--- a/.preview/pptx/deck.pptx
+++ b/.preview/pptx/deck.pptx
@@ -2,27 +2,27 @@
 <file path=ppt/presentation.xml><?xml version="1.0" encoding="utf-8"?>
 <p:presentation xmlns:p="http://schemas.openxmlformats.org/presentationml/2006/main">
   <p:sldMasterIdLst>
-    <p:sldMasterId xmlns:r="http://schemas.openxmlformats.org/officeDocument/2006/relationships" id="2147483648" r:id="R5fbfe860ed7f44d6"/>
+    <p:sldMasterId xmlns:r="http://schemas.openxmlformats.org/officeDocument/2006/relationships" id="2147483648" r:id="R7e6ad224c5c04a03"/>
   </p:sldMasterIdLst>
   <p:notesMasterIdLst>
-    <p:notesMasterId xmlns:r="http://schemas.openxmlformats.org/officeDocument/2006/relationships" r:id="R398ca349f82344e5"/>
+    <p:notesMasterId xmlns:r="http://schemas.openxmlformats.org/officeDocument/2006/relationships" r:id="Rc2c5fc6638a84d39"/>
   </p:notesMasterIdLst>
   <p:sldIdLst>
-    <p:sldId xmlns:r="http://schemas.openxmlformats.org/officeDocument/2006/relationships" id="256" r:id="Rc2f5cced04e34b8b"/>
-    <p:sldId xmlns:r="http://schemas.openxmlformats.org/officeDocument/2006/relationships" id="257" r:id="Rc558c4f2ab8f446e"/>
-    <p:sldId xmlns:r="http://schemas.openxmlformats.org/officeDocument/2006/relationships" id="258" r:id="R906cd53f57c84745"/>
-    <p:sldId xmlns:r="http://schemas.openxmlformats.org/officeDocument/2006/relationships" id="259" r:id="R4e4b376140b64853"/>
-    <p:sldId xmlns:r="http://schemas.openxmlformats.org/officeDocument/2006/relationships" id="260" r:id="R3d07ca6df7c84377"/>
-    <p:sldId xmlns:r="http://schemas.openxmlformats.org/officeDocument/2006/relationships" id="261" r:id="Rba8a8e803a0c4136"/>
-    <p:sldId xmlns:r="http://schemas.openxmlformats.org/officeDocument/2006/relationships" id="262" r:id="Rd0f1745ec6d44b4e"/>
-    <p:sldId xmlns:r="http://schemas.openxmlformats.org/officeDocument/2006/relationships" id="263" r:id="Rd8da3a0e53a94464"/>
-    <p:sldId xmlns:r="http://schemas.openxmlformats.org/officeDocument/2006/relationships" id="264" r:id="Rf12e5e9a424545cb"/>
-    <p:sldId xmlns:r="http://schemas.openxmlformats.org/officeDocument/2006/relationships" id="265" r:id="R3166cae1152e4d9c"/>
-    <p:sldId xmlns:r="http://schemas.openxmlformats.org/officeDocument/2006/relationships" id="266" r:id="R12f9b05229c748e8"/>
-    <p:sldId xmlns:r="http://schemas.openxmlformats.org/officeDocument/2006/relationships" id="267" r:id="Rfee79b5d3b754de8"/>
-    <p:sldId xmlns:r="http://schemas.openxmlformats.org/officeDocument/2006/relationships" id="268" r:id="R30a703d519f2470f"/>
-    <p:sldId xmlns:r="http://schemas.openxmlformats.org/officeDocument/2006/relationships" id="269" r:id="R4776aaa66f7745b7"/>
-    <p:sldId xmlns:r="http://schemas.openxmlformats.org/officeDocument/2006/relationships" id="270" r:id="Rad0ea4d1a6bb4b7b"/>
+    <p:sldId xmlns:r="http://schemas.openxmlformats.org/officeDocument/2006/relationships" id="256" r:id="Raa4bb28fcff7404a"/>
+    <p:sldId xmlns:r="http://schemas.openxmlformats.org/officeDocument/2006/relationships" id="257" r:id="Rd5fa9b74de9a438b"/>
+    <p:sldId xmlns:r="http://schemas.openxmlformats.org/officeDocument/2006/relationships" id="258" r:id="R0034d63938ae46c7"/>
+    <p:sldId xmlns:r="http://schemas.openxmlformats.org/officeDocument/2006/relationships" id="259" r:id="R2fb77f895a6a4af8"/>
+    <p:sldId xmlns:r="http://schemas.openxmlformats.org/officeDocument/2006/relationships" id="260" r:id="Rfcc7114ce51e4ae1"/>
+    <p:sldId xmlns:r="http://schemas.openxmlformats.org/officeDocument/2006/relationships" id="261" r:id="R5c5ac611666347b7"/>
+    <p:sldId xmlns:r="http://schemas.openxmlformats.org/officeDocument/2006/relationships" id="262" r:id="R9c6e1b3e8b0942fa"/>
+    <p:sldId xmlns:r="http://schemas.openxmlformats.org/officeDocument/2006/relationships" id="263" r:id="R3ada2c73a6964924"/>
+    <p:sldId xmlns:r="http://schemas.openxmlformats.org/officeDocument/2006/relationships" id="264" r:id="R5b9644688d624f1c"/>
+    <p:sldId xmlns:r="http://schemas.openxmlformats.org/officeDocument/2006/relationships" id="265" r:id="R759713d259f34480"/>
+    <p:sldId xmlns:r="http://schemas.openxmlformats.org/officeDocument/2006/relationships" id="266" r:id="R61a30a24df7246cd"/>
+    <p:sldId xmlns:r="http://schemas.openxmlformats.org/officeDocument/2006/relationships" id="267" r:id="Rc06ea82ee3ba41c1"/>
+    <p:sldId xmlns:r="http://schemas.openxmlformats.org/officeDocument/2006/relationships" id="268" r:id="Rf0530b3f8d2e44f5"/>
+    <p:sldId xmlns:r="http://schemas.openxmlformats.org/officeDocument/2006/relationships" id="269" r:id="R900b264bdde84873"/>
+    <p:sldId xmlns:r="http://schemas.openxmlformats.org/officeDocument/2006/relationships" id="270" r:id="R9565f525527547e9"/>
   </p:sldIdLst>
   <p:sldSz cx="12192000" cy="6858000"/>
   <p:notesSz cx="6858000" cy="9144000"/>
@@ -1879,7 +1879,7 @@
   </p:cSld>
   <p:clrMap bg1="lt1" tx1="dk1" bg2="lt2" tx2="dk2" accent1="accent1" accent2="accent2" accent3="accent3" accent4="accent4" accent5="accent5" accent6="accent6" hlink="hlink" folHlink="folHlink"/>
   <p:sldLayoutIdLst>
-    <p:sldLayoutId xmlns:r="http://schemas.openxmlformats.org/officeDocument/2006/relationships" id="2147483649" r:id="Rf165aaae593e4aa8"/>
+    <p:sldLayoutId xmlns:r="http://schemas.openxmlformats.org/officeDocument/2006/relationships" id="2147483649" r:id="Rb24ce226c087479f"/>
   </p:sldLayoutIdLst>
   <p:txStyles>
     <p:titleStyle>
@@ -2430,7 +2430,7 @@
           <p:cNvPr id="17" name="">
             <a:extLst xmlns:a="http://schemas.openxmlformats.org/drawingml/2006/main">
               <a:ext uri="{FF2B5EF4-FFF2-40B4-BE49-F238E27FC236}">
-                <a16:creationId xmlns:a16="http://schemas.microsoft.com/office/drawing/2014/main" id="{BCE10402-27A6-46F9-A44D-E5A064C4D3AD}"/>
+                <a16:creationId xmlns:a16="http://schemas.microsoft.com/office/drawing/2014/main" id="{965C54E4-FA53-4CB0-99BE-83AD346518DF}"/>
               </a:ext>
             </a:extLst>
           </p:cNvPr>
@@ -2463,7 +2463,7 @@
           <p:cNvPr id="2" name="">
             <a:extLst xmlns:a="http://schemas.openxmlformats.org/drawingml/2006/main">
               <a:ext uri="{FF2B5EF4-FFF2-40B4-BE49-F238E27FC236}">
-                <a16:creationId xmlns:a16="http://schemas.microsoft.com/office/drawing/2014/main" id="{3CFB5EEC-426D-4732-9CC7-9E238C418BFE}"/>
+                <a16:creationId xmlns:a16="http://schemas.microsoft.com/office/drawing/2014/main" id="{19886478-2D26-4980-988C-A68F99FA87E3}"/>
               </a:ext>
             </a:extLst>
           </p:cNvPr>
@@ -2494,7 +2494,7 @@
           <p:cNvPr id="3" name="">
             <a:extLst xmlns:a="http://schemas.openxmlformats.org/drawingml/2006/main">
               <a:ext uri="{FF2B5EF4-FFF2-40B4-BE49-F238E27FC236}">
-                <a16:creationId xmlns:a16="http://schemas.microsoft.com/office/drawing/2014/main" id="{297F0AA0-673D-4FF5-8144-0208963EB549}"/>
+                <a16:creationId xmlns:a16="http://schemas.microsoft.com/office/drawing/2014/main" id="{4EE4AEAC-2979-4436-A3F7-AC67E6988E76}"/>
               </a:ext>
             </a:extLst>
           </p:cNvPr>
@@ -2529,7 +2529,7 @@
           <p:nvPr/>
         </p:nvPicPr>
         <p:blipFill>
-          <a:blip xmlns:r="http://schemas.openxmlformats.org/officeDocument/2006/relationships" xmlns:a="http://schemas.openxmlformats.org/drawingml/2006/main" r:embed="R0ec38ff0ed9d4205"/>
+          <a:blip xmlns:r="http://schemas.openxmlformats.org/officeDocument/2006/relationships" xmlns:a="http://schemas.openxmlformats.org/drawingml/2006/main" r:embed="R5f38e751cd1b44c3"/>
           <a:stretch xmlns:a="http://schemas.openxmlformats.org/drawingml/2006/main"/>
         </p:blipFill>
         <p:spPr>
@@ -2547,7 +2547,7 @@
           <p:cNvPr id="5" name="">
             <a:extLst xmlns:a="http://schemas.openxmlformats.org/drawingml/2006/main">
               <a:ext uri="{FF2B5EF4-FFF2-40B4-BE49-F238E27FC236}">
-                <a16:creationId xmlns:a16="http://schemas.microsoft.com/office/drawing/2014/main" id="{F683BF87-1DFB-4B2F-B1BC-A3C9ED74D22E}"/>
+                <a16:creationId xmlns:a16="http://schemas.microsoft.com/office/drawing/2014/main" id="{3A061831-2CDA-4487-BE59-2D134D1E2CBB}"/>
               </a:ext>
             </a:extLst>
           </p:cNvPr>
@@ -2599,7 +2599,7 @@
           <p:cNvPr id="6" name="">
             <a:extLst xmlns:a="http://schemas.openxmlformats.org/drawingml/2006/main">
               <a:ext uri="{FF2B5EF4-FFF2-40B4-BE49-F238E27FC236}">
-                <a16:creationId xmlns:a16="http://schemas.microsoft.com/office/drawing/2014/main" id="{71A1968E-763D-4162-BF01-0BD51CF10D88}"/>
+                <a16:creationId xmlns:a16="http://schemas.microsoft.com/office/drawing/2014/main" id="{B252EBFF-730D-4489-8D57-6EE33073A9EA}"/>
               </a:ext>
             </a:extLst>
           </p:cNvPr>
@@ -2655,7 +2655,7 @@
           <p:nvPr/>
         </p:nvPicPr>
         <p:blipFill>
-          <a:blip xmlns:r="http://schemas.openxmlformats.org/officeDocument/2006/relationships" xmlns:a="http://schemas.openxmlformats.org/drawingml/2006/main" r:embed="R0ef8c0215ba34d92"/>
+          <a:blip xmlns:r="http://schemas.openxmlformats.org/officeDocument/2006/relationships" xmlns:a="http://schemas.openxmlformats.org/drawingml/2006/main" r:embed="R0c4fca48570a42c6"/>
           <a:stretch xmlns:a="http://schemas.openxmlformats.org/drawingml/2006/main"/>
         </p:blipFill>
         <p:spPr>
@@ -2673,7 +2673,7 @@
           <p:cNvPr id="8" name="">
             <a:extLst xmlns:a="http://schemas.openxmlformats.org/drawingml/2006/main">
               <a:ext uri="{FF2B5EF4-FFF2-40B4-BE49-F238E27FC236}">
-                <a16:creationId xmlns:a16="http://schemas.microsoft.com/office/drawing/2014/main" id="{57F7709A-00EC-4000-A3A5-BBF0E2830CF7}"/>
+                <a16:creationId xmlns:a16="http://schemas.microsoft.com/office/drawing/2014/main" id="{8B5EC1C4-71A2-4E29-AF7A-0548B1E680F9}"/>
               </a:ext>
             </a:extLst>
           </p:cNvPr>
@@ -2706,7 +2706,7 @@
           <p:cNvPr id="9" name="">
             <a:extLst xmlns:a="http://schemas.openxmlformats.org/drawingml/2006/main">
               <a:ext uri="{FF2B5EF4-FFF2-40B4-BE49-F238E27FC236}">
-                <a16:creationId xmlns:a16="http://schemas.microsoft.com/office/drawing/2014/main" id="{45368615-781F-4DF3-BB61-7EC91350606A}"/>
+                <a16:creationId xmlns:a16="http://schemas.microsoft.com/office/drawing/2014/main" id="{AEB9F931-D072-48D6-897A-BBD353E07550}"/>
               </a:ext>
             </a:extLst>
           </p:cNvPr>
@@ -2758,7 +2758,7 @@
           <p:cNvPr id="10" name="">
             <a:extLst xmlns:a="http://schemas.openxmlformats.org/drawingml/2006/main">
               <a:ext uri="{FF2B5EF4-FFF2-40B4-BE49-F238E27FC236}">
-                <a16:creationId xmlns:a16="http://schemas.microsoft.com/office/drawing/2014/main" id="{58DBDEC8-B79D-4529-A0F8-02375A9D29DC}"/>
+                <a16:creationId xmlns:a16="http://schemas.microsoft.com/office/drawing/2014/main" id="{F51D70EB-5435-40D4-BBE7-A0D45B43812A}"/>
               </a:ext>
             </a:extLst>
           </p:cNvPr>
@@ -2810,7 +2810,7 @@
           <p:cNvPr id="11" name="">
             <a:extLst xmlns:a="http://schemas.openxmlformats.org/drawingml/2006/main">
               <a:ext uri="{FF2B5EF4-FFF2-40B4-BE49-F238E27FC236}">
-                <a16:creationId xmlns:a16="http://schemas.microsoft.com/office/drawing/2014/main" id="{92CEC08B-6D2C-447A-B2CB-F13C4FCB336E}"/>
+                <a16:creationId xmlns:a16="http://schemas.microsoft.com/office/drawing/2014/main" id="{7762D1F4-D2FF-45B4-B07D-8D777CE5B07D}"/>
               </a:ext>
             </a:extLst>
           </p:cNvPr>
@@ -2862,7 +2862,7 @@
           <p:cNvPr id="12" name="">
             <a:extLst xmlns:a="http://schemas.openxmlformats.org/drawingml/2006/main">
               <a:ext uri="{FF2B5EF4-FFF2-40B4-BE49-F238E27FC236}">
-                <a16:creationId xmlns:a16="http://schemas.microsoft.com/office/drawing/2014/main" id="{1BD5F0EB-2735-470D-B848-A5DAA89BB41E}"/>
+                <a16:creationId xmlns:a16="http://schemas.microsoft.com/office/drawing/2014/main" id="{41229607-B7EC-40F2-8FA0-7518D6F85EE7}"/>
               </a:ext>
             </a:extLst>
           </p:cNvPr>
@@ -2914,7 +2914,7 @@
           <p:cNvPr id="13" name="">
             <a:extLst xmlns:a="http://schemas.openxmlformats.org/drawingml/2006/main">
               <a:ext uri="{FF2B5EF4-FFF2-40B4-BE49-F238E27FC236}">
-                <a16:creationId xmlns:a16="http://schemas.microsoft.com/office/drawing/2014/main" id="{E352F9B9-692D-411F-B33A-FCF9481BC53A}"/>
+                <a16:creationId xmlns:a16="http://schemas.microsoft.com/office/drawing/2014/main" id="{867580BA-590B-41FF-A6BD-EAE52E89F12F}"/>
               </a:ext>
             </a:extLst>
           </p:cNvPr>
@@ -2966,7 +2966,7 @@
           <p:cNvPr id="14" name="">
             <a:extLst xmlns:a="http://schemas.openxmlformats.org/drawingml/2006/main">
               <a:ext uri="{FF2B5EF4-FFF2-40B4-BE49-F238E27FC236}">
-                <a16:creationId xmlns:a16="http://schemas.microsoft.com/office/drawing/2014/main" id="{1ECE4938-F63F-40C7-84F3-F5E49F926F22}"/>
+                <a16:creationId xmlns:a16="http://schemas.microsoft.com/office/drawing/2014/main" id="{E8C44D87-4279-4B60-BD7A-80A7636C72D5}"/>
               </a:ext>
             </a:extLst>
           </p:cNvPr>
@@ -3018,7 +3018,7 @@
           <p:cNvPr id="15" name="">
             <a:extLst xmlns:a="http://schemas.openxmlformats.org/drawingml/2006/main">
               <a:ext uri="{FF2B5EF4-FFF2-40B4-BE49-F238E27FC236}">
-                <a16:creationId xmlns:a16="http://schemas.microsoft.com/office/drawing/2014/main" id="{51EBC21F-5195-44B8-90EF-453B15E54B9D}"/>
+                <a16:creationId xmlns:a16="http://schemas.microsoft.com/office/drawing/2014/main" id="{2E4F2EDD-446E-4FAB-8858-47DE8DC94730}"/>
               </a:ext>
             </a:extLst>
           </p:cNvPr>
@@ -3070,7 +3070,7 @@
           <p:cNvPr id="16" name="">
             <a:extLst xmlns:a="http://schemas.openxmlformats.org/drawingml/2006/main">
               <a:ext uri="{FF2B5EF4-FFF2-40B4-BE49-F238E27FC236}">
-                <a16:creationId xmlns:a16="http://schemas.microsoft.com/office/drawing/2014/main" id="{35E8A50C-1064-4C91-BF7A-E0894AB6B169}"/>
+                <a16:creationId xmlns:a16="http://schemas.microsoft.com/office/drawing/2014/main" id="{F877A967-1C6B-4709-A52E-448F2D8A3DED}"/>
               </a:ext>
             </a:extLst>
           </p:cNvPr>
@@ -3120,7 +3120,7 @@
     </p:spTree>
     <p:extLst>
       <p:ext uri="{BB962C8B-B14F-4D97-AF65-F5344CB8AC3E}">
-        <p14:creationId xmlns:p14="http://schemas.microsoft.com/office/powerpoint/2010/main" val="1346658033"/>
+        <p14:creationId xmlns:p14="http://schemas.microsoft.com/office/powerpoint/2010/main" val="1518045204"/>
       </p:ext>
     </p:extLst>
   </p:cSld>
@@ -3151,7 +3151,7 @@
           <p:cNvPr id="103" name="">
             <a:extLst xmlns:a="http://schemas.openxmlformats.org/drawingml/2006/main">
               <a:ext uri="{FF2B5EF4-FFF2-40B4-BE49-F238E27FC236}">
-                <a16:creationId xmlns:a16="http://schemas.microsoft.com/office/drawing/2014/main" id="{16B551FE-DB0E-4DC2-8074-2048BF91F9E9}"/>
+                <a16:creationId xmlns:a16="http://schemas.microsoft.com/office/drawing/2014/main" id="{5828E48C-5F4C-408B-B693-489909BC11E9}"/>
               </a:ext>
             </a:extLst>
           </p:cNvPr>
@@ -3184,7 +3184,7 @@
           <p:cNvPr id="2" name="">
             <a:extLst xmlns:a="http://schemas.openxmlformats.org/drawingml/2006/main">
               <a:ext uri="{FF2B5EF4-FFF2-40B4-BE49-F238E27FC236}">
-                <a16:creationId xmlns:a16="http://schemas.microsoft.com/office/drawing/2014/main" id="{944E9B00-63AC-435E-8583-9986AC4533A8}"/>
+                <a16:creationId xmlns:a16="http://schemas.microsoft.com/office/drawing/2014/main" id="{3BC08CC7-2EDA-4186-B3C8-C8BDEB6CC0CC}"/>
               </a:ext>
             </a:extLst>
           </p:cNvPr>
@@ -3215,7 +3215,7 @@
           <p:cNvPr id="3" name="">
             <a:extLst xmlns:a="http://schemas.openxmlformats.org/drawingml/2006/main">
               <a:ext uri="{FF2B5EF4-FFF2-40B4-BE49-F238E27FC236}">
-                <a16:creationId xmlns:a16="http://schemas.microsoft.com/office/drawing/2014/main" id="{080E9C85-921C-48CC-A665-E18F6DDFB7DE}"/>
+                <a16:creationId xmlns:a16="http://schemas.microsoft.com/office/drawing/2014/main" id="{63D30337-9A91-4D4A-A4E7-6A103B5E505F}"/>
               </a:ext>
             </a:extLst>
           </p:cNvPr>
@@ -3267,7 +3267,7 @@
           <p:cNvPr id="4" name="">
             <a:extLst xmlns:a="http://schemas.openxmlformats.org/drawingml/2006/main">
               <a:ext uri="{FF2B5EF4-FFF2-40B4-BE49-F238E27FC236}">
-                <a16:creationId xmlns:a16="http://schemas.microsoft.com/office/drawing/2014/main" id="{51F194EB-A877-4E47-AE67-1C4318DE656F}"/>
+                <a16:creationId xmlns:a16="http://schemas.microsoft.com/office/drawing/2014/main" id="{F7F0FCEF-2A6A-4D2F-8A32-5AFB5A88A02E}"/>
               </a:ext>
             </a:extLst>
           </p:cNvPr>
@@ -3319,7 +3319,7 @@
           <p:cNvPr id="5" name="">
             <a:extLst xmlns:a="http://schemas.openxmlformats.org/drawingml/2006/main">
               <a:ext uri="{FF2B5EF4-FFF2-40B4-BE49-F238E27FC236}">
-                <a16:creationId xmlns:a16="http://schemas.microsoft.com/office/drawing/2014/main" id="{F041D1DD-002C-4702-AC48-5E07A405382C}"/>
+                <a16:creationId xmlns:a16="http://schemas.microsoft.com/office/drawing/2014/main" id="{D7666D74-C0A9-4499-87A1-19269A0A49D7}"/>
               </a:ext>
             </a:extLst>
           </p:cNvPr>
@@ -3354,7 +3354,7 @@
           <p:nvPr/>
         </p:nvPicPr>
         <p:blipFill>
-          <a:blip xmlns:r="http://schemas.openxmlformats.org/officeDocument/2006/relationships" xmlns:a="http://schemas.openxmlformats.org/drawingml/2006/main" r:embed="Rf05e9841cbd44e3c"/>
+          <a:blip xmlns:r="http://schemas.openxmlformats.org/officeDocument/2006/relationships" xmlns:a="http://schemas.openxmlformats.org/drawingml/2006/main" r:embed="R506eaff795dd4315"/>
           <a:stretch xmlns:a="http://schemas.openxmlformats.org/drawingml/2006/main"/>
         </p:blipFill>
         <p:spPr>
@@ -3372,7 +3372,7 @@
           <p:cNvPr id="7" name="">
             <a:extLst xmlns:a="http://schemas.openxmlformats.org/drawingml/2006/main">
               <a:ext uri="{FF2B5EF4-FFF2-40B4-BE49-F238E27FC236}">
-                <a16:creationId xmlns:a16="http://schemas.microsoft.com/office/drawing/2014/main" id="{F62BDD9F-1131-411A-ACAE-2A36D4DB1BE8}"/>
+                <a16:creationId xmlns:a16="http://schemas.microsoft.com/office/drawing/2014/main" id="{51C9447F-A07D-4C6B-B247-E8B7B6FC0633}"/>
               </a:ext>
             </a:extLst>
           </p:cNvPr>
@@ -3424,7 +3424,7 @@
           <p:cNvPr id="8" name="">
             <a:extLst xmlns:a="http://schemas.openxmlformats.org/drawingml/2006/main">
               <a:ext uri="{FF2B5EF4-FFF2-40B4-BE49-F238E27FC236}">
-                <a16:creationId xmlns:a16="http://schemas.microsoft.com/office/drawing/2014/main" id="{DB7A10D6-D078-4863-BD4E-9D8D7A9670C3}"/>
+                <a16:creationId xmlns:a16="http://schemas.microsoft.com/office/drawing/2014/main" id="{E848EE62-BC99-4424-9CA5-71C2298A673B}"/>
               </a:ext>
             </a:extLst>
           </p:cNvPr>
@@ -3476,7 +3476,7 @@
           <p:cNvPr id="9" name="">
             <a:extLst xmlns:a="http://schemas.openxmlformats.org/drawingml/2006/main">
               <a:ext uri="{FF2B5EF4-FFF2-40B4-BE49-F238E27FC236}">
-                <a16:creationId xmlns:a16="http://schemas.microsoft.com/office/drawing/2014/main" id="{7AD2B50B-BAF9-4FA2-A637-F0DA5476F2CF}"/>
+                <a16:creationId xmlns:a16="http://schemas.microsoft.com/office/drawing/2014/main" id="{03251859-2E87-410C-9778-BC8D620E2048}"/>
               </a:ext>
             </a:extLst>
           </p:cNvPr>
@@ -3528,7 +3528,7 @@
           <p:cNvPr id="10" name="">
             <a:extLst xmlns:a="http://schemas.openxmlformats.org/drawingml/2006/main">
               <a:ext uri="{FF2B5EF4-FFF2-40B4-BE49-F238E27FC236}">
-                <a16:creationId xmlns:a16="http://schemas.microsoft.com/office/drawing/2014/main" id="{0990F5B8-8080-443B-A48B-CBC9891F2CCC}"/>
+                <a16:creationId xmlns:a16="http://schemas.microsoft.com/office/drawing/2014/main" id="{7CE1945B-56DE-451C-8E58-A1A9DC872B31}"/>
               </a:ext>
             </a:extLst>
           </p:cNvPr>
@@ -3580,7 +3580,7 @@
           <p:cNvPr id="11" name="">
             <a:extLst xmlns:a="http://schemas.openxmlformats.org/drawingml/2006/main">
               <a:ext uri="{FF2B5EF4-FFF2-40B4-BE49-F238E27FC236}">
-                <a16:creationId xmlns:a16="http://schemas.microsoft.com/office/drawing/2014/main" id="{FA2B059E-A207-40D3-ABC4-3A65F7753725}"/>
+                <a16:creationId xmlns:a16="http://schemas.microsoft.com/office/drawing/2014/main" id="{4D1484AC-7891-4402-93E4-6CE3E68B9F24}"/>
               </a:ext>
             </a:extLst>
           </p:cNvPr>
@@ -3611,7 +3611,7 @@
           <p:cNvPr id="12" name="">
             <a:extLst xmlns:a="http://schemas.openxmlformats.org/drawingml/2006/main">
               <a:ext uri="{FF2B5EF4-FFF2-40B4-BE49-F238E27FC236}">
-                <a16:creationId xmlns:a16="http://schemas.microsoft.com/office/drawing/2014/main" id="{930D8326-2494-46FB-8490-1BB2217A1C0B}"/>
+                <a16:creationId xmlns:a16="http://schemas.microsoft.com/office/drawing/2014/main" id="{499BCF15-A2D9-4727-A0E5-3ABCB57F10A6}"/>
               </a:ext>
             </a:extLst>
           </p:cNvPr>
@@ -3642,7 +3642,7 @@
           <p:cNvPr id="13" name="">
             <a:extLst xmlns:a="http://schemas.openxmlformats.org/drawingml/2006/main">
               <a:ext uri="{FF2B5EF4-FFF2-40B4-BE49-F238E27FC236}">
-                <a16:creationId xmlns:a16="http://schemas.microsoft.com/office/drawing/2014/main" id="{ED7DA3DA-04D3-4DC2-B1F2-C7188F31C8FB}"/>
+                <a16:creationId xmlns:a16="http://schemas.microsoft.com/office/drawing/2014/main" id="{A447D479-4804-4588-A8B9-EBDCD8422289}"/>
               </a:ext>
             </a:extLst>
           </p:cNvPr>
@@ -3694,7 +3694,7 @@
           <p:cNvPr id="14" name="">
             <a:extLst xmlns:a="http://schemas.openxmlformats.org/drawingml/2006/main">
               <a:ext uri="{FF2B5EF4-FFF2-40B4-BE49-F238E27FC236}">
-                <a16:creationId xmlns:a16="http://schemas.microsoft.com/office/drawing/2014/main" id="{AD5AF819-D9BD-431E-8E70-09163848A719}"/>
+                <a16:creationId xmlns:a16="http://schemas.microsoft.com/office/drawing/2014/main" id="{0CD05777-16A3-4E48-B2FC-467AFF8CC85E}"/>
               </a:ext>
             </a:extLst>
           </p:cNvPr>
@@ -3746,7 +3746,7 @@
           <p:cNvPr id="15" name="">
             <a:extLst xmlns:a="http://schemas.openxmlformats.org/drawingml/2006/main">
               <a:ext uri="{FF2B5EF4-FFF2-40B4-BE49-F238E27FC236}">
-                <a16:creationId xmlns:a16="http://schemas.microsoft.com/office/drawing/2014/main" id="{30B4D494-9F7C-4AC7-BC00-73F07D4506E2}"/>
+                <a16:creationId xmlns:a16="http://schemas.microsoft.com/office/drawing/2014/main" id="{0B37EB4D-F7A7-4A53-B083-0F9D73E79B2A}"/>
               </a:ext>
             </a:extLst>
           </p:cNvPr>
@@ -3798,7 +3798,7 @@
           <p:cNvPr id="16" name="">
             <a:extLst xmlns:a="http://schemas.openxmlformats.org/drawingml/2006/main">
               <a:ext uri="{FF2B5EF4-FFF2-40B4-BE49-F238E27FC236}">
-                <a16:creationId xmlns:a16="http://schemas.microsoft.com/office/drawing/2014/main" id="{BC7F697F-29E7-4C72-B9FD-4C95D3F3650A}"/>
+                <a16:creationId xmlns:a16="http://schemas.microsoft.com/office/drawing/2014/main" id="{4515DCB5-9DAF-473E-8291-BB78D2654F5E}"/>
               </a:ext>
             </a:extLst>
           </p:cNvPr>
@@ -3850,7 +3850,7 @@
           <p:cNvPr id="17" name="">
             <a:extLst xmlns:a="http://schemas.openxmlformats.org/drawingml/2006/main">
               <a:ext uri="{FF2B5EF4-FFF2-40B4-BE49-F238E27FC236}">
-                <a16:creationId xmlns:a16="http://schemas.microsoft.com/office/drawing/2014/main" id="{2F41BACE-22A4-41A6-8862-3569F1DA0F2E}"/>
+                <a16:creationId xmlns:a16="http://schemas.microsoft.com/office/drawing/2014/main" id="{DF3A3F28-99A2-4A7F-84D5-6C8D484E4AA0}"/>
               </a:ext>
             </a:extLst>
           </p:cNvPr>
@@ -3902,7 +3902,7 @@
           <p:cNvPr id="18" name="">
             <a:extLst xmlns:a="http://schemas.openxmlformats.org/drawingml/2006/main">
               <a:ext uri="{FF2B5EF4-FFF2-40B4-BE49-F238E27FC236}">
-                <a16:creationId xmlns:a16="http://schemas.microsoft.com/office/drawing/2014/main" id="{4079E633-7782-4881-A606-F5D4F6BD2125}"/>
+                <a16:creationId xmlns:a16="http://schemas.microsoft.com/office/drawing/2014/main" id="{28C74BEA-6D01-4463-9765-E28A0D532CF0}"/>
               </a:ext>
             </a:extLst>
           </p:cNvPr>
@@ -3933,7 +3933,7 @@
           <p:cNvPr id="19" name="">
             <a:extLst xmlns:a="http://schemas.openxmlformats.org/drawingml/2006/main">
               <a:ext uri="{FF2B5EF4-FFF2-40B4-BE49-F238E27FC236}">
-                <a16:creationId xmlns:a16="http://schemas.microsoft.com/office/drawing/2014/main" id="{575C2A5B-3860-4808-99A4-47E14E386228}"/>
+                <a16:creationId xmlns:a16="http://schemas.microsoft.com/office/drawing/2014/main" id="{29C81163-9988-465A-96E9-D436204CA0E3}"/>
               </a:ext>
             </a:extLst>
           </p:cNvPr>
@@ -3964,7 +3964,7 @@
           <p:cNvPr id="20" name="">
             <a:extLst xmlns:a="http://schemas.openxmlformats.org/drawingml/2006/main">
               <a:ext uri="{FF2B5EF4-FFF2-40B4-BE49-F238E27FC236}">
-                <a16:creationId xmlns:a16="http://schemas.microsoft.com/office/drawing/2014/main" id="{62559207-1D09-46EA-9E66-D66599F5327A}"/>
+                <a16:creationId xmlns:a16="http://schemas.microsoft.com/office/drawing/2014/main" id="{5D435F84-1641-4EAB-B9DD-C3C9B872EC6C}"/>
               </a:ext>
             </a:extLst>
           </p:cNvPr>
@@ -4016,7 +4016,7 @@
           <p:cNvPr id="21" name="">
             <a:extLst xmlns:a="http://schemas.openxmlformats.org/drawingml/2006/main">
               <a:ext uri="{FF2B5EF4-FFF2-40B4-BE49-F238E27FC236}">
-                <a16:creationId xmlns:a16="http://schemas.microsoft.com/office/drawing/2014/main" id="{893B1671-B985-42BD-B525-DF5E44F78C25}"/>
+                <a16:creationId xmlns:a16="http://schemas.microsoft.com/office/drawing/2014/main" id="{55F3145F-943C-4766-9CDB-2FDD6BC50E19}"/>
               </a:ext>
             </a:extLst>
           </p:cNvPr>
@@ -4068,7 +4068,7 @@
           <p:cNvPr id="22" name="">
             <a:extLst xmlns:a="http://schemas.openxmlformats.org/drawingml/2006/main">
               <a:ext uri="{FF2B5EF4-FFF2-40B4-BE49-F238E27FC236}">
-                <a16:creationId xmlns:a16="http://schemas.microsoft.com/office/drawing/2014/main" id="{EC2D5E33-383C-472A-B1A1-BDC6B5B1243A}"/>
+                <a16:creationId xmlns:a16="http://schemas.microsoft.com/office/drawing/2014/main" id="{B779ADFC-F672-43E7-BFEE-09D0837AFD5B}"/>
               </a:ext>
             </a:extLst>
           </p:cNvPr>
@@ -4120,7 +4120,7 @@
           <p:cNvPr id="23" name="">
             <a:extLst xmlns:a="http://schemas.openxmlformats.org/drawingml/2006/main">
               <a:ext uri="{FF2B5EF4-FFF2-40B4-BE49-F238E27FC236}">
-                <a16:creationId xmlns:a16="http://schemas.microsoft.com/office/drawing/2014/main" id="{6A4BFBCB-ADA7-432C-9891-9082431D9349}"/>
+                <a16:creationId xmlns:a16="http://schemas.microsoft.com/office/drawing/2014/main" id="{D172E79B-0637-4C80-83E2-08DFE1466ECC}"/>
               </a:ext>
             </a:extLst>
           </p:cNvPr>
@@ -4172,7 +4172,7 @@
           <p:cNvPr id="24" name="">
             <a:extLst xmlns:a="http://schemas.openxmlformats.org/drawingml/2006/main">
               <a:ext uri="{FF2B5EF4-FFF2-40B4-BE49-F238E27FC236}">
-                <a16:creationId xmlns:a16="http://schemas.microsoft.com/office/drawing/2014/main" id="{62C1D198-4EB0-4FAC-BDFE-7E19837037D6}"/>
+                <a16:creationId xmlns:a16="http://schemas.microsoft.com/office/drawing/2014/main" id="{415C94E0-3119-44B2-9371-3544A7AD0C8C}"/>
               </a:ext>
             </a:extLst>
           </p:cNvPr>
@@ -4224,7 +4224,7 @@
           <p:cNvPr id="25" name="">
             <a:extLst xmlns:a="http://schemas.openxmlformats.org/drawingml/2006/main">
               <a:ext uri="{FF2B5EF4-FFF2-40B4-BE49-F238E27FC236}">
-                <a16:creationId xmlns:a16="http://schemas.microsoft.com/office/drawing/2014/main" id="{B7A411F4-DF8C-4533-876F-EEC3760DDBF4}"/>
+                <a16:creationId xmlns:a16="http://schemas.microsoft.com/office/drawing/2014/main" id="{2D6D6566-D072-4A53-9043-29DE58FD9092}"/>
               </a:ext>
             </a:extLst>
           </p:cNvPr>
@@ -4255,7 +4255,7 @@
           <p:cNvPr id="26" name="">
             <a:extLst xmlns:a="http://schemas.openxmlformats.org/drawingml/2006/main">
               <a:ext uri="{FF2B5EF4-FFF2-40B4-BE49-F238E27FC236}">
-                <a16:creationId xmlns:a16="http://schemas.microsoft.com/office/drawing/2014/main" id="{4D75A579-B4FE-405F-982A-F057D10C2467}"/>
+                <a16:creationId xmlns:a16="http://schemas.microsoft.com/office/drawing/2014/main" id="{EF6203DE-72AD-43E0-8DBB-D4924E513395}"/>
               </a:ext>
             </a:extLst>
           </p:cNvPr>
@@ -4307,7 +4307,7 @@
           <p:cNvPr id="27" name="">
             <a:extLst xmlns:a="http://schemas.openxmlformats.org/drawingml/2006/main">
               <a:ext uri="{FF2B5EF4-FFF2-40B4-BE49-F238E27FC236}">
-                <a16:creationId xmlns:a16="http://schemas.microsoft.com/office/drawing/2014/main" id="{27A0AC9F-7316-40A8-9779-47E97BCEE062}"/>
+                <a16:creationId xmlns:a16="http://schemas.microsoft.com/office/drawing/2014/main" id="{4E4C9BD7-AABF-48B7-BB1F-5481D2CD4A68}"/>
               </a:ext>
             </a:extLst>
           </p:cNvPr>
@@ -4359,7 +4359,7 @@
           <p:cNvPr id="28" name="">
             <a:extLst xmlns:a="http://schemas.openxmlformats.org/drawingml/2006/main">
               <a:ext uri="{FF2B5EF4-FFF2-40B4-BE49-F238E27FC236}">
-                <a16:creationId xmlns:a16="http://schemas.microsoft.com/office/drawing/2014/main" id="{5071F95D-C00D-4334-9034-4F1A49392130}"/>
+                <a16:creationId xmlns:a16="http://schemas.microsoft.com/office/drawing/2014/main" id="{73EEEF5A-3EF5-4DEF-B5CC-C8A83E89152C}"/>
               </a:ext>
             </a:extLst>
           </p:cNvPr>
@@ -4411,7 +4411,7 @@
           <p:cNvPr id="29" name="">
             <a:extLst xmlns:a="http://schemas.openxmlformats.org/drawingml/2006/main">
               <a:ext uri="{FF2B5EF4-FFF2-40B4-BE49-F238E27FC236}">
-                <a16:creationId xmlns:a16="http://schemas.microsoft.com/office/drawing/2014/main" id="{A9E64603-4CF2-4E12-A91D-25A98CA895F9}"/>
+                <a16:creationId xmlns:a16="http://schemas.microsoft.com/office/drawing/2014/main" id="{2EDC1EB3-9F98-4B70-96A8-726A38C4B78A}"/>
               </a:ext>
             </a:extLst>
           </p:cNvPr>
@@ -4463,7 +4463,7 @@
           <p:cNvPr id="30" name="">
             <a:extLst xmlns:a="http://schemas.openxmlformats.org/drawingml/2006/main">
               <a:ext uri="{FF2B5EF4-FFF2-40B4-BE49-F238E27FC236}">
-                <a16:creationId xmlns:a16="http://schemas.microsoft.com/office/drawing/2014/main" id="{FB9F82C0-00AA-47DA-A95C-B031AC1CC8CE}"/>
+                <a16:creationId xmlns:a16="http://schemas.microsoft.com/office/drawing/2014/main" id="{86CB0A68-E803-4923-BB60-81D235A9B1FD}"/>
               </a:ext>
             </a:extLst>
           </p:cNvPr>
@@ -4515,7 +4515,7 @@
           <p:cNvPr id="31" name="">
             <a:extLst xmlns:a="http://schemas.openxmlformats.org/drawingml/2006/main">
               <a:ext uri="{FF2B5EF4-FFF2-40B4-BE49-F238E27FC236}">
-                <a16:creationId xmlns:a16="http://schemas.microsoft.com/office/drawing/2014/main" id="{1C6C7B60-26CF-45FC-BBF4-109C93B5A9FF}"/>
+                <a16:creationId xmlns:a16="http://schemas.microsoft.com/office/drawing/2014/main" id="{7C776B53-4BA0-4977-A815-237067D36A49}"/>
               </a:ext>
             </a:extLst>
           </p:cNvPr>
@@ -4546,7 +4546,7 @@
           <p:cNvPr id="32" name="">
             <a:extLst xmlns:a="http://schemas.openxmlformats.org/drawingml/2006/main">
               <a:ext uri="{FF2B5EF4-FFF2-40B4-BE49-F238E27FC236}">
-                <a16:creationId xmlns:a16="http://schemas.microsoft.com/office/drawing/2014/main" id="{7F40EE18-AE16-4D54-951A-EC57936DB91C}"/>
+                <a16:creationId xmlns:a16="http://schemas.microsoft.com/office/drawing/2014/main" id="{3964D597-B324-4430-BA2E-F6F979AF1124}"/>
               </a:ext>
             </a:extLst>
           </p:cNvPr>
@@ -4577,7 +4577,7 @@
           <p:cNvPr id="33" name="">
             <a:extLst xmlns:a="http://schemas.openxmlformats.org/drawingml/2006/main">
               <a:ext uri="{FF2B5EF4-FFF2-40B4-BE49-F238E27FC236}">
-                <a16:creationId xmlns:a16="http://schemas.microsoft.com/office/drawing/2014/main" id="{AA113CAF-6578-4633-A011-DB5F6F3B6728}"/>
+                <a16:creationId xmlns:a16="http://schemas.microsoft.com/office/drawing/2014/main" id="{06E19E82-C48A-4F2B-B7CB-7B4D35F7EE81}"/>
               </a:ext>
             </a:extLst>
           </p:cNvPr>
@@ -4629,7 +4629,7 @@
           <p:cNvPr id="34" name="">
             <a:extLst xmlns:a="http://schemas.openxmlformats.org/drawingml/2006/main">
               <a:ext uri="{FF2B5EF4-FFF2-40B4-BE49-F238E27FC236}">
-                <a16:creationId xmlns:a16="http://schemas.microsoft.com/office/drawing/2014/main" id="{6EACF811-6B35-4340-BD08-2623FCA73A22}"/>
+                <a16:creationId xmlns:a16="http://schemas.microsoft.com/office/drawing/2014/main" id="{B8D15650-4C14-48C6-A204-9111A38011ED}"/>
               </a:ext>
             </a:extLst>
           </p:cNvPr>
@@ -4681,7 +4681,7 @@
           <p:cNvPr id="35" name="">
             <a:extLst xmlns:a="http://schemas.openxmlformats.org/drawingml/2006/main">
               <a:ext uri="{FF2B5EF4-FFF2-40B4-BE49-F238E27FC236}">
-                <a16:creationId xmlns:a16="http://schemas.microsoft.com/office/drawing/2014/main" id="{6DC43DF9-55C5-47AD-B656-BA1D78BD58E0}"/>
+                <a16:creationId xmlns:a16="http://schemas.microsoft.com/office/drawing/2014/main" id="{0F366C9B-1DC9-42E4-AC76-67F4BFF646A5}"/>
               </a:ext>
             </a:extLst>
           </p:cNvPr>
@@ -4733,7 +4733,7 @@
           <p:cNvPr id="36" name="">
             <a:extLst xmlns:a="http://schemas.openxmlformats.org/drawingml/2006/main">
               <a:ext uri="{FF2B5EF4-FFF2-40B4-BE49-F238E27FC236}">
-                <a16:creationId xmlns:a16="http://schemas.microsoft.com/office/drawing/2014/main" id="{2766A76B-D747-4BAE-8146-5EB9A1EA05F3}"/>
+                <a16:creationId xmlns:a16="http://schemas.microsoft.com/office/drawing/2014/main" id="{38148665-F6CB-4EF3-9A72-367E97891CE7}"/>
               </a:ext>
             </a:extLst>
           </p:cNvPr>
@@ -4785,7 +4785,7 @@
           <p:cNvPr id="37" name="">
             <a:extLst xmlns:a="http://schemas.openxmlformats.org/drawingml/2006/main">
               <a:ext uri="{FF2B5EF4-FFF2-40B4-BE49-F238E27FC236}">
-                <a16:creationId xmlns:a16="http://schemas.microsoft.com/office/drawing/2014/main" id="{E7B012AD-6A5A-4998-91F8-62DD57EE3DAF}"/>
+                <a16:creationId xmlns:a16="http://schemas.microsoft.com/office/drawing/2014/main" id="{30B0E977-EB70-4059-BAFF-D8914B6540A9}"/>
               </a:ext>
             </a:extLst>
           </p:cNvPr>
@@ -4837,7 +4837,7 @@
           <p:cNvPr id="38" name="">
             <a:extLst xmlns:a="http://schemas.openxmlformats.org/drawingml/2006/main">
               <a:ext uri="{FF2B5EF4-FFF2-40B4-BE49-F238E27FC236}">
-                <a16:creationId xmlns:a16="http://schemas.microsoft.com/office/drawing/2014/main" id="{96021A8A-EEA9-4F47-BAFC-3FF4A3CAC1B4}"/>
+                <a16:creationId xmlns:a16="http://schemas.microsoft.com/office/drawing/2014/main" id="{1EBA6B32-2E41-4820-B4E1-1D084D8AF662}"/>
               </a:ext>
             </a:extLst>
           </p:cNvPr>
@@ -4868,7 +4868,7 @@
           <p:cNvPr id="39" name="">
             <a:extLst xmlns:a="http://schemas.openxmlformats.org/drawingml/2006/main">
               <a:ext uri="{FF2B5EF4-FFF2-40B4-BE49-F238E27FC236}">
-                <a16:creationId xmlns:a16="http://schemas.microsoft.com/office/drawing/2014/main" id="{31B3C13C-24FD-4377-B1C0-C766FEBBEC21}"/>
+                <a16:creationId xmlns:a16="http://schemas.microsoft.com/office/drawing/2014/main" id="{7359FF73-A19E-463D-A767-16B21E3A8EFD}"/>
               </a:ext>
             </a:extLst>
           </p:cNvPr>
@@ -4920,7 +4920,7 @@
           <p:cNvPr id="40" name="">
             <a:extLst xmlns:a="http://schemas.openxmlformats.org/drawingml/2006/main">
               <a:ext uri="{FF2B5EF4-FFF2-40B4-BE49-F238E27FC236}">
-                <a16:creationId xmlns:a16="http://schemas.microsoft.com/office/drawing/2014/main" id="{1044717B-DF89-4AA9-8B9E-53B07ADAF855}"/>
+                <a16:creationId xmlns:a16="http://schemas.microsoft.com/office/drawing/2014/main" id="{3C8D5A37-AA9A-4D2D-B6D5-63FCF9F0C3E9}"/>
               </a:ext>
             </a:extLst>
           </p:cNvPr>
@@ -4972,7 +4972,7 @@
           <p:cNvPr id="41" name="">
             <a:extLst xmlns:a="http://schemas.openxmlformats.org/drawingml/2006/main">
               <a:ext uri="{FF2B5EF4-FFF2-40B4-BE49-F238E27FC236}">
-                <a16:creationId xmlns:a16="http://schemas.microsoft.com/office/drawing/2014/main" id="{67DDDB2B-4369-4FFF-ABE1-2FBC7D6B6097}"/>
+                <a16:creationId xmlns:a16="http://schemas.microsoft.com/office/drawing/2014/main" id="{130446B6-24BA-4A60-9573-09745422E683}"/>
               </a:ext>
             </a:extLst>
           </p:cNvPr>
@@ -5024,7 +5024,7 @@
           <p:cNvPr id="42" name="">
             <a:extLst xmlns:a="http://schemas.openxmlformats.org/drawingml/2006/main">
               <a:ext uri="{FF2B5EF4-FFF2-40B4-BE49-F238E27FC236}">
-                <a16:creationId xmlns:a16="http://schemas.microsoft.com/office/drawing/2014/main" id="{1AA317AC-96E4-4A9D-BE55-739446E6FED6}"/>
+                <a16:creationId xmlns:a16="http://schemas.microsoft.com/office/drawing/2014/main" id="{892B8A64-96CF-48DA-AC11-4911FFFE40B2}"/>
               </a:ext>
             </a:extLst>
           </p:cNvPr>
@@ -5076,7 +5076,7 @@
           <p:cNvPr id="43" name="">
             <a:extLst xmlns:a="http://schemas.openxmlformats.org/drawingml/2006/main">
               <a:ext uri="{FF2B5EF4-FFF2-40B4-BE49-F238E27FC236}">
-                <a16:creationId xmlns:a16="http://schemas.microsoft.com/office/drawing/2014/main" id="{BADC2AAE-1303-45E5-89F3-91455BA2EB4C}"/>
+                <a16:creationId xmlns:a16="http://schemas.microsoft.com/office/drawing/2014/main" id="{F254AC7C-A2AB-405B-AEED-E215446FDC0A}"/>
               </a:ext>
             </a:extLst>
           </p:cNvPr>
@@ -5128,7 +5128,7 @@
           <p:cNvPr id="44" name="">
             <a:extLst xmlns:a="http://schemas.openxmlformats.org/drawingml/2006/main">
               <a:ext uri="{FF2B5EF4-FFF2-40B4-BE49-F238E27FC236}">
-                <a16:creationId xmlns:a16="http://schemas.microsoft.com/office/drawing/2014/main" id="{2949AF46-0D83-475A-B933-711CB0A9A7B3}"/>
+                <a16:creationId xmlns:a16="http://schemas.microsoft.com/office/drawing/2014/main" id="{5B518E39-DABF-4087-9C47-16BF1D76AEFA}"/>
               </a:ext>
             </a:extLst>
           </p:cNvPr>
@@ -5159,7 +5159,7 @@
           <p:cNvPr id="45" name="">
             <a:extLst xmlns:a="http://schemas.openxmlformats.org/drawingml/2006/main">
               <a:ext uri="{FF2B5EF4-FFF2-40B4-BE49-F238E27FC236}">
-                <a16:creationId xmlns:a16="http://schemas.microsoft.com/office/drawing/2014/main" id="{1CEEA023-C214-4387-830F-4ED4E219F2A0}"/>
+                <a16:creationId xmlns:a16="http://schemas.microsoft.com/office/drawing/2014/main" id="{C584EE1E-091D-4FAD-89A1-35C68AA649E0}"/>
               </a:ext>
             </a:extLst>
           </p:cNvPr>
@@ -5190,7 +5190,7 @@
           <p:cNvPr id="46" name="">
             <a:extLst xmlns:a="http://schemas.openxmlformats.org/drawingml/2006/main">
               <a:ext uri="{FF2B5EF4-FFF2-40B4-BE49-F238E27FC236}">
-                <a16:creationId xmlns:a16="http://schemas.microsoft.com/office/drawing/2014/main" id="{DA212BFE-0BCE-4BCD-B0E7-905E33C5A883}"/>
+                <a16:creationId xmlns:a16="http://schemas.microsoft.com/office/drawing/2014/main" id="{48FC2595-E816-461B-AF2B-E31C1C5E19D2}"/>
               </a:ext>
             </a:extLst>
           </p:cNvPr>
@@ -5242,7 +5242,7 @@
           <p:cNvPr id="47" name="">
             <a:extLst xmlns:a="http://schemas.openxmlformats.org/drawingml/2006/main">
               <a:ext uri="{FF2B5EF4-FFF2-40B4-BE49-F238E27FC236}">
-                <a16:creationId xmlns:a16="http://schemas.microsoft.com/office/drawing/2014/main" id="{69E2122D-57D2-4009-B907-A1C71E18B407}"/>
+                <a16:creationId xmlns:a16="http://schemas.microsoft.com/office/drawing/2014/main" id="{14415912-422A-45A8-B936-3C597A8431F2}"/>
               </a:ext>
             </a:extLst>
           </p:cNvPr>
@@ -5294,7 +5294,7 @@
           <p:cNvPr id="48" name="">
             <a:extLst xmlns:a="http://schemas.openxmlformats.org/drawingml/2006/main">
               <a:ext uri="{FF2B5EF4-FFF2-40B4-BE49-F238E27FC236}">
-                <a16:creationId xmlns:a16="http://schemas.microsoft.com/office/drawing/2014/main" id="{936BEB4F-235C-40E1-99DF-259C80E2387F}"/>
+                <a16:creationId xmlns:a16="http://schemas.microsoft.com/office/drawing/2014/main" id="{605A0E2F-CF0A-4D9D-A116-D1250C1A7460}"/>
               </a:ext>
             </a:extLst>
           </p:cNvPr>
@@ -5346,7 +5346,7 @@
           <p:cNvPr id="49" name="">
             <a:extLst xmlns:a="http://schemas.openxmlformats.org/drawingml/2006/main">
               <a:ext uri="{FF2B5EF4-FFF2-40B4-BE49-F238E27FC236}">
-                <a16:creationId xmlns:a16="http://schemas.microsoft.com/office/drawing/2014/main" id="{C2446137-D25D-4E52-B0F6-CC97AFD0F046}"/>
+                <a16:creationId xmlns:a16="http://schemas.microsoft.com/office/drawing/2014/main" id="{37ACF250-4CB1-4648-A2FC-9AF639728234}"/>
               </a:ext>
             </a:extLst>
           </p:cNvPr>
@@ -5398,7 +5398,7 @@
           <p:cNvPr id="50" name="">
             <a:extLst xmlns:a="http://schemas.openxmlformats.org/drawingml/2006/main">
               <a:ext uri="{FF2B5EF4-FFF2-40B4-BE49-F238E27FC236}">
-                <a16:creationId xmlns:a16="http://schemas.microsoft.com/office/drawing/2014/main" id="{C0B15538-BB30-415A-8EAA-E7C22038C4C6}"/>
+                <a16:creationId xmlns:a16="http://schemas.microsoft.com/office/drawing/2014/main" id="{5C496B38-802B-4A84-9FE5-87C53BD83D8D}"/>
               </a:ext>
             </a:extLst>
           </p:cNvPr>
@@ -5450,7 +5450,7 @@
           <p:cNvPr id="51" name="">
             <a:extLst xmlns:a="http://schemas.openxmlformats.org/drawingml/2006/main">
               <a:ext uri="{FF2B5EF4-FFF2-40B4-BE49-F238E27FC236}">
-                <a16:creationId xmlns:a16="http://schemas.microsoft.com/office/drawing/2014/main" id="{4CD9222D-B4B4-4312-9756-23882EA6F0A7}"/>
+                <a16:creationId xmlns:a16="http://schemas.microsoft.com/office/drawing/2014/main" id="{B7444045-A6B7-48AB-B3C3-C8A287FBA10A}"/>
               </a:ext>
             </a:extLst>
           </p:cNvPr>
@@ -5481,7 +5481,7 @@
           <p:cNvPr id="52" name="">
             <a:extLst xmlns:a="http://schemas.openxmlformats.org/drawingml/2006/main">
               <a:ext uri="{FF2B5EF4-FFF2-40B4-BE49-F238E27FC236}">
-                <a16:creationId xmlns:a16="http://schemas.microsoft.com/office/drawing/2014/main" id="{03297127-E208-4F8F-A0F8-ADC9AA4CA6AD}"/>
+                <a16:creationId xmlns:a16="http://schemas.microsoft.com/office/drawing/2014/main" id="{8A9F8E9B-FEC2-4102-8121-CA86F2B5774E}"/>
               </a:ext>
             </a:extLst>
           </p:cNvPr>
@@ -5533,7 +5533,7 @@
           <p:cNvPr id="53" name="">
             <a:extLst xmlns:a="http://schemas.openxmlformats.org/drawingml/2006/main">
               <a:ext uri="{FF2B5EF4-FFF2-40B4-BE49-F238E27FC236}">
-                <a16:creationId xmlns:a16="http://schemas.microsoft.com/office/drawing/2014/main" id="{64E10357-1684-4DF2-B916-E06995C3FA9E}"/>
+                <a16:creationId xmlns:a16="http://schemas.microsoft.com/office/drawing/2014/main" id="{751E0A58-3A87-4EDD-B6E2-95F4C6E345F0}"/>
               </a:ext>
             </a:extLst>
           </p:cNvPr>
@@ -5585,7 +5585,7 @@
           <p:cNvPr id="54" name="">
             <a:extLst xmlns:a="http://schemas.openxmlformats.org/drawingml/2006/main">
               <a:ext uri="{FF2B5EF4-FFF2-40B4-BE49-F238E27FC236}">
-                <a16:creationId xmlns:a16="http://schemas.microsoft.com/office/drawing/2014/main" id="{ED46A1CF-D577-479A-BFD6-E32911C9DE78}"/>
+                <a16:creationId xmlns:a16="http://schemas.microsoft.com/office/drawing/2014/main" id="{6F411DDD-1FD2-47A3-9D66-5327E0FC0F78}"/>
               </a:ext>
             </a:extLst>
           </p:cNvPr>
@@ -5637,7 +5637,7 @@
           <p:cNvPr id="55" name="">
             <a:extLst xmlns:a="http://schemas.openxmlformats.org/drawingml/2006/main">
               <a:ext uri="{FF2B5EF4-FFF2-40B4-BE49-F238E27FC236}">
-                <a16:creationId xmlns:a16="http://schemas.microsoft.com/office/drawing/2014/main" id="{4F3861E8-EBBB-4E72-92AC-E7EDA9D8F7FD}"/>
+                <a16:creationId xmlns:a16="http://schemas.microsoft.com/office/drawing/2014/main" id="{8BA7C93E-7813-411B-9CA6-AA97A7E3F6E0}"/>
               </a:ext>
             </a:extLst>
           </p:cNvPr>
@@ -5689,7 +5689,7 @@
           <p:cNvPr id="56" name="">
             <a:extLst xmlns:a="http://schemas.openxmlformats.org/drawingml/2006/main">
               <a:ext uri="{FF2B5EF4-FFF2-40B4-BE49-F238E27FC236}">
-                <a16:creationId xmlns:a16="http://schemas.microsoft.com/office/drawing/2014/main" id="{D1AD6042-795F-4ABF-92E5-581A67DF4595}"/>
+                <a16:creationId xmlns:a16="http://schemas.microsoft.com/office/drawing/2014/main" id="{5CBA51BD-3BED-4E8B-BE86-2C45EF3DF45B}"/>
               </a:ext>
             </a:extLst>
           </p:cNvPr>
@@ -5741,7 +5741,7 @@
           <p:cNvPr id="57" name="">
             <a:extLst xmlns:a="http://schemas.openxmlformats.org/drawingml/2006/main">
               <a:ext uri="{FF2B5EF4-FFF2-40B4-BE49-F238E27FC236}">
-                <a16:creationId xmlns:a16="http://schemas.microsoft.com/office/drawing/2014/main" id="{0048C6A9-352C-424C-99E0-D1D24818A91B}"/>
+                <a16:creationId xmlns:a16="http://schemas.microsoft.com/office/drawing/2014/main" id="{BCC85065-C8CB-4B0A-9BE7-6F1A98AD5C19}"/>
               </a:ext>
             </a:extLst>
           </p:cNvPr>
@@ -5772,7 +5772,7 @@
           <p:cNvPr id="58" name="">
             <a:extLst xmlns:a="http://schemas.openxmlformats.org/drawingml/2006/main">
               <a:ext uri="{FF2B5EF4-FFF2-40B4-BE49-F238E27FC236}">
-                <a16:creationId xmlns:a16="http://schemas.microsoft.com/office/drawing/2014/main" id="{7EA929E7-EAD0-4A76-8579-04CA3E66BE97}"/>
+                <a16:creationId xmlns:a16="http://schemas.microsoft.com/office/drawing/2014/main" id="{BD20CC73-5DBB-49B0-8857-1FE71D08FAFC}"/>
               </a:ext>
             </a:extLst>
           </p:cNvPr>
@@ -5803,7 +5803,7 @@
           <p:cNvPr id="59" name="">
             <a:extLst xmlns:a="http://schemas.openxmlformats.org/drawingml/2006/main">
               <a:ext uri="{FF2B5EF4-FFF2-40B4-BE49-F238E27FC236}">
-                <a16:creationId xmlns:a16="http://schemas.microsoft.com/office/drawing/2014/main" id="{20530B33-67CD-4CFC-912E-94305ABFFCD1}"/>
+                <a16:creationId xmlns:a16="http://schemas.microsoft.com/office/drawing/2014/main" id="{726DE987-5E44-44A9-86E2-B6CDFF3B4301}"/>
               </a:ext>
             </a:extLst>
           </p:cNvPr>
@@ -5855,7 +5855,7 @@
           <p:cNvPr id="60" name="">
             <a:extLst xmlns:a="http://schemas.openxmlformats.org/drawingml/2006/main">
               <a:ext uri="{FF2B5EF4-FFF2-40B4-BE49-F238E27FC236}">
-                <a16:creationId xmlns:a16="http://schemas.microsoft.com/office/drawing/2014/main" id="{C9502D82-16BF-42C4-916F-F9A1E89806B9}"/>
+                <a16:creationId xmlns:a16="http://schemas.microsoft.com/office/drawing/2014/main" id="{D4F21E01-3833-45ED-8770-05E490C0D9EF}"/>
               </a:ext>
             </a:extLst>
           </p:cNvPr>
@@ -5907,7 +5907,7 @@
           <p:cNvPr id="61" name="">
             <a:extLst xmlns:a="http://schemas.openxmlformats.org/drawingml/2006/main">
               <a:ext uri="{FF2B5EF4-FFF2-40B4-BE49-F238E27FC236}">
-                <a16:creationId xmlns:a16="http://schemas.microsoft.com/office/drawing/2014/main" id="{B1086B01-4604-4E55-800F-6AF2DB35C7D9}"/>
+                <a16:creationId xmlns:a16="http://schemas.microsoft.com/office/drawing/2014/main" id="{9201E4C1-5F9E-413E-8AAB-6317DF8051AB}"/>
               </a:ext>
             </a:extLst>
           </p:cNvPr>
@@ -5959,7 +5959,7 @@
           <p:cNvPr id="62" name="">
             <a:extLst xmlns:a="http://schemas.openxmlformats.org/drawingml/2006/main">
               <a:ext uri="{FF2B5EF4-FFF2-40B4-BE49-F238E27FC236}">
-                <a16:creationId xmlns:a16="http://schemas.microsoft.com/office/drawing/2014/main" id="{D3A93E83-7A66-401A-91EF-6AE6111F960C}"/>
+                <a16:creationId xmlns:a16="http://schemas.microsoft.com/office/drawing/2014/main" id="{18F6781A-5D3E-43B7-89E1-13E3B7E56EA1}"/>
               </a:ext>
             </a:extLst>
           </p:cNvPr>
@@ -6011,7 +6011,7 @@
           <p:cNvPr id="63" name="">
             <a:extLst xmlns:a="http://schemas.openxmlformats.org/drawingml/2006/main">
               <a:ext uri="{FF2B5EF4-FFF2-40B4-BE49-F238E27FC236}">
-                <a16:creationId xmlns:a16="http://schemas.microsoft.com/office/drawing/2014/main" id="{E838650A-7341-4A45-BE40-49C3A39AC6D8}"/>
+                <a16:creationId xmlns:a16="http://schemas.microsoft.com/office/drawing/2014/main" id="{704D4426-722F-4A72-A56D-12AFFDAEF00D}"/>
               </a:ext>
             </a:extLst>
           </p:cNvPr>
@@ -6063,7 +6063,7 @@
           <p:cNvPr id="64" name="">
             <a:extLst xmlns:a="http://schemas.openxmlformats.org/drawingml/2006/main">
               <a:ext uri="{FF2B5EF4-FFF2-40B4-BE49-F238E27FC236}">
-                <a16:creationId xmlns:a16="http://schemas.microsoft.com/office/drawing/2014/main" id="{3B5C6BA0-FE8D-44BD-8A07-C093DE0487B0}"/>
+                <a16:creationId xmlns:a16="http://schemas.microsoft.com/office/drawing/2014/main" id="{5ACC16B4-8EB3-47EA-A79D-3D449A0ED3FE}"/>
               </a:ext>
             </a:extLst>
           </p:cNvPr>
@@ -6094,7 +6094,7 @@
           <p:cNvPr id="65" name="">
             <a:extLst xmlns:a="http://schemas.openxmlformats.org/drawingml/2006/main">
               <a:ext uri="{FF2B5EF4-FFF2-40B4-BE49-F238E27FC236}">
-                <a16:creationId xmlns:a16="http://schemas.microsoft.com/office/drawing/2014/main" id="{70D7CC00-B820-4D7B-BA7C-77BEB942CA9C}"/>
+                <a16:creationId xmlns:a16="http://schemas.microsoft.com/office/drawing/2014/main" id="{E7445146-EF4E-4D91-B521-DF0BA6F2967E}"/>
               </a:ext>
             </a:extLst>
           </p:cNvPr>
@@ -6146,7 +6146,7 @@
           <p:cNvPr id="66" name="">
             <a:extLst xmlns:a="http://schemas.openxmlformats.org/drawingml/2006/main">
               <a:ext uri="{FF2B5EF4-FFF2-40B4-BE49-F238E27FC236}">
-                <a16:creationId xmlns:a16="http://schemas.microsoft.com/office/drawing/2014/main" id="{52506E92-7623-4431-BE1F-11B1DC05261D}"/>
+                <a16:creationId xmlns:a16="http://schemas.microsoft.com/office/drawing/2014/main" id="{F4BB7379-A0BA-40F3-85D6-E29BA8F14284}"/>
               </a:ext>
             </a:extLst>
           </p:cNvPr>
@@ -6198,7 +6198,7 @@
           <p:cNvPr id="67" name="">
             <a:extLst xmlns:a="http://schemas.openxmlformats.org/drawingml/2006/main">
               <a:ext uri="{FF2B5EF4-FFF2-40B4-BE49-F238E27FC236}">
-                <a16:creationId xmlns:a16="http://schemas.microsoft.com/office/drawing/2014/main" id="{1BFDEB62-3349-47B4-9CBE-B37B953C7C21}"/>
+                <a16:creationId xmlns:a16="http://schemas.microsoft.com/office/drawing/2014/main" id="{423BEBD2-211F-486B-8225-B35EB7CE82D7}"/>
               </a:ext>
             </a:extLst>
           </p:cNvPr>
@@ -6250,7 +6250,7 @@
           <p:cNvPr id="68" name="">
             <a:extLst xmlns:a="http://schemas.openxmlformats.org/drawingml/2006/main">
               <a:ext uri="{FF2B5EF4-FFF2-40B4-BE49-F238E27FC236}">
-                <a16:creationId xmlns:a16="http://schemas.microsoft.com/office/drawing/2014/main" id="{5CAF140A-0D0A-4F39-BA6D-7BB85BDEB22D}"/>
+                <a16:creationId xmlns:a16="http://schemas.microsoft.com/office/drawing/2014/main" id="{990F5D79-36B4-4A2C-993B-8177AB8EE899}"/>
               </a:ext>
             </a:extLst>
           </p:cNvPr>
@@ -6302,7 +6302,7 @@
           <p:cNvPr id="69" name="">
             <a:extLst xmlns:a="http://schemas.openxmlformats.org/drawingml/2006/main">
               <a:ext uri="{FF2B5EF4-FFF2-40B4-BE49-F238E27FC236}">
-                <a16:creationId xmlns:a16="http://schemas.microsoft.com/office/drawing/2014/main" id="{83BF3170-5972-4C50-886D-49EEC9A87BF5}"/>
+                <a16:creationId xmlns:a16="http://schemas.microsoft.com/office/drawing/2014/main" id="{6A9D537F-1468-4EB1-800D-96D9A2B9606B}"/>
               </a:ext>
             </a:extLst>
           </p:cNvPr>
@@ -6354,7 +6354,7 @@
           <p:cNvPr id="70" name="">
             <a:extLst xmlns:a="http://schemas.openxmlformats.org/drawingml/2006/main">
               <a:ext uri="{FF2B5EF4-FFF2-40B4-BE49-F238E27FC236}">
-                <a16:creationId xmlns:a16="http://schemas.microsoft.com/office/drawing/2014/main" id="{D05B5B2C-6C10-4D82-8A8D-90A7FE0C236D}"/>
+                <a16:creationId xmlns:a16="http://schemas.microsoft.com/office/drawing/2014/main" id="{76ED42B6-A68B-48D4-A063-89E640B56F9B}"/>
               </a:ext>
             </a:extLst>
           </p:cNvPr>
@@ -6385,7 +6385,7 @@
           <p:cNvPr id="71" name="">
             <a:extLst xmlns:a="http://schemas.openxmlformats.org/drawingml/2006/main">
               <a:ext uri="{FF2B5EF4-FFF2-40B4-BE49-F238E27FC236}">
-                <a16:creationId xmlns:a16="http://schemas.microsoft.com/office/drawing/2014/main" id="{2A29C3C6-71EB-4E4B-83A7-0D81AC0FD6D5}"/>
+                <a16:creationId xmlns:a16="http://schemas.microsoft.com/office/drawing/2014/main" id="{432B300C-85E4-438A-AE25-63EB31F64E4D}"/>
               </a:ext>
             </a:extLst>
           </p:cNvPr>
@@ -6416,7 +6416,7 @@
           <p:cNvPr id="72" name="">
             <a:extLst xmlns:a="http://schemas.openxmlformats.org/drawingml/2006/main">
               <a:ext uri="{FF2B5EF4-FFF2-40B4-BE49-F238E27FC236}">
-                <a16:creationId xmlns:a16="http://schemas.microsoft.com/office/drawing/2014/main" id="{06FEFD41-12C7-4C42-AC73-F0D41028BDA2}"/>
+                <a16:creationId xmlns:a16="http://schemas.microsoft.com/office/drawing/2014/main" id="{115E925A-FB7B-4535-B30E-18008DAE194F}"/>
               </a:ext>
             </a:extLst>
           </p:cNvPr>
@@ -6468,7 +6468,7 @@
           <p:cNvPr id="73" name="">
             <a:extLst xmlns:a="http://schemas.openxmlformats.org/drawingml/2006/main">
               <a:ext uri="{FF2B5EF4-FFF2-40B4-BE49-F238E27FC236}">
-                <a16:creationId xmlns:a16="http://schemas.microsoft.com/office/drawing/2014/main" id="{8B1576EF-E9BF-4205-8FC6-CA015FB7BDBE}"/>
+                <a16:creationId xmlns:a16="http://schemas.microsoft.com/office/drawing/2014/main" id="{51645861-F032-4D0A-AADD-ECF5FD043354}"/>
               </a:ext>
             </a:extLst>
           </p:cNvPr>
@@ -6520,7 +6520,7 @@
           <p:cNvPr id="74" name="">
             <a:extLst xmlns:a="http://schemas.openxmlformats.org/drawingml/2006/main">
               <a:ext uri="{FF2B5EF4-FFF2-40B4-BE49-F238E27FC236}">
-                <a16:creationId xmlns:a16="http://schemas.microsoft.com/office/drawing/2014/main" id="{999FDD05-0581-49E4-93B7-1DDA3ADC8272}"/>
+                <a16:creationId xmlns:a16="http://schemas.microsoft.com/office/drawing/2014/main" id="{29BBD99F-602A-4D74-A799-0DE1FDA7D47D}"/>
               </a:ext>
             </a:extLst>
           </p:cNvPr>
@@ -6572,7 +6572,7 @@
           <p:cNvPr id="75" name="">
             <a:extLst xmlns:a="http://schemas.openxmlformats.org/drawingml/2006/main">
               <a:ext uri="{FF2B5EF4-FFF2-40B4-BE49-F238E27FC236}">
-                <a16:creationId xmlns:a16="http://schemas.microsoft.com/office/drawing/2014/main" id="{2D410016-39E5-4370-A4B5-460A896DE70B}"/>
+                <a16:creationId xmlns:a16="http://schemas.microsoft.com/office/drawing/2014/main" id="{6FA66752-7640-496D-BC34-FE7BA7FD8220}"/>
               </a:ext>
             </a:extLst>
           </p:cNvPr>
@@ -6624,7 +6624,7 @@
           <p:cNvPr id="76" name="">
             <a:extLst xmlns:a="http://schemas.openxmlformats.org/drawingml/2006/main">
               <a:ext uri="{FF2B5EF4-FFF2-40B4-BE49-F238E27FC236}">
-                <a16:creationId xmlns:a16="http://schemas.microsoft.com/office/drawing/2014/main" id="{3C4BE0A6-584E-4579-BC83-14CCA93B986F}"/>
+                <a16:creationId xmlns:a16="http://schemas.microsoft.com/office/drawing/2014/main" id="{CD592906-E1A0-4CD5-B83B-39011003B41E}"/>
               </a:ext>
             </a:extLst>
           </p:cNvPr>
@@ -6676,7 +6676,7 @@
           <p:cNvPr id="77" name="">
             <a:extLst xmlns:a="http://schemas.openxmlformats.org/drawingml/2006/main">
               <a:ext uri="{FF2B5EF4-FFF2-40B4-BE49-F238E27FC236}">
-                <a16:creationId xmlns:a16="http://schemas.microsoft.com/office/drawing/2014/main" id="{5EA5E51D-1CB0-4C72-ABCB-CB671952060D}"/>
+                <a16:creationId xmlns:a16="http://schemas.microsoft.com/office/drawing/2014/main" id="{2F063AED-84A7-45CD-9FD2-D96EF8EDDD35}"/>
               </a:ext>
             </a:extLst>
           </p:cNvPr>
@@ -6707,7 +6707,7 @@
           <p:cNvPr id="78" name="">
             <a:extLst xmlns:a="http://schemas.openxmlformats.org/drawingml/2006/main">
               <a:ext uri="{FF2B5EF4-FFF2-40B4-BE49-F238E27FC236}">
-                <a16:creationId xmlns:a16="http://schemas.microsoft.com/office/drawing/2014/main" id="{7DC8355F-C538-4BE8-8A45-99A1598995E1}"/>
+                <a16:creationId xmlns:a16="http://schemas.microsoft.com/office/drawing/2014/main" id="{82AC2EAE-BBA7-401B-A283-BD5B25F52864}"/>
               </a:ext>
             </a:extLst>
           </p:cNvPr>
@@ -6759,7 +6759,7 @@
           <p:cNvPr id="79" name="">
             <a:extLst xmlns:a="http://schemas.openxmlformats.org/drawingml/2006/main">
               <a:ext uri="{FF2B5EF4-FFF2-40B4-BE49-F238E27FC236}">
-                <a16:creationId xmlns:a16="http://schemas.microsoft.com/office/drawing/2014/main" id="{7E6273C9-9D6C-4DF4-871C-509420358C3E}"/>
+                <a16:creationId xmlns:a16="http://schemas.microsoft.com/office/drawing/2014/main" id="{851FB069-D03B-42B1-839B-067F6C36F782}"/>
               </a:ext>
             </a:extLst>
           </p:cNvPr>
@@ -6811,7 +6811,7 @@
           <p:cNvPr id="80" name="">
             <a:extLst xmlns:a="http://schemas.openxmlformats.org/drawingml/2006/main">
               <a:ext uri="{FF2B5EF4-FFF2-40B4-BE49-F238E27FC236}">
-                <a16:creationId xmlns:a16="http://schemas.microsoft.com/office/drawing/2014/main" id="{49E4A98B-508D-4899-A456-F721B6E3CED3}"/>
+                <a16:creationId xmlns:a16="http://schemas.microsoft.com/office/drawing/2014/main" id="{5CEC08C1-AB96-4683-883A-379C97C8EECF}"/>
               </a:ext>
             </a:extLst>
           </p:cNvPr>
@@ -6863,7 +6863,7 @@
           <p:cNvPr id="81" name="">
             <a:extLst xmlns:a="http://schemas.openxmlformats.org/drawingml/2006/main">
               <a:ext uri="{FF2B5EF4-FFF2-40B4-BE49-F238E27FC236}">
-                <a16:creationId xmlns:a16="http://schemas.microsoft.com/office/drawing/2014/main" id="{98073307-BB46-424B-9534-F0E808C23446}"/>
+                <a16:creationId xmlns:a16="http://schemas.microsoft.com/office/drawing/2014/main" id="{A2B71F7A-683A-489E-9F1D-D0A40F8794DD}"/>
               </a:ext>
             </a:extLst>
           </p:cNvPr>
@@ -6915,7 +6915,7 @@
           <p:cNvPr id="82" name="">
             <a:extLst xmlns:a="http://schemas.openxmlformats.org/drawingml/2006/main">
               <a:ext uri="{FF2B5EF4-FFF2-40B4-BE49-F238E27FC236}">
-                <a16:creationId xmlns:a16="http://schemas.microsoft.com/office/drawing/2014/main" id="{CDE08400-C7C6-4233-A492-928170C54640}"/>
+                <a16:creationId xmlns:a16="http://schemas.microsoft.com/office/drawing/2014/main" id="{6518DB33-85DD-47CC-814B-D9FAA9D756C8}"/>
               </a:ext>
             </a:extLst>
           </p:cNvPr>
@@ -6967,7 +6967,7 @@
           <p:cNvPr id="83" name="">
             <a:extLst xmlns:a="http://schemas.openxmlformats.org/drawingml/2006/main">
               <a:ext uri="{FF2B5EF4-FFF2-40B4-BE49-F238E27FC236}">
-                <a16:creationId xmlns:a16="http://schemas.microsoft.com/office/drawing/2014/main" id="{C5FB1C5F-D9C4-4165-8910-21963F509C3C}"/>
+                <a16:creationId xmlns:a16="http://schemas.microsoft.com/office/drawing/2014/main" id="{FA35BAFC-4733-407B-8AA2-1024B063C562}"/>
               </a:ext>
             </a:extLst>
           </p:cNvPr>
@@ -6998,7 +6998,7 @@
           <p:cNvPr id="84" name="">
             <a:extLst xmlns:a="http://schemas.openxmlformats.org/drawingml/2006/main">
               <a:ext uri="{FF2B5EF4-FFF2-40B4-BE49-F238E27FC236}">
-                <a16:creationId xmlns:a16="http://schemas.microsoft.com/office/drawing/2014/main" id="{A1812C65-D42C-4CFC-9E3D-2AABAD0B68DD}"/>
+                <a16:creationId xmlns:a16="http://schemas.microsoft.com/office/drawing/2014/main" id="{F84BCB0E-ECCA-468F-BD60-1B110F256430}"/>
               </a:ext>
             </a:extLst>
           </p:cNvPr>
@@ -7029,7 +7029,7 @@
           <p:cNvPr id="85" name="">
             <a:extLst xmlns:a="http://schemas.openxmlformats.org/drawingml/2006/main">
               <a:ext uri="{FF2B5EF4-FFF2-40B4-BE49-F238E27FC236}">
-                <a16:creationId xmlns:a16="http://schemas.microsoft.com/office/drawing/2014/main" id="{D8BE4817-5C13-4ACE-B5C8-AB93D003B202}"/>
+                <a16:creationId xmlns:a16="http://schemas.microsoft.com/office/drawing/2014/main" id="{6A0110B0-6E40-44D6-8959-7FAA1C35DF27}"/>
               </a:ext>
             </a:extLst>
           </p:cNvPr>
@@ -7081,7 +7081,7 @@
           <p:cNvPr id="86" name="">
             <a:extLst xmlns:a="http://schemas.openxmlformats.org/drawingml/2006/main">
               <a:ext uri="{FF2B5EF4-FFF2-40B4-BE49-F238E27FC236}">
-                <a16:creationId xmlns:a16="http://schemas.microsoft.com/office/drawing/2014/main" id="{D20F97B4-3F81-45D9-A9C6-202242C02650}"/>
+                <a16:creationId xmlns:a16="http://schemas.microsoft.com/office/drawing/2014/main" id="{74B85EA6-F253-4B44-A561-737DF9EB315E}"/>
               </a:ext>
             </a:extLst>
           </p:cNvPr>
@@ -7133,7 +7133,7 @@
           <p:cNvPr id="87" name="">
             <a:extLst xmlns:a="http://schemas.openxmlformats.org/drawingml/2006/main">
               <a:ext uri="{FF2B5EF4-FFF2-40B4-BE49-F238E27FC236}">
-                <a16:creationId xmlns:a16="http://schemas.microsoft.com/office/drawing/2014/main" id="{F9E1327B-D8DA-4375-9F51-A9E7B495C2CE}"/>
+                <a16:creationId xmlns:a16="http://schemas.microsoft.com/office/drawing/2014/main" id="{AEBA444E-42F6-4D85-9B53-0922E0CC7A46}"/>
               </a:ext>
             </a:extLst>
           </p:cNvPr>
@@ -7185,7 +7185,7 @@
           <p:cNvPr id="88" name="">
             <a:extLst xmlns:a="http://schemas.openxmlformats.org/drawingml/2006/main">
               <a:ext uri="{FF2B5EF4-FFF2-40B4-BE49-F238E27FC236}">
-                <a16:creationId xmlns:a16="http://schemas.microsoft.com/office/drawing/2014/main" id="{4A0D4209-BE6E-44DB-8470-2B9BD2497FBE}"/>
+                <a16:creationId xmlns:a16="http://schemas.microsoft.com/office/drawing/2014/main" id="{4E56690A-4BB1-47C3-BE78-72950FB011BB}"/>
               </a:ext>
             </a:extLst>
           </p:cNvPr>
@@ -7237,7 +7237,7 @@
           <p:cNvPr id="89" name="">
             <a:extLst xmlns:a="http://schemas.openxmlformats.org/drawingml/2006/main">
               <a:ext uri="{FF2B5EF4-FFF2-40B4-BE49-F238E27FC236}">
-                <a16:creationId xmlns:a16="http://schemas.microsoft.com/office/drawing/2014/main" id="{91A9CE5D-1B69-4BE3-B344-4B4BC15FE90C}"/>
+                <a16:creationId xmlns:a16="http://schemas.microsoft.com/office/drawing/2014/main" id="{F908ACED-4402-44DE-80EB-E7F4B9AB20FE}"/>
               </a:ext>
             </a:extLst>
           </p:cNvPr>
@@ -7289,7 +7289,7 @@
           <p:cNvPr id="90" name="">
             <a:extLst xmlns:a="http://schemas.openxmlformats.org/drawingml/2006/main">
               <a:ext uri="{FF2B5EF4-FFF2-40B4-BE49-F238E27FC236}">
-                <a16:creationId xmlns:a16="http://schemas.microsoft.com/office/drawing/2014/main" id="{EECAF380-6060-4A25-B6CE-53CD8FE1AF23}"/>
+                <a16:creationId xmlns:a16="http://schemas.microsoft.com/office/drawing/2014/main" id="{FE50036E-4284-4B02-89DF-580C28023865}"/>
               </a:ext>
             </a:extLst>
           </p:cNvPr>
@@ -7320,7 +7320,7 @@
           <p:cNvPr id="91" name="">
             <a:extLst xmlns:a="http://schemas.openxmlformats.org/drawingml/2006/main">
               <a:ext uri="{FF2B5EF4-FFF2-40B4-BE49-F238E27FC236}">
-                <a16:creationId xmlns:a16="http://schemas.microsoft.com/office/drawing/2014/main" id="{21429451-5157-4C17-B706-B060EFA44B34}"/>
+                <a16:creationId xmlns:a16="http://schemas.microsoft.com/office/drawing/2014/main" id="{508ED51B-4D18-4E78-874B-5D44E481B129}"/>
               </a:ext>
             </a:extLst>
           </p:cNvPr>
@@ -7372,7 +7372,7 @@
           <p:cNvPr id="92" name="">
             <a:extLst xmlns:a="http://schemas.openxmlformats.org/drawingml/2006/main">
               <a:ext uri="{FF2B5EF4-FFF2-40B4-BE49-F238E27FC236}">
-                <a16:creationId xmlns:a16="http://schemas.microsoft.com/office/drawing/2014/main" id="{02F833A0-C427-4DED-8C6A-3C800FE9B440}"/>
+                <a16:creationId xmlns:a16="http://schemas.microsoft.com/office/drawing/2014/main" id="{BFAE1D8F-31E3-4989-AA3F-1C0C545F84AE}"/>
               </a:ext>
             </a:extLst>
           </p:cNvPr>
@@ -7424,7 +7424,7 @@
           <p:cNvPr id="93" name="">
             <a:extLst xmlns:a="http://schemas.openxmlformats.org/drawingml/2006/main">
               <a:ext uri="{FF2B5EF4-FFF2-40B4-BE49-F238E27FC236}">
-                <a16:creationId xmlns:a16="http://schemas.microsoft.com/office/drawing/2014/main" id="{C916E3C9-C4A0-48FC-A8B7-15C9F8370B39}"/>
+                <a16:creationId xmlns:a16="http://schemas.microsoft.com/office/drawing/2014/main" id="{667B9B2D-5828-4211-9E25-AA17276723B2}"/>
               </a:ext>
             </a:extLst>
           </p:cNvPr>
@@ -7476,7 +7476,7 @@
           <p:cNvPr id="94" name="">
             <a:extLst xmlns:a="http://schemas.openxmlformats.org/drawingml/2006/main">
               <a:ext uri="{FF2B5EF4-FFF2-40B4-BE49-F238E27FC236}">
-                <a16:creationId xmlns:a16="http://schemas.microsoft.com/office/drawing/2014/main" id="{B2F083BA-CB72-41D3-97A8-2188DE5E5748}"/>
+                <a16:creationId xmlns:a16="http://schemas.microsoft.com/office/drawing/2014/main" id="{3D185811-228C-4DBF-B17A-C54476DBE1EE}"/>
               </a:ext>
             </a:extLst>
           </p:cNvPr>
@@ -7528,7 +7528,7 @@
           <p:cNvPr id="95" name="">
             <a:extLst xmlns:a="http://schemas.openxmlformats.org/drawingml/2006/main">
               <a:ext uri="{FF2B5EF4-FFF2-40B4-BE49-F238E27FC236}">
-                <a16:creationId xmlns:a16="http://schemas.microsoft.com/office/drawing/2014/main" id="{F7063713-B358-45DA-804E-F4F2D74AFCBA}"/>
+                <a16:creationId xmlns:a16="http://schemas.microsoft.com/office/drawing/2014/main" id="{5BF13486-DC41-408B-A963-7279F6BE8693}"/>
               </a:ext>
             </a:extLst>
           </p:cNvPr>
@@ -7580,7 +7580,7 @@
           <p:cNvPr id="96" name="">
             <a:extLst xmlns:a="http://schemas.openxmlformats.org/drawingml/2006/main">
               <a:ext uri="{FF2B5EF4-FFF2-40B4-BE49-F238E27FC236}">
-                <a16:creationId xmlns:a16="http://schemas.microsoft.com/office/drawing/2014/main" id="{59FB8859-6D5C-4BE2-9475-0027243E9256}"/>
+                <a16:creationId xmlns:a16="http://schemas.microsoft.com/office/drawing/2014/main" id="{AA4444A0-566C-4873-AC47-3D8F4280425E}"/>
               </a:ext>
             </a:extLst>
           </p:cNvPr>
@@ -7611,7 +7611,7 @@
           <p:cNvPr id="97" name="">
             <a:extLst xmlns:a="http://schemas.openxmlformats.org/drawingml/2006/main">
               <a:ext uri="{FF2B5EF4-FFF2-40B4-BE49-F238E27FC236}">
-                <a16:creationId xmlns:a16="http://schemas.microsoft.com/office/drawing/2014/main" id="{0482831B-AB5E-48FE-9E40-9AE064DEE613}"/>
+                <a16:creationId xmlns:a16="http://schemas.microsoft.com/office/drawing/2014/main" id="{30A58CD0-AF20-449E-904F-C84013EC2990}"/>
               </a:ext>
             </a:extLst>
           </p:cNvPr>
@@ -7642,7 +7642,7 @@
           <p:cNvPr id="98" name="">
             <a:extLst xmlns:a="http://schemas.openxmlformats.org/drawingml/2006/main">
               <a:ext uri="{FF2B5EF4-FFF2-40B4-BE49-F238E27FC236}">
-                <a16:creationId xmlns:a16="http://schemas.microsoft.com/office/drawing/2014/main" id="{745203BC-6967-4D24-83A5-750792C01E4A}"/>
+                <a16:creationId xmlns:a16="http://schemas.microsoft.com/office/drawing/2014/main" id="{273FDBC0-3BBC-4BC0-A66B-56FB4BA4D89D}"/>
               </a:ext>
             </a:extLst>
           </p:cNvPr>
@@ -7694,7 +7694,7 @@
           <p:cNvPr id="99" name="">
             <a:extLst xmlns:a="http://schemas.openxmlformats.org/drawingml/2006/main">
               <a:ext uri="{FF2B5EF4-FFF2-40B4-BE49-F238E27FC236}">
-                <a16:creationId xmlns:a16="http://schemas.microsoft.com/office/drawing/2014/main" id="{7827E7E3-D6B6-49F7-B18A-64F11955CD16}"/>
+                <a16:creationId xmlns:a16="http://schemas.microsoft.com/office/drawing/2014/main" id="{7E9FEAEA-ADD6-4C20-B2B3-36244F6AACD7}"/>
               </a:ext>
             </a:extLst>
           </p:cNvPr>
@@ -7746,7 +7746,7 @@
           <p:cNvPr id="100" name="">
             <a:extLst xmlns:a="http://schemas.openxmlformats.org/drawingml/2006/main">
               <a:ext uri="{FF2B5EF4-FFF2-40B4-BE49-F238E27FC236}">
-                <a16:creationId xmlns:a16="http://schemas.microsoft.com/office/drawing/2014/main" id="{D49D112D-1D21-4FDE-96AB-55896A88D583}"/>
+                <a16:creationId xmlns:a16="http://schemas.microsoft.com/office/drawing/2014/main" id="{2A78BA21-8803-44CB-A66B-0EC0B16A4D00}"/>
               </a:ext>
             </a:extLst>
           </p:cNvPr>
@@ -7798,7 +7798,7 @@
           <p:cNvPr id="101" name="">
             <a:extLst xmlns:a="http://schemas.openxmlformats.org/drawingml/2006/main">
               <a:ext uri="{FF2B5EF4-FFF2-40B4-BE49-F238E27FC236}">
-                <a16:creationId xmlns:a16="http://schemas.microsoft.com/office/drawing/2014/main" id="{843C8FC4-6646-4103-A387-5B500D098AC5}"/>
+                <a16:creationId xmlns:a16="http://schemas.microsoft.com/office/drawing/2014/main" id="{27CA2FCC-B1F9-4839-99AD-0C0D71690240}"/>
               </a:ext>
             </a:extLst>
           </p:cNvPr>
@@ -7850,7 +7850,7 @@
           <p:cNvPr id="102" name="">
             <a:extLst xmlns:a="http://schemas.openxmlformats.org/drawingml/2006/main">
               <a:ext uri="{FF2B5EF4-FFF2-40B4-BE49-F238E27FC236}">
-                <a16:creationId xmlns:a16="http://schemas.microsoft.com/office/drawing/2014/main" id="{CFAE9D72-2D74-49E4-AAE0-FA0444D68ADC}"/>
+                <a16:creationId xmlns:a16="http://schemas.microsoft.com/office/drawing/2014/main" id="{B897438B-B29A-4375-9DD1-C3CB359F2A0E}"/>
               </a:ext>
             </a:extLst>
           </p:cNvPr>
@@ -7900,7 +7900,7 @@
     </p:spTree>
     <p:extLst>
       <p:ext uri="{BB962C8B-B14F-4D97-AF65-F5344CB8AC3E}">
-        <p14:creationId xmlns:p14="http://schemas.microsoft.com/office/powerpoint/2010/main" val="1170040461"/>
+        <p14:creationId xmlns:p14="http://schemas.microsoft.com/office/powerpoint/2010/main" val="2004888362"/>
       </p:ext>
     </p:extLst>
   </p:cSld>
@@ -7931,7 +7931,7 @@
           <p:cNvPr id="98" name="">
             <a:extLst xmlns:a="http://schemas.openxmlformats.org/drawingml/2006/main">
               <a:ext uri="{FF2B5EF4-FFF2-40B4-BE49-F238E27FC236}">
-                <a16:creationId xmlns:a16="http://schemas.microsoft.com/office/drawing/2014/main" id="{DCD52DAF-1112-4835-8A98-35B62A7BD7F2}"/>
+                <a16:creationId xmlns:a16="http://schemas.microsoft.com/office/drawing/2014/main" id="{8C247691-339C-48AA-99C9-A38024742345}"/>
               </a:ext>
             </a:extLst>
           </p:cNvPr>
@@ -7964,7 +7964,7 @@
           <p:cNvPr id="2" name="">
             <a:extLst xmlns:a="http://schemas.openxmlformats.org/drawingml/2006/main">
               <a:ext uri="{FF2B5EF4-FFF2-40B4-BE49-F238E27FC236}">
-                <a16:creationId xmlns:a16="http://schemas.microsoft.com/office/drawing/2014/main" id="{DDBF0CEC-397F-42C0-BDA9-09C8330DC560}"/>
+                <a16:creationId xmlns:a16="http://schemas.microsoft.com/office/drawing/2014/main" id="{C9DFA6A1-DD9E-46DD-BD43-D5B40F9111EA}"/>
               </a:ext>
             </a:extLst>
           </p:cNvPr>
@@ -7995,7 +7995,7 @@
           <p:cNvPr id="3" name="">
             <a:extLst xmlns:a="http://schemas.openxmlformats.org/drawingml/2006/main">
               <a:ext uri="{FF2B5EF4-FFF2-40B4-BE49-F238E27FC236}">
-                <a16:creationId xmlns:a16="http://schemas.microsoft.com/office/drawing/2014/main" id="{FA3F7D31-06FB-48B5-937A-E316125C6B27}"/>
+                <a16:creationId xmlns:a16="http://schemas.microsoft.com/office/drawing/2014/main" id="{25353E9E-B775-46D1-9967-CA8511E222C9}"/>
               </a:ext>
             </a:extLst>
           </p:cNvPr>
@@ -8047,7 +8047,7 @@
           <p:cNvPr id="4" name="">
             <a:extLst xmlns:a="http://schemas.openxmlformats.org/drawingml/2006/main">
               <a:ext uri="{FF2B5EF4-FFF2-40B4-BE49-F238E27FC236}">
-                <a16:creationId xmlns:a16="http://schemas.microsoft.com/office/drawing/2014/main" id="{09424C8C-E9D3-4706-BA68-765EF9DC6BA2}"/>
+                <a16:creationId xmlns:a16="http://schemas.microsoft.com/office/drawing/2014/main" id="{2ED4D476-1E10-4A25-9325-7F9132FC20AE}"/>
               </a:ext>
             </a:extLst>
           </p:cNvPr>
@@ -8099,7 +8099,7 @@
           <p:cNvPr id="5" name="">
             <a:extLst xmlns:a="http://schemas.openxmlformats.org/drawingml/2006/main">
               <a:ext uri="{FF2B5EF4-FFF2-40B4-BE49-F238E27FC236}">
-                <a16:creationId xmlns:a16="http://schemas.microsoft.com/office/drawing/2014/main" id="{E6C0D042-A361-4FE6-A01E-5DE7FC043B93}"/>
+                <a16:creationId xmlns:a16="http://schemas.microsoft.com/office/drawing/2014/main" id="{D4D9083B-2C04-4F6F-82D3-5F77478B9FD1}"/>
               </a:ext>
             </a:extLst>
           </p:cNvPr>
@@ -8134,7 +8134,7 @@
           <p:nvPr/>
         </p:nvPicPr>
         <p:blipFill>
-          <a:blip xmlns:r="http://schemas.openxmlformats.org/officeDocument/2006/relationships" xmlns:a="http://schemas.openxmlformats.org/drawingml/2006/main" r:embed="Rcb2b76a50e4548b9"/>
+          <a:blip xmlns:r="http://schemas.openxmlformats.org/officeDocument/2006/relationships" xmlns:a="http://schemas.openxmlformats.org/drawingml/2006/main" r:embed="R766013efd5f34ff8"/>
           <a:stretch xmlns:a="http://schemas.openxmlformats.org/drawingml/2006/main"/>
         </p:blipFill>
         <p:spPr>
@@ -8152,7 +8152,7 @@
           <p:cNvPr id="7" name="">
             <a:extLst xmlns:a="http://schemas.openxmlformats.org/drawingml/2006/main">
               <a:ext uri="{FF2B5EF4-FFF2-40B4-BE49-F238E27FC236}">
-                <a16:creationId xmlns:a16="http://schemas.microsoft.com/office/drawing/2014/main" id="{78DACE4C-DC01-4D17-BB01-00311EDCAA24}"/>
+                <a16:creationId xmlns:a16="http://schemas.microsoft.com/office/drawing/2014/main" id="{285E080E-87B0-4689-B977-C999BC3010FF}"/>
               </a:ext>
             </a:extLst>
           </p:cNvPr>
@@ -8204,7 +8204,7 @@
           <p:cNvPr id="8" name="">
             <a:extLst xmlns:a="http://schemas.openxmlformats.org/drawingml/2006/main">
               <a:ext uri="{FF2B5EF4-FFF2-40B4-BE49-F238E27FC236}">
-                <a16:creationId xmlns:a16="http://schemas.microsoft.com/office/drawing/2014/main" id="{B29178D6-E264-4FF7-9D0E-CBED35A2550A}"/>
+                <a16:creationId xmlns:a16="http://schemas.microsoft.com/office/drawing/2014/main" id="{E4189AB5-BD61-4B5B-A274-A6193C5AB4EB}"/>
               </a:ext>
             </a:extLst>
           </p:cNvPr>
@@ -8256,7 +8256,7 @@
           <p:cNvPr id="9" name="">
             <a:extLst xmlns:a="http://schemas.openxmlformats.org/drawingml/2006/main">
               <a:ext uri="{FF2B5EF4-FFF2-40B4-BE49-F238E27FC236}">
-                <a16:creationId xmlns:a16="http://schemas.microsoft.com/office/drawing/2014/main" id="{1C585DBA-6BF1-49B8-9AA3-F5FCDDD8B95C}"/>
+                <a16:creationId xmlns:a16="http://schemas.microsoft.com/office/drawing/2014/main" id="{66737655-5C3A-4BE5-BA4B-6852AE3D9F59}"/>
               </a:ext>
             </a:extLst>
           </p:cNvPr>
@@ -8308,7 +8308,7 @@
           <p:cNvPr id="10" name="">
             <a:extLst xmlns:a="http://schemas.openxmlformats.org/drawingml/2006/main">
               <a:ext uri="{FF2B5EF4-FFF2-40B4-BE49-F238E27FC236}">
-                <a16:creationId xmlns:a16="http://schemas.microsoft.com/office/drawing/2014/main" id="{6BC85CFD-776B-4237-95D0-EA11FEE3EB9D}"/>
+                <a16:creationId xmlns:a16="http://schemas.microsoft.com/office/drawing/2014/main" id="{17679DB1-9A40-49EA-A383-ED33721A695F}"/>
               </a:ext>
             </a:extLst>
           </p:cNvPr>
@@ -8360,7 +8360,7 @@
           <p:cNvPr id="11" name="">
             <a:extLst xmlns:a="http://schemas.openxmlformats.org/drawingml/2006/main">
               <a:ext uri="{FF2B5EF4-FFF2-40B4-BE49-F238E27FC236}">
-                <a16:creationId xmlns:a16="http://schemas.microsoft.com/office/drawing/2014/main" id="{D2D47782-D1BD-4673-8C8C-AFE90AB2EA51}"/>
+                <a16:creationId xmlns:a16="http://schemas.microsoft.com/office/drawing/2014/main" id="{CBD319CE-5522-47B7-8B0A-F1D4DDFD90EB}"/>
               </a:ext>
             </a:extLst>
           </p:cNvPr>
@@ -8391,7 +8391,7 @@
           <p:cNvPr id="12" name="">
             <a:extLst xmlns:a="http://schemas.openxmlformats.org/drawingml/2006/main">
               <a:ext uri="{FF2B5EF4-FFF2-40B4-BE49-F238E27FC236}">
-                <a16:creationId xmlns:a16="http://schemas.microsoft.com/office/drawing/2014/main" id="{08EE980D-82B9-42B0-9C12-9312EE3B05B0}"/>
+                <a16:creationId xmlns:a16="http://schemas.microsoft.com/office/drawing/2014/main" id="{30BFB399-3713-4B47-BBB7-EA60AA1F8FA9}"/>
               </a:ext>
             </a:extLst>
           </p:cNvPr>
@@ -8422,7 +8422,7 @@
           <p:cNvPr id="13" name="">
             <a:extLst xmlns:a="http://schemas.openxmlformats.org/drawingml/2006/main">
               <a:ext uri="{FF2B5EF4-FFF2-40B4-BE49-F238E27FC236}">
-                <a16:creationId xmlns:a16="http://schemas.microsoft.com/office/drawing/2014/main" id="{4A62B2ED-8393-4D27-AD74-881B3D0D0421}"/>
+                <a16:creationId xmlns:a16="http://schemas.microsoft.com/office/drawing/2014/main" id="{299E4E2B-DB2D-492B-8C6A-BF06DFC4EBBC}"/>
               </a:ext>
             </a:extLst>
           </p:cNvPr>
@@ -8474,7 +8474,7 @@
           <p:cNvPr id="14" name="">
             <a:extLst xmlns:a="http://schemas.openxmlformats.org/drawingml/2006/main">
               <a:ext uri="{FF2B5EF4-FFF2-40B4-BE49-F238E27FC236}">
-                <a16:creationId xmlns:a16="http://schemas.microsoft.com/office/drawing/2014/main" id="{AB20885E-3D18-48D8-8EEE-6E1084083850}"/>
+                <a16:creationId xmlns:a16="http://schemas.microsoft.com/office/drawing/2014/main" id="{D5DD0332-98CA-476C-9DC2-A33018E5C04A}"/>
               </a:ext>
             </a:extLst>
           </p:cNvPr>
@@ -8526,7 +8526,7 @@
           <p:cNvPr id="15" name="">
             <a:extLst xmlns:a="http://schemas.openxmlformats.org/drawingml/2006/main">
               <a:ext uri="{FF2B5EF4-FFF2-40B4-BE49-F238E27FC236}">
-                <a16:creationId xmlns:a16="http://schemas.microsoft.com/office/drawing/2014/main" id="{1931A654-2E22-4C49-BA76-A671503361AD}"/>
+                <a16:creationId xmlns:a16="http://schemas.microsoft.com/office/drawing/2014/main" id="{FDB5BBC8-4E56-45CB-810A-5D8E05E5D222}"/>
               </a:ext>
             </a:extLst>
           </p:cNvPr>
@@ -8578,7 +8578,7 @@
           <p:cNvPr id="16" name="">
             <a:extLst xmlns:a="http://schemas.openxmlformats.org/drawingml/2006/main">
               <a:ext uri="{FF2B5EF4-FFF2-40B4-BE49-F238E27FC236}">
-                <a16:creationId xmlns:a16="http://schemas.microsoft.com/office/drawing/2014/main" id="{3B8A5B7E-9F08-48E1-B29A-765A6853CA01}"/>
+                <a16:creationId xmlns:a16="http://schemas.microsoft.com/office/drawing/2014/main" id="{9B58B5E3-64B6-4233-A56C-09D1EF35842B}"/>
               </a:ext>
             </a:extLst>
           </p:cNvPr>
@@ -8630,7 +8630,7 @@
           <p:cNvPr id="17" name="">
             <a:extLst xmlns:a="http://schemas.openxmlformats.org/drawingml/2006/main">
               <a:ext uri="{FF2B5EF4-FFF2-40B4-BE49-F238E27FC236}">
-                <a16:creationId xmlns:a16="http://schemas.microsoft.com/office/drawing/2014/main" id="{A99AA1C0-D688-4A3F-ADA2-7332D3F86EB5}"/>
+                <a16:creationId xmlns:a16="http://schemas.microsoft.com/office/drawing/2014/main" id="{3DEA181F-8FED-4044-A912-A4567A5239E0}"/>
               </a:ext>
             </a:extLst>
           </p:cNvPr>
@@ -8682,7 +8682,7 @@
           <p:cNvPr id="18" name="">
             <a:extLst xmlns:a="http://schemas.openxmlformats.org/drawingml/2006/main">
               <a:ext uri="{FF2B5EF4-FFF2-40B4-BE49-F238E27FC236}">
-                <a16:creationId xmlns:a16="http://schemas.microsoft.com/office/drawing/2014/main" id="{6ED52915-F408-4633-8173-64A4BE71AB0B}"/>
+                <a16:creationId xmlns:a16="http://schemas.microsoft.com/office/drawing/2014/main" id="{9BC392EF-C60A-4C3D-85E8-51EAC47E485B}"/>
               </a:ext>
             </a:extLst>
           </p:cNvPr>
@@ -8713,7 +8713,7 @@
           <p:cNvPr id="19" name="">
             <a:extLst xmlns:a="http://schemas.openxmlformats.org/drawingml/2006/main">
               <a:ext uri="{FF2B5EF4-FFF2-40B4-BE49-F238E27FC236}">
-                <a16:creationId xmlns:a16="http://schemas.microsoft.com/office/drawing/2014/main" id="{A9B016C0-F260-44D7-BDD2-18EC19113851}"/>
+                <a16:creationId xmlns:a16="http://schemas.microsoft.com/office/drawing/2014/main" id="{92196733-DF16-4C10-93E2-6D840E82E9A0}"/>
               </a:ext>
             </a:extLst>
           </p:cNvPr>
@@ -8765,7 +8765,7 @@
           <p:cNvPr id="20" name="">
             <a:extLst xmlns:a="http://schemas.openxmlformats.org/drawingml/2006/main">
               <a:ext uri="{FF2B5EF4-FFF2-40B4-BE49-F238E27FC236}">
-                <a16:creationId xmlns:a16="http://schemas.microsoft.com/office/drawing/2014/main" id="{DAFA81A0-7CB3-4389-99B3-A9F7CCC8CBE1}"/>
+                <a16:creationId xmlns:a16="http://schemas.microsoft.com/office/drawing/2014/main" id="{25D20D55-0783-4D6C-BB4F-6C8DDF178EAC}"/>
               </a:ext>
             </a:extLst>
           </p:cNvPr>
@@ -8817,7 +8817,7 @@
           <p:cNvPr id="21" name="">
             <a:extLst xmlns:a="http://schemas.openxmlformats.org/drawingml/2006/main">
               <a:ext uri="{FF2B5EF4-FFF2-40B4-BE49-F238E27FC236}">
-                <a16:creationId xmlns:a16="http://schemas.microsoft.com/office/drawing/2014/main" id="{29CC9155-0079-4DED-A62D-7664F5035673}"/>
+                <a16:creationId xmlns:a16="http://schemas.microsoft.com/office/drawing/2014/main" id="{3DCD7885-0978-4718-8CFA-41387FEFCA01}"/>
               </a:ext>
             </a:extLst>
           </p:cNvPr>
@@ -8869,7 +8869,7 @@
           <p:cNvPr id="22" name="">
             <a:extLst xmlns:a="http://schemas.openxmlformats.org/drawingml/2006/main">
               <a:ext uri="{FF2B5EF4-FFF2-40B4-BE49-F238E27FC236}">
-                <a16:creationId xmlns:a16="http://schemas.microsoft.com/office/drawing/2014/main" id="{D967EB74-3213-442C-AF30-714800E0B308}"/>
+                <a16:creationId xmlns:a16="http://schemas.microsoft.com/office/drawing/2014/main" id="{982CE488-9D4C-4182-A9E4-9C7DBC4E936D}"/>
               </a:ext>
             </a:extLst>
           </p:cNvPr>
@@ -8921,7 +8921,7 @@
           <p:cNvPr id="23" name="">
             <a:extLst xmlns:a="http://schemas.openxmlformats.org/drawingml/2006/main">
               <a:ext uri="{FF2B5EF4-FFF2-40B4-BE49-F238E27FC236}">
-                <a16:creationId xmlns:a16="http://schemas.microsoft.com/office/drawing/2014/main" id="{56D7537D-B62C-4EC1-AF17-A290AC69A623}"/>
+                <a16:creationId xmlns:a16="http://schemas.microsoft.com/office/drawing/2014/main" id="{217A8004-754C-4927-A459-B5A93C050A7D}"/>
               </a:ext>
             </a:extLst>
           </p:cNvPr>
@@ -8973,7 +8973,7 @@
           <p:cNvPr id="24" name="">
             <a:extLst xmlns:a="http://schemas.openxmlformats.org/drawingml/2006/main">
               <a:ext uri="{FF2B5EF4-FFF2-40B4-BE49-F238E27FC236}">
-                <a16:creationId xmlns:a16="http://schemas.microsoft.com/office/drawing/2014/main" id="{F6E25B98-9D51-4EC2-AB1A-E2D49F93A879}"/>
+                <a16:creationId xmlns:a16="http://schemas.microsoft.com/office/drawing/2014/main" id="{7DE96DF4-FB88-4619-8CA2-35016114C2E3}"/>
               </a:ext>
             </a:extLst>
           </p:cNvPr>
@@ -9004,7 +9004,7 @@
           <p:cNvPr id="25" name="">
             <a:extLst xmlns:a="http://schemas.openxmlformats.org/drawingml/2006/main">
               <a:ext uri="{FF2B5EF4-FFF2-40B4-BE49-F238E27FC236}">
-                <a16:creationId xmlns:a16="http://schemas.microsoft.com/office/drawing/2014/main" id="{EBDE6D59-C815-4434-A21A-00C7C39910C2}"/>
+                <a16:creationId xmlns:a16="http://schemas.microsoft.com/office/drawing/2014/main" id="{06DA0BBC-6DD6-405D-90EA-EE06A15D203E}"/>
               </a:ext>
             </a:extLst>
           </p:cNvPr>
@@ -9035,7 +9035,7 @@
           <p:cNvPr id="26" name="">
             <a:extLst xmlns:a="http://schemas.openxmlformats.org/drawingml/2006/main">
               <a:ext uri="{FF2B5EF4-FFF2-40B4-BE49-F238E27FC236}">
-                <a16:creationId xmlns:a16="http://schemas.microsoft.com/office/drawing/2014/main" id="{06D44AA8-67F7-4DB3-BFF4-779F09FE2868}"/>
+                <a16:creationId xmlns:a16="http://schemas.microsoft.com/office/drawing/2014/main" id="{6F0E0524-4EAC-4320-AEBF-007CE8316A89}"/>
               </a:ext>
             </a:extLst>
           </p:cNvPr>
@@ -9087,7 +9087,7 @@
           <p:cNvPr id="27" name="">
             <a:extLst xmlns:a="http://schemas.openxmlformats.org/drawingml/2006/main">
               <a:ext uri="{FF2B5EF4-FFF2-40B4-BE49-F238E27FC236}">
-                <a16:creationId xmlns:a16="http://schemas.microsoft.com/office/drawing/2014/main" id="{BAE4998E-E189-4248-9CC7-D6593194DEC9}"/>
+                <a16:creationId xmlns:a16="http://schemas.microsoft.com/office/drawing/2014/main" id="{12D87201-493F-441F-B3FA-987A0D9BFF89}"/>
               </a:ext>
             </a:extLst>
           </p:cNvPr>
@@ -9139,7 +9139,7 @@
           <p:cNvPr id="28" name="">
             <a:extLst xmlns:a="http://schemas.openxmlformats.org/drawingml/2006/main">
               <a:ext uri="{FF2B5EF4-FFF2-40B4-BE49-F238E27FC236}">
-                <a16:creationId xmlns:a16="http://schemas.microsoft.com/office/drawing/2014/main" id="{3BFA1507-2114-47AE-BF05-3D30857FF89C}"/>
+                <a16:creationId xmlns:a16="http://schemas.microsoft.com/office/drawing/2014/main" id="{AD87F590-CAC9-451E-B03A-0B87825FDE6F}"/>
               </a:ext>
             </a:extLst>
           </p:cNvPr>
@@ -9191,7 +9191,7 @@
           <p:cNvPr id="29" name="">
             <a:extLst xmlns:a="http://schemas.openxmlformats.org/drawingml/2006/main">
               <a:ext uri="{FF2B5EF4-FFF2-40B4-BE49-F238E27FC236}">
-                <a16:creationId xmlns:a16="http://schemas.microsoft.com/office/drawing/2014/main" id="{799AD780-3090-4435-BF13-95DF90A53968}"/>
+                <a16:creationId xmlns:a16="http://schemas.microsoft.com/office/drawing/2014/main" id="{322257ED-8B79-4C7A-B1F8-F332F484C753}"/>
               </a:ext>
             </a:extLst>
           </p:cNvPr>
@@ -9243,7 +9243,7 @@
           <p:cNvPr id="30" name="">
             <a:extLst xmlns:a="http://schemas.openxmlformats.org/drawingml/2006/main">
               <a:ext uri="{FF2B5EF4-FFF2-40B4-BE49-F238E27FC236}">
-                <a16:creationId xmlns:a16="http://schemas.microsoft.com/office/drawing/2014/main" id="{27E8C026-DCF6-4098-98E4-A91DA27D7F8A}"/>
+                <a16:creationId xmlns:a16="http://schemas.microsoft.com/office/drawing/2014/main" id="{E99F87EF-5AE0-408F-BE4F-50AF8C203B2E}"/>
               </a:ext>
             </a:extLst>
           </p:cNvPr>
@@ -9295,7 +9295,7 @@
           <p:cNvPr id="31" name="">
             <a:extLst xmlns:a="http://schemas.openxmlformats.org/drawingml/2006/main">
               <a:ext uri="{FF2B5EF4-FFF2-40B4-BE49-F238E27FC236}">
-                <a16:creationId xmlns:a16="http://schemas.microsoft.com/office/drawing/2014/main" id="{5126A057-B6D4-4E95-AAB3-223BC2277E68}"/>
+                <a16:creationId xmlns:a16="http://schemas.microsoft.com/office/drawing/2014/main" id="{28E9B43B-DFC1-49E6-9693-D20DB7FAB652}"/>
               </a:ext>
             </a:extLst>
           </p:cNvPr>
@@ -9326,7 +9326,7 @@
           <p:cNvPr id="32" name="">
             <a:extLst xmlns:a="http://schemas.openxmlformats.org/drawingml/2006/main">
               <a:ext uri="{FF2B5EF4-FFF2-40B4-BE49-F238E27FC236}">
-                <a16:creationId xmlns:a16="http://schemas.microsoft.com/office/drawing/2014/main" id="{2B36A622-1BF9-4C47-9EC1-70DA5851F477}"/>
+                <a16:creationId xmlns:a16="http://schemas.microsoft.com/office/drawing/2014/main" id="{904A7D4C-6DC1-4E6C-B967-29CAD7B25460}"/>
               </a:ext>
             </a:extLst>
           </p:cNvPr>
@@ -9378,7 +9378,7 @@
           <p:cNvPr id="33" name="">
             <a:extLst xmlns:a="http://schemas.openxmlformats.org/drawingml/2006/main">
               <a:ext uri="{FF2B5EF4-FFF2-40B4-BE49-F238E27FC236}">
-                <a16:creationId xmlns:a16="http://schemas.microsoft.com/office/drawing/2014/main" id="{555731BC-4198-47D6-8383-34ED08D86748}"/>
+                <a16:creationId xmlns:a16="http://schemas.microsoft.com/office/drawing/2014/main" id="{1F4D3CBA-2103-4D2E-8624-335860ED492D}"/>
               </a:ext>
             </a:extLst>
           </p:cNvPr>
@@ -9430,7 +9430,7 @@
           <p:cNvPr id="34" name="">
             <a:extLst xmlns:a="http://schemas.openxmlformats.org/drawingml/2006/main">
               <a:ext uri="{FF2B5EF4-FFF2-40B4-BE49-F238E27FC236}">
-                <a16:creationId xmlns:a16="http://schemas.microsoft.com/office/drawing/2014/main" id="{235711A0-F2FB-4C63-9BC2-66B9631BCB94}"/>
+                <a16:creationId xmlns:a16="http://schemas.microsoft.com/office/drawing/2014/main" id="{C09DC359-2780-410D-B62C-4A9E1CCD9BEE}"/>
               </a:ext>
             </a:extLst>
           </p:cNvPr>
@@ -9482,7 +9482,7 @@
           <p:cNvPr id="35" name="">
             <a:extLst xmlns:a="http://schemas.openxmlformats.org/drawingml/2006/main">
               <a:ext uri="{FF2B5EF4-FFF2-40B4-BE49-F238E27FC236}">
-                <a16:creationId xmlns:a16="http://schemas.microsoft.com/office/drawing/2014/main" id="{417C5C0E-D65E-427F-B702-4DA555BDE800}"/>
+                <a16:creationId xmlns:a16="http://schemas.microsoft.com/office/drawing/2014/main" id="{B7D2CAC3-4A4C-4641-92AF-EBEAC924A867}"/>
               </a:ext>
             </a:extLst>
           </p:cNvPr>
@@ -9534,7 +9534,7 @@
           <p:cNvPr id="36" name="">
             <a:extLst xmlns:a="http://schemas.openxmlformats.org/drawingml/2006/main">
               <a:ext uri="{FF2B5EF4-FFF2-40B4-BE49-F238E27FC236}">
-                <a16:creationId xmlns:a16="http://schemas.microsoft.com/office/drawing/2014/main" id="{C16F281F-EDAB-4307-9D2F-C7E010F75F67}"/>
+                <a16:creationId xmlns:a16="http://schemas.microsoft.com/office/drawing/2014/main" id="{E661FA51-9F72-4411-976E-925306C87443}"/>
               </a:ext>
             </a:extLst>
           </p:cNvPr>
@@ -9586,7 +9586,7 @@
           <p:cNvPr id="37" name="">
             <a:extLst xmlns:a="http://schemas.openxmlformats.org/drawingml/2006/main">
               <a:ext uri="{FF2B5EF4-FFF2-40B4-BE49-F238E27FC236}">
-                <a16:creationId xmlns:a16="http://schemas.microsoft.com/office/drawing/2014/main" id="{869A06D9-94E6-40E8-8C75-2481BB564983}"/>
+                <a16:creationId xmlns:a16="http://schemas.microsoft.com/office/drawing/2014/main" id="{61805E22-15A0-40C5-878D-3F059B460E18}"/>
               </a:ext>
             </a:extLst>
           </p:cNvPr>
@@ -9617,7 +9617,7 @@
           <p:cNvPr id="38" name="">
             <a:extLst xmlns:a="http://schemas.openxmlformats.org/drawingml/2006/main">
               <a:ext uri="{FF2B5EF4-FFF2-40B4-BE49-F238E27FC236}">
-                <a16:creationId xmlns:a16="http://schemas.microsoft.com/office/drawing/2014/main" id="{AF4F40B1-B7D7-4027-B30A-D9B0E47C1C8E}"/>
+                <a16:creationId xmlns:a16="http://schemas.microsoft.com/office/drawing/2014/main" id="{0625332C-02C9-49E8-8A4B-3CCE62799B95}"/>
               </a:ext>
             </a:extLst>
           </p:cNvPr>
@@ -9648,7 +9648,7 @@
           <p:cNvPr id="39" name="">
             <a:extLst xmlns:a="http://schemas.openxmlformats.org/drawingml/2006/main">
               <a:ext uri="{FF2B5EF4-FFF2-40B4-BE49-F238E27FC236}">
-                <a16:creationId xmlns:a16="http://schemas.microsoft.com/office/drawing/2014/main" id="{6EC0C968-3F5A-48DB-B654-90D23FE2E679}"/>
+                <a16:creationId xmlns:a16="http://schemas.microsoft.com/office/drawing/2014/main" id="{95E13C29-DD65-4B42-8CB1-3E10189F1804}"/>
               </a:ext>
             </a:extLst>
           </p:cNvPr>
@@ -9700,7 +9700,7 @@
           <p:cNvPr id="40" name="">
             <a:extLst xmlns:a="http://schemas.openxmlformats.org/drawingml/2006/main">
               <a:ext uri="{FF2B5EF4-FFF2-40B4-BE49-F238E27FC236}">
-                <a16:creationId xmlns:a16="http://schemas.microsoft.com/office/drawing/2014/main" id="{0EDD7E72-8DC3-4191-9133-BE5BBC85DF19}"/>
+                <a16:creationId xmlns:a16="http://schemas.microsoft.com/office/drawing/2014/main" id="{D9690D96-0E79-4D23-A535-D0EC536D621B}"/>
               </a:ext>
             </a:extLst>
           </p:cNvPr>
@@ -9752,7 +9752,7 @@
           <p:cNvPr id="41" name="">
             <a:extLst xmlns:a="http://schemas.openxmlformats.org/drawingml/2006/main">
               <a:ext uri="{FF2B5EF4-FFF2-40B4-BE49-F238E27FC236}">
-                <a16:creationId xmlns:a16="http://schemas.microsoft.com/office/drawing/2014/main" id="{A4C8A305-1BBE-47BA-8387-D3D57E05527A}"/>
+                <a16:creationId xmlns:a16="http://schemas.microsoft.com/office/drawing/2014/main" id="{93D5CBD5-3C34-4174-A535-0C8CC0CBE387}"/>
               </a:ext>
             </a:extLst>
           </p:cNvPr>
@@ -9804,7 +9804,7 @@
           <p:cNvPr id="42" name="">
             <a:extLst xmlns:a="http://schemas.openxmlformats.org/drawingml/2006/main">
               <a:ext uri="{FF2B5EF4-FFF2-40B4-BE49-F238E27FC236}">
-                <a16:creationId xmlns:a16="http://schemas.microsoft.com/office/drawing/2014/main" id="{A3B64509-510B-4DD2-A2FB-86E397FC7666}"/>
+                <a16:creationId xmlns:a16="http://schemas.microsoft.com/office/drawing/2014/main" id="{8968AC74-6B41-4716-BC78-8A658A5BDE46}"/>
               </a:ext>
             </a:extLst>
           </p:cNvPr>
@@ -9856,7 +9856,7 @@
           <p:cNvPr id="43" name="">
             <a:extLst xmlns:a="http://schemas.openxmlformats.org/drawingml/2006/main">
               <a:ext uri="{FF2B5EF4-FFF2-40B4-BE49-F238E27FC236}">
-                <a16:creationId xmlns:a16="http://schemas.microsoft.com/office/drawing/2014/main" id="{6940A6F8-FD4E-458C-A4FB-42ABE2071D7E}"/>
+                <a16:creationId xmlns:a16="http://schemas.microsoft.com/office/drawing/2014/main" id="{DC2F3657-80CA-4337-A00C-241A3841602E}"/>
               </a:ext>
             </a:extLst>
           </p:cNvPr>
@@ -9908,7 +9908,7 @@
           <p:cNvPr id="44" name="">
             <a:extLst xmlns:a="http://schemas.openxmlformats.org/drawingml/2006/main">
               <a:ext uri="{FF2B5EF4-FFF2-40B4-BE49-F238E27FC236}">
-                <a16:creationId xmlns:a16="http://schemas.microsoft.com/office/drawing/2014/main" id="{3CAB69C3-749A-453B-9BB8-8157EC2B0325}"/>
+                <a16:creationId xmlns:a16="http://schemas.microsoft.com/office/drawing/2014/main" id="{F7881B93-DAEC-45A0-9F7E-23D306BE1B2D}"/>
               </a:ext>
             </a:extLst>
           </p:cNvPr>
@@ -9939,7 +9939,7 @@
           <p:cNvPr id="45" name="">
             <a:extLst xmlns:a="http://schemas.openxmlformats.org/drawingml/2006/main">
               <a:ext uri="{FF2B5EF4-FFF2-40B4-BE49-F238E27FC236}">
-                <a16:creationId xmlns:a16="http://schemas.microsoft.com/office/drawing/2014/main" id="{CF1C5AB1-0989-411A-AD69-6285E72F7D3C}"/>
+                <a16:creationId xmlns:a16="http://schemas.microsoft.com/office/drawing/2014/main" id="{401E0E1E-BD0D-4EBC-9667-5FECF8245D8E}"/>
               </a:ext>
             </a:extLst>
           </p:cNvPr>
@@ -9991,7 +9991,7 @@
           <p:cNvPr id="46" name="">
             <a:extLst xmlns:a="http://schemas.openxmlformats.org/drawingml/2006/main">
               <a:ext uri="{FF2B5EF4-FFF2-40B4-BE49-F238E27FC236}">
-                <a16:creationId xmlns:a16="http://schemas.microsoft.com/office/drawing/2014/main" id="{51ABE5B7-AE03-4F0C-8DD0-799451BE04BC}"/>
+                <a16:creationId xmlns:a16="http://schemas.microsoft.com/office/drawing/2014/main" id="{D285D027-9612-47CB-9761-4A50B4FBB514}"/>
               </a:ext>
             </a:extLst>
           </p:cNvPr>
@@ -10043,7 +10043,7 @@
           <p:cNvPr id="47" name="">
             <a:extLst xmlns:a="http://schemas.openxmlformats.org/drawingml/2006/main">
               <a:ext uri="{FF2B5EF4-FFF2-40B4-BE49-F238E27FC236}">
-                <a16:creationId xmlns:a16="http://schemas.microsoft.com/office/drawing/2014/main" id="{5FAB3876-9086-4F28-A6E5-D6831C8664A1}"/>
+                <a16:creationId xmlns:a16="http://schemas.microsoft.com/office/drawing/2014/main" id="{08F3EA8C-84D0-4B73-82CA-CA5868DA284F}"/>
               </a:ext>
             </a:extLst>
           </p:cNvPr>
@@ -10095,7 +10095,7 @@
           <p:cNvPr id="48" name="">
             <a:extLst xmlns:a="http://schemas.openxmlformats.org/drawingml/2006/main">
               <a:ext uri="{FF2B5EF4-FFF2-40B4-BE49-F238E27FC236}">
-                <a16:creationId xmlns:a16="http://schemas.microsoft.com/office/drawing/2014/main" id="{0FB28521-71BA-4CE0-964E-A8A8802887DD}"/>
+                <a16:creationId xmlns:a16="http://schemas.microsoft.com/office/drawing/2014/main" id="{CF16E971-196F-40A2-BAB6-9AB50EC04AD3}"/>
               </a:ext>
             </a:extLst>
           </p:cNvPr>
@@ -10147,7 +10147,7 @@
           <p:cNvPr id="49" name="">
             <a:extLst xmlns:a="http://schemas.openxmlformats.org/drawingml/2006/main">
               <a:ext uri="{FF2B5EF4-FFF2-40B4-BE49-F238E27FC236}">
-                <a16:creationId xmlns:a16="http://schemas.microsoft.com/office/drawing/2014/main" id="{5051520F-8EB3-4309-820A-83853DEC3D5A}"/>
+                <a16:creationId xmlns:a16="http://schemas.microsoft.com/office/drawing/2014/main" id="{C16B7633-61CF-4B5A-94A3-520AFBE9E168}"/>
               </a:ext>
             </a:extLst>
           </p:cNvPr>
@@ -10199,7 +10199,7 @@
           <p:cNvPr id="50" name="">
             <a:extLst xmlns:a="http://schemas.openxmlformats.org/drawingml/2006/main">
               <a:ext uri="{FF2B5EF4-FFF2-40B4-BE49-F238E27FC236}">
-                <a16:creationId xmlns:a16="http://schemas.microsoft.com/office/drawing/2014/main" id="{3A970024-66F9-4C7A-9AD4-9FA12D664C07}"/>
+                <a16:creationId xmlns:a16="http://schemas.microsoft.com/office/drawing/2014/main" id="{C4D4AD67-BD0D-4385-9ADE-569FB044B597}"/>
               </a:ext>
             </a:extLst>
           </p:cNvPr>
@@ -10251,7 +10251,7 @@
           <p:cNvPr id="51" name="">
             <a:extLst xmlns:a="http://schemas.openxmlformats.org/drawingml/2006/main">
               <a:ext uri="{FF2B5EF4-FFF2-40B4-BE49-F238E27FC236}">
-                <a16:creationId xmlns:a16="http://schemas.microsoft.com/office/drawing/2014/main" id="{7B428B29-63DF-4681-9086-8F85BFEC58D3}"/>
+                <a16:creationId xmlns:a16="http://schemas.microsoft.com/office/drawing/2014/main" id="{48647F5F-F52D-406A-9487-C67527280385}"/>
               </a:ext>
             </a:extLst>
           </p:cNvPr>
@@ -10282,7 +10282,7 @@
           <p:cNvPr id="52" name="">
             <a:extLst xmlns:a="http://schemas.openxmlformats.org/drawingml/2006/main">
               <a:ext uri="{FF2B5EF4-FFF2-40B4-BE49-F238E27FC236}">
-                <a16:creationId xmlns:a16="http://schemas.microsoft.com/office/drawing/2014/main" id="{1B3C041F-0ED3-456E-AC1F-0051F8126AB2}"/>
+                <a16:creationId xmlns:a16="http://schemas.microsoft.com/office/drawing/2014/main" id="{59A34C33-D8D1-4DDE-9A02-C20899D750C5}"/>
               </a:ext>
             </a:extLst>
           </p:cNvPr>
@@ -10313,7 +10313,7 @@
           <p:cNvPr id="53" name="">
             <a:extLst xmlns:a="http://schemas.openxmlformats.org/drawingml/2006/main">
               <a:ext uri="{FF2B5EF4-FFF2-40B4-BE49-F238E27FC236}">
-                <a16:creationId xmlns:a16="http://schemas.microsoft.com/office/drawing/2014/main" id="{218BB252-3830-4F3C-BAFF-5BB8532AACE6}"/>
+                <a16:creationId xmlns:a16="http://schemas.microsoft.com/office/drawing/2014/main" id="{C3EA3BB9-DFFB-4D7D-8DC0-EC432E04BA2C}"/>
               </a:ext>
             </a:extLst>
           </p:cNvPr>
@@ -10344,7 +10344,7 @@
           <p:cNvPr id="54" name="">
             <a:extLst xmlns:a="http://schemas.openxmlformats.org/drawingml/2006/main">
               <a:ext uri="{FF2B5EF4-FFF2-40B4-BE49-F238E27FC236}">
-                <a16:creationId xmlns:a16="http://schemas.microsoft.com/office/drawing/2014/main" id="{8C9799CF-DB59-431C-8EB3-8932F7711897}"/>
+                <a16:creationId xmlns:a16="http://schemas.microsoft.com/office/drawing/2014/main" id="{5ACC0E51-D733-402B-BF6B-05C44491F924}"/>
               </a:ext>
             </a:extLst>
           </p:cNvPr>
@@ -10396,7 +10396,7 @@
           <p:cNvPr id="55" name="">
             <a:extLst xmlns:a="http://schemas.openxmlformats.org/drawingml/2006/main">
               <a:ext uri="{FF2B5EF4-FFF2-40B4-BE49-F238E27FC236}">
-                <a16:creationId xmlns:a16="http://schemas.microsoft.com/office/drawing/2014/main" id="{7487217F-6561-45B2-8EBF-265B6DB8F4F3}"/>
+                <a16:creationId xmlns:a16="http://schemas.microsoft.com/office/drawing/2014/main" id="{AB25F5BF-296F-44C9-9D64-5C306168BF80}"/>
               </a:ext>
             </a:extLst>
           </p:cNvPr>
@@ -10448,7 +10448,7 @@
           <p:cNvPr id="56" name="">
             <a:extLst xmlns:a="http://schemas.openxmlformats.org/drawingml/2006/main">
               <a:ext uri="{FF2B5EF4-FFF2-40B4-BE49-F238E27FC236}">
-                <a16:creationId xmlns:a16="http://schemas.microsoft.com/office/drawing/2014/main" id="{5C42AE29-CBD2-472B-A2E8-8B3179C9F972}"/>
+                <a16:creationId xmlns:a16="http://schemas.microsoft.com/office/drawing/2014/main" id="{5570900F-EA06-4C54-B471-866AE3416E44}"/>
               </a:ext>
             </a:extLst>
           </p:cNvPr>
@@ -10500,7 +10500,7 @@
           <p:cNvPr id="57" name="">
             <a:extLst xmlns:a="http://schemas.openxmlformats.org/drawingml/2006/main">
               <a:ext uri="{FF2B5EF4-FFF2-40B4-BE49-F238E27FC236}">
-                <a16:creationId xmlns:a16="http://schemas.microsoft.com/office/drawing/2014/main" id="{22A921D4-8F0D-47FC-8B67-9902AB105D15}"/>
+                <a16:creationId xmlns:a16="http://schemas.microsoft.com/office/drawing/2014/main" id="{F26EE4F1-2436-4E2A-B2BC-163C112B412F}"/>
               </a:ext>
             </a:extLst>
           </p:cNvPr>
@@ -10552,7 +10552,7 @@
           <p:cNvPr id="58" name="">
             <a:extLst xmlns:a="http://schemas.openxmlformats.org/drawingml/2006/main">
               <a:ext uri="{FF2B5EF4-FFF2-40B4-BE49-F238E27FC236}">
-                <a16:creationId xmlns:a16="http://schemas.microsoft.com/office/drawing/2014/main" id="{5E45291C-20B9-4AEC-B2B6-C26D5FC7A0C2}"/>
+                <a16:creationId xmlns:a16="http://schemas.microsoft.com/office/drawing/2014/main" id="{A2FA1B49-3E6B-4636-938D-369A6C3D6687}"/>
               </a:ext>
             </a:extLst>
           </p:cNvPr>
@@ -10604,7 +10604,7 @@
           <p:cNvPr id="59" name="">
             <a:extLst xmlns:a="http://schemas.openxmlformats.org/drawingml/2006/main">
               <a:ext uri="{FF2B5EF4-FFF2-40B4-BE49-F238E27FC236}">
-                <a16:creationId xmlns:a16="http://schemas.microsoft.com/office/drawing/2014/main" id="{AF1400CE-7920-453F-AFA3-F3A67F15B7D5}"/>
+                <a16:creationId xmlns:a16="http://schemas.microsoft.com/office/drawing/2014/main" id="{65488EB0-9A24-4F6D-8D51-DA1511E982A4}"/>
               </a:ext>
             </a:extLst>
           </p:cNvPr>
@@ -10635,7 +10635,7 @@
           <p:cNvPr id="60" name="">
             <a:extLst xmlns:a="http://schemas.openxmlformats.org/drawingml/2006/main">
               <a:ext uri="{FF2B5EF4-FFF2-40B4-BE49-F238E27FC236}">
-                <a16:creationId xmlns:a16="http://schemas.microsoft.com/office/drawing/2014/main" id="{C0F2204F-B992-4BCB-8EFD-63FC4C307921}"/>
+                <a16:creationId xmlns:a16="http://schemas.microsoft.com/office/drawing/2014/main" id="{8640E3AD-1E40-4B42-9780-3FE882CFDE7E}"/>
               </a:ext>
             </a:extLst>
           </p:cNvPr>
@@ -10687,7 +10687,7 @@
           <p:cNvPr id="61" name="">
             <a:extLst xmlns:a="http://schemas.openxmlformats.org/drawingml/2006/main">
               <a:ext uri="{FF2B5EF4-FFF2-40B4-BE49-F238E27FC236}">
-                <a16:creationId xmlns:a16="http://schemas.microsoft.com/office/drawing/2014/main" id="{55F8B5F1-9F1F-4008-9A7F-9D95656D54B3}"/>
+                <a16:creationId xmlns:a16="http://schemas.microsoft.com/office/drawing/2014/main" id="{5C67092C-27DA-4C7C-B15C-72B319ABD4BF}"/>
               </a:ext>
             </a:extLst>
           </p:cNvPr>
@@ -10739,7 +10739,7 @@
           <p:cNvPr id="62" name="">
             <a:extLst xmlns:a="http://schemas.openxmlformats.org/drawingml/2006/main">
               <a:ext uri="{FF2B5EF4-FFF2-40B4-BE49-F238E27FC236}">
-                <a16:creationId xmlns:a16="http://schemas.microsoft.com/office/drawing/2014/main" id="{58CF0C32-F419-43B1-BA09-36CFB5ED65ED}"/>
+                <a16:creationId xmlns:a16="http://schemas.microsoft.com/office/drawing/2014/main" id="{7C270BB0-20CD-4DD8-B1AF-38F886FE7D3E}"/>
               </a:ext>
             </a:extLst>
           </p:cNvPr>
@@ -10791,7 +10791,7 @@
           <p:cNvPr id="63" name="">
             <a:extLst xmlns:a="http://schemas.openxmlformats.org/drawingml/2006/main">
               <a:ext uri="{FF2B5EF4-FFF2-40B4-BE49-F238E27FC236}">
-                <a16:creationId xmlns:a16="http://schemas.microsoft.com/office/drawing/2014/main" id="{B9D21A1D-3970-4F03-8532-A665C4345A07}"/>
+                <a16:creationId xmlns:a16="http://schemas.microsoft.com/office/drawing/2014/main" id="{E1572209-53EF-4A3E-87DF-21902D67C205}"/>
               </a:ext>
             </a:extLst>
           </p:cNvPr>
@@ -10843,7 +10843,7 @@
           <p:cNvPr id="64" name="">
             <a:extLst xmlns:a="http://schemas.openxmlformats.org/drawingml/2006/main">
               <a:ext uri="{FF2B5EF4-FFF2-40B4-BE49-F238E27FC236}">
-                <a16:creationId xmlns:a16="http://schemas.microsoft.com/office/drawing/2014/main" id="{313D5DC5-11A1-416D-BF39-0669A1CB4F4D}"/>
+                <a16:creationId xmlns:a16="http://schemas.microsoft.com/office/drawing/2014/main" id="{695EBADB-4D02-4FD1-915D-B3E244EB512A}"/>
               </a:ext>
             </a:extLst>
           </p:cNvPr>
@@ -10895,7 +10895,7 @@
           <p:cNvPr id="65" name="">
             <a:extLst xmlns:a="http://schemas.openxmlformats.org/drawingml/2006/main">
               <a:ext uri="{FF2B5EF4-FFF2-40B4-BE49-F238E27FC236}">
-                <a16:creationId xmlns:a16="http://schemas.microsoft.com/office/drawing/2014/main" id="{FC7B447C-21FF-438D-BB7A-81DC873E6D3A}"/>
+                <a16:creationId xmlns:a16="http://schemas.microsoft.com/office/drawing/2014/main" id="{11473958-C19E-4AC8-BB6C-829951376261}"/>
               </a:ext>
             </a:extLst>
           </p:cNvPr>
@@ -10926,7 +10926,7 @@
           <p:cNvPr id="66" name="">
             <a:extLst xmlns:a="http://schemas.openxmlformats.org/drawingml/2006/main">
               <a:ext uri="{FF2B5EF4-FFF2-40B4-BE49-F238E27FC236}">
-                <a16:creationId xmlns:a16="http://schemas.microsoft.com/office/drawing/2014/main" id="{A75A7243-7282-43E8-8A8D-4ADB4B68553F}"/>
+                <a16:creationId xmlns:a16="http://schemas.microsoft.com/office/drawing/2014/main" id="{BF24C79C-9355-4333-B0A2-56CA80237982}"/>
               </a:ext>
             </a:extLst>
           </p:cNvPr>
@@ -10957,7 +10957,7 @@
           <p:cNvPr id="67" name="">
             <a:extLst xmlns:a="http://schemas.openxmlformats.org/drawingml/2006/main">
               <a:ext uri="{FF2B5EF4-FFF2-40B4-BE49-F238E27FC236}">
-                <a16:creationId xmlns:a16="http://schemas.microsoft.com/office/drawing/2014/main" id="{1C2CD6BF-77E3-4F52-BEEF-90B5294CC901}"/>
+                <a16:creationId xmlns:a16="http://schemas.microsoft.com/office/drawing/2014/main" id="{3EBE8E13-DFA9-49E1-A218-AA23DA184ACA}"/>
               </a:ext>
             </a:extLst>
           </p:cNvPr>
@@ -11009,7 +11009,7 @@
           <p:cNvPr id="68" name="">
             <a:extLst xmlns:a="http://schemas.openxmlformats.org/drawingml/2006/main">
               <a:ext uri="{FF2B5EF4-FFF2-40B4-BE49-F238E27FC236}">
-                <a16:creationId xmlns:a16="http://schemas.microsoft.com/office/drawing/2014/main" id="{8A8974A0-0844-4D33-B324-65FEE6418F12}"/>
+                <a16:creationId xmlns:a16="http://schemas.microsoft.com/office/drawing/2014/main" id="{B953FC2A-981C-4161-B5EF-8732F25D6359}"/>
               </a:ext>
             </a:extLst>
           </p:cNvPr>
@@ -11061,7 +11061,7 @@
           <p:cNvPr id="69" name="">
             <a:extLst xmlns:a="http://schemas.openxmlformats.org/drawingml/2006/main">
               <a:ext uri="{FF2B5EF4-FFF2-40B4-BE49-F238E27FC236}">
-                <a16:creationId xmlns:a16="http://schemas.microsoft.com/office/drawing/2014/main" id="{145C42DC-FF49-48E6-9D49-E4C70B62A52F}"/>
+                <a16:creationId xmlns:a16="http://schemas.microsoft.com/office/drawing/2014/main" id="{A616B525-BE05-436B-B8D0-525918E50F53}"/>
               </a:ext>
             </a:extLst>
           </p:cNvPr>
@@ -11113,7 +11113,7 @@
           <p:cNvPr id="70" name="">
             <a:extLst xmlns:a="http://schemas.openxmlformats.org/drawingml/2006/main">
               <a:ext uri="{FF2B5EF4-FFF2-40B4-BE49-F238E27FC236}">
-                <a16:creationId xmlns:a16="http://schemas.microsoft.com/office/drawing/2014/main" id="{A13CF44C-23C8-41C2-9F82-0DA2C31EA43B}"/>
+                <a16:creationId xmlns:a16="http://schemas.microsoft.com/office/drawing/2014/main" id="{A9166D23-CEA4-412E-8440-4AE449B1FFA0}"/>
               </a:ext>
             </a:extLst>
           </p:cNvPr>
@@ -11165,7 +11165,7 @@
           <p:cNvPr id="71" name="">
             <a:extLst xmlns:a="http://schemas.openxmlformats.org/drawingml/2006/main">
               <a:ext uri="{FF2B5EF4-FFF2-40B4-BE49-F238E27FC236}">
-                <a16:creationId xmlns:a16="http://schemas.microsoft.com/office/drawing/2014/main" id="{7FEAD63E-CBC8-4380-A6C2-C4044C11B2D9}"/>
+                <a16:creationId xmlns:a16="http://schemas.microsoft.com/office/drawing/2014/main" id="{914232E7-B15C-4508-AE37-720E528345BC}"/>
               </a:ext>
             </a:extLst>
           </p:cNvPr>
@@ -11217,7 +11217,7 @@
           <p:cNvPr id="72" name="">
             <a:extLst xmlns:a="http://schemas.openxmlformats.org/drawingml/2006/main">
               <a:ext uri="{FF2B5EF4-FFF2-40B4-BE49-F238E27FC236}">
-                <a16:creationId xmlns:a16="http://schemas.microsoft.com/office/drawing/2014/main" id="{EF74DDDA-26EF-40A4-BA07-3CB0886D621C}"/>
+                <a16:creationId xmlns:a16="http://schemas.microsoft.com/office/drawing/2014/main" id="{1D7B4359-6209-446F-B424-2A2C86B3FBC9}"/>
               </a:ext>
             </a:extLst>
           </p:cNvPr>
@@ -11248,7 +11248,7 @@
           <p:cNvPr id="73" name="">
             <a:extLst xmlns:a="http://schemas.openxmlformats.org/drawingml/2006/main">
               <a:ext uri="{FF2B5EF4-FFF2-40B4-BE49-F238E27FC236}">
-                <a16:creationId xmlns:a16="http://schemas.microsoft.com/office/drawing/2014/main" id="{5588CB39-1B50-4051-A296-99A2A0370143}"/>
+                <a16:creationId xmlns:a16="http://schemas.microsoft.com/office/drawing/2014/main" id="{5804A55A-E35B-433F-B650-E702C2B59E9F}"/>
               </a:ext>
             </a:extLst>
           </p:cNvPr>
@@ -11300,7 +11300,7 @@
           <p:cNvPr id="74" name="">
             <a:extLst xmlns:a="http://schemas.openxmlformats.org/drawingml/2006/main">
               <a:ext uri="{FF2B5EF4-FFF2-40B4-BE49-F238E27FC236}">
-                <a16:creationId xmlns:a16="http://schemas.microsoft.com/office/drawing/2014/main" id="{F4D61AF2-D2D8-4537-8AEA-61F0D01B7EC1}"/>
+                <a16:creationId xmlns:a16="http://schemas.microsoft.com/office/drawing/2014/main" id="{647DADF0-41A2-4EC3-889A-0720FD54D214}"/>
               </a:ext>
             </a:extLst>
           </p:cNvPr>
@@ -11352,7 +11352,7 @@
           <p:cNvPr id="75" name="">
             <a:extLst xmlns:a="http://schemas.openxmlformats.org/drawingml/2006/main">
               <a:ext uri="{FF2B5EF4-FFF2-40B4-BE49-F238E27FC236}">
-                <a16:creationId xmlns:a16="http://schemas.microsoft.com/office/drawing/2014/main" id="{2E440ADB-9D42-4F42-8883-260ABBF2515A}"/>
+                <a16:creationId xmlns:a16="http://schemas.microsoft.com/office/drawing/2014/main" id="{9775E1C1-8945-4EE6-8544-636F83BC2905}"/>
               </a:ext>
             </a:extLst>
           </p:cNvPr>
@@ -11404,7 +11404,7 @@
           <p:cNvPr id="76" name="">
             <a:extLst xmlns:a="http://schemas.openxmlformats.org/drawingml/2006/main">
               <a:ext uri="{FF2B5EF4-FFF2-40B4-BE49-F238E27FC236}">
-                <a16:creationId xmlns:a16="http://schemas.microsoft.com/office/drawing/2014/main" id="{1FF9B66F-7D17-4438-A3F6-39244C67AF9E}"/>
+                <a16:creationId xmlns:a16="http://schemas.microsoft.com/office/drawing/2014/main" id="{3CA82BD1-AE59-404D-857E-5989C3A791B4}"/>
               </a:ext>
             </a:extLst>
           </p:cNvPr>
@@ -11456,7 +11456,7 @@
           <p:cNvPr id="77" name="">
             <a:extLst xmlns:a="http://schemas.openxmlformats.org/drawingml/2006/main">
               <a:ext uri="{FF2B5EF4-FFF2-40B4-BE49-F238E27FC236}">
-                <a16:creationId xmlns:a16="http://schemas.microsoft.com/office/drawing/2014/main" id="{BF4E1CB7-CF2E-41FD-B42D-26CDF8FEE7F2}"/>
+                <a16:creationId xmlns:a16="http://schemas.microsoft.com/office/drawing/2014/main" id="{7E125CA4-0DF3-4FB7-8929-97C995E7B408}"/>
               </a:ext>
             </a:extLst>
           </p:cNvPr>
@@ -11508,7 +11508,7 @@
           <p:cNvPr id="78" name="">
             <a:extLst xmlns:a="http://schemas.openxmlformats.org/drawingml/2006/main">
               <a:ext uri="{FF2B5EF4-FFF2-40B4-BE49-F238E27FC236}">
-                <a16:creationId xmlns:a16="http://schemas.microsoft.com/office/drawing/2014/main" id="{CC4026FB-6AC6-42CD-B370-1CD53031C1CB}"/>
+                <a16:creationId xmlns:a16="http://schemas.microsoft.com/office/drawing/2014/main" id="{9A90D950-89B8-443D-9235-B2AC4F0981FF}"/>
               </a:ext>
             </a:extLst>
           </p:cNvPr>
@@ -11539,7 +11539,7 @@
           <p:cNvPr id="79" name="">
             <a:extLst xmlns:a="http://schemas.openxmlformats.org/drawingml/2006/main">
               <a:ext uri="{FF2B5EF4-FFF2-40B4-BE49-F238E27FC236}">
-                <a16:creationId xmlns:a16="http://schemas.microsoft.com/office/drawing/2014/main" id="{2183D33C-3BE4-453C-9254-5B2746DF378B}"/>
+                <a16:creationId xmlns:a16="http://schemas.microsoft.com/office/drawing/2014/main" id="{6F89131C-054C-4BAF-B138-9E014CCB9CA5}"/>
               </a:ext>
             </a:extLst>
           </p:cNvPr>
@@ -11570,7 +11570,7 @@
           <p:cNvPr id="80" name="">
             <a:extLst xmlns:a="http://schemas.openxmlformats.org/drawingml/2006/main">
               <a:ext uri="{FF2B5EF4-FFF2-40B4-BE49-F238E27FC236}">
-                <a16:creationId xmlns:a16="http://schemas.microsoft.com/office/drawing/2014/main" id="{8B9BC5C2-82E5-448C-B248-CAD07C871360}"/>
+                <a16:creationId xmlns:a16="http://schemas.microsoft.com/office/drawing/2014/main" id="{0E31AA59-A6D3-4DA8-8E08-2074B107E254}"/>
               </a:ext>
             </a:extLst>
           </p:cNvPr>
@@ -11622,7 +11622,7 @@
           <p:cNvPr id="81" name="">
             <a:extLst xmlns:a="http://schemas.openxmlformats.org/drawingml/2006/main">
               <a:ext uri="{FF2B5EF4-FFF2-40B4-BE49-F238E27FC236}">
-                <a16:creationId xmlns:a16="http://schemas.microsoft.com/office/drawing/2014/main" id="{C761D268-0AF2-4AC2-8F0B-5F3835D815BE}"/>
+                <a16:creationId xmlns:a16="http://schemas.microsoft.com/office/drawing/2014/main" id="{B1C11872-5567-4C24-9D97-3D6F62AA6CD4}"/>
               </a:ext>
             </a:extLst>
           </p:cNvPr>
@@ -11674,7 +11674,7 @@
           <p:cNvPr id="82" name="">
             <a:extLst xmlns:a="http://schemas.openxmlformats.org/drawingml/2006/main">
               <a:ext uri="{FF2B5EF4-FFF2-40B4-BE49-F238E27FC236}">
-                <a16:creationId xmlns:a16="http://schemas.microsoft.com/office/drawing/2014/main" id="{92C71FDE-2114-4A95-A5EA-1AE77ED0DA16}"/>
+                <a16:creationId xmlns:a16="http://schemas.microsoft.com/office/drawing/2014/main" id="{CEC24552-4EFF-48DA-91FF-71998BDECADA}"/>
               </a:ext>
             </a:extLst>
           </p:cNvPr>
@@ -11726,7 +11726,7 @@
           <p:cNvPr id="83" name="">
             <a:extLst xmlns:a="http://schemas.openxmlformats.org/drawingml/2006/main">
               <a:ext uri="{FF2B5EF4-FFF2-40B4-BE49-F238E27FC236}">
-                <a16:creationId xmlns:a16="http://schemas.microsoft.com/office/drawing/2014/main" id="{1ABD25B2-0AC7-4C71-AC67-1ED6F60D8176}"/>
+                <a16:creationId xmlns:a16="http://schemas.microsoft.com/office/drawing/2014/main" id="{BB32F22C-5C09-424F-B9D9-4E9B7506AAE6}"/>
               </a:ext>
             </a:extLst>
           </p:cNvPr>
@@ -11778,7 +11778,7 @@
           <p:cNvPr id="84" name="">
             <a:extLst xmlns:a="http://schemas.openxmlformats.org/drawingml/2006/main">
               <a:ext uri="{FF2B5EF4-FFF2-40B4-BE49-F238E27FC236}">
-                <a16:creationId xmlns:a16="http://schemas.microsoft.com/office/drawing/2014/main" id="{BE69979E-A9C4-4FC3-A513-D8F3BC2EA8EA}"/>
+                <a16:creationId xmlns:a16="http://schemas.microsoft.com/office/drawing/2014/main" id="{A6F26F16-2D01-4048-AA83-824BD2622D70}"/>
               </a:ext>
             </a:extLst>
           </p:cNvPr>
@@ -11830,7 +11830,7 @@
           <p:cNvPr id="85" name="">
             <a:extLst xmlns:a="http://schemas.openxmlformats.org/drawingml/2006/main">
               <a:ext uri="{FF2B5EF4-FFF2-40B4-BE49-F238E27FC236}">
-                <a16:creationId xmlns:a16="http://schemas.microsoft.com/office/drawing/2014/main" id="{77D02B3D-36D3-472B-AC1B-823C0875AACB}"/>
+                <a16:creationId xmlns:a16="http://schemas.microsoft.com/office/drawing/2014/main" id="{45B94481-DDCB-47ED-A12E-2CC3037063F8}"/>
               </a:ext>
             </a:extLst>
           </p:cNvPr>
@@ -11861,7 +11861,7 @@
           <p:cNvPr id="86" name="">
             <a:extLst xmlns:a="http://schemas.openxmlformats.org/drawingml/2006/main">
               <a:ext uri="{FF2B5EF4-FFF2-40B4-BE49-F238E27FC236}">
-                <a16:creationId xmlns:a16="http://schemas.microsoft.com/office/drawing/2014/main" id="{9885FD89-AEFB-4001-8B49-D363DF1F9899}"/>
+                <a16:creationId xmlns:a16="http://schemas.microsoft.com/office/drawing/2014/main" id="{7CC24DE1-1EB8-486C-B243-2728BCEE76E7}"/>
               </a:ext>
             </a:extLst>
           </p:cNvPr>
@@ -11913,7 +11913,7 @@
           <p:cNvPr id="87" name="">
             <a:extLst xmlns:a="http://schemas.openxmlformats.org/drawingml/2006/main">
               <a:ext uri="{FF2B5EF4-FFF2-40B4-BE49-F238E27FC236}">
-                <a16:creationId xmlns:a16="http://schemas.microsoft.com/office/drawing/2014/main" id="{D4813D2B-C629-469A-A5C2-3162BF37802E}"/>
+                <a16:creationId xmlns:a16="http://schemas.microsoft.com/office/drawing/2014/main" id="{53B02204-3902-4557-BEE5-17464829B5F5}"/>
               </a:ext>
             </a:extLst>
           </p:cNvPr>
@@ -11965,7 +11965,7 @@
           <p:cNvPr id="88" name="">
             <a:extLst xmlns:a="http://schemas.openxmlformats.org/drawingml/2006/main">
               <a:ext uri="{FF2B5EF4-FFF2-40B4-BE49-F238E27FC236}">
-                <a16:creationId xmlns:a16="http://schemas.microsoft.com/office/drawing/2014/main" id="{6B64FEE6-F980-43E4-A81F-DFC21F8B67AB}"/>
+                <a16:creationId xmlns:a16="http://schemas.microsoft.com/office/drawing/2014/main" id="{DB21FCFE-D673-435A-BB05-9BAED06AB3A7}"/>
               </a:ext>
             </a:extLst>
           </p:cNvPr>
@@ -12017,7 +12017,7 @@
           <p:cNvPr id="89" name="">
             <a:extLst xmlns:a="http://schemas.openxmlformats.org/drawingml/2006/main">
               <a:ext uri="{FF2B5EF4-FFF2-40B4-BE49-F238E27FC236}">
-                <a16:creationId xmlns:a16="http://schemas.microsoft.com/office/drawing/2014/main" id="{10C7D7EB-4251-46A2-8A0C-6F41454E031E}"/>
+                <a16:creationId xmlns:a16="http://schemas.microsoft.com/office/drawing/2014/main" id="{4CABCFD6-C26C-42DF-8A35-5F7C040CDA12}"/>
               </a:ext>
             </a:extLst>
           </p:cNvPr>
@@ -12069,7 +12069,7 @@
           <p:cNvPr id="90" name="">
             <a:extLst xmlns:a="http://schemas.openxmlformats.org/drawingml/2006/main">
               <a:ext uri="{FF2B5EF4-FFF2-40B4-BE49-F238E27FC236}">
-                <a16:creationId xmlns:a16="http://schemas.microsoft.com/office/drawing/2014/main" id="{721E534C-10A3-4C32-BFEB-F256A3398C0D}"/>
+                <a16:creationId xmlns:a16="http://schemas.microsoft.com/office/drawing/2014/main" id="{85B14AA1-1E80-4FB3-8DDC-F1D066A36E71}"/>
               </a:ext>
             </a:extLst>
           </p:cNvPr>
@@ -12121,7 +12121,7 @@
           <p:cNvPr id="91" name="">
             <a:extLst xmlns:a="http://schemas.openxmlformats.org/drawingml/2006/main">
               <a:ext uri="{FF2B5EF4-FFF2-40B4-BE49-F238E27FC236}">
-                <a16:creationId xmlns:a16="http://schemas.microsoft.com/office/drawing/2014/main" id="{41C26366-9B16-4E7B-BD01-EE995E2B8242}"/>
+                <a16:creationId xmlns:a16="http://schemas.microsoft.com/office/drawing/2014/main" id="{25CD2162-B001-4227-B456-94B3183A470A}"/>
               </a:ext>
             </a:extLst>
           </p:cNvPr>
@@ -12152,7 +12152,7 @@
           <p:cNvPr id="92" name="">
             <a:extLst xmlns:a="http://schemas.openxmlformats.org/drawingml/2006/main">
               <a:ext uri="{FF2B5EF4-FFF2-40B4-BE49-F238E27FC236}">
-                <a16:creationId xmlns:a16="http://schemas.microsoft.com/office/drawing/2014/main" id="{C2900206-49C7-4DDF-92E6-8E04679FAE08}"/>
+                <a16:creationId xmlns:a16="http://schemas.microsoft.com/office/drawing/2014/main" id="{D049E793-C6DF-4754-A31E-4E213D4CAB54}"/>
               </a:ext>
             </a:extLst>
           </p:cNvPr>
@@ -12183,7 +12183,7 @@
           <p:cNvPr id="93" name="">
             <a:extLst xmlns:a="http://schemas.openxmlformats.org/drawingml/2006/main">
               <a:ext uri="{FF2B5EF4-FFF2-40B4-BE49-F238E27FC236}">
-                <a16:creationId xmlns:a16="http://schemas.microsoft.com/office/drawing/2014/main" id="{13C1463E-FA2A-4CFD-87F0-65C2335B3D65}"/>
+                <a16:creationId xmlns:a16="http://schemas.microsoft.com/office/drawing/2014/main" id="{DAB365CD-163B-4FB2-826F-910417DCEB98}"/>
               </a:ext>
             </a:extLst>
           </p:cNvPr>
@@ -12235,7 +12235,7 @@
           <p:cNvPr id="94" name="">
             <a:extLst xmlns:a="http://schemas.openxmlformats.org/drawingml/2006/main">
               <a:ext uri="{FF2B5EF4-FFF2-40B4-BE49-F238E27FC236}">
-                <a16:creationId xmlns:a16="http://schemas.microsoft.com/office/drawing/2014/main" id="{0A028CD3-13B0-482B-ADC1-5CC396BB0407}"/>
+                <a16:creationId xmlns:a16="http://schemas.microsoft.com/office/drawing/2014/main" id="{A82378C2-0422-4DCA-A116-BDAE3B8A824C}"/>
               </a:ext>
             </a:extLst>
           </p:cNvPr>
@@ -12287,7 +12287,7 @@
           <p:cNvPr id="95" name="">
             <a:extLst xmlns:a="http://schemas.openxmlformats.org/drawingml/2006/main">
               <a:ext uri="{FF2B5EF4-FFF2-40B4-BE49-F238E27FC236}">
-                <a16:creationId xmlns:a16="http://schemas.microsoft.com/office/drawing/2014/main" id="{D90EDD39-EF1C-4FFA-B0EE-74E5F344E50C}"/>
+                <a16:creationId xmlns:a16="http://schemas.microsoft.com/office/drawing/2014/main" id="{F246DE5D-9116-410D-B386-C783651E25BE}"/>
               </a:ext>
             </a:extLst>
           </p:cNvPr>
@@ -12339,7 +12339,7 @@
           <p:cNvPr id="96" name="">
             <a:extLst xmlns:a="http://schemas.openxmlformats.org/drawingml/2006/main">
               <a:ext uri="{FF2B5EF4-FFF2-40B4-BE49-F238E27FC236}">
-                <a16:creationId xmlns:a16="http://schemas.microsoft.com/office/drawing/2014/main" id="{30F7B6FF-00E3-4D27-9AB2-C480A05266C4}"/>
+                <a16:creationId xmlns:a16="http://schemas.microsoft.com/office/drawing/2014/main" id="{D064F87C-A742-45DB-BF07-E62936613DCD}"/>
               </a:ext>
             </a:extLst>
           </p:cNvPr>
@@ -12391,7 +12391,7 @@
           <p:cNvPr id="97" name="">
             <a:extLst xmlns:a="http://schemas.openxmlformats.org/drawingml/2006/main">
               <a:ext uri="{FF2B5EF4-FFF2-40B4-BE49-F238E27FC236}">
-                <a16:creationId xmlns:a16="http://schemas.microsoft.com/office/drawing/2014/main" id="{95E30009-E5B1-4771-BA0E-75C8268B806F}"/>
+                <a16:creationId xmlns:a16="http://schemas.microsoft.com/office/drawing/2014/main" id="{375B1D33-24B4-43B7-A5C5-884ED52E63C9}"/>
               </a:ext>
             </a:extLst>
           </p:cNvPr>
@@ -12441,7 +12441,7 @@
     </p:spTree>
     <p:extLst>
       <p:ext uri="{BB962C8B-B14F-4D97-AF65-F5344CB8AC3E}">
-        <p14:creationId xmlns:p14="http://schemas.microsoft.com/office/powerpoint/2010/main" val="82997272"/>
+        <p14:creationId xmlns:p14="http://schemas.microsoft.com/office/powerpoint/2010/main" val="2090183904"/>
       </p:ext>
     </p:extLst>
   </p:cSld>
@@ -12472,7 +12472,7 @@
           <p:cNvPr id="102" name="">
             <a:extLst xmlns:a="http://schemas.openxmlformats.org/drawingml/2006/main">
               <a:ext uri="{FF2B5EF4-FFF2-40B4-BE49-F238E27FC236}">
-                <a16:creationId xmlns:a16="http://schemas.microsoft.com/office/drawing/2014/main" id="{0D10ED68-B691-46F5-B85A-20FCD349202B}"/>
+                <a16:creationId xmlns:a16="http://schemas.microsoft.com/office/drawing/2014/main" id="{9E2A0FBE-DFD2-4608-A442-E8DCC3CE661B}"/>
               </a:ext>
             </a:extLst>
           </p:cNvPr>
@@ -12505,7 +12505,7 @@
           <p:cNvPr id="2" name="">
             <a:extLst xmlns:a="http://schemas.openxmlformats.org/drawingml/2006/main">
               <a:ext uri="{FF2B5EF4-FFF2-40B4-BE49-F238E27FC236}">
-                <a16:creationId xmlns:a16="http://schemas.microsoft.com/office/drawing/2014/main" id="{4D688538-2F0B-4561-8290-61E1748592C1}"/>
+                <a16:creationId xmlns:a16="http://schemas.microsoft.com/office/drawing/2014/main" id="{4BA8FC07-AE19-44B4-A70C-D5175212E7EC}"/>
               </a:ext>
             </a:extLst>
           </p:cNvPr>
@@ -12536,7 +12536,7 @@
           <p:cNvPr id="3" name="">
             <a:extLst xmlns:a="http://schemas.openxmlformats.org/drawingml/2006/main">
               <a:ext uri="{FF2B5EF4-FFF2-40B4-BE49-F238E27FC236}">
-                <a16:creationId xmlns:a16="http://schemas.microsoft.com/office/drawing/2014/main" id="{A3510BC3-6B0D-477A-92E8-2B570154B2D2}"/>
+                <a16:creationId xmlns:a16="http://schemas.microsoft.com/office/drawing/2014/main" id="{F85010B9-C773-4CE5-98CB-B0D106B7E76D}"/>
               </a:ext>
             </a:extLst>
           </p:cNvPr>
@@ -12588,7 +12588,7 @@
           <p:cNvPr id="4" name="">
             <a:extLst xmlns:a="http://schemas.openxmlformats.org/drawingml/2006/main">
               <a:ext uri="{FF2B5EF4-FFF2-40B4-BE49-F238E27FC236}">
-                <a16:creationId xmlns:a16="http://schemas.microsoft.com/office/drawing/2014/main" id="{E85AA0DF-1084-4E65-932B-0EE540BD326B}"/>
+                <a16:creationId xmlns:a16="http://schemas.microsoft.com/office/drawing/2014/main" id="{99105726-B7FA-41F4-812D-3DBF5F22249D}"/>
               </a:ext>
             </a:extLst>
           </p:cNvPr>
@@ -12640,7 +12640,7 @@
           <p:cNvPr id="5" name="">
             <a:extLst xmlns:a="http://schemas.openxmlformats.org/drawingml/2006/main">
               <a:ext uri="{FF2B5EF4-FFF2-40B4-BE49-F238E27FC236}">
-                <a16:creationId xmlns:a16="http://schemas.microsoft.com/office/drawing/2014/main" id="{2AE374AF-ABA1-4211-89B3-1156ECFC127A}"/>
+                <a16:creationId xmlns:a16="http://schemas.microsoft.com/office/drawing/2014/main" id="{3D02E117-A411-4FF9-A1A7-4D0DBF1A3B41}"/>
               </a:ext>
             </a:extLst>
           </p:cNvPr>
@@ -12675,7 +12675,7 @@
           <p:nvPr/>
         </p:nvPicPr>
         <p:blipFill>
-          <a:blip xmlns:r="http://schemas.openxmlformats.org/officeDocument/2006/relationships" xmlns:a="http://schemas.openxmlformats.org/drawingml/2006/main" r:embed="Ree671c84deca4086"/>
+          <a:blip xmlns:r="http://schemas.openxmlformats.org/officeDocument/2006/relationships" xmlns:a="http://schemas.openxmlformats.org/drawingml/2006/main" r:embed="R30c8182968c44ebd"/>
           <a:stretch xmlns:a="http://schemas.openxmlformats.org/drawingml/2006/main"/>
         </p:blipFill>
         <p:spPr>
@@ -12693,7 +12693,7 @@
           <p:cNvPr id="7" name="">
             <a:extLst xmlns:a="http://schemas.openxmlformats.org/drawingml/2006/main">
               <a:ext uri="{FF2B5EF4-FFF2-40B4-BE49-F238E27FC236}">
-                <a16:creationId xmlns:a16="http://schemas.microsoft.com/office/drawing/2014/main" id="{972ADDE7-C71A-4B55-864F-950551F55E7C}"/>
+                <a16:creationId xmlns:a16="http://schemas.microsoft.com/office/drawing/2014/main" id="{44C30E12-68FE-4A03-83B5-5F16C62A23B5}"/>
               </a:ext>
             </a:extLst>
           </p:cNvPr>
@@ -12745,7 +12745,7 @@
           <p:cNvPr id="8" name="">
             <a:extLst xmlns:a="http://schemas.openxmlformats.org/drawingml/2006/main">
               <a:ext uri="{FF2B5EF4-FFF2-40B4-BE49-F238E27FC236}">
-                <a16:creationId xmlns:a16="http://schemas.microsoft.com/office/drawing/2014/main" id="{95481744-C232-43DC-926B-27C1B90E5639}"/>
+                <a16:creationId xmlns:a16="http://schemas.microsoft.com/office/drawing/2014/main" id="{63ED69F4-1F82-4585-A44C-29CEE550BA2D}"/>
               </a:ext>
             </a:extLst>
           </p:cNvPr>
@@ -12797,7 +12797,7 @@
           <p:cNvPr id="9" name="">
             <a:extLst xmlns:a="http://schemas.openxmlformats.org/drawingml/2006/main">
               <a:ext uri="{FF2B5EF4-FFF2-40B4-BE49-F238E27FC236}">
-                <a16:creationId xmlns:a16="http://schemas.microsoft.com/office/drawing/2014/main" id="{E2DC15E9-9C80-4ED6-8170-DB3121D5EF82}"/>
+                <a16:creationId xmlns:a16="http://schemas.microsoft.com/office/drawing/2014/main" id="{574C0A07-BA84-4A52-B4E7-6F2C84069065}"/>
               </a:ext>
             </a:extLst>
           </p:cNvPr>
@@ -12849,7 +12849,7 @@
           <p:cNvPr id="10" name="">
             <a:extLst xmlns:a="http://schemas.openxmlformats.org/drawingml/2006/main">
               <a:ext uri="{FF2B5EF4-FFF2-40B4-BE49-F238E27FC236}">
-                <a16:creationId xmlns:a16="http://schemas.microsoft.com/office/drawing/2014/main" id="{EB78B9E7-9956-46CC-AA7E-809437AEE231}"/>
+                <a16:creationId xmlns:a16="http://schemas.microsoft.com/office/drawing/2014/main" id="{463F6E5C-79C8-4644-8F05-4AD53E4EA159}"/>
               </a:ext>
             </a:extLst>
           </p:cNvPr>
@@ -12901,7 +12901,7 @@
           <p:cNvPr id="11" name="">
             <a:extLst xmlns:a="http://schemas.openxmlformats.org/drawingml/2006/main">
               <a:ext uri="{FF2B5EF4-FFF2-40B4-BE49-F238E27FC236}">
-                <a16:creationId xmlns:a16="http://schemas.microsoft.com/office/drawing/2014/main" id="{50A1F8A2-4620-4E3D-912A-DBEEC4ED2F9E}"/>
+                <a16:creationId xmlns:a16="http://schemas.microsoft.com/office/drawing/2014/main" id="{7C5A61EE-FC03-4716-A7E0-A91B16C5AC41}"/>
               </a:ext>
             </a:extLst>
           </p:cNvPr>
@@ -12932,7 +12932,7 @@
           <p:cNvPr id="12" name="">
             <a:extLst xmlns:a="http://schemas.openxmlformats.org/drawingml/2006/main">
               <a:ext uri="{FF2B5EF4-FFF2-40B4-BE49-F238E27FC236}">
-                <a16:creationId xmlns:a16="http://schemas.microsoft.com/office/drawing/2014/main" id="{CE6DB7AE-0A7D-4CA3-85C6-C554AB756D21}"/>
+                <a16:creationId xmlns:a16="http://schemas.microsoft.com/office/drawing/2014/main" id="{5A5D736F-9369-4B85-9A9B-7FA5F6FA878C}"/>
               </a:ext>
             </a:extLst>
           </p:cNvPr>
@@ -12963,7 +12963,7 @@
           <p:cNvPr id="13" name="">
             <a:extLst xmlns:a="http://schemas.openxmlformats.org/drawingml/2006/main">
               <a:ext uri="{FF2B5EF4-FFF2-40B4-BE49-F238E27FC236}">
-                <a16:creationId xmlns:a16="http://schemas.microsoft.com/office/drawing/2014/main" id="{894068D8-40D4-4E2E-B387-BFEB0E6ADB45}"/>
+                <a16:creationId xmlns:a16="http://schemas.microsoft.com/office/drawing/2014/main" id="{860E88C0-52BA-41C5-B843-EB55336B00AE}"/>
               </a:ext>
             </a:extLst>
           </p:cNvPr>
@@ -13015,7 +13015,7 @@
           <p:cNvPr id="14" name="">
             <a:extLst xmlns:a="http://schemas.openxmlformats.org/drawingml/2006/main">
               <a:ext uri="{FF2B5EF4-FFF2-40B4-BE49-F238E27FC236}">
-                <a16:creationId xmlns:a16="http://schemas.microsoft.com/office/drawing/2014/main" id="{0DA6907D-3B38-4D93-BCED-D0FF042C6BA9}"/>
+                <a16:creationId xmlns:a16="http://schemas.microsoft.com/office/drawing/2014/main" id="{2A167621-7B82-4356-A7EC-8997019B3EB5}"/>
               </a:ext>
             </a:extLst>
           </p:cNvPr>
@@ -13067,7 +13067,7 @@
           <p:cNvPr id="15" name="">
             <a:extLst xmlns:a="http://schemas.openxmlformats.org/drawingml/2006/main">
               <a:ext uri="{FF2B5EF4-FFF2-40B4-BE49-F238E27FC236}">
-                <a16:creationId xmlns:a16="http://schemas.microsoft.com/office/drawing/2014/main" id="{C4053F9C-A370-4435-B5BE-9EFC329E091F}"/>
+                <a16:creationId xmlns:a16="http://schemas.microsoft.com/office/drawing/2014/main" id="{CA104C05-A755-4DA4-976A-99FFDADF2905}"/>
               </a:ext>
             </a:extLst>
           </p:cNvPr>
@@ -13119,7 +13119,7 @@
           <p:cNvPr id="16" name="">
             <a:extLst xmlns:a="http://schemas.openxmlformats.org/drawingml/2006/main">
               <a:ext uri="{FF2B5EF4-FFF2-40B4-BE49-F238E27FC236}">
-                <a16:creationId xmlns:a16="http://schemas.microsoft.com/office/drawing/2014/main" id="{E6EE988D-DBC8-4D3A-97D6-A085D03F5C1A}"/>
+                <a16:creationId xmlns:a16="http://schemas.microsoft.com/office/drawing/2014/main" id="{C38DB2F4-512B-465B-B307-9DA05DED7C06}"/>
               </a:ext>
             </a:extLst>
           </p:cNvPr>
@@ -13171,7 +13171,7 @@
           <p:cNvPr id="17" name="">
             <a:extLst xmlns:a="http://schemas.openxmlformats.org/drawingml/2006/main">
               <a:ext uri="{FF2B5EF4-FFF2-40B4-BE49-F238E27FC236}">
-                <a16:creationId xmlns:a16="http://schemas.microsoft.com/office/drawing/2014/main" id="{4C671C80-3C63-4D10-9A17-816C0ACB116A}"/>
+                <a16:creationId xmlns:a16="http://schemas.microsoft.com/office/drawing/2014/main" id="{07E874B2-1221-466C-821C-FFFCDE5E59CC}"/>
               </a:ext>
             </a:extLst>
           </p:cNvPr>
@@ -13223,7 +13223,7 @@
           <p:cNvPr id="18" name="">
             <a:extLst xmlns:a="http://schemas.openxmlformats.org/drawingml/2006/main">
               <a:ext uri="{FF2B5EF4-FFF2-40B4-BE49-F238E27FC236}">
-                <a16:creationId xmlns:a16="http://schemas.microsoft.com/office/drawing/2014/main" id="{0C358798-8A91-43DF-9351-318815C13FC6}"/>
+                <a16:creationId xmlns:a16="http://schemas.microsoft.com/office/drawing/2014/main" id="{43987592-6254-4A32-AD3E-AE83511D9C42}"/>
               </a:ext>
             </a:extLst>
           </p:cNvPr>
@@ -13254,7 +13254,7 @@
           <p:cNvPr id="19" name="">
             <a:extLst xmlns:a="http://schemas.openxmlformats.org/drawingml/2006/main">
               <a:ext uri="{FF2B5EF4-FFF2-40B4-BE49-F238E27FC236}">
-                <a16:creationId xmlns:a16="http://schemas.microsoft.com/office/drawing/2014/main" id="{65B5EC92-6507-4F89-9806-47F54C34F2BB}"/>
+                <a16:creationId xmlns:a16="http://schemas.microsoft.com/office/drawing/2014/main" id="{3F338A11-1336-43D5-8ADF-3BC9184A0449}"/>
               </a:ext>
             </a:extLst>
           </p:cNvPr>
@@ -13306,7 +13306,7 @@
           <p:cNvPr id="20" name="">
             <a:extLst xmlns:a="http://schemas.openxmlformats.org/drawingml/2006/main">
               <a:ext uri="{FF2B5EF4-FFF2-40B4-BE49-F238E27FC236}">
-                <a16:creationId xmlns:a16="http://schemas.microsoft.com/office/drawing/2014/main" id="{D6D1FE40-2357-4F83-AB13-B3321D3EA0C0}"/>
+                <a16:creationId xmlns:a16="http://schemas.microsoft.com/office/drawing/2014/main" id="{AF557194-0248-4890-999F-77C11240B199}"/>
               </a:ext>
             </a:extLst>
           </p:cNvPr>
@@ -13358,7 +13358,7 @@
           <p:cNvPr id="21" name="">
             <a:extLst xmlns:a="http://schemas.openxmlformats.org/drawingml/2006/main">
               <a:ext uri="{FF2B5EF4-FFF2-40B4-BE49-F238E27FC236}">
-                <a16:creationId xmlns:a16="http://schemas.microsoft.com/office/drawing/2014/main" id="{D66587EF-399D-4E0A-98D3-BC38E78533CA}"/>
+                <a16:creationId xmlns:a16="http://schemas.microsoft.com/office/drawing/2014/main" id="{59C6380A-CCCB-423F-AA7C-1FEC6F3A2ABB}"/>
               </a:ext>
             </a:extLst>
           </p:cNvPr>
@@ -13410,7 +13410,7 @@
           <p:cNvPr id="22" name="">
             <a:extLst xmlns:a="http://schemas.openxmlformats.org/drawingml/2006/main">
               <a:ext uri="{FF2B5EF4-FFF2-40B4-BE49-F238E27FC236}">
-                <a16:creationId xmlns:a16="http://schemas.microsoft.com/office/drawing/2014/main" id="{69E235B0-D8DF-41AA-BEF7-32D1DB3E7CF0}"/>
+                <a16:creationId xmlns:a16="http://schemas.microsoft.com/office/drawing/2014/main" id="{6D3CA219-CCFD-483E-8E1D-E4E2CEB71395}"/>
               </a:ext>
             </a:extLst>
           </p:cNvPr>
@@ -13462,7 +13462,7 @@
           <p:cNvPr id="23" name="">
             <a:extLst xmlns:a="http://schemas.openxmlformats.org/drawingml/2006/main">
               <a:ext uri="{FF2B5EF4-FFF2-40B4-BE49-F238E27FC236}">
-                <a16:creationId xmlns:a16="http://schemas.microsoft.com/office/drawing/2014/main" id="{BA0D3CE3-E57D-4EC1-8032-0A30D8AAC630}"/>
+                <a16:creationId xmlns:a16="http://schemas.microsoft.com/office/drawing/2014/main" id="{05EE8E5A-C805-4FA4-BE7E-188A45BAFD26}"/>
               </a:ext>
             </a:extLst>
           </p:cNvPr>
@@ -13514,7 +13514,7 @@
           <p:cNvPr id="24" name="">
             <a:extLst xmlns:a="http://schemas.openxmlformats.org/drawingml/2006/main">
               <a:ext uri="{FF2B5EF4-FFF2-40B4-BE49-F238E27FC236}">
-                <a16:creationId xmlns:a16="http://schemas.microsoft.com/office/drawing/2014/main" id="{5D94FB56-5041-4FB7-AF1D-C502BD94F918}"/>
+                <a16:creationId xmlns:a16="http://schemas.microsoft.com/office/drawing/2014/main" id="{A579C739-26CA-4DDC-AFE9-A5C4F9A5EC10}"/>
               </a:ext>
             </a:extLst>
           </p:cNvPr>
@@ -13545,7 +13545,7 @@
           <p:cNvPr id="25" name="">
             <a:extLst xmlns:a="http://schemas.openxmlformats.org/drawingml/2006/main">
               <a:ext uri="{FF2B5EF4-FFF2-40B4-BE49-F238E27FC236}">
-                <a16:creationId xmlns:a16="http://schemas.microsoft.com/office/drawing/2014/main" id="{FB729C85-C494-4136-AEEC-F718115FECB2}"/>
+                <a16:creationId xmlns:a16="http://schemas.microsoft.com/office/drawing/2014/main" id="{DB0227FD-81B9-4783-9E4D-C50D21BE2518}"/>
               </a:ext>
             </a:extLst>
           </p:cNvPr>
@@ -13576,7 +13576,7 @@
           <p:cNvPr id="26" name="">
             <a:extLst xmlns:a="http://schemas.openxmlformats.org/drawingml/2006/main">
               <a:ext uri="{FF2B5EF4-FFF2-40B4-BE49-F238E27FC236}">
-                <a16:creationId xmlns:a16="http://schemas.microsoft.com/office/drawing/2014/main" id="{760E92E1-2260-475E-AA6F-C95D84B7EEE4}"/>
+                <a16:creationId xmlns:a16="http://schemas.microsoft.com/office/drawing/2014/main" id="{B6AB2EB3-3C15-4A08-A2CA-E2B2F6A005E8}"/>
               </a:ext>
             </a:extLst>
           </p:cNvPr>
@@ -13628,7 +13628,7 @@
           <p:cNvPr id="27" name="">
             <a:extLst xmlns:a="http://schemas.openxmlformats.org/drawingml/2006/main">
               <a:ext uri="{FF2B5EF4-FFF2-40B4-BE49-F238E27FC236}">
-                <a16:creationId xmlns:a16="http://schemas.microsoft.com/office/drawing/2014/main" id="{D143100C-C638-4C9B-9668-BD5B5B451B61}"/>
+                <a16:creationId xmlns:a16="http://schemas.microsoft.com/office/drawing/2014/main" id="{6A5C3625-573E-446A-AEFE-10980562C208}"/>
               </a:ext>
             </a:extLst>
           </p:cNvPr>
@@ -13680,7 +13680,7 @@
           <p:cNvPr id="28" name="">
             <a:extLst xmlns:a="http://schemas.openxmlformats.org/drawingml/2006/main">
               <a:ext uri="{FF2B5EF4-FFF2-40B4-BE49-F238E27FC236}">
-                <a16:creationId xmlns:a16="http://schemas.microsoft.com/office/drawing/2014/main" id="{732F513F-0E2C-4DBB-8C0A-D06E0DB9E026}"/>
+                <a16:creationId xmlns:a16="http://schemas.microsoft.com/office/drawing/2014/main" id="{8D429FE8-9B66-46E0-93C2-9C6CE1A82A40}"/>
               </a:ext>
             </a:extLst>
           </p:cNvPr>
@@ -13732,7 +13732,7 @@
           <p:cNvPr id="29" name="">
             <a:extLst xmlns:a="http://schemas.openxmlformats.org/drawingml/2006/main">
               <a:ext uri="{FF2B5EF4-FFF2-40B4-BE49-F238E27FC236}">
-                <a16:creationId xmlns:a16="http://schemas.microsoft.com/office/drawing/2014/main" id="{C8CF62F9-93A3-4767-8555-B1E4752BDA85}"/>
+                <a16:creationId xmlns:a16="http://schemas.microsoft.com/office/drawing/2014/main" id="{CC4696DD-C560-4009-938C-1AA050DC1C30}"/>
               </a:ext>
             </a:extLst>
           </p:cNvPr>
@@ -13784,7 +13784,7 @@
           <p:cNvPr id="30" name="">
             <a:extLst xmlns:a="http://schemas.openxmlformats.org/drawingml/2006/main">
               <a:ext uri="{FF2B5EF4-FFF2-40B4-BE49-F238E27FC236}">
-                <a16:creationId xmlns:a16="http://schemas.microsoft.com/office/drawing/2014/main" id="{99AABA9D-A4C5-4A68-9E00-4BC4E0645478}"/>
+                <a16:creationId xmlns:a16="http://schemas.microsoft.com/office/drawing/2014/main" id="{33A24077-705F-462E-8E35-789AACB445C8}"/>
               </a:ext>
             </a:extLst>
           </p:cNvPr>
@@ -13836,7 +13836,7 @@
           <p:cNvPr id="31" name="">
             <a:extLst xmlns:a="http://schemas.openxmlformats.org/drawingml/2006/main">
               <a:ext uri="{FF2B5EF4-FFF2-40B4-BE49-F238E27FC236}">
-                <a16:creationId xmlns:a16="http://schemas.microsoft.com/office/drawing/2014/main" id="{D27A525A-338D-4BCC-8980-71BF0DE3C697}"/>
+                <a16:creationId xmlns:a16="http://schemas.microsoft.com/office/drawing/2014/main" id="{16D5A823-FA97-4B49-9662-BC63BA068464}"/>
               </a:ext>
             </a:extLst>
           </p:cNvPr>
@@ -13867,7 +13867,7 @@
           <p:cNvPr id="32" name="">
             <a:extLst xmlns:a="http://schemas.openxmlformats.org/drawingml/2006/main">
               <a:ext uri="{FF2B5EF4-FFF2-40B4-BE49-F238E27FC236}">
-                <a16:creationId xmlns:a16="http://schemas.microsoft.com/office/drawing/2014/main" id="{CC25344F-19A5-42BE-B13F-3F9427E33786}"/>
+                <a16:creationId xmlns:a16="http://schemas.microsoft.com/office/drawing/2014/main" id="{F077C955-9730-4F6F-BAF1-BE375AA5321F}"/>
               </a:ext>
             </a:extLst>
           </p:cNvPr>
@@ -13919,7 +13919,7 @@
           <p:cNvPr id="33" name="">
             <a:extLst xmlns:a="http://schemas.openxmlformats.org/drawingml/2006/main">
               <a:ext uri="{FF2B5EF4-FFF2-40B4-BE49-F238E27FC236}">
-                <a16:creationId xmlns:a16="http://schemas.microsoft.com/office/drawing/2014/main" id="{49E251B0-C065-45A0-B281-FADA095E9AB1}"/>
+                <a16:creationId xmlns:a16="http://schemas.microsoft.com/office/drawing/2014/main" id="{BFD8158A-E545-43BA-A6D5-B541DA0ACA32}"/>
               </a:ext>
             </a:extLst>
           </p:cNvPr>
@@ -13971,7 +13971,7 @@
           <p:cNvPr id="34" name="">
             <a:extLst xmlns:a="http://schemas.openxmlformats.org/drawingml/2006/main">
               <a:ext uri="{FF2B5EF4-FFF2-40B4-BE49-F238E27FC236}">
-                <a16:creationId xmlns:a16="http://schemas.microsoft.com/office/drawing/2014/main" id="{73659E0E-A00D-4384-A8A8-13B4C9F94C29}"/>
+                <a16:creationId xmlns:a16="http://schemas.microsoft.com/office/drawing/2014/main" id="{53C2C4EC-980C-42D3-B7AD-4FAD5432FDB0}"/>
               </a:ext>
             </a:extLst>
           </p:cNvPr>
@@ -14023,7 +14023,7 @@
           <p:cNvPr id="35" name="">
             <a:extLst xmlns:a="http://schemas.openxmlformats.org/drawingml/2006/main">
               <a:ext uri="{FF2B5EF4-FFF2-40B4-BE49-F238E27FC236}">
-                <a16:creationId xmlns:a16="http://schemas.microsoft.com/office/drawing/2014/main" id="{FA58DCB1-08BE-44DF-BA6D-CBC3452C3529}"/>
+                <a16:creationId xmlns:a16="http://schemas.microsoft.com/office/drawing/2014/main" id="{658613F2-2628-46A0-BC83-3D24AEE7AA1B}"/>
               </a:ext>
             </a:extLst>
           </p:cNvPr>
@@ -14075,7 +14075,7 @@
           <p:cNvPr id="36" name="">
             <a:extLst xmlns:a="http://schemas.openxmlformats.org/drawingml/2006/main">
               <a:ext uri="{FF2B5EF4-FFF2-40B4-BE49-F238E27FC236}">
-                <a16:creationId xmlns:a16="http://schemas.microsoft.com/office/drawing/2014/main" id="{B755387E-9A67-44C8-8DD3-E3EB71E1A3F2}"/>
+                <a16:creationId xmlns:a16="http://schemas.microsoft.com/office/drawing/2014/main" id="{658D26EE-8EC2-498E-B114-A5C2D088C88C}"/>
               </a:ext>
             </a:extLst>
           </p:cNvPr>
@@ -14127,7 +14127,7 @@
           <p:cNvPr id="37" name="">
             <a:extLst xmlns:a="http://schemas.openxmlformats.org/drawingml/2006/main">
               <a:ext uri="{FF2B5EF4-FFF2-40B4-BE49-F238E27FC236}">
-                <a16:creationId xmlns:a16="http://schemas.microsoft.com/office/drawing/2014/main" id="{C7C40C96-B8AC-43CC-BE7E-402BCB03B913}"/>
+                <a16:creationId xmlns:a16="http://schemas.microsoft.com/office/drawing/2014/main" id="{3BE4D1B5-99C4-4C00-8CC4-E873B85DC340}"/>
               </a:ext>
             </a:extLst>
           </p:cNvPr>
@@ -14158,7 +14158,7 @@
           <p:cNvPr id="38" name="">
             <a:extLst xmlns:a="http://schemas.openxmlformats.org/drawingml/2006/main">
               <a:ext uri="{FF2B5EF4-FFF2-40B4-BE49-F238E27FC236}">
-                <a16:creationId xmlns:a16="http://schemas.microsoft.com/office/drawing/2014/main" id="{7A95A400-EEFF-4761-85EA-671242C05021}"/>
+                <a16:creationId xmlns:a16="http://schemas.microsoft.com/office/drawing/2014/main" id="{EBB5D38D-D25E-40C8-96AD-9DB10266D8A3}"/>
               </a:ext>
             </a:extLst>
           </p:cNvPr>
@@ -14189,7 +14189,7 @@
           <p:cNvPr id="39" name="">
             <a:extLst xmlns:a="http://schemas.openxmlformats.org/drawingml/2006/main">
               <a:ext uri="{FF2B5EF4-FFF2-40B4-BE49-F238E27FC236}">
-                <a16:creationId xmlns:a16="http://schemas.microsoft.com/office/drawing/2014/main" id="{4B4B8779-DA70-4E20-B01D-8C4D608CD253}"/>
+                <a16:creationId xmlns:a16="http://schemas.microsoft.com/office/drawing/2014/main" id="{0DB4C855-A8C9-4F95-A9BB-B37B186D54DF}"/>
               </a:ext>
             </a:extLst>
           </p:cNvPr>
@@ -14241,7 +14241,7 @@
           <p:cNvPr id="40" name="">
             <a:extLst xmlns:a="http://schemas.openxmlformats.org/drawingml/2006/main">
               <a:ext uri="{FF2B5EF4-FFF2-40B4-BE49-F238E27FC236}">
-                <a16:creationId xmlns:a16="http://schemas.microsoft.com/office/drawing/2014/main" id="{A20542D6-E2F1-4D2D-B28A-72947658F007}"/>
+                <a16:creationId xmlns:a16="http://schemas.microsoft.com/office/drawing/2014/main" id="{3C4D654F-445B-412E-98AD-916C9ADB7E5B}"/>
               </a:ext>
             </a:extLst>
           </p:cNvPr>
@@ -14293,7 +14293,7 @@
           <p:cNvPr id="41" name="">
             <a:extLst xmlns:a="http://schemas.openxmlformats.org/drawingml/2006/main">
               <a:ext uri="{FF2B5EF4-FFF2-40B4-BE49-F238E27FC236}">
-                <a16:creationId xmlns:a16="http://schemas.microsoft.com/office/drawing/2014/main" id="{E4A0C8F7-B84A-4F37-BED6-7E3AB2DA05B0}"/>
+                <a16:creationId xmlns:a16="http://schemas.microsoft.com/office/drawing/2014/main" id="{ED1AC3A0-6664-4A9D-A328-1776F115ED6A}"/>
               </a:ext>
             </a:extLst>
           </p:cNvPr>
@@ -14345,7 +14345,7 @@
           <p:cNvPr id="42" name="">
             <a:extLst xmlns:a="http://schemas.openxmlformats.org/drawingml/2006/main">
               <a:ext uri="{FF2B5EF4-FFF2-40B4-BE49-F238E27FC236}">
-                <a16:creationId xmlns:a16="http://schemas.microsoft.com/office/drawing/2014/main" id="{86D49ECD-4D67-482B-B117-F5560B746FCB}"/>
+                <a16:creationId xmlns:a16="http://schemas.microsoft.com/office/drawing/2014/main" id="{68067A88-B24D-496F-9E0E-11C85C40A033}"/>
               </a:ext>
             </a:extLst>
           </p:cNvPr>
@@ -14397,7 +14397,7 @@
           <p:cNvPr id="43" name="">
             <a:extLst xmlns:a="http://schemas.openxmlformats.org/drawingml/2006/main">
               <a:ext uri="{FF2B5EF4-FFF2-40B4-BE49-F238E27FC236}">
-                <a16:creationId xmlns:a16="http://schemas.microsoft.com/office/drawing/2014/main" id="{DD24FD38-F9A4-46FC-B50E-1A6EF40516CE}"/>
+                <a16:creationId xmlns:a16="http://schemas.microsoft.com/office/drawing/2014/main" id="{F5AE2A8B-B881-40C4-90D3-C5C8A9DB6146}"/>
               </a:ext>
             </a:extLst>
           </p:cNvPr>
@@ -14449,7 +14449,7 @@
           <p:cNvPr id="44" name="">
             <a:extLst xmlns:a="http://schemas.openxmlformats.org/drawingml/2006/main">
               <a:ext uri="{FF2B5EF4-FFF2-40B4-BE49-F238E27FC236}">
-                <a16:creationId xmlns:a16="http://schemas.microsoft.com/office/drawing/2014/main" id="{02D5AE3D-3980-44E5-8017-7E4A527E314A}"/>
+                <a16:creationId xmlns:a16="http://schemas.microsoft.com/office/drawing/2014/main" id="{CD7C9034-17FB-4BE0-B86F-15E7DA5D93DA}"/>
               </a:ext>
             </a:extLst>
           </p:cNvPr>
@@ -14480,7 +14480,7 @@
           <p:cNvPr id="45" name="">
             <a:extLst xmlns:a="http://schemas.openxmlformats.org/drawingml/2006/main">
               <a:ext uri="{FF2B5EF4-FFF2-40B4-BE49-F238E27FC236}">
-                <a16:creationId xmlns:a16="http://schemas.microsoft.com/office/drawing/2014/main" id="{EFA613B5-082E-4387-ABE8-A65B50E6BA14}"/>
+                <a16:creationId xmlns:a16="http://schemas.microsoft.com/office/drawing/2014/main" id="{3052EC7A-8F11-4408-92E0-9D51E36311DF}"/>
               </a:ext>
             </a:extLst>
           </p:cNvPr>
@@ -14532,7 +14532,7 @@
           <p:cNvPr id="46" name="">
             <a:extLst xmlns:a="http://schemas.openxmlformats.org/drawingml/2006/main">
               <a:ext uri="{FF2B5EF4-FFF2-40B4-BE49-F238E27FC236}">
-                <a16:creationId xmlns:a16="http://schemas.microsoft.com/office/drawing/2014/main" id="{A891306E-E064-4643-84DB-E01D4F88A986}"/>
+                <a16:creationId xmlns:a16="http://schemas.microsoft.com/office/drawing/2014/main" id="{0290D492-FEB3-4897-88C0-648F863808DC}"/>
               </a:ext>
             </a:extLst>
           </p:cNvPr>
@@ -14584,7 +14584,7 @@
           <p:cNvPr id="47" name="">
             <a:extLst xmlns:a="http://schemas.openxmlformats.org/drawingml/2006/main">
               <a:ext uri="{FF2B5EF4-FFF2-40B4-BE49-F238E27FC236}">
-                <a16:creationId xmlns:a16="http://schemas.microsoft.com/office/drawing/2014/main" id="{C645799F-5457-4FD7-8B42-6AAA7577CC7E}"/>
+                <a16:creationId xmlns:a16="http://schemas.microsoft.com/office/drawing/2014/main" id="{8CE933A8-34D2-4995-8ABE-9F8087619916}"/>
               </a:ext>
             </a:extLst>
           </p:cNvPr>
@@ -14636,7 +14636,7 @@
           <p:cNvPr id="48" name="">
             <a:extLst xmlns:a="http://schemas.openxmlformats.org/drawingml/2006/main">
               <a:ext uri="{FF2B5EF4-FFF2-40B4-BE49-F238E27FC236}">
-                <a16:creationId xmlns:a16="http://schemas.microsoft.com/office/drawing/2014/main" id="{A3104461-021F-4C23-BAE2-FF560BBA9B94}"/>
+                <a16:creationId xmlns:a16="http://schemas.microsoft.com/office/drawing/2014/main" id="{0176E642-EB3E-4242-8D45-D4468AF0C5E4}"/>
               </a:ext>
             </a:extLst>
           </p:cNvPr>
@@ -14688,7 +14688,7 @@
           <p:cNvPr id="49" name="">
             <a:extLst xmlns:a="http://schemas.openxmlformats.org/drawingml/2006/main">
               <a:ext uri="{FF2B5EF4-FFF2-40B4-BE49-F238E27FC236}">
-                <a16:creationId xmlns:a16="http://schemas.microsoft.com/office/drawing/2014/main" id="{4147AB3B-0B83-4E1C-9EF7-54CBEB35A3B6}"/>
+                <a16:creationId xmlns:a16="http://schemas.microsoft.com/office/drawing/2014/main" id="{35843602-CBEE-42ED-863C-8D7FA51331FD}"/>
               </a:ext>
             </a:extLst>
           </p:cNvPr>
@@ -14740,7 +14740,7 @@
           <p:cNvPr id="50" name="">
             <a:extLst xmlns:a="http://schemas.openxmlformats.org/drawingml/2006/main">
               <a:ext uri="{FF2B5EF4-FFF2-40B4-BE49-F238E27FC236}">
-                <a16:creationId xmlns:a16="http://schemas.microsoft.com/office/drawing/2014/main" id="{E27613D5-ABF7-440F-BE23-AF993BE6603F}"/>
+                <a16:creationId xmlns:a16="http://schemas.microsoft.com/office/drawing/2014/main" id="{CBD2D972-3577-4DCF-8417-8D7FB9895ED7}"/>
               </a:ext>
             </a:extLst>
           </p:cNvPr>
@@ -14771,7 +14771,7 @@
           <p:cNvPr id="51" name="">
             <a:extLst xmlns:a="http://schemas.openxmlformats.org/drawingml/2006/main">
               <a:ext uri="{FF2B5EF4-FFF2-40B4-BE49-F238E27FC236}">
-                <a16:creationId xmlns:a16="http://schemas.microsoft.com/office/drawing/2014/main" id="{775692F8-E696-4B50-BEF8-34685FCF0AA5}"/>
+                <a16:creationId xmlns:a16="http://schemas.microsoft.com/office/drawing/2014/main" id="{FAAFCA9D-E9CD-4C2F-A673-E39486D5EECC}"/>
               </a:ext>
             </a:extLst>
           </p:cNvPr>
@@ -14802,7 +14802,7 @@
           <p:cNvPr id="52" name="">
             <a:extLst xmlns:a="http://schemas.openxmlformats.org/drawingml/2006/main">
               <a:ext uri="{FF2B5EF4-FFF2-40B4-BE49-F238E27FC236}">
-                <a16:creationId xmlns:a16="http://schemas.microsoft.com/office/drawing/2014/main" id="{074143E8-A919-42CB-878C-9388C2813D6B}"/>
+                <a16:creationId xmlns:a16="http://schemas.microsoft.com/office/drawing/2014/main" id="{25E8ED7E-DAEF-4AC5-AB63-4981F0CA120D}"/>
               </a:ext>
             </a:extLst>
           </p:cNvPr>
@@ -14854,7 +14854,7 @@
           <p:cNvPr id="53" name="">
             <a:extLst xmlns:a="http://schemas.openxmlformats.org/drawingml/2006/main">
               <a:ext uri="{FF2B5EF4-FFF2-40B4-BE49-F238E27FC236}">
-                <a16:creationId xmlns:a16="http://schemas.microsoft.com/office/drawing/2014/main" id="{FAEBEFB2-7768-4C4C-B436-5208DD548E26}"/>
+                <a16:creationId xmlns:a16="http://schemas.microsoft.com/office/drawing/2014/main" id="{5378A8B4-7C62-47AA-966D-1887BCDDE64B}"/>
               </a:ext>
             </a:extLst>
           </p:cNvPr>
@@ -14906,7 +14906,7 @@
           <p:cNvPr id="54" name="">
             <a:extLst xmlns:a="http://schemas.openxmlformats.org/drawingml/2006/main">
               <a:ext uri="{FF2B5EF4-FFF2-40B4-BE49-F238E27FC236}">
-                <a16:creationId xmlns:a16="http://schemas.microsoft.com/office/drawing/2014/main" id="{9A82FCC6-4235-4FAA-9CDE-25636C8F6F18}"/>
+                <a16:creationId xmlns:a16="http://schemas.microsoft.com/office/drawing/2014/main" id="{43441050-B6EC-44A4-8D8D-543EB7125FEB}"/>
               </a:ext>
             </a:extLst>
           </p:cNvPr>
@@ -14958,7 +14958,7 @@
           <p:cNvPr id="55" name="">
             <a:extLst xmlns:a="http://schemas.openxmlformats.org/drawingml/2006/main">
               <a:ext uri="{FF2B5EF4-FFF2-40B4-BE49-F238E27FC236}">
-                <a16:creationId xmlns:a16="http://schemas.microsoft.com/office/drawing/2014/main" id="{28787614-8775-4CCD-B2FA-E6C28C8BFC1C}"/>
+                <a16:creationId xmlns:a16="http://schemas.microsoft.com/office/drawing/2014/main" id="{4749B6DE-A4D1-4F3B-A507-B6638E1F68C0}"/>
               </a:ext>
             </a:extLst>
           </p:cNvPr>
@@ -15010,7 +15010,7 @@
           <p:cNvPr id="56" name="">
             <a:extLst xmlns:a="http://schemas.openxmlformats.org/drawingml/2006/main">
               <a:ext uri="{FF2B5EF4-FFF2-40B4-BE49-F238E27FC236}">
-                <a16:creationId xmlns:a16="http://schemas.microsoft.com/office/drawing/2014/main" id="{2D3A5470-E00E-400E-8780-2CD2AFE60A43}"/>
+                <a16:creationId xmlns:a16="http://schemas.microsoft.com/office/drawing/2014/main" id="{4F3D05F3-2540-459E-8D47-3A3BC65FFBBA}"/>
               </a:ext>
             </a:extLst>
           </p:cNvPr>
@@ -15062,7 +15062,7 @@
           <p:cNvPr id="57" name="">
             <a:extLst xmlns:a="http://schemas.openxmlformats.org/drawingml/2006/main">
               <a:ext uri="{FF2B5EF4-FFF2-40B4-BE49-F238E27FC236}">
-                <a16:creationId xmlns:a16="http://schemas.microsoft.com/office/drawing/2014/main" id="{E07E2DE9-B6B1-495C-83BA-3E6A40D2CF08}"/>
+                <a16:creationId xmlns:a16="http://schemas.microsoft.com/office/drawing/2014/main" id="{B99D88F8-E22D-49F0-99A5-060E4F14E695}"/>
               </a:ext>
             </a:extLst>
           </p:cNvPr>
@@ -15093,7 +15093,7 @@
           <p:cNvPr id="58" name="">
             <a:extLst xmlns:a="http://schemas.openxmlformats.org/drawingml/2006/main">
               <a:ext uri="{FF2B5EF4-FFF2-40B4-BE49-F238E27FC236}">
-                <a16:creationId xmlns:a16="http://schemas.microsoft.com/office/drawing/2014/main" id="{FEB3E921-99DC-4B64-A4B2-A131C30A4BFF}"/>
+                <a16:creationId xmlns:a16="http://schemas.microsoft.com/office/drawing/2014/main" id="{3FDBB1C5-7B07-46C1-B017-E1A844116CA5}"/>
               </a:ext>
             </a:extLst>
           </p:cNvPr>
@@ -15145,7 +15145,7 @@
           <p:cNvPr id="59" name="">
             <a:extLst xmlns:a="http://schemas.openxmlformats.org/drawingml/2006/main">
               <a:ext uri="{FF2B5EF4-FFF2-40B4-BE49-F238E27FC236}">
-                <a16:creationId xmlns:a16="http://schemas.microsoft.com/office/drawing/2014/main" id="{19D46B6F-AE9D-48A2-A24D-2F5DF1130F01}"/>
+                <a16:creationId xmlns:a16="http://schemas.microsoft.com/office/drawing/2014/main" id="{AEFB0CFF-079C-44EC-8EB0-B8FADADBB0E3}"/>
               </a:ext>
             </a:extLst>
           </p:cNvPr>
@@ -15197,7 +15197,7 @@
           <p:cNvPr id="60" name="">
             <a:extLst xmlns:a="http://schemas.openxmlformats.org/drawingml/2006/main">
               <a:ext uri="{FF2B5EF4-FFF2-40B4-BE49-F238E27FC236}">
-                <a16:creationId xmlns:a16="http://schemas.microsoft.com/office/drawing/2014/main" id="{93005E0B-F6CF-4377-8F13-107B48B51798}"/>
+                <a16:creationId xmlns:a16="http://schemas.microsoft.com/office/drawing/2014/main" id="{7E68A870-9BB6-4A23-9B36-9BA859F5CE98}"/>
               </a:ext>
             </a:extLst>
           </p:cNvPr>
@@ -15249,7 +15249,7 @@
           <p:cNvPr id="61" name="">
             <a:extLst xmlns:a="http://schemas.openxmlformats.org/drawingml/2006/main">
               <a:ext uri="{FF2B5EF4-FFF2-40B4-BE49-F238E27FC236}">
-                <a16:creationId xmlns:a16="http://schemas.microsoft.com/office/drawing/2014/main" id="{02F60FDD-76A8-4EEB-A56B-8BC293CEB3D8}"/>
+                <a16:creationId xmlns:a16="http://schemas.microsoft.com/office/drawing/2014/main" id="{8E86E690-F87C-4CA3-BED5-DA1AFB7F2507}"/>
               </a:ext>
             </a:extLst>
           </p:cNvPr>
@@ -15301,7 +15301,7 @@
           <p:cNvPr id="62" name="">
             <a:extLst xmlns:a="http://schemas.openxmlformats.org/drawingml/2006/main">
               <a:ext uri="{FF2B5EF4-FFF2-40B4-BE49-F238E27FC236}">
-                <a16:creationId xmlns:a16="http://schemas.microsoft.com/office/drawing/2014/main" id="{7BB3B5A3-814F-4422-B707-0EF95EC869F7}"/>
+                <a16:creationId xmlns:a16="http://schemas.microsoft.com/office/drawing/2014/main" id="{68D44F83-4B67-4CD1-A98B-AE1B087419CC}"/>
               </a:ext>
             </a:extLst>
           </p:cNvPr>
@@ -15353,7 +15353,7 @@
           <p:cNvPr id="63" name="">
             <a:extLst xmlns:a="http://schemas.openxmlformats.org/drawingml/2006/main">
               <a:ext uri="{FF2B5EF4-FFF2-40B4-BE49-F238E27FC236}">
-                <a16:creationId xmlns:a16="http://schemas.microsoft.com/office/drawing/2014/main" id="{B03B3D59-5213-46C1-828F-B7E57E3BC215}"/>
+                <a16:creationId xmlns:a16="http://schemas.microsoft.com/office/drawing/2014/main" id="{AC995789-575B-4979-9464-FD60DA918661}"/>
               </a:ext>
             </a:extLst>
           </p:cNvPr>
@@ -15384,7 +15384,7 @@
           <p:cNvPr id="64" name="">
             <a:extLst xmlns:a="http://schemas.openxmlformats.org/drawingml/2006/main">
               <a:ext uri="{FF2B5EF4-FFF2-40B4-BE49-F238E27FC236}">
-                <a16:creationId xmlns:a16="http://schemas.microsoft.com/office/drawing/2014/main" id="{9CB54E0E-A9FA-4EEA-B06D-5A7DA9510FDB}"/>
+                <a16:creationId xmlns:a16="http://schemas.microsoft.com/office/drawing/2014/main" id="{83519D7D-3768-48A6-8DA8-9BC783A921B3}"/>
               </a:ext>
             </a:extLst>
           </p:cNvPr>
@@ -15415,7 +15415,7 @@
           <p:cNvPr id="65" name="">
             <a:extLst xmlns:a="http://schemas.openxmlformats.org/drawingml/2006/main">
               <a:ext uri="{FF2B5EF4-FFF2-40B4-BE49-F238E27FC236}">
-                <a16:creationId xmlns:a16="http://schemas.microsoft.com/office/drawing/2014/main" id="{6AA56612-24BC-4F64-A1A9-6842FABB2111}"/>
+                <a16:creationId xmlns:a16="http://schemas.microsoft.com/office/drawing/2014/main" id="{F0B30490-4FB4-4F18-8939-8847DC9831D1}"/>
               </a:ext>
             </a:extLst>
           </p:cNvPr>
@@ -15467,7 +15467,7 @@
           <p:cNvPr id="66" name="">
             <a:extLst xmlns:a="http://schemas.openxmlformats.org/drawingml/2006/main">
               <a:ext uri="{FF2B5EF4-FFF2-40B4-BE49-F238E27FC236}">
-                <a16:creationId xmlns:a16="http://schemas.microsoft.com/office/drawing/2014/main" id="{3C15AC69-C643-4C93-8254-745AFBCAE255}"/>
+                <a16:creationId xmlns:a16="http://schemas.microsoft.com/office/drawing/2014/main" id="{9A4432B8-26C3-4689-9B8B-AD934174F5EA}"/>
               </a:ext>
             </a:extLst>
           </p:cNvPr>
@@ -15519,7 +15519,7 @@
           <p:cNvPr id="67" name="">
             <a:extLst xmlns:a="http://schemas.openxmlformats.org/drawingml/2006/main">
               <a:ext uri="{FF2B5EF4-FFF2-40B4-BE49-F238E27FC236}">
-                <a16:creationId xmlns:a16="http://schemas.microsoft.com/office/drawing/2014/main" id="{38F13950-7DB5-43C5-858E-0792D4160BED}"/>
+                <a16:creationId xmlns:a16="http://schemas.microsoft.com/office/drawing/2014/main" id="{4CE3C324-E751-4D4F-96D0-A9D43ACDA195}"/>
               </a:ext>
             </a:extLst>
           </p:cNvPr>
@@ -15571,7 +15571,7 @@
           <p:cNvPr id="68" name="">
             <a:extLst xmlns:a="http://schemas.openxmlformats.org/drawingml/2006/main">
               <a:ext uri="{FF2B5EF4-FFF2-40B4-BE49-F238E27FC236}">
-                <a16:creationId xmlns:a16="http://schemas.microsoft.com/office/drawing/2014/main" id="{C0BA7D7A-A4A0-44D2-8C3F-E0379961DDF8}"/>
+                <a16:creationId xmlns:a16="http://schemas.microsoft.com/office/drawing/2014/main" id="{823CC4E5-D5EC-401B-B957-2A5377A4D084}"/>
               </a:ext>
             </a:extLst>
           </p:cNvPr>
@@ -15623,7 +15623,7 @@
           <p:cNvPr id="69" name="">
             <a:extLst xmlns:a="http://schemas.openxmlformats.org/drawingml/2006/main">
               <a:ext uri="{FF2B5EF4-FFF2-40B4-BE49-F238E27FC236}">
-                <a16:creationId xmlns:a16="http://schemas.microsoft.com/office/drawing/2014/main" id="{067CFDFF-9F95-4D84-A05D-93D6FB980DB0}"/>
+                <a16:creationId xmlns:a16="http://schemas.microsoft.com/office/drawing/2014/main" id="{332BC2F4-9DF8-4232-B5F8-DF4ADB1BFBCB}"/>
               </a:ext>
             </a:extLst>
           </p:cNvPr>
@@ -15675,7 +15675,7 @@
           <p:cNvPr id="70" name="">
             <a:extLst xmlns:a="http://schemas.openxmlformats.org/drawingml/2006/main">
               <a:ext uri="{FF2B5EF4-FFF2-40B4-BE49-F238E27FC236}">
-                <a16:creationId xmlns:a16="http://schemas.microsoft.com/office/drawing/2014/main" id="{A43A7633-CAFE-4319-A6A5-1979872A4322}"/>
+                <a16:creationId xmlns:a16="http://schemas.microsoft.com/office/drawing/2014/main" id="{D585E244-A7CB-4AAC-96B3-3D35E84FB43A}"/>
               </a:ext>
             </a:extLst>
           </p:cNvPr>
@@ -15706,7 +15706,7 @@
           <p:cNvPr id="71" name="">
             <a:extLst xmlns:a="http://schemas.openxmlformats.org/drawingml/2006/main">
               <a:ext uri="{FF2B5EF4-FFF2-40B4-BE49-F238E27FC236}">
-                <a16:creationId xmlns:a16="http://schemas.microsoft.com/office/drawing/2014/main" id="{BD9D75EF-966E-4280-B1B1-FB8273C2C11E}"/>
+                <a16:creationId xmlns:a16="http://schemas.microsoft.com/office/drawing/2014/main" id="{0648D30F-26EA-4EF7-B099-F59BF5FB3388}"/>
               </a:ext>
             </a:extLst>
           </p:cNvPr>
@@ -15758,7 +15758,7 @@
           <p:cNvPr id="72" name="">
             <a:extLst xmlns:a="http://schemas.openxmlformats.org/drawingml/2006/main">
               <a:ext uri="{FF2B5EF4-FFF2-40B4-BE49-F238E27FC236}">
-                <a16:creationId xmlns:a16="http://schemas.microsoft.com/office/drawing/2014/main" id="{482359E3-EEF5-42D8-A4CE-8F03FA947EF7}"/>
+                <a16:creationId xmlns:a16="http://schemas.microsoft.com/office/drawing/2014/main" id="{97037C55-4B49-4B73-A812-1E2313E3C9FB}"/>
               </a:ext>
             </a:extLst>
           </p:cNvPr>
@@ -15810,7 +15810,7 @@
           <p:cNvPr id="73" name="">
             <a:extLst xmlns:a="http://schemas.openxmlformats.org/drawingml/2006/main">
               <a:ext uri="{FF2B5EF4-FFF2-40B4-BE49-F238E27FC236}">
-                <a16:creationId xmlns:a16="http://schemas.microsoft.com/office/drawing/2014/main" id="{D96636D5-D5AA-4EA0-96AB-6139B3DAE408}"/>
+                <a16:creationId xmlns:a16="http://schemas.microsoft.com/office/drawing/2014/main" id="{453DFE2C-E2C8-4076-9BEA-75E48E5A087C}"/>
               </a:ext>
             </a:extLst>
           </p:cNvPr>
@@ -15862,7 +15862,7 @@
           <p:cNvPr id="74" name="">
             <a:extLst xmlns:a="http://schemas.openxmlformats.org/drawingml/2006/main">
               <a:ext uri="{FF2B5EF4-FFF2-40B4-BE49-F238E27FC236}">
-                <a16:creationId xmlns:a16="http://schemas.microsoft.com/office/drawing/2014/main" id="{B46CAFBB-F201-4E48-9B90-223E5EFA2129}"/>
+                <a16:creationId xmlns:a16="http://schemas.microsoft.com/office/drawing/2014/main" id="{47BC32B8-5E76-4BE5-AA3A-C73EDED55C78}"/>
               </a:ext>
             </a:extLst>
           </p:cNvPr>
@@ -15914,7 +15914,7 @@
           <p:cNvPr id="75" name="">
             <a:extLst xmlns:a="http://schemas.openxmlformats.org/drawingml/2006/main">
               <a:ext uri="{FF2B5EF4-FFF2-40B4-BE49-F238E27FC236}">
-                <a16:creationId xmlns:a16="http://schemas.microsoft.com/office/drawing/2014/main" id="{9BE4695B-FF09-4CF3-A065-D84A15B8AB32}"/>
+                <a16:creationId xmlns:a16="http://schemas.microsoft.com/office/drawing/2014/main" id="{FC213967-0790-45DF-BF3B-ED286590598E}"/>
               </a:ext>
             </a:extLst>
           </p:cNvPr>
@@ -15966,7 +15966,7 @@
           <p:cNvPr id="76" name="">
             <a:extLst xmlns:a="http://schemas.openxmlformats.org/drawingml/2006/main">
               <a:ext uri="{FF2B5EF4-FFF2-40B4-BE49-F238E27FC236}">
-                <a16:creationId xmlns:a16="http://schemas.microsoft.com/office/drawing/2014/main" id="{A0969D26-0816-46DB-B138-AE677C6CB367}"/>
+                <a16:creationId xmlns:a16="http://schemas.microsoft.com/office/drawing/2014/main" id="{9C24ED98-C3CE-4EA5-AC57-DE34D1E9C379}"/>
               </a:ext>
             </a:extLst>
           </p:cNvPr>
@@ -15997,7 +15997,7 @@
           <p:cNvPr id="77" name="">
             <a:extLst xmlns:a="http://schemas.openxmlformats.org/drawingml/2006/main">
               <a:ext uri="{FF2B5EF4-FFF2-40B4-BE49-F238E27FC236}">
-                <a16:creationId xmlns:a16="http://schemas.microsoft.com/office/drawing/2014/main" id="{741D926D-3192-447D-A836-D611C124E97D}"/>
+                <a16:creationId xmlns:a16="http://schemas.microsoft.com/office/drawing/2014/main" id="{57EC266F-7DF9-4A10-9B78-3643A9A16487}"/>
               </a:ext>
             </a:extLst>
           </p:cNvPr>
@@ -16028,7 +16028,7 @@
           <p:cNvPr id="78" name="">
             <a:extLst xmlns:a="http://schemas.openxmlformats.org/drawingml/2006/main">
               <a:ext uri="{FF2B5EF4-FFF2-40B4-BE49-F238E27FC236}">
-                <a16:creationId xmlns:a16="http://schemas.microsoft.com/office/drawing/2014/main" id="{05CDBE30-638D-4BC3-83C1-A7BF1B31FE2F}"/>
+                <a16:creationId xmlns:a16="http://schemas.microsoft.com/office/drawing/2014/main" id="{108F063F-11C9-4ACE-8258-A9EFB9863B2D}"/>
               </a:ext>
             </a:extLst>
           </p:cNvPr>
@@ -16080,7 +16080,7 @@
           <p:cNvPr id="79" name="">
             <a:extLst xmlns:a="http://schemas.openxmlformats.org/drawingml/2006/main">
               <a:ext uri="{FF2B5EF4-FFF2-40B4-BE49-F238E27FC236}">
-                <a16:creationId xmlns:a16="http://schemas.microsoft.com/office/drawing/2014/main" id="{102E3EC8-7417-4CFD-A110-E7A167218A5F}"/>
+                <a16:creationId xmlns:a16="http://schemas.microsoft.com/office/drawing/2014/main" id="{E9FF92A4-B1EF-498F-B10F-F3E662C8D85F}"/>
               </a:ext>
             </a:extLst>
           </p:cNvPr>
@@ -16132,7 +16132,7 @@
           <p:cNvPr id="80" name="">
             <a:extLst xmlns:a="http://schemas.openxmlformats.org/drawingml/2006/main">
               <a:ext uri="{FF2B5EF4-FFF2-40B4-BE49-F238E27FC236}">
-                <a16:creationId xmlns:a16="http://schemas.microsoft.com/office/drawing/2014/main" id="{830BE9B2-F831-4EE3-8E06-D63F533972ED}"/>
+                <a16:creationId xmlns:a16="http://schemas.microsoft.com/office/drawing/2014/main" id="{A228199A-78ED-423C-A720-11CC81E59A7A}"/>
               </a:ext>
             </a:extLst>
           </p:cNvPr>
@@ -16184,7 +16184,7 @@
           <p:cNvPr id="81" name="">
             <a:extLst xmlns:a="http://schemas.openxmlformats.org/drawingml/2006/main">
               <a:ext uri="{FF2B5EF4-FFF2-40B4-BE49-F238E27FC236}">
-                <a16:creationId xmlns:a16="http://schemas.microsoft.com/office/drawing/2014/main" id="{4E785F5F-19DF-4184-ADCC-69170D064FC5}"/>
+                <a16:creationId xmlns:a16="http://schemas.microsoft.com/office/drawing/2014/main" id="{8875D684-1FC2-47C3-A876-CCAF693645FC}"/>
               </a:ext>
             </a:extLst>
           </p:cNvPr>
@@ -16236,7 +16236,7 @@
           <p:cNvPr id="82" name="">
             <a:extLst xmlns:a="http://schemas.openxmlformats.org/drawingml/2006/main">
               <a:ext uri="{FF2B5EF4-FFF2-40B4-BE49-F238E27FC236}">
-                <a16:creationId xmlns:a16="http://schemas.microsoft.com/office/drawing/2014/main" id="{E512EA98-8901-43B9-87D9-6BBB97F97FB4}"/>
+                <a16:creationId xmlns:a16="http://schemas.microsoft.com/office/drawing/2014/main" id="{A0D231E2-0729-4D05-AC5A-392B78336F35}"/>
               </a:ext>
             </a:extLst>
           </p:cNvPr>
@@ -16288,7 +16288,7 @@
           <p:cNvPr id="83" name="">
             <a:extLst xmlns:a="http://schemas.openxmlformats.org/drawingml/2006/main">
               <a:ext uri="{FF2B5EF4-FFF2-40B4-BE49-F238E27FC236}">
-                <a16:creationId xmlns:a16="http://schemas.microsoft.com/office/drawing/2014/main" id="{09482D18-DF29-4146-9E8E-48E29680B3CD}"/>
+                <a16:creationId xmlns:a16="http://schemas.microsoft.com/office/drawing/2014/main" id="{76123CC5-B583-4949-8B34-AE84CE775308}"/>
               </a:ext>
             </a:extLst>
           </p:cNvPr>
@@ -16319,7 +16319,7 @@
           <p:cNvPr id="84" name="">
             <a:extLst xmlns:a="http://schemas.openxmlformats.org/drawingml/2006/main">
               <a:ext uri="{FF2B5EF4-FFF2-40B4-BE49-F238E27FC236}">
-                <a16:creationId xmlns:a16="http://schemas.microsoft.com/office/drawing/2014/main" id="{C1B20D96-601E-4F60-9C20-29D6E987D995}"/>
+                <a16:creationId xmlns:a16="http://schemas.microsoft.com/office/drawing/2014/main" id="{D0F70BE0-5459-42EF-BE12-420F8D4FEFF6}"/>
               </a:ext>
             </a:extLst>
           </p:cNvPr>
@@ -16371,7 +16371,7 @@
           <p:cNvPr id="85" name="">
             <a:extLst xmlns:a="http://schemas.openxmlformats.org/drawingml/2006/main">
               <a:ext uri="{FF2B5EF4-FFF2-40B4-BE49-F238E27FC236}">
-                <a16:creationId xmlns:a16="http://schemas.microsoft.com/office/drawing/2014/main" id="{D3BE4F66-9CE4-4B9E-B62C-F31BFF15CF51}"/>
+                <a16:creationId xmlns:a16="http://schemas.microsoft.com/office/drawing/2014/main" id="{C5C3A6CD-BE45-4E43-8FEC-EAC4FED2FC1C}"/>
               </a:ext>
             </a:extLst>
           </p:cNvPr>
@@ -16423,7 +16423,7 @@
           <p:cNvPr id="86" name="">
             <a:extLst xmlns:a="http://schemas.openxmlformats.org/drawingml/2006/main">
               <a:ext uri="{FF2B5EF4-FFF2-40B4-BE49-F238E27FC236}">
-                <a16:creationId xmlns:a16="http://schemas.microsoft.com/office/drawing/2014/main" id="{36954DFC-AA58-4CE6-B1D0-426A27E9EFDE}"/>
+                <a16:creationId xmlns:a16="http://schemas.microsoft.com/office/drawing/2014/main" id="{8689080E-D65C-4DCD-A406-CDBC067E690E}"/>
               </a:ext>
             </a:extLst>
           </p:cNvPr>
@@ -16475,7 +16475,7 @@
           <p:cNvPr id="87" name="">
             <a:extLst xmlns:a="http://schemas.openxmlformats.org/drawingml/2006/main">
               <a:ext uri="{FF2B5EF4-FFF2-40B4-BE49-F238E27FC236}">
-                <a16:creationId xmlns:a16="http://schemas.microsoft.com/office/drawing/2014/main" id="{5245524C-BE4B-45DA-8DCF-F2F9644A34A7}"/>
+                <a16:creationId xmlns:a16="http://schemas.microsoft.com/office/drawing/2014/main" id="{7446E599-7100-4EE0-A29E-76511F8E10F5}"/>
               </a:ext>
             </a:extLst>
           </p:cNvPr>
@@ -16527,7 +16527,7 @@
           <p:cNvPr id="88" name="">
             <a:extLst xmlns:a="http://schemas.openxmlformats.org/drawingml/2006/main">
               <a:ext uri="{FF2B5EF4-FFF2-40B4-BE49-F238E27FC236}">
-                <a16:creationId xmlns:a16="http://schemas.microsoft.com/office/drawing/2014/main" id="{B4FF7B91-5E4A-4D69-9601-4BBA5DBC0592}"/>
+                <a16:creationId xmlns:a16="http://schemas.microsoft.com/office/drawing/2014/main" id="{AD45B45B-53BD-4C41-8A97-07CA0E13EB6C}"/>
               </a:ext>
             </a:extLst>
           </p:cNvPr>
@@ -16579,7 +16579,7 @@
           <p:cNvPr id="89" name="">
             <a:extLst xmlns:a="http://schemas.openxmlformats.org/drawingml/2006/main">
               <a:ext uri="{FF2B5EF4-FFF2-40B4-BE49-F238E27FC236}">
-                <a16:creationId xmlns:a16="http://schemas.microsoft.com/office/drawing/2014/main" id="{974451F2-63E2-4AB6-9831-4B43DE71C3C4}"/>
+                <a16:creationId xmlns:a16="http://schemas.microsoft.com/office/drawing/2014/main" id="{0DE4CFD0-2933-4D5A-8A3D-02ECB11164AD}"/>
               </a:ext>
             </a:extLst>
           </p:cNvPr>
@@ -16610,7 +16610,7 @@
           <p:cNvPr id="90" name="">
             <a:extLst xmlns:a="http://schemas.openxmlformats.org/drawingml/2006/main">
               <a:ext uri="{FF2B5EF4-FFF2-40B4-BE49-F238E27FC236}">
-                <a16:creationId xmlns:a16="http://schemas.microsoft.com/office/drawing/2014/main" id="{429127D4-94C9-40FA-8C03-6B9DFA77ED2A}"/>
+                <a16:creationId xmlns:a16="http://schemas.microsoft.com/office/drawing/2014/main" id="{49DA831A-435C-4364-A976-C33A0379DEB3}"/>
               </a:ext>
             </a:extLst>
           </p:cNvPr>
@@ -16641,7 +16641,7 @@
           <p:cNvPr id="91" name="">
             <a:extLst xmlns:a="http://schemas.openxmlformats.org/drawingml/2006/main">
               <a:ext uri="{FF2B5EF4-FFF2-40B4-BE49-F238E27FC236}">
-                <a16:creationId xmlns:a16="http://schemas.microsoft.com/office/drawing/2014/main" id="{0CE39E92-F6D5-4802-9143-0A7FB83E9661}"/>
+                <a16:creationId xmlns:a16="http://schemas.microsoft.com/office/drawing/2014/main" id="{18850086-6A9A-44E0-AC2E-BF1532AC9048}"/>
               </a:ext>
             </a:extLst>
           </p:cNvPr>
@@ -16693,7 +16693,7 @@
           <p:cNvPr id="92" name="">
             <a:extLst xmlns:a="http://schemas.openxmlformats.org/drawingml/2006/main">
               <a:ext uri="{FF2B5EF4-FFF2-40B4-BE49-F238E27FC236}">
-                <a16:creationId xmlns:a16="http://schemas.microsoft.com/office/drawing/2014/main" id="{DF89FC0B-5117-46F3-BEC1-6CE33C16253E}"/>
+                <a16:creationId xmlns:a16="http://schemas.microsoft.com/office/drawing/2014/main" id="{DF05BDE0-7AF7-4382-A6C9-31C54478A253}"/>
               </a:ext>
             </a:extLst>
           </p:cNvPr>
@@ -16745,7 +16745,7 @@
           <p:cNvPr id="93" name="">
             <a:extLst xmlns:a="http://schemas.openxmlformats.org/drawingml/2006/main">
               <a:ext uri="{FF2B5EF4-FFF2-40B4-BE49-F238E27FC236}">
-                <a16:creationId xmlns:a16="http://schemas.microsoft.com/office/drawing/2014/main" id="{FCB0677A-E358-4728-A88A-AEE10AECE94B}"/>
+                <a16:creationId xmlns:a16="http://schemas.microsoft.com/office/drawing/2014/main" id="{3DFE47DD-23F9-4E6E-95E9-EAB1AA9D217D}"/>
               </a:ext>
             </a:extLst>
           </p:cNvPr>
@@ -16797,7 +16797,7 @@
           <p:cNvPr id="94" name="">
             <a:extLst xmlns:a="http://schemas.openxmlformats.org/drawingml/2006/main">
               <a:ext uri="{FF2B5EF4-FFF2-40B4-BE49-F238E27FC236}">
-                <a16:creationId xmlns:a16="http://schemas.microsoft.com/office/drawing/2014/main" id="{4CE53296-AD0A-4710-8130-16526A894EE7}"/>
+                <a16:creationId xmlns:a16="http://schemas.microsoft.com/office/drawing/2014/main" id="{A76534D8-F515-409A-ADD2-615404DACE82}"/>
               </a:ext>
             </a:extLst>
           </p:cNvPr>
@@ -16849,7 +16849,7 @@
           <p:cNvPr id="95" name="">
             <a:extLst xmlns:a="http://schemas.openxmlformats.org/drawingml/2006/main">
               <a:ext uri="{FF2B5EF4-FFF2-40B4-BE49-F238E27FC236}">
-                <a16:creationId xmlns:a16="http://schemas.microsoft.com/office/drawing/2014/main" id="{60453C7B-EBDA-4EB3-8554-734997162393}"/>
+                <a16:creationId xmlns:a16="http://schemas.microsoft.com/office/drawing/2014/main" id="{E4E243C3-1457-421F-A6B6-B006BCC1D836}"/>
               </a:ext>
             </a:extLst>
           </p:cNvPr>
@@ -16901,7 +16901,7 @@
           <p:cNvPr id="96" name="">
             <a:extLst xmlns:a="http://schemas.openxmlformats.org/drawingml/2006/main">
               <a:ext uri="{FF2B5EF4-FFF2-40B4-BE49-F238E27FC236}">
-                <a16:creationId xmlns:a16="http://schemas.microsoft.com/office/drawing/2014/main" id="{1A3CD914-9B43-4B22-889A-88E8731FA9E2}"/>
+                <a16:creationId xmlns:a16="http://schemas.microsoft.com/office/drawing/2014/main" id="{11D84F42-AEE2-46FA-9531-98BBEC1E8027}"/>
               </a:ext>
             </a:extLst>
           </p:cNvPr>
@@ -16932,7 +16932,7 @@
           <p:cNvPr id="97" name="">
             <a:extLst xmlns:a="http://schemas.openxmlformats.org/drawingml/2006/main">
               <a:ext uri="{FF2B5EF4-FFF2-40B4-BE49-F238E27FC236}">
-                <a16:creationId xmlns:a16="http://schemas.microsoft.com/office/drawing/2014/main" id="{17FF93CA-ECD1-4F5C-8E11-14DDE3B8C709}"/>
+                <a16:creationId xmlns:a16="http://schemas.microsoft.com/office/drawing/2014/main" id="{DA29256D-24FF-420E-A600-24AD2D0144DE}"/>
               </a:ext>
             </a:extLst>
           </p:cNvPr>
@@ -16984,7 +16984,7 @@
           <p:cNvPr id="98" name="">
             <a:extLst xmlns:a="http://schemas.openxmlformats.org/drawingml/2006/main">
               <a:ext uri="{FF2B5EF4-FFF2-40B4-BE49-F238E27FC236}">
-                <a16:creationId xmlns:a16="http://schemas.microsoft.com/office/drawing/2014/main" id="{27402A0B-AB83-42E0-82D8-A78B786868FA}"/>
+                <a16:creationId xmlns:a16="http://schemas.microsoft.com/office/drawing/2014/main" id="{EBB28AF9-6FE4-4300-A8FB-709819A0BF24}"/>
               </a:ext>
             </a:extLst>
           </p:cNvPr>
@@ -17036,7 +17036,7 @@
           <p:cNvPr id="99" name="">
             <a:extLst xmlns:a="http://schemas.openxmlformats.org/drawingml/2006/main">
               <a:ext uri="{FF2B5EF4-FFF2-40B4-BE49-F238E27FC236}">
-                <a16:creationId xmlns:a16="http://schemas.microsoft.com/office/drawing/2014/main" id="{14B34D55-B5CA-409C-8C5C-2394FA42F1F2}"/>
+                <a16:creationId xmlns:a16="http://schemas.microsoft.com/office/drawing/2014/main" id="{446AFDE4-F336-4D49-9D26-7FE208DAC70D}"/>
               </a:ext>
             </a:extLst>
           </p:cNvPr>
@@ -17088,7 +17088,7 @@
           <p:cNvPr id="100" name="">
             <a:extLst xmlns:a="http://schemas.openxmlformats.org/drawingml/2006/main">
               <a:ext uri="{FF2B5EF4-FFF2-40B4-BE49-F238E27FC236}">
-                <a16:creationId xmlns:a16="http://schemas.microsoft.com/office/drawing/2014/main" id="{C1B1A06F-6649-4905-99C9-644751939BC4}"/>
+                <a16:creationId xmlns:a16="http://schemas.microsoft.com/office/drawing/2014/main" id="{7E1F22E4-7E35-47CC-8742-92575BA361F6}"/>
               </a:ext>
             </a:extLst>
           </p:cNvPr>
@@ -17140,7 +17140,7 @@
           <p:cNvPr id="101" name="">
             <a:extLst xmlns:a="http://schemas.openxmlformats.org/drawingml/2006/main">
               <a:ext uri="{FF2B5EF4-FFF2-40B4-BE49-F238E27FC236}">
-                <a16:creationId xmlns:a16="http://schemas.microsoft.com/office/drawing/2014/main" id="{58FA19B5-9EB7-4033-A939-F774B3FD0901}"/>
+                <a16:creationId xmlns:a16="http://schemas.microsoft.com/office/drawing/2014/main" id="{FF879D2E-A780-4241-9CF5-E93FCD0C3EB7}"/>
               </a:ext>
             </a:extLst>
           </p:cNvPr>
@@ -17190,7 +17190,7 @@
     </p:spTree>
     <p:extLst>
       <p:ext uri="{BB962C8B-B14F-4D97-AF65-F5344CB8AC3E}">
-        <p14:creationId xmlns:p14="http://schemas.microsoft.com/office/powerpoint/2010/main" val="1957616490"/>
+        <p14:creationId xmlns:p14="http://schemas.microsoft.com/office/powerpoint/2010/main" val="2046279908"/>
       </p:ext>
     </p:extLst>
   </p:cSld>
@@ -17221,7 +17221,7 @@
           <p:cNvPr id="96" name="">
             <a:extLst xmlns:a="http://schemas.openxmlformats.org/drawingml/2006/main">
               <a:ext uri="{FF2B5EF4-FFF2-40B4-BE49-F238E27FC236}">
-                <a16:creationId xmlns:a16="http://schemas.microsoft.com/office/drawing/2014/main" id="{B1B412F7-6A98-4908-AF6E-65AADD0404CF}"/>
+                <a16:creationId xmlns:a16="http://schemas.microsoft.com/office/drawing/2014/main" id="{42BC6229-5E50-4EAE-AEE1-F2EA859F8BE9}"/>
               </a:ext>
             </a:extLst>
           </p:cNvPr>
@@ -17254,7 +17254,7 @@
           <p:cNvPr id="2" name="">
             <a:extLst xmlns:a="http://schemas.openxmlformats.org/drawingml/2006/main">
               <a:ext uri="{FF2B5EF4-FFF2-40B4-BE49-F238E27FC236}">
-                <a16:creationId xmlns:a16="http://schemas.microsoft.com/office/drawing/2014/main" id="{E3518DC4-9224-448B-BD70-9C6D2D00ADB8}"/>
+                <a16:creationId xmlns:a16="http://schemas.microsoft.com/office/drawing/2014/main" id="{0B057408-3396-4BA7-AADF-09C5387B56BB}"/>
               </a:ext>
             </a:extLst>
           </p:cNvPr>
@@ -17285,7 +17285,7 @@
           <p:cNvPr id="3" name="">
             <a:extLst xmlns:a="http://schemas.openxmlformats.org/drawingml/2006/main">
               <a:ext uri="{FF2B5EF4-FFF2-40B4-BE49-F238E27FC236}">
-                <a16:creationId xmlns:a16="http://schemas.microsoft.com/office/drawing/2014/main" id="{B4A04853-5B7E-45F7-B69B-71880826C970}"/>
+                <a16:creationId xmlns:a16="http://schemas.microsoft.com/office/drawing/2014/main" id="{985F9F13-3DE5-4856-B3AF-95F0F374B4EE}"/>
               </a:ext>
             </a:extLst>
           </p:cNvPr>
@@ -17337,7 +17337,7 @@
           <p:cNvPr id="4" name="">
             <a:extLst xmlns:a="http://schemas.openxmlformats.org/drawingml/2006/main">
               <a:ext uri="{FF2B5EF4-FFF2-40B4-BE49-F238E27FC236}">
-                <a16:creationId xmlns:a16="http://schemas.microsoft.com/office/drawing/2014/main" id="{5C48E04F-196F-42A2-B055-13F8E420C6F7}"/>
+                <a16:creationId xmlns:a16="http://schemas.microsoft.com/office/drawing/2014/main" id="{57DA2B1F-45A6-4721-8501-647548E16CCF}"/>
               </a:ext>
             </a:extLst>
           </p:cNvPr>
@@ -17389,7 +17389,7 @@
           <p:cNvPr id="5" name="">
             <a:extLst xmlns:a="http://schemas.openxmlformats.org/drawingml/2006/main">
               <a:ext uri="{FF2B5EF4-FFF2-40B4-BE49-F238E27FC236}">
-                <a16:creationId xmlns:a16="http://schemas.microsoft.com/office/drawing/2014/main" id="{D7A85F1E-12B3-4C14-AD8C-4B41B7456980}"/>
+                <a16:creationId xmlns:a16="http://schemas.microsoft.com/office/drawing/2014/main" id="{BC0D0F82-08E7-4FFA-961B-E66D7895B74C}"/>
               </a:ext>
             </a:extLst>
           </p:cNvPr>
@@ -17424,7 +17424,7 @@
           <p:nvPr/>
         </p:nvPicPr>
         <p:blipFill>
-          <a:blip xmlns:r="http://schemas.openxmlformats.org/officeDocument/2006/relationships" xmlns:a="http://schemas.openxmlformats.org/drawingml/2006/main" r:embed="R534b2cc4f4844c59"/>
+          <a:blip xmlns:r="http://schemas.openxmlformats.org/officeDocument/2006/relationships" xmlns:a="http://schemas.openxmlformats.org/drawingml/2006/main" r:embed="R4ff039509f0746fb"/>
           <a:stretch xmlns:a="http://schemas.openxmlformats.org/drawingml/2006/main"/>
         </p:blipFill>
         <p:spPr>
@@ -17442,7 +17442,7 @@
           <p:cNvPr id="7" name="">
             <a:extLst xmlns:a="http://schemas.openxmlformats.org/drawingml/2006/main">
               <a:ext uri="{FF2B5EF4-FFF2-40B4-BE49-F238E27FC236}">
-                <a16:creationId xmlns:a16="http://schemas.microsoft.com/office/drawing/2014/main" id="{095BFB1D-B79D-447A-B599-FCFC0F355179}"/>
+                <a16:creationId xmlns:a16="http://schemas.microsoft.com/office/drawing/2014/main" id="{646A0643-27B5-43E5-AA56-610D23B01A9E}"/>
               </a:ext>
             </a:extLst>
           </p:cNvPr>
@@ -17494,7 +17494,7 @@
           <p:cNvPr id="8" name="">
             <a:extLst xmlns:a="http://schemas.openxmlformats.org/drawingml/2006/main">
               <a:ext uri="{FF2B5EF4-FFF2-40B4-BE49-F238E27FC236}">
-                <a16:creationId xmlns:a16="http://schemas.microsoft.com/office/drawing/2014/main" id="{18BD8992-C175-4F89-889F-9F0D0F4DC661}"/>
+                <a16:creationId xmlns:a16="http://schemas.microsoft.com/office/drawing/2014/main" id="{E4F3D1B6-0D94-4CCB-A669-86A3B4DC958F}"/>
               </a:ext>
             </a:extLst>
           </p:cNvPr>
@@ -17546,7 +17546,7 @@
           <p:cNvPr id="9" name="">
             <a:extLst xmlns:a="http://schemas.openxmlformats.org/drawingml/2006/main">
               <a:ext uri="{FF2B5EF4-FFF2-40B4-BE49-F238E27FC236}">
-                <a16:creationId xmlns:a16="http://schemas.microsoft.com/office/drawing/2014/main" id="{8D0B797D-0FB7-406D-BF23-4A6FA1A17C63}"/>
+                <a16:creationId xmlns:a16="http://schemas.microsoft.com/office/drawing/2014/main" id="{4A3129FD-5B15-4E58-A965-E97CF7AA16C3}"/>
               </a:ext>
             </a:extLst>
           </p:cNvPr>
@@ -17598,7 +17598,7 @@
           <p:cNvPr id="10" name="">
             <a:extLst xmlns:a="http://schemas.openxmlformats.org/drawingml/2006/main">
               <a:ext uri="{FF2B5EF4-FFF2-40B4-BE49-F238E27FC236}">
-                <a16:creationId xmlns:a16="http://schemas.microsoft.com/office/drawing/2014/main" id="{9786051F-0C45-4335-9460-C43E68A77084}"/>
+                <a16:creationId xmlns:a16="http://schemas.microsoft.com/office/drawing/2014/main" id="{B3B3DE39-ADDB-49DD-9BB0-5A9C12E1034B}"/>
               </a:ext>
             </a:extLst>
           </p:cNvPr>
@@ -17650,7 +17650,7 @@
           <p:cNvPr id="11" name="">
             <a:extLst xmlns:a="http://schemas.openxmlformats.org/drawingml/2006/main">
               <a:ext uri="{FF2B5EF4-FFF2-40B4-BE49-F238E27FC236}">
-                <a16:creationId xmlns:a16="http://schemas.microsoft.com/office/drawing/2014/main" id="{5CDEC61D-08D9-43CE-8EA1-10BA1D693CB9}"/>
+                <a16:creationId xmlns:a16="http://schemas.microsoft.com/office/drawing/2014/main" id="{8ACD4C11-72A4-4A0D-8266-66C13433FADF}"/>
               </a:ext>
             </a:extLst>
           </p:cNvPr>
@@ -17681,7 +17681,7 @@
           <p:cNvPr id="12" name="">
             <a:extLst xmlns:a="http://schemas.openxmlformats.org/drawingml/2006/main">
               <a:ext uri="{FF2B5EF4-FFF2-40B4-BE49-F238E27FC236}">
-                <a16:creationId xmlns:a16="http://schemas.microsoft.com/office/drawing/2014/main" id="{AF260242-5E7A-4755-97AC-10A37AD61534}"/>
+                <a16:creationId xmlns:a16="http://schemas.microsoft.com/office/drawing/2014/main" id="{AE5F4771-8AA4-40A5-B9B7-2F83DF898357}"/>
               </a:ext>
             </a:extLst>
           </p:cNvPr>
@@ -17712,7 +17712,7 @@
           <p:cNvPr id="13" name="">
             <a:extLst xmlns:a="http://schemas.openxmlformats.org/drawingml/2006/main">
               <a:ext uri="{FF2B5EF4-FFF2-40B4-BE49-F238E27FC236}">
-                <a16:creationId xmlns:a16="http://schemas.microsoft.com/office/drawing/2014/main" id="{8E444C99-FE83-453B-AB9A-0E4D15650A0D}"/>
+                <a16:creationId xmlns:a16="http://schemas.microsoft.com/office/drawing/2014/main" id="{8FC0006D-A20E-4363-9F9D-76B0091E370B}"/>
               </a:ext>
             </a:extLst>
           </p:cNvPr>
@@ -17764,7 +17764,7 @@
           <p:cNvPr id="14" name="">
             <a:extLst xmlns:a="http://schemas.openxmlformats.org/drawingml/2006/main">
               <a:ext uri="{FF2B5EF4-FFF2-40B4-BE49-F238E27FC236}">
-                <a16:creationId xmlns:a16="http://schemas.microsoft.com/office/drawing/2014/main" id="{08259E4A-B899-4793-98C1-E3936DAF021D}"/>
+                <a16:creationId xmlns:a16="http://schemas.microsoft.com/office/drawing/2014/main" id="{7CDD2AD9-8645-4552-812B-8F65E4D2D228}"/>
               </a:ext>
             </a:extLst>
           </p:cNvPr>
@@ -17816,7 +17816,7 @@
           <p:cNvPr id="15" name="">
             <a:extLst xmlns:a="http://schemas.openxmlformats.org/drawingml/2006/main">
               <a:ext uri="{FF2B5EF4-FFF2-40B4-BE49-F238E27FC236}">
-                <a16:creationId xmlns:a16="http://schemas.microsoft.com/office/drawing/2014/main" id="{B8E9214F-50AC-4BF5-BF5F-5715ABA1B966}"/>
+                <a16:creationId xmlns:a16="http://schemas.microsoft.com/office/drawing/2014/main" id="{12CE8E7A-568A-49DA-8DA4-416AE4528C64}"/>
               </a:ext>
             </a:extLst>
           </p:cNvPr>
@@ -17868,7 +17868,7 @@
           <p:cNvPr id="16" name="">
             <a:extLst xmlns:a="http://schemas.openxmlformats.org/drawingml/2006/main">
               <a:ext uri="{FF2B5EF4-FFF2-40B4-BE49-F238E27FC236}">
-                <a16:creationId xmlns:a16="http://schemas.microsoft.com/office/drawing/2014/main" id="{6CF2B0FF-747B-4A0C-BA6F-8ACE5FE1143A}"/>
+                <a16:creationId xmlns:a16="http://schemas.microsoft.com/office/drawing/2014/main" id="{7287713B-CEF6-4BF8-A8D7-022297BDDA9A}"/>
               </a:ext>
             </a:extLst>
           </p:cNvPr>
@@ -17920,7 +17920,7 @@
           <p:cNvPr id="17" name="">
             <a:extLst xmlns:a="http://schemas.openxmlformats.org/drawingml/2006/main">
               <a:ext uri="{FF2B5EF4-FFF2-40B4-BE49-F238E27FC236}">
-                <a16:creationId xmlns:a16="http://schemas.microsoft.com/office/drawing/2014/main" id="{B50F9ADC-1136-48F0-8BB5-AE22B9F947F0}"/>
+                <a16:creationId xmlns:a16="http://schemas.microsoft.com/office/drawing/2014/main" id="{806C3B8E-7F8D-4678-83B8-9AE2E94FFB6E}"/>
               </a:ext>
             </a:extLst>
           </p:cNvPr>
@@ -17972,7 +17972,7 @@
           <p:cNvPr id="18" name="">
             <a:extLst xmlns:a="http://schemas.openxmlformats.org/drawingml/2006/main">
               <a:ext uri="{FF2B5EF4-FFF2-40B4-BE49-F238E27FC236}">
-                <a16:creationId xmlns:a16="http://schemas.microsoft.com/office/drawing/2014/main" id="{C07B417F-1C5A-4D69-B800-576F2088D3EA}"/>
+                <a16:creationId xmlns:a16="http://schemas.microsoft.com/office/drawing/2014/main" id="{46484F52-8864-4C18-AA27-A43C2E55B937}"/>
               </a:ext>
             </a:extLst>
           </p:cNvPr>
@@ -18003,7 +18003,7 @@
           <p:cNvPr id="19" name="">
             <a:extLst xmlns:a="http://schemas.openxmlformats.org/drawingml/2006/main">
               <a:ext uri="{FF2B5EF4-FFF2-40B4-BE49-F238E27FC236}">
-                <a16:creationId xmlns:a16="http://schemas.microsoft.com/office/drawing/2014/main" id="{574E0205-3541-46A9-8835-EAAA9FC4A358}"/>
+                <a16:creationId xmlns:a16="http://schemas.microsoft.com/office/drawing/2014/main" id="{C6A49BFA-0A34-4D9B-98EA-9A0D6A6955C3}"/>
               </a:ext>
             </a:extLst>
           </p:cNvPr>
@@ -18034,7 +18034,7 @@
           <p:cNvPr id="20" name="">
             <a:extLst xmlns:a="http://schemas.openxmlformats.org/drawingml/2006/main">
               <a:ext uri="{FF2B5EF4-FFF2-40B4-BE49-F238E27FC236}">
-                <a16:creationId xmlns:a16="http://schemas.microsoft.com/office/drawing/2014/main" id="{FD0117E2-07E9-4B20-B246-0BE8F350EE0D}"/>
+                <a16:creationId xmlns:a16="http://schemas.microsoft.com/office/drawing/2014/main" id="{A9CED02B-94BB-4E0E-A116-8BD9E599591F}"/>
               </a:ext>
             </a:extLst>
           </p:cNvPr>
@@ -18086,7 +18086,7 @@
           <p:cNvPr id="21" name="">
             <a:extLst xmlns:a="http://schemas.openxmlformats.org/drawingml/2006/main">
               <a:ext uri="{FF2B5EF4-FFF2-40B4-BE49-F238E27FC236}">
-                <a16:creationId xmlns:a16="http://schemas.microsoft.com/office/drawing/2014/main" id="{CD7EFEBA-7EBE-4ECB-B539-E5F9A70F044D}"/>
+                <a16:creationId xmlns:a16="http://schemas.microsoft.com/office/drawing/2014/main" id="{FDF51352-58CC-48AE-AE43-39C618EE2D1D}"/>
               </a:ext>
             </a:extLst>
           </p:cNvPr>
@@ -18138,7 +18138,7 @@
           <p:cNvPr id="22" name="">
             <a:extLst xmlns:a="http://schemas.openxmlformats.org/drawingml/2006/main">
               <a:ext uri="{FF2B5EF4-FFF2-40B4-BE49-F238E27FC236}">
-                <a16:creationId xmlns:a16="http://schemas.microsoft.com/office/drawing/2014/main" id="{CAF47089-551A-4173-AE85-009A9B849F3B}"/>
+                <a16:creationId xmlns:a16="http://schemas.microsoft.com/office/drawing/2014/main" id="{F5659C17-F3AF-4CB2-A1F3-96ED3D2405A3}"/>
               </a:ext>
             </a:extLst>
           </p:cNvPr>
@@ -18190,7 +18190,7 @@
           <p:cNvPr id="23" name="">
             <a:extLst xmlns:a="http://schemas.openxmlformats.org/drawingml/2006/main">
               <a:ext uri="{FF2B5EF4-FFF2-40B4-BE49-F238E27FC236}">
-                <a16:creationId xmlns:a16="http://schemas.microsoft.com/office/drawing/2014/main" id="{265B6260-C112-4BA3-9894-8DEBA8F56FAF}"/>
+                <a16:creationId xmlns:a16="http://schemas.microsoft.com/office/drawing/2014/main" id="{3F93B6A3-0983-455B-BF27-7770A650E3CD}"/>
               </a:ext>
             </a:extLst>
           </p:cNvPr>
@@ -18242,7 +18242,7 @@
           <p:cNvPr id="24" name="">
             <a:extLst xmlns:a="http://schemas.openxmlformats.org/drawingml/2006/main">
               <a:ext uri="{FF2B5EF4-FFF2-40B4-BE49-F238E27FC236}">
-                <a16:creationId xmlns:a16="http://schemas.microsoft.com/office/drawing/2014/main" id="{F6A9C2A3-7167-43C1-9708-15578DAE0DEF}"/>
+                <a16:creationId xmlns:a16="http://schemas.microsoft.com/office/drawing/2014/main" id="{34044644-6953-4FE7-9E93-358778E92CC3}"/>
               </a:ext>
             </a:extLst>
           </p:cNvPr>
@@ -18294,7 +18294,7 @@
           <p:cNvPr id="25" name="">
             <a:extLst xmlns:a="http://schemas.openxmlformats.org/drawingml/2006/main">
               <a:ext uri="{FF2B5EF4-FFF2-40B4-BE49-F238E27FC236}">
-                <a16:creationId xmlns:a16="http://schemas.microsoft.com/office/drawing/2014/main" id="{EBFE875F-1E9E-4916-BFAD-1A420B4998DA}"/>
+                <a16:creationId xmlns:a16="http://schemas.microsoft.com/office/drawing/2014/main" id="{48140CAD-0D8D-4B1D-A785-FF77340DF455}"/>
               </a:ext>
             </a:extLst>
           </p:cNvPr>
@@ -18325,7 +18325,7 @@
           <p:cNvPr id="26" name="">
             <a:extLst xmlns:a="http://schemas.openxmlformats.org/drawingml/2006/main">
               <a:ext uri="{FF2B5EF4-FFF2-40B4-BE49-F238E27FC236}">
-                <a16:creationId xmlns:a16="http://schemas.microsoft.com/office/drawing/2014/main" id="{CD8AA78E-59C5-4A1B-89A0-28F440401B8D}"/>
+                <a16:creationId xmlns:a16="http://schemas.microsoft.com/office/drawing/2014/main" id="{417743BB-2BFC-439B-8B46-01CB01B8DA6A}"/>
               </a:ext>
             </a:extLst>
           </p:cNvPr>
@@ -18377,7 +18377,7 @@
           <p:cNvPr id="27" name="">
             <a:extLst xmlns:a="http://schemas.openxmlformats.org/drawingml/2006/main">
               <a:ext uri="{FF2B5EF4-FFF2-40B4-BE49-F238E27FC236}">
-                <a16:creationId xmlns:a16="http://schemas.microsoft.com/office/drawing/2014/main" id="{11BFE357-DC52-4261-A067-FF1204289EE2}"/>
+                <a16:creationId xmlns:a16="http://schemas.microsoft.com/office/drawing/2014/main" id="{C2E347EC-3466-425D-AF21-3EBD5D8BA58D}"/>
               </a:ext>
             </a:extLst>
           </p:cNvPr>
@@ -18429,7 +18429,7 @@
           <p:cNvPr id="28" name="">
             <a:extLst xmlns:a="http://schemas.openxmlformats.org/drawingml/2006/main">
               <a:ext uri="{FF2B5EF4-FFF2-40B4-BE49-F238E27FC236}">
-                <a16:creationId xmlns:a16="http://schemas.microsoft.com/office/drawing/2014/main" id="{8A2594B9-DC7D-46D3-B1CE-DED0A51332ED}"/>
+                <a16:creationId xmlns:a16="http://schemas.microsoft.com/office/drawing/2014/main" id="{62150316-779C-4198-917C-CE06981FD298}"/>
               </a:ext>
             </a:extLst>
           </p:cNvPr>
@@ -18481,7 +18481,7 @@
           <p:cNvPr id="29" name="">
             <a:extLst xmlns:a="http://schemas.openxmlformats.org/drawingml/2006/main">
               <a:ext uri="{FF2B5EF4-FFF2-40B4-BE49-F238E27FC236}">
-                <a16:creationId xmlns:a16="http://schemas.microsoft.com/office/drawing/2014/main" id="{31804830-39DA-40A5-90B6-509D9029290C}"/>
+                <a16:creationId xmlns:a16="http://schemas.microsoft.com/office/drawing/2014/main" id="{0BC9D213-18D8-447F-8D6D-F95EFCEF4ECB}"/>
               </a:ext>
             </a:extLst>
           </p:cNvPr>
@@ -18533,7 +18533,7 @@
           <p:cNvPr id="30" name="">
             <a:extLst xmlns:a="http://schemas.openxmlformats.org/drawingml/2006/main">
               <a:ext uri="{FF2B5EF4-FFF2-40B4-BE49-F238E27FC236}">
-                <a16:creationId xmlns:a16="http://schemas.microsoft.com/office/drawing/2014/main" id="{236DBE62-1260-439B-A7A8-DB82E2DBE866}"/>
+                <a16:creationId xmlns:a16="http://schemas.microsoft.com/office/drawing/2014/main" id="{D54A7806-F7D8-4549-A255-4B0842B864EE}"/>
               </a:ext>
             </a:extLst>
           </p:cNvPr>
@@ -18585,7 +18585,7 @@
           <p:cNvPr id="31" name="">
             <a:extLst xmlns:a="http://schemas.openxmlformats.org/drawingml/2006/main">
               <a:ext uri="{FF2B5EF4-FFF2-40B4-BE49-F238E27FC236}">
-                <a16:creationId xmlns:a16="http://schemas.microsoft.com/office/drawing/2014/main" id="{B7CFB01C-0F3C-4FB1-A386-3D906B2F0368}"/>
+                <a16:creationId xmlns:a16="http://schemas.microsoft.com/office/drawing/2014/main" id="{8CF0EEFF-BF36-4F32-A3F6-D8B29066C30A}"/>
               </a:ext>
             </a:extLst>
           </p:cNvPr>
@@ -18616,7 +18616,7 @@
           <p:cNvPr id="32" name="">
             <a:extLst xmlns:a="http://schemas.openxmlformats.org/drawingml/2006/main">
               <a:ext uri="{FF2B5EF4-FFF2-40B4-BE49-F238E27FC236}">
-                <a16:creationId xmlns:a16="http://schemas.microsoft.com/office/drawing/2014/main" id="{A27F56DF-DA1F-4E50-8ADA-C9AFC021EDD6}"/>
+                <a16:creationId xmlns:a16="http://schemas.microsoft.com/office/drawing/2014/main" id="{A38AEB6A-AFE6-4827-A7A7-39226F31A327}"/>
               </a:ext>
             </a:extLst>
           </p:cNvPr>
@@ -18647,7 +18647,7 @@
           <p:cNvPr id="33" name="">
             <a:extLst xmlns:a="http://schemas.openxmlformats.org/drawingml/2006/main">
               <a:ext uri="{FF2B5EF4-FFF2-40B4-BE49-F238E27FC236}">
-                <a16:creationId xmlns:a16="http://schemas.microsoft.com/office/drawing/2014/main" id="{01E940EE-3168-4D3B-974C-277B696233D3}"/>
+                <a16:creationId xmlns:a16="http://schemas.microsoft.com/office/drawing/2014/main" id="{97A8D173-89B2-4D4C-B3A9-9E86CF8AB617}"/>
               </a:ext>
             </a:extLst>
           </p:cNvPr>
@@ -18699,7 +18699,7 @@
           <p:cNvPr id="34" name="">
             <a:extLst xmlns:a="http://schemas.openxmlformats.org/drawingml/2006/main">
               <a:ext uri="{FF2B5EF4-FFF2-40B4-BE49-F238E27FC236}">
-                <a16:creationId xmlns:a16="http://schemas.microsoft.com/office/drawing/2014/main" id="{D194484D-86D6-4612-997A-692C272B81E0}"/>
+                <a16:creationId xmlns:a16="http://schemas.microsoft.com/office/drawing/2014/main" id="{34FBBE03-A84C-489D-A5F2-A16EF69473C0}"/>
               </a:ext>
             </a:extLst>
           </p:cNvPr>
@@ -18751,7 +18751,7 @@
           <p:cNvPr id="35" name="">
             <a:extLst xmlns:a="http://schemas.openxmlformats.org/drawingml/2006/main">
               <a:ext uri="{FF2B5EF4-FFF2-40B4-BE49-F238E27FC236}">
-                <a16:creationId xmlns:a16="http://schemas.microsoft.com/office/drawing/2014/main" id="{BAA472F7-8946-4472-A8A3-8BBB8C0058E9}"/>
+                <a16:creationId xmlns:a16="http://schemas.microsoft.com/office/drawing/2014/main" id="{C2D1C1E4-819F-4C22-AA76-FEFD82E80277}"/>
               </a:ext>
             </a:extLst>
           </p:cNvPr>
@@ -18803,7 +18803,7 @@
           <p:cNvPr id="36" name="">
             <a:extLst xmlns:a="http://schemas.openxmlformats.org/drawingml/2006/main">
               <a:ext uri="{FF2B5EF4-FFF2-40B4-BE49-F238E27FC236}">
-                <a16:creationId xmlns:a16="http://schemas.microsoft.com/office/drawing/2014/main" id="{4743EB9B-96A1-4841-A40E-39383272D8E6}"/>
+                <a16:creationId xmlns:a16="http://schemas.microsoft.com/office/drawing/2014/main" id="{B426AB5F-B999-4BAD-8251-E48032F97329}"/>
               </a:ext>
             </a:extLst>
           </p:cNvPr>
@@ -18855,7 +18855,7 @@
           <p:cNvPr id="37" name="">
             <a:extLst xmlns:a="http://schemas.openxmlformats.org/drawingml/2006/main">
               <a:ext uri="{FF2B5EF4-FFF2-40B4-BE49-F238E27FC236}">
-                <a16:creationId xmlns:a16="http://schemas.microsoft.com/office/drawing/2014/main" id="{1E053E2A-0A25-48EB-8D58-C7C6C0DF8ED4}"/>
+                <a16:creationId xmlns:a16="http://schemas.microsoft.com/office/drawing/2014/main" id="{68822F75-475B-45AC-B9C4-FAB5424D0E97}"/>
               </a:ext>
             </a:extLst>
           </p:cNvPr>
@@ -18907,7 +18907,7 @@
           <p:cNvPr id="38" name="">
             <a:extLst xmlns:a="http://schemas.openxmlformats.org/drawingml/2006/main">
               <a:ext uri="{FF2B5EF4-FFF2-40B4-BE49-F238E27FC236}">
-                <a16:creationId xmlns:a16="http://schemas.microsoft.com/office/drawing/2014/main" id="{2C3A5E47-F812-49D5-937C-423B12B41316}"/>
+                <a16:creationId xmlns:a16="http://schemas.microsoft.com/office/drawing/2014/main" id="{71ECB49A-DEAA-4A19-AEC0-89979212B013}"/>
               </a:ext>
             </a:extLst>
           </p:cNvPr>
@@ -18938,7 +18938,7 @@
           <p:cNvPr id="39" name="">
             <a:extLst xmlns:a="http://schemas.openxmlformats.org/drawingml/2006/main">
               <a:ext uri="{FF2B5EF4-FFF2-40B4-BE49-F238E27FC236}">
-                <a16:creationId xmlns:a16="http://schemas.microsoft.com/office/drawing/2014/main" id="{F0F6FCC4-E77C-406C-A381-255B5E4F3735}"/>
+                <a16:creationId xmlns:a16="http://schemas.microsoft.com/office/drawing/2014/main" id="{B2F771B4-787A-4F56-A216-B146036574C6}"/>
               </a:ext>
             </a:extLst>
           </p:cNvPr>
@@ -18990,7 +18990,7 @@
           <p:cNvPr id="40" name="">
             <a:extLst xmlns:a="http://schemas.openxmlformats.org/drawingml/2006/main">
               <a:ext uri="{FF2B5EF4-FFF2-40B4-BE49-F238E27FC236}">
-                <a16:creationId xmlns:a16="http://schemas.microsoft.com/office/drawing/2014/main" id="{A5D7166B-5B37-4B08-93AD-D9509267C7AB}"/>
+                <a16:creationId xmlns:a16="http://schemas.microsoft.com/office/drawing/2014/main" id="{ABB067DF-AF0D-4A0A-A190-B261CE39A971}"/>
               </a:ext>
             </a:extLst>
           </p:cNvPr>
@@ -19042,7 +19042,7 @@
           <p:cNvPr id="41" name="">
             <a:extLst xmlns:a="http://schemas.openxmlformats.org/drawingml/2006/main">
               <a:ext uri="{FF2B5EF4-FFF2-40B4-BE49-F238E27FC236}">
-                <a16:creationId xmlns:a16="http://schemas.microsoft.com/office/drawing/2014/main" id="{3BBF5F3F-59A2-4E2B-8AE9-3B2CBA79D2F0}"/>
+                <a16:creationId xmlns:a16="http://schemas.microsoft.com/office/drawing/2014/main" id="{6214DAF4-D539-40D8-B88D-2A361A3AFBA1}"/>
               </a:ext>
             </a:extLst>
           </p:cNvPr>
@@ -19094,7 +19094,7 @@
           <p:cNvPr id="42" name="">
             <a:extLst xmlns:a="http://schemas.openxmlformats.org/drawingml/2006/main">
               <a:ext uri="{FF2B5EF4-FFF2-40B4-BE49-F238E27FC236}">
-                <a16:creationId xmlns:a16="http://schemas.microsoft.com/office/drawing/2014/main" id="{F40561F0-EE73-4D80-BCE1-291C951032D3}"/>
+                <a16:creationId xmlns:a16="http://schemas.microsoft.com/office/drawing/2014/main" id="{7356BE38-430C-4771-96B9-D51F10DF5139}"/>
               </a:ext>
             </a:extLst>
           </p:cNvPr>
@@ -19146,7 +19146,7 @@
           <p:cNvPr id="43" name="">
             <a:extLst xmlns:a="http://schemas.openxmlformats.org/drawingml/2006/main">
               <a:ext uri="{FF2B5EF4-FFF2-40B4-BE49-F238E27FC236}">
-                <a16:creationId xmlns:a16="http://schemas.microsoft.com/office/drawing/2014/main" id="{133C81DA-9EE0-4F6C-AC7E-0A32F37C9506}"/>
+                <a16:creationId xmlns:a16="http://schemas.microsoft.com/office/drawing/2014/main" id="{C01F0295-5E47-4174-AD41-C36D43EF4800}"/>
               </a:ext>
             </a:extLst>
           </p:cNvPr>
@@ -19198,7 +19198,7 @@
           <p:cNvPr id="44" name="">
             <a:extLst xmlns:a="http://schemas.openxmlformats.org/drawingml/2006/main">
               <a:ext uri="{FF2B5EF4-FFF2-40B4-BE49-F238E27FC236}">
-                <a16:creationId xmlns:a16="http://schemas.microsoft.com/office/drawing/2014/main" id="{77D69EB6-B2B3-485C-B178-584D8D3F9B0F}"/>
+                <a16:creationId xmlns:a16="http://schemas.microsoft.com/office/drawing/2014/main" id="{02715B4D-9F3E-4844-8FFA-30D2537453A4}"/>
               </a:ext>
             </a:extLst>
           </p:cNvPr>
@@ -19229,7 +19229,7 @@
           <p:cNvPr id="45" name="">
             <a:extLst xmlns:a="http://schemas.openxmlformats.org/drawingml/2006/main">
               <a:ext uri="{FF2B5EF4-FFF2-40B4-BE49-F238E27FC236}">
-                <a16:creationId xmlns:a16="http://schemas.microsoft.com/office/drawing/2014/main" id="{EC5F9DDE-6C23-41D8-BEE7-1CE2AE36D631}"/>
+                <a16:creationId xmlns:a16="http://schemas.microsoft.com/office/drawing/2014/main" id="{4F74F2EF-A92D-445A-B9F1-83A330BA6FC2}"/>
               </a:ext>
             </a:extLst>
           </p:cNvPr>
@@ -19260,7 +19260,7 @@
           <p:cNvPr id="46" name="">
             <a:extLst xmlns:a="http://schemas.openxmlformats.org/drawingml/2006/main">
               <a:ext uri="{FF2B5EF4-FFF2-40B4-BE49-F238E27FC236}">
-                <a16:creationId xmlns:a16="http://schemas.microsoft.com/office/drawing/2014/main" id="{379375E5-7225-4DB6-9A40-D686F1A8D0F9}"/>
+                <a16:creationId xmlns:a16="http://schemas.microsoft.com/office/drawing/2014/main" id="{6674F1C1-AC07-4E5F-AF67-2634DB7F96CB}"/>
               </a:ext>
             </a:extLst>
           </p:cNvPr>
@@ -19312,7 +19312,7 @@
           <p:cNvPr id="47" name="">
             <a:extLst xmlns:a="http://schemas.openxmlformats.org/drawingml/2006/main">
               <a:ext uri="{FF2B5EF4-FFF2-40B4-BE49-F238E27FC236}">
-                <a16:creationId xmlns:a16="http://schemas.microsoft.com/office/drawing/2014/main" id="{D976B73F-66B6-472A-B3AD-7525337627E2}"/>
+                <a16:creationId xmlns:a16="http://schemas.microsoft.com/office/drawing/2014/main" id="{EE480467-E80F-4A9A-A3D4-D22E1C987479}"/>
               </a:ext>
             </a:extLst>
           </p:cNvPr>
@@ -19364,7 +19364,7 @@
           <p:cNvPr id="48" name="">
             <a:extLst xmlns:a="http://schemas.openxmlformats.org/drawingml/2006/main">
               <a:ext uri="{FF2B5EF4-FFF2-40B4-BE49-F238E27FC236}">
-                <a16:creationId xmlns:a16="http://schemas.microsoft.com/office/drawing/2014/main" id="{C8E62210-A2AA-407D-BC4F-C21A1FAC6DD9}"/>
+                <a16:creationId xmlns:a16="http://schemas.microsoft.com/office/drawing/2014/main" id="{636CF1B0-1B14-43D2-83F3-DEBE5A97BA28}"/>
               </a:ext>
             </a:extLst>
           </p:cNvPr>
@@ -19416,7 +19416,7 @@
           <p:cNvPr id="49" name="">
             <a:extLst xmlns:a="http://schemas.openxmlformats.org/drawingml/2006/main">
               <a:ext uri="{FF2B5EF4-FFF2-40B4-BE49-F238E27FC236}">
-                <a16:creationId xmlns:a16="http://schemas.microsoft.com/office/drawing/2014/main" id="{C556C3BD-C57E-451A-806B-5A27D2C0ACFF}"/>
+                <a16:creationId xmlns:a16="http://schemas.microsoft.com/office/drawing/2014/main" id="{5D857977-6AB7-4FB4-8D47-E3E01B1AE1E5}"/>
               </a:ext>
             </a:extLst>
           </p:cNvPr>
@@ -19468,7 +19468,7 @@
           <p:cNvPr id="50" name="">
             <a:extLst xmlns:a="http://schemas.openxmlformats.org/drawingml/2006/main">
               <a:ext uri="{FF2B5EF4-FFF2-40B4-BE49-F238E27FC236}">
-                <a16:creationId xmlns:a16="http://schemas.microsoft.com/office/drawing/2014/main" id="{7C452855-4FB8-42D0-8472-73B4953AF1F1}"/>
+                <a16:creationId xmlns:a16="http://schemas.microsoft.com/office/drawing/2014/main" id="{DE6FE055-4530-438F-BC54-22A33700E4A7}"/>
               </a:ext>
             </a:extLst>
           </p:cNvPr>
@@ -19520,7 +19520,7 @@
           <p:cNvPr id="51" name="">
             <a:extLst xmlns:a="http://schemas.openxmlformats.org/drawingml/2006/main">
               <a:ext uri="{FF2B5EF4-FFF2-40B4-BE49-F238E27FC236}">
-                <a16:creationId xmlns:a16="http://schemas.microsoft.com/office/drawing/2014/main" id="{AC9FF884-3C35-48E6-B85C-7797728BCAFF}"/>
+                <a16:creationId xmlns:a16="http://schemas.microsoft.com/office/drawing/2014/main" id="{513CE8BF-C739-4369-A4CD-B4EEC47E6B9B}"/>
               </a:ext>
             </a:extLst>
           </p:cNvPr>
@@ -19551,7 +19551,7 @@
           <p:cNvPr id="52" name="">
             <a:extLst xmlns:a="http://schemas.openxmlformats.org/drawingml/2006/main">
               <a:ext uri="{FF2B5EF4-FFF2-40B4-BE49-F238E27FC236}">
-                <a16:creationId xmlns:a16="http://schemas.microsoft.com/office/drawing/2014/main" id="{97E44135-6EAC-4A6D-8F40-172ABED5BCBF}"/>
+                <a16:creationId xmlns:a16="http://schemas.microsoft.com/office/drawing/2014/main" id="{BE85D725-D414-463D-ABEB-C055361A34AB}"/>
               </a:ext>
             </a:extLst>
           </p:cNvPr>
@@ -19603,7 +19603,7 @@
           <p:cNvPr id="53" name="">
             <a:extLst xmlns:a="http://schemas.openxmlformats.org/drawingml/2006/main">
               <a:ext uri="{FF2B5EF4-FFF2-40B4-BE49-F238E27FC236}">
-                <a16:creationId xmlns:a16="http://schemas.microsoft.com/office/drawing/2014/main" id="{576A59C6-C4D1-4D1B-A75B-BBF618A5C000}"/>
+                <a16:creationId xmlns:a16="http://schemas.microsoft.com/office/drawing/2014/main" id="{AA41838A-2E00-4FF1-9652-7BEE27D3C1D5}"/>
               </a:ext>
             </a:extLst>
           </p:cNvPr>
@@ -19655,7 +19655,7 @@
           <p:cNvPr id="54" name="">
             <a:extLst xmlns:a="http://schemas.openxmlformats.org/drawingml/2006/main">
               <a:ext uri="{FF2B5EF4-FFF2-40B4-BE49-F238E27FC236}">
-                <a16:creationId xmlns:a16="http://schemas.microsoft.com/office/drawing/2014/main" id="{0DE04C7B-3EDD-4A69-9749-E8E1A97668CA}"/>
+                <a16:creationId xmlns:a16="http://schemas.microsoft.com/office/drawing/2014/main" id="{027B20D7-E1B1-419C-8DC1-3BDE660B9DFC}"/>
               </a:ext>
             </a:extLst>
           </p:cNvPr>
@@ -19707,7 +19707,7 @@
           <p:cNvPr id="55" name="">
             <a:extLst xmlns:a="http://schemas.openxmlformats.org/drawingml/2006/main">
               <a:ext uri="{FF2B5EF4-FFF2-40B4-BE49-F238E27FC236}">
-                <a16:creationId xmlns:a16="http://schemas.microsoft.com/office/drawing/2014/main" id="{A1606FD4-0A6B-4E25-963E-80836B2C6E28}"/>
+                <a16:creationId xmlns:a16="http://schemas.microsoft.com/office/drawing/2014/main" id="{687B07BF-D79A-4203-A0F1-9EF7886629BE}"/>
               </a:ext>
             </a:extLst>
           </p:cNvPr>
@@ -19759,7 +19759,7 @@
           <p:cNvPr id="56" name="">
             <a:extLst xmlns:a="http://schemas.openxmlformats.org/drawingml/2006/main">
               <a:ext uri="{FF2B5EF4-FFF2-40B4-BE49-F238E27FC236}">
-                <a16:creationId xmlns:a16="http://schemas.microsoft.com/office/drawing/2014/main" id="{8CAEEF91-4B2B-4385-8B3B-5CA1C9ABF7BC}"/>
+                <a16:creationId xmlns:a16="http://schemas.microsoft.com/office/drawing/2014/main" id="{A7C3D01A-48EC-4106-9455-A36EED0ED07E}"/>
               </a:ext>
             </a:extLst>
           </p:cNvPr>
@@ -19811,7 +19811,7 @@
           <p:cNvPr id="57" name="">
             <a:extLst xmlns:a="http://schemas.openxmlformats.org/drawingml/2006/main">
               <a:ext uri="{FF2B5EF4-FFF2-40B4-BE49-F238E27FC236}">
-                <a16:creationId xmlns:a16="http://schemas.microsoft.com/office/drawing/2014/main" id="{043C926F-D511-4317-87C9-3ACC7CB5D8F2}"/>
+                <a16:creationId xmlns:a16="http://schemas.microsoft.com/office/drawing/2014/main" id="{E0AE3A48-7522-4D36-A5E6-31F015791CFB}"/>
               </a:ext>
             </a:extLst>
           </p:cNvPr>
@@ -19842,7 +19842,7 @@
           <p:cNvPr id="58" name="">
             <a:extLst xmlns:a="http://schemas.openxmlformats.org/drawingml/2006/main">
               <a:ext uri="{FF2B5EF4-FFF2-40B4-BE49-F238E27FC236}">
-                <a16:creationId xmlns:a16="http://schemas.microsoft.com/office/drawing/2014/main" id="{A4D5E69E-30DB-41CA-823C-98796BACB179}"/>
+                <a16:creationId xmlns:a16="http://schemas.microsoft.com/office/drawing/2014/main" id="{6F166593-F71E-4EE6-A42F-1AF3B9E56932}"/>
               </a:ext>
             </a:extLst>
           </p:cNvPr>
@@ -19873,7 +19873,7 @@
           <p:cNvPr id="59" name="">
             <a:extLst xmlns:a="http://schemas.openxmlformats.org/drawingml/2006/main">
               <a:ext uri="{FF2B5EF4-FFF2-40B4-BE49-F238E27FC236}">
-                <a16:creationId xmlns:a16="http://schemas.microsoft.com/office/drawing/2014/main" id="{51911725-EEE2-4ED5-A2BC-44A50A7733DE}"/>
+                <a16:creationId xmlns:a16="http://schemas.microsoft.com/office/drawing/2014/main" id="{58A0BD82-DD2A-4DD6-950B-1510BD37BF11}"/>
               </a:ext>
             </a:extLst>
           </p:cNvPr>
@@ -19925,7 +19925,7 @@
           <p:cNvPr id="60" name="">
             <a:extLst xmlns:a="http://schemas.openxmlformats.org/drawingml/2006/main">
               <a:ext uri="{FF2B5EF4-FFF2-40B4-BE49-F238E27FC236}">
-                <a16:creationId xmlns:a16="http://schemas.microsoft.com/office/drawing/2014/main" id="{FDA397A3-87BB-436D-8855-DD86DDED2417}"/>
+                <a16:creationId xmlns:a16="http://schemas.microsoft.com/office/drawing/2014/main" id="{28240EBC-8E68-4A9D-8589-B1D016340C8B}"/>
               </a:ext>
             </a:extLst>
           </p:cNvPr>
@@ -19977,7 +19977,7 @@
           <p:cNvPr id="61" name="">
             <a:extLst xmlns:a="http://schemas.openxmlformats.org/drawingml/2006/main">
               <a:ext uri="{FF2B5EF4-FFF2-40B4-BE49-F238E27FC236}">
-                <a16:creationId xmlns:a16="http://schemas.microsoft.com/office/drawing/2014/main" id="{6A65E1CF-5D80-453D-8E3D-E2B028585A48}"/>
+                <a16:creationId xmlns:a16="http://schemas.microsoft.com/office/drawing/2014/main" id="{B880B06B-DF4A-47A6-B920-CB5369CD8644}"/>
               </a:ext>
             </a:extLst>
           </p:cNvPr>
@@ -20029,7 +20029,7 @@
           <p:cNvPr id="62" name="">
             <a:extLst xmlns:a="http://schemas.openxmlformats.org/drawingml/2006/main">
               <a:ext uri="{FF2B5EF4-FFF2-40B4-BE49-F238E27FC236}">
-                <a16:creationId xmlns:a16="http://schemas.microsoft.com/office/drawing/2014/main" id="{BE19D0B2-1CE3-4A50-8704-06246114AF05}"/>
+                <a16:creationId xmlns:a16="http://schemas.microsoft.com/office/drawing/2014/main" id="{E4A2ABC0-C478-45DF-A260-C48D187458F7}"/>
               </a:ext>
             </a:extLst>
           </p:cNvPr>
@@ -20081,7 +20081,7 @@
           <p:cNvPr id="63" name="">
             <a:extLst xmlns:a="http://schemas.openxmlformats.org/drawingml/2006/main">
               <a:ext uri="{FF2B5EF4-FFF2-40B4-BE49-F238E27FC236}">
-                <a16:creationId xmlns:a16="http://schemas.microsoft.com/office/drawing/2014/main" id="{BF45387A-0293-49EC-87AF-F1290094B5F5}"/>
+                <a16:creationId xmlns:a16="http://schemas.microsoft.com/office/drawing/2014/main" id="{6B7A016C-BBD6-4C7F-8456-EC971DB6EE22}"/>
               </a:ext>
             </a:extLst>
           </p:cNvPr>
@@ -20133,7 +20133,7 @@
           <p:cNvPr id="64" name="">
             <a:extLst xmlns:a="http://schemas.openxmlformats.org/drawingml/2006/main">
               <a:ext uri="{FF2B5EF4-FFF2-40B4-BE49-F238E27FC236}">
-                <a16:creationId xmlns:a16="http://schemas.microsoft.com/office/drawing/2014/main" id="{5B2D8A96-B962-426A-8EEA-E868BFBB2022}"/>
+                <a16:creationId xmlns:a16="http://schemas.microsoft.com/office/drawing/2014/main" id="{961295F3-D583-47A9-BFED-EA719B07D863}"/>
               </a:ext>
             </a:extLst>
           </p:cNvPr>
@@ -20164,7 +20164,7 @@
           <p:cNvPr id="65" name="">
             <a:extLst xmlns:a="http://schemas.openxmlformats.org/drawingml/2006/main">
               <a:ext uri="{FF2B5EF4-FFF2-40B4-BE49-F238E27FC236}">
-                <a16:creationId xmlns:a16="http://schemas.microsoft.com/office/drawing/2014/main" id="{5C39E7A8-E131-43F2-A9F5-DCD9202E2CDC}"/>
+                <a16:creationId xmlns:a16="http://schemas.microsoft.com/office/drawing/2014/main" id="{AE8201F7-B087-453F-BF3C-B09F98C72287}"/>
               </a:ext>
             </a:extLst>
           </p:cNvPr>
@@ -20216,7 +20216,7 @@
           <p:cNvPr id="66" name="">
             <a:extLst xmlns:a="http://schemas.openxmlformats.org/drawingml/2006/main">
               <a:ext uri="{FF2B5EF4-FFF2-40B4-BE49-F238E27FC236}">
-                <a16:creationId xmlns:a16="http://schemas.microsoft.com/office/drawing/2014/main" id="{3AE0B52B-6BD4-41F4-AF7A-571AD28BA446}"/>
+                <a16:creationId xmlns:a16="http://schemas.microsoft.com/office/drawing/2014/main" id="{B6C5191E-3D23-4F4D-9183-15D62F08BCFE}"/>
               </a:ext>
             </a:extLst>
           </p:cNvPr>
@@ -20268,7 +20268,7 @@
           <p:cNvPr id="67" name="">
             <a:extLst xmlns:a="http://schemas.openxmlformats.org/drawingml/2006/main">
               <a:ext uri="{FF2B5EF4-FFF2-40B4-BE49-F238E27FC236}">
-                <a16:creationId xmlns:a16="http://schemas.microsoft.com/office/drawing/2014/main" id="{F5E8611F-FD19-4F7B-A5B9-B422E82432FF}"/>
+                <a16:creationId xmlns:a16="http://schemas.microsoft.com/office/drawing/2014/main" id="{96A0D6C9-5547-4581-B13F-BED1E24C4B52}"/>
               </a:ext>
             </a:extLst>
           </p:cNvPr>
@@ -20320,7 +20320,7 @@
           <p:cNvPr id="68" name="">
             <a:extLst xmlns:a="http://schemas.openxmlformats.org/drawingml/2006/main">
               <a:ext uri="{FF2B5EF4-FFF2-40B4-BE49-F238E27FC236}">
-                <a16:creationId xmlns:a16="http://schemas.microsoft.com/office/drawing/2014/main" id="{0E7A6E4B-350E-4ADE-8ADA-81437C435D4B}"/>
+                <a16:creationId xmlns:a16="http://schemas.microsoft.com/office/drawing/2014/main" id="{C0E998CF-33CB-4A8E-8D59-B6573EFC382D}"/>
               </a:ext>
             </a:extLst>
           </p:cNvPr>
@@ -20372,7 +20372,7 @@
           <p:cNvPr id="69" name="">
             <a:extLst xmlns:a="http://schemas.openxmlformats.org/drawingml/2006/main">
               <a:ext uri="{FF2B5EF4-FFF2-40B4-BE49-F238E27FC236}">
-                <a16:creationId xmlns:a16="http://schemas.microsoft.com/office/drawing/2014/main" id="{C0D5E515-9217-4782-A43E-399822BF66CE}"/>
+                <a16:creationId xmlns:a16="http://schemas.microsoft.com/office/drawing/2014/main" id="{921F840B-3629-43B0-96A3-E880D806A85C}"/>
               </a:ext>
             </a:extLst>
           </p:cNvPr>
@@ -20424,7 +20424,7 @@
           <p:cNvPr id="70" name="">
             <a:extLst xmlns:a="http://schemas.openxmlformats.org/drawingml/2006/main">
               <a:ext uri="{FF2B5EF4-FFF2-40B4-BE49-F238E27FC236}">
-                <a16:creationId xmlns:a16="http://schemas.microsoft.com/office/drawing/2014/main" id="{D9C457FC-A053-4C75-BB5E-0AD3383D77E8}"/>
+                <a16:creationId xmlns:a16="http://schemas.microsoft.com/office/drawing/2014/main" id="{BC024F51-E59E-4E64-8E62-758E52F3737A}"/>
               </a:ext>
             </a:extLst>
           </p:cNvPr>
@@ -20455,7 +20455,7 @@
           <p:cNvPr id="71" name="">
             <a:extLst xmlns:a="http://schemas.openxmlformats.org/drawingml/2006/main">
               <a:ext uri="{FF2B5EF4-FFF2-40B4-BE49-F238E27FC236}">
-                <a16:creationId xmlns:a16="http://schemas.microsoft.com/office/drawing/2014/main" id="{4AAC48AC-B87A-430F-9447-BB75CD284329}"/>
+                <a16:creationId xmlns:a16="http://schemas.microsoft.com/office/drawing/2014/main" id="{CD9A1611-0ABE-40A5-AE7C-97DCCC4ECB8F}"/>
               </a:ext>
             </a:extLst>
           </p:cNvPr>
@@ -20486,7 +20486,7 @@
           <p:cNvPr id="72" name="">
             <a:extLst xmlns:a="http://schemas.openxmlformats.org/drawingml/2006/main">
               <a:ext uri="{FF2B5EF4-FFF2-40B4-BE49-F238E27FC236}">
-                <a16:creationId xmlns:a16="http://schemas.microsoft.com/office/drawing/2014/main" id="{2120E163-062A-4907-837D-C262B67F4E5B}"/>
+                <a16:creationId xmlns:a16="http://schemas.microsoft.com/office/drawing/2014/main" id="{E07DB3FA-6CED-46F4-B191-9B242AE0FA88}"/>
               </a:ext>
             </a:extLst>
           </p:cNvPr>
@@ -20538,7 +20538,7 @@
           <p:cNvPr id="73" name="">
             <a:extLst xmlns:a="http://schemas.openxmlformats.org/drawingml/2006/main">
               <a:ext uri="{FF2B5EF4-FFF2-40B4-BE49-F238E27FC236}">
-                <a16:creationId xmlns:a16="http://schemas.microsoft.com/office/drawing/2014/main" id="{E8E63CC0-6A78-465F-8E27-06F813CA0FE5}"/>
+                <a16:creationId xmlns:a16="http://schemas.microsoft.com/office/drawing/2014/main" id="{92340229-B4BE-410B-95B1-969CF412AD5C}"/>
               </a:ext>
             </a:extLst>
           </p:cNvPr>
@@ -20590,7 +20590,7 @@
           <p:cNvPr id="74" name="">
             <a:extLst xmlns:a="http://schemas.openxmlformats.org/drawingml/2006/main">
               <a:ext uri="{FF2B5EF4-FFF2-40B4-BE49-F238E27FC236}">
-                <a16:creationId xmlns:a16="http://schemas.microsoft.com/office/drawing/2014/main" id="{D2040CE8-4E0F-4D4A-B534-E68618E4FB6F}"/>
+                <a16:creationId xmlns:a16="http://schemas.microsoft.com/office/drawing/2014/main" id="{0BBF10FF-CA28-4672-8AC5-949F3C831CDD}"/>
               </a:ext>
             </a:extLst>
           </p:cNvPr>
@@ -20642,7 +20642,7 @@
           <p:cNvPr id="75" name="">
             <a:extLst xmlns:a="http://schemas.openxmlformats.org/drawingml/2006/main">
               <a:ext uri="{FF2B5EF4-FFF2-40B4-BE49-F238E27FC236}">
-                <a16:creationId xmlns:a16="http://schemas.microsoft.com/office/drawing/2014/main" id="{E9795C2E-F86F-41C8-8502-5E90D8BCDF85}"/>
+                <a16:creationId xmlns:a16="http://schemas.microsoft.com/office/drawing/2014/main" id="{55DD9F94-755C-4ED4-9367-EAC6B4A0C584}"/>
               </a:ext>
             </a:extLst>
           </p:cNvPr>
@@ -20694,7 +20694,7 @@
           <p:cNvPr id="76" name="">
             <a:extLst xmlns:a="http://schemas.openxmlformats.org/drawingml/2006/main">
               <a:ext uri="{FF2B5EF4-FFF2-40B4-BE49-F238E27FC236}">
-                <a16:creationId xmlns:a16="http://schemas.microsoft.com/office/drawing/2014/main" id="{E5A6A6C0-4B50-4A7F-A6F3-0DB4D0B49FFA}"/>
+                <a16:creationId xmlns:a16="http://schemas.microsoft.com/office/drawing/2014/main" id="{7412F864-2D6C-4898-81A7-CD89CA93D165}"/>
               </a:ext>
             </a:extLst>
           </p:cNvPr>
@@ -20746,7 +20746,7 @@
           <p:cNvPr id="77" name="">
             <a:extLst xmlns:a="http://schemas.openxmlformats.org/drawingml/2006/main">
               <a:ext uri="{FF2B5EF4-FFF2-40B4-BE49-F238E27FC236}">
-                <a16:creationId xmlns:a16="http://schemas.microsoft.com/office/drawing/2014/main" id="{BA6B9CE3-9ED8-4A74-990F-D9A568AAB999}"/>
+                <a16:creationId xmlns:a16="http://schemas.microsoft.com/office/drawing/2014/main" id="{68D4AB83-1D13-40B0-A285-0BBF8B2FE493}"/>
               </a:ext>
             </a:extLst>
           </p:cNvPr>
@@ -20777,7 +20777,7 @@
           <p:cNvPr id="78" name="">
             <a:extLst xmlns:a="http://schemas.openxmlformats.org/drawingml/2006/main">
               <a:ext uri="{FF2B5EF4-FFF2-40B4-BE49-F238E27FC236}">
-                <a16:creationId xmlns:a16="http://schemas.microsoft.com/office/drawing/2014/main" id="{B8662050-F45B-43BE-9B60-5965D1D58280}"/>
+                <a16:creationId xmlns:a16="http://schemas.microsoft.com/office/drawing/2014/main" id="{56466E1D-D6A9-4F30-848E-ED23CED31558}"/>
               </a:ext>
             </a:extLst>
           </p:cNvPr>
@@ -20829,7 +20829,7 @@
           <p:cNvPr id="79" name="">
             <a:extLst xmlns:a="http://schemas.openxmlformats.org/drawingml/2006/main">
               <a:ext uri="{FF2B5EF4-FFF2-40B4-BE49-F238E27FC236}">
-                <a16:creationId xmlns:a16="http://schemas.microsoft.com/office/drawing/2014/main" id="{41EB6482-5097-4CA4-AAC5-A59AA79EFFEA}"/>
+                <a16:creationId xmlns:a16="http://schemas.microsoft.com/office/drawing/2014/main" id="{ED509DF7-A8AA-4BED-9C02-B01D3340362A}"/>
               </a:ext>
             </a:extLst>
           </p:cNvPr>
@@ -20881,7 +20881,7 @@
           <p:cNvPr id="80" name="">
             <a:extLst xmlns:a="http://schemas.openxmlformats.org/drawingml/2006/main">
               <a:ext uri="{FF2B5EF4-FFF2-40B4-BE49-F238E27FC236}">
-                <a16:creationId xmlns:a16="http://schemas.microsoft.com/office/drawing/2014/main" id="{2B07493B-B77F-4FE1-B2B5-DE74174982EB}"/>
+                <a16:creationId xmlns:a16="http://schemas.microsoft.com/office/drawing/2014/main" id="{DB571EE5-D3E8-4A01-875C-A91BAB60D4A8}"/>
               </a:ext>
             </a:extLst>
           </p:cNvPr>
@@ -20933,7 +20933,7 @@
           <p:cNvPr id="81" name="">
             <a:extLst xmlns:a="http://schemas.openxmlformats.org/drawingml/2006/main">
               <a:ext uri="{FF2B5EF4-FFF2-40B4-BE49-F238E27FC236}">
-                <a16:creationId xmlns:a16="http://schemas.microsoft.com/office/drawing/2014/main" id="{3CADF9BD-60B7-4F70-BCFA-2139F67DC869}"/>
+                <a16:creationId xmlns:a16="http://schemas.microsoft.com/office/drawing/2014/main" id="{41A6F7C7-D89E-4A2D-A3B6-3D724C59FF82}"/>
               </a:ext>
             </a:extLst>
           </p:cNvPr>
@@ -20985,7 +20985,7 @@
           <p:cNvPr id="82" name="">
             <a:extLst xmlns:a="http://schemas.openxmlformats.org/drawingml/2006/main">
               <a:ext uri="{FF2B5EF4-FFF2-40B4-BE49-F238E27FC236}">
-                <a16:creationId xmlns:a16="http://schemas.microsoft.com/office/drawing/2014/main" id="{1832BFE6-D22B-44FD-9D46-050281A194FB}"/>
+                <a16:creationId xmlns:a16="http://schemas.microsoft.com/office/drawing/2014/main" id="{A0861AF3-5C2E-485D-8296-38DD009197D1}"/>
               </a:ext>
             </a:extLst>
           </p:cNvPr>
@@ -21037,7 +21037,7 @@
           <p:cNvPr id="83" name="">
             <a:extLst xmlns:a="http://schemas.openxmlformats.org/drawingml/2006/main">
               <a:ext uri="{FF2B5EF4-FFF2-40B4-BE49-F238E27FC236}">
-                <a16:creationId xmlns:a16="http://schemas.microsoft.com/office/drawing/2014/main" id="{7CBB6D1C-0260-446C-A19D-1D773B166875}"/>
+                <a16:creationId xmlns:a16="http://schemas.microsoft.com/office/drawing/2014/main" id="{AE1FF6BE-F832-45B3-9C72-CDEA89146591}"/>
               </a:ext>
             </a:extLst>
           </p:cNvPr>
@@ -21068,7 +21068,7 @@
           <p:cNvPr id="84" name="">
             <a:extLst xmlns:a="http://schemas.openxmlformats.org/drawingml/2006/main">
               <a:ext uri="{FF2B5EF4-FFF2-40B4-BE49-F238E27FC236}">
-                <a16:creationId xmlns:a16="http://schemas.microsoft.com/office/drawing/2014/main" id="{72E4882D-2985-42A8-A83F-B27F61360360}"/>
+                <a16:creationId xmlns:a16="http://schemas.microsoft.com/office/drawing/2014/main" id="{9986C82B-69F4-4194-A293-96BC399CACFC}"/>
               </a:ext>
             </a:extLst>
           </p:cNvPr>
@@ -21120,7 +21120,7 @@
           <p:cNvPr id="85" name="">
             <a:extLst xmlns:a="http://schemas.openxmlformats.org/drawingml/2006/main">
               <a:ext uri="{FF2B5EF4-FFF2-40B4-BE49-F238E27FC236}">
-                <a16:creationId xmlns:a16="http://schemas.microsoft.com/office/drawing/2014/main" id="{781E7D53-C2C7-4C68-9ADF-CC52F8DA289E}"/>
+                <a16:creationId xmlns:a16="http://schemas.microsoft.com/office/drawing/2014/main" id="{08E9215A-95EC-4A67-A7BA-11F5AB89E5FA}"/>
               </a:ext>
             </a:extLst>
           </p:cNvPr>
@@ -21172,7 +21172,7 @@
           <p:cNvPr id="86" name="">
             <a:extLst xmlns:a="http://schemas.openxmlformats.org/drawingml/2006/main">
               <a:ext uri="{FF2B5EF4-FFF2-40B4-BE49-F238E27FC236}">
-                <a16:creationId xmlns:a16="http://schemas.microsoft.com/office/drawing/2014/main" id="{F3D6D15A-9142-40F9-BE9B-E14519506552}"/>
+                <a16:creationId xmlns:a16="http://schemas.microsoft.com/office/drawing/2014/main" id="{5523D908-DA03-4100-87DE-D6C6467F7E86}"/>
               </a:ext>
             </a:extLst>
           </p:cNvPr>
@@ -21224,7 +21224,7 @@
           <p:cNvPr id="87" name="">
             <a:extLst xmlns:a="http://schemas.openxmlformats.org/drawingml/2006/main">
               <a:ext uri="{FF2B5EF4-FFF2-40B4-BE49-F238E27FC236}">
-                <a16:creationId xmlns:a16="http://schemas.microsoft.com/office/drawing/2014/main" id="{BB761903-108B-45C5-A124-D7DFA2607E5F}"/>
+                <a16:creationId xmlns:a16="http://schemas.microsoft.com/office/drawing/2014/main" id="{EFB8A146-9E6C-4F7C-AF0F-40C5AB5BEA9A}"/>
               </a:ext>
             </a:extLst>
           </p:cNvPr>
@@ -21276,7 +21276,7 @@
           <p:cNvPr id="88" name="">
             <a:extLst xmlns:a="http://schemas.openxmlformats.org/drawingml/2006/main">
               <a:ext uri="{FF2B5EF4-FFF2-40B4-BE49-F238E27FC236}">
-                <a16:creationId xmlns:a16="http://schemas.microsoft.com/office/drawing/2014/main" id="{E6EE3695-6845-4E53-AC87-21D83C22C40E}"/>
+                <a16:creationId xmlns:a16="http://schemas.microsoft.com/office/drawing/2014/main" id="{D8C274F6-83C1-450D-B12A-53370B20E20D}"/>
               </a:ext>
             </a:extLst>
           </p:cNvPr>
@@ -21328,7 +21328,7 @@
           <p:cNvPr id="89" name="">
             <a:extLst xmlns:a="http://schemas.openxmlformats.org/drawingml/2006/main">
               <a:ext uri="{FF2B5EF4-FFF2-40B4-BE49-F238E27FC236}">
-                <a16:creationId xmlns:a16="http://schemas.microsoft.com/office/drawing/2014/main" id="{F15E7BBB-999F-42B5-9502-877CF7EA6385}"/>
+                <a16:creationId xmlns:a16="http://schemas.microsoft.com/office/drawing/2014/main" id="{8E9AE32D-3C27-4578-AD79-FD4BD92D34B2}"/>
               </a:ext>
             </a:extLst>
           </p:cNvPr>
@@ -21359,7 +21359,7 @@
           <p:cNvPr id="90" name="">
             <a:extLst xmlns:a="http://schemas.openxmlformats.org/drawingml/2006/main">
               <a:ext uri="{FF2B5EF4-FFF2-40B4-BE49-F238E27FC236}">
-                <a16:creationId xmlns:a16="http://schemas.microsoft.com/office/drawing/2014/main" id="{D093CB53-4D4B-4BAA-B30A-CC519329ADD7}"/>
+                <a16:creationId xmlns:a16="http://schemas.microsoft.com/office/drawing/2014/main" id="{AD68B155-0651-4F89-B904-81A6B07A0614}"/>
               </a:ext>
             </a:extLst>
           </p:cNvPr>
@@ -21390,7 +21390,7 @@
           <p:cNvPr id="91" name="">
             <a:extLst xmlns:a="http://schemas.openxmlformats.org/drawingml/2006/main">
               <a:ext uri="{FF2B5EF4-FFF2-40B4-BE49-F238E27FC236}">
-                <a16:creationId xmlns:a16="http://schemas.microsoft.com/office/drawing/2014/main" id="{3BCC5CE4-A914-4730-BB52-7878EAD05503}"/>
+                <a16:creationId xmlns:a16="http://schemas.microsoft.com/office/drawing/2014/main" id="{C7FAFAC6-44EA-4073-8A28-29712E6CC5A4}"/>
               </a:ext>
             </a:extLst>
           </p:cNvPr>
@@ -21442,7 +21442,7 @@
           <p:cNvPr id="92" name="">
             <a:extLst xmlns:a="http://schemas.openxmlformats.org/drawingml/2006/main">
               <a:ext uri="{FF2B5EF4-FFF2-40B4-BE49-F238E27FC236}">
-                <a16:creationId xmlns:a16="http://schemas.microsoft.com/office/drawing/2014/main" id="{992AAB44-2D92-40C1-AFF4-11BBAF35014A}"/>
+                <a16:creationId xmlns:a16="http://schemas.microsoft.com/office/drawing/2014/main" id="{60D953F0-CA2C-4980-BEB5-FD617B7CCED1}"/>
               </a:ext>
             </a:extLst>
           </p:cNvPr>
@@ -21494,7 +21494,7 @@
           <p:cNvPr id="93" name="">
             <a:extLst xmlns:a="http://schemas.openxmlformats.org/drawingml/2006/main">
               <a:ext uri="{FF2B5EF4-FFF2-40B4-BE49-F238E27FC236}">
-                <a16:creationId xmlns:a16="http://schemas.microsoft.com/office/drawing/2014/main" id="{49823391-6559-4CA6-93F2-99F1D2D748C2}"/>
+                <a16:creationId xmlns:a16="http://schemas.microsoft.com/office/drawing/2014/main" id="{E7A239EB-F788-49B7-B8AB-DB8459407A76}"/>
               </a:ext>
             </a:extLst>
           </p:cNvPr>
@@ -21546,7 +21546,7 @@
           <p:cNvPr id="94" name="">
             <a:extLst xmlns:a="http://schemas.openxmlformats.org/drawingml/2006/main">
               <a:ext uri="{FF2B5EF4-FFF2-40B4-BE49-F238E27FC236}">
-                <a16:creationId xmlns:a16="http://schemas.microsoft.com/office/drawing/2014/main" id="{F49A9986-8778-4755-99DC-843F5F86298F}"/>
+                <a16:creationId xmlns:a16="http://schemas.microsoft.com/office/drawing/2014/main" id="{713A1C98-5C0E-4AA1-9E9A-20AB6CEA3D04}"/>
               </a:ext>
             </a:extLst>
           </p:cNvPr>
@@ -21598,7 +21598,7 @@
           <p:cNvPr id="95" name="">
             <a:extLst xmlns:a="http://schemas.openxmlformats.org/drawingml/2006/main">
               <a:ext uri="{FF2B5EF4-FFF2-40B4-BE49-F238E27FC236}">
-                <a16:creationId xmlns:a16="http://schemas.microsoft.com/office/drawing/2014/main" id="{F1EB3AA5-EAE2-49BD-80F7-3AD17DA4BF5B}"/>
+                <a16:creationId xmlns:a16="http://schemas.microsoft.com/office/drawing/2014/main" id="{61A633E3-E06D-46EB-8490-7680696CFFF6}"/>
               </a:ext>
             </a:extLst>
           </p:cNvPr>
@@ -21648,7 +21648,7 @@
     </p:spTree>
     <p:extLst>
       <p:ext uri="{BB962C8B-B14F-4D97-AF65-F5344CB8AC3E}">
-        <p14:creationId xmlns:p14="http://schemas.microsoft.com/office/powerpoint/2010/main" val="350912713"/>
+        <p14:creationId xmlns:p14="http://schemas.microsoft.com/office/powerpoint/2010/main" val="1015084915"/>
       </p:ext>
     </p:extLst>
   </p:cSld>
@@ -21679,7 +21679,7 @@
           <p:cNvPr id="135" name="">
             <a:extLst xmlns:a="http://schemas.openxmlformats.org/drawingml/2006/main">
               <a:ext uri="{FF2B5EF4-FFF2-40B4-BE49-F238E27FC236}">
-                <a16:creationId xmlns:a16="http://schemas.microsoft.com/office/drawing/2014/main" id="{80F90252-D688-4EC0-86CD-A4D771DDE786}"/>
+                <a16:creationId xmlns:a16="http://schemas.microsoft.com/office/drawing/2014/main" id="{49D9A2E4-3DCB-4F6C-8462-0AAF01B62893}"/>
               </a:ext>
             </a:extLst>
           </p:cNvPr>
@@ -21712,7 +21712,7 @@
           <p:cNvPr id="2" name="">
             <a:extLst xmlns:a="http://schemas.openxmlformats.org/drawingml/2006/main">
               <a:ext uri="{FF2B5EF4-FFF2-40B4-BE49-F238E27FC236}">
-                <a16:creationId xmlns:a16="http://schemas.microsoft.com/office/drawing/2014/main" id="{BFDDDA62-533D-464B-9BDE-5DC298CDC91D}"/>
+                <a16:creationId xmlns:a16="http://schemas.microsoft.com/office/drawing/2014/main" id="{C319C474-1B53-4721-A1E6-D5A570E916DE}"/>
               </a:ext>
             </a:extLst>
           </p:cNvPr>
@@ -21743,7 +21743,7 @@
           <p:cNvPr id="3" name="">
             <a:extLst xmlns:a="http://schemas.openxmlformats.org/drawingml/2006/main">
               <a:ext uri="{FF2B5EF4-FFF2-40B4-BE49-F238E27FC236}">
-                <a16:creationId xmlns:a16="http://schemas.microsoft.com/office/drawing/2014/main" id="{63FCF30F-9E9E-40D2-AFA6-197B55FA75FE}"/>
+                <a16:creationId xmlns:a16="http://schemas.microsoft.com/office/drawing/2014/main" id="{6CAD4DE0-6D0A-461C-BA89-F12D0277650E}"/>
               </a:ext>
             </a:extLst>
           </p:cNvPr>
@@ -21795,7 +21795,7 @@
           <p:cNvPr id="4" name="">
             <a:extLst xmlns:a="http://schemas.openxmlformats.org/drawingml/2006/main">
               <a:ext uri="{FF2B5EF4-FFF2-40B4-BE49-F238E27FC236}">
-                <a16:creationId xmlns:a16="http://schemas.microsoft.com/office/drawing/2014/main" id="{21BCA107-9777-4BCE-8138-A250E6A7DFEA}"/>
+                <a16:creationId xmlns:a16="http://schemas.microsoft.com/office/drawing/2014/main" id="{9F35DC40-AD46-4090-BD2F-53C0BCCF1C37}"/>
               </a:ext>
             </a:extLst>
           </p:cNvPr>
@@ -21847,7 +21847,7 @@
           <p:cNvPr id="5" name="">
             <a:extLst xmlns:a="http://schemas.openxmlformats.org/drawingml/2006/main">
               <a:ext uri="{FF2B5EF4-FFF2-40B4-BE49-F238E27FC236}">
-                <a16:creationId xmlns:a16="http://schemas.microsoft.com/office/drawing/2014/main" id="{3637756D-6735-4306-BE56-EDEA62803D71}"/>
+                <a16:creationId xmlns:a16="http://schemas.microsoft.com/office/drawing/2014/main" id="{91E651B4-AB1B-43A3-8BE1-7D7B3A544CCE}"/>
               </a:ext>
             </a:extLst>
           </p:cNvPr>
@@ -21882,7 +21882,7 @@
           <p:nvPr/>
         </p:nvPicPr>
         <p:blipFill>
-          <a:blip xmlns:r="http://schemas.openxmlformats.org/officeDocument/2006/relationships" xmlns:a="http://schemas.openxmlformats.org/drawingml/2006/main" r:embed="R15dd7725d1dc456a"/>
+          <a:blip xmlns:r="http://schemas.openxmlformats.org/officeDocument/2006/relationships" xmlns:a="http://schemas.openxmlformats.org/drawingml/2006/main" r:embed="R1ceaf2e1f7644e4c"/>
           <a:stretch xmlns:a="http://schemas.openxmlformats.org/drawingml/2006/main"/>
         </p:blipFill>
         <p:spPr>
@@ -21900,7 +21900,7 @@
           <p:cNvPr id="7" name="">
             <a:extLst xmlns:a="http://schemas.openxmlformats.org/drawingml/2006/main">
               <a:ext uri="{FF2B5EF4-FFF2-40B4-BE49-F238E27FC236}">
-                <a16:creationId xmlns:a16="http://schemas.microsoft.com/office/drawing/2014/main" id="{33B5D4AA-5066-4F2D-B791-1D1DDD21965A}"/>
+                <a16:creationId xmlns:a16="http://schemas.microsoft.com/office/drawing/2014/main" id="{A1CA0D0D-307B-4A46-BCEF-66CF9395EE07}"/>
               </a:ext>
             </a:extLst>
           </p:cNvPr>
@@ -21952,7 +21952,7 @@
           <p:cNvPr id="8" name="">
             <a:extLst xmlns:a="http://schemas.openxmlformats.org/drawingml/2006/main">
               <a:ext uri="{FF2B5EF4-FFF2-40B4-BE49-F238E27FC236}">
-                <a16:creationId xmlns:a16="http://schemas.microsoft.com/office/drawing/2014/main" id="{287895F8-6368-4644-8044-49D78242C7F9}"/>
+                <a16:creationId xmlns:a16="http://schemas.microsoft.com/office/drawing/2014/main" id="{6FF74318-89D3-4143-98E2-93076D3034D7}"/>
               </a:ext>
             </a:extLst>
           </p:cNvPr>
@@ -22004,7 +22004,7 @@
           <p:cNvPr id="9" name="">
             <a:extLst xmlns:a="http://schemas.openxmlformats.org/drawingml/2006/main">
               <a:ext uri="{FF2B5EF4-FFF2-40B4-BE49-F238E27FC236}">
-                <a16:creationId xmlns:a16="http://schemas.microsoft.com/office/drawing/2014/main" id="{A00CA19D-2F39-45FD-B3B6-D2D31D187630}"/>
+                <a16:creationId xmlns:a16="http://schemas.microsoft.com/office/drawing/2014/main" id="{B578023E-65B0-4482-9393-8E1EAC529694}"/>
               </a:ext>
             </a:extLst>
           </p:cNvPr>
@@ -22056,7 +22056,7 @@
           <p:cNvPr id="10" name="">
             <a:extLst xmlns:a="http://schemas.openxmlformats.org/drawingml/2006/main">
               <a:ext uri="{FF2B5EF4-FFF2-40B4-BE49-F238E27FC236}">
-                <a16:creationId xmlns:a16="http://schemas.microsoft.com/office/drawing/2014/main" id="{1D0FDEF0-DDC6-4FAC-A74F-78E912332749}"/>
+                <a16:creationId xmlns:a16="http://schemas.microsoft.com/office/drawing/2014/main" id="{9C987CF0-5614-4190-A75D-CFD181AD3EFA}"/>
               </a:ext>
             </a:extLst>
           </p:cNvPr>
@@ -22108,7 +22108,7 @@
           <p:cNvPr id="11" name="">
             <a:extLst xmlns:a="http://schemas.openxmlformats.org/drawingml/2006/main">
               <a:ext uri="{FF2B5EF4-FFF2-40B4-BE49-F238E27FC236}">
-                <a16:creationId xmlns:a16="http://schemas.microsoft.com/office/drawing/2014/main" id="{A3DCF02E-EC7A-47CA-B749-FAF3968DCC54}"/>
+                <a16:creationId xmlns:a16="http://schemas.microsoft.com/office/drawing/2014/main" id="{66F6A444-41C4-45DF-A525-5727A0DD7FA3}"/>
               </a:ext>
             </a:extLst>
           </p:cNvPr>
@@ -22139,7 +22139,7 @@
           <p:cNvPr id="12" name="">
             <a:extLst xmlns:a="http://schemas.openxmlformats.org/drawingml/2006/main">
               <a:ext uri="{FF2B5EF4-FFF2-40B4-BE49-F238E27FC236}">
-                <a16:creationId xmlns:a16="http://schemas.microsoft.com/office/drawing/2014/main" id="{E68172DF-5B87-4C3E-A8AD-773F9DCB7CDA}"/>
+                <a16:creationId xmlns:a16="http://schemas.microsoft.com/office/drawing/2014/main" id="{16C202FD-44F1-4B72-BD9C-19F012F76D76}"/>
               </a:ext>
             </a:extLst>
           </p:cNvPr>
@@ -22170,7 +22170,7 @@
           <p:cNvPr id="13" name="">
             <a:extLst xmlns:a="http://schemas.openxmlformats.org/drawingml/2006/main">
               <a:ext uri="{FF2B5EF4-FFF2-40B4-BE49-F238E27FC236}">
-                <a16:creationId xmlns:a16="http://schemas.microsoft.com/office/drawing/2014/main" id="{381D7270-E9A5-424C-A98A-3B4BB9A63522}"/>
+                <a16:creationId xmlns:a16="http://schemas.microsoft.com/office/drawing/2014/main" id="{7757668A-EF63-407B-968B-2C0B8AD9CC70}"/>
               </a:ext>
             </a:extLst>
           </p:cNvPr>
@@ -22222,7 +22222,7 @@
           <p:cNvPr id="14" name="">
             <a:extLst xmlns:a="http://schemas.openxmlformats.org/drawingml/2006/main">
               <a:ext uri="{FF2B5EF4-FFF2-40B4-BE49-F238E27FC236}">
-                <a16:creationId xmlns:a16="http://schemas.microsoft.com/office/drawing/2014/main" id="{7B77FC4A-2C70-4772-A449-D3B7CA64BD5E}"/>
+                <a16:creationId xmlns:a16="http://schemas.microsoft.com/office/drawing/2014/main" id="{EF9A8DC8-BB8A-4C4E-9C39-DC2F7A2030D8}"/>
               </a:ext>
             </a:extLst>
           </p:cNvPr>
@@ -22274,7 +22274,7 @@
           <p:cNvPr id="15" name="">
             <a:extLst xmlns:a="http://schemas.openxmlformats.org/drawingml/2006/main">
               <a:ext uri="{FF2B5EF4-FFF2-40B4-BE49-F238E27FC236}">
-                <a16:creationId xmlns:a16="http://schemas.microsoft.com/office/drawing/2014/main" id="{ADA718B1-6993-41FB-82F9-EC5A5A22EAD1}"/>
+                <a16:creationId xmlns:a16="http://schemas.microsoft.com/office/drawing/2014/main" id="{0FAEC3D2-11CF-4452-A362-F2A1A2773602}"/>
               </a:ext>
             </a:extLst>
           </p:cNvPr>
@@ -22326,7 +22326,7 @@
           <p:cNvPr id="16" name="">
             <a:extLst xmlns:a="http://schemas.openxmlformats.org/drawingml/2006/main">
               <a:ext uri="{FF2B5EF4-FFF2-40B4-BE49-F238E27FC236}">
-                <a16:creationId xmlns:a16="http://schemas.microsoft.com/office/drawing/2014/main" id="{7C32F964-E7D2-4151-BB5F-F17E578A3DC7}"/>
+                <a16:creationId xmlns:a16="http://schemas.microsoft.com/office/drawing/2014/main" id="{E9ACE0EA-CC7C-4C2C-996C-BA1280786EB8}"/>
               </a:ext>
             </a:extLst>
           </p:cNvPr>
@@ -22378,7 +22378,7 @@
           <p:cNvPr id="17" name="">
             <a:extLst xmlns:a="http://schemas.openxmlformats.org/drawingml/2006/main">
               <a:ext uri="{FF2B5EF4-FFF2-40B4-BE49-F238E27FC236}">
-                <a16:creationId xmlns:a16="http://schemas.microsoft.com/office/drawing/2014/main" id="{A10BD76B-66C0-4558-A4E3-E5B4404E6971}"/>
+                <a16:creationId xmlns:a16="http://schemas.microsoft.com/office/drawing/2014/main" id="{A91ADEFA-D2F6-42D8-842C-C9E2C3D036C8}"/>
               </a:ext>
             </a:extLst>
           </p:cNvPr>
@@ -22430,7 +22430,7 @@
           <p:cNvPr id="18" name="">
             <a:extLst xmlns:a="http://schemas.openxmlformats.org/drawingml/2006/main">
               <a:ext uri="{FF2B5EF4-FFF2-40B4-BE49-F238E27FC236}">
-                <a16:creationId xmlns:a16="http://schemas.microsoft.com/office/drawing/2014/main" id="{E13C14EC-76EA-4847-B922-D6BC3E1367B5}"/>
+                <a16:creationId xmlns:a16="http://schemas.microsoft.com/office/drawing/2014/main" id="{980F9552-16C5-476F-BE21-39E20B9357D5}"/>
               </a:ext>
             </a:extLst>
           </p:cNvPr>
@@ -22482,7 +22482,7 @@
           <p:cNvPr id="19" name="">
             <a:extLst xmlns:a="http://schemas.openxmlformats.org/drawingml/2006/main">
               <a:ext uri="{FF2B5EF4-FFF2-40B4-BE49-F238E27FC236}">
-                <a16:creationId xmlns:a16="http://schemas.microsoft.com/office/drawing/2014/main" id="{D9250DD3-CB22-48DC-AEF8-1BAF0265187A}"/>
+                <a16:creationId xmlns:a16="http://schemas.microsoft.com/office/drawing/2014/main" id="{71E06AD3-61E9-4AA4-BD4A-C4023D01FBF3}"/>
               </a:ext>
             </a:extLst>
           </p:cNvPr>
@@ -22534,7 +22534,7 @@
           <p:cNvPr id="20" name="">
             <a:extLst xmlns:a="http://schemas.openxmlformats.org/drawingml/2006/main">
               <a:ext uri="{FF2B5EF4-FFF2-40B4-BE49-F238E27FC236}">
-                <a16:creationId xmlns:a16="http://schemas.microsoft.com/office/drawing/2014/main" id="{42894F68-1F9E-4F40-8EBF-4C476407E236}"/>
+                <a16:creationId xmlns:a16="http://schemas.microsoft.com/office/drawing/2014/main" id="{BF8D5960-E7DE-4918-8E6E-6851D1F89DA6}"/>
               </a:ext>
             </a:extLst>
           </p:cNvPr>
@@ -22586,7 +22586,7 @@
           <p:cNvPr id="21" name="">
             <a:extLst xmlns:a="http://schemas.openxmlformats.org/drawingml/2006/main">
               <a:ext uri="{FF2B5EF4-FFF2-40B4-BE49-F238E27FC236}">
-                <a16:creationId xmlns:a16="http://schemas.microsoft.com/office/drawing/2014/main" id="{539DFE84-2376-4A3E-B9FC-A6778F784428}"/>
+                <a16:creationId xmlns:a16="http://schemas.microsoft.com/office/drawing/2014/main" id="{595A5270-ABD5-440C-B80C-9759056EC7C1}"/>
               </a:ext>
             </a:extLst>
           </p:cNvPr>
@@ -22617,7 +22617,7 @@
           <p:cNvPr id="22" name="">
             <a:extLst xmlns:a="http://schemas.openxmlformats.org/drawingml/2006/main">
               <a:ext uri="{FF2B5EF4-FFF2-40B4-BE49-F238E27FC236}">
-                <a16:creationId xmlns:a16="http://schemas.microsoft.com/office/drawing/2014/main" id="{58855C6D-0848-4101-917A-0FD20EA2ABE9}"/>
+                <a16:creationId xmlns:a16="http://schemas.microsoft.com/office/drawing/2014/main" id="{FEE2DE20-09B9-4424-A89C-D5A8D4A9BE3C}"/>
               </a:ext>
             </a:extLst>
           </p:cNvPr>
@@ -22669,7 +22669,7 @@
           <p:cNvPr id="23" name="">
             <a:extLst xmlns:a="http://schemas.openxmlformats.org/drawingml/2006/main">
               <a:ext uri="{FF2B5EF4-FFF2-40B4-BE49-F238E27FC236}">
-                <a16:creationId xmlns:a16="http://schemas.microsoft.com/office/drawing/2014/main" id="{76FFA0DC-9667-4BBB-A9E6-95F942B1DD4E}"/>
+                <a16:creationId xmlns:a16="http://schemas.microsoft.com/office/drawing/2014/main" id="{81D80AC4-3BF7-44AE-BE22-3D6A3A40F2E0}"/>
               </a:ext>
             </a:extLst>
           </p:cNvPr>
@@ -22721,7 +22721,7 @@
           <p:cNvPr id="24" name="">
             <a:extLst xmlns:a="http://schemas.openxmlformats.org/drawingml/2006/main">
               <a:ext uri="{FF2B5EF4-FFF2-40B4-BE49-F238E27FC236}">
-                <a16:creationId xmlns:a16="http://schemas.microsoft.com/office/drawing/2014/main" id="{9DEF12DF-7105-49FC-AF8A-15B6DD3850DB}"/>
+                <a16:creationId xmlns:a16="http://schemas.microsoft.com/office/drawing/2014/main" id="{B6CDDA01-33C9-4065-A44A-D945C1FB7772}"/>
               </a:ext>
             </a:extLst>
           </p:cNvPr>
@@ -22773,7 +22773,7 @@
           <p:cNvPr id="25" name="">
             <a:extLst xmlns:a="http://schemas.openxmlformats.org/drawingml/2006/main">
               <a:ext uri="{FF2B5EF4-FFF2-40B4-BE49-F238E27FC236}">
-                <a16:creationId xmlns:a16="http://schemas.microsoft.com/office/drawing/2014/main" id="{E6A19880-992C-4E14-A102-D1DE9C70E4B3}"/>
+                <a16:creationId xmlns:a16="http://schemas.microsoft.com/office/drawing/2014/main" id="{43EC7005-4841-461F-A386-4E3C5800358A}"/>
               </a:ext>
             </a:extLst>
           </p:cNvPr>
@@ -22825,7 +22825,7 @@
           <p:cNvPr id="26" name="">
             <a:extLst xmlns:a="http://schemas.openxmlformats.org/drawingml/2006/main">
               <a:ext uri="{FF2B5EF4-FFF2-40B4-BE49-F238E27FC236}">
-                <a16:creationId xmlns:a16="http://schemas.microsoft.com/office/drawing/2014/main" id="{1C3E36A9-8D7E-4E70-B91C-79745121E3AB}"/>
+                <a16:creationId xmlns:a16="http://schemas.microsoft.com/office/drawing/2014/main" id="{190F58F8-8C57-402C-9594-625A8EEEA476}"/>
               </a:ext>
             </a:extLst>
           </p:cNvPr>
@@ -22877,7 +22877,7 @@
           <p:cNvPr id="27" name="">
             <a:extLst xmlns:a="http://schemas.openxmlformats.org/drawingml/2006/main">
               <a:ext uri="{FF2B5EF4-FFF2-40B4-BE49-F238E27FC236}">
-                <a16:creationId xmlns:a16="http://schemas.microsoft.com/office/drawing/2014/main" id="{95EBBE90-3710-4A66-9011-4A94454467E7}"/>
+                <a16:creationId xmlns:a16="http://schemas.microsoft.com/office/drawing/2014/main" id="{4EC5C480-E058-4093-B83E-D0D3EF1FFCCA}"/>
               </a:ext>
             </a:extLst>
           </p:cNvPr>
@@ -22929,7 +22929,7 @@
           <p:cNvPr id="28" name="">
             <a:extLst xmlns:a="http://schemas.openxmlformats.org/drawingml/2006/main">
               <a:ext uri="{FF2B5EF4-FFF2-40B4-BE49-F238E27FC236}">
-                <a16:creationId xmlns:a16="http://schemas.microsoft.com/office/drawing/2014/main" id="{24211A40-147D-49D0-B922-C1EE42FB920A}"/>
+                <a16:creationId xmlns:a16="http://schemas.microsoft.com/office/drawing/2014/main" id="{383F9C27-7A1D-46AA-B772-F9DC1DA6F07F}"/>
               </a:ext>
             </a:extLst>
           </p:cNvPr>
@@ -22981,7 +22981,7 @@
           <p:cNvPr id="29" name="">
             <a:extLst xmlns:a="http://schemas.openxmlformats.org/drawingml/2006/main">
               <a:ext uri="{FF2B5EF4-FFF2-40B4-BE49-F238E27FC236}">
-                <a16:creationId xmlns:a16="http://schemas.microsoft.com/office/drawing/2014/main" id="{927895C9-89AF-4988-8694-6C12AA2E19F3}"/>
+                <a16:creationId xmlns:a16="http://schemas.microsoft.com/office/drawing/2014/main" id="{024D21F2-F4CE-43E6-9A18-CB02C65BEAA6}"/>
               </a:ext>
             </a:extLst>
           </p:cNvPr>
@@ -23033,7 +23033,7 @@
           <p:cNvPr id="30" name="">
             <a:extLst xmlns:a="http://schemas.openxmlformats.org/drawingml/2006/main">
               <a:ext uri="{FF2B5EF4-FFF2-40B4-BE49-F238E27FC236}">
-                <a16:creationId xmlns:a16="http://schemas.microsoft.com/office/drawing/2014/main" id="{21B4E413-EA4E-4236-81E7-59F845D740BC}"/>
+                <a16:creationId xmlns:a16="http://schemas.microsoft.com/office/drawing/2014/main" id="{4873CB1C-DCF4-4F3F-831E-0B860E090ABD}"/>
               </a:ext>
             </a:extLst>
           </p:cNvPr>
@@ -23064,7 +23064,7 @@
           <p:cNvPr id="31" name="">
             <a:extLst xmlns:a="http://schemas.openxmlformats.org/drawingml/2006/main">
               <a:ext uri="{FF2B5EF4-FFF2-40B4-BE49-F238E27FC236}">
-                <a16:creationId xmlns:a16="http://schemas.microsoft.com/office/drawing/2014/main" id="{87337AE7-938D-4F34-975E-7470875CE4D3}"/>
+                <a16:creationId xmlns:a16="http://schemas.microsoft.com/office/drawing/2014/main" id="{A842A799-4B91-49B2-B8BC-0A2624F4EABD}"/>
               </a:ext>
             </a:extLst>
           </p:cNvPr>
@@ -23095,7 +23095,7 @@
           <p:cNvPr id="32" name="">
             <a:extLst xmlns:a="http://schemas.openxmlformats.org/drawingml/2006/main">
               <a:ext uri="{FF2B5EF4-FFF2-40B4-BE49-F238E27FC236}">
-                <a16:creationId xmlns:a16="http://schemas.microsoft.com/office/drawing/2014/main" id="{1D53D2DF-2D57-4271-8E86-0014DE079873}"/>
+                <a16:creationId xmlns:a16="http://schemas.microsoft.com/office/drawing/2014/main" id="{7506B71F-44E7-4AF3-93FD-F672686ECF8D}"/>
               </a:ext>
             </a:extLst>
           </p:cNvPr>
@@ -23147,7 +23147,7 @@
           <p:cNvPr id="33" name="">
             <a:extLst xmlns:a="http://schemas.openxmlformats.org/drawingml/2006/main">
               <a:ext uri="{FF2B5EF4-FFF2-40B4-BE49-F238E27FC236}">
-                <a16:creationId xmlns:a16="http://schemas.microsoft.com/office/drawing/2014/main" id="{E9440716-1C48-4B53-B6E2-6C6031F0DC7A}"/>
+                <a16:creationId xmlns:a16="http://schemas.microsoft.com/office/drawing/2014/main" id="{8468967D-716D-48BB-A448-18755F127406}"/>
               </a:ext>
             </a:extLst>
           </p:cNvPr>
@@ -23199,7 +23199,7 @@
           <p:cNvPr id="34" name="">
             <a:extLst xmlns:a="http://schemas.openxmlformats.org/drawingml/2006/main">
               <a:ext uri="{FF2B5EF4-FFF2-40B4-BE49-F238E27FC236}">
-                <a16:creationId xmlns:a16="http://schemas.microsoft.com/office/drawing/2014/main" id="{420C93A0-5FC1-4606-AD29-515EBAF02436}"/>
+                <a16:creationId xmlns:a16="http://schemas.microsoft.com/office/drawing/2014/main" id="{76EB46A5-EB8D-4718-9376-309C5EAAF72E}"/>
               </a:ext>
             </a:extLst>
           </p:cNvPr>
@@ -23251,7 +23251,7 @@
           <p:cNvPr id="35" name="">
             <a:extLst xmlns:a="http://schemas.openxmlformats.org/drawingml/2006/main">
               <a:ext uri="{FF2B5EF4-FFF2-40B4-BE49-F238E27FC236}">
-                <a16:creationId xmlns:a16="http://schemas.microsoft.com/office/drawing/2014/main" id="{ADD4668B-B79A-45C0-9A71-9D6CCFC9B7D9}"/>
+                <a16:creationId xmlns:a16="http://schemas.microsoft.com/office/drawing/2014/main" id="{09ECC5C8-95CA-453A-BB8B-14A89ACDADAA}"/>
               </a:ext>
             </a:extLst>
           </p:cNvPr>
@@ -23303,7 +23303,7 @@
           <p:cNvPr id="36" name="">
             <a:extLst xmlns:a="http://schemas.openxmlformats.org/drawingml/2006/main">
               <a:ext uri="{FF2B5EF4-FFF2-40B4-BE49-F238E27FC236}">
-                <a16:creationId xmlns:a16="http://schemas.microsoft.com/office/drawing/2014/main" id="{9BF460E6-824C-4D5A-9322-7B6692850B90}"/>
+                <a16:creationId xmlns:a16="http://schemas.microsoft.com/office/drawing/2014/main" id="{DDB09584-54DF-4D1C-B0C0-134E9ACD8042}"/>
               </a:ext>
             </a:extLst>
           </p:cNvPr>
@@ -23355,7 +23355,7 @@
           <p:cNvPr id="37" name="">
             <a:extLst xmlns:a="http://schemas.openxmlformats.org/drawingml/2006/main">
               <a:ext uri="{FF2B5EF4-FFF2-40B4-BE49-F238E27FC236}">
-                <a16:creationId xmlns:a16="http://schemas.microsoft.com/office/drawing/2014/main" id="{C4E9B327-C5C6-478B-B44F-FA0614248636}"/>
+                <a16:creationId xmlns:a16="http://schemas.microsoft.com/office/drawing/2014/main" id="{CDD942E6-F043-4D20-8E9A-D392FA373274}"/>
               </a:ext>
             </a:extLst>
           </p:cNvPr>
@@ -23407,7 +23407,7 @@
           <p:cNvPr id="38" name="">
             <a:extLst xmlns:a="http://schemas.openxmlformats.org/drawingml/2006/main">
               <a:ext uri="{FF2B5EF4-FFF2-40B4-BE49-F238E27FC236}">
-                <a16:creationId xmlns:a16="http://schemas.microsoft.com/office/drawing/2014/main" id="{E0EBB30C-FBE0-479F-ACFE-9AB52DAF1BAB}"/>
+                <a16:creationId xmlns:a16="http://schemas.microsoft.com/office/drawing/2014/main" id="{EDBA60CB-83D7-43AE-BB81-B771D1426D4A}"/>
               </a:ext>
             </a:extLst>
           </p:cNvPr>
@@ -23459,7 +23459,7 @@
           <p:cNvPr id="39" name="">
             <a:extLst xmlns:a="http://schemas.openxmlformats.org/drawingml/2006/main">
               <a:ext uri="{FF2B5EF4-FFF2-40B4-BE49-F238E27FC236}">
-                <a16:creationId xmlns:a16="http://schemas.microsoft.com/office/drawing/2014/main" id="{91737919-CF32-4EB8-B346-5C541CD00DEC}"/>
+                <a16:creationId xmlns:a16="http://schemas.microsoft.com/office/drawing/2014/main" id="{6549A9FA-522C-4C29-8C1C-8E178AB234F1}"/>
               </a:ext>
             </a:extLst>
           </p:cNvPr>
@@ -23511,7 +23511,7 @@
           <p:cNvPr id="40" name="">
             <a:extLst xmlns:a="http://schemas.openxmlformats.org/drawingml/2006/main">
               <a:ext uri="{FF2B5EF4-FFF2-40B4-BE49-F238E27FC236}">
-                <a16:creationId xmlns:a16="http://schemas.microsoft.com/office/drawing/2014/main" id="{1686B718-8765-4ECE-BE4E-2177B466329F}"/>
+                <a16:creationId xmlns:a16="http://schemas.microsoft.com/office/drawing/2014/main" id="{75D1E1DD-0794-42DB-BBD2-7A789313B33E}"/>
               </a:ext>
             </a:extLst>
           </p:cNvPr>
@@ -23542,7 +23542,7 @@
           <p:cNvPr id="41" name="">
             <a:extLst xmlns:a="http://schemas.openxmlformats.org/drawingml/2006/main">
               <a:ext uri="{FF2B5EF4-FFF2-40B4-BE49-F238E27FC236}">
-                <a16:creationId xmlns:a16="http://schemas.microsoft.com/office/drawing/2014/main" id="{F88298CB-6330-432D-9A09-13D8B746A7C0}"/>
+                <a16:creationId xmlns:a16="http://schemas.microsoft.com/office/drawing/2014/main" id="{9156E0E1-BE37-479A-A63A-99BBA7BA3BC6}"/>
               </a:ext>
             </a:extLst>
           </p:cNvPr>
@@ -23594,7 +23594,7 @@
           <p:cNvPr id="42" name="">
             <a:extLst xmlns:a="http://schemas.openxmlformats.org/drawingml/2006/main">
               <a:ext uri="{FF2B5EF4-FFF2-40B4-BE49-F238E27FC236}">
-                <a16:creationId xmlns:a16="http://schemas.microsoft.com/office/drawing/2014/main" id="{53CB4532-B17B-4A26-B689-35F91C373A24}"/>
+                <a16:creationId xmlns:a16="http://schemas.microsoft.com/office/drawing/2014/main" id="{7D9289C0-616B-480A-B790-EE0700F60FB4}"/>
               </a:ext>
             </a:extLst>
           </p:cNvPr>
@@ -23646,7 +23646,7 @@
           <p:cNvPr id="43" name="">
             <a:extLst xmlns:a="http://schemas.openxmlformats.org/drawingml/2006/main">
               <a:ext uri="{FF2B5EF4-FFF2-40B4-BE49-F238E27FC236}">
-                <a16:creationId xmlns:a16="http://schemas.microsoft.com/office/drawing/2014/main" id="{86CA70EF-9725-43B8-B34B-8D3CE8BE5A37}"/>
+                <a16:creationId xmlns:a16="http://schemas.microsoft.com/office/drawing/2014/main" id="{47053EF1-FDEF-46B2-AD39-A819D5DBCFF5}"/>
               </a:ext>
             </a:extLst>
           </p:cNvPr>
@@ -23698,7 +23698,7 @@
           <p:cNvPr id="44" name="">
             <a:extLst xmlns:a="http://schemas.openxmlformats.org/drawingml/2006/main">
               <a:ext uri="{FF2B5EF4-FFF2-40B4-BE49-F238E27FC236}">
-                <a16:creationId xmlns:a16="http://schemas.microsoft.com/office/drawing/2014/main" id="{4E68B683-2EBF-416E-9F0D-1EADF5C66BDC}"/>
+                <a16:creationId xmlns:a16="http://schemas.microsoft.com/office/drawing/2014/main" id="{971919A7-8A76-4576-B779-506B7820CA9E}"/>
               </a:ext>
             </a:extLst>
           </p:cNvPr>
@@ -23750,7 +23750,7 @@
           <p:cNvPr id="45" name="">
             <a:extLst xmlns:a="http://schemas.openxmlformats.org/drawingml/2006/main">
               <a:ext uri="{FF2B5EF4-FFF2-40B4-BE49-F238E27FC236}">
-                <a16:creationId xmlns:a16="http://schemas.microsoft.com/office/drawing/2014/main" id="{67C1A349-A4C4-4C52-AC7B-87104F4E0EFC}"/>
+                <a16:creationId xmlns:a16="http://schemas.microsoft.com/office/drawing/2014/main" id="{41BF66D8-9AB6-4D91-A388-D13A952398C1}"/>
               </a:ext>
             </a:extLst>
           </p:cNvPr>
@@ -23802,7 +23802,7 @@
           <p:cNvPr id="46" name="">
             <a:extLst xmlns:a="http://schemas.openxmlformats.org/drawingml/2006/main">
               <a:ext uri="{FF2B5EF4-FFF2-40B4-BE49-F238E27FC236}">
-                <a16:creationId xmlns:a16="http://schemas.microsoft.com/office/drawing/2014/main" id="{FEEEDA7A-8AE7-4F89-9C52-65E433A6B654}"/>
+                <a16:creationId xmlns:a16="http://schemas.microsoft.com/office/drawing/2014/main" id="{FCD8E551-C1B2-4CDE-9623-53ED5E4F0756}"/>
               </a:ext>
             </a:extLst>
           </p:cNvPr>
@@ -23854,7 +23854,7 @@
           <p:cNvPr id="47" name="">
             <a:extLst xmlns:a="http://schemas.openxmlformats.org/drawingml/2006/main">
               <a:ext uri="{FF2B5EF4-FFF2-40B4-BE49-F238E27FC236}">
-                <a16:creationId xmlns:a16="http://schemas.microsoft.com/office/drawing/2014/main" id="{3C974AF0-B42F-4DA6-8886-095176EC0E12}"/>
+                <a16:creationId xmlns:a16="http://schemas.microsoft.com/office/drawing/2014/main" id="{9FBEB2E4-E72A-4DCC-B4AD-8B4633238AD8}"/>
               </a:ext>
             </a:extLst>
           </p:cNvPr>
@@ -23906,7 +23906,7 @@
           <p:cNvPr id="48" name="">
             <a:extLst xmlns:a="http://schemas.openxmlformats.org/drawingml/2006/main">
               <a:ext uri="{FF2B5EF4-FFF2-40B4-BE49-F238E27FC236}">
-                <a16:creationId xmlns:a16="http://schemas.microsoft.com/office/drawing/2014/main" id="{CB2C8499-B83C-4CB9-A4E2-D11D5460C045}"/>
+                <a16:creationId xmlns:a16="http://schemas.microsoft.com/office/drawing/2014/main" id="{50861077-A871-463D-80EE-C1E93280111F}"/>
               </a:ext>
             </a:extLst>
           </p:cNvPr>
@@ -23958,7 +23958,7 @@
           <p:cNvPr id="49" name="">
             <a:extLst xmlns:a="http://schemas.openxmlformats.org/drawingml/2006/main">
               <a:ext uri="{FF2B5EF4-FFF2-40B4-BE49-F238E27FC236}">
-                <a16:creationId xmlns:a16="http://schemas.microsoft.com/office/drawing/2014/main" id="{E851B710-67AB-497D-A873-6969495097DD}"/>
+                <a16:creationId xmlns:a16="http://schemas.microsoft.com/office/drawing/2014/main" id="{38955A9B-61B4-4F6A-86BA-C426E9DAAAF9}"/>
               </a:ext>
             </a:extLst>
           </p:cNvPr>
@@ -23989,7 +23989,7 @@
           <p:cNvPr id="50" name="">
             <a:extLst xmlns:a="http://schemas.openxmlformats.org/drawingml/2006/main">
               <a:ext uri="{FF2B5EF4-FFF2-40B4-BE49-F238E27FC236}">
-                <a16:creationId xmlns:a16="http://schemas.microsoft.com/office/drawing/2014/main" id="{DBC22ECD-C5CE-4558-B6C3-DF4B44197EFE}"/>
+                <a16:creationId xmlns:a16="http://schemas.microsoft.com/office/drawing/2014/main" id="{5E0639BB-9F36-4720-B4F6-B8A8333C0745}"/>
               </a:ext>
             </a:extLst>
           </p:cNvPr>
@@ -24020,7 +24020,7 @@
           <p:cNvPr id="51" name="">
             <a:extLst xmlns:a="http://schemas.openxmlformats.org/drawingml/2006/main">
               <a:ext uri="{FF2B5EF4-FFF2-40B4-BE49-F238E27FC236}">
-                <a16:creationId xmlns:a16="http://schemas.microsoft.com/office/drawing/2014/main" id="{8B0D4340-8D76-4839-AE31-2EBBA752C467}"/>
+                <a16:creationId xmlns:a16="http://schemas.microsoft.com/office/drawing/2014/main" id="{FA1B849D-8E28-4F1D-A2B5-B927363513B8}"/>
               </a:ext>
             </a:extLst>
           </p:cNvPr>
@@ -24072,7 +24072,7 @@
           <p:cNvPr id="52" name="">
             <a:extLst xmlns:a="http://schemas.openxmlformats.org/drawingml/2006/main">
               <a:ext uri="{FF2B5EF4-FFF2-40B4-BE49-F238E27FC236}">
-                <a16:creationId xmlns:a16="http://schemas.microsoft.com/office/drawing/2014/main" id="{31E6C214-1C21-4381-950C-C66CD997D236}"/>
+                <a16:creationId xmlns:a16="http://schemas.microsoft.com/office/drawing/2014/main" id="{DFE4CAD1-3612-4FE2-BF16-B5BFC8C05DCF}"/>
               </a:ext>
             </a:extLst>
           </p:cNvPr>
@@ -24124,7 +24124,7 @@
           <p:cNvPr id="53" name="">
             <a:extLst xmlns:a="http://schemas.openxmlformats.org/drawingml/2006/main">
               <a:ext uri="{FF2B5EF4-FFF2-40B4-BE49-F238E27FC236}">
-                <a16:creationId xmlns:a16="http://schemas.microsoft.com/office/drawing/2014/main" id="{6A6ACBCA-0EB3-4C0C-AB10-DF703189D8D9}"/>
+                <a16:creationId xmlns:a16="http://schemas.microsoft.com/office/drawing/2014/main" id="{BFDBC182-85A3-4229-B642-C24BD7AD583C}"/>
               </a:ext>
             </a:extLst>
           </p:cNvPr>
@@ -24176,7 +24176,7 @@
           <p:cNvPr id="54" name="">
             <a:extLst xmlns:a="http://schemas.openxmlformats.org/drawingml/2006/main">
               <a:ext uri="{FF2B5EF4-FFF2-40B4-BE49-F238E27FC236}">
-                <a16:creationId xmlns:a16="http://schemas.microsoft.com/office/drawing/2014/main" id="{432C68A1-C5A9-4A8F-935D-EAB12537485F}"/>
+                <a16:creationId xmlns:a16="http://schemas.microsoft.com/office/drawing/2014/main" id="{1F0A5A7D-7215-4080-87DD-E6F49C4DCC03}"/>
               </a:ext>
             </a:extLst>
           </p:cNvPr>
@@ -24228,7 +24228,7 @@
           <p:cNvPr id="55" name="">
             <a:extLst xmlns:a="http://schemas.openxmlformats.org/drawingml/2006/main">
               <a:ext uri="{FF2B5EF4-FFF2-40B4-BE49-F238E27FC236}">
-                <a16:creationId xmlns:a16="http://schemas.microsoft.com/office/drawing/2014/main" id="{174658D4-CA33-4EFB-9066-C270078F42DA}"/>
+                <a16:creationId xmlns:a16="http://schemas.microsoft.com/office/drawing/2014/main" id="{81D130A8-7C9A-45F5-AB2D-CD1D36FBB009}"/>
               </a:ext>
             </a:extLst>
           </p:cNvPr>
@@ -24280,7 +24280,7 @@
           <p:cNvPr id="56" name="">
             <a:extLst xmlns:a="http://schemas.openxmlformats.org/drawingml/2006/main">
               <a:ext uri="{FF2B5EF4-FFF2-40B4-BE49-F238E27FC236}">
-                <a16:creationId xmlns:a16="http://schemas.microsoft.com/office/drawing/2014/main" id="{A63A26AA-E64F-4289-87F5-8D789B532B7B}"/>
+                <a16:creationId xmlns:a16="http://schemas.microsoft.com/office/drawing/2014/main" id="{0699968F-DDA2-4B2E-A75D-F560D21B831A}"/>
               </a:ext>
             </a:extLst>
           </p:cNvPr>
@@ -24332,7 +24332,7 @@
           <p:cNvPr id="57" name="">
             <a:extLst xmlns:a="http://schemas.openxmlformats.org/drawingml/2006/main">
               <a:ext uri="{FF2B5EF4-FFF2-40B4-BE49-F238E27FC236}">
-                <a16:creationId xmlns:a16="http://schemas.microsoft.com/office/drawing/2014/main" id="{F81057D2-1177-477C-ACF3-1A1D924FEA30}"/>
+                <a16:creationId xmlns:a16="http://schemas.microsoft.com/office/drawing/2014/main" id="{98510828-B92F-4ABC-904B-977AE127AA16}"/>
               </a:ext>
             </a:extLst>
           </p:cNvPr>
@@ -24384,7 +24384,7 @@
           <p:cNvPr id="58" name="">
             <a:extLst xmlns:a="http://schemas.openxmlformats.org/drawingml/2006/main">
               <a:ext uri="{FF2B5EF4-FFF2-40B4-BE49-F238E27FC236}">
-                <a16:creationId xmlns:a16="http://schemas.microsoft.com/office/drawing/2014/main" id="{8FAE4E28-30CE-4A34-A505-EC611B2DF222}"/>
+                <a16:creationId xmlns:a16="http://schemas.microsoft.com/office/drawing/2014/main" id="{CD1799A7-0120-4AA8-A72B-3E96AADBC1B2}"/>
               </a:ext>
             </a:extLst>
           </p:cNvPr>
@@ -24436,7 +24436,7 @@
           <p:cNvPr id="59" name="">
             <a:extLst xmlns:a="http://schemas.openxmlformats.org/drawingml/2006/main">
               <a:ext uri="{FF2B5EF4-FFF2-40B4-BE49-F238E27FC236}">
-                <a16:creationId xmlns:a16="http://schemas.microsoft.com/office/drawing/2014/main" id="{B5754575-E5A8-41EB-971D-D863CF4BD736}"/>
+                <a16:creationId xmlns:a16="http://schemas.microsoft.com/office/drawing/2014/main" id="{47B96C2C-FA75-4458-A1E1-F3CB25962293}"/>
               </a:ext>
             </a:extLst>
           </p:cNvPr>
@@ -24467,7 +24467,7 @@
           <p:cNvPr id="60" name="">
             <a:extLst xmlns:a="http://schemas.openxmlformats.org/drawingml/2006/main">
               <a:ext uri="{FF2B5EF4-FFF2-40B4-BE49-F238E27FC236}">
-                <a16:creationId xmlns:a16="http://schemas.microsoft.com/office/drawing/2014/main" id="{93C39ED4-4B0A-4A42-9FD0-4663437611AD}"/>
+                <a16:creationId xmlns:a16="http://schemas.microsoft.com/office/drawing/2014/main" id="{1414BBD5-58B3-495C-B0E5-7C28076E527B}"/>
               </a:ext>
             </a:extLst>
           </p:cNvPr>
@@ -24519,7 +24519,7 @@
           <p:cNvPr id="61" name="">
             <a:extLst xmlns:a="http://schemas.openxmlformats.org/drawingml/2006/main">
               <a:ext uri="{FF2B5EF4-FFF2-40B4-BE49-F238E27FC236}">
-                <a16:creationId xmlns:a16="http://schemas.microsoft.com/office/drawing/2014/main" id="{9441AEAF-927D-46A4-9CB2-6BA959FCF13C}"/>
+                <a16:creationId xmlns:a16="http://schemas.microsoft.com/office/drawing/2014/main" id="{84A711EE-0EDA-4986-8F13-63175AFA7553}"/>
               </a:ext>
             </a:extLst>
           </p:cNvPr>
@@ -24571,7 +24571,7 @@
           <p:cNvPr id="62" name="">
             <a:extLst xmlns:a="http://schemas.openxmlformats.org/drawingml/2006/main">
               <a:ext uri="{FF2B5EF4-FFF2-40B4-BE49-F238E27FC236}">
-                <a16:creationId xmlns:a16="http://schemas.microsoft.com/office/drawing/2014/main" id="{7D76ED6F-44A0-41FE-BFB7-939F6BEEB054}"/>
+                <a16:creationId xmlns:a16="http://schemas.microsoft.com/office/drawing/2014/main" id="{F5972F7D-E0FB-4F87-956D-F92820E9E731}"/>
               </a:ext>
             </a:extLst>
           </p:cNvPr>
@@ -24623,7 +24623,7 @@
           <p:cNvPr id="63" name="">
             <a:extLst xmlns:a="http://schemas.openxmlformats.org/drawingml/2006/main">
               <a:ext uri="{FF2B5EF4-FFF2-40B4-BE49-F238E27FC236}">
-                <a16:creationId xmlns:a16="http://schemas.microsoft.com/office/drawing/2014/main" id="{18C66E7D-E355-4A66-B604-5C1366CF192B}"/>
+                <a16:creationId xmlns:a16="http://schemas.microsoft.com/office/drawing/2014/main" id="{5F10C675-7FA6-4952-8389-903FB76FB305}"/>
               </a:ext>
             </a:extLst>
           </p:cNvPr>
@@ -24675,7 +24675,7 @@
           <p:cNvPr id="64" name="">
             <a:extLst xmlns:a="http://schemas.openxmlformats.org/drawingml/2006/main">
               <a:ext uri="{FF2B5EF4-FFF2-40B4-BE49-F238E27FC236}">
-                <a16:creationId xmlns:a16="http://schemas.microsoft.com/office/drawing/2014/main" id="{E990AF30-0BBE-4760-9DE5-B2EAA857958E}"/>
+                <a16:creationId xmlns:a16="http://schemas.microsoft.com/office/drawing/2014/main" id="{E5857E35-191D-4E14-A9C0-9951223D8A1E}"/>
               </a:ext>
             </a:extLst>
           </p:cNvPr>
@@ -24727,7 +24727,7 @@
           <p:cNvPr id="65" name="">
             <a:extLst xmlns:a="http://schemas.openxmlformats.org/drawingml/2006/main">
               <a:ext uri="{FF2B5EF4-FFF2-40B4-BE49-F238E27FC236}">
-                <a16:creationId xmlns:a16="http://schemas.microsoft.com/office/drawing/2014/main" id="{11C757DF-FDC1-4762-A42D-29C5792896BC}"/>
+                <a16:creationId xmlns:a16="http://schemas.microsoft.com/office/drawing/2014/main" id="{74FD68B2-53E0-45C0-AD7C-4ACDE73783CE}"/>
               </a:ext>
             </a:extLst>
           </p:cNvPr>
@@ -24779,7 +24779,7 @@
           <p:cNvPr id="66" name="">
             <a:extLst xmlns:a="http://schemas.openxmlformats.org/drawingml/2006/main">
               <a:ext uri="{FF2B5EF4-FFF2-40B4-BE49-F238E27FC236}">
-                <a16:creationId xmlns:a16="http://schemas.microsoft.com/office/drawing/2014/main" id="{91F52450-3B79-4E1D-A682-F7BF1B680C89}"/>
+                <a16:creationId xmlns:a16="http://schemas.microsoft.com/office/drawing/2014/main" id="{3061FFA7-C101-4EA5-A775-577E6AE38DA3}"/>
               </a:ext>
             </a:extLst>
           </p:cNvPr>
@@ -24831,7 +24831,7 @@
           <p:cNvPr id="67" name="">
             <a:extLst xmlns:a="http://schemas.openxmlformats.org/drawingml/2006/main">
               <a:ext uri="{FF2B5EF4-FFF2-40B4-BE49-F238E27FC236}">
-                <a16:creationId xmlns:a16="http://schemas.microsoft.com/office/drawing/2014/main" id="{758FDB6D-0763-4712-903A-F4713CE2FB26}"/>
+                <a16:creationId xmlns:a16="http://schemas.microsoft.com/office/drawing/2014/main" id="{4B4EF6F7-615D-465D-83E7-3005CB9461F2}"/>
               </a:ext>
             </a:extLst>
           </p:cNvPr>
@@ -24883,7 +24883,7 @@
           <p:cNvPr id="68" name="">
             <a:extLst xmlns:a="http://schemas.openxmlformats.org/drawingml/2006/main">
               <a:ext uri="{FF2B5EF4-FFF2-40B4-BE49-F238E27FC236}">
-                <a16:creationId xmlns:a16="http://schemas.microsoft.com/office/drawing/2014/main" id="{88A8492D-BD97-436A-BC04-2D83D5146087}"/>
+                <a16:creationId xmlns:a16="http://schemas.microsoft.com/office/drawing/2014/main" id="{59244973-6CA7-4995-BEE5-E6039505777D}"/>
               </a:ext>
             </a:extLst>
           </p:cNvPr>
@@ -24914,7 +24914,7 @@
           <p:cNvPr id="69" name="">
             <a:extLst xmlns:a="http://schemas.openxmlformats.org/drawingml/2006/main">
               <a:ext uri="{FF2B5EF4-FFF2-40B4-BE49-F238E27FC236}">
-                <a16:creationId xmlns:a16="http://schemas.microsoft.com/office/drawing/2014/main" id="{6CE14F6B-0229-4D25-95BC-A3F5BCF4EBC7}"/>
+                <a16:creationId xmlns:a16="http://schemas.microsoft.com/office/drawing/2014/main" id="{FC7E3115-5DF1-4AF8-9399-388EF24D0CAD}"/>
               </a:ext>
             </a:extLst>
           </p:cNvPr>
@@ -24945,7 +24945,7 @@
           <p:cNvPr id="70" name="">
             <a:extLst xmlns:a="http://schemas.openxmlformats.org/drawingml/2006/main">
               <a:ext uri="{FF2B5EF4-FFF2-40B4-BE49-F238E27FC236}">
-                <a16:creationId xmlns:a16="http://schemas.microsoft.com/office/drawing/2014/main" id="{5DD03B0E-F1D9-4476-B288-6A0C5DFDC093}"/>
+                <a16:creationId xmlns:a16="http://schemas.microsoft.com/office/drawing/2014/main" id="{8B70F55F-8DDA-4D21-ADE3-5FC35E116B59}"/>
               </a:ext>
             </a:extLst>
           </p:cNvPr>
@@ -24997,7 +24997,7 @@
           <p:cNvPr id="71" name="">
             <a:extLst xmlns:a="http://schemas.openxmlformats.org/drawingml/2006/main">
               <a:ext uri="{FF2B5EF4-FFF2-40B4-BE49-F238E27FC236}">
-                <a16:creationId xmlns:a16="http://schemas.microsoft.com/office/drawing/2014/main" id="{1F91A8E1-5D14-4249-9B03-E1D2AA3533F7}"/>
+                <a16:creationId xmlns:a16="http://schemas.microsoft.com/office/drawing/2014/main" id="{EC36EF09-3E1F-4EE5-9431-C16182823416}"/>
               </a:ext>
             </a:extLst>
           </p:cNvPr>
@@ -25049,7 +25049,7 @@
           <p:cNvPr id="72" name="">
             <a:extLst xmlns:a="http://schemas.openxmlformats.org/drawingml/2006/main">
               <a:ext uri="{FF2B5EF4-FFF2-40B4-BE49-F238E27FC236}">
-                <a16:creationId xmlns:a16="http://schemas.microsoft.com/office/drawing/2014/main" id="{2F9209EC-055A-4F98-B1F2-778B0821807C}"/>
+                <a16:creationId xmlns:a16="http://schemas.microsoft.com/office/drawing/2014/main" id="{5748E845-F202-412A-859E-2A4774701FD9}"/>
               </a:ext>
             </a:extLst>
           </p:cNvPr>
@@ -25101,7 +25101,7 @@
           <p:cNvPr id="73" name="">
             <a:extLst xmlns:a="http://schemas.openxmlformats.org/drawingml/2006/main">
               <a:ext uri="{FF2B5EF4-FFF2-40B4-BE49-F238E27FC236}">
-                <a16:creationId xmlns:a16="http://schemas.microsoft.com/office/drawing/2014/main" id="{4639EA07-48DA-4E55-84C6-9274BF86BF1D}"/>
+                <a16:creationId xmlns:a16="http://schemas.microsoft.com/office/drawing/2014/main" id="{DB1F2EE7-9ADF-4124-B276-E0FBA1D6F030}"/>
               </a:ext>
             </a:extLst>
           </p:cNvPr>
@@ -25153,7 +25153,7 @@
           <p:cNvPr id="74" name="">
             <a:extLst xmlns:a="http://schemas.openxmlformats.org/drawingml/2006/main">
               <a:ext uri="{FF2B5EF4-FFF2-40B4-BE49-F238E27FC236}">
-                <a16:creationId xmlns:a16="http://schemas.microsoft.com/office/drawing/2014/main" id="{A16091EC-72BF-4AFA-8058-030D97BDDD07}"/>
+                <a16:creationId xmlns:a16="http://schemas.microsoft.com/office/drawing/2014/main" id="{0FDAA669-6203-40E4-9B36-F4AC654BCE52}"/>
               </a:ext>
             </a:extLst>
           </p:cNvPr>
@@ -25205,7 +25205,7 @@
           <p:cNvPr id="75" name="">
             <a:extLst xmlns:a="http://schemas.openxmlformats.org/drawingml/2006/main">
               <a:ext uri="{FF2B5EF4-FFF2-40B4-BE49-F238E27FC236}">
-                <a16:creationId xmlns:a16="http://schemas.microsoft.com/office/drawing/2014/main" id="{A1E9C5E1-9EED-43F0-969F-2492A71E829D}"/>
+                <a16:creationId xmlns:a16="http://schemas.microsoft.com/office/drawing/2014/main" id="{333B59EC-18CD-43B5-A216-E008E1D76DBB}"/>
               </a:ext>
             </a:extLst>
           </p:cNvPr>
@@ -25257,7 +25257,7 @@
           <p:cNvPr id="76" name="">
             <a:extLst xmlns:a="http://schemas.openxmlformats.org/drawingml/2006/main">
               <a:ext uri="{FF2B5EF4-FFF2-40B4-BE49-F238E27FC236}">
-                <a16:creationId xmlns:a16="http://schemas.microsoft.com/office/drawing/2014/main" id="{B524703D-2824-45D7-B8C8-ACE5532906D0}"/>
+                <a16:creationId xmlns:a16="http://schemas.microsoft.com/office/drawing/2014/main" id="{2466032F-E113-4ACA-904D-649AC0575B87}"/>
               </a:ext>
             </a:extLst>
           </p:cNvPr>
@@ -25309,7 +25309,7 @@
           <p:cNvPr id="77" name="">
             <a:extLst xmlns:a="http://schemas.openxmlformats.org/drawingml/2006/main">
               <a:ext uri="{FF2B5EF4-FFF2-40B4-BE49-F238E27FC236}">
-                <a16:creationId xmlns:a16="http://schemas.microsoft.com/office/drawing/2014/main" id="{11EA9E40-8437-4CA9-B933-11F921E7B13D}"/>
+                <a16:creationId xmlns:a16="http://schemas.microsoft.com/office/drawing/2014/main" id="{8765CCC5-E4CD-4430-90F6-AC99965381F0}"/>
               </a:ext>
             </a:extLst>
           </p:cNvPr>
@@ -25361,7 +25361,7 @@
           <p:cNvPr id="78" name="">
             <a:extLst xmlns:a="http://schemas.openxmlformats.org/drawingml/2006/main">
               <a:ext uri="{FF2B5EF4-FFF2-40B4-BE49-F238E27FC236}">
-                <a16:creationId xmlns:a16="http://schemas.microsoft.com/office/drawing/2014/main" id="{4BE448AE-0BD4-414F-A9C5-44CBDAE504BF}"/>
+                <a16:creationId xmlns:a16="http://schemas.microsoft.com/office/drawing/2014/main" id="{5518C8F9-D706-4C1F-89CB-656F8D9FF670}"/>
               </a:ext>
             </a:extLst>
           </p:cNvPr>
@@ -25392,7 +25392,7 @@
           <p:cNvPr id="79" name="">
             <a:extLst xmlns:a="http://schemas.openxmlformats.org/drawingml/2006/main">
               <a:ext uri="{FF2B5EF4-FFF2-40B4-BE49-F238E27FC236}">
-                <a16:creationId xmlns:a16="http://schemas.microsoft.com/office/drawing/2014/main" id="{4BAB7C91-16B0-4680-B595-5104B7B0BA86}"/>
+                <a16:creationId xmlns:a16="http://schemas.microsoft.com/office/drawing/2014/main" id="{5A3CA7D8-1BBE-4F08-8507-4DD006EE3F3F}"/>
               </a:ext>
             </a:extLst>
           </p:cNvPr>
@@ -25444,7 +25444,7 @@
           <p:cNvPr id="80" name="">
             <a:extLst xmlns:a="http://schemas.openxmlformats.org/drawingml/2006/main">
               <a:ext uri="{FF2B5EF4-FFF2-40B4-BE49-F238E27FC236}">
-                <a16:creationId xmlns:a16="http://schemas.microsoft.com/office/drawing/2014/main" id="{072D4AE0-9A73-4D9C-8DC0-8D86616D1B94}"/>
+                <a16:creationId xmlns:a16="http://schemas.microsoft.com/office/drawing/2014/main" id="{2F2CA07A-6C82-4D19-B445-F86A08DE8BAD}"/>
               </a:ext>
             </a:extLst>
           </p:cNvPr>
@@ -25496,7 +25496,7 @@
           <p:cNvPr id="81" name="">
             <a:extLst xmlns:a="http://schemas.openxmlformats.org/drawingml/2006/main">
               <a:ext uri="{FF2B5EF4-FFF2-40B4-BE49-F238E27FC236}">
-                <a16:creationId xmlns:a16="http://schemas.microsoft.com/office/drawing/2014/main" id="{BF4921B6-4A65-4D74-A70D-9E1292590E73}"/>
+                <a16:creationId xmlns:a16="http://schemas.microsoft.com/office/drawing/2014/main" id="{D7ECF963-13E6-460A-830A-C4BBE340FD51}"/>
               </a:ext>
             </a:extLst>
           </p:cNvPr>
@@ -25548,7 +25548,7 @@
           <p:cNvPr id="82" name="">
             <a:extLst xmlns:a="http://schemas.openxmlformats.org/drawingml/2006/main">
               <a:ext uri="{FF2B5EF4-FFF2-40B4-BE49-F238E27FC236}">
-                <a16:creationId xmlns:a16="http://schemas.microsoft.com/office/drawing/2014/main" id="{65DFBAC3-69C9-455A-96CE-8F9A7815CD27}"/>
+                <a16:creationId xmlns:a16="http://schemas.microsoft.com/office/drawing/2014/main" id="{BD3FEC99-B06E-4C8A-99C0-A6CCC9478648}"/>
               </a:ext>
             </a:extLst>
           </p:cNvPr>
@@ -25600,7 +25600,7 @@
           <p:cNvPr id="83" name="">
             <a:extLst xmlns:a="http://schemas.openxmlformats.org/drawingml/2006/main">
               <a:ext uri="{FF2B5EF4-FFF2-40B4-BE49-F238E27FC236}">
-                <a16:creationId xmlns:a16="http://schemas.microsoft.com/office/drawing/2014/main" id="{9779A4FC-C5AB-4752-91AE-5D8996D1CAC9}"/>
+                <a16:creationId xmlns:a16="http://schemas.microsoft.com/office/drawing/2014/main" id="{575D22A4-3E43-4428-BC36-942973C403C2}"/>
               </a:ext>
             </a:extLst>
           </p:cNvPr>
@@ -25652,7 +25652,7 @@
           <p:cNvPr id="84" name="">
             <a:extLst xmlns:a="http://schemas.openxmlformats.org/drawingml/2006/main">
               <a:ext uri="{FF2B5EF4-FFF2-40B4-BE49-F238E27FC236}">
-                <a16:creationId xmlns:a16="http://schemas.microsoft.com/office/drawing/2014/main" id="{19DFFB0B-AD8D-4372-B14A-D3192C1B7766}"/>
+                <a16:creationId xmlns:a16="http://schemas.microsoft.com/office/drawing/2014/main" id="{BF2C9994-3C72-4903-8387-AF2C83CD5077}"/>
               </a:ext>
             </a:extLst>
           </p:cNvPr>
@@ -25704,7 +25704,7 @@
           <p:cNvPr id="85" name="">
             <a:extLst xmlns:a="http://schemas.openxmlformats.org/drawingml/2006/main">
               <a:ext uri="{FF2B5EF4-FFF2-40B4-BE49-F238E27FC236}">
-                <a16:creationId xmlns:a16="http://schemas.microsoft.com/office/drawing/2014/main" id="{F2955098-375A-41C2-BB18-44B65D377925}"/>
+                <a16:creationId xmlns:a16="http://schemas.microsoft.com/office/drawing/2014/main" id="{32D45013-9131-4E8A-85AC-A7B063F0FBA7}"/>
               </a:ext>
             </a:extLst>
           </p:cNvPr>
@@ -25756,7 +25756,7 @@
           <p:cNvPr id="86" name="">
             <a:extLst xmlns:a="http://schemas.openxmlformats.org/drawingml/2006/main">
               <a:ext uri="{FF2B5EF4-FFF2-40B4-BE49-F238E27FC236}">
-                <a16:creationId xmlns:a16="http://schemas.microsoft.com/office/drawing/2014/main" id="{84EAD101-9359-4A23-B8A6-49970478B904}"/>
+                <a16:creationId xmlns:a16="http://schemas.microsoft.com/office/drawing/2014/main" id="{BB228262-C4A3-4125-BBB0-ED7C0D98EBC8}"/>
               </a:ext>
             </a:extLst>
           </p:cNvPr>
@@ -25808,7 +25808,7 @@
           <p:cNvPr id="87" name="">
             <a:extLst xmlns:a="http://schemas.openxmlformats.org/drawingml/2006/main">
               <a:ext uri="{FF2B5EF4-FFF2-40B4-BE49-F238E27FC236}">
-                <a16:creationId xmlns:a16="http://schemas.microsoft.com/office/drawing/2014/main" id="{A67DEB0E-11AC-4F7E-8BC1-63C3F8792430}"/>
+                <a16:creationId xmlns:a16="http://schemas.microsoft.com/office/drawing/2014/main" id="{6F6EF24D-6A65-45B0-92D6-D3AAB07DED9A}"/>
               </a:ext>
             </a:extLst>
           </p:cNvPr>
@@ -25839,7 +25839,7 @@
           <p:cNvPr id="88" name="">
             <a:extLst xmlns:a="http://schemas.openxmlformats.org/drawingml/2006/main">
               <a:ext uri="{FF2B5EF4-FFF2-40B4-BE49-F238E27FC236}">
-                <a16:creationId xmlns:a16="http://schemas.microsoft.com/office/drawing/2014/main" id="{FAF15075-E2F0-4F28-9057-2CDBB59200C5}"/>
+                <a16:creationId xmlns:a16="http://schemas.microsoft.com/office/drawing/2014/main" id="{7BA488E5-BF05-4688-AE1B-95FCD416EFC9}"/>
               </a:ext>
             </a:extLst>
           </p:cNvPr>
@@ -25870,7 +25870,7 @@
           <p:cNvPr id="89" name="">
             <a:extLst xmlns:a="http://schemas.openxmlformats.org/drawingml/2006/main">
               <a:ext uri="{FF2B5EF4-FFF2-40B4-BE49-F238E27FC236}">
-                <a16:creationId xmlns:a16="http://schemas.microsoft.com/office/drawing/2014/main" id="{C9EBAD9F-1148-4353-B5F1-18361E2DC407}"/>
+                <a16:creationId xmlns:a16="http://schemas.microsoft.com/office/drawing/2014/main" id="{0FAE4574-5166-4943-9D52-2FC902E79AB6}"/>
               </a:ext>
             </a:extLst>
           </p:cNvPr>
@@ -25922,7 +25922,7 @@
           <p:cNvPr id="90" name="">
             <a:extLst xmlns:a="http://schemas.openxmlformats.org/drawingml/2006/main">
               <a:ext uri="{FF2B5EF4-FFF2-40B4-BE49-F238E27FC236}">
-                <a16:creationId xmlns:a16="http://schemas.microsoft.com/office/drawing/2014/main" id="{F29CB375-53C0-4F82-AC6C-B5406897D208}"/>
+                <a16:creationId xmlns:a16="http://schemas.microsoft.com/office/drawing/2014/main" id="{3F97AC3A-5302-428C-8AE7-A41A95C5B6EE}"/>
               </a:ext>
             </a:extLst>
           </p:cNvPr>
@@ -25974,7 +25974,7 @@
           <p:cNvPr id="91" name="">
             <a:extLst xmlns:a="http://schemas.openxmlformats.org/drawingml/2006/main">
               <a:ext uri="{FF2B5EF4-FFF2-40B4-BE49-F238E27FC236}">
-                <a16:creationId xmlns:a16="http://schemas.microsoft.com/office/drawing/2014/main" id="{87C4A20D-9892-4CB8-AF2D-5DC76CC41D0B}"/>
+                <a16:creationId xmlns:a16="http://schemas.microsoft.com/office/drawing/2014/main" id="{B6D4201E-0099-45AB-874D-A9382FB0EF8B}"/>
               </a:ext>
             </a:extLst>
           </p:cNvPr>
@@ -26026,7 +26026,7 @@
           <p:cNvPr id="92" name="">
             <a:extLst xmlns:a="http://schemas.openxmlformats.org/drawingml/2006/main">
               <a:ext uri="{FF2B5EF4-FFF2-40B4-BE49-F238E27FC236}">
-                <a16:creationId xmlns:a16="http://schemas.microsoft.com/office/drawing/2014/main" id="{79B9AD31-287C-404C-BF8A-97DB7E4A0FA7}"/>
+                <a16:creationId xmlns:a16="http://schemas.microsoft.com/office/drawing/2014/main" id="{78FDB0F3-A897-4C71-91C6-41BB3A507A63}"/>
               </a:ext>
             </a:extLst>
           </p:cNvPr>
@@ -26078,7 +26078,7 @@
           <p:cNvPr id="93" name="">
             <a:extLst xmlns:a="http://schemas.openxmlformats.org/drawingml/2006/main">
               <a:ext uri="{FF2B5EF4-FFF2-40B4-BE49-F238E27FC236}">
-                <a16:creationId xmlns:a16="http://schemas.microsoft.com/office/drawing/2014/main" id="{6FA2E3F9-FD0F-4A56-A621-BE6683E1639B}"/>
+                <a16:creationId xmlns:a16="http://schemas.microsoft.com/office/drawing/2014/main" id="{1A5C8435-0C62-4225-8061-F92D4899AEAF}"/>
               </a:ext>
             </a:extLst>
           </p:cNvPr>
@@ -26130,7 +26130,7 @@
           <p:cNvPr id="94" name="">
             <a:extLst xmlns:a="http://schemas.openxmlformats.org/drawingml/2006/main">
               <a:ext uri="{FF2B5EF4-FFF2-40B4-BE49-F238E27FC236}">
-                <a16:creationId xmlns:a16="http://schemas.microsoft.com/office/drawing/2014/main" id="{D2E22F73-DBBC-4E97-89CD-D665D96658CA}"/>
+                <a16:creationId xmlns:a16="http://schemas.microsoft.com/office/drawing/2014/main" id="{D0721604-DC96-4A71-AD57-38C8F45FFAC7}"/>
               </a:ext>
             </a:extLst>
           </p:cNvPr>
@@ -26182,7 +26182,7 @@
           <p:cNvPr id="95" name="">
             <a:extLst xmlns:a="http://schemas.openxmlformats.org/drawingml/2006/main">
               <a:ext uri="{FF2B5EF4-FFF2-40B4-BE49-F238E27FC236}">
-                <a16:creationId xmlns:a16="http://schemas.microsoft.com/office/drawing/2014/main" id="{C8BE6BF2-C992-4A0A-96A3-758E29474DE3}"/>
+                <a16:creationId xmlns:a16="http://schemas.microsoft.com/office/drawing/2014/main" id="{03C5C33F-4641-42E0-99BC-847C9310CC32}"/>
               </a:ext>
             </a:extLst>
           </p:cNvPr>
@@ -26234,7 +26234,7 @@
           <p:cNvPr id="96" name="">
             <a:extLst xmlns:a="http://schemas.openxmlformats.org/drawingml/2006/main">
               <a:ext uri="{FF2B5EF4-FFF2-40B4-BE49-F238E27FC236}">
-                <a16:creationId xmlns:a16="http://schemas.microsoft.com/office/drawing/2014/main" id="{240EC374-4A0E-444D-A6F4-C28812FD38DD}"/>
+                <a16:creationId xmlns:a16="http://schemas.microsoft.com/office/drawing/2014/main" id="{C78C2A26-E3C5-4306-AC8E-241F90574612}"/>
               </a:ext>
             </a:extLst>
           </p:cNvPr>
@@ -26286,7 +26286,7 @@
           <p:cNvPr id="97" name="">
             <a:extLst xmlns:a="http://schemas.openxmlformats.org/drawingml/2006/main">
               <a:ext uri="{FF2B5EF4-FFF2-40B4-BE49-F238E27FC236}">
-                <a16:creationId xmlns:a16="http://schemas.microsoft.com/office/drawing/2014/main" id="{10B16C03-3252-4E2B-879C-96AEBDF6D33A}"/>
+                <a16:creationId xmlns:a16="http://schemas.microsoft.com/office/drawing/2014/main" id="{4AA5A67E-17C3-4F91-98C8-36B93AE9C1B7}"/>
               </a:ext>
             </a:extLst>
           </p:cNvPr>
@@ -26317,7 +26317,7 @@
           <p:cNvPr id="98" name="">
             <a:extLst xmlns:a="http://schemas.openxmlformats.org/drawingml/2006/main">
               <a:ext uri="{FF2B5EF4-FFF2-40B4-BE49-F238E27FC236}">
-                <a16:creationId xmlns:a16="http://schemas.microsoft.com/office/drawing/2014/main" id="{9957E59E-B460-4A17-909E-3D79AC5E1A79}"/>
+                <a16:creationId xmlns:a16="http://schemas.microsoft.com/office/drawing/2014/main" id="{DCADF9B3-FF77-4FC8-A89B-5ED24E39B131}"/>
               </a:ext>
             </a:extLst>
           </p:cNvPr>
@@ -26369,7 +26369,7 @@
           <p:cNvPr id="99" name="">
             <a:extLst xmlns:a="http://schemas.openxmlformats.org/drawingml/2006/main">
               <a:ext uri="{FF2B5EF4-FFF2-40B4-BE49-F238E27FC236}">
-                <a16:creationId xmlns:a16="http://schemas.microsoft.com/office/drawing/2014/main" id="{1A4387EB-574B-45BB-A919-691211D6D135}"/>
+                <a16:creationId xmlns:a16="http://schemas.microsoft.com/office/drawing/2014/main" id="{A450A8BF-7EBA-4614-B2A3-1B7BECEED4A3}"/>
               </a:ext>
             </a:extLst>
           </p:cNvPr>
@@ -26421,7 +26421,7 @@
           <p:cNvPr id="100" name="">
             <a:extLst xmlns:a="http://schemas.openxmlformats.org/drawingml/2006/main">
               <a:ext uri="{FF2B5EF4-FFF2-40B4-BE49-F238E27FC236}">
-                <a16:creationId xmlns:a16="http://schemas.microsoft.com/office/drawing/2014/main" id="{860152CB-B957-4BB3-8652-B4E409060217}"/>
+                <a16:creationId xmlns:a16="http://schemas.microsoft.com/office/drawing/2014/main" id="{98FBE5BF-A7A9-4664-A99D-305C6BEEBA1B}"/>
               </a:ext>
             </a:extLst>
           </p:cNvPr>
@@ -26473,7 +26473,7 @@
           <p:cNvPr id="101" name="">
             <a:extLst xmlns:a="http://schemas.openxmlformats.org/drawingml/2006/main">
               <a:ext uri="{FF2B5EF4-FFF2-40B4-BE49-F238E27FC236}">
-                <a16:creationId xmlns:a16="http://schemas.microsoft.com/office/drawing/2014/main" id="{5346D48E-B5EC-4B26-A5AF-03C3F666DB5D}"/>
+                <a16:creationId xmlns:a16="http://schemas.microsoft.com/office/drawing/2014/main" id="{5F56E906-26B3-4838-9B40-0648CC43BBF2}"/>
               </a:ext>
             </a:extLst>
           </p:cNvPr>
@@ -26525,7 +26525,7 @@
           <p:cNvPr id="102" name="">
             <a:extLst xmlns:a="http://schemas.openxmlformats.org/drawingml/2006/main">
               <a:ext uri="{FF2B5EF4-FFF2-40B4-BE49-F238E27FC236}">
-                <a16:creationId xmlns:a16="http://schemas.microsoft.com/office/drawing/2014/main" id="{3715FAF3-7D78-4A59-9B3E-D57B036761CF}"/>
+                <a16:creationId xmlns:a16="http://schemas.microsoft.com/office/drawing/2014/main" id="{11A026EC-C685-427B-973E-6E349F6FD06E}"/>
               </a:ext>
             </a:extLst>
           </p:cNvPr>
@@ -26577,7 +26577,7 @@
           <p:cNvPr id="103" name="">
             <a:extLst xmlns:a="http://schemas.openxmlformats.org/drawingml/2006/main">
               <a:ext uri="{FF2B5EF4-FFF2-40B4-BE49-F238E27FC236}">
-                <a16:creationId xmlns:a16="http://schemas.microsoft.com/office/drawing/2014/main" id="{722B00C1-064E-465F-B556-E26A675FD91C}"/>
+                <a16:creationId xmlns:a16="http://schemas.microsoft.com/office/drawing/2014/main" id="{6654A51F-C915-4729-A5D9-DF8A478AE1A9}"/>
               </a:ext>
             </a:extLst>
           </p:cNvPr>
@@ -26629,7 +26629,7 @@
           <p:cNvPr id="104" name="">
             <a:extLst xmlns:a="http://schemas.openxmlformats.org/drawingml/2006/main">
               <a:ext uri="{FF2B5EF4-FFF2-40B4-BE49-F238E27FC236}">
-                <a16:creationId xmlns:a16="http://schemas.microsoft.com/office/drawing/2014/main" id="{C96849A9-5076-4A75-9700-C1A4D3BC7B6F}"/>
+                <a16:creationId xmlns:a16="http://schemas.microsoft.com/office/drawing/2014/main" id="{3D20F2F9-B70D-406B-9F58-71D347B111B1}"/>
               </a:ext>
             </a:extLst>
           </p:cNvPr>
@@ -26681,7 +26681,7 @@
           <p:cNvPr id="105" name="">
             <a:extLst xmlns:a="http://schemas.openxmlformats.org/drawingml/2006/main">
               <a:ext uri="{FF2B5EF4-FFF2-40B4-BE49-F238E27FC236}">
-                <a16:creationId xmlns:a16="http://schemas.microsoft.com/office/drawing/2014/main" id="{360D7BAB-77CA-4FF2-893F-83F23C99A1C4}"/>
+                <a16:creationId xmlns:a16="http://schemas.microsoft.com/office/drawing/2014/main" id="{F0FB564E-7DBC-43A9-8CC0-EDC6B8AE985C}"/>
               </a:ext>
             </a:extLst>
           </p:cNvPr>
@@ -26733,7 +26733,7 @@
           <p:cNvPr id="106" name="">
             <a:extLst xmlns:a="http://schemas.openxmlformats.org/drawingml/2006/main">
               <a:ext uri="{FF2B5EF4-FFF2-40B4-BE49-F238E27FC236}">
-                <a16:creationId xmlns:a16="http://schemas.microsoft.com/office/drawing/2014/main" id="{2D4FFA61-E354-4B29-BC3D-DCF8562E54BB}"/>
+                <a16:creationId xmlns:a16="http://schemas.microsoft.com/office/drawing/2014/main" id="{844A4CE2-9627-42D9-B00C-7BCB90E70EA5}"/>
               </a:ext>
             </a:extLst>
           </p:cNvPr>
@@ -26764,7 +26764,7 @@
           <p:cNvPr id="107" name="">
             <a:extLst xmlns:a="http://schemas.openxmlformats.org/drawingml/2006/main">
               <a:ext uri="{FF2B5EF4-FFF2-40B4-BE49-F238E27FC236}">
-                <a16:creationId xmlns:a16="http://schemas.microsoft.com/office/drawing/2014/main" id="{D493C542-A0EB-4B2D-AEA3-DAEBD232318F}"/>
+                <a16:creationId xmlns:a16="http://schemas.microsoft.com/office/drawing/2014/main" id="{A7CF7CED-201F-470D-96BD-06D4AEC1F308}"/>
               </a:ext>
             </a:extLst>
           </p:cNvPr>
@@ -26795,7 +26795,7 @@
           <p:cNvPr id="108" name="">
             <a:extLst xmlns:a="http://schemas.openxmlformats.org/drawingml/2006/main">
               <a:ext uri="{FF2B5EF4-FFF2-40B4-BE49-F238E27FC236}">
-                <a16:creationId xmlns:a16="http://schemas.microsoft.com/office/drawing/2014/main" id="{D82C7433-B39A-47E4-9E3D-38B273658E15}"/>
+                <a16:creationId xmlns:a16="http://schemas.microsoft.com/office/drawing/2014/main" id="{6806FD7F-063F-4867-83EF-5C8410BE7B55}"/>
               </a:ext>
             </a:extLst>
           </p:cNvPr>
@@ -26847,7 +26847,7 @@
           <p:cNvPr id="109" name="">
             <a:extLst xmlns:a="http://schemas.openxmlformats.org/drawingml/2006/main">
               <a:ext uri="{FF2B5EF4-FFF2-40B4-BE49-F238E27FC236}">
-                <a16:creationId xmlns:a16="http://schemas.microsoft.com/office/drawing/2014/main" id="{B466B008-3618-49AD-B1B8-D4B5376DEE0E}"/>
+                <a16:creationId xmlns:a16="http://schemas.microsoft.com/office/drawing/2014/main" id="{BA0D7BC2-C2E1-476A-8847-373585289446}"/>
               </a:ext>
             </a:extLst>
           </p:cNvPr>
@@ -26899,7 +26899,7 @@
           <p:cNvPr id="110" name="">
             <a:extLst xmlns:a="http://schemas.openxmlformats.org/drawingml/2006/main">
               <a:ext uri="{FF2B5EF4-FFF2-40B4-BE49-F238E27FC236}">
-                <a16:creationId xmlns:a16="http://schemas.microsoft.com/office/drawing/2014/main" id="{69052FD4-0A66-407C-83D0-3D704B4B3438}"/>
+                <a16:creationId xmlns:a16="http://schemas.microsoft.com/office/drawing/2014/main" id="{863762A2-C436-4CB8-A873-586DCA82AC8D}"/>
               </a:ext>
             </a:extLst>
           </p:cNvPr>
@@ -26951,7 +26951,7 @@
           <p:cNvPr id="111" name="">
             <a:extLst xmlns:a="http://schemas.openxmlformats.org/drawingml/2006/main">
               <a:ext uri="{FF2B5EF4-FFF2-40B4-BE49-F238E27FC236}">
-                <a16:creationId xmlns:a16="http://schemas.microsoft.com/office/drawing/2014/main" id="{ABD4F6D8-B97C-4AD5-B075-50BAEA39094B}"/>
+                <a16:creationId xmlns:a16="http://schemas.microsoft.com/office/drawing/2014/main" id="{628739F0-6393-431B-B461-C4EB9E93296E}"/>
               </a:ext>
             </a:extLst>
           </p:cNvPr>
@@ -27003,7 +27003,7 @@
           <p:cNvPr id="112" name="">
             <a:extLst xmlns:a="http://schemas.openxmlformats.org/drawingml/2006/main">
               <a:ext uri="{FF2B5EF4-FFF2-40B4-BE49-F238E27FC236}">
-                <a16:creationId xmlns:a16="http://schemas.microsoft.com/office/drawing/2014/main" id="{882A9FF6-D747-40D9-ACE5-D9A1A35D4CE6}"/>
+                <a16:creationId xmlns:a16="http://schemas.microsoft.com/office/drawing/2014/main" id="{DAC409AC-EDEC-4FDD-B8E3-F93017E118C2}"/>
               </a:ext>
             </a:extLst>
           </p:cNvPr>
@@ -27055,7 +27055,7 @@
           <p:cNvPr id="113" name="">
             <a:extLst xmlns:a="http://schemas.openxmlformats.org/drawingml/2006/main">
               <a:ext uri="{FF2B5EF4-FFF2-40B4-BE49-F238E27FC236}">
-                <a16:creationId xmlns:a16="http://schemas.microsoft.com/office/drawing/2014/main" id="{BD5F5C7F-1341-4492-8EF2-CA08BC6056C2}"/>
+                <a16:creationId xmlns:a16="http://schemas.microsoft.com/office/drawing/2014/main" id="{FAC8AA77-27F1-4548-AEB1-12FB20632687}"/>
               </a:ext>
             </a:extLst>
           </p:cNvPr>
@@ -27107,7 +27107,7 @@
           <p:cNvPr id="114" name="">
             <a:extLst xmlns:a="http://schemas.openxmlformats.org/drawingml/2006/main">
               <a:ext uri="{FF2B5EF4-FFF2-40B4-BE49-F238E27FC236}">
-                <a16:creationId xmlns:a16="http://schemas.microsoft.com/office/drawing/2014/main" id="{E68BC0E7-47BA-4975-920F-8C640F30E873}"/>
+                <a16:creationId xmlns:a16="http://schemas.microsoft.com/office/drawing/2014/main" id="{A9D26707-3192-4E2D-8AEA-0D71971CF3D8}"/>
               </a:ext>
             </a:extLst>
           </p:cNvPr>
@@ -27159,7 +27159,7 @@
           <p:cNvPr id="115" name="">
             <a:extLst xmlns:a="http://schemas.openxmlformats.org/drawingml/2006/main">
               <a:ext uri="{FF2B5EF4-FFF2-40B4-BE49-F238E27FC236}">
-                <a16:creationId xmlns:a16="http://schemas.microsoft.com/office/drawing/2014/main" id="{E61F9EDD-DB75-40BA-99AC-C8CDC0EF3119}"/>
+                <a16:creationId xmlns:a16="http://schemas.microsoft.com/office/drawing/2014/main" id="{BE9C0915-FD3B-4D4F-97EA-4E67A892F551}"/>
               </a:ext>
             </a:extLst>
           </p:cNvPr>
@@ -27211,7 +27211,7 @@
           <p:cNvPr id="116" name="">
             <a:extLst xmlns:a="http://schemas.openxmlformats.org/drawingml/2006/main">
               <a:ext uri="{FF2B5EF4-FFF2-40B4-BE49-F238E27FC236}">
-                <a16:creationId xmlns:a16="http://schemas.microsoft.com/office/drawing/2014/main" id="{4CC5BF8C-943C-4BA9-A426-A5281C3A62B0}"/>
+                <a16:creationId xmlns:a16="http://schemas.microsoft.com/office/drawing/2014/main" id="{DD5D5321-0388-4C94-AADB-91B7D23C4120}"/>
               </a:ext>
             </a:extLst>
           </p:cNvPr>
@@ -27242,7 +27242,7 @@
           <p:cNvPr id="117" name="">
             <a:extLst xmlns:a="http://schemas.openxmlformats.org/drawingml/2006/main">
               <a:ext uri="{FF2B5EF4-FFF2-40B4-BE49-F238E27FC236}">
-                <a16:creationId xmlns:a16="http://schemas.microsoft.com/office/drawing/2014/main" id="{90545F63-8AEC-49FA-86D3-FB93B1770D4B}"/>
+                <a16:creationId xmlns:a16="http://schemas.microsoft.com/office/drawing/2014/main" id="{72100919-2612-41AC-B902-884E5FF253EC}"/>
               </a:ext>
             </a:extLst>
           </p:cNvPr>
@@ -27294,7 +27294,7 @@
           <p:cNvPr id="118" name="">
             <a:extLst xmlns:a="http://schemas.openxmlformats.org/drawingml/2006/main">
               <a:ext uri="{FF2B5EF4-FFF2-40B4-BE49-F238E27FC236}">
-                <a16:creationId xmlns:a16="http://schemas.microsoft.com/office/drawing/2014/main" id="{24FDAF4C-88C0-485D-9D2B-1D20E5F76CEE}"/>
+                <a16:creationId xmlns:a16="http://schemas.microsoft.com/office/drawing/2014/main" id="{D68CFA3C-B180-41E8-9009-01EEA2EAFCE1}"/>
               </a:ext>
             </a:extLst>
           </p:cNvPr>
@@ -27346,7 +27346,7 @@
           <p:cNvPr id="119" name="">
             <a:extLst xmlns:a="http://schemas.openxmlformats.org/drawingml/2006/main">
               <a:ext uri="{FF2B5EF4-FFF2-40B4-BE49-F238E27FC236}">
-                <a16:creationId xmlns:a16="http://schemas.microsoft.com/office/drawing/2014/main" id="{9AD90154-9AB3-43C3-B098-E5C8A96B16F8}"/>
+                <a16:creationId xmlns:a16="http://schemas.microsoft.com/office/drawing/2014/main" id="{3A50F34D-4BE8-42B3-AF5A-7C4DA8FE4CE2}"/>
               </a:ext>
             </a:extLst>
           </p:cNvPr>
@@ -27398,7 +27398,7 @@
           <p:cNvPr id="120" name="">
             <a:extLst xmlns:a="http://schemas.openxmlformats.org/drawingml/2006/main">
               <a:ext uri="{FF2B5EF4-FFF2-40B4-BE49-F238E27FC236}">
-                <a16:creationId xmlns:a16="http://schemas.microsoft.com/office/drawing/2014/main" id="{5F022669-AD4B-4A6C-B22A-85E4522584FA}"/>
+                <a16:creationId xmlns:a16="http://schemas.microsoft.com/office/drawing/2014/main" id="{C2D3016B-18E8-454E-9ADD-090A2D76F202}"/>
               </a:ext>
             </a:extLst>
           </p:cNvPr>
@@ -27450,7 +27450,7 @@
           <p:cNvPr id="121" name="">
             <a:extLst xmlns:a="http://schemas.openxmlformats.org/drawingml/2006/main">
               <a:ext uri="{FF2B5EF4-FFF2-40B4-BE49-F238E27FC236}">
-                <a16:creationId xmlns:a16="http://schemas.microsoft.com/office/drawing/2014/main" id="{9964E3B6-C7A9-497B-8F43-7111FC185CE0}"/>
+                <a16:creationId xmlns:a16="http://schemas.microsoft.com/office/drawing/2014/main" id="{70EC918F-192B-4158-907F-2AD066D30527}"/>
               </a:ext>
             </a:extLst>
           </p:cNvPr>
@@ -27502,7 +27502,7 @@
           <p:cNvPr id="122" name="">
             <a:extLst xmlns:a="http://schemas.openxmlformats.org/drawingml/2006/main">
               <a:ext uri="{FF2B5EF4-FFF2-40B4-BE49-F238E27FC236}">
-                <a16:creationId xmlns:a16="http://schemas.microsoft.com/office/drawing/2014/main" id="{D5CCDBDA-F975-4F33-8644-9791F3EC0975}"/>
+                <a16:creationId xmlns:a16="http://schemas.microsoft.com/office/drawing/2014/main" id="{7FDFA9D8-FF86-4F3B-AE67-EC491E1EE736}"/>
               </a:ext>
             </a:extLst>
           </p:cNvPr>
@@ -27554,7 +27554,7 @@
           <p:cNvPr id="123" name="">
             <a:extLst xmlns:a="http://schemas.openxmlformats.org/drawingml/2006/main">
               <a:ext uri="{FF2B5EF4-FFF2-40B4-BE49-F238E27FC236}">
-                <a16:creationId xmlns:a16="http://schemas.microsoft.com/office/drawing/2014/main" id="{DD4DB2EE-D64D-470D-A790-362ECA3C7A31}"/>
+                <a16:creationId xmlns:a16="http://schemas.microsoft.com/office/drawing/2014/main" id="{A8D495C9-6503-47BF-BF1D-EA7CFA5D9BEF}"/>
               </a:ext>
             </a:extLst>
           </p:cNvPr>
@@ -27606,7 +27606,7 @@
           <p:cNvPr id="124" name="">
             <a:extLst xmlns:a="http://schemas.openxmlformats.org/drawingml/2006/main">
               <a:ext uri="{FF2B5EF4-FFF2-40B4-BE49-F238E27FC236}">
-                <a16:creationId xmlns:a16="http://schemas.microsoft.com/office/drawing/2014/main" id="{C5EA7AD1-E291-4241-BD15-68321061E360}"/>
+                <a16:creationId xmlns:a16="http://schemas.microsoft.com/office/drawing/2014/main" id="{B134DCC0-39BA-4508-BDBE-6B6408EEA612}"/>
               </a:ext>
             </a:extLst>
           </p:cNvPr>
@@ -27658,7 +27658,7 @@
           <p:cNvPr id="125" name="">
             <a:extLst xmlns:a="http://schemas.openxmlformats.org/drawingml/2006/main">
               <a:ext uri="{FF2B5EF4-FFF2-40B4-BE49-F238E27FC236}">
-                <a16:creationId xmlns:a16="http://schemas.microsoft.com/office/drawing/2014/main" id="{7C4135BB-FC05-4F9B-BA4C-A7B4F81DF162}"/>
+                <a16:creationId xmlns:a16="http://schemas.microsoft.com/office/drawing/2014/main" id="{8E12A07F-C71D-474F-B191-FDA5B284C1E9}"/>
               </a:ext>
             </a:extLst>
           </p:cNvPr>
@@ -27689,7 +27689,7 @@
           <p:cNvPr id="126" name="">
             <a:extLst xmlns:a="http://schemas.openxmlformats.org/drawingml/2006/main">
               <a:ext uri="{FF2B5EF4-FFF2-40B4-BE49-F238E27FC236}">
-                <a16:creationId xmlns:a16="http://schemas.microsoft.com/office/drawing/2014/main" id="{9106474E-7521-436D-AB4B-FBD1822670FD}"/>
+                <a16:creationId xmlns:a16="http://schemas.microsoft.com/office/drawing/2014/main" id="{EAC82918-61ED-4619-B828-3AB1B92F09A8}"/>
               </a:ext>
             </a:extLst>
           </p:cNvPr>
@@ -27720,7 +27720,7 @@
           <p:cNvPr id="127" name="">
             <a:extLst xmlns:a="http://schemas.openxmlformats.org/drawingml/2006/main">
               <a:ext uri="{FF2B5EF4-FFF2-40B4-BE49-F238E27FC236}">
-                <a16:creationId xmlns:a16="http://schemas.microsoft.com/office/drawing/2014/main" id="{0F7B00A6-7905-441B-BA5F-68E211873AA2}"/>
+                <a16:creationId xmlns:a16="http://schemas.microsoft.com/office/drawing/2014/main" id="{41D41535-AF0D-421D-896A-0129DE23442D}"/>
               </a:ext>
             </a:extLst>
           </p:cNvPr>
@@ -27772,7 +27772,7 @@
           <p:cNvPr id="128" name="">
             <a:extLst xmlns:a="http://schemas.openxmlformats.org/drawingml/2006/main">
               <a:ext uri="{FF2B5EF4-FFF2-40B4-BE49-F238E27FC236}">
-                <a16:creationId xmlns:a16="http://schemas.microsoft.com/office/drawing/2014/main" id="{E8386474-0EFF-4403-94D3-63D84866537E}"/>
+                <a16:creationId xmlns:a16="http://schemas.microsoft.com/office/drawing/2014/main" id="{ED185BF1-EAD5-4D80-A5FD-187B6D8FDFEE}"/>
               </a:ext>
             </a:extLst>
           </p:cNvPr>
@@ -27824,7 +27824,7 @@
           <p:cNvPr id="129" name="">
             <a:extLst xmlns:a="http://schemas.openxmlformats.org/drawingml/2006/main">
               <a:ext uri="{FF2B5EF4-FFF2-40B4-BE49-F238E27FC236}">
-                <a16:creationId xmlns:a16="http://schemas.microsoft.com/office/drawing/2014/main" id="{69C3833B-177E-4122-8B05-2723862C37DF}"/>
+                <a16:creationId xmlns:a16="http://schemas.microsoft.com/office/drawing/2014/main" id="{B60C9CB5-C550-44CC-A364-990492EB55F5}"/>
               </a:ext>
             </a:extLst>
           </p:cNvPr>
@@ -27876,7 +27876,7 @@
           <p:cNvPr id="130" name="">
             <a:extLst xmlns:a="http://schemas.openxmlformats.org/drawingml/2006/main">
               <a:ext uri="{FF2B5EF4-FFF2-40B4-BE49-F238E27FC236}">
-                <a16:creationId xmlns:a16="http://schemas.microsoft.com/office/drawing/2014/main" id="{4831FB09-B5C1-40A5-A0D4-0993D3DFCC82}"/>
+                <a16:creationId xmlns:a16="http://schemas.microsoft.com/office/drawing/2014/main" id="{FD312917-5597-496C-B7FA-F899288C7839}"/>
               </a:ext>
             </a:extLst>
           </p:cNvPr>
@@ -27928,7 +27928,7 @@
           <p:cNvPr id="131" name="">
             <a:extLst xmlns:a="http://schemas.openxmlformats.org/drawingml/2006/main">
               <a:ext uri="{FF2B5EF4-FFF2-40B4-BE49-F238E27FC236}">
-                <a16:creationId xmlns:a16="http://schemas.microsoft.com/office/drawing/2014/main" id="{58DBEC30-0C78-4ADA-B021-79109FB9AC36}"/>
+                <a16:creationId xmlns:a16="http://schemas.microsoft.com/office/drawing/2014/main" id="{92EA70B7-D1B6-44E2-BBD9-DEA4FC9E0C35}"/>
               </a:ext>
             </a:extLst>
           </p:cNvPr>
@@ -27980,7 +27980,7 @@
           <p:cNvPr id="132" name="">
             <a:extLst xmlns:a="http://schemas.openxmlformats.org/drawingml/2006/main">
               <a:ext uri="{FF2B5EF4-FFF2-40B4-BE49-F238E27FC236}">
-                <a16:creationId xmlns:a16="http://schemas.microsoft.com/office/drawing/2014/main" id="{7C2BA3A8-EFAE-45F7-99D1-D04A581C184B}"/>
+                <a16:creationId xmlns:a16="http://schemas.microsoft.com/office/drawing/2014/main" id="{55746C0E-C7E7-40F5-BE4F-7D50E21A16E5}"/>
               </a:ext>
             </a:extLst>
           </p:cNvPr>
@@ -28032,7 +28032,7 @@
           <p:cNvPr id="133" name="">
             <a:extLst xmlns:a="http://schemas.openxmlformats.org/drawingml/2006/main">
               <a:ext uri="{FF2B5EF4-FFF2-40B4-BE49-F238E27FC236}">
-                <a16:creationId xmlns:a16="http://schemas.microsoft.com/office/drawing/2014/main" id="{9089BD09-845A-443B-B242-8F2DBB3778FC}"/>
+                <a16:creationId xmlns:a16="http://schemas.microsoft.com/office/drawing/2014/main" id="{2641F3C0-3880-4F6E-B4E2-305BF0EDB2EB}"/>
               </a:ext>
             </a:extLst>
           </p:cNvPr>
@@ -28084,7 +28084,7 @@
           <p:cNvPr id="134" name="">
             <a:extLst xmlns:a="http://schemas.openxmlformats.org/drawingml/2006/main">
               <a:ext uri="{FF2B5EF4-FFF2-40B4-BE49-F238E27FC236}">
-                <a16:creationId xmlns:a16="http://schemas.microsoft.com/office/drawing/2014/main" id="{03402DD9-CE9C-4A74-B60F-E0D7EDFA5A6B}"/>
+                <a16:creationId xmlns:a16="http://schemas.microsoft.com/office/drawing/2014/main" id="{7915636E-33D7-4A7A-8507-D834E0AA692E}"/>
               </a:ext>
             </a:extLst>
           </p:cNvPr>
@@ -28134,7 +28134,7 @@
     </p:spTree>
     <p:extLst>
       <p:ext uri="{BB962C8B-B14F-4D97-AF65-F5344CB8AC3E}">
-        <p14:creationId xmlns:p14="http://schemas.microsoft.com/office/powerpoint/2010/main" val="1922532388"/>
+        <p14:creationId xmlns:p14="http://schemas.microsoft.com/office/powerpoint/2010/main" val="1198987267"/>
       </p:ext>
     </p:extLst>
   </p:cSld>
@@ -28165,7 +28165,7 @@
           <p:cNvPr id="9" name="">
             <a:extLst xmlns:a="http://schemas.openxmlformats.org/drawingml/2006/main">
               <a:ext uri="{FF2B5EF4-FFF2-40B4-BE49-F238E27FC236}">
-                <a16:creationId xmlns:a16="http://schemas.microsoft.com/office/drawing/2014/main" id="{F53625D9-1CB6-47FF-BF71-863178A1D89C}"/>
+                <a16:creationId xmlns:a16="http://schemas.microsoft.com/office/drawing/2014/main" id="{3BAE2B9C-39E3-455A-9B27-59F1800913F2}"/>
               </a:ext>
             </a:extLst>
           </p:cNvPr>
@@ -28198,7 +28198,7 @@
           <p:cNvPr id="2" name="">
             <a:extLst xmlns:a="http://schemas.openxmlformats.org/drawingml/2006/main">
               <a:ext uri="{FF2B5EF4-FFF2-40B4-BE49-F238E27FC236}">
-                <a16:creationId xmlns:a16="http://schemas.microsoft.com/office/drawing/2014/main" id="{3D69C25D-6DEC-4209-9DDF-18BF6287A4C5}"/>
+                <a16:creationId xmlns:a16="http://schemas.microsoft.com/office/drawing/2014/main" id="{80AE17B1-CF46-4BC2-8501-E77B6DE8CEA7}"/>
               </a:ext>
             </a:extLst>
           </p:cNvPr>
@@ -28229,7 +28229,7 @@
           <p:cNvPr id="3" name="">
             <a:extLst xmlns:a="http://schemas.openxmlformats.org/drawingml/2006/main">
               <a:ext uri="{FF2B5EF4-FFF2-40B4-BE49-F238E27FC236}">
-                <a16:creationId xmlns:a16="http://schemas.microsoft.com/office/drawing/2014/main" id="{6082DDF8-E5D3-4386-8C84-0BD6A1073D50}"/>
+                <a16:creationId xmlns:a16="http://schemas.microsoft.com/office/drawing/2014/main" id="{8A3EB412-8163-4750-8D50-5EC9D063AEAE}"/>
               </a:ext>
             </a:extLst>
           </p:cNvPr>
@@ -28281,7 +28281,7 @@
           <p:cNvPr id="4" name="">
             <a:extLst xmlns:a="http://schemas.openxmlformats.org/drawingml/2006/main">
               <a:ext uri="{FF2B5EF4-FFF2-40B4-BE49-F238E27FC236}">
-                <a16:creationId xmlns:a16="http://schemas.microsoft.com/office/drawing/2014/main" id="{E2F95C76-8B28-46C9-98CB-48EDACA0B476}"/>
+                <a16:creationId xmlns:a16="http://schemas.microsoft.com/office/drawing/2014/main" id="{72119AD4-A095-428C-9A6F-51EB1BC15F70}"/>
               </a:ext>
             </a:extLst>
           </p:cNvPr>
@@ -28316,7 +28316,7 @@
           <p:nvPr/>
         </p:nvPicPr>
         <p:blipFill>
-          <a:blip xmlns:r="http://schemas.openxmlformats.org/officeDocument/2006/relationships" xmlns:a="http://schemas.openxmlformats.org/drawingml/2006/main" r:embed="R6da4d1d05114474d"/>
+          <a:blip xmlns:r="http://schemas.openxmlformats.org/officeDocument/2006/relationships" xmlns:a="http://schemas.openxmlformats.org/drawingml/2006/main" r:embed="R5a621a857344474e"/>
           <a:stretch xmlns:a="http://schemas.openxmlformats.org/drawingml/2006/main"/>
         </p:blipFill>
         <p:spPr>
@@ -28334,7 +28334,7 @@
           <p:cNvPr id="6" name="">
             <a:extLst xmlns:a="http://schemas.openxmlformats.org/drawingml/2006/main">
               <a:ext uri="{FF2B5EF4-FFF2-40B4-BE49-F238E27FC236}">
-                <a16:creationId xmlns:a16="http://schemas.microsoft.com/office/drawing/2014/main" id="{75743EF2-3AC4-4A83-B7C1-37F7E2F2532E}"/>
+                <a16:creationId xmlns:a16="http://schemas.microsoft.com/office/drawing/2014/main" id="{7B1D120D-63D7-4170-88BE-3B5CE5F4791B}"/>
               </a:ext>
             </a:extLst>
           </p:cNvPr>
@@ -28386,7 +28386,7 @@
           <p:cNvPr id="7" name="">
             <a:extLst xmlns:a="http://schemas.openxmlformats.org/drawingml/2006/main">
               <a:ext uri="{FF2B5EF4-FFF2-40B4-BE49-F238E27FC236}">
-                <a16:creationId xmlns:a16="http://schemas.microsoft.com/office/drawing/2014/main" id="{DDF9E9C0-61E0-4528-8CAE-B2E747F9A241}"/>
+                <a16:creationId xmlns:a16="http://schemas.microsoft.com/office/drawing/2014/main" id="{5FD71448-63A6-46A8-9574-B0164D1645BA}"/>
               </a:ext>
             </a:extLst>
           </p:cNvPr>
@@ -28442,7 +28442,7 @@
           <p:nvPr/>
         </p:nvPicPr>
         <p:blipFill>
-          <a:blip xmlns:r="http://schemas.openxmlformats.org/officeDocument/2006/relationships" xmlns:a="http://schemas.openxmlformats.org/drawingml/2006/main" r:embed="R8d652670ad354457"/>
+          <a:blip xmlns:r="http://schemas.openxmlformats.org/officeDocument/2006/relationships" xmlns:a="http://schemas.openxmlformats.org/drawingml/2006/main" r:embed="R316dce32b5f84a20"/>
           <a:stretch xmlns:a="http://schemas.openxmlformats.org/drawingml/2006/main"/>
         </p:blipFill>
         <p:spPr>
@@ -28458,7 +28458,7 @@
     </p:spTree>
     <p:extLst>
       <p:ext uri="{BB962C8B-B14F-4D97-AF65-F5344CB8AC3E}">
-        <p14:creationId xmlns:p14="http://schemas.microsoft.com/office/powerpoint/2010/main" val="158599389"/>
+        <p14:creationId xmlns:p14="http://schemas.microsoft.com/office/powerpoint/2010/main" val="1948181022"/>
       </p:ext>
     </p:extLst>
   </p:cSld>
@@ -28489,7 +28489,7 @@
           <p:cNvPr id="42" name="">
             <a:extLst xmlns:a="http://schemas.openxmlformats.org/drawingml/2006/main">
               <a:ext uri="{FF2B5EF4-FFF2-40B4-BE49-F238E27FC236}">
-                <a16:creationId xmlns:a16="http://schemas.microsoft.com/office/drawing/2014/main" id="{7422317D-97E2-4486-9680-89E955F784C1}"/>
+                <a16:creationId xmlns:a16="http://schemas.microsoft.com/office/drawing/2014/main" id="{11863C67-55E3-4953-8632-52691D0891CB}"/>
               </a:ext>
             </a:extLst>
           </p:cNvPr>
@@ -28522,7 +28522,7 @@
           <p:cNvPr id="2" name="">
             <a:extLst xmlns:a="http://schemas.openxmlformats.org/drawingml/2006/main">
               <a:ext uri="{FF2B5EF4-FFF2-40B4-BE49-F238E27FC236}">
-                <a16:creationId xmlns:a16="http://schemas.microsoft.com/office/drawing/2014/main" id="{24BB2461-C785-4636-8FA0-1BDFCE8ABD8A}"/>
+                <a16:creationId xmlns:a16="http://schemas.microsoft.com/office/drawing/2014/main" id="{0F73B2A1-EBC5-468A-9405-9BBF7C26EC5C}"/>
               </a:ext>
             </a:extLst>
           </p:cNvPr>
@@ -28553,7 +28553,7 @@
           <p:cNvPr id="3" name="">
             <a:extLst xmlns:a="http://schemas.openxmlformats.org/drawingml/2006/main">
               <a:ext uri="{FF2B5EF4-FFF2-40B4-BE49-F238E27FC236}">
-                <a16:creationId xmlns:a16="http://schemas.microsoft.com/office/drawing/2014/main" id="{3A8773D8-23A6-479B-B489-2B1720103657}"/>
+                <a16:creationId xmlns:a16="http://schemas.microsoft.com/office/drawing/2014/main" id="{D0EA270E-3375-4A43-AB94-299074603B48}"/>
               </a:ext>
             </a:extLst>
           </p:cNvPr>
@@ -28605,7 +28605,7 @@
           <p:cNvPr id="4" name="">
             <a:extLst xmlns:a="http://schemas.openxmlformats.org/drawingml/2006/main">
               <a:ext uri="{FF2B5EF4-FFF2-40B4-BE49-F238E27FC236}">
-                <a16:creationId xmlns:a16="http://schemas.microsoft.com/office/drawing/2014/main" id="{82CA2EF0-95F4-41A8-A45F-3F76B35BE172}"/>
+                <a16:creationId xmlns:a16="http://schemas.microsoft.com/office/drawing/2014/main" id="{050931DF-61DE-4906-A474-2FBBC1B6309D}"/>
               </a:ext>
             </a:extLst>
           </p:cNvPr>
@@ -28657,7 +28657,7 @@
           <p:cNvPr id="5" name="">
             <a:extLst xmlns:a="http://schemas.openxmlformats.org/drawingml/2006/main">
               <a:ext uri="{FF2B5EF4-FFF2-40B4-BE49-F238E27FC236}">
-                <a16:creationId xmlns:a16="http://schemas.microsoft.com/office/drawing/2014/main" id="{AD7BC4B4-D43B-4A76-9C17-24B671D40D23}"/>
+                <a16:creationId xmlns:a16="http://schemas.microsoft.com/office/drawing/2014/main" id="{1C3B81A9-A242-4EF8-B507-E0A3C7D24886}"/>
               </a:ext>
             </a:extLst>
           </p:cNvPr>
@@ -28692,7 +28692,7 @@
           <p:nvPr/>
         </p:nvPicPr>
         <p:blipFill>
-          <a:blip xmlns:r="http://schemas.openxmlformats.org/officeDocument/2006/relationships" xmlns:a="http://schemas.openxmlformats.org/drawingml/2006/main" r:embed="R7f633c5dd3324178"/>
+          <a:blip xmlns:r="http://schemas.openxmlformats.org/officeDocument/2006/relationships" xmlns:a="http://schemas.openxmlformats.org/drawingml/2006/main" r:embed="Rfdaf0a9858504aa0"/>
           <a:stretch xmlns:a="http://schemas.openxmlformats.org/drawingml/2006/main"/>
         </p:blipFill>
         <p:spPr>
@@ -28710,7 +28710,7 @@
           <p:cNvPr id="7" name="">
             <a:extLst xmlns:a="http://schemas.openxmlformats.org/drawingml/2006/main">
               <a:ext uri="{FF2B5EF4-FFF2-40B4-BE49-F238E27FC236}">
-                <a16:creationId xmlns:a16="http://schemas.microsoft.com/office/drawing/2014/main" id="{739D0EBA-C302-44F0-98C5-E572C4A17B44}"/>
+                <a16:creationId xmlns:a16="http://schemas.microsoft.com/office/drawing/2014/main" id="{D1DEA9E1-C41A-4BD9-912A-6F9563CF4936}"/>
               </a:ext>
             </a:extLst>
           </p:cNvPr>
@@ -28762,7 +28762,7 @@
           <p:cNvPr id="8" name="">
             <a:extLst xmlns:a="http://schemas.openxmlformats.org/drawingml/2006/main">
               <a:ext uri="{FF2B5EF4-FFF2-40B4-BE49-F238E27FC236}">
-                <a16:creationId xmlns:a16="http://schemas.microsoft.com/office/drawing/2014/main" id="{A073B2A8-FA0A-45DC-93E6-C6D107ADC0AD}"/>
+                <a16:creationId xmlns:a16="http://schemas.microsoft.com/office/drawing/2014/main" id="{FE5B40C8-94B3-47C9-8DD2-A69FF650BDA8}"/>
               </a:ext>
             </a:extLst>
           </p:cNvPr>
@@ -28814,7 +28814,7 @@
           <p:cNvPr id="9" name="">
             <a:extLst xmlns:a="http://schemas.openxmlformats.org/drawingml/2006/main">
               <a:ext uri="{FF2B5EF4-FFF2-40B4-BE49-F238E27FC236}">
-                <a16:creationId xmlns:a16="http://schemas.microsoft.com/office/drawing/2014/main" id="{E44C3829-E8C0-48D0-BD88-30E2B450215D}"/>
+                <a16:creationId xmlns:a16="http://schemas.microsoft.com/office/drawing/2014/main" id="{E6C167FB-698D-4727-B234-49F23DFEC517}"/>
               </a:ext>
             </a:extLst>
           </p:cNvPr>
@@ -28866,7 +28866,7 @@
           <p:cNvPr id="10" name="">
             <a:extLst xmlns:a="http://schemas.openxmlformats.org/drawingml/2006/main">
               <a:ext uri="{FF2B5EF4-FFF2-40B4-BE49-F238E27FC236}">
-                <a16:creationId xmlns:a16="http://schemas.microsoft.com/office/drawing/2014/main" id="{35338D77-2994-4481-B643-EA495EEA6261}"/>
+                <a16:creationId xmlns:a16="http://schemas.microsoft.com/office/drawing/2014/main" id="{F34AC424-7F72-443D-BE0C-4E2D1A75CF2C}"/>
               </a:ext>
             </a:extLst>
           </p:cNvPr>
@@ -28897,7 +28897,7 @@
           <p:cNvPr id="11" name="">
             <a:extLst xmlns:a="http://schemas.openxmlformats.org/drawingml/2006/main">
               <a:ext uri="{FF2B5EF4-FFF2-40B4-BE49-F238E27FC236}">
-                <a16:creationId xmlns:a16="http://schemas.microsoft.com/office/drawing/2014/main" id="{688E9082-A748-499D-88FB-0AFB1C4158F3}"/>
+                <a16:creationId xmlns:a16="http://schemas.microsoft.com/office/drawing/2014/main" id="{8B3EB4FF-A435-40B3-8DAD-8A209DC34550}"/>
               </a:ext>
             </a:extLst>
           </p:cNvPr>
@@ -28949,7 +28949,7 @@
           <p:cNvPr id="12" name="">
             <a:extLst xmlns:a="http://schemas.openxmlformats.org/drawingml/2006/main">
               <a:ext uri="{FF2B5EF4-FFF2-40B4-BE49-F238E27FC236}">
-                <a16:creationId xmlns:a16="http://schemas.microsoft.com/office/drawing/2014/main" id="{00455B33-007E-44C6-B6E1-A5E62B49380B}"/>
+                <a16:creationId xmlns:a16="http://schemas.microsoft.com/office/drawing/2014/main" id="{F77A76AE-6D61-46D4-9721-C21B76D07F1D}"/>
               </a:ext>
             </a:extLst>
           </p:cNvPr>
@@ -29001,7 +29001,7 @@
           <p:cNvPr id="13" name="">
             <a:extLst xmlns:a="http://schemas.openxmlformats.org/drawingml/2006/main">
               <a:ext uri="{FF2B5EF4-FFF2-40B4-BE49-F238E27FC236}">
-                <a16:creationId xmlns:a16="http://schemas.microsoft.com/office/drawing/2014/main" id="{5A003930-37CD-4ABF-9289-3C4576817DF7}"/>
+                <a16:creationId xmlns:a16="http://schemas.microsoft.com/office/drawing/2014/main" id="{33128E1A-22DC-4EC7-8F45-F6823E153E5F}"/>
               </a:ext>
             </a:extLst>
           </p:cNvPr>
@@ -29053,7 +29053,7 @@
           <p:cNvPr id="14" name="">
             <a:extLst xmlns:a="http://schemas.openxmlformats.org/drawingml/2006/main">
               <a:ext uri="{FF2B5EF4-FFF2-40B4-BE49-F238E27FC236}">
-                <a16:creationId xmlns:a16="http://schemas.microsoft.com/office/drawing/2014/main" id="{0EB291EF-8965-4548-A70F-1552517D6358}"/>
+                <a16:creationId xmlns:a16="http://schemas.microsoft.com/office/drawing/2014/main" id="{B3928035-BDAB-4183-BED1-7647AACAC8F5}"/>
               </a:ext>
             </a:extLst>
           </p:cNvPr>
@@ -29084,7 +29084,7 @@
           <p:cNvPr id="15" name="">
             <a:extLst xmlns:a="http://schemas.openxmlformats.org/drawingml/2006/main">
               <a:ext uri="{FF2B5EF4-FFF2-40B4-BE49-F238E27FC236}">
-                <a16:creationId xmlns:a16="http://schemas.microsoft.com/office/drawing/2014/main" id="{7B748451-6FBE-4FD3-8548-956D63F28044}"/>
+                <a16:creationId xmlns:a16="http://schemas.microsoft.com/office/drawing/2014/main" id="{53F7CC6A-F2F9-43C2-BECF-6A0EE83E7716}"/>
               </a:ext>
             </a:extLst>
           </p:cNvPr>
@@ -29136,7 +29136,7 @@
           <p:cNvPr id="16" name="">
             <a:extLst xmlns:a="http://schemas.openxmlformats.org/drawingml/2006/main">
               <a:ext uri="{FF2B5EF4-FFF2-40B4-BE49-F238E27FC236}">
-                <a16:creationId xmlns:a16="http://schemas.microsoft.com/office/drawing/2014/main" id="{27250252-FB6B-47EE-9CA9-1C2E787BAFEB}"/>
+                <a16:creationId xmlns:a16="http://schemas.microsoft.com/office/drawing/2014/main" id="{22870428-7883-46CF-A3BE-4491F7EF7D32}"/>
               </a:ext>
             </a:extLst>
           </p:cNvPr>
@@ -29188,7 +29188,7 @@
           <p:cNvPr id="17" name="">
             <a:extLst xmlns:a="http://schemas.openxmlformats.org/drawingml/2006/main">
               <a:ext uri="{FF2B5EF4-FFF2-40B4-BE49-F238E27FC236}">
-                <a16:creationId xmlns:a16="http://schemas.microsoft.com/office/drawing/2014/main" id="{CC482477-A8EE-4011-B347-C32B4F50E96A}"/>
+                <a16:creationId xmlns:a16="http://schemas.microsoft.com/office/drawing/2014/main" id="{48742DE0-3A53-4920-96B7-337670C1E21C}"/>
               </a:ext>
             </a:extLst>
           </p:cNvPr>
@@ -29240,7 +29240,7 @@
           <p:cNvPr id="18" name="">
             <a:extLst xmlns:a="http://schemas.openxmlformats.org/drawingml/2006/main">
               <a:ext uri="{FF2B5EF4-FFF2-40B4-BE49-F238E27FC236}">
-                <a16:creationId xmlns:a16="http://schemas.microsoft.com/office/drawing/2014/main" id="{B82D1BC2-9CEB-4FBD-B10F-D71E87F97214}"/>
+                <a16:creationId xmlns:a16="http://schemas.microsoft.com/office/drawing/2014/main" id="{636439D3-1504-4DD4-90DB-72990C505727}"/>
               </a:ext>
             </a:extLst>
           </p:cNvPr>
@@ -29271,7 +29271,7 @@
           <p:cNvPr id="19" name="">
             <a:extLst xmlns:a="http://schemas.openxmlformats.org/drawingml/2006/main">
               <a:ext uri="{FF2B5EF4-FFF2-40B4-BE49-F238E27FC236}">
-                <a16:creationId xmlns:a16="http://schemas.microsoft.com/office/drawing/2014/main" id="{E0522A87-F3A2-4494-8801-62F3A51ACD5F}"/>
+                <a16:creationId xmlns:a16="http://schemas.microsoft.com/office/drawing/2014/main" id="{C26BDBB6-A471-48F3-AD48-D3FDFA032918}"/>
               </a:ext>
             </a:extLst>
           </p:cNvPr>
@@ -29323,7 +29323,7 @@
           <p:cNvPr id="20" name="">
             <a:extLst xmlns:a="http://schemas.openxmlformats.org/drawingml/2006/main">
               <a:ext uri="{FF2B5EF4-FFF2-40B4-BE49-F238E27FC236}">
-                <a16:creationId xmlns:a16="http://schemas.microsoft.com/office/drawing/2014/main" id="{5E23707A-FADD-460B-8445-F58A8E28541A}"/>
+                <a16:creationId xmlns:a16="http://schemas.microsoft.com/office/drawing/2014/main" id="{7132277F-A47C-4095-8BD1-2E731ED9CC69}"/>
               </a:ext>
             </a:extLst>
           </p:cNvPr>
@@ -29375,7 +29375,7 @@
           <p:cNvPr id="21" name="">
             <a:extLst xmlns:a="http://schemas.openxmlformats.org/drawingml/2006/main">
               <a:ext uri="{FF2B5EF4-FFF2-40B4-BE49-F238E27FC236}">
-                <a16:creationId xmlns:a16="http://schemas.microsoft.com/office/drawing/2014/main" id="{844444B6-1382-4002-94D0-A387CA174110}"/>
+                <a16:creationId xmlns:a16="http://schemas.microsoft.com/office/drawing/2014/main" id="{FEA17F3F-0273-48EF-9F93-6AA8F30ABA6B}"/>
               </a:ext>
             </a:extLst>
           </p:cNvPr>
@@ -29427,7 +29427,7 @@
           <p:cNvPr id="22" name="">
             <a:extLst xmlns:a="http://schemas.openxmlformats.org/drawingml/2006/main">
               <a:ext uri="{FF2B5EF4-FFF2-40B4-BE49-F238E27FC236}">
-                <a16:creationId xmlns:a16="http://schemas.microsoft.com/office/drawing/2014/main" id="{2D1189AE-3222-4BEF-8F98-9C25B2F324EE}"/>
+                <a16:creationId xmlns:a16="http://schemas.microsoft.com/office/drawing/2014/main" id="{7CE608D6-7742-4F06-9751-8BA9CB45FEE6}"/>
               </a:ext>
             </a:extLst>
           </p:cNvPr>
@@ -29458,7 +29458,7 @@
           <p:cNvPr id="23" name="">
             <a:extLst xmlns:a="http://schemas.openxmlformats.org/drawingml/2006/main">
               <a:ext uri="{FF2B5EF4-FFF2-40B4-BE49-F238E27FC236}">
-                <a16:creationId xmlns:a16="http://schemas.microsoft.com/office/drawing/2014/main" id="{D2976AE7-5FA4-442E-AD99-7BB3FE9E6E23}"/>
+                <a16:creationId xmlns:a16="http://schemas.microsoft.com/office/drawing/2014/main" id="{A03E6CD8-905F-4EE4-BC5C-A30711BCFF64}"/>
               </a:ext>
             </a:extLst>
           </p:cNvPr>
@@ -29510,7 +29510,7 @@
           <p:cNvPr id="24" name="">
             <a:extLst xmlns:a="http://schemas.openxmlformats.org/drawingml/2006/main">
               <a:ext uri="{FF2B5EF4-FFF2-40B4-BE49-F238E27FC236}">
-                <a16:creationId xmlns:a16="http://schemas.microsoft.com/office/drawing/2014/main" id="{D41F7904-15AA-4A58-BD82-7ABDE67704FA}"/>
+                <a16:creationId xmlns:a16="http://schemas.microsoft.com/office/drawing/2014/main" id="{2F89CB6E-B32C-4BB3-927C-D520B9603D35}"/>
               </a:ext>
             </a:extLst>
           </p:cNvPr>
@@ -29562,7 +29562,7 @@
           <p:cNvPr id="25" name="">
             <a:extLst xmlns:a="http://schemas.openxmlformats.org/drawingml/2006/main">
               <a:ext uri="{FF2B5EF4-FFF2-40B4-BE49-F238E27FC236}">
-                <a16:creationId xmlns:a16="http://schemas.microsoft.com/office/drawing/2014/main" id="{42A1245B-7D3B-4452-85C4-24F30C7F24DF}"/>
+                <a16:creationId xmlns:a16="http://schemas.microsoft.com/office/drawing/2014/main" id="{89BC59C0-8A5C-4F1C-A6D5-B292587B61AE}"/>
               </a:ext>
             </a:extLst>
           </p:cNvPr>
@@ -29614,7 +29614,7 @@
           <p:cNvPr id="26" name="">
             <a:extLst xmlns:a="http://schemas.openxmlformats.org/drawingml/2006/main">
               <a:ext uri="{FF2B5EF4-FFF2-40B4-BE49-F238E27FC236}">
-                <a16:creationId xmlns:a16="http://schemas.microsoft.com/office/drawing/2014/main" id="{721725F7-C284-4165-A94B-B65496B03654}"/>
+                <a16:creationId xmlns:a16="http://schemas.microsoft.com/office/drawing/2014/main" id="{C90259D1-85EB-416F-AFFF-22D24BD3885D}"/>
               </a:ext>
             </a:extLst>
           </p:cNvPr>
@@ -29645,7 +29645,7 @@
           <p:cNvPr id="27" name="">
             <a:extLst xmlns:a="http://schemas.openxmlformats.org/drawingml/2006/main">
               <a:ext uri="{FF2B5EF4-FFF2-40B4-BE49-F238E27FC236}">
-                <a16:creationId xmlns:a16="http://schemas.microsoft.com/office/drawing/2014/main" id="{5B40E54C-B352-4178-AF0F-D08678C7FC7E}"/>
+                <a16:creationId xmlns:a16="http://schemas.microsoft.com/office/drawing/2014/main" id="{8324DD8F-08D7-4645-9812-BE6F4160F9F4}"/>
               </a:ext>
             </a:extLst>
           </p:cNvPr>
@@ -29697,7 +29697,7 @@
           <p:cNvPr id="28" name="">
             <a:extLst xmlns:a="http://schemas.openxmlformats.org/drawingml/2006/main">
               <a:ext uri="{FF2B5EF4-FFF2-40B4-BE49-F238E27FC236}">
-                <a16:creationId xmlns:a16="http://schemas.microsoft.com/office/drawing/2014/main" id="{36079A74-33EA-49DC-8359-4ABA6186686C}"/>
+                <a16:creationId xmlns:a16="http://schemas.microsoft.com/office/drawing/2014/main" id="{90D2AC6A-9BF9-469B-A97D-E7F748FBFFBF}"/>
               </a:ext>
             </a:extLst>
           </p:cNvPr>
@@ -29749,7 +29749,7 @@
           <p:cNvPr id="29" name="">
             <a:extLst xmlns:a="http://schemas.openxmlformats.org/drawingml/2006/main">
               <a:ext uri="{FF2B5EF4-FFF2-40B4-BE49-F238E27FC236}">
-                <a16:creationId xmlns:a16="http://schemas.microsoft.com/office/drawing/2014/main" id="{F5276A90-2FEA-49BA-8CDF-F9219185CDD7}"/>
+                <a16:creationId xmlns:a16="http://schemas.microsoft.com/office/drawing/2014/main" id="{53174E33-7E7B-497C-BD3E-9E0CA82AC6A7}"/>
               </a:ext>
             </a:extLst>
           </p:cNvPr>
@@ -29801,7 +29801,7 @@
           <p:cNvPr id="30" name="">
             <a:extLst xmlns:a="http://schemas.openxmlformats.org/drawingml/2006/main">
               <a:ext uri="{FF2B5EF4-FFF2-40B4-BE49-F238E27FC236}">
-                <a16:creationId xmlns:a16="http://schemas.microsoft.com/office/drawing/2014/main" id="{D1D7722E-DC83-467F-BBAE-B6CBD7DE5682}"/>
+                <a16:creationId xmlns:a16="http://schemas.microsoft.com/office/drawing/2014/main" id="{625F8ED8-0E0F-4C7A-B030-F0922E4BF985}"/>
               </a:ext>
             </a:extLst>
           </p:cNvPr>
@@ -29832,7 +29832,7 @@
           <p:cNvPr id="31" name="">
             <a:extLst xmlns:a="http://schemas.openxmlformats.org/drawingml/2006/main">
               <a:ext uri="{FF2B5EF4-FFF2-40B4-BE49-F238E27FC236}">
-                <a16:creationId xmlns:a16="http://schemas.microsoft.com/office/drawing/2014/main" id="{C98397E6-D770-49D3-8F46-912D9DE34008}"/>
+                <a16:creationId xmlns:a16="http://schemas.microsoft.com/office/drawing/2014/main" id="{E3AA79FF-3E10-432B-AA73-5A18D729E9D5}"/>
               </a:ext>
             </a:extLst>
           </p:cNvPr>
@@ -29884,7 +29884,7 @@
           <p:cNvPr id="32" name="">
             <a:extLst xmlns:a="http://schemas.openxmlformats.org/drawingml/2006/main">
               <a:ext uri="{FF2B5EF4-FFF2-40B4-BE49-F238E27FC236}">
-                <a16:creationId xmlns:a16="http://schemas.microsoft.com/office/drawing/2014/main" id="{6D99BA96-1470-498B-B921-56443C5CEF58}"/>
+                <a16:creationId xmlns:a16="http://schemas.microsoft.com/office/drawing/2014/main" id="{EDB0303C-E40A-46AD-BD87-17AF02723804}"/>
               </a:ext>
             </a:extLst>
           </p:cNvPr>
@@ -29936,7 +29936,7 @@
           <p:cNvPr id="33" name="">
             <a:extLst xmlns:a="http://schemas.openxmlformats.org/drawingml/2006/main">
               <a:ext uri="{FF2B5EF4-FFF2-40B4-BE49-F238E27FC236}">
-                <a16:creationId xmlns:a16="http://schemas.microsoft.com/office/drawing/2014/main" id="{8E05DE4D-6325-4DA5-ADBE-B6903858F7F5}"/>
+                <a16:creationId xmlns:a16="http://schemas.microsoft.com/office/drawing/2014/main" id="{1C75A52D-1FA6-4CF7-9A3A-FC9CCACEAE49}"/>
               </a:ext>
             </a:extLst>
           </p:cNvPr>
@@ -29988,7 +29988,7 @@
           <p:cNvPr id="34" name="">
             <a:extLst xmlns:a="http://schemas.openxmlformats.org/drawingml/2006/main">
               <a:ext uri="{FF2B5EF4-FFF2-40B4-BE49-F238E27FC236}">
-                <a16:creationId xmlns:a16="http://schemas.microsoft.com/office/drawing/2014/main" id="{94CAA456-3471-4B59-BF6C-95073C14FF1D}"/>
+                <a16:creationId xmlns:a16="http://schemas.microsoft.com/office/drawing/2014/main" id="{CA3ADA71-E765-4A0F-821E-58DD62D62FFE}"/>
               </a:ext>
             </a:extLst>
           </p:cNvPr>
@@ -30019,7 +30019,7 @@
           <p:cNvPr id="35" name="">
             <a:extLst xmlns:a="http://schemas.openxmlformats.org/drawingml/2006/main">
               <a:ext uri="{FF2B5EF4-FFF2-40B4-BE49-F238E27FC236}">
-                <a16:creationId xmlns:a16="http://schemas.microsoft.com/office/drawing/2014/main" id="{2726DEB9-7C4C-4C49-B4D5-DE6E62D507EF}"/>
+                <a16:creationId xmlns:a16="http://schemas.microsoft.com/office/drawing/2014/main" id="{A014FFE0-9B32-4C94-9B04-A9C6AB610B3E}"/>
               </a:ext>
             </a:extLst>
           </p:cNvPr>
@@ -30071,7 +30071,7 @@
           <p:cNvPr id="36" name="">
             <a:extLst xmlns:a="http://schemas.openxmlformats.org/drawingml/2006/main">
               <a:ext uri="{FF2B5EF4-FFF2-40B4-BE49-F238E27FC236}">
-                <a16:creationId xmlns:a16="http://schemas.microsoft.com/office/drawing/2014/main" id="{5889ABD4-D60B-4899-9F6D-80738B619696}"/>
+                <a16:creationId xmlns:a16="http://schemas.microsoft.com/office/drawing/2014/main" id="{010F8030-64D6-4822-85D8-AE6795F2AA21}"/>
               </a:ext>
             </a:extLst>
           </p:cNvPr>
@@ -30123,7 +30123,7 @@
           <p:cNvPr id="37" name="">
             <a:extLst xmlns:a="http://schemas.openxmlformats.org/drawingml/2006/main">
               <a:ext uri="{FF2B5EF4-FFF2-40B4-BE49-F238E27FC236}">
-                <a16:creationId xmlns:a16="http://schemas.microsoft.com/office/drawing/2014/main" id="{F82BE548-D9D1-4A76-A6B3-2C37F54A2DC5}"/>
+                <a16:creationId xmlns:a16="http://schemas.microsoft.com/office/drawing/2014/main" id="{103927C4-07C6-4B68-BA6C-08448E8311C3}"/>
               </a:ext>
             </a:extLst>
           </p:cNvPr>
@@ -30175,7 +30175,7 @@
           <p:cNvPr id="38" name="">
             <a:extLst xmlns:a="http://schemas.openxmlformats.org/drawingml/2006/main">
               <a:ext uri="{FF2B5EF4-FFF2-40B4-BE49-F238E27FC236}">
-                <a16:creationId xmlns:a16="http://schemas.microsoft.com/office/drawing/2014/main" id="{931FAF26-DDDE-4588-9DA4-9F5A20457BAA}"/>
+                <a16:creationId xmlns:a16="http://schemas.microsoft.com/office/drawing/2014/main" id="{6B7FFA74-33E8-403A-B532-7E6D65143D31}"/>
               </a:ext>
             </a:extLst>
           </p:cNvPr>
@@ -30206,7 +30206,7 @@
           <p:cNvPr id="39" name="">
             <a:extLst xmlns:a="http://schemas.openxmlformats.org/drawingml/2006/main">
               <a:ext uri="{FF2B5EF4-FFF2-40B4-BE49-F238E27FC236}">
-                <a16:creationId xmlns:a16="http://schemas.microsoft.com/office/drawing/2014/main" id="{601C5511-683B-4D1E-BF33-B03C66437995}"/>
+                <a16:creationId xmlns:a16="http://schemas.microsoft.com/office/drawing/2014/main" id="{0272A64F-CAD5-475F-BF45-9E895F5EC70F}"/>
               </a:ext>
             </a:extLst>
           </p:cNvPr>
@@ -30258,7 +30258,7 @@
           <p:cNvPr id="40" name="">
             <a:extLst xmlns:a="http://schemas.openxmlformats.org/drawingml/2006/main">
               <a:ext uri="{FF2B5EF4-FFF2-40B4-BE49-F238E27FC236}">
-                <a16:creationId xmlns:a16="http://schemas.microsoft.com/office/drawing/2014/main" id="{00E6D326-3939-4098-B8E7-C487113938D0}"/>
+                <a16:creationId xmlns:a16="http://schemas.microsoft.com/office/drawing/2014/main" id="{7A3921FC-A8D8-4F31-8C06-BD7101E5C8EE}"/>
               </a:ext>
             </a:extLst>
           </p:cNvPr>
@@ -30310,7 +30310,7 @@
           <p:cNvPr id="41" name="">
             <a:extLst xmlns:a="http://schemas.openxmlformats.org/drawingml/2006/main">
               <a:ext uri="{FF2B5EF4-FFF2-40B4-BE49-F238E27FC236}">
-                <a16:creationId xmlns:a16="http://schemas.microsoft.com/office/drawing/2014/main" id="{5F40FDB8-A912-4013-ACF9-6DEA37A7F89A}"/>
+                <a16:creationId xmlns:a16="http://schemas.microsoft.com/office/drawing/2014/main" id="{5DF61251-58D0-4F70-8847-F1D1353AFBD5}"/>
               </a:ext>
             </a:extLst>
           </p:cNvPr>
@@ -30360,7 +30360,7 @@
     </p:spTree>
     <p:extLst>
       <p:ext uri="{BB962C8B-B14F-4D97-AF65-F5344CB8AC3E}">
-        <p14:creationId xmlns:p14="http://schemas.microsoft.com/office/powerpoint/2010/main" val="326550734"/>
+        <p14:creationId xmlns:p14="http://schemas.microsoft.com/office/powerpoint/2010/main" val="483410397"/>
       </p:ext>
     </p:extLst>
   </p:cSld>
@@ -30391,7 +30391,7 @@
           <p:cNvPr id="76" name="">
             <a:extLst xmlns:a="http://schemas.openxmlformats.org/drawingml/2006/main">
               <a:ext uri="{FF2B5EF4-FFF2-40B4-BE49-F238E27FC236}">
-                <a16:creationId xmlns:a16="http://schemas.microsoft.com/office/drawing/2014/main" id="{13243149-4AF2-4A5B-8E67-06C406A40643}"/>
+                <a16:creationId xmlns:a16="http://schemas.microsoft.com/office/drawing/2014/main" id="{81C042D9-ACE1-417F-864D-9DC2FC2AA897}"/>
               </a:ext>
             </a:extLst>
           </p:cNvPr>
@@ -30424,7 +30424,7 @@
           <p:cNvPr id="2" name="">
             <a:extLst xmlns:a="http://schemas.openxmlformats.org/drawingml/2006/main">
               <a:ext uri="{FF2B5EF4-FFF2-40B4-BE49-F238E27FC236}">
-                <a16:creationId xmlns:a16="http://schemas.microsoft.com/office/drawing/2014/main" id="{96DC2456-D717-48F2-961C-43E56833CA1F}"/>
+                <a16:creationId xmlns:a16="http://schemas.microsoft.com/office/drawing/2014/main" id="{270913DA-4EA0-4CE8-8DB9-2E039E52641D}"/>
               </a:ext>
             </a:extLst>
           </p:cNvPr>
@@ -30455,7 +30455,7 @@
           <p:cNvPr id="3" name="">
             <a:extLst xmlns:a="http://schemas.openxmlformats.org/drawingml/2006/main">
               <a:ext uri="{FF2B5EF4-FFF2-40B4-BE49-F238E27FC236}">
-                <a16:creationId xmlns:a16="http://schemas.microsoft.com/office/drawing/2014/main" id="{37022775-E63B-4B60-A848-9705924EDB1B}"/>
+                <a16:creationId xmlns:a16="http://schemas.microsoft.com/office/drawing/2014/main" id="{E63A345E-BD7A-420D-B97C-A870D36C74BD}"/>
               </a:ext>
             </a:extLst>
           </p:cNvPr>
@@ -30507,7 +30507,7 @@
           <p:cNvPr id="4" name="">
             <a:extLst xmlns:a="http://schemas.openxmlformats.org/drawingml/2006/main">
               <a:ext uri="{FF2B5EF4-FFF2-40B4-BE49-F238E27FC236}">
-                <a16:creationId xmlns:a16="http://schemas.microsoft.com/office/drawing/2014/main" id="{122E9BC0-0F97-44EC-9BEF-E7D67EF25D2C}"/>
+                <a16:creationId xmlns:a16="http://schemas.microsoft.com/office/drawing/2014/main" id="{9FC3D17E-541E-4AF6-8025-AFF21171886B}"/>
               </a:ext>
             </a:extLst>
           </p:cNvPr>
@@ -30559,7 +30559,7 @@
           <p:cNvPr id="5" name="">
             <a:extLst xmlns:a="http://schemas.openxmlformats.org/drawingml/2006/main">
               <a:ext uri="{FF2B5EF4-FFF2-40B4-BE49-F238E27FC236}">
-                <a16:creationId xmlns:a16="http://schemas.microsoft.com/office/drawing/2014/main" id="{C27FADD2-F2E1-48D5-8C5E-3B83BC7E2AF8}"/>
+                <a16:creationId xmlns:a16="http://schemas.microsoft.com/office/drawing/2014/main" id="{854B2BD6-ED95-40ED-8EF9-F3661A4667F2}"/>
               </a:ext>
             </a:extLst>
           </p:cNvPr>
@@ -30594,7 +30594,7 @@
           <p:nvPr/>
         </p:nvPicPr>
         <p:blipFill>
-          <a:blip xmlns:r="http://schemas.openxmlformats.org/officeDocument/2006/relationships" xmlns:a="http://schemas.openxmlformats.org/drawingml/2006/main" r:embed="R4f76532e45da4b55"/>
+          <a:blip xmlns:r="http://schemas.openxmlformats.org/officeDocument/2006/relationships" xmlns:a="http://schemas.openxmlformats.org/drawingml/2006/main" r:embed="R96ae6495090a453d"/>
           <a:stretch xmlns:a="http://schemas.openxmlformats.org/drawingml/2006/main"/>
         </p:blipFill>
         <p:spPr>
@@ -30612,7 +30612,7 @@
           <p:cNvPr id="7" name="">
             <a:extLst xmlns:a="http://schemas.openxmlformats.org/drawingml/2006/main">
               <a:ext uri="{FF2B5EF4-FFF2-40B4-BE49-F238E27FC236}">
-                <a16:creationId xmlns:a16="http://schemas.microsoft.com/office/drawing/2014/main" id="{970B3DBD-FFFB-4F02-94FB-319431C7FF9D}"/>
+                <a16:creationId xmlns:a16="http://schemas.microsoft.com/office/drawing/2014/main" id="{ADCE8180-433D-4E63-A3B9-F2733B85D7A0}"/>
               </a:ext>
             </a:extLst>
           </p:cNvPr>
@@ -30664,7 +30664,7 @@
           <p:cNvPr id="8" name="">
             <a:extLst xmlns:a="http://schemas.openxmlformats.org/drawingml/2006/main">
               <a:ext uri="{FF2B5EF4-FFF2-40B4-BE49-F238E27FC236}">
-                <a16:creationId xmlns:a16="http://schemas.microsoft.com/office/drawing/2014/main" id="{87675770-4595-44D0-93D1-A91D1A2E2748}"/>
+                <a16:creationId xmlns:a16="http://schemas.microsoft.com/office/drawing/2014/main" id="{0AD1840A-0A80-454A-A19C-D1CE453F1357}"/>
               </a:ext>
             </a:extLst>
           </p:cNvPr>
@@ -30716,7 +30716,7 @@
           <p:cNvPr id="9" name="">
             <a:extLst xmlns:a="http://schemas.openxmlformats.org/drawingml/2006/main">
               <a:ext uri="{FF2B5EF4-FFF2-40B4-BE49-F238E27FC236}">
-                <a16:creationId xmlns:a16="http://schemas.microsoft.com/office/drawing/2014/main" id="{A06639D0-9A7E-4F3D-B509-C98103FCEBCB}"/>
+                <a16:creationId xmlns:a16="http://schemas.microsoft.com/office/drawing/2014/main" id="{7FDE09B6-7ACD-4E0C-98D0-60A51328233E}"/>
               </a:ext>
             </a:extLst>
           </p:cNvPr>
@@ -30768,7 +30768,7 @@
           <p:cNvPr id="10" name="">
             <a:extLst xmlns:a="http://schemas.openxmlformats.org/drawingml/2006/main">
               <a:ext uri="{FF2B5EF4-FFF2-40B4-BE49-F238E27FC236}">
-                <a16:creationId xmlns:a16="http://schemas.microsoft.com/office/drawing/2014/main" id="{6B33EC0B-DEC8-42D9-ABAC-183DD1050CEC}"/>
+                <a16:creationId xmlns:a16="http://schemas.microsoft.com/office/drawing/2014/main" id="{1AC75E56-77F1-4C32-85A8-4C37C0E82790}"/>
               </a:ext>
             </a:extLst>
           </p:cNvPr>
@@ -30820,7 +30820,7 @@
           <p:cNvPr id="11" name="">
             <a:extLst xmlns:a="http://schemas.openxmlformats.org/drawingml/2006/main">
               <a:ext uri="{FF2B5EF4-FFF2-40B4-BE49-F238E27FC236}">
-                <a16:creationId xmlns:a16="http://schemas.microsoft.com/office/drawing/2014/main" id="{A5C98FCB-2489-4C16-B2F7-AB11CB8CD756}"/>
+                <a16:creationId xmlns:a16="http://schemas.microsoft.com/office/drawing/2014/main" id="{124AD285-98BB-488A-8171-592121A060E5}"/>
               </a:ext>
             </a:extLst>
           </p:cNvPr>
@@ -30863,7 +30863,7 @@
           <p:cNvPr id="12" name="">
             <a:extLst xmlns:a="http://schemas.openxmlformats.org/drawingml/2006/main">
               <a:ext uri="{FF2B5EF4-FFF2-40B4-BE49-F238E27FC236}">
-                <a16:creationId xmlns:a16="http://schemas.microsoft.com/office/drawing/2014/main" id="{90886416-254F-470A-A806-D478FC1B5907}"/>
+                <a16:creationId xmlns:a16="http://schemas.microsoft.com/office/drawing/2014/main" id="{F6CD328B-0F9A-40AC-91D4-9B90066729EC}"/>
               </a:ext>
             </a:extLst>
           </p:cNvPr>
@@ -30894,7 +30894,7 @@
           <p:cNvPr id="13" name="">
             <a:extLst xmlns:a="http://schemas.openxmlformats.org/drawingml/2006/main">
               <a:ext uri="{FF2B5EF4-FFF2-40B4-BE49-F238E27FC236}">
-                <a16:creationId xmlns:a16="http://schemas.microsoft.com/office/drawing/2014/main" id="{3483320C-23F9-4384-A3F3-D2524CC31DCD}"/>
+                <a16:creationId xmlns:a16="http://schemas.microsoft.com/office/drawing/2014/main" id="{0E2D98CD-51CE-4419-89B0-34AC57258CF8}"/>
               </a:ext>
             </a:extLst>
           </p:cNvPr>
@@ -30925,7 +30925,7 @@
           <p:cNvPr id="14" name="">
             <a:extLst xmlns:a="http://schemas.openxmlformats.org/drawingml/2006/main">
               <a:ext uri="{FF2B5EF4-FFF2-40B4-BE49-F238E27FC236}">
-                <a16:creationId xmlns:a16="http://schemas.microsoft.com/office/drawing/2014/main" id="{F52380E7-9EE0-4282-AC47-04190CD96E6D}"/>
+                <a16:creationId xmlns:a16="http://schemas.microsoft.com/office/drawing/2014/main" id="{E72F86DB-7CD8-46EA-8369-04D628765D9A}"/>
               </a:ext>
             </a:extLst>
           </p:cNvPr>
@@ -30968,7 +30968,7 @@
           <p:cNvPr id="15" name="">
             <a:extLst xmlns:a="http://schemas.openxmlformats.org/drawingml/2006/main">
               <a:ext uri="{FF2B5EF4-FFF2-40B4-BE49-F238E27FC236}">
-                <a16:creationId xmlns:a16="http://schemas.microsoft.com/office/drawing/2014/main" id="{724509BE-9DDA-4220-8566-9C2153490043}"/>
+                <a16:creationId xmlns:a16="http://schemas.microsoft.com/office/drawing/2014/main" id="{7737A248-14E9-48FC-B706-58703D104F01}"/>
               </a:ext>
             </a:extLst>
           </p:cNvPr>
@@ -30999,7 +30999,7 @@
           <p:cNvPr id="16" name="">
             <a:extLst xmlns:a="http://schemas.openxmlformats.org/drawingml/2006/main">
               <a:ext uri="{FF2B5EF4-FFF2-40B4-BE49-F238E27FC236}">
-                <a16:creationId xmlns:a16="http://schemas.microsoft.com/office/drawing/2014/main" id="{B957CD5F-43EF-4F10-AD9F-83C7E89C24EB}"/>
+                <a16:creationId xmlns:a16="http://schemas.microsoft.com/office/drawing/2014/main" id="{04F52036-2DB0-4A8B-A277-11246D4B5DDE}"/>
               </a:ext>
             </a:extLst>
           </p:cNvPr>
@@ -31030,7 +31030,7 @@
           <p:cNvPr id="17" name="">
             <a:extLst xmlns:a="http://schemas.openxmlformats.org/drawingml/2006/main">
               <a:ext uri="{FF2B5EF4-FFF2-40B4-BE49-F238E27FC236}">
-                <a16:creationId xmlns:a16="http://schemas.microsoft.com/office/drawing/2014/main" id="{C44AED0A-BEC4-42F9-BABB-8246650F758E}"/>
+                <a16:creationId xmlns:a16="http://schemas.microsoft.com/office/drawing/2014/main" id="{868D56E7-036A-4593-B075-E7801EC41008}"/>
               </a:ext>
             </a:extLst>
           </p:cNvPr>
@@ -31082,7 +31082,7 @@
           <p:cNvPr id="18" name="">
             <a:extLst xmlns:a="http://schemas.openxmlformats.org/drawingml/2006/main">
               <a:ext uri="{FF2B5EF4-FFF2-40B4-BE49-F238E27FC236}">
-                <a16:creationId xmlns:a16="http://schemas.microsoft.com/office/drawing/2014/main" id="{2BACFC6F-C5EA-4CBF-8DCE-72393AA04431}"/>
+                <a16:creationId xmlns:a16="http://schemas.microsoft.com/office/drawing/2014/main" id="{FC4FEA42-F432-4F5C-BC97-52090DD0BEB6}"/>
               </a:ext>
             </a:extLst>
           </p:cNvPr>
@@ -31134,7 +31134,7 @@
           <p:cNvPr id="19" name="">
             <a:extLst xmlns:a="http://schemas.openxmlformats.org/drawingml/2006/main">
               <a:ext uri="{FF2B5EF4-FFF2-40B4-BE49-F238E27FC236}">
-                <a16:creationId xmlns:a16="http://schemas.microsoft.com/office/drawing/2014/main" id="{B813A754-CE46-44E8-B5DC-043B6126C8FA}"/>
+                <a16:creationId xmlns:a16="http://schemas.microsoft.com/office/drawing/2014/main" id="{6226474B-9FA6-4051-9875-989D2A4B35A1}"/>
               </a:ext>
             </a:extLst>
           </p:cNvPr>
@@ -31186,7 +31186,7 @@
           <p:cNvPr id="20" name="">
             <a:extLst xmlns:a="http://schemas.openxmlformats.org/drawingml/2006/main">
               <a:ext uri="{FF2B5EF4-FFF2-40B4-BE49-F238E27FC236}">
-                <a16:creationId xmlns:a16="http://schemas.microsoft.com/office/drawing/2014/main" id="{7CC1C1B1-9971-4B78-B048-A69A05BC9BE0}"/>
+                <a16:creationId xmlns:a16="http://schemas.microsoft.com/office/drawing/2014/main" id="{DCB237AE-2ED6-438F-A7AA-85C0DF849C47}"/>
               </a:ext>
             </a:extLst>
           </p:cNvPr>
@@ -31229,7 +31229,7 @@
           <p:cNvPr id="21" name="">
             <a:extLst xmlns:a="http://schemas.openxmlformats.org/drawingml/2006/main">
               <a:ext uri="{FF2B5EF4-FFF2-40B4-BE49-F238E27FC236}">
-                <a16:creationId xmlns:a16="http://schemas.microsoft.com/office/drawing/2014/main" id="{75F67598-D9BA-43AC-9C59-3ABCA01B6EDD}"/>
+                <a16:creationId xmlns:a16="http://schemas.microsoft.com/office/drawing/2014/main" id="{8401088F-F820-474D-AE84-9984779A179E}"/>
               </a:ext>
             </a:extLst>
           </p:cNvPr>
@@ -31260,7 +31260,7 @@
           <p:cNvPr id="22" name="">
             <a:extLst xmlns:a="http://schemas.openxmlformats.org/drawingml/2006/main">
               <a:ext uri="{FF2B5EF4-FFF2-40B4-BE49-F238E27FC236}">
-                <a16:creationId xmlns:a16="http://schemas.microsoft.com/office/drawing/2014/main" id="{D88DB259-07D9-4C7E-83BA-96FE2FCC42AE}"/>
+                <a16:creationId xmlns:a16="http://schemas.microsoft.com/office/drawing/2014/main" id="{2EB853AE-D633-43E4-BDD4-1E82B6616629}"/>
               </a:ext>
             </a:extLst>
           </p:cNvPr>
@@ -31291,7 +31291,7 @@
           <p:cNvPr id="23" name="">
             <a:extLst xmlns:a="http://schemas.openxmlformats.org/drawingml/2006/main">
               <a:ext uri="{FF2B5EF4-FFF2-40B4-BE49-F238E27FC236}">
-                <a16:creationId xmlns:a16="http://schemas.microsoft.com/office/drawing/2014/main" id="{ADEE6C2F-C823-47D4-BB34-BF198DD2E934}"/>
+                <a16:creationId xmlns:a16="http://schemas.microsoft.com/office/drawing/2014/main" id="{6AA5184A-79B6-4BF2-B402-505ABAEB8950}"/>
               </a:ext>
             </a:extLst>
           </p:cNvPr>
@@ -31343,7 +31343,7 @@
           <p:cNvPr id="24" name="">
             <a:extLst xmlns:a="http://schemas.openxmlformats.org/drawingml/2006/main">
               <a:ext uri="{FF2B5EF4-FFF2-40B4-BE49-F238E27FC236}">
-                <a16:creationId xmlns:a16="http://schemas.microsoft.com/office/drawing/2014/main" id="{D846F528-1D80-4F5D-ACDF-75C011D83B71}"/>
+                <a16:creationId xmlns:a16="http://schemas.microsoft.com/office/drawing/2014/main" id="{F9DDE5C7-2B3E-4C0E-A491-8EC3B6D79CEA}"/>
               </a:ext>
             </a:extLst>
           </p:cNvPr>
@@ -31395,7 +31395,7 @@
           <p:cNvPr id="25" name="">
             <a:extLst xmlns:a="http://schemas.openxmlformats.org/drawingml/2006/main">
               <a:ext uri="{FF2B5EF4-FFF2-40B4-BE49-F238E27FC236}">
-                <a16:creationId xmlns:a16="http://schemas.microsoft.com/office/drawing/2014/main" id="{999148FC-35FE-4315-A91F-CEC5D68243EF}"/>
+                <a16:creationId xmlns:a16="http://schemas.microsoft.com/office/drawing/2014/main" id="{B875F98C-F00A-43A2-B2D8-62BB6BC80C1D}"/>
               </a:ext>
             </a:extLst>
           </p:cNvPr>
@@ -31447,7 +31447,7 @@
           <p:cNvPr id="26" name="">
             <a:extLst xmlns:a="http://schemas.openxmlformats.org/drawingml/2006/main">
               <a:ext uri="{FF2B5EF4-FFF2-40B4-BE49-F238E27FC236}">
-                <a16:creationId xmlns:a16="http://schemas.microsoft.com/office/drawing/2014/main" id="{FF7D01E6-9398-4DF4-8C29-A06747C9F532}"/>
+                <a16:creationId xmlns:a16="http://schemas.microsoft.com/office/drawing/2014/main" id="{0B9366E0-61AC-4036-B2F8-292D765077BC}"/>
               </a:ext>
             </a:extLst>
           </p:cNvPr>
@@ -31490,7 +31490,7 @@
           <p:cNvPr id="27" name="">
             <a:extLst xmlns:a="http://schemas.openxmlformats.org/drawingml/2006/main">
               <a:ext uri="{FF2B5EF4-FFF2-40B4-BE49-F238E27FC236}">
-                <a16:creationId xmlns:a16="http://schemas.microsoft.com/office/drawing/2014/main" id="{6B91AD59-8486-4F78-B82A-D37D402F08F7}"/>
+                <a16:creationId xmlns:a16="http://schemas.microsoft.com/office/drawing/2014/main" id="{2A9D7675-164A-4668-B9FD-77DA4C507FB0}"/>
               </a:ext>
             </a:extLst>
           </p:cNvPr>
@@ -31521,7 +31521,7 @@
           <p:cNvPr id="28" name="">
             <a:extLst xmlns:a="http://schemas.openxmlformats.org/drawingml/2006/main">
               <a:ext uri="{FF2B5EF4-FFF2-40B4-BE49-F238E27FC236}">
-                <a16:creationId xmlns:a16="http://schemas.microsoft.com/office/drawing/2014/main" id="{D3A914DC-9CF4-4AC0-BFEA-ABF9CC2E515F}"/>
+                <a16:creationId xmlns:a16="http://schemas.microsoft.com/office/drawing/2014/main" id="{B1651A4E-B62B-4E8A-BFCE-4E57EA9D53D5}"/>
               </a:ext>
             </a:extLst>
           </p:cNvPr>
@@ -31552,7 +31552,7 @@
           <p:cNvPr id="29" name="">
             <a:extLst xmlns:a="http://schemas.openxmlformats.org/drawingml/2006/main">
               <a:ext uri="{FF2B5EF4-FFF2-40B4-BE49-F238E27FC236}">
-                <a16:creationId xmlns:a16="http://schemas.microsoft.com/office/drawing/2014/main" id="{DB2C3AF2-4012-485A-9159-5328C2BF491A}"/>
+                <a16:creationId xmlns:a16="http://schemas.microsoft.com/office/drawing/2014/main" id="{C362F09E-8235-4DB6-AD1B-E3C30FBD066A}"/>
               </a:ext>
             </a:extLst>
           </p:cNvPr>
@@ -31604,7 +31604,7 @@
           <p:cNvPr id="30" name="">
             <a:extLst xmlns:a="http://schemas.openxmlformats.org/drawingml/2006/main">
               <a:ext uri="{FF2B5EF4-FFF2-40B4-BE49-F238E27FC236}">
-                <a16:creationId xmlns:a16="http://schemas.microsoft.com/office/drawing/2014/main" id="{D8BD2F34-7168-46EB-AA8E-96E87D3E36A5}"/>
+                <a16:creationId xmlns:a16="http://schemas.microsoft.com/office/drawing/2014/main" id="{1D889C44-B545-444E-8EE6-572EC3B53A28}"/>
               </a:ext>
             </a:extLst>
           </p:cNvPr>
@@ -31656,7 +31656,7 @@
           <p:cNvPr id="31" name="">
             <a:extLst xmlns:a="http://schemas.openxmlformats.org/drawingml/2006/main">
               <a:ext uri="{FF2B5EF4-FFF2-40B4-BE49-F238E27FC236}">
-                <a16:creationId xmlns:a16="http://schemas.microsoft.com/office/drawing/2014/main" id="{E0584457-EE3D-4D81-9B53-FB2379B18061}"/>
+                <a16:creationId xmlns:a16="http://schemas.microsoft.com/office/drawing/2014/main" id="{5569B44D-C83F-4B22-839D-C75D7853D436}"/>
               </a:ext>
             </a:extLst>
           </p:cNvPr>
@@ -31708,7 +31708,7 @@
           <p:cNvPr id="32" name="">
             <a:extLst xmlns:a="http://schemas.openxmlformats.org/drawingml/2006/main">
               <a:ext uri="{FF2B5EF4-FFF2-40B4-BE49-F238E27FC236}">
-                <a16:creationId xmlns:a16="http://schemas.microsoft.com/office/drawing/2014/main" id="{E072E935-F225-4F48-A903-EB2FCB112798}"/>
+                <a16:creationId xmlns:a16="http://schemas.microsoft.com/office/drawing/2014/main" id="{543AAE2F-7B84-474E-A275-C7EA8E929A5C}"/>
               </a:ext>
             </a:extLst>
           </p:cNvPr>
@@ -31751,7 +31751,7 @@
           <p:cNvPr id="33" name="">
             <a:extLst xmlns:a="http://schemas.openxmlformats.org/drawingml/2006/main">
               <a:ext uri="{FF2B5EF4-FFF2-40B4-BE49-F238E27FC236}">
-                <a16:creationId xmlns:a16="http://schemas.microsoft.com/office/drawing/2014/main" id="{B5CB66F1-4499-4A55-A83C-0104DB19B418}"/>
+                <a16:creationId xmlns:a16="http://schemas.microsoft.com/office/drawing/2014/main" id="{D7F6B771-9FDB-4E60-A480-0771453BA455}"/>
               </a:ext>
             </a:extLst>
           </p:cNvPr>
@@ -31782,7 +31782,7 @@
           <p:cNvPr id="34" name="">
             <a:extLst xmlns:a="http://schemas.openxmlformats.org/drawingml/2006/main">
               <a:ext uri="{FF2B5EF4-FFF2-40B4-BE49-F238E27FC236}">
-                <a16:creationId xmlns:a16="http://schemas.microsoft.com/office/drawing/2014/main" id="{52595A4A-5B59-4BDE-A2F7-E3D2491F6656}"/>
+                <a16:creationId xmlns:a16="http://schemas.microsoft.com/office/drawing/2014/main" id="{8FAA8F80-DF10-4FBA-BDD5-70512E79CFF0}"/>
               </a:ext>
             </a:extLst>
           </p:cNvPr>
@@ -31813,7 +31813,7 @@
           <p:cNvPr id="35" name="">
             <a:extLst xmlns:a="http://schemas.openxmlformats.org/drawingml/2006/main">
               <a:ext uri="{FF2B5EF4-FFF2-40B4-BE49-F238E27FC236}">
-                <a16:creationId xmlns:a16="http://schemas.microsoft.com/office/drawing/2014/main" id="{AE0CF639-1809-40FF-AC88-FE0EFDEDC4CD}"/>
+                <a16:creationId xmlns:a16="http://schemas.microsoft.com/office/drawing/2014/main" id="{93895330-B63D-45CC-A503-92C556FD97CF}"/>
               </a:ext>
             </a:extLst>
           </p:cNvPr>
@@ -31865,7 +31865,7 @@
           <p:cNvPr id="36" name="">
             <a:extLst xmlns:a="http://schemas.openxmlformats.org/drawingml/2006/main">
               <a:ext uri="{FF2B5EF4-FFF2-40B4-BE49-F238E27FC236}">
-                <a16:creationId xmlns:a16="http://schemas.microsoft.com/office/drawing/2014/main" id="{FF559827-30DA-431E-9329-04A19222C80D}"/>
+                <a16:creationId xmlns:a16="http://schemas.microsoft.com/office/drawing/2014/main" id="{D5BED67B-0CCA-4092-9174-21D5F69E55F3}"/>
               </a:ext>
             </a:extLst>
           </p:cNvPr>
@@ -31917,7 +31917,7 @@
           <p:cNvPr id="37" name="">
             <a:extLst xmlns:a="http://schemas.openxmlformats.org/drawingml/2006/main">
               <a:ext uri="{FF2B5EF4-FFF2-40B4-BE49-F238E27FC236}">
-                <a16:creationId xmlns:a16="http://schemas.microsoft.com/office/drawing/2014/main" id="{CE644BBF-E997-42F7-BF70-B1B1D20EC3E8}"/>
+                <a16:creationId xmlns:a16="http://schemas.microsoft.com/office/drawing/2014/main" id="{2827E2DD-B03C-49FA-AD40-172043504286}"/>
               </a:ext>
             </a:extLst>
           </p:cNvPr>
@@ -31973,10 +31973,10 @@
           <p:nvPr/>
         </p:nvPicPr>
         <p:blipFill>
-          <a:blip xmlns:r="http://schemas.openxmlformats.org/officeDocument/2006/relationships" xmlns:a="http://schemas.openxmlformats.org/drawingml/2006/main" r:embed="Racda480288ea48c7">
+          <a:blip xmlns:r="http://schemas.openxmlformats.org/officeDocument/2006/relationships" xmlns:a="http://schemas.openxmlformats.org/drawingml/2006/main" r:embed="R5107fc9bc73d4e4b">
             <a:extLst>
               <a:ext uri="{96DAC541-7B7A-43D3-8B79-37D633B846F1}">
-                <asvg:svgBlip xmlns:asvg="http://schemas.microsoft.com/office/drawing/2016/SVG/main" r:embed="R80c0854a39b84376"/>
+                <asvg:svgBlip xmlns:asvg="http://schemas.microsoft.com/office/drawing/2016/SVG/main" r:embed="R020e801ba6814636"/>
               </a:ext>
             </a:extLst>
           </a:blip>
@@ -31997,7 +31997,7 @@
           <p:cNvPr id="39" name="">
             <a:extLst xmlns:a="http://schemas.openxmlformats.org/drawingml/2006/main">
               <a:ext uri="{FF2B5EF4-FFF2-40B4-BE49-F238E27FC236}">
-                <a16:creationId xmlns:a16="http://schemas.microsoft.com/office/drawing/2014/main" id="{1907F80B-41AD-435F-B789-32DDC89C7399}"/>
+                <a16:creationId xmlns:a16="http://schemas.microsoft.com/office/drawing/2014/main" id="{6BDC7290-B9CD-40F5-BD1D-55EC71223733}"/>
               </a:ext>
             </a:extLst>
           </p:cNvPr>
@@ -32049,7 +32049,7 @@
           <p:cNvPr id="40" name="">
             <a:extLst xmlns:a="http://schemas.openxmlformats.org/drawingml/2006/main">
               <a:ext uri="{FF2B5EF4-FFF2-40B4-BE49-F238E27FC236}">
-                <a16:creationId xmlns:a16="http://schemas.microsoft.com/office/drawing/2014/main" id="{C6F8AB13-C43B-4C6D-AC73-B942C0E3A7CF}"/>
+                <a16:creationId xmlns:a16="http://schemas.microsoft.com/office/drawing/2014/main" id="{AA9620D3-CF24-49E4-9144-2CCE5757449C}"/>
               </a:ext>
             </a:extLst>
           </p:cNvPr>
@@ -32101,7 +32101,7 @@
           <p:cNvPr id="41" name="">
             <a:extLst xmlns:a="http://schemas.openxmlformats.org/drawingml/2006/main">
               <a:ext uri="{FF2B5EF4-FFF2-40B4-BE49-F238E27FC236}">
-                <a16:creationId xmlns:a16="http://schemas.microsoft.com/office/drawing/2014/main" id="{43802F57-54DC-4736-A504-7F62BBEFC2D9}"/>
+                <a16:creationId xmlns:a16="http://schemas.microsoft.com/office/drawing/2014/main" id="{9BD91A64-7438-4F3B-8340-184733816848}"/>
               </a:ext>
             </a:extLst>
           </p:cNvPr>
@@ -32144,7 +32144,7 @@
           <p:cNvPr id="42" name="">
             <a:extLst xmlns:a="http://schemas.openxmlformats.org/drawingml/2006/main">
               <a:ext uri="{FF2B5EF4-FFF2-40B4-BE49-F238E27FC236}">
-                <a16:creationId xmlns:a16="http://schemas.microsoft.com/office/drawing/2014/main" id="{52666FB6-15A9-45D8-A9F8-7ED487B4E384}"/>
+                <a16:creationId xmlns:a16="http://schemas.microsoft.com/office/drawing/2014/main" id="{4C83EADF-DEF5-41A0-AC23-1C72CB58969B}"/>
               </a:ext>
             </a:extLst>
           </p:cNvPr>
@@ -32175,7 +32175,7 @@
           <p:cNvPr id="43" name="">
             <a:extLst xmlns:a="http://schemas.openxmlformats.org/drawingml/2006/main">
               <a:ext uri="{FF2B5EF4-FFF2-40B4-BE49-F238E27FC236}">
-                <a16:creationId xmlns:a16="http://schemas.microsoft.com/office/drawing/2014/main" id="{372CD7A5-F740-45EF-9937-F07C83ADCD22}"/>
+                <a16:creationId xmlns:a16="http://schemas.microsoft.com/office/drawing/2014/main" id="{8FED3F78-2CD9-4F6E-8BCC-4B248CF919BB}"/>
               </a:ext>
             </a:extLst>
           </p:cNvPr>
@@ -32206,7 +32206,7 @@
           <p:cNvPr id="44" name="">
             <a:extLst xmlns:a="http://schemas.openxmlformats.org/drawingml/2006/main">
               <a:ext uri="{FF2B5EF4-FFF2-40B4-BE49-F238E27FC236}">
-                <a16:creationId xmlns:a16="http://schemas.microsoft.com/office/drawing/2014/main" id="{CEAF881A-AB77-4F93-94F5-078538EFE8BB}"/>
+                <a16:creationId xmlns:a16="http://schemas.microsoft.com/office/drawing/2014/main" id="{9D4961D4-304D-4B0A-8F82-F0BB31265E12}"/>
               </a:ext>
             </a:extLst>
           </p:cNvPr>
@@ -32249,7 +32249,7 @@
           <p:cNvPr id="45" name="">
             <a:extLst xmlns:a="http://schemas.openxmlformats.org/drawingml/2006/main">
               <a:ext uri="{FF2B5EF4-FFF2-40B4-BE49-F238E27FC236}">
-                <a16:creationId xmlns:a16="http://schemas.microsoft.com/office/drawing/2014/main" id="{EEDAB25E-1081-4A3B-87AA-011F3D1846F4}"/>
+                <a16:creationId xmlns:a16="http://schemas.microsoft.com/office/drawing/2014/main" id="{4A26D126-0835-405C-9296-BD5B6C231E58}"/>
               </a:ext>
             </a:extLst>
           </p:cNvPr>
@@ -32280,7 +32280,7 @@
           <p:cNvPr id="46" name="">
             <a:extLst xmlns:a="http://schemas.openxmlformats.org/drawingml/2006/main">
               <a:ext uri="{FF2B5EF4-FFF2-40B4-BE49-F238E27FC236}">
-                <a16:creationId xmlns:a16="http://schemas.microsoft.com/office/drawing/2014/main" id="{3762D79B-30BC-4306-849B-333427CE0EA4}"/>
+                <a16:creationId xmlns:a16="http://schemas.microsoft.com/office/drawing/2014/main" id="{5AB17477-C78F-45B6-B5BC-610FF891EF81}"/>
               </a:ext>
             </a:extLst>
           </p:cNvPr>
@@ -32311,7 +32311,7 @@
           <p:cNvPr id="47" name="">
             <a:extLst xmlns:a="http://schemas.openxmlformats.org/drawingml/2006/main">
               <a:ext uri="{FF2B5EF4-FFF2-40B4-BE49-F238E27FC236}">
-                <a16:creationId xmlns:a16="http://schemas.microsoft.com/office/drawing/2014/main" id="{5E81E566-8FAD-4CE5-992F-AA85989B3D4D}"/>
+                <a16:creationId xmlns:a16="http://schemas.microsoft.com/office/drawing/2014/main" id="{FFCF68B4-9E60-482B-92F2-A1DFC335B67A}"/>
               </a:ext>
             </a:extLst>
           </p:cNvPr>
@@ -32363,7 +32363,7 @@
           <p:cNvPr id="48" name="">
             <a:extLst xmlns:a="http://schemas.openxmlformats.org/drawingml/2006/main">
               <a:ext uri="{FF2B5EF4-FFF2-40B4-BE49-F238E27FC236}">
-                <a16:creationId xmlns:a16="http://schemas.microsoft.com/office/drawing/2014/main" id="{FFDBCA04-2C40-48D0-8B81-4D47EAF073D0}"/>
+                <a16:creationId xmlns:a16="http://schemas.microsoft.com/office/drawing/2014/main" id="{693E13E4-9E40-4258-AAF7-936167EFA420}"/>
               </a:ext>
             </a:extLst>
           </p:cNvPr>
@@ -32396,7 +32396,7 @@
           <p:cNvPr id="49" name="">
             <a:extLst xmlns:a="http://schemas.openxmlformats.org/drawingml/2006/main">
               <a:ext uri="{FF2B5EF4-FFF2-40B4-BE49-F238E27FC236}">
-                <a16:creationId xmlns:a16="http://schemas.microsoft.com/office/drawing/2014/main" id="{F32FE96C-B76F-43C1-ABDC-20539F00998F}"/>
+                <a16:creationId xmlns:a16="http://schemas.microsoft.com/office/drawing/2014/main" id="{9FBFEFB6-D987-452A-B828-DFA53D446565}"/>
               </a:ext>
             </a:extLst>
           </p:cNvPr>
@@ -32448,7 +32448,7 @@
           <p:cNvPr id="50" name="">
             <a:extLst xmlns:a="http://schemas.openxmlformats.org/drawingml/2006/main">
               <a:ext uri="{FF2B5EF4-FFF2-40B4-BE49-F238E27FC236}">
-                <a16:creationId xmlns:a16="http://schemas.microsoft.com/office/drawing/2014/main" id="{B540A07D-2C8F-49DC-9A9A-398B0D1EA3FD}"/>
+                <a16:creationId xmlns:a16="http://schemas.microsoft.com/office/drawing/2014/main" id="{5004D9C1-FAF8-4C9F-8EA6-BAB8D8109B4E}"/>
               </a:ext>
             </a:extLst>
           </p:cNvPr>
@@ -32500,7 +32500,7 @@
           <p:cNvPr id="51" name="">
             <a:extLst xmlns:a="http://schemas.openxmlformats.org/drawingml/2006/main">
               <a:ext uri="{FF2B5EF4-FFF2-40B4-BE49-F238E27FC236}">
-                <a16:creationId xmlns:a16="http://schemas.microsoft.com/office/drawing/2014/main" id="{B5BAD163-CAA9-4E0F-9BBA-6DAD382A509B}"/>
+                <a16:creationId xmlns:a16="http://schemas.microsoft.com/office/drawing/2014/main" id="{BD5C2A4F-87A7-4AE2-A146-066F3C0D7F48}"/>
               </a:ext>
             </a:extLst>
           </p:cNvPr>
@@ -32552,7 +32552,7 @@
           <p:cNvPr id="52" name="">
             <a:extLst xmlns:a="http://schemas.openxmlformats.org/drawingml/2006/main">
               <a:ext uri="{FF2B5EF4-FFF2-40B4-BE49-F238E27FC236}">
-                <a16:creationId xmlns:a16="http://schemas.microsoft.com/office/drawing/2014/main" id="{C14B3B51-14EC-4F0D-806F-CB9A8828DA0B}"/>
+                <a16:creationId xmlns:a16="http://schemas.microsoft.com/office/drawing/2014/main" id="{46AB6105-530D-4CAC-B67C-65B1E04D488C}"/>
               </a:ext>
             </a:extLst>
           </p:cNvPr>
@@ -32595,7 +32595,7 @@
           <p:cNvPr id="53" name="">
             <a:extLst xmlns:a="http://schemas.openxmlformats.org/drawingml/2006/main">
               <a:ext uri="{FF2B5EF4-FFF2-40B4-BE49-F238E27FC236}">
-                <a16:creationId xmlns:a16="http://schemas.microsoft.com/office/drawing/2014/main" id="{9FA5646C-C64B-4DAA-A97A-AF51826DFD40}"/>
+                <a16:creationId xmlns:a16="http://schemas.microsoft.com/office/drawing/2014/main" id="{A81A309E-A400-40F1-96A2-3DB006D5FE30}"/>
               </a:ext>
             </a:extLst>
           </p:cNvPr>
@@ -32626,7 +32626,7 @@
           <p:cNvPr id="54" name="">
             <a:extLst xmlns:a="http://schemas.openxmlformats.org/drawingml/2006/main">
               <a:ext uri="{FF2B5EF4-FFF2-40B4-BE49-F238E27FC236}">
-                <a16:creationId xmlns:a16="http://schemas.microsoft.com/office/drawing/2014/main" id="{64C57337-798D-4176-A43F-81FD4A8B7575}"/>
+                <a16:creationId xmlns:a16="http://schemas.microsoft.com/office/drawing/2014/main" id="{B771DE48-EBE2-4D72-BEFF-BDAE33A91D05}"/>
               </a:ext>
             </a:extLst>
           </p:cNvPr>
@@ -32657,7 +32657,7 @@
           <p:cNvPr id="55" name="">
             <a:extLst xmlns:a="http://schemas.openxmlformats.org/drawingml/2006/main">
               <a:ext uri="{FF2B5EF4-FFF2-40B4-BE49-F238E27FC236}">
-                <a16:creationId xmlns:a16="http://schemas.microsoft.com/office/drawing/2014/main" id="{38B7A1C9-F273-48A2-B019-9E96E18C8D37}"/>
+                <a16:creationId xmlns:a16="http://schemas.microsoft.com/office/drawing/2014/main" id="{52FFF3D5-0AA9-453E-B962-1752A689CD91}"/>
               </a:ext>
             </a:extLst>
           </p:cNvPr>
@@ -32709,7 +32709,7 @@
           <p:cNvPr id="56" name="">
             <a:extLst xmlns:a="http://schemas.openxmlformats.org/drawingml/2006/main">
               <a:ext uri="{FF2B5EF4-FFF2-40B4-BE49-F238E27FC236}">
-                <a16:creationId xmlns:a16="http://schemas.microsoft.com/office/drawing/2014/main" id="{567FB97F-9B5B-4C13-ACEE-76F9CE135090}"/>
+                <a16:creationId xmlns:a16="http://schemas.microsoft.com/office/drawing/2014/main" id="{09DFB7CA-EDE4-4D03-A79D-87B8FF02D5DB}"/>
               </a:ext>
             </a:extLst>
           </p:cNvPr>
@@ -32742,7 +32742,7 @@
           <p:cNvPr id="57" name="">
             <a:extLst xmlns:a="http://schemas.openxmlformats.org/drawingml/2006/main">
               <a:ext uri="{FF2B5EF4-FFF2-40B4-BE49-F238E27FC236}">
-                <a16:creationId xmlns:a16="http://schemas.microsoft.com/office/drawing/2014/main" id="{A09AFF73-3467-4F8E-92D8-4687610D87B1}"/>
+                <a16:creationId xmlns:a16="http://schemas.microsoft.com/office/drawing/2014/main" id="{E2AFF0EF-273D-49D3-8470-F096ABB914F5}"/>
               </a:ext>
             </a:extLst>
           </p:cNvPr>
@@ -32794,7 +32794,7 @@
           <p:cNvPr id="58" name="">
             <a:extLst xmlns:a="http://schemas.openxmlformats.org/drawingml/2006/main">
               <a:ext uri="{FF2B5EF4-FFF2-40B4-BE49-F238E27FC236}">
-                <a16:creationId xmlns:a16="http://schemas.microsoft.com/office/drawing/2014/main" id="{FC94F8A8-DBA9-4652-97CB-5BD0F7A3B80F}"/>
+                <a16:creationId xmlns:a16="http://schemas.microsoft.com/office/drawing/2014/main" id="{47AEBDA8-0C54-4D3A-8EFE-BBA30EAB8423}"/>
               </a:ext>
             </a:extLst>
           </p:cNvPr>
@@ -32846,7 +32846,7 @@
           <p:cNvPr id="59" name="">
             <a:extLst xmlns:a="http://schemas.openxmlformats.org/drawingml/2006/main">
               <a:ext uri="{FF2B5EF4-FFF2-40B4-BE49-F238E27FC236}">
-                <a16:creationId xmlns:a16="http://schemas.microsoft.com/office/drawing/2014/main" id="{94392F9A-098E-4AFE-A790-57027CFD3F0E}"/>
+                <a16:creationId xmlns:a16="http://schemas.microsoft.com/office/drawing/2014/main" id="{A0243C90-7DB7-4575-A826-5392967DDF49}"/>
               </a:ext>
             </a:extLst>
           </p:cNvPr>
@@ -32898,7 +32898,7 @@
           <p:cNvPr id="60" name="">
             <a:extLst xmlns:a="http://schemas.openxmlformats.org/drawingml/2006/main">
               <a:ext uri="{FF2B5EF4-FFF2-40B4-BE49-F238E27FC236}">
-                <a16:creationId xmlns:a16="http://schemas.microsoft.com/office/drawing/2014/main" id="{CE9A11FE-08DD-4C76-900F-D09C91996733}"/>
+                <a16:creationId xmlns:a16="http://schemas.microsoft.com/office/drawing/2014/main" id="{E87E3199-57F5-4022-88E8-6D57E61B34AE}"/>
               </a:ext>
             </a:extLst>
           </p:cNvPr>
@@ -32941,7 +32941,7 @@
           <p:cNvPr id="61" name="">
             <a:extLst xmlns:a="http://schemas.openxmlformats.org/drawingml/2006/main">
               <a:ext uri="{FF2B5EF4-FFF2-40B4-BE49-F238E27FC236}">
-                <a16:creationId xmlns:a16="http://schemas.microsoft.com/office/drawing/2014/main" id="{A6EC7F79-2574-41B6-8B30-739296DEF447}"/>
+                <a16:creationId xmlns:a16="http://schemas.microsoft.com/office/drawing/2014/main" id="{B7305693-E200-4FF1-AEBF-B7FE3211DA91}"/>
               </a:ext>
             </a:extLst>
           </p:cNvPr>
@@ -32972,7 +32972,7 @@
           <p:cNvPr id="62" name="">
             <a:extLst xmlns:a="http://schemas.openxmlformats.org/drawingml/2006/main">
               <a:ext uri="{FF2B5EF4-FFF2-40B4-BE49-F238E27FC236}">
-                <a16:creationId xmlns:a16="http://schemas.microsoft.com/office/drawing/2014/main" id="{506749A6-9DDD-443E-97E6-B3012A182A43}"/>
+                <a16:creationId xmlns:a16="http://schemas.microsoft.com/office/drawing/2014/main" id="{1B44ED20-6C2F-40A8-8735-F09F5A1B3181}"/>
               </a:ext>
             </a:extLst>
           </p:cNvPr>
@@ -33003,7 +33003,7 @@
           <p:cNvPr id="63" name="">
             <a:extLst xmlns:a="http://schemas.openxmlformats.org/drawingml/2006/main">
               <a:ext uri="{FF2B5EF4-FFF2-40B4-BE49-F238E27FC236}">
-                <a16:creationId xmlns:a16="http://schemas.microsoft.com/office/drawing/2014/main" id="{0BAD8B0A-9399-49F3-B674-769988E62BE9}"/>
+                <a16:creationId xmlns:a16="http://schemas.microsoft.com/office/drawing/2014/main" id="{31CB03FA-25E0-4916-BFF0-667AE1EE6A2C}"/>
               </a:ext>
             </a:extLst>
           </p:cNvPr>
@@ -33055,7 +33055,7 @@
           <p:cNvPr id="64" name="">
             <a:extLst xmlns:a="http://schemas.openxmlformats.org/drawingml/2006/main">
               <a:ext uri="{FF2B5EF4-FFF2-40B4-BE49-F238E27FC236}">
-                <a16:creationId xmlns:a16="http://schemas.microsoft.com/office/drawing/2014/main" id="{FD40743B-7A7F-453B-A366-04214E24F83C}"/>
+                <a16:creationId xmlns:a16="http://schemas.microsoft.com/office/drawing/2014/main" id="{9C178C51-3893-4BE3-8D09-E551EE806CC4}"/>
               </a:ext>
             </a:extLst>
           </p:cNvPr>
@@ -33088,7 +33088,7 @@
           <p:cNvPr id="65" name="">
             <a:extLst xmlns:a="http://schemas.openxmlformats.org/drawingml/2006/main">
               <a:ext uri="{FF2B5EF4-FFF2-40B4-BE49-F238E27FC236}">
-                <a16:creationId xmlns:a16="http://schemas.microsoft.com/office/drawing/2014/main" id="{9FC7E2F9-B9D1-4DC2-B97F-8FC286873BE5}"/>
+                <a16:creationId xmlns:a16="http://schemas.microsoft.com/office/drawing/2014/main" id="{04B0CB7D-BB74-4E23-B71C-C2CB71A1A8E9}"/>
               </a:ext>
             </a:extLst>
           </p:cNvPr>
@@ -33140,7 +33140,7 @@
           <p:cNvPr id="66" name="">
             <a:extLst xmlns:a="http://schemas.openxmlformats.org/drawingml/2006/main">
               <a:ext uri="{FF2B5EF4-FFF2-40B4-BE49-F238E27FC236}">
-                <a16:creationId xmlns:a16="http://schemas.microsoft.com/office/drawing/2014/main" id="{A559CA65-D50E-42DB-99FC-005414AC4DAD}"/>
+                <a16:creationId xmlns:a16="http://schemas.microsoft.com/office/drawing/2014/main" id="{7F0D79E3-7459-4D1B-918D-52D8CDF64C82}"/>
               </a:ext>
             </a:extLst>
           </p:cNvPr>
@@ -33192,7 +33192,7 @@
           <p:cNvPr id="67" name="">
             <a:extLst xmlns:a="http://schemas.openxmlformats.org/drawingml/2006/main">
               <a:ext uri="{FF2B5EF4-FFF2-40B4-BE49-F238E27FC236}">
-                <a16:creationId xmlns:a16="http://schemas.microsoft.com/office/drawing/2014/main" id="{A4F16336-9327-4A6C-B96E-C3EF6B2D84EB}"/>
+                <a16:creationId xmlns:a16="http://schemas.microsoft.com/office/drawing/2014/main" id="{51E7D6E1-724C-4238-A49C-75FD64855AF2}"/>
               </a:ext>
             </a:extLst>
           </p:cNvPr>
@@ -33244,7 +33244,7 @@
           <p:cNvPr id="68" name="">
             <a:extLst xmlns:a="http://schemas.openxmlformats.org/drawingml/2006/main">
               <a:ext uri="{FF2B5EF4-FFF2-40B4-BE49-F238E27FC236}">
-                <a16:creationId xmlns:a16="http://schemas.microsoft.com/office/drawing/2014/main" id="{F69C6A09-9F8D-432F-AA3F-9B92D55697E3}"/>
+                <a16:creationId xmlns:a16="http://schemas.microsoft.com/office/drawing/2014/main" id="{2106F3FF-87FD-4470-B9D9-DD67555F5CD5}"/>
               </a:ext>
             </a:extLst>
           </p:cNvPr>
@@ -33287,7 +33287,7 @@
           <p:cNvPr id="69" name="">
             <a:extLst xmlns:a="http://schemas.openxmlformats.org/drawingml/2006/main">
               <a:ext uri="{FF2B5EF4-FFF2-40B4-BE49-F238E27FC236}">
-                <a16:creationId xmlns:a16="http://schemas.microsoft.com/office/drawing/2014/main" id="{11102408-708E-4C9B-A62F-6C7655E466E4}"/>
+                <a16:creationId xmlns:a16="http://schemas.microsoft.com/office/drawing/2014/main" id="{FA3E269B-56F2-49EB-91F1-F440115BF4B8}"/>
               </a:ext>
             </a:extLst>
           </p:cNvPr>
@@ -33318,7 +33318,7 @@
           <p:cNvPr id="70" name="">
             <a:extLst xmlns:a="http://schemas.openxmlformats.org/drawingml/2006/main">
               <a:ext uri="{FF2B5EF4-FFF2-40B4-BE49-F238E27FC236}">
-                <a16:creationId xmlns:a16="http://schemas.microsoft.com/office/drawing/2014/main" id="{ED43CE83-83BA-4E17-BC04-25CFBDF98B7D}"/>
+                <a16:creationId xmlns:a16="http://schemas.microsoft.com/office/drawing/2014/main" id="{64C66B48-9C66-450F-9158-47FDAE86FEBD}"/>
               </a:ext>
             </a:extLst>
           </p:cNvPr>
@@ -33349,7 +33349,7 @@
           <p:cNvPr id="71" name="">
             <a:extLst xmlns:a="http://schemas.openxmlformats.org/drawingml/2006/main">
               <a:ext uri="{FF2B5EF4-FFF2-40B4-BE49-F238E27FC236}">
-                <a16:creationId xmlns:a16="http://schemas.microsoft.com/office/drawing/2014/main" id="{11087BE6-F34D-4EE4-9C29-573D4C8F322A}"/>
+                <a16:creationId xmlns:a16="http://schemas.microsoft.com/office/drawing/2014/main" id="{55C2E8F4-0C08-49BF-81E8-69E16103C084}"/>
               </a:ext>
             </a:extLst>
           </p:cNvPr>
@@ -33401,7 +33401,7 @@
           <p:cNvPr id="72" name="">
             <a:extLst xmlns:a="http://schemas.openxmlformats.org/drawingml/2006/main">
               <a:ext uri="{FF2B5EF4-FFF2-40B4-BE49-F238E27FC236}">
-                <a16:creationId xmlns:a16="http://schemas.microsoft.com/office/drawing/2014/main" id="{22BB6094-2181-4044-9E52-ACC28A2281C4}"/>
+                <a16:creationId xmlns:a16="http://schemas.microsoft.com/office/drawing/2014/main" id="{D245B097-1025-4443-82E9-D6DADA8E3DB1}"/>
               </a:ext>
             </a:extLst>
           </p:cNvPr>
@@ -33434,7 +33434,7 @@
           <p:cNvPr id="73" name="">
             <a:extLst xmlns:a="http://schemas.openxmlformats.org/drawingml/2006/main">
               <a:ext uri="{FF2B5EF4-FFF2-40B4-BE49-F238E27FC236}">
-                <a16:creationId xmlns:a16="http://schemas.microsoft.com/office/drawing/2014/main" id="{B29B3FC7-891E-4E62-A674-4C5BEED994FC}"/>
+                <a16:creationId xmlns:a16="http://schemas.microsoft.com/office/drawing/2014/main" id="{DBE2C9B0-124A-4FA1-BD1E-C4DE9B733571}"/>
               </a:ext>
             </a:extLst>
           </p:cNvPr>
@@ -33486,7 +33486,7 @@
           <p:cNvPr id="74" name="">
             <a:extLst xmlns:a="http://schemas.openxmlformats.org/drawingml/2006/main">
               <a:ext uri="{FF2B5EF4-FFF2-40B4-BE49-F238E27FC236}">
-                <a16:creationId xmlns:a16="http://schemas.microsoft.com/office/drawing/2014/main" id="{75788E71-0248-4D4F-9301-AFCB3C978BDC}"/>
+                <a16:creationId xmlns:a16="http://schemas.microsoft.com/office/drawing/2014/main" id="{BD42BF1C-A43F-42B2-AF08-3E9DF03207CD}"/>
               </a:ext>
             </a:extLst>
           </p:cNvPr>
@@ -33538,7 +33538,7 @@
           <p:cNvPr id="75" name="">
             <a:extLst xmlns:a="http://schemas.openxmlformats.org/drawingml/2006/main">
               <a:ext uri="{FF2B5EF4-FFF2-40B4-BE49-F238E27FC236}">
-                <a16:creationId xmlns:a16="http://schemas.microsoft.com/office/drawing/2014/main" id="{6EBBDC0F-6D75-4327-9B74-C9A0220B2358}"/>
+                <a16:creationId xmlns:a16="http://schemas.microsoft.com/office/drawing/2014/main" id="{7A09E0FA-132F-40F7-A73A-6CF1AD23D556}"/>
               </a:ext>
             </a:extLst>
           </p:cNvPr>
@@ -33588,7 +33588,7 @@
     </p:spTree>
     <p:extLst>
       <p:ext uri="{BB962C8B-B14F-4D97-AF65-F5344CB8AC3E}">
-        <p14:creationId xmlns:p14="http://schemas.microsoft.com/office/powerpoint/2010/main" val="87670668"/>
+        <p14:creationId xmlns:p14="http://schemas.microsoft.com/office/powerpoint/2010/main" val="1053744368"/>
       </p:ext>
     </p:extLst>
   </p:cSld>
@@ -33619,7 +33619,7 @@
           <p:cNvPr id="30" name="">
             <a:extLst xmlns:a="http://schemas.openxmlformats.org/drawingml/2006/main">
               <a:ext uri="{FF2B5EF4-FFF2-40B4-BE49-F238E27FC236}">
-                <a16:creationId xmlns:a16="http://schemas.microsoft.com/office/drawing/2014/main" id="{E04A03B5-FF8E-4C01-AB51-D6E5648D7FA6}"/>
+                <a16:creationId xmlns:a16="http://schemas.microsoft.com/office/drawing/2014/main" id="{EF5DDCCA-B48B-4F6C-A1AA-9269DE7BB611}"/>
               </a:ext>
             </a:extLst>
           </p:cNvPr>
@@ -33652,7 +33652,7 @@
           <p:cNvPr id="2" name="">
             <a:extLst xmlns:a="http://schemas.openxmlformats.org/drawingml/2006/main">
               <a:ext uri="{FF2B5EF4-FFF2-40B4-BE49-F238E27FC236}">
-                <a16:creationId xmlns:a16="http://schemas.microsoft.com/office/drawing/2014/main" id="{ED4173A0-58F9-4879-9629-B8C7388C6017}"/>
+                <a16:creationId xmlns:a16="http://schemas.microsoft.com/office/drawing/2014/main" id="{71C23690-1EA1-4CE9-82BB-E3FC4113689B}"/>
               </a:ext>
             </a:extLst>
           </p:cNvPr>
@@ -33683,7 +33683,7 @@
           <p:cNvPr id="3" name="">
             <a:extLst xmlns:a="http://schemas.openxmlformats.org/drawingml/2006/main">
               <a:ext uri="{FF2B5EF4-FFF2-40B4-BE49-F238E27FC236}">
-                <a16:creationId xmlns:a16="http://schemas.microsoft.com/office/drawing/2014/main" id="{69B4E7C9-803E-4DB0-806C-246A8BA2B4CC}"/>
+                <a16:creationId xmlns:a16="http://schemas.microsoft.com/office/drawing/2014/main" id="{FAB7E3EF-5C04-4F8B-8059-5A4EBDC2641F}"/>
               </a:ext>
             </a:extLst>
           </p:cNvPr>
@@ -33735,7 +33735,7 @@
           <p:cNvPr id="4" name="">
             <a:extLst xmlns:a="http://schemas.openxmlformats.org/drawingml/2006/main">
               <a:ext uri="{FF2B5EF4-FFF2-40B4-BE49-F238E27FC236}">
-                <a16:creationId xmlns:a16="http://schemas.microsoft.com/office/drawing/2014/main" id="{4DFDA2D5-3C43-459E-8FAD-B2DDB4981BD0}"/>
+                <a16:creationId xmlns:a16="http://schemas.microsoft.com/office/drawing/2014/main" id="{A626036C-084E-4B49-8F57-A75B7B1F53EC}"/>
               </a:ext>
             </a:extLst>
           </p:cNvPr>
@@ -33787,7 +33787,7 @@
           <p:cNvPr id="5" name="">
             <a:extLst xmlns:a="http://schemas.openxmlformats.org/drawingml/2006/main">
               <a:ext uri="{FF2B5EF4-FFF2-40B4-BE49-F238E27FC236}">
-                <a16:creationId xmlns:a16="http://schemas.microsoft.com/office/drawing/2014/main" id="{E50C9302-DFCF-44B7-A957-989BDF7DC375}"/>
+                <a16:creationId xmlns:a16="http://schemas.microsoft.com/office/drawing/2014/main" id="{475A1404-0BD8-43FE-86FE-2B4934BDB82E}"/>
               </a:ext>
             </a:extLst>
           </p:cNvPr>
@@ -33822,7 +33822,7 @@
           <p:nvPr/>
         </p:nvPicPr>
         <p:blipFill>
-          <a:blip xmlns:r="http://schemas.openxmlformats.org/officeDocument/2006/relationships" xmlns:a="http://schemas.openxmlformats.org/drawingml/2006/main" r:embed="R998dc13057274437"/>
+          <a:blip xmlns:r="http://schemas.openxmlformats.org/officeDocument/2006/relationships" xmlns:a="http://schemas.openxmlformats.org/drawingml/2006/main" r:embed="R6e23606e026d438d"/>
           <a:stretch xmlns:a="http://schemas.openxmlformats.org/drawingml/2006/main"/>
         </p:blipFill>
         <p:spPr>
@@ -33840,7 +33840,7 @@
           <p:cNvPr id="7" name="">
             <a:extLst xmlns:a="http://schemas.openxmlformats.org/drawingml/2006/main">
               <a:ext uri="{FF2B5EF4-FFF2-40B4-BE49-F238E27FC236}">
-                <a16:creationId xmlns:a16="http://schemas.microsoft.com/office/drawing/2014/main" id="{FDF167C2-E322-48E4-83A4-2BDA0F1D75FA}"/>
+                <a16:creationId xmlns:a16="http://schemas.microsoft.com/office/drawing/2014/main" id="{3103E471-18B8-4E7F-87BE-F98EDF625297}"/>
               </a:ext>
             </a:extLst>
           </p:cNvPr>
@@ -33892,7 +33892,7 @@
           <p:cNvPr id="8" name="">
             <a:extLst xmlns:a="http://schemas.openxmlformats.org/drawingml/2006/main">
               <a:ext uri="{FF2B5EF4-FFF2-40B4-BE49-F238E27FC236}">
-                <a16:creationId xmlns:a16="http://schemas.microsoft.com/office/drawing/2014/main" id="{101010A4-9461-42AB-856E-63DEA3346243}"/>
+                <a16:creationId xmlns:a16="http://schemas.microsoft.com/office/drawing/2014/main" id="{98919D7B-696F-42BD-8063-0259D5446E6A}"/>
               </a:ext>
             </a:extLst>
           </p:cNvPr>
@@ -33944,7 +33944,7 @@
           <p:cNvPr id="9" name="">
             <a:extLst xmlns:a="http://schemas.openxmlformats.org/drawingml/2006/main">
               <a:ext uri="{FF2B5EF4-FFF2-40B4-BE49-F238E27FC236}">
-                <a16:creationId xmlns:a16="http://schemas.microsoft.com/office/drawing/2014/main" id="{33337904-F446-449D-B213-CCFDCABEA9BE}"/>
+                <a16:creationId xmlns:a16="http://schemas.microsoft.com/office/drawing/2014/main" id="{45BB515A-0252-4E1F-ABE7-2C36CCE1D3F2}"/>
               </a:ext>
             </a:extLst>
           </p:cNvPr>
@@ -33996,7 +33996,7 @@
           <p:cNvPr id="10" name="">
             <a:extLst xmlns:a="http://schemas.openxmlformats.org/drawingml/2006/main">
               <a:ext uri="{FF2B5EF4-FFF2-40B4-BE49-F238E27FC236}">
-                <a16:creationId xmlns:a16="http://schemas.microsoft.com/office/drawing/2014/main" id="{4EA5223E-200A-4EBB-985B-C5615E3ABAF1}"/>
+                <a16:creationId xmlns:a16="http://schemas.microsoft.com/office/drawing/2014/main" id="{843F5548-FCA9-455B-8373-CF59C7CD919E}"/>
               </a:ext>
             </a:extLst>
           </p:cNvPr>
@@ -34048,7 +34048,7 @@
           <p:cNvPr id="11" name="">
             <a:extLst xmlns:a="http://schemas.openxmlformats.org/drawingml/2006/main">
               <a:ext uri="{FF2B5EF4-FFF2-40B4-BE49-F238E27FC236}">
-                <a16:creationId xmlns:a16="http://schemas.microsoft.com/office/drawing/2014/main" id="{2A59B4D6-D836-4308-BF74-AFD18FB14FD5}"/>
+                <a16:creationId xmlns:a16="http://schemas.microsoft.com/office/drawing/2014/main" id="{906BE91A-4864-4279-8D8C-F16FE70B42F9}"/>
               </a:ext>
             </a:extLst>
           </p:cNvPr>
@@ -34095,10 +34095,10 @@
           <p:nvPr/>
         </p:nvPicPr>
         <p:blipFill>
-          <a:blip xmlns:r="http://schemas.openxmlformats.org/officeDocument/2006/relationships" xmlns:a="http://schemas.openxmlformats.org/drawingml/2006/main" r:embed="R29d4d5d5bb664b5f">
+          <a:blip xmlns:r="http://schemas.openxmlformats.org/officeDocument/2006/relationships" xmlns:a="http://schemas.openxmlformats.org/drawingml/2006/main" r:embed="R1cd628cfb52a46ff">
             <a:extLst>
               <a:ext uri="{96DAC541-7B7A-43D3-8B79-37D633B846F1}">
-                <asvg:svgBlip xmlns:asvg="http://schemas.microsoft.com/office/drawing/2016/SVG/main" r:embed="Rb6a245e70d8c4b9f"/>
+                <asvg:svgBlip xmlns:asvg="http://schemas.microsoft.com/office/drawing/2016/SVG/main" r:embed="R64b4053002ad4cad"/>
               </a:ext>
             </a:extLst>
           </a:blip>
@@ -34119,7 +34119,7 @@
           <p:cNvPr id="13" name="">
             <a:extLst xmlns:a="http://schemas.openxmlformats.org/drawingml/2006/main">
               <a:ext uri="{FF2B5EF4-FFF2-40B4-BE49-F238E27FC236}">
-                <a16:creationId xmlns:a16="http://schemas.microsoft.com/office/drawing/2014/main" id="{E625A768-D2B7-40F5-87AF-DA25B0BA0AE5}"/>
+                <a16:creationId xmlns:a16="http://schemas.microsoft.com/office/drawing/2014/main" id="{6A73285F-8B94-4205-841B-07757E1B9651}"/>
               </a:ext>
             </a:extLst>
           </p:cNvPr>
@@ -34152,7 +34152,7 @@
           <p:cNvPr id="14" name="">
             <a:extLst xmlns:a="http://schemas.openxmlformats.org/drawingml/2006/main">
               <a:ext uri="{FF2B5EF4-FFF2-40B4-BE49-F238E27FC236}">
-                <a16:creationId xmlns:a16="http://schemas.microsoft.com/office/drawing/2014/main" id="{3E564008-982C-42E7-A6DA-A9717D45AF68}"/>
+                <a16:creationId xmlns:a16="http://schemas.microsoft.com/office/drawing/2014/main" id="{D8935FAC-A463-4903-A06F-371D5C5AD7BF}"/>
               </a:ext>
             </a:extLst>
           </p:cNvPr>
@@ -34204,7 +34204,7 @@
           <p:cNvPr id="15" name="">
             <a:extLst xmlns:a="http://schemas.openxmlformats.org/drawingml/2006/main">
               <a:ext uri="{FF2B5EF4-FFF2-40B4-BE49-F238E27FC236}">
-                <a16:creationId xmlns:a16="http://schemas.microsoft.com/office/drawing/2014/main" id="{ADA849BF-C252-4C6C-9EC9-FBE962F49CFA}"/>
+                <a16:creationId xmlns:a16="http://schemas.microsoft.com/office/drawing/2014/main" id="{58E5BBFA-BB0A-4509-9AC2-BB442BA1E8C5}"/>
               </a:ext>
             </a:extLst>
           </p:cNvPr>
@@ -34237,7 +34237,7 @@
           <p:cNvPr id="16" name="">
             <a:extLst xmlns:a="http://schemas.openxmlformats.org/drawingml/2006/main">
               <a:ext uri="{FF2B5EF4-FFF2-40B4-BE49-F238E27FC236}">
-                <a16:creationId xmlns:a16="http://schemas.microsoft.com/office/drawing/2014/main" id="{C2A0C525-38BF-401E-B448-CD92DED58C8B}"/>
+                <a16:creationId xmlns:a16="http://schemas.microsoft.com/office/drawing/2014/main" id="{0610954B-B4D3-4F90-8DC0-C6CE798D8C14}"/>
               </a:ext>
             </a:extLst>
           </p:cNvPr>
@@ -34289,7 +34289,7 @@
           <p:cNvPr id="17" name="">
             <a:extLst xmlns:a="http://schemas.openxmlformats.org/drawingml/2006/main">
               <a:ext uri="{FF2B5EF4-FFF2-40B4-BE49-F238E27FC236}">
-                <a16:creationId xmlns:a16="http://schemas.microsoft.com/office/drawing/2014/main" id="{4DFE4D61-CADD-41A2-9904-2B7321A02EF8}"/>
+                <a16:creationId xmlns:a16="http://schemas.microsoft.com/office/drawing/2014/main" id="{38816E40-1ED5-4FEE-91B2-DED8F4E2CB82}"/>
               </a:ext>
             </a:extLst>
           </p:cNvPr>
@@ -34322,7 +34322,7 @@
           <p:cNvPr id="18" name="">
             <a:extLst xmlns:a="http://schemas.openxmlformats.org/drawingml/2006/main">
               <a:ext uri="{FF2B5EF4-FFF2-40B4-BE49-F238E27FC236}">
-                <a16:creationId xmlns:a16="http://schemas.microsoft.com/office/drawing/2014/main" id="{F6C0811B-2F33-4DD8-ACE2-7F437EDE2CF1}"/>
+                <a16:creationId xmlns:a16="http://schemas.microsoft.com/office/drawing/2014/main" id="{C4D3A218-91B3-4C87-8FB0-432ACD4590B8}"/>
               </a:ext>
             </a:extLst>
           </p:cNvPr>
@@ -34374,7 +34374,7 @@
           <p:cNvPr id="19" name="">
             <a:extLst xmlns:a="http://schemas.openxmlformats.org/drawingml/2006/main">
               <a:ext uri="{FF2B5EF4-FFF2-40B4-BE49-F238E27FC236}">
-                <a16:creationId xmlns:a16="http://schemas.microsoft.com/office/drawing/2014/main" id="{99127B56-13F9-4231-BD63-250A04340787}"/>
+                <a16:creationId xmlns:a16="http://schemas.microsoft.com/office/drawing/2014/main" id="{0D0D9B9D-3DA1-450B-BD84-434578046EE1}"/>
               </a:ext>
             </a:extLst>
           </p:cNvPr>
@@ -34407,7 +34407,7 @@
           <p:cNvPr id="20" name="">
             <a:extLst xmlns:a="http://schemas.openxmlformats.org/drawingml/2006/main">
               <a:ext uri="{FF2B5EF4-FFF2-40B4-BE49-F238E27FC236}">
-                <a16:creationId xmlns:a16="http://schemas.microsoft.com/office/drawing/2014/main" id="{C0F2DCEB-9D54-4DB6-B62E-CA8E5D0E1E6E}"/>
+                <a16:creationId xmlns:a16="http://schemas.microsoft.com/office/drawing/2014/main" id="{F516C009-A48A-4EB4-BE20-08B236CEA3BC}"/>
               </a:ext>
             </a:extLst>
           </p:cNvPr>
@@ -34459,7 +34459,7 @@
           <p:cNvPr id="21" name="">
             <a:extLst xmlns:a="http://schemas.openxmlformats.org/drawingml/2006/main">
               <a:ext uri="{FF2B5EF4-FFF2-40B4-BE49-F238E27FC236}">
-                <a16:creationId xmlns:a16="http://schemas.microsoft.com/office/drawing/2014/main" id="{14E2A45C-FA05-460A-B13A-46B295CE7C54}"/>
+                <a16:creationId xmlns:a16="http://schemas.microsoft.com/office/drawing/2014/main" id="{D1723975-C792-4802-98DF-816674BE4E8A}"/>
               </a:ext>
             </a:extLst>
           </p:cNvPr>
@@ -34490,7 +34490,7 @@
           <p:cNvPr id="22" name="">
             <a:extLst xmlns:a="http://schemas.openxmlformats.org/drawingml/2006/main">
               <a:ext uri="{FF2B5EF4-FFF2-40B4-BE49-F238E27FC236}">
-                <a16:creationId xmlns:a16="http://schemas.microsoft.com/office/drawing/2014/main" id="{2EEF2911-AEA4-492A-B4E4-99BEF3CFBEFD}"/>
+                <a16:creationId xmlns:a16="http://schemas.microsoft.com/office/drawing/2014/main" id="{8F684F68-4DF2-4600-91CE-9DFD96601459}"/>
               </a:ext>
             </a:extLst>
           </p:cNvPr>
@@ -34542,7 +34542,7 @@
           <p:cNvPr id="23" name="">
             <a:extLst xmlns:a="http://schemas.openxmlformats.org/drawingml/2006/main">
               <a:ext uri="{FF2B5EF4-FFF2-40B4-BE49-F238E27FC236}">
-                <a16:creationId xmlns:a16="http://schemas.microsoft.com/office/drawing/2014/main" id="{A4FE73B5-507A-4AEC-8DD1-AD9E47C8A2C1}"/>
+                <a16:creationId xmlns:a16="http://schemas.microsoft.com/office/drawing/2014/main" id="{E564158E-5DA4-498E-AB5C-2B146BCC754D}"/>
               </a:ext>
             </a:extLst>
           </p:cNvPr>
@@ -34594,7 +34594,7 @@
           <p:cNvPr id="24" name="">
             <a:extLst xmlns:a="http://schemas.openxmlformats.org/drawingml/2006/main">
               <a:ext uri="{FF2B5EF4-FFF2-40B4-BE49-F238E27FC236}">
-                <a16:creationId xmlns:a16="http://schemas.microsoft.com/office/drawing/2014/main" id="{D866A33F-BC6F-4FAF-B325-6D4A549CE376}"/>
+                <a16:creationId xmlns:a16="http://schemas.microsoft.com/office/drawing/2014/main" id="{B4FD5F06-606F-4FEB-BBDD-ACFD32DCBBBD}"/>
               </a:ext>
             </a:extLst>
           </p:cNvPr>
@@ -34646,7 +34646,7 @@
           <p:cNvPr id="25" name="">
             <a:extLst xmlns:a="http://schemas.openxmlformats.org/drawingml/2006/main">
               <a:ext uri="{FF2B5EF4-FFF2-40B4-BE49-F238E27FC236}">
-                <a16:creationId xmlns:a16="http://schemas.microsoft.com/office/drawing/2014/main" id="{B92A6BB6-11D4-4360-BF76-23B32DDA9E98}"/>
+                <a16:creationId xmlns:a16="http://schemas.microsoft.com/office/drawing/2014/main" id="{4CDFB054-58FE-41BD-A91F-110C18CAE286}"/>
               </a:ext>
             </a:extLst>
           </p:cNvPr>
@@ -34698,7 +34698,7 @@
           <p:cNvPr id="26" name="">
             <a:extLst xmlns:a="http://schemas.openxmlformats.org/drawingml/2006/main">
               <a:ext uri="{FF2B5EF4-FFF2-40B4-BE49-F238E27FC236}">
-                <a16:creationId xmlns:a16="http://schemas.microsoft.com/office/drawing/2014/main" id="{F1A91A03-D9C5-46F3-BD46-B22AFAF9B8EC}"/>
+                <a16:creationId xmlns:a16="http://schemas.microsoft.com/office/drawing/2014/main" id="{BEB8597A-F2AF-442F-A835-92CAC3C62279}"/>
               </a:ext>
             </a:extLst>
           </p:cNvPr>
@@ -34750,7 +34750,7 @@
           <p:cNvPr id="27" name="">
             <a:extLst xmlns:a="http://schemas.openxmlformats.org/drawingml/2006/main">
               <a:ext uri="{FF2B5EF4-FFF2-40B4-BE49-F238E27FC236}">
-                <a16:creationId xmlns:a16="http://schemas.microsoft.com/office/drawing/2014/main" id="{3636EAB1-2286-438E-AEA2-B1DB73CB4D93}"/>
+                <a16:creationId xmlns:a16="http://schemas.microsoft.com/office/drawing/2014/main" id="{B950E8E3-A473-4835-8BD7-9362DEBE77EE}"/>
               </a:ext>
             </a:extLst>
           </p:cNvPr>
@@ -34802,7 +34802,7 @@
           <p:cNvPr id="28" name="">
             <a:extLst xmlns:a="http://schemas.openxmlformats.org/drawingml/2006/main">
               <a:ext uri="{FF2B5EF4-FFF2-40B4-BE49-F238E27FC236}">
-                <a16:creationId xmlns:a16="http://schemas.microsoft.com/office/drawing/2014/main" id="{DAC5624D-264B-48E2-B567-D060B9910E40}"/>
+                <a16:creationId xmlns:a16="http://schemas.microsoft.com/office/drawing/2014/main" id="{8B450747-5CEA-4D06-8B1B-5BBF2D7CB3D4}"/>
               </a:ext>
             </a:extLst>
           </p:cNvPr>
@@ -34854,7 +34854,7 @@
           <p:cNvPr id="29" name="">
             <a:extLst xmlns:a="http://schemas.openxmlformats.org/drawingml/2006/main">
               <a:ext uri="{FF2B5EF4-FFF2-40B4-BE49-F238E27FC236}">
-                <a16:creationId xmlns:a16="http://schemas.microsoft.com/office/drawing/2014/main" id="{28DDC191-3019-424B-BDF6-693539ACE82F}"/>
+                <a16:creationId xmlns:a16="http://schemas.microsoft.com/office/drawing/2014/main" id="{C91E1021-3434-488D-8B89-26B9D5766272}"/>
               </a:ext>
             </a:extLst>
           </p:cNvPr>
@@ -34904,7 +34904,7 @@
     </p:spTree>
     <p:extLst>
       <p:ext uri="{BB962C8B-B14F-4D97-AF65-F5344CB8AC3E}">
-        <p14:creationId xmlns:p14="http://schemas.microsoft.com/office/powerpoint/2010/main" val="316241673"/>
+        <p14:creationId xmlns:p14="http://schemas.microsoft.com/office/powerpoint/2010/main" val="622443789"/>
       </p:ext>
     </p:extLst>
   </p:cSld>
@@ -34935,7 +34935,7 @@
           <p:cNvPr id="33" name="">
             <a:extLst xmlns:a="http://schemas.openxmlformats.org/drawingml/2006/main">
               <a:ext uri="{FF2B5EF4-FFF2-40B4-BE49-F238E27FC236}">
-                <a16:creationId xmlns:a16="http://schemas.microsoft.com/office/drawing/2014/main" id="{04B86008-BDBD-4320-ADFA-CA65211FB47D}"/>
+                <a16:creationId xmlns:a16="http://schemas.microsoft.com/office/drawing/2014/main" id="{305DE97E-8F0A-4010-B2AC-6154CE888C56}"/>
               </a:ext>
             </a:extLst>
           </p:cNvPr>
@@ -34968,7 +34968,7 @@
           <p:cNvPr id="2" name="">
             <a:extLst xmlns:a="http://schemas.openxmlformats.org/drawingml/2006/main">
               <a:ext uri="{FF2B5EF4-FFF2-40B4-BE49-F238E27FC236}">
-                <a16:creationId xmlns:a16="http://schemas.microsoft.com/office/drawing/2014/main" id="{A51D4386-CDBC-4539-990E-321C7A5FD856}"/>
+                <a16:creationId xmlns:a16="http://schemas.microsoft.com/office/drawing/2014/main" id="{E79B67EA-4157-41C1-8B0D-8DB29B60F5D2}"/>
               </a:ext>
             </a:extLst>
           </p:cNvPr>
@@ -34999,7 +34999,7 @@
           <p:cNvPr id="3" name="">
             <a:extLst xmlns:a="http://schemas.openxmlformats.org/drawingml/2006/main">
               <a:ext uri="{FF2B5EF4-FFF2-40B4-BE49-F238E27FC236}">
-                <a16:creationId xmlns:a16="http://schemas.microsoft.com/office/drawing/2014/main" id="{5389DC90-60C1-498A-8CCD-1F989204E657}"/>
+                <a16:creationId xmlns:a16="http://schemas.microsoft.com/office/drawing/2014/main" id="{C56D1636-856F-451B-9896-7046D57384B3}"/>
               </a:ext>
             </a:extLst>
           </p:cNvPr>
@@ -35051,7 +35051,7 @@
           <p:cNvPr id="4" name="">
             <a:extLst xmlns:a="http://schemas.openxmlformats.org/drawingml/2006/main">
               <a:ext uri="{FF2B5EF4-FFF2-40B4-BE49-F238E27FC236}">
-                <a16:creationId xmlns:a16="http://schemas.microsoft.com/office/drawing/2014/main" id="{A69B8F33-A63B-42C5-9DC2-4275E925F8A0}"/>
+                <a16:creationId xmlns:a16="http://schemas.microsoft.com/office/drawing/2014/main" id="{4314FA87-1903-4027-8D8E-1493042E367D}"/>
               </a:ext>
             </a:extLst>
           </p:cNvPr>
@@ -35103,7 +35103,7 @@
           <p:cNvPr id="5" name="">
             <a:extLst xmlns:a="http://schemas.openxmlformats.org/drawingml/2006/main">
               <a:ext uri="{FF2B5EF4-FFF2-40B4-BE49-F238E27FC236}">
-                <a16:creationId xmlns:a16="http://schemas.microsoft.com/office/drawing/2014/main" id="{CA2E608B-96A7-4D3D-912D-13D62B7E6375}"/>
+                <a16:creationId xmlns:a16="http://schemas.microsoft.com/office/drawing/2014/main" id="{729FE053-D7B1-4962-9DD2-B87CA001E5EE}"/>
               </a:ext>
             </a:extLst>
           </p:cNvPr>
@@ -35138,7 +35138,7 @@
           <p:nvPr/>
         </p:nvPicPr>
         <p:blipFill>
-          <a:blip xmlns:r="http://schemas.openxmlformats.org/officeDocument/2006/relationships" xmlns:a="http://schemas.openxmlformats.org/drawingml/2006/main" r:embed="R606117bf682747c8"/>
+          <a:blip xmlns:r="http://schemas.openxmlformats.org/officeDocument/2006/relationships" xmlns:a="http://schemas.openxmlformats.org/drawingml/2006/main" r:embed="R53a978594b6048b4"/>
           <a:stretch xmlns:a="http://schemas.openxmlformats.org/drawingml/2006/main"/>
         </p:blipFill>
         <p:spPr>
@@ -35156,7 +35156,7 @@
           <p:cNvPr id="7" name="">
             <a:extLst xmlns:a="http://schemas.openxmlformats.org/drawingml/2006/main">
               <a:ext uri="{FF2B5EF4-FFF2-40B4-BE49-F238E27FC236}">
-                <a16:creationId xmlns:a16="http://schemas.microsoft.com/office/drawing/2014/main" id="{CAB299B3-98EB-49D0-9F6D-403EA0EE6690}"/>
+                <a16:creationId xmlns:a16="http://schemas.microsoft.com/office/drawing/2014/main" id="{C46E6453-FE0D-4468-85C9-A1B5A3FD2A3F}"/>
               </a:ext>
             </a:extLst>
           </p:cNvPr>
@@ -35208,7 +35208,7 @@
           <p:cNvPr id="8" name="">
             <a:extLst xmlns:a="http://schemas.openxmlformats.org/drawingml/2006/main">
               <a:ext uri="{FF2B5EF4-FFF2-40B4-BE49-F238E27FC236}">
-                <a16:creationId xmlns:a16="http://schemas.microsoft.com/office/drawing/2014/main" id="{05A9A54A-FA19-4B0C-B1C2-F2ADE9379159}"/>
+                <a16:creationId xmlns:a16="http://schemas.microsoft.com/office/drawing/2014/main" id="{5E438F85-19B4-44A8-A0F9-50B8A9180544}"/>
               </a:ext>
             </a:extLst>
           </p:cNvPr>
@@ -35260,7 +35260,7 @@
           <p:cNvPr id="9" name="">
             <a:extLst xmlns:a="http://schemas.openxmlformats.org/drawingml/2006/main">
               <a:ext uri="{FF2B5EF4-FFF2-40B4-BE49-F238E27FC236}">
-                <a16:creationId xmlns:a16="http://schemas.microsoft.com/office/drawing/2014/main" id="{47F02771-7892-4700-A8E4-413BDE1CB05A}"/>
+                <a16:creationId xmlns:a16="http://schemas.microsoft.com/office/drawing/2014/main" id="{CBEF9F6E-17E4-4792-8505-D3E3EED3BD24}"/>
               </a:ext>
             </a:extLst>
           </p:cNvPr>
@@ -35312,7 +35312,7 @@
           <p:cNvPr id="10" name="">
             <a:extLst xmlns:a="http://schemas.openxmlformats.org/drawingml/2006/main">
               <a:ext uri="{FF2B5EF4-FFF2-40B4-BE49-F238E27FC236}">
-                <a16:creationId xmlns:a16="http://schemas.microsoft.com/office/drawing/2014/main" id="{5AB8E10A-C09F-4AD4-815F-1E1635B09899}"/>
+                <a16:creationId xmlns:a16="http://schemas.microsoft.com/office/drawing/2014/main" id="{7AC59B39-8AD7-485F-9B5B-4107474E0D6D}"/>
               </a:ext>
             </a:extLst>
           </p:cNvPr>
@@ -35364,7 +35364,7 @@
           <p:cNvPr id="11" name="">
             <a:extLst xmlns:a="http://schemas.openxmlformats.org/drawingml/2006/main">
               <a:ext uri="{FF2B5EF4-FFF2-40B4-BE49-F238E27FC236}">
-                <a16:creationId xmlns:a16="http://schemas.microsoft.com/office/drawing/2014/main" id="{9D94962A-6F83-480A-8B04-44CAE66B5F82}"/>
+                <a16:creationId xmlns:a16="http://schemas.microsoft.com/office/drawing/2014/main" id="{C0321717-BCFB-4BB6-AF29-010C00C0B44C}"/>
               </a:ext>
             </a:extLst>
           </p:cNvPr>
@@ -35411,10 +35411,10 @@
           <p:nvPr/>
         </p:nvPicPr>
         <p:blipFill>
-          <a:blip xmlns:r="http://schemas.openxmlformats.org/officeDocument/2006/relationships" xmlns:a="http://schemas.openxmlformats.org/drawingml/2006/main" r:embed="R1bf637b7312c483e">
+          <a:blip xmlns:r="http://schemas.openxmlformats.org/officeDocument/2006/relationships" xmlns:a="http://schemas.openxmlformats.org/drawingml/2006/main" r:embed="R6fe9ea2d00ac4704">
             <a:extLst>
               <a:ext uri="{96DAC541-7B7A-43D3-8B79-37D633B846F1}">
-                <asvg:svgBlip xmlns:asvg="http://schemas.microsoft.com/office/drawing/2016/SVG/main" r:embed="R66536182f40a480b"/>
+                <asvg:svgBlip xmlns:asvg="http://schemas.microsoft.com/office/drawing/2016/SVG/main" r:embed="Ra43235a4332c41b4"/>
               </a:ext>
             </a:extLst>
           </a:blip>
@@ -35435,7 +35435,7 @@
           <p:cNvPr id="13" name="">
             <a:extLst xmlns:a="http://schemas.openxmlformats.org/drawingml/2006/main">
               <a:ext uri="{FF2B5EF4-FFF2-40B4-BE49-F238E27FC236}">
-                <a16:creationId xmlns:a16="http://schemas.microsoft.com/office/drawing/2014/main" id="{C48A2B0B-A972-4CE4-B5FC-983F1658D0A9}"/>
+                <a16:creationId xmlns:a16="http://schemas.microsoft.com/office/drawing/2014/main" id="{1B6F2468-21F5-4E34-80B3-BB9FB689CFDF}"/>
               </a:ext>
             </a:extLst>
           </p:cNvPr>
@@ -35468,7 +35468,7 @@
           <p:cNvPr id="14" name="">
             <a:extLst xmlns:a="http://schemas.openxmlformats.org/drawingml/2006/main">
               <a:ext uri="{FF2B5EF4-FFF2-40B4-BE49-F238E27FC236}">
-                <a16:creationId xmlns:a16="http://schemas.microsoft.com/office/drawing/2014/main" id="{B0B1AC41-2D0D-4F6C-8823-2A00A306BD68}"/>
+                <a16:creationId xmlns:a16="http://schemas.microsoft.com/office/drawing/2014/main" id="{DDF2EDC1-7EE5-4353-8B19-6A3B29921B4B}"/>
               </a:ext>
             </a:extLst>
           </p:cNvPr>
@@ -35520,7 +35520,7 @@
           <p:cNvPr id="15" name="">
             <a:extLst xmlns:a="http://schemas.openxmlformats.org/drawingml/2006/main">
               <a:ext uri="{FF2B5EF4-FFF2-40B4-BE49-F238E27FC236}">
-                <a16:creationId xmlns:a16="http://schemas.microsoft.com/office/drawing/2014/main" id="{D3793AD1-5C4D-4398-9196-1696C0D711C1}"/>
+                <a16:creationId xmlns:a16="http://schemas.microsoft.com/office/drawing/2014/main" id="{1EA9C4DF-AB19-43DD-A13A-A2F8A4C55618}"/>
               </a:ext>
             </a:extLst>
           </p:cNvPr>
@@ -35551,7 +35551,7 @@
           <p:cNvPr id="16" name="">
             <a:extLst xmlns:a="http://schemas.openxmlformats.org/drawingml/2006/main">
               <a:ext uri="{FF2B5EF4-FFF2-40B4-BE49-F238E27FC236}">
-                <a16:creationId xmlns:a16="http://schemas.microsoft.com/office/drawing/2014/main" id="{DF78B2DF-5EA0-47FE-9DCE-964C7B9EC003}"/>
+                <a16:creationId xmlns:a16="http://schemas.microsoft.com/office/drawing/2014/main" id="{2B62ED52-4F16-4E7C-80B0-2F659C8FCED9}"/>
               </a:ext>
             </a:extLst>
           </p:cNvPr>
@@ -35582,7 +35582,7 @@
           <p:cNvPr id="17" name="">
             <a:extLst xmlns:a="http://schemas.openxmlformats.org/drawingml/2006/main">
               <a:ext uri="{FF2B5EF4-FFF2-40B4-BE49-F238E27FC236}">
-                <a16:creationId xmlns:a16="http://schemas.microsoft.com/office/drawing/2014/main" id="{FEEE551A-D04C-4610-8D2C-7B7193D20E89}"/>
+                <a16:creationId xmlns:a16="http://schemas.microsoft.com/office/drawing/2014/main" id="{2A0F587D-A80F-4A16-B4FD-A108860206D7}"/>
               </a:ext>
             </a:extLst>
           </p:cNvPr>
@@ -35634,7 +35634,7 @@
           <p:cNvPr id="18" name="">
             <a:extLst xmlns:a="http://schemas.openxmlformats.org/drawingml/2006/main">
               <a:ext uri="{FF2B5EF4-FFF2-40B4-BE49-F238E27FC236}">
-                <a16:creationId xmlns:a16="http://schemas.microsoft.com/office/drawing/2014/main" id="{D3265A9F-8E81-44D0-845F-0FD8E16EFBB6}"/>
+                <a16:creationId xmlns:a16="http://schemas.microsoft.com/office/drawing/2014/main" id="{FB491ACD-6F2B-409B-98FE-07C014FB67C2}"/>
               </a:ext>
             </a:extLst>
           </p:cNvPr>
@@ -35667,7 +35667,7 @@
           <p:cNvPr id="19" name="">
             <a:extLst xmlns:a="http://schemas.openxmlformats.org/drawingml/2006/main">
               <a:ext uri="{FF2B5EF4-FFF2-40B4-BE49-F238E27FC236}">
-                <a16:creationId xmlns:a16="http://schemas.microsoft.com/office/drawing/2014/main" id="{09A0CC15-DD47-4A91-98B1-E1E2C47265D2}"/>
+                <a16:creationId xmlns:a16="http://schemas.microsoft.com/office/drawing/2014/main" id="{E6A9E406-5AF2-48DD-9F06-DFC9EAFB301C}"/>
               </a:ext>
             </a:extLst>
           </p:cNvPr>
@@ -35719,7 +35719,7 @@
           <p:cNvPr id="20" name="">
             <a:extLst xmlns:a="http://schemas.openxmlformats.org/drawingml/2006/main">
               <a:ext uri="{FF2B5EF4-FFF2-40B4-BE49-F238E27FC236}">
-                <a16:creationId xmlns:a16="http://schemas.microsoft.com/office/drawing/2014/main" id="{6BCDF447-93AA-4F8D-8F5E-0CA66D3FE4CE}"/>
+                <a16:creationId xmlns:a16="http://schemas.microsoft.com/office/drawing/2014/main" id="{017071DF-DF33-410E-99D0-50A9F2395981}"/>
               </a:ext>
             </a:extLst>
           </p:cNvPr>
@@ -35750,7 +35750,7 @@
           <p:cNvPr id="21" name="">
             <a:extLst xmlns:a="http://schemas.openxmlformats.org/drawingml/2006/main">
               <a:ext uri="{FF2B5EF4-FFF2-40B4-BE49-F238E27FC236}">
-                <a16:creationId xmlns:a16="http://schemas.microsoft.com/office/drawing/2014/main" id="{D269087F-D2F0-4692-BC5F-7FAB95C02FC2}"/>
+                <a16:creationId xmlns:a16="http://schemas.microsoft.com/office/drawing/2014/main" id="{2F8FFA06-01D0-4DF8-9337-7016CF186D24}"/>
               </a:ext>
             </a:extLst>
           </p:cNvPr>
@@ -35781,7 +35781,7 @@
           <p:cNvPr id="22" name="">
             <a:extLst xmlns:a="http://schemas.openxmlformats.org/drawingml/2006/main">
               <a:ext uri="{FF2B5EF4-FFF2-40B4-BE49-F238E27FC236}">
-                <a16:creationId xmlns:a16="http://schemas.microsoft.com/office/drawing/2014/main" id="{9C66D22D-6A28-4018-B90F-312608A3E67F}"/>
+                <a16:creationId xmlns:a16="http://schemas.microsoft.com/office/drawing/2014/main" id="{6C2951AE-D29F-4AC0-AD8B-F82BA4F891E9}"/>
               </a:ext>
             </a:extLst>
           </p:cNvPr>
@@ -35833,7 +35833,7 @@
           <p:cNvPr id="23" name="">
             <a:extLst xmlns:a="http://schemas.openxmlformats.org/drawingml/2006/main">
               <a:ext uri="{FF2B5EF4-FFF2-40B4-BE49-F238E27FC236}">
-                <a16:creationId xmlns:a16="http://schemas.microsoft.com/office/drawing/2014/main" id="{AB9071C5-6120-4780-808C-58DB0B2FCAFD}"/>
+                <a16:creationId xmlns:a16="http://schemas.microsoft.com/office/drawing/2014/main" id="{9699F65A-538D-4111-8B53-4CACC4E2919E}"/>
               </a:ext>
             </a:extLst>
           </p:cNvPr>
@@ -35885,7 +35885,7 @@
           <p:cNvPr id="24" name="">
             <a:extLst xmlns:a="http://schemas.openxmlformats.org/drawingml/2006/main">
               <a:ext uri="{FF2B5EF4-FFF2-40B4-BE49-F238E27FC236}">
-                <a16:creationId xmlns:a16="http://schemas.microsoft.com/office/drawing/2014/main" id="{536E3258-D240-4254-8955-4B91F2699806}"/>
+                <a16:creationId xmlns:a16="http://schemas.microsoft.com/office/drawing/2014/main" id="{79865A31-50BE-443C-B353-3DD90B4C0EED}"/>
               </a:ext>
             </a:extLst>
           </p:cNvPr>
@@ -35916,7 +35916,7 @@
           <p:cNvPr id="25" name="">
             <a:extLst xmlns:a="http://schemas.openxmlformats.org/drawingml/2006/main">
               <a:ext uri="{FF2B5EF4-FFF2-40B4-BE49-F238E27FC236}">
-                <a16:creationId xmlns:a16="http://schemas.microsoft.com/office/drawing/2014/main" id="{1912AF18-C160-4793-9971-98076B86A2B0}"/>
+                <a16:creationId xmlns:a16="http://schemas.microsoft.com/office/drawing/2014/main" id="{42B7514B-7613-4103-94EE-B2CDDEEB9690}"/>
               </a:ext>
             </a:extLst>
           </p:cNvPr>
@@ -35968,7 +35968,7 @@
           <p:cNvPr id="26" name="">
             <a:extLst xmlns:a="http://schemas.openxmlformats.org/drawingml/2006/main">
               <a:ext uri="{FF2B5EF4-FFF2-40B4-BE49-F238E27FC236}">
-                <a16:creationId xmlns:a16="http://schemas.microsoft.com/office/drawing/2014/main" id="{1E9C398E-2C11-4D55-9DF6-DB3F66C332FC}"/>
+                <a16:creationId xmlns:a16="http://schemas.microsoft.com/office/drawing/2014/main" id="{C35584EF-2D59-484A-A7DB-01DD69D5D3D5}"/>
               </a:ext>
             </a:extLst>
           </p:cNvPr>
@@ -36020,7 +36020,7 @@
           <p:cNvPr id="27" name="">
             <a:extLst xmlns:a="http://schemas.openxmlformats.org/drawingml/2006/main">
               <a:ext uri="{FF2B5EF4-FFF2-40B4-BE49-F238E27FC236}">
-                <a16:creationId xmlns:a16="http://schemas.microsoft.com/office/drawing/2014/main" id="{F0DDA65A-9934-4B92-8075-02FBBDAA20E0}"/>
+                <a16:creationId xmlns:a16="http://schemas.microsoft.com/office/drawing/2014/main" id="{E3C9A610-126D-498A-8EB2-9D027B8E1F9F}"/>
               </a:ext>
             </a:extLst>
           </p:cNvPr>
@@ -36072,7 +36072,7 @@
           <p:cNvPr id="28" name="">
             <a:extLst xmlns:a="http://schemas.openxmlformats.org/drawingml/2006/main">
               <a:ext uri="{FF2B5EF4-FFF2-40B4-BE49-F238E27FC236}">
-                <a16:creationId xmlns:a16="http://schemas.microsoft.com/office/drawing/2014/main" id="{6CF726B0-57E2-4BAE-A8CE-18FEE05740DA}"/>
+                <a16:creationId xmlns:a16="http://schemas.microsoft.com/office/drawing/2014/main" id="{0BB39CB5-9036-4541-84B4-E879145AB949}"/>
               </a:ext>
             </a:extLst>
           </p:cNvPr>
@@ -36124,7 +36124,7 @@
           <p:cNvPr id="29" name="">
             <a:extLst xmlns:a="http://schemas.openxmlformats.org/drawingml/2006/main">
               <a:ext uri="{FF2B5EF4-FFF2-40B4-BE49-F238E27FC236}">
-                <a16:creationId xmlns:a16="http://schemas.microsoft.com/office/drawing/2014/main" id="{FB35A0C0-6556-41BC-A6CB-36549498A30F}"/>
+                <a16:creationId xmlns:a16="http://schemas.microsoft.com/office/drawing/2014/main" id="{049F3920-C11A-4B83-A7E1-0CF9C1F0B938}"/>
               </a:ext>
             </a:extLst>
           </p:cNvPr>
@@ -36176,7 +36176,7 @@
           <p:cNvPr id="30" name="">
             <a:extLst xmlns:a="http://schemas.openxmlformats.org/drawingml/2006/main">
               <a:ext uri="{FF2B5EF4-FFF2-40B4-BE49-F238E27FC236}">
-                <a16:creationId xmlns:a16="http://schemas.microsoft.com/office/drawing/2014/main" id="{4EBCA708-1C66-4993-991D-1F74231FA706}"/>
+                <a16:creationId xmlns:a16="http://schemas.microsoft.com/office/drawing/2014/main" id="{61638EBE-B747-436C-BADC-7F144DA27402}"/>
               </a:ext>
             </a:extLst>
           </p:cNvPr>
@@ -36228,7 +36228,7 @@
           <p:cNvPr id="31" name="">
             <a:extLst xmlns:a="http://schemas.openxmlformats.org/drawingml/2006/main">
               <a:ext uri="{FF2B5EF4-FFF2-40B4-BE49-F238E27FC236}">
-                <a16:creationId xmlns:a16="http://schemas.microsoft.com/office/drawing/2014/main" id="{AA9ADD53-5969-49A2-BF46-25B1C87E8FF2}"/>
+                <a16:creationId xmlns:a16="http://schemas.microsoft.com/office/drawing/2014/main" id="{639F6896-6146-429D-84FC-BBE18EA6B145}"/>
               </a:ext>
             </a:extLst>
           </p:cNvPr>
@@ -36280,7 +36280,7 @@
           <p:cNvPr id="32" name="">
             <a:extLst xmlns:a="http://schemas.openxmlformats.org/drawingml/2006/main">
               <a:ext uri="{FF2B5EF4-FFF2-40B4-BE49-F238E27FC236}">
-                <a16:creationId xmlns:a16="http://schemas.microsoft.com/office/drawing/2014/main" id="{4C797F35-5579-4B29-BA3B-EB5A1E92D662}"/>
+                <a16:creationId xmlns:a16="http://schemas.microsoft.com/office/drawing/2014/main" id="{17DDACF5-2C35-4D1B-8799-20C3A321618C}"/>
               </a:ext>
             </a:extLst>
           </p:cNvPr>
@@ -36330,7 +36330,7 @@
     </p:spTree>
     <p:extLst>
       <p:ext uri="{BB962C8B-B14F-4D97-AF65-F5344CB8AC3E}">
-        <p14:creationId xmlns:p14="http://schemas.microsoft.com/office/powerpoint/2010/main" val="1139626663"/>
+        <p14:creationId xmlns:p14="http://schemas.microsoft.com/office/powerpoint/2010/main" val="1731214329"/>
       </p:ext>
     </p:extLst>
   </p:cSld>
@@ -36361,7 +36361,7 @@
           <p:cNvPr id="27" name="">
             <a:extLst xmlns:a="http://schemas.openxmlformats.org/drawingml/2006/main">
               <a:ext uri="{FF2B5EF4-FFF2-40B4-BE49-F238E27FC236}">
-                <a16:creationId xmlns:a16="http://schemas.microsoft.com/office/drawing/2014/main" id="{F222EE02-7DD4-4317-8F92-1D39E47C835B}"/>
+                <a16:creationId xmlns:a16="http://schemas.microsoft.com/office/drawing/2014/main" id="{7F88183B-AD16-426C-AA9A-909035261CD0}"/>
               </a:ext>
             </a:extLst>
           </p:cNvPr>
@@ -36394,7 +36394,7 @@
           <p:cNvPr id="2" name="">
             <a:extLst xmlns:a="http://schemas.openxmlformats.org/drawingml/2006/main">
               <a:ext uri="{FF2B5EF4-FFF2-40B4-BE49-F238E27FC236}">
-                <a16:creationId xmlns:a16="http://schemas.microsoft.com/office/drawing/2014/main" id="{AA16EC3C-5FDE-4F84-BD31-501158029765}"/>
+                <a16:creationId xmlns:a16="http://schemas.microsoft.com/office/drawing/2014/main" id="{C599D43C-5426-43C6-AC12-6EA6CFA4700E}"/>
               </a:ext>
             </a:extLst>
           </p:cNvPr>
@@ -36425,7 +36425,7 @@
           <p:cNvPr id="3" name="">
             <a:extLst xmlns:a="http://schemas.openxmlformats.org/drawingml/2006/main">
               <a:ext uri="{FF2B5EF4-FFF2-40B4-BE49-F238E27FC236}">
-                <a16:creationId xmlns:a16="http://schemas.microsoft.com/office/drawing/2014/main" id="{F2A94058-9296-46CD-960F-2323CA4E0B17}"/>
+                <a16:creationId xmlns:a16="http://schemas.microsoft.com/office/drawing/2014/main" id="{25EEB610-7D99-4C3D-99CF-DDDB93D1AA7F}"/>
               </a:ext>
             </a:extLst>
           </p:cNvPr>
@@ -36477,7 +36477,7 @@
           <p:cNvPr id="4" name="">
             <a:extLst xmlns:a="http://schemas.openxmlformats.org/drawingml/2006/main">
               <a:ext uri="{FF2B5EF4-FFF2-40B4-BE49-F238E27FC236}">
-                <a16:creationId xmlns:a16="http://schemas.microsoft.com/office/drawing/2014/main" id="{EC7B5B44-7F6A-457F-80EB-3280D0539C24}"/>
+                <a16:creationId xmlns:a16="http://schemas.microsoft.com/office/drawing/2014/main" id="{E25F9A9F-59D9-4C25-84EE-061638F02190}"/>
               </a:ext>
             </a:extLst>
           </p:cNvPr>
@@ -36529,7 +36529,7 @@
           <p:cNvPr id="5" name="">
             <a:extLst xmlns:a="http://schemas.openxmlformats.org/drawingml/2006/main">
               <a:ext uri="{FF2B5EF4-FFF2-40B4-BE49-F238E27FC236}">
-                <a16:creationId xmlns:a16="http://schemas.microsoft.com/office/drawing/2014/main" id="{75296DB5-7513-4681-8517-E06D9CEBBA04}"/>
+                <a16:creationId xmlns:a16="http://schemas.microsoft.com/office/drawing/2014/main" id="{9300F410-8627-4540-8FF3-DB284260914B}"/>
               </a:ext>
             </a:extLst>
           </p:cNvPr>
@@ -36564,7 +36564,7 @@
           <p:nvPr/>
         </p:nvPicPr>
         <p:blipFill>
-          <a:blip xmlns:r="http://schemas.openxmlformats.org/officeDocument/2006/relationships" xmlns:a="http://schemas.openxmlformats.org/drawingml/2006/main" r:embed="R7db8c8784c524373"/>
+          <a:blip xmlns:r="http://schemas.openxmlformats.org/officeDocument/2006/relationships" xmlns:a="http://schemas.openxmlformats.org/drawingml/2006/main" r:embed="R070dd67b6f2a475a"/>
           <a:stretch xmlns:a="http://schemas.openxmlformats.org/drawingml/2006/main"/>
         </p:blipFill>
         <p:spPr>
@@ -36582,7 +36582,7 @@
           <p:cNvPr id="7" name="">
             <a:extLst xmlns:a="http://schemas.openxmlformats.org/drawingml/2006/main">
               <a:ext uri="{FF2B5EF4-FFF2-40B4-BE49-F238E27FC236}">
-                <a16:creationId xmlns:a16="http://schemas.microsoft.com/office/drawing/2014/main" id="{59E942E4-93A1-4FB6-A679-D77CFC490401}"/>
+                <a16:creationId xmlns:a16="http://schemas.microsoft.com/office/drawing/2014/main" id="{50A8FB59-C25A-4442-9D6B-313C87696CE9}"/>
               </a:ext>
             </a:extLst>
           </p:cNvPr>
@@ -36634,7 +36634,7 @@
           <p:cNvPr id="8" name="">
             <a:extLst xmlns:a="http://schemas.openxmlformats.org/drawingml/2006/main">
               <a:ext uri="{FF2B5EF4-FFF2-40B4-BE49-F238E27FC236}">
-                <a16:creationId xmlns:a16="http://schemas.microsoft.com/office/drawing/2014/main" id="{00511997-A07B-4206-A12A-C0C239D0B7F5}"/>
+                <a16:creationId xmlns:a16="http://schemas.microsoft.com/office/drawing/2014/main" id="{8D96E820-7A90-43BF-A0B1-18288F9F10F2}"/>
               </a:ext>
             </a:extLst>
           </p:cNvPr>
@@ -36686,7 +36686,7 @@
           <p:cNvPr id="9" name="">
             <a:extLst xmlns:a="http://schemas.openxmlformats.org/drawingml/2006/main">
               <a:ext uri="{FF2B5EF4-FFF2-40B4-BE49-F238E27FC236}">
-                <a16:creationId xmlns:a16="http://schemas.microsoft.com/office/drawing/2014/main" id="{697B728A-D8FE-40D3-AEEF-AFC2E4B858B9}"/>
+                <a16:creationId xmlns:a16="http://schemas.microsoft.com/office/drawing/2014/main" id="{03C28250-8377-4F7D-8527-41C7FF0E9BEC}"/>
               </a:ext>
             </a:extLst>
           </p:cNvPr>
@@ -36738,7 +36738,7 @@
           <p:cNvPr id="10" name="">
             <a:extLst xmlns:a="http://schemas.openxmlformats.org/drawingml/2006/main">
               <a:ext uri="{FF2B5EF4-FFF2-40B4-BE49-F238E27FC236}">
-                <a16:creationId xmlns:a16="http://schemas.microsoft.com/office/drawing/2014/main" id="{EBD0725D-DA9C-4BD9-B7EF-57E5DFDF57FB}"/>
+                <a16:creationId xmlns:a16="http://schemas.microsoft.com/office/drawing/2014/main" id="{9F68BCF1-530E-47F7-BA09-88F0A275D81F}"/>
               </a:ext>
             </a:extLst>
           </p:cNvPr>
@@ -36790,7 +36790,7 @@
           <p:cNvPr id="11" name="">
             <a:extLst xmlns:a="http://schemas.openxmlformats.org/drawingml/2006/main">
               <a:ext uri="{FF2B5EF4-FFF2-40B4-BE49-F238E27FC236}">
-                <a16:creationId xmlns:a16="http://schemas.microsoft.com/office/drawing/2014/main" id="{731FA964-C537-444E-AB3D-BD4489E66DAD}"/>
+                <a16:creationId xmlns:a16="http://schemas.microsoft.com/office/drawing/2014/main" id="{612B051A-23B1-4B4C-8CDF-4E2E921BC7F7}"/>
               </a:ext>
             </a:extLst>
           </p:cNvPr>
@@ -36837,10 +36837,10 @@
           <p:nvPr/>
         </p:nvPicPr>
         <p:blipFill>
-          <a:blip xmlns:r="http://schemas.openxmlformats.org/officeDocument/2006/relationships" xmlns:a="http://schemas.openxmlformats.org/drawingml/2006/main" r:embed="R3dbda519a2894381">
+          <a:blip xmlns:r="http://schemas.openxmlformats.org/officeDocument/2006/relationships" xmlns:a="http://schemas.openxmlformats.org/drawingml/2006/main" r:embed="Rc5d743d115c0405b">
             <a:extLst>
               <a:ext uri="{96DAC541-7B7A-43D3-8B79-37D633B846F1}">
-                <asvg:svgBlip xmlns:asvg="http://schemas.microsoft.com/office/drawing/2016/SVG/main" r:embed="Rc40a87d567624b40"/>
+                <asvg:svgBlip xmlns:asvg="http://schemas.microsoft.com/office/drawing/2016/SVG/main" r:embed="Rd591d0d90e7d49ea"/>
               </a:ext>
             </a:extLst>
           </a:blip>
@@ -36861,7 +36861,7 @@
           <p:cNvPr id="13" name="">
             <a:extLst xmlns:a="http://schemas.openxmlformats.org/drawingml/2006/main">
               <a:ext uri="{FF2B5EF4-FFF2-40B4-BE49-F238E27FC236}">
-                <a16:creationId xmlns:a16="http://schemas.microsoft.com/office/drawing/2014/main" id="{82CC015F-5A82-49C3-A4B0-932C53417AB4}"/>
+                <a16:creationId xmlns:a16="http://schemas.microsoft.com/office/drawing/2014/main" id="{50B9C437-8575-4A6F-87AB-C99957E4DC6E}"/>
               </a:ext>
             </a:extLst>
           </p:cNvPr>
@@ -36894,7 +36894,7 @@
           <p:cNvPr id="14" name="">
             <a:extLst xmlns:a="http://schemas.openxmlformats.org/drawingml/2006/main">
               <a:ext uri="{FF2B5EF4-FFF2-40B4-BE49-F238E27FC236}">
-                <a16:creationId xmlns:a16="http://schemas.microsoft.com/office/drawing/2014/main" id="{4D12F216-9361-47BC-BD9E-051A3611CBFD}"/>
+                <a16:creationId xmlns:a16="http://schemas.microsoft.com/office/drawing/2014/main" id="{F4B58CD6-FD66-499A-AEA3-8D090CEF56A7}"/>
               </a:ext>
             </a:extLst>
           </p:cNvPr>
@@ -36946,7 +36946,7 @@
           <p:cNvPr id="15" name="">
             <a:extLst xmlns:a="http://schemas.openxmlformats.org/drawingml/2006/main">
               <a:ext uri="{FF2B5EF4-FFF2-40B4-BE49-F238E27FC236}">
-                <a16:creationId xmlns:a16="http://schemas.microsoft.com/office/drawing/2014/main" id="{8E5C44CC-08ED-4FF9-8E5A-B1E65A4AFFEB}"/>
+                <a16:creationId xmlns:a16="http://schemas.microsoft.com/office/drawing/2014/main" id="{58413432-E5F4-45C7-B3D7-F9978C23F59B}"/>
               </a:ext>
             </a:extLst>
           </p:cNvPr>
@@ -36979,7 +36979,7 @@
           <p:cNvPr id="16" name="">
             <a:extLst xmlns:a="http://schemas.openxmlformats.org/drawingml/2006/main">
               <a:ext uri="{FF2B5EF4-FFF2-40B4-BE49-F238E27FC236}">
-                <a16:creationId xmlns:a16="http://schemas.microsoft.com/office/drawing/2014/main" id="{5B038D36-7D3B-4EC7-B37E-A98F3FBB2A3D}"/>
+                <a16:creationId xmlns:a16="http://schemas.microsoft.com/office/drawing/2014/main" id="{35D2E54C-2ACF-4BB4-A8DE-9B9A7798CA61}"/>
               </a:ext>
             </a:extLst>
           </p:cNvPr>
@@ -37031,7 +37031,7 @@
           <p:cNvPr id="17" name="">
             <a:extLst xmlns:a="http://schemas.openxmlformats.org/drawingml/2006/main">
               <a:ext uri="{FF2B5EF4-FFF2-40B4-BE49-F238E27FC236}">
-                <a16:creationId xmlns:a16="http://schemas.microsoft.com/office/drawing/2014/main" id="{318BAB08-2D70-4535-A088-7CDDA7372C06}"/>
+                <a16:creationId xmlns:a16="http://schemas.microsoft.com/office/drawing/2014/main" id="{AF0B2A0C-2579-4E4C-B986-8788C72B05D3}"/>
               </a:ext>
             </a:extLst>
           </p:cNvPr>
@@ -37062,7 +37062,7 @@
           <p:cNvPr id="18" name="">
             <a:extLst xmlns:a="http://schemas.openxmlformats.org/drawingml/2006/main">
               <a:ext uri="{FF2B5EF4-FFF2-40B4-BE49-F238E27FC236}">
-                <a16:creationId xmlns:a16="http://schemas.microsoft.com/office/drawing/2014/main" id="{3EBEB558-AC35-40DF-AC8C-8EC4326F5338}"/>
+                <a16:creationId xmlns:a16="http://schemas.microsoft.com/office/drawing/2014/main" id="{FB1D51CB-7AFC-4C08-B683-23CE0DADE641}"/>
               </a:ext>
             </a:extLst>
           </p:cNvPr>
@@ -37093,7 +37093,7 @@
           <p:cNvPr id="19" name="">
             <a:extLst xmlns:a="http://schemas.openxmlformats.org/drawingml/2006/main">
               <a:ext uri="{FF2B5EF4-FFF2-40B4-BE49-F238E27FC236}">
-                <a16:creationId xmlns:a16="http://schemas.microsoft.com/office/drawing/2014/main" id="{CBF6BE93-150F-4FC9-81C9-491AAE0D87DF}"/>
+                <a16:creationId xmlns:a16="http://schemas.microsoft.com/office/drawing/2014/main" id="{853EC306-D577-4AD0-8399-DE831C628C41}"/>
               </a:ext>
             </a:extLst>
           </p:cNvPr>
@@ -37145,7 +37145,7 @@
           <p:cNvPr id="20" name="">
             <a:extLst xmlns:a="http://schemas.openxmlformats.org/drawingml/2006/main">
               <a:ext uri="{FF2B5EF4-FFF2-40B4-BE49-F238E27FC236}">
-                <a16:creationId xmlns:a16="http://schemas.microsoft.com/office/drawing/2014/main" id="{1D2EB16F-5814-4839-93D1-D7222C7B07BC}"/>
+                <a16:creationId xmlns:a16="http://schemas.microsoft.com/office/drawing/2014/main" id="{0359C54E-7E3F-491A-A840-E80726880C50}"/>
               </a:ext>
             </a:extLst>
           </p:cNvPr>
@@ -37176,7 +37176,7 @@
           <p:cNvPr id="21" name="">
             <a:extLst xmlns:a="http://schemas.openxmlformats.org/drawingml/2006/main">
               <a:ext uri="{FF2B5EF4-FFF2-40B4-BE49-F238E27FC236}">
-                <a16:creationId xmlns:a16="http://schemas.microsoft.com/office/drawing/2014/main" id="{56E622B4-8570-46E6-8185-DBC6F1075B5B}"/>
+                <a16:creationId xmlns:a16="http://schemas.microsoft.com/office/drawing/2014/main" id="{CD4D14AA-5AF8-4591-841B-186B05FC8D03}"/>
               </a:ext>
             </a:extLst>
           </p:cNvPr>
@@ -37228,7 +37228,7 @@
           <p:cNvPr id="22" name="">
             <a:extLst xmlns:a="http://schemas.openxmlformats.org/drawingml/2006/main">
               <a:ext uri="{FF2B5EF4-FFF2-40B4-BE49-F238E27FC236}">
-                <a16:creationId xmlns:a16="http://schemas.microsoft.com/office/drawing/2014/main" id="{362F64C8-B032-4D57-B1DA-A7E470C8F937}"/>
+                <a16:creationId xmlns:a16="http://schemas.microsoft.com/office/drawing/2014/main" id="{39EC3263-B741-42E1-AC28-D8E599B39563}"/>
               </a:ext>
             </a:extLst>
           </p:cNvPr>
@@ -37280,7 +37280,7 @@
           <p:cNvPr id="23" name="">
             <a:extLst xmlns:a="http://schemas.openxmlformats.org/drawingml/2006/main">
               <a:ext uri="{FF2B5EF4-FFF2-40B4-BE49-F238E27FC236}">
-                <a16:creationId xmlns:a16="http://schemas.microsoft.com/office/drawing/2014/main" id="{BD8030E7-7089-4332-A9D1-2EE0798F9656}"/>
+                <a16:creationId xmlns:a16="http://schemas.microsoft.com/office/drawing/2014/main" id="{BA1A4506-AE11-49C8-AFB4-D0D972CAC959}"/>
               </a:ext>
             </a:extLst>
           </p:cNvPr>
@@ -37332,7 +37332,7 @@
           <p:cNvPr id="24" name="">
             <a:extLst xmlns:a="http://schemas.openxmlformats.org/drawingml/2006/main">
               <a:ext uri="{FF2B5EF4-FFF2-40B4-BE49-F238E27FC236}">
-                <a16:creationId xmlns:a16="http://schemas.microsoft.com/office/drawing/2014/main" id="{EFC6A5BB-1CCD-4F99-B4C2-932FFB1ECCBB}"/>
+                <a16:creationId xmlns:a16="http://schemas.microsoft.com/office/drawing/2014/main" id="{4E9AF63D-1391-40EF-BA54-F9C7894764A4}"/>
               </a:ext>
             </a:extLst>
           </p:cNvPr>
@@ -37384,7 +37384,7 @@
           <p:cNvPr id="25" name="">
             <a:extLst xmlns:a="http://schemas.openxmlformats.org/drawingml/2006/main">
               <a:ext uri="{FF2B5EF4-FFF2-40B4-BE49-F238E27FC236}">
-                <a16:creationId xmlns:a16="http://schemas.microsoft.com/office/drawing/2014/main" id="{015F4399-759B-4FFA-8C28-F5DD38B301E2}"/>
+                <a16:creationId xmlns:a16="http://schemas.microsoft.com/office/drawing/2014/main" id="{D643E24E-EEE7-4FE5-B018-05443373DEEC}"/>
               </a:ext>
             </a:extLst>
           </p:cNvPr>
@@ -37436,7 +37436,7 @@
           <p:cNvPr id="26" name="">
             <a:extLst xmlns:a="http://schemas.openxmlformats.org/drawingml/2006/main">
               <a:ext uri="{FF2B5EF4-FFF2-40B4-BE49-F238E27FC236}">
-                <a16:creationId xmlns:a16="http://schemas.microsoft.com/office/drawing/2014/main" id="{D5582819-8594-4408-9C1F-42E60FF7CA12}"/>
+                <a16:creationId xmlns:a16="http://schemas.microsoft.com/office/drawing/2014/main" id="{A2F38D46-7F82-4274-807F-892C8B9F5B71}"/>
               </a:ext>
             </a:extLst>
           </p:cNvPr>
@@ -37486,7 +37486,7 @@
     </p:spTree>
     <p:extLst>
       <p:ext uri="{BB962C8B-B14F-4D97-AF65-F5344CB8AC3E}">
-        <p14:creationId xmlns:p14="http://schemas.microsoft.com/office/powerpoint/2010/main" val="1292311351"/>
+        <p14:creationId xmlns:p14="http://schemas.microsoft.com/office/powerpoint/2010/main" val="947263732"/>
       </p:ext>
     </p:extLst>
   </p:cSld>
@@ -37517,7 +37517,7 @@
           <p:cNvPr id="27" name="">
             <a:extLst xmlns:a="http://schemas.openxmlformats.org/drawingml/2006/main">
               <a:ext uri="{FF2B5EF4-FFF2-40B4-BE49-F238E27FC236}">
-                <a16:creationId xmlns:a16="http://schemas.microsoft.com/office/drawing/2014/main" id="{5F9ED598-6B5D-43A1-AC7D-DC855FFC8602}"/>
+                <a16:creationId xmlns:a16="http://schemas.microsoft.com/office/drawing/2014/main" id="{543A8F2A-1C8C-4096-9ECA-4B83414B8497}"/>
               </a:ext>
             </a:extLst>
           </p:cNvPr>
@@ -37550,7 +37550,7 @@
           <p:cNvPr id="2" name="">
             <a:extLst xmlns:a="http://schemas.openxmlformats.org/drawingml/2006/main">
               <a:ext uri="{FF2B5EF4-FFF2-40B4-BE49-F238E27FC236}">
-                <a16:creationId xmlns:a16="http://schemas.microsoft.com/office/drawing/2014/main" id="{FE41E288-1C50-4838-931B-7959B70C546F}"/>
+                <a16:creationId xmlns:a16="http://schemas.microsoft.com/office/drawing/2014/main" id="{801F7305-23A2-47C4-BBCB-C26840D2793C}"/>
               </a:ext>
             </a:extLst>
           </p:cNvPr>
@@ -37581,7 +37581,7 @@
           <p:cNvPr id="3" name="">
             <a:extLst xmlns:a="http://schemas.openxmlformats.org/drawingml/2006/main">
               <a:ext uri="{FF2B5EF4-FFF2-40B4-BE49-F238E27FC236}">
-                <a16:creationId xmlns:a16="http://schemas.microsoft.com/office/drawing/2014/main" id="{27DC6A36-51F9-497F-A1ED-59304432782F}"/>
+                <a16:creationId xmlns:a16="http://schemas.microsoft.com/office/drawing/2014/main" id="{707DFAF1-84BC-4A63-B65F-865D3CF0F12E}"/>
               </a:ext>
             </a:extLst>
           </p:cNvPr>
@@ -37633,7 +37633,7 @@
           <p:cNvPr id="4" name="">
             <a:extLst xmlns:a="http://schemas.openxmlformats.org/drawingml/2006/main">
               <a:ext uri="{FF2B5EF4-FFF2-40B4-BE49-F238E27FC236}">
-                <a16:creationId xmlns:a16="http://schemas.microsoft.com/office/drawing/2014/main" id="{EECA2D78-D986-4480-89EB-4C876164CA6E}"/>
+                <a16:creationId xmlns:a16="http://schemas.microsoft.com/office/drawing/2014/main" id="{10ABBF70-C67C-465E-9F29-48E2767CB325}"/>
               </a:ext>
             </a:extLst>
           </p:cNvPr>
@@ -37685,7 +37685,7 @@
           <p:cNvPr id="5" name="">
             <a:extLst xmlns:a="http://schemas.openxmlformats.org/drawingml/2006/main">
               <a:ext uri="{FF2B5EF4-FFF2-40B4-BE49-F238E27FC236}">
-                <a16:creationId xmlns:a16="http://schemas.microsoft.com/office/drawing/2014/main" id="{BA3AF483-B9CF-41FB-ABBA-01AEB2F71AA2}"/>
+                <a16:creationId xmlns:a16="http://schemas.microsoft.com/office/drawing/2014/main" id="{0A7280A4-628C-40B7-A859-D7E963C5E46E}"/>
               </a:ext>
             </a:extLst>
           </p:cNvPr>
@@ -37720,7 +37720,7 @@
           <p:nvPr/>
         </p:nvPicPr>
         <p:blipFill>
-          <a:blip xmlns:r="http://schemas.openxmlformats.org/officeDocument/2006/relationships" xmlns:a="http://schemas.openxmlformats.org/drawingml/2006/main" r:embed="R906de00e525547f7"/>
+          <a:blip xmlns:r="http://schemas.openxmlformats.org/officeDocument/2006/relationships" xmlns:a="http://schemas.openxmlformats.org/drawingml/2006/main" r:embed="Rb881b4674c024be3"/>
           <a:stretch xmlns:a="http://schemas.openxmlformats.org/drawingml/2006/main"/>
         </p:blipFill>
         <p:spPr>
@@ -37738,7 +37738,7 @@
           <p:cNvPr id="7" name="">
             <a:extLst xmlns:a="http://schemas.openxmlformats.org/drawingml/2006/main">
               <a:ext uri="{FF2B5EF4-FFF2-40B4-BE49-F238E27FC236}">
-                <a16:creationId xmlns:a16="http://schemas.microsoft.com/office/drawing/2014/main" id="{7BF4FD59-C24A-4BDC-BD7C-7B7128F535BA}"/>
+                <a16:creationId xmlns:a16="http://schemas.microsoft.com/office/drawing/2014/main" id="{EBE9B02F-1049-4FF8-A335-522D998E2C42}"/>
               </a:ext>
             </a:extLst>
           </p:cNvPr>
@@ -37790,7 +37790,7 @@
           <p:cNvPr id="8" name="">
             <a:extLst xmlns:a="http://schemas.openxmlformats.org/drawingml/2006/main">
               <a:ext uri="{FF2B5EF4-FFF2-40B4-BE49-F238E27FC236}">
-                <a16:creationId xmlns:a16="http://schemas.microsoft.com/office/drawing/2014/main" id="{3A5CF088-C974-435B-B1A2-7A430FEB1763}"/>
+                <a16:creationId xmlns:a16="http://schemas.microsoft.com/office/drawing/2014/main" id="{18AF980D-70C4-4B01-802E-6EB2E79DE8F4}"/>
               </a:ext>
             </a:extLst>
           </p:cNvPr>
@@ -37842,7 +37842,7 @@
           <p:cNvPr id="9" name="">
             <a:extLst xmlns:a="http://schemas.openxmlformats.org/drawingml/2006/main">
               <a:ext uri="{FF2B5EF4-FFF2-40B4-BE49-F238E27FC236}">
-                <a16:creationId xmlns:a16="http://schemas.microsoft.com/office/drawing/2014/main" id="{A5046B88-A6D9-43E6-B89C-C12AC88DB6D1}"/>
+                <a16:creationId xmlns:a16="http://schemas.microsoft.com/office/drawing/2014/main" id="{6C529B9C-0730-49A8-A833-2B24B94467D4}"/>
               </a:ext>
             </a:extLst>
           </p:cNvPr>
@@ -37894,7 +37894,7 @@
           <p:cNvPr id="10" name="">
             <a:extLst xmlns:a="http://schemas.openxmlformats.org/drawingml/2006/main">
               <a:ext uri="{FF2B5EF4-FFF2-40B4-BE49-F238E27FC236}">
-                <a16:creationId xmlns:a16="http://schemas.microsoft.com/office/drawing/2014/main" id="{E8D2678A-0D33-41ED-9284-BF82ADB1F669}"/>
+                <a16:creationId xmlns:a16="http://schemas.microsoft.com/office/drawing/2014/main" id="{1D104DCA-CA3F-4688-941C-C0003848DFEB}"/>
               </a:ext>
             </a:extLst>
           </p:cNvPr>
@@ -37946,7 +37946,7 @@
           <p:cNvPr id="11" name="">
             <a:extLst xmlns:a="http://schemas.openxmlformats.org/drawingml/2006/main">
               <a:ext uri="{FF2B5EF4-FFF2-40B4-BE49-F238E27FC236}">
-                <a16:creationId xmlns:a16="http://schemas.microsoft.com/office/drawing/2014/main" id="{4DE226A7-8490-41F6-BCE1-846980B1552C}"/>
+                <a16:creationId xmlns:a16="http://schemas.microsoft.com/office/drawing/2014/main" id="{AFE77330-AD3F-465B-8214-C5F1B88F0951}"/>
               </a:ext>
             </a:extLst>
           </p:cNvPr>
@@ -37993,10 +37993,10 @@
           <p:nvPr/>
         </p:nvPicPr>
         <p:blipFill>
-          <a:blip xmlns:r="http://schemas.openxmlformats.org/officeDocument/2006/relationships" xmlns:a="http://schemas.openxmlformats.org/drawingml/2006/main" r:embed="R4c914abf6d7c4245">
+          <a:blip xmlns:r="http://schemas.openxmlformats.org/officeDocument/2006/relationships" xmlns:a="http://schemas.openxmlformats.org/drawingml/2006/main" r:embed="R2d3785dacd584044">
             <a:extLst>
               <a:ext uri="{96DAC541-7B7A-43D3-8B79-37D633B846F1}">
-                <asvg:svgBlip xmlns:asvg="http://schemas.microsoft.com/office/drawing/2016/SVG/main" r:embed="Rd7480fcd9499416d"/>
+                <asvg:svgBlip xmlns:asvg="http://schemas.microsoft.com/office/drawing/2016/SVG/main" r:embed="R84e282a229224e51"/>
               </a:ext>
             </a:extLst>
           </a:blip>
@@ -38017,7 +38017,7 @@
           <p:cNvPr id="13" name="">
             <a:extLst xmlns:a="http://schemas.openxmlformats.org/drawingml/2006/main">
               <a:ext uri="{FF2B5EF4-FFF2-40B4-BE49-F238E27FC236}">
-                <a16:creationId xmlns:a16="http://schemas.microsoft.com/office/drawing/2014/main" id="{B876BEDD-CA15-43E3-A124-BCCA08F588AB}"/>
+                <a16:creationId xmlns:a16="http://schemas.microsoft.com/office/drawing/2014/main" id="{51112CD5-BEE4-4ACA-89C3-8A3AB8215E4F}"/>
               </a:ext>
             </a:extLst>
           </p:cNvPr>
@@ -38050,7 +38050,7 @@
           <p:cNvPr id="14" name="">
             <a:extLst xmlns:a="http://schemas.openxmlformats.org/drawingml/2006/main">
               <a:ext uri="{FF2B5EF4-FFF2-40B4-BE49-F238E27FC236}">
-                <a16:creationId xmlns:a16="http://schemas.microsoft.com/office/drawing/2014/main" id="{64B975D5-C130-4CD6-A75C-5962FDEA2149}"/>
+                <a16:creationId xmlns:a16="http://schemas.microsoft.com/office/drawing/2014/main" id="{A899CA7F-6721-4178-A32E-8FC69C1DFE39}"/>
               </a:ext>
             </a:extLst>
           </p:cNvPr>
@@ -38102,7 +38102,7 @@
           <p:cNvPr id="15" name="">
             <a:extLst xmlns:a="http://schemas.openxmlformats.org/drawingml/2006/main">
               <a:ext uri="{FF2B5EF4-FFF2-40B4-BE49-F238E27FC236}">
-                <a16:creationId xmlns:a16="http://schemas.microsoft.com/office/drawing/2014/main" id="{F793EBD6-76B8-4C21-BB96-AEE54A0E0AD8}"/>
+                <a16:creationId xmlns:a16="http://schemas.microsoft.com/office/drawing/2014/main" id="{216F05F8-3E54-4076-AF2A-06E4862C4454}"/>
               </a:ext>
             </a:extLst>
           </p:cNvPr>
@@ -38135,7 +38135,7 @@
           <p:cNvPr id="16" name="">
             <a:extLst xmlns:a="http://schemas.openxmlformats.org/drawingml/2006/main">
               <a:ext uri="{FF2B5EF4-FFF2-40B4-BE49-F238E27FC236}">
-                <a16:creationId xmlns:a16="http://schemas.microsoft.com/office/drawing/2014/main" id="{C968054F-53F1-44BE-A5D5-EF06239D68AB}"/>
+                <a16:creationId xmlns:a16="http://schemas.microsoft.com/office/drawing/2014/main" id="{62610A6A-CDDA-46A3-97DD-0D0CE6E52394}"/>
               </a:ext>
             </a:extLst>
           </p:cNvPr>
@@ -38187,7 +38187,7 @@
           <p:cNvPr id="17" name="">
             <a:extLst xmlns:a="http://schemas.openxmlformats.org/drawingml/2006/main">
               <a:ext uri="{FF2B5EF4-FFF2-40B4-BE49-F238E27FC236}">
-                <a16:creationId xmlns:a16="http://schemas.microsoft.com/office/drawing/2014/main" id="{73591B97-3CE5-42BB-B31E-54212A171C09}"/>
+                <a16:creationId xmlns:a16="http://schemas.microsoft.com/office/drawing/2014/main" id="{53D69517-005C-4D8F-B5E4-682D9DE91CDD}"/>
               </a:ext>
             </a:extLst>
           </p:cNvPr>
@@ -38220,7 +38220,7 @@
           <p:cNvPr id="18" name="">
             <a:extLst xmlns:a="http://schemas.openxmlformats.org/drawingml/2006/main">
               <a:ext uri="{FF2B5EF4-FFF2-40B4-BE49-F238E27FC236}">
-                <a16:creationId xmlns:a16="http://schemas.microsoft.com/office/drawing/2014/main" id="{5AE2BC30-57AA-438B-B66E-6F08CC095A43}"/>
+                <a16:creationId xmlns:a16="http://schemas.microsoft.com/office/drawing/2014/main" id="{C1A0DB03-843F-47E2-BED1-32011938969B}"/>
               </a:ext>
             </a:extLst>
           </p:cNvPr>
@@ -38272,7 +38272,7 @@
           <p:cNvPr id="19" name="">
             <a:extLst xmlns:a="http://schemas.openxmlformats.org/drawingml/2006/main">
               <a:ext uri="{FF2B5EF4-FFF2-40B4-BE49-F238E27FC236}">
-                <a16:creationId xmlns:a16="http://schemas.microsoft.com/office/drawing/2014/main" id="{51146DB8-8A0D-498D-B0A0-F270F2B878E6}"/>
+                <a16:creationId xmlns:a16="http://schemas.microsoft.com/office/drawing/2014/main" id="{B2C7FE4B-54F0-46E8-BEF5-C917F7B6CA8A}"/>
               </a:ext>
             </a:extLst>
           </p:cNvPr>
@@ -38324,7 +38324,7 @@
           <p:cNvPr id="20" name="">
             <a:extLst xmlns:a="http://schemas.openxmlformats.org/drawingml/2006/main">
               <a:ext uri="{FF2B5EF4-FFF2-40B4-BE49-F238E27FC236}">
-                <a16:creationId xmlns:a16="http://schemas.microsoft.com/office/drawing/2014/main" id="{AE4119DD-DC40-45B7-85A3-B73163A7409B}"/>
+                <a16:creationId xmlns:a16="http://schemas.microsoft.com/office/drawing/2014/main" id="{BB385BCE-0EB5-42D3-80E0-38B1A5E6B0FE}"/>
               </a:ext>
             </a:extLst>
           </p:cNvPr>
@@ -38355,7 +38355,7 @@
           <p:cNvPr id="21" name="">
             <a:extLst xmlns:a="http://schemas.openxmlformats.org/drawingml/2006/main">
               <a:ext uri="{FF2B5EF4-FFF2-40B4-BE49-F238E27FC236}">
-                <a16:creationId xmlns:a16="http://schemas.microsoft.com/office/drawing/2014/main" id="{9D354A1A-BA6B-4C57-8362-9AB926A76BE6}"/>
+                <a16:creationId xmlns:a16="http://schemas.microsoft.com/office/drawing/2014/main" id="{1A982708-8136-4CD2-81B5-07159E9E6677}"/>
               </a:ext>
             </a:extLst>
           </p:cNvPr>
@@ -38407,7 +38407,7 @@
           <p:cNvPr id="22" name="">
             <a:extLst xmlns:a="http://schemas.openxmlformats.org/drawingml/2006/main">
               <a:ext uri="{FF2B5EF4-FFF2-40B4-BE49-F238E27FC236}">
-                <a16:creationId xmlns:a16="http://schemas.microsoft.com/office/drawing/2014/main" id="{542FB5AD-9128-4AB0-9AF1-8BDABDB87C7B}"/>
+                <a16:creationId xmlns:a16="http://schemas.microsoft.com/office/drawing/2014/main" id="{F5D60293-D0A7-4AC9-8920-64A1ABACD011}"/>
               </a:ext>
             </a:extLst>
           </p:cNvPr>
@@ -38459,7 +38459,7 @@
           <p:cNvPr id="23" name="">
             <a:extLst xmlns:a="http://schemas.openxmlformats.org/drawingml/2006/main">
               <a:ext uri="{FF2B5EF4-FFF2-40B4-BE49-F238E27FC236}">
-                <a16:creationId xmlns:a16="http://schemas.microsoft.com/office/drawing/2014/main" id="{B8A871E3-F567-4667-B393-453F925DB4C0}"/>
+                <a16:creationId xmlns:a16="http://schemas.microsoft.com/office/drawing/2014/main" id="{2E025B13-2603-4AEC-8BFB-345F45D96EBE}"/>
               </a:ext>
             </a:extLst>
           </p:cNvPr>
@@ -38511,7 +38511,7 @@
           <p:cNvPr id="24" name="">
             <a:extLst xmlns:a="http://schemas.openxmlformats.org/drawingml/2006/main">
               <a:ext uri="{FF2B5EF4-FFF2-40B4-BE49-F238E27FC236}">
-                <a16:creationId xmlns:a16="http://schemas.microsoft.com/office/drawing/2014/main" id="{F4097450-392E-4F53-9264-E2F8B2AB9F3A}"/>
+                <a16:creationId xmlns:a16="http://schemas.microsoft.com/office/drawing/2014/main" id="{610F0C42-27EE-4473-B67F-E84D544FBDA8}"/>
               </a:ext>
             </a:extLst>
           </p:cNvPr>
@@ -38563,7 +38563,7 @@
           <p:cNvPr id="25" name="">
             <a:extLst xmlns:a="http://schemas.openxmlformats.org/drawingml/2006/main">
               <a:ext uri="{FF2B5EF4-FFF2-40B4-BE49-F238E27FC236}">
-                <a16:creationId xmlns:a16="http://schemas.microsoft.com/office/drawing/2014/main" id="{52266F64-FE79-4F92-9B61-B7BDF9A79F01}"/>
+                <a16:creationId xmlns:a16="http://schemas.microsoft.com/office/drawing/2014/main" id="{477A5E96-1FB3-44D0-B0DD-668DB77F62CF}"/>
               </a:ext>
             </a:extLst>
           </p:cNvPr>
@@ -38615,7 +38615,7 @@
           <p:cNvPr id="26" name="">
             <a:extLst xmlns:a="http://schemas.openxmlformats.org/drawingml/2006/main">
               <a:ext uri="{FF2B5EF4-FFF2-40B4-BE49-F238E27FC236}">
-                <a16:creationId xmlns:a16="http://schemas.microsoft.com/office/drawing/2014/main" id="{2053CDD7-D628-4BE7-A5A4-BF85AB835012}"/>
+                <a16:creationId xmlns:a16="http://schemas.microsoft.com/office/drawing/2014/main" id="{4FC95DAD-8CE5-4733-975E-E25F16BD90D6}"/>
               </a:ext>
             </a:extLst>
           </p:cNvPr>
@@ -38665,7 +38665,7 @@
     </p:spTree>
     <p:extLst>
       <p:ext uri="{BB962C8B-B14F-4D97-AF65-F5344CB8AC3E}">
-        <p14:creationId xmlns:p14="http://schemas.microsoft.com/office/powerpoint/2010/main" val="937881538"/>
+        <p14:creationId xmlns:p14="http://schemas.microsoft.com/office/powerpoint/2010/main" val="1109132981"/>
       </p:ext>
     </p:extLst>
   </p:cSld>
@@ -38696,7 +38696,7 @@
           <p:cNvPr id="35" name="">
             <a:extLst xmlns:a="http://schemas.openxmlformats.org/drawingml/2006/main">
               <a:ext uri="{FF2B5EF4-FFF2-40B4-BE49-F238E27FC236}">
-                <a16:creationId xmlns:a16="http://schemas.microsoft.com/office/drawing/2014/main" id="{3B18BA29-6B15-46D4-B111-3152FC97406B}"/>
+                <a16:creationId xmlns:a16="http://schemas.microsoft.com/office/drawing/2014/main" id="{049F7A2D-5AB7-413B-8EB7-54DDFDE8188E}"/>
               </a:ext>
             </a:extLst>
           </p:cNvPr>
@@ -38729,7 +38729,7 @@
           <p:cNvPr id="2" name="">
             <a:extLst xmlns:a="http://schemas.openxmlformats.org/drawingml/2006/main">
               <a:ext uri="{FF2B5EF4-FFF2-40B4-BE49-F238E27FC236}">
-                <a16:creationId xmlns:a16="http://schemas.microsoft.com/office/drawing/2014/main" id="{649E3350-5259-462B-8EFC-A9278D1AFCA6}"/>
+                <a16:creationId xmlns:a16="http://schemas.microsoft.com/office/drawing/2014/main" id="{4CE9D476-CC34-410D-8FF9-9FF11FFF49EA}"/>
               </a:ext>
             </a:extLst>
           </p:cNvPr>
@@ -38760,7 +38760,7 @@
           <p:cNvPr id="3" name="">
             <a:extLst xmlns:a="http://schemas.openxmlformats.org/drawingml/2006/main">
               <a:ext uri="{FF2B5EF4-FFF2-40B4-BE49-F238E27FC236}">
-                <a16:creationId xmlns:a16="http://schemas.microsoft.com/office/drawing/2014/main" id="{73788643-0318-4115-837A-34B6B5DA2BD6}"/>
+                <a16:creationId xmlns:a16="http://schemas.microsoft.com/office/drawing/2014/main" id="{10699D97-7929-4A7E-BAE1-B620DC956D45}"/>
               </a:ext>
             </a:extLst>
           </p:cNvPr>
@@ -38812,7 +38812,7 @@
           <p:cNvPr id="4" name="">
             <a:extLst xmlns:a="http://schemas.openxmlformats.org/drawingml/2006/main">
               <a:ext uri="{FF2B5EF4-FFF2-40B4-BE49-F238E27FC236}">
-                <a16:creationId xmlns:a16="http://schemas.microsoft.com/office/drawing/2014/main" id="{1B28DB2F-7D1B-446A-B892-0C3EB8C2ED2C}"/>
+                <a16:creationId xmlns:a16="http://schemas.microsoft.com/office/drawing/2014/main" id="{5082AF44-913B-418A-B06A-B2DF4567480E}"/>
               </a:ext>
             </a:extLst>
           </p:cNvPr>
@@ -38864,7 +38864,7 @@
           <p:cNvPr id="5" name="">
             <a:extLst xmlns:a="http://schemas.openxmlformats.org/drawingml/2006/main">
               <a:ext uri="{FF2B5EF4-FFF2-40B4-BE49-F238E27FC236}">
-                <a16:creationId xmlns:a16="http://schemas.microsoft.com/office/drawing/2014/main" id="{9479E402-1C03-4957-B221-021722C70AB9}"/>
+                <a16:creationId xmlns:a16="http://schemas.microsoft.com/office/drawing/2014/main" id="{C06BA96B-3286-442E-964E-AE55099EA446}"/>
               </a:ext>
             </a:extLst>
           </p:cNvPr>
@@ -38899,7 +38899,7 @@
           <p:nvPr/>
         </p:nvPicPr>
         <p:blipFill>
-          <a:blip xmlns:r="http://schemas.openxmlformats.org/officeDocument/2006/relationships" xmlns:a="http://schemas.openxmlformats.org/drawingml/2006/main" r:embed="R4aa6cce5a9fb4439"/>
+          <a:blip xmlns:r="http://schemas.openxmlformats.org/officeDocument/2006/relationships" xmlns:a="http://schemas.openxmlformats.org/drawingml/2006/main" r:embed="Rec1b0593cfce454c"/>
           <a:stretch xmlns:a="http://schemas.openxmlformats.org/drawingml/2006/main"/>
         </p:blipFill>
         <p:spPr>
@@ -38917,7 +38917,7 @@
           <p:cNvPr id="7" name="">
             <a:extLst xmlns:a="http://schemas.openxmlformats.org/drawingml/2006/main">
               <a:ext uri="{FF2B5EF4-FFF2-40B4-BE49-F238E27FC236}">
-                <a16:creationId xmlns:a16="http://schemas.microsoft.com/office/drawing/2014/main" id="{5C2ED830-758A-484F-B0D5-DB3B8CF6D686}"/>
+                <a16:creationId xmlns:a16="http://schemas.microsoft.com/office/drawing/2014/main" id="{C0364CB9-3105-4686-9FF1-1CBBB8FB8D3B}"/>
               </a:ext>
             </a:extLst>
           </p:cNvPr>
@@ -38969,7 +38969,7 @@
           <p:cNvPr id="8" name="">
             <a:extLst xmlns:a="http://schemas.openxmlformats.org/drawingml/2006/main">
               <a:ext uri="{FF2B5EF4-FFF2-40B4-BE49-F238E27FC236}">
-                <a16:creationId xmlns:a16="http://schemas.microsoft.com/office/drawing/2014/main" id="{7FD60427-C899-4788-993B-9618152AC240}"/>
+                <a16:creationId xmlns:a16="http://schemas.microsoft.com/office/drawing/2014/main" id="{53702223-B55D-4BFB-B24D-0CA6EFB8DC4C}"/>
               </a:ext>
             </a:extLst>
           </p:cNvPr>
@@ -39021,7 +39021,7 @@
           <p:cNvPr id="9" name="">
             <a:extLst xmlns:a="http://schemas.openxmlformats.org/drawingml/2006/main">
               <a:ext uri="{FF2B5EF4-FFF2-40B4-BE49-F238E27FC236}">
-                <a16:creationId xmlns:a16="http://schemas.microsoft.com/office/drawing/2014/main" id="{D73EA505-E111-4C09-9557-9B6BBBE9EDC8}"/>
+                <a16:creationId xmlns:a16="http://schemas.microsoft.com/office/drawing/2014/main" id="{72227C2C-2C3D-4FF9-8538-FECCE1F89ED3}"/>
               </a:ext>
             </a:extLst>
           </p:cNvPr>
@@ -39073,7 +39073,7 @@
           <p:cNvPr id="10" name="">
             <a:extLst xmlns:a="http://schemas.openxmlformats.org/drawingml/2006/main">
               <a:ext uri="{FF2B5EF4-FFF2-40B4-BE49-F238E27FC236}">
-                <a16:creationId xmlns:a16="http://schemas.microsoft.com/office/drawing/2014/main" id="{EC5E9079-269A-4012-803F-3132CF410D87}"/>
+                <a16:creationId xmlns:a16="http://schemas.microsoft.com/office/drawing/2014/main" id="{B4E3E2A5-8E20-4460-94C3-90D935444A68}"/>
               </a:ext>
             </a:extLst>
           </p:cNvPr>
@@ -39125,7 +39125,7 @@
           <p:cNvPr id="11" name="">
             <a:extLst xmlns:a="http://schemas.openxmlformats.org/drawingml/2006/main">
               <a:ext uri="{FF2B5EF4-FFF2-40B4-BE49-F238E27FC236}">
-                <a16:creationId xmlns:a16="http://schemas.microsoft.com/office/drawing/2014/main" id="{98A4D40E-9336-4DC1-95B1-1F9F929799DC}"/>
+                <a16:creationId xmlns:a16="http://schemas.microsoft.com/office/drawing/2014/main" id="{41DA1DC7-075C-4305-A515-F091CC0A0BCE}"/>
               </a:ext>
             </a:extLst>
           </p:cNvPr>
@@ -39172,10 +39172,10 @@
           <p:nvPr/>
         </p:nvPicPr>
         <p:blipFill>
-          <a:blip xmlns:r="http://schemas.openxmlformats.org/officeDocument/2006/relationships" xmlns:a="http://schemas.openxmlformats.org/drawingml/2006/main" r:embed="R20e294256d9c4ecd">
+          <a:blip xmlns:r="http://schemas.openxmlformats.org/officeDocument/2006/relationships" xmlns:a="http://schemas.openxmlformats.org/drawingml/2006/main" r:embed="R142321493d634d8f">
             <a:extLst>
               <a:ext uri="{96DAC541-7B7A-43D3-8B79-37D633B846F1}">
-                <asvg:svgBlip xmlns:asvg="http://schemas.microsoft.com/office/drawing/2016/SVG/main" r:embed="Rdda5fefa20274081"/>
+                <asvg:svgBlip xmlns:asvg="http://schemas.microsoft.com/office/drawing/2016/SVG/main" r:embed="R7fcee42da3aa44fb"/>
               </a:ext>
             </a:extLst>
           </a:blip>
@@ -39196,7 +39196,7 @@
           <p:cNvPr id="13" name="">
             <a:extLst xmlns:a="http://schemas.openxmlformats.org/drawingml/2006/main">
               <a:ext uri="{FF2B5EF4-FFF2-40B4-BE49-F238E27FC236}">
-                <a16:creationId xmlns:a16="http://schemas.microsoft.com/office/drawing/2014/main" id="{16A62828-817A-4FCB-8504-DBFD41ED0994}"/>
+                <a16:creationId xmlns:a16="http://schemas.microsoft.com/office/drawing/2014/main" id="{0A725652-1EBF-4C4B-A0FE-C1BCA6CAFF27}"/>
               </a:ext>
             </a:extLst>
           </p:cNvPr>
@@ -39229,7 +39229,7 @@
           <p:cNvPr id="14" name="">
             <a:extLst xmlns:a="http://schemas.openxmlformats.org/drawingml/2006/main">
               <a:ext uri="{FF2B5EF4-FFF2-40B4-BE49-F238E27FC236}">
-                <a16:creationId xmlns:a16="http://schemas.microsoft.com/office/drawing/2014/main" id="{518D9DE2-8695-42A5-8557-46D08D922720}"/>
+                <a16:creationId xmlns:a16="http://schemas.microsoft.com/office/drawing/2014/main" id="{D96938F1-F649-4145-8F6E-CE2CA3C72032}"/>
               </a:ext>
             </a:extLst>
           </p:cNvPr>
@@ -39281,7 +39281,7 @@
           <p:cNvPr id="15" name="">
             <a:extLst xmlns:a="http://schemas.openxmlformats.org/drawingml/2006/main">
               <a:ext uri="{FF2B5EF4-FFF2-40B4-BE49-F238E27FC236}">
-                <a16:creationId xmlns:a16="http://schemas.microsoft.com/office/drawing/2014/main" id="{AFDB1C03-4C56-49C7-9787-8D554C170870}"/>
+                <a16:creationId xmlns:a16="http://schemas.microsoft.com/office/drawing/2014/main" id="{230D5D79-D93F-4587-8AAA-E7FED21853E3}"/>
               </a:ext>
             </a:extLst>
           </p:cNvPr>
@@ -39314,7 +39314,7 @@
           <p:cNvPr id="16" name="">
             <a:extLst xmlns:a="http://schemas.openxmlformats.org/drawingml/2006/main">
               <a:ext uri="{FF2B5EF4-FFF2-40B4-BE49-F238E27FC236}">
-                <a16:creationId xmlns:a16="http://schemas.microsoft.com/office/drawing/2014/main" id="{55B0C4E2-5A14-47AF-BF43-4847E67754F1}"/>
+                <a16:creationId xmlns:a16="http://schemas.microsoft.com/office/drawing/2014/main" id="{5B5E734B-ECE6-4FB3-BF44-0AB67C330923}"/>
               </a:ext>
             </a:extLst>
           </p:cNvPr>
@@ -39366,7 +39366,7 @@
           <p:cNvPr id="17" name="">
             <a:extLst xmlns:a="http://schemas.openxmlformats.org/drawingml/2006/main">
               <a:ext uri="{FF2B5EF4-FFF2-40B4-BE49-F238E27FC236}">
-                <a16:creationId xmlns:a16="http://schemas.microsoft.com/office/drawing/2014/main" id="{60E61952-1CC0-4E1C-9D11-38D8B3CBFCF0}"/>
+                <a16:creationId xmlns:a16="http://schemas.microsoft.com/office/drawing/2014/main" id="{773EA604-40D1-4C2C-B782-71C6F655EE7C}"/>
               </a:ext>
             </a:extLst>
           </p:cNvPr>
@@ -39399,7 +39399,7 @@
           <p:cNvPr id="18" name="">
             <a:extLst xmlns:a="http://schemas.openxmlformats.org/drawingml/2006/main">
               <a:ext uri="{FF2B5EF4-FFF2-40B4-BE49-F238E27FC236}">
-                <a16:creationId xmlns:a16="http://schemas.microsoft.com/office/drawing/2014/main" id="{A1174DE4-EA9F-4672-8BDB-54CFA9FDD4C0}"/>
+                <a16:creationId xmlns:a16="http://schemas.microsoft.com/office/drawing/2014/main" id="{AE174D5C-06AD-45D1-B45A-A2334CC15EA5}"/>
               </a:ext>
             </a:extLst>
           </p:cNvPr>
@@ -39451,7 +39451,7 @@
           <p:cNvPr id="19" name="">
             <a:extLst xmlns:a="http://schemas.openxmlformats.org/drawingml/2006/main">
               <a:ext uri="{FF2B5EF4-FFF2-40B4-BE49-F238E27FC236}">
-                <a16:creationId xmlns:a16="http://schemas.microsoft.com/office/drawing/2014/main" id="{F638C5FE-4780-4F3A-B37F-A6B414B4D290}"/>
+                <a16:creationId xmlns:a16="http://schemas.microsoft.com/office/drawing/2014/main" id="{874F01EF-B70D-4DAE-A236-5601DBCF1B27}"/>
               </a:ext>
             </a:extLst>
           </p:cNvPr>
@@ -39484,7 +39484,7 @@
           <p:cNvPr id="20" name="">
             <a:extLst xmlns:a="http://schemas.openxmlformats.org/drawingml/2006/main">
               <a:ext uri="{FF2B5EF4-FFF2-40B4-BE49-F238E27FC236}">
-                <a16:creationId xmlns:a16="http://schemas.microsoft.com/office/drawing/2014/main" id="{4E40EE7F-629F-4335-92CA-E2FEE852E4CB}"/>
+                <a16:creationId xmlns:a16="http://schemas.microsoft.com/office/drawing/2014/main" id="{75A51E14-4DB7-42CD-902C-A2EC95452E2D}"/>
               </a:ext>
             </a:extLst>
           </p:cNvPr>
@@ -39536,7 +39536,7 @@
           <p:cNvPr id="21" name="">
             <a:extLst xmlns:a="http://schemas.openxmlformats.org/drawingml/2006/main">
               <a:ext uri="{FF2B5EF4-FFF2-40B4-BE49-F238E27FC236}">
-                <a16:creationId xmlns:a16="http://schemas.microsoft.com/office/drawing/2014/main" id="{6EEB5573-BB44-41BB-87C2-DB8E2C27EE2B}"/>
+                <a16:creationId xmlns:a16="http://schemas.microsoft.com/office/drawing/2014/main" id="{A50FBD54-0727-4BDF-89F4-8049B8F325D5}"/>
               </a:ext>
             </a:extLst>
           </p:cNvPr>
@@ -39569,7 +39569,7 @@
           <p:cNvPr id="22" name="">
             <a:extLst xmlns:a="http://schemas.openxmlformats.org/drawingml/2006/main">
               <a:ext uri="{FF2B5EF4-FFF2-40B4-BE49-F238E27FC236}">
-                <a16:creationId xmlns:a16="http://schemas.microsoft.com/office/drawing/2014/main" id="{1FF71AC0-6B24-4EE4-A7D5-71EE50C741BC}"/>
+                <a16:creationId xmlns:a16="http://schemas.microsoft.com/office/drawing/2014/main" id="{D0C64D5A-BE22-400C-B8E3-22F53845CF76}"/>
               </a:ext>
             </a:extLst>
           </p:cNvPr>
@@ -39621,7 +39621,7 @@
           <p:cNvPr id="23" name="">
             <a:extLst xmlns:a="http://schemas.openxmlformats.org/drawingml/2006/main">
               <a:ext uri="{FF2B5EF4-FFF2-40B4-BE49-F238E27FC236}">
-                <a16:creationId xmlns:a16="http://schemas.microsoft.com/office/drawing/2014/main" id="{C5103A40-697D-4618-9CB5-7FC3EA4098DE}"/>
+                <a16:creationId xmlns:a16="http://schemas.microsoft.com/office/drawing/2014/main" id="{D17CD1CB-50B8-470B-A910-9E18B07638B3}"/>
               </a:ext>
             </a:extLst>
           </p:cNvPr>
@@ -39654,7 +39654,7 @@
           <p:cNvPr id="24" name="">
             <a:extLst xmlns:a="http://schemas.openxmlformats.org/drawingml/2006/main">
               <a:ext uri="{FF2B5EF4-FFF2-40B4-BE49-F238E27FC236}">
-                <a16:creationId xmlns:a16="http://schemas.microsoft.com/office/drawing/2014/main" id="{3ED7BD89-114E-4617-B91A-31E1EB84D901}"/>
+                <a16:creationId xmlns:a16="http://schemas.microsoft.com/office/drawing/2014/main" id="{0044E740-147F-4E27-A4CB-C9954F31415C}"/>
               </a:ext>
             </a:extLst>
           </p:cNvPr>
@@ -39706,7 +39706,7 @@
           <p:cNvPr id="25" name="">
             <a:extLst xmlns:a="http://schemas.openxmlformats.org/drawingml/2006/main">
               <a:ext uri="{FF2B5EF4-FFF2-40B4-BE49-F238E27FC236}">
-                <a16:creationId xmlns:a16="http://schemas.microsoft.com/office/drawing/2014/main" id="{B7F3E462-0F1C-4BBF-A825-5717BF26E784}"/>
+                <a16:creationId xmlns:a16="http://schemas.microsoft.com/office/drawing/2014/main" id="{94407D46-3C02-48AD-8217-C2FE8734CD42}"/>
               </a:ext>
             </a:extLst>
           </p:cNvPr>
@@ -39739,7 +39739,7 @@
           <p:cNvPr id="26" name="">
             <a:extLst xmlns:a="http://schemas.openxmlformats.org/drawingml/2006/main">
               <a:ext uri="{FF2B5EF4-FFF2-40B4-BE49-F238E27FC236}">
-                <a16:creationId xmlns:a16="http://schemas.microsoft.com/office/drawing/2014/main" id="{888C59C3-1BB6-4C6A-AE3D-3402F32ED460}"/>
+                <a16:creationId xmlns:a16="http://schemas.microsoft.com/office/drawing/2014/main" id="{B1168EBC-ED71-4CE4-B091-F15ABE893882}"/>
               </a:ext>
             </a:extLst>
           </p:cNvPr>
@@ -39791,7 +39791,7 @@
           <p:cNvPr id="27" name="">
             <a:extLst xmlns:a="http://schemas.openxmlformats.org/drawingml/2006/main">
               <a:ext uri="{FF2B5EF4-FFF2-40B4-BE49-F238E27FC236}">
-                <a16:creationId xmlns:a16="http://schemas.microsoft.com/office/drawing/2014/main" id="{A069F806-2BE7-416F-944A-6E56F008C06C}"/>
+                <a16:creationId xmlns:a16="http://schemas.microsoft.com/office/drawing/2014/main" id="{996C32F5-3C39-4D0B-B94A-35AB46BC451B}"/>
               </a:ext>
             </a:extLst>
           </p:cNvPr>
@@ -39824,7 +39824,7 @@
           <p:cNvPr id="28" name="">
             <a:extLst xmlns:a="http://schemas.openxmlformats.org/drawingml/2006/main">
               <a:ext uri="{FF2B5EF4-FFF2-40B4-BE49-F238E27FC236}">
-                <a16:creationId xmlns:a16="http://schemas.microsoft.com/office/drawing/2014/main" id="{273EFDD8-608D-4E4C-A24F-EEE02939BAE2}"/>
+                <a16:creationId xmlns:a16="http://schemas.microsoft.com/office/drawing/2014/main" id="{D6EDAB7B-D010-4878-ADAE-5CE9ABD8C0A1}"/>
               </a:ext>
             </a:extLst>
           </p:cNvPr>
@@ -39876,7 +39876,7 @@
           <p:cNvPr id="29" name="">
             <a:extLst xmlns:a="http://schemas.openxmlformats.org/drawingml/2006/main">
               <a:ext uri="{FF2B5EF4-FFF2-40B4-BE49-F238E27FC236}">
-                <a16:creationId xmlns:a16="http://schemas.microsoft.com/office/drawing/2014/main" id="{9EA86DD6-436E-4FEA-A11B-08252F4A69E1}"/>
+                <a16:creationId xmlns:a16="http://schemas.microsoft.com/office/drawing/2014/main" id="{2D9D6606-14FF-48CE-9C65-FBE38811F9CB}"/>
               </a:ext>
             </a:extLst>
           </p:cNvPr>
@@ -39909,7 +39909,7 @@
           <p:cNvPr id="30" name="">
             <a:extLst xmlns:a="http://schemas.openxmlformats.org/drawingml/2006/main">
               <a:ext uri="{FF2B5EF4-FFF2-40B4-BE49-F238E27FC236}">
-                <a16:creationId xmlns:a16="http://schemas.microsoft.com/office/drawing/2014/main" id="{B5357E19-AEB9-4EAD-A120-2960E1ECE38B}"/>
+                <a16:creationId xmlns:a16="http://schemas.microsoft.com/office/drawing/2014/main" id="{7521DFB7-31A5-4F55-AD2C-F2988790BF70}"/>
               </a:ext>
             </a:extLst>
           </p:cNvPr>
@@ -39961,7 +39961,7 @@
           <p:cNvPr id="31" name="">
             <a:extLst xmlns:a="http://schemas.openxmlformats.org/drawingml/2006/main">
               <a:ext uri="{FF2B5EF4-FFF2-40B4-BE49-F238E27FC236}">
-                <a16:creationId xmlns:a16="http://schemas.microsoft.com/office/drawing/2014/main" id="{75923391-B6BA-49C9-9AEB-00736427D796}"/>
+                <a16:creationId xmlns:a16="http://schemas.microsoft.com/office/drawing/2014/main" id="{B056E153-13B6-4D39-88FE-B093BFCA44D6}"/>
               </a:ext>
             </a:extLst>
           </p:cNvPr>
@@ -39994,7 +39994,7 @@
           <p:cNvPr id="32" name="">
             <a:extLst xmlns:a="http://schemas.openxmlformats.org/drawingml/2006/main">
               <a:ext uri="{FF2B5EF4-FFF2-40B4-BE49-F238E27FC236}">
-                <a16:creationId xmlns:a16="http://schemas.microsoft.com/office/drawing/2014/main" id="{8716088C-F87E-4110-BB76-A52F4C2DC2A9}"/>
+                <a16:creationId xmlns:a16="http://schemas.microsoft.com/office/drawing/2014/main" id="{CC947A83-453A-4A90-BC48-CAA2B7BF9AE1}"/>
               </a:ext>
             </a:extLst>
           </p:cNvPr>
@@ -40046,7 +40046,7 @@
           <p:cNvPr id="33" name="">
             <a:extLst xmlns:a="http://schemas.openxmlformats.org/drawingml/2006/main">
               <a:ext uri="{FF2B5EF4-FFF2-40B4-BE49-F238E27FC236}">
-                <a16:creationId xmlns:a16="http://schemas.microsoft.com/office/drawing/2014/main" id="{061AF3BD-4620-4C5E-BEB3-E2931B8633C1}"/>
+                <a16:creationId xmlns:a16="http://schemas.microsoft.com/office/drawing/2014/main" id="{48CE1857-6D4E-4E9E-9409-F0C7B3B4FDA1}"/>
               </a:ext>
             </a:extLst>
           </p:cNvPr>
@@ -40079,7 +40079,7 @@
           <p:cNvPr id="34" name="">
             <a:extLst xmlns:a="http://schemas.openxmlformats.org/drawingml/2006/main">
               <a:ext uri="{FF2B5EF4-FFF2-40B4-BE49-F238E27FC236}">
-                <a16:creationId xmlns:a16="http://schemas.microsoft.com/office/drawing/2014/main" id="{CF7A6ED0-A4ED-4D5D-99BB-00E2CD25D40B}"/>
+                <a16:creationId xmlns:a16="http://schemas.microsoft.com/office/drawing/2014/main" id="{26436E1A-6012-4AC4-8BAA-BA1854FD9699}"/>
               </a:ext>
             </a:extLst>
           </p:cNvPr>
@@ -40129,7 +40129,7 @@
     </p:spTree>
     <p:extLst>
       <p:ext uri="{BB962C8B-B14F-4D97-AF65-F5344CB8AC3E}">
-        <p14:creationId xmlns:p14="http://schemas.microsoft.com/office/powerpoint/2010/main" val="1314069070"/>
+        <p14:creationId xmlns:p14="http://schemas.microsoft.com/office/powerpoint/2010/main" val="431962935"/>
       </p:ext>
     </p:extLst>
   </p:cSld>
@@ -40160,7 +40160,7 @@
           <p:cNvPr id="102" name="">
             <a:extLst xmlns:a="http://schemas.openxmlformats.org/drawingml/2006/main">
               <a:ext uri="{FF2B5EF4-FFF2-40B4-BE49-F238E27FC236}">
-                <a16:creationId xmlns:a16="http://schemas.microsoft.com/office/drawing/2014/main" id="{05C9EC76-B324-4D8B-A479-5495EF76232A}"/>
+                <a16:creationId xmlns:a16="http://schemas.microsoft.com/office/drawing/2014/main" id="{22495A7A-2F93-4D2A-B682-C04600491F8B}"/>
               </a:ext>
             </a:extLst>
           </p:cNvPr>
@@ -40193,7 +40193,7 @@
           <p:cNvPr id="2" name="">
             <a:extLst xmlns:a="http://schemas.openxmlformats.org/drawingml/2006/main">
               <a:ext uri="{FF2B5EF4-FFF2-40B4-BE49-F238E27FC236}">
-                <a16:creationId xmlns:a16="http://schemas.microsoft.com/office/drawing/2014/main" id="{C235D068-7840-4873-A9E4-33D9D594DDE4}"/>
+                <a16:creationId xmlns:a16="http://schemas.microsoft.com/office/drawing/2014/main" id="{53055F06-82CB-49AC-8291-8937DD1DF78E}"/>
               </a:ext>
             </a:extLst>
           </p:cNvPr>
@@ -40224,7 +40224,7 @@
           <p:cNvPr id="3" name="">
             <a:extLst xmlns:a="http://schemas.openxmlformats.org/drawingml/2006/main">
               <a:ext uri="{FF2B5EF4-FFF2-40B4-BE49-F238E27FC236}">
-                <a16:creationId xmlns:a16="http://schemas.microsoft.com/office/drawing/2014/main" id="{ADB2A72F-8209-4694-B64C-9DEFE5E57AA2}"/>
+                <a16:creationId xmlns:a16="http://schemas.microsoft.com/office/drawing/2014/main" id="{A8AEBA19-9686-4358-9248-1D058815E586}"/>
               </a:ext>
             </a:extLst>
           </p:cNvPr>
@@ -40276,7 +40276,7 @@
           <p:cNvPr id="4" name="">
             <a:extLst xmlns:a="http://schemas.openxmlformats.org/drawingml/2006/main">
               <a:ext uri="{FF2B5EF4-FFF2-40B4-BE49-F238E27FC236}">
-                <a16:creationId xmlns:a16="http://schemas.microsoft.com/office/drawing/2014/main" id="{D7406845-0C79-4615-8E51-D66745E063D9}"/>
+                <a16:creationId xmlns:a16="http://schemas.microsoft.com/office/drawing/2014/main" id="{7F63BCF6-F511-4900-8D5A-38168B1C827B}"/>
               </a:ext>
             </a:extLst>
           </p:cNvPr>
@@ -40328,7 +40328,7 @@
           <p:cNvPr id="5" name="">
             <a:extLst xmlns:a="http://schemas.openxmlformats.org/drawingml/2006/main">
               <a:ext uri="{FF2B5EF4-FFF2-40B4-BE49-F238E27FC236}">
-                <a16:creationId xmlns:a16="http://schemas.microsoft.com/office/drawing/2014/main" id="{02EAE07F-8540-4EB7-A78A-E4903C466A7A}"/>
+                <a16:creationId xmlns:a16="http://schemas.microsoft.com/office/drawing/2014/main" id="{CE0F4FAB-AF03-4493-B018-603099389DDB}"/>
               </a:ext>
             </a:extLst>
           </p:cNvPr>
@@ -40363,7 +40363,7 @@
           <p:nvPr/>
         </p:nvPicPr>
         <p:blipFill>
-          <a:blip xmlns:r="http://schemas.openxmlformats.org/officeDocument/2006/relationships" xmlns:a="http://schemas.openxmlformats.org/drawingml/2006/main" r:embed="R827e62ccfcc349ce"/>
+          <a:blip xmlns:r="http://schemas.openxmlformats.org/officeDocument/2006/relationships" xmlns:a="http://schemas.openxmlformats.org/drawingml/2006/main" r:embed="R585a3f83822c4033"/>
           <a:stretch xmlns:a="http://schemas.openxmlformats.org/drawingml/2006/main"/>
         </p:blipFill>
         <p:spPr>
@@ -40381,7 +40381,7 @@
           <p:cNvPr id="7" name="">
             <a:extLst xmlns:a="http://schemas.openxmlformats.org/drawingml/2006/main">
               <a:ext uri="{FF2B5EF4-FFF2-40B4-BE49-F238E27FC236}">
-                <a16:creationId xmlns:a16="http://schemas.microsoft.com/office/drawing/2014/main" id="{70F3AECB-0D88-445B-B067-67012C80F074}"/>
+                <a16:creationId xmlns:a16="http://schemas.microsoft.com/office/drawing/2014/main" id="{5031F249-E66C-46CC-8CB0-85809D3B3069}"/>
               </a:ext>
             </a:extLst>
           </p:cNvPr>
@@ -40433,7 +40433,7 @@
           <p:cNvPr id="8" name="">
             <a:extLst xmlns:a="http://schemas.openxmlformats.org/drawingml/2006/main">
               <a:ext uri="{FF2B5EF4-FFF2-40B4-BE49-F238E27FC236}">
-                <a16:creationId xmlns:a16="http://schemas.microsoft.com/office/drawing/2014/main" id="{1147CEE6-BF03-4153-8F1F-F7DD3EFFF77A}"/>
+                <a16:creationId xmlns:a16="http://schemas.microsoft.com/office/drawing/2014/main" id="{ECDA993A-0867-4E6A-B432-C2435AAEC037}"/>
               </a:ext>
             </a:extLst>
           </p:cNvPr>
@@ -40485,7 +40485,7 @@
           <p:cNvPr id="9" name="">
             <a:extLst xmlns:a="http://schemas.openxmlformats.org/drawingml/2006/main">
               <a:ext uri="{FF2B5EF4-FFF2-40B4-BE49-F238E27FC236}">
-                <a16:creationId xmlns:a16="http://schemas.microsoft.com/office/drawing/2014/main" id="{57F3FF45-0413-4C5D-8931-27B23FF9D2C2}"/>
+                <a16:creationId xmlns:a16="http://schemas.microsoft.com/office/drawing/2014/main" id="{F733A8CD-B3EE-4A92-8665-EB92DD0F7D18}"/>
               </a:ext>
             </a:extLst>
           </p:cNvPr>
@@ -40537,7 +40537,7 @@
           <p:cNvPr id="10" name="">
             <a:extLst xmlns:a="http://schemas.openxmlformats.org/drawingml/2006/main">
               <a:ext uri="{FF2B5EF4-FFF2-40B4-BE49-F238E27FC236}">
-                <a16:creationId xmlns:a16="http://schemas.microsoft.com/office/drawing/2014/main" id="{F9430D00-729B-4891-AB6B-B3F8C70215DB}"/>
+                <a16:creationId xmlns:a16="http://schemas.microsoft.com/office/drawing/2014/main" id="{19F79B16-E069-4604-A46D-6F20FEC860D2}"/>
               </a:ext>
             </a:extLst>
           </p:cNvPr>
@@ -40589,7 +40589,7 @@
           <p:cNvPr id="11" name="">
             <a:extLst xmlns:a="http://schemas.openxmlformats.org/drawingml/2006/main">
               <a:ext uri="{FF2B5EF4-FFF2-40B4-BE49-F238E27FC236}">
-                <a16:creationId xmlns:a16="http://schemas.microsoft.com/office/drawing/2014/main" id="{9A241457-BEC9-49B8-884C-C5735B0C4CFF}"/>
+                <a16:creationId xmlns:a16="http://schemas.microsoft.com/office/drawing/2014/main" id="{ED57CC2E-4912-4D96-A449-E78FDF01F101}"/>
               </a:ext>
             </a:extLst>
           </p:cNvPr>
@@ -40620,7 +40620,7 @@
           <p:cNvPr id="12" name="">
             <a:extLst xmlns:a="http://schemas.openxmlformats.org/drawingml/2006/main">
               <a:ext uri="{FF2B5EF4-FFF2-40B4-BE49-F238E27FC236}">
-                <a16:creationId xmlns:a16="http://schemas.microsoft.com/office/drawing/2014/main" id="{F662BC6C-3109-4B58-96A9-655D476EB081}"/>
+                <a16:creationId xmlns:a16="http://schemas.microsoft.com/office/drawing/2014/main" id="{6E53F7B0-C485-4716-9818-DCCFC69398BD}"/>
               </a:ext>
             </a:extLst>
           </p:cNvPr>
@@ -40651,7 +40651,7 @@
           <p:cNvPr id="13" name="">
             <a:extLst xmlns:a="http://schemas.openxmlformats.org/drawingml/2006/main">
               <a:ext uri="{FF2B5EF4-FFF2-40B4-BE49-F238E27FC236}">
-                <a16:creationId xmlns:a16="http://schemas.microsoft.com/office/drawing/2014/main" id="{B658F787-EE10-4F1D-9ED5-1A968363400F}"/>
+                <a16:creationId xmlns:a16="http://schemas.microsoft.com/office/drawing/2014/main" id="{31725A0A-8DA2-492E-9855-0A9D0567D829}"/>
               </a:ext>
             </a:extLst>
           </p:cNvPr>
@@ -40703,7 +40703,7 @@
           <p:cNvPr id="14" name="">
             <a:extLst xmlns:a="http://schemas.openxmlformats.org/drawingml/2006/main">
               <a:ext uri="{FF2B5EF4-FFF2-40B4-BE49-F238E27FC236}">
-                <a16:creationId xmlns:a16="http://schemas.microsoft.com/office/drawing/2014/main" id="{2A412604-84C7-489D-B7C4-3935066D66EB}"/>
+                <a16:creationId xmlns:a16="http://schemas.microsoft.com/office/drawing/2014/main" id="{C6663852-900D-4F34-81FC-6342D6186A9F}"/>
               </a:ext>
             </a:extLst>
           </p:cNvPr>
@@ -40755,7 +40755,7 @@
           <p:cNvPr id="15" name="">
             <a:extLst xmlns:a="http://schemas.openxmlformats.org/drawingml/2006/main">
               <a:ext uri="{FF2B5EF4-FFF2-40B4-BE49-F238E27FC236}">
-                <a16:creationId xmlns:a16="http://schemas.microsoft.com/office/drawing/2014/main" id="{EE8838CA-8084-41A7-AE6F-BB082BEC767C}"/>
+                <a16:creationId xmlns:a16="http://schemas.microsoft.com/office/drawing/2014/main" id="{E3D3F2E6-68D4-4120-B766-5F68981A8E6D}"/>
               </a:ext>
             </a:extLst>
           </p:cNvPr>
@@ -40807,7 +40807,7 @@
           <p:cNvPr id="16" name="">
             <a:extLst xmlns:a="http://schemas.openxmlformats.org/drawingml/2006/main">
               <a:ext uri="{FF2B5EF4-FFF2-40B4-BE49-F238E27FC236}">
-                <a16:creationId xmlns:a16="http://schemas.microsoft.com/office/drawing/2014/main" id="{61265642-B12A-45DE-8BAC-50CEBA51705E}"/>
+                <a16:creationId xmlns:a16="http://schemas.microsoft.com/office/drawing/2014/main" id="{F7C208FF-B143-4686-8806-3AB828A4EAC7}"/>
               </a:ext>
             </a:extLst>
           </p:cNvPr>
@@ -40859,7 +40859,7 @@
           <p:cNvPr id="17" name="">
             <a:extLst xmlns:a="http://schemas.openxmlformats.org/drawingml/2006/main">
               <a:ext uri="{FF2B5EF4-FFF2-40B4-BE49-F238E27FC236}">
-                <a16:creationId xmlns:a16="http://schemas.microsoft.com/office/drawing/2014/main" id="{A968942A-65BD-4AC1-90ED-382696F7F345}"/>
+                <a16:creationId xmlns:a16="http://schemas.microsoft.com/office/drawing/2014/main" id="{4D1C094E-EB04-4B95-A595-D25C3775C7B7}"/>
               </a:ext>
             </a:extLst>
           </p:cNvPr>
@@ -40911,7 +40911,7 @@
           <p:cNvPr id="18" name="">
             <a:extLst xmlns:a="http://schemas.openxmlformats.org/drawingml/2006/main">
               <a:ext uri="{FF2B5EF4-FFF2-40B4-BE49-F238E27FC236}">
-                <a16:creationId xmlns:a16="http://schemas.microsoft.com/office/drawing/2014/main" id="{7C726A12-0449-41AE-A815-876B7C44C0FD}"/>
+                <a16:creationId xmlns:a16="http://schemas.microsoft.com/office/drawing/2014/main" id="{837E6989-BF1D-44D8-AC37-C07FB92B7FEC}"/>
               </a:ext>
             </a:extLst>
           </p:cNvPr>
@@ -40942,7 +40942,7 @@
           <p:cNvPr id="19" name="">
             <a:extLst xmlns:a="http://schemas.openxmlformats.org/drawingml/2006/main">
               <a:ext uri="{FF2B5EF4-FFF2-40B4-BE49-F238E27FC236}">
-                <a16:creationId xmlns:a16="http://schemas.microsoft.com/office/drawing/2014/main" id="{BCB9FDB3-ED75-436D-9282-E69EFA1B8A8E}"/>
+                <a16:creationId xmlns:a16="http://schemas.microsoft.com/office/drawing/2014/main" id="{8BF77703-124D-4C44-A28D-17892341B80A}"/>
               </a:ext>
             </a:extLst>
           </p:cNvPr>
@@ -40994,7 +40994,7 @@
           <p:cNvPr id="20" name="">
             <a:extLst xmlns:a="http://schemas.openxmlformats.org/drawingml/2006/main">
               <a:ext uri="{FF2B5EF4-FFF2-40B4-BE49-F238E27FC236}">
-                <a16:creationId xmlns:a16="http://schemas.microsoft.com/office/drawing/2014/main" id="{06F3D27E-DD71-421C-B084-BB9373096CFA}"/>
+                <a16:creationId xmlns:a16="http://schemas.microsoft.com/office/drawing/2014/main" id="{C49F3910-9428-4A59-B252-7A7ADA1DA2FC}"/>
               </a:ext>
             </a:extLst>
           </p:cNvPr>
@@ -41046,7 +41046,7 @@
           <p:cNvPr id="21" name="">
             <a:extLst xmlns:a="http://schemas.openxmlformats.org/drawingml/2006/main">
               <a:ext uri="{FF2B5EF4-FFF2-40B4-BE49-F238E27FC236}">
-                <a16:creationId xmlns:a16="http://schemas.microsoft.com/office/drawing/2014/main" id="{4569FA99-9082-43F6-AA6D-8575A2F9AC60}"/>
+                <a16:creationId xmlns:a16="http://schemas.microsoft.com/office/drawing/2014/main" id="{8FD42F16-EA31-4089-A403-DE4B6A2C242E}"/>
               </a:ext>
             </a:extLst>
           </p:cNvPr>
@@ -41098,7 +41098,7 @@
           <p:cNvPr id="22" name="">
             <a:extLst xmlns:a="http://schemas.openxmlformats.org/drawingml/2006/main">
               <a:ext uri="{FF2B5EF4-FFF2-40B4-BE49-F238E27FC236}">
-                <a16:creationId xmlns:a16="http://schemas.microsoft.com/office/drawing/2014/main" id="{0563EE3C-3B41-4F53-AF76-8F65B28F3A58}"/>
+                <a16:creationId xmlns:a16="http://schemas.microsoft.com/office/drawing/2014/main" id="{CDF97E6B-37D8-43D5-B8D8-640BC51F34CA}"/>
               </a:ext>
             </a:extLst>
           </p:cNvPr>
@@ -41150,7 +41150,7 @@
           <p:cNvPr id="23" name="">
             <a:extLst xmlns:a="http://schemas.openxmlformats.org/drawingml/2006/main">
               <a:ext uri="{FF2B5EF4-FFF2-40B4-BE49-F238E27FC236}">
-                <a16:creationId xmlns:a16="http://schemas.microsoft.com/office/drawing/2014/main" id="{2EFDAC9F-9E2B-44BD-92C5-06229DCF80F3}"/>
+                <a16:creationId xmlns:a16="http://schemas.microsoft.com/office/drawing/2014/main" id="{19176790-A46B-47B0-BAFE-AA7B1FB31666}"/>
               </a:ext>
             </a:extLst>
           </p:cNvPr>
@@ -41202,7 +41202,7 @@
           <p:cNvPr id="24" name="">
             <a:extLst xmlns:a="http://schemas.openxmlformats.org/drawingml/2006/main">
               <a:ext uri="{FF2B5EF4-FFF2-40B4-BE49-F238E27FC236}">
-                <a16:creationId xmlns:a16="http://schemas.microsoft.com/office/drawing/2014/main" id="{961013BB-D55A-4163-AC30-D1CDC1961470}"/>
+                <a16:creationId xmlns:a16="http://schemas.microsoft.com/office/drawing/2014/main" id="{F52F37F9-B1FC-4331-BC23-2A5269811F3B}"/>
               </a:ext>
             </a:extLst>
           </p:cNvPr>
@@ -41233,7 +41233,7 @@
           <p:cNvPr id="25" name="">
             <a:extLst xmlns:a="http://schemas.openxmlformats.org/drawingml/2006/main">
               <a:ext uri="{FF2B5EF4-FFF2-40B4-BE49-F238E27FC236}">
-                <a16:creationId xmlns:a16="http://schemas.microsoft.com/office/drawing/2014/main" id="{3A247BD5-C34C-4BD8-B4DF-C93ABE410C9D}"/>
+                <a16:creationId xmlns:a16="http://schemas.microsoft.com/office/drawing/2014/main" id="{E907437F-C85E-4DFA-AB4F-03C79CCD282D}"/>
               </a:ext>
             </a:extLst>
           </p:cNvPr>
@@ -41264,7 +41264,7 @@
           <p:cNvPr id="26" name="">
             <a:extLst xmlns:a="http://schemas.openxmlformats.org/drawingml/2006/main">
               <a:ext uri="{FF2B5EF4-FFF2-40B4-BE49-F238E27FC236}">
-                <a16:creationId xmlns:a16="http://schemas.microsoft.com/office/drawing/2014/main" id="{CA3A7687-4FC0-4528-B2AA-74F880A8A00A}"/>
+                <a16:creationId xmlns:a16="http://schemas.microsoft.com/office/drawing/2014/main" id="{B159B38E-3331-4B22-842D-AADAD0DE363A}"/>
               </a:ext>
             </a:extLst>
           </p:cNvPr>
@@ -41316,7 +41316,7 @@
           <p:cNvPr id="27" name="">
             <a:extLst xmlns:a="http://schemas.openxmlformats.org/drawingml/2006/main">
               <a:ext uri="{FF2B5EF4-FFF2-40B4-BE49-F238E27FC236}">
-                <a16:creationId xmlns:a16="http://schemas.microsoft.com/office/drawing/2014/main" id="{FA5CFE03-248C-4B0F-92A8-3EB0008393D8}"/>
+                <a16:creationId xmlns:a16="http://schemas.microsoft.com/office/drawing/2014/main" id="{B9A84E5C-B045-435F-B44B-4DDC3FCDC501}"/>
               </a:ext>
             </a:extLst>
           </p:cNvPr>
@@ -41368,7 +41368,7 @@
           <p:cNvPr id="28" name="">
             <a:extLst xmlns:a="http://schemas.openxmlformats.org/drawingml/2006/main">
               <a:ext uri="{FF2B5EF4-FFF2-40B4-BE49-F238E27FC236}">
-                <a16:creationId xmlns:a16="http://schemas.microsoft.com/office/drawing/2014/main" id="{3EE7F760-AE02-4D0B-89D8-D5729E83CAA2}"/>
+                <a16:creationId xmlns:a16="http://schemas.microsoft.com/office/drawing/2014/main" id="{BE42B383-1895-4EF1-9300-514817D38F5F}"/>
               </a:ext>
             </a:extLst>
           </p:cNvPr>
@@ -41420,7 +41420,7 @@
           <p:cNvPr id="29" name="">
             <a:extLst xmlns:a="http://schemas.openxmlformats.org/drawingml/2006/main">
               <a:ext uri="{FF2B5EF4-FFF2-40B4-BE49-F238E27FC236}">
-                <a16:creationId xmlns:a16="http://schemas.microsoft.com/office/drawing/2014/main" id="{68E541A4-0D4D-46EB-9FB2-5A46A37D805A}"/>
+                <a16:creationId xmlns:a16="http://schemas.microsoft.com/office/drawing/2014/main" id="{DD04E582-6D2A-4637-AAA1-45B34256B121}"/>
               </a:ext>
             </a:extLst>
           </p:cNvPr>
@@ -41472,7 +41472,7 @@
           <p:cNvPr id="30" name="">
             <a:extLst xmlns:a="http://schemas.openxmlformats.org/drawingml/2006/main">
               <a:ext uri="{FF2B5EF4-FFF2-40B4-BE49-F238E27FC236}">
-                <a16:creationId xmlns:a16="http://schemas.microsoft.com/office/drawing/2014/main" id="{7AFD4FCD-1EA2-4561-92CB-B77985E64ACD}"/>
+                <a16:creationId xmlns:a16="http://schemas.microsoft.com/office/drawing/2014/main" id="{0A2CCD55-EFEE-4067-A913-2B5291B7F73A}"/>
               </a:ext>
             </a:extLst>
           </p:cNvPr>
@@ -41524,7 +41524,7 @@
           <p:cNvPr id="31" name="">
             <a:extLst xmlns:a="http://schemas.openxmlformats.org/drawingml/2006/main">
               <a:ext uri="{FF2B5EF4-FFF2-40B4-BE49-F238E27FC236}">
-                <a16:creationId xmlns:a16="http://schemas.microsoft.com/office/drawing/2014/main" id="{100FDDE8-7896-4D32-A848-C9D4F4641749}"/>
+                <a16:creationId xmlns:a16="http://schemas.microsoft.com/office/drawing/2014/main" id="{03612484-41BF-4B39-8B4E-DCF4E065E5B6}"/>
               </a:ext>
             </a:extLst>
           </p:cNvPr>
@@ -41555,7 +41555,7 @@
           <p:cNvPr id="32" name="">
             <a:extLst xmlns:a="http://schemas.openxmlformats.org/drawingml/2006/main">
               <a:ext uri="{FF2B5EF4-FFF2-40B4-BE49-F238E27FC236}">
-                <a16:creationId xmlns:a16="http://schemas.microsoft.com/office/drawing/2014/main" id="{C0ACAE90-5EFB-4FAE-A43C-8EDAE736773B}"/>
+                <a16:creationId xmlns:a16="http://schemas.microsoft.com/office/drawing/2014/main" id="{6B655A59-549F-41C4-8122-F84E42D0FD77}"/>
               </a:ext>
             </a:extLst>
           </p:cNvPr>
@@ -41607,7 +41607,7 @@
           <p:cNvPr id="33" name="">
             <a:extLst xmlns:a="http://schemas.openxmlformats.org/drawingml/2006/main">
               <a:ext uri="{FF2B5EF4-FFF2-40B4-BE49-F238E27FC236}">
-                <a16:creationId xmlns:a16="http://schemas.microsoft.com/office/drawing/2014/main" id="{CDD1E4D2-1F5F-40D4-8743-3BA9C204836B}"/>
+                <a16:creationId xmlns:a16="http://schemas.microsoft.com/office/drawing/2014/main" id="{94731614-E5EF-4D49-8929-9F7E61B2247D}"/>
               </a:ext>
             </a:extLst>
           </p:cNvPr>
@@ -41659,7 +41659,7 @@
           <p:cNvPr id="34" name="">
             <a:extLst xmlns:a="http://schemas.openxmlformats.org/drawingml/2006/main">
               <a:ext uri="{FF2B5EF4-FFF2-40B4-BE49-F238E27FC236}">
-                <a16:creationId xmlns:a16="http://schemas.microsoft.com/office/drawing/2014/main" id="{4E6B1477-18BE-4C66-BE3B-683A003CB465}"/>
+                <a16:creationId xmlns:a16="http://schemas.microsoft.com/office/drawing/2014/main" id="{7726DE3B-B407-4022-881E-9CB91E3597F3}"/>
               </a:ext>
             </a:extLst>
           </p:cNvPr>
@@ -41711,7 +41711,7 @@
           <p:cNvPr id="35" name="">
             <a:extLst xmlns:a="http://schemas.openxmlformats.org/drawingml/2006/main">
               <a:ext uri="{FF2B5EF4-FFF2-40B4-BE49-F238E27FC236}">
-                <a16:creationId xmlns:a16="http://schemas.microsoft.com/office/drawing/2014/main" id="{3F64F341-F259-46C3-B88B-4C726E4FC584}"/>
+                <a16:creationId xmlns:a16="http://schemas.microsoft.com/office/drawing/2014/main" id="{A6631EED-DA92-4D6F-A2F2-FFB337F2573E}"/>
               </a:ext>
             </a:extLst>
           </p:cNvPr>
@@ -41763,7 +41763,7 @@
           <p:cNvPr id="36" name="">
             <a:extLst xmlns:a="http://schemas.openxmlformats.org/drawingml/2006/main">
               <a:ext uri="{FF2B5EF4-FFF2-40B4-BE49-F238E27FC236}">
-                <a16:creationId xmlns:a16="http://schemas.microsoft.com/office/drawing/2014/main" id="{6141CFE1-AF38-4EDF-9BE0-32227DF7B8E9}"/>
+                <a16:creationId xmlns:a16="http://schemas.microsoft.com/office/drawing/2014/main" id="{740C05D0-4F58-4D4C-8B73-A44A6A0DB6EB}"/>
               </a:ext>
             </a:extLst>
           </p:cNvPr>
@@ -41815,7 +41815,7 @@
           <p:cNvPr id="37" name="">
             <a:extLst xmlns:a="http://schemas.openxmlformats.org/drawingml/2006/main">
               <a:ext uri="{FF2B5EF4-FFF2-40B4-BE49-F238E27FC236}">
-                <a16:creationId xmlns:a16="http://schemas.microsoft.com/office/drawing/2014/main" id="{655EB7B7-2037-4E00-9EBD-16C0E3996125}"/>
+                <a16:creationId xmlns:a16="http://schemas.microsoft.com/office/drawing/2014/main" id="{322D7D02-61D3-4049-8D94-1ED0C7BA1A8E}"/>
               </a:ext>
             </a:extLst>
           </p:cNvPr>
@@ -41846,7 +41846,7 @@
           <p:cNvPr id="38" name="">
             <a:extLst xmlns:a="http://schemas.openxmlformats.org/drawingml/2006/main">
               <a:ext uri="{FF2B5EF4-FFF2-40B4-BE49-F238E27FC236}">
-                <a16:creationId xmlns:a16="http://schemas.microsoft.com/office/drawing/2014/main" id="{32487D57-493B-4743-A091-52554949FF65}"/>
+                <a16:creationId xmlns:a16="http://schemas.microsoft.com/office/drawing/2014/main" id="{9579FE0A-5636-474F-9F87-488267C217CF}"/>
               </a:ext>
             </a:extLst>
           </p:cNvPr>
@@ -41877,7 +41877,7 @@
           <p:cNvPr id="39" name="">
             <a:extLst xmlns:a="http://schemas.openxmlformats.org/drawingml/2006/main">
               <a:ext uri="{FF2B5EF4-FFF2-40B4-BE49-F238E27FC236}">
-                <a16:creationId xmlns:a16="http://schemas.microsoft.com/office/drawing/2014/main" id="{2D39AD28-6B4B-42D8-A8DC-07C7C1B5786F}"/>
+                <a16:creationId xmlns:a16="http://schemas.microsoft.com/office/drawing/2014/main" id="{0E4F7632-BC84-4915-8A0E-7628E10DE980}"/>
               </a:ext>
             </a:extLst>
           </p:cNvPr>
@@ -41929,7 +41929,7 @@
           <p:cNvPr id="40" name="">
             <a:extLst xmlns:a="http://schemas.openxmlformats.org/drawingml/2006/main">
               <a:ext uri="{FF2B5EF4-FFF2-40B4-BE49-F238E27FC236}">
-                <a16:creationId xmlns:a16="http://schemas.microsoft.com/office/drawing/2014/main" id="{70060235-5358-4FE9-A25D-FADE692FA677}"/>
+                <a16:creationId xmlns:a16="http://schemas.microsoft.com/office/drawing/2014/main" id="{E7287D3F-677C-495E-9874-3E86AA7C1216}"/>
               </a:ext>
             </a:extLst>
           </p:cNvPr>
@@ -41981,7 +41981,7 @@
           <p:cNvPr id="41" name="">
             <a:extLst xmlns:a="http://schemas.openxmlformats.org/drawingml/2006/main">
               <a:ext uri="{FF2B5EF4-FFF2-40B4-BE49-F238E27FC236}">
-                <a16:creationId xmlns:a16="http://schemas.microsoft.com/office/drawing/2014/main" id="{A140C1FC-FEE2-4A67-966C-174B0E485B6E}"/>
+                <a16:creationId xmlns:a16="http://schemas.microsoft.com/office/drawing/2014/main" id="{CA24C8F1-D268-465D-ADC3-329F022FA3AE}"/>
               </a:ext>
             </a:extLst>
           </p:cNvPr>
@@ -42033,7 +42033,7 @@
           <p:cNvPr id="42" name="">
             <a:extLst xmlns:a="http://schemas.openxmlformats.org/drawingml/2006/main">
               <a:ext uri="{FF2B5EF4-FFF2-40B4-BE49-F238E27FC236}">
-                <a16:creationId xmlns:a16="http://schemas.microsoft.com/office/drawing/2014/main" id="{53854A78-A4E0-4CA9-B597-62F7F22A3D8A}"/>
+                <a16:creationId xmlns:a16="http://schemas.microsoft.com/office/drawing/2014/main" id="{528F0D6B-D3F1-4301-9F93-E89B2EEA868F}"/>
               </a:ext>
             </a:extLst>
           </p:cNvPr>
@@ -42085,7 +42085,7 @@
           <p:cNvPr id="43" name="">
             <a:extLst xmlns:a="http://schemas.openxmlformats.org/drawingml/2006/main">
               <a:ext uri="{FF2B5EF4-FFF2-40B4-BE49-F238E27FC236}">
-                <a16:creationId xmlns:a16="http://schemas.microsoft.com/office/drawing/2014/main" id="{785B2885-349F-4DF0-9118-0FA27274D673}"/>
+                <a16:creationId xmlns:a16="http://schemas.microsoft.com/office/drawing/2014/main" id="{958A8D7B-7F11-4351-AF3A-219D150F0B43}"/>
               </a:ext>
             </a:extLst>
           </p:cNvPr>
@@ -42137,7 +42137,7 @@
           <p:cNvPr id="44" name="">
             <a:extLst xmlns:a="http://schemas.openxmlformats.org/drawingml/2006/main">
               <a:ext uri="{FF2B5EF4-FFF2-40B4-BE49-F238E27FC236}">
-                <a16:creationId xmlns:a16="http://schemas.microsoft.com/office/drawing/2014/main" id="{92FE766D-9A99-43EF-9A0C-4361918DEF24}"/>
+                <a16:creationId xmlns:a16="http://schemas.microsoft.com/office/drawing/2014/main" id="{162731EA-72FF-4EDC-9438-D80854B2B798}"/>
               </a:ext>
             </a:extLst>
           </p:cNvPr>
@@ -42168,7 +42168,7 @@
           <p:cNvPr id="45" name="">
             <a:extLst xmlns:a="http://schemas.openxmlformats.org/drawingml/2006/main">
               <a:ext uri="{FF2B5EF4-FFF2-40B4-BE49-F238E27FC236}">
-                <a16:creationId xmlns:a16="http://schemas.microsoft.com/office/drawing/2014/main" id="{C7C3EC57-0F10-4700-AF94-D2BB6977AFFC}"/>
+                <a16:creationId xmlns:a16="http://schemas.microsoft.com/office/drawing/2014/main" id="{DFD8A990-0813-4A09-A61E-78A3DAD9F9EF}"/>
               </a:ext>
             </a:extLst>
           </p:cNvPr>
@@ -42220,7 +42220,7 @@
           <p:cNvPr id="46" name="">
             <a:extLst xmlns:a="http://schemas.openxmlformats.org/drawingml/2006/main">
               <a:ext uri="{FF2B5EF4-FFF2-40B4-BE49-F238E27FC236}">
-                <a16:creationId xmlns:a16="http://schemas.microsoft.com/office/drawing/2014/main" id="{6F4FD3DD-58B2-4C71-80BB-DF9472EEAF09}"/>
+                <a16:creationId xmlns:a16="http://schemas.microsoft.com/office/drawing/2014/main" id="{7454F986-6FFB-4866-AB86-808EFF88DCD3}"/>
               </a:ext>
             </a:extLst>
           </p:cNvPr>
@@ -42272,7 +42272,7 @@
           <p:cNvPr id="47" name="">
             <a:extLst xmlns:a="http://schemas.openxmlformats.org/drawingml/2006/main">
               <a:ext uri="{FF2B5EF4-FFF2-40B4-BE49-F238E27FC236}">
-                <a16:creationId xmlns:a16="http://schemas.microsoft.com/office/drawing/2014/main" id="{055FCF10-4432-4550-9691-C6FF3964E0FA}"/>
+                <a16:creationId xmlns:a16="http://schemas.microsoft.com/office/drawing/2014/main" id="{789B87B1-519B-4CE5-9B64-ED835C347CAD}"/>
               </a:ext>
             </a:extLst>
           </p:cNvPr>
@@ -42324,7 +42324,7 @@
           <p:cNvPr id="48" name="">
             <a:extLst xmlns:a="http://schemas.openxmlformats.org/drawingml/2006/main">
               <a:ext uri="{FF2B5EF4-FFF2-40B4-BE49-F238E27FC236}">
-                <a16:creationId xmlns:a16="http://schemas.microsoft.com/office/drawing/2014/main" id="{CCB6F1AD-DD54-48AB-8787-86B0CB8A0728}"/>
+                <a16:creationId xmlns:a16="http://schemas.microsoft.com/office/drawing/2014/main" id="{F905444F-0669-434C-AD14-473EC4A8CC51}"/>
               </a:ext>
             </a:extLst>
           </p:cNvPr>
@@ -42376,7 +42376,7 @@
           <p:cNvPr id="49" name="">
             <a:extLst xmlns:a="http://schemas.openxmlformats.org/drawingml/2006/main">
               <a:ext uri="{FF2B5EF4-FFF2-40B4-BE49-F238E27FC236}">
-                <a16:creationId xmlns:a16="http://schemas.microsoft.com/office/drawing/2014/main" id="{17213A4B-801C-4F01-A52E-8E6D21723881}"/>
+                <a16:creationId xmlns:a16="http://schemas.microsoft.com/office/drawing/2014/main" id="{0AF53560-2028-45FF-B483-889557534191}"/>
               </a:ext>
             </a:extLst>
           </p:cNvPr>
@@ -42428,7 +42428,7 @@
           <p:cNvPr id="50" name="">
             <a:extLst xmlns:a="http://schemas.openxmlformats.org/drawingml/2006/main">
               <a:ext uri="{FF2B5EF4-FFF2-40B4-BE49-F238E27FC236}">
-                <a16:creationId xmlns:a16="http://schemas.microsoft.com/office/drawing/2014/main" id="{639DCD52-6D4B-47A8-9CE2-7375BBE9F9F0}"/>
+                <a16:creationId xmlns:a16="http://schemas.microsoft.com/office/drawing/2014/main" id="{C9AF7E33-B987-48F0-83A6-268EE2E42B65}"/>
               </a:ext>
             </a:extLst>
           </p:cNvPr>
@@ -42459,7 +42459,7 @@
           <p:cNvPr id="51" name="">
             <a:extLst xmlns:a="http://schemas.openxmlformats.org/drawingml/2006/main">
               <a:ext uri="{FF2B5EF4-FFF2-40B4-BE49-F238E27FC236}">
-                <a16:creationId xmlns:a16="http://schemas.microsoft.com/office/drawing/2014/main" id="{F13EB93F-5125-44EC-B09A-8839C5BEC0AB}"/>
+                <a16:creationId xmlns:a16="http://schemas.microsoft.com/office/drawing/2014/main" id="{FCBAF4CF-54C9-4A23-9E9D-26C6EC7163B0}"/>
               </a:ext>
             </a:extLst>
           </p:cNvPr>
@@ -42490,7 +42490,7 @@
           <p:cNvPr id="52" name="">
             <a:extLst xmlns:a="http://schemas.openxmlformats.org/drawingml/2006/main">
               <a:ext uri="{FF2B5EF4-FFF2-40B4-BE49-F238E27FC236}">
-                <a16:creationId xmlns:a16="http://schemas.microsoft.com/office/drawing/2014/main" id="{DBE2406C-DE64-41BF-BF88-90A34DAF9D04}"/>
+                <a16:creationId xmlns:a16="http://schemas.microsoft.com/office/drawing/2014/main" id="{597D468E-A033-4C47-A13B-3AFAFEC51211}"/>
               </a:ext>
             </a:extLst>
           </p:cNvPr>
@@ -42542,7 +42542,7 @@
           <p:cNvPr id="53" name="">
             <a:extLst xmlns:a="http://schemas.openxmlformats.org/drawingml/2006/main">
               <a:ext uri="{FF2B5EF4-FFF2-40B4-BE49-F238E27FC236}">
-                <a16:creationId xmlns:a16="http://schemas.microsoft.com/office/drawing/2014/main" id="{F6244C31-00E4-4DB4-87CC-B019A4CB8A75}"/>
+                <a16:creationId xmlns:a16="http://schemas.microsoft.com/office/drawing/2014/main" id="{F79FE3A7-3270-4DB7-971B-5F242DD9D79B}"/>
               </a:ext>
             </a:extLst>
           </p:cNvPr>
@@ -42594,7 +42594,7 @@
           <p:cNvPr id="54" name="">
             <a:extLst xmlns:a="http://schemas.openxmlformats.org/drawingml/2006/main">
               <a:ext uri="{FF2B5EF4-FFF2-40B4-BE49-F238E27FC236}">
-                <a16:creationId xmlns:a16="http://schemas.microsoft.com/office/drawing/2014/main" id="{952091BA-1693-4D0B-9822-52873E7D241C}"/>
+                <a16:creationId xmlns:a16="http://schemas.microsoft.com/office/drawing/2014/main" id="{2D3C8135-F556-444F-9336-3AE3E98F1C32}"/>
               </a:ext>
             </a:extLst>
           </p:cNvPr>
@@ -42646,7 +42646,7 @@
           <p:cNvPr id="55" name="">
             <a:extLst xmlns:a="http://schemas.openxmlformats.org/drawingml/2006/main">
               <a:ext uri="{FF2B5EF4-FFF2-40B4-BE49-F238E27FC236}">
-                <a16:creationId xmlns:a16="http://schemas.microsoft.com/office/drawing/2014/main" id="{98E4A86D-5B2A-4A8F-9B80-046C29AA225A}"/>
+                <a16:creationId xmlns:a16="http://schemas.microsoft.com/office/drawing/2014/main" id="{95434351-8BF9-4DC7-ACC2-BE211BE7679A}"/>
               </a:ext>
             </a:extLst>
           </p:cNvPr>
@@ -42698,7 +42698,7 @@
           <p:cNvPr id="56" name="">
             <a:extLst xmlns:a="http://schemas.openxmlformats.org/drawingml/2006/main">
               <a:ext uri="{FF2B5EF4-FFF2-40B4-BE49-F238E27FC236}">
-                <a16:creationId xmlns:a16="http://schemas.microsoft.com/office/drawing/2014/main" id="{0B9BC0ED-55C1-4713-A97C-1893A661DCB2}"/>
+                <a16:creationId xmlns:a16="http://schemas.microsoft.com/office/drawing/2014/main" id="{6171D664-D788-4772-920E-0B8F01B54AEB}"/>
               </a:ext>
             </a:extLst>
           </p:cNvPr>
@@ -42750,7 +42750,7 @@
           <p:cNvPr id="57" name="">
             <a:extLst xmlns:a="http://schemas.openxmlformats.org/drawingml/2006/main">
               <a:ext uri="{FF2B5EF4-FFF2-40B4-BE49-F238E27FC236}">
-                <a16:creationId xmlns:a16="http://schemas.microsoft.com/office/drawing/2014/main" id="{B2717C58-C192-4F78-8F07-18AAB24693D8}"/>
+                <a16:creationId xmlns:a16="http://schemas.microsoft.com/office/drawing/2014/main" id="{1A9FBB20-5496-4522-B694-1775E4BC8B7B}"/>
               </a:ext>
             </a:extLst>
           </p:cNvPr>
@@ -42781,7 +42781,7 @@
           <p:cNvPr id="58" name="">
             <a:extLst xmlns:a="http://schemas.openxmlformats.org/drawingml/2006/main">
               <a:ext uri="{FF2B5EF4-FFF2-40B4-BE49-F238E27FC236}">
-                <a16:creationId xmlns:a16="http://schemas.microsoft.com/office/drawing/2014/main" id="{AEB008F7-ACE9-4316-A51C-90745127B97C}"/>
+                <a16:creationId xmlns:a16="http://schemas.microsoft.com/office/drawing/2014/main" id="{8448B2BD-EAD3-4804-A9CD-4B7A5B324D50}"/>
               </a:ext>
             </a:extLst>
           </p:cNvPr>
@@ -42833,7 +42833,7 @@
           <p:cNvPr id="59" name="">
             <a:extLst xmlns:a="http://schemas.openxmlformats.org/drawingml/2006/main">
               <a:ext uri="{FF2B5EF4-FFF2-40B4-BE49-F238E27FC236}">
-                <a16:creationId xmlns:a16="http://schemas.microsoft.com/office/drawing/2014/main" id="{CE02FCFC-6D14-478B-9082-AB08F301304D}"/>
+                <a16:creationId xmlns:a16="http://schemas.microsoft.com/office/drawing/2014/main" id="{C72A3E41-7B43-45A0-887C-6236D3335A54}"/>
               </a:ext>
             </a:extLst>
           </p:cNvPr>
@@ -42885,7 +42885,7 @@
           <p:cNvPr id="60" name="">
             <a:extLst xmlns:a="http://schemas.openxmlformats.org/drawingml/2006/main">
               <a:ext uri="{FF2B5EF4-FFF2-40B4-BE49-F238E27FC236}">
-                <a16:creationId xmlns:a16="http://schemas.microsoft.com/office/drawing/2014/main" id="{27541527-A29A-4155-ADDC-D1442135B558}"/>
+                <a16:creationId xmlns:a16="http://schemas.microsoft.com/office/drawing/2014/main" id="{7BEDE41A-54EB-498C-9671-1563BD7DFD3E}"/>
               </a:ext>
             </a:extLst>
           </p:cNvPr>
@@ -42937,7 +42937,7 @@
           <p:cNvPr id="61" name="">
             <a:extLst xmlns:a="http://schemas.openxmlformats.org/drawingml/2006/main">
               <a:ext uri="{FF2B5EF4-FFF2-40B4-BE49-F238E27FC236}">
-                <a16:creationId xmlns:a16="http://schemas.microsoft.com/office/drawing/2014/main" id="{FCC958D5-ED03-4EF7-AC04-FA3223A49600}"/>
+                <a16:creationId xmlns:a16="http://schemas.microsoft.com/office/drawing/2014/main" id="{1DFFD357-5956-4E36-BFD1-3F2B5BCF4835}"/>
               </a:ext>
             </a:extLst>
           </p:cNvPr>
@@ -42989,7 +42989,7 @@
           <p:cNvPr id="62" name="">
             <a:extLst xmlns:a="http://schemas.openxmlformats.org/drawingml/2006/main">
               <a:ext uri="{FF2B5EF4-FFF2-40B4-BE49-F238E27FC236}">
-                <a16:creationId xmlns:a16="http://schemas.microsoft.com/office/drawing/2014/main" id="{2E803C03-8F0C-4763-AE24-A7E46E134F86}"/>
+                <a16:creationId xmlns:a16="http://schemas.microsoft.com/office/drawing/2014/main" id="{3F0B4344-491C-4600-92EE-9AD0B3F0BC51}"/>
               </a:ext>
             </a:extLst>
           </p:cNvPr>
@@ -43041,7 +43041,7 @@
           <p:cNvPr id="63" name="">
             <a:extLst xmlns:a="http://schemas.openxmlformats.org/drawingml/2006/main">
               <a:ext uri="{FF2B5EF4-FFF2-40B4-BE49-F238E27FC236}">
-                <a16:creationId xmlns:a16="http://schemas.microsoft.com/office/drawing/2014/main" id="{31B8A224-943C-4ADE-8F8B-009F0EEA105E}"/>
+                <a16:creationId xmlns:a16="http://schemas.microsoft.com/office/drawing/2014/main" id="{104EE825-CDE8-4D26-94E9-07B0B0517332}"/>
               </a:ext>
             </a:extLst>
           </p:cNvPr>
@@ -43072,7 +43072,7 @@
           <p:cNvPr id="64" name="">
             <a:extLst xmlns:a="http://schemas.openxmlformats.org/drawingml/2006/main">
               <a:ext uri="{FF2B5EF4-FFF2-40B4-BE49-F238E27FC236}">
-                <a16:creationId xmlns:a16="http://schemas.microsoft.com/office/drawing/2014/main" id="{2137390A-FB6E-4272-BF36-38614C58DD8A}"/>
+                <a16:creationId xmlns:a16="http://schemas.microsoft.com/office/drawing/2014/main" id="{DA1E10DD-C3FB-440D-9542-076CCE52BB95}"/>
               </a:ext>
             </a:extLst>
           </p:cNvPr>
@@ -43103,7 +43103,7 @@
           <p:cNvPr id="65" name="">
             <a:extLst xmlns:a="http://schemas.openxmlformats.org/drawingml/2006/main">
               <a:ext uri="{FF2B5EF4-FFF2-40B4-BE49-F238E27FC236}">
-                <a16:creationId xmlns:a16="http://schemas.microsoft.com/office/drawing/2014/main" id="{66D8DF02-E72E-40B5-9CE3-06D4060C23E6}"/>
+                <a16:creationId xmlns:a16="http://schemas.microsoft.com/office/drawing/2014/main" id="{CF28CDB4-96B3-4E74-AB7B-90D5D8224668}"/>
               </a:ext>
             </a:extLst>
           </p:cNvPr>
@@ -43155,7 +43155,7 @@
           <p:cNvPr id="66" name="">
             <a:extLst xmlns:a="http://schemas.openxmlformats.org/drawingml/2006/main">
               <a:ext uri="{FF2B5EF4-FFF2-40B4-BE49-F238E27FC236}">
-                <a16:creationId xmlns:a16="http://schemas.microsoft.com/office/drawing/2014/main" id="{94437DCA-67DC-4429-8C52-995E9884F773}"/>
+                <a16:creationId xmlns:a16="http://schemas.microsoft.com/office/drawing/2014/main" id="{90205860-018E-4468-86E8-98E28755341A}"/>
               </a:ext>
             </a:extLst>
           </p:cNvPr>
@@ -43207,7 +43207,7 @@
           <p:cNvPr id="67" name="">
             <a:extLst xmlns:a="http://schemas.openxmlformats.org/drawingml/2006/main">
               <a:ext uri="{FF2B5EF4-FFF2-40B4-BE49-F238E27FC236}">
-                <a16:creationId xmlns:a16="http://schemas.microsoft.com/office/drawing/2014/main" id="{A7C40957-384C-49E0-B0BB-C17222FB9547}"/>
+                <a16:creationId xmlns:a16="http://schemas.microsoft.com/office/drawing/2014/main" id="{6294C650-9EEF-4CDB-A9C9-E1C317789EAB}"/>
               </a:ext>
             </a:extLst>
           </p:cNvPr>
@@ -43259,7 +43259,7 @@
           <p:cNvPr id="68" name="">
             <a:extLst xmlns:a="http://schemas.openxmlformats.org/drawingml/2006/main">
               <a:ext uri="{FF2B5EF4-FFF2-40B4-BE49-F238E27FC236}">
-                <a16:creationId xmlns:a16="http://schemas.microsoft.com/office/drawing/2014/main" id="{B9B27636-C705-43D8-804A-6E4859ABA16B}"/>
+                <a16:creationId xmlns:a16="http://schemas.microsoft.com/office/drawing/2014/main" id="{F626DC2E-C93A-44E1-8CF0-65F46FB906D1}"/>
               </a:ext>
             </a:extLst>
           </p:cNvPr>
@@ -43311,7 +43311,7 @@
           <p:cNvPr id="69" name="">
             <a:extLst xmlns:a="http://schemas.openxmlformats.org/drawingml/2006/main">
               <a:ext uri="{FF2B5EF4-FFF2-40B4-BE49-F238E27FC236}">
-                <a16:creationId xmlns:a16="http://schemas.microsoft.com/office/drawing/2014/main" id="{A015FAD7-60FD-41A7-85BD-935075C032A6}"/>
+                <a16:creationId xmlns:a16="http://schemas.microsoft.com/office/drawing/2014/main" id="{9AFB5EBC-689F-449F-8D70-E8F9C4B7A641}"/>
               </a:ext>
             </a:extLst>
           </p:cNvPr>
@@ -43363,7 +43363,7 @@
           <p:cNvPr id="70" name="">
             <a:extLst xmlns:a="http://schemas.openxmlformats.org/drawingml/2006/main">
               <a:ext uri="{FF2B5EF4-FFF2-40B4-BE49-F238E27FC236}">
-                <a16:creationId xmlns:a16="http://schemas.microsoft.com/office/drawing/2014/main" id="{51ED86A9-B11C-4E90-A521-3EC2B3732B06}"/>
+                <a16:creationId xmlns:a16="http://schemas.microsoft.com/office/drawing/2014/main" id="{C6AFAA53-AE07-4835-A295-E8ACF0A96B16}"/>
               </a:ext>
             </a:extLst>
           </p:cNvPr>
@@ -43394,7 +43394,7 @@
           <p:cNvPr id="71" name="">
             <a:extLst xmlns:a="http://schemas.openxmlformats.org/drawingml/2006/main">
               <a:ext uri="{FF2B5EF4-FFF2-40B4-BE49-F238E27FC236}">
-                <a16:creationId xmlns:a16="http://schemas.microsoft.com/office/drawing/2014/main" id="{55F0BD78-B72A-4122-91EE-A58B94781452}"/>
+                <a16:creationId xmlns:a16="http://schemas.microsoft.com/office/drawing/2014/main" id="{F91C2C74-8BD7-4407-985C-36FFFC764FB3}"/>
               </a:ext>
             </a:extLst>
           </p:cNvPr>
@@ -43446,7 +43446,7 @@
           <p:cNvPr id="72" name="">
             <a:extLst xmlns:a="http://schemas.openxmlformats.org/drawingml/2006/main">
               <a:ext uri="{FF2B5EF4-FFF2-40B4-BE49-F238E27FC236}">
-                <a16:creationId xmlns:a16="http://schemas.microsoft.com/office/drawing/2014/main" id="{C7BFB45B-039B-4AC5-AFFA-1B310D194877}"/>
+                <a16:creationId xmlns:a16="http://schemas.microsoft.com/office/drawing/2014/main" id="{AE9331B6-402E-46B9-AB6D-A51E3AC89501}"/>
               </a:ext>
             </a:extLst>
           </p:cNvPr>
@@ -43498,7 +43498,7 @@
           <p:cNvPr id="73" name="">
             <a:extLst xmlns:a="http://schemas.openxmlformats.org/drawingml/2006/main">
               <a:ext uri="{FF2B5EF4-FFF2-40B4-BE49-F238E27FC236}">
-                <a16:creationId xmlns:a16="http://schemas.microsoft.com/office/drawing/2014/main" id="{11BD2143-8561-455E-B799-50380F23BFCC}"/>
+                <a16:creationId xmlns:a16="http://schemas.microsoft.com/office/drawing/2014/main" id="{241C96C8-9AEF-4037-8213-F49F91FF3A76}"/>
               </a:ext>
             </a:extLst>
           </p:cNvPr>
@@ -43550,7 +43550,7 @@
           <p:cNvPr id="74" name="">
             <a:extLst xmlns:a="http://schemas.openxmlformats.org/drawingml/2006/main">
               <a:ext uri="{FF2B5EF4-FFF2-40B4-BE49-F238E27FC236}">
-                <a16:creationId xmlns:a16="http://schemas.microsoft.com/office/drawing/2014/main" id="{0AA64240-B426-4AE9-90D6-5877A19C1827}"/>
+                <a16:creationId xmlns:a16="http://schemas.microsoft.com/office/drawing/2014/main" id="{9801339D-323D-4831-8F18-8629EBA92AE8}"/>
               </a:ext>
             </a:extLst>
           </p:cNvPr>
@@ -43602,7 +43602,7 @@
           <p:cNvPr id="75" name="">
             <a:extLst xmlns:a="http://schemas.openxmlformats.org/drawingml/2006/main">
               <a:ext uri="{FF2B5EF4-FFF2-40B4-BE49-F238E27FC236}">
-                <a16:creationId xmlns:a16="http://schemas.microsoft.com/office/drawing/2014/main" id="{0AF7ED93-D987-4859-8969-A9A7E97724C9}"/>
+                <a16:creationId xmlns:a16="http://schemas.microsoft.com/office/drawing/2014/main" id="{E42DACC7-0A81-48D3-9E83-EC3BF3967B17}"/>
               </a:ext>
             </a:extLst>
           </p:cNvPr>
@@ -43654,7 +43654,7 @@
           <p:cNvPr id="76" name="">
             <a:extLst xmlns:a="http://schemas.openxmlformats.org/drawingml/2006/main">
               <a:ext uri="{FF2B5EF4-FFF2-40B4-BE49-F238E27FC236}">
-                <a16:creationId xmlns:a16="http://schemas.microsoft.com/office/drawing/2014/main" id="{5C148695-74A9-4379-A8E4-324FD4E7EA06}"/>
+                <a16:creationId xmlns:a16="http://schemas.microsoft.com/office/drawing/2014/main" id="{6BD8C21B-F0CC-4596-8C96-2F4A5ED43F87}"/>
               </a:ext>
             </a:extLst>
           </p:cNvPr>
@@ -43685,7 +43685,7 @@
           <p:cNvPr id="77" name="">
             <a:extLst xmlns:a="http://schemas.openxmlformats.org/drawingml/2006/main">
               <a:ext uri="{FF2B5EF4-FFF2-40B4-BE49-F238E27FC236}">
-                <a16:creationId xmlns:a16="http://schemas.microsoft.com/office/drawing/2014/main" id="{1A9A68B1-4845-4C47-BD42-F53B8ACBE153}"/>
+                <a16:creationId xmlns:a16="http://schemas.microsoft.com/office/drawing/2014/main" id="{BC93C816-C72E-4303-97D7-8C8BA14AC288}"/>
               </a:ext>
             </a:extLst>
           </p:cNvPr>
@@ -43716,7 +43716,7 @@
           <p:cNvPr id="78" name="">
             <a:extLst xmlns:a="http://schemas.openxmlformats.org/drawingml/2006/main">
               <a:ext uri="{FF2B5EF4-FFF2-40B4-BE49-F238E27FC236}">
-                <a16:creationId xmlns:a16="http://schemas.microsoft.com/office/drawing/2014/main" id="{5550170D-87CA-4BA3-9FBD-A7CE055B8D8A}"/>
+                <a16:creationId xmlns:a16="http://schemas.microsoft.com/office/drawing/2014/main" id="{FCF25224-849F-41D1-A280-8C05014167F4}"/>
               </a:ext>
             </a:extLst>
           </p:cNvPr>
@@ -43768,7 +43768,7 @@
           <p:cNvPr id="79" name="">
             <a:extLst xmlns:a="http://schemas.openxmlformats.org/drawingml/2006/main">
               <a:ext uri="{FF2B5EF4-FFF2-40B4-BE49-F238E27FC236}">
-                <a16:creationId xmlns:a16="http://schemas.microsoft.com/office/drawing/2014/main" id="{C6D55ABA-3D32-40FA-A8C6-3D05B15F9C79}"/>
+                <a16:creationId xmlns:a16="http://schemas.microsoft.com/office/drawing/2014/main" id="{54A4F995-59DD-457C-A3B0-0AEEFB256B4A}"/>
               </a:ext>
             </a:extLst>
           </p:cNvPr>
@@ -43820,7 +43820,7 @@
           <p:cNvPr id="80" name="">
             <a:extLst xmlns:a="http://schemas.openxmlformats.org/drawingml/2006/main">
               <a:ext uri="{FF2B5EF4-FFF2-40B4-BE49-F238E27FC236}">
-                <a16:creationId xmlns:a16="http://schemas.microsoft.com/office/drawing/2014/main" id="{6EEABFF9-FECD-4BE7-8EDF-3A24AC267006}"/>
+                <a16:creationId xmlns:a16="http://schemas.microsoft.com/office/drawing/2014/main" id="{14655F80-FA17-4DB4-A2DA-E6549AB08ECD}"/>
               </a:ext>
             </a:extLst>
           </p:cNvPr>
@@ -43872,7 +43872,7 @@
           <p:cNvPr id="81" name="">
             <a:extLst xmlns:a="http://schemas.openxmlformats.org/drawingml/2006/main">
               <a:ext uri="{FF2B5EF4-FFF2-40B4-BE49-F238E27FC236}">
-                <a16:creationId xmlns:a16="http://schemas.microsoft.com/office/drawing/2014/main" id="{098C3215-501C-4792-BC23-F29D2308DB0A}"/>
+                <a16:creationId xmlns:a16="http://schemas.microsoft.com/office/drawing/2014/main" id="{EECA625E-F862-4E27-83DD-91A108A1F970}"/>
               </a:ext>
             </a:extLst>
           </p:cNvPr>
@@ -43924,7 +43924,7 @@
           <p:cNvPr id="82" name="">
             <a:extLst xmlns:a="http://schemas.openxmlformats.org/drawingml/2006/main">
               <a:ext uri="{FF2B5EF4-FFF2-40B4-BE49-F238E27FC236}">
-                <a16:creationId xmlns:a16="http://schemas.microsoft.com/office/drawing/2014/main" id="{2B543694-6672-445F-9D65-22379FF7E750}"/>
+                <a16:creationId xmlns:a16="http://schemas.microsoft.com/office/drawing/2014/main" id="{FD4CD822-B297-4E5D-99AE-E496314A29D8}"/>
               </a:ext>
             </a:extLst>
           </p:cNvPr>
@@ -43976,7 +43976,7 @@
           <p:cNvPr id="83" name="">
             <a:extLst xmlns:a="http://schemas.openxmlformats.org/drawingml/2006/main">
               <a:ext uri="{FF2B5EF4-FFF2-40B4-BE49-F238E27FC236}">
-                <a16:creationId xmlns:a16="http://schemas.microsoft.com/office/drawing/2014/main" id="{B6220C0E-6F7C-4E89-8CE9-CCB312521231}"/>
+                <a16:creationId xmlns:a16="http://schemas.microsoft.com/office/drawing/2014/main" id="{BC3A0C83-16AF-4976-BD09-6EAF09E54F28}"/>
               </a:ext>
             </a:extLst>
           </p:cNvPr>
@@ -44007,7 +44007,7 @@
           <p:cNvPr id="84" name="">
             <a:extLst xmlns:a="http://schemas.openxmlformats.org/drawingml/2006/main">
               <a:ext uri="{FF2B5EF4-FFF2-40B4-BE49-F238E27FC236}">
-                <a16:creationId xmlns:a16="http://schemas.microsoft.com/office/drawing/2014/main" id="{65301FE2-02F6-4E5F-9475-CD0E695603B2}"/>
+                <a16:creationId xmlns:a16="http://schemas.microsoft.com/office/drawing/2014/main" id="{8EE4E43A-84AF-4C5A-B437-719CB5869F9B}"/>
               </a:ext>
             </a:extLst>
           </p:cNvPr>
@@ -44059,7 +44059,7 @@
           <p:cNvPr id="85" name="">
             <a:extLst xmlns:a="http://schemas.openxmlformats.org/drawingml/2006/main">
               <a:ext uri="{FF2B5EF4-FFF2-40B4-BE49-F238E27FC236}">
-                <a16:creationId xmlns:a16="http://schemas.microsoft.com/office/drawing/2014/main" id="{B5A6187D-7BFC-4CBA-AE04-74887C6DF68B}"/>
+                <a16:creationId xmlns:a16="http://schemas.microsoft.com/office/drawing/2014/main" id="{28BA85F5-F67F-413B-A149-8F93FB57C789}"/>
               </a:ext>
             </a:extLst>
           </p:cNvPr>
@@ -44111,7 +44111,7 @@
           <p:cNvPr id="86" name="">
             <a:extLst xmlns:a="http://schemas.openxmlformats.org/drawingml/2006/main">
               <a:ext uri="{FF2B5EF4-FFF2-40B4-BE49-F238E27FC236}">
-                <a16:creationId xmlns:a16="http://schemas.microsoft.com/office/drawing/2014/main" id="{C228CACC-647A-4E17-A664-3B1DCAED19AF}"/>
+                <a16:creationId xmlns:a16="http://schemas.microsoft.com/office/drawing/2014/main" id="{1F0212E2-53E8-4EF1-AE09-419D65C512D1}"/>
               </a:ext>
             </a:extLst>
           </p:cNvPr>
@@ -44163,7 +44163,7 @@
           <p:cNvPr id="87" name="">
             <a:extLst xmlns:a="http://schemas.openxmlformats.org/drawingml/2006/main">
               <a:ext uri="{FF2B5EF4-FFF2-40B4-BE49-F238E27FC236}">
-                <a16:creationId xmlns:a16="http://schemas.microsoft.com/office/drawing/2014/main" id="{052EB48C-020F-401B-A569-00FF524AF86D}"/>
+                <a16:creationId xmlns:a16="http://schemas.microsoft.com/office/drawing/2014/main" id="{01816850-89D0-4DDE-AAD2-A9EB75154195}"/>
               </a:ext>
             </a:extLst>
           </p:cNvPr>
@@ -44215,7 +44215,7 @@
           <p:cNvPr id="88" name="">
             <a:extLst xmlns:a="http://schemas.openxmlformats.org/drawingml/2006/main">
               <a:ext uri="{FF2B5EF4-FFF2-40B4-BE49-F238E27FC236}">
-                <a16:creationId xmlns:a16="http://schemas.microsoft.com/office/drawing/2014/main" id="{75706CE8-9D3A-40C2-9648-6DD3CFE381E2}"/>
+                <a16:creationId xmlns:a16="http://schemas.microsoft.com/office/drawing/2014/main" id="{3D3AC99A-593C-471A-AB0E-4A1AE16A0703}"/>
               </a:ext>
             </a:extLst>
           </p:cNvPr>
@@ -44267,7 +44267,7 @@
           <p:cNvPr id="89" name="">
             <a:extLst xmlns:a="http://schemas.openxmlformats.org/drawingml/2006/main">
               <a:ext uri="{FF2B5EF4-FFF2-40B4-BE49-F238E27FC236}">
-                <a16:creationId xmlns:a16="http://schemas.microsoft.com/office/drawing/2014/main" id="{04133C04-6D87-41A5-9FBC-7AFDDEE11E8A}"/>
+                <a16:creationId xmlns:a16="http://schemas.microsoft.com/office/drawing/2014/main" id="{3296C872-B7B8-4964-8649-924022CCCB40}"/>
               </a:ext>
             </a:extLst>
           </p:cNvPr>
@@ -44298,7 +44298,7 @@
           <p:cNvPr id="90" name="">
             <a:extLst xmlns:a="http://schemas.openxmlformats.org/drawingml/2006/main">
               <a:ext uri="{FF2B5EF4-FFF2-40B4-BE49-F238E27FC236}">
-                <a16:creationId xmlns:a16="http://schemas.microsoft.com/office/drawing/2014/main" id="{F05DE5F2-4567-48BB-8B33-D4E3458F3EB6}"/>
+                <a16:creationId xmlns:a16="http://schemas.microsoft.com/office/drawing/2014/main" id="{3ADDE125-70A8-43DE-B602-5150FE9CFAAD}"/>
               </a:ext>
             </a:extLst>
           </p:cNvPr>
@@ -44329,7 +44329,7 @@
           <p:cNvPr id="91" name="">
             <a:extLst xmlns:a="http://schemas.openxmlformats.org/drawingml/2006/main">
               <a:ext uri="{FF2B5EF4-FFF2-40B4-BE49-F238E27FC236}">
-                <a16:creationId xmlns:a16="http://schemas.microsoft.com/office/drawing/2014/main" id="{CE9E10AA-ECAE-4B00-BD72-F747F6636F9F}"/>
+                <a16:creationId xmlns:a16="http://schemas.microsoft.com/office/drawing/2014/main" id="{5C95DBAB-5004-4B06-A985-6105A4C25172}"/>
               </a:ext>
             </a:extLst>
           </p:cNvPr>
@@ -44381,7 +44381,7 @@
           <p:cNvPr id="92" name="">
             <a:extLst xmlns:a="http://schemas.openxmlformats.org/drawingml/2006/main">
               <a:ext uri="{FF2B5EF4-FFF2-40B4-BE49-F238E27FC236}">
-                <a16:creationId xmlns:a16="http://schemas.microsoft.com/office/drawing/2014/main" id="{8AA0680F-79FF-4E0F-96AD-01E12FDB18E4}"/>
+                <a16:creationId xmlns:a16="http://schemas.microsoft.com/office/drawing/2014/main" id="{804DC7A0-D8A7-4578-A1A2-3617E2C6A5F4}"/>
               </a:ext>
             </a:extLst>
           </p:cNvPr>
@@ -44433,7 +44433,7 @@
           <p:cNvPr id="93" name="">
             <a:extLst xmlns:a="http://schemas.openxmlformats.org/drawingml/2006/main">
               <a:ext uri="{FF2B5EF4-FFF2-40B4-BE49-F238E27FC236}">
-                <a16:creationId xmlns:a16="http://schemas.microsoft.com/office/drawing/2014/main" id="{BFD5E948-01EB-4E3C-BC54-2B1C97F26E56}"/>
+                <a16:creationId xmlns:a16="http://schemas.microsoft.com/office/drawing/2014/main" id="{ED3C5851-EFC7-4979-8CD2-6BAD04CE83DB}"/>
               </a:ext>
             </a:extLst>
           </p:cNvPr>
@@ -44485,7 +44485,7 @@
           <p:cNvPr id="94" name="">
             <a:extLst xmlns:a="http://schemas.openxmlformats.org/drawingml/2006/main">
               <a:ext uri="{FF2B5EF4-FFF2-40B4-BE49-F238E27FC236}">
-                <a16:creationId xmlns:a16="http://schemas.microsoft.com/office/drawing/2014/main" id="{352D5C6B-E315-4EBB-BFC9-08F02771A931}"/>
+                <a16:creationId xmlns:a16="http://schemas.microsoft.com/office/drawing/2014/main" id="{7A2070DF-E492-4C8B-BEBD-3FF7BDE34E24}"/>
               </a:ext>
             </a:extLst>
           </p:cNvPr>
@@ -44537,7 +44537,7 @@
           <p:cNvPr id="95" name="">
             <a:extLst xmlns:a="http://schemas.openxmlformats.org/drawingml/2006/main">
               <a:ext uri="{FF2B5EF4-FFF2-40B4-BE49-F238E27FC236}">
-                <a16:creationId xmlns:a16="http://schemas.microsoft.com/office/drawing/2014/main" id="{66E0CA64-BD8F-45BA-A177-FB8B17960091}"/>
+                <a16:creationId xmlns:a16="http://schemas.microsoft.com/office/drawing/2014/main" id="{77C0E2F5-29E1-4C57-B975-36CA10026D2E}"/>
               </a:ext>
             </a:extLst>
           </p:cNvPr>
@@ -44589,7 +44589,7 @@
           <p:cNvPr id="96" name="">
             <a:extLst xmlns:a="http://schemas.openxmlformats.org/drawingml/2006/main">
               <a:ext uri="{FF2B5EF4-FFF2-40B4-BE49-F238E27FC236}">
-                <a16:creationId xmlns:a16="http://schemas.microsoft.com/office/drawing/2014/main" id="{F417620C-081C-4623-BA08-B7A3F3399CC1}"/>
+                <a16:creationId xmlns:a16="http://schemas.microsoft.com/office/drawing/2014/main" id="{DA4044A7-7812-4199-AB75-4D0A490C608E}"/>
               </a:ext>
             </a:extLst>
           </p:cNvPr>
@@ -44620,7 +44620,7 @@
           <p:cNvPr id="97" name="">
             <a:extLst xmlns:a="http://schemas.openxmlformats.org/drawingml/2006/main">
               <a:ext uri="{FF2B5EF4-FFF2-40B4-BE49-F238E27FC236}">
-                <a16:creationId xmlns:a16="http://schemas.microsoft.com/office/drawing/2014/main" id="{173EC544-0AEE-4417-A287-97BD8A0041DD}"/>
+                <a16:creationId xmlns:a16="http://schemas.microsoft.com/office/drawing/2014/main" id="{B4C23092-924A-4DC9-94B8-D500383F4565}"/>
               </a:ext>
             </a:extLst>
           </p:cNvPr>
@@ -44672,7 +44672,7 @@
           <p:cNvPr id="98" name="">
             <a:extLst xmlns:a="http://schemas.openxmlformats.org/drawingml/2006/main">
               <a:ext uri="{FF2B5EF4-FFF2-40B4-BE49-F238E27FC236}">
-                <a16:creationId xmlns:a16="http://schemas.microsoft.com/office/drawing/2014/main" id="{5F05F1C6-1064-471A-94FE-4F12BC667222}"/>
+                <a16:creationId xmlns:a16="http://schemas.microsoft.com/office/drawing/2014/main" id="{BD6C5EFD-D6F8-4F50-B7CA-DE1908B8713F}"/>
               </a:ext>
             </a:extLst>
           </p:cNvPr>
@@ -44724,7 +44724,7 @@
           <p:cNvPr id="99" name="">
             <a:extLst xmlns:a="http://schemas.openxmlformats.org/drawingml/2006/main">
               <a:ext uri="{FF2B5EF4-FFF2-40B4-BE49-F238E27FC236}">
-                <a16:creationId xmlns:a16="http://schemas.microsoft.com/office/drawing/2014/main" id="{1FBBB374-06C7-4D1B-8FC0-55F52C05EA19}"/>
+                <a16:creationId xmlns:a16="http://schemas.microsoft.com/office/drawing/2014/main" id="{1C2F7513-D670-4AAD-8B7B-45F48806AF32}"/>
               </a:ext>
             </a:extLst>
           </p:cNvPr>
@@ -44776,7 +44776,7 @@
           <p:cNvPr id="100" name="">
             <a:extLst xmlns:a="http://schemas.openxmlformats.org/drawingml/2006/main">
               <a:ext uri="{FF2B5EF4-FFF2-40B4-BE49-F238E27FC236}">
-                <a16:creationId xmlns:a16="http://schemas.microsoft.com/office/drawing/2014/main" id="{2BC2E441-3A74-4D74-A968-E45C89549E07}"/>
+                <a16:creationId xmlns:a16="http://schemas.microsoft.com/office/drawing/2014/main" id="{DB15039A-8B27-4436-95F1-0AEFC37A318F}"/>
               </a:ext>
             </a:extLst>
           </p:cNvPr>
@@ -44828,7 +44828,7 @@
           <p:cNvPr id="101" name="">
             <a:extLst xmlns:a="http://schemas.openxmlformats.org/drawingml/2006/main">
               <a:ext uri="{FF2B5EF4-FFF2-40B4-BE49-F238E27FC236}">
-                <a16:creationId xmlns:a16="http://schemas.microsoft.com/office/drawing/2014/main" id="{C80743E8-FCC8-40FB-9194-D244AC44B827}"/>
+                <a16:creationId xmlns:a16="http://schemas.microsoft.com/office/drawing/2014/main" id="{D9C28D43-674C-48A1-A6E8-E096F222FD6F}"/>
               </a:ext>
             </a:extLst>
           </p:cNvPr>
@@ -44878,7 +44878,7 @@
     </p:spTree>
     <p:extLst>
       <p:ext uri="{BB962C8B-B14F-4D97-AF65-F5344CB8AC3E}">
-        <p14:creationId xmlns:p14="http://schemas.microsoft.com/office/powerpoint/2010/main" val="1295787880"/>
+        <p14:creationId xmlns:p14="http://schemas.microsoft.com/office/powerpoint/2010/main" val="2072004671"/>
       </p:ext>
     </p:extLst>
   </p:cSld>

--- a/.preview/pptx/deck.pptx
+++ b/.preview/pptx/deck.pptx
@@ -2,27 +2,27 @@
 <file path=ppt/presentation.xml><?xml version="1.0" encoding="utf-8"?>
 <p:presentation xmlns:p="http://schemas.openxmlformats.org/presentationml/2006/main">
   <p:sldMasterIdLst>
-    <p:sldMasterId xmlns:r="http://schemas.openxmlformats.org/officeDocument/2006/relationships" id="2147483648" r:id="R7e6ad224c5c04a03"/>
+    <p:sldMasterId xmlns:r="http://schemas.openxmlformats.org/officeDocument/2006/relationships" id="2147483648" r:id="R305cd68df293421d"/>
   </p:sldMasterIdLst>
   <p:notesMasterIdLst>
-    <p:notesMasterId xmlns:r="http://schemas.openxmlformats.org/officeDocument/2006/relationships" r:id="Rc2c5fc6638a84d39"/>
+    <p:notesMasterId xmlns:r="http://schemas.openxmlformats.org/officeDocument/2006/relationships" r:id="Rfe5760f56d7a495c"/>
   </p:notesMasterIdLst>
   <p:sldIdLst>
-    <p:sldId xmlns:r="http://schemas.openxmlformats.org/officeDocument/2006/relationships" id="256" r:id="Raa4bb28fcff7404a"/>
-    <p:sldId xmlns:r="http://schemas.openxmlformats.org/officeDocument/2006/relationships" id="257" r:id="Rd5fa9b74de9a438b"/>
-    <p:sldId xmlns:r="http://schemas.openxmlformats.org/officeDocument/2006/relationships" id="258" r:id="R0034d63938ae46c7"/>
-    <p:sldId xmlns:r="http://schemas.openxmlformats.org/officeDocument/2006/relationships" id="259" r:id="R2fb77f895a6a4af8"/>
-    <p:sldId xmlns:r="http://schemas.openxmlformats.org/officeDocument/2006/relationships" id="260" r:id="Rfcc7114ce51e4ae1"/>
-    <p:sldId xmlns:r="http://schemas.openxmlformats.org/officeDocument/2006/relationships" id="261" r:id="R5c5ac611666347b7"/>
-    <p:sldId xmlns:r="http://schemas.openxmlformats.org/officeDocument/2006/relationships" id="262" r:id="R9c6e1b3e8b0942fa"/>
-    <p:sldId xmlns:r="http://schemas.openxmlformats.org/officeDocument/2006/relationships" id="263" r:id="R3ada2c73a6964924"/>
-    <p:sldId xmlns:r="http://schemas.openxmlformats.org/officeDocument/2006/relationships" id="264" r:id="R5b9644688d624f1c"/>
-    <p:sldId xmlns:r="http://schemas.openxmlformats.org/officeDocument/2006/relationships" id="265" r:id="R759713d259f34480"/>
-    <p:sldId xmlns:r="http://schemas.openxmlformats.org/officeDocument/2006/relationships" id="266" r:id="R61a30a24df7246cd"/>
-    <p:sldId xmlns:r="http://schemas.openxmlformats.org/officeDocument/2006/relationships" id="267" r:id="Rc06ea82ee3ba41c1"/>
-    <p:sldId xmlns:r="http://schemas.openxmlformats.org/officeDocument/2006/relationships" id="268" r:id="Rf0530b3f8d2e44f5"/>
-    <p:sldId xmlns:r="http://schemas.openxmlformats.org/officeDocument/2006/relationships" id="269" r:id="R900b264bdde84873"/>
-    <p:sldId xmlns:r="http://schemas.openxmlformats.org/officeDocument/2006/relationships" id="270" r:id="R9565f525527547e9"/>
+    <p:sldId xmlns:r="http://schemas.openxmlformats.org/officeDocument/2006/relationships" id="256" r:id="R46738a3764c64efd"/>
+    <p:sldId xmlns:r="http://schemas.openxmlformats.org/officeDocument/2006/relationships" id="257" r:id="R41654e1e104f4c94"/>
+    <p:sldId xmlns:r="http://schemas.openxmlformats.org/officeDocument/2006/relationships" id="258" r:id="R4b21d9d7c3174ea0"/>
+    <p:sldId xmlns:r="http://schemas.openxmlformats.org/officeDocument/2006/relationships" id="259" r:id="R7c12fb4d669346c2"/>
+    <p:sldId xmlns:r="http://schemas.openxmlformats.org/officeDocument/2006/relationships" id="260" r:id="Raa8f793c71474911"/>
+    <p:sldId xmlns:r="http://schemas.openxmlformats.org/officeDocument/2006/relationships" id="261" r:id="R8a2f6db40f24494e"/>
+    <p:sldId xmlns:r="http://schemas.openxmlformats.org/officeDocument/2006/relationships" id="262" r:id="R6830815a456d4dda"/>
+    <p:sldId xmlns:r="http://schemas.openxmlformats.org/officeDocument/2006/relationships" id="263" r:id="Ra61aa8c813d241b6"/>
+    <p:sldId xmlns:r="http://schemas.openxmlformats.org/officeDocument/2006/relationships" id="264" r:id="R42960316e6a14569"/>
+    <p:sldId xmlns:r="http://schemas.openxmlformats.org/officeDocument/2006/relationships" id="265" r:id="R4149b415ec524922"/>
+    <p:sldId xmlns:r="http://schemas.openxmlformats.org/officeDocument/2006/relationships" id="266" r:id="R22e38db36d094bd8"/>
+    <p:sldId xmlns:r="http://schemas.openxmlformats.org/officeDocument/2006/relationships" id="267" r:id="Rd424e9156b584a43"/>
+    <p:sldId xmlns:r="http://schemas.openxmlformats.org/officeDocument/2006/relationships" id="268" r:id="R52764634065846ed"/>
+    <p:sldId xmlns:r="http://schemas.openxmlformats.org/officeDocument/2006/relationships" id="269" r:id="Race3dd0844ea4fa3"/>
+    <p:sldId xmlns:r="http://schemas.openxmlformats.org/officeDocument/2006/relationships" id="270" r:id="R2748034507fc4c97"/>
   </p:sldIdLst>
   <p:sldSz cx="12192000" cy="6858000"/>
   <p:notesSz cx="6858000" cy="9144000"/>
@@ -1879,7 +1879,7 @@
   </p:cSld>
   <p:clrMap bg1="lt1" tx1="dk1" bg2="lt2" tx2="dk2" accent1="accent1" accent2="accent2" accent3="accent3" accent4="accent4" accent5="accent5" accent6="accent6" hlink="hlink" folHlink="folHlink"/>
   <p:sldLayoutIdLst>
-    <p:sldLayoutId xmlns:r="http://schemas.openxmlformats.org/officeDocument/2006/relationships" id="2147483649" r:id="Rb24ce226c087479f"/>
+    <p:sldLayoutId xmlns:r="http://schemas.openxmlformats.org/officeDocument/2006/relationships" id="2147483649" r:id="R12b2a7900d2d4460"/>
   </p:sldLayoutIdLst>
   <p:txStyles>
     <p:titleStyle>
@@ -2430,7 +2430,7 @@
           <p:cNvPr id="17" name="">
             <a:extLst xmlns:a="http://schemas.openxmlformats.org/drawingml/2006/main">
               <a:ext uri="{FF2B5EF4-FFF2-40B4-BE49-F238E27FC236}">
-                <a16:creationId xmlns:a16="http://schemas.microsoft.com/office/drawing/2014/main" id="{965C54E4-FA53-4CB0-99BE-83AD346518DF}"/>
+                <a16:creationId xmlns:a16="http://schemas.microsoft.com/office/drawing/2014/main" id="{4E8D7064-0028-4A68-8151-D9024548B8C7}"/>
               </a:ext>
             </a:extLst>
           </p:cNvPr>
@@ -2463,7 +2463,7 @@
           <p:cNvPr id="2" name="">
             <a:extLst xmlns:a="http://schemas.openxmlformats.org/drawingml/2006/main">
               <a:ext uri="{FF2B5EF4-FFF2-40B4-BE49-F238E27FC236}">
-                <a16:creationId xmlns:a16="http://schemas.microsoft.com/office/drawing/2014/main" id="{19886478-2D26-4980-988C-A68F99FA87E3}"/>
+                <a16:creationId xmlns:a16="http://schemas.microsoft.com/office/drawing/2014/main" id="{2B6EA26B-A982-4C79-A078-B3CE2A54818E}"/>
               </a:ext>
             </a:extLst>
           </p:cNvPr>
@@ -2494,7 +2494,7 @@
           <p:cNvPr id="3" name="">
             <a:extLst xmlns:a="http://schemas.openxmlformats.org/drawingml/2006/main">
               <a:ext uri="{FF2B5EF4-FFF2-40B4-BE49-F238E27FC236}">
-                <a16:creationId xmlns:a16="http://schemas.microsoft.com/office/drawing/2014/main" id="{4EE4AEAC-2979-4436-A3F7-AC67E6988E76}"/>
+                <a16:creationId xmlns:a16="http://schemas.microsoft.com/office/drawing/2014/main" id="{3D346D1B-DF64-44DD-A4A8-49CBC4013A0B}"/>
               </a:ext>
             </a:extLst>
           </p:cNvPr>
@@ -2529,7 +2529,7 @@
           <p:nvPr/>
         </p:nvPicPr>
         <p:blipFill>
-          <a:blip xmlns:r="http://schemas.openxmlformats.org/officeDocument/2006/relationships" xmlns:a="http://schemas.openxmlformats.org/drawingml/2006/main" r:embed="R5f38e751cd1b44c3"/>
+          <a:blip xmlns:r="http://schemas.openxmlformats.org/officeDocument/2006/relationships" xmlns:a="http://schemas.openxmlformats.org/drawingml/2006/main" r:embed="R33b8aa2e330e4c91"/>
           <a:stretch xmlns:a="http://schemas.openxmlformats.org/drawingml/2006/main"/>
         </p:blipFill>
         <p:spPr>
@@ -2547,7 +2547,7 @@
           <p:cNvPr id="5" name="">
             <a:extLst xmlns:a="http://schemas.openxmlformats.org/drawingml/2006/main">
               <a:ext uri="{FF2B5EF4-FFF2-40B4-BE49-F238E27FC236}">
-                <a16:creationId xmlns:a16="http://schemas.microsoft.com/office/drawing/2014/main" id="{3A061831-2CDA-4487-BE59-2D134D1E2CBB}"/>
+                <a16:creationId xmlns:a16="http://schemas.microsoft.com/office/drawing/2014/main" id="{6929E6C1-A779-4641-98C2-1597B3857F79}"/>
               </a:ext>
             </a:extLst>
           </p:cNvPr>
@@ -2599,7 +2599,7 @@
           <p:cNvPr id="6" name="">
             <a:extLst xmlns:a="http://schemas.openxmlformats.org/drawingml/2006/main">
               <a:ext uri="{FF2B5EF4-FFF2-40B4-BE49-F238E27FC236}">
-                <a16:creationId xmlns:a16="http://schemas.microsoft.com/office/drawing/2014/main" id="{B252EBFF-730D-4489-8D57-6EE33073A9EA}"/>
+                <a16:creationId xmlns:a16="http://schemas.microsoft.com/office/drawing/2014/main" id="{2601CC57-2676-4F6F-BACF-CAC60A9D2B13}"/>
               </a:ext>
             </a:extLst>
           </p:cNvPr>
@@ -2655,7 +2655,7 @@
           <p:nvPr/>
         </p:nvPicPr>
         <p:blipFill>
-          <a:blip xmlns:r="http://schemas.openxmlformats.org/officeDocument/2006/relationships" xmlns:a="http://schemas.openxmlformats.org/drawingml/2006/main" r:embed="R0c4fca48570a42c6"/>
+          <a:blip xmlns:r="http://schemas.openxmlformats.org/officeDocument/2006/relationships" xmlns:a="http://schemas.openxmlformats.org/drawingml/2006/main" r:embed="Rca062b482a3f4ab0"/>
           <a:stretch xmlns:a="http://schemas.openxmlformats.org/drawingml/2006/main"/>
         </p:blipFill>
         <p:spPr>
@@ -2673,7 +2673,7 @@
           <p:cNvPr id="8" name="">
             <a:extLst xmlns:a="http://schemas.openxmlformats.org/drawingml/2006/main">
               <a:ext uri="{FF2B5EF4-FFF2-40B4-BE49-F238E27FC236}">
-                <a16:creationId xmlns:a16="http://schemas.microsoft.com/office/drawing/2014/main" id="{8B5EC1C4-71A2-4E29-AF7A-0548B1E680F9}"/>
+                <a16:creationId xmlns:a16="http://schemas.microsoft.com/office/drawing/2014/main" id="{064D1C7C-F5A4-4B97-9FA1-FD983985BAC8}"/>
               </a:ext>
             </a:extLst>
           </p:cNvPr>
@@ -2706,7 +2706,7 @@
           <p:cNvPr id="9" name="">
             <a:extLst xmlns:a="http://schemas.openxmlformats.org/drawingml/2006/main">
               <a:ext uri="{FF2B5EF4-FFF2-40B4-BE49-F238E27FC236}">
-                <a16:creationId xmlns:a16="http://schemas.microsoft.com/office/drawing/2014/main" id="{AEB9F931-D072-48D6-897A-BBD353E07550}"/>
+                <a16:creationId xmlns:a16="http://schemas.microsoft.com/office/drawing/2014/main" id="{029CABE0-151F-4591-911B-FD237E8C7F48}"/>
               </a:ext>
             </a:extLst>
           </p:cNvPr>
@@ -2758,7 +2758,7 @@
           <p:cNvPr id="10" name="">
             <a:extLst xmlns:a="http://schemas.openxmlformats.org/drawingml/2006/main">
               <a:ext uri="{FF2B5EF4-FFF2-40B4-BE49-F238E27FC236}">
-                <a16:creationId xmlns:a16="http://schemas.microsoft.com/office/drawing/2014/main" id="{F51D70EB-5435-40D4-BBE7-A0D45B43812A}"/>
+                <a16:creationId xmlns:a16="http://schemas.microsoft.com/office/drawing/2014/main" id="{D8150463-409E-4EB5-84B6-BF38C21780AE}"/>
               </a:ext>
             </a:extLst>
           </p:cNvPr>
@@ -2810,7 +2810,7 @@
           <p:cNvPr id="11" name="">
             <a:extLst xmlns:a="http://schemas.openxmlformats.org/drawingml/2006/main">
               <a:ext uri="{FF2B5EF4-FFF2-40B4-BE49-F238E27FC236}">
-                <a16:creationId xmlns:a16="http://schemas.microsoft.com/office/drawing/2014/main" id="{7762D1F4-D2FF-45B4-B07D-8D777CE5B07D}"/>
+                <a16:creationId xmlns:a16="http://schemas.microsoft.com/office/drawing/2014/main" id="{C5A70FDC-1324-445D-A634-E09DE4557D69}"/>
               </a:ext>
             </a:extLst>
           </p:cNvPr>
@@ -2862,7 +2862,7 @@
           <p:cNvPr id="12" name="">
             <a:extLst xmlns:a="http://schemas.openxmlformats.org/drawingml/2006/main">
               <a:ext uri="{FF2B5EF4-FFF2-40B4-BE49-F238E27FC236}">
-                <a16:creationId xmlns:a16="http://schemas.microsoft.com/office/drawing/2014/main" id="{41229607-B7EC-40F2-8FA0-7518D6F85EE7}"/>
+                <a16:creationId xmlns:a16="http://schemas.microsoft.com/office/drawing/2014/main" id="{BD0946DD-F7B9-4B68-B3BC-39B679AD131C}"/>
               </a:ext>
             </a:extLst>
           </p:cNvPr>
@@ -2914,7 +2914,7 @@
           <p:cNvPr id="13" name="">
             <a:extLst xmlns:a="http://schemas.openxmlformats.org/drawingml/2006/main">
               <a:ext uri="{FF2B5EF4-FFF2-40B4-BE49-F238E27FC236}">
-                <a16:creationId xmlns:a16="http://schemas.microsoft.com/office/drawing/2014/main" id="{867580BA-590B-41FF-A6BD-EAE52E89F12F}"/>
+                <a16:creationId xmlns:a16="http://schemas.microsoft.com/office/drawing/2014/main" id="{8418F73C-DB45-4252-9640-2719116EDA60}"/>
               </a:ext>
             </a:extLst>
           </p:cNvPr>
@@ -2966,7 +2966,7 @@
           <p:cNvPr id="14" name="">
             <a:extLst xmlns:a="http://schemas.openxmlformats.org/drawingml/2006/main">
               <a:ext uri="{FF2B5EF4-FFF2-40B4-BE49-F238E27FC236}">
-                <a16:creationId xmlns:a16="http://schemas.microsoft.com/office/drawing/2014/main" id="{E8C44D87-4279-4B60-BD7A-80A7636C72D5}"/>
+                <a16:creationId xmlns:a16="http://schemas.microsoft.com/office/drawing/2014/main" id="{E9F95A73-6279-4488-8F4A-687B1AE247F9}"/>
               </a:ext>
             </a:extLst>
           </p:cNvPr>
@@ -3018,7 +3018,7 @@
           <p:cNvPr id="15" name="">
             <a:extLst xmlns:a="http://schemas.openxmlformats.org/drawingml/2006/main">
               <a:ext uri="{FF2B5EF4-FFF2-40B4-BE49-F238E27FC236}">
-                <a16:creationId xmlns:a16="http://schemas.microsoft.com/office/drawing/2014/main" id="{2E4F2EDD-446E-4FAB-8858-47DE8DC94730}"/>
+                <a16:creationId xmlns:a16="http://schemas.microsoft.com/office/drawing/2014/main" id="{70211395-81EF-49A0-AA0C-89F4E2F15025}"/>
               </a:ext>
             </a:extLst>
           </p:cNvPr>
@@ -3070,7 +3070,7 @@
           <p:cNvPr id="16" name="">
             <a:extLst xmlns:a="http://schemas.openxmlformats.org/drawingml/2006/main">
               <a:ext uri="{FF2B5EF4-FFF2-40B4-BE49-F238E27FC236}">
-                <a16:creationId xmlns:a16="http://schemas.microsoft.com/office/drawing/2014/main" id="{F877A967-1C6B-4709-A52E-448F2D8A3DED}"/>
+                <a16:creationId xmlns:a16="http://schemas.microsoft.com/office/drawing/2014/main" id="{AD7B9B32-8811-4DD3-97E0-4A27169A453D}"/>
               </a:ext>
             </a:extLst>
           </p:cNvPr>
@@ -3120,7 +3120,7 @@
     </p:spTree>
     <p:extLst>
       <p:ext uri="{BB962C8B-B14F-4D97-AF65-F5344CB8AC3E}">
-        <p14:creationId xmlns:p14="http://schemas.microsoft.com/office/powerpoint/2010/main" val="1518045204"/>
+        <p14:creationId xmlns:p14="http://schemas.microsoft.com/office/powerpoint/2010/main" val="259442689"/>
       </p:ext>
     </p:extLst>
   </p:cSld>
@@ -3151,7 +3151,7 @@
           <p:cNvPr id="103" name="">
             <a:extLst xmlns:a="http://schemas.openxmlformats.org/drawingml/2006/main">
               <a:ext uri="{FF2B5EF4-FFF2-40B4-BE49-F238E27FC236}">
-                <a16:creationId xmlns:a16="http://schemas.microsoft.com/office/drawing/2014/main" id="{5828E48C-5F4C-408B-B693-489909BC11E9}"/>
+                <a16:creationId xmlns:a16="http://schemas.microsoft.com/office/drawing/2014/main" id="{EFF449DC-756E-4768-815A-4FD5DC8EB8ED}"/>
               </a:ext>
             </a:extLst>
           </p:cNvPr>
@@ -3184,7 +3184,7 @@
           <p:cNvPr id="2" name="">
             <a:extLst xmlns:a="http://schemas.openxmlformats.org/drawingml/2006/main">
               <a:ext uri="{FF2B5EF4-FFF2-40B4-BE49-F238E27FC236}">
-                <a16:creationId xmlns:a16="http://schemas.microsoft.com/office/drawing/2014/main" id="{3BC08CC7-2EDA-4186-B3C8-C8BDEB6CC0CC}"/>
+                <a16:creationId xmlns:a16="http://schemas.microsoft.com/office/drawing/2014/main" id="{3E94C137-E9DA-43EE-837C-21CD99E87926}"/>
               </a:ext>
             </a:extLst>
           </p:cNvPr>
@@ -3215,7 +3215,7 @@
           <p:cNvPr id="3" name="">
             <a:extLst xmlns:a="http://schemas.openxmlformats.org/drawingml/2006/main">
               <a:ext uri="{FF2B5EF4-FFF2-40B4-BE49-F238E27FC236}">
-                <a16:creationId xmlns:a16="http://schemas.microsoft.com/office/drawing/2014/main" id="{63D30337-9A91-4D4A-A4E7-6A103B5E505F}"/>
+                <a16:creationId xmlns:a16="http://schemas.microsoft.com/office/drawing/2014/main" id="{1A4FD2EF-D60C-4B30-B030-E87D7936057B}"/>
               </a:ext>
             </a:extLst>
           </p:cNvPr>
@@ -3267,7 +3267,7 @@
           <p:cNvPr id="4" name="">
             <a:extLst xmlns:a="http://schemas.openxmlformats.org/drawingml/2006/main">
               <a:ext uri="{FF2B5EF4-FFF2-40B4-BE49-F238E27FC236}">
-                <a16:creationId xmlns:a16="http://schemas.microsoft.com/office/drawing/2014/main" id="{F7F0FCEF-2A6A-4D2F-8A32-5AFB5A88A02E}"/>
+                <a16:creationId xmlns:a16="http://schemas.microsoft.com/office/drawing/2014/main" id="{6633C198-48D5-44DD-8D8F-9C40B4D9372B}"/>
               </a:ext>
             </a:extLst>
           </p:cNvPr>
@@ -3319,7 +3319,7 @@
           <p:cNvPr id="5" name="">
             <a:extLst xmlns:a="http://schemas.openxmlformats.org/drawingml/2006/main">
               <a:ext uri="{FF2B5EF4-FFF2-40B4-BE49-F238E27FC236}">
-                <a16:creationId xmlns:a16="http://schemas.microsoft.com/office/drawing/2014/main" id="{D7666D74-C0A9-4499-87A1-19269A0A49D7}"/>
+                <a16:creationId xmlns:a16="http://schemas.microsoft.com/office/drawing/2014/main" id="{21CDBC32-6F1B-404C-A815-8A65229B49AB}"/>
               </a:ext>
             </a:extLst>
           </p:cNvPr>
@@ -3354,7 +3354,7 @@
           <p:nvPr/>
         </p:nvPicPr>
         <p:blipFill>
-          <a:blip xmlns:r="http://schemas.openxmlformats.org/officeDocument/2006/relationships" xmlns:a="http://schemas.openxmlformats.org/drawingml/2006/main" r:embed="R506eaff795dd4315"/>
+          <a:blip xmlns:r="http://schemas.openxmlformats.org/officeDocument/2006/relationships" xmlns:a="http://schemas.openxmlformats.org/drawingml/2006/main" r:embed="Raf8797790efd4740"/>
           <a:stretch xmlns:a="http://schemas.openxmlformats.org/drawingml/2006/main"/>
         </p:blipFill>
         <p:spPr>
@@ -3372,7 +3372,7 @@
           <p:cNvPr id="7" name="">
             <a:extLst xmlns:a="http://schemas.openxmlformats.org/drawingml/2006/main">
               <a:ext uri="{FF2B5EF4-FFF2-40B4-BE49-F238E27FC236}">
-                <a16:creationId xmlns:a16="http://schemas.microsoft.com/office/drawing/2014/main" id="{51C9447F-A07D-4C6B-B247-E8B7B6FC0633}"/>
+                <a16:creationId xmlns:a16="http://schemas.microsoft.com/office/drawing/2014/main" id="{AA0DE496-98EC-439E-963D-48033DDACFDD}"/>
               </a:ext>
             </a:extLst>
           </p:cNvPr>
@@ -3424,7 +3424,7 @@
           <p:cNvPr id="8" name="">
             <a:extLst xmlns:a="http://schemas.openxmlformats.org/drawingml/2006/main">
               <a:ext uri="{FF2B5EF4-FFF2-40B4-BE49-F238E27FC236}">
-                <a16:creationId xmlns:a16="http://schemas.microsoft.com/office/drawing/2014/main" id="{E848EE62-BC99-4424-9CA5-71C2298A673B}"/>
+                <a16:creationId xmlns:a16="http://schemas.microsoft.com/office/drawing/2014/main" id="{E0327C9E-52AF-4EF5-9BA1-1715F2D0BC40}"/>
               </a:ext>
             </a:extLst>
           </p:cNvPr>
@@ -3476,7 +3476,7 @@
           <p:cNvPr id="9" name="">
             <a:extLst xmlns:a="http://schemas.openxmlformats.org/drawingml/2006/main">
               <a:ext uri="{FF2B5EF4-FFF2-40B4-BE49-F238E27FC236}">
-                <a16:creationId xmlns:a16="http://schemas.microsoft.com/office/drawing/2014/main" id="{03251859-2E87-410C-9778-BC8D620E2048}"/>
+                <a16:creationId xmlns:a16="http://schemas.microsoft.com/office/drawing/2014/main" id="{2465FD4D-0244-45B2-BE16-49E2AC29BAC9}"/>
               </a:ext>
             </a:extLst>
           </p:cNvPr>
@@ -3528,7 +3528,7 @@
           <p:cNvPr id="10" name="">
             <a:extLst xmlns:a="http://schemas.openxmlformats.org/drawingml/2006/main">
               <a:ext uri="{FF2B5EF4-FFF2-40B4-BE49-F238E27FC236}">
-                <a16:creationId xmlns:a16="http://schemas.microsoft.com/office/drawing/2014/main" id="{7CE1945B-56DE-451C-8E58-A1A9DC872B31}"/>
+                <a16:creationId xmlns:a16="http://schemas.microsoft.com/office/drawing/2014/main" id="{B9354DAB-F41D-4D7A-85A4-303A8AA32FF2}"/>
               </a:ext>
             </a:extLst>
           </p:cNvPr>
@@ -3580,7 +3580,7 @@
           <p:cNvPr id="11" name="">
             <a:extLst xmlns:a="http://schemas.openxmlformats.org/drawingml/2006/main">
               <a:ext uri="{FF2B5EF4-FFF2-40B4-BE49-F238E27FC236}">
-                <a16:creationId xmlns:a16="http://schemas.microsoft.com/office/drawing/2014/main" id="{4D1484AC-7891-4402-93E4-6CE3E68B9F24}"/>
+                <a16:creationId xmlns:a16="http://schemas.microsoft.com/office/drawing/2014/main" id="{B57B9610-2809-4A58-BA9D-0C0455D34E3D}"/>
               </a:ext>
             </a:extLst>
           </p:cNvPr>
@@ -3611,7 +3611,7 @@
           <p:cNvPr id="12" name="">
             <a:extLst xmlns:a="http://schemas.openxmlformats.org/drawingml/2006/main">
               <a:ext uri="{FF2B5EF4-FFF2-40B4-BE49-F238E27FC236}">
-                <a16:creationId xmlns:a16="http://schemas.microsoft.com/office/drawing/2014/main" id="{499BCF15-A2D9-4727-A0E5-3ABCB57F10A6}"/>
+                <a16:creationId xmlns:a16="http://schemas.microsoft.com/office/drawing/2014/main" id="{6B0F775D-0569-4518-B56B-0F7B4358FB06}"/>
               </a:ext>
             </a:extLst>
           </p:cNvPr>
@@ -3642,7 +3642,7 @@
           <p:cNvPr id="13" name="">
             <a:extLst xmlns:a="http://schemas.openxmlformats.org/drawingml/2006/main">
               <a:ext uri="{FF2B5EF4-FFF2-40B4-BE49-F238E27FC236}">
-                <a16:creationId xmlns:a16="http://schemas.microsoft.com/office/drawing/2014/main" id="{A447D479-4804-4588-A8B9-EBDCD8422289}"/>
+                <a16:creationId xmlns:a16="http://schemas.microsoft.com/office/drawing/2014/main" id="{0E86FE6D-6393-4D0E-9074-8A4A202193B6}"/>
               </a:ext>
             </a:extLst>
           </p:cNvPr>
@@ -3694,7 +3694,7 @@
           <p:cNvPr id="14" name="">
             <a:extLst xmlns:a="http://schemas.openxmlformats.org/drawingml/2006/main">
               <a:ext uri="{FF2B5EF4-FFF2-40B4-BE49-F238E27FC236}">
-                <a16:creationId xmlns:a16="http://schemas.microsoft.com/office/drawing/2014/main" id="{0CD05777-16A3-4E48-B2FC-467AFF8CC85E}"/>
+                <a16:creationId xmlns:a16="http://schemas.microsoft.com/office/drawing/2014/main" id="{DF3C006B-BDE4-4FA9-B55D-90AD5A8EC875}"/>
               </a:ext>
             </a:extLst>
           </p:cNvPr>
@@ -3746,7 +3746,7 @@
           <p:cNvPr id="15" name="">
             <a:extLst xmlns:a="http://schemas.openxmlformats.org/drawingml/2006/main">
               <a:ext uri="{FF2B5EF4-FFF2-40B4-BE49-F238E27FC236}">
-                <a16:creationId xmlns:a16="http://schemas.microsoft.com/office/drawing/2014/main" id="{0B37EB4D-F7A7-4A53-B083-0F9D73E79B2A}"/>
+                <a16:creationId xmlns:a16="http://schemas.microsoft.com/office/drawing/2014/main" id="{5499FD43-0F69-4632-859E-EAEA4D0401FF}"/>
               </a:ext>
             </a:extLst>
           </p:cNvPr>
@@ -3798,7 +3798,7 @@
           <p:cNvPr id="16" name="">
             <a:extLst xmlns:a="http://schemas.openxmlformats.org/drawingml/2006/main">
               <a:ext uri="{FF2B5EF4-FFF2-40B4-BE49-F238E27FC236}">
-                <a16:creationId xmlns:a16="http://schemas.microsoft.com/office/drawing/2014/main" id="{4515DCB5-9DAF-473E-8291-BB78D2654F5E}"/>
+                <a16:creationId xmlns:a16="http://schemas.microsoft.com/office/drawing/2014/main" id="{967AAE74-A056-4152-828C-3C5468821E4A}"/>
               </a:ext>
             </a:extLst>
           </p:cNvPr>
@@ -3850,7 +3850,7 @@
           <p:cNvPr id="17" name="">
             <a:extLst xmlns:a="http://schemas.openxmlformats.org/drawingml/2006/main">
               <a:ext uri="{FF2B5EF4-FFF2-40B4-BE49-F238E27FC236}">
-                <a16:creationId xmlns:a16="http://schemas.microsoft.com/office/drawing/2014/main" id="{DF3A3F28-99A2-4A7F-84D5-6C8D484E4AA0}"/>
+                <a16:creationId xmlns:a16="http://schemas.microsoft.com/office/drawing/2014/main" id="{8B6AC199-7494-4A4B-963E-81C95BF5F652}"/>
               </a:ext>
             </a:extLst>
           </p:cNvPr>
@@ -3902,7 +3902,7 @@
           <p:cNvPr id="18" name="">
             <a:extLst xmlns:a="http://schemas.openxmlformats.org/drawingml/2006/main">
               <a:ext uri="{FF2B5EF4-FFF2-40B4-BE49-F238E27FC236}">
-                <a16:creationId xmlns:a16="http://schemas.microsoft.com/office/drawing/2014/main" id="{28C74BEA-6D01-4463-9765-E28A0D532CF0}"/>
+                <a16:creationId xmlns:a16="http://schemas.microsoft.com/office/drawing/2014/main" id="{7C97368E-3611-4CFB-A747-2F8443BEDF8A}"/>
               </a:ext>
             </a:extLst>
           </p:cNvPr>
@@ -3933,7 +3933,7 @@
           <p:cNvPr id="19" name="">
             <a:extLst xmlns:a="http://schemas.openxmlformats.org/drawingml/2006/main">
               <a:ext uri="{FF2B5EF4-FFF2-40B4-BE49-F238E27FC236}">
-                <a16:creationId xmlns:a16="http://schemas.microsoft.com/office/drawing/2014/main" id="{29C81163-9988-465A-96E9-D436204CA0E3}"/>
+                <a16:creationId xmlns:a16="http://schemas.microsoft.com/office/drawing/2014/main" id="{2F6AFB9A-4FB1-4722-B08D-8BEBABC4FB16}"/>
               </a:ext>
             </a:extLst>
           </p:cNvPr>
@@ -3964,7 +3964,7 @@
           <p:cNvPr id="20" name="">
             <a:extLst xmlns:a="http://schemas.openxmlformats.org/drawingml/2006/main">
               <a:ext uri="{FF2B5EF4-FFF2-40B4-BE49-F238E27FC236}">
-                <a16:creationId xmlns:a16="http://schemas.microsoft.com/office/drawing/2014/main" id="{5D435F84-1641-4EAB-B9DD-C3C9B872EC6C}"/>
+                <a16:creationId xmlns:a16="http://schemas.microsoft.com/office/drawing/2014/main" id="{A6E6B39C-7C32-444D-AEBC-3AC68FEE7845}"/>
               </a:ext>
             </a:extLst>
           </p:cNvPr>
@@ -4016,7 +4016,7 @@
           <p:cNvPr id="21" name="">
             <a:extLst xmlns:a="http://schemas.openxmlformats.org/drawingml/2006/main">
               <a:ext uri="{FF2B5EF4-FFF2-40B4-BE49-F238E27FC236}">
-                <a16:creationId xmlns:a16="http://schemas.microsoft.com/office/drawing/2014/main" id="{55F3145F-943C-4766-9CDB-2FDD6BC50E19}"/>
+                <a16:creationId xmlns:a16="http://schemas.microsoft.com/office/drawing/2014/main" id="{F0924D5B-BEA4-4AA6-834F-4199F1E367FA}"/>
               </a:ext>
             </a:extLst>
           </p:cNvPr>
@@ -4068,7 +4068,7 @@
           <p:cNvPr id="22" name="">
             <a:extLst xmlns:a="http://schemas.openxmlformats.org/drawingml/2006/main">
               <a:ext uri="{FF2B5EF4-FFF2-40B4-BE49-F238E27FC236}">
-                <a16:creationId xmlns:a16="http://schemas.microsoft.com/office/drawing/2014/main" id="{B779ADFC-F672-43E7-BFEE-09D0837AFD5B}"/>
+                <a16:creationId xmlns:a16="http://schemas.microsoft.com/office/drawing/2014/main" id="{4D999FAB-458E-4B4A-BADF-1811187E3E7E}"/>
               </a:ext>
             </a:extLst>
           </p:cNvPr>
@@ -4120,7 +4120,7 @@
           <p:cNvPr id="23" name="">
             <a:extLst xmlns:a="http://schemas.openxmlformats.org/drawingml/2006/main">
               <a:ext uri="{FF2B5EF4-FFF2-40B4-BE49-F238E27FC236}">
-                <a16:creationId xmlns:a16="http://schemas.microsoft.com/office/drawing/2014/main" id="{D172E79B-0637-4C80-83E2-08DFE1466ECC}"/>
+                <a16:creationId xmlns:a16="http://schemas.microsoft.com/office/drawing/2014/main" id="{DC0E230A-1E9C-412A-9ED6-57F6AC073DA9}"/>
               </a:ext>
             </a:extLst>
           </p:cNvPr>
@@ -4172,7 +4172,7 @@
           <p:cNvPr id="24" name="">
             <a:extLst xmlns:a="http://schemas.openxmlformats.org/drawingml/2006/main">
               <a:ext uri="{FF2B5EF4-FFF2-40B4-BE49-F238E27FC236}">
-                <a16:creationId xmlns:a16="http://schemas.microsoft.com/office/drawing/2014/main" id="{415C94E0-3119-44B2-9371-3544A7AD0C8C}"/>
+                <a16:creationId xmlns:a16="http://schemas.microsoft.com/office/drawing/2014/main" id="{3E8A50B7-57CC-4C6D-982B-85AE60B89815}"/>
               </a:ext>
             </a:extLst>
           </p:cNvPr>
@@ -4224,7 +4224,7 @@
           <p:cNvPr id="25" name="">
             <a:extLst xmlns:a="http://schemas.openxmlformats.org/drawingml/2006/main">
               <a:ext uri="{FF2B5EF4-FFF2-40B4-BE49-F238E27FC236}">
-                <a16:creationId xmlns:a16="http://schemas.microsoft.com/office/drawing/2014/main" id="{2D6D6566-D072-4A53-9043-29DE58FD9092}"/>
+                <a16:creationId xmlns:a16="http://schemas.microsoft.com/office/drawing/2014/main" id="{6AFD7254-8FB8-412B-96B6-EF2563843E37}"/>
               </a:ext>
             </a:extLst>
           </p:cNvPr>
@@ -4255,7 +4255,7 @@
           <p:cNvPr id="26" name="">
             <a:extLst xmlns:a="http://schemas.openxmlformats.org/drawingml/2006/main">
               <a:ext uri="{FF2B5EF4-FFF2-40B4-BE49-F238E27FC236}">
-                <a16:creationId xmlns:a16="http://schemas.microsoft.com/office/drawing/2014/main" id="{EF6203DE-72AD-43E0-8DBB-D4924E513395}"/>
+                <a16:creationId xmlns:a16="http://schemas.microsoft.com/office/drawing/2014/main" id="{BCAC73A0-8CC2-4849-9486-1B8DB270DFBC}"/>
               </a:ext>
             </a:extLst>
           </p:cNvPr>
@@ -4307,7 +4307,7 @@
           <p:cNvPr id="27" name="">
             <a:extLst xmlns:a="http://schemas.openxmlformats.org/drawingml/2006/main">
               <a:ext uri="{FF2B5EF4-FFF2-40B4-BE49-F238E27FC236}">
-                <a16:creationId xmlns:a16="http://schemas.microsoft.com/office/drawing/2014/main" id="{4E4C9BD7-AABF-48B7-BB1F-5481D2CD4A68}"/>
+                <a16:creationId xmlns:a16="http://schemas.microsoft.com/office/drawing/2014/main" id="{EA3D6C2F-3976-44BB-98CD-5D7AC983CF7C}"/>
               </a:ext>
             </a:extLst>
           </p:cNvPr>
@@ -4359,7 +4359,7 @@
           <p:cNvPr id="28" name="">
             <a:extLst xmlns:a="http://schemas.openxmlformats.org/drawingml/2006/main">
               <a:ext uri="{FF2B5EF4-FFF2-40B4-BE49-F238E27FC236}">
-                <a16:creationId xmlns:a16="http://schemas.microsoft.com/office/drawing/2014/main" id="{73EEEF5A-3EF5-4DEF-B5CC-C8A83E89152C}"/>
+                <a16:creationId xmlns:a16="http://schemas.microsoft.com/office/drawing/2014/main" id="{09489E91-7814-4B31-8B4D-EEB2497CE6CA}"/>
               </a:ext>
             </a:extLst>
           </p:cNvPr>
@@ -4411,7 +4411,7 @@
           <p:cNvPr id="29" name="">
             <a:extLst xmlns:a="http://schemas.openxmlformats.org/drawingml/2006/main">
               <a:ext uri="{FF2B5EF4-FFF2-40B4-BE49-F238E27FC236}">
-                <a16:creationId xmlns:a16="http://schemas.microsoft.com/office/drawing/2014/main" id="{2EDC1EB3-9F98-4B70-96A8-726A38C4B78A}"/>
+                <a16:creationId xmlns:a16="http://schemas.microsoft.com/office/drawing/2014/main" id="{64C89C2C-BC37-40B1-87B7-64FB9A82434F}"/>
               </a:ext>
             </a:extLst>
           </p:cNvPr>
@@ -4463,7 +4463,7 @@
           <p:cNvPr id="30" name="">
             <a:extLst xmlns:a="http://schemas.openxmlformats.org/drawingml/2006/main">
               <a:ext uri="{FF2B5EF4-FFF2-40B4-BE49-F238E27FC236}">
-                <a16:creationId xmlns:a16="http://schemas.microsoft.com/office/drawing/2014/main" id="{86CB0A68-E803-4923-BB60-81D235A9B1FD}"/>
+                <a16:creationId xmlns:a16="http://schemas.microsoft.com/office/drawing/2014/main" id="{D1084F65-17DE-4DA3-9A12-D754EE41E90F}"/>
               </a:ext>
             </a:extLst>
           </p:cNvPr>
@@ -4515,7 +4515,7 @@
           <p:cNvPr id="31" name="">
             <a:extLst xmlns:a="http://schemas.openxmlformats.org/drawingml/2006/main">
               <a:ext uri="{FF2B5EF4-FFF2-40B4-BE49-F238E27FC236}">
-                <a16:creationId xmlns:a16="http://schemas.microsoft.com/office/drawing/2014/main" id="{7C776B53-4BA0-4977-A815-237067D36A49}"/>
+                <a16:creationId xmlns:a16="http://schemas.microsoft.com/office/drawing/2014/main" id="{A8548D17-30AF-440B-AF61-6FC91469BF2A}"/>
               </a:ext>
             </a:extLst>
           </p:cNvPr>
@@ -4546,7 +4546,7 @@
           <p:cNvPr id="32" name="">
             <a:extLst xmlns:a="http://schemas.openxmlformats.org/drawingml/2006/main">
               <a:ext uri="{FF2B5EF4-FFF2-40B4-BE49-F238E27FC236}">
-                <a16:creationId xmlns:a16="http://schemas.microsoft.com/office/drawing/2014/main" id="{3964D597-B324-4430-BA2E-F6F979AF1124}"/>
+                <a16:creationId xmlns:a16="http://schemas.microsoft.com/office/drawing/2014/main" id="{E00B6359-4761-4EA9-B23A-98098BFCC07A}"/>
               </a:ext>
             </a:extLst>
           </p:cNvPr>
@@ -4577,7 +4577,7 @@
           <p:cNvPr id="33" name="">
             <a:extLst xmlns:a="http://schemas.openxmlformats.org/drawingml/2006/main">
               <a:ext uri="{FF2B5EF4-FFF2-40B4-BE49-F238E27FC236}">
-                <a16:creationId xmlns:a16="http://schemas.microsoft.com/office/drawing/2014/main" id="{06E19E82-C48A-4F2B-B7CB-7B4D35F7EE81}"/>
+                <a16:creationId xmlns:a16="http://schemas.microsoft.com/office/drawing/2014/main" id="{5B939AAD-F3F7-4404-80C8-4C047C6EE5C4}"/>
               </a:ext>
             </a:extLst>
           </p:cNvPr>
@@ -4629,7 +4629,7 @@
           <p:cNvPr id="34" name="">
             <a:extLst xmlns:a="http://schemas.openxmlformats.org/drawingml/2006/main">
               <a:ext uri="{FF2B5EF4-FFF2-40B4-BE49-F238E27FC236}">
-                <a16:creationId xmlns:a16="http://schemas.microsoft.com/office/drawing/2014/main" id="{B8D15650-4C14-48C6-A204-9111A38011ED}"/>
+                <a16:creationId xmlns:a16="http://schemas.microsoft.com/office/drawing/2014/main" id="{1E817C21-6CB5-4DC3-93C2-ED6C050F9532}"/>
               </a:ext>
             </a:extLst>
           </p:cNvPr>
@@ -4681,7 +4681,7 @@
           <p:cNvPr id="35" name="">
             <a:extLst xmlns:a="http://schemas.openxmlformats.org/drawingml/2006/main">
               <a:ext uri="{FF2B5EF4-FFF2-40B4-BE49-F238E27FC236}">
-                <a16:creationId xmlns:a16="http://schemas.microsoft.com/office/drawing/2014/main" id="{0F366C9B-1DC9-42E4-AC76-67F4BFF646A5}"/>
+                <a16:creationId xmlns:a16="http://schemas.microsoft.com/office/drawing/2014/main" id="{20F5D6B1-1AE5-4D89-9D23-4945A9286B28}"/>
               </a:ext>
             </a:extLst>
           </p:cNvPr>
@@ -4733,7 +4733,7 @@
           <p:cNvPr id="36" name="">
             <a:extLst xmlns:a="http://schemas.openxmlformats.org/drawingml/2006/main">
               <a:ext uri="{FF2B5EF4-FFF2-40B4-BE49-F238E27FC236}">
-                <a16:creationId xmlns:a16="http://schemas.microsoft.com/office/drawing/2014/main" id="{38148665-F6CB-4EF3-9A72-367E97891CE7}"/>
+                <a16:creationId xmlns:a16="http://schemas.microsoft.com/office/drawing/2014/main" id="{4B25FF7E-3DA6-4C70-9D72-6EA3847BFA3C}"/>
               </a:ext>
             </a:extLst>
           </p:cNvPr>
@@ -4785,7 +4785,7 @@
           <p:cNvPr id="37" name="">
             <a:extLst xmlns:a="http://schemas.openxmlformats.org/drawingml/2006/main">
               <a:ext uri="{FF2B5EF4-FFF2-40B4-BE49-F238E27FC236}">
-                <a16:creationId xmlns:a16="http://schemas.microsoft.com/office/drawing/2014/main" id="{30B0E977-EB70-4059-BAFF-D8914B6540A9}"/>
+                <a16:creationId xmlns:a16="http://schemas.microsoft.com/office/drawing/2014/main" id="{7834B92B-D902-40F7-8744-FA3ABD22099A}"/>
               </a:ext>
             </a:extLst>
           </p:cNvPr>
@@ -4837,7 +4837,7 @@
           <p:cNvPr id="38" name="">
             <a:extLst xmlns:a="http://schemas.openxmlformats.org/drawingml/2006/main">
               <a:ext uri="{FF2B5EF4-FFF2-40B4-BE49-F238E27FC236}">
-                <a16:creationId xmlns:a16="http://schemas.microsoft.com/office/drawing/2014/main" id="{1EBA6B32-2E41-4820-B4E1-1D084D8AF662}"/>
+                <a16:creationId xmlns:a16="http://schemas.microsoft.com/office/drawing/2014/main" id="{CFE92FF5-932D-47A1-93FA-2ADC17757E86}"/>
               </a:ext>
             </a:extLst>
           </p:cNvPr>
@@ -4868,7 +4868,7 @@
           <p:cNvPr id="39" name="">
             <a:extLst xmlns:a="http://schemas.openxmlformats.org/drawingml/2006/main">
               <a:ext uri="{FF2B5EF4-FFF2-40B4-BE49-F238E27FC236}">
-                <a16:creationId xmlns:a16="http://schemas.microsoft.com/office/drawing/2014/main" id="{7359FF73-A19E-463D-A767-16B21E3A8EFD}"/>
+                <a16:creationId xmlns:a16="http://schemas.microsoft.com/office/drawing/2014/main" id="{F5D86390-5BC0-4610-8A25-498F8F502CC2}"/>
               </a:ext>
             </a:extLst>
           </p:cNvPr>
@@ -4920,7 +4920,7 @@
           <p:cNvPr id="40" name="">
             <a:extLst xmlns:a="http://schemas.openxmlformats.org/drawingml/2006/main">
               <a:ext uri="{FF2B5EF4-FFF2-40B4-BE49-F238E27FC236}">
-                <a16:creationId xmlns:a16="http://schemas.microsoft.com/office/drawing/2014/main" id="{3C8D5A37-AA9A-4D2D-B6D5-63FCF9F0C3E9}"/>
+                <a16:creationId xmlns:a16="http://schemas.microsoft.com/office/drawing/2014/main" id="{5F0E4ACD-63FC-4EAA-B271-E5E8D0DFA346}"/>
               </a:ext>
             </a:extLst>
           </p:cNvPr>
@@ -4972,7 +4972,7 @@
           <p:cNvPr id="41" name="">
             <a:extLst xmlns:a="http://schemas.openxmlformats.org/drawingml/2006/main">
               <a:ext uri="{FF2B5EF4-FFF2-40B4-BE49-F238E27FC236}">
-                <a16:creationId xmlns:a16="http://schemas.microsoft.com/office/drawing/2014/main" id="{130446B6-24BA-4A60-9573-09745422E683}"/>
+                <a16:creationId xmlns:a16="http://schemas.microsoft.com/office/drawing/2014/main" id="{7EE71C74-8D3C-4A74-A2F4-1461A0135AFF}"/>
               </a:ext>
             </a:extLst>
           </p:cNvPr>
@@ -5024,7 +5024,7 @@
           <p:cNvPr id="42" name="">
             <a:extLst xmlns:a="http://schemas.openxmlformats.org/drawingml/2006/main">
               <a:ext uri="{FF2B5EF4-FFF2-40B4-BE49-F238E27FC236}">
-                <a16:creationId xmlns:a16="http://schemas.microsoft.com/office/drawing/2014/main" id="{892B8A64-96CF-48DA-AC11-4911FFFE40B2}"/>
+                <a16:creationId xmlns:a16="http://schemas.microsoft.com/office/drawing/2014/main" id="{EDC91A45-ACED-4946-824C-53F9036398E0}"/>
               </a:ext>
             </a:extLst>
           </p:cNvPr>
@@ -5076,7 +5076,7 @@
           <p:cNvPr id="43" name="">
             <a:extLst xmlns:a="http://schemas.openxmlformats.org/drawingml/2006/main">
               <a:ext uri="{FF2B5EF4-FFF2-40B4-BE49-F238E27FC236}">
-                <a16:creationId xmlns:a16="http://schemas.microsoft.com/office/drawing/2014/main" id="{F254AC7C-A2AB-405B-AEED-E215446FDC0A}"/>
+                <a16:creationId xmlns:a16="http://schemas.microsoft.com/office/drawing/2014/main" id="{0E901DCE-E945-4CB1-BED9-276D059F0EA8}"/>
               </a:ext>
             </a:extLst>
           </p:cNvPr>
@@ -5128,7 +5128,7 @@
           <p:cNvPr id="44" name="">
             <a:extLst xmlns:a="http://schemas.openxmlformats.org/drawingml/2006/main">
               <a:ext uri="{FF2B5EF4-FFF2-40B4-BE49-F238E27FC236}">
-                <a16:creationId xmlns:a16="http://schemas.microsoft.com/office/drawing/2014/main" id="{5B518E39-DABF-4087-9C47-16BF1D76AEFA}"/>
+                <a16:creationId xmlns:a16="http://schemas.microsoft.com/office/drawing/2014/main" id="{68A9CE8D-8B60-4D96-812B-FB5ED78F586A}"/>
               </a:ext>
             </a:extLst>
           </p:cNvPr>
@@ -5159,7 +5159,7 @@
           <p:cNvPr id="45" name="">
             <a:extLst xmlns:a="http://schemas.openxmlformats.org/drawingml/2006/main">
               <a:ext uri="{FF2B5EF4-FFF2-40B4-BE49-F238E27FC236}">
-                <a16:creationId xmlns:a16="http://schemas.microsoft.com/office/drawing/2014/main" id="{C584EE1E-091D-4FAD-89A1-35C68AA649E0}"/>
+                <a16:creationId xmlns:a16="http://schemas.microsoft.com/office/drawing/2014/main" id="{3E68CFE7-4D7D-4773-A273-7A5D2C8C73D0}"/>
               </a:ext>
             </a:extLst>
           </p:cNvPr>
@@ -5190,7 +5190,7 @@
           <p:cNvPr id="46" name="">
             <a:extLst xmlns:a="http://schemas.openxmlformats.org/drawingml/2006/main">
               <a:ext uri="{FF2B5EF4-FFF2-40B4-BE49-F238E27FC236}">
-                <a16:creationId xmlns:a16="http://schemas.microsoft.com/office/drawing/2014/main" id="{48FC2595-E816-461B-AF2B-E31C1C5E19D2}"/>
+                <a16:creationId xmlns:a16="http://schemas.microsoft.com/office/drawing/2014/main" id="{9FF6A8D7-2DBE-4FB3-BF9A-9F339CE43020}"/>
               </a:ext>
             </a:extLst>
           </p:cNvPr>
@@ -5242,7 +5242,7 @@
           <p:cNvPr id="47" name="">
             <a:extLst xmlns:a="http://schemas.openxmlformats.org/drawingml/2006/main">
               <a:ext uri="{FF2B5EF4-FFF2-40B4-BE49-F238E27FC236}">
-                <a16:creationId xmlns:a16="http://schemas.microsoft.com/office/drawing/2014/main" id="{14415912-422A-45A8-B936-3C597A8431F2}"/>
+                <a16:creationId xmlns:a16="http://schemas.microsoft.com/office/drawing/2014/main" id="{9A094EE5-3489-40CC-ADED-8CA65882881A}"/>
               </a:ext>
             </a:extLst>
           </p:cNvPr>
@@ -5294,7 +5294,7 @@
           <p:cNvPr id="48" name="">
             <a:extLst xmlns:a="http://schemas.openxmlformats.org/drawingml/2006/main">
               <a:ext uri="{FF2B5EF4-FFF2-40B4-BE49-F238E27FC236}">
-                <a16:creationId xmlns:a16="http://schemas.microsoft.com/office/drawing/2014/main" id="{605A0E2F-CF0A-4D9D-A116-D1250C1A7460}"/>
+                <a16:creationId xmlns:a16="http://schemas.microsoft.com/office/drawing/2014/main" id="{F56F23D3-B525-4AEB-AB04-3A9B613417D0}"/>
               </a:ext>
             </a:extLst>
           </p:cNvPr>
@@ -5346,7 +5346,7 @@
           <p:cNvPr id="49" name="">
             <a:extLst xmlns:a="http://schemas.openxmlformats.org/drawingml/2006/main">
               <a:ext uri="{FF2B5EF4-FFF2-40B4-BE49-F238E27FC236}">
-                <a16:creationId xmlns:a16="http://schemas.microsoft.com/office/drawing/2014/main" id="{37ACF250-4CB1-4648-A2FC-9AF639728234}"/>
+                <a16:creationId xmlns:a16="http://schemas.microsoft.com/office/drawing/2014/main" id="{8F732B48-2020-4E22-968C-28D3D5DFAD3F}"/>
               </a:ext>
             </a:extLst>
           </p:cNvPr>
@@ -5398,7 +5398,7 @@
           <p:cNvPr id="50" name="">
             <a:extLst xmlns:a="http://schemas.openxmlformats.org/drawingml/2006/main">
               <a:ext uri="{FF2B5EF4-FFF2-40B4-BE49-F238E27FC236}">
-                <a16:creationId xmlns:a16="http://schemas.microsoft.com/office/drawing/2014/main" id="{5C496B38-802B-4A84-9FE5-87C53BD83D8D}"/>
+                <a16:creationId xmlns:a16="http://schemas.microsoft.com/office/drawing/2014/main" id="{2C9CCB6A-BCA3-4C9B-BDF8-5CCE7B23176F}"/>
               </a:ext>
             </a:extLst>
           </p:cNvPr>
@@ -5450,7 +5450,7 @@
           <p:cNvPr id="51" name="">
             <a:extLst xmlns:a="http://schemas.openxmlformats.org/drawingml/2006/main">
               <a:ext uri="{FF2B5EF4-FFF2-40B4-BE49-F238E27FC236}">
-                <a16:creationId xmlns:a16="http://schemas.microsoft.com/office/drawing/2014/main" id="{B7444045-A6B7-48AB-B3C3-C8A287FBA10A}"/>
+                <a16:creationId xmlns:a16="http://schemas.microsoft.com/office/drawing/2014/main" id="{F40C6EAB-D853-4900-86D9-3224674C3857}"/>
               </a:ext>
             </a:extLst>
           </p:cNvPr>
@@ -5481,7 +5481,7 @@
           <p:cNvPr id="52" name="">
             <a:extLst xmlns:a="http://schemas.openxmlformats.org/drawingml/2006/main">
               <a:ext uri="{FF2B5EF4-FFF2-40B4-BE49-F238E27FC236}">
-                <a16:creationId xmlns:a16="http://schemas.microsoft.com/office/drawing/2014/main" id="{8A9F8E9B-FEC2-4102-8121-CA86F2B5774E}"/>
+                <a16:creationId xmlns:a16="http://schemas.microsoft.com/office/drawing/2014/main" id="{BA9500B3-2173-4F38-A6F2-7BADE2FD06E1}"/>
               </a:ext>
             </a:extLst>
           </p:cNvPr>
@@ -5533,7 +5533,7 @@
           <p:cNvPr id="53" name="">
             <a:extLst xmlns:a="http://schemas.openxmlformats.org/drawingml/2006/main">
               <a:ext uri="{FF2B5EF4-FFF2-40B4-BE49-F238E27FC236}">
-                <a16:creationId xmlns:a16="http://schemas.microsoft.com/office/drawing/2014/main" id="{751E0A58-3A87-4EDD-B6E2-95F4C6E345F0}"/>
+                <a16:creationId xmlns:a16="http://schemas.microsoft.com/office/drawing/2014/main" id="{F777FA4B-AC19-4831-9B81-5AC535472138}"/>
               </a:ext>
             </a:extLst>
           </p:cNvPr>
@@ -5585,7 +5585,7 @@
           <p:cNvPr id="54" name="">
             <a:extLst xmlns:a="http://schemas.openxmlformats.org/drawingml/2006/main">
               <a:ext uri="{FF2B5EF4-FFF2-40B4-BE49-F238E27FC236}">
-                <a16:creationId xmlns:a16="http://schemas.microsoft.com/office/drawing/2014/main" id="{6F411DDD-1FD2-47A3-9D66-5327E0FC0F78}"/>
+                <a16:creationId xmlns:a16="http://schemas.microsoft.com/office/drawing/2014/main" id="{2BD4C7F6-EFB8-44E3-ADAC-869272A8F114}"/>
               </a:ext>
             </a:extLst>
           </p:cNvPr>
@@ -5637,7 +5637,7 @@
           <p:cNvPr id="55" name="">
             <a:extLst xmlns:a="http://schemas.openxmlformats.org/drawingml/2006/main">
               <a:ext uri="{FF2B5EF4-FFF2-40B4-BE49-F238E27FC236}">
-                <a16:creationId xmlns:a16="http://schemas.microsoft.com/office/drawing/2014/main" id="{8BA7C93E-7813-411B-9CA6-AA97A7E3F6E0}"/>
+                <a16:creationId xmlns:a16="http://schemas.microsoft.com/office/drawing/2014/main" id="{F4473F33-9E5B-4288-9E24-B7570B2EFA3F}"/>
               </a:ext>
             </a:extLst>
           </p:cNvPr>
@@ -5689,7 +5689,7 @@
           <p:cNvPr id="56" name="">
             <a:extLst xmlns:a="http://schemas.openxmlformats.org/drawingml/2006/main">
               <a:ext uri="{FF2B5EF4-FFF2-40B4-BE49-F238E27FC236}">
-                <a16:creationId xmlns:a16="http://schemas.microsoft.com/office/drawing/2014/main" id="{5CBA51BD-3BED-4E8B-BE86-2C45EF3DF45B}"/>
+                <a16:creationId xmlns:a16="http://schemas.microsoft.com/office/drawing/2014/main" id="{DFA54B7D-A5A3-4788-B31C-BE87B94CA5A5}"/>
               </a:ext>
             </a:extLst>
           </p:cNvPr>
@@ -5741,7 +5741,7 @@
           <p:cNvPr id="57" name="">
             <a:extLst xmlns:a="http://schemas.openxmlformats.org/drawingml/2006/main">
               <a:ext uri="{FF2B5EF4-FFF2-40B4-BE49-F238E27FC236}">
-                <a16:creationId xmlns:a16="http://schemas.microsoft.com/office/drawing/2014/main" id="{BCC85065-C8CB-4B0A-9BE7-6F1A98AD5C19}"/>
+                <a16:creationId xmlns:a16="http://schemas.microsoft.com/office/drawing/2014/main" id="{770F8A76-5A86-4930-836C-89C222855AF1}"/>
               </a:ext>
             </a:extLst>
           </p:cNvPr>
@@ -5772,7 +5772,7 @@
           <p:cNvPr id="58" name="">
             <a:extLst xmlns:a="http://schemas.openxmlformats.org/drawingml/2006/main">
               <a:ext uri="{FF2B5EF4-FFF2-40B4-BE49-F238E27FC236}">
-                <a16:creationId xmlns:a16="http://schemas.microsoft.com/office/drawing/2014/main" id="{BD20CC73-5DBB-49B0-8857-1FE71D08FAFC}"/>
+                <a16:creationId xmlns:a16="http://schemas.microsoft.com/office/drawing/2014/main" id="{C98CB1FE-519A-4FB4-BE2F-CFF3E724D69A}"/>
               </a:ext>
             </a:extLst>
           </p:cNvPr>
@@ -5803,7 +5803,7 @@
           <p:cNvPr id="59" name="">
             <a:extLst xmlns:a="http://schemas.openxmlformats.org/drawingml/2006/main">
               <a:ext uri="{FF2B5EF4-FFF2-40B4-BE49-F238E27FC236}">
-                <a16:creationId xmlns:a16="http://schemas.microsoft.com/office/drawing/2014/main" id="{726DE987-5E44-44A9-86E2-B6CDFF3B4301}"/>
+                <a16:creationId xmlns:a16="http://schemas.microsoft.com/office/drawing/2014/main" id="{650B1D04-676B-4CA1-84E7-65143495D968}"/>
               </a:ext>
             </a:extLst>
           </p:cNvPr>
@@ -5855,7 +5855,7 @@
           <p:cNvPr id="60" name="">
             <a:extLst xmlns:a="http://schemas.openxmlformats.org/drawingml/2006/main">
               <a:ext uri="{FF2B5EF4-FFF2-40B4-BE49-F238E27FC236}">
-                <a16:creationId xmlns:a16="http://schemas.microsoft.com/office/drawing/2014/main" id="{D4F21E01-3833-45ED-8770-05E490C0D9EF}"/>
+                <a16:creationId xmlns:a16="http://schemas.microsoft.com/office/drawing/2014/main" id="{2CC0FAD9-0572-4566-ABF9-33B784E2B370}"/>
               </a:ext>
             </a:extLst>
           </p:cNvPr>
@@ -5907,7 +5907,7 @@
           <p:cNvPr id="61" name="">
             <a:extLst xmlns:a="http://schemas.openxmlformats.org/drawingml/2006/main">
               <a:ext uri="{FF2B5EF4-FFF2-40B4-BE49-F238E27FC236}">
-                <a16:creationId xmlns:a16="http://schemas.microsoft.com/office/drawing/2014/main" id="{9201E4C1-5F9E-413E-8AAB-6317DF8051AB}"/>
+                <a16:creationId xmlns:a16="http://schemas.microsoft.com/office/drawing/2014/main" id="{1DF5F2D0-A6F2-497C-9F50-40DD3DC56532}"/>
               </a:ext>
             </a:extLst>
           </p:cNvPr>
@@ -5959,7 +5959,7 @@
           <p:cNvPr id="62" name="">
             <a:extLst xmlns:a="http://schemas.openxmlformats.org/drawingml/2006/main">
               <a:ext uri="{FF2B5EF4-FFF2-40B4-BE49-F238E27FC236}">
-                <a16:creationId xmlns:a16="http://schemas.microsoft.com/office/drawing/2014/main" id="{18F6781A-5D3E-43B7-89E1-13E3B7E56EA1}"/>
+                <a16:creationId xmlns:a16="http://schemas.microsoft.com/office/drawing/2014/main" id="{B2314A72-5629-4261-9ADF-52ED6FD7C7A5}"/>
               </a:ext>
             </a:extLst>
           </p:cNvPr>
@@ -6011,7 +6011,7 @@
           <p:cNvPr id="63" name="">
             <a:extLst xmlns:a="http://schemas.openxmlformats.org/drawingml/2006/main">
               <a:ext uri="{FF2B5EF4-FFF2-40B4-BE49-F238E27FC236}">
-                <a16:creationId xmlns:a16="http://schemas.microsoft.com/office/drawing/2014/main" id="{704D4426-722F-4A72-A56D-12AFFDAEF00D}"/>
+                <a16:creationId xmlns:a16="http://schemas.microsoft.com/office/drawing/2014/main" id="{D9391519-430A-4C65-B895-4D4953882CB6}"/>
               </a:ext>
             </a:extLst>
           </p:cNvPr>
@@ -6063,7 +6063,7 @@
           <p:cNvPr id="64" name="">
             <a:extLst xmlns:a="http://schemas.openxmlformats.org/drawingml/2006/main">
               <a:ext uri="{FF2B5EF4-FFF2-40B4-BE49-F238E27FC236}">
-                <a16:creationId xmlns:a16="http://schemas.microsoft.com/office/drawing/2014/main" id="{5ACC16B4-8EB3-47EA-A79D-3D449A0ED3FE}"/>
+                <a16:creationId xmlns:a16="http://schemas.microsoft.com/office/drawing/2014/main" id="{31C88EF5-3D3A-4247-8414-733DC256C0AC}"/>
               </a:ext>
             </a:extLst>
           </p:cNvPr>
@@ -6094,7 +6094,7 @@
           <p:cNvPr id="65" name="">
             <a:extLst xmlns:a="http://schemas.openxmlformats.org/drawingml/2006/main">
               <a:ext uri="{FF2B5EF4-FFF2-40B4-BE49-F238E27FC236}">
-                <a16:creationId xmlns:a16="http://schemas.microsoft.com/office/drawing/2014/main" id="{E7445146-EF4E-4D91-B521-DF0BA6F2967E}"/>
+                <a16:creationId xmlns:a16="http://schemas.microsoft.com/office/drawing/2014/main" id="{072442C2-89C3-4578-8F44-C11B9D6DF9E8}"/>
               </a:ext>
             </a:extLst>
           </p:cNvPr>
@@ -6146,7 +6146,7 @@
           <p:cNvPr id="66" name="">
             <a:extLst xmlns:a="http://schemas.openxmlformats.org/drawingml/2006/main">
               <a:ext uri="{FF2B5EF4-FFF2-40B4-BE49-F238E27FC236}">
-                <a16:creationId xmlns:a16="http://schemas.microsoft.com/office/drawing/2014/main" id="{F4BB7379-A0BA-40F3-85D6-E29BA8F14284}"/>
+                <a16:creationId xmlns:a16="http://schemas.microsoft.com/office/drawing/2014/main" id="{535D78BE-2464-43C7-B127-D184CB7A0ADA}"/>
               </a:ext>
             </a:extLst>
           </p:cNvPr>
@@ -6198,7 +6198,7 @@
           <p:cNvPr id="67" name="">
             <a:extLst xmlns:a="http://schemas.openxmlformats.org/drawingml/2006/main">
               <a:ext uri="{FF2B5EF4-FFF2-40B4-BE49-F238E27FC236}">
-                <a16:creationId xmlns:a16="http://schemas.microsoft.com/office/drawing/2014/main" id="{423BEBD2-211F-486B-8225-B35EB7CE82D7}"/>
+                <a16:creationId xmlns:a16="http://schemas.microsoft.com/office/drawing/2014/main" id="{00912FFD-0C2A-4A7F-9BBF-091D3FFF6798}"/>
               </a:ext>
             </a:extLst>
           </p:cNvPr>
@@ -6250,7 +6250,7 @@
           <p:cNvPr id="68" name="">
             <a:extLst xmlns:a="http://schemas.openxmlformats.org/drawingml/2006/main">
               <a:ext uri="{FF2B5EF4-FFF2-40B4-BE49-F238E27FC236}">
-                <a16:creationId xmlns:a16="http://schemas.microsoft.com/office/drawing/2014/main" id="{990F5D79-36B4-4A2C-993B-8177AB8EE899}"/>
+                <a16:creationId xmlns:a16="http://schemas.microsoft.com/office/drawing/2014/main" id="{C0439B3A-B3CC-44A3-8A70-D77C0D1EC005}"/>
               </a:ext>
             </a:extLst>
           </p:cNvPr>
@@ -6302,7 +6302,7 @@
           <p:cNvPr id="69" name="">
             <a:extLst xmlns:a="http://schemas.openxmlformats.org/drawingml/2006/main">
               <a:ext uri="{FF2B5EF4-FFF2-40B4-BE49-F238E27FC236}">
-                <a16:creationId xmlns:a16="http://schemas.microsoft.com/office/drawing/2014/main" id="{6A9D537F-1468-4EB1-800D-96D9A2B9606B}"/>
+                <a16:creationId xmlns:a16="http://schemas.microsoft.com/office/drawing/2014/main" id="{FDC805E3-50F6-43D5-BDA0-DE2115FE5068}"/>
               </a:ext>
             </a:extLst>
           </p:cNvPr>
@@ -6354,7 +6354,7 @@
           <p:cNvPr id="70" name="">
             <a:extLst xmlns:a="http://schemas.openxmlformats.org/drawingml/2006/main">
               <a:ext uri="{FF2B5EF4-FFF2-40B4-BE49-F238E27FC236}">
-                <a16:creationId xmlns:a16="http://schemas.microsoft.com/office/drawing/2014/main" id="{76ED42B6-A68B-48D4-A063-89E640B56F9B}"/>
+                <a16:creationId xmlns:a16="http://schemas.microsoft.com/office/drawing/2014/main" id="{179D313C-9A93-4017-8A90-C794B95DCE62}"/>
               </a:ext>
             </a:extLst>
           </p:cNvPr>
@@ -6385,7 +6385,7 @@
           <p:cNvPr id="71" name="">
             <a:extLst xmlns:a="http://schemas.openxmlformats.org/drawingml/2006/main">
               <a:ext uri="{FF2B5EF4-FFF2-40B4-BE49-F238E27FC236}">
-                <a16:creationId xmlns:a16="http://schemas.microsoft.com/office/drawing/2014/main" id="{432B300C-85E4-438A-AE25-63EB31F64E4D}"/>
+                <a16:creationId xmlns:a16="http://schemas.microsoft.com/office/drawing/2014/main" id="{EA3CB1A5-13A5-445A-B89B-2F772B616E56}"/>
               </a:ext>
             </a:extLst>
           </p:cNvPr>
@@ -6416,7 +6416,7 @@
           <p:cNvPr id="72" name="">
             <a:extLst xmlns:a="http://schemas.openxmlformats.org/drawingml/2006/main">
               <a:ext uri="{FF2B5EF4-FFF2-40B4-BE49-F238E27FC236}">
-                <a16:creationId xmlns:a16="http://schemas.microsoft.com/office/drawing/2014/main" id="{115E925A-FB7B-4535-B30E-18008DAE194F}"/>
+                <a16:creationId xmlns:a16="http://schemas.microsoft.com/office/drawing/2014/main" id="{77858D6E-BF88-492B-AEC0-37F47FEA41E1}"/>
               </a:ext>
             </a:extLst>
           </p:cNvPr>
@@ -6468,7 +6468,7 @@
           <p:cNvPr id="73" name="">
             <a:extLst xmlns:a="http://schemas.openxmlformats.org/drawingml/2006/main">
               <a:ext uri="{FF2B5EF4-FFF2-40B4-BE49-F238E27FC236}">
-                <a16:creationId xmlns:a16="http://schemas.microsoft.com/office/drawing/2014/main" id="{51645861-F032-4D0A-AADD-ECF5FD043354}"/>
+                <a16:creationId xmlns:a16="http://schemas.microsoft.com/office/drawing/2014/main" id="{6133F8B9-1C07-44C9-8A4C-5A8C41D824F9}"/>
               </a:ext>
             </a:extLst>
           </p:cNvPr>
@@ -6520,7 +6520,7 @@
           <p:cNvPr id="74" name="">
             <a:extLst xmlns:a="http://schemas.openxmlformats.org/drawingml/2006/main">
               <a:ext uri="{FF2B5EF4-FFF2-40B4-BE49-F238E27FC236}">
-                <a16:creationId xmlns:a16="http://schemas.microsoft.com/office/drawing/2014/main" id="{29BBD99F-602A-4D74-A799-0DE1FDA7D47D}"/>
+                <a16:creationId xmlns:a16="http://schemas.microsoft.com/office/drawing/2014/main" id="{EBA8BA80-9696-48A5-A89E-A2290D32153D}"/>
               </a:ext>
             </a:extLst>
           </p:cNvPr>
@@ -6572,7 +6572,7 @@
           <p:cNvPr id="75" name="">
             <a:extLst xmlns:a="http://schemas.openxmlformats.org/drawingml/2006/main">
               <a:ext uri="{FF2B5EF4-FFF2-40B4-BE49-F238E27FC236}">
-                <a16:creationId xmlns:a16="http://schemas.microsoft.com/office/drawing/2014/main" id="{6FA66752-7640-496D-BC34-FE7BA7FD8220}"/>
+                <a16:creationId xmlns:a16="http://schemas.microsoft.com/office/drawing/2014/main" id="{CAB7FACB-1647-4790-B869-AA229C196741}"/>
               </a:ext>
             </a:extLst>
           </p:cNvPr>
@@ -6624,7 +6624,7 @@
           <p:cNvPr id="76" name="">
             <a:extLst xmlns:a="http://schemas.openxmlformats.org/drawingml/2006/main">
               <a:ext uri="{FF2B5EF4-FFF2-40B4-BE49-F238E27FC236}">
-                <a16:creationId xmlns:a16="http://schemas.microsoft.com/office/drawing/2014/main" id="{CD592906-E1A0-4CD5-B83B-39011003B41E}"/>
+                <a16:creationId xmlns:a16="http://schemas.microsoft.com/office/drawing/2014/main" id="{AD69BA0D-1F14-4496-9A1E-0768F258625E}"/>
               </a:ext>
             </a:extLst>
           </p:cNvPr>
@@ -6676,7 +6676,7 @@
           <p:cNvPr id="77" name="">
             <a:extLst xmlns:a="http://schemas.openxmlformats.org/drawingml/2006/main">
               <a:ext uri="{FF2B5EF4-FFF2-40B4-BE49-F238E27FC236}">
-                <a16:creationId xmlns:a16="http://schemas.microsoft.com/office/drawing/2014/main" id="{2F063AED-84A7-45CD-9FD2-D96EF8EDDD35}"/>
+                <a16:creationId xmlns:a16="http://schemas.microsoft.com/office/drawing/2014/main" id="{2951251C-5AAB-4E9B-9B2A-51EDA862BFC8}"/>
               </a:ext>
             </a:extLst>
           </p:cNvPr>
@@ -6707,7 +6707,7 @@
           <p:cNvPr id="78" name="">
             <a:extLst xmlns:a="http://schemas.openxmlformats.org/drawingml/2006/main">
               <a:ext uri="{FF2B5EF4-FFF2-40B4-BE49-F238E27FC236}">
-                <a16:creationId xmlns:a16="http://schemas.microsoft.com/office/drawing/2014/main" id="{82AC2EAE-BBA7-401B-A283-BD5B25F52864}"/>
+                <a16:creationId xmlns:a16="http://schemas.microsoft.com/office/drawing/2014/main" id="{A45C1659-887D-42B0-BABD-F93486CDAFA4}"/>
               </a:ext>
             </a:extLst>
           </p:cNvPr>
@@ -6759,7 +6759,7 @@
           <p:cNvPr id="79" name="">
             <a:extLst xmlns:a="http://schemas.openxmlformats.org/drawingml/2006/main">
               <a:ext uri="{FF2B5EF4-FFF2-40B4-BE49-F238E27FC236}">
-                <a16:creationId xmlns:a16="http://schemas.microsoft.com/office/drawing/2014/main" id="{851FB069-D03B-42B1-839B-067F6C36F782}"/>
+                <a16:creationId xmlns:a16="http://schemas.microsoft.com/office/drawing/2014/main" id="{00FBB2ED-AD0C-4048-B824-00EB59709670}"/>
               </a:ext>
             </a:extLst>
           </p:cNvPr>
@@ -6811,7 +6811,7 @@
           <p:cNvPr id="80" name="">
             <a:extLst xmlns:a="http://schemas.openxmlformats.org/drawingml/2006/main">
               <a:ext uri="{FF2B5EF4-FFF2-40B4-BE49-F238E27FC236}">
-                <a16:creationId xmlns:a16="http://schemas.microsoft.com/office/drawing/2014/main" id="{5CEC08C1-AB96-4683-883A-379C97C8EECF}"/>
+                <a16:creationId xmlns:a16="http://schemas.microsoft.com/office/drawing/2014/main" id="{61E87FB1-5FE8-493E-966E-6F26895E5F57}"/>
               </a:ext>
             </a:extLst>
           </p:cNvPr>
@@ -6863,7 +6863,7 @@
           <p:cNvPr id="81" name="">
             <a:extLst xmlns:a="http://schemas.openxmlformats.org/drawingml/2006/main">
               <a:ext uri="{FF2B5EF4-FFF2-40B4-BE49-F238E27FC236}">
-                <a16:creationId xmlns:a16="http://schemas.microsoft.com/office/drawing/2014/main" id="{A2B71F7A-683A-489E-9F1D-D0A40F8794DD}"/>
+                <a16:creationId xmlns:a16="http://schemas.microsoft.com/office/drawing/2014/main" id="{AA26565A-B830-4D25-9FDA-641484B28D87}"/>
               </a:ext>
             </a:extLst>
           </p:cNvPr>
@@ -6915,7 +6915,7 @@
           <p:cNvPr id="82" name="">
             <a:extLst xmlns:a="http://schemas.openxmlformats.org/drawingml/2006/main">
               <a:ext uri="{FF2B5EF4-FFF2-40B4-BE49-F238E27FC236}">
-                <a16:creationId xmlns:a16="http://schemas.microsoft.com/office/drawing/2014/main" id="{6518DB33-85DD-47CC-814B-D9FAA9D756C8}"/>
+                <a16:creationId xmlns:a16="http://schemas.microsoft.com/office/drawing/2014/main" id="{2C016493-6B09-48E1-B52C-7FA4C39A9298}"/>
               </a:ext>
             </a:extLst>
           </p:cNvPr>
@@ -6967,7 +6967,7 @@
           <p:cNvPr id="83" name="">
             <a:extLst xmlns:a="http://schemas.openxmlformats.org/drawingml/2006/main">
               <a:ext uri="{FF2B5EF4-FFF2-40B4-BE49-F238E27FC236}">
-                <a16:creationId xmlns:a16="http://schemas.microsoft.com/office/drawing/2014/main" id="{FA35BAFC-4733-407B-8AA2-1024B063C562}"/>
+                <a16:creationId xmlns:a16="http://schemas.microsoft.com/office/drawing/2014/main" id="{A23B9180-A45E-4AC9-B533-2B592DEED6BB}"/>
               </a:ext>
             </a:extLst>
           </p:cNvPr>
@@ -6998,7 +6998,7 @@
           <p:cNvPr id="84" name="">
             <a:extLst xmlns:a="http://schemas.openxmlformats.org/drawingml/2006/main">
               <a:ext uri="{FF2B5EF4-FFF2-40B4-BE49-F238E27FC236}">
-                <a16:creationId xmlns:a16="http://schemas.microsoft.com/office/drawing/2014/main" id="{F84BCB0E-ECCA-468F-BD60-1B110F256430}"/>
+                <a16:creationId xmlns:a16="http://schemas.microsoft.com/office/drawing/2014/main" id="{30B93E89-6EB2-4F28-845C-374140B4F56A}"/>
               </a:ext>
             </a:extLst>
           </p:cNvPr>
@@ -7029,7 +7029,7 @@
           <p:cNvPr id="85" name="">
             <a:extLst xmlns:a="http://schemas.openxmlformats.org/drawingml/2006/main">
               <a:ext uri="{FF2B5EF4-FFF2-40B4-BE49-F238E27FC236}">
-                <a16:creationId xmlns:a16="http://schemas.microsoft.com/office/drawing/2014/main" id="{6A0110B0-6E40-44D6-8959-7FAA1C35DF27}"/>
+                <a16:creationId xmlns:a16="http://schemas.microsoft.com/office/drawing/2014/main" id="{9553BA6B-1726-4E15-9C7E-310950F0FFCC}"/>
               </a:ext>
             </a:extLst>
           </p:cNvPr>
@@ -7081,7 +7081,7 @@
           <p:cNvPr id="86" name="">
             <a:extLst xmlns:a="http://schemas.openxmlformats.org/drawingml/2006/main">
               <a:ext uri="{FF2B5EF4-FFF2-40B4-BE49-F238E27FC236}">
-                <a16:creationId xmlns:a16="http://schemas.microsoft.com/office/drawing/2014/main" id="{74B85EA6-F253-4B44-A561-737DF9EB315E}"/>
+                <a16:creationId xmlns:a16="http://schemas.microsoft.com/office/drawing/2014/main" id="{1642D433-8B30-401D-93D2-940EAB380742}"/>
               </a:ext>
             </a:extLst>
           </p:cNvPr>
@@ -7133,7 +7133,7 @@
           <p:cNvPr id="87" name="">
             <a:extLst xmlns:a="http://schemas.openxmlformats.org/drawingml/2006/main">
               <a:ext uri="{FF2B5EF4-FFF2-40B4-BE49-F238E27FC236}">
-                <a16:creationId xmlns:a16="http://schemas.microsoft.com/office/drawing/2014/main" id="{AEBA444E-42F6-4D85-9B53-0922E0CC7A46}"/>
+                <a16:creationId xmlns:a16="http://schemas.microsoft.com/office/drawing/2014/main" id="{EC0001FC-4A55-41DA-B1A4-7F7B03B0D2B1}"/>
               </a:ext>
             </a:extLst>
           </p:cNvPr>
@@ -7185,7 +7185,7 @@
           <p:cNvPr id="88" name="">
             <a:extLst xmlns:a="http://schemas.openxmlformats.org/drawingml/2006/main">
               <a:ext uri="{FF2B5EF4-FFF2-40B4-BE49-F238E27FC236}">
-                <a16:creationId xmlns:a16="http://schemas.microsoft.com/office/drawing/2014/main" id="{4E56690A-4BB1-47C3-BE78-72950FB011BB}"/>
+                <a16:creationId xmlns:a16="http://schemas.microsoft.com/office/drawing/2014/main" id="{B11D05DE-C54A-4CDF-B04A-F8394E00F0AB}"/>
               </a:ext>
             </a:extLst>
           </p:cNvPr>
@@ -7237,7 +7237,7 @@
           <p:cNvPr id="89" name="">
             <a:extLst xmlns:a="http://schemas.openxmlformats.org/drawingml/2006/main">
               <a:ext uri="{FF2B5EF4-FFF2-40B4-BE49-F238E27FC236}">
-                <a16:creationId xmlns:a16="http://schemas.microsoft.com/office/drawing/2014/main" id="{F908ACED-4402-44DE-80EB-E7F4B9AB20FE}"/>
+                <a16:creationId xmlns:a16="http://schemas.microsoft.com/office/drawing/2014/main" id="{09C9B022-51A7-4A2B-AC33-EB22C25CA692}"/>
               </a:ext>
             </a:extLst>
           </p:cNvPr>
@@ -7289,7 +7289,7 @@
           <p:cNvPr id="90" name="">
             <a:extLst xmlns:a="http://schemas.openxmlformats.org/drawingml/2006/main">
               <a:ext uri="{FF2B5EF4-FFF2-40B4-BE49-F238E27FC236}">
-                <a16:creationId xmlns:a16="http://schemas.microsoft.com/office/drawing/2014/main" id="{FE50036E-4284-4B02-89DF-580C28023865}"/>
+                <a16:creationId xmlns:a16="http://schemas.microsoft.com/office/drawing/2014/main" id="{90AB4F5D-89DB-439E-AC7A-9ACE00EBF039}"/>
               </a:ext>
             </a:extLst>
           </p:cNvPr>
@@ -7320,7 +7320,7 @@
           <p:cNvPr id="91" name="">
             <a:extLst xmlns:a="http://schemas.openxmlformats.org/drawingml/2006/main">
               <a:ext uri="{FF2B5EF4-FFF2-40B4-BE49-F238E27FC236}">
-                <a16:creationId xmlns:a16="http://schemas.microsoft.com/office/drawing/2014/main" id="{508ED51B-4D18-4E78-874B-5D44E481B129}"/>
+                <a16:creationId xmlns:a16="http://schemas.microsoft.com/office/drawing/2014/main" id="{C91C343D-7BAD-490D-AC7D-1F94992F1346}"/>
               </a:ext>
             </a:extLst>
           </p:cNvPr>
@@ -7372,7 +7372,7 @@
           <p:cNvPr id="92" name="">
             <a:extLst xmlns:a="http://schemas.openxmlformats.org/drawingml/2006/main">
               <a:ext uri="{FF2B5EF4-FFF2-40B4-BE49-F238E27FC236}">
-                <a16:creationId xmlns:a16="http://schemas.microsoft.com/office/drawing/2014/main" id="{BFAE1D8F-31E3-4989-AA3F-1C0C545F84AE}"/>
+                <a16:creationId xmlns:a16="http://schemas.microsoft.com/office/drawing/2014/main" id="{862FAB0A-0A01-4866-9FE1-D7E2A997FBF7}"/>
               </a:ext>
             </a:extLst>
           </p:cNvPr>
@@ -7424,7 +7424,7 @@
           <p:cNvPr id="93" name="">
             <a:extLst xmlns:a="http://schemas.openxmlformats.org/drawingml/2006/main">
               <a:ext uri="{FF2B5EF4-FFF2-40B4-BE49-F238E27FC236}">
-                <a16:creationId xmlns:a16="http://schemas.microsoft.com/office/drawing/2014/main" id="{667B9B2D-5828-4211-9E25-AA17276723B2}"/>
+                <a16:creationId xmlns:a16="http://schemas.microsoft.com/office/drawing/2014/main" id="{4BA4E3A9-B778-4D8E-8A77-4F0B9B70B36F}"/>
               </a:ext>
             </a:extLst>
           </p:cNvPr>
@@ -7476,7 +7476,7 @@
           <p:cNvPr id="94" name="">
             <a:extLst xmlns:a="http://schemas.openxmlformats.org/drawingml/2006/main">
               <a:ext uri="{FF2B5EF4-FFF2-40B4-BE49-F238E27FC236}">
-                <a16:creationId xmlns:a16="http://schemas.microsoft.com/office/drawing/2014/main" id="{3D185811-228C-4DBF-B17A-C54476DBE1EE}"/>
+                <a16:creationId xmlns:a16="http://schemas.microsoft.com/office/drawing/2014/main" id="{88C30DAE-8F8B-41EF-997A-D5DD56E9C2EC}"/>
               </a:ext>
             </a:extLst>
           </p:cNvPr>
@@ -7528,7 +7528,7 @@
           <p:cNvPr id="95" name="">
             <a:extLst xmlns:a="http://schemas.openxmlformats.org/drawingml/2006/main">
               <a:ext uri="{FF2B5EF4-FFF2-40B4-BE49-F238E27FC236}">
-                <a16:creationId xmlns:a16="http://schemas.microsoft.com/office/drawing/2014/main" id="{5BF13486-DC41-408B-A963-7279F6BE8693}"/>
+                <a16:creationId xmlns:a16="http://schemas.microsoft.com/office/drawing/2014/main" id="{4A5E9603-95C9-4D2C-91B9-0E2F79D1A878}"/>
               </a:ext>
             </a:extLst>
           </p:cNvPr>
@@ -7580,7 +7580,7 @@
           <p:cNvPr id="96" name="">
             <a:extLst xmlns:a="http://schemas.openxmlformats.org/drawingml/2006/main">
               <a:ext uri="{FF2B5EF4-FFF2-40B4-BE49-F238E27FC236}">
-                <a16:creationId xmlns:a16="http://schemas.microsoft.com/office/drawing/2014/main" id="{AA4444A0-566C-4873-AC47-3D8F4280425E}"/>
+                <a16:creationId xmlns:a16="http://schemas.microsoft.com/office/drawing/2014/main" id="{D88DE414-CD95-49C7-9CBF-0CE43685F705}"/>
               </a:ext>
             </a:extLst>
           </p:cNvPr>
@@ -7611,7 +7611,7 @@
           <p:cNvPr id="97" name="">
             <a:extLst xmlns:a="http://schemas.openxmlformats.org/drawingml/2006/main">
               <a:ext uri="{FF2B5EF4-FFF2-40B4-BE49-F238E27FC236}">
-                <a16:creationId xmlns:a16="http://schemas.microsoft.com/office/drawing/2014/main" id="{30A58CD0-AF20-449E-904F-C84013EC2990}"/>
+                <a16:creationId xmlns:a16="http://schemas.microsoft.com/office/drawing/2014/main" id="{25ED4DF8-4E2F-4034-9623-7D2B57AA58CF}"/>
               </a:ext>
             </a:extLst>
           </p:cNvPr>
@@ -7642,7 +7642,7 @@
           <p:cNvPr id="98" name="">
             <a:extLst xmlns:a="http://schemas.openxmlformats.org/drawingml/2006/main">
               <a:ext uri="{FF2B5EF4-FFF2-40B4-BE49-F238E27FC236}">
-                <a16:creationId xmlns:a16="http://schemas.microsoft.com/office/drawing/2014/main" id="{273FDBC0-3BBC-4BC0-A66B-56FB4BA4D89D}"/>
+                <a16:creationId xmlns:a16="http://schemas.microsoft.com/office/drawing/2014/main" id="{D39EE24D-10EC-4217-8719-59356BE47D7E}"/>
               </a:ext>
             </a:extLst>
           </p:cNvPr>
@@ -7694,7 +7694,7 @@
           <p:cNvPr id="99" name="">
             <a:extLst xmlns:a="http://schemas.openxmlformats.org/drawingml/2006/main">
               <a:ext uri="{FF2B5EF4-FFF2-40B4-BE49-F238E27FC236}">
-                <a16:creationId xmlns:a16="http://schemas.microsoft.com/office/drawing/2014/main" id="{7E9FEAEA-ADD6-4C20-B2B3-36244F6AACD7}"/>
+                <a16:creationId xmlns:a16="http://schemas.microsoft.com/office/drawing/2014/main" id="{6B947CF4-4617-45D5-9862-013CB7CA7C42}"/>
               </a:ext>
             </a:extLst>
           </p:cNvPr>
@@ -7746,7 +7746,7 @@
           <p:cNvPr id="100" name="">
             <a:extLst xmlns:a="http://schemas.openxmlformats.org/drawingml/2006/main">
               <a:ext uri="{FF2B5EF4-FFF2-40B4-BE49-F238E27FC236}">
-                <a16:creationId xmlns:a16="http://schemas.microsoft.com/office/drawing/2014/main" id="{2A78BA21-8803-44CB-A66B-0EC0B16A4D00}"/>
+                <a16:creationId xmlns:a16="http://schemas.microsoft.com/office/drawing/2014/main" id="{FD1D6403-8B64-48DE-870A-BA4A9F07C66E}"/>
               </a:ext>
             </a:extLst>
           </p:cNvPr>
@@ -7798,7 +7798,7 @@
           <p:cNvPr id="101" name="">
             <a:extLst xmlns:a="http://schemas.openxmlformats.org/drawingml/2006/main">
               <a:ext uri="{FF2B5EF4-FFF2-40B4-BE49-F238E27FC236}">
-                <a16:creationId xmlns:a16="http://schemas.microsoft.com/office/drawing/2014/main" id="{27CA2FCC-B1F9-4839-99AD-0C0D71690240}"/>
+                <a16:creationId xmlns:a16="http://schemas.microsoft.com/office/drawing/2014/main" id="{E938D5E5-5925-4A1A-A5BF-5DFD35EECB99}"/>
               </a:ext>
             </a:extLst>
           </p:cNvPr>
@@ -7850,7 +7850,7 @@
           <p:cNvPr id="102" name="">
             <a:extLst xmlns:a="http://schemas.openxmlformats.org/drawingml/2006/main">
               <a:ext uri="{FF2B5EF4-FFF2-40B4-BE49-F238E27FC236}">
-                <a16:creationId xmlns:a16="http://schemas.microsoft.com/office/drawing/2014/main" id="{B897438B-B29A-4375-9DD1-C3CB359F2A0E}"/>
+                <a16:creationId xmlns:a16="http://schemas.microsoft.com/office/drawing/2014/main" id="{E0CE05CC-3DA9-46B4-ABF2-3732750EF315}"/>
               </a:ext>
             </a:extLst>
           </p:cNvPr>
@@ -7900,7 +7900,7 @@
     </p:spTree>
     <p:extLst>
       <p:ext uri="{BB962C8B-B14F-4D97-AF65-F5344CB8AC3E}">
-        <p14:creationId xmlns:p14="http://schemas.microsoft.com/office/powerpoint/2010/main" val="2004888362"/>
+        <p14:creationId xmlns:p14="http://schemas.microsoft.com/office/powerpoint/2010/main" val="451899121"/>
       </p:ext>
     </p:extLst>
   </p:cSld>
@@ -7931,7 +7931,7 @@
           <p:cNvPr id="98" name="">
             <a:extLst xmlns:a="http://schemas.openxmlformats.org/drawingml/2006/main">
               <a:ext uri="{FF2B5EF4-FFF2-40B4-BE49-F238E27FC236}">
-                <a16:creationId xmlns:a16="http://schemas.microsoft.com/office/drawing/2014/main" id="{8C247691-339C-48AA-99C9-A38024742345}"/>
+                <a16:creationId xmlns:a16="http://schemas.microsoft.com/office/drawing/2014/main" id="{0A47D754-68FE-423A-B759-371F42EA14AF}"/>
               </a:ext>
             </a:extLst>
           </p:cNvPr>
@@ -7964,7 +7964,7 @@
           <p:cNvPr id="2" name="">
             <a:extLst xmlns:a="http://schemas.openxmlformats.org/drawingml/2006/main">
               <a:ext uri="{FF2B5EF4-FFF2-40B4-BE49-F238E27FC236}">
-                <a16:creationId xmlns:a16="http://schemas.microsoft.com/office/drawing/2014/main" id="{C9DFA6A1-DD9E-46DD-BD43-D5B40F9111EA}"/>
+                <a16:creationId xmlns:a16="http://schemas.microsoft.com/office/drawing/2014/main" id="{714429BC-1D35-46B5-9EDA-61EBB411915C}"/>
               </a:ext>
             </a:extLst>
           </p:cNvPr>
@@ -7995,7 +7995,7 @@
           <p:cNvPr id="3" name="">
             <a:extLst xmlns:a="http://schemas.openxmlformats.org/drawingml/2006/main">
               <a:ext uri="{FF2B5EF4-FFF2-40B4-BE49-F238E27FC236}">
-                <a16:creationId xmlns:a16="http://schemas.microsoft.com/office/drawing/2014/main" id="{25353E9E-B775-46D1-9967-CA8511E222C9}"/>
+                <a16:creationId xmlns:a16="http://schemas.microsoft.com/office/drawing/2014/main" id="{84FCE1E4-F135-43C7-92EF-83A0E023697D}"/>
               </a:ext>
             </a:extLst>
           </p:cNvPr>
@@ -8047,7 +8047,7 @@
           <p:cNvPr id="4" name="">
             <a:extLst xmlns:a="http://schemas.openxmlformats.org/drawingml/2006/main">
               <a:ext uri="{FF2B5EF4-FFF2-40B4-BE49-F238E27FC236}">
-                <a16:creationId xmlns:a16="http://schemas.microsoft.com/office/drawing/2014/main" id="{2ED4D476-1E10-4A25-9325-7F9132FC20AE}"/>
+                <a16:creationId xmlns:a16="http://schemas.microsoft.com/office/drawing/2014/main" id="{3BADA557-D3F6-4459-BBEC-41C4AE2AB132}"/>
               </a:ext>
             </a:extLst>
           </p:cNvPr>
@@ -8099,7 +8099,7 @@
           <p:cNvPr id="5" name="">
             <a:extLst xmlns:a="http://schemas.openxmlformats.org/drawingml/2006/main">
               <a:ext uri="{FF2B5EF4-FFF2-40B4-BE49-F238E27FC236}">
-                <a16:creationId xmlns:a16="http://schemas.microsoft.com/office/drawing/2014/main" id="{D4D9083B-2C04-4F6F-82D3-5F77478B9FD1}"/>
+                <a16:creationId xmlns:a16="http://schemas.microsoft.com/office/drawing/2014/main" id="{5B9BF90C-1011-4DEE-A769-7FC87E353030}"/>
               </a:ext>
             </a:extLst>
           </p:cNvPr>
@@ -8134,7 +8134,7 @@
           <p:nvPr/>
         </p:nvPicPr>
         <p:blipFill>
-          <a:blip xmlns:r="http://schemas.openxmlformats.org/officeDocument/2006/relationships" xmlns:a="http://schemas.openxmlformats.org/drawingml/2006/main" r:embed="R766013efd5f34ff8"/>
+          <a:blip xmlns:r="http://schemas.openxmlformats.org/officeDocument/2006/relationships" xmlns:a="http://schemas.openxmlformats.org/drawingml/2006/main" r:embed="R13e5dc162ed84a2f"/>
           <a:stretch xmlns:a="http://schemas.openxmlformats.org/drawingml/2006/main"/>
         </p:blipFill>
         <p:spPr>
@@ -8152,7 +8152,7 @@
           <p:cNvPr id="7" name="">
             <a:extLst xmlns:a="http://schemas.openxmlformats.org/drawingml/2006/main">
               <a:ext uri="{FF2B5EF4-FFF2-40B4-BE49-F238E27FC236}">
-                <a16:creationId xmlns:a16="http://schemas.microsoft.com/office/drawing/2014/main" id="{285E080E-87B0-4689-B977-C999BC3010FF}"/>
+                <a16:creationId xmlns:a16="http://schemas.microsoft.com/office/drawing/2014/main" id="{9ECD3BB5-43DB-40F2-854B-2EEA6BF35844}"/>
               </a:ext>
             </a:extLst>
           </p:cNvPr>
@@ -8204,7 +8204,7 @@
           <p:cNvPr id="8" name="">
             <a:extLst xmlns:a="http://schemas.openxmlformats.org/drawingml/2006/main">
               <a:ext uri="{FF2B5EF4-FFF2-40B4-BE49-F238E27FC236}">
-                <a16:creationId xmlns:a16="http://schemas.microsoft.com/office/drawing/2014/main" id="{E4189AB5-BD61-4B5B-A274-A6193C5AB4EB}"/>
+                <a16:creationId xmlns:a16="http://schemas.microsoft.com/office/drawing/2014/main" id="{2BE38594-1C5F-4BE2-BC1A-2A055DE259D5}"/>
               </a:ext>
             </a:extLst>
           </p:cNvPr>
@@ -8256,7 +8256,7 @@
           <p:cNvPr id="9" name="">
             <a:extLst xmlns:a="http://schemas.openxmlformats.org/drawingml/2006/main">
               <a:ext uri="{FF2B5EF4-FFF2-40B4-BE49-F238E27FC236}">
-                <a16:creationId xmlns:a16="http://schemas.microsoft.com/office/drawing/2014/main" id="{66737655-5C3A-4BE5-BA4B-6852AE3D9F59}"/>
+                <a16:creationId xmlns:a16="http://schemas.microsoft.com/office/drawing/2014/main" id="{53EAAB96-327B-4FBA-AAB7-42FC79952E9C}"/>
               </a:ext>
             </a:extLst>
           </p:cNvPr>
@@ -8308,7 +8308,7 @@
           <p:cNvPr id="10" name="">
             <a:extLst xmlns:a="http://schemas.openxmlformats.org/drawingml/2006/main">
               <a:ext uri="{FF2B5EF4-FFF2-40B4-BE49-F238E27FC236}">
-                <a16:creationId xmlns:a16="http://schemas.microsoft.com/office/drawing/2014/main" id="{17679DB1-9A40-49EA-A383-ED33721A695F}"/>
+                <a16:creationId xmlns:a16="http://schemas.microsoft.com/office/drawing/2014/main" id="{3D7B595B-8E3E-4934-B788-24F69E7378DA}"/>
               </a:ext>
             </a:extLst>
           </p:cNvPr>
@@ -8360,7 +8360,7 @@
           <p:cNvPr id="11" name="">
             <a:extLst xmlns:a="http://schemas.openxmlformats.org/drawingml/2006/main">
               <a:ext uri="{FF2B5EF4-FFF2-40B4-BE49-F238E27FC236}">
-                <a16:creationId xmlns:a16="http://schemas.microsoft.com/office/drawing/2014/main" id="{CBD319CE-5522-47B7-8B0A-F1D4DDFD90EB}"/>
+                <a16:creationId xmlns:a16="http://schemas.microsoft.com/office/drawing/2014/main" id="{7211924D-5184-43B0-9899-6C64FE3B151E}"/>
               </a:ext>
             </a:extLst>
           </p:cNvPr>
@@ -8391,7 +8391,7 @@
           <p:cNvPr id="12" name="">
             <a:extLst xmlns:a="http://schemas.openxmlformats.org/drawingml/2006/main">
               <a:ext uri="{FF2B5EF4-FFF2-40B4-BE49-F238E27FC236}">
-                <a16:creationId xmlns:a16="http://schemas.microsoft.com/office/drawing/2014/main" id="{30BFB399-3713-4B47-BBB7-EA60AA1F8FA9}"/>
+                <a16:creationId xmlns:a16="http://schemas.microsoft.com/office/drawing/2014/main" id="{C546BA93-23AC-4395-8CE0-89E18F6262BE}"/>
               </a:ext>
             </a:extLst>
           </p:cNvPr>
@@ -8422,7 +8422,7 @@
           <p:cNvPr id="13" name="">
             <a:extLst xmlns:a="http://schemas.openxmlformats.org/drawingml/2006/main">
               <a:ext uri="{FF2B5EF4-FFF2-40B4-BE49-F238E27FC236}">
-                <a16:creationId xmlns:a16="http://schemas.microsoft.com/office/drawing/2014/main" id="{299E4E2B-DB2D-492B-8C6A-BF06DFC4EBBC}"/>
+                <a16:creationId xmlns:a16="http://schemas.microsoft.com/office/drawing/2014/main" id="{59121D3E-6166-4D98-93BE-F8F78ACE232F}"/>
               </a:ext>
             </a:extLst>
           </p:cNvPr>
@@ -8474,7 +8474,7 @@
           <p:cNvPr id="14" name="">
             <a:extLst xmlns:a="http://schemas.openxmlformats.org/drawingml/2006/main">
               <a:ext uri="{FF2B5EF4-FFF2-40B4-BE49-F238E27FC236}">
-                <a16:creationId xmlns:a16="http://schemas.microsoft.com/office/drawing/2014/main" id="{D5DD0332-98CA-476C-9DC2-A33018E5C04A}"/>
+                <a16:creationId xmlns:a16="http://schemas.microsoft.com/office/drawing/2014/main" id="{78E9DC3D-000A-416A-B897-30A2EEA6E289}"/>
               </a:ext>
             </a:extLst>
           </p:cNvPr>
@@ -8526,7 +8526,7 @@
           <p:cNvPr id="15" name="">
             <a:extLst xmlns:a="http://schemas.openxmlformats.org/drawingml/2006/main">
               <a:ext uri="{FF2B5EF4-FFF2-40B4-BE49-F238E27FC236}">
-                <a16:creationId xmlns:a16="http://schemas.microsoft.com/office/drawing/2014/main" id="{FDB5BBC8-4E56-45CB-810A-5D8E05E5D222}"/>
+                <a16:creationId xmlns:a16="http://schemas.microsoft.com/office/drawing/2014/main" id="{65826B1F-3E9F-4F6B-8C97-B18BAABEAC87}"/>
               </a:ext>
             </a:extLst>
           </p:cNvPr>
@@ -8578,7 +8578,7 @@
           <p:cNvPr id="16" name="">
             <a:extLst xmlns:a="http://schemas.openxmlformats.org/drawingml/2006/main">
               <a:ext uri="{FF2B5EF4-FFF2-40B4-BE49-F238E27FC236}">
-                <a16:creationId xmlns:a16="http://schemas.microsoft.com/office/drawing/2014/main" id="{9B58B5E3-64B6-4233-A56C-09D1EF35842B}"/>
+                <a16:creationId xmlns:a16="http://schemas.microsoft.com/office/drawing/2014/main" id="{FE36DE34-32AE-49ED-AD62-4EBDD4A5D2E8}"/>
               </a:ext>
             </a:extLst>
           </p:cNvPr>
@@ -8630,7 +8630,7 @@
           <p:cNvPr id="17" name="">
             <a:extLst xmlns:a="http://schemas.openxmlformats.org/drawingml/2006/main">
               <a:ext uri="{FF2B5EF4-FFF2-40B4-BE49-F238E27FC236}">
-                <a16:creationId xmlns:a16="http://schemas.microsoft.com/office/drawing/2014/main" id="{3DEA181F-8FED-4044-A912-A4567A5239E0}"/>
+                <a16:creationId xmlns:a16="http://schemas.microsoft.com/office/drawing/2014/main" id="{A93DC616-8EBC-4C73-9665-81EAD108E955}"/>
               </a:ext>
             </a:extLst>
           </p:cNvPr>
@@ -8682,7 +8682,7 @@
           <p:cNvPr id="18" name="">
             <a:extLst xmlns:a="http://schemas.openxmlformats.org/drawingml/2006/main">
               <a:ext uri="{FF2B5EF4-FFF2-40B4-BE49-F238E27FC236}">
-                <a16:creationId xmlns:a16="http://schemas.microsoft.com/office/drawing/2014/main" id="{9BC392EF-C60A-4C3D-85E8-51EAC47E485B}"/>
+                <a16:creationId xmlns:a16="http://schemas.microsoft.com/office/drawing/2014/main" id="{9C8807BF-89B2-4C32-951C-52FA5FB30AC2}"/>
               </a:ext>
             </a:extLst>
           </p:cNvPr>
@@ -8713,7 +8713,7 @@
           <p:cNvPr id="19" name="">
             <a:extLst xmlns:a="http://schemas.openxmlformats.org/drawingml/2006/main">
               <a:ext uri="{FF2B5EF4-FFF2-40B4-BE49-F238E27FC236}">
-                <a16:creationId xmlns:a16="http://schemas.microsoft.com/office/drawing/2014/main" id="{92196733-DF16-4C10-93E2-6D840E82E9A0}"/>
+                <a16:creationId xmlns:a16="http://schemas.microsoft.com/office/drawing/2014/main" id="{1A21BE1F-A04F-42A7-85F3-3C5E3DAAE630}"/>
               </a:ext>
             </a:extLst>
           </p:cNvPr>
@@ -8765,7 +8765,7 @@
           <p:cNvPr id="20" name="">
             <a:extLst xmlns:a="http://schemas.openxmlformats.org/drawingml/2006/main">
               <a:ext uri="{FF2B5EF4-FFF2-40B4-BE49-F238E27FC236}">
-                <a16:creationId xmlns:a16="http://schemas.microsoft.com/office/drawing/2014/main" id="{25D20D55-0783-4D6C-BB4F-6C8DDF178EAC}"/>
+                <a16:creationId xmlns:a16="http://schemas.microsoft.com/office/drawing/2014/main" id="{45C9583A-6F21-48B9-9A3E-A405F43F2EF9}"/>
               </a:ext>
             </a:extLst>
           </p:cNvPr>
@@ -8817,7 +8817,7 @@
           <p:cNvPr id="21" name="">
             <a:extLst xmlns:a="http://schemas.openxmlformats.org/drawingml/2006/main">
               <a:ext uri="{FF2B5EF4-FFF2-40B4-BE49-F238E27FC236}">
-                <a16:creationId xmlns:a16="http://schemas.microsoft.com/office/drawing/2014/main" id="{3DCD7885-0978-4718-8CFA-41387FEFCA01}"/>
+                <a16:creationId xmlns:a16="http://schemas.microsoft.com/office/drawing/2014/main" id="{2C27A294-7E07-4A96-80F3-54B7E1CA0B00}"/>
               </a:ext>
             </a:extLst>
           </p:cNvPr>
@@ -8869,7 +8869,7 @@
           <p:cNvPr id="22" name="">
             <a:extLst xmlns:a="http://schemas.openxmlformats.org/drawingml/2006/main">
               <a:ext uri="{FF2B5EF4-FFF2-40B4-BE49-F238E27FC236}">
-                <a16:creationId xmlns:a16="http://schemas.microsoft.com/office/drawing/2014/main" id="{982CE488-9D4C-4182-A9E4-9C7DBC4E936D}"/>
+                <a16:creationId xmlns:a16="http://schemas.microsoft.com/office/drawing/2014/main" id="{9E58AEE0-E69D-4BEB-A3C3-32BE1B98FC39}"/>
               </a:ext>
             </a:extLst>
           </p:cNvPr>
@@ -8921,7 +8921,7 @@
           <p:cNvPr id="23" name="">
             <a:extLst xmlns:a="http://schemas.openxmlformats.org/drawingml/2006/main">
               <a:ext uri="{FF2B5EF4-FFF2-40B4-BE49-F238E27FC236}">
-                <a16:creationId xmlns:a16="http://schemas.microsoft.com/office/drawing/2014/main" id="{217A8004-754C-4927-A459-B5A93C050A7D}"/>
+                <a16:creationId xmlns:a16="http://schemas.microsoft.com/office/drawing/2014/main" id="{E62BBD21-9CA4-4F57-B9DA-B2F3FA592727}"/>
               </a:ext>
             </a:extLst>
           </p:cNvPr>
@@ -8973,7 +8973,7 @@
           <p:cNvPr id="24" name="">
             <a:extLst xmlns:a="http://schemas.openxmlformats.org/drawingml/2006/main">
               <a:ext uri="{FF2B5EF4-FFF2-40B4-BE49-F238E27FC236}">
-                <a16:creationId xmlns:a16="http://schemas.microsoft.com/office/drawing/2014/main" id="{7DE96DF4-FB88-4619-8CA2-35016114C2E3}"/>
+                <a16:creationId xmlns:a16="http://schemas.microsoft.com/office/drawing/2014/main" id="{A3A0285D-2023-4492-A77D-8070CC6A68FC}"/>
               </a:ext>
             </a:extLst>
           </p:cNvPr>
@@ -9004,7 +9004,7 @@
           <p:cNvPr id="25" name="">
             <a:extLst xmlns:a="http://schemas.openxmlformats.org/drawingml/2006/main">
               <a:ext uri="{FF2B5EF4-FFF2-40B4-BE49-F238E27FC236}">
-                <a16:creationId xmlns:a16="http://schemas.microsoft.com/office/drawing/2014/main" id="{06DA0BBC-6DD6-405D-90EA-EE06A15D203E}"/>
+                <a16:creationId xmlns:a16="http://schemas.microsoft.com/office/drawing/2014/main" id="{B5CEE5FE-B137-4C7F-8E5C-C88913A3A178}"/>
               </a:ext>
             </a:extLst>
           </p:cNvPr>
@@ -9035,7 +9035,7 @@
           <p:cNvPr id="26" name="">
             <a:extLst xmlns:a="http://schemas.openxmlformats.org/drawingml/2006/main">
               <a:ext uri="{FF2B5EF4-FFF2-40B4-BE49-F238E27FC236}">
-                <a16:creationId xmlns:a16="http://schemas.microsoft.com/office/drawing/2014/main" id="{6F0E0524-4EAC-4320-AEBF-007CE8316A89}"/>
+                <a16:creationId xmlns:a16="http://schemas.microsoft.com/office/drawing/2014/main" id="{4185860B-74A7-43B4-9408-BECA2C5CD4AD}"/>
               </a:ext>
             </a:extLst>
           </p:cNvPr>
@@ -9087,7 +9087,7 @@
           <p:cNvPr id="27" name="">
             <a:extLst xmlns:a="http://schemas.openxmlformats.org/drawingml/2006/main">
               <a:ext uri="{FF2B5EF4-FFF2-40B4-BE49-F238E27FC236}">
-                <a16:creationId xmlns:a16="http://schemas.microsoft.com/office/drawing/2014/main" id="{12D87201-493F-441F-B3FA-987A0D9BFF89}"/>
+                <a16:creationId xmlns:a16="http://schemas.microsoft.com/office/drawing/2014/main" id="{1F0FC1C4-F2DA-487F-85ED-416DB88F9204}"/>
               </a:ext>
             </a:extLst>
           </p:cNvPr>
@@ -9139,7 +9139,7 @@
           <p:cNvPr id="28" name="">
             <a:extLst xmlns:a="http://schemas.openxmlformats.org/drawingml/2006/main">
               <a:ext uri="{FF2B5EF4-FFF2-40B4-BE49-F238E27FC236}">
-                <a16:creationId xmlns:a16="http://schemas.microsoft.com/office/drawing/2014/main" id="{AD87F590-CAC9-451E-B03A-0B87825FDE6F}"/>
+                <a16:creationId xmlns:a16="http://schemas.microsoft.com/office/drawing/2014/main" id="{AB92B200-07A4-40FD-82AD-BF718C4B8AA7}"/>
               </a:ext>
             </a:extLst>
           </p:cNvPr>
@@ -9191,7 +9191,7 @@
           <p:cNvPr id="29" name="">
             <a:extLst xmlns:a="http://schemas.openxmlformats.org/drawingml/2006/main">
               <a:ext uri="{FF2B5EF4-FFF2-40B4-BE49-F238E27FC236}">
-                <a16:creationId xmlns:a16="http://schemas.microsoft.com/office/drawing/2014/main" id="{322257ED-8B79-4C7A-B1F8-F332F484C753}"/>
+                <a16:creationId xmlns:a16="http://schemas.microsoft.com/office/drawing/2014/main" id="{4AAFE964-715D-40AC-A7DB-48A3314411B8}"/>
               </a:ext>
             </a:extLst>
           </p:cNvPr>
@@ -9243,7 +9243,7 @@
           <p:cNvPr id="30" name="">
             <a:extLst xmlns:a="http://schemas.openxmlformats.org/drawingml/2006/main">
               <a:ext uri="{FF2B5EF4-FFF2-40B4-BE49-F238E27FC236}">
-                <a16:creationId xmlns:a16="http://schemas.microsoft.com/office/drawing/2014/main" id="{E99F87EF-5AE0-408F-BE4F-50AF8C203B2E}"/>
+                <a16:creationId xmlns:a16="http://schemas.microsoft.com/office/drawing/2014/main" id="{5C922C64-966E-444D-8104-6A8006595F8F}"/>
               </a:ext>
             </a:extLst>
           </p:cNvPr>
@@ -9295,7 +9295,7 @@
           <p:cNvPr id="31" name="">
             <a:extLst xmlns:a="http://schemas.openxmlformats.org/drawingml/2006/main">
               <a:ext uri="{FF2B5EF4-FFF2-40B4-BE49-F238E27FC236}">
-                <a16:creationId xmlns:a16="http://schemas.microsoft.com/office/drawing/2014/main" id="{28E9B43B-DFC1-49E6-9693-D20DB7FAB652}"/>
+                <a16:creationId xmlns:a16="http://schemas.microsoft.com/office/drawing/2014/main" id="{0F9CE410-F0C1-4797-9930-D7D5FBAECE57}"/>
               </a:ext>
             </a:extLst>
           </p:cNvPr>
@@ -9326,7 +9326,7 @@
           <p:cNvPr id="32" name="">
             <a:extLst xmlns:a="http://schemas.openxmlformats.org/drawingml/2006/main">
               <a:ext uri="{FF2B5EF4-FFF2-40B4-BE49-F238E27FC236}">
-                <a16:creationId xmlns:a16="http://schemas.microsoft.com/office/drawing/2014/main" id="{904A7D4C-6DC1-4E6C-B967-29CAD7B25460}"/>
+                <a16:creationId xmlns:a16="http://schemas.microsoft.com/office/drawing/2014/main" id="{7E8FA411-0FD5-48E2-9C16-2C041E1A7B98}"/>
               </a:ext>
             </a:extLst>
           </p:cNvPr>
@@ -9378,7 +9378,7 @@
           <p:cNvPr id="33" name="">
             <a:extLst xmlns:a="http://schemas.openxmlformats.org/drawingml/2006/main">
               <a:ext uri="{FF2B5EF4-FFF2-40B4-BE49-F238E27FC236}">
-                <a16:creationId xmlns:a16="http://schemas.microsoft.com/office/drawing/2014/main" id="{1F4D3CBA-2103-4D2E-8624-335860ED492D}"/>
+                <a16:creationId xmlns:a16="http://schemas.microsoft.com/office/drawing/2014/main" id="{69232CB2-EDF7-4AB5-8954-9E5015EB7C2A}"/>
               </a:ext>
             </a:extLst>
           </p:cNvPr>
@@ -9430,7 +9430,7 @@
           <p:cNvPr id="34" name="">
             <a:extLst xmlns:a="http://schemas.openxmlformats.org/drawingml/2006/main">
               <a:ext uri="{FF2B5EF4-FFF2-40B4-BE49-F238E27FC236}">
-                <a16:creationId xmlns:a16="http://schemas.microsoft.com/office/drawing/2014/main" id="{C09DC359-2780-410D-B62C-4A9E1CCD9BEE}"/>
+                <a16:creationId xmlns:a16="http://schemas.microsoft.com/office/drawing/2014/main" id="{49050C7D-D20E-4813-96D2-504F5032A616}"/>
               </a:ext>
             </a:extLst>
           </p:cNvPr>
@@ -9482,7 +9482,7 @@
           <p:cNvPr id="35" name="">
             <a:extLst xmlns:a="http://schemas.openxmlformats.org/drawingml/2006/main">
               <a:ext uri="{FF2B5EF4-FFF2-40B4-BE49-F238E27FC236}">
-                <a16:creationId xmlns:a16="http://schemas.microsoft.com/office/drawing/2014/main" id="{B7D2CAC3-4A4C-4641-92AF-EBEAC924A867}"/>
+                <a16:creationId xmlns:a16="http://schemas.microsoft.com/office/drawing/2014/main" id="{812EEEC1-7335-480C-8024-81A8E7E04307}"/>
               </a:ext>
             </a:extLst>
           </p:cNvPr>
@@ -9534,7 +9534,7 @@
           <p:cNvPr id="36" name="">
             <a:extLst xmlns:a="http://schemas.openxmlformats.org/drawingml/2006/main">
               <a:ext uri="{FF2B5EF4-FFF2-40B4-BE49-F238E27FC236}">
-                <a16:creationId xmlns:a16="http://schemas.microsoft.com/office/drawing/2014/main" id="{E661FA51-9F72-4411-976E-925306C87443}"/>
+                <a16:creationId xmlns:a16="http://schemas.microsoft.com/office/drawing/2014/main" id="{798556AB-7402-4D70-BD88-361139A1922E}"/>
               </a:ext>
             </a:extLst>
           </p:cNvPr>
@@ -9586,7 +9586,7 @@
           <p:cNvPr id="37" name="">
             <a:extLst xmlns:a="http://schemas.openxmlformats.org/drawingml/2006/main">
               <a:ext uri="{FF2B5EF4-FFF2-40B4-BE49-F238E27FC236}">
-                <a16:creationId xmlns:a16="http://schemas.microsoft.com/office/drawing/2014/main" id="{61805E22-15A0-40C5-878D-3F059B460E18}"/>
+                <a16:creationId xmlns:a16="http://schemas.microsoft.com/office/drawing/2014/main" id="{E61A238A-2DE6-4221-8A93-96588D41B01E}"/>
               </a:ext>
             </a:extLst>
           </p:cNvPr>
@@ -9617,7 +9617,7 @@
           <p:cNvPr id="38" name="">
             <a:extLst xmlns:a="http://schemas.openxmlformats.org/drawingml/2006/main">
               <a:ext uri="{FF2B5EF4-FFF2-40B4-BE49-F238E27FC236}">
-                <a16:creationId xmlns:a16="http://schemas.microsoft.com/office/drawing/2014/main" id="{0625332C-02C9-49E8-8A4B-3CCE62799B95}"/>
+                <a16:creationId xmlns:a16="http://schemas.microsoft.com/office/drawing/2014/main" id="{52D476F0-E89C-4550-9BFE-D3373A2E5E25}"/>
               </a:ext>
             </a:extLst>
           </p:cNvPr>
@@ -9648,7 +9648,7 @@
           <p:cNvPr id="39" name="">
             <a:extLst xmlns:a="http://schemas.openxmlformats.org/drawingml/2006/main">
               <a:ext uri="{FF2B5EF4-FFF2-40B4-BE49-F238E27FC236}">
-                <a16:creationId xmlns:a16="http://schemas.microsoft.com/office/drawing/2014/main" id="{95E13C29-DD65-4B42-8CB1-3E10189F1804}"/>
+                <a16:creationId xmlns:a16="http://schemas.microsoft.com/office/drawing/2014/main" id="{CC557D6A-C2D3-4A64-87E5-1B31DA5225C2}"/>
               </a:ext>
             </a:extLst>
           </p:cNvPr>
@@ -9700,7 +9700,7 @@
           <p:cNvPr id="40" name="">
             <a:extLst xmlns:a="http://schemas.openxmlformats.org/drawingml/2006/main">
               <a:ext uri="{FF2B5EF4-FFF2-40B4-BE49-F238E27FC236}">
-                <a16:creationId xmlns:a16="http://schemas.microsoft.com/office/drawing/2014/main" id="{D9690D96-0E79-4D23-A535-D0EC536D621B}"/>
+                <a16:creationId xmlns:a16="http://schemas.microsoft.com/office/drawing/2014/main" id="{C160F056-BBE5-4448-B7B8-428BA770F2AA}"/>
               </a:ext>
             </a:extLst>
           </p:cNvPr>
@@ -9752,7 +9752,7 @@
           <p:cNvPr id="41" name="">
             <a:extLst xmlns:a="http://schemas.openxmlformats.org/drawingml/2006/main">
               <a:ext uri="{FF2B5EF4-FFF2-40B4-BE49-F238E27FC236}">
-                <a16:creationId xmlns:a16="http://schemas.microsoft.com/office/drawing/2014/main" id="{93D5CBD5-3C34-4174-A535-0C8CC0CBE387}"/>
+                <a16:creationId xmlns:a16="http://schemas.microsoft.com/office/drawing/2014/main" id="{E612C816-2952-418C-84E9-DC1013FF9E83}"/>
               </a:ext>
             </a:extLst>
           </p:cNvPr>
@@ -9804,7 +9804,7 @@
           <p:cNvPr id="42" name="">
             <a:extLst xmlns:a="http://schemas.openxmlformats.org/drawingml/2006/main">
               <a:ext uri="{FF2B5EF4-FFF2-40B4-BE49-F238E27FC236}">
-                <a16:creationId xmlns:a16="http://schemas.microsoft.com/office/drawing/2014/main" id="{8968AC74-6B41-4716-BC78-8A658A5BDE46}"/>
+                <a16:creationId xmlns:a16="http://schemas.microsoft.com/office/drawing/2014/main" id="{21D306A6-C694-4AE3-9B9A-74881D01D6D0}"/>
               </a:ext>
             </a:extLst>
           </p:cNvPr>
@@ -9856,7 +9856,7 @@
           <p:cNvPr id="43" name="">
             <a:extLst xmlns:a="http://schemas.openxmlformats.org/drawingml/2006/main">
               <a:ext uri="{FF2B5EF4-FFF2-40B4-BE49-F238E27FC236}">
-                <a16:creationId xmlns:a16="http://schemas.microsoft.com/office/drawing/2014/main" id="{DC2F3657-80CA-4337-A00C-241A3841602E}"/>
+                <a16:creationId xmlns:a16="http://schemas.microsoft.com/office/drawing/2014/main" id="{E66FB5BA-8DEF-4871-9B9D-96DC785B3CC8}"/>
               </a:ext>
             </a:extLst>
           </p:cNvPr>
@@ -9908,7 +9908,7 @@
           <p:cNvPr id="44" name="">
             <a:extLst xmlns:a="http://schemas.openxmlformats.org/drawingml/2006/main">
               <a:ext uri="{FF2B5EF4-FFF2-40B4-BE49-F238E27FC236}">
-                <a16:creationId xmlns:a16="http://schemas.microsoft.com/office/drawing/2014/main" id="{F7881B93-DAEC-45A0-9F7E-23D306BE1B2D}"/>
+                <a16:creationId xmlns:a16="http://schemas.microsoft.com/office/drawing/2014/main" id="{EE241214-4656-4603-BE39-2024866D8728}"/>
               </a:ext>
             </a:extLst>
           </p:cNvPr>
@@ -9939,7 +9939,7 @@
           <p:cNvPr id="45" name="">
             <a:extLst xmlns:a="http://schemas.openxmlformats.org/drawingml/2006/main">
               <a:ext uri="{FF2B5EF4-FFF2-40B4-BE49-F238E27FC236}">
-                <a16:creationId xmlns:a16="http://schemas.microsoft.com/office/drawing/2014/main" id="{401E0E1E-BD0D-4EBC-9667-5FECF8245D8E}"/>
+                <a16:creationId xmlns:a16="http://schemas.microsoft.com/office/drawing/2014/main" id="{C46B9AA1-33DA-412C-BD20-466CBD48FBD6}"/>
               </a:ext>
             </a:extLst>
           </p:cNvPr>
@@ -9991,7 +9991,7 @@
           <p:cNvPr id="46" name="">
             <a:extLst xmlns:a="http://schemas.openxmlformats.org/drawingml/2006/main">
               <a:ext uri="{FF2B5EF4-FFF2-40B4-BE49-F238E27FC236}">
-                <a16:creationId xmlns:a16="http://schemas.microsoft.com/office/drawing/2014/main" id="{D285D027-9612-47CB-9761-4A50B4FBB514}"/>
+                <a16:creationId xmlns:a16="http://schemas.microsoft.com/office/drawing/2014/main" id="{DA115A32-8D80-413E-85D6-E4C6473CF789}"/>
               </a:ext>
             </a:extLst>
           </p:cNvPr>
@@ -10043,7 +10043,7 @@
           <p:cNvPr id="47" name="">
             <a:extLst xmlns:a="http://schemas.openxmlformats.org/drawingml/2006/main">
               <a:ext uri="{FF2B5EF4-FFF2-40B4-BE49-F238E27FC236}">
-                <a16:creationId xmlns:a16="http://schemas.microsoft.com/office/drawing/2014/main" id="{08F3EA8C-84D0-4B73-82CA-CA5868DA284F}"/>
+                <a16:creationId xmlns:a16="http://schemas.microsoft.com/office/drawing/2014/main" id="{CB718FD5-BFF5-49BD-8CF1-F27D6AEEB633}"/>
               </a:ext>
             </a:extLst>
           </p:cNvPr>
@@ -10095,7 +10095,7 @@
           <p:cNvPr id="48" name="">
             <a:extLst xmlns:a="http://schemas.openxmlformats.org/drawingml/2006/main">
               <a:ext uri="{FF2B5EF4-FFF2-40B4-BE49-F238E27FC236}">
-                <a16:creationId xmlns:a16="http://schemas.microsoft.com/office/drawing/2014/main" id="{CF16E971-196F-40A2-BAB6-9AB50EC04AD3}"/>
+                <a16:creationId xmlns:a16="http://schemas.microsoft.com/office/drawing/2014/main" id="{6BBDDE06-C380-47E0-9756-8D58CA790417}"/>
               </a:ext>
             </a:extLst>
           </p:cNvPr>
@@ -10147,7 +10147,7 @@
           <p:cNvPr id="49" name="">
             <a:extLst xmlns:a="http://schemas.openxmlformats.org/drawingml/2006/main">
               <a:ext uri="{FF2B5EF4-FFF2-40B4-BE49-F238E27FC236}">
-                <a16:creationId xmlns:a16="http://schemas.microsoft.com/office/drawing/2014/main" id="{C16B7633-61CF-4B5A-94A3-520AFBE9E168}"/>
+                <a16:creationId xmlns:a16="http://schemas.microsoft.com/office/drawing/2014/main" id="{D263E30F-E1D6-4F42-AF05-F09847A13D44}"/>
               </a:ext>
             </a:extLst>
           </p:cNvPr>
@@ -10199,7 +10199,7 @@
           <p:cNvPr id="50" name="">
             <a:extLst xmlns:a="http://schemas.openxmlformats.org/drawingml/2006/main">
               <a:ext uri="{FF2B5EF4-FFF2-40B4-BE49-F238E27FC236}">
-                <a16:creationId xmlns:a16="http://schemas.microsoft.com/office/drawing/2014/main" id="{C4D4AD67-BD0D-4385-9ADE-569FB044B597}"/>
+                <a16:creationId xmlns:a16="http://schemas.microsoft.com/office/drawing/2014/main" id="{C23EEBB0-829E-4AD7-B4D5-09BCECEFF311}"/>
               </a:ext>
             </a:extLst>
           </p:cNvPr>
@@ -10251,7 +10251,7 @@
           <p:cNvPr id="51" name="">
             <a:extLst xmlns:a="http://schemas.openxmlformats.org/drawingml/2006/main">
               <a:ext uri="{FF2B5EF4-FFF2-40B4-BE49-F238E27FC236}">
-                <a16:creationId xmlns:a16="http://schemas.microsoft.com/office/drawing/2014/main" id="{48647F5F-F52D-406A-9487-C67527280385}"/>
+                <a16:creationId xmlns:a16="http://schemas.microsoft.com/office/drawing/2014/main" id="{A5660EFE-B307-43FB-B910-5DADC08677B5}"/>
               </a:ext>
             </a:extLst>
           </p:cNvPr>
@@ -10282,7 +10282,7 @@
           <p:cNvPr id="52" name="">
             <a:extLst xmlns:a="http://schemas.openxmlformats.org/drawingml/2006/main">
               <a:ext uri="{FF2B5EF4-FFF2-40B4-BE49-F238E27FC236}">
-                <a16:creationId xmlns:a16="http://schemas.microsoft.com/office/drawing/2014/main" id="{59A34C33-D8D1-4DDE-9A02-C20899D750C5}"/>
+                <a16:creationId xmlns:a16="http://schemas.microsoft.com/office/drawing/2014/main" id="{BB35A487-F686-4229-8394-A406EE817E96}"/>
               </a:ext>
             </a:extLst>
           </p:cNvPr>
@@ -10313,7 +10313,7 @@
           <p:cNvPr id="53" name="">
             <a:extLst xmlns:a="http://schemas.openxmlformats.org/drawingml/2006/main">
               <a:ext uri="{FF2B5EF4-FFF2-40B4-BE49-F238E27FC236}">
-                <a16:creationId xmlns:a16="http://schemas.microsoft.com/office/drawing/2014/main" id="{C3EA3BB9-DFFB-4D7D-8DC0-EC432E04BA2C}"/>
+                <a16:creationId xmlns:a16="http://schemas.microsoft.com/office/drawing/2014/main" id="{CAE6ACFA-5C23-4F85-9BA7-77F1895C5662}"/>
               </a:ext>
             </a:extLst>
           </p:cNvPr>
@@ -10344,7 +10344,7 @@
           <p:cNvPr id="54" name="">
             <a:extLst xmlns:a="http://schemas.openxmlformats.org/drawingml/2006/main">
               <a:ext uri="{FF2B5EF4-FFF2-40B4-BE49-F238E27FC236}">
-                <a16:creationId xmlns:a16="http://schemas.microsoft.com/office/drawing/2014/main" id="{5ACC0E51-D733-402B-BF6B-05C44491F924}"/>
+                <a16:creationId xmlns:a16="http://schemas.microsoft.com/office/drawing/2014/main" id="{59C94CD7-36DC-41ED-BFD7-350762D6151B}"/>
               </a:ext>
             </a:extLst>
           </p:cNvPr>
@@ -10396,7 +10396,7 @@
           <p:cNvPr id="55" name="">
             <a:extLst xmlns:a="http://schemas.openxmlformats.org/drawingml/2006/main">
               <a:ext uri="{FF2B5EF4-FFF2-40B4-BE49-F238E27FC236}">
-                <a16:creationId xmlns:a16="http://schemas.microsoft.com/office/drawing/2014/main" id="{AB25F5BF-296F-44C9-9D64-5C306168BF80}"/>
+                <a16:creationId xmlns:a16="http://schemas.microsoft.com/office/drawing/2014/main" id="{4F792A38-1CFC-4FE9-AE7E-1C2233DF9805}"/>
               </a:ext>
             </a:extLst>
           </p:cNvPr>
@@ -10448,7 +10448,7 @@
           <p:cNvPr id="56" name="">
             <a:extLst xmlns:a="http://schemas.openxmlformats.org/drawingml/2006/main">
               <a:ext uri="{FF2B5EF4-FFF2-40B4-BE49-F238E27FC236}">
-                <a16:creationId xmlns:a16="http://schemas.microsoft.com/office/drawing/2014/main" id="{5570900F-EA06-4C54-B471-866AE3416E44}"/>
+                <a16:creationId xmlns:a16="http://schemas.microsoft.com/office/drawing/2014/main" id="{771366CA-3D00-4CBA-8DFD-ED0E88967571}"/>
               </a:ext>
             </a:extLst>
           </p:cNvPr>
@@ -10500,7 +10500,7 @@
           <p:cNvPr id="57" name="">
             <a:extLst xmlns:a="http://schemas.openxmlformats.org/drawingml/2006/main">
               <a:ext uri="{FF2B5EF4-FFF2-40B4-BE49-F238E27FC236}">
-                <a16:creationId xmlns:a16="http://schemas.microsoft.com/office/drawing/2014/main" id="{F26EE4F1-2436-4E2A-B2BC-163C112B412F}"/>
+                <a16:creationId xmlns:a16="http://schemas.microsoft.com/office/drawing/2014/main" id="{FA7B4873-5934-46A2-A26B-70B918C6FCC8}"/>
               </a:ext>
             </a:extLst>
           </p:cNvPr>
@@ -10552,7 +10552,7 @@
           <p:cNvPr id="58" name="">
             <a:extLst xmlns:a="http://schemas.openxmlformats.org/drawingml/2006/main">
               <a:ext uri="{FF2B5EF4-FFF2-40B4-BE49-F238E27FC236}">
-                <a16:creationId xmlns:a16="http://schemas.microsoft.com/office/drawing/2014/main" id="{A2FA1B49-3E6B-4636-938D-369A6C3D6687}"/>
+                <a16:creationId xmlns:a16="http://schemas.microsoft.com/office/drawing/2014/main" id="{70807CE1-5E97-4868-A635-483171695407}"/>
               </a:ext>
             </a:extLst>
           </p:cNvPr>
@@ -10604,7 +10604,7 @@
           <p:cNvPr id="59" name="">
             <a:extLst xmlns:a="http://schemas.openxmlformats.org/drawingml/2006/main">
               <a:ext uri="{FF2B5EF4-FFF2-40B4-BE49-F238E27FC236}">
-                <a16:creationId xmlns:a16="http://schemas.microsoft.com/office/drawing/2014/main" id="{65488EB0-9A24-4F6D-8D51-DA1511E982A4}"/>
+                <a16:creationId xmlns:a16="http://schemas.microsoft.com/office/drawing/2014/main" id="{65E24EB8-F476-4DCE-8CE6-9642E8925993}"/>
               </a:ext>
             </a:extLst>
           </p:cNvPr>
@@ -10635,7 +10635,7 @@
           <p:cNvPr id="60" name="">
             <a:extLst xmlns:a="http://schemas.openxmlformats.org/drawingml/2006/main">
               <a:ext uri="{FF2B5EF4-FFF2-40B4-BE49-F238E27FC236}">
-                <a16:creationId xmlns:a16="http://schemas.microsoft.com/office/drawing/2014/main" id="{8640E3AD-1E40-4B42-9780-3FE882CFDE7E}"/>
+                <a16:creationId xmlns:a16="http://schemas.microsoft.com/office/drawing/2014/main" id="{FD9CA457-C6E6-45D0-A705-4ABDB9193CD3}"/>
               </a:ext>
             </a:extLst>
           </p:cNvPr>
@@ -10687,7 +10687,7 @@
           <p:cNvPr id="61" name="">
             <a:extLst xmlns:a="http://schemas.openxmlformats.org/drawingml/2006/main">
               <a:ext uri="{FF2B5EF4-FFF2-40B4-BE49-F238E27FC236}">
-                <a16:creationId xmlns:a16="http://schemas.microsoft.com/office/drawing/2014/main" id="{5C67092C-27DA-4C7C-B15C-72B319ABD4BF}"/>
+                <a16:creationId xmlns:a16="http://schemas.microsoft.com/office/drawing/2014/main" id="{A9C15471-78F4-4F84-8336-940F068C4CAB}"/>
               </a:ext>
             </a:extLst>
           </p:cNvPr>
@@ -10739,7 +10739,7 @@
           <p:cNvPr id="62" name="">
             <a:extLst xmlns:a="http://schemas.openxmlformats.org/drawingml/2006/main">
               <a:ext uri="{FF2B5EF4-FFF2-40B4-BE49-F238E27FC236}">
-                <a16:creationId xmlns:a16="http://schemas.microsoft.com/office/drawing/2014/main" id="{7C270BB0-20CD-4DD8-B1AF-38F886FE7D3E}"/>
+                <a16:creationId xmlns:a16="http://schemas.microsoft.com/office/drawing/2014/main" id="{D5C166ED-05A9-42A5-B3FB-B8EE29D87C32}"/>
               </a:ext>
             </a:extLst>
           </p:cNvPr>
@@ -10791,7 +10791,7 @@
           <p:cNvPr id="63" name="">
             <a:extLst xmlns:a="http://schemas.openxmlformats.org/drawingml/2006/main">
               <a:ext uri="{FF2B5EF4-FFF2-40B4-BE49-F238E27FC236}">
-                <a16:creationId xmlns:a16="http://schemas.microsoft.com/office/drawing/2014/main" id="{E1572209-53EF-4A3E-87DF-21902D67C205}"/>
+                <a16:creationId xmlns:a16="http://schemas.microsoft.com/office/drawing/2014/main" id="{8F3CC5C0-B6BD-4274-99A7-0F0B68952B63}"/>
               </a:ext>
             </a:extLst>
           </p:cNvPr>
@@ -10843,7 +10843,7 @@
           <p:cNvPr id="64" name="">
             <a:extLst xmlns:a="http://schemas.openxmlformats.org/drawingml/2006/main">
               <a:ext uri="{FF2B5EF4-FFF2-40B4-BE49-F238E27FC236}">
-                <a16:creationId xmlns:a16="http://schemas.microsoft.com/office/drawing/2014/main" id="{695EBADB-4D02-4FD1-915D-B3E244EB512A}"/>
+                <a16:creationId xmlns:a16="http://schemas.microsoft.com/office/drawing/2014/main" id="{215828D3-2F0A-40A6-92E9-F079029D78FD}"/>
               </a:ext>
             </a:extLst>
           </p:cNvPr>
@@ -10895,7 +10895,7 @@
           <p:cNvPr id="65" name="">
             <a:extLst xmlns:a="http://schemas.openxmlformats.org/drawingml/2006/main">
               <a:ext uri="{FF2B5EF4-FFF2-40B4-BE49-F238E27FC236}">
-                <a16:creationId xmlns:a16="http://schemas.microsoft.com/office/drawing/2014/main" id="{11473958-C19E-4AC8-BB6C-829951376261}"/>
+                <a16:creationId xmlns:a16="http://schemas.microsoft.com/office/drawing/2014/main" id="{54807E2F-9468-42D6-ADC0-BAC30433731B}"/>
               </a:ext>
             </a:extLst>
           </p:cNvPr>
@@ -10926,7 +10926,7 @@
           <p:cNvPr id="66" name="">
             <a:extLst xmlns:a="http://schemas.openxmlformats.org/drawingml/2006/main">
               <a:ext uri="{FF2B5EF4-FFF2-40B4-BE49-F238E27FC236}">
-                <a16:creationId xmlns:a16="http://schemas.microsoft.com/office/drawing/2014/main" id="{BF24C79C-9355-4333-B0A2-56CA80237982}"/>
+                <a16:creationId xmlns:a16="http://schemas.microsoft.com/office/drawing/2014/main" id="{FF314139-8B04-420B-8C14-8248A7EDF60C}"/>
               </a:ext>
             </a:extLst>
           </p:cNvPr>
@@ -10957,7 +10957,7 @@
           <p:cNvPr id="67" name="">
             <a:extLst xmlns:a="http://schemas.openxmlformats.org/drawingml/2006/main">
               <a:ext uri="{FF2B5EF4-FFF2-40B4-BE49-F238E27FC236}">
-                <a16:creationId xmlns:a16="http://schemas.microsoft.com/office/drawing/2014/main" id="{3EBE8E13-DFA9-49E1-A218-AA23DA184ACA}"/>
+                <a16:creationId xmlns:a16="http://schemas.microsoft.com/office/drawing/2014/main" id="{0F2317F3-6085-45EE-8285-A77C48690A0C}"/>
               </a:ext>
             </a:extLst>
           </p:cNvPr>
@@ -11009,7 +11009,7 @@
           <p:cNvPr id="68" name="">
             <a:extLst xmlns:a="http://schemas.openxmlformats.org/drawingml/2006/main">
               <a:ext uri="{FF2B5EF4-FFF2-40B4-BE49-F238E27FC236}">
-                <a16:creationId xmlns:a16="http://schemas.microsoft.com/office/drawing/2014/main" id="{B953FC2A-981C-4161-B5EF-8732F25D6359}"/>
+                <a16:creationId xmlns:a16="http://schemas.microsoft.com/office/drawing/2014/main" id="{9C7B4DAF-21B9-4666-A381-AD104547A855}"/>
               </a:ext>
             </a:extLst>
           </p:cNvPr>
@@ -11061,7 +11061,7 @@
           <p:cNvPr id="69" name="">
             <a:extLst xmlns:a="http://schemas.openxmlformats.org/drawingml/2006/main">
               <a:ext uri="{FF2B5EF4-FFF2-40B4-BE49-F238E27FC236}">
-                <a16:creationId xmlns:a16="http://schemas.microsoft.com/office/drawing/2014/main" id="{A616B525-BE05-436B-B8D0-525918E50F53}"/>
+                <a16:creationId xmlns:a16="http://schemas.microsoft.com/office/drawing/2014/main" id="{3D0D40CC-AD1A-4F72-83A8-06D8046CE6A8}"/>
               </a:ext>
             </a:extLst>
           </p:cNvPr>
@@ -11113,7 +11113,7 @@
           <p:cNvPr id="70" name="">
             <a:extLst xmlns:a="http://schemas.openxmlformats.org/drawingml/2006/main">
               <a:ext uri="{FF2B5EF4-FFF2-40B4-BE49-F238E27FC236}">
-                <a16:creationId xmlns:a16="http://schemas.microsoft.com/office/drawing/2014/main" id="{A9166D23-CEA4-412E-8440-4AE449B1FFA0}"/>
+                <a16:creationId xmlns:a16="http://schemas.microsoft.com/office/drawing/2014/main" id="{E7DBEBB7-B7EA-44ED-B0A8-EA027FBA5D2C}"/>
               </a:ext>
             </a:extLst>
           </p:cNvPr>
@@ -11165,7 +11165,7 @@
           <p:cNvPr id="71" name="">
             <a:extLst xmlns:a="http://schemas.openxmlformats.org/drawingml/2006/main">
               <a:ext uri="{FF2B5EF4-FFF2-40B4-BE49-F238E27FC236}">
-                <a16:creationId xmlns:a16="http://schemas.microsoft.com/office/drawing/2014/main" id="{914232E7-B15C-4508-AE37-720E528345BC}"/>
+                <a16:creationId xmlns:a16="http://schemas.microsoft.com/office/drawing/2014/main" id="{4B4927E3-C721-4251-94F2-074208941E69}"/>
               </a:ext>
             </a:extLst>
           </p:cNvPr>
@@ -11217,7 +11217,7 @@
           <p:cNvPr id="72" name="">
             <a:extLst xmlns:a="http://schemas.openxmlformats.org/drawingml/2006/main">
               <a:ext uri="{FF2B5EF4-FFF2-40B4-BE49-F238E27FC236}">
-                <a16:creationId xmlns:a16="http://schemas.microsoft.com/office/drawing/2014/main" id="{1D7B4359-6209-446F-B424-2A2C86B3FBC9}"/>
+                <a16:creationId xmlns:a16="http://schemas.microsoft.com/office/drawing/2014/main" id="{76C30341-5AD7-4AE0-8681-F1C91A917798}"/>
               </a:ext>
             </a:extLst>
           </p:cNvPr>
@@ -11248,7 +11248,7 @@
           <p:cNvPr id="73" name="">
             <a:extLst xmlns:a="http://schemas.openxmlformats.org/drawingml/2006/main">
               <a:ext uri="{FF2B5EF4-FFF2-40B4-BE49-F238E27FC236}">
-                <a16:creationId xmlns:a16="http://schemas.microsoft.com/office/drawing/2014/main" id="{5804A55A-E35B-433F-B650-E702C2B59E9F}"/>
+                <a16:creationId xmlns:a16="http://schemas.microsoft.com/office/drawing/2014/main" id="{C446593F-1065-4076-BAA9-E45ED3FBFDA0}"/>
               </a:ext>
             </a:extLst>
           </p:cNvPr>
@@ -11300,7 +11300,7 @@
           <p:cNvPr id="74" name="">
             <a:extLst xmlns:a="http://schemas.openxmlformats.org/drawingml/2006/main">
               <a:ext uri="{FF2B5EF4-FFF2-40B4-BE49-F238E27FC236}">
-                <a16:creationId xmlns:a16="http://schemas.microsoft.com/office/drawing/2014/main" id="{647DADF0-41A2-4EC3-889A-0720FD54D214}"/>
+                <a16:creationId xmlns:a16="http://schemas.microsoft.com/office/drawing/2014/main" id="{97F76455-5697-4715-BBE8-7C383B7B07DF}"/>
               </a:ext>
             </a:extLst>
           </p:cNvPr>
@@ -11352,7 +11352,7 @@
           <p:cNvPr id="75" name="">
             <a:extLst xmlns:a="http://schemas.openxmlformats.org/drawingml/2006/main">
               <a:ext uri="{FF2B5EF4-FFF2-40B4-BE49-F238E27FC236}">
-                <a16:creationId xmlns:a16="http://schemas.microsoft.com/office/drawing/2014/main" id="{9775E1C1-8945-4EE6-8544-636F83BC2905}"/>
+                <a16:creationId xmlns:a16="http://schemas.microsoft.com/office/drawing/2014/main" id="{CADB5E02-E239-4058-AC67-EC36E933F234}"/>
               </a:ext>
             </a:extLst>
           </p:cNvPr>
@@ -11404,7 +11404,7 @@
           <p:cNvPr id="76" name="">
             <a:extLst xmlns:a="http://schemas.openxmlformats.org/drawingml/2006/main">
               <a:ext uri="{FF2B5EF4-FFF2-40B4-BE49-F238E27FC236}">
-                <a16:creationId xmlns:a16="http://schemas.microsoft.com/office/drawing/2014/main" id="{3CA82BD1-AE59-404D-857E-5989C3A791B4}"/>
+                <a16:creationId xmlns:a16="http://schemas.microsoft.com/office/drawing/2014/main" id="{E9B93596-3DDD-41DD-90D6-3FA658133F5D}"/>
               </a:ext>
             </a:extLst>
           </p:cNvPr>
@@ -11456,7 +11456,7 @@
           <p:cNvPr id="77" name="">
             <a:extLst xmlns:a="http://schemas.openxmlformats.org/drawingml/2006/main">
               <a:ext uri="{FF2B5EF4-FFF2-40B4-BE49-F238E27FC236}">
-                <a16:creationId xmlns:a16="http://schemas.microsoft.com/office/drawing/2014/main" id="{7E125CA4-0DF3-4FB7-8929-97C995E7B408}"/>
+                <a16:creationId xmlns:a16="http://schemas.microsoft.com/office/drawing/2014/main" id="{B9195356-9CF4-4A97-B0D8-A77630A56BD1}"/>
               </a:ext>
             </a:extLst>
           </p:cNvPr>
@@ -11508,7 +11508,7 @@
           <p:cNvPr id="78" name="">
             <a:extLst xmlns:a="http://schemas.openxmlformats.org/drawingml/2006/main">
               <a:ext uri="{FF2B5EF4-FFF2-40B4-BE49-F238E27FC236}">
-                <a16:creationId xmlns:a16="http://schemas.microsoft.com/office/drawing/2014/main" id="{9A90D950-89B8-443D-9235-B2AC4F0981FF}"/>
+                <a16:creationId xmlns:a16="http://schemas.microsoft.com/office/drawing/2014/main" id="{569DA28E-A88D-4294-8FD5-7A6386F40C80}"/>
               </a:ext>
             </a:extLst>
           </p:cNvPr>
@@ -11539,7 +11539,7 @@
           <p:cNvPr id="79" name="">
             <a:extLst xmlns:a="http://schemas.openxmlformats.org/drawingml/2006/main">
               <a:ext uri="{FF2B5EF4-FFF2-40B4-BE49-F238E27FC236}">
-                <a16:creationId xmlns:a16="http://schemas.microsoft.com/office/drawing/2014/main" id="{6F89131C-054C-4BAF-B138-9E014CCB9CA5}"/>
+                <a16:creationId xmlns:a16="http://schemas.microsoft.com/office/drawing/2014/main" id="{FA857DE1-524C-4199-9CEB-F0830680AE75}"/>
               </a:ext>
             </a:extLst>
           </p:cNvPr>
@@ -11570,7 +11570,7 @@
           <p:cNvPr id="80" name="">
             <a:extLst xmlns:a="http://schemas.openxmlformats.org/drawingml/2006/main">
               <a:ext uri="{FF2B5EF4-FFF2-40B4-BE49-F238E27FC236}">
-                <a16:creationId xmlns:a16="http://schemas.microsoft.com/office/drawing/2014/main" id="{0E31AA59-A6D3-4DA8-8E08-2074B107E254}"/>
+                <a16:creationId xmlns:a16="http://schemas.microsoft.com/office/drawing/2014/main" id="{4664C248-40F7-48AC-AB84-D5F91DE7D6F3}"/>
               </a:ext>
             </a:extLst>
           </p:cNvPr>
@@ -11622,7 +11622,7 @@
           <p:cNvPr id="81" name="">
             <a:extLst xmlns:a="http://schemas.openxmlformats.org/drawingml/2006/main">
               <a:ext uri="{FF2B5EF4-FFF2-40B4-BE49-F238E27FC236}">
-                <a16:creationId xmlns:a16="http://schemas.microsoft.com/office/drawing/2014/main" id="{B1C11872-5567-4C24-9D97-3D6F62AA6CD4}"/>
+                <a16:creationId xmlns:a16="http://schemas.microsoft.com/office/drawing/2014/main" id="{31897030-F71F-472B-84C7-9C70BE7C1CE5}"/>
               </a:ext>
             </a:extLst>
           </p:cNvPr>
@@ -11674,7 +11674,7 @@
           <p:cNvPr id="82" name="">
             <a:extLst xmlns:a="http://schemas.openxmlformats.org/drawingml/2006/main">
               <a:ext uri="{FF2B5EF4-FFF2-40B4-BE49-F238E27FC236}">
-                <a16:creationId xmlns:a16="http://schemas.microsoft.com/office/drawing/2014/main" id="{CEC24552-4EFF-48DA-91FF-71998BDECADA}"/>
+                <a16:creationId xmlns:a16="http://schemas.microsoft.com/office/drawing/2014/main" id="{05EACF8B-3576-4E28-8D96-CA1337C5627A}"/>
               </a:ext>
             </a:extLst>
           </p:cNvPr>
@@ -11726,7 +11726,7 @@
           <p:cNvPr id="83" name="">
             <a:extLst xmlns:a="http://schemas.openxmlformats.org/drawingml/2006/main">
               <a:ext uri="{FF2B5EF4-FFF2-40B4-BE49-F238E27FC236}">
-                <a16:creationId xmlns:a16="http://schemas.microsoft.com/office/drawing/2014/main" id="{BB32F22C-5C09-424F-B9D9-4E9B7506AAE6}"/>
+                <a16:creationId xmlns:a16="http://schemas.microsoft.com/office/drawing/2014/main" id="{93270198-924E-4C68-B401-1410063DF18A}"/>
               </a:ext>
             </a:extLst>
           </p:cNvPr>
@@ -11778,7 +11778,7 @@
           <p:cNvPr id="84" name="">
             <a:extLst xmlns:a="http://schemas.openxmlformats.org/drawingml/2006/main">
               <a:ext uri="{FF2B5EF4-FFF2-40B4-BE49-F238E27FC236}">
-                <a16:creationId xmlns:a16="http://schemas.microsoft.com/office/drawing/2014/main" id="{A6F26F16-2D01-4048-AA83-824BD2622D70}"/>
+                <a16:creationId xmlns:a16="http://schemas.microsoft.com/office/drawing/2014/main" id="{57000E87-AC41-4DBD-807E-9884C74BE3BE}"/>
               </a:ext>
             </a:extLst>
           </p:cNvPr>
@@ -11830,7 +11830,7 @@
           <p:cNvPr id="85" name="">
             <a:extLst xmlns:a="http://schemas.openxmlformats.org/drawingml/2006/main">
               <a:ext uri="{FF2B5EF4-FFF2-40B4-BE49-F238E27FC236}">
-                <a16:creationId xmlns:a16="http://schemas.microsoft.com/office/drawing/2014/main" id="{45B94481-DDCB-47ED-A12E-2CC3037063F8}"/>
+                <a16:creationId xmlns:a16="http://schemas.microsoft.com/office/drawing/2014/main" id="{17F8965F-FF2A-47E8-8013-86DC1132E7B2}"/>
               </a:ext>
             </a:extLst>
           </p:cNvPr>
@@ -11861,7 +11861,7 @@
           <p:cNvPr id="86" name="">
             <a:extLst xmlns:a="http://schemas.openxmlformats.org/drawingml/2006/main">
               <a:ext uri="{FF2B5EF4-FFF2-40B4-BE49-F238E27FC236}">
-                <a16:creationId xmlns:a16="http://schemas.microsoft.com/office/drawing/2014/main" id="{7CC24DE1-1EB8-486C-B243-2728BCEE76E7}"/>
+                <a16:creationId xmlns:a16="http://schemas.microsoft.com/office/drawing/2014/main" id="{DCE13CBD-6F86-47A7-8B99-2A9818E0F3A0}"/>
               </a:ext>
             </a:extLst>
           </p:cNvPr>
@@ -11913,7 +11913,7 @@
           <p:cNvPr id="87" name="">
             <a:extLst xmlns:a="http://schemas.openxmlformats.org/drawingml/2006/main">
               <a:ext uri="{FF2B5EF4-FFF2-40B4-BE49-F238E27FC236}">
-                <a16:creationId xmlns:a16="http://schemas.microsoft.com/office/drawing/2014/main" id="{53B02204-3902-4557-BEE5-17464829B5F5}"/>
+                <a16:creationId xmlns:a16="http://schemas.microsoft.com/office/drawing/2014/main" id="{9F5FF613-A3C1-4BF6-926D-969DBB39E228}"/>
               </a:ext>
             </a:extLst>
           </p:cNvPr>
@@ -11965,7 +11965,7 @@
           <p:cNvPr id="88" name="">
             <a:extLst xmlns:a="http://schemas.openxmlformats.org/drawingml/2006/main">
               <a:ext uri="{FF2B5EF4-FFF2-40B4-BE49-F238E27FC236}">
-                <a16:creationId xmlns:a16="http://schemas.microsoft.com/office/drawing/2014/main" id="{DB21FCFE-D673-435A-BB05-9BAED06AB3A7}"/>
+                <a16:creationId xmlns:a16="http://schemas.microsoft.com/office/drawing/2014/main" id="{89DC70B0-1881-4CE2-8960-5267A0471C8E}"/>
               </a:ext>
             </a:extLst>
           </p:cNvPr>
@@ -12017,7 +12017,7 @@
           <p:cNvPr id="89" name="">
             <a:extLst xmlns:a="http://schemas.openxmlformats.org/drawingml/2006/main">
               <a:ext uri="{FF2B5EF4-FFF2-40B4-BE49-F238E27FC236}">
-                <a16:creationId xmlns:a16="http://schemas.microsoft.com/office/drawing/2014/main" id="{4CABCFD6-C26C-42DF-8A35-5F7C040CDA12}"/>
+                <a16:creationId xmlns:a16="http://schemas.microsoft.com/office/drawing/2014/main" id="{E9FE8499-8361-4DCF-A310-CD1FC1C37C90}"/>
               </a:ext>
             </a:extLst>
           </p:cNvPr>
@@ -12069,7 +12069,7 @@
           <p:cNvPr id="90" name="">
             <a:extLst xmlns:a="http://schemas.openxmlformats.org/drawingml/2006/main">
               <a:ext uri="{FF2B5EF4-FFF2-40B4-BE49-F238E27FC236}">
-                <a16:creationId xmlns:a16="http://schemas.microsoft.com/office/drawing/2014/main" id="{85B14AA1-1E80-4FB3-8DDC-F1D066A36E71}"/>
+                <a16:creationId xmlns:a16="http://schemas.microsoft.com/office/drawing/2014/main" id="{70628EA1-E38D-4E05-9AA2-009FA09E80EE}"/>
               </a:ext>
             </a:extLst>
           </p:cNvPr>
@@ -12121,7 +12121,7 @@
           <p:cNvPr id="91" name="">
             <a:extLst xmlns:a="http://schemas.openxmlformats.org/drawingml/2006/main">
               <a:ext uri="{FF2B5EF4-FFF2-40B4-BE49-F238E27FC236}">
-                <a16:creationId xmlns:a16="http://schemas.microsoft.com/office/drawing/2014/main" id="{25CD2162-B001-4227-B456-94B3183A470A}"/>
+                <a16:creationId xmlns:a16="http://schemas.microsoft.com/office/drawing/2014/main" id="{4ACA8176-69E0-415B-83F2-83DA41F57EE2}"/>
               </a:ext>
             </a:extLst>
           </p:cNvPr>
@@ -12152,7 +12152,7 @@
           <p:cNvPr id="92" name="">
             <a:extLst xmlns:a="http://schemas.openxmlformats.org/drawingml/2006/main">
               <a:ext uri="{FF2B5EF4-FFF2-40B4-BE49-F238E27FC236}">
-                <a16:creationId xmlns:a16="http://schemas.microsoft.com/office/drawing/2014/main" id="{D049E793-C6DF-4754-A31E-4E213D4CAB54}"/>
+                <a16:creationId xmlns:a16="http://schemas.microsoft.com/office/drawing/2014/main" id="{B3D84D84-E922-45AF-8E95-EB8BBA3223F1}"/>
               </a:ext>
             </a:extLst>
           </p:cNvPr>
@@ -12183,7 +12183,7 @@
           <p:cNvPr id="93" name="">
             <a:extLst xmlns:a="http://schemas.openxmlformats.org/drawingml/2006/main">
               <a:ext uri="{FF2B5EF4-FFF2-40B4-BE49-F238E27FC236}">
-                <a16:creationId xmlns:a16="http://schemas.microsoft.com/office/drawing/2014/main" id="{DAB365CD-163B-4FB2-826F-910417DCEB98}"/>
+                <a16:creationId xmlns:a16="http://schemas.microsoft.com/office/drawing/2014/main" id="{BF4F2C7C-2CB6-41A5-9AE5-CFBE4A1B87CF}"/>
               </a:ext>
             </a:extLst>
           </p:cNvPr>
@@ -12235,7 +12235,7 @@
           <p:cNvPr id="94" name="">
             <a:extLst xmlns:a="http://schemas.openxmlformats.org/drawingml/2006/main">
               <a:ext uri="{FF2B5EF4-FFF2-40B4-BE49-F238E27FC236}">
-                <a16:creationId xmlns:a16="http://schemas.microsoft.com/office/drawing/2014/main" id="{A82378C2-0422-4DCA-A116-BDAE3B8A824C}"/>
+                <a16:creationId xmlns:a16="http://schemas.microsoft.com/office/drawing/2014/main" id="{172CB840-9FB5-4544-B3D9-EB69BF4A1731}"/>
               </a:ext>
             </a:extLst>
           </p:cNvPr>
@@ -12287,7 +12287,7 @@
           <p:cNvPr id="95" name="">
             <a:extLst xmlns:a="http://schemas.openxmlformats.org/drawingml/2006/main">
               <a:ext uri="{FF2B5EF4-FFF2-40B4-BE49-F238E27FC236}">
-                <a16:creationId xmlns:a16="http://schemas.microsoft.com/office/drawing/2014/main" id="{F246DE5D-9116-410D-B386-C783651E25BE}"/>
+                <a16:creationId xmlns:a16="http://schemas.microsoft.com/office/drawing/2014/main" id="{B4CFA770-4157-49DF-B103-AF132BC43BF5}"/>
               </a:ext>
             </a:extLst>
           </p:cNvPr>
@@ -12339,7 +12339,7 @@
           <p:cNvPr id="96" name="">
             <a:extLst xmlns:a="http://schemas.openxmlformats.org/drawingml/2006/main">
               <a:ext uri="{FF2B5EF4-FFF2-40B4-BE49-F238E27FC236}">
-                <a16:creationId xmlns:a16="http://schemas.microsoft.com/office/drawing/2014/main" id="{D064F87C-A742-45DB-BF07-E62936613DCD}"/>
+                <a16:creationId xmlns:a16="http://schemas.microsoft.com/office/drawing/2014/main" id="{2FB8FB54-6C35-49F6-8862-572C52B9000A}"/>
               </a:ext>
             </a:extLst>
           </p:cNvPr>
@@ -12391,7 +12391,7 @@
           <p:cNvPr id="97" name="">
             <a:extLst xmlns:a="http://schemas.openxmlformats.org/drawingml/2006/main">
               <a:ext uri="{FF2B5EF4-FFF2-40B4-BE49-F238E27FC236}">
-                <a16:creationId xmlns:a16="http://schemas.microsoft.com/office/drawing/2014/main" id="{375B1D33-24B4-43B7-A5C5-884ED52E63C9}"/>
+                <a16:creationId xmlns:a16="http://schemas.microsoft.com/office/drawing/2014/main" id="{4BA16585-D823-44A6-B994-0FDC1B44BB50}"/>
               </a:ext>
             </a:extLst>
           </p:cNvPr>
@@ -12441,7 +12441,7 @@
     </p:spTree>
     <p:extLst>
       <p:ext uri="{BB962C8B-B14F-4D97-AF65-F5344CB8AC3E}">
-        <p14:creationId xmlns:p14="http://schemas.microsoft.com/office/powerpoint/2010/main" val="2090183904"/>
+        <p14:creationId xmlns:p14="http://schemas.microsoft.com/office/powerpoint/2010/main" val="1619645952"/>
       </p:ext>
     </p:extLst>
   </p:cSld>
@@ -12472,7 +12472,7 @@
           <p:cNvPr id="102" name="">
             <a:extLst xmlns:a="http://schemas.openxmlformats.org/drawingml/2006/main">
               <a:ext uri="{FF2B5EF4-FFF2-40B4-BE49-F238E27FC236}">
-                <a16:creationId xmlns:a16="http://schemas.microsoft.com/office/drawing/2014/main" id="{9E2A0FBE-DFD2-4608-A442-E8DCC3CE661B}"/>
+                <a16:creationId xmlns:a16="http://schemas.microsoft.com/office/drawing/2014/main" id="{7CAEC936-16B1-4B5F-8041-BC472D4978B3}"/>
               </a:ext>
             </a:extLst>
           </p:cNvPr>
@@ -12505,7 +12505,7 @@
           <p:cNvPr id="2" name="">
             <a:extLst xmlns:a="http://schemas.openxmlformats.org/drawingml/2006/main">
               <a:ext uri="{FF2B5EF4-FFF2-40B4-BE49-F238E27FC236}">
-                <a16:creationId xmlns:a16="http://schemas.microsoft.com/office/drawing/2014/main" id="{4BA8FC07-AE19-44B4-A70C-D5175212E7EC}"/>
+                <a16:creationId xmlns:a16="http://schemas.microsoft.com/office/drawing/2014/main" id="{2D9675B3-363C-4EFE-8E81-8FD40ABCD4FC}"/>
               </a:ext>
             </a:extLst>
           </p:cNvPr>
@@ -12536,7 +12536,7 @@
           <p:cNvPr id="3" name="">
             <a:extLst xmlns:a="http://schemas.openxmlformats.org/drawingml/2006/main">
               <a:ext uri="{FF2B5EF4-FFF2-40B4-BE49-F238E27FC236}">
-                <a16:creationId xmlns:a16="http://schemas.microsoft.com/office/drawing/2014/main" id="{F85010B9-C773-4CE5-98CB-B0D106B7E76D}"/>
+                <a16:creationId xmlns:a16="http://schemas.microsoft.com/office/drawing/2014/main" id="{E093C6EE-2031-4590-BD7D-49EC1B0299A2}"/>
               </a:ext>
             </a:extLst>
           </p:cNvPr>
@@ -12588,7 +12588,7 @@
           <p:cNvPr id="4" name="">
             <a:extLst xmlns:a="http://schemas.openxmlformats.org/drawingml/2006/main">
               <a:ext uri="{FF2B5EF4-FFF2-40B4-BE49-F238E27FC236}">
-                <a16:creationId xmlns:a16="http://schemas.microsoft.com/office/drawing/2014/main" id="{99105726-B7FA-41F4-812D-3DBF5F22249D}"/>
+                <a16:creationId xmlns:a16="http://schemas.microsoft.com/office/drawing/2014/main" id="{ECE66BC0-37F3-4CE7-BA78-5EEE16385D2F}"/>
               </a:ext>
             </a:extLst>
           </p:cNvPr>
@@ -12640,7 +12640,7 @@
           <p:cNvPr id="5" name="">
             <a:extLst xmlns:a="http://schemas.openxmlformats.org/drawingml/2006/main">
               <a:ext uri="{FF2B5EF4-FFF2-40B4-BE49-F238E27FC236}">
-                <a16:creationId xmlns:a16="http://schemas.microsoft.com/office/drawing/2014/main" id="{3D02E117-A411-4FF9-A1A7-4D0DBF1A3B41}"/>
+                <a16:creationId xmlns:a16="http://schemas.microsoft.com/office/drawing/2014/main" id="{005EFC51-F325-4CFB-B494-44B92462AFCB}"/>
               </a:ext>
             </a:extLst>
           </p:cNvPr>
@@ -12675,7 +12675,7 @@
           <p:nvPr/>
         </p:nvPicPr>
         <p:blipFill>
-          <a:blip xmlns:r="http://schemas.openxmlformats.org/officeDocument/2006/relationships" xmlns:a="http://schemas.openxmlformats.org/drawingml/2006/main" r:embed="R30c8182968c44ebd"/>
+          <a:blip xmlns:r="http://schemas.openxmlformats.org/officeDocument/2006/relationships" xmlns:a="http://schemas.openxmlformats.org/drawingml/2006/main" r:embed="R3f455ff606ef4858"/>
           <a:stretch xmlns:a="http://schemas.openxmlformats.org/drawingml/2006/main"/>
         </p:blipFill>
         <p:spPr>
@@ -12693,7 +12693,7 @@
           <p:cNvPr id="7" name="">
             <a:extLst xmlns:a="http://schemas.openxmlformats.org/drawingml/2006/main">
               <a:ext uri="{FF2B5EF4-FFF2-40B4-BE49-F238E27FC236}">
-                <a16:creationId xmlns:a16="http://schemas.microsoft.com/office/drawing/2014/main" id="{44C30E12-68FE-4A03-83B5-5F16C62A23B5}"/>
+                <a16:creationId xmlns:a16="http://schemas.microsoft.com/office/drawing/2014/main" id="{4F26A154-BDD6-4326-B543-42C67E0CE9BA}"/>
               </a:ext>
             </a:extLst>
           </p:cNvPr>
@@ -12745,7 +12745,7 @@
           <p:cNvPr id="8" name="">
             <a:extLst xmlns:a="http://schemas.openxmlformats.org/drawingml/2006/main">
               <a:ext uri="{FF2B5EF4-FFF2-40B4-BE49-F238E27FC236}">
-                <a16:creationId xmlns:a16="http://schemas.microsoft.com/office/drawing/2014/main" id="{63ED69F4-1F82-4585-A44C-29CEE550BA2D}"/>
+                <a16:creationId xmlns:a16="http://schemas.microsoft.com/office/drawing/2014/main" id="{28834290-FFB8-4969-BBA4-D816C77BFF29}"/>
               </a:ext>
             </a:extLst>
           </p:cNvPr>
@@ -12797,7 +12797,7 @@
           <p:cNvPr id="9" name="">
             <a:extLst xmlns:a="http://schemas.openxmlformats.org/drawingml/2006/main">
               <a:ext uri="{FF2B5EF4-FFF2-40B4-BE49-F238E27FC236}">
-                <a16:creationId xmlns:a16="http://schemas.microsoft.com/office/drawing/2014/main" id="{574C0A07-BA84-4A52-B4E7-6F2C84069065}"/>
+                <a16:creationId xmlns:a16="http://schemas.microsoft.com/office/drawing/2014/main" id="{17B16654-AB49-4F97-B03D-BFECC1A3DE52}"/>
               </a:ext>
             </a:extLst>
           </p:cNvPr>
@@ -12849,7 +12849,7 @@
           <p:cNvPr id="10" name="">
             <a:extLst xmlns:a="http://schemas.openxmlformats.org/drawingml/2006/main">
               <a:ext uri="{FF2B5EF4-FFF2-40B4-BE49-F238E27FC236}">
-                <a16:creationId xmlns:a16="http://schemas.microsoft.com/office/drawing/2014/main" id="{463F6E5C-79C8-4644-8F05-4AD53E4EA159}"/>
+                <a16:creationId xmlns:a16="http://schemas.microsoft.com/office/drawing/2014/main" id="{8763E6EE-6C8F-4F4E-AFA2-177487DC8B06}"/>
               </a:ext>
             </a:extLst>
           </p:cNvPr>
@@ -12901,7 +12901,7 @@
           <p:cNvPr id="11" name="">
             <a:extLst xmlns:a="http://schemas.openxmlformats.org/drawingml/2006/main">
               <a:ext uri="{FF2B5EF4-FFF2-40B4-BE49-F238E27FC236}">
-                <a16:creationId xmlns:a16="http://schemas.microsoft.com/office/drawing/2014/main" id="{7C5A61EE-FC03-4716-A7E0-A91B16C5AC41}"/>
+                <a16:creationId xmlns:a16="http://schemas.microsoft.com/office/drawing/2014/main" id="{40D135C9-0AAA-448D-B5EB-521704A0DA70}"/>
               </a:ext>
             </a:extLst>
           </p:cNvPr>
@@ -12932,7 +12932,7 @@
           <p:cNvPr id="12" name="">
             <a:extLst xmlns:a="http://schemas.openxmlformats.org/drawingml/2006/main">
               <a:ext uri="{FF2B5EF4-FFF2-40B4-BE49-F238E27FC236}">
-                <a16:creationId xmlns:a16="http://schemas.microsoft.com/office/drawing/2014/main" id="{5A5D736F-9369-4B85-9A9B-7FA5F6FA878C}"/>
+                <a16:creationId xmlns:a16="http://schemas.microsoft.com/office/drawing/2014/main" id="{A26CFD7D-FC2B-4235-A866-98C680F84374}"/>
               </a:ext>
             </a:extLst>
           </p:cNvPr>
@@ -12963,7 +12963,7 @@
           <p:cNvPr id="13" name="">
             <a:extLst xmlns:a="http://schemas.openxmlformats.org/drawingml/2006/main">
               <a:ext uri="{FF2B5EF4-FFF2-40B4-BE49-F238E27FC236}">
-                <a16:creationId xmlns:a16="http://schemas.microsoft.com/office/drawing/2014/main" id="{860E88C0-52BA-41C5-B843-EB55336B00AE}"/>
+                <a16:creationId xmlns:a16="http://schemas.microsoft.com/office/drawing/2014/main" id="{DAE65C03-B49A-4542-B743-8CA24664F8CA}"/>
               </a:ext>
             </a:extLst>
           </p:cNvPr>
@@ -13015,7 +13015,7 @@
           <p:cNvPr id="14" name="">
             <a:extLst xmlns:a="http://schemas.openxmlformats.org/drawingml/2006/main">
               <a:ext uri="{FF2B5EF4-FFF2-40B4-BE49-F238E27FC236}">
-                <a16:creationId xmlns:a16="http://schemas.microsoft.com/office/drawing/2014/main" id="{2A167621-7B82-4356-A7EC-8997019B3EB5}"/>
+                <a16:creationId xmlns:a16="http://schemas.microsoft.com/office/drawing/2014/main" id="{EDF488D8-EEE0-48F3-B1E2-C01E76ED8CE0}"/>
               </a:ext>
             </a:extLst>
           </p:cNvPr>
@@ -13067,7 +13067,7 @@
           <p:cNvPr id="15" name="">
             <a:extLst xmlns:a="http://schemas.openxmlformats.org/drawingml/2006/main">
               <a:ext uri="{FF2B5EF4-FFF2-40B4-BE49-F238E27FC236}">
-                <a16:creationId xmlns:a16="http://schemas.microsoft.com/office/drawing/2014/main" id="{CA104C05-A755-4DA4-976A-99FFDADF2905}"/>
+                <a16:creationId xmlns:a16="http://schemas.microsoft.com/office/drawing/2014/main" id="{B2A2DF02-265E-4F34-98C5-65E447E00D51}"/>
               </a:ext>
             </a:extLst>
           </p:cNvPr>
@@ -13119,7 +13119,7 @@
           <p:cNvPr id="16" name="">
             <a:extLst xmlns:a="http://schemas.openxmlformats.org/drawingml/2006/main">
               <a:ext uri="{FF2B5EF4-FFF2-40B4-BE49-F238E27FC236}">
-                <a16:creationId xmlns:a16="http://schemas.microsoft.com/office/drawing/2014/main" id="{C38DB2F4-512B-465B-B307-9DA05DED7C06}"/>
+                <a16:creationId xmlns:a16="http://schemas.microsoft.com/office/drawing/2014/main" id="{75C40846-B9D1-45A6-BC35-E15CFA203EB9}"/>
               </a:ext>
             </a:extLst>
           </p:cNvPr>
@@ -13171,7 +13171,7 @@
           <p:cNvPr id="17" name="">
             <a:extLst xmlns:a="http://schemas.openxmlformats.org/drawingml/2006/main">
               <a:ext uri="{FF2B5EF4-FFF2-40B4-BE49-F238E27FC236}">
-                <a16:creationId xmlns:a16="http://schemas.microsoft.com/office/drawing/2014/main" id="{07E874B2-1221-466C-821C-FFFCDE5E59CC}"/>
+                <a16:creationId xmlns:a16="http://schemas.microsoft.com/office/drawing/2014/main" id="{A0240D93-F07B-40CE-9574-02DEDB0B2353}"/>
               </a:ext>
             </a:extLst>
           </p:cNvPr>
@@ -13223,7 +13223,7 @@
           <p:cNvPr id="18" name="">
             <a:extLst xmlns:a="http://schemas.openxmlformats.org/drawingml/2006/main">
               <a:ext uri="{FF2B5EF4-FFF2-40B4-BE49-F238E27FC236}">
-                <a16:creationId xmlns:a16="http://schemas.microsoft.com/office/drawing/2014/main" id="{43987592-6254-4A32-AD3E-AE83511D9C42}"/>
+                <a16:creationId xmlns:a16="http://schemas.microsoft.com/office/drawing/2014/main" id="{B3A4E2BA-6072-497C-886E-9C5CABB4C5EB}"/>
               </a:ext>
             </a:extLst>
           </p:cNvPr>
@@ -13254,7 +13254,7 @@
           <p:cNvPr id="19" name="">
             <a:extLst xmlns:a="http://schemas.openxmlformats.org/drawingml/2006/main">
               <a:ext uri="{FF2B5EF4-FFF2-40B4-BE49-F238E27FC236}">
-                <a16:creationId xmlns:a16="http://schemas.microsoft.com/office/drawing/2014/main" id="{3F338A11-1336-43D5-8ADF-3BC9184A0449}"/>
+                <a16:creationId xmlns:a16="http://schemas.microsoft.com/office/drawing/2014/main" id="{88E6C074-EA98-4092-96E6-4C0896E56A16}"/>
               </a:ext>
             </a:extLst>
           </p:cNvPr>
@@ -13306,7 +13306,7 @@
           <p:cNvPr id="20" name="">
             <a:extLst xmlns:a="http://schemas.openxmlformats.org/drawingml/2006/main">
               <a:ext uri="{FF2B5EF4-FFF2-40B4-BE49-F238E27FC236}">
-                <a16:creationId xmlns:a16="http://schemas.microsoft.com/office/drawing/2014/main" id="{AF557194-0248-4890-999F-77C11240B199}"/>
+                <a16:creationId xmlns:a16="http://schemas.microsoft.com/office/drawing/2014/main" id="{82A46475-76F3-4046-BB08-55B4BE90B6DA}"/>
               </a:ext>
             </a:extLst>
           </p:cNvPr>
@@ -13358,7 +13358,7 @@
           <p:cNvPr id="21" name="">
             <a:extLst xmlns:a="http://schemas.openxmlformats.org/drawingml/2006/main">
               <a:ext uri="{FF2B5EF4-FFF2-40B4-BE49-F238E27FC236}">
-                <a16:creationId xmlns:a16="http://schemas.microsoft.com/office/drawing/2014/main" id="{59C6380A-CCCB-423F-AA7C-1FEC6F3A2ABB}"/>
+                <a16:creationId xmlns:a16="http://schemas.microsoft.com/office/drawing/2014/main" id="{97547AAE-3055-4D19-89ED-02CD5235E831}"/>
               </a:ext>
             </a:extLst>
           </p:cNvPr>
@@ -13410,7 +13410,7 @@
           <p:cNvPr id="22" name="">
             <a:extLst xmlns:a="http://schemas.openxmlformats.org/drawingml/2006/main">
               <a:ext uri="{FF2B5EF4-FFF2-40B4-BE49-F238E27FC236}">
-                <a16:creationId xmlns:a16="http://schemas.microsoft.com/office/drawing/2014/main" id="{6D3CA219-CCFD-483E-8E1D-E4E2CEB71395}"/>
+                <a16:creationId xmlns:a16="http://schemas.microsoft.com/office/drawing/2014/main" id="{A3A63BC8-F1C7-4783-A623-494726AB6392}"/>
               </a:ext>
             </a:extLst>
           </p:cNvPr>
@@ -13462,7 +13462,7 @@
           <p:cNvPr id="23" name="">
             <a:extLst xmlns:a="http://schemas.openxmlformats.org/drawingml/2006/main">
               <a:ext uri="{FF2B5EF4-FFF2-40B4-BE49-F238E27FC236}">
-                <a16:creationId xmlns:a16="http://schemas.microsoft.com/office/drawing/2014/main" id="{05EE8E5A-C805-4FA4-BE7E-188A45BAFD26}"/>
+                <a16:creationId xmlns:a16="http://schemas.microsoft.com/office/drawing/2014/main" id="{F6E9F9D0-DE29-4AC8-8992-0ECF49C6ED08}"/>
               </a:ext>
             </a:extLst>
           </p:cNvPr>
@@ -13514,7 +13514,7 @@
           <p:cNvPr id="24" name="">
             <a:extLst xmlns:a="http://schemas.openxmlformats.org/drawingml/2006/main">
               <a:ext uri="{FF2B5EF4-FFF2-40B4-BE49-F238E27FC236}">
-                <a16:creationId xmlns:a16="http://schemas.microsoft.com/office/drawing/2014/main" id="{A579C739-26CA-4DDC-AFE9-A5C4F9A5EC10}"/>
+                <a16:creationId xmlns:a16="http://schemas.microsoft.com/office/drawing/2014/main" id="{88FCFE9C-9FCC-4F07-B29B-B9E197EBF4A6}"/>
               </a:ext>
             </a:extLst>
           </p:cNvPr>
@@ -13545,7 +13545,7 @@
           <p:cNvPr id="25" name="">
             <a:extLst xmlns:a="http://schemas.openxmlformats.org/drawingml/2006/main">
               <a:ext uri="{FF2B5EF4-FFF2-40B4-BE49-F238E27FC236}">
-                <a16:creationId xmlns:a16="http://schemas.microsoft.com/office/drawing/2014/main" id="{DB0227FD-81B9-4783-9E4D-C50D21BE2518}"/>
+                <a16:creationId xmlns:a16="http://schemas.microsoft.com/office/drawing/2014/main" id="{DFDBF037-558A-4242-803D-2380EBCE0CAD}"/>
               </a:ext>
             </a:extLst>
           </p:cNvPr>
@@ -13576,7 +13576,7 @@
           <p:cNvPr id="26" name="">
             <a:extLst xmlns:a="http://schemas.openxmlformats.org/drawingml/2006/main">
               <a:ext uri="{FF2B5EF4-FFF2-40B4-BE49-F238E27FC236}">
-                <a16:creationId xmlns:a16="http://schemas.microsoft.com/office/drawing/2014/main" id="{B6AB2EB3-3C15-4A08-A2CA-E2B2F6A005E8}"/>
+                <a16:creationId xmlns:a16="http://schemas.microsoft.com/office/drawing/2014/main" id="{29CC7132-AC42-41D1-A3A9-1437C361464F}"/>
               </a:ext>
             </a:extLst>
           </p:cNvPr>
@@ -13628,7 +13628,7 @@
           <p:cNvPr id="27" name="">
             <a:extLst xmlns:a="http://schemas.openxmlformats.org/drawingml/2006/main">
               <a:ext uri="{FF2B5EF4-FFF2-40B4-BE49-F238E27FC236}">
-                <a16:creationId xmlns:a16="http://schemas.microsoft.com/office/drawing/2014/main" id="{6A5C3625-573E-446A-AEFE-10980562C208}"/>
+                <a16:creationId xmlns:a16="http://schemas.microsoft.com/office/drawing/2014/main" id="{8B6FB749-15B5-4EE7-B1AD-05BB8716BD00}"/>
               </a:ext>
             </a:extLst>
           </p:cNvPr>
@@ -13680,7 +13680,7 @@
           <p:cNvPr id="28" name="">
             <a:extLst xmlns:a="http://schemas.openxmlformats.org/drawingml/2006/main">
               <a:ext uri="{FF2B5EF4-FFF2-40B4-BE49-F238E27FC236}">
-                <a16:creationId xmlns:a16="http://schemas.microsoft.com/office/drawing/2014/main" id="{8D429FE8-9B66-46E0-93C2-9C6CE1A82A40}"/>
+                <a16:creationId xmlns:a16="http://schemas.microsoft.com/office/drawing/2014/main" id="{49BCFC4F-F0EB-4C89-9952-C77088D02048}"/>
               </a:ext>
             </a:extLst>
           </p:cNvPr>
@@ -13732,7 +13732,7 @@
           <p:cNvPr id="29" name="">
             <a:extLst xmlns:a="http://schemas.openxmlformats.org/drawingml/2006/main">
               <a:ext uri="{FF2B5EF4-FFF2-40B4-BE49-F238E27FC236}">
-                <a16:creationId xmlns:a16="http://schemas.microsoft.com/office/drawing/2014/main" id="{CC4696DD-C560-4009-938C-1AA050DC1C30}"/>
+                <a16:creationId xmlns:a16="http://schemas.microsoft.com/office/drawing/2014/main" id="{6901B685-9991-4124-8CAE-C1D46A5CB7CB}"/>
               </a:ext>
             </a:extLst>
           </p:cNvPr>
@@ -13784,7 +13784,7 @@
           <p:cNvPr id="30" name="">
             <a:extLst xmlns:a="http://schemas.openxmlformats.org/drawingml/2006/main">
               <a:ext uri="{FF2B5EF4-FFF2-40B4-BE49-F238E27FC236}">
-                <a16:creationId xmlns:a16="http://schemas.microsoft.com/office/drawing/2014/main" id="{33A24077-705F-462E-8E35-789AACB445C8}"/>
+                <a16:creationId xmlns:a16="http://schemas.microsoft.com/office/drawing/2014/main" id="{7ACA233D-1CE0-4CE5-B95C-FEE8E3402A61}"/>
               </a:ext>
             </a:extLst>
           </p:cNvPr>
@@ -13836,7 +13836,7 @@
           <p:cNvPr id="31" name="">
             <a:extLst xmlns:a="http://schemas.openxmlformats.org/drawingml/2006/main">
               <a:ext uri="{FF2B5EF4-FFF2-40B4-BE49-F238E27FC236}">
-                <a16:creationId xmlns:a16="http://schemas.microsoft.com/office/drawing/2014/main" id="{16D5A823-FA97-4B49-9662-BC63BA068464}"/>
+                <a16:creationId xmlns:a16="http://schemas.microsoft.com/office/drawing/2014/main" id="{C638B430-D5CA-48A7-82AC-D27623269223}"/>
               </a:ext>
             </a:extLst>
           </p:cNvPr>
@@ -13867,7 +13867,7 @@
           <p:cNvPr id="32" name="">
             <a:extLst xmlns:a="http://schemas.openxmlformats.org/drawingml/2006/main">
               <a:ext uri="{FF2B5EF4-FFF2-40B4-BE49-F238E27FC236}">
-                <a16:creationId xmlns:a16="http://schemas.microsoft.com/office/drawing/2014/main" id="{F077C955-9730-4F6F-BAF1-BE375AA5321F}"/>
+                <a16:creationId xmlns:a16="http://schemas.microsoft.com/office/drawing/2014/main" id="{6B827928-CA9B-4A4F-AC65-E2808C80B30E}"/>
               </a:ext>
             </a:extLst>
           </p:cNvPr>
@@ -13919,7 +13919,7 @@
           <p:cNvPr id="33" name="">
             <a:extLst xmlns:a="http://schemas.openxmlformats.org/drawingml/2006/main">
               <a:ext uri="{FF2B5EF4-FFF2-40B4-BE49-F238E27FC236}">
-                <a16:creationId xmlns:a16="http://schemas.microsoft.com/office/drawing/2014/main" id="{BFD8158A-E545-43BA-A6D5-B541DA0ACA32}"/>
+                <a16:creationId xmlns:a16="http://schemas.microsoft.com/office/drawing/2014/main" id="{48CB39E3-744E-49AE-9159-9568E699AC74}"/>
               </a:ext>
             </a:extLst>
           </p:cNvPr>
@@ -13971,7 +13971,7 @@
           <p:cNvPr id="34" name="">
             <a:extLst xmlns:a="http://schemas.openxmlformats.org/drawingml/2006/main">
               <a:ext uri="{FF2B5EF4-FFF2-40B4-BE49-F238E27FC236}">
-                <a16:creationId xmlns:a16="http://schemas.microsoft.com/office/drawing/2014/main" id="{53C2C4EC-980C-42D3-B7AD-4FAD5432FDB0}"/>
+                <a16:creationId xmlns:a16="http://schemas.microsoft.com/office/drawing/2014/main" id="{68D44C82-6C39-4F5C-A57E-F2D6C0387314}"/>
               </a:ext>
             </a:extLst>
           </p:cNvPr>
@@ -14023,7 +14023,7 @@
           <p:cNvPr id="35" name="">
             <a:extLst xmlns:a="http://schemas.openxmlformats.org/drawingml/2006/main">
               <a:ext uri="{FF2B5EF4-FFF2-40B4-BE49-F238E27FC236}">
-                <a16:creationId xmlns:a16="http://schemas.microsoft.com/office/drawing/2014/main" id="{658613F2-2628-46A0-BC83-3D24AEE7AA1B}"/>
+                <a16:creationId xmlns:a16="http://schemas.microsoft.com/office/drawing/2014/main" id="{D371486C-12CC-4948-8435-298BDF5835F1}"/>
               </a:ext>
             </a:extLst>
           </p:cNvPr>
@@ -14075,7 +14075,7 @@
           <p:cNvPr id="36" name="">
             <a:extLst xmlns:a="http://schemas.openxmlformats.org/drawingml/2006/main">
               <a:ext uri="{FF2B5EF4-FFF2-40B4-BE49-F238E27FC236}">
-                <a16:creationId xmlns:a16="http://schemas.microsoft.com/office/drawing/2014/main" id="{658D26EE-8EC2-498E-B114-A5C2D088C88C}"/>
+                <a16:creationId xmlns:a16="http://schemas.microsoft.com/office/drawing/2014/main" id="{E6B4B561-7D93-44DF-8344-83E6EE710134}"/>
               </a:ext>
             </a:extLst>
           </p:cNvPr>
@@ -14127,7 +14127,7 @@
           <p:cNvPr id="37" name="">
             <a:extLst xmlns:a="http://schemas.openxmlformats.org/drawingml/2006/main">
               <a:ext uri="{FF2B5EF4-FFF2-40B4-BE49-F238E27FC236}">
-                <a16:creationId xmlns:a16="http://schemas.microsoft.com/office/drawing/2014/main" id="{3BE4D1B5-99C4-4C00-8CC4-E873B85DC340}"/>
+                <a16:creationId xmlns:a16="http://schemas.microsoft.com/office/drawing/2014/main" id="{512F6E78-70C6-4C97-94EB-DC1F4268763E}"/>
               </a:ext>
             </a:extLst>
           </p:cNvPr>
@@ -14158,7 +14158,7 @@
           <p:cNvPr id="38" name="">
             <a:extLst xmlns:a="http://schemas.openxmlformats.org/drawingml/2006/main">
               <a:ext uri="{FF2B5EF4-FFF2-40B4-BE49-F238E27FC236}">
-                <a16:creationId xmlns:a16="http://schemas.microsoft.com/office/drawing/2014/main" id="{EBB5D38D-D25E-40C8-96AD-9DB10266D8A3}"/>
+                <a16:creationId xmlns:a16="http://schemas.microsoft.com/office/drawing/2014/main" id="{2A2CDA20-50C3-41EE-A89F-FA9EA4E3ACE1}"/>
               </a:ext>
             </a:extLst>
           </p:cNvPr>
@@ -14189,7 +14189,7 @@
           <p:cNvPr id="39" name="">
             <a:extLst xmlns:a="http://schemas.openxmlformats.org/drawingml/2006/main">
               <a:ext uri="{FF2B5EF4-FFF2-40B4-BE49-F238E27FC236}">
-                <a16:creationId xmlns:a16="http://schemas.microsoft.com/office/drawing/2014/main" id="{0DB4C855-A8C9-4F95-A9BB-B37B186D54DF}"/>
+                <a16:creationId xmlns:a16="http://schemas.microsoft.com/office/drawing/2014/main" id="{BD1B2528-68F9-4111-B59E-0DA94031B016}"/>
               </a:ext>
             </a:extLst>
           </p:cNvPr>
@@ -14241,7 +14241,7 @@
           <p:cNvPr id="40" name="">
             <a:extLst xmlns:a="http://schemas.openxmlformats.org/drawingml/2006/main">
               <a:ext uri="{FF2B5EF4-FFF2-40B4-BE49-F238E27FC236}">
-                <a16:creationId xmlns:a16="http://schemas.microsoft.com/office/drawing/2014/main" id="{3C4D654F-445B-412E-98AD-916C9ADB7E5B}"/>
+                <a16:creationId xmlns:a16="http://schemas.microsoft.com/office/drawing/2014/main" id="{4AFAB5BC-C204-4DD9-B4B0-BAB17633E538}"/>
               </a:ext>
             </a:extLst>
           </p:cNvPr>
@@ -14293,7 +14293,7 @@
           <p:cNvPr id="41" name="">
             <a:extLst xmlns:a="http://schemas.openxmlformats.org/drawingml/2006/main">
               <a:ext uri="{FF2B5EF4-FFF2-40B4-BE49-F238E27FC236}">
-                <a16:creationId xmlns:a16="http://schemas.microsoft.com/office/drawing/2014/main" id="{ED1AC3A0-6664-4A9D-A328-1776F115ED6A}"/>
+                <a16:creationId xmlns:a16="http://schemas.microsoft.com/office/drawing/2014/main" id="{E48CB23A-B5E8-495E-B0B1-BFB50ACB3744}"/>
               </a:ext>
             </a:extLst>
           </p:cNvPr>
@@ -14345,7 +14345,7 @@
           <p:cNvPr id="42" name="">
             <a:extLst xmlns:a="http://schemas.openxmlformats.org/drawingml/2006/main">
               <a:ext uri="{FF2B5EF4-FFF2-40B4-BE49-F238E27FC236}">
-                <a16:creationId xmlns:a16="http://schemas.microsoft.com/office/drawing/2014/main" id="{68067A88-B24D-496F-9E0E-11C85C40A033}"/>
+                <a16:creationId xmlns:a16="http://schemas.microsoft.com/office/drawing/2014/main" id="{5360679F-8185-4E7D-A015-4FBB1BD4AB81}"/>
               </a:ext>
             </a:extLst>
           </p:cNvPr>
@@ -14397,7 +14397,7 @@
           <p:cNvPr id="43" name="">
             <a:extLst xmlns:a="http://schemas.openxmlformats.org/drawingml/2006/main">
               <a:ext uri="{FF2B5EF4-FFF2-40B4-BE49-F238E27FC236}">
-                <a16:creationId xmlns:a16="http://schemas.microsoft.com/office/drawing/2014/main" id="{F5AE2A8B-B881-40C4-90D3-C5C8A9DB6146}"/>
+                <a16:creationId xmlns:a16="http://schemas.microsoft.com/office/drawing/2014/main" id="{E6CCC424-DE88-4A78-BE39-8B34711B4E93}"/>
               </a:ext>
             </a:extLst>
           </p:cNvPr>
@@ -14449,7 +14449,7 @@
           <p:cNvPr id="44" name="">
             <a:extLst xmlns:a="http://schemas.openxmlformats.org/drawingml/2006/main">
               <a:ext uri="{FF2B5EF4-FFF2-40B4-BE49-F238E27FC236}">
-                <a16:creationId xmlns:a16="http://schemas.microsoft.com/office/drawing/2014/main" id="{CD7C9034-17FB-4BE0-B86F-15E7DA5D93DA}"/>
+                <a16:creationId xmlns:a16="http://schemas.microsoft.com/office/drawing/2014/main" id="{5710A2F3-31DD-4838-A695-B7BF70529BFA}"/>
               </a:ext>
             </a:extLst>
           </p:cNvPr>
@@ -14480,7 +14480,7 @@
           <p:cNvPr id="45" name="">
             <a:extLst xmlns:a="http://schemas.openxmlformats.org/drawingml/2006/main">
               <a:ext uri="{FF2B5EF4-FFF2-40B4-BE49-F238E27FC236}">
-                <a16:creationId xmlns:a16="http://schemas.microsoft.com/office/drawing/2014/main" id="{3052EC7A-8F11-4408-92E0-9D51E36311DF}"/>
+                <a16:creationId xmlns:a16="http://schemas.microsoft.com/office/drawing/2014/main" id="{46D3813F-FA94-42C7-943A-466154236A98}"/>
               </a:ext>
             </a:extLst>
           </p:cNvPr>
@@ -14532,7 +14532,7 @@
           <p:cNvPr id="46" name="">
             <a:extLst xmlns:a="http://schemas.openxmlformats.org/drawingml/2006/main">
               <a:ext uri="{FF2B5EF4-FFF2-40B4-BE49-F238E27FC236}">
-                <a16:creationId xmlns:a16="http://schemas.microsoft.com/office/drawing/2014/main" id="{0290D492-FEB3-4897-88C0-648F863808DC}"/>
+                <a16:creationId xmlns:a16="http://schemas.microsoft.com/office/drawing/2014/main" id="{AFF3CBE8-EB23-49E2-A50E-B35137094866}"/>
               </a:ext>
             </a:extLst>
           </p:cNvPr>
@@ -14584,7 +14584,7 @@
           <p:cNvPr id="47" name="">
             <a:extLst xmlns:a="http://schemas.openxmlformats.org/drawingml/2006/main">
               <a:ext uri="{FF2B5EF4-FFF2-40B4-BE49-F238E27FC236}">
-                <a16:creationId xmlns:a16="http://schemas.microsoft.com/office/drawing/2014/main" id="{8CE933A8-34D2-4995-8ABE-9F8087619916}"/>
+                <a16:creationId xmlns:a16="http://schemas.microsoft.com/office/drawing/2014/main" id="{D85161FF-B75E-4AC4-91FC-E5ACE0F57C74}"/>
               </a:ext>
             </a:extLst>
           </p:cNvPr>
@@ -14636,7 +14636,7 @@
           <p:cNvPr id="48" name="">
             <a:extLst xmlns:a="http://schemas.openxmlformats.org/drawingml/2006/main">
               <a:ext uri="{FF2B5EF4-FFF2-40B4-BE49-F238E27FC236}">
-                <a16:creationId xmlns:a16="http://schemas.microsoft.com/office/drawing/2014/main" id="{0176E642-EB3E-4242-8D45-D4468AF0C5E4}"/>
+                <a16:creationId xmlns:a16="http://schemas.microsoft.com/office/drawing/2014/main" id="{9CE7C184-2D5C-444F-8FFE-41FD8C57A0AA}"/>
               </a:ext>
             </a:extLst>
           </p:cNvPr>
@@ -14688,7 +14688,7 @@
           <p:cNvPr id="49" name="">
             <a:extLst xmlns:a="http://schemas.openxmlformats.org/drawingml/2006/main">
               <a:ext uri="{FF2B5EF4-FFF2-40B4-BE49-F238E27FC236}">
-                <a16:creationId xmlns:a16="http://schemas.microsoft.com/office/drawing/2014/main" id="{35843602-CBEE-42ED-863C-8D7FA51331FD}"/>
+                <a16:creationId xmlns:a16="http://schemas.microsoft.com/office/drawing/2014/main" id="{38528D75-A7C6-4DBD-BCD7-E65A6F0B8494}"/>
               </a:ext>
             </a:extLst>
           </p:cNvPr>
@@ -14740,7 +14740,7 @@
           <p:cNvPr id="50" name="">
             <a:extLst xmlns:a="http://schemas.openxmlformats.org/drawingml/2006/main">
               <a:ext uri="{FF2B5EF4-FFF2-40B4-BE49-F238E27FC236}">
-                <a16:creationId xmlns:a16="http://schemas.microsoft.com/office/drawing/2014/main" id="{CBD2D972-3577-4DCF-8417-8D7FB9895ED7}"/>
+                <a16:creationId xmlns:a16="http://schemas.microsoft.com/office/drawing/2014/main" id="{8E55579B-C484-4767-9BFE-0C51E824EC4C}"/>
               </a:ext>
             </a:extLst>
           </p:cNvPr>
@@ -14771,7 +14771,7 @@
           <p:cNvPr id="51" name="">
             <a:extLst xmlns:a="http://schemas.openxmlformats.org/drawingml/2006/main">
               <a:ext uri="{FF2B5EF4-FFF2-40B4-BE49-F238E27FC236}">
-                <a16:creationId xmlns:a16="http://schemas.microsoft.com/office/drawing/2014/main" id="{FAAFCA9D-E9CD-4C2F-A673-E39486D5EECC}"/>
+                <a16:creationId xmlns:a16="http://schemas.microsoft.com/office/drawing/2014/main" id="{32EBF3EE-4963-41F0-9D44-47BF078F3E2F}"/>
               </a:ext>
             </a:extLst>
           </p:cNvPr>
@@ -14802,7 +14802,7 @@
           <p:cNvPr id="52" name="">
             <a:extLst xmlns:a="http://schemas.openxmlformats.org/drawingml/2006/main">
               <a:ext uri="{FF2B5EF4-FFF2-40B4-BE49-F238E27FC236}">
-                <a16:creationId xmlns:a16="http://schemas.microsoft.com/office/drawing/2014/main" id="{25E8ED7E-DAEF-4AC5-AB63-4981F0CA120D}"/>
+                <a16:creationId xmlns:a16="http://schemas.microsoft.com/office/drawing/2014/main" id="{61205AEA-31C7-4385-9F3D-FCD1C880E552}"/>
               </a:ext>
             </a:extLst>
           </p:cNvPr>
@@ -14854,7 +14854,7 @@
           <p:cNvPr id="53" name="">
             <a:extLst xmlns:a="http://schemas.openxmlformats.org/drawingml/2006/main">
               <a:ext uri="{FF2B5EF4-FFF2-40B4-BE49-F238E27FC236}">
-                <a16:creationId xmlns:a16="http://schemas.microsoft.com/office/drawing/2014/main" id="{5378A8B4-7C62-47AA-966D-1887BCDDE64B}"/>
+                <a16:creationId xmlns:a16="http://schemas.microsoft.com/office/drawing/2014/main" id="{D8613431-C897-4781-AEBC-28EF38912677}"/>
               </a:ext>
             </a:extLst>
           </p:cNvPr>
@@ -14906,7 +14906,7 @@
           <p:cNvPr id="54" name="">
             <a:extLst xmlns:a="http://schemas.openxmlformats.org/drawingml/2006/main">
               <a:ext uri="{FF2B5EF4-FFF2-40B4-BE49-F238E27FC236}">
-                <a16:creationId xmlns:a16="http://schemas.microsoft.com/office/drawing/2014/main" id="{43441050-B6EC-44A4-8D8D-543EB7125FEB}"/>
+                <a16:creationId xmlns:a16="http://schemas.microsoft.com/office/drawing/2014/main" id="{D25AF7D8-8881-4DFF-A284-DBE21C931658}"/>
               </a:ext>
             </a:extLst>
           </p:cNvPr>
@@ -14958,7 +14958,7 @@
           <p:cNvPr id="55" name="">
             <a:extLst xmlns:a="http://schemas.openxmlformats.org/drawingml/2006/main">
               <a:ext uri="{FF2B5EF4-FFF2-40B4-BE49-F238E27FC236}">
-                <a16:creationId xmlns:a16="http://schemas.microsoft.com/office/drawing/2014/main" id="{4749B6DE-A4D1-4F3B-A507-B6638E1F68C0}"/>
+                <a16:creationId xmlns:a16="http://schemas.microsoft.com/office/drawing/2014/main" id="{3C85F885-B807-471C-A808-8E9D08911248}"/>
               </a:ext>
             </a:extLst>
           </p:cNvPr>
@@ -15010,7 +15010,7 @@
           <p:cNvPr id="56" name="">
             <a:extLst xmlns:a="http://schemas.openxmlformats.org/drawingml/2006/main">
               <a:ext uri="{FF2B5EF4-FFF2-40B4-BE49-F238E27FC236}">
-                <a16:creationId xmlns:a16="http://schemas.microsoft.com/office/drawing/2014/main" id="{4F3D05F3-2540-459E-8D47-3A3BC65FFBBA}"/>
+                <a16:creationId xmlns:a16="http://schemas.microsoft.com/office/drawing/2014/main" id="{CA74FAB1-0E26-42DD-8ADA-B39A419E14A0}"/>
               </a:ext>
             </a:extLst>
           </p:cNvPr>
@@ -15062,7 +15062,7 @@
           <p:cNvPr id="57" name="">
             <a:extLst xmlns:a="http://schemas.openxmlformats.org/drawingml/2006/main">
               <a:ext uri="{FF2B5EF4-FFF2-40B4-BE49-F238E27FC236}">
-                <a16:creationId xmlns:a16="http://schemas.microsoft.com/office/drawing/2014/main" id="{B99D88F8-E22D-49F0-99A5-060E4F14E695}"/>
+                <a16:creationId xmlns:a16="http://schemas.microsoft.com/office/drawing/2014/main" id="{47E3C5EE-092E-4F9F-BD12-AE51126B1DA2}"/>
               </a:ext>
             </a:extLst>
           </p:cNvPr>
@@ -15093,7 +15093,7 @@
           <p:cNvPr id="58" name="">
             <a:extLst xmlns:a="http://schemas.openxmlformats.org/drawingml/2006/main">
               <a:ext uri="{FF2B5EF4-FFF2-40B4-BE49-F238E27FC236}">
-                <a16:creationId xmlns:a16="http://schemas.microsoft.com/office/drawing/2014/main" id="{3FDBB1C5-7B07-46C1-B017-E1A844116CA5}"/>
+                <a16:creationId xmlns:a16="http://schemas.microsoft.com/office/drawing/2014/main" id="{0B63CEE1-CBF4-4262-B578-245480309A39}"/>
               </a:ext>
             </a:extLst>
           </p:cNvPr>
@@ -15145,7 +15145,7 @@
           <p:cNvPr id="59" name="">
             <a:extLst xmlns:a="http://schemas.openxmlformats.org/drawingml/2006/main">
               <a:ext uri="{FF2B5EF4-FFF2-40B4-BE49-F238E27FC236}">
-                <a16:creationId xmlns:a16="http://schemas.microsoft.com/office/drawing/2014/main" id="{AEFB0CFF-079C-44EC-8EB0-B8FADADBB0E3}"/>
+                <a16:creationId xmlns:a16="http://schemas.microsoft.com/office/drawing/2014/main" id="{5320CE40-317E-4E01-9657-21D100D4E3BD}"/>
               </a:ext>
             </a:extLst>
           </p:cNvPr>
@@ -15197,7 +15197,7 @@
           <p:cNvPr id="60" name="">
             <a:extLst xmlns:a="http://schemas.openxmlformats.org/drawingml/2006/main">
               <a:ext uri="{FF2B5EF4-FFF2-40B4-BE49-F238E27FC236}">
-                <a16:creationId xmlns:a16="http://schemas.microsoft.com/office/drawing/2014/main" id="{7E68A870-9BB6-4A23-9B36-9BA859F5CE98}"/>
+                <a16:creationId xmlns:a16="http://schemas.microsoft.com/office/drawing/2014/main" id="{0F0ADDAC-1569-460F-AF89-A1B6BD01281A}"/>
               </a:ext>
             </a:extLst>
           </p:cNvPr>
@@ -15249,7 +15249,7 @@
           <p:cNvPr id="61" name="">
             <a:extLst xmlns:a="http://schemas.openxmlformats.org/drawingml/2006/main">
               <a:ext uri="{FF2B5EF4-FFF2-40B4-BE49-F238E27FC236}">
-                <a16:creationId xmlns:a16="http://schemas.microsoft.com/office/drawing/2014/main" id="{8E86E690-F87C-4CA3-BED5-DA1AFB7F2507}"/>
+                <a16:creationId xmlns:a16="http://schemas.microsoft.com/office/drawing/2014/main" id="{64EF1ABA-344D-438E-9A73-0487445A13F0}"/>
               </a:ext>
             </a:extLst>
           </p:cNvPr>
@@ -15301,7 +15301,7 @@
           <p:cNvPr id="62" name="">
             <a:extLst xmlns:a="http://schemas.openxmlformats.org/drawingml/2006/main">
               <a:ext uri="{FF2B5EF4-FFF2-40B4-BE49-F238E27FC236}">
-                <a16:creationId xmlns:a16="http://schemas.microsoft.com/office/drawing/2014/main" id="{68D44F83-4B67-4CD1-A98B-AE1B087419CC}"/>
+                <a16:creationId xmlns:a16="http://schemas.microsoft.com/office/drawing/2014/main" id="{8310720A-4C44-4471-AF40-6A6ACBFD7F15}"/>
               </a:ext>
             </a:extLst>
           </p:cNvPr>
@@ -15353,7 +15353,7 @@
           <p:cNvPr id="63" name="">
             <a:extLst xmlns:a="http://schemas.openxmlformats.org/drawingml/2006/main">
               <a:ext uri="{FF2B5EF4-FFF2-40B4-BE49-F238E27FC236}">
-                <a16:creationId xmlns:a16="http://schemas.microsoft.com/office/drawing/2014/main" id="{AC995789-575B-4979-9464-FD60DA918661}"/>
+                <a16:creationId xmlns:a16="http://schemas.microsoft.com/office/drawing/2014/main" id="{5960E507-A889-416B-9C36-D521902AC53D}"/>
               </a:ext>
             </a:extLst>
           </p:cNvPr>
@@ -15384,7 +15384,7 @@
           <p:cNvPr id="64" name="">
             <a:extLst xmlns:a="http://schemas.openxmlformats.org/drawingml/2006/main">
               <a:ext uri="{FF2B5EF4-FFF2-40B4-BE49-F238E27FC236}">
-                <a16:creationId xmlns:a16="http://schemas.microsoft.com/office/drawing/2014/main" id="{83519D7D-3768-48A6-8DA8-9BC783A921B3}"/>
+                <a16:creationId xmlns:a16="http://schemas.microsoft.com/office/drawing/2014/main" id="{FE65B58A-77D9-4A8D-844D-4114A1393288}"/>
               </a:ext>
             </a:extLst>
           </p:cNvPr>
@@ -15415,7 +15415,7 @@
           <p:cNvPr id="65" name="">
             <a:extLst xmlns:a="http://schemas.openxmlformats.org/drawingml/2006/main">
               <a:ext uri="{FF2B5EF4-FFF2-40B4-BE49-F238E27FC236}">
-                <a16:creationId xmlns:a16="http://schemas.microsoft.com/office/drawing/2014/main" id="{F0B30490-4FB4-4F18-8939-8847DC9831D1}"/>
+                <a16:creationId xmlns:a16="http://schemas.microsoft.com/office/drawing/2014/main" id="{9142DEB8-3020-4103-BAB8-1A0F8EC6178E}"/>
               </a:ext>
             </a:extLst>
           </p:cNvPr>
@@ -15467,7 +15467,7 @@
           <p:cNvPr id="66" name="">
             <a:extLst xmlns:a="http://schemas.openxmlformats.org/drawingml/2006/main">
               <a:ext uri="{FF2B5EF4-FFF2-40B4-BE49-F238E27FC236}">
-                <a16:creationId xmlns:a16="http://schemas.microsoft.com/office/drawing/2014/main" id="{9A4432B8-26C3-4689-9B8B-AD934174F5EA}"/>
+                <a16:creationId xmlns:a16="http://schemas.microsoft.com/office/drawing/2014/main" id="{B5BEC48C-1EDB-48A2-929A-FFE54A57829B}"/>
               </a:ext>
             </a:extLst>
           </p:cNvPr>
@@ -15519,7 +15519,7 @@
           <p:cNvPr id="67" name="">
             <a:extLst xmlns:a="http://schemas.openxmlformats.org/drawingml/2006/main">
               <a:ext uri="{FF2B5EF4-FFF2-40B4-BE49-F238E27FC236}">
-                <a16:creationId xmlns:a16="http://schemas.microsoft.com/office/drawing/2014/main" id="{4CE3C324-E751-4D4F-96D0-A9D43ACDA195}"/>
+                <a16:creationId xmlns:a16="http://schemas.microsoft.com/office/drawing/2014/main" id="{C3D398B6-A4E5-4BF5-ACE5-71F4E8185055}"/>
               </a:ext>
             </a:extLst>
           </p:cNvPr>
@@ -15571,7 +15571,7 @@
           <p:cNvPr id="68" name="">
             <a:extLst xmlns:a="http://schemas.openxmlformats.org/drawingml/2006/main">
               <a:ext uri="{FF2B5EF4-FFF2-40B4-BE49-F238E27FC236}">
-                <a16:creationId xmlns:a16="http://schemas.microsoft.com/office/drawing/2014/main" id="{823CC4E5-D5EC-401B-B957-2A5377A4D084}"/>
+                <a16:creationId xmlns:a16="http://schemas.microsoft.com/office/drawing/2014/main" id="{8CD86D6F-DCE7-4623-951C-B445D1C1AFB5}"/>
               </a:ext>
             </a:extLst>
           </p:cNvPr>
@@ -15623,7 +15623,7 @@
           <p:cNvPr id="69" name="">
             <a:extLst xmlns:a="http://schemas.openxmlformats.org/drawingml/2006/main">
               <a:ext uri="{FF2B5EF4-FFF2-40B4-BE49-F238E27FC236}">
-                <a16:creationId xmlns:a16="http://schemas.microsoft.com/office/drawing/2014/main" id="{332BC2F4-9DF8-4232-B5F8-DF4ADB1BFBCB}"/>
+                <a16:creationId xmlns:a16="http://schemas.microsoft.com/office/drawing/2014/main" id="{62164D5F-933A-416D-846E-7BB9B78F4892}"/>
               </a:ext>
             </a:extLst>
           </p:cNvPr>
@@ -15675,7 +15675,7 @@
           <p:cNvPr id="70" name="">
             <a:extLst xmlns:a="http://schemas.openxmlformats.org/drawingml/2006/main">
               <a:ext uri="{FF2B5EF4-FFF2-40B4-BE49-F238E27FC236}">
-                <a16:creationId xmlns:a16="http://schemas.microsoft.com/office/drawing/2014/main" id="{D585E244-A7CB-4AAC-96B3-3D35E84FB43A}"/>
+                <a16:creationId xmlns:a16="http://schemas.microsoft.com/office/drawing/2014/main" id="{17D7E437-FA06-46E7-B692-4BA1A8D69E46}"/>
               </a:ext>
             </a:extLst>
           </p:cNvPr>
@@ -15706,7 +15706,7 @@
           <p:cNvPr id="71" name="">
             <a:extLst xmlns:a="http://schemas.openxmlformats.org/drawingml/2006/main">
               <a:ext uri="{FF2B5EF4-FFF2-40B4-BE49-F238E27FC236}">
-                <a16:creationId xmlns:a16="http://schemas.microsoft.com/office/drawing/2014/main" id="{0648D30F-26EA-4EF7-B099-F59BF5FB3388}"/>
+                <a16:creationId xmlns:a16="http://schemas.microsoft.com/office/drawing/2014/main" id="{43A97190-FB65-4233-9238-A0722A02676A}"/>
               </a:ext>
             </a:extLst>
           </p:cNvPr>
@@ -15758,7 +15758,7 @@
           <p:cNvPr id="72" name="">
             <a:extLst xmlns:a="http://schemas.openxmlformats.org/drawingml/2006/main">
               <a:ext uri="{FF2B5EF4-FFF2-40B4-BE49-F238E27FC236}">
-                <a16:creationId xmlns:a16="http://schemas.microsoft.com/office/drawing/2014/main" id="{97037C55-4B49-4B73-A812-1E2313E3C9FB}"/>
+                <a16:creationId xmlns:a16="http://schemas.microsoft.com/office/drawing/2014/main" id="{DD59590C-6BB5-4CBB-B057-BE30C6FE1F9D}"/>
               </a:ext>
             </a:extLst>
           </p:cNvPr>
@@ -15810,7 +15810,7 @@
           <p:cNvPr id="73" name="">
             <a:extLst xmlns:a="http://schemas.openxmlformats.org/drawingml/2006/main">
               <a:ext uri="{FF2B5EF4-FFF2-40B4-BE49-F238E27FC236}">
-                <a16:creationId xmlns:a16="http://schemas.microsoft.com/office/drawing/2014/main" id="{453DFE2C-E2C8-4076-9BEA-75E48E5A087C}"/>
+                <a16:creationId xmlns:a16="http://schemas.microsoft.com/office/drawing/2014/main" id="{1281264F-1986-4349-8392-AC41131A71B7}"/>
               </a:ext>
             </a:extLst>
           </p:cNvPr>
@@ -15862,7 +15862,7 @@
           <p:cNvPr id="74" name="">
             <a:extLst xmlns:a="http://schemas.openxmlformats.org/drawingml/2006/main">
               <a:ext uri="{FF2B5EF4-FFF2-40B4-BE49-F238E27FC236}">
-                <a16:creationId xmlns:a16="http://schemas.microsoft.com/office/drawing/2014/main" id="{47BC32B8-5E76-4BE5-AA3A-C73EDED55C78}"/>
+                <a16:creationId xmlns:a16="http://schemas.microsoft.com/office/drawing/2014/main" id="{71AF88F0-82A0-4D93-BE1E-ABE64CE0173B}"/>
               </a:ext>
             </a:extLst>
           </p:cNvPr>
@@ -15914,7 +15914,7 @@
           <p:cNvPr id="75" name="">
             <a:extLst xmlns:a="http://schemas.openxmlformats.org/drawingml/2006/main">
               <a:ext uri="{FF2B5EF4-FFF2-40B4-BE49-F238E27FC236}">
-                <a16:creationId xmlns:a16="http://schemas.microsoft.com/office/drawing/2014/main" id="{FC213967-0790-45DF-BF3B-ED286590598E}"/>
+                <a16:creationId xmlns:a16="http://schemas.microsoft.com/office/drawing/2014/main" id="{5B463C72-15AC-4EDA-BD63-7A07B921C13B}"/>
               </a:ext>
             </a:extLst>
           </p:cNvPr>
@@ -15966,7 +15966,7 @@
           <p:cNvPr id="76" name="">
             <a:extLst xmlns:a="http://schemas.openxmlformats.org/drawingml/2006/main">
               <a:ext uri="{FF2B5EF4-FFF2-40B4-BE49-F238E27FC236}">
-                <a16:creationId xmlns:a16="http://schemas.microsoft.com/office/drawing/2014/main" id="{9C24ED98-C3CE-4EA5-AC57-DE34D1E9C379}"/>
+                <a16:creationId xmlns:a16="http://schemas.microsoft.com/office/drawing/2014/main" id="{4FF8BBA7-6418-4418-A494-D9E2F91DF58F}"/>
               </a:ext>
             </a:extLst>
           </p:cNvPr>
@@ -15997,7 +15997,7 @@
           <p:cNvPr id="77" name="">
             <a:extLst xmlns:a="http://schemas.openxmlformats.org/drawingml/2006/main">
               <a:ext uri="{FF2B5EF4-FFF2-40B4-BE49-F238E27FC236}">
-                <a16:creationId xmlns:a16="http://schemas.microsoft.com/office/drawing/2014/main" id="{57EC266F-7DF9-4A10-9B78-3643A9A16487}"/>
+                <a16:creationId xmlns:a16="http://schemas.microsoft.com/office/drawing/2014/main" id="{093421A2-9A4D-43FA-ACF4-3F4FC868B6B2}"/>
               </a:ext>
             </a:extLst>
           </p:cNvPr>
@@ -16028,7 +16028,7 @@
           <p:cNvPr id="78" name="">
             <a:extLst xmlns:a="http://schemas.openxmlformats.org/drawingml/2006/main">
               <a:ext uri="{FF2B5EF4-FFF2-40B4-BE49-F238E27FC236}">
-                <a16:creationId xmlns:a16="http://schemas.microsoft.com/office/drawing/2014/main" id="{108F063F-11C9-4ACE-8258-A9EFB9863B2D}"/>
+                <a16:creationId xmlns:a16="http://schemas.microsoft.com/office/drawing/2014/main" id="{3829F841-31E2-4C43-B628-F52C125FE89E}"/>
               </a:ext>
             </a:extLst>
           </p:cNvPr>
@@ -16080,7 +16080,7 @@
           <p:cNvPr id="79" name="">
             <a:extLst xmlns:a="http://schemas.openxmlformats.org/drawingml/2006/main">
               <a:ext uri="{FF2B5EF4-FFF2-40B4-BE49-F238E27FC236}">
-                <a16:creationId xmlns:a16="http://schemas.microsoft.com/office/drawing/2014/main" id="{E9FF92A4-B1EF-498F-B10F-F3E662C8D85F}"/>
+                <a16:creationId xmlns:a16="http://schemas.microsoft.com/office/drawing/2014/main" id="{DD56A507-4A08-4212-85DD-91458829B294}"/>
               </a:ext>
             </a:extLst>
           </p:cNvPr>
@@ -16132,7 +16132,7 @@
           <p:cNvPr id="80" name="">
             <a:extLst xmlns:a="http://schemas.openxmlformats.org/drawingml/2006/main">
               <a:ext uri="{FF2B5EF4-FFF2-40B4-BE49-F238E27FC236}">
-                <a16:creationId xmlns:a16="http://schemas.microsoft.com/office/drawing/2014/main" id="{A228199A-78ED-423C-A720-11CC81E59A7A}"/>
+                <a16:creationId xmlns:a16="http://schemas.microsoft.com/office/drawing/2014/main" id="{927C1107-792E-49C6-9F95-C8D8B4331103}"/>
               </a:ext>
             </a:extLst>
           </p:cNvPr>
@@ -16184,7 +16184,7 @@
           <p:cNvPr id="81" name="">
             <a:extLst xmlns:a="http://schemas.openxmlformats.org/drawingml/2006/main">
               <a:ext uri="{FF2B5EF4-FFF2-40B4-BE49-F238E27FC236}">
-                <a16:creationId xmlns:a16="http://schemas.microsoft.com/office/drawing/2014/main" id="{8875D684-1FC2-47C3-A876-CCAF693645FC}"/>
+                <a16:creationId xmlns:a16="http://schemas.microsoft.com/office/drawing/2014/main" id="{F31EC324-FC7D-4838-A166-03EDA9F0F98B}"/>
               </a:ext>
             </a:extLst>
           </p:cNvPr>
@@ -16236,7 +16236,7 @@
           <p:cNvPr id="82" name="">
             <a:extLst xmlns:a="http://schemas.openxmlformats.org/drawingml/2006/main">
               <a:ext uri="{FF2B5EF4-FFF2-40B4-BE49-F238E27FC236}">
-                <a16:creationId xmlns:a16="http://schemas.microsoft.com/office/drawing/2014/main" id="{A0D231E2-0729-4D05-AC5A-392B78336F35}"/>
+                <a16:creationId xmlns:a16="http://schemas.microsoft.com/office/drawing/2014/main" id="{4D818FC1-5838-47FF-9F44-692D1B8CE3DD}"/>
               </a:ext>
             </a:extLst>
           </p:cNvPr>
@@ -16288,7 +16288,7 @@
           <p:cNvPr id="83" name="">
             <a:extLst xmlns:a="http://schemas.openxmlformats.org/drawingml/2006/main">
               <a:ext uri="{FF2B5EF4-FFF2-40B4-BE49-F238E27FC236}">
-                <a16:creationId xmlns:a16="http://schemas.microsoft.com/office/drawing/2014/main" id="{76123CC5-B583-4949-8B34-AE84CE775308}"/>
+                <a16:creationId xmlns:a16="http://schemas.microsoft.com/office/drawing/2014/main" id="{269E2F31-C155-4475-967E-38C44C0AC63B}"/>
               </a:ext>
             </a:extLst>
           </p:cNvPr>
@@ -16319,7 +16319,7 @@
           <p:cNvPr id="84" name="">
             <a:extLst xmlns:a="http://schemas.openxmlformats.org/drawingml/2006/main">
               <a:ext uri="{FF2B5EF4-FFF2-40B4-BE49-F238E27FC236}">
-                <a16:creationId xmlns:a16="http://schemas.microsoft.com/office/drawing/2014/main" id="{D0F70BE0-5459-42EF-BE12-420F8D4FEFF6}"/>
+                <a16:creationId xmlns:a16="http://schemas.microsoft.com/office/drawing/2014/main" id="{8A7696F6-B3B0-4679-B4DC-82C459817238}"/>
               </a:ext>
             </a:extLst>
           </p:cNvPr>
@@ -16371,7 +16371,7 @@
           <p:cNvPr id="85" name="">
             <a:extLst xmlns:a="http://schemas.openxmlformats.org/drawingml/2006/main">
               <a:ext uri="{FF2B5EF4-FFF2-40B4-BE49-F238E27FC236}">
-                <a16:creationId xmlns:a16="http://schemas.microsoft.com/office/drawing/2014/main" id="{C5C3A6CD-BE45-4E43-8FEC-EAC4FED2FC1C}"/>
+                <a16:creationId xmlns:a16="http://schemas.microsoft.com/office/drawing/2014/main" id="{7FA4B3CC-4CF3-4EC3-89B8-FABF93AC92FF}"/>
               </a:ext>
             </a:extLst>
           </p:cNvPr>
@@ -16423,7 +16423,7 @@
           <p:cNvPr id="86" name="">
             <a:extLst xmlns:a="http://schemas.openxmlformats.org/drawingml/2006/main">
               <a:ext uri="{FF2B5EF4-FFF2-40B4-BE49-F238E27FC236}">
-                <a16:creationId xmlns:a16="http://schemas.microsoft.com/office/drawing/2014/main" id="{8689080E-D65C-4DCD-A406-CDBC067E690E}"/>
+                <a16:creationId xmlns:a16="http://schemas.microsoft.com/office/drawing/2014/main" id="{8D00FDE2-C72D-4783-AD79-AFE624B61159}"/>
               </a:ext>
             </a:extLst>
           </p:cNvPr>
@@ -16475,7 +16475,7 @@
           <p:cNvPr id="87" name="">
             <a:extLst xmlns:a="http://schemas.openxmlformats.org/drawingml/2006/main">
               <a:ext uri="{FF2B5EF4-FFF2-40B4-BE49-F238E27FC236}">
-                <a16:creationId xmlns:a16="http://schemas.microsoft.com/office/drawing/2014/main" id="{7446E599-7100-4EE0-A29E-76511F8E10F5}"/>
+                <a16:creationId xmlns:a16="http://schemas.microsoft.com/office/drawing/2014/main" id="{5C81ED2B-97B8-499F-B4A5-0176CA01CE57}"/>
               </a:ext>
             </a:extLst>
           </p:cNvPr>
@@ -16527,7 +16527,7 @@
           <p:cNvPr id="88" name="">
             <a:extLst xmlns:a="http://schemas.openxmlformats.org/drawingml/2006/main">
               <a:ext uri="{FF2B5EF4-FFF2-40B4-BE49-F238E27FC236}">
-                <a16:creationId xmlns:a16="http://schemas.microsoft.com/office/drawing/2014/main" id="{AD45B45B-53BD-4C41-8A97-07CA0E13EB6C}"/>
+                <a16:creationId xmlns:a16="http://schemas.microsoft.com/office/drawing/2014/main" id="{42CF996B-3054-4F5A-B6C9-A2CF8A920B04}"/>
               </a:ext>
             </a:extLst>
           </p:cNvPr>
@@ -16579,7 +16579,7 @@
           <p:cNvPr id="89" name="">
             <a:extLst xmlns:a="http://schemas.openxmlformats.org/drawingml/2006/main">
               <a:ext uri="{FF2B5EF4-FFF2-40B4-BE49-F238E27FC236}">
-                <a16:creationId xmlns:a16="http://schemas.microsoft.com/office/drawing/2014/main" id="{0DE4CFD0-2933-4D5A-8A3D-02ECB11164AD}"/>
+                <a16:creationId xmlns:a16="http://schemas.microsoft.com/office/drawing/2014/main" id="{45DBC011-A639-4F05-BEA7-0D9ECFECDEB8}"/>
               </a:ext>
             </a:extLst>
           </p:cNvPr>
@@ -16610,7 +16610,7 @@
           <p:cNvPr id="90" name="">
             <a:extLst xmlns:a="http://schemas.openxmlformats.org/drawingml/2006/main">
               <a:ext uri="{FF2B5EF4-FFF2-40B4-BE49-F238E27FC236}">
-                <a16:creationId xmlns:a16="http://schemas.microsoft.com/office/drawing/2014/main" id="{49DA831A-435C-4364-A976-C33A0379DEB3}"/>
+                <a16:creationId xmlns:a16="http://schemas.microsoft.com/office/drawing/2014/main" id="{C9C66E7D-644D-4DF6-844A-4F8F4AE3D398}"/>
               </a:ext>
             </a:extLst>
           </p:cNvPr>
@@ -16641,7 +16641,7 @@
           <p:cNvPr id="91" name="">
             <a:extLst xmlns:a="http://schemas.openxmlformats.org/drawingml/2006/main">
               <a:ext uri="{FF2B5EF4-FFF2-40B4-BE49-F238E27FC236}">
-                <a16:creationId xmlns:a16="http://schemas.microsoft.com/office/drawing/2014/main" id="{18850086-6A9A-44E0-AC2E-BF1532AC9048}"/>
+                <a16:creationId xmlns:a16="http://schemas.microsoft.com/office/drawing/2014/main" id="{3C6DB7C0-5DF8-480B-8255-19D5A2264B7C}"/>
               </a:ext>
             </a:extLst>
           </p:cNvPr>
@@ -16693,7 +16693,7 @@
           <p:cNvPr id="92" name="">
             <a:extLst xmlns:a="http://schemas.openxmlformats.org/drawingml/2006/main">
               <a:ext uri="{FF2B5EF4-FFF2-40B4-BE49-F238E27FC236}">
-                <a16:creationId xmlns:a16="http://schemas.microsoft.com/office/drawing/2014/main" id="{DF05BDE0-7AF7-4382-A6C9-31C54478A253}"/>
+                <a16:creationId xmlns:a16="http://schemas.microsoft.com/office/drawing/2014/main" id="{EE52EEB1-BDB6-47F1-B6E4-70E7E8F3892B}"/>
               </a:ext>
             </a:extLst>
           </p:cNvPr>
@@ -16745,7 +16745,7 @@
           <p:cNvPr id="93" name="">
             <a:extLst xmlns:a="http://schemas.openxmlformats.org/drawingml/2006/main">
               <a:ext uri="{FF2B5EF4-FFF2-40B4-BE49-F238E27FC236}">
-                <a16:creationId xmlns:a16="http://schemas.microsoft.com/office/drawing/2014/main" id="{3DFE47DD-23F9-4E6E-95E9-EAB1AA9D217D}"/>
+                <a16:creationId xmlns:a16="http://schemas.microsoft.com/office/drawing/2014/main" id="{C9A303CB-6164-4D4C-9B8A-F0051E3FD98C}"/>
               </a:ext>
             </a:extLst>
           </p:cNvPr>
@@ -16797,7 +16797,7 @@
           <p:cNvPr id="94" name="">
             <a:extLst xmlns:a="http://schemas.openxmlformats.org/drawingml/2006/main">
               <a:ext uri="{FF2B5EF4-FFF2-40B4-BE49-F238E27FC236}">
-                <a16:creationId xmlns:a16="http://schemas.microsoft.com/office/drawing/2014/main" id="{A76534D8-F515-409A-ADD2-615404DACE82}"/>
+                <a16:creationId xmlns:a16="http://schemas.microsoft.com/office/drawing/2014/main" id="{1786A17E-51A6-4E74-8488-45521DFE85B0}"/>
               </a:ext>
             </a:extLst>
           </p:cNvPr>
@@ -16849,7 +16849,7 @@
           <p:cNvPr id="95" name="">
             <a:extLst xmlns:a="http://schemas.openxmlformats.org/drawingml/2006/main">
               <a:ext uri="{FF2B5EF4-FFF2-40B4-BE49-F238E27FC236}">
-                <a16:creationId xmlns:a16="http://schemas.microsoft.com/office/drawing/2014/main" id="{E4E243C3-1457-421F-A6B6-B006BCC1D836}"/>
+                <a16:creationId xmlns:a16="http://schemas.microsoft.com/office/drawing/2014/main" id="{E0A28C3F-C11D-456B-A598-CD947EEF2A60}"/>
               </a:ext>
             </a:extLst>
           </p:cNvPr>
@@ -16901,7 +16901,7 @@
           <p:cNvPr id="96" name="">
             <a:extLst xmlns:a="http://schemas.openxmlformats.org/drawingml/2006/main">
               <a:ext uri="{FF2B5EF4-FFF2-40B4-BE49-F238E27FC236}">
-                <a16:creationId xmlns:a16="http://schemas.microsoft.com/office/drawing/2014/main" id="{11D84F42-AEE2-46FA-9531-98BBEC1E8027}"/>
+                <a16:creationId xmlns:a16="http://schemas.microsoft.com/office/drawing/2014/main" id="{216659C6-3178-40D4-94B7-61287A0BA86E}"/>
               </a:ext>
             </a:extLst>
           </p:cNvPr>
@@ -16932,7 +16932,7 @@
           <p:cNvPr id="97" name="">
             <a:extLst xmlns:a="http://schemas.openxmlformats.org/drawingml/2006/main">
               <a:ext uri="{FF2B5EF4-FFF2-40B4-BE49-F238E27FC236}">
-                <a16:creationId xmlns:a16="http://schemas.microsoft.com/office/drawing/2014/main" id="{DA29256D-24FF-420E-A600-24AD2D0144DE}"/>
+                <a16:creationId xmlns:a16="http://schemas.microsoft.com/office/drawing/2014/main" id="{6B256B65-08E9-4F0D-ADE3-ECE91254C1F8}"/>
               </a:ext>
             </a:extLst>
           </p:cNvPr>
@@ -16984,7 +16984,7 @@
           <p:cNvPr id="98" name="">
             <a:extLst xmlns:a="http://schemas.openxmlformats.org/drawingml/2006/main">
               <a:ext uri="{FF2B5EF4-FFF2-40B4-BE49-F238E27FC236}">
-                <a16:creationId xmlns:a16="http://schemas.microsoft.com/office/drawing/2014/main" id="{EBB28AF9-6FE4-4300-A8FB-709819A0BF24}"/>
+                <a16:creationId xmlns:a16="http://schemas.microsoft.com/office/drawing/2014/main" id="{3A44AB93-B4F3-49E0-ACD7-E12276CDAF75}"/>
               </a:ext>
             </a:extLst>
           </p:cNvPr>
@@ -17036,7 +17036,7 @@
           <p:cNvPr id="99" name="">
             <a:extLst xmlns:a="http://schemas.openxmlformats.org/drawingml/2006/main">
               <a:ext uri="{FF2B5EF4-FFF2-40B4-BE49-F238E27FC236}">
-                <a16:creationId xmlns:a16="http://schemas.microsoft.com/office/drawing/2014/main" id="{446AFDE4-F336-4D49-9D26-7FE208DAC70D}"/>
+                <a16:creationId xmlns:a16="http://schemas.microsoft.com/office/drawing/2014/main" id="{5CA153D6-2A50-48CC-AD70-FC6BAB4C3BDE}"/>
               </a:ext>
             </a:extLst>
           </p:cNvPr>
@@ -17088,7 +17088,7 @@
           <p:cNvPr id="100" name="">
             <a:extLst xmlns:a="http://schemas.openxmlformats.org/drawingml/2006/main">
               <a:ext uri="{FF2B5EF4-FFF2-40B4-BE49-F238E27FC236}">
-                <a16:creationId xmlns:a16="http://schemas.microsoft.com/office/drawing/2014/main" id="{7E1F22E4-7E35-47CC-8742-92575BA361F6}"/>
+                <a16:creationId xmlns:a16="http://schemas.microsoft.com/office/drawing/2014/main" id="{25065297-6659-4D95-A0A4-48394FAB767D}"/>
               </a:ext>
             </a:extLst>
           </p:cNvPr>
@@ -17140,7 +17140,7 @@
           <p:cNvPr id="101" name="">
             <a:extLst xmlns:a="http://schemas.openxmlformats.org/drawingml/2006/main">
               <a:ext uri="{FF2B5EF4-FFF2-40B4-BE49-F238E27FC236}">
-                <a16:creationId xmlns:a16="http://schemas.microsoft.com/office/drawing/2014/main" id="{FF879D2E-A780-4241-9CF5-E93FCD0C3EB7}"/>
+                <a16:creationId xmlns:a16="http://schemas.microsoft.com/office/drawing/2014/main" id="{264F9B06-7AC1-43BD-8B05-86461D9DC146}"/>
               </a:ext>
             </a:extLst>
           </p:cNvPr>
@@ -17190,7 +17190,7 @@
     </p:spTree>
     <p:extLst>
       <p:ext uri="{BB962C8B-B14F-4D97-AF65-F5344CB8AC3E}">
-        <p14:creationId xmlns:p14="http://schemas.microsoft.com/office/powerpoint/2010/main" val="2046279908"/>
+        <p14:creationId xmlns:p14="http://schemas.microsoft.com/office/powerpoint/2010/main" val="640244"/>
       </p:ext>
     </p:extLst>
   </p:cSld>
@@ -17221,7 +17221,7 @@
           <p:cNvPr id="96" name="">
             <a:extLst xmlns:a="http://schemas.openxmlformats.org/drawingml/2006/main">
               <a:ext uri="{FF2B5EF4-FFF2-40B4-BE49-F238E27FC236}">
-                <a16:creationId xmlns:a16="http://schemas.microsoft.com/office/drawing/2014/main" id="{42BC6229-5E50-4EAE-AEE1-F2EA859F8BE9}"/>
+                <a16:creationId xmlns:a16="http://schemas.microsoft.com/office/drawing/2014/main" id="{E2A83703-3B1B-418D-B02D-09EA4FBF588C}"/>
               </a:ext>
             </a:extLst>
           </p:cNvPr>
@@ -17254,7 +17254,7 @@
           <p:cNvPr id="2" name="">
             <a:extLst xmlns:a="http://schemas.openxmlformats.org/drawingml/2006/main">
               <a:ext uri="{FF2B5EF4-FFF2-40B4-BE49-F238E27FC236}">
-                <a16:creationId xmlns:a16="http://schemas.microsoft.com/office/drawing/2014/main" id="{0B057408-3396-4BA7-AADF-09C5387B56BB}"/>
+                <a16:creationId xmlns:a16="http://schemas.microsoft.com/office/drawing/2014/main" id="{F7892ECD-2C8E-4FB8-A2F1-2CCACB3F2F59}"/>
               </a:ext>
             </a:extLst>
           </p:cNvPr>
@@ -17285,7 +17285,7 @@
           <p:cNvPr id="3" name="">
             <a:extLst xmlns:a="http://schemas.openxmlformats.org/drawingml/2006/main">
               <a:ext uri="{FF2B5EF4-FFF2-40B4-BE49-F238E27FC236}">
-                <a16:creationId xmlns:a16="http://schemas.microsoft.com/office/drawing/2014/main" id="{985F9F13-3DE5-4856-B3AF-95F0F374B4EE}"/>
+                <a16:creationId xmlns:a16="http://schemas.microsoft.com/office/drawing/2014/main" id="{2F80B3EC-D930-4F4E-80CE-AD9F6659EAA1}"/>
               </a:ext>
             </a:extLst>
           </p:cNvPr>
@@ -17337,7 +17337,7 @@
           <p:cNvPr id="4" name="">
             <a:extLst xmlns:a="http://schemas.openxmlformats.org/drawingml/2006/main">
               <a:ext uri="{FF2B5EF4-FFF2-40B4-BE49-F238E27FC236}">
-                <a16:creationId xmlns:a16="http://schemas.microsoft.com/office/drawing/2014/main" id="{57DA2B1F-45A6-4721-8501-647548E16CCF}"/>
+                <a16:creationId xmlns:a16="http://schemas.microsoft.com/office/drawing/2014/main" id="{82E80A62-2854-4252-BFE0-5657C9A8D93B}"/>
               </a:ext>
             </a:extLst>
           </p:cNvPr>
@@ -17389,7 +17389,7 @@
           <p:cNvPr id="5" name="">
             <a:extLst xmlns:a="http://schemas.openxmlformats.org/drawingml/2006/main">
               <a:ext uri="{FF2B5EF4-FFF2-40B4-BE49-F238E27FC236}">
-                <a16:creationId xmlns:a16="http://schemas.microsoft.com/office/drawing/2014/main" id="{BC0D0F82-08E7-4FFA-961B-E66D7895B74C}"/>
+                <a16:creationId xmlns:a16="http://schemas.microsoft.com/office/drawing/2014/main" id="{881D8361-7B21-4714-94AD-BDDB6EB347EE}"/>
               </a:ext>
             </a:extLst>
           </p:cNvPr>
@@ -17424,7 +17424,7 @@
           <p:nvPr/>
         </p:nvPicPr>
         <p:blipFill>
-          <a:blip xmlns:r="http://schemas.openxmlformats.org/officeDocument/2006/relationships" xmlns:a="http://schemas.openxmlformats.org/drawingml/2006/main" r:embed="R4ff039509f0746fb"/>
+          <a:blip xmlns:r="http://schemas.openxmlformats.org/officeDocument/2006/relationships" xmlns:a="http://schemas.openxmlformats.org/drawingml/2006/main" r:embed="R81179e45ca494e3c"/>
           <a:stretch xmlns:a="http://schemas.openxmlformats.org/drawingml/2006/main"/>
         </p:blipFill>
         <p:spPr>
@@ -17442,7 +17442,7 @@
           <p:cNvPr id="7" name="">
             <a:extLst xmlns:a="http://schemas.openxmlformats.org/drawingml/2006/main">
               <a:ext uri="{FF2B5EF4-FFF2-40B4-BE49-F238E27FC236}">
-                <a16:creationId xmlns:a16="http://schemas.microsoft.com/office/drawing/2014/main" id="{646A0643-27B5-43E5-AA56-610D23B01A9E}"/>
+                <a16:creationId xmlns:a16="http://schemas.microsoft.com/office/drawing/2014/main" id="{CA2EA32E-ACC1-40C7-B63B-2104D8C6170A}"/>
               </a:ext>
             </a:extLst>
           </p:cNvPr>
@@ -17494,7 +17494,7 @@
           <p:cNvPr id="8" name="">
             <a:extLst xmlns:a="http://schemas.openxmlformats.org/drawingml/2006/main">
               <a:ext uri="{FF2B5EF4-FFF2-40B4-BE49-F238E27FC236}">
-                <a16:creationId xmlns:a16="http://schemas.microsoft.com/office/drawing/2014/main" id="{E4F3D1B6-0D94-4CCB-A669-86A3B4DC958F}"/>
+                <a16:creationId xmlns:a16="http://schemas.microsoft.com/office/drawing/2014/main" id="{0E7B76F7-C749-4B52-92EB-E7EF44363E76}"/>
               </a:ext>
             </a:extLst>
           </p:cNvPr>
@@ -17546,7 +17546,7 @@
           <p:cNvPr id="9" name="">
             <a:extLst xmlns:a="http://schemas.openxmlformats.org/drawingml/2006/main">
               <a:ext uri="{FF2B5EF4-FFF2-40B4-BE49-F238E27FC236}">
-                <a16:creationId xmlns:a16="http://schemas.microsoft.com/office/drawing/2014/main" id="{4A3129FD-5B15-4E58-A965-E97CF7AA16C3}"/>
+                <a16:creationId xmlns:a16="http://schemas.microsoft.com/office/drawing/2014/main" id="{AF46B9EC-4957-44FB-A805-F70512C7AE85}"/>
               </a:ext>
             </a:extLst>
           </p:cNvPr>
@@ -17598,7 +17598,7 @@
           <p:cNvPr id="10" name="">
             <a:extLst xmlns:a="http://schemas.openxmlformats.org/drawingml/2006/main">
               <a:ext uri="{FF2B5EF4-FFF2-40B4-BE49-F238E27FC236}">
-                <a16:creationId xmlns:a16="http://schemas.microsoft.com/office/drawing/2014/main" id="{B3B3DE39-ADDB-49DD-9BB0-5A9C12E1034B}"/>
+                <a16:creationId xmlns:a16="http://schemas.microsoft.com/office/drawing/2014/main" id="{35EA1792-ACD4-4914-B5F9-0A99AAE7F65B}"/>
               </a:ext>
             </a:extLst>
           </p:cNvPr>
@@ -17650,7 +17650,7 @@
           <p:cNvPr id="11" name="">
             <a:extLst xmlns:a="http://schemas.openxmlformats.org/drawingml/2006/main">
               <a:ext uri="{FF2B5EF4-FFF2-40B4-BE49-F238E27FC236}">
-                <a16:creationId xmlns:a16="http://schemas.microsoft.com/office/drawing/2014/main" id="{8ACD4C11-72A4-4A0D-8266-66C13433FADF}"/>
+                <a16:creationId xmlns:a16="http://schemas.microsoft.com/office/drawing/2014/main" id="{1E592C1C-EC2B-43CA-8E12-0300431F2474}"/>
               </a:ext>
             </a:extLst>
           </p:cNvPr>
@@ -17681,7 +17681,7 @@
           <p:cNvPr id="12" name="">
             <a:extLst xmlns:a="http://schemas.openxmlformats.org/drawingml/2006/main">
               <a:ext uri="{FF2B5EF4-FFF2-40B4-BE49-F238E27FC236}">
-                <a16:creationId xmlns:a16="http://schemas.microsoft.com/office/drawing/2014/main" id="{AE5F4771-8AA4-40A5-B9B7-2F83DF898357}"/>
+                <a16:creationId xmlns:a16="http://schemas.microsoft.com/office/drawing/2014/main" id="{B7A880EB-8EDB-4131-8671-63B54BF17C20}"/>
               </a:ext>
             </a:extLst>
           </p:cNvPr>
@@ -17712,7 +17712,7 @@
           <p:cNvPr id="13" name="">
             <a:extLst xmlns:a="http://schemas.openxmlformats.org/drawingml/2006/main">
               <a:ext uri="{FF2B5EF4-FFF2-40B4-BE49-F238E27FC236}">
-                <a16:creationId xmlns:a16="http://schemas.microsoft.com/office/drawing/2014/main" id="{8FC0006D-A20E-4363-9F9D-76B0091E370B}"/>
+                <a16:creationId xmlns:a16="http://schemas.microsoft.com/office/drawing/2014/main" id="{C42D8FEE-9E93-4E62-8B31-BD310F873F13}"/>
               </a:ext>
             </a:extLst>
           </p:cNvPr>
@@ -17764,7 +17764,7 @@
           <p:cNvPr id="14" name="">
             <a:extLst xmlns:a="http://schemas.openxmlformats.org/drawingml/2006/main">
               <a:ext uri="{FF2B5EF4-FFF2-40B4-BE49-F238E27FC236}">
-                <a16:creationId xmlns:a16="http://schemas.microsoft.com/office/drawing/2014/main" id="{7CDD2AD9-8645-4552-812B-8F65E4D2D228}"/>
+                <a16:creationId xmlns:a16="http://schemas.microsoft.com/office/drawing/2014/main" id="{B8D7E869-1EFD-4311-867E-37D90C875FE0}"/>
               </a:ext>
             </a:extLst>
           </p:cNvPr>
@@ -17816,7 +17816,7 @@
           <p:cNvPr id="15" name="">
             <a:extLst xmlns:a="http://schemas.openxmlformats.org/drawingml/2006/main">
               <a:ext uri="{FF2B5EF4-FFF2-40B4-BE49-F238E27FC236}">
-                <a16:creationId xmlns:a16="http://schemas.microsoft.com/office/drawing/2014/main" id="{12CE8E7A-568A-49DA-8DA4-416AE4528C64}"/>
+                <a16:creationId xmlns:a16="http://schemas.microsoft.com/office/drawing/2014/main" id="{0D13B41F-F9C8-4165-A400-8BD9CAE30F8D}"/>
               </a:ext>
             </a:extLst>
           </p:cNvPr>
@@ -17868,7 +17868,7 @@
           <p:cNvPr id="16" name="">
             <a:extLst xmlns:a="http://schemas.openxmlformats.org/drawingml/2006/main">
               <a:ext uri="{FF2B5EF4-FFF2-40B4-BE49-F238E27FC236}">
-                <a16:creationId xmlns:a16="http://schemas.microsoft.com/office/drawing/2014/main" id="{7287713B-CEF6-4BF8-A8D7-022297BDDA9A}"/>
+                <a16:creationId xmlns:a16="http://schemas.microsoft.com/office/drawing/2014/main" id="{53DCC370-2F95-4486-87BD-9288DAB53E4A}"/>
               </a:ext>
             </a:extLst>
           </p:cNvPr>
@@ -17920,7 +17920,7 @@
           <p:cNvPr id="17" name="">
             <a:extLst xmlns:a="http://schemas.openxmlformats.org/drawingml/2006/main">
               <a:ext uri="{FF2B5EF4-FFF2-40B4-BE49-F238E27FC236}">
-                <a16:creationId xmlns:a16="http://schemas.microsoft.com/office/drawing/2014/main" id="{806C3B8E-7F8D-4678-83B8-9AE2E94FFB6E}"/>
+                <a16:creationId xmlns:a16="http://schemas.microsoft.com/office/drawing/2014/main" id="{EB416BCC-8134-4C1B-BEE0-730739023151}"/>
               </a:ext>
             </a:extLst>
           </p:cNvPr>
@@ -17972,7 +17972,7 @@
           <p:cNvPr id="18" name="">
             <a:extLst xmlns:a="http://schemas.openxmlformats.org/drawingml/2006/main">
               <a:ext uri="{FF2B5EF4-FFF2-40B4-BE49-F238E27FC236}">
-                <a16:creationId xmlns:a16="http://schemas.microsoft.com/office/drawing/2014/main" id="{46484F52-8864-4C18-AA27-A43C2E55B937}"/>
+                <a16:creationId xmlns:a16="http://schemas.microsoft.com/office/drawing/2014/main" id="{EA43762E-09DF-474B-9E17-BDAC800F5FC0}"/>
               </a:ext>
             </a:extLst>
           </p:cNvPr>
@@ -18003,7 +18003,7 @@
           <p:cNvPr id="19" name="">
             <a:extLst xmlns:a="http://schemas.openxmlformats.org/drawingml/2006/main">
               <a:ext uri="{FF2B5EF4-FFF2-40B4-BE49-F238E27FC236}">
-                <a16:creationId xmlns:a16="http://schemas.microsoft.com/office/drawing/2014/main" id="{C6A49BFA-0A34-4D9B-98EA-9A0D6A6955C3}"/>
+                <a16:creationId xmlns:a16="http://schemas.microsoft.com/office/drawing/2014/main" id="{040DDDF5-0B8A-457F-BB23-9D6334250804}"/>
               </a:ext>
             </a:extLst>
           </p:cNvPr>
@@ -18034,7 +18034,7 @@
           <p:cNvPr id="20" name="">
             <a:extLst xmlns:a="http://schemas.openxmlformats.org/drawingml/2006/main">
               <a:ext uri="{FF2B5EF4-FFF2-40B4-BE49-F238E27FC236}">
-                <a16:creationId xmlns:a16="http://schemas.microsoft.com/office/drawing/2014/main" id="{A9CED02B-94BB-4E0E-A116-8BD9E599591F}"/>
+                <a16:creationId xmlns:a16="http://schemas.microsoft.com/office/drawing/2014/main" id="{796281BF-D3A0-45F3-9641-A2EBFF7FEDC8}"/>
               </a:ext>
             </a:extLst>
           </p:cNvPr>
@@ -18086,7 +18086,7 @@
           <p:cNvPr id="21" name="">
             <a:extLst xmlns:a="http://schemas.openxmlformats.org/drawingml/2006/main">
               <a:ext uri="{FF2B5EF4-FFF2-40B4-BE49-F238E27FC236}">
-                <a16:creationId xmlns:a16="http://schemas.microsoft.com/office/drawing/2014/main" id="{FDF51352-58CC-48AE-AE43-39C618EE2D1D}"/>
+                <a16:creationId xmlns:a16="http://schemas.microsoft.com/office/drawing/2014/main" id="{49090360-B06B-4F75-9F50-B5512097061B}"/>
               </a:ext>
             </a:extLst>
           </p:cNvPr>
@@ -18138,7 +18138,7 @@
           <p:cNvPr id="22" name="">
             <a:extLst xmlns:a="http://schemas.openxmlformats.org/drawingml/2006/main">
               <a:ext uri="{FF2B5EF4-FFF2-40B4-BE49-F238E27FC236}">
-                <a16:creationId xmlns:a16="http://schemas.microsoft.com/office/drawing/2014/main" id="{F5659C17-F3AF-4CB2-A1F3-96ED3D2405A3}"/>
+                <a16:creationId xmlns:a16="http://schemas.microsoft.com/office/drawing/2014/main" id="{21FA21D3-142D-447D-95FC-BB5586A610F9}"/>
               </a:ext>
             </a:extLst>
           </p:cNvPr>
@@ -18190,7 +18190,7 @@
           <p:cNvPr id="23" name="">
             <a:extLst xmlns:a="http://schemas.openxmlformats.org/drawingml/2006/main">
               <a:ext uri="{FF2B5EF4-FFF2-40B4-BE49-F238E27FC236}">
-                <a16:creationId xmlns:a16="http://schemas.microsoft.com/office/drawing/2014/main" id="{3F93B6A3-0983-455B-BF27-7770A650E3CD}"/>
+                <a16:creationId xmlns:a16="http://schemas.microsoft.com/office/drawing/2014/main" id="{C64731EF-EEE7-4896-A9D6-0DEA79AB4B53}"/>
               </a:ext>
             </a:extLst>
           </p:cNvPr>
@@ -18242,7 +18242,7 @@
           <p:cNvPr id="24" name="">
             <a:extLst xmlns:a="http://schemas.openxmlformats.org/drawingml/2006/main">
               <a:ext uri="{FF2B5EF4-FFF2-40B4-BE49-F238E27FC236}">
-                <a16:creationId xmlns:a16="http://schemas.microsoft.com/office/drawing/2014/main" id="{34044644-6953-4FE7-9E93-358778E92CC3}"/>
+                <a16:creationId xmlns:a16="http://schemas.microsoft.com/office/drawing/2014/main" id="{8228C641-823D-42FF-A0E4-5ADA53A69898}"/>
               </a:ext>
             </a:extLst>
           </p:cNvPr>
@@ -18294,7 +18294,7 @@
           <p:cNvPr id="25" name="">
             <a:extLst xmlns:a="http://schemas.openxmlformats.org/drawingml/2006/main">
               <a:ext uri="{FF2B5EF4-FFF2-40B4-BE49-F238E27FC236}">
-                <a16:creationId xmlns:a16="http://schemas.microsoft.com/office/drawing/2014/main" id="{48140CAD-0D8D-4B1D-A785-FF77340DF455}"/>
+                <a16:creationId xmlns:a16="http://schemas.microsoft.com/office/drawing/2014/main" id="{13BC1ADB-2CCC-4D66-928A-EAE05973EC2C}"/>
               </a:ext>
             </a:extLst>
           </p:cNvPr>
@@ -18325,7 +18325,7 @@
           <p:cNvPr id="26" name="">
             <a:extLst xmlns:a="http://schemas.openxmlformats.org/drawingml/2006/main">
               <a:ext uri="{FF2B5EF4-FFF2-40B4-BE49-F238E27FC236}">
-                <a16:creationId xmlns:a16="http://schemas.microsoft.com/office/drawing/2014/main" id="{417743BB-2BFC-439B-8B46-01CB01B8DA6A}"/>
+                <a16:creationId xmlns:a16="http://schemas.microsoft.com/office/drawing/2014/main" id="{8879244F-5DDA-494C-9777-EDD44B9B4CDD}"/>
               </a:ext>
             </a:extLst>
           </p:cNvPr>
@@ -18377,7 +18377,7 @@
           <p:cNvPr id="27" name="">
             <a:extLst xmlns:a="http://schemas.openxmlformats.org/drawingml/2006/main">
               <a:ext uri="{FF2B5EF4-FFF2-40B4-BE49-F238E27FC236}">
-                <a16:creationId xmlns:a16="http://schemas.microsoft.com/office/drawing/2014/main" id="{C2E347EC-3466-425D-AF21-3EBD5D8BA58D}"/>
+                <a16:creationId xmlns:a16="http://schemas.microsoft.com/office/drawing/2014/main" id="{867E00F8-EE1D-48BF-A690-C4951578229E}"/>
               </a:ext>
             </a:extLst>
           </p:cNvPr>
@@ -18429,7 +18429,7 @@
           <p:cNvPr id="28" name="">
             <a:extLst xmlns:a="http://schemas.openxmlformats.org/drawingml/2006/main">
               <a:ext uri="{FF2B5EF4-FFF2-40B4-BE49-F238E27FC236}">
-                <a16:creationId xmlns:a16="http://schemas.microsoft.com/office/drawing/2014/main" id="{62150316-779C-4198-917C-CE06981FD298}"/>
+                <a16:creationId xmlns:a16="http://schemas.microsoft.com/office/drawing/2014/main" id="{F71A9F2A-13B7-4C4B-8088-7930063633EE}"/>
               </a:ext>
             </a:extLst>
           </p:cNvPr>
@@ -18481,7 +18481,7 @@
           <p:cNvPr id="29" name="">
             <a:extLst xmlns:a="http://schemas.openxmlformats.org/drawingml/2006/main">
               <a:ext uri="{FF2B5EF4-FFF2-40B4-BE49-F238E27FC236}">
-                <a16:creationId xmlns:a16="http://schemas.microsoft.com/office/drawing/2014/main" id="{0BC9D213-18D8-447F-8D6D-F95EFCEF4ECB}"/>
+                <a16:creationId xmlns:a16="http://schemas.microsoft.com/office/drawing/2014/main" id="{A43BD46C-7381-4545-942F-E830013BAA8C}"/>
               </a:ext>
             </a:extLst>
           </p:cNvPr>
@@ -18533,7 +18533,7 @@
           <p:cNvPr id="30" name="">
             <a:extLst xmlns:a="http://schemas.openxmlformats.org/drawingml/2006/main">
               <a:ext uri="{FF2B5EF4-FFF2-40B4-BE49-F238E27FC236}">
-                <a16:creationId xmlns:a16="http://schemas.microsoft.com/office/drawing/2014/main" id="{D54A7806-F7D8-4549-A255-4B0842B864EE}"/>
+                <a16:creationId xmlns:a16="http://schemas.microsoft.com/office/drawing/2014/main" id="{9198E069-06BD-4A5B-BCC3-6E11EA1D5704}"/>
               </a:ext>
             </a:extLst>
           </p:cNvPr>
@@ -18585,7 +18585,7 @@
           <p:cNvPr id="31" name="">
             <a:extLst xmlns:a="http://schemas.openxmlformats.org/drawingml/2006/main">
               <a:ext uri="{FF2B5EF4-FFF2-40B4-BE49-F238E27FC236}">
-                <a16:creationId xmlns:a16="http://schemas.microsoft.com/office/drawing/2014/main" id="{8CF0EEFF-BF36-4F32-A3F6-D8B29066C30A}"/>
+                <a16:creationId xmlns:a16="http://schemas.microsoft.com/office/drawing/2014/main" id="{683DC817-51C2-40B1-BC09-B2455638A1AE}"/>
               </a:ext>
             </a:extLst>
           </p:cNvPr>
@@ -18616,7 +18616,7 @@
           <p:cNvPr id="32" name="">
             <a:extLst xmlns:a="http://schemas.openxmlformats.org/drawingml/2006/main">
               <a:ext uri="{FF2B5EF4-FFF2-40B4-BE49-F238E27FC236}">
-                <a16:creationId xmlns:a16="http://schemas.microsoft.com/office/drawing/2014/main" id="{A38AEB6A-AFE6-4827-A7A7-39226F31A327}"/>
+                <a16:creationId xmlns:a16="http://schemas.microsoft.com/office/drawing/2014/main" id="{5B5CBCA3-54DF-4763-A2BB-84240205936A}"/>
               </a:ext>
             </a:extLst>
           </p:cNvPr>
@@ -18647,7 +18647,7 @@
           <p:cNvPr id="33" name="">
             <a:extLst xmlns:a="http://schemas.openxmlformats.org/drawingml/2006/main">
               <a:ext uri="{FF2B5EF4-FFF2-40B4-BE49-F238E27FC236}">
-                <a16:creationId xmlns:a16="http://schemas.microsoft.com/office/drawing/2014/main" id="{97A8D173-89B2-4D4C-B3A9-9E86CF8AB617}"/>
+                <a16:creationId xmlns:a16="http://schemas.microsoft.com/office/drawing/2014/main" id="{A18056BD-9DF8-42E0-B3A3-D169DA7B553B}"/>
               </a:ext>
             </a:extLst>
           </p:cNvPr>
@@ -18699,7 +18699,7 @@
           <p:cNvPr id="34" name="">
             <a:extLst xmlns:a="http://schemas.openxmlformats.org/drawingml/2006/main">
               <a:ext uri="{FF2B5EF4-FFF2-40B4-BE49-F238E27FC236}">
-                <a16:creationId xmlns:a16="http://schemas.microsoft.com/office/drawing/2014/main" id="{34FBBE03-A84C-489D-A5F2-A16EF69473C0}"/>
+                <a16:creationId xmlns:a16="http://schemas.microsoft.com/office/drawing/2014/main" id="{030F95D4-6932-48E6-A105-4916A5988AD4}"/>
               </a:ext>
             </a:extLst>
           </p:cNvPr>
@@ -18751,7 +18751,7 @@
           <p:cNvPr id="35" name="">
             <a:extLst xmlns:a="http://schemas.openxmlformats.org/drawingml/2006/main">
               <a:ext uri="{FF2B5EF4-FFF2-40B4-BE49-F238E27FC236}">
-                <a16:creationId xmlns:a16="http://schemas.microsoft.com/office/drawing/2014/main" id="{C2D1C1E4-819F-4C22-AA76-FEFD82E80277}"/>
+                <a16:creationId xmlns:a16="http://schemas.microsoft.com/office/drawing/2014/main" id="{312A1BBC-3D74-41D8-B241-33EBEB5A8CBB}"/>
               </a:ext>
             </a:extLst>
           </p:cNvPr>
@@ -18803,7 +18803,7 @@
           <p:cNvPr id="36" name="">
             <a:extLst xmlns:a="http://schemas.openxmlformats.org/drawingml/2006/main">
               <a:ext uri="{FF2B5EF4-FFF2-40B4-BE49-F238E27FC236}">
-                <a16:creationId xmlns:a16="http://schemas.microsoft.com/office/drawing/2014/main" id="{B426AB5F-B999-4BAD-8251-E48032F97329}"/>
+                <a16:creationId xmlns:a16="http://schemas.microsoft.com/office/drawing/2014/main" id="{7E81271D-ED52-43FF-A5EC-94A248D22D34}"/>
               </a:ext>
             </a:extLst>
           </p:cNvPr>
@@ -18855,7 +18855,7 @@
           <p:cNvPr id="37" name="">
             <a:extLst xmlns:a="http://schemas.openxmlformats.org/drawingml/2006/main">
               <a:ext uri="{FF2B5EF4-FFF2-40B4-BE49-F238E27FC236}">
-                <a16:creationId xmlns:a16="http://schemas.microsoft.com/office/drawing/2014/main" id="{68822F75-475B-45AC-B9C4-FAB5424D0E97}"/>
+                <a16:creationId xmlns:a16="http://schemas.microsoft.com/office/drawing/2014/main" id="{A7FB04C7-C4FC-46E3-B1FA-3EDA664A45E2}"/>
               </a:ext>
             </a:extLst>
           </p:cNvPr>
@@ -18907,7 +18907,7 @@
           <p:cNvPr id="38" name="">
             <a:extLst xmlns:a="http://schemas.openxmlformats.org/drawingml/2006/main">
               <a:ext uri="{FF2B5EF4-FFF2-40B4-BE49-F238E27FC236}">
-                <a16:creationId xmlns:a16="http://schemas.microsoft.com/office/drawing/2014/main" id="{71ECB49A-DEAA-4A19-AEC0-89979212B013}"/>
+                <a16:creationId xmlns:a16="http://schemas.microsoft.com/office/drawing/2014/main" id="{A70CC856-23D7-449A-856A-500B762CC596}"/>
               </a:ext>
             </a:extLst>
           </p:cNvPr>
@@ -18938,7 +18938,7 @@
           <p:cNvPr id="39" name="">
             <a:extLst xmlns:a="http://schemas.openxmlformats.org/drawingml/2006/main">
               <a:ext uri="{FF2B5EF4-FFF2-40B4-BE49-F238E27FC236}">
-                <a16:creationId xmlns:a16="http://schemas.microsoft.com/office/drawing/2014/main" id="{B2F771B4-787A-4F56-A216-B146036574C6}"/>
+                <a16:creationId xmlns:a16="http://schemas.microsoft.com/office/drawing/2014/main" id="{DA164AAB-E4F6-4939-885E-9EA2301AC3D0}"/>
               </a:ext>
             </a:extLst>
           </p:cNvPr>
@@ -18990,7 +18990,7 @@
           <p:cNvPr id="40" name="">
             <a:extLst xmlns:a="http://schemas.openxmlformats.org/drawingml/2006/main">
               <a:ext uri="{FF2B5EF4-FFF2-40B4-BE49-F238E27FC236}">
-                <a16:creationId xmlns:a16="http://schemas.microsoft.com/office/drawing/2014/main" id="{ABB067DF-AF0D-4A0A-A190-B261CE39A971}"/>
+                <a16:creationId xmlns:a16="http://schemas.microsoft.com/office/drawing/2014/main" id="{C7E70715-8B8D-4253-AF33-0DA3EFFA77B7}"/>
               </a:ext>
             </a:extLst>
           </p:cNvPr>
@@ -19042,7 +19042,7 @@
           <p:cNvPr id="41" name="">
             <a:extLst xmlns:a="http://schemas.openxmlformats.org/drawingml/2006/main">
               <a:ext uri="{FF2B5EF4-FFF2-40B4-BE49-F238E27FC236}">
-                <a16:creationId xmlns:a16="http://schemas.microsoft.com/office/drawing/2014/main" id="{6214DAF4-D539-40D8-B88D-2A361A3AFBA1}"/>
+                <a16:creationId xmlns:a16="http://schemas.microsoft.com/office/drawing/2014/main" id="{66E33D55-5DEB-4BDD-8B53-27E79322B25B}"/>
               </a:ext>
             </a:extLst>
           </p:cNvPr>
@@ -19094,7 +19094,7 @@
           <p:cNvPr id="42" name="">
             <a:extLst xmlns:a="http://schemas.openxmlformats.org/drawingml/2006/main">
               <a:ext uri="{FF2B5EF4-FFF2-40B4-BE49-F238E27FC236}">
-                <a16:creationId xmlns:a16="http://schemas.microsoft.com/office/drawing/2014/main" id="{7356BE38-430C-4771-96B9-D51F10DF5139}"/>
+                <a16:creationId xmlns:a16="http://schemas.microsoft.com/office/drawing/2014/main" id="{575A6227-ECA0-4E9E-8D1A-9BF856DA1D55}"/>
               </a:ext>
             </a:extLst>
           </p:cNvPr>
@@ -19146,7 +19146,7 @@
           <p:cNvPr id="43" name="">
             <a:extLst xmlns:a="http://schemas.openxmlformats.org/drawingml/2006/main">
               <a:ext uri="{FF2B5EF4-FFF2-40B4-BE49-F238E27FC236}">
-                <a16:creationId xmlns:a16="http://schemas.microsoft.com/office/drawing/2014/main" id="{C01F0295-5E47-4174-AD41-C36D43EF4800}"/>
+                <a16:creationId xmlns:a16="http://schemas.microsoft.com/office/drawing/2014/main" id="{ABA64C2B-2EB1-47DE-AD3F-03AA305B8550}"/>
               </a:ext>
             </a:extLst>
           </p:cNvPr>
@@ -19198,7 +19198,7 @@
           <p:cNvPr id="44" name="">
             <a:extLst xmlns:a="http://schemas.openxmlformats.org/drawingml/2006/main">
               <a:ext uri="{FF2B5EF4-FFF2-40B4-BE49-F238E27FC236}">
-                <a16:creationId xmlns:a16="http://schemas.microsoft.com/office/drawing/2014/main" id="{02715B4D-9F3E-4844-8FFA-30D2537453A4}"/>
+                <a16:creationId xmlns:a16="http://schemas.microsoft.com/office/drawing/2014/main" id="{2C5C5DBE-E83A-4C51-8E33-30A3515D4FB8}"/>
               </a:ext>
             </a:extLst>
           </p:cNvPr>
@@ -19229,7 +19229,7 @@
           <p:cNvPr id="45" name="">
             <a:extLst xmlns:a="http://schemas.openxmlformats.org/drawingml/2006/main">
               <a:ext uri="{FF2B5EF4-FFF2-40B4-BE49-F238E27FC236}">
-                <a16:creationId xmlns:a16="http://schemas.microsoft.com/office/drawing/2014/main" id="{4F74F2EF-A92D-445A-B9F1-83A330BA6FC2}"/>
+                <a16:creationId xmlns:a16="http://schemas.microsoft.com/office/drawing/2014/main" id="{0C64096D-AEB4-4B4A-999D-02BB6270CFD9}"/>
               </a:ext>
             </a:extLst>
           </p:cNvPr>
@@ -19260,7 +19260,7 @@
           <p:cNvPr id="46" name="">
             <a:extLst xmlns:a="http://schemas.openxmlformats.org/drawingml/2006/main">
               <a:ext uri="{FF2B5EF4-FFF2-40B4-BE49-F238E27FC236}">
-                <a16:creationId xmlns:a16="http://schemas.microsoft.com/office/drawing/2014/main" id="{6674F1C1-AC07-4E5F-AF67-2634DB7F96CB}"/>
+                <a16:creationId xmlns:a16="http://schemas.microsoft.com/office/drawing/2014/main" id="{C777A8DD-03F9-4520-8A51-EFFB5D04A0F9}"/>
               </a:ext>
             </a:extLst>
           </p:cNvPr>
@@ -19312,7 +19312,7 @@
           <p:cNvPr id="47" name="">
             <a:extLst xmlns:a="http://schemas.openxmlformats.org/drawingml/2006/main">
               <a:ext uri="{FF2B5EF4-FFF2-40B4-BE49-F238E27FC236}">
-                <a16:creationId xmlns:a16="http://schemas.microsoft.com/office/drawing/2014/main" id="{EE480467-E80F-4A9A-A3D4-D22E1C987479}"/>
+                <a16:creationId xmlns:a16="http://schemas.microsoft.com/office/drawing/2014/main" id="{43477DDA-F28E-49DF-BCA1-39F538388B6A}"/>
               </a:ext>
             </a:extLst>
           </p:cNvPr>
@@ -19364,7 +19364,7 @@
           <p:cNvPr id="48" name="">
             <a:extLst xmlns:a="http://schemas.openxmlformats.org/drawingml/2006/main">
               <a:ext uri="{FF2B5EF4-FFF2-40B4-BE49-F238E27FC236}">
-                <a16:creationId xmlns:a16="http://schemas.microsoft.com/office/drawing/2014/main" id="{636CF1B0-1B14-43D2-83F3-DEBE5A97BA28}"/>
+                <a16:creationId xmlns:a16="http://schemas.microsoft.com/office/drawing/2014/main" id="{E1E81DF5-BE20-4D61-9134-7A8FA236B1BA}"/>
               </a:ext>
             </a:extLst>
           </p:cNvPr>
@@ -19416,7 +19416,7 @@
           <p:cNvPr id="49" name="">
             <a:extLst xmlns:a="http://schemas.openxmlformats.org/drawingml/2006/main">
               <a:ext uri="{FF2B5EF4-FFF2-40B4-BE49-F238E27FC236}">
-                <a16:creationId xmlns:a16="http://schemas.microsoft.com/office/drawing/2014/main" id="{5D857977-6AB7-4FB4-8D47-E3E01B1AE1E5}"/>
+                <a16:creationId xmlns:a16="http://schemas.microsoft.com/office/drawing/2014/main" id="{0AB06CF1-4304-43EF-83BD-85EF055B55D8}"/>
               </a:ext>
             </a:extLst>
           </p:cNvPr>
@@ -19468,7 +19468,7 @@
           <p:cNvPr id="50" name="">
             <a:extLst xmlns:a="http://schemas.openxmlformats.org/drawingml/2006/main">
               <a:ext uri="{FF2B5EF4-FFF2-40B4-BE49-F238E27FC236}">
-                <a16:creationId xmlns:a16="http://schemas.microsoft.com/office/drawing/2014/main" id="{DE6FE055-4530-438F-BC54-22A33700E4A7}"/>
+                <a16:creationId xmlns:a16="http://schemas.microsoft.com/office/drawing/2014/main" id="{F7FC1B82-B0B5-4A27-BE9B-56095CA908C3}"/>
               </a:ext>
             </a:extLst>
           </p:cNvPr>
@@ -19520,7 +19520,7 @@
           <p:cNvPr id="51" name="">
             <a:extLst xmlns:a="http://schemas.openxmlformats.org/drawingml/2006/main">
               <a:ext uri="{FF2B5EF4-FFF2-40B4-BE49-F238E27FC236}">
-                <a16:creationId xmlns:a16="http://schemas.microsoft.com/office/drawing/2014/main" id="{513CE8BF-C739-4369-A4CD-B4EEC47E6B9B}"/>
+                <a16:creationId xmlns:a16="http://schemas.microsoft.com/office/drawing/2014/main" id="{1E17A6BF-8A44-4F0E-8296-24BD19E2B591}"/>
               </a:ext>
             </a:extLst>
           </p:cNvPr>
@@ -19551,7 +19551,7 @@
           <p:cNvPr id="52" name="">
             <a:extLst xmlns:a="http://schemas.openxmlformats.org/drawingml/2006/main">
               <a:ext uri="{FF2B5EF4-FFF2-40B4-BE49-F238E27FC236}">
-                <a16:creationId xmlns:a16="http://schemas.microsoft.com/office/drawing/2014/main" id="{BE85D725-D414-463D-ABEB-C055361A34AB}"/>
+                <a16:creationId xmlns:a16="http://schemas.microsoft.com/office/drawing/2014/main" id="{5ED424D4-5552-4C9D-9F6D-A66EB29127E4}"/>
               </a:ext>
             </a:extLst>
           </p:cNvPr>
@@ -19603,7 +19603,7 @@
           <p:cNvPr id="53" name="">
             <a:extLst xmlns:a="http://schemas.openxmlformats.org/drawingml/2006/main">
               <a:ext uri="{FF2B5EF4-FFF2-40B4-BE49-F238E27FC236}">
-                <a16:creationId xmlns:a16="http://schemas.microsoft.com/office/drawing/2014/main" id="{AA41838A-2E00-4FF1-9652-7BEE27D3C1D5}"/>
+                <a16:creationId xmlns:a16="http://schemas.microsoft.com/office/drawing/2014/main" id="{AB8B2D58-4550-4999-BC37-111021EF2E88}"/>
               </a:ext>
             </a:extLst>
           </p:cNvPr>
@@ -19655,7 +19655,7 @@
           <p:cNvPr id="54" name="">
             <a:extLst xmlns:a="http://schemas.openxmlformats.org/drawingml/2006/main">
               <a:ext uri="{FF2B5EF4-FFF2-40B4-BE49-F238E27FC236}">
-                <a16:creationId xmlns:a16="http://schemas.microsoft.com/office/drawing/2014/main" id="{027B20D7-E1B1-419C-8DC1-3BDE660B9DFC}"/>
+                <a16:creationId xmlns:a16="http://schemas.microsoft.com/office/drawing/2014/main" id="{934F4654-A179-4719-AC3B-6BD50E636DAB}"/>
               </a:ext>
             </a:extLst>
           </p:cNvPr>
@@ -19707,7 +19707,7 @@
           <p:cNvPr id="55" name="">
             <a:extLst xmlns:a="http://schemas.openxmlformats.org/drawingml/2006/main">
               <a:ext uri="{FF2B5EF4-FFF2-40B4-BE49-F238E27FC236}">
-                <a16:creationId xmlns:a16="http://schemas.microsoft.com/office/drawing/2014/main" id="{687B07BF-D79A-4203-A0F1-9EF7886629BE}"/>
+                <a16:creationId xmlns:a16="http://schemas.microsoft.com/office/drawing/2014/main" id="{1CF575A0-EC47-46C7-BE31-0CC6619C279D}"/>
               </a:ext>
             </a:extLst>
           </p:cNvPr>
@@ -19759,7 +19759,7 @@
           <p:cNvPr id="56" name="">
             <a:extLst xmlns:a="http://schemas.openxmlformats.org/drawingml/2006/main">
               <a:ext uri="{FF2B5EF4-FFF2-40B4-BE49-F238E27FC236}">
-                <a16:creationId xmlns:a16="http://schemas.microsoft.com/office/drawing/2014/main" id="{A7C3D01A-48EC-4106-9455-A36EED0ED07E}"/>
+                <a16:creationId xmlns:a16="http://schemas.microsoft.com/office/drawing/2014/main" id="{03428819-6628-4D63-ACEF-04A2AD220B53}"/>
               </a:ext>
             </a:extLst>
           </p:cNvPr>
@@ -19811,7 +19811,7 @@
           <p:cNvPr id="57" name="">
             <a:extLst xmlns:a="http://schemas.openxmlformats.org/drawingml/2006/main">
               <a:ext uri="{FF2B5EF4-FFF2-40B4-BE49-F238E27FC236}">
-                <a16:creationId xmlns:a16="http://schemas.microsoft.com/office/drawing/2014/main" id="{E0AE3A48-7522-4D36-A5E6-31F015791CFB}"/>
+                <a16:creationId xmlns:a16="http://schemas.microsoft.com/office/drawing/2014/main" id="{F78EE39E-168C-4095-BA8F-E931788A07C2}"/>
               </a:ext>
             </a:extLst>
           </p:cNvPr>
@@ -19842,7 +19842,7 @@
           <p:cNvPr id="58" name="">
             <a:extLst xmlns:a="http://schemas.openxmlformats.org/drawingml/2006/main">
               <a:ext uri="{FF2B5EF4-FFF2-40B4-BE49-F238E27FC236}">
-                <a16:creationId xmlns:a16="http://schemas.microsoft.com/office/drawing/2014/main" id="{6F166593-F71E-4EE6-A42F-1AF3B9E56932}"/>
+                <a16:creationId xmlns:a16="http://schemas.microsoft.com/office/drawing/2014/main" id="{5503D014-A4BB-4FE7-828D-B03DE3ACA0D8}"/>
               </a:ext>
             </a:extLst>
           </p:cNvPr>
@@ -19873,7 +19873,7 @@
           <p:cNvPr id="59" name="">
             <a:extLst xmlns:a="http://schemas.openxmlformats.org/drawingml/2006/main">
               <a:ext uri="{FF2B5EF4-FFF2-40B4-BE49-F238E27FC236}">
-                <a16:creationId xmlns:a16="http://schemas.microsoft.com/office/drawing/2014/main" id="{58A0BD82-DD2A-4DD6-950B-1510BD37BF11}"/>
+                <a16:creationId xmlns:a16="http://schemas.microsoft.com/office/drawing/2014/main" id="{0A8839FF-CEFF-4F23-9359-56F5286627F6}"/>
               </a:ext>
             </a:extLst>
           </p:cNvPr>
@@ -19925,7 +19925,7 @@
           <p:cNvPr id="60" name="">
             <a:extLst xmlns:a="http://schemas.openxmlformats.org/drawingml/2006/main">
               <a:ext uri="{FF2B5EF4-FFF2-40B4-BE49-F238E27FC236}">
-                <a16:creationId xmlns:a16="http://schemas.microsoft.com/office/drawing/2014/main" id="{28240EBC-8E68-4A9D-8589-B1D016340C8B}"/>
+                <a16:creationId xmlns:a16="http://schemas.microsoft.com/office/drawing/2014/main" id="{BF3DF167-C4BD-4A11-82D3-3C423753B0A6}"/>
               </a:ext>
             </a:extLst>
           </p:cNvPr>
@@ -19977,7 +19977,7 @@
           <p:cNvPr id="61" name="">
             <a:extLst xmlns:a="http://schemas.openxmlformats.org/drawingml/2006/main">
               <a:ext uri="{FF2B5EF4-FFF2-40B4-BE49-F238E27FC236}">
-                <a16:creationId xmlns:a16="http://schemas.microsoft.com/office/drawing/2014/main" id="{B880B06B-DF4A-47A6-B920-CB5369CD8644}"/>
+                <a16:creationId xmlns:a16="http://schemas.microsoft.com/office/drawing/2014/main" id="{18940DBA-34E3-4C1E-A43B-A702092740BB}"/>
               </a:ext>
             </a:extLst>
           </p:cNvPr>
@@ -20029,7 +20029,7 @@
           <p:cNvPr id="62" name="">
             <a:extLst xmlns:a="http://schemas.openxmlformats.org/drawingml/2006/main">
               <a:ext uri="{FF2B5EF4-FFF2-40B4-BE49-F238E27FC236}">
-                <a16:creationId xmlns:a16="http://schemas.microsoft.com/office/drawing/2014/main" id="{E4A2ABC0-C478-45DF-A260-C48D187458F7}"/>
+                <a16:creationId xmlns:a16="http://schemas.microsoft.com/office/drawing/2014/main" id="{01EA9303-94AC-4B7E-B98A-F9ED447BC97F}"/>
               </a:ext>
             </a:extLst>
           </p:cNvPr>
@@ -20081,7 +20081,7 @@
           <p:cNvPr id="63" name="">
             <a:extLst xmlns:a="http://schemas.openxmlformats.org/drawingml/2006/main">
               <a:ext uri="{FF2B5EF4-FFF2-40B4-BE49-F238E27FC236}">
-                <a16:creationId xmlns:a16="http://schemas.microsoft.com/office/drawing/2014/main" id="{6B7A016C-BBD6-4C7F-8456-EC971DB6EE22}"/>
+                <a16:creationId xmlns:a16="http://schemas.microsoft.com/office/drawing/2014/main" id="{62D7EE37-8107-4E4D-BAE1-69A5188E182A}"/>
               </a:ext>
             </a:extLst>
           </p:cNvPr>
@@ -20133,7 +20133,7 @@
           <p:cNvPr id="64" name="">
             <a:extLst xmlns:a="http://schemas.openxmlformats.org/drawingml/2006/main">
               <a:ext uri="{FF2B5EF4-FFF2-40B4-BE49-F238E27FC236}">
-                <a16:creationId xmlns:a16="http://schemas.microsoft.com/office/drawing/2014/main" id="{961295F3-D583-47A9-BFED-EA719B07D863}"/>
+                <a16:creationId xmlns:a16="http://schemas.microsoft.com/office/drawing/2014/main" id="{DB3BB90E-DC52-4AD4-9A08-609B51E5E7BB}"/>
               </a:ext>
             </a:extLst>
           </p:cNvPr>
@@ -20164,7 +20164,7 @@
           <p:cNvPr id="65" name="">
             <a:extLst xmlns:a="http://schemas.openxmlformats.org/drawingml/2006/main">
               <a:ext uri="{FF2B5EF4-FFF2-40B4-BE49-F238E27FC236}">
-                <a16:creationId xmlns:a16="http://schemas.microsoft.com/office/drawing/2014/main" id="{AE8201F7-B087-453F-BF3C-B09F98C72287}"/>
+                <a16:creationId xmlns:a16="http://schemas.microsoft.com/office/drawing/2014/main" id="{F5EC9FAC-43D6-4DB3-ABC4-72E5F85544B9}"/>
               </a:ext>
             </a:extLst>
           </p:cNvPr>
@@ -20216,7 +20216,7 @@
           <p:cNvPr id="66" name="">
             <a:extLst xmlns:a="http://schemas.openxmlformats.org/drawingml/2006/main">
               <a:ext uri="{FF2B5EF4-FFF2-40B4-BE49-F238E27FC236}">
-                <a16:creationId xmlns:a16="http://schemas.microsoft.com/office/drawing/2014/main" id="{B6C5191E-3D23-4F4D-9183-15D62F08BCFE}"/>
+                <a16:creationId xmlns:a16="http://schemas.microsoft.com/office/drawing/2014/main" id="{F0EDFF0D-6E6B-4B7D-B90D-4980DA0371FF}"/>
               </a:ext>
             </a:extLst>
           </p:cNvPr>
@@ -20268,7 +20268,7 @@
           <p:cNvPr id="67" name="">
             <a:extLst xmlns:a="http://schemas.openxmlformats.org/drawingml/2006/main">
               <a:ext uri="{FF2B5EF4-FFF2-40B4-BE49-F238E27FC236}">
-                <a16:creationId xmlns:a16="http://schemas.microsoft.com/office/drawing/2014/main" id="{96A0D6C9-5547-4581-B13F-BED1E24C4B52}"/>
+                <a16:creationId xmlns:a16="http://schemas.microsoft.com/office/drawing/2014/main" id="{DA8C54E2-1223-4E32-BC37-6621402C87FA}"/>
               </a:ext>
             </a:extLst>
           </p:cNvPr>
@@ -20320,7 +20320,7 @@
           <p:cNvPr id="68" name="">
             <a:extLst xmlns:a="http://schemas.openxmlformats.org/drawingml/2006/main">
               <a:ext uri="{FF2B5EF4-FFF2-40B4-BE49-F238E27FC236}">
-                <a16:creationId xmlns:a16="http://schemas.microsoft.com/office/drawing/2014/main" id="{C0E998CF-33CB-4A8E-8D59-B6573EFC382D}"/>
+                <a16:creationId xmlns:a16="http://schemas.microsoft.com/office/drawing/2014/main" id="{37031495-FF1E-438F-B84C-09ECE83F2FE3}"/>
               </a:ext>
             </a:extLst>
           </p:cNvPr>
@@ -20372,7 +20372,7 @@
           <p:cNvPr id="69" name="">
             <a:extLst xmlns:a="http://schemas.openxmlformats.org/drawingml/2006/main">
               <a:ext uri="{FF2B5EF4-FFF2-40B4-BE49-F238E27FC236}">
-                <a16:creationId xmlns:a16="http://schemas.microsoft.com/office/drawing/2014/main" id="{921F840B-3629-43B0-96A3-E880D806A85C}"/>
+                <a16:creationId xmlns:a16="http://schemas.microsoft.com/office/drawing/2014/main" id="{170FC777-89CC-4D10-AC64-3B47801AC1D5}"/>
               </a:ext>
             </a:extLst>
           </p:cNvPr>
@@ -20424,7 +20424,7 @@
           <p:cNvPr id="70" name="">
             <a:extLst xmlns:a="http://schemas.openxmlformats.org/drawingml/2006/main">
               <a:ext uri="{FF2B5EF4-FFF2-40B4-BE49-F238E27FC236}">
-                <a16:creationId xmlns:a16="http://schemas.microsoft.com/office/drawing/2014/main" id="{BC024F51-E59E-4E64-8E62-758E52F3737A}"/>
+                <a16:creationId xmlns:a16="http://schemas.microsoft.com/office/drawing/2014/main" id="{39F08BB4-DAF2-4098-8354-0BCD27FD3307}"/>
               </a:ext>
             </a:extLst>
           </p:cNvPr>
@@ -20455,7 +20455,7 @@
           <p:cNvPr id="71" name="">
             <a:extLst xmlns:a="http://schemas.openxmlformats.org/drawingml/2006/main">
               <a:ext uri="{FF2B5EF4-FFF2-40B4-BE49-F238E27FC236}">
-                <a16:creationId xmlns:a16="http://schemas.microsoft.com/office/drawing/2014/main" id="{CD9A1611-0ABE-40A5-AE7C-97DCCC4ECB8F}"/>
+                <a16:creationId xmlns:a16="http://schemas.microsoft.com/office/drawing/2014/main" id="{1A1A4A20-097E-417A-AED8-C2C299B00759}"/>
               </a:ext>
             </a:extLst>
           </p:cNvPr>
@@ -20486,7 +20486,7 @@
           <p:cNvPr id="72" name="">
             <a:extLst xmlns:a="http://schemas.openxmlformats.org/drawingml/2006/main">
               <a:ext uri="{FF2B5EF4-FFF2-40B4-BE49-F238E27FC236}">
-                <a16:creationId xmlns:a16="http://schemas.microsoft.com/office/drawing/2014/main" id="{E07DB3FA-6CED-46F4-B191-9B242AE0FA88}"/>
+                <a16:creationId xmlns:a16="http://schemas.microsoft.com/office/drawing/2014/main" id="{7B0BAA6E-016D-4D41-8002-7ED961FAAEAA}"/>
               </a:ext>
             </a:extLst>
           </p:cNvPr>
@@ -20538,7 +20538,7 @@
           <p:cNvPr id="73" name="">
             <a:extLst xmlns:a="http://schemas.openxmlformats.org/drawingml/2006/main">
               <a:ext uri="{FF2B5EF4-FFF2-40B4-BE49-F238E27FC236}">
-                <a16:creationId xmlns:a16="http://schemas.microsoft.com/office/drawing/2014/main" id="{92340229-B4BE-410B-95B1-969CF412AD5C}"/>
+                <a16:creationId xmlns:a16="http://schemas.microsoft.com/office/drawing/2014/main" id="{772C3215-17D2-49F4-A386-08AE753D0515}"/>
               </a:ext>
             </a:extLst>
           </p:cNvPr>
@@ -20590,7 +20590,7 @@
           <p:cNvPr id="74" name="">
             <a:extLst xmlns:a="http://schemas.openxmlformats.org/drawingml/2006/main">
               <a:ext uri="{FF2B5EF4-FFF2-40B4-BE49-F238E27FC236}">
-                <a16:creationId xmlns:a16="http://schemas.microsoft.com/office/drawing/2014/main" id="{0BBF10FF-CA28-4672-8AC5-949F3C831CDD}"/>
+                <a16:creationId xmlns:a16="http://schemas.microsoft.com/office/drawing/2014/main" id="{50D459B8-E0DA-4C10-9B67-FB5487582D83}"/>
               </a:ext>
             </a:extLst>
           </p:cNvPr>
@@ -20642,7 +20642,7 @@
           <p:cNvPr id="75" name="">
             <a:extLst xmlns:a="http://schemas.openxmlformats.org/drawingml/2006/main">
               <a:ext uri="{FF2B5EF4-FFF2-40B4-BE49-F238E27FC236}">
-                <a16:creationId xmlns:a16="http://schemas.microsoft.com/office/drawing/2014/main" id="{55DD9F94-755C-4ED4-9367-EAC6B4A0C584}"/>
+                <a16:creationId xmlns:a16="http://schemas.microsoft.com/office/drawing/2014/main" id="{417A3DED-0D8E-41EA-9E3D-406ACAF67B7B}"/>
               </a:ext>
             </a:extLst>
           </p:cNvPr>
@@ -20694,7 +20694,7 @@
           <p:cNvPr id="76" name="">
             <a:extLst xmlns:a="http://schemas.openxmlformats.org/drawingml/2006/main">
               <a:ext uri="{FF2B5EF4-FFF2-40B4-BE49-F238E27FC236}">
-                <a16:creationId xmlns:a16="http://schemas.microsoft.com/office/drawing/2014/main" id="{7412F864-2D6C-4898-81A7-CD89CA93D165}"/>
+                <a16:creationId xmlns:a16="http://schemas.microsoft.com/office/drawing/2014/main" id="{0C836AF4-E47E-4ECA-8D7E-89D4BDB3B5BB}"/>
               </a:ext>
             </a:extLst>
           </p:cNvPr>
@@ -20746,7 +20746,7 @@
           <p:cNvPr id="77" name="">
             <a:extLst xmlns:a="http://schemas.openxmlformats.org/drawingml/2006/main">
               <a:ext uri="{FF2B5EF4-FFF2-40B4-BE49-F238E27FC236}">
-                <a16:creationId xmlns:a16="http://schemas.microsoft.com/office/drawing/2014/main" id="{68D4AB83-1D13-40B0-A285-0BBF8B2FE493}"/>
+                <a16:creationId xmlns:a16="http://schemas.microsoft.com/office/drawing/2014/main" id="{A29FD246-34DB-4B50-9BE0-1B85B335F15A}"/>
               </a:ext>
             </a:extLst>
           </p:cNvPr>
@@ -20777,7 +20777,7 @@
           <p:cNvPr id="78" name="">
             <a:extLst xmlns:a="http://schemas.openxmlformats.org/drawingml/2006/main">
               <a:ext uri="{FF2B5EF4-FFF2-40B4-BE49-F238E27FC236}">
-                <a16:creationId xmlns:a16="http://schemas.microsoft.com/office/drawing/2014/main" id="{56466E1D-D6A9-4F30-848E-ED23CED31558}"/>
+                <a16:creationId xmlns:a16="http://schemas.microsoft.com/office/drawing/2014/main" id="{0806C3AE-EA43-4E69-BAAD-7ED01754AEB9}"/>
               </a:ext>
             </a:extLst>
           </p:cNvPr>
@@ -20829,7 +20829,7 @@
           <p:cNvPr id="79" name="">
             <a:extLst xmlns:a="http://schemas.openxmlformats.org/drawingml/2006/main">
               <a:ext uri="{FF2B5EF4-FFF2-40B4-BE49-F238E27FC236}">
-                <a16:creationId xmlns:a16="http://schemas.microsoft.com/office/drawing/2014/main" id="{ED509DF7-A8AA-4BED-9C02-B01D3340362A}"/>
+                <a16:creationId xmlns:a16="http://schemas.microsoft.com/office/drawing/2014/main" id="{C259232C-B4F1-4616-87EB-5AA0AEB1E205}"/>
               </a:ext>
             </a:extLst>
           </p:cNvPr>
@@ -20881,7 +20881,7 @@
           <p:cNvPr id="80" name="">
             <a:extLst xmlns:a="http://schemas.openxmlformats.org/drawingml/2006/main">
               <a:ext uri="{FF2B5EF4-FFF2-40B4-BE49-F238E27FC236}">
-                <a16:creationId xmlns:a16="http://schemas.microsoft.com/office/drawing/2014/main" id="{DB571EE5-D3E8-4A01-875C-A91BAB60D4A8}"/>
+                <a16:creationId xmlns:a16="http://schemas.microsoft.com/office/drawing/2014/main" id="{CED02605-2746-4A45-8C2C-A4306E81CF89}"/>
               </a:ext>
             </a:extLst>
           </p:cNvPr>
@@ -20933,7 +20933,7 @@
           <p:cNvPr id="81" name="">
             <a:extLst xmlns:a="http://schemas.openxmlformats.org/drawingml/2006/main">
               <a:ext uri="{FF2B5EF4-FFF2-40B4-BE49-F238E27FC236}">
-                <a16:creationId xmlns:a16="http://schemas.microsoft.com/office/drawing/2014/main" id="{41A6F7C7-D89E-4A2D-A3B6-3D724C59FF82}"/>
+                <a16:creationId xmlns:a16="http://schemas.microsoft.com/office/drawing/2014/main" id="{56541A12-B4D0-4F4B-8494-3604BE738C80}"/>
               </a:ext>
             </a:extLst>
           </p:cNvPr>
@@ -20985,7 +20985,7 @@
           <p:cNvPr id="82" name="">
             <a:extLst xmlns:a="http://schemas.openxmlformats.org/drawingml/2006/main">
               <a:ext uri="{FF2B5EF4-FFF2-40B4-BE49-F238E27FC236}">
-                <a16:creationId xmlns:a16="http://schemas.microsoft.com/office/drawing/2014/main" id="{A0861AF3-5C2E-485D-8296-38DD009197D1}"/>
+                <a16:creationId xmlns:a16="http://schemas.microsoft.com/office/drawing/2014/main" id="{6ECF01D6-729E-4CDF-AF39-971B64BCF183}"/>
               </a:ext>
             </a:extLst>
           </p:cNvPr>
@@ -21037,7 +21037,7 @@
           <p:cNvPr id="83" name="">
             <a:extLst xmlns:a="http://schemas.openxmlformats.org/drawingml/2006/main">
               <a:ext uri="{FF2B5EF4-FFF2-40B4-BE49-F238E27FC236}">
-                <a16:creationId xmlns:a16="http://schemas.microsoft.com/office/drawing/2014/main" id="{AE1FF6BE-F832-45B3-9C72-CDEA89146591}"/>
+                <a16:creationId xmlns:a16="http://schemas.microsoft.com/office/drawing/2014/main" id="{4C8795AB-065A-402C-B49B-C704A6BB5738}"/>
               </a:ext>
             </a:extLst>
           </p:cNvPr>
@@ -21068,7 +21068,7 @@
           <p:cNvPr id="84" name="">
             <a:extLst xmlns:a="http://schemas.openxmlformats.org/drawingml/2006/main">
               <a:ext uri="{FF2B5EF4-FFF2-40B4-BE49-F238E27FC236}">
-                <a16:creationId xmlns:a16="http://schemas.microsoft.com/office/drawing/2014/main" id="{9986C82B-69F4-4194-A293-96BC399CACFC}"/>
+                <a16:creationId xmlns:a16="http://schemas.microsoft.com/office/drawing/2014/main" id="{52295957-6B1F-411E-B3F6-A949028C7701}"/>
               </a:ext>
             </a:extLst>
           </p:cNvPr>
@@ -21120,7 +21120,7 @@
           <p:cNvPr id="85" name="">
             <a:extLst xmlns:a="http://schemas.openxmlformats.org/drawingml/2006/main">
               <a:ext uri="{FF2B5EF4-FFF2-40B4-BE49-F238E27FC236}">
-                <a16:creationId xmlns:a16="http://schemas.microsoft.com/office/drawing/2014/main" id="{08E9215A-95EC-4A67-A7BA-11F5AB89E5FA}"/>
+                <a16:creationId xmlns:a16="http://schemas.microsoft.com/office/drawing/2014/main" id="{68769113-A2B9-4FA4-8095-3AC4630CCE19}"/>
               </a:ext>
             </a:extLst>
           </p:cNvPr>
@@ -21172,7 +21172,7 @@
           <p:cNvPr id="86" name="">
             <a:extLst xmlns:a="http://schemas.openxmlformats.org/drawingml/2006/main">
               <a:ext uri="{FF2B5EF4-FFF2-40B4-BE49-F238E27FC236}">
-                <a16:creationId xmlns:a16="http://schemas.microsoft.com/office/drawing/2014/main" id="{5523D908-DA03-4100-87DE-D6C6467F7E86}"/>
+                <a16:creationId xmlns:a16="http://schemas.microsoft.com/office/drawing/2014/main" id="{8670D416-4402-4EF9-809A-83016DBF9833}"/>
               </a:ext>
             </a:extLst>
           </p:cNvPr>
@@ -21224,7 +21224,7 @@
           <p:cNvPr id="87" name="">
             <a:extLst xmlns:a="http://schemas.openxmlformats.org/drawingml/2006/main">
               <a:ext uri="{FF2B5EF4-FFF2-40B4-BE49-F238E27FC236}">
-                <a16:creationId xmlns:a16="http://schemas.microsoft.com/office/drawing/2014/main" id="{EFB8A146-9E6C-4F7C-AF0F-40C5AB5BEA9A}"/>
+                <a16:creationId xmlns:a16="http://schemas.microsoft.com/office/drawing/2014/main" id="{FD852258-68DF-4DDC-9808-09A32770EC3F}"/>
               </a:ext>
             </a:extLst>
           </p:cNvPr>
@@ -21276,7 +21276,7 @@
           <p:cNvPr id="88" name="">
             <a:extLst xmlns:a="http://schemas.openxmlformats.org/drawingml/2006/main">
               <a:ext uri="{FF2B5EF4-FFF2-40B4-BE49-F238E27FC236}">
-                <a16:creationId xmlns:a16="http://schemas.microsoft.com/office/drawing/2014/main" id="{D8C274F6-83C1-450D-B12A-53370B20E20D}"/>
+                <a16:creationId xmlns:a16="http://schemas.microsoft.com/office/drawing/2014/main" id="{F5FA8FBC-C12B-43BA-B5F7-C512934DC0A9}"/>
               </a:ext>
             </a:extLst>
           </p:cNvPr>
@@ -21328,7 +21328,7 @@
           <p:cNvPr id="89" name="">
             <a:extLst xmlns:a="http://schemas.openxmlformats.org/drawingml/2006/main">
               <a:ext uri="{FF2B5EF4-FFF2-40B4-BE49-F238E27FC236}">
-                <a16:creationId xmlns:a16="http://schemas.microsoft.com/office/drawing/2014/main" id="{8E9AE32D-3C27-4578-AD79-FD4BD92D34B2}"/>
+                <a16:creationId xmlns:a16="http://schemas.microsoft.com/office/drawing/2014/main" id="{66D0D9EA-A0EE-4B93-B3B7-F0DF43014857}"/>
               </a:ext>
             </a:extLst>
           </p:cNvPr>
@@ -21359,7 +21359,7 @@
           <p:cNvPr id="90" name="">
             <a:extLst xmlns:a="http://schemas.openxmlformats.org/drawingml/2006/main">
               <a:ext uri="{FF2B5EF4-FFF2-40B4-BE49-F238E27FC236}">
-                <a16:creationId xmlns:a16="http://schemas.microsoft.com/office/drawing/2014/main" id="{AD68B155-0651-4F89-B904-81A6B07A0614}"/>
+                <a16:creationId xmlns:a16="http://schemas.microsoft.com/office/drawing/2014/main" id="{81433C10-D61D-4067-A0AF-5C35B96E9B17}"/>
               </a:ext>
             </a:extLst>
           </p:cNvPr>
@@ -21390,7 +21390,7 @@
           <p:cNvPr id="91" name="">
             <a:extLst xmlns:a="http://schemas.openxmlformats.org/drawingml/2006/main">
               <a:ext uri="{FF2B5EF4-FFF2-40B4-BE49-F238E27FC236}">
-                <a16:creationId xmlns:a16="http://schemas.microsoft.com/office/drawing/2014/main" id="{C7FAFAC6-44EA-4073-8A28-29712E6CC5A4}"/>
+                <a16:creationId xmlns:a16="http://schemas.microsoft.com/office/drawing/2014/main" id="{F4F480E8-DEF1-4444-8070-32AC709A212E}"/>
               </a:ext>
             </a:extLst>
           </p:cNvPr>
@@ -21442,7 +21442,7 @@
           <p:cNvPr id="92" name="">
             <a:extLst xmlns:a="http://schemas.openxmlformats.org/drawingml/2006/main">
               <a:ext uri="{FF2B5EF4-FFF2-40B4-BE49-F238E27FC236}">
-                <a16:creationId xmlns:a16="http://schemas.microsoft.com/office/drawing/2014/main" id="{60D953F0-CA2C-4980-BEB5-FD617B7CCED1}"/>
+                <a16:creationId xmlns:a16="http://schemas.microsoft.com/office/drawing/2014/main" id="{64A4F708-4E7B-4709-9E74-64A1A8FB915F}"/>
               </a:ext>
             </a:extLst>
           </p:cNvPr>
@@ -21494,7 +21494,7 @@
           <p:cNvPr id="93" name="">
             <a:extLst xmlns:a="http://schemas.openxmlformats.org/drawingml/2006/main">
               <a:ext uri="{FF2B5EF4-FFF2-40B4-BE49-F238E27FC236}">
-                <a16:creationId xmlns:a16="http://schemas.microsoft.com/office/drawing/2014/main" id="{E7A239EB-F788-49B7-B8AB-DB8459407A76}"/>
+                <a16:creationId xmlns:a16="http://schemas.microsoft.com/office/drawing/2014/main" id="{7855D32D-9F6A-4413-9C10-9236AB8A82EB}"/>
               </a:ext>
             </a:extLst>
           </p:cNvPr>
@@ -21546,7 +21546,7 @@
           <p:cNvPr id="94" name="">
             <a:extLst xmlns:a="http://schemas.openxmlformats.org/drawingml/2006/main">
               <a:ext uri="{FF2B5EF4-FFF2-40B4-BE49-F238E27FC236}">
-                <a16:creationId xmlns:a16="http://schemas.microsoft.com/office/drawing/2014/main" id="{713A1C98-5C0E-4AA1-9E9A-20AB6CEA3D04}"/>
+                <a16:creationId xmlns:a16="http://schemas.microsoft.com/office/drawing/2014/main" id="{52C21E24-590F-43FF-B3F7-2849892D292D}"/>
               </a:ext>
             </a:extLst>
           </p:cNvPr>
@@ -21598,7 +21598,7 @@
           <p:cNvPr id="95" name="">
             <a:extLst xmlns:a="http://schemas.openxmlformats.org/drawingml/2006/main">
               <a:ext uri="{FF2B5EF4-FFF2-40B4-BE49-F238E27FC236}">
-                <a16:creationId xmlns:a16="http://schemas.microsoft.com/office/drawing/2014/main" id="{61A633E3-E06D-46EB-8490-7680696CFFF6}"/>
+                <a16:creationId xmlns:a16="http://schemas.microsoft.com/office/drawing/2014/main" id="{85FAE0A3-071D-4B89-A7AE-8C65542C0446}"/>
               </a:ext>
             </a:extLst>
           </p:cNvPr>
@@ -21648,7 +21648,7 @@
     </p:spTree>
     <p:extLst>
       <p:ext uri="{BB962C8B-B14F-4D97-AF65-F5344CB8AC3E}">
-        <p14:creationId xmlns:p14="http://schemas.microsoft.com/office/powerpoint/2010/main" val="1015084915"/>
+        <p14:creationId xmlns:p14="http://schemas.microsoft.com/office/powerpoint/2010/main" val="1502661489"/>
       </p:ext>
     </p:extLst>
   </p:cSld>
@@ -21679,7 +21679,7 @@
           <p:cNvPr id="135" name="">
             <a:extLst xmlns:a="http://schemas.openxmlformats.org/drawingml/2006/main">
               <a:ext uri="{FF2B5EF4-FFF2-40B4-BE49-F238E27FC236}">
-                <a16:creationId xmlns:a16="http://schemas.microsoft.com/office/drawing/2014/main" id="{49D9A2E4-3DCB-4F6C-8462-0AAF01B62893}"/>
+                <a16:creationId xmlns:a16="http://schemas.microsoft.com/office/drawing/2014/main" id="{BD087A8E-2249-49C0-B8E6-AB7BEE832008}"/>
               </a:ext>
             </a:extLst>
           </p:cNvPr>
@@ -21712,7 +21712,7 @@
           <p:cNvPr id="2" name="">
             <a:extLst xmlns:a="http://schemas.openxmlformats.org/drawingml/2006/main">
               <a:ext uri="{FF2B5EF4-FFF2-40B4-BE49-F238E27FC236}">
-                <a16:creationId xmlns:a16="http://schemas.microsoft.com/office/drawing/2014/main" id="{C319C474-1B53-4721-A1E6-D5A570E916DE}"/>
+                <a16:creationId xmlns:a16="http://schemas.microsoft.com/office/drawing/2014/main" id="{96E1C10C-4802-448F-9CFB-D02ED06D207C}"/>
               </a:ext>
             </a:extLst>
           </p:cNvPr>
@@ -21743,7 +21743,7 @@
           <p:cNvPr id="3" name="">
             <a:extLst xmlns:a="http://schemas.openxmlformats.org/drawingml/2006/main">
               <a:ext uri="{FF2B5EF4-FFF2-40B4-BE49-F238E27FC236}">
-                <a16:creationId xmlns:a16="http://schemas.microsoft.com/office/drawing/2014/main" id="{6CAD4DE0-6D0A-461C-BA89-F12D0277650E}"/>
+                <a16:creationId xmlns:a16="http://schemas.microsoft.com/office/drawing/2014/main" id="{1CF710A6-9F51-4E29-A933-64E1DE4FA31E}"/>
               </a:ext>
             </a:extLst>
           </p:cNvPr>
@@ -21795,7 +21795,7 @@
           <p:cNvPr id="4" name="">
             <a:extLst xmlns:a="http://schemas.openxmlformats.org/drawingml/2006/main">
               <a:ext uri="{FF2B5EF4-FFF2-40B4-BE49-F238E27FC236}">
-                <a16:creationId xmlns:a16="http://schemas.microsoft.com/office/drawing/2014/main" id="{9F35DC40-AD46-4090-BD2F-53C0BCCF1C37}"/>
+                <a16:creationId xmlns:a16="http://schemas.microsoft.com/office/drawing/2014/main" id="{38FBB9CE-79B2-4E56-8F39-6D672B0A519D}"/>
               </a:ext>
             </a:extLst>
           </p:cNvPr>
@@ -21847,7 +21847,7 @@
           <p:cNvPr id="5" name="">
             <a:extLst xmlns:a="http://schemas.openxmlformats.org/drawingml/2006/main">
               <a:ext uri="{FF2B5EF4-FFF2-40B4-BE49-F238E27FC236}">
-                <a16:creationId xmlns:a16="http://schemas.microsoft.com/office/drawing/2014/main" id="{91E651B4-AB1B-43A3-8BE1-7D7B3A544CCE}"/>
+                <a16:creationId xmlns:a16="http://schemas.microsoft.com/office/drawing/2014/main" id="{41433295-175C-4D95-8D25-601D7A9A92A0}"/>
               </a:ext>
             </a:extLst>
           </p:cNvPr>
@@ -21882,7 +21882,7 @@
           <p:nvPr/>
         </p:nvPicPr>
         <p:blipFill>
-          <a:blip xmlns:r="http://schemas.openxmlformats.org/officeDocument/2006/relationships" xmlns:a="http://schemas.openxmlformats.org/drawingml/2006/main" r:embed="R1ceaf2e1f7644e4c"/>
+          <a:blip xmlns:r="http://schemas.openxmlformats.org/officeDocument/2006/relationships" xmlns:a="http://schemas.openxmlformats.org/drawingml/2006/main" r:embed="R332e8afc8da24aed"/>
           <a:stretch xmlns:a="http://schemas.openxmlformats.org/drawingml/2006/main"/>
         </p:blipFill>
         <p:spPr>
@@ -21900,7 +21900,7 @@
           <p:cNvPr id="7" name="">
             <a:extLst xmlns:a="http://schemas.openxmlformats.org/drawingml/2006/main">
               <a:ext uri="{FF2B5EF4-FFF2-40B4-BE49-F238E27FC236}">
-                <a16:creationId xmlns:a16="http://schemas.microsoft.com/office/drawing/2014/main" id="{A1CA0D0D-307B-4A46-BCEF-66CF9395EE07}"/>
+                <a16:creationId xmlns:a16="http://schemas.microsoft.com/office/drawing/2014/main" id="{AE7530F7-BB90-4E89-A235-77DBEFAAE0BD}"/>
               </a:ext>
             </a:extLst>
           </p:cNvPr>
@@ -21952,7 +21952,7 @@
           <p:cNvPr id="8" name="">
             <a:extLst xmlns:a="http://schemas.openxmlformats.org/drawingml/2006/main">
               <a:ext uri="{FF2B5EF4-FFF2-40B4-BE49-F238E27FC236}">
-                <a16:creationId xmlns:a16="http://schemas.microsoft.com/office/drawing/2014/main" id="{6FF74318-89D3-4143-98E2-93076D3034D7}"/>
+                <a16:creationId xmlns:a16="http://schemas.microsoft.com/office/drawing/2014/main" id="{C97A2D77-017F-4244-8AF5-F10CA09C9473}"/>
               </a:ext>
             </a:extLst>
           </p:cNvPr>
@@ -22004,7 +22004,7 @@
           <p:cNvPr id="9" name="">
             <a:extLst xmlns:a="http://schemas.openxmlformats.org/drawingml/2006/main">
               <a:ext uri="{FF2B5EF4-FFF2-40B4-BE49-F238E27FC236}">
-                <a16:creationId xmlns:a16="http://schemas.microsoft.com/office/drawing/2014/main" id="{B578023E-65B0-4482-9393-8E1EAC529694}"/>
+                <a16:creationId xmlns:a16="http://schemas.microsoft.com/office/drawing/2014/main" id="{A10E52C1-368F-4BBA-AF21-9F1E50C3DC18}"/>
               </a:ext>
             </a:extLst>
           </p:cNvPr>
@@ -22056,7 +22056,7 @@
           <p:cNvPr id="10" name="">
             <a:extLst xmlns:a="http://schemas.openxmlformats.org/drawingml/2006/main">
               <a:ext uri="{FF2B5EF4-FFF2-40B4-BE49-F238E27FC236}">
-                <a16:creationId xmlns:a16="http://schemas.microsoft.com/office/drawing/2014/main" id="{9C987CF0-5614-4190-A75D-CFD181AD3EFA}"/>
+                <a16:creationId xmlns:a16="http://schemas.microsoft.com/office/drawing/2014/main" id="{BAD71C68-D081-4448-8485-8B03E3DA1E1B}"/>
               </a:ext>
             </a:extLst>
           </p:cNvPr>
@@ -22108,7 +22108,7 @@
           <p:cNvPr id="11" name="">
             <a:extLst xmlns:a="http://schemas.openxmlformats.org/drawingml/2006/main">
               <a:ext uri="{FF2B5EF4-FFF2-40B4-BE49-F238E27FC236}">
-                <a16:creationId xmlns:a16="http://schemas.microsoft.com/office/drawing/2014/main" id="{66F6A444-41C4-45DF-A525-5727A0DD7FA3}"/>
+                <a16:creationId xmlns:a16="http://schemas.microsoft.com/office/drawing/2014/main" id="{F9BCDBB0-2BB6-45E7-928C-B85D969203B1}"/>
               </a:ext>
             </a:extLst>
           </p:cNvPr>
@@ -22139,7 +22139,7 @@
           <p:cNvPr id="12" name="">
             <a:extLst xmlns:a="http://schemas.openxmlformats.org/drawingml/2006/main">
               <a:ext uri="{FF2B5EF4-FFF2-40B4-BE49-F238E27FC236}">
-                <a16:creationId xmlns:a16="http://schemas.microsoft.com/office/drawing/2014/main" id="{16C202FD-44F1-4B72-BD9C-19F012F76D76}"/>
+                <a16:creationId xmlns:a16="http://schemas.microsoft.com/office/drawing/2014/main" id="{607439D1-7276-4BEA-941D-6FA2A96785C3}"/>
               </a:ext>
             </a:extLst>
           </p:cNvPr>
@@ -22170,7 +22170,7 @@
           <p:cNvPr id="13" name="">
             <a:extLst xmlns:a="http://schemas.openxmlformats.org/drawingml/2006/main">
               <a:ext uri="{FF2B5EF4-FFF2-40B4-BE49-F238E27FC236}">
-                <a16:creationId xmlns:a16="http://schemas.microsoft.com/office/drawing/2014/main" id="{7757668A-EF63-407B-968B-2C0B8AD9CC70}"/>
+                <a16:creationId xmlns:a16="http://schemas.microsoft.com/office/drawing/2014/main" id="{B9725582-5687-49D2-BF3A-D09C1E1AA820}"/>
               </a:ext>
             </a:extLst>
           </p:cNvPr>
@@ -22222,7 +22222,7 @@
           <p:cNvPr id="14" name="">
             <a:extLst xmlns:a="http://schemas.openxmlformats.org/drawingml/2006/main">
               <a:ext uri="{FF2B5EF4-FFF2-40B4-BE49-F238E27FC236}">
-                <a16:creationId xmlns:a16="http://schemas.microsoft.com/office/drawing/2014/main" id="{EF9A8DC8-BB8A-4C4E-9C39-DC2F7A2030D8}"/>
+                <a16:creationId xmlns:a16="http://schemas.microsoft.com/office/drawing/2014/main" id="{4775FF64-A797-4B2E-93B1-28C5175FC9AC}"/>
               </a:ext>
             </a:extLst>
           </p:cNvPr>
@@ -22274,7 +22274,7 @@
           <p:cNvPr id="15" name="">
             <a:extLst xmlns:a="http://schemas.openxmlformats.org/drawingml/2006/main">
               <a:ext uri="{FF2B5EF4-FFF2-40B4-BE49-F238E27FC236}">
-                <a16:creationId xmlns:a16="http://schemas.microsoft.com/office/drawing/2014/main" id="{0FAEC3D2-11CF-4452-A362-F2A1A2773602}"/>
+                <a16:creationId xmlns:a16="http://schemas.microsoft.com/office/drawing/2014/main" id="{B2131833-63A8-436A-80A2-5CDEC26FB61A}"/>
               </a:ext>
             </a:extLst>
           </p:cNvPr>
@@ -22326,7 +22326,7 @@
           <p:cNvPr id="16" name="">
             <a:extLst xmlns:a="http://schemas.openxmlformats.org/drawingml/2006/main">
               <a:ext uri="{FF2B5EF4-FFF2-40B4-BE49-F238E27FC236}">
-                <a16:creationId xmlns:a16="http://schemas.microsoft.com/office/drawing/2014/main" id="{E9ACE0EA-CC7C-4C2C-996C-BA1280786EB8}"/>
+                <a16:creationId xmlns:a16="http://schemas.microsoft.com/office/drawing/2014/main" id="{80631591-484A-4BBD-B030-1C5B899F952C}"/>
               </a:ext>
             </a:extLst>
           </p:cNvPr>
@@ -22378,7 +22378,7 @@
           <p:cNvPr id="17" name="">
             <a:extLst xmlns:a="http://schemas.openxmlformats.org/drawingml/2006/main">
               <a:ext uri="{FF2B5EF4-FFF2-40B4-BE49-F238E27FC236}">
-                <a16:creationId xmlns:a16="http://schemas.microsoft.com/office/drawing/2014/main" id="{A91ADEFA-D2F6-42D8-842C-C9E2C3D036C8}"/>
+                <a16:creationId xmlns:a16="http://schemas.microsoft.com/office/drawing/2014/main" id="{789DF6AA-21E4-4C31-9F2D-EA1B674A7066}"/>
               </a:ext>
             </a:extLst>
           </p:cNvPr>
@@ -22430,7 +22430,7 @@
           <p:cNvPr id="18" name="">
             <a:extLst xmlns:a="http://schemas.openxmlformats.org/drawingml/2006/main">
               <a:ext uri="{FF2B5EF4-FFF2-40B4-BE49-F238E27FC236}">
-                <a16:creationId xmlns:a16="http://schemas.microsoft.com/office/drawing/2014/main" id="{980F9552-16C5-476F-BE21-39E20B9357D5}"/>
+                <a16:creationId xmlns:a16="http://schemas.microsoft.com/office/drawing/2014/main" id="{19292E1B-77C5-4BBA-84F3-C398C1B240A9}"/>
               </a:ext>
             </a:extLst>
           </p:cNvPr>
@@ -22482,7 +22482,7 @@
           <p:cNvPr id="19" name="">
             <a:extLst xmlns:a="http://schemas.openxmlformats.org/drawingml/2006/main">
               <a:ext uri="{FF2B5EF4-FFF2-40B4-BE49-F238E27FC236}">
-                <a16:creationId xmlns:a16="http://schemas.microsoft.com/office/drawing/2014/main" id="{71E06AD3-61E9-4AA4-BD4A-C4023D01FBF3}"/>
+                <a16:creationId xmlns:a16="http://schemas.microsoft.com/office/drawing/2014/main" id="{D9A69DED-ABEE-40F5-954C-85DA82438B07}"/>
               </a:ext>
             </a:extLst>
           </p:cNvPr>
@@ -22534,7 +22534,7 @@
           <p:cNvPr id="20" name="">
             <a:extLst xmlns:a="http://schemas.openxmlformats.org/drawingml/2006/main">
               <a:ext uri="{FF2B5EF4-FFF2-40B4-BE49-F238E27FC236}">
-                <a16:creationId xmlns:a16="http://schemas.microsoft.com/office/drawing/2014/main" id="{BF8D5960-E7DE-4918-8E6E-6851D1F89DA6}"/>
+                <a16:creationId xmlns:a16="http://schemas.microsoft.com/office/drawing/2014/main" id="{507994CF-3F8D-47AD-AE33-DAF559FDAEB8}"/>
               </a:ext>
             </a:extLst>
           </p:cNvPr>
@@ -22586,7 +22586,7 @@
           <p:cNvPr id="21" name="">
             <a:extLst xmlns:a="http://schemas.openxmlformats.org/drawingml/2006/main">
               <a:ext uri="{FF2B5EF4-FFF2-40B4-BE49-F238E27FC236}">
-                <a16:creationId xmlns:a16="http://schemas.microsoft.com/office/drawing/2014/main" id="{595A5270-ABD5-440C-B80C-9759056EC7C1}"/>
+                <a16:creationId xmlns:a16="http://schemas.microsoft.com/office/drawing/2014/main" id="{D4B66490-C7A9-48A4-A8DC-990DAEB08051}"/>
               </a:ext>
             </a:extLst>
           </p:cNvPr>
@@ -22617,7 +22617,7 @@
           <p:cNvPr id="22" name="">
             <a:extLst xmlns:a="http://schemas.openxmlformats.org/drawingml/2006/main">
               <a:ext uri="{FF2B5EF4-FFF2-40B4-BE49-F238E27FC236}">
-                <a16:creationId xmlns:a16="http://schemas.microsoft.com/office/drawing/2014/main" id="{FEE2DE20-09B9-4424-A89C-D5A8D4A9BE3C}"/>
+                <a16:creationId xmlns:a16="http://schemas.microsoft.com/office/drawing/2014/main" id="{7E390A7F-69BA-401E-9F54-656AD1BCF01D}"/>
               </a:ext>
             </a:extLst>
           </p:cNvPr>
@@ -22669,7 +22669,7 @@
           <p:cNvPr id="23" name="">
             <a:extLst xmlns:a="http://schemas.openxmlformats.org/drawingml/2006/main">
               <a:ext uri="{FF2B5EF4-FFF2-40B4-BE49-F238E27FC236}">
-                <a16:creationId xmlns:a16="http://schemas.microsoft.com/office/drawing/2014/main" id="{81D80AC4-3BF7-44AE-BE22-3D6A3A40F2E0}"/>
+                <a16:creationId xmlns:a16="http://schemas.microsoft.com/office/drawing/2014/main" id="{1364C1B0-5134-4B36-A223-48CCF0788517}"/>
               </a:ext>
             </a:extLst>
           </p:cNvPr>
@@ -22721,7 +22721,7 @@
           <p:cNvPr id="24" name="">
             <a:extLst xmlns:a="http://schemas.openxmlformats.org/drawingml/2006/main">
               <a:ext uri="{FF2B5EF4-FFF2-40B4-BE49-F238E27FC236}">
-                <a16:creationId xmlns:a16="http://schemas.microsoft.com/office/drawing/2014/main" id="{B6CDDA01-33C9-4065-A44A-D945C1FB7772}"/>
+                <a16:creationId xmlns:a16="http://schemas.microsoft.com/office/drawing/2014/main" id="{18156189-4FB3-4479-8B9A-9C287AE3A4EE}"/>
               </a:ext>
             </a:extLst>
           </p:cNvPr>
@@ -22773,7 +22773,7 @@
           <p:cNvPr id="25" name="">
             <a:extLst xmlns:a="http://schemas.openxmlformats.org/drawingml/2006/main">
               <a:ext uri="{FF2B5EF4-FFF2-40B4-BE49-F238E27FC236}">
-                <a16:creationId xmlns:a16="http://schemas.microsoft.com/office/drawing/2014/main" id="{43EC7005-4841-461F-A386-4E3C5800358A}"/>
+                <a16:creationId xmlns:a16="http://schemas.microsoft.com/office/drawing/2014/main" id="{52D38380-38C0-4513-AB4E-64318A1BA740}"/>
               </a:ext>
             </a:extLst>
           </p:cNvPr>
@@ -22825,7 +22825,7 @@
           <p:cNvPr id="26" name="">
             <a:extLst xmlns:a="http://schemas.openxmlformats.org/drawingml/2006/main">
               <a:ext uri="{FF2B5EF4-FFF2-40B4-BE49-F238E27FC236}">
-                <a16:creationId xmlns:a16="http://schemas.microsoft.com/office/drawing/2014/main" id="{190F58F8-8C57-402C-9594-625A8EEEA476}"/>
+                <a16:creationId xmlns:a16="http://schemas.microsoft.com/office/drawing/2014/main" id="{A23CC324-6BC1-47CD-B743-7676B0563CDA}"/>
               </a:ext>
             </a:extLst>
           </p:cNvPr>
@@ -22877,7 +22877,7 @@
           <p:cNvPr id="27" name="">
             <a:extLst xmlns:a="http://schemas.openxmlformats.org/drawingml/2006/main">
               <a:ext uri="{FF2B5EF4-FFF2-40B4-BE49-F238E27FC236}">
-                <a16:creationId xmlns:a16="http://schemas.microsoft.com/office/drawing/2014/main" id="{4EC5C480-E058-4093-B83E-D0D3EF1FFCCA}"/>
+                <a16:creationId xmlns:a16="http://schemas.microsoft.com/office/drawing/2014/main" id="{FF02CE54-61FC-4C1B-AE2C-48B063BA868F}"/>
               </a:ext>
             </a:extLst>
           </p:cNvPr>
@@ -22929,7 +22929,7 @@
           <p:cNvPr id="28" name="">
             <a:extLst xmlns:a="http://schemas.openxmlformats.org/drawingml/2006/main">
               <a:ext uri="{FF2B5EF4-FFF2-40B4-BE49-F238E27FC236}">
-                <a16:creationId xmlns:a16="http://schemas.microsoft.com/office/drawing/2014/main" id="{383F9C27-7A1D-46AA-B772-F9DC1DA6F07F}"/>
+                <a16:creationId xmlns:a16="http://schemas.microsoft.com/office/drawing/2014/main" id="{8A8DD44E-2861-4D17-B310-22C7E44855B8}"/>
               </a:ext>
             </a:extLst>
           </p:cNvPr>
@@ -22981,7 +22981,7 @@
           <p:cNvPr id="29" name="">
             <a:extLst xmlns:a="http://schemas.openxmlformats.org/drawingml/2006/main">
               <a:ext uri="{FF2B5EF4-FFF2-40B4-BE49-F238E27FC236}">
-                <a16:creationId xmlns:a16="http://schemas.microsoft.com/office/drawing/2014/main" id="{024D21F2-F4CE-43E6-9A18-CB02C65BEAA6}"/>
+                <a16:creationId xmlns:a16="http://schemas.microsoft.com/office/drawing/2014/main" id="{3E7DC2BC-00EE-4737-803E-BE329B93D9EF}"/>
               </a:ext>
             </a:extLst>
           </p:cNvPr>
@@ -23033,7 +23033,7 @@
           <p:cNvPr id="30" name="">
             <a:extLst xmlns:a="http://schemas.openxmlformats.org/drawingml/2006/main">
               <a:ext uri="{FF2B5EF4-FFF2-40B4-BE49-F238E27FC236}">
-                <a16:creationId xmlns:a16="http://schemas.microsoft.com/office/drawing/2014/main" id="{4873CB1C-DCF4-4F3F-831E-0B860E090ABD}"/>
+                <a16:creationId xmlns:a16="http://schemas.microsoft.com/office/drawing/2014/main" id="{E4DA380F-1888-4D1B-A696-D9D9E11B99E8}"/>
               </a:ext>
             </a:extLst>
           </p:cNvPr>
@@ -23064,7 +23064,7 @@
           <p:cNvPr id="31" name="">
             <a:extLst xmlns:a="http://schemas.openxmlformats.org/drawingml/2006/main">
               <a:ext uri="{FF2B5EF4-FFF2-40B4-BE49-F238E27FC236}">
-                <a16:creationId xmlns:a16="http://schemas.microsoft.com/office/drawing/2014/main" id="{A842A799-4B91-49B2-B8BC-0A2624F4EABD}"/>
+                <a16:creationId xmlns:a16="http://schemas.microsoft.com/office/drawing/2014/main" id="{E932A119-D770-4C93-A679-61105E713902}"/>
               </a:ext>
             </a:extLst>
           </p:cNvPr>
@@ -23095,7 +23095,7 @@
           <p:cNvPr id="32" name="">
             <a:extLst xmlns:a="http://schemas.openxmlformats.org/drawingml/2006/main">
               <a:ext uri="{FF2B5EF4-FFF2-40B4-BE49-F238E27FC236}">
-                <a16:creationId xmlns:a16="http://schemas.microsoft.com/office/drawing/2014/main" id="{7506B71F-44E7-4AF3-93FD-F672686ECF8D}"/>
+                <a16:creationId xmlns:a16="http://schemas.microsoft.com/office/drawing/2014/main" id="{38439E23-3F74-4684-9D4B-99F15862BE96}"/>
               </a:ext>
             </a:extLst>
           </p:cNvPr>
@@ -23147,7 +23147,7 @@
           <p:cNvPr id="33" name="">
             <a:extLst xmlns:a="http://schemas.openxmlformats.org/drawingml/2006/main">
               <a:ext uri="{FF2B5EF4-FFF2-40B4-BE49-F238E27FC236}">
-                <a16:creationId xmlns:a16="http://schemas.microsoft.com/office/drawing/2014/main" id="{8468967D-716D-48BB-A448-18755F127406}"/>
+                <a16:creationId xmlns:a16="http://schemas.microsoft.com/office/drawing/2014/main" id="{28912748-28EF-4E10-853B-15B7E4E125D5}"/>
               </a:ext>
             </a:extLst>
           </p:cNvPr>
@@ -23199,7 +23199,7 @@
           <p:cNvPr id="34" name="">
             <a:extLst xmlns:a="http://schemas.openxmlformats.org/drawingml/2006/main">
               <a:ext uri="{FF2B5EF4-FFF2-40B4-BE49-F238E27FC236}">
-                <a16:creationId xmlns:a16="http://schemas.microsoft.com/office/drawing/2014/main" id="{76EB46A5-EB8D-4718-9376-309C5EAAF72E}"/>
+                <a16:creationId xmlns:a16="http://schemas.microsoft.com/office/drawing/2014/main" id="{37FF4975-ADFF-4F26-BC75-1CF3614C5338}"/>
               </a:ext>
             </a:extLst>
           </p:cNvPr>
@@ -23251,7 +23251,7 @@
           <p:cNvPr id="35" name="">
             <a:extLst xmlns:a="http://schemas.openxmlformats.org/drawingml/2006/main">
               <a:ext uri="{FF2B5EF4-FFF2-40B4-BE49-F238E27FC236}">
-                <a16:creationId xmlns:a16="http://schemas.microsoft.com/office/drawing/2014/main" id="{09ECC5C8-95CA-453A-BB8B-14A89ACDADAA}"/>
+                <a16:creationId xmlns:a16="http://schemas.microsoft.com/office/drawing/2014/main" id="{813A8217-68DE-466B-AD7F-2F8FD46D6A45}"/>
               </a:ext>
             </a:extLst>
           </p:cNvPr>
@@ -23303,7 +23303,7 @@
           <p:cNvPr id="36" name="">
             <a:extLst xmlns:a="http://schemas.openxmlformats.org/drawingml/2006/main">
               <a:ext uri="{FF2B5EF4-FFF2-40B4-BE49-F238E27FC236}">
-                <a16:creationId xmlns:a16="http://schemas.microsoft.com/office/drawing/2014/main" id="{DDB09584-54DF-4D1C-B0C0-134E9ACD8042}"/>
+                <a16:creationId xmlns:a16="http://schemas.microsoft.com/office/drawing/2014/main" id="{A6AB1012-9F65-41E3-868A-EA9D4D32C84C}"/>
               </a:ext>
             </a:extLst>
           </p:cNvPr>
@@ -23355,7 +23355,7 @@
           <p:cNvPr id="37" name="">
             <a:extLst xmlns:a="http://schemas.openxmlformats.org/drawingml/2006/main">
               <a:ext uri="{FF2B5EF4-FFF2-40B4-BE49-F238E27FC236}">
-                <a16:creationId xmlns:a16="http://schemas.microsoft.com/office/drawing/2014/main" id="{CDD942E6-F043-4D20-8E9A-D392FA373274}"/>
+                <a16:creationId xmlns:a16="http://schemas.microsoft.com/office/drawing/2014/main" id="{F9E7A117-B7A6-4293-B700-4249637D3A8A}"/>
               </a:ext>
             </a:extLst>
           </p:cNvPr>
@@ -23407,7 +23407,7 @@
           <p:cNvPr id="38" name="">
             <a:extLst xmlns:a="http://schemas.openxmlformats.org/drawingml/2006/main">
               <a:ext uri="{FF2B5EF4-FFF2-40B4-BE49-F238E27FC236}">
-                <a16:creationId xmlns:a16="http://schemas.microsoft.com/office/drawing/2014/main" id="{EDBA60CB-83D7-43AE-BB81-B771D1426D4A}"/>
+                <a16:creationId xmlns:a16="http://schemas.microsoft.com/office/drawing/2014/main" id="{DF7CAC6C-15A9-4509-BEEE-27C68F6B841A}"/>
               </a:ext>
             </a:extLst>
           </p:cNvPr>
@@ -23459,7 +23459,7 @@
           <p:cNvPr id="39" name="">
             <a:extLst xmlns:a="http://schemas.openxmlformats.org/drawingml/2006/main">
               <a:ext uri="{FF2B5EF4-FFF2-40B4-BE49-F238E27FC236}">
-                <a16:creationId xmlns:a16="http://schemas.microsoft.com/office/drawing/2014/main" id="{6549A9FA-522C-4C29-8C1C-8E178AB234F1}"/>
+                <a16:creationId xmlns:a16="http://schemas.microsoft.com/office/drawing/2014/main" id="{75C22F07-9E14-43F2-ADF0-43500FE31512}"/>
               </a:ext>
             </a:extLst>
           </p:cNvPr>
@@ -23511,7 +23511,7 @@
           <p:cNvPr id="40" name="">
             <a:extLst xmlns:a="http://schemas.openxmlformats.org/drawingml/2006/main">
               <a:ext uri="{FF2B5EF4-FFF2-40B4-BE49-F238E27FC236}">
-                <a16:creationId xmlns:a16="http://schemas.microsoft.com/office/drawing/2014/main" id="{75D1E1DD-0794-42DB-BBD2-7A789313B33E}"/>
+                <a16:creationId xmlns:a16="http://schemas.microsoft.com/office/drawing/2014/main" id="{90010B00-2490-4630-9A05-5DE77915EB71}"/>
               </a:ext>
             </a:extLst>
           </p:cNvPr>
@@ -23542,7 +23542,7 @@
           <p:cNvPr id="41" name="">
             <a:extLst xmlns:a="http://schemas.openxmlformats.org/drawingml/2006/main">
               <a:ext uri="{FF2B5EF4-FFF2-40B4-BE49-F238E27FC236}">
-                <a16:creationId xmlns:a16="http://schemas.microsoft.com/office/drawing/2014/main" id="{9156E0E1-BE37-479A-A63A-99BBA7BA3BC6}"/>
+                <a16:creationId xmlns:a16="http://schemas.microsoft.com/office/drawing/2014/main" id="{0468DFFB-B79B-4594-9B15-CAC6CF9F0C33}"/>
               </a:ext>
             </a:extLst>
           </p:cNvPr>
@@ -23594,7 +23594,7 @@
           <p:cNvPr id="42" name="">
             <a:extLst xmlns:a="http://schemas.openxmlformats.org/drawingml/2006/main">
               <a:ext uri="{FF2B5EF4-FFF2-40B4-BE49-F238E27FC236}">
-                <a16:creationId xmlns:a16="http://schemas.microsoft.com/office/drawing/2014/main" id="{7D9289C0-616B-480A-B790-EE0700F60FB4}"/>
+                <a16:creationId xmlns:a16="http://schemas.microsoft.com/office/drawing/2014/main" id="{563E72B5-023B-44BE-8A9B-F21596B7E8E0}"/>
               </a:ext>
             </a:extLst>
           </p:cNvPr>
@@ -23646,7 +23646,7 @@
           <p:cNvPr id="43" name="">
             <a:extLst xmlns:a="http://schemas.openxmlformats.org/drawingml/2006/main">
               <a:ext uri="{FF2B5EF4-FFF2-40B4-BE49-F238E27FC236}">
-                <a16:creationId xmlns:a16="http://schemas.microsoft.com/office/drawing/2014/main" id="{47053EF1-FDEF-46B2-AD39-A819D5DBCFF5}"/>
+                <a16:creationId xmlns:a16="http://schemas.microsoft.com/office/drawing/2014/main" id="{8682DC9A-7306-4C87-AAB7-243FCD79A11A}"/>
               </a:ext>
             </a:extLst>
           </p:cNvPr>
@@ -23698,7 +23698,7 @@
           <p:cNvPr id="44" name="">
             <a:extLst xmlns:a="http://schemas.openxmlformats.org/drawingml/2006/main">
               <a:ext uri="{FF2B5EF4-FFF2-40B4-BE49-F238E27FC236}">
-                <a16:creationId xmlns:a16="http://schemas.microsoft.com/office/drawing/2014/main" id="{971919A7-8A76-4576-B779-506B7820CA9E}"/>
+                <a16:creationId xmlns:a16="http://schemas.microsoft.com/office/drawing/2014/main" id="{AEB978D8-F215-4070-BC8E-769B726A089A}"/>
               </a:ext>
             </a:extLst>
           </p:cNvPr>
@@ -23750,7 +23750,7 @@
           <p:cNvPr id="45" name="">
             <a:extLst xmlns:a="http://schemas.openxmlformats.org/drawingml/2006/main">
               <a:ext uri="{FF2B5EF4-FFF2-40B4-BE49-F238E27FC236}">
-                <a16:creationId xmlns:a16="http://schemas.microsoft.com/office/drawing/2014/main" id="{41BF66D8-9AB6-4D91-A388-D13A952398C1}"/>
+                <a16:creationId xmlns:a16="http://schemas.microsoft.com/office/drawing/2014/main" id="{814D80B4-3A6C-4A10-A7B8-D086D9E9ACAA}"/>
               </a:ext>
             </a:extLst>
           </p:cNvPr>
@@ -23802,7 +23802,7 @@
           <p:cNvPr id="46" name="">
             <a:extLst xmlns:a="http://schemas.openxmlformats.org/drawingml/2006/main">
               <a:ext uri="{FF2B5EF4-FFF2-40B4-BE49-F238E27FC236}">
-                <a16:creationId xmlns:a16="http://schemas.microsoft.com/office/drawing/2014/main" id="{FCD8E551-C1B2-4CDE-9623-53ED5E4F0756}"/>
+                <a16:creationId xmlns:a16="http://schemas.microsoft.com/office/drawing/2014/main" id="{0EA3EBCF-5618-4604-BB92-8ECFF6677FA6}"/>
               </a:ext>
             </a:extLst>
           </p:cNvPr>
@@ -23854,7 +23854,7 @@
           <p:cNvPr id="47" name="">
             <a:extLst xmlns:a="http://schemas.openxmlformats.org/drawingml/2006/main">
               <a:ext uri="{FF2B5EF4-FFF2-40B4-BE49-F238E27FC236}">
-                <a16:creationId xmlns:a16="http://schemas.microsoft.com/office/drawing/2014/main" id="{9FBEB2E4-E72A-4DCC-B4AD-8B4633238AD8}"/>
+                <a16:creationId xmlns:a16="http://schemas.microsoft.com/office/drawing/2014/main" id="{E97EBBAA-001C-4399-A0B3-2FD27804D95B}"/>
               </a:ext>
             </a:extLst>
           </p:cNvPr>
@@ -23906,7 +23906,7 @@
           <p:cNvPr id="48" name="">
             <a:extLst xmlns:a="http://schemas.openxmlformats.org/drawingml/2006/main">
               <a:ext uri="{FF2B5EF4-FFF2-40B4-BE49-F238E27FC236}">
-                <a16:creationId xmlns:a16="http://schemas.microsoft.com/office/drawing/2014/main" id="{50861077-A871-463D-80EE-C1E93280111F}"/>
+                <a16:creationId xmlns:a16="http://schemas.microsoft.com/office/drawing/2014/main" id="{AA70CC36-649B-47E1-860A-594EAE0A70F0}"/>
               </a:ext>
             </a:extLst>
           </p:cNvPr>
@@ -23958,7 +23958,7 @@
           <p:cNvPr id="49" name="">
             <a:extLst xmlns:a="http://schemas.openxmlformats.org/drawingml/2006/main">
               <a:ext uri="{FF2B5EF4-FFF2-40B4-BE49-F238E27FC236}">
-                <a16:creationId xmlns:a16="http://schemas.microsoft.com/office/drawing/2014/main" id="{38955A9B-61B4-4F6A-86BA-C426E9DAAAF9}"/>
+                <a16:creationId xmlns:a16="http://schemas.microsoft.com/office/drawing/2014/main" id="{AA1640DF-6CA9-4407-8FB1-5B7C6B686FD2}"/>
               </a:ext>
             </a:extLst>
           </p:cNvPr>
@@ -23989,7 +23989,7 @@
           <p:cNvPr id="50" name="">
             <a:extLst xmlns:a="http://schemas.openxmlformats.org/drawingml/2006/main">
               <a:ext uri="{FF2B5EF4-FFF2-40B4-BE49-F238E27FC236}">
-                <a16:creationId xmlns:a16="http://schemas.microsoft.com/office/drawing/2014/main" id="{5E0639BB-9F36-4720-B4F6-B8A8333C0745}"/>
+                <a16:creationId xmlns:a16="http://schemas.microsoft.com/office/drawing/2014/main" id="{914F3BDD-F8BC-4707-B40E-FCAAEF6FC4DE}"/>
               </a:ext>
             </a:extLst>
           </p:cNvPr>
@@ -24020,7 +24020,7 @@
           <p:cNvPr id="51" name="">
             <a:extLst xmlns:a="http://schemas.openxmlformats.org/drawingml/2006/main">
               <a:ext uri="{FF2B5EF4-FFF2-40B4-BE49-F238E27FC236}">
-                <a16:creationId xmlns:a16="http://schemas.microsoft.com/office/drawing/2014/main" id="{FA1B849D-8E28-4F1D-A2B5-B927363513B8}"/>
+                <a16:creationId xmlns:a16="http://schemas.microsoft.com/office/drawing/2014/main" id="{31193A8E-F8CB-44C9-8EB8-0B1C01B1BFAD}"/>
               </a:ext>
             </a:extLst>
           </p:cNvPr>
@@ -24072,7 +24072,7 @@
           <p:cNvPr id="52" name="">
             <a:extLst xmlns:a="http://schemas.openxmlformats.org/drawingml/2006/main">
               <a:ext uri="{FF2B5EF4-FFF2-40B4-BE49-F238E27FC236}">
-                <a16:creationId xmlns:a16="http://schemas.microsoft.com/office/drawing/2014/main" id="{DFE4CAD1-3612-4FE2-BF16-B5BFC8C05DCF}"/>
+                <a16:creationId xmlns:a16="http://schemas.microsoft.com/office/drawing/2014/main" id="{5E5F7535-167C-44DF-8A0B-442F38D2790B}"/>
               </a:ext>
             </a:extLst>
           </p:cNvPr>
@@ -24124,7 +24124,7 @@
           <p:cNvPr id="53" name="">
             <a:extLst xmlns:a="http://schemas.openxmlformats.org/drawingml/2006/main">
               <a:ext uri="{FF2B5EF4-FFF2-40B4-BE49-F238E27FC236}">
-                <a16:creationId xmlns:a16="http://schemas.microsoft.com/office/drawing/2014/main" id="{BFDBC182-85A3-4229-B642-C24BD7AD583C}"/>
+                <a16:creationId xmlns:a16="http://schemas.microsoft.com/office/drawing/2014/main" id="{EC6073F3-33D4-4571-8531-1E3144A75A11}"/>
               </a:ext>
             </a:extLst>
           </p:cNvPr>
@@ -24176,7 +24176,7 @@
           <p:cNvPr id="54" name="">
             <a:extLst xmlns:a="http://schemas.openxmlformats.org/drawingml/2006/main">
               <a:ext uri="{FF2B5EF4-FFF2-40B4-BE49-F238E27FC236}">
-                <a16:creationId xmlns:a16="http://schemas.microsoft.com/office/drawing/2014/main" id="{1F0A5A7D-7215-4080-87DD-E6F49C4DCC03}"/>
+                <a16:creationId xmlns:a16="http://schemas.microsoft.com/office/drawing/2014/main" id="{FC2B7C7C-3570-4169-8748-2B05665CA4F1}"/>
               </a:ext>
             </a:extLst>
           </p:cNvPr>
@@ -24228,7 +24228,7 @@
           <p:cNvPr id="55" name="">
             <a:extLst xmlns:a="http://schemas.openxmlformats.org/drawingml/2006/main">
               <a:ext uri="{FF2B5EF4-FFF2-40B4-BE49-F238E27FC236}">
-                <a16:creationId xmlns:a16="http://schemas.microsoft.com/office/drawing/2014/main" id="{81D130A8-7C9A-45F5-AB2D-CD1D36FBB009}"/>
+                <a16:creationId xmlns:a16="http://schemas.microsoft.com/office/drawing/2014/main" id="{2A4AC1F6-566C-436A-8716-618D2BAE6E4B}"/>
               </a:ext>
             </a:extLst>
           </p:cNvPr>
@@ -24280,7 +24280,7 @@
           <p:cNvPr id="56" name="">
             <a:extLst xmlns:a="http://schemas.openxmlformats.org/drawingml/2006/main">
               <a:ext uri="{FF2B5EF4-FFF2-40B4-BE49-F238E27FC236}">
-                <a16:creationId xmlns:a16="http://schemas.microsoft.com/office/drawing/2014/main" id="{0699968F-DDA2-4B2E-A75D-F560D21B831A}"/>
+                <a16:creationId xmlns:a16="http://schemas.microsoft.com/office/drawing/2014/main" id="{450A8F62-8385-4EC2-85FF-B131B97095D6}"/>
               </a:ext>
             </a:extLst>
           </p:cNvPr>
@@ -24332,7 +24332,7 @@
           <p:cNvPr id="57" name="">
             <a:extLst xmlns:a="http://schemas.openxmlformats.org/drawingml/2006/main">
               <a:ext uri="{FF2B5EF4-FFF2-40B4-BE49-F238E27FC236}">
-                <a16:creationId xmlns:a16="http://schemas.microsoft.com/office/drawing/2014/main" id="{98510828-B92F-4ABC-904B-977AE127AA16}"/>
+                <a16:creationId xmlns:a16="http://schemas.microsoft.com/office/drawing/2014/main" id="{4162BA22-FE13-463D-AA18-659352A2C5B9}"/>
               </a:ext>
             </a:extLst>
           </p:cNvPr>
@@ -24384,7 +24384,7 @@
           <p:cNvPr id="58" name="">
             <a:extLst xmlns:a="http://schemas.openxmlformats.org/drawingml/2006/main">
               <a:ext uri="{FF2B5EF4-FFF2-40B4-BE49-F238E27FC236}">
-                <a16:creationId xmlns:a16="http://schemas.microsoft.com/office/drawing/2014/main" id="{CD1799A7-0120-4AA8-A72B-3E96AADBC1B2}"/>
+                <a16:creationId xmlns:a16="http://schemas.microsoft.com/office/drawing/2014/main" id="{9A83AC89-500B-4970-98C1-24787D2EFD97}"/>
               </a:ext>
             </a:extLst>
           </p:cNvPr>
@@ -24436,7 +24436,7 @@
           <p:cNvPr id="59" name="">
             <a:extLst xmlns:a="http://schemas.openxmlformats.org/drawingml/2006/main">
               <a:ext uri="{FF2B5EF4-FFF2-40B4-BE49-F238E27FC236}">
-                <a16:creationId xmlns:a16="http://schemas.microsoft.com/office/drawing/2014/main" id="{47B96C2C-FA75-4458-A1E1-F3CB25962293}"/>
+                <a16:creationId xmlns:a16="http://schemas.microsoft.com/office/drawing/2014/main" id="{8EF03DA0-C7F1-45B9-979E-D46C3A9A5E6F}"/>
               </a:ext>
             </a:extLst>
           </p:cNvPr>
@@ -24467,7 +24467,7 @@
           <p:cNvPr id="60" name="">
             <a:extLst xmlns:a="http://schemas.openxmlformats.org/drawingml/2006/main">
               <a:ext uri="{FF2B5EF4-FFF2-40B4-BE49-F238E27FC236}">
-                <a16:creationId xmlns:a16="http://schemas.microsoft.com/office/drawing/2014/main" id="{1414BBD5-58B3-495C-B0E5-7C28076E527B}"/>
+                <a16:creationId xmlns:a16="http://schemas.microsoft.com/office/drawing/2014/main" id="{5F5FEA5C-D3A7-4C67-B60F-8F46CE9DC91A}"/>
               </a:ext>
             </a:extLst>
           </p:cNvPr>
@@ -24519,7 +24519,7 @@
           <p:cNvPr id="61" name="">
             <a:extLst xmlns:a="http://schemas.openxmlformats.org/drawingml/2006/main">
               <a:ext uri="{FF2B5EF4-FFF2-40B4-BE49-F238E27FC236}">
-                <a16:creationId xmlns:a16="http://schemas.microsoft.com/office/drawing/2014/main" id="{84A711EE-0EDA-4986-8F13-63175AFA7553}"/>
+                <a16:creationId xmlns:a16="http://schemas.microsoft.com/office/drawing/2014/main" id="{765C0AA8-E34B-401D-9F29-D04089A01B62}"/>
               </a:ext>
             </a:extLst>
           </p:cNvPr>
@@ -24571,7 +24571,7 @@
           <p:cNvPr id="62" name="">
             <a:extLst xmlns:a="http://schemas.openxmlformats.org/drawingml/2006/main">
               <a:ext uri="{FF2B5EF4-FFF2-40B4-BE49-F238E27FC236}">
-                <a16:creationId xmlns:a16="http://schemas.microsoft.com/office/drawing/2014/main" id="{F5972F7D-E0FB-4F87-956D-F92820E9E731}"/>
+                <a16:creationId xmlns:a16="http://schemas.microsoft.com/office/drawing/2014/main" id="{DDB4E0F8-65D9-4D69-932D-2CF83AFED934}"/>
               </a:ext>
             </a:extLst>
           </p:cNvPr>
@@ -24623,7 +24623,7 @@
           <p:cNvPr id="63" name="">
             <a:extLst xmlns:a="http://schemas.openxmlformats.org/drawingml/2006/main">
               <a:ext uri="{FF2B5EF4-FFF2-40B4-BE49-F238E27FC236}">
-                <a16:creationId xmlns:a16="http://schemas.microsoft.com/office/drawing/2014/main" id="{5F10C675-7FA6-4952-8389-903FB76FB305}"/>
+                <a16:creationId xmlns:a16="http://schemas.microsoft.com/office/drawing/2014/main" id="{144C4344-A778-48EA-A358-7BB00CC1428A}"/>
               </a:ext>
             </a:extLst>
           </p:cNvPr>
@@ -24675,7 +24675,7 @@
           <p:cNvPr id="64" name="">
             <a:extLst xmlns:a="http://schemas.openxmlformats.org/drawingml/2006/main">
               <a:ext uri="{FF2B5EF4-FFF2-40B4-BE49-F238E27FC236}">
-                <a16:creationId xmlns:a16="http://schemas.microsoft.com/office/drawing/2014/main" id="{E5857E35-191D-4E14-A9C0-9951223D8A1E}"/>
+                <a16:creationId xmlns:a16="http://schemas.microsoft.com/office/drawing/2014/main" id="{BDED01E4-DFE3-490A-9518-8B094DF1995A}"/>
               </a:ext>
             </a:extLst>
           </p:cNvPr>
@@ -24727,7 +24727,7 @@
           <p:cNvPr id="65" name="">
             <a:extLst xmlns:a="http://schemas.openxmlformats.org/drawingml/2006/main">
               <a:ext uri="{FF2B5EF4-FFF2-40B4-BE49-F238E27FC236}">
-                <a16:creationId xmlns:a16="http://schemas.microsoft.com/office/drawing/2014/main" id="{74FD68B2-53E0-45C0-AD7C-4ACDE73783CE}"/>
+                <a16:creationId xmlns:a16="http://schemas.microsoft.com/office/drawing/2014/main" id="{6165792B-F9D2-48FA-8F85-5FB5A34DAC83}"/>
               </a:ext>
             </a:extLst>
           </p:cNvPr>
@@ -24779,7 +24779,7 @@
           <p:cNvPr id="66" name="">
             <a:extLst xmlns:a="http://schemas.openxmlformats.org/drawingml/2006/main">
               <a:ext uri="{FF2B5EF4-FFF2-40B4-BE49-F238E27FC236}">
-                <a16:creationId xmlns:a16="http://schemas.microsoft.com/office/drawing/2014/main" id="{3061FFA7-C101-4EA5-A775-577E6AE38DA3}"/>
+                <a16:creationId xmlns:a16="http://schemas.microsoft.com/office/drawing/2014/main" id="{6FBDFC57-6309-4F75-8596-F09574626C95}"/>
               </a:ext>
             </a:extLst>
           </p:cNvPr>
@@ -24831,7 +24831,7 @@
           <p:cNvPr id="67" name="">
             <a:extLst xmlns:a="http://schemas.openxmlformats.org/drawingml/2006/main">
               <a:ext uri="{FF2B5EF4-FFF2-40B4-BE49-F238E27FC236}">
-                <a16:creationId xmlns:a16="http://schemas.microsoft.com/office/drawing/2014/main" id="{4B4EF6F7-615D-465D-83E7-3005CB9461F2}"/>
+                <a16:creationId xmlns:a16="http://schemas.microsoft.com/office/drawing/2014/main" id="{5D406A17-C4D8-44CE-A3DE-CE0011CD1C7E}"/>
               </a:ext>
             </a:extLst>
           </p:cNvPr>
@@ -24883,7 +24883,7 @@
           <p:cNvPr id="68" name="">
             <a:extLst xmlns:a="http://schemas.openxmlformats.org/drawingml/2006/main">
               <a:ext uri="{FF2B5EF4-FFF2-40B4-BE49-F238E27FC236}">
-                <a16:creationId xmlns:a16="http://schemas.microsoft.com/office/drawing/2014/main" id="{59244973-6CA7-4995-BEE5-E6039505777D}"/>
+                <a16:creationId xmlns:a16="http://schemas.microsoft.com/office/drawing/2014/main" id="{CCB02A14-E315-4A85-AC16-7C69EF95CB0D}"/>
               </a:ext>
             </a:extLst>
           </p:cNvPr>
@@ -24914,7 +24914,7 @@
           <p:cNvPr id="69" name="">
             <a:extLst xmlns:a="http://schemas.openxmlformats.org/drawingml/2006/main">
               <a:ext uri="{FF2B5EF4-FFF2-40B4-BE49-F238E27FC236}">
-                <a16:creationId xmlns:a16="http://schemas.microsoft.com/office/drawing/2014/main" id="{FC7E3115-5DF1-4AF8-9399-388EF24D0CAD}"/>
+                <a16:creationId xmlns:a16="http://schemas.microsoft.com/office/drawing/2014/main" id="{25C83194-7182-490E-9149-53AF81E36496}"/>
               </a:ext>
             </a:extLst>
           </p:cNvPr>
@@ -24945,7 +24945,7 @@
           <p:cNvPr id="70" name="">
             <a:extLst xmlns:a="http://schemas.openxmlformats.org/drawingml/2006/main">
               <a:ext uri="{FF2B5EF4-FFF2-40B4-BE49-F238E27FC236}">
-                <a16:creationId xmlns:a16="http://schemas.microsoft.com/office/drawing/2014/main" id="{8B70F55F-8DDA-4D21-ADE3-5FC35E116B59}"/>
+                <a16:creationId xmlns:a16="http://schemas.microsoft.com/office/drawing/2014/main" id="{19E7E245-5BEB-431B-BD1A-DE2A486FA98B}"/>
               </a:ext>
             </a:extLst>
           </p:cNvPr>
@@ -24997,7 +24997,7 @@
           <p:cNvPr id="71" name="">
             <a:extLst xmlns:a="http://schemas.openxmlformats.org/drawingml/2006/main">
               <a:ext uri="{FF2B5EF4-FFF2-40B4-BE49-F238E27FC236}">
-                <a16:creationId xmlns:a16="http://schemas.microsoft.com/office/drawing/2014/main" id="{EC36EF09-3E1F-4EE5-9431-C16182823416}"/>
+                <a16:creationId xmlns:a16="http://schemas.microsoft.com/office/drawing/2014/main" id="{06671B7C-CE08-42FE-8E9D-B0A80C0699C5}"/>
               </a:ext>
             </a:extLst>
           </p:cNvPr>
@@ -25049,7 +25049,7 @@
           <p:cNvPr id="72" name="">
             <a:extLst xmlns:a="http://schemas.openxmlformats.org/drawingml/2006/main">
               <a:ext uri="{FF2B5EF4-FFF2-40B4-BE49-F238E27FC236}">
-                <a16:creationId xmlns:a16="http://schemas.microsoft.com/office/drawing/2014/main" id="{5748E845-F202-412A-859E-2A4774701FD9}"/>
+                <a16:creationId xmlns:a16="http://schemas.microsoft.com/office/drawing/2014/main" id="{9515D370-EEE1-4FE0-B544-E33568CBBD17}"/>
               </a:ext>
             </a:extLst>
           </p:cNvPr>
@@ -25101,7 +25101,7 @@
           <p:cNvPr id="73" name="">
             <a:extLst xmlns:a="http://schemas.openxmlformats.org/drawingml/2006/main">
               <a:ext uri="{FF2B5EF4-FFF2-40B4-BE49-F238E27FC236}">
-                <a16:creationId xmlns:a16="http://schemas.microsoft.com/office/drawing/2014/main" id="{DB1F2EE7-9ADF-4124-B276-E0FBA1D6F030}"/>
+                <a16:creationId xmlns:a16="http://schemas.microsoft.com/office/drawing/2014/main" id="{ECFB2C8D-49DF-42D7-A56B-9D800B51D267}"/>
               </a:ext>
             </a:extLst>
           </p:cNvPr>
@@ -25153,7 +25153,7 @@
           <p:cNvPr id="74" name="">
             <a:extLst xmlns:a="http://schemas.openxmlformats.org/drawingml/2006/main">
               <a:ext uri="{FF2B5EF4-FFF2-40B4-BE49-F238E27FC236}">
-                <a16:creationId xmlns:a16="http://schemas.microsoft.com/office/drawing/2014/main" id="{0FDAA669-6203-40E4-9B36-F4AC654BCE52}"/>
+                <a16:creationId xmlns:a16="http://schemas.microsoft.com/office/drawing/2014/main" id="{833905D3-E15F-4F66-9B70-D2C533F6CC1A}"/>
               </a:ext>
             </a:extLst>
           </p:cNvPr>
@@ -25205,7 +25205,7 @@
           <p:cNvPr id="75" name="">
             <a:extLst xmlns:a="http://schemas.openxmlformats.org/drawingml/2006/main">
               <a:ext uri="{FF2B5EF4-FFF2-40B4-BE49-F238E27FC236}">
-                <a16:creationId xmlns:a16="http://schemas.microsoft.com/office/drawing/2014/main" id="{333B59EC-18CD-43B5-A216-E008E1D76DBB}"/>
+                <a16:creationId xmlns:a16="http://schemas.microsoft.com/office/drawing/2014/main" id="{862C3B6B-3F8C-45B1-9703-367A44DF4135}"/>
               </a:ext>
             </a:extLst>
           </p:cNvPr>
@@ -25257,7 +25257,7 @@
           <p:cNvPr id="76" name="">
             <a:extLst xmlns:a="http://schemas.openxmlformats.org/drawingml/2006/main">
               <a:ext uri="{FF2B5EF4-FFF2-40B4-BE49-F238E27FC236}">
-                <a16:creationId xmlns:a16="http://schemas.microsoft.com/office/drawing/2014/main" id="{2466032F-E113-4ACA-904D-649AC0575B87}"/>
+                <a16:creationId xmlns:a16="http://schemas.microsoft.com/office/drawing/2014/main" id="{12E4D259-1D48-453A-B144-50468F3DD493}"/>
               </a:ext>
             </a:extLst>
           </p:cNvPr>
@@ -25309,7 +25309,7 @@
           <p:cNvPr id="77" name="">
             <a:extLst xmlns:a="http://schemas.openxmlformats.org/drawingml/2006/main">
               <a:ext uri="{FF2B5EF4-FFF2-40B4-BE49-F238E27FC236}">
-                <a16:creationId xmlns:a16="http://schemas.microsoft.com/office/drawing/2014/main" id="{8765CCC5-E4CD-4430-90F6-AC99965381F0}"/>
+                <a16:creationId xmlns:a16="http://schemas.microsoft.com/office/drawing/2014/main" id="{FF462EF9-10EB-438D-A947-F834A19D5FDB}"/>
               </a:ext>
             </a:extLst>
           </p:cNvPr>
@@ -25361,7 +25361,7 @@
           <p:cNvPr id="78" name="">
             <a:extLst xmlns:a="http://schemas.openxmlformats.org/drawingml/2006/main">
               <a:ext uri="{FF2B5EF4-FFF2-40B4-BE49-F238E27FC236}">
-                <a16:creationId xmlns:a16="http://schemas.microsoft.com/office/drawing/2014/main" id="{5518C8F9-D706-4C1F-89CB-656F8D9FF670}"/>
+                <a16:creationId xmlns:a16="http://schemas.microsoft.com/office/drawing/2014/main" id="{CC39EB61-47E6-43B8-AB63-83379AC26DAA}"/>
               </a:ext>
             </a:extLst>
           </p:cNvPr>
@@ -25392,7 +25392,7 @@
           <p:cNvPr id="79" name="">
             <a:extLst xmlns:a="http://schemas.openxmlformats.org/drawingml/2006/main">
               <a:ext uri="{FF2B5EF4-FFF2-40B4-BE49-F238E27FC236}">
-                <a16:creationId xmlns:a16="http://schemas.microsoft.com/office/drawing/2014/main" id="{5A3CA7D8-1BBE-4F08-8507-4DD006EE3F3F}"/>
+                <a16:creationId xmlns:a16="http://schemas.microsoft.com/office/drawing/2014/main" id="{9A8F5BCB-6920-434B-A21A-90E251A50645}"/>
               </a:ext>
             </a:extLst>
           </p:cNvPr>
@@ -25444,7 +25444,7 @@
           <p:cNvPr id="80" name="">
             <a:extLst xmlns:a="http://schemas.openxmlformats.org/drawingml/2006/main">
               <a:ext uri="{FF2B5EF4-FFF2-40B4-BE49-F238E27FC236}">
-                <a16:creationId xmlns:a16="http://schemas.microsoft.com/office/drawing/2014/main" id="{2F2CA07A-6C82-4D19-B445-F86A08DE8BAD}"/>
+                <a16:creationId xmlns:a16="http://schemas.microsoft.com/office/drawing/2014/main" id="{ACE402BD-FA5A-4885-963A-D3AEB8881B5A}"/>
               </a:ext>
             </a:extLst>
           </p:cNvPr>
@@ -25496,7 +25496,7 @@
           <p:cNvPr id="81" name="">
             <a:extLst xmlns:a="http://schemas.openxmlformats.org/drawingml/2006/main">
               <a:ext uri="{FF2B5EF4-FFF2-40B4-BE49-F238E27FC236}">
-                <a16:creationId xmlns:a16="http://schemas.microsoft.com/office/drawing/2014/main" id="{D7ECF963-13E6-460A-830A-C4BBE340FD51}"/>
+                <a16:creationId xmlns:a16="http://schemas.microsoft.com/office/drawing/2014/main" id="{A5FB6250-882C-41FD-8F20-D83CCFF33FAA}"/>
               </a:ext>
             </a:extLst>
           </p:cNvPr>
@@ -25548,7 +25548,7 @@
           <p:cNvPr id="82" name="">
             <a:extLst xmlns:a="http://schemas.openxmlformats.org/drawingml/2006/main">
               <a:ext uri="{FF2B5EF4-FFF2-40B4-BE49-F238E27FC236}">
-                <a16:creationId xmlns:a16="http://schemas.microsoft.com/office/drawing/2014/main" id="{BD3FEC99-B06E-4C8A-99C0-A6CCC9478648}"/>
+                <a16:creationId xmlns:a16="http://schemas.microsoft.com/office/drawing/2014/main" id="{4095D18B-1E9D-4653-8A95-9B6364919411}"/>
               </a:ext>
             </a:extLst>
           </p:cNvPr>
@@ -25600,7 +25600,7 @@
           <p:cNvPr id="83" name="">
             <a:extLst xmlns:a="http://schemas.openxmlformats.org/drawingml/2006/main">
               <a:ext uri="{FF2B5EF4-FFF2-40B4-BE49-F238E27FC236}">
-                <a16:creationId xmlns:a16="http://schemas.microsoft.com/office/drawing/2014/main" id="{575D22A4-3E43-4428-BC36-942973C403C2}"/>
+                <a16:creationId xmlns:a16="http://schemas.microsoft.com/office/drawing/2014/main" id="{E7F5EFA5-3F8A-4762-AF14-0444287D77FD}"/>
               </a:ext>
             </a:extLst>
           </p:cNvPr>
@@ -25652,7 +25652,7 @@
           <p:cNvPr id="84" name="">
             <a:extLst xmlns:a="http://schemas.openxmlformats.org/drawingml/2006/main">
               <a:ext uri="{FF2B5EF4-FFF2-40B4-BE49-F238E27FC236}">
-                <a16:creationId xmlns:a16="http://schemas.microsoft.com/office/drawing/2014/main" id="{BF2C9994-3C72-4903-8387-AF2C83CD5077}"/>
+                <a16:creationId xmlns:a16="http://schemas.microsoft.com/office/drawing/2014/main" id="{314B4D81-DD18-4B34-BDDC-1D19A8CAB4DC}"/>
               </a:ext>
             </a:extLst>
           </p:cNvPr>
@@ -25704,7 +25704,7 @@
           <p:cNvPr id="85" name="">
             <a:extLst xmlns:a="http://schemas.openxmlformats.org/drawingml/2006/main">
               <a:ext uri="{FF2B5EF4-FFF2-40B4-BE49-F238E27FC236}">
-                <a16:creationId xmlns:a16="http://schemas.microsoft.com/office/drawing/2014/main" id="{32D45013-9131-4E8A-85AC-A7B063F0FBA7}"/>
+                <a16:creationId xmlns:a16="http://schemas.microsoft.com/office/drawing/2014/main" id="{30C0183C-0E44-4CA1-9EAA-12DB65CA9718}"/>
               </a:ext>
             </a:extLst>
           </p:cNvPr>
@@ -25756,7 +25756,7 @@
           <p:cNvPr id="86" name="">
             <a:extLst xmlns:a="http://schemas.openxmlformats.org/drawingml/2006/main">
               <a:ext uri="{FF2B5EF4-FFF2-40B4-BE49-F238E27FC236}">
-                <a16:creationId xmlns:a16="http://schemas.microsoft.com/office/drawing/2014/main" id="{BB228262-C4A3-4125-BBB0-ED7C0D98EBC8}"/>
+                <a16:creationId xmlns:a16="http://schemas.microsoft.com/office/drawing/2014/main" id="{D91A69CD-DD98-4036-849B-89EBAB20649C}"/>
               </a:ext>
             </a:extLst>
           </p:cNvPr>
@@ -25808,7 +25808,7 @@
           <p:cNvPr id="87" name="">
             <a:extLst xmlns:a="http://schemas.openxmlformats.org/drawingml/2006/main">
               <a:ext uri="{FF2B5EF4-FFF2-40B4-BE49-F238E27FC236}">
-                <a16:creationId xmlns:a16="http://schemas.microsoft.com/office/drawing/2014/main" id="{6F6EF24D-6A65-45B0-92D6-D3AAB07DED9A}"/>
+                <a16:creationId xmlns:a16="http://schemas.microsoft.com/office/drawing/2014/main" id="{91881CBE-1E19-4104-B90D-D7C745DCB389}"/>
               </a:ext>
             </a:extLst>
           </p:cNvPr>
@@ -25839,7 +25839,7 @@
           <p:cNvPr id="88" name="">
             <a:extLst xmlns:a="http://schemas.openxmlformats.org/drawingml/2006/main">
               <a:ext uri="{FF2B5EF4-FFF2-40B4-BE49-F238E27FC236}">
-                <a16:creationId xmlns:a16="http://schemas.microsoft.com/office/drawing/2014/main" id="{7BA488E5-BF05-4688-AE1B-95FCD416EFC9}"/>
+                <a16:creationId xmlns:a16="http://schemas.microsoft.com/office/drawing/2014/main" id="{3467298D-FF89-4713-BD41-0302ACAEB4E8}"/>
               </a:ext>
             </a:extLst>
           </p:cNvPr>
@@ -25870,7 +25870,7 @@
           <p:cNvPr id="89" name="">
             <a:extLst xmlns:a="http://schemas.openxmlformats.org/drawingml/2006/main">
               <a:ext uri="{FF2B5EF4-FFF2-40B4-BE49-F238E27FC236}">
-                <a16:creationId xmlns:a16="http://schemas.microsoft.com/office/drawing/2014/main" id="{0FAE4574-5166-4943-9D52-2FC902E79AB6}"/>
+                <a16:creationId xmlns:a16="http://schemas.microsoft.com/office/drawing/2014/main" id="{69DA0A41-A7A3-4D55-B7CF-AF28D6EE3E5B}"/>
               </a:ext>
             </a:extLst>
           </p:cNvPr>
@@ -25922,7 +25922,7 @@
           <p:cNvPr id="90" name="">
             <a:extLst xmlns:a="http://schemas.openxmlformats.org/drawingml/2006/main">
               <a:ext uri="{FF2B5EF4-FFF2-40B4-BE49-F238E27FC236}">
-                <a16:creationId xmlns:a16="http://schemas.microsoft.com/office/drawing/2014/main" id="{3F97AC3A-5302-428C-8AE7-A41A95C5B6EE}"/>
+                <a16:creationId xmlns:a16="http://schemas.microsoft.com/office/drawing/2014/main" id="{B5EDABE4-1BF1-4AE3-9990-036793D96627}"/>
               </a:ext>
             </a:extLst>
           </p:cNvPr>
@@ -25974,7 +25974,7 @@
           <p:cNvPr id="91" name="">
             <a:extLst xmlns:a="http://schemas.openxmlformats.org/drawingml/2006/main">
               <a:ext uri="{FF2B5EF4-FFF2-40B4-BE49-F238E27FC236}">
-                <a16:creationId xmlns:a16="http://schemas.microsoft.com/office/drawing/2014/main" id="{B6D4201E-0099-45AB-874D-A9382FB0EF8B}"/>
+                <a16:creationId xmlns:a16="http://schemas.microsoft.com/office/drawing/2014/main" id="{4C044254-A0EB-43D5-8784-49902D586DDE}"/>
               </a:ext>
             </a:extLst>
           </p:cNvPr>
@@ -26026,7 +26026,7 @@
           <p:cNvPr id="92" name="">
             <a:extLst xmlns:a="http://schemas.openxmlformats.org/drawingml/2006/main">
               <a:ext uri="{FF2B5EF4-FFF2-40B4-BE49-F238E27FC236}">
-                <a16:creationId xmlns:a16="http://schemas.microsoft.com/office/drawing/2014/main" id="{78FDB0F3-A897-4C71-91C6-41BB3A507A63}"/>
+                <a16:creationId xmlns:a16="http://schemas.microsoft.com/office/drawing/2014/main" id="{17D93CA1-ED13-430F-9BB7-4C2DAA835EF5}"/>
               </a:ext>
             </a:extLst>
           </p:cNvPr>
@@ -26078,7 +26078,7 @@
           <p:cNvPr id="93" name="">
             <a:extLst xmlns:a="http://schemas.openxmlformats.org/drawingml/2006/main">
               <a:ext uri="{FF2B5EF4-FFF2-40B4-BE49-F238E27FC236}">
-                <a16:creationId xmlns:a16="http://schemas.microsoft.com/office/drawing/2014/main" id="{1A5C8435-0C62-4225-8061-F92D4899AEAF}"/>
+                <a16:creationId xmlns:a16="http://schemas.microsoft.com/office/drawing/2014/main" id="{B40BAD0C-B41D-44EF-8EBF-067E222AEBEB}"/>
               </a:ext>
             </a:extLst>
           </p:cNvPr>
@@ -26130,7 +26130,7 @@
           <p:cNvPr id="94" name="">
             <a:extLst xmlns:a="http://schemas.openxmlformats.org/drawingml/2006/main">
               <a:ext uri="{FF2B5EF4-FFF2-40B4-BE49-F238E27FC236}">
-                <a16:creationId xmlns:a16="http://schemas.microsoft.com/office/drawing/2014/main" id="{D0721604-DC96-4A71-AD57-38C8F45FFAC7}"/>
+                <a16:creationId xmlns:a16="http://schemas.microsoft.com/office/drawing/2014/main" id="{CB25E3A8-C792-4F2E-821A-3C8B2B839866}"/>
               </a:ext>
             </a:extLst>
           </p:cNvPr>
@@ -26182,7 +26182,7 @@
           <p:cNvPr id="95" name="">
             <a:extLst xmlns:a="http://schemas.openxmlformats.org/drawingml/2006/main">
               <a:ext uri="{FF2B5EF4-FFF2-40B4-BE49-F238E27FC236}">
-                <a16:creationId xmlns:a16="http://schemas.microsoft.com/office/drawing/2014/main" id="{03C5C33F-4641-42E0-99BC-847C9310CC32}"/>
+                <a16:creationId xmlns:a16="http://schemas.microsoft.com/office/drawing/2014/main" id="{BEA5E651-CF8A-4BDF-9EEB-1B82652B0288}"/>
               </a:ext>
             </a:extLst>
           </p:cNvPr>
@@ -26234,7 +26234,7 @@
           <p:cNvPr id="96" name="">
             <a:extLst xmlns:a="http://schemas.openxmlformats.org/drawingml/2006/main">
               <a:ext uri="{FF2B5EF4-FFF2-40B4-BE49-F238E27FC236}">
-                <a16:creationId xmlns:a16="http://schemas.microsoft.com/office/drawing/2014/main" id="{C78C2A26-E3C5-4306-AC8E-241F90574612}"/>
+                <a16:creationId xmlns:a16="http://schemas.microsoft.com/office/drawing/2014/main" id="{C1DD51A2-C476-4A3B-8568-D3FD582592C2}"/>
               </a:ext>
             </a:extLst>
           </p:cNvPr>
@@ -26286,7 +26286,7 @@
           <p:cNvPr id="97" name="">
             <a:extLst xmlns:a="http://schemas.openxmlformats.org/drawingml/2006/main">
               <a:ext uri="{FF2B5EF4-FFF2-40B4-BE49-F238E27FC236}">
-                <a16:creationId xmlns:a16="http://schemas.microsoft.com/office/drawing/2014/main" id="{4AA5A67E-17C3-4F91-98C8-36B93AE9C1B7}"/>
+                <a16:creationId xmlns:a16="http://schemas.microsoft.com/office/drawing/2014/main" id="{890D1D8C-9BCB-4816-8360-144300EC2D40}"/>
               </a:ext>
             </a:extLst>
           </p:cNvPr>
@@ -26317,7 +26317,7 @@
           <p:cNvPr id="98" name="">
             <a:extLst xmlns:a="http://schemas.openxmlformats.org/drawingml/2006/main">
               <a:ext uri="{FF2B5EF4-FFF2-40B4-BE49-F238E27FC236}">
-                <a16:creationId xmlns:a16="http://schemas.microsoft.com/office/drawing/2014/main" id="{DCADF9B3-FF77-4FC8-A89B-5ED24E39B131}"/>
+                <a16:creationId xmlns:a16="http://schemas.microsoft.com/office/drawing/2014/main" id="{5A0FBAC6-A69F-441D-B579-D0DE8E59EA01}"/>
               </a:ext>
             </a:extLst>
           </p:cNvPr>
@@ -26369,7 +26369,7 @@
           <p:cNvPr id="99" name="">
             <a:extLst xmlns:a="http://schemas.openxmlformats.org/drawingml/2006/main">
               <a:ext uri="{FF2B5EF4-FFF2-40B4-BE49-F238E27FC236}">
-                <a16:creationId xmlns:a16="http://schemas.microsoft.com/office/drawing/2014/main" id="{A450A8BF-7EBA-4614-B2A3-1B7BECEED4A3}"/>
+                <a16:creationId xmlns:a16="http://schemas.microsoft.com/office/drawing/2014/main" id="{2AA14B90-89A8-4702-BE40-4F660B554159}"/>
               </a:ext>
             </a:extLst>
           </p:cNvPr>
@@ -26421,7 +26421,7 @@
           <p:cNvPr id="100" name="">
             <a:extLst xmlns:a="http://schemas.openxmlformats.org/drawingml/2006/main">
               <a:ext uri="{FF2B5EF4-FFF2-40B4-BE49-F238E27FC236}">
-                <a16:creationId xmlns:a16="http://schemas.microsoft.com/office/drawing/2014/main" id="{98FBE5BF-A7A9-4664-A99D-305C6BEEBA1B}"/>
+                <a16:creationId xmlns:a16="http://schemas.microsoft.com/office/drawing/2014/main" id="{D843FC70-7F6B-4814-9A35-A99B8EF268DC}"/>
               </a:ext>
             </a:extLst>
           </p:cNvPr>
@@ -26473,7 +26473,7 @@
           <p:cNvPr id="101" name="">
             <a:extLst xmlns:a="http://schemas.openxmlformats.org/drawingml/2006/main">
               <a:ext uri="{FF2B5EF4-FFF2-40B4-BE49-F238E27FC236}">
-                <a16:creationId xmlns:a16="http://schemas.microsoft.com/office/drawing/2014/main" id="{5F56E906-26B3-4838-9B40-0648CC43BBF2}"/>
+                <a16:creationId xmlns:a16="http://schemas.microsoft.com/office/drawing/2014/main" id="{ECEECD6C-1011-43D2-BD45-A97E6A6BDE2E}"/>
               </a:ext>
             </a:extLst>
           </p:cNvPr>
@@ -26525,7 +26525,7 @@
           <p:cNvPr id="102" name="">
             <a:extLst xmlns:a="http://schemas.openxmlformats.org/drawingml/2006/main">
               <a:ext uri="{FF2B5EF4-FFF2-40B4-BE49-F238E27FC236}">
-                <a16:creationId xmlns:a16="http://schemas.microsoft.com/office/drawing/2014/main" id="{11A026EC-C685-427B-973E-6E349F6FD06E}"/>
+                <a16:creationId xmlns:a16="http://schemas.microsoft.com/office/drawing/2014/main" id="{DCDF48A4-E54F-4B21-A413-BC8764CC1175}"/>
               </a:ext>
             </a:extLst>
           </p:cNvPr>
@@ -26577,7 +26577,7 @@
           <p:cNvPr id="103" name="">
             <a:extLst xmlns:a="http://schemas.openxmlformats.org/drawingml/2006/main">
               <a:ext uri="{FF2B5EF4-FFF2-40B4-BE49-F238E27FC236}">
-                <a16:creationId xmlns:a16="http://schemas.microsoft.com/office/drawing/2014/main" id="{6654A51F-C915-4729-A5D9-DF8A478AE1A9}"/>
+                <a16:creationId xmlns:a16="http://schemas.microsoft.com/office/drawing/2014/main" id="{D9F5209A-9156-4265-B346-6FAF5E79A38C}"/>
               </a:ext>
             </a:extLst>
           </p:cNvPr>
@@ -26629,7 +26629,7 @@
           <p:cNvPr id="104" name="">
             <a:extLst xmlns:a="http://schemas.openxmlformats.org/drawingml/2006/main">
               <a:ext uri="{FF2B5EF4-FFF2-40B4-BE49-F238E27FC236}">
-                <a16:creationId xmlns:a16="http://schemas.microsoft.com/office/drawing/2014/main" id="{3D20F2F9-B70D-406B-9F58-71D347B111B1}"/>
+                <a16:creationId xmlns:a16="http://schemas.microsoft.com/office/drawing/2014/main" id="{C30255CD-6DDD-47B6-B44A-2809C76B994A}"/>
               </a:ext>
             </a:extLst>
           </p:cNvPr>
@@ -26681,7 +26681,7 @@
           <p:cNvPr id="105" name="">
             <a:extLst xmlns:a="http://schemas.openxmlformats.org/drawingml/2006/main">
               <a:ext uri="{FF2B5EF4-FFF2-40B4-BE49-F238E27FC236}">
-                <a16:creationId xmlns:a16="http://schemas.microsoft.com/office/drawing/2014/main" id="{F0FB564E-7DBC-43A9-8CC0-EDC6B8AE985C}"/>
+                <a16:creationId xmlns:a16="http://schemas.microsoft.com/office/drawing/2014/main" id="{0BCBD552-EF3B-4838-83E5-6EA344751E14}"/>
               </a:ext>
             </a:extLst>
           </p:cNvPr>
@@ -26733,7 +26733,7 @@
           <p:cNvPr id="106" name="">
             <a:extLst xmlns:a="http://schemas.openxmlformats.org/drawingml/2006/main">
               <a:ext uri="{FF2B5EF4-FFF2-40B4-BE49-F238E27FC236}">
-                <a16:creationId xmlns:a16="http://schemas.microsoft.com/office/drawing/2014/main" id="{844A4CE2-9627-42D9-B00C-7BCB90E70EA5}"/>
+                <a16:creationId xmlns:a16="http://schemas.microsoft.com/office/drawing/2014/main" id="{3A903107-526A-4A04-A37E-0ED1A0CE058D}"/>
               </a:ext>
             </a:extLst>
           </p:cNvPr>
@@ -26764,7 +26764,7 @@
           <p:cNvPr id="107" name="">
             <a:extLst xmlns:a="http://schemas.openxmlformats.org/drawingml/2006/main">
               <a:ext uri="{FF2B5EF4-FFF2-40B4-BE49-F238E27FC236}">
-                <a16:creationId xmlns:a16="http://schemas.microsoft.com/office/drawing/2014/main" id="{A7CF7CED-201F-470D-96BD-06D4AEC1F308}"/>
+                <a16:creationId xmlns:a16="http://schemas.microsoft.com/office/drawing/2014/main" id="{DDE924BF-3873-4E6E-B116-17207C298B8A}"/>
               </a:ext>
             </a:extLst>
           </p:cNvPr>
@@ -26795,7 +26795,7 @@
           <p:cNvPr id="108" name="">
             <a:extLst xmlns:a="http://schemas.openxmlformats.org/drawingml/2006/main">
               <a:ext uri="{FF2B5EF4-FFF2-40B4-BE49-F238E27FC236}">
-                <a16:creationId xmlns:a16="http://schemas.microsoft.com/office/drawing/2014/main" id="{6806FD7F-063F-4867-83EF-5C8410BE7B55}"/>
+                <a16:creationId xmlns:a16="http://schemas.microsoft.com/office/drawing/2014/main" id="{0A09B60F-AA08-4680-BD4C-B0F2BE051F48}"/>
               </a:ext>
             </a:extLst>
           </p:cNvPr>
@@ -26847,7 +26847,7 @@
           <p:cNvPr id="109" name="">
             <a:extLst xmlns:a="http://schemas.openxmlformats.org/drawingml/2006/main">
               <a:ext uri="{FF2B5EF4-FFF2-40B4-BE49-F238E27FC236}">
-                <a16:creationId xmlns:a16="http://schemas.microsoft.com/office/drawing/2014/main" id="{BA0D7BC2-C2E1-476A-8847-373585289446}"/>
+                <a16:creationId xmlns:a16="http://schemas.microsoft.com/office/drawing/2014/main" id="{A7EB6DC9-F475-49CF-894B-8C8276B26398}"/>
               </a:ext>
             </a:extLst>
           </p:cNvPr>
@@ -26899,7 +26899,7 @@
           <p:cNvPr id="110" name="">
             <a:extLst xmlns:a="http://schemas.openxmlformats.org/drawingml/2006/main">
               <a:ext uri="{FF2B5EF4-FFF2-40B4-BE49-F238E27FC236}">
-                <a16:creationId xmlns:a16="http://schemas.microsoft.com/office/drawing/2014/main" id="{863762A2-C436-4CB8-A873-586DCA82AC8D}"/>
+                <a16:creationId xmlns:a16="http://schemas.microsoft.com/office/drawing/2014/main" id="{42D025FE-3E42-406E-AF99-A5935E973271}"/>
               </a:ext>
             </a:extLst>
           </p:cNvPr>
@@ -26951,7 +26951,7 @@
           <p:cNvPr id="111" name="">
             <a:extLst xmlns:a="http://schemas.openxmlformats.org/drawingml/2006/main">
               <a:ext uri="{FF2B5EF4-FFF2-40B4-BE49-F238E27FC236}">
-                <a16:creationId xmlns:a16="http://schemas.microsoft.com/office/drawing/2014/main" id="{628739F0-6393-431B-B461-C4EB9E93296E}"/>
+                <a16:creationId xmlns:a16="http://schemas.microsoft.com/office/drawing/2014/main" id="{69CA23DD-21CA-4561-B3F1-960ABC200536}"/>
               </a:ext>
             </a:extLst>
           </p:cNvPr>
@@ -27003,7 +27003,7 @@
           <p:cNvPr id="112" name="">
             <a:extLst xmlns:a="http://schemas.openxmlformats.org/drawingml/2006/main">
               <a:ext uri="{FF2B5EF4-FFF2-40B4-BE49-F238E27FC236}">
-                <a16:creationId xmlns:a16="http://schemas.microsoft.com/office/drawing/2014/main" id="{DAC409AC-EDEC-4FDD-B8E3-F93017E118C2}"/>
+                <a16:creationId xmlns:a16="http://schemas.microsoft.com/office/drawing/2014/main" id="{3B59E392-121F-45EB-96AF-9FE351DC4629}"/>
               </a:ext>
             </a:extLst>
           </p:cNvPr>
@@ -27055,7 +27055,7 @@
           <p:cNvPr id="113" name="">
             <a:extLst xmlns:a="http://schemas.openxmlformats.org/drawingml/2006/main">
               <a:ext uri="{FF2B5EF4-FFF2-40B4-BE49-F238E27FC236}">
-                <a16:creationId xmlns:a16="http://schemas.microsoft.com/office/drawing/2014/main" id="{FAC8AA77-27F1-4548-AEB1-12FB20632687}"/>
+                <a16:creationId xmlns:a16="http://schemas.microsoft.com/office/drawing/2014/main" id="{8170B106-D3E2-49ED-8119-0B99AFEE55DA}"/>
               </a:ext>
             </a:extLst>
           </p:cNvPr>
@@ -27107,7 +27107,7 @@
           <p:cNvPr id="114" name="">
             <a:extLst xmlns:a="http://schemas.openxmlformats.org/drawingml/2006/main">
               <a:ext uri="{FF2B5EF4-FFF2-40B4-BE49-F238E27FC236}">
-                <a16:creationId xmlns:a16="http://schemas.microsoft.com/office/drawing/2014/main" id="{A9D26707-3192-4E2D-8AEA-0D71971CF3D8}"/>
+                <a16:creationId xmlns:a16="http://schemas.microsoft.com/office/drawing/2014/main" id="{E7E5C264-F272-415B-8615-258387C4D2C6}"/>
               </a:ext>
             </a:extLst>
           </p:cNvPr>
@@ -27159,7 +27159,7 @@
           <p:cNvPr id="115" name="">
             <a:extLst xmlns:a="http://schemas.openxmlformats.org/drawingml/2006/main">
               <a:ext uri="{FF2B5EF4-FFF2-40B4-BE49-F238E27FC236}">
-                <a16:creationId xmlns:a16="http://schemas.microsoft.com/office/drawing/2014/main" id="{BE9C0915-FD3B-4D4F-97EA-4E67A892F551}"/>
+                <a16:creationId xmlns:a16="http://schemas.microsoft.com/office/drawing/2014/main" id="{094C2578-7597-49DB-931F-8C3F48F351D9}"/>
               </a:ext>
             </a:extLst>
           </p:cNvPr>
@@ -27211,7 +27211,7 @@
           <p:cNvPr id="116" name="">
             <a:extLst xmlns:a="http://schemas.openxmlformats.org/drawingml/2006/main">
               <a:ext uri="{FF2B5EF4-FFF2-40B4-BE49-F238E27FC236}">
-                <a16:creationId xmlns:a16="http://schemas.microsoft.com/office/drawing/2014/main" id="{DD5D5321-0388-4C94-AADB-91B7D23C4120}"/>
+                <a16:creationId xmlns:a16="http://schemas.microsoft.com/office/drawing/2014/main" id="{B19EFBE7-C14E-4D48-A421-581BA0D07CE9}"/>
               </a:ext>
             </a:extLst>
           </p:cNvPr>
@@ -27242,7 +27242,7 @@
           <p:cNvPr id="117" name="">
             <a:extLst xmlns:a="http://schemas.openxmlformats.org/drawingml/2006/main">
               <a:ext uri="{FF2B5EF4-FFF2-40B4-BE49-F238E27FC236}">
-                <a16:creationId xmlns:a16="http://schemas.microsoft.com/office/drawing/2014/main" id="{72100919-2612-41AC-B902-884E5FF253EC}"/>
+                <a16:creationId xmlns:a16="http://schemas.microsoft.com/office/drawing/2014/main" id="{E96A913B-4FC1-4961-87A2-F504D3837F7A}"/>
               </a:ext>
             </a:extLst>
           </p:cNvPr>
@@ -27294,7 +27294,7 @@
           <p:cNvPr id="118" name="">
             <a:extLst xmlns:a="http://schemas.openxmlformats.org/drawingml/2006/main">
               <a:ext uri="{FF2B5EF4-FFF2-40B4-BE49-F238E27FC236}">
-                <a16:creationId xmlns:a16="http://schemas.microsoft.com/office/drawing/2014/main" id="{D68CFA3C-B180-41E8-9009-01EEA2EAFCE1}"/>
+                <a16:creationId xmlns:a16="http://schemas.microsoft.com/office/drawing/2014/main" id="{BFCAB485-4310-4116-9BB0-79C207552D41}"/>
               </a:ext>
             </a:extLst>
           </p:cNvPr>
@@ -27346,7 +27346,7 @@
           <p:cNvPr id="119" name="">
             <a:extLst xmlns:a="http://schemas.openxmlformats.org/drawingml/2006/main">
               <a:ext uri="{FF2B5EF4-FFF2-40B4-BE49-F238E27FC236}">
-                <a16:creationId xmlns:a16="http://schemas.microsoft.com/office/drawing/2014/main" id="{3A50F34D-4BE8-42B3-AF5A-7C4DA8FE4CE2}"/>
+                <a16:creationId xmlns:a16="http://schemas.microsoft.com/office/drawing/2014/main" id="{EE99CF53-CF24-4EA4-B346-6EA787E3AA45}"/>
               </a:ext>
             </a:extLst>
           </p:cNvPr>
@@ -27398,7 +27398,7 @@
           <p:cNvPr id="120" name="">
             <a:extLst xmlns:a="http://schemas.openxmlformats.org/drawingml/2006/main">
               <a:ext uri="{FF2B5EF4-FFF2-40B4-BE49-F238E27FC236}">
-                <a16:creationId xmlns:a16="http://schemas.microsoft.com/office/drawing/2014/main" id="{C2D3016B-18E8-454E-9ADD-090A2D76F202}"/>
+                <a16:creationId xmlns:a16="http://schemas.microsoft.com/office/drawing/2014/main" id="{10EBEAAB-664E-4C89-B4A4-28B5E5C66EBF}"/>
               </a:ext>
             </a:extLst>
           </p:cNvPr>
@@ -27450,7 +27450,7 @@
           <p:cNvPr id="121" name="">
             <a:extLst xmlns:a="http://schemas.openxmlformats.org/drawingml/2006/main">
               <a:ext uri="{FF2B5EF4-FFF2-40B4-BE49-F238E27FC236}">
-                <a16:creationId xmlns:a16="http://schemas.microsoft.com/office/drawing/2014/main" id="{70EC918F-192B-4158-907F-2AD066D30527}"/>
+                <a16:creationId xmlns:a16="http://schemas.microsoft.com/office/drawing/2014/main" id="{EAAF814B-D1C0-413D-AC2F-1D74EB14D46C}"/>
               </a:ext>
             </a:extLst>
           </p:cNvPr>
@@ -27502,7 +27502,7 @@
           <p:cNvPr id="122" name="">
             <a:extLst xmlns:a="http://schemas.openxmlformats.org/drawingml/2006/main">
               <a:ext uri="{FF2B5EF4-FFF2-40B4-BE49-F238E27FC236}">
-                <a16:creationId xmlns:a16="http://schemas.microsoft.com/office/drawing/2014/main" id="{7FDFA9D8-FF86-4F3B-AE67-EC491E1EE736}"/>
+                <a16:creationId xmlns:a16="http://schemas.microsoft.com/office/drawing/2014/main" id="{9E366FCB-37C6-45FA-AFEA-95C42D0B8D37}"/>
               </a:ext>
             </a:extLst>
           </p:cNvPr>
@@ -27554,7 +27554,7 @@
           <p:cNvPr id="123" name="">
             <a:extLst xmlns:a="http://schemas.openxmlformats.org/drawingml/2006/main">
               <a:ext uri="{FF2B5EF4-FFF2-40B4-BE49-F238E27FC236}">
-                <a16:creationId xmlns:a16="http://schemas.microsoft.com/office/drawing/2014/main" id="{A8D495C9-6503-47BF-BF1D-EA7CFA5D9BEF}"/>
+                <a16:creationId xmlns:a16="http://schemas.microsoft.com/office/drawing/2014/main" id="{0D91ADF3-DDD2-4AC1-B863-3B9401CA016A}"/>
               </a:ext>
             </a:extLst>
           </p:cNvPr>
@@ -27606,7 +27606,7 @@
           <p:cNvPr id="124" name="">
             <a:extLst xmlns:a="http://schemas.openxmlformats.org/drawingml/2006/main">
               <a:ext uri="{FF2B5EF4-FFF2-40B4-BE49-F238E27FC236}">
-                <a16:creationId xmlns:a16="http://schemas.microsoft.com/office/drawing/2014/main" id="{B134DCC0-39BA-4508-BDBE-6B6408EEA612}"/>
+                <a16:creationId xmlns:a16="http://schemas.microsoft.com/office/drawing/2014/main" id="{8790E9F3-F443-4885-8CA6-71045887D052}"/>
               </a:ext>
             </a:extLst>
           </p:cNvPr>
@@ -27658,7 +27658,7 @@
           <p:cNvPr id="125" name="">
             <a:extLst xmlns:a="http://schemas.openxmlformats.org/drawingml/2006/main">
               <a:ext uri="{FF2B5EF4-FFF2-40B4-BE49-F238E27FC236}">
-                <a16:creationId xmlns:a16="http://schemas.microsoft.com/office/drawing/2014/main" id="{8E12A07F-C71D-474F-B191-FDA5B284C1E9}"/>
+                <a16:creationId xmlns:a16="http://schemas.microsoft.com/office/drawing/2014/main" id="{6CD979FA-C21A-400F-B885-4B99DCDE75A0}"/>
               </a:ext>
             </a:extLst>
           </p:cNvPr>
@@ -27689,7 +27689,7 @@
           <p:cNvPr id="126" name="">
             <a:extLst xmlns:a="http://schemas.openxmlformats.org/drawingml/2006/main">
               <a:ext uri="{FF2B5EF4-FFF2-40B4-BE49-F238E27FC236}">
-                <a16:creationId xmlns:a16="http://schemas.microsoft.com/office/drawing/2014/main" id="{EAC82918-61ED-4619-B828-3AB1B92F09A8}"/>
+                <a16:creationId xmlns:a16="http://schemas.microsoft.com/office/drawing/2014/main" id="{59FD1F66-623E-42A1-A616-20D1AB31C052}"/>
               </a:ext>
             </a:extLst>
           </p:cNvPr>
@@ -27720,7 +27720,7 @@
           <p:cNvPr id="127" name="">
             <a:extLst xmlns:a="http://schemas.openxmlformats.org/drawingml/2006/main">
               <a:ext uri="{FF2B5EF4-FFF2-40B4-BE49-F238E27FC236}">
-                <a16:creationId xmlns:a16="http://schemas.microsoft.com/office/drawing/2014/main" id="{41D41535-AF0D-421D-896A-0129DE23442D}"/>
+                <a16:creationId xmlns:a16="http://schemas.microsoft.com/office/drawing/2014/main" id="{5291CF33-D29E-49D6-B296-95FB92227BB4}"/>
               </a:ext>
             </a:extLst>
           </p:cNvPr>
@@ -27772,7 +27772,7 @@
           <p:cNvPr id="128" name="">
             <a:extLst xmlns:a="http://schemas.openxmlformats.org/drawingml/2006/main">
               <a:ext uri="{FF2B5EF4-FFF2-40B4-BE49-F238E27FC236}">
-                <a16:creationId xmlns:a16="http://schemas.microsoft.com/office/drawing/2014/main" id="{ED185BF1-EAD5-4D80-A5FD-187B6D8FDFEE}"/>
+                <a16:creationId xmlns:a16="http://schemas.microsoft.com/office/drawing/2014/main" id="{311E4D00-52F9-4566-BB6E-3B4B5BF586D7}"/>
               </a:ext>
             </a:extLst>
           </p:cNvPr>
@@ -27824,7 +27824,7 @@
           <p:cNvPr id="129" name="">
             <a:extLst xmlns:a="http://schemas.openxmlformats.org/drawingml/2006/main">
               <a:ext uri="{FF2B5EF4-FFF2-40B4-BE49-F238E27FC236}">
-                <a16:creationId xmlns:a16="http://schemas.microsoft.com/office/drawing/2014/main" id="{B60C9CB5-C550-44CC-A364-990492EB55F5}"/>
+                <a16:creationId xmlns:a16="http://schemas.microsoft.com/office/drawing/2014/main" id="{0ABCEFB9-E923-4CFD-BA2F-61A11AD722AB}"/>
               </a:ext>
             </a:extLst>
           </p:cNvPr>
@@ -27876,7 +27876,7 @@
           <p:cNvPr id="130" name="">
             <a:extLst xmlns:a="http://schemas.openxmlformats.org/drawingml/2006/main">
               <a:ext uri="{FF2B5EF4-FFF2-40B4-BE49-F238E27FC236}">
-                <a16:creationId xmlns:a16="http://schemas.microsoft.com/office/drawing/2014/main" id="{FD312917-5597-496C-B7FA-F899288C7839}"/>
+                <a16:creationId xmlns:a16="http://schemas.microsoft.com/office/drawing/2014/main" id="{75F66FCA-C753-410C-B7B3-C43C95DBAEC5}"/>
               </a:ext>
             </a:extLst>
           </p:cNvPr>
@@ -27928,7 +27928,7 @@
           <p:cNvPr id="131" name="">
             <a:extLst xmlns:a="http://schemas.openxmlformats.org/drawingml/2006/main">
               <a:ext uri="{FF2B5EF4-FFF2-40B4-BE49-F238E27FC236}">
-                <a16:creationId xmlns:a16="http://schemas.microsoft.com/office/drawing/2014/main" id="{92EA70B7-D1B6-44E2-BBD9-DEA4FC9E0C35}"/>
+                <a16:creationId xmlns:a16="http://schemas.microsoft.com/office/drawing/2014/main" id="{8B1B476B-CB17-4797-BD15-32A55BCC8B1D}"/>
               </a:ext>
             </a:extLst>
           </p:cNvPr>
@@ -27980,7 +27980,7 @@
           <p:cNvPr id="132" name="">
             <a:extLst xmlns:a="http://schemas.openxmlformats.org/drawingml/2006/main">
               <a:ext uri="{FF2B5EF4-FFF2-40B4-BE49-F238E27FC236}">
-                <a16:creationId xmlns:a16="http://schemas.microsoft.com/office/drawing/2014/main" id="{55746C0E-C7E7-40F5-BE4F-7D50E21A16E5}"/>
+                <a16:creationId xmlns:a16="http://schemas.microsoft.com/office/drawing/2014/main" id="{39BA1ADF-89CC-404A-8F0A-C97F7C1A19F6}"/>
               </a:ext>
             </a:extLst>
           </p:cNvPr>
@@ -28032,7 +28032,7 @@
           <p:cNvPr id="133" name="">
             <a:extLst xmlns:a="http://schemas.openxmlformats.org/drawingml/2006/main">
               <a:ext uri="{FF2B5EF4-FFF2-40B4-BE49-F238E27FC236}">
-                <a16:creationId xmlns:a16="http://schemas.microsoft.com/office/drawing/2014/main" id="{2641F3C0-3880-4F6E-B4E2-305BF0EDB2EB}"/>
+                <a16:creationId xmlns:a16="http://schemas.microsoft.com/office/drawing/2014/main" id="{4B7D3906-8C27-4484-B3D8-C07EEC4E872C}"/>
               </a:ext>
             </a:extLst>
           </p:cNvPr>
@@ -28084,7 +28084,7 @@
           <p:cNvPr id="134" name="">
             <a:extLst xmlns:a="http://schemas.openxmlformats.org/drawingml/2006/main">
               <a:ext uri="{FF2B5EF4-FFF2-40B4-BE49-F238E27FC236}">
-                <a16:creationId xmlns:a16="http://schemas.microsoft.com/office/drawing/2014/main" id="{7915636E-33D7-4A7A-8507-D834E0AA692E}"/>
+                <a16:creationId xmlns:a16="http://schemas.microsoft.com/office/drawing/2014/main" id="{DC368CA7-2B05-4CA7-BDDA-65A0614529DD}"/>
               </a:ext>
             </a:extLst>
           </p:cNvPr>
@@ -28134,7 +28134,7 @@
     </p:spTree>
     <p:extLst>
       <p:ext uri="{BB962C8B-B14F-4D97-AF65-F5344CB8AC3E}">
-        <p14:creationId xmlns:p14="http://schemas.microsoft.com/office/powerpoint/2010/main" val="1198987267"/>
+        <p14:creationId xmlns:p14="http://schemas.microsoft.com/office/powerpoint/2010/main" val="899581399"/>
       </p:ext>
     </p:extLst>
   </p:cSld>
@@ -28165,7 +28165,7 @@
           <p:cNvPr id="9" name="">
             <a:extLst xmlns:a="http://schemas.openxmlformats.org/drawingml/2006/main">
               <a:ext uri="{FF2B5EF4-FFF2-40B4-BE49-F238E27FC236}">
-                <a16:creationId xmlns:a16="http://schemas.microsoft.com/office/drawing/2014/main" id="{3BAE2B9C-39E3-455A-9B27-59F1800913F2}"/>
+                <a16:creationId xmlns:a16="http://schemas.microsoft.com/office/drawing/2014/main" id="{70804BBA-1D1B-4BA5-954E-46D49081B36E}"/>
               </a:ext>
             </a:extLst>
           </p:cNvPr>
@@ -28198,7 +28198,7 @@
           <p:cNvPr id="2" name="">
             <a:extLst xmlns:a="http://schemas.openxmlformats.org/drawingml/2006/main">
               <a:ext uri="{FF2B5EF4-FFF2-40B4-BE49-F238E27FC236}">
-                <a16:creationId xmlns:a16="http://schemas.microsoft.com/office/drawing/2014/main" id="{80AE17B1-CF46-4BC2-8501-E77B6DE8CEA7}"/>
+                <a16:creationId xmlns:a16="http://schemas.microsoft.com/office/drawing/2014/main" id="{CB95CB5A-0830-472E-8DA1-D1E3136AA351}"/>
               </a:ext>
             </a:extLst>
           </p:cNvPr>
@@ -28229,7 +28229,7 @@
           <p:cNvPr id="3" name="">
             <a:extLst xmlns:a="http://schemas.openxmlformats.org/drawingml/2006/main">
               <a:ext uri="{FF2B5EF4-FFF2-40B4-BE49-F238E27FC236}">
-                <a16:creationId xmlns:a16="http://schemas.microsoft.com/office/drawing/2014/main" id="{8A3EB412-8163-4750-8D50-5EC9D063AEAE}"/>
+                <a16:creationId xmlns:a16="http://schemas.microsoft.com/office/drawing/2014/main" id="{86330211-FEEA-4F80-AE6A-2D62CF453D1A}"/>
               </a:ext>
             </a:extLst>
           </p:cNvPr>
@@ -28281,7 +28281,7 @@
           <p:cNvPr id="4" name="">
             <a:extLst xmlns:a="http://schemas.openxmlformats.org/drawingml/2006/main">
               <a:ext uri="{FF2B5EF4-FFF2-40B4-BE49-F238E27FC236}">
-                <a16:creationId xmlns:a16="http://schemas.microsoft.com/office/drawing/2014/main" id="{72119AD4-A095-428C-9A6F-51EB1BC15F70}"/>
+                <a16:creationId xmlns:a16="http://schemas.microsoft.com/office/drawing/2014/main" id="{512172EB-D6FC-4999-8460-E8FB026D9E2B}"/>
               </a:ext>
             </a:extLst>
           </p:cNvPr>
@@ -28316,7 +28316,7 @@
           <p:nvPr/>
         </p:nvPicPr>
         <p:blipFill>
-          <a:blip xmlns:r="http://schemas.openxmlformats.org/officeDocument/2006/relationships" xmlns:a="http://schemas.openxmlformats.org/drawingml/2006/main" r:embed="R5a621a857344474e"/>
+          <a:blip xmlns:r="http://schemas.openxmlformats.org/officeDocument/2006/relationships" xmlns:a="http://schemas.openxmlformats.org/drawingml/2006/main" r:embed="R269b321973ce451a"/>
           <a:stretch xmlns:a="http://schemas.openxmlformats.org/drawingml/2006/main"/>
         </p:blipFill>
         <p:spPr>
@@ -28334,7 +28334,7 @@
           <p:cNvPr id="6" name="">
             <a:extLst xmlns:a="http://schemas.openxmlformats.org/drawingml/2006/main">
               <a:ext uri="{FF2B5EF4-FFF2-40B4-BE49-F238E27FC236}">
-                <a16:creationId xmlns:a16="http://schemas.microsoft.com/office/drawing/2014/main" id="{7B1D120D-63D7-4170-88BE-3B5CE5F4791B}"/>
+                <a16:creationId xmlns:a16="http://schemas.microsoft.com/office/drawing/2014/main" id="{27BD1251-EF5E-4E84-915B-345676C6495C}"/>
               </a:ext>
             </a:extLst>
           </p:cNvPr>
@@ -28386,7 +28386,7 @@
           <p:cNvPr id="7" name="">
             <a:extLst xmlns:a="http://schemas.openxmlformats.org/drawingml/2006/main">
               <a:ext uri="{FF2B5EF4-FFF2-40B4-BE49-F238E27FC236}">
-                <a16:creationId xmlns:a16="http://schemas.microsoft.com/office/drawing/2014/main" id="{5FD71448-63A6-46A8-9574-B0164D1645BA}"/>
+                <a16:creationId xmlns:a16="http://schemas.microsoft.com/office/drawing/2014/main" id="{9FD3EDA2-AFF6-4BA6-8E25-EFD2C1D04D6B}"/>
               </a:ext>
             </a:extLst>
           </p:cNvPr>
@@ -28442,7 +28442,7 @@
           <p:nvPr/>
         </p:nvPicPr>
         <p:blipFill>
-          <a:blip xmlns:r="http://schemas.openxmlformats.org/officeDocument/2006/relationships" xmlns:a="http://schemas.openxmlformats.org/drawingml/2006/main" r:embed="R316dce32b5f84a20"/>
+          <a:blip xmlns:r="http://schemas.openxmlformats.org/officeDocument/2006/relationships" xmlns:a="http://schemas.openxmlformats.org/drawingml/2006/main" r:embed="Rbf8f6eb0c4f24979"/>
           <a:stretch xmlns:a="http://schemas.openxmlformats.org/drawingml/2006/main"/>
         </p:blipFill>
         <p:spPr>
@@ -28458,7 +28458,7 @@
     </p:spTree>
     <p:extLst>
       <p:ext uri="{BB962C8B-B14F-4D97-AF65-F5344CB8AC3E}">
-        <p14:creationId xmlns:p14="http://schemas.microsoft.com/office/powerpoint/2010/main" val="1948181022"/>
+        <p14:creationId xmlns:p14="http://schemas.microsoft.com/office/powerpoint/2010/main" val="1325059909"/>
       </p:ext>
     </p:extLst>
   </p:cSld>
@@ -28489,7 +28489,7 @@
           <p:cNvPr id="42" name="">
             <a:extLst xmlns:a="http://schemas.openxmlformats.org/drawingml/2006/main">
               <a:ext uri="{FF2B5EF4-FFF2-40B4-BE49-F238E27FC236}">
-                <a16:creationId xmlns:a16="http://schemas.microsoft.com/office/drawing/2014/main" id="{11863C67-55E3-4953-8632-52691D0891CB}"/>
+                <a16:creationId xmlns:a16="http://schemas.microsoft.com/office/drawing/2014/main" id="{876EFFD4-D2ED-41F2-8ADF-BA51F6661B90}"/>
               </a:ext>
             </a:extLst>
           </p:cNvPr>
@@ -28522,7 +28522,7 @@
           <p:cNvPr id="2" name="">
             <a:extLst xmlns:a="http://schemas.openxmlformats.org/drawingml/2006/main">
               <a:ext uri="{FF2B5EF4-FFF2-40B4-BE49-F238E27FC236}">
-                <a16:creationId xmlns:a16="http://schemas.microsoft.com/office/drawing/2014/main" id="{0F73B2A1-EBC5-468A-9405-9BBF7C26EC5C}"/>
+                <a16:creationId xmlns:a16="http://schemas.microsoft.com/office/drawing/2014/main" id="{313B3C7F-CBDF-4909-99E9-9FF876F4E15D}"/>
               </a:ext>
             </a:extLst>
           </p:cNvPr>
@@ -28553,7 +28553,7 @@
           <p:cNvPr id="3" name="">
             <a:extLst xmlns:a="http://schemas.openxmlformats.org/drawingml/2006/main">
               <a:ext uri="{FF2B5EF4-FFF2-40B4-BE49-F238E27FC236}">
-                <a16:creationId xmlns:a16="http://schemas.microsoft.com/office/drawing/2014/main" id="{D0EA270E-3375-4A43-AB94-299074603B48}"/>
+                <a16:creationId xmlns:a16="http://schemas.microsoft.com/office/drawing/2014/main" id="{BCB7D2D0-74B8-48C5-9926-B8B5DCE6AAE0}"/>
               </a:ext>
             </a:extLst>
           </p:cNvPr>
@@ -28605,7 +28605,7 @@
           <p:cNvPr id="4" name="">
             <a:extLst xmlns:a="http://schemas.openxmlformats.org/drawingml/2006/main">
               <a:ext uri="{FF2B5EF4-FFF2-40B4-BE49-F238E27FC236}">
-                <a16:creationId xmlns:a16="http://schemas.microsoft.com/office/drawing/2014/main" id="{050931DF-61DE-4906-A474-2FBBC1B6309D}"/>
+                <a16:creationId xmlns:a16="http://schemas.microsoft.com/office/drawing/2014/main" id="{B7BEFB50-F31F-4349-89F7-FE2B691CBA2D}"/>
               </a:ext>
             </a:extLst>
           </p:cNvPr>
@@ -28657,7 +28657,7 @@
           <p:cNvPr id="5" name="">
             <a:extLst xmlns:a="http://schemas.openxmlformats.org/drawingml/2006/main">
               <a:ext uri="{FF2B5EF4-FFF2-40B4-BE49-F238E27FC236}">
-                <a16:creationId xmlns:a16="http://schemas.microsoft.com/office/drawing/2014/main" id="{1C3B81A9-A242-4EF8-B507-E0A3C7D24886}"/>
+                <a16:creationId xmlns:a16="http://schemas.microsoft.com/office/drawing/2014/main" id="{96CE563F-77B2-43E3-B7B4-42DDB0C96DBA}"/>
               </a:ext>
             </a:extLst>
           </p:cNvPr>
@@ -28692,7 +28692,7 @@
           <p:nvPr/>
         </p:nvPicPr>
         <p:blipFill>
-          <a:blip xmlns:r="http://schemas.openxmlformats.org/officeDocument/2006/relationships" xmlns:a="http://schemas.openxmlformats.org/drawingml/2006/main" r:embed="Rfdaf0a9858504aa0"/>
+          <a:blip xmlns:r="http://schemas.openxmlformats.org/officeDocument/2006/relationships" xmlns:a="http://schemas.openxmlformats.org/drawingml/2006/main" r:embed="Rf1f6d0407afe48e1"/>
           <a:stretch xmlns:a="http://schemas.openxmlformats.org/drawingml/2006/main"/>
         </p:blipFill>
         <p:spPr>
@@ -28710,7 +28710,7 @@
           <p:cNvPr id="7" name="">
             <a:extLst xmlns:a="http://schemas.openxmlformats.org/drawingml/2006/main">
               <a:ext uri="{FF2B5EF4-FFF2-40B4-BE49-F238E27FC236}">
-                <a16:creationId xmlns:a16="http://schemas.microsoft.com/office/drawing/2014/main" id="{D1DEA9E1-C41A-4BD9-912A-6F9563CF4936}"/>
+                <a16:creationId xmlns:a16="http://schemas.microsoft.com/office/drawing/2014/main" id="{19F98917-7A71-4F2F-87DE-D3EFB7CA2A0B}"/>
               </a:ext>
             </a:extLst>
           </p:cNvPr>
@@ -28762,7 +28762,7 @@
           <p:cNvPr id="8" name="">
             <a:extLst xmlns:a="http://schemas.openxmlformats.org/drawingml/2006/main">
               <a:ext uri="{FF2B5EF4-FFF2-40B4-BE49-F238E27FC236}">
-                <a16:creationId xmlns:a16="http://schemas.microsoft.com/office/drawing/2014/main" id="{FE5B40C8-94B3-47C9-8DD2-A69FF650BDA8}"/>
+                <a16:creationId xmlns:a16="http://schemas.microsoft.com/office/drawing/2014/main" id="{83C42599-4324-4588-8D79-B0457E1CE576}"/>
               </a:ext>
             </a:extLst>
           </p:cNvPr>
@@ -28814,7 +28814,7 @@
           <p:cNvPr id="9" name="">
             <a:extLst xmlns:a="http://schemas.openxmlformats.org/drawingml/2006/main">
               <a:ext uri="{FF2B5EF4-FFF2-40B4-BE49-F238E27FC236}">
-                <a16:creationId xmlns:a16="http://schemas.microsoft.com/office/drawing/2014/main" id="{E6C167FB-698D-4727-B234-49F23DFEC517}"/>
+                <a16:creationId xmlns:a16="http://schemas.microsoft.com/office/drawing/2014/main" id="{07865743-279C-403F-93D7-5A81FCF33451}"/>
               </a:ext>
             </a:extLst>
           </p:cNvPr>
@@ -28866,7 +28866,7 @@
           <p:cNvPr id="10" name="">
             <a:extLst xmlns:a="http://schemas.openxmlformats.org/drawingml/2006/main">
               <a:ext uri="{FF2B5EF4-FFF2-40B4-BE49-F238E27FC236}">
-                <a16:creationId xmlns:a16="http://schemas.microsoft.com/office/drawing/2014/main" id="{F34AC424-7F72-443D-BE0C-4E2D1A75CF2C}"/>
+                <a16:creationId xmlns:a16="http://schemas.microsoft.com/office/drawing/2014/main" id="{2824063B-B0B2-42E9-8162-29516C2892BE}"/>
               </a:ext>
             </a:extLst>
           </p:cNvPr>
@@ -28897,7 +28897,7 @@
           <p:cNvPr id="11" name="">
             <a:extLst xmlns:a="http://schemas.openxmlformats.org/drawingml/2006/main">
               <a:ext uri="{FF2B5EF4-FFF2-40B4-BE49-F238E27FC236}">
-                <a16:creationId xmlns:a16="http://schemas.microsoft.com/office/drawing/2014/main" id="{8B3EB4FF-A435-40B3-8DAD-8A209DC34550}"/>
+                <a16:creationId xmlns:a16="http://schemas.microsoft.com/office/drawing/2014/main" id="{E0BDA629-1FC7-475A-B802-94531E204D0A}"/>
               </a:ext>
             </a:extLst>
           </p:cNvPr>
@@ -28949,7 +28949,7 @@
           <p:cNvPr id="12" name="">
             <a:extLst xmlns:a="http://schemas.openxmlformats.org/drawingml/2006/main">
               <a:ext uri="{FF2B5EF4-FFF2-40B4-BE49-F238E27FC236}">
-                <a16:creationId xmlns:a16="http://schemas.microsoft.com/office/drawing/2014/main" id="{F77A76AE-6D61-46D4-9721-C21B76D07F1D}"/>
+                <a16:creationId xmlns:a16="http://schemas.microsoft.com/office/drawing/2014/main" id="{EFAD2D69-5B28-4B92-ACE6-5C789C984BF0}"/>
               </a:ext>
             </a:extLst>
           </p:cNvPr>
@@ -29001,7 +29001,7 @@
           <p:cNvPr id="13" name="">
             <a:extLst xmlns:a="http://schemas.openxmlformats.org/drawingml/2006/main">
               <a:ext uri="{FF2B5EF4-FFF2-40B4-BE49-F238E27FC236}">
-                <a16:creationId xmlns:a16="http://schemas.microsoft.com/office/drawing/2014/main" id="{33128E1A-22DC-4EC7-8F45-F6823E153E5F}"/>
+                <a16:creationId xmlns:a16="http://schemas.microsoft.com/office/drawing/2014/main" id="{69320434-7A43-4748-BEA4-D44A8E314926}"/>
               </a:ext>
             </a:extLst>
           </p:cNvPr>
@@ -29053,7 +29053,7 @@
           <p:cNvPr id="14" name="">
             <a:extLst xmlns:a="http://schemas.openxmlformats.org/drawingml/2006/main">
               <a:ext uri="{FF2B5EF4-FFF2-40B4-BE49-F238E27FC236}">
-                <a16:creationId xmlns:a16="http://schemas.microsoft.com/office/drawing/2014/main" id="{B3928035-BDAB-4183-BED1-7647AACAC8F5}"/>
+                <a16:creationId xmlns:a16="http://schemas.microsoft.com/office/drawing/2014/main" id="{19C0F0A6-E4EB-4CB7-8970-3EEE01268AEF}"/>
               </a:ext>
             </a:extLst>
           </p:cNvPr>
@@ -29084,7 +29084,7 @@
           <p:cNvPr id="15" name="">
             <a:extLst xmlns:a="http://schemas.openxmlformats.org/drawingml/2006/main">
               <a:ext uri="{FF2B5EF4-FFF2-40B4-BE49-F238E27FC236}">
-                <a16:creationId xmlns:a16="http://schemas.microsoft.com/office/drawing/2014/main" id="{53F7CC6A-F2F9-43C2-BECF-6A0EE83E7716}"/>
+                <a16:creationId xmlns:a16="http://schemas.microsoft.com/office/drawing/2014/main" id="{B49ABEB2-20CC-49EA-B0CE-5BCBBD0F08FD}"/>
               </a:ext>
             </a:extLst>
           </p:cNvPr>
@@ -29136,7 +29136,7 @@
           <p:cNvPr id="16" name="">
             <a:extLst xmlns:a="http://schemas.openxmlformats.org/drawingml/2006/main">
               <a:ext uri="{FF2B5EF4-FFF2-40B4-BE49-F238E27FC236}">
-                <a16:creationId xmlns:a16="http://schemas.microsoft.com/office/drawing/2014/main" id="{22870428-7883-46CF-A3BE-4491F7EF7D32}"/>
+                <a16:creationId xmlns:a16="http://schemas.microsoft.com/office/drawing/2014/main" id="{D7CC7566-7B05-4EA5-A9F7-D0DCED5CFD67}"/>
               </a:ext>
             </a:extLst>
           </p:cNvPr>
@@ -29188,7 +29188,7 @@
           <p:cNvPr id="17" name="">
             <a:extLst xmlns:a="http://schemas.openxmlformats.org/drawingml/2006/main">
               <a:ext uri="{FF2B5EF4-FFF2-40B4-BE49-F238E27FC236}">
-                <a16:creationId xmlns:a16="http://schemas.microsoft.com/office/drawing/2014/main" id="{48742DE0-3A53-4920-96B7-337670C1E21C}"/>
+                <a16:creationId xmlns:a16="http://schemas.microsoft.com/office/drawing/2014/main" id="{0BBEBB0A-03EB-436E-8C89-305ABFCDFEBA}"/>
               </a:ext>
             </a:extLst>
           </p:cNvPr>
@@ -29240,7 +29240,7 @@
           <p:cNvPr id="18" name="">
             <a:extLst xmlns:a="http://schemas.openxmlformats.org/drawingml/2006/main">
               <a:ext uri="{FF2B5EF4-FFF2-40B4-BE49-F238E27FC236}">
-                <a16:creationId xmlns:a16="http://schemas.microsoft.com/office/drawing/2014/main" id="{636439D3-1504-4DD4-90DB-72990C505727}"/>
+                <a16:creationId xmlns:a16="http://schemas.microsoft.com/office/drawing/2014/main" id="{57E50376-5E13-440C-B092-8A32DBEEAB48}"/>
               </a:ext>
             </a:extLst>
           </p:cNvPr>
@@ -29271,7 +29271,7 @@
           <p:cNvPr id="19" name="">
             <a:extLst xmlns:a="http://schemas.openxmlformats.org/drawingml/2006/main">
               <a:ext uri="{FF2B5EF4-FFF2-40B4-BE49-F238E27FC236}">
-                <a16:creationId xmlns:a16="http://schemas.microsoft.com/office/drawing/2014/main" id="{C26BDBB6-A471-48F3-AD48-D3FDFA032918}"/>
+                <a16:creationId xmlns:a16="http://schemas.microsoft.com/office/drawing/2014/main" id="{0E268302-A8A2-42AF-8233-B0016C332491}"/>
               </a:ext>
             </a:extLst>
           </p:cNvPr>
@@ -29323,7 +29323,7 @@
           <p:cNvPr id="20" name="">
             <a:extLst xmlns:a="http://schemas.openxmlformats.org/drawingml/2006/main">
               <a:ext uri="{FF2B5EF4-FFF2-40B4-BE49-F238E27FC236}">
-                <a16:creationId xmlns:a16="http://schemas.microsoft.com/office/drawing/2014/main" id="{7132277F-A47C-4095-8BD1-2E731ED9CC69}"/>
+                <a16:creationId xmlns:a16="http://schemas.microsoft.com/office/drawing/2014/main" id="{8661EC53-8D43-42A5-9A22-9BEAB5FA82EB}"/>
               </a:ext>
             </a:extLst>
           </p:cNvPr>
@@ -29375,7 +29375,7 @@
           <p:cNvPr id="21" name="">
             <a:extLst xmlns:a="http://schemas.openxmlformats.org/drawingml/2006/main">
               <a:ext uri="{FF2B5EF4-FFF2-40B4-BE49-F238E27FC236}">
-                <a16:creationId xmlns:a16="http://schemas.microsoft.com/office/drawing/2014/main" id="{FEA17F3F-0273-48EF-9F93-6AA8F30ABA6B}"/>
+                <a16:creationId xmlns:a16="http://schemas.microsoft.com/office/drawing/2014/main" id="{6B3CF21E-4111-484D-8FAD-4989130EEC2E}"/>
               </a:ext>
             </a:extLst>
           </p:cNvPr>
@@ -29427,7 +29427,7 @@
           <p:cNvPr id="22" name="">
             <a:extLst xmlns:a="http://schemas.openxmlformats.org/drawingml/2006/main">
               <a:ext uri="{FF2B5EF4-FFF2-40B4-BE49-F238E27FC236}">
-                <a16:creationId xmlns:a16="http://schemas.microsoft.com/office/drawing/2014/main" id="{7CE608D6-7742-4F06-9751-8BA9CB45FEE6}"/>
+                <a16:creationId xmlns:a16="http://schemas.microsoft.com/office/drawing/2014/main" id="{884F6FBE-6AC9-4839-9F99-AD9C4481C61A}"/>
               </a:ext>
             </a:extLst>
           </p:cNvPr>
@@ -29458,7 +29458,7 @@
           <p:cNvPr id="23" name="">
             <a:extLst xmlns:a="http://schemas.openxmlformats.org/drawingml/2006/main">
               <a:ext uri="{FF2B5EF4-FFF2-40B4-BE49-F238E27FC236}">
-                <a16:creationId xmlns:a16="http://schemas.microsoft.com/office/drawing/2014/main" id="{A03E6CD8-905F-4EE4-BC5C-A30711BCFF64}"/>
+                <a16:creationId xmlns:a16="http://schemas.microsoft.com/office/drawing/2014/main" id="{D60C6C0B-6485-4AFE-9898-DD025B1B1409}"/>
               </a:ext>
             </a:extLst>
           </p:cNvPr>
@@ -29510,7 +29510,7 @@
           <p:cNvPr id="24" name="">
             <a:extLst xmlns:a="http://schemas.openxmlformats.org/drawingml/2006/main">
               <a:ext uri="{FF2B5EF4-FFF2-40B4-BE49-F238E27FC236}">
-                <a16:creationId xmlns:a16="http://schemas.microsoft.com/office/drawing/2014/main" id="{2F89CB6E-B32C-4BB3-927C-D520B9603D35}"/>
+                <a16:creationId xmlns:a16="http://schemas.microsoft.com/office/drawing/2014/main" id="{E8B0B0FF-6237-4B00-8988-4CCDE1C2F3EF}"/>
               </a:ext>
             </a:extLst>
           </p:cNvPr>
@@ -29562,7 +29562,7 @@
           <p:cNvPr id="25" name="">
             <a:extLst xmlns:a="http://schemas.openxmlformats.org/drawingml/2006/main">
               <a:ext uri="{FF2B5EF4-FFF2-40B4-BE49-F238E27FC236}">
-                <a16:creationId xmlns:a16="http://schemas.microsoft.com/office/drawing/2014/main" id="{89BC59C0-8A5C-4F1C-A6D5-B292587B61AE}"/>
+                <a16:creationId xmlns:a16="http://schemas.microsoft.com/office/drawing/2014/main" id="{821F75D7-FCBF-4075-A0DC-119E8621515B}"/>
               </a:ext>
             </a:extLst>
           </p:cNvPr>
@@ -29614,7 +29614,7 @@
           <p:cNvPr id="26" name="">
             <a:extLst xmlns:a="http://schemas.openxmlformats.org/drawingml/2006/main">
               <a:ext uri="{FF2B5EF4-FFF2-40B4-BE49-F238E27FC236}">
-                <a16:creationId xmlns:a16="http://schemas.microsoft.com/office/drawing/2014/main" id="{C90259D1-85EB-416F-AFFF-22D24BD3885D}"/>
+                <a16:creationId xmlns:a16="http://schemas.microsoft.com/office/drawing/2014/main" id="{46F850AC-026A-4E4E-B31E-08AEEC131397}"/>
               </a:ext>
             </a:extLst>
           </p:cNvPr>
@@ -29645,7 +29645,7 @@
           <p:cNvPr id="27" name="">
             <a:extLst xmlns:a="http://schemas.openxmlformats.org/drawingml/2006/main">
               <a:ext uri="{FF2B5EF4-FFF2-40B4-BE49-F238E27FC236}">
-                <a16:creationId xmlns:a16="http://schemas.microsoft.com/office/drawing/2014/main" id="{8324DD8F-08D7-4645-9812-BE6F4160F9F4}"/>
+                <a16:creationId xmlns:a16="http://schemas.microsoft.com/office/drawing/2014/main" id="{6F06E12F-1E71-4FF6-8638-A3E190841311}"/>
               </a:ext>
             </a:extLst>
           </p:cNvPr>
@@ -29697,7 +29697,7 @@
           <p:cNvPr id="28" name="">
             <a:extLst xmlns:a="http://schemas.openxmlformats.org/drawingml/2006/main">
               <a:ext uri="{FF2B5EF4-FFF2-40B4-BE49-F238E27FC236}">
-                <a16:creationId xmlns:a16="http://schemas.microsoft.com/office/drawing/2014/main" id="{90D2AC6A-9BF9-469B-A97D-E7F748FBFFBF}"/>
+                <a16:creationId xmlns:a16="http://schemas.microsoft.com/office/drawing/2014/main" id="{0A6A6B55-04DA-4FE0-95B4-8E93A61793DF}"/>
               </a:ext>
             </a:extLst>
           </p:cNvPr>
@@ -29749,7 +29749,7 @@
           <p:cNvPr id="29" name="">
             <a:extLst xmlns:a="http://schemas.openxmlformats.org/drawingml/2006/main">
               <a:ext uri="{FF2B5EF4-FFF2-40B4-BE49-F238E27FC236}">
-                <a16:creationId xmlns:a16="http://schemas.microsoft.com/office/drawing/2014/main" id="{53174E33-7E7B-497C-BD3E-9E0CA82AC6A7}"/>
+                <a16:creationId xmlns:a16="http://schemas.microsoft.com/office/drawing/2014/main" id="{1ED750FA-733D-47B7-A46C-6EFD28F47C00}"/>
               </a:ext>
             </a:extLst>
           </p:cNvPr>
@@ -29801,7 +29801,7 @@
           <p:cNvPr id="30" name="">
             <a:extLst xmlns:a="http://schemas.openxmlformats.org/drawingml/2006/main">
               <a:ext uri="{FF2B5EF4-FFF2-40B4-BE49-F238E27FC236}">
-                <a16:creationId xmlns:a16="http://schemas.microsoft.com/office/drawing/2014/main" id="{625F8ED8-0E0F-4C7A-B030-F0922E4BF985}"/>
+                <a16:creationId xmlns:a16="http://schemas.microsoft.com/office/drawing/2014/main" id="{B5D4D861-4B59-467F-8DD6-214A3346731C}"/>
               </a:ext>
             </a:extLst>
           </p:cNvPr>
@@ -29832,7 +29832,7 @@
           <p:cNvPr id="31" name="">
             <a:extLst xmlns:a="http://schemas.openxmlformats.org/drawingml/2006/main">
               <a:ext uri="{FF2B5EF4-FFF2-40B4-BE49-F238E27FC236}">
-                <a16:creationId xmlns:a16="http://schemas.microsoft.com/office/drawing/2014/main" id="{E3AA79FF-3E10-432B-AA73-5A18D729E9D5}"/>
+                <a16:creationId xmlns:a16="http://schemas.microsoft.com/office/drawing/2014/main" id="{03D5869F-664C-44E1-9803-E2D485EDB69B}"/>
               </a:ext>
             </a:extLst>
           </p:cNvPr>
@@ -29884,7 +29884,7 @@
           <p:cNvPr id="32" name="">
             <a:extLst xmlns:a="http://schemas.openxmlformats.org/drawingml/2006/main">
               <a:ext uri="{FF2B5EF4-FFF2-40B4-BE49-F238E27FC236}">
-                <a16:creationId xmlns:a16="http://schemas.microsoft.com/office/drawing/2014/main" id="{EDB0303C-E40A-46AD-BD87-17AF02723804}"/>
+                <a16:creationId xmlns:a16="http://schemas.microsoft.com/office/drawing/2014/main" id="{78F60133-6551-42BF-823D-D8C68AF1766F}"/>
               </a:ext>
             </a:extLst>
           </p:cNvPr>
@@ -29936,7 +29936,7 @@
           <p:cNvPr id="33" name="">
             <a:extLst xmlns:a="http://schemas.openxmlformats.org/drawingml/2006/main">
               <a:ext uri="{FF2B5EF4-FFF2-40B4-BE49-F238E27FC236}">
-                <a16:creationId xmlns:a16="http://schemas.microsoft.com/office/drawing/2014/main" id="{1C75A52D-1FA6-4CF7-9A3A-FC9CCACEAE49}"/>
+                <a16:creationId xmlns:a16="http://schemas.microsoft.com/office/drawing/2014/main" id="{01BF0E2B-B332-45A0-B2AA-87EADCCE8CD1}"/>
               </a:ext>
             </a:extLst>
           </p:cNvPr>
@@ -29988,7 +29988,7 @@
           <p:cNvPr id="34" name="">
             <a:extLst xmlns:a="http://schemas.openxmlformats.org/drawingml/2006/main">
               <a:ext uri="{FF2B5EF4-FFF2-40B4-BE49-F238E27FC236}">
-                <a16:creationId xmlns:a16="http://schemas.microsoft.com/office/drawing/2014/main" id="{CA3ADA71-E765-4A0F-821E-58DD62D62FFE}"/>
+                <a16:creationId xmlns:a16="http://schemas.microsoft.com/office/drawing/2014/main" id="{54456250-17D2-40D1-9583-E52E64B1D44D}"/>
               </a:ext>
             </a:extLst>
           </p:cNvPr>
@@ -30019,7 +30019,7 @@
           <p:cNvPr id="35" name="">
             <a:extLst xmlns:a="http://schemas.openxmlformats.org/drawingml/2006/main">
               <a:ext uri="{FF2B5EF4-FFF2-40B4-BE49-F238E27FC236}">
-                <a16:creationId xmlns:a16="http://schemas.microsoft.com/office/drawing/2014/main" id="{A014FFE0-9B32-4C94-9B04-A9C6AB610B3E}"/>
+                <a16:creationId xmlns:a16="http://schemas.microsoft.com/office/drawing/2014/main" id="{52300D71-F818-4B63-9354-7DB205337500}"/>
               </a:ext>
             </a:extLst>
           </p:cNvPr>
@@ -30071,7 +30071,7 @@
           <p:cNvPr id="36" name="">
             <a:extLst xmlns:a="http://schemas.openxmlformats.org/drawingml/2006/main">
               <a:ext uri="{FF2B5EF4-FFF2-40B4-BE49-F238E27FC236}">
-                <a16:creationId xmlns:a16="http://schemas.microsoft.com/office/drawing/2014/main" id="{010F8030-64D6-4822-85D8-AE6795F2AA21}"/>
+                <a16:creationId xmlns:a16="http://schemas.microsoft.com/office/drawing/2014/main" id="{6A9AF89C-8019-47C5-BFBC-C56A46541A8E}"/>
               </a:ext>
             </a:extLst>
           </p:cNvPr>
@@ -30123,7 +30123,7 @@
           <p:cNvPr id="37" name="">
             <a:extLst xmlns:a="http://schemas.openxmlformats.org/drawingml/2006/main">
               <a:ext uri="{FF2B5EF4-FFF2-40B4-BE49-F238E27FC236}">
-                <a16:creationId xmlns:a16="http://schemas.microsoft.com/office/drawing/2014/main" id="{103927C4-07C6-4B68-BA6C-08448E8311C3}"/>
+                <a16:creationId xmlns:a16="http://schemas.microsoft.com/office/drawing/2014/main" id="{0AEDF886-578A-4B35-BD54-8F03111452D2}"/>
               </a:ext>
             </a:extLst>
           </p:cNvPr>
@@ -30175,7 +30175,7 @@
           <p:cNvPr id="38" name="">
             <a:extLst xmlns:a="http://schemas.openxmlformats.org/drawingml/2006/main">
               <a:ext uri="{FF2B5EF4-FFF2-40B4-BE49-F238E27FC236}">
-                <a16:creationId xmlns:a16="http://schemas.microsoft.com/office/drawing/2014/main" id="{6B7FFA74-33E8-403A-B532-7E6D65143D31}"/>
+                <a16:creationId xmlns:a16="http://schemas.microsoft.com/office/drawing/2014/main" id="{9F9EEA52-287A-4CF9-8347-DCF8C7090481}"/>
               </a:ext>
             </a:extLst>
           </p:cNvPr>
@@ -30206,7 +30206,7 @@
           <p:cNvPr id="39" name="">
             <a:extLst xmlns:a="http://schemas.openxmlformats.org/drawingml/2006/main">
               <a:ext uri="{FF2B5EF4-FFF2-40B4-BE49-F238E27FC236}">
-                <a16:creationId xmlns:a16="http://schemas.microsoft.com/office/drawing/2014/main" id="{0272A64F-CAD5-475F-BF45-9E895F5EC70F}"/>
+                <a16:creationId xmlns:a16="http://schemas.microsoft.com/office/drawing/2014/main" id="{2318B12D-08BB-4272-9B6C-6593024C85FE}"/>
               </a:ext>
             </a:extLst>
           </p:cNvPr>
@@ -30258,7 +30258,7 @@
           <p:cNvPr id="40" name="">
             <a:extLst xmlns:a="http://schemas.openxmlformats.org/drawingml/2006/main">
               <a:ext uri="{FF2B5EF4-FFF2-40B4-BE49-F238E27FC236}">
-                <a16:creationId xmlns:a16="http://schemas.microsoft.com/office/drawing/2014/main" id="{7A3921FC-A8D8-4F31-8C06-BD7101E5C8EE}"/>
+                <a16:creationId xmlns:a16="http://schemas.microsoft.com/office/drawing/2014/main" id="{56CCEDC9-1F9C-4BFE-A057-4F9174D57317}"/>
               </a:ext>
             </a:extLst>
           </p:cNvPr>
@@ -30310,7 +30310,7 @@
           <p:cNvPr id="41" name="">
             <a:extLst xmlns:a="http://schemas.openxmlformats.org/drawingml/2006/main">
               <a:ext uri="{FF2B5EF4-FFF2-40B4-BE49-F238E27FC236}">
-                <a16:creationId xmlns:a16="http://schemas.microsoft.com/office/drawing/2014/main" id="{5DF61251-58D0-4F70-8847-F1D1353AFBD5}"/>
+                <a16:creationId xmlns:a16="http://schemas.microsoft.com/office/drawing/2014/main" id="{D76276A3-A539-4F99-BB30-59E3412605D1}"/>
               </a:ext>
             </a:extLst>
           </p:cNvPr>
@@ -30360,7 +30360,7 @@
     </p:spTree>
     <p:extLst>
       <p:ext uri="{BB962C8B-B14F-4D97-AF65-F5344CB8AC3E}">
-        <p14:creationId xmlns:p14="http://schemas.microsoft.com/office/powerpoint/2010/main" val="483410397"/>
+        <p14:creationId xmlns:p14="http://schemas.microsoft.com/office/powerpoint/2010/main" val="1936451599"/>
       </p:ext>
     </p:extLst>
   </p:cSld>
@@ -30391,7 +30391,7 @@
           <p:cNvPr id="76" name="">
             <a:extLst xmlns:a="http://schemas.openxmlformats.org/drawingml/2006/main">
               <a:ext uri="{FF2B5EF4-FFF2-40B4-BE49-F238E27FC236}">
-                <a16:creationId xmlns:a16="http://schemas.microsoft.com/office/drawing/2014/main" id="{81C042D9-ACE1-417F-864D-9DC2FC2AA897}"/>
+                <a16:creationId xmlns:a16="http://schemas.microsoft.com/office/drawing/2014/main" id="{5D3FB01C-E566-410E-A180-39A091F8AFF7}"/>
               </a:ext>
             </a:extLst>
           </p:cNvPr>
@@ -30424,7 +30424,7 @@
           <p:cNvPr id="2" name="">
             <a:extLst xmlns:a="http://schemas.openxmlformats.org/drawingml/2006/main">
               <a:ext uri="{FF2B5EF4-FFF2-40B4-BE49-F238E27FC236}">
-                <a16:creationId xmlns:a16="http://schemas.microsoft.com/office/drawing/2014/main" id="{270913DA-4EA0-4CE8-8DB9-2E039E52641D}"/>
+                <a16:creationId xmlns:a16="http://schemas.microsoft.com/office/drawing/2014/main" id="{0EE3D7EA-0C37-4F5C-B80E-97E4D350A9E1}"/>
               </a:ext>
             </a:extLst>
           </p:cNvPr>
@@ -30455,7 +30455,7 @@
           <p:cNvPr id="3" name="">
             <a:extLst xmlns:a="http://schemas.openxmlformats.org/drawingml/2006/main">
               <a:ext uri="{FF2B5EF4-FFF2-40B4-BE49-F238E27FC236}">
-                <a16:creationId xmlns:a16="http://schemas.microsoft.com/office/drawing/2014/main" id="{E63A345E-BD7A-420D-B97C-A870D36C74BD}"/>
+                <a16:creationId xmlns:a16="http://schemas.microsoft.com/office/drawing/2014/main" id="{4362EEA5-2A07-4EA4-B7F6-4DD61BAF4E08}"/>
               </a:ext>
             </a:extLst>
           </p:cNvPr>
@@ -30507,7 +30507,7 @@
           <p:cNvPr id="4" name="">
             <a:extLst xmlns:a="http://schemas.openxmlformats.org/drawingml/2006/main">
               <a:ext uri="{FF2B5EF4-FFF2-40B4-BE49-F238E27FC236}">
-                <a16:creationId xmlns:a16="http://schemas.microsoft.com/office/drawing/2014/main" id="{9FC3D17E-541E-4AF6-8025-AFF21171886B}"/>
+                <a16:creationId xmlns:a16="http://schemas.microsoft.com/office/drawing/2014/main" id="{57F0259E-A6BD-4C95-B498-CC25CBBF620F}"/>
               </a:ext>
             </a:extLst>
           </p:cNvPr>
@@ -30559,7 +30559,7 @@
           <p:cNvPr id="5" name="">
             <a:extLst xmlns:a="http://schemas.openxmlformats.org/drawingml/2006/main">
               <a:ext uri="{FF2B5EF4-FFF2-40B4-BE49-F238E27FC236}">
-                <a16:creationId xmlns:a16="http://schemas.microsoft.com/office/drawing/2014/main" id="{854B2BD6-ED95-40ED-8EF9-F3661A4667F2}"/>
+                <a16:creationId xmlns:a16="http://schemas.microsoft.com/office/drawing/2014/main" id="{417E8817-03AF-4374-98C2-2BFEBDADF212}"/>
               </a:ext>
             </a:extLst>
           </p:cNvPr>
@@ -30594,7 +30594,7 @@
           <p:nvPr/>
         </p:nvPicPr>
         <p:blipFill>
-          <a:blip xmlns:r="http://schemas.openxmlformats.org/officeDocument/2006/relationships" xmlns:a="http://schemas.openxmlformats.org/drawingml/2006/main" r:embed="R96ae6495090a453d"/>
+          <a:blip xmlns:r="http://schemas.openxmlformats.org/officeDocument/2006/relationships" xmlns:a="http://schemas.openxmlformats.org/drawingml/2006/main" r:embed="Rdaa022ba40ce4846"/>
           <a:stretch xmlns:a="http://schemas.openxmlformats.org/drawingml/2006/main"/>
         </p:blipFill>
         <p:spPr>
@@ -30612,7 +30612,7 @@
           <p:cNvPr id="7" name="">
             <a:extLst xmlns:a="http://schemas.openxmlformats.org/drawingml/2006/main">
               <a:ext uri="{FF2B5EF4-FFF2-40B4-BE49-F238E27FC236}">
-                <a16:creationId xmlns:a16="http://schemas.microsoft.com/office/drawing/2014/main" id="{ADCE8180-433D-4E63-A3B9-F2733B85D7A0}"/>
+                <a16:creationId xmlns:a16="http://schemas.microsoft.com/office/drawing/2014/main" id="{0864F2E2-35D6-4D75-9408-8B4ABC4B5E3A}"/>
               </a:ext>
             </a:extLst>
           </p:cNvPr>
@@ -30664,7 +30664,7 @@
           <p:cNvPr id="8" name="">
             <a:extLst xmlns:a="http://schemas.openxmlformats.org/drawingml/2006/main">
               <a:ext uri="{FF2B5EF4-FFF2-40B4-BE49-F238E27FC236}">
-                <a16:creationId xmlns:a16="http://schemas.microsoft.com/office/drawing/2014/main" id="{0AD1840A-0A80-454A-A19C-D1CE453F1357}"/>
+                <a16:creationId xmlns:a16="http://schemas.microsoft.com/office/drawing/2014/main" id="{065D4FA9-A644-4C07-9262-53549F062977}"/>
               </a:ext>
             </a:extLst>
           </p:cNvPr>
@@ -30716,7 +30716,7 @@
           <p:cNvPr id="9" name="">
             <a:extLst xmlns:a="http://schemas.openxmlformats.org/drawingml/2006/main">
               <a:ext uri="{FF2B5EF4-FFF2-40B4-BE49-F238E27FC236}">
-                <a16:creationId xmlns:a16="http://schemas.microsoft.com/office/drawing/2014/main" id="{7FDE09B6-7ACD-4E0C-98D0-60A51328233E}"/>
+                <a16:creationId xmlns:a16="http://schemas.microsoft.com/office/drawing/2014/main" id="{4AF06B84-1032-4459-A324-551A98684070}"/>
               </a:ext>
             </a:extLst>
           </p:cNvPr>
@@ -30768,7 +30768,7 @@
           <p:cNvPr id="10" name="">
             <a:extLst xmlns:a="http://schemas.openxmlformats.org/drawingml/2006/main">
               <a:ext uri="{FF2B5EF4-FFF2-40B4-BE49-F238E27FC236}">
-                <a16:creationId xmlns:a16="http://schemas.microsoft.com/office/drawing/2014/main" id="{1AC75E56-77F1-4C32-85A8-4C37C0E82790}"/>
+                <a16:creationId xmlns:a16="http://schemas.microsoft.com/office/drawing/2014/main" id="{8B9E94DF-C8A3-4F01-8517-F8C9CEE50ABA}"/>
               </a:ext>
             </a:extLst>
           </p:cNvPr>
@@ -30820,7 +30820,7 @@
           <p:cNvPr id="11" name="">
             <a:extLst xmlns:a="http://schemas.openxmlformats.org/drawingml/2006/main">
               <a:ext uri="{FF2B5EF4-FFF2-40B4-BE49-F238E27FC236}">
-                <a16:creationId xmlns:a16="http://schemas.microsoft.com/office/drawing/2014/main" id="{124AD285-98BB-488A-8171-592121A060E5}"/>
+                <a16:creationId xmlns:a16="http://schemas.microsoft.com/office/drawing/2014/main" id="{BE3FED6B-9583-474D-839D-D5DB8F48CA90}"/>
               </a:ext>
             </a:extLst>
           </p:cNvPr>
@@ -30863,7 +30863,7 @@
           <p:cNvPr id="12" name="">
             <a:extLst xmlns:a="http://schemas.openxmlformats.org/drawingml/2006/main">
               <a:ext uri="{FF2B5EF4-FFF2-40B4-BE49-F238E27FC236}">
-                <a16:creationId xmlns:a16="http://schemas.microsoft.com/office/drawing/2014/main" id="{F6CD328B-0F9A-40AC-91D4-9B90066729EC}"/>
+                <a16:creationId xmlns:a16="http://schemas.microsoft.com/office/drawing/2014/main" id="{F8B12B4E-987C-43AA-A054-A0BD1894C24C}"/>
               </a:ext>
             </a:extLst>
           </p:cNvPr>
@@ -30894,7 +30894,7 @@
           <p:cNvPr id="13" name="">
             <a:extLst xmlns:a="http://schemas.openxmlformats.org/drawingml/2006/main">
               <a:ext uri="{FF2B5EF4-FFF2-40B4-BE49-F238E27FC236}">
-                <a16:creationId xmlns:a16="http://schemas.microsoft.com/office/drawing/2014/main" id="{0E2D98CD-51CE-4419-89B0-34AC57258CF8}"/>
+                <a16:creationId xmlns:a16="http://schemas.microsoft.com/office/drawing/2014/main" id="{35A21295-82DB-4CB8-AF55-929611CC9517}"/>
               </a:ext>
             </a:extLst>
           </p:cNvPr>
@@ -30925,7 +30925,7 @@
           <p:cNvPr id="14" name="">
             <a:extLst xmlns:a="http://schemas.openxmlformats.org/drawingml/2006/main">
               <a:ext uri="{FF2B5EF4-FFF2-40B4-BE49-F238E27FC236}">
-                <a16:creationId xmlns:a16="http://schemas.microsoft.com/office/drawing/2014/main" id="{E72F86DB-7CD8-46EA-8369-04D628765D9A}"/>
+                <a16:creationId xmlns:a16="http://schemas.microsoft.com/office/drawing/2014/main" id="{46CDEFF2-CACD-4703-B521-8346DCCC12F2}"/>
               </a:ext>
             </a:extLst>
           </p:cNvPr>
@@ -30968,7 +30968,7 @@
           <p:cNvPr id="15" name="">
             <a:extLst xmlns:a="http://schemas.openxmlformats.org/drawingml/2006/main">
               <a:ext uri="{FF2B5EF4-FFF2-40B4-BE49-F238E27FC236}">
-                <a16:creationId xmlns:a16="http://schemas.microsoft.com/office/drawing/2014/main" id="{7737A248-14E9-48FC-B706-58703D104F01}"/>
+                <a16:creationId xmlns:a16="http://schemas.microsoft.com/office/drawing/2014/main" id="{A903A40D-5BA2-412C-BF61-74C1214190F7}"/>
               </a:ext>
             </a:extLst>
           </p:cNvPr>
@@ -30999,7 +30999,7 @@
           <p:cNvPr id="16" name="">
             <a:extLst xmlns:a="http://schemas.openxmlformats.org/drawingml/2006/main">
               <a:ext uri="{FF2B5EF4-FFF2-40B4-BE49-F238E27FC236}">
-                <a16:creationId xmlns:a16="http://schemas.microsoft.com/office/drawing/2014/main" id="{04F52036-2DB0-4A8B-A277-11246D4B5DDE}"/>
+                <a16:creationId xmlns:a16="http://schemas.microsoft.com/office/drawing/2014/main" id="{6A561C27-DE42-44BD-8336-68FB4D159FB0}"/>
               </a:ext>
             </a:extLst>
           </p:cNvPr>
@@ -31030,7 +31030,7 @@
           <p:cNvPr id="17" name="">
             <a:extLst xmlns:a="http://schemas.openxmlformats.org/drawingml/2006/main">
               <a:ext uri="{FF2B5EF4-FFF2-40B4-BE49-F238E27FC236}">
-                <a16:creationId xmlns:a16="http://schemas.microsoft.com/office/drawing/2014/main" id="{868D56E7-036A-4593-B075-E7801EC41008}"/>
+                <a16:creationId xmlns:a16="http://schemas.microsoft.com/office/drawing/2014/main" id="{8979D26D-EAF6-4B45-8BE6-D082A8B97D71}"/>
               </a:ext>
             </a:extLst>
           </p:cNvPr>
@@ -31082,7 +31082,7 @@
           <p:cNvPr id="18" name="">
             <a:extLst xmlns:a="http://schemas.openxmlformats.org/drawingml/2006/main">
               <a:ext uri="{FF2B5EF4-FFF2-40B4-BE49-F238E27FC236}">
-                <a16:creationId xmlns:a16="http://schemas.microsoft.com/office/drawing/2014/main" id="{FC4FEA42-F432-4F5C-BC97-52090DD0BEB6}"/>
+                <a16:creationId xmlns:a16="http://schemas.microsoft.com/office/drawing/2014/main" id="{BF98231F-ACC2-4850-8C3F-EE24A3E90608}"/>
               </a:ext>
             </a:extLst>
           </p:cNvPr>
@@ -31134,7 +31134,7 @@
           <p:cNvPr id="19" name="">
             <a:extLst xmlns:a="http://schemas.openxmlformats.org/drawingml/2006/main">
               <a:ext uri="{FF2B5EF4-FFF2-40B4-BE49-F238E27FC236}">
-                <a16:creationId xmlns:a16="http://schemas.microsoft.com/office/drawing/2014/main" id="{6226474B-9FA6-4051-9875-989D2A4B35A1}"/>
+                <a16:creationId xmlns:a16="http://schemas.microsoft.com/office/drawing/2014/main" id="{867D2123-E8EF-44D8-98B5-B2010CB63246}"/>
               </a:ext>
             </a:extLst>
           </p:cNvPr>
@@ -31186,7 +31186,7 @@
           <p:cNvPr id="20" name="">
             <a:extLst xmlns:a="http://schemas.openxmlformats.org/drawingml/2006/main">
               <a:ext uri="{FF2B5EF4-FFF2-40B4-BE49-F238E27FC236}">
-                <a16:creationId xmlns:a16="http://schemas.microsoft.com/office/drawing/2014/main" id="{DCB237AE-2ED6-438F-A7AA-85C0DF849C47}"/>
+                <a16:creationId xmlns:a16="http://schemas.microsoft.com/office/drawing/2014/main" id="{06547984-7C0B-4482-A73D-73BB113773D3}"/>
               </a:ext>
             </a:extLst>
           </p:cNvPr>
@@ -31229,7 +31229,7 @@
           <p:cNvPr id="21" name="">
             <a:extLst xmlns:a="http://schemas.openxmlformats.org/drawingml/2006/main">
               <a:ext uri="{FF2B5EF4-FFF2-40B4-BE49-F238E27FC236}">
-                <a16:creationId xmlns:a16="http://schemas.microsoft.com/office/drawing/2014/main" id="{8401088F-F820-474D-AE84-9984779A179E}"/>
+                <a16:creationId xmlns:a16="http://schemas.microsoft.com/office/drawing/2014/main" id="{D986BD80-0B8B-4E62-9342-A03528379FEE}"/>
               </a:ext>
             </a:extLst>
           </p:cNvPr>
@@ -31260,7 +31260,7 @@
           <p:cNvPr id="22" name="">
             <a:extLst xmlns:a="http://schemas.openxmlformats.org/drawingml/2006/main">
               <a:ext uri="{FF2B5EF4-FFF2-40B4-BE49-F238E27FC236}">
-                <a16:creationId xmlns:a16="http://schemas.microsoft.com/office/drawing/2014/main" id="{2EB853AE-D633-43E4-BDD4-1E82B6616629}"/>
+                <a16:creationId xmlns:a16="http://schemas.microsoft.com/office/drawing/2014/main" id="{EC8956BD-FF0E-4A08-8E00-F6FB3C26D5B2}"/>
               </a:ext>
             </a:extLst>
           </p:cNvPr>
@@ -31291,7 +31291,7 @@
           <p:cNvPr id="23" name="">
             <a:extLst xmlns:a="http://schemas.openxmlformats.org/drawingml/2006/main">
               <a:ext uri="{FF2B5EF4-FFF2-40B4-BE49-F238E27FC236}">
-                <a16:creationId xmlns:a16="http://schemas.microsoft.com/office/drawing/2014/main" id="{6AA5184A-79B6-4BF2-B402-505ABAEB8950}"/>
+                <a16:creationId xmlns:a16="http://schemas.microsoft.com/office/drawing/2014/main" id="{57777F9B-379E-45CF-AF7E-FCEEB3759846}"/>
               </a:ext>
             </a:extLst>
           </p:cNvPr>
@@ -31343,7 +31343,7 @@
           <p:cNvPr id="24" name="">
             <a:extLst xmlns:a="http://schemas.openxmlformats.org/drawingml/2006/main">
               <a:ext uri="{FF2B5EF4-FFF2-40B4-BE49-F238E27FC236}">
-                <a16:creationId xmlns:a16="http://schemas.microsoft.com/office/drawing/2014/main" id="{F9DDE5C7-2B3E-4C0E-A491-8EC3B6D79CEA}"/>
+                <a16:creationId xmlns:a16="http://schemas.microsoft.com/office/drawing/2014/main" id="{F23B50F4-993B-48C9-9C0D-172841E003AF}"/>
               </a:ext>
             </a:extLst>
           </p:cNvPr>
@@ -31395,7 +31395,7 @@
           <p:cNvPr id="25" name="">
             <a:extLst xmlns:a="http://schemas.openxmlformats.org/drawingml/2006/main">
               <a:ext uri="{FF2B5EF4-FFF2-40B4-BE49-F238E27FC236}">
-                <a16:creationId xmlns:a16="http://schemas.microsoft.com/office/drawing/2014/main" id="{B875F98C-F00A-43A2-B2D8-62BB6BC80C1D}"/>
+                <a16:creationId xmlns:a16="http://schemas.microsoft.com/office/drawing/2014/main" id="{85E64DB7-CCE2-4CB4-B0D7-0433FAA9BE32}"/>
               </a:ext>
             </a:extLst>
           </p:cNvPr>
@@ -31447,7 +31447,7 @@
           <p:cNvPr id="26" name="">
             <a:extLst xmlns:a="http://schemas.openxmlformats.org/drawingml/2006/main">
               <a:ext uri="{FF2B5EF4-FFF2-40B4-BE49-F238E27FC236}">
-                <a16:creationId xmlns:a16="http://schemas.microsoft.com/office/drawing/2014/main" id="{0B9366E0-61AC-4036-B2F8-292D765077BC}"/>
+                <a16:creationId xmlns:a16="http://schemas.microsoft.com/office/drawing/2014/main" id="{6BF3E947-847B-4A7D-AE58-218583F789E6}"/>
               </a:ext>
             </a:extLst>
           </p:cNvPr>
@@ -31490,7 +31490,7 @@
           <p:cNvPr id="27" name="">
             <a:extLst xmlns:a="http://schemas.openxmlformats.org/drawingml/2006/main">
               <a:ext uri="{FF2B5EF4-FFF2-40B4-BE49-F238E27FC236}">
-                <a16:creationId xmlns:a16="http://schemas.microsoft.com/office/drawing/2014/main" id="{2A9D7675-164A-4668-B9FD-77DA4C507FB0}"/>
+                <a16:creationId xmlns:a16="http://schemas.microsoft.com/office/drawing/2014/main" id="{9A24BAF2-EB2F-406A-82E1-B32C5BC933EE}"/>
               </a:ext>
             </a:extLst>
           </p:cNvPr>
@@ -31521,7 +31521,7 @@
           <p:cNvPr id="28" name="">
             <a:extLst xmlns:a="http://schemas.openxmlformats.org/drawingml/2006/main">
               <a:ext uri="{FF2B5EF4-FFF2-40B4-BE49-F238E27FC236}">
-                <a16:creationId xmlns:a16="http://schemas.microsoft.com/office/drawing/2014/main" id="{B1651A4E-B62B-4E8A-BFCE-4E57EA9D53D5}"/>
+                <a16:creationId xmlns:a16="http://schemas.microsoft.com/office/drawing/2014/main" id="{5C4D7C2E-DBAB-4514-9893-4CDF177C52F3}"/>
               </a:ext>
             </a:extLst>
           </p:cNvPr>
@@ -31552,7 +31552,7 @@
           <p:cNvPr id="29" name="">
             <a:extLst xmlns:a="http://schemas.openxmlformats.org/drawingml/2006/main">
               <a:ext uri="{FF2B5EF4-FFF2-40B4-BE49-F238E27FC236}">
-                <a16:creationId xmlns:a16="http://schemas.microsoft.com/office/drawing/2014/main" id="{C362F09E-8235-4DB6-AD1B-E3C30FBD066A}"/>
+                <a16:creationId xmlns:a16="http://schemas.microsoft.com/office/drawing/2014/main" id="{90522B79-FCEC-4CEB-A098-F99CAAE62646}"/>
               </a:ext>
             </a:extLst>
           </p:cNvPr>
@@ -31604,7 +31604,7 @@
           <p:cNvPr id="30" name="">
             <a:extLst xmlns:a="http://schemas.openxmlformats.org/drawingml/2006/main">
               <a:ext uri="{FF2B5EF4-FFF2-40B4-BE49-F238E27FC236}">
-                <a16:creationId xmlns:a16="http://schemas.microsoft.com/office/drawing/2014/main" id="{1D889C44-B545-444E-8EE6-572EC3B53A28}"/>
+                <a16:creationId xmlns:a16="http://schemas.microsoft.com/office/drawing/2014/main" id="{3564B2D9-6B88-4C11-B3A3-FB2B0C4685F5}"/>
               </a:ext>
             </a:extLst>
           </p:cNvPr>
@@ -31656,7 +31656,7 @@
           <p:cNvPr id="31" name="">
             <a:extLst xmlns:a="http://schemas.openxmlformats.org/drawingml/2006/main">
               <a:ext uri="{FF2B5EF4-FFF2-40B4-BE49-F238E27FC236}">
-                <a16:creationId xmlns:a16="http://schemas.microsoft.com/office/drawing/2014/main" id="{5569B44D-C83F-4B22-839D-C75D7853D436}"/>
+                <a16:creationId xmlns:a16="http://schemas.microsoft.com/office/drawing/2014/main" id="{8558D821-E179-4DB1-9D3C-53EA085BCA96}"/>
               </a:ext>
             </a:extLst>
           </p:cNvPr>
@@ -31708,7 +31708,7 @@
           <p:cNvPr id="32" name="">
             <a:extLst xmlns:a="http://schemas.openxmlformats.org/drawingml/2006/main">
               <a:ext uri="{FF2B5EF4-FFF2-40B4-BE49-F238E27FC236}">
-                <a16:creationId xmlns:a16="http://schemas.microsoft.com/office/drawing/2014/main" id="{543AAE2F-7B84-474E-A275-C7EA8E929A5C}"/>
+                <a16:creationId xmlns:a16="http://schemas.microsoft.com/office/drawing/2014/main" id="{72D9BE06-B842-47FD-A6F5-39F46CC46CB3}"/>
               </a:ext>
             </a:extLst>
           </p:cNvPr>
@@ -31751,7 +31751,7 @@
           <p:cNvPr id="33" name="">
             <a:extLst xmlns:a="http://schemas.openxmlformats.org/drawingml/2006/main">
               <a:ext uri="{FF2B5EF4-FFF2-40B4-BE49-F238E27FC236}">
-                <a16:creationId xmlns:a16="http://schemas.microsoft.com/office/drawing/2014/main" id="{D7F6B771-9FDB-4E60-A480-0771453BA455}"/>
+                <a16:creationId xmlns:a16="http://schemas.microsoft.com/office/drawing/2014/main" id="{4DC91777-9F8D-4E78-BC1F-D1E6E6D530C5}"/>
               </a:ext>
             </a:extLst>
           </p:cNvPr>
@@ -31782,7 +31782,7 @@
           <p:cNvPr id="34" name="">
             <a:extLst xmlns:a="http://schemas.openxmlformats.org/drawingml/2006/main">
               <a:ext uri="{FF2B5EF4-FFF2-40B4-BE49-F238E27FC236}">
-                <a16:creationId xmlns:a16="http://schemas.microsoft.com/office/drawing/2014/main" id="{8FAA8F80-DF10-4FBA-BDD5-70512E79CFF0}"/>
+                <a16:creationId xmlns:a16="http://schemas.microsoft.com/office/drawing/2014/main" id="{C247AA01-3559-49A9-8490-A5E8972CE51F}"/>
               </a:ext>
             </a:extLst>
           </p:cNvPr>
@@ -31813,7 +31813,7 @@
           <p:cNvPr id="35" name="">
             <a:extLst xmlns:a="http://schemas.openxmlformats.org/drawingml/2006/main">
               <a:ext uri="{FF2B5EF4-FFF2-40B4-BE49-F238E27FC236}">
-                <a16:creationId xmlns:a16="http://schemas.microsoft.com/office/drawing/2014/main" id="{93895330-B63D-45CC-A503-92C556FD97CF}"/>
+                <a16:creationId xmlns:a16="http://schemas.microsoft.com/office/drawing/2014/main" id="{BD0402F6-373E-40A4-84EA-046D37658799}"/>
               </a:ext>
             </a:extLst>
           </p:cNvPr>
@@ -31865,7 +31865,7 @@
           <p:cNvPr id="36" name="">
             <a:extLst xmlns:a="http://schemas.openxmlformats.org/drawingml/2006/main">
               <a:ext uri="{FF2B5EF4-FFF2-40B4-BE49-F238E27FC236}">
-                <a16:creationId xmlns:a16="http://schemas.microsoft.com/office/drawing/2014/main" id="{D5BED67B-0CCA-4092-9174-21D5F69E55F3}"/>
+                <a16:creationId xmlns:a16="http://schemas.microsoft.com/office/drawing/2014/main" id="{F8A643C7-E665-40D5-8FF9-C80C346E4BD6}"/>
               </a:ext>
             </a:extLst>
           </p:cNvPr>
@@ -31917,7 +31917,7 @@
           <p:cNvPr id="37" name="">
             <a:extLst xmlns:a="http://schemas.openxmlformats.org/drawingml/2006/main">
               <a:ext uri="{FF2B5EF4-FFF2-40B4-BE49-F238E27FC236}">
-                <a16:creationId xmlns:a16="http://schemas.microsoft.com/office/drawing/2014/main" id="{2827E2DD-B03C-49FA-AD40-172043504286}"/>
+                <a16:creationId xmlns:a16="http://schemas.microsoft.com/office/drawing/2014/main" id="{00A6B85C-04D8-430F-8DA4-32476319036E}"/>
               </a:ext>
             </a:extLst>
           </p:cNvPr>
@@ -31973,10 +31973,10 @@
           <p:nvPr/>
         </p:nvPicPr>
         <p:blipFill>
-          <a:blip xmlns:r="http://schemas.openxmlformats.org/officeDocument/2006/relationships" xmlns:a="http://schemas.openxmlformats.org/drawingml/2006/main" r:embed="R5107fc9bc73d4e4b">
+          <a:blip xmlns:r="http://schemas.openxmlformats.org/officeDocument/2006/relationships" xmlns:a="http://schemas.openxmlformats.org/drawingml/2006/main" r:embed="R7d11996f51424bcf">
             <a:extLst>
               <a:ext uri="{96DAC541-7B7A-43D3-8B79-37D633B846F1}">
-                <asvg:svgBlip xmlns:asvg="http://schemas.microsoft.com/office/drawing/2016/SVG/main" r:embed="R020e801ba6814636"/>
+                <asvg:svgBlip xmlns:asvg="http://schemas.microsoft.com/office/drawing/2016/SVG/main" r:embed="R5e42d0b021c34cf0"/>
               </a:ext>
             </a:extLst>
           </a:blip>
@@ -31997,7 +31997,7 @@
           <p:cNvPr id="39" name="">
             <a:extLst xmlns:a="http://schemas.openxmlformats.org/drawingml/2006/main">
               <a:ext uri="{FF2B5EF4-FFF2-40B4-BE49-F238E27FC236}">
-                <a16:creationId xmlns:a16="http://schemas.microsoft.com/office/drawing/2014/main" id="{6BDC7290-B9CD-40F5-BD1D-55EC71223733}"/>
+                <a16:creationId xmlns:a16="http://schemas.microsoft.com/office/drawing/2014/main" id="{F74BFA7B-ED55-42E8-90BE-97C1D16E333F}"/>
               </a:ext>
             </a:extLst>
           </p:cNvPr>
@@ -32049,7 +32049,7 @@
           <p:cNvPr id="40" name="">
             <a:extLst xmlns:a="http://schemas.openxmlformats.org/drawingml/2006/main">
               <a:ext uri="{FF2B5EF4-FFF2-40B4-BE49-F238E27FC236}">
-                <a16:creationId xmlns:a16="http://schemas.microsoft.com/office/drawing/2014/main" id="{AA9620D3-CF24-49E4-9144-2CCE5757449C}"/>
+                <a16:creationId xmlns:a16="http://schemas.microsoft.com/office/drawing/2014/main" id="{E2A66699-3EC3-46E5-99FE-7197FAECF2DA}"/>
               </a:ext>
             </a:extLst>
           </p:cNvPr>
@@ -32101,7 +32101,7 @@
           <p:cNvPr id="41" name="">
             <a:extLst xmlns:a="http://schemas.openxmlformats.org/drawingml/2006/main">
               <a:ext uri="{FF2B5EF4-FFF2-40B4-BE49-F238E27FC236}">
-                <a16:creationId xmlns:a16="http://schemas.microsoft.com/office/drawing/2014/main" id="{9BD91A64-7438-4F3B-8340-184733816848}"/>
+                <a16:creationId xmlns:a16="http://schemas.microsoft.com/office/drawing/2014/main" id="{FDA6F383-9122-481F-906F-CA2DB0309FAB}"/>
               </a:ext>
             </a:extLst>
           </p:cNvPr>
@@ -32144,7 +32144,7 @@
           <p:cNvPr id="42" name="">
             <a:extLst xmlns:a="http://schemas.openxmlformats.org/drawingml/2006/main">
               <a:ext uri="{FF2B5EF4-FFF2-40B4-BE49-F238E27FC236}">
-                <a16:creationId xmlns:a16="http://schemas.microsoft.com/office/drawing/2014/main" id="{4C83EADF-DEF5-41A0-AC23-1C72CB58969B}"/>
+                <a16:creationId xmlns:a16="http://schemas.microsoft.com/office/drawing/2014/main" id="{D01D223A-CE8A-4B84-A947-F1ECF2B43EAB}"/>
               </a:ext>
             </a:extLst>
           </p:cNvPr>
@@ -32175,7 +32175,7 @@
           <p:cNvPr id="43" name="">
             <a:extLst xmlns:a="http://schemas.openxmlformats.org/drawingml/2006/main">
               <a:ext uri="{FF2B5EF4-FFF2-40B4-BE49-F238E27FC236}">
-                <a16:creationId xmlns:a16="http://schemas.microsoft.com/office/drawing/2014/main" id="{8FED3F78-2CD9-4F6E-8BCC-4B248CF919BB}"/>
+                <a16:creationId xmlns:a16="http://schemas.microsoft.com/office/drawing/2014/main" id="{6F55DC53-B4C1-4C63-A617-74E00F8F54DB}"/>
               </a:ext>
             </a:extLst>
           </p:cNvPr>
@@ -32206,7 +32206,7 @@
           <p:cNvPr id="44" name="">
             <a:extLst xmlns:a="http://schemas.openxmlformats.org/drawingml/2006/main">
               <a:ext uri="{FF2B5EF4-FFF2-40B4-BE49-F238E27FC236}">
-                <a16:creationId xmlns:a16="http://schemas.microsoft.com/office/drawing/2014/main" id="{9D4961D4-304D-4B0A-8F82-F0BB31265E12}"/>
+                <a16:creationId xmlns:a16="http://schemas.microsoft.com/office/drawing/2014/main" id="{ED782DD9-C35D-4FC0-839A-EB5B768E9810}"/>
               </a:ext>
             </a:extLst>
           </p:cNvPr>
@@ -32249,7 +32249,7 @@
           <p:cNvPr id="45" name="">
             <a:extLst xmlns:a="http://schemas.openxmlformats.org/drawingml/2006/main">
               <a:ext uri="{FF2B5EF4-FFF2-40B4-BE49-F238E27FC236}">
-                <a16:creationId xmlns:a16="http://schemas.microsoft.com/office/drawing/2014/main" id="{4A26D126-0835-405C-9296-BD5B6C231E58}"/>
+                <a16:creationId xmlns:a16="http://schemas.microsoft.com/office/drawing/2014/main" id="{B1769BCE-63ED-415D-95C0-6C5336EBCFEB}"/>
               </a:ext>
             </a:extLst>
           </p:cNvPr>
@@ -32280,7 +32280,7 @@
           <p:cNvPr id="46" name="">
             <a:extLst xmlns:a="http://schemas.openxmlformats.org/drawingml/2006/main">
               <a:ext uri="{FF2B5EF4-FFF2-40B4-BE49-F238E27FC236}">
-                <a16:creationId xmlns:a16="http://schemas.microsoft.com/office/drawing/2014/main" id="{5AB17477-C78F-45B6-B5BC-610FF891EF81}"/>
+                <a16:creationId xmlns:a16="http://schemas.microsoft.com/office/drawing/2014/main" id="{32ABB086-929D-4947-BA31-1328C1238AB9}"/>
               </a:ext>
             </a:extLst>
           </p:cNvPr>
@@ -32311,7 +32311,7 @@
           <p:cNvPr id="47" name="">
             <a:extLst xmlns:a="http://schemas.openxmlformats.org/drawingml/2006/main">
               <a:ext uri="{FF2B5EF4-FFF2-40B4-BE49-F238E27FC236}">
-                <a16:creationId xmlns:a16="http://schemas.microsoft.com/office/drawing/2014/main" id="{FFCF68B4-9E60-482B-92F2-A1DFC335B67A}"/>
+                <a16:creationId xmlns:a16="http://schemas.microsoft.com/office/drawing/2014/main" id="{F33335DF-ADE1-4F05-A61B-BE7374595539}"/>
               </a:ext>
             </a:extLst>
           </p:cNvPr>
@@ -32363,7 +32363,7 @@
           <p:cNvPr id="48" name="">
             <a:extLst xmlns:a="http://schemas.openxmlformats.org/drawingml/2006/main">
               <a:ext uri="{FF2B5EF4-FFF2-40B4-BE49-F238E27FC236}">
-                <a16:creationId xmlns:a16="http://schemas.microsoft.com/office/drawing/2014/main" id="{693E13E4-9E40-4258-AAF7-936167EFA420}"/>
+                <a16:creationId xmlns:a16="http://schemas.microsoft.com/office/drawing/2014/main" id="{AE44D6C3-4FAE-46E1-8944-EDF304DACF65}"/>
               </a:ext>
             </a:extLst>
           </p:cNvPr>
@@ -32396,7 +32396,7 @@
           <p:cNvPr id="49" name="">
             <a:extLst xmlns:a="http://schemas.openxmlformats.org/drawingml/2006/main">
               <a:ext uri="{FF2B5EF4-FFF2-40B4-BE49-F238E27FC236}">
-                <a16:creationId xmlns:a16="http://schemas.microsoft.com/office/drawing/2014/main" id="{9FBFEFB6-D987-452A-B828-DFA53D446565}"/>
+                <a16:creationId xmlns:a16="http://schemas.microsoft.com/office/drawing/2014/main" id="{E102941D-4065-4C3A-99B3-6081B740608C}"/>
               </a:ext>
             </a:extLst>
           </p:cNvPr>
@@ -32448,7 +32448,7 @@
           <p:cNvPr id="50" name="">
             <a:extLst xmlns:a="http://schemas.openxmlformats.org/drawingml/2006/main">
               <a:ext uri="{FF2B5EF4-FFF2-40B4-BE49-F238E27FC236}">
-                <a16:creationId xmlns:a16="http://schemas.microsoft.com/office/drawing/2014/main" id="{5004D9C1-FAF8-4C9F-8EA6-BAB8D8109B4E}"/>
+                <a16:creationId xmlns:a16="http://schemas.microsoft.com/office/drawing/2014/main" id="{EAB2D6C4-2F27-47B0-AEFE-155A558F3CD7}"/>
               </a:ext>
             </a:extLst>
           </p:cNvPr>
@@ -32500,7 +32500,7 @@
           <p:cNvPr id="51" name="">
             <a:extLst xmlns:a="http://schemas.openxmlformats.org/drawingml/2006/main">
               <a:ext uri="{FF2B5EF4-FFF2-40B4-BE49-F238E27FC236}">
-                <a16:creationId xmlns:a16="http://schemas.microsoft.com/office/drawing/2014/main" id="{BD5C2A4F-87A7-4AE2-A146-066F3C0D7F48}"/>
+                <a16:creationId xmlns:a16="http://schemas.microsoft.com/office/drawing/2014/main" id="{00CF1762-597F-412E-9F1C-ECF930CA2412}"/>
               </a:ext>
             </a:extLst>
           </p:cNvPr>
@@ -32552,7 +32552,7 @@
           <p:cNvPr id="52" name="">
             <a:extLst xmlns:a="http://schemas.openxmlformats.org/drawingml/2006/main">
               <a:ext uri="{FF2B5EF4-FFF2-40B4-BE49-F238E27FC236}">
-                <a16:creationId xmlns:a16="http://schemas.microsoft.com/office/drawing/2014/main" id="{46AB6105-530D-4CAC-B67C-65B1E04D488C}"/>
+                <a16:creationId xmlns:a16="http://schemas.microsoft.com/office/drawing/2014/main" id="{9487D256-505A-4841-8BDF-9FD90F8ECCEE}"/>
               </a:ext>
             </a:extLst>
           </p:cNvPr>
@@ -32595,7 +32595,7 @@
           <p:cNvPr id="53" name="">
             <a:extLst xmlns:a="http://schemas.openxmlformats.org/drawingml/2006/main">
               <a:ext uri="{FF2B5EF4-FFF2-40B4-BE49-F238E27FC236}">
-                <a16:creationId xmlns:a16="http://schemas.microsoft.com/office/drawing/2014/main" id="{A81A309E-A400-40F1-96A2-3DB006D5FE30}"/>
+                <a16:creationId xmlns:a16="http://schemas.microsoft.com/office/drawing/2014/main" id="{518FAF62-4199-4EFA-B6CB-0A0A7B63E0A5}"/>
               </a:ext>
             </a:extLst>
           </p:cNvPr>
@@ -32626,7 +32626,7 @@
           <p:cNvPr id="54" name="">
             <a:extLst xmlns:a="http://schemas.openxmlformats.org/drawingml/2006/main">
               <a:ext uri="{FF2B5EF4-FFF2-40B4-BE49-F238E27FC236}">
-                <a16:creationId xmlns:a16="http://schemas.microsoft.com/office/drawing/2014/main" id="{B771DE48-EBE2-4D72-BEFF-BDAE33A91D05}"/>
+                <a16:creationId xmlns:a16="http://schemas.microsoft.com/office/drawing/2014/main" id="{AE9C2629-80D9-4B78-A1A0-CBF14F0B4BB1}"/>
               </a:ext>
             </a:extLst>
           </p:cNvPr>
@@ -32657,7 +32657,7 @@
           <p:cNvPr id="55" name="">
             <a:extLst xmlns:a="http://schemas.openxmlformats.org/drawingml/2006/main">
               <a:ext uri="{FF2B5EF4-FFF2-40B4-BE49-F238E27FC236}">
-                <a16:creationId xmlns:a16="http://schemas.microsoft.com/office/drawing/2014/main" id="{52FFF3D5-0AA9-453E-B962-1752A689CD91}"/>
+                <a16:creationId xmlns:a16="http://schemas.microsoft.com/office/drawing/2014/main" id="{49F8457C-F88C-4A73-B88D-F39057D88DFF}"/>
               </a:ext>
             </a:extLst>
           </p:cNvPr>
@@ -32709,7 +32709,7 @@
           <p:cNvPr id="56" name="">
             <a:extLst xmlns:a="http://schemas.openxmlformats.org/drawingml/2006/main">
               <a:ext uri="{FF2B5EF4-FFF2-40B4-BE49-F238E27FC236}">
-                <a16:creationId xmlns:a16="http://schemas.microsoft.com/office/drawing/2014/main" id="{09DFB7CA-EDE4-4D03-A79D-87B8FF02D5DB}"/>
+                <a16:creationId xmlns:a16="http://schemas.microsoft.com/office/drawing/2014/main" id="{85222D57-A52C-48ED-986C-1DCA2FE5A9B1}"/>
               </a:ext>
             </a:extLst>
           </p:cNvPr>
@@ -32742,7 +32742,7 @@
           <p:cNvPr id="57" name="">
             <a:extLst xmlns:a="http://schemas.openxmlformats.org/drawingml/2006/main">
               <a:ext uri="{FF2B5EF4-FFF2-40B4-BE49-F238E27FC236}">
-                <a16:creationId xmlns:a16="http://schemas.microsoft.com/office/drawing/2014/main" id="{E2AFF0EF-273D-49D3-8470-F096ABB914F5}"/>
+                <a16:creationId xmlns:a16="http://schemas.microsoft.com/office/drawing/2014/main" id="{0BE40574-2888-48FC-8688-A19D387DD380}"/>
               </a:ext>
             </a:extLst>
           </p:cNvPr>
@@ -32794,7 +32794,7 @@
           <p:cNvPr id="58" name="">
             <a:extLst xmlns:a="http://schemas.openxmlformats.org/drawingml/2006/main">
               <a:ext uri="{FF2B5EF4-FFF2-40B4-BE49-F238E27FC236}">
-                <a16:creationId xmlns:a16="http://schemas.microsoft.com/office/drawing/2014/main" id="{47AEBDA8-0C54-4D3A-8EFE-BBA30EAB8423}"/>
+                <a16:creationId xmlns:a16="http://schemas.microsoft.com/office/drawing/2014/main" id="{822B1E78-664E-4596-A56A-7DD93E9D6336}"/>
               </a:ext>
             </a:extLst>
           </p:cNvPr>
@@ -32846,7 +32846,7 @@
           <p:cNvPr id="59" name="">
             <a:extLst xmlns:a="http://schemas.openxmlformats.org/drawingml/2006/main">
               <a:ext uri="{FF2B5EF4-FFF2-40B4-BE49-F238E27FC236}">
-                <a16:creationId xmlns:a16="http://schemas.microsoft.com/office/drawing/2014/main" id="{A0243C90-7DB7-4575-A826-5392967DDF49}"/>
+                <a16:creationId xmlns:a16="http://schemas.microsoft.com/office/drawing/2014/main" id="{5A55ED34-FC55-4FB6-A7A4-66B894DAA110}"/>
               </a:ext>
             </a:extLst>
           </p:cNvPr>
@@ -32898,7 +32898,7 @@
           <p:cNvPr id="60" name="">
             <a:extLst xmlns:a="http://schemas.openxmlformats.org/drawingml/2006/main">
               <a:ext uri="{FF2B5EF4-FFF2-40B4-BE49-F238E27FC236}">
-                <a16:creationId xmlns:a16="http://schemas.microsoft.com/office/drawing/2014/main" id="{E87E3199-57F5-4022-88E8-6D57E61B34AE}"/>
+                <a16:creationId xmlns:a16="http://schemas.microsoft.com/office/drawing/2014/main" id="{76B7CDBA-C7A3-4506-82DD-1D06332C39E7}"/>
               </a:ext>
             </a:extLst>
           </p:cNvPr>
@@ -32941,7 +32941,7 @@
           <p:cNvPr id="61" name="">
             <a:extLst xmlns:a="http://schemas.openxmlformats.org/drawingml/2006/main">
               <a:ext uri="{FF2B5EF4-FFF2-40B4-BE49-F238E27FC236}">
-                <a16:creationId xmlns:a16="http://schemas.microsoft.com/office/drawing/2014/main" id="{B7305693-E200-4FF1-AEBF-B7FE3211DA91}"/>
+                <a16:creationId xmlns:a16="http://schemas.microsoft.com/office/drawing/2014/main" id="{5F44A71D-DCC2-4F4A-B5C3-030A016DF425}"/>
               </a:ext>
             </a:extLst>
           </p:cNvPr>
@@ -32972,7 +32972,7 @@
           <p:cNvPr id="62" name="">
             <a:extLst xmlns:a="http://schemas.openxmlformats.org/drawingml/2006/main">
               <a:ext uri="{FF2B5EF4-FFF2-40B4-BE49-F238E27FC236}">
-                <a16:creationId xmlns:a16="http://schemas.microsoft.com/office/drawing/2014/main" id="{1B44ED20-6C2F-40A8-8735-F09F5A1B3181}"/>
+                <a16:creationId xmlns:a16="http://schemas.microsoft.com/office/drawing/2014/main" id="{9CC288EB-37CC-4711-8A5D-24AF271A8196}"/>
               </a:ext>
             </a:extLst>
           </p:cNvPr>
@@ -33003,7 +33003,7 @@
           <p:cNvPr id="63" name="">
             <a:extLst xmlns:a="http://schemas.openxmlformats.org/drawingml/2006/main">
               <a:ext uri="{FF2B5EF4-FFF2-40B4-BE49-F238E27FC236}">
-                <a16:creationId xmlns:a16="http://schemas.microsoft.com/office/drawing/2014/main" id="{31CB03FA-25E0-4916-BFF0-667AE1EE6A2C}"/>
+                <a16:creationId xmlns:a16="http://schemas.microsoft.com/office/drawing/2014/main" id="{CB79FCA5-4787-4D3D-B227-25BDF7599B27}"/>
               </a:ext>
             </a:extLst>
           </p:cNvPr>
@@ -33055,7 +33055,7 @@
           <p:cNvPr id="64" name="">
             <a:extLst xmlns:a="http://schemas.openxmlformats.org/drawingml/2006/main">
               <a:ext uri="{FF2B5EF4-FFF2-40B4-BE49-F238E27FC236}">
-                <a16:creationId xmlns:a16="http://schemas.microsoft.com/office/drawing/2014/main" id="{9C178C51-3893-4BE3-8D09-E551EE806CC4}"/>
+                <a16:creationId xmlns:a16="http://schemas.microsoft.com/office/drawing/2014/main" id="{447CEA02-F5A5-4483-B0D1-3228EBCC7C99}"/>
               </a:ext>
             </a:extLst>
           </p:cNvPr>
@@ -33088,7 +33088,7 @@
           <p:cNvPr id="65" name="">
             <a:extLst xmlns:a="http://schemas.openxmlformats.org/drawingml/2006/main">
               <a:ext uri="{FF2B5EF4-FFF2-40B4-BE49-F238E27FC236}">
-                <a16:creationId xmlns:a16="http://schemas.microsoft.com/office/drawing/2014/main" id="{04B0CB7D-BB74-4E23-B71C-C2CB71A1A8E9}"/>
+                <a16:creationId xmlns:a16="http://schemas.microsoft.com/office/drawing/2014/main" id="{FA6E2D21-AA63-4A48-A730-B8DF54574CDB}"/>
               </a:ext>
             </a:extLst>
           </p:cNvPr>
@@ -33140,7 +33140,7 @@
           <p:cNvPr id="66" name="">
             <a:extLst xmlns:a="http://schemas.openxmlformats.org/drawingml/2006/main">
               <a:ext uri="{FF2B5EF4-FFF2-40B4-BE49-F238E27FC236}">
-                <a16:creationId xmlns:a16="http://schemas.microsoft.com/office/drawing/2014/main" id="{7F0D79E3-7459-4D1B-918D-52D8CDF64C82}"/>
+                <a16:creationId xmlns:a16="http://schemas.microsoft.com/office/drawing/2014/main" id="{39FBD382-A90F-4311-B003-F0F632D45726}"/>
               </a:ext>
             </a:extLst>
           </p:cNvPr>
@@ -33192,7 +33192,7 @@
           <p:cNvPr id="67" name="">
             <a:extLst xmlns:a="http://schemas.openxmlformats.org/drawingml/2006/main">
               <a:ext uri="{FF2B5EF4-FFF2-40B4-BE49-F238E27FC236}">
-                <a16:creationId xmlns:a16="http://schemas.microsoft.com/office/drawing/2014/main" id="{51E7D6E1-724C-4238-A49C-75FD64855AF2}"/>
+                <a16:creationId xmlns:a16="http://schemas.microsoft.com/office/drawing/2014/main" id="{FFC5B656-EACC-4E9B-BB56-EC76CEB4709A}"/>
               </a:ext>
             </a:extLst>
           </p:cNvPr>
@@ -33244,7 +33244,7 @@
           <p:cNvPr id="68" name="">
             <a:extLst xmlns:a="http://schemas.openxmlformats.org/drawingml/2006/main">
               <a:ext uri="{FF2B5EF4-FFF2-40B4-BE49-F238E27FC236}">
-                <a16:creationId xmlns:a16="http://schemas.microsoft.com/office/drawing/2014/main" id="{2106F3FF-87FD-4470-B9D9-DD67555F5CD5}"/>
+                <a16:creationId xmlns:a16="http://schemas.microsoft.com/office/drawing/2014/main" id="{E8FB9069-307B-4154-B35A-E2BBBC1298E3}"/>
               </a:ext>
             </a:extLst>
           </p:cNvPr>
@@ -33287,7 +33287,7 @@
           <p:cNvPr id="69" name="">
             <a:extLst xmlns:a="http://schemas.openxmlformats.org/drawingml/2006/main">
               <a:ext uri="{FF2B5EF4-FFF2-40B4-BE49-F238E27FC236}">
-                <a16:creationId xmlns:a16="http://schemas.microsoft.com/office/drawing/2014/main" id="{FA3E269B-56F2-49EB-91F1-F440115BF4B8}"/>
+                <a16:creationId xmlns:a16="http://schemas.microsoft.com/office/drawing/2014/main" id="{DB562296-79D3-4A95-9FAE-C8A6E2A4E82F}"/>
               </a:ext>
             </a:extLst>
           </p:cNvPr>
@@ -33318,7 +33318,7 @@
           <p:cNvPr id="70" name="">
             <a:extLst xmlns:a="http://schemas.openxmlformats.org/drawingml/2006/main">
               <a:ext uri="{FF2B5EF4-FFF2-40B4-BE49-F238E27FC236}">
-                <a16:creationId xmlns:a16="http://schemas.microsoft.com/office/drawing/2014/main" id="{64C66B48-9C66-450F-9158-47FDAE86FEBD}"/>
+                <a16:creationId xmlns:a16="http://schemas.microsoft.com/office/drawing/2014/main" id="{E0941EFD-E266-4731-A438-5C3DD43C54F6}"/>
               </a:ext>
             </a:extLst>
           </p:cNvPr>
@@ -33349,7 +33349,7 @@
           <p:cNvPr id="71" name="">
             <a:extLst xmlns:a="http://schemas.openxmlformats.org/drawingml/2006/main">
               <a:ext uri="{FF2B5EF4-FFF2-40B4-BE49-F238E27FC236}">
-                <a16:creationId xmlns:a16="http://schemas.microsoft.com/office/drawing/2014/main" id="{55C2E8F4-0C08-49BF-81E8-69E16103C084}"/>
+                <a16:creationId xmlns:a16="http://schemas.microsoft.com/office/drawing/2014/main" id="{2085C621-8CF0-499E-9622-FEEF6037B0F0}"/>
               </a:ext>
             </a:extLst>
           </p:cNvPr>
@@ -33401,7 +33401,7 @@
           <p:cNvPr id="72" name="">
             <a:extLst xmlns:a="http://schemas.openxmlformats.org/drawingml/2006/main">
               <a:ext uri="{FF2B5EF4-FFF2-40B4-BE49-F238E27FC236}">
-                <a16:creationId xmlns:a16="http://schemas.microsoft.com/office/drawing/2014/main" id="{D245B097-1025-4443-82E9-D6DADA8E3DB1}"/>
+                <a16:creationId xmlns:a16="http://schemas.microsoft.com/office/drawing/2014/main" id="{EFFBC7F2-F573-4ED4-BAB4-954CD010B830}"/>
               </a:ext>
             </a:extLst>
           </p:cNvPr>
@@ -33434,7 +33434,7 @@
           <p:cNvPr id="73" name="">
             <a:extLst xmlns:a="http://schemas.openxmlformats.org/drawingml/2006/main">
               <a:ext uri="{FF2B5EF4-FFF2-40B4-BE49-F238E27FC236}">
-                <a16:creationId xmlns:a16="http://schemas.microsoft.com/office/drawing/2014/main" id="{DBE2C9B0-124A-4FA1-BD1E-C4DE9B733571}"/>
+                <a16:creationId xmlns:a16="http://schemas.microsoft.com/office/drawing/2014/main" id="{23CC0CA1-D137-40A5-8EA1-1E6DA52E37B7}"/>
               </a:ext>
             </a:extLst>
           </p:cNvPr>
@@ -33486,7 +33486,7 @@
           <p:cNvPr id="74" name="">
             <a:extLst xmlns:a="http://schemas.openxmlformats.org/drawingml/2006/main">
               <a:ext uri="{FF2B5EF4-FFF2-40B4-BE49-F238E27FC236}">
-                <a16:creationId xmlns:a16="http://schemas.microsoft.com/office/drawing/2014/main" id="{BD42BF1C-A43F-42B2-AF08-3E9DF03207CD}"/>
+                <a16:creationId xmlns:a16="http://schemas.microsoft.com/office/drawing/2014/main" id="{BDD6D785-FEB6-4706-B2F8-42A3946E8A6E}"/>
               </a:ext>
             </a:extLst>
           </p:cNvPr>
@@ -33538,7 +33538,7 @@
           <p:cNvPr id="75" name="">
             <a:extLst xmlns:a="http://schemas.openxmlformats.org/drawingml/2006/main">
               <a:ext uri="{FF2B5EF4-FFF2-40B4-BE49-F238E27FC236}">
-                <a16:creationId xmlns:a16="http://schemas.microsoft.com/office/drawing/2014/main" id="{7A09E0FA-132F-40F7-A73A-6CF1AD23D556}"/>
+                <a16:creationId xmlns:a16="http://schemas.microsoft.com/office/drawing/2014/main" id="{BC301BC0-C710-41A4-AC46-E3E7DBDA62DD}"/>
               </a:ext>
             </a:extLst>
           </p:cNvPr>
@@ -33588,7 +33588,7 @@
     </p:spTree>
     <p:extLst>
       <p:ext uri="{BB962C8B-B14F-4D97-AF65-F5344CB8AC3E}">
-        <p14:creationId xmlns:p14="http://schemas.microsoft.com/office/powerpoint/2010/main" val="1053744368"/>
+        <p14:creationId xmlns:p14="http://schemas.microsoft.com/office/powerpoint/2010/main" val="1448144467"/>
       </p:ext>
     </p:extLst>
   </p:cSld>
@@ -33619,7 +33619,7 @@
           <p:cNvPr id="30" name="">
             <a:extLst xmlns:a="http://schemas.openxmlformats.org/drawingml/2006/main">
               <a:ext uri="{FF2B5EF4-FFF2-40B4-BE49-F238E27FC236}">
-                <a16:creationId xmlns:a16="http://schemas.microsoft.com/office/drawing/2014/main" id="{EF5DDCCA-B48B-4F6C-A1AA-9269DE7BB611}"/>
+                <a16:creationId xmlns:a16="http://schemas.microsoft.com/office/drawing/2014/main" id="{4BA2EAA7-0173-4149-8F9D-A1903BB3532C}"/>
               </a:ext>
             </a:extLst>
           </p:cNvPr>
@@ -33652,7 +33652,7 @@
           <p:cNvPr id="2" name="">
             <a:extLst xmlns:a="http://schemas.openxmlformats.org/drawingml/2006/main">
               <a:ext uri="{FF2B5EF4-FFF2-40B4-BE49-F238E27FC236}">
-                <a16:creationId xmlns:a16="http://schemas.microsoft.com/office/drawing/2014/main" id="{71C23690-1EA1-4CE9-82BB-E3FC4113689B}"/>
+                <a16:creationId xmlns:a16="http://schemas.microsoft.com/office/drawing/2014/main" id="{C30F392B-63A8-458A-AA25-C9021D36B842}"/>
               </a:ext>
             </a:extLst>
           </p:cNvPr>
@@ -33683,7 +33683,7 @@
           <p:cNvPr id="3" name="">
             <a:extLst xmlns:a="http://schemas.openxmlformats.org/drawingml/2006/main">
               <a:ext uri="{FF2B5EF4-FFF2-40B4-BE49-F238E27FC236}">
-                <a16:creationId xmlns:a16="http://schemas.microsoft.com/office/drawing/2014/main" id="{FAB7E3EF-5C04-4F8B-8059-5A4EBDC2641F}"/>
+                <a16:creationId xmlns:a16="http://schemas.microsoft.com/office/drawing/2014/main" id="{117B4F2E-40C9-408A-BC6A-F054E68689D7}"/>
               </a:ext>
             </a:extLst>
           </p:cNvPr>
@@ -33735,7 +33735,7 @@
           <p:cNvPr id="4" name="">
             <a:extLst xmlns:a="http://schemas.openxmlformats.org/drawingml/2006/main">
               <a:ext uri="{FF2B5EF4-FFF2-40B4-BE49-F238E27FC236}">
-                <a16:creationId xmlns:a16="http://schemas.microsoft.com/office/drawing/2014/main" id="{A626036C-084E-4B49-8F57-A75B7B1F53EC}"/>
+                <a16:creationId xmlns:a16="http://schemas.microsoft.com/office/drawing/2014/main" id="{F6D32E3A-827E-455B-AB6E-E4051696D8FC}"/>
               </a:ext>
             </a:extLst>
           </p:cNvPr>
@@ -33787,7 +33787,7 @@
           <p:cNvPr id="5" name="">
             <a:extLst xmlns:a="http://schemas.openxmlformats.org/drawingml/2006/main">
               <a:ext uri="{FF2B5EF4-FFF2-40B4-BE49-F238E27FC236}">
-                <a16:creationId xmlns:a16="http://schemas.microsoft.com/office/drawing/2014/main" id="{475A1404-0BD8-43FE-86FE-2B4934BDB82E}"/>
+                <a16:creationId xmlns:a16="http://schemas.microsoft.com/office/drawing/2014/main" id="{62CBE4DB-F9FE-4E4B-883D-8B4D9367344E}"/>
               </a:ext>
             </a:extLst>
           </p:cNvPr>
@@ -33822,7 +33822,7 @@
           <p:nvPr/>
         </p:nvPicPr>
         <p:blipFill>
-          <a:blip xmlns:r="http://schemas.openxmlformats.org/officeDocument/2006/relationships" xmlns:a="http://schemas.openxmlformats.org/drawingml/2006/main" r:embed="R6e23606e026d438d"/>
+          <a:blip xmlns:r="http://schemas.openxmlformats.org/officeDocument/2006/relationships" xmlns:a="http://schemas.openxmlformats.org/drawingml/2006/main" r:embed="Rbdd2f2c9369c48c0"/>
           <a:stretch xmlns:a="http://schemas.openxmlformats.org/drawingml/2006/main"/>
         </p:blipFill>
         <p:spPr>
@@ -33840,7 +33840,7 @@
           <p:cNvPr id="7" name="">
             <a:extLst xmlns:a="http://schemas.openxmlformats.org/drawingml/2006/main">
               <a:ext uri="{FF2B5EF4-FFF2-40B4-BE49-F238E27FC236}">
-                <a16:creationId xmlns:a16="http://schemas.microsoft.com/office/drawing/2014/main" id="{3103E471-18B8-4E7F-87BE-F98EDF625297}"/>
+                <a16:creationId xmlns:a16="http://schemas.microsoft.com/office/drawing/2014/main" id="{0E9715AB-2BF2-4BDD-AC8F-9B7BBAFCDB7C}"/>
               </a:ext>
             </a:extLst>
           </p:cNvPr>
@@ -33892,7 +33892,7 @@
           <p:cNvPr id="8" name="">
             <a:extLst xmlns:a="http://schemas.openxmlformats.org/drawingml/2006/main">
               <a:ext uri="{FF2B5EF4-FFF2-40B4-BE49-F238E27FC236}">
-                <a16:creationId xmlns:a16="http://schemas.microsoft.com/office/drawing/2014/main" id="{98919D7B-696F-42BD-8063-0259D5446E6A}"/>
+                <a16:creationId xmlns:a16="http://schemas.microsoft.com/office/drawing/2014/main" id="{9C5A6164-AD1E-4BD6-A6BE-0ABE1000F6C5}"/>
               </a:ext>
             </a:extLst>
           </p:cNvPr>
@@ -33944,7 +33944,7 @@
           <p:cNvPr id="9" name="">
             <a:extLst xmlns:a="http://schemas.openxmlformats.org/drawingml/2006/main">
               <a:ext uri="{FF2B5EF4-FFF2-40B4-BE49-F238E27FC236}">
-                <a16:creationId xmlns:a16="http://schemas.microsoft.com/office/drawing/2014/main" id="{45BB515A-0252-4E1F-ABE7-2C36CCE1D3F2}"/>
+                <a16:creationId xmlns:a16="http://schemas.microsoft.com/office/drawing/2014/main" id="{16CD1C5D-685A-4B7E-A057-22AA0FC85F72}"/>
               </a:ext>
             </a:extLst>
           </p:cNvPr>
@@ -33996,7 +33996,7 @@
           <p:cNvPr id="10" name="">
             <a:extLst xmlns:a="http://schemas.openxmlformats.org/drawingml/2006/main">
               <a:ext uri="{FF2B5EF4-FFF2-40B4-BE49-F238E27FC236}">
-                <a16:creationId xmlns:a16="http://schemas.microsoft.com/office/drawing/2014/main" id="{843F5548-FCA9-455B-8373-CF59C7CD919E}"/>
+                <a16:creationId xmlns:a16="http://schemas.microsoft.com/office/drawing/2014/main" id="{0C2922E2-E776-4E4B-85EC-ACEAEC5B60E1}"/>
               </a:ext>
             </a:extLst>
           </p:cNvPr>
@@ -34048,7 +34048,7 @@
           <p:cNvPr id="11" name="">
             <a:extLst xmlns:a="http://schemas.openxmlformats.org/drawingml/2006/main">
               <a:ext uri="{FF2B5EF4-FFF2-40B4-BE49-F238E27FC236}">
-                <a16:creationId xmlns:a16="http://schemas.microsoft.com/office/drawing/2014/main" id="{906BE91A-4864-4279-8D8C-F16FE70B42F9}"/>
+                <a16:creationId xmlns:a16="http://schemas.microsoft.com/office/drawing/2014/main" id="{92A4597F-2834-4DA9-9906-8546F2F52837}"/>
               </a:ext>
             </a:extLst>
           </p:cNvPr>
@@ -34095,10 +34095,10 @@
           <p:nvPr/>
         </p:nvPicPr>
         <p:blipFill>
-          <a:blip xmlns:r="http://schemas.openxmlformats.org/officeDocument/2006/relationships" xmlns:a="http://schemas.openxmlformats.org/drawingml/2006/main" r:embed="R1cd628cfb52a46ff">
+          <a:blip xmlns:r="http://schemas.openxmlformats.org/officeDocument/2006/relationships" xmlns:a="http://schemas.openxmlformats.org/drawingml/2006/main" r:embed="Rbf33b36913624d33">
             <a:extLst>
               <a:ext uri="{96DAC541-7B7A-43D3-8B79-37D633B846F1}">
-                <asvg:svgBlip xmlns:asvg="http://schemas.microsoft.com/office/drawing/2016/SVG/main" r:embed="R64b4053002ad4cad"/>
+                <asvg:svgBlip xmlns:asvg="http://schemas.microsoft.com/office/drawing/2016/SVG/main" r:embed="R15cb818ef7764664"/>
               </a:ext>
             </a:extLst>
           </a:blip>
@@ -34119,7 +34119,7 @@
           <p:cNvPr id="13" name="">
             <a:extLst xmlns:a="http://schemas.openxmlformats.org/drawingml/2006/main">
               <a:ext uri="{FF2B5EF4-FFF2-40B4-BE49-F238E27FC236}">
-                <a16:creationId xmlns:a16="http://schemas.microsoft.com/office/drawing/2014/main" id="{6A73285F-8B94-4205-841B-07757E1B9651}"/>
+                <a16:creationId xmlns:a16="http://schemas.microsoft.com/office/drawing/2014/main" id="{96FDB22B-14EE-43C3-9A54-B74FFAFFB6FA}"/>
               </a:ext>
             </a:extLst>
           </p:cNvPr>
@@ -34152,7 +34152,7 @@
           <p:cNvPr id="14" name="">
             <a:extLst xmlns:a="http://schemas.openxmlformats.org/drawingml/2006/main">
               <a:ext uri="{FF2B5EF4-FFF2-40B4-BE49-F238E27FC236}">
-                <a16:creationId xmlns:a16="http://schemas.microsoft.com/office/drawing/2014/main" id="{D8935FAC-A463-4903-A06F-371D5C5AD7BF}"/>
+                <a16:creationId xmlns:a16="http://schemas.microsoft.com/office/drawing/2014/main" id="{9623846B-210E-4AFF-A3B5-68987838ACDB}"/>
               </a:ext>
             </a:extLst>
           </p:cNvPr>
@@ -34204,7 +34204,7 @@
           <p:cNvPr id="15" name="">
             <a:extLst xmlns:a="http://schemas.openxmlformats.org/drawingml/2006/main">
               <a:ext uri="{FF2B5EF4-FFF2-40B4-BE49-F238E27FC236}">
-                <a16:creationId xmlns:a16="http://schemas.microsoft.com/office/drawing/2014/main" id="{58E5BBFA-BB0A-4509-9AC2-BB442BA1E8C5}"/>
+                <a16:creationId xmlns:a16="http://schemas.microsoft.com/office/drawing/2014/main" id="{96166846-0F4D-4BF0-B859-0994BF27F9D3}"/>
               </a:ext>
             </a:extLst>
           </p:cNvPr>
@@ -34237,7 +34237,7 @@
           <p:cNvPr id="16" name="">
             <a:extLst xmlns:a="http://schemas.openxmlformats.org/drawingml/2006/main">
               <a:ext uri="{FF2B5EF4-FFF2-40B4-BE49-F238E27FC236}">
-                <a16:creationId xmlns:a16="http://schemas.microsoft.com/office/drawing/2014/main" id="{0610954B-B4D3-4F90-8DC0-C6CE798D8C14}"/>
+                <a16:creationId xmlns:a16="http://schemas.microsoft.com/office/drawing/2014/main" id="{E1FA1CC9-7363-4747-B38E-EF46FABA352D}"/>
               </a:ext>
             </a:extLst>
           </p:cNvPr>
@@ -34289,7 +34289,7 @@
           <p:cNvPr id="17" name="">
             <a:extLst xmlns:a="http://schemas.openxmlformats.org/drawingml/2006/main">
               <a:ext uri="{FF2B5EF4-FFF2-40B4-BE49-F238E27FC236}">
-                <a16:creationId xmlns:a16="http://schemas.microsoft.com/office/drawing/2014/main" id="{38816E40-1ED5-4FEE-91B2-DED8F4E2CB82}"/>
+                <a16:creationId xmlns:a16="http://schemas.microsoft.com/office/drawing/2014/main" id="{EC88A484-70E1-423A-8CAE-D5A82B6CACA8}"/>
               </a:ext>
             </a:extLst>
           </p:cNvPr>
@@ -34322,7 +34322,7 @@
           <p:cNvPr id="18" name="">
             <a:extLst xmlns:a="http://schemas.openxmlformats.org/drawingml/2006/main">
               <a:ext uri="{FF2B5EF4-FFF2-40B4-BE49-F238E27FC236}">
-                <a16:creationId xmlns:a16="http://schemas.microsoft.com/office/drawing/2014/main" id="{C4D3A218-91B3-4C87-8FB0-432ACD4590B8}"/>
+                <a16:creationId xmlns:a16="http://schemas.microsoft.com/office/drawing/2014/main" id="{9F8C81E0-612C-4533-93A5-AC2AEB3918AC}"/>
               </a:ext>
             </a:extLst>
           </p:cNvPr>
@@ -34374,7 +34374,7 @@
           <p:cNvPr id="19" name="">
             <a:extLst xmlns:a="http://schemas.openxmlformats.org/drawingml/2006/main">
               <a:ext uri="{FF2B5EF4-FFF2-40B4-BE49-F238E27FC236}">
-                <a16:creationId xmlns:a16="http://schemas.microsoft.com/office/drawing/2014/main" id="{0D0D9B9D-3DA1-450B-BD84-434578046EE1}"/>
+                <a16:creationId xmlns:a16="http://schemas.microsoft.com/office/drawing/2014/main" id="{0F7B28DF-E765-4C5B-AB86-3F8FC21BD98E}"/>
               </a:ext>
             </a:extLst>
           </p:cNvPr>
@@ -34407,7 +34407,7 @@
           <p:cNvPr id="20" name="">
             <a:extLst xmlns:a="http://schemas.openxmlformats.org/drawingml/2006/main">
               <a:ext uri="{FF2B5EF4-FFF2-40B4-BE49-F238E27FC236}">
-                <a16:creationId xmlns:a16="http://schemas.microsoft.com/office/drawing/2014/main" id="{F516C009-A48A-4EB4-BE20-08B236CEA3BC}"/>
+                <a16:creationId xmlns:a16="http://schemas.microsoft.com/office/drawing/2014/main" id="{5E716D15-16F6-481C-B58E-8AA75941C98D}"/>
               </a:ext>
             </a:extLst>
           </p:cNvPr>
@@ -34459,7 +34459,7 @@
           <p:cNvPr id="21" name="">
             <a:extLst xmlns:a="http://schemas.openxmlformats.org/drawingml/2006/main">
               <a:ext uri="{FF2B5EF4-FFF2-40B4-BE49-F238E27FC236}">
-                <a16:creationId xmlns:a16="http://schemas.microsoft.com/office/drawing/2014/main" id="{D1723975-C792-4802-98DF-816674BE4E8A}"/>
+                <a16:creationId xmlns:a16="http://schemas.microsoft.com/office/drawing/2014/main" id="{F116732E-B714-4F9B-9A9C-563E834C5861}"/>
               </a:ext>
             </a:extLst>
           </p:cNvPr>
@@ -34490,7 +34490,7 @@
           <p:cNvPr id="22" name="">
             <a:extLst xmlns:a="http://schemas.openxmlformats.org/drawingml/2006/main">
               <a:ext uri="{FF2B5EF4-FFF2-40B4-BE49-F238E27FC236}">
-                <a16:creationId xmlns:a16="http://schemas.microsoft.com/office/drawing/2014/main" id="{8F684F68-4DF2-4600-91CE-9DFD96601459}"/>
+                <a16:creationId xmlns:a16="http://schemas.microsoft.com/office/drawing/2014/main" id="{0CFA5884-DB72-4983-BBC2-421CB6E2AF79}"/>
               </a:ext>
             </a:extLst>
           </p:cNvPr>
@@ -34542,7 +34542,7 @@
           <p:cNvPr id="23" name="">
             <a:extLst xmlns:a="http://schemas.openxmlformats.org/drawingml/2006/main">
               <a:ext uri="{FF2B5EF4-FFF2-40B4-BE49-F238E27FC236}">
-                <a16:creationId xmlns:a16="http://schemas.microsoft.com/office/drawing/2014/main" id="{E564158E-5DA4-498E-AB5C-2B146BCC754D}"/>
+                <a16:creationId xmlns:a16="http://schemas.microsoft.com/office/drawing/2014/main" id="{D1A2231E-8693-4C23-B395-D977C024DD59}"/>
               </a:ext>
             </a:extLst>
           </p:cNvPr>
@@ -34594,7 +34594,7 @@
           <p:cNvPr id="24" name="">
             <a:extLst xmlns:a="http://schemas.openxmlformats.org/drawingml/2006/main">
               <a:ext uri="{FF2B5EF4-FFF2-40B4-BE49-F238E27FC236}">
-                <a16:creationId xmlns:a16="http://schemas.microsoft.com/office/drawing/2014/main" id="{B4FD5F06-606F-4FEB-BBDD-ACFD32DCBBBD}"/>
+                <a16:creationId xmlns:a16="http://schemas.microsoft.com/office/drawing/2014/main" id="{F2BB082F-5697-4EFE-BE25-5F84CB7C16D5}"/>
               </a:ext>
             </a:extLst>
           </p:cNvPr>
@@ -34646,7 +34646,7 @@
           <p:cNvPr id="25" name="">
             <a:extLst xmlns:a="http://schemas.openxmlformats.org/drawingml/2006/main">
               <a:ext uri="{FF2B5EF4-FFF2-40B4-BE49-F238E27FC236}">
-                <a16:creationId xmlns:a16="http://schemas.microsoft.com/office/drawing/2014/main" id="{4CDFB054-58FE-41BD-A91F-110C18CAE286}"/>
+                <a16:creationId xmlns:a16="http://schemas.microsoft.com/office/drawing/2014/main" id="{DF02784C-46EE-4192-B276-E01E876B9FA4}"/>
               </a:ext>
             </a:extLst>
           </p:cNvPr>
@@ -34698,7 +34698,7 @@
           <p:cNvPr id="26" name="">
             <a:extLst xmlns:a="http://schemas.openxmlformats.org/drawingml/2006/main">
               <a:ext uri="{FF2B5EF4-FFF2-40B4-BE49-F238E27FC236}">
-                <a16:creationId xmlns:a16="http://schemas.microsoft.com/office/drawing/2014/main" id="{BEB8597A-F2AF-442F-A835-92CAC3C62279}"/>
+                <a16:creationId xmlns:a16="http://schemas.microsoft.com/office/drawing/2014/main" id="{A420B309-67C4-4DC9-9C3A-AAEEE3E5B420}"/>
               </a:ext>
             </a:extLst>
           </p:cNvPr>
@@ -34750,7 +34750,7 @@
           <p:cNvPr id="27" name="">
             <a:extLst xmlns:a="http://schemas.openxmlformats.org/drawingml/2006/main">
               <a:ext uri="{FF2B5EF4-FFF2-40B4-BE49-F238E27FC236}">
-                <a16:creationId xmlns:a16="http://schemas.microsoft.com/office/drawing/2014/main" id="{B950E8E3-A473-4835-8BD7-9362DEBE77EE}"/>
+                <a16:creationId xmlns:a16="http://schemas.microsoft.com/office/drawing/2014/main" id="{D0A9F7DA-FA0F-4FCA-B87E-1DB42EB9F987}"/>
               </a:ext>
             </a:extLst>
           </p:cNvPr>
@@ -34802,7 +34802,7 @@
           <p:cNvPr id="28" name="">
             <a:extLst xmlns:a="http://schemas.openxmlformats.org/drawingml/2006/main">
               <a:ext uri="{FF2B5EF4-FFF2-40B4-BE49-F238E27FC236}">
-                <a16:creationId xmlns:a16="http://schemas.microsoft.com/office/drawing/2014/main" id="{8B450747-5CEA-4D06-8B1B-5BBF2D7CB3D4}"/>
+                <a16:creationId xmlns:a16="http://schemas.microsoft.com/office/drawing/2014/main" id="{32FB2C3A-1860-4DF5-9FE1-1FCFD5512BD3}"/>
               </a:ext>
             </a:extLst>
           </p:cNvPr>
@@ -34854,7 +34854,7 @@
           <p:cNvPr id="29" name="">
             <a:extLst xmlns:a="http://schemas.openxmlformats.org/drawingml/2006/main">
               <a:ext uri="{FF2B5EF4-FFF2-40B4-BE49-F238E27FC236}">
-                <a16:creationId xmlns:a16="http://schemas.microsoft.com/office/drawing/2014/main" id="{C91E1021-3434-488D-8B89-26B9D5766272}"/>
+                <a16:creationId xmlns:a16="http://schemas.microsoft.com/office/drawing/2014/main" id="{B87EFC2F-53E6-40A1-AB9D-B0FD1E8B766F}"/>
               </a:ext>
             </a:extLst>
           </p:cNvPr>
@@ -34904,7 +34904,7 @@
     </p:spTree>
     <p:extLst>
       <p:ext uri="{BB962C8B-B14F-4D97-AF65-F5344CB8AC3E}">
-        <p14:creationId xmlns:p14="http://schemas.microsoft.com/office/powerpoint/2010/main" val="622443789"/>
+        <p14:creationId xmlns:p14="http://schemas.microsoft.com/office/powerpoint/2010/main" val="1310136277"/>
       </p:ext>
     </p:extLst>
   </p:cSld>
@@ -34935,7 +34935,7 @@
           <p:cNvPr id="33" name="">
             <a:extLst xmlns:a="http://schemas.openxmlformats.org/drawingml/2006/main">
               <a:ext uri="{FF2B5EF4-FFF2-40B4-BE49-F238E27FC236}">
-                <a16:creationId xmlns:a16="http://schemas.microsoft.com/office/drawing/2014/main" id="{305DE97E-8F0A-4010-B2AC-6154CE888C56}"/>
+                <a16:creationId xmlns:a16="http://schemas.microsoft.com/office/drawing/2014/main" id="{43E8B17D-4F1C-4BF5-8C47-A452642F09DF}"/>
               </a:ext>
             </a:extLst>
           </p:cNvPr>
@@ -34968,7 +34968,7 @@
           <p:cNvPr id="2" name="">
             <a:extLst xmlns:a="http://schemas.openxmlformats.org/drawingml/2006/main">
               <a:ext uri="{FF2B5EF4-FFF2-40B4-BE49-F238E27FC236}">
-                <a16:creationId xmlns:a16="http://schemas.microsoft.com/office/drawing/2014/main" id="{E79B67EA-4157-41C1-8B0D-8DB29B60F5D2}"/>
+                <a16:creationId xmlns:a16="http://schemas.microsoft.com/office/drawing/2014/main" id="{949BD4C0-4BE0-4A16-8570-F85E06284B95}"/>
               </a:ext>
             </a:extLst>
           </p:cNvPr>
@@ -34999,7 +34999,7 @@
           <p:cNvPr id="3" name="">
             <a:extLst xmlns:a="http://schemas.openxmlformats.org/drawingml/2006/main">
               <a:ext uri="{FF2B5EF4-FFF2-40B4-BE49-F238E27FC236}">
-                <a16:creationId xmlns:a16="http://schemas.microsoft.com/office/drawing/2014/main" id="{C56D1636-856F-451B-9896-7046D57384B3}"/>
+                <a16:creationId xmlns:a16="http://schemas.microsoft.com/office/drawing/2014/main" id="{C681BFB2-F4E9-4B04-819B-935D2C4B2B6B}"/>
               </a:ext>
             </a:extLst>
           </p:cNvPr>
@@ -35051,7 +35051,7 @@
           <p:cNvPr id="4" name="">
             <a:extLst xmlns:a="http://schemas.openxmlformats.org/drawingml/2006/main">
               <a:ext uri="{FF2B5EF4-FFF2-40B4-BE49-F238E27FC236}">
-                <a16:creationId xmlns:a16="http://schemas.microsoft.com/office/drawing/2014/main" id="{4314FA87-1903-4027-8D8E-1493042E367D}"/>
+                <a16:creationId xmlns:a16="http://schemas.microsoft.com/office/drawing/2014/main" id="{6669D964-CEF1-47E7-8FFC-D50D83C1ACC3}"/>
               </a:ext>
             </a:extLst>
           </p:cNvPr>
@@ -35103,7 +35103,7 @@
           <p:cNvPr id="5" name="">
             <a:extLst xmlns:a="http://schemas.openxmlformats.org/drawingml/2006/main">
               <a:ext uri="{FF2B5EF4-FFF2-40B4-BE49-F238E27FC236}">
-                <a16:creationId xmlns:a16="http://schemas.microsoft.com/office/drawing/2014/main" id="{729FE053-D7B1-4962-9DD2-B87CA001E5EE}"/>
+                <a16:creationId xmlns:a16="http://schemas.microsoft.com/office/drawing/2014/main" id="{B37F1CE6-C005-4FCF-B1C2-D1DC9FB5E877}"/>
               </a:ext>
             </a:extLst>
           </p:cNvPr>
@@ -35138,7 +35138,7 @@
           <p:nvPr/>
         </p:nvPicPr>
         <p:blipFill>
-          <a:blip xmlns:r="http://schemas.openxmlformats.org/officeDocument/2006/relationships" xmlns:a="http://schemas.openxmlformats.org/drawingml/2006/main" r:embed="R53a978594b6048b4"/>
+          <a:blip xmlns:r="http://schemas.openxmlformats.org/officeDocument/2006/relationships" xmlns:a="http://schemas.openxmlformats.org/drawingml/2006/main" r:embed="Rfb85fdcb73244ea5"/>
           <a:stretch xmlns:a="http://schemas.openxmlformats.org/drawingml/2006/main"/>
         </p:blipFill>
         <p:spPr>
@@ -35156,7 +35156,7 @@
           <p:cNvPr id="7" name="">
             <a:extLst xmlns:a="http://schemas.openxmlformats.org/drawingml/2006/main">
               <a:ext uri="{FF2B5EF4-FFF2-40B4-BE49-F238E27FC236}">
-                <a16:creationId xmlns:a16="http://schemas.microsoft.com/office/drawing/2014/main" id="{C46E6453-FE0D-4468-85C9-A1B5A3FD2A3F}"/>
+                <a16:creationId xmlns:a16="http://schemas.microsoft.com/office/drawing/2014/main" id="{426554ED-78D0-43FA-B762-C96D599DAB45}"/>
               </a:ext>
             </a:extLst>
           </p:cNvPr>
@@ -35208,7 +35208,7 @@
           <p:cNvPr id="8" name="">
             <a:extLst xmlns:a="http://schemas.openxmlformats.org/drawingml/2006/main">
               <a:ext uri="{FF2B5EF4-FFF2-40B4-BE49-F238E27FC236}">
-                <a16:creationId xmlns:a16="http://schemas.microsoft.com/office/drawing/2014/main" id="{5E438F85-19B4-44A8-A0F9-50B8A9180544}"/>
+                <a16:creationId xmlns:a16="http://schemas.microsoft.com/office/drawing/2014/main" id="{010C35E8-7C11-4AF7-A41D-9F04AD238CD4}"/>
               </a:ext>
             </a:extLst>
           </p:cNvPr>
@@ -35260,7 +35260,7 @@
           <p:cNvPr id="9" name="">
             <a:extLst xmlns:a="http://schemas.openxmlformats.org/drawingml/2006/main">
               <a:ext uri="{FF2B5EF4-FFF2-40B4-BE49-F238E27FC236}">
-                <a16:creationId xmlns:a16="http://schemas.microsoft.com/office/drawing/2014/main" id="{CBEF9F6E-17E4-4792-8505-D3E3EED3BD24}"/>
+                <a16:creationId xmlns:a16="http://schemas.microsoft.com/office/drawing/2014/main" id="{992D5F26-40EF-4229-89F9-28B6C9C1273B}"/>
               </a:ext>
             </a:extLst>
           </p:cNvPr>
@@ -35312,7 +35312,7 @@
           <p:cNvPr id="10" name="">
             <a:extLst xmlns:a="http://schemas.openxmlformats.org/drawingml/2006/main">
               <a:ext uri="{FF2B5EF4-FFF2-40B4-BE49-F238E27FC236}">
-                <a16:creationId xmlns:a16="http://schemas.microsoft.com/office/drawing/2014/main" id="{7AC59B39-8AD7-485F-9B5B-4107474E0D6D}"/>
+                <a16:creationId xmlns:a16="http://schemas.microsoft.com/office/drawing/2014/main" id="{83F6BCFC-4470-4387-B91F-646B0441CBE2}"/>
               </a:ext>
             </a:extLst>
           </p:cNvPr>
@@ -35364,7 +35364,7 @@
           <p:cNvPr id="11" name="">
             <a:extLst xmlns:a="http://schemas.openxmlformats.org/drawingml/2006/main">
               <a:ext uri="{FF2B5EF4-FFF2-40B4-BE49-F238E27FC236}">
-                <a16:creationId xmlns:a16="http://schemas.microsoft.com/office/drawing/2014/main" id="{C0321717-BCFB-4BB6-AF29-010C00C0B44C}"/>
+                <a16:creationId xmlns:a16="http://schemas.microsoft.com/office/drawing/2014/main" id="{DB6ADC15-4AFC-4D5F-94C3-232F979A5443}"/>
               </a:ext>
             </a:extLst>
           </p:cNvPr>
@@ -35411,10 +35411,10 @@
           <p:nvPr/>
         </p:nvPicPr>
         <p:blipFill>
-          <a:blip xmlns:r="http://schemas.openxmlformats.org/officeDocument/2006/relationships" xmlns:a="http://schemas.openxmlformats.org/drawingml/2006/main" r:embed="R6fe9ea2d00ac4704">
+          <a:blip xmlns:r="http://schemas.openxmlformats.org/officeDocument/2006/relationships" xmlns:a="http://schemas.openxmlformats.org/drawingml/2006/main" r:embed="R9b5fc80d44214c5b">
             <a:extLst>
               <a:ext uri="{96DAC541-7B7A-43D3-8B79-37D633B846F1}">
-                <asvg:svgBlip xmlns:asvg="http://schemas.microsoft.com/office/drawing/2016/SVG/main" r:embed="Ra43235a4332c41b4"/>
+                <asvg:svgBlip xmlns:asvg="http://schemas.microsoft.com/office/drawing/2016/SVG/main" r:embed="R5183318d6993412c"/>
               </a:ext>
             </a:extLst>
           </a:blip>
@@ -35435,7 +35435,7 @@
           <p:cNvPr id="13" name="">
             <a:extLst xmlns:a="http://schemas.openxmlformats.org/drawingml/2006/main">
               <a:ext uri="{FF2B5EF4-FFF2-40B4-BE49-F238E27FC236}">
-                <a16:creationId xmlns:a16="http://schemas.microsoft.com/office/drawing/2014/main" id="{1B6F2468-21F5-4E34-80B3-BB9FB689CFDF}"/>
+                <a16:creationId xmlns:a16="http://schemas.microsoft.com/office/drawing/2014/main" id="{A1330F94-3A63-442C-9EB1-F8366F63F2DE}"/>
               </a:ext>
             </a:extLst>
           </p:cNvPr>
@@ -35468,7 +35468,7 @@
           <p:cNvPr id="14" name="">
             <a:extLst xmlns:a="http://schemas.openxmlformats.org/drawingml/2006/main">
               <a:ext uri="{FF2B5EF4-FFF2-40B4-BE49-F238E27FC236}">
-                <a16:creationId xmlns:a16="http://schemas.microsoft.com/office/drawing/2014/main" id="{DDF2EDC1-7EE5-4353-8B19-6A3B29921B4B}"/>
+                <a16:creationId xmlns:a16="http://schemas.microsoft.com/office/drawing/2014/main" id="{C903EBDF-29B7-43B4-81F2-8FFEE0A0A65F}"/>
               </a:ext>
             </a:extLst>
           </p:cNvPr>
@@ -35520,7 +35520,7 @@
           <p:cNvPr id="15" name="">
             <a:extLst xmlns:a="http://schemas.openxmlformats.org/drawingml/2006/main">
               <a:ext uri="{FF2B5EF4-FFF2-40B4-BE49-F238E27FC236}">
-                <a16:creationId xmlns:a16="http://schemas.microsoft.com/office/drawing/2014/main" id="{1EA9C4DF-AB19-43DD-A13A-A2F8A4C55618}"/>
+                <a16:creationId xmlns:a16="http://schemas.microsoft.com/office/drawing/2014/main" id="{C1822731-F7D6-4D29-81D3-85C8287008AC}"/>
               </a:ext>
             </a:extLst>
           </p:cNvPr>
@@ -35551,7 +35551,7 @@
           <p:cNvPr id="16" name="">
             <a:extLst xmlns:a="http://schemas.openxmlformats.org/drawingml/2006/main">
               <a:ext uri="{FF2B5EF4-FFF2-40B4-BE49-F238E27FC236}">
-                <a16:creationId xmlns:a16="http://schemas.microsoft.com/office/drawing/2014/main" id="{2B62ED52-4F16-4E7C-80B0-2F659C8FCED9}"/>
+                <a16:creationId xmlns:a16="http://schemas.microsoft.com/office/drawing/2014/main" id="{06EFA227-9237-4B43-BA42-3EE583A6381A}"/>
               </a:ext>
             </a:extLst>
           </p:cNvPr>
@@ -35582,7 +35582,7 @@
           <p:cNvPr id="17" name="">
             <a:extLst xmlns:a="http://schemas.openxmlformats.org/drawingml/2006/main">
               <a:ext uri="{FF2B5EF4-FFF2-40B4-BE49-F238E27FC236}">
-                <a16:creationId xmlns:a16="http://schemas.microsoft.com/office/drawing/2014/main" id="{2A0F587D-A80F-4A16-B4FD-A108860206D7}"/>
+                <a16:creationId xmlns:a16="http://schemas.microsoft.com/office/drawing/2014/main" id="{7F11EBFF-9A08-4D6A-BD28-FB79708F9B73}"/>
               </a:ext>
             </a:extLst>
           </p:cNvPr>
@@ -35634,7 +35634,7 @@
           <p:cNvPr id="18" name="">
             <a:extLst xmlns:a="http://schemas.openxmlformats.org/drawingml/2006/main">
               <a:ext uri="{FF2B5EF4-FFF2-40B4-BE49-F238E27FC236}">
-                <a16:creationId xmlns:a16="http://schemas.microsoft.com/office/drawing/2014/main" id="{FB491ACD-6F2B-409B-98FE-07C014FB67C2}"/>
+                <a16:creationId xmlns:a16="http://schemas.microsoft.com/office/drawing/2014/main" id="{08BB288A-BF95-4BCC-862B-01365C83FE27}"/>
               </a:ext>
             </a:extLst>
           </p:cNvPr>
@@ -35667,7 +35667,7 @@
           <p:cNvPr id="19" name="">
             <a:extLst xmlns:a="http://schemas.openxmlformats.org/drawingml/2006/main">
               <a:ext uri="{FF2B5EF4-FFF2-40B4-BE49-F238E27FC236}">
-                <a16:creationId xmlns:a16="http://schemas.microsoft.com/office/drawing/2014/main" id="{E6A9E406-5AF2-48DD-9F06-DFC9EAFB301C}"/>
+                <a16:creationId xmlns:a16="http://schemas.microsoft.com/office/drawing/2014/main" id="{146E40FE-77B9-42C9-981F-DA0CA385739B}"/>
               </a:ext>
             </a:extLst>
           </p:cNvPr>
@@ -35719,7 +35719,7 @@
           <p:cNvPr id="20" name="">
             <a:extLst xmlns:a="http://schemas.openxmlformats.org/drawingml/2006/main">
               <a:ext uri="{FF2B5EF4-FFF2-40B4-BE49-F238E27FC236}">
-                <a16:creationId xmlns:a16="http://schemas.microsoft.com/office/drawing/2014/main" id="{017071DF-DF33-410E-99D0-50A9F2395981}"/>
+                <a16:creationId xmlns:a16="http://schemas.microsoft.com/office/drawing/2014/main" id="{377FDB42-D5FE-4466-ABA6-0793CC8A3817}"/>
               </a:ext>
             </a:extLst>
           </p:cNvPr>
@@ -35750,7 +35750,7 @@
           <p:cNvPr id="21" name="">
             <a:extLst xmlns:a="http://schemas.openxmlformats.org/drawingml/2006/main">
               <a:ext uri="{FF2B5EF4-FFF2-40B4-BE49-F238E27FC236}">
-                <a16:creationId xmlns:a16="http://schemas.microsoft.com/office/drawing/2014/main" id="{2F8FFA06-01D0-4DF8-9337-7016CF186D24}"/>
+                <a16:creationId xmlns:a16="http://schemas.microsoft.com/office/drawing/2014/main" id="{304551E9-AF74-42A0-A2FF-60BD5736034B}"/>
               </a:ext>
             </a:extLst>
           </p:cNvPr>
@@ -35781,7 +35781,7 @@
           <p:cNvPr id="22" name="">
             <a:extLst xmlns:a="http://schemas.openxmlformats.org/drawingml/2006/main">
               <a:ext uri="{FF2B5EF4-FFF2-40B4-BE49-F238E27FC236}">
-                <a16:creationId xmlns:a16="http://schemas.microsoft.com/office/drawing/2014/main" id="{6C2951AE-D29F-4AC0-AD8B-F82BA4F891E9}"/>
+                <a16:creationId xmlns:a16="http://schemas.microsoft.com/office/drawing/2014/main" id="{B0325834-E01A-4AA6-A7E9-5274CA7A85CA}"/>
               </a:ext>
             </a:extLst>
           </p:cNvPr>
@@ -35833,7 +35833,7 @@
           <p:cNvPr id="23" name="">
             <a:extLst xmlns:a="http://schemas.openxmlformats.org/drawingml/2006/main">
               <a:ext uri="{FF2B5EF4-FFF2-40B4-BE49-F238E27FC236}">
-                <a16:creationId xmlns:a16="http://schemas.microsoft.com/office/drawing/2014/main" id="{9699F65A-538D-4111-8B53-4CACC4E2919E}"/>
+                <a16:creationId xmlns:a16="http://schemas.microsoft.com/office/drawing/2014/main" id="{97583D63-4DE6-47F4-A29D-0A5B224E7352}"/>
               </a:ext>
             </a:extLst>
           </p:cNvPr>
@@ -35885,7 +35885,7 @@
           <p:cNvPr id="24" name="">
             <a:extLst xmlns:a="http://schemas.openxmlformats.org/drawingml/2006/main">
               <a:ext uri="{FF2B5EF4-FFF2-40B4-BE49-F238E27FC236}">
-                <a16:creationId xmlns:a16="http://schemas.microsoft.com/office/drawing/2014/main" id="{79865A31-50BE-443C-B353-3DD90B4C0EED}"/>
+                <a16:creationId xmlns:a16="http://schemas.microsoft.com/office/drawing/2014/main" id="{68C3AD7E-928A-43DE-83D4-9F24F00BCFAA}"/>
               </a:ext>
             </a:extLst>
           </p:cNvPr>
@@ -35916,7 +35916,7 @@
           <p:cNvPr id="25" name="">
             <a:extLst xmlns:a="http://schemas.openxmlformats.org/drawingml/2006/main">
               <a:ext uri="{FF2B5EF4-FFF2-40B4-BE49-F238E27FC236}">
-                <a16:creationId xmlns:a16="http://schemas.microsoft.com/office/drawing/2014/main" id="{42B7514B-7613-4103-94EE-B2CDDEEB9690}"/>
+                <a16:creationId xmlns:a16="http://schemas.microsoft.com/office/drawing/2014/main" id="{39086254-C95F-4C20-95A1-51EC9D77A690}"/>
               </a:ext>
             </a:extLst>
           </p:cNvPr>
@@ -35968,7 +35968,7 @@
           <p:cNvPr id="26" name="">
             <a:extLst xmlns:a="http://schemas.openxmlformats.org/drawingml/2006/main">
               <a:ext uri="{FF2B5EF4-FFF2-40B4-BE49-F238E27FC236}">
-                <a16:creationId xmlns:a16="http://schemas.microsoft.com/office/drawing/2014/main" id="{C35584EF-2D59-484A-A7DB-01DD69D5D3D5}"/>
+                <a16:creationId xmlns:a16="http://schemas.microsoft.com/office/drawing/2014/main" id="{A13D4A12-B349-4FEF-82FD-C50B5ACFC318}"/>
               </a:ext>
             </a:extLst>
           </p:cNvPr>
@@ -36020,7 +36020,7 @@
           <p:cNvPr id="27" name="">
             <a:extLst xmlns:a="http://schemas.openxmlformats.org/drawingml/2006/main">
               <a:ext uri="{FF2B5EF4-FFF2-40B4-BE49-F238E27FC236}">
-                <a16:creationId xmlns:a16="http://schemas.microsoft.com/office/drawing/2014/main" id="{E3C9A610-126D-498A-8EB2-9D027B8E1F9F}"/>
+                <a16:creationId xmlns:a16="http://schemas.microsoft.com/office/drawing/2014/main" id="{4BCD4F5C-AEBB-421D-B1F9-06F409C7BDA7}"/>
               </a:ext>
             </a:extLst>
           </p:cNvPr>
@@ -36072,7 +36072,7 @@
           <p:cNvPr id="28" name="">
             <a:extLst xmlns:a="http://schemas.openxmlformats.org/drawingml/2006/main">
               <a:ext uri="{FF2B5EF4-FFF2-40B4-BE49-F238E27FC236}">
-                <a16:creationId xmlns:a16="http://schemas.microsoft.com/office/drawing/2014/main" id="{0BB39CB5-9036-4541-84B4-E879145AB949}"/>
+                <a16:creationId xmlns:a16="http://schemas.microsoft.com/office/drawing/2014/main" id="{2739A45F-119A-4C09-BF2D-B54F3A85091C}"/>
               </a:ext>
             </a:extLst>
           </p:cNvPr>
@@ -36124,7 +36124,7 @@
           <p:cNvPr id="29" name="">
             <a:extLst xmlns:a="http://schemas.openxmlformats.org/drawingml/2006/main">
               <a:ext uri="{FF2B5EF4-FFF2-40B4-BE49-F238E27FC236}">
-                <a16:creationId xmlns:a16="http://schemas.microsoft.com/office/drawing/2014/main" id="{049F3920-C11A-4B83-A7E1-0CF9C1F0B938}"/>
+                <a16:creationId xmlns:a16="http://schemas.microsoft.com/office/drawing/2014/main" id="{57949F6C-105D-49E6-BBB5-32904A22D2FE}"/>
               </a:ext>
             </a:extLst>
           </p:cNvPr>
@@ -36176,7 +36176,7 @@
           <p:cNvPr id="30" name="">
             <a:extLst xmlns:a="http://schemas.openxmlformats.org/drawingml/2006/main">
               <a:ext uri="{FF2B5EF4-FFF2-40B4-BE49-F238E27FC236}">
-                <a16:creationId xmlns:a16="http://schemas.microsoft.com/office/drawing/2014/main" id="{61638EBE-B747-436C-BADC-7F144DA27402}"/>
+                <a16:creationId xmlns:a16="http://schemas.microsoft.com/office/drawing/2014/main" id="{42D07AB9-9EE5-4EDD-AF4D-BA74B21F1A25}"/>
               </a:ext>
             </a:extLst>
           </p:cNvPr>
@@ -36228,7 +36228,7 @@
           <p:cNvPr id="31" name="">
             <a:extLst xmlns:a="http://schemas.openxmlformats.org/drawingml/2006/main">
               <a:ext uri="{FF2B5EF4-FFF2-40B4-BE49-F238E27FC236}">
-                <a16:creationId xmlns:a16="http://schemas.microsoft.com/office/drawing/2014/main" id="{639F6896-6146-429D-84FC-BBE18EA6B145}"/>
+                <a16:creationId xmlns:a16="http://schemas.microsoft.com/office/drawing/2014/main" id="{C054E006-920F-41D3-AAB6-9AD0943373B7}"/>
               </a:ext>
             </a:extLst>
           </p:cNvPr>
@@ -36280,7 +36280,7 @@
           <p:cNvPr id="32" name="">
             <a:extLst xmlns:a="http://schemas.openxmlformats.org/drawingml/2006/main">
               <a:ext uri="{FF2B5EF4-FFF2-40B4-BE49-F238E27FC236}">
-                <a16:creationId xmlns:a16="http://schemas.microsoft.com/office/drawing/2014/main" id="{17DDACF5-2C35-4D1B-8799-20C3A321618C}"/>
+                <a16:creationId xmlns:a16="http://schemas.microsoft.com/office/drawing/2014/main" id="{9194F28E-A269-40FC-A92F-089A01388CEE}"/>
               </a:ext>
             </a:extLst>
           </p:cNvPr>
@@ -36330,7 +36330,7 @@
     </p:spTree>
     <p:extLst>
       <p:ext uri="{BB962C8B-B14F-4D97-AF65-F5344CB8AC3E}">
-        <p14:creationId xmlns:p14="http://schemas.microsoft.com/office/powerpoint/2010/main" val="1731214329"/>
+        <p14:creationId xmlns:p14="http://schemas.microsoft.com/office/powerpoint/2010/main" val="1295026346"/>
       </p:ext>
     </p:extLst>
   </p:cSld>
@@ -36361,7 +36361,7 @@
           <p:cNvPr id="27" name="">
             <a:extLst xmlns:a="http://schemas.openxmlformats.org/drawingml/2006/main">
               <a:ext uri="{FF2B5EF4-FFF2-40B4-BE49-F238E27FC236}">
-                <a16:creationId xmlns:a16="http://schemas.microsoft.com/office/drawing/2014/main" id="{7F88183B-AD16-426C-AA9A-909035261CD0}"/>
+                <a16:creationId xmlns:a16="http://schemas.microsoft.com/office/drawing/2014/main" id="{FBB0B467-80BF-4A47-8037-856EB728622F}"/>
               </a:ext>
             </a:extLst>
           </p:cNvPr>
@@ -36394,7 +36394,7 @@
           <p:cNvPr id="2" name="">
             <a:extLst xmlns:a="http://schemas.openxmlformats.org/drawingml/2006/main">
               <a:ext uri="{FF2B5EF4-FFF2-40B4-BE49-F238E27FC236}">
-                <a16:creationId xmlns:a16="http://schemas.microsoft.com/office/drawing/2014/main" id="{C599D43C-5426-43C6-AC12-6EA6CFA4700E}"/>
+                <a16:creationId xmlns:a16="http://schemas.microsoft.com/office/drawing/2014/main" id="{69DC412E-8279-4A94-892D-976C1522E39F}"/>
               </a:ext>
             </a:extLst>
           </p:cNvPr>
@@ -36425,7 +36425,7 @@
           <p:cNvPr id="3" name="">
             <a:extLst xmlns:a="http://schemas.openxmlformats.org/drawingml/2006/main">
               <a:ext uri="{FF2B5EF4-FFF2-40B4-BE49-F238E27FC236}">
-                <a16:creationId xmlns:a16="http://schemas.microsoft.com/office/drawing/2014/main" id="{25EEB610-7D99-4C3D-99CF-DDDB93D1AA7F}"/>
+                <a16:creationId xmlns:a16="http://schemas.microsoft.com/office/drawing/2014/main" id="{BCEBE3AE-8C9A-4584-9863-645E8579B8E7}"/>
               </a:ext>
             </a:extLst>
           </p:cNvPr>
@@ -36477,7 +36477,7 @@
           <p:cNvPr id="4" name="">
             <a:extLst xmlns:a="http://schemas.openxmlformats.org/drawingml/2006/main">
               <a:ext uri="{FF2B5EF4-FFF2-40B4-BE49-F238E27FC236}">
-                <a16:creationId xmlns:a16="http://schemas.microsoft.com/office/drawing/2014/main" id="{E25F9A9F-59D9-4C25-84EE-061638F02190}"/>
+                <a16:creationId xmlns:a16="http://schemas.microsoft.com/office/drawing/2014/main" id="{E7AC19BD-683D-4566-BD27-C176E84F2C6D}"/>
               </a:ext>
             </a:extLst>
           </p:cNvPr>
@@ -36529,7 +36529,7 @@
           <p:cNvPr id="5" name="">
             <a:extLst xmlns:a="http://schemas.openxmlformats.org/drawingml/2006/main">
               <a:ext uri="{FF2B5EF4-FFF2-40B4-BE49-F238E27FC236}">
-                <a16:creationId xmlns:a16="http://schemas.microsoft.com/office/drawing/2014/main" id="{9300F410-8627-4540-8FF3-DB284260914B}"/>
+                <a16:creationId xmlns:a16="http://schemas.microsoft.com/office/drawing/2014/main" id="{D52A6D34-7EB9-4B9C-A830-078C72584C0F}"/>
               </a:ext>
             </a:extLst>
           </p:cNvPr>
@@ -36564,7 +36564,7 @@
           <p:nvPr/>
         </p:nvPicPr>
         <p:blipFill>
-          <a:blip xmlns:r="http://schemas.openxmlformats.org/officeDocument/2006/relationships" xmlns:a="http://schemas.openxmlformats.org/drawingml/2006/main" r:embed="R070dd67b6f2a475a"/>
+          <a:blip xmlns:r="http://schemas.openxmlformats.org/officeDocument/2006/relationships" xmlns:a="http://schemas.openxmlformats.org/drawingml/2006/main" r:embed="R3be230e21cc74b92"/>
           <a:stretch xmlns:a="http://schemas.openxmlformats.org/drawingml/2006/main"/>
         </p:blipFill>
         <p:spPr>
@@ -36582,7 +36582,7 @@
           <p:cNvPr id="7" name="">
             <a:extLst xmlns:a="http://schemas.openxmlformats.org/drawingml/2006/main">
               <a:ext uri="{FF2B5EF4-FFF2-40B4-BE49-F238E27FC236}">
-                <a16:creationId xmlns:a16="http://schemas.microsoft.com/office/drawing/2014/main" id="{50A8FB59-C25A-4442-9D6B-313C87696CE9}"/>
+                <a16:creationId xmlns:a16="http://schemas.microsoft.com/office/drawing/2014/main" id="{D71013B1-AE6F-4612-9BC8-9B5669A4E56F}"/>
               </a:ext>
             </a:extLst>
           </p:cNvPr>
@@ -36634,7 +36634,7 @@
           <p:cNvPr id="8" name="">
             <a:extLst xmlns:a="http://schemas.openxmlformats.org/drawingml/2006/main">
               <a:ext uri="{FF2B5EF4-FFF2-40B4-BE49-F238E27FC236}">
-                <a16:creationId xmlns:a16="http://schemas.microsoft.com/office/drawing/2014/main" id="{8D96E820-7A90-43BF-A0B1-18288F9F10F2}"/>
+                <a16:creationId xmlns:a16="http://schemas.microsoft.com/office/drawing/2014/main" id="{35E34421-DFB5-4BF7-A2F1-4EF392D87679}"/>
               </a:ext>
             </a:extLst>
           </p:cNvPr>
@@ -36686,7 +36686,7 @@
           <p:cNvPr id="9" name="">
             <a:extLst xmlns:a="http://schemas.openxmlformats.org/drawingml/2006/main">
               <a:ext uri="{FF2B5EF4-FFF2-40B4-BE49-F238E27FC236}">
-                <a16:creationId xmlns:a16="http://schemas.microsoft.com/office/drawing/2014/main" id="{03C28250-8377-4F7D-8527-41C7FF0E9BEC}"/>
+                <a16:creationId xmlns:a16="http://schemas.microsoft.com/office/drawing/2014/main" id="{33B76A8E-6397-46AB-9011-D192E3BFF89A}"/>
               </a:ext>
             </a:extLst>
           </p:cNvPr>
@@ -36738,7 +36738,7 @@
           <p:cNvPr id="10" name="">
             <a:extLst xmlns:a="http://schemas.openxmlformats.org/drawingml/2006/main">
               <a:ext uri="{FF2B5EF4-FFF2-40B4-BE49-F238E27FC236}">
-                <a16:creationId xmlns:a16="http://schemas.microsoft.com/office/drawing/2014/main" id="{9F68BCF1-530E-47F7-BA09-88F0A275D81F}"/>
+                <a16:creationId xmlns:a16="http://schemas.microsoft.com/office/drawing/2014/main" id="{3A9ADCC3-1A9D-4652-B662-BF715A13EB89}"/>
               </a:ext>
             </a:extLst>
           </p:cNvPr>
@@ -36790,7 +36790,7 @@
           <p:cNvPr id="11" name="">
             <a:extLst xmlns:a="http://schemas.openxmlformats.org/drawingml/2006/main">
               <a:ext uri="{FF2B5EF4-FFF2-40B4-BE49-F238E27FC236}">
-                <a16:creationId xmlns:a16="http://schemas.microsoft.com/office/drawing/2014/main" id="{612B051A-23B1-4B4C-8CDF-4E2E921BC7F7}"/>
+                <a16:creationId xmlns:a16="http://schemas.microsoft.com/office/drawing/2014/main" id="{9B0D4E51-5B6F-4F8E-9FE1-61495078EA31}"/>
               </a:ext>
             </a:extLst>
           </p:cNvPr>
@@ -36837,10 +36837,10 @@
           <p:nvPr/>
         </p:nvPicPr>
         <p:blipFill>
-          <a:blip xmlns:r="http://schemas.openxmlformats.org/officeDocument/2006/relationships" xmlns:a="http://schemas.openxmlformats.org/drawingml/2006/main" r:embed="Rc5d743d115c0405b">
+          <a:blip xmlns:r="http://schemas.openxmlformats.org/officeDocument/2006/relationships" xmlns:a="http://schemas.openxmlformats.org/drawingml/2006/main" r:embed="R9cfc65a2c5034b61">
             <a:extLst>
               <a:ext uri="{96DAC541-7B7A-43D3-8B79-37D633B846F1}">
-                <asvg:svgBlip xmlns:asvg="http://schemas.microsoft.com/office/drawing/2016/SVG/main" r:embed="Rd591d0d90e7d49ea"/>
+                <asvg:svgBlip xmlns:asvg="http://schemas.microsoft.com/office/drawing/2016/SVG/main" r:embed="Rfc1c4c8237474d36"/>
               </a:ext>
             </a:extLst>
           </a:blip>
@@ -36861,7 +36861,7 @@
           <p:cNvPr id="13" name="">
             <a:extLst xmlns:a="http://schemas.openxmlformats.org/drawingml/2006/main">
               <a:ext uri="{FF2B5EF4-FFF2-40B4-BE49-F238E27FC236}">
-                <a16:creationId xmlns:a16="http://schemas.microsoft.com/office/drawing/2014/main" id="{50B9C437-8575-4A6F-87AB-C99957E4DC6E}"/>
+                <a16:creationId xmlns:a16="http://schemas.microsoft.com/office/drawing/2014/main" id="{4C065434-879D-40F1-AA2C-E63B66B62AA8}"/>
               </a:ext>
             </a:extLst>
           </p:cNvPr>
@@ -36894,7 +36894,7 @@
           <p:cNvPr id="14" name="">
             <a:extLst xmlns:a="http://schemas.openxmlformats.org/drawingml/2006/main">
               <a:ext uri="{FF2B5EF4-FFF2-40B4-BE49-F238E27FC236}">
-                <a16:creationId xmlns:a16="http://schemas.microsoft.com/office/drawing/2014/main" id="{F4B58CD6-FD66-499A-AEA3-8D090CEF56A7}"/>
+                <a16:creationId xmlns:a16="http://schemas.microsoft.com/office/drawing/2014/main" id="{53C7CE9F-E4F7-4D0C-A695-0A374331D91E}"/>
               </a:ext>
             </a:extLst>
           </p:cNvPr>
@@ -36946,7 +36946,7 @@
           <p:cNvPr id="15" name="">
             <a:extLst xmlns:a="http://schemas.openxmlformats.org/drawingml/2006/main">
               <a:ext uri="{FF2B5EF4-FFF2-40B4-BE49-F238E27FC236}">
-                <a16:creationId xmlns:a16="http://schemas.microsoft.com/office/drawing/2014/main" id="{58413432-E5F4-45C7-B3D7-F9978C23F59B}"/>
+                <a16:creationId xmlns:a16="http://schemas.microsoft.com/office/drawing/2014/main" id="{CC1A0082-1363-4D35-9ECD-19911B3E7913}"/>
               </a:ext>
             </a:extLst>
           </p:cNvPr>
@@ -36979,7 +36979,7 @@
           <p:cNvPr id="16" name="">
             <a:extLst xmlns:a="http://schemas.openxmlformats.org/drawingml/2006/main">
               <a:ext uri="{FF2B5EF4-FFF2-40B4-BE49-F238E27FC236}">
-                <a16:creationId xmlns:a16="http://schemas.microsoft.com/office/drawing/2014/main" id="{35D2E54C-2ACF-4BB4-A8DE-9B9A7798CA61}"/>
+                <a16:creationId xmlns:a16="http://schemas.microsoft.com/office/drawing/2014/main" id="{9378757B-FBA2-411A-8E05-A23467B23E64}"/>
               </a:ext>
             </a:extLst>
           </p:cNvPr>
@@ -37031,7 +37031,7 @@
           <p:cNvPr id="17" name="">
             <a:extLst xmlns:a="http://schemas.openxmlformats.org/drawingml/2006/main">
               <a:ext uri="{FF2B5EF4-FFF2-40B4-BE49-F238E27FC236}">
-                <a16:creationId xmlns:a16="http://schemas.microsoft.com/office/drawing/2014/main" id="{AF0B2A0C-2579-4E4C-B986-8788C72B05D3}"/>
+                <a16:creationId xmlns:a16="http://schemas.microsoft.com/office/drawing/2014/main" id="{697AA1F5-DA5E-45A3-A53D-486718D8ACDF}"/>
               </a:ext>
             </a:extLst>
           </p:cNvPr>
@@ -37062,7 +37062,7 @@
           <p:cNvPr id="18" name="">
             <a:extLst xmlns:a="http://schemas.openxmlformats.org/drawingml/2006/main">
               <a:ext uri="{FF2B5EF4-FFF2-40B4-BE49-F238E27FC236}">
-                <a16:creationId xmlns:a16="http://schemas.microsoft.com/office/drawing/2014/main" id="{FB1D51CB-7AFC-4C08-B683-23CE0DADE641}"/>
+                <a16:creationId xmlns:a16="http://schemas.microsoft.com/office/drawing/2014/main" id="{1A955616-48CD-48CC-9E01-871A7B0BF640}"/>
               </a:ext>
             </a:extLst>
           </p:cNvPr>
@@ -37093,7 +37093,7 @@
           <p:cNvPr id="19" name="">
             <a:extLst xmlns:a="http://schemas.openxmlformats.org/drawingml/2006/main">
               <a:ext uri="{FF2B5EF4-FFF2-40B4-BE49-F238E27FC236}">
-                <a16:creationId xmlns:a16="http://schemas.microsoft.com/office/drawing/2014/main" id="{853EC306-D577-4AD0-8399-DE831C628C41}"/>
+                <a16:creationId xmlns:a16="http://schemas.microsoft.com/office/drawing/2014/main" id="{B652BFEE-DFB5-412C-90D9-A92CC5B63789}"/>
               </a:ext>
             </a:extLst>
           </p:cNvPr>
@@ -37145,7 +37145,7 @@
           <p:cNvPr id="20" name="">
             <a:extLst xmlns:a="http://schemas.openxmlformats.org/drawingml/2006/main">
               <a:ext uri="{FF2B5EF4-FFF2-40B4-BE49-F238E27FC236}">
-                <a16:creationId xmlns:a16="http://schemas.microsoft.com/office/drawing/2014/main" id="{0359C54E-7E3F-491A-A840-E80726880C50}"/>
+                <a16:creationId xmlns:a16="http://schemas.microsoft.com/office/drawing/2014/main" id="{B80F5030-4E6D-468F-AA4C-8C36B8D34AB4}"/>
               </a:ext>
             </a:extLst>
           </p:cNvPr>
@@ -37176,7 +37176,7 @@
           <p:cNvPr id="21" name="">
             <a:extLst xmlns:a="http://schemas.openxmlformats.org/drawingml/2006/main">
               <a:ext uri="{FF2B5EF4-FFF2-40B4-BE49-F238E27FC236}">
-                <a16:creationId xmlns:a16="http://schemas.microsoft.com/office/drawing/2014/main" id="{CD4D14AA-5AF8-4591-841B-186B05FC8D03}"/>
+                <a16:creationId xmlns:a16="http://schemas.microsoft.com/office/drawing/2014/main" id="{83BE47D3-D652-4824-B2C6-653BBC766992}"/>
               </a:ext>
             </a:extLst>
           </p:cNvPr>
@@ -37228,7 +37228,7 @@
           <p:cNvPr id="22" name="">
             <a:extLst xmlns:a="http://schemas.openxmlformats.org/drawingml/2006/main">
               <a:ext uri="{FF2B5EF4-FFF2-40B4-BE49-F238E27FC236}">
-                <a16:creationId xmlns:a16="http://schemas.microsoft.com/office/drawing/2014/main" id="{39EC3263-B741-42E1-AC28-D8E599B39563}"/>
+                <a16:creationId xmlns:a16="http://schemas.microsoft.com/office/drawing/2014/main" id="{2A148689-F1FD-4869-87A1-23DC0740086D}"/>
               </a:ext>
             </a:extLst>
           </p:cNvPr>
@@ -37280,7 +37280,7 @@
           <p:cNvPr id="23" name="">
             <a:extLst xmlns:a="http://schemas.openxmlformats.org/drawingml/2006/main">
               <a:ext uri="{FF2B5EF4-FFF2-40B4-BE49-F238E27FC236}">
-                <a16:creationId xmlns:a16="http://schemas.microsoft.com/office/drawing/2014/main" id="{BA1A4506-AE11-49C8-AFB4-D0D972CAC959}"/>
+                <a16:creationId xmlns:a16="http://schemas.microsoft.com/office/drawing/2014/main" id="{71167A30-BD1F-42F3-B247-315D9FD48250}"/>
               </a:ext>
             </a:extLst>
           </p:cNvPr>
@@ -37332,7 +37332,7 @@
           <p:cNvPr id="24" name="">
             <a:extLst xmlns:a="http://schemas.openxmlformats.org/drawingml/2006/main">
               <a:ext uri="{FF2B5EF4-FFF2-40B4-BE49-F238E27FC236}">
-                <a16:creationId xmlns:a16="http://schemas.microsoft.com/office/drawing/2014/main" id="{4E9AF63D-1391-40EF-BA54-F9C7894764A4}"/>
+                <a16:creationId xmlns:a16="http://schemas.microsoft.com/office/drawing/2014/main" id="{5235B3A4-8CC8-424D-B5FD-44FF64A09B7A}"/>
               </a:ext>
             </a:extLst>
           </p:cNvPr>
@@ -37384,7 +37384,7 @@
           <p:cNvPr id="25" name="">
             <a:extLst xmlns:a="http://schemas.openxmlformats.org/drawingml/2006/main">
               <a:ext uri="{FF2B5EF4-FFF2-40B4-BE49-F238E27FC236}">
-                <a16:creationId xmlns:a16="http://schemas.microsoft.com/office/drawing/2014/main" id="{D643E24E-EEE7-4FE5-B018-05443373DEEC}"/>
+                <a16:creationId xmlns:a16="http://schemas.microsoft.com/office/drawing/2014/main" id="{92D3648C-B228-4E29-A627-00C19165E12F}"/>
               </a:ext>
             </a:extLst>
           </p:cNvPr>
@@ -37436,7 +37436,7 @@
           <p:cNvPr id="26" name="">
             <a:extLst xmlns:a="http://schemas.openxmlformats.org/drawingml/2006/main">
               <a:ext uri="{FF2B5EF4-FFF2-40B4-BE49-F238E27FC236}">
-                <a16:creationId xmlns:a16="http://schemas.microsoft.com/office/drawing/2014/main" id="{A2F38D46-7F82-4274-807F-892C8B9F5B71}"/>
+                <a16:creationId xmlns:a16="http://schemas.microsoft.com/office/drawing/2014/main" id="{F5E82F20-C8C2-4FF0-ACA7-5A05D7F9472F}"/>
               </a:ext>
             </a:extLst>
           </p:cNvPr>
@@ -37486,7 +37486,7 @@
     </p:spTree>
     <p:extLst>
       <p:ext uri="{BB962C8B-B14F-4D97-AF65-F5344CB8AC3E}">
-        <p14:creationId xmlns:p14="http://schemas.microsoft.com/office/powerpoint/2010/main" val="947263732"/>
+        <p14:creationId xmlns:p14="http://schemas.microsoft.com/office/powerpoint/2010/main" val="1883090661"/>
       </p:ext>
     </p:extLst>
   </p:cSld>
@@ -37517,7 +37517,7 @@
           <p:cNvPr id="27" name="">
             <a:extLst xmlns:a="http://schemas.openxmlformats.org/drawingml/2006/main">
               <a:ext uri="{FF2B5EF4-FFF2-40B4-BE49-F238E27FC236}">
-                <a16:creationId xmlns:a16="http://schemas.microsoft.com/office/drawing/2014/main" id="{543A8F2A-1C8C-4096-9ECA-4B83414B8497}"/>
+                <a16:creationId xmlns:a16="http://schemas.microsoft.com/office/drawing/2014/main" id="{CFDC4A36-7A4D-4F85-BEC0-73A613DB77A9}"/>
               </a:ext>
             </a:extLst>
           </p:cNvPr>
@@ -37550,7 +37550,7 @@
           <p:cNvPr id="2" name="">
             <a:extLst xmlns:a="http://schemas.openxmlformats.org/drawingml/2006/main">
               <a:ext uri="{FF2B5EF4-FFF2-40B4-BE49-F238E27FC236}">
-                <a16:creationId xmlns:a16="http://schemas.microsoft.com/office/drawing/2014/main" id="{801F7305-23A2-47C4-BBCB-C26840D2793C}"/>
+                <a16:creationId xmlns:a16="http://schemas.microsoft.com/office/drawing/2014/main" id="{1B161570-0398-4765-AE4D-CE109A0CE57C}"/>
               </a:ext>
             </a:extLst>
           </p:cNvPr>
@@ -37581,7 +37581,7 @@
           <p:cNvPr id="3" name="">
             <a:extLst xmlns:a="http://schemas.openxmlformats.org/drawingml/2006/main">
               <a:ext uri="{FF2B5EF4-FFF2-40B4-BE49-F238E27FC236}">
-                <a16:creationId xmlns:a16="http://schemas.microsoft.com/office/drawing/2014/main" id="{707DFAF1-84BC-4A63-B65F-865D3CF0F12E}"/>
+                <a16:creationId xmlns:a16="http://schemas.microsoft.com/office/drawing/2014/main" id="{82E8F8D3-37C7-4D98-B827-8B7A7FEFC74A}"/>
               </a:ext>
             </a:extLst>
           </p:cNvPr>
@@ -37633,7 +37633,7 @@
           <p:cNvPr id="4" name="">
             <a:extLst xmlns:a="http://schemas.openxmlformats.org/drawingml/2006/main">
               <a:ext uri="{FF2B5EF4-FFF2-40B4-BE49-F238E27FC236}">
-                <a16:creationId xmlns:a16="http://schemas.microsoft.com/office/drawing/2014/main" id="{10ABBF70-C67C-465E-9F29-48E2767CB325}"/>
+                <a16:creationId xmlns:a16="http://schemas.microsoft.com/office/drawing/2014/main" id="{F2374953-E305-467C-B579-3BE80B998A18}"/>
               </a:ext>
             </a:extLst>
           </p:cNvPr>
@@ -37685,7 +37685,7 @@
           <p:cNvPr id="5" name="">
             <a:extLst xmlns:a="http://schemas.openxmlformats.org/drawingml/2006/main">
               <a:ext uri="{FF2B5EF4-FFF2-40B4-BE49-F238E27FC236}">
-                <a16:creationId xmlns:a16="http://schemas.microsoft.com/office/drawing/2014/main" id="{0A7280A4-628C-40B7-A859-D7E963C5E46E}"/>
+                <a16:creationId xmlns:a16="http://schemas.microsoft.com/office/drawing/2014/main" id="{25D7619C-11EC-479D-AE6F-A8C83E9D013A}"/>
               </a:ext>
             </a:extLst>
           </p:cNvPr>
@@ -37720,7 +37720,7 @@
           <p:nvPr/>
         </p:nvPicPr>
         <p:blipFill>
-          <a:blip xmlns:r="http://schemas.openxmlformats.org/officeDocument/2006/relationships" xmlns:a="http://schemas.openxmlformats.org/drawingml/2006/main" r:embed="Rb881b4674c024be3"/>
+          <a:blip xmlns:r="http://schemas.openxmlformats.org/officeDocument/2006/relationships" xmlns:a="http://schemas.openxmlformats.org/drawingml/2006/main" r:embed="Rae8972c0430149a7"/>
           <a:stretch xmlns:a="http://schemas.openxmlformats.org/drawingml/2006/main"/>
         </p:blipFill>
         <p:spPr>
@@ -37738,7 +37738,7 @@
           <p:cNvPr id="7" name="">
             <a:extLst xmlns:a="http://schemas.openxmlformats.org/drawingml/2006/main">
               <a:ext uri="{FF2B5EF4-FFF2-40B4-BE49-F238E27FC236}">
-                <a16:creationId xmlns:a16="http://schemas.microsoft.com/office/drawing/2014/main" id="{EBE9B02F-1049-4FF8-A335-522D998E2C42}"/>
+                <a16:creationId xmlns:a16="http://schemas.microsoft.com/office/drawing/2014/main" id="{B43CADAF-5C18-4BC7-B16B-C9C6C965E80C}"/>
               </a:ext>
             </a:extLst>
           </p:cNvPr>
@@ -37790,7 +37790,7 @@
           <p:cNvPr id="8" name="">
             <a:extLst xmlns:a="http://schemas.openxmlformats.org/drawingml/2006/main">
               <a:ext uri="{FF2B5EF4-FFF2-40B4-BE49-F238E27FC236}">
-                <a16:creationId xmlns:a16="http://schemas.microsoft.com/office/drawing/2014/main" id="{18AF980D-70C4-4B01-802E-6EB2E79DE8F4}"/>
+                <a16:creationId xmlns:a16="http://schemas.microsoft.com/office/drawing/2014/main" id="{F0C13EE7-0D68-4A65-9015-68D66CC8A390}"/>
               </a:ext>
             </a:extLst>
           </p:cNvPr>
@@ -37842,7 +37842,7 @@
           <p:cNvPr id="9" name="">
             <a:extLst xmlns:a="http://schemas.openxmlformats.org/drawingml/2006/main">
               <a:ext uri="{FF2B5EF4-FFF2-40B4-BE49-F238E27FC236}">
-                <a16:creationId xmlns:a16="http://schemas.microsoft.com/office/drawing/2014/main" id="{6C529B9C-0730-49A8-A833-2B24B94467D4}"/>
+                <a16:creationId xmlns:a16="http://schemas.microsoft.com/office/drawing/2014/main" id="{EC6E1BE1-7EB3-4847-B160-6B4E8D7CAF24}"/>
               </a:ext>
             </a:extLst>
           </p:cNvPr>
@@ -37894,7 +37894,7 @@
           <p:cNvPr id="10" name="">
             <a:extLst xmlns:a="http://schemas.openxmlformats.org/drawingml/2006/main">
               <a:ext uri="{FF2B5EF4-FFF2-40B4-BE49-F238E27FC236}">
-                <a16:creationId xmlns:a16="http://schemas.microsoft.com/office/drawing/2014/main" id="{1D104DCA-CA3F-4688-941C-C0003848DFEB}"/>
+                <a16:creationId xmlns:a16="http://schemas.microsoft.com/office/drawing/2014/main" id="{C0D5CFF5-910A-43BF-BB57-CC6821EE65AD}"/>
               </a:ext>
             </a:extLst>
           </p:cNvPr>
@@ -37946,7 +37946,7 @@
           <p:cNvPr id="11" name="">
             <a:extLst xmlns:a="http://schemas.openxmlformats.org/drawingml/2006/main">
               <a:ext uri="{FF2B5EF4-FFF2-40B4-BE49-F238E27FC236}">
-                <a16:creationId xmlns:a16="http://schemas.microsoft.com/office/drawing/2014/main" id="{AFE77330-AD3F-465B-8214-C5F1B88F0951}"/>
+                <a16:creationId xmlns:a16="http://schemas.microsoft.com/office/drawing/2014/main" id="{D24BBFF0-1A88-4572-86AE-71743868088B}"/>
               </a:ext>
             </a:extLst>
           </p:cNvPr>
@@ -37993,10 +37993,10 @@
           <p:nvPr/>
         </p:nvPicPr>
         <p:blipFill>
-          <a:blip xmlns:r="http://schemas.openxmlformats.org/officeDocument/2006/relationships" xmlns:a="http://schemas.openxmlformats.org/drawingml/2006/main" r:embed="R2d3785dacd584044">
+          <a:blip xmlns:r="http://schemas.openxmlformats.org/officeDocument/2006/relationships" xmlns:a="http://schemas.openxmlformats.org/drawingml/2006/main" r:embed="Re66bab7b5ea04ede">
             <a:extLst>
               <a:ext uri="{96DAC541-7B7A-43D3-8B79-37D633B846F1}">
-                <asvg:svgBlip xmlns:asvg="http://schemas.microsoft.com/office/drawing/2016/SVG/main" r:embed="R84e282a229224e51"/>
+                <asvg:svgBlip xmlns:asvg="http://schemas.microsoft.com/office/drawing/2016/SVG/main" r:embed="Rb5bad8339a9d42a6"/>
               </a:ext>
             </a:extLst>
           </a:blip>
@@ -38017,7 +38017,7 @@
           <p:cNvPr id="13" name="">
             <a:extLst xmlns:a="http://schemas.openxmlformats.org/drawingml/2006/main">
               <a:ext uri="{FF2B5EF4-FFF2-40B4-BE49-F238E27FC236}">
-                <a16:creationId xmlns:a16="http://schemas.microsoft.com/office/drawing/2014/main" id="{51112CD5-BEE4-4ACA-89C3-8A3AB8215E4F}"/>
+                <a16:creationId xmlns:a16="http://schemas.microsoft.com/office/drawing/2014/main" id="{5FC9A715-41B0-4EF6-92CE-ED1AB238460B}"/>
               </a:ext>
             </a:extLst>
           </p:cNvPr>
@@ -38050,7 +38050,7 @@
           <p:cNvPr id="14" name="">
             <a:extLst xmlns:a="http://schemas.openxmlformats.org/drawingml/2006/main">
               <a:ext uri="{FF2B5EF4-FFF2-40B4-BE49-F238E27FC236}">
-                <a16:creationId xmlns:a16="http://schemas.microsoft.com/office/drawing/2014/main" id="{A899CA7F-6721-4178-A32E-8FC69C1DFE39}"/>
+                <a16:creationId xmlns:a16="http://schemas.microsoft.com/office/drawing/2014/main" id="{D786B5CB-B0C0-4BB6-A23B-DEF8D7A70180}"/>
               </a:ext>
             </a:extLst>
           </p:cNvPr>
@@ -38102,7 +38102,7 @@
           <p:cNvPr id="15" name="">
             <a:extLst xmlns:a="http://schemas.openxmlformats.org/drawingml/2006/main">
               <a:ext uri="{FF2B5EF4-FFF2-40B4-BE49-F238E27FC236}">
-                <a16:creationId xmlns:a16="http://schemas.microsoft.com/office/drawing/2014/main" id="{216F05F8-3E54-4076-AF2A-06E4862C4454}"/>
+                <a16:creationId xmlns:a16="http://schemas.microsoft.com/office/drawing/2014/main" id="{AA180779-A65D-4ECE-9A2E-E816504B865B}"/>
               </a:ext>
             </a:extLst>
           </p:cNvPr>
@@ -38135,7 +38135,7 @@
           <p:cNvPr id="16" name="">
             <a:extLst xmlns:a="http://schemas.openxmlformats.org/drawingml/2006/main">
               <a:ext uri="{FF2B5EF4-FFF2-40B4-BE49-F238E27FC236}">
-                <a16:creationId xmlns:a16="http://schemas.microsoft.com/office/drawing/2014/main" id="{62610A6A-CDDA-46A3-97DD-0D0CE6E52394}"/>
+                <a16:creationId xmlns:a16="http://schemas.microsoft.com/office/drawing/2014/main" id="{A821F542-1A5F-4226-AA3D-A92B4EFD16CD}"/>
               </a:ext>
             </a:extLst>
           </p:cNvPr>
@@ -38187,7 +38187,7 @@
           <p:cNvPr id="17" name="">
             <a:extLst xmlns:a="http://schemas.openxmlformats.org/drawingml/2006/main">
               <a:ext uri="{FF2B5EF4-FFF2-40B4-BE49-F238E27FC236}">
-                <a16:creationId xmlns:a16="http://schemas.microsoft.com/office/drawing/2014/main" id="{53D69517-005C-4D8F-B5E4-682D9DE91CDD}"/>
+                <a16:creationId xmlns:a16="http://schemas.microsoft.com/office/drawing/2014/main" id="{F6E8935E-F132-4F36-A399-9298FFFDACE6}"/>
               </a:ext>
             </a:extLst>
           </p:cNvPr>
@@ -38220,7 +38220,7 @@
           <p:cNvPr id="18" name="">
             <a:extLst xmlns:a="http://schemas.openxmlformats.org/drawingml/2006/main">
               <a:ext uri="{FF2B5EF4-FFF2-40B4-BE49-F238E27FC236}">
-                <a16:creationId xmlns:a16="http://schemas.microsoft.com/office/drawing/2014/main" id="{C1A0DB03-843F-47E2-BED1-32011938969B}"/>
+                <a16:creationId xmlns:a16="http://schemas.microsoft.com/office/drawing/2014/main" id="{44E75633-AE75-41FA-9D53-D7FA8AB7D377}"/>
               </a:ext>
             </a:extLst>
           </p:cNvPr>
@@ -38272,7 +38272,7 @@
           <p:cNvPr id="19" name="">
             <a:extLst xmlns:a="http://schemas.openxmlformats.org/drawingml/2006/main">
               <a:ext uri="{FF2B5EF4-FFF2-40B4-BE49-F238E27FC236}">
-                <a16:creationId xmlns:a16="http://schemas.microsoft.com/office/drawing/2014/main" id="{B2C7FE4B-54F0-46E8-BEF5-C917F7B6CA8A}"/>
+                <a16:creationId xmlns:a16="http://schemas.microsoft.com/office/drawing/2014/main" id="{4AA813CF-66F3-44A4-80F9-A84E0824A4EF}"/>
               </a:ext>
             </a:extLst>
           </p:cNvPr>
@@ -38324,7 +38324,7 @@
           <p:cNvPr id="20" name="">
             <a:extLst xmlns:a="http://schemas.openxmlformats.org/drawingml/2006/main">
               <a:ext uri="{FF2B5EF4-FFF2-40B4-BE49-F238E27FC236}">
-                <a16:creationId xmlns:a16="http://schemas.microsoft.com/office/drawing/2014/main" id="{BB385BCE-0EB5-42D3-80E0-38B1A5E6B0FE}"/>
+                <a16:creationId xmlns:a16="http://schemas.microsoft.com/office/drawing/2014/main" id="{978D7C22-7D70-4C30-8E48-21BACBA734A9}"/>
               </a:ext>
             </a:extLst>
           </p:cNvPr>
@@ -38355,7 +38355,7 @@
           <p:cNvPr id="21" name="">
             <a:extLst xmlns:a="http://schemas.openxmlformats.org/drawingml/2006/main">
               <a:ext uri="{FF2B5EF4-FFF2-40B4-BE49-F238E27FC236}">
-                <a16:creationId xmlns:a16="http://schemas.microsoft.com/office/drawing/2014/main" id="{1A982708-8136-4CD2-81B5-07159E9E6677}"/>
+                <a16:creationId xmlns:a16="http://schemas.microsoft.com/office/drawing/2014/main" id="{AB50125C-876F-4D93-9E0D-32B0D058FFBC}"/>
               </a:ext>
             </a:extLst>
           </p:cNvPr>
@@ -38407,7 +38407,7 @@
           <p:cNvPr id="22" name="">
             <a:extLst xmlns:a="http://schemas.openxmlformats.org/drawingml/2006/main">
               <a:ext uri="{FF2B5EF4-FFF2-40B4-BE49-F238E27FC236}">
-                <a16:creationId xmlns:a16="http://schemas.microsoft.com/office/drawing/2014/main" id="{F5D60293-D0A7-4AC9-8920-64A1ABACD011}"/>
+                <a16:creationId xmlns:a16="http://schemas.microsoft.com/office/drawing/2014/main" id="{C38BA23F-0728-4917-B5EF-2E6719786930}"/>
               </a:ext>
             </a:extLst>
           </p:cNvPr>
@@ -38459,7 +38459,7 @@
           <p:cNvPr id="23" name="">
             <a:extLst xmlns:a="http://schemas.openxmlformats.org/drawingml/2006/main">
               <a:ext uri="{FF2B5EF4-FFF2-40B4-BE49-F238E27FC236}">
-                <a16:creationId xmlns:a16="http://schemas.microsoft.com/office/drawing/2014/main" id="{2E025B13-2603-4AEC-8BFB-345F45D96EBE}"/>
+                <a16:creationId xmlns:a16="http://schemas.microsoft.com/office/drawing/2014/main" id="{B3F60ACF-FA8C-4C1E-BFB3-F50BA1AF20A7}"/>
               </a:ext>
             </a:extLst>
           </p:cNvPr>
@@ -38511,7 +38511,7 @@
           <p:cNvPr id="24" name="">
             <a:extLst xmlns:a="http://schemas.openxmlformats.org/drawingml/2006/main">
               <a:ext uri="{FF2B5EF4-FFF2-40B4-BE49-F238E27FC236}">
-                <a16:creationId xmlns:a16="http://schemas.microsoft.com/office/drawing/2014/main" id="{610F0C42-27EE-4473-B67F-E84D544FBDA8}"/>
+                <a16:creationId xmlns:a16="http://schemas.microsoft.com/office/drawing/2014/main" id="{8DDF3930-5116-4C67-AF1C-A73BF77F95AE}"/>
               </a:ext>
             </a:extLst>
           </p:cNvPr>
@@ -38563,7 +38563,7 @@
           <p:cNvPr id="25" name="">
             <a:extLst xmlns:a="http://schemas.openxmlformats.org/drawingml/2006/main">
               <a:ext uri="{FF2B5EF4-FFF2-40B4-BE49-F238E27FC236}">
-                <a16:creationId xmlns:a16="http://schemas.microsoft.com/office/drawing/2014/main" id="{477A5E96-1FB3-44D0-B0DD-668DB77F62CF}"/>
+                <a16:creationId xmlns:a16="http://schemas.microsoft.com/office/drawing/2014/main" id="{AF95B4F6-4E5C-4CA5-A05E-866084A84644}"/>
               </a:ext>
             </a:extLst>
           </p:cNvPr>
@@ -38615,7 +38615,7 @@
           <p:cNvPr id="26" name="">
             <a:extLst xmlns:a="http://schemas.openxmlformats.org/drawingml/2006/main">
               <a:ext uri="{FF2B5EF4-FFF2-40B4-BE49-F238E27FC236}">
-                <a16:creationId xmlns:a16="http://schemas.microsoft.com/office/drawing/2014/main" id="{4FC95DAD-8CE5-4733-975E-E25F16BD90D6}"/>
+                <a16:creationId xmlns:a16="http://schemas.microsoft.com/office/drawing/2014/main" id="{43902683-F983-417D-B77B-AFED5B98839C}"/>
               </a:ext>
             </a:extLst>
           </p:cNvPr>
@@ -38665,7 +38665,7 @@
     </p:spTree>
     <p:extLst>
       <p:ext uri="{BB962C8B-B14F-4D97-AF65-F5344CB8AC3E}">
-        <p14:creationId xmlns:p14="http://schemas.microsoft.com/office/powerpoint/2010/main" val="1109132981"/>
+        <p14:creationId xmlns:p14="http://schemas.microsoft.com/office/powerpoint/2010/main" val="433155165"/>
       </p:ext>
     </p:extLst>
   </p:cSld>
@@ -38696,7 +38696,7 @@
           <p:cNvPr id="35" name="">
             <a:extLst xmlns:a="http://schemas.openxmlformats.org/drawingml/2006/main">
               <a:ext uri="{FF2B5EF4-FFF2-40B4-BE49-F238E27FC236}">
-                <a16:creationId xmlns:a16="http://schemas.microsoft.com/office/drawing/2014/main" id="{049F7A2D-5AB7-413B-8EB7-54DDFDE8188E}"/>
+                <a16:creationId xmlns:a16="http://schemas.microsoft.com/office/drawing/2014/main" id="{55F3CD5C-8965-44B6-8ACF-B04C80275AE7}"/>
               </a:ext>
             </a:extLst>
           </p:cNvPr>
@@ -38729,7 +38729,7 @@
           <p:cNvPr id="2" name="">
             <a:extLst xmlns:a="http://schemas.openxmlformats.org/drawingml/2006/main">
               <a:ext uri="{FF2B5EF4-FFF2-40B4-BE49-F238E27FC236}">
-                <a16:creationId xmlns:a16="http://schemas.microsoft.com/office/drawing/2014/main" id="{4CE9D476-CC34-410D-8FF9-9FF11FFF49EA}"/>
+                <a16:creationId xmlns:a16="http://schemas.microsoft.com/office/drawing/2014/main" id="{B80A6BD1-A9D4-4584-884C-3AF769440413}"/>
               </a:ext>
             </a:extLst>
           </p:cNvPr>
@@ -38760,7 +38760,7 @@
           <p:cNvPr id="3" name="">
             <a:extLst xmlns:a="http://schemas.openxmlformats.org/drawingml/2006/main">
               <a:ext uri="{FF2B5EF4-FFF2-40B4-BE49-F238E27FC236}">
-                <a16:creationId xmlns:a16="http://schemas.microsoft.com/office/drawing/2014/main" id="{10699D97-7929-4A7E-BAE1-B620DC956D45}"/>
+                <a16:creationId xmlns:a16="http://schemas.microsoft.com/office/drawing/2014/main" id="{905CF034-0A0F-49DD-B1F5-05B84D364A4C}"/>
               </a:ext>
             </a:extLst>
           </p:cNvPr>
@@ -38812,7 +38812,7 @@
           <p:cNvPr id="4" name="">
             <a:extLst xmlns:a="http://schemas.openxmlformats.org/drawingml/2006/main">
               <a:ext uri="{FF2B5EF4-FFF2-40B4-BE49-F238E27FC236}">
-                <a16:creationId xmlns:a16="http://schemas.microsoft.com/office/drawing/2014/main" id="{5082AF44-913B-418A-B06A-B2DF4567480E}"/>
+                <a16:creationId xmlns:a16="http://schemas.microsoft.com/office/drawing/2014/main" id="{7A2917DA-4B3C-4140-B7F9-83BAB56A61E2}"/>
               </a:ext>
             </a:extLst>
           </p:cNvPr>
@@ -38864,7 +38864,7 @@
           <p:cNvPr id="5" name="">
             <a:extLst xmlns:a="http://schemas.openxmlformats.org/drawingml/2006/main">
               <a:ext uri="{FF2B5EF4-FFF2-40B4-BE49-F238E27FC236}">
-                <a16:creationId xmlns:a16="http://schemas.microsoft.com/office/drawing/2014/main" id="{C06BA96B-3286-442E-964E-AE55099EA446}"/>
+                <a16:creationId xmlns:a16="http://schemas.microsoft.com/office/drawing/2014/main" id="{9594D687-5251-4D61-B3BB-CAE84FA753D0}"/>
               </a:ext>
             </a:extLst>
           </p:cNvPr>
@@ -38899,7 +38899,7 @@
           <p:nvPr/>
         </p:nvPicPr>
         <p:blipFill>
-          <a:blip xmlns:r="http://schemas.openxmlformats.org/officeDocument/2006/relationships" xmlns:a="http://schemas.openxmlformats.org/drawingml/2006/main" r:embed="Rec1b0593cfce454c"/>
+          <a:blip xmlns:r="http://schemas.openxmlformats.org/officeDocument/2006/relationships" xmlns:a="http://schemas.openxmlformats.org/drawingml/2006/main" r:embed="Ra731ca5a4dcb4b3d"/>
           <a:stretch xmlns:a="http://schemas.openxmlformats.org/drawingml/2006/main"/>
         </p:blipFill>
         <p:spPr>
@@ -38917,7 +38917,7 @@
           <p:cNvPr id="7" name="">
             <a:extLst xmlns:a="http://schemas.openxmlformats.org/drawingml/2006/main">
               <a:ext uri="{FF2B5EF4-FFF2-40B4-BE49-F238E27FC236}">
-                <a16:creationId xmlns:a16="http://schemas.microsoft.com/office/drawing/2014/main" id="{C0364CB9-3105-4686-9FF1-1CBBB8FB8D3B}"/>
+                <a16:creationId xmlns:a16="http://schemas.microsoft.com/office/drawing/2014/main" id="{EA02F7E5-A142-4FEA-825F-11DC90A8B7F5}"/>
               </a:ext>
             </a:extLst>
           </p:cNvPr>
@@ -38969,7 +38969,7 @@
           <p:cNvPr id="8" name="">
             <a:extLst xmlns:a="http://schemas.openxmlformats.org/drawingml/2006/main">
               <a:ext uri="{FF2B5EF4-FFF2-40B4-BE49-F238E27FC236}">
-                <a16:creationId xmlns:a16="http://schemas.microsoft.com/office/drawing/2014/main" id="{53702223-B55D-4BFB-B24D-0CA6EFB8DC4C}"/>
+                <a16:creationId xmlns:a16="http://schemas.microsoft.com/office/drawing/2014/main" id="{C43012AE-1A99-45B2-B74A-C7ECC553433C}"/>
               </a:ext>
             </a:extLst>
           </p:cNvPr>
@@ -39021,7 +39021,7 @@
           <p:cNvPr id="9" name="">
             <a:extLst xmlns:a="http://schemas.openxmlformats.org/drawingml/2006/main">
               <a:ext uri="{FF2B5EF4-FFF2-40B4-BE49-F238E27FC236}">
-                <a16:creationId xmlns:a16="http://schemas.microsoft.com/office/drawing/2014/main" id="{72227C2C-2C3D-4FF9-8538-FECCE1F89ED3}"/>
+                <a16:creationId xmlns:a16="http://schemas.microsoft.com/office/drawing/2014/main" id="{15714052-0C1D-4F45-BCD0-E5735088138D}"/>
               </a:ext>
             </a:extLst>
           </p:cNvPr>
@@ -39073,7 +39073,7 @@
           <p:cNvPr id="10" name="">
             <a:extLst xmlns:a="http://schemas.openxmlformats.org/drawingml/2006/main">
               <a:ext uri="{FF2B5EF4-FFF2-40B4-BE49-F238E27FC236}">
-                <a16:creationId xmlns:a16="http://schemas.microsoft.com/office/drawing/2014/main" id="{B4E3E2A5-8E20-4460-94C3-90D935444A68}"/>
+                <a16:creationId xmlns:a16="http://schemas.microsoft.com/office/drawing/2014/main" id="{7ACB3033-688C-4516-9C77-5FE07A6E1E8C}"/>
               </a:ext>
             </a:extLst>
           </p:cNvPr>
@@ -39125,7 +39125,7 @@
           <p:cNvPr id="11" name="">
             <a:extLst xmlns:a="http://schemas.openxmlformats.org/drawingml/2006/main">
               <a:ext uri="{FF2B5EF4-FFF2-40B4-BE49-F238E27FC236}">
-                <a16:creationId xmlns:a16="http://schemas.microsoft.com/office/drawing/2014/main" id="{41DA1DC7-075C-4305-A515-F091CC0A0BCE}"/>
+                <a16:creationId xmlns:a16="http://schemas.microsoft.com/office/drawing/2014/main" id="{38FA0B3C-22D4-498C-8EAA-C21A69005D8C}"/>
               </a:ext>
             </a:extLst>
           </p:cNvPr>
@@ -39172,10 +39172,10 @@
           <p:nvPr/>
         </p:nvPicPr>
         <p:blipFill>
-          <a:blip xmlns:r="http://schemas.openxmlformats.org/officeDocument/2006/relationships" xmlns:a="http://schemas.openxmlformats.org/drawingml/2006/main" r:embed="R142321493d634d8f">
+          <a:blip xmlns:r="http://schemas.openxmlformats.org/officeDocument/2006/relationships" xmlns:a="http://schemas.openxmlformats.org/drawingml/2006/main" r:embed="Rf26044a01a2d4d8a">
             <a:extLst>
               <a:ext uri="{96DAC541-7B7A-43D3-8B79-37D633B846F1}">
-                <asvg:svgBlip xmlns:asvg="http://schemas.microsoft.com/office/drawing/2016/SVG/main" r:embed="R7fcee42da3aa44fb"/>
+                <asvg:svgBlip xmlns:asvg="http://schemas.microsoft.com/office/drawing/2016/SVG/main" r:embed="Rbbb10179c8f349a4"/>
               </a:ext>
             </a:extLst>
           </a:blip>
@@ -39196,7 +39196,7 @@
           <p:cNvPr id="13" name="">
             <a:extLst xmlns:a="http://schemas.openxmlformats.org/drawingml/2006/main">
               <a:ext uri="{FF2B5EF4-FFF2-40B4-BE49-F238E27FC236}">
-                <a16:creationId xmlns:a16="http://schemas.microsoft.com/office/drawing/2014/main" id="{0A725652-1EBF-4C4B-A0FE-C1BCA6CAFF27}"/>
+                <a16:creationId xmlns:a16="http://schemas.microsoft.com/office/drawing/2014/main" id="{C635D50D-65F2-414B-8D57-6E6753BC0F46}"/>
               </a:ext>
             </a:extLst>
           </p:cNvPr>
@@ -39229,7 +39229,7 @@
           <p:cNvPr id="14" name="">
             <a:extLst xmlns:a="http://schemas.openxmlformats.org/drawingml/2006/main">
               <a:ext uri="{FF2B5EF4-FFF2-40B4-BE49-F238E27FC236}">
-                <a16:creationId xmlns:a16="http://schemas.microsoft.com/office/drawing/2014/main" id="{D96938F1-F649-4145-8F6E-CE2CA3C72032}"/>
+                <a16:creationId xmlns:a16="http://schemas.microsoft.com/office/drawing/2014/main" id="{28556031-F5F3-40AA-8640-8A492D94B43D}"/>
               </a:ext>
             </a:extLst>
           </p:cNvPr>
@@ -39281,7 +39281,7 @@
           <p:cNvPr id="15" name="">
             <a:extLst xmlns:a="http://schemas.openxmlformats.org/drawingml/2006/main">
               <a:ext uri="{FF2B5EF4-FFF2-40B4-BE49-F238E27FC236}">
-                <a16:creationId xmlns:a16="http://schemas.microsoft.com/office/drawing/2014/main" id="{230D5D79-D93F-4587-8AAA-E7FED21853E3}"/>
+                <a16:creationId xmlns:a16="http://schemas.microsoft.com/office/drawing/2014/main" id="{6452BCA4-E384-4368-A6BE-8C6AE02235BD}"/>
               </a:ext>
             </a:extLst>
           </p:cNvPr>
@@ -39314,7 +39314,7 @@
           <p:cNvPr id="16" name="">
             <a:extLst xmlns:a="http://schemas.openxmlformats.org/drawingml/2006/main">
               <a:ext uri="{FF2B5EF4-FFF2-40B4-BE49-F238E27FC236}">
-                <a16:creationId xmlns:a16="http://schemas.microsoft.com/office/drawing/2014/main" id="{5B5E734B-ECE6-4FB3-BF44-0AB67C330923}"/>
+                <a16:creationId xmlns:a16="http://schemas.microsoft.com/office/drawing/2014/main" id="{72F68A31-6B3F-472F-89F8-AB6F73F8FD73}"/>
               </a:ext>
             </a:extLst>
           </p:cNvPr>
@@ -39366,7 +39366,7 @@
           <p:cNvPr id="17" name="">
             <a:extLst xmlns:a="http://schemas.openxmlformats.org/drawingml/2006/main">
               <a:ext uri="{FF2B5EF4-FFF2-40B4-BE49-F238E27FC236}">
-                <a16:creationId xmlns:a16="http://schemas.microsoft.com/office/drawing/2014/main" id="{773EA604-40D1-4C2C-B782-71C6F655EE7C}"/>
+                <a16:creationId xmlns:a16="http://schemas.microsoft.com/office/drawing/2014/main" id="{FFAC71B8-4C93-4BF5-8937-0DCA588DA460}"/>
               </a:ext>
             </a:extLst>
           </p:cNvPr>
@@ -39399,7 +39399,7 @@
           <p:cNvPr id="18" name="">
             <a:extLst xmlns:a="http://schemas.openxmlformats.org/drawingml/2006/main">
               <a:ext uri="{FF2B5EF4-FFF2-40B4-BE49-F238E27FC236}">
-                <a16:creationId xmlns:a16="http://schemas.microsoft.com/office/drawing/2014/main" id="{AE174D5C-06AD-45D1-B45A-A2334CC15EA5}"/>
+                <a16:creationId xmlns:a16="http://schemas.microsoft.com/office/drawing/2014/main" id="{2FF44BB8-4B06-47D2-8CC3-355B9542EB5C}"/>
               </a:ext>
             </a:extLst>
           </p:cNvPr>
@@ -39451,7 +39451,7 @@
           <p:cNvPr id="19" name="">
             <a:extLst xmlns:a="http://schemas.openxmlformats.org/drawingml/2006/main">
               <a:ext uri="{FF2B5EF4-FFF2-40B4-BE49-F238E27FC236}">
-                <a16:creationId xmlns:a16="http://schemas.microsoft.com/office/drawing/2014/main" id="{874F01EF-B70D-4DAE-A236-5601DBCF1B27}"/>
+                <a16:creationId xmlns:a16="http://schemas.microsoft.com/office/drawing/2014/main" id="{5B81A6DA-70C6-4971-88DE-B3BC8074D7FC}"/>
               </a:ext>
             </a:extLst>
           </p:cNvPr>
@@ -39484,7 +39484,7 @@
           <p:cNvPr id="20" name="">
             <a:extLst xmlns:a="http://schemas.openxmlformats.org/drawingml/2006/main">
               <a:ext uri="{FF2B5EF4-FFF2-40B4-BE49-F238E27FC236}">
-                <a16:creationId xmlns:a16="http://schemas.microsoft.com/office/drawing/2014/main" id="{75A51E14-4DB7-42CD-902C-A2EC95452E2D}"/>
+                <a16:creationId xmlns:a16="http://schemas.microsoft.com/office/drawing/2014/main" id="{ECBB6AAB-4196-4C10-BD68-95E839266C3F}"/>
               </a:ext>
             </a:extLst>
           </p:cNvPr>
@@ -39536,7 +39536,7 @@
           <p:cNvPr id="21" name="">
             <a:extLst xmlns:a="http://schemas.openxmlformats.org/drawingml/2006/main">
               <a:ext uri="{FF2B5EF4-FFF2-40B4-BE49-F238E27FC236}">
-                <a16:creationId xmlns:a16="http://schemas.microsoft.com/office/drawing/2014/main" id="{A50FBD54-0727-4BDF-89F4-8049B8F325D5}"/>
+                <a16:creationId xmlns:a16="http://schemas.microsoft.com/office/drawing/2014/main" id="{4216B89E-AA76-42C1-BFB7-C4F8724EAE76}"/>
               </a:ext>
             </a:extLst>
           </p:cNvPr>
@@ -39569,7 +39569,7 @@
           <p:cNvPr id="22" name="">
             <a:extLst xmlns:a="http://schemas.openxmlformats.org/drawingml/2006/main">
               <a:ext uri="{FF2B5EF4-FFF2-40B4-BE49-F238E27FC236}">
-                <a16:creationId xmlns:a16="http://schemas.microsoft.com/office/drawing/2014/main" id="{D0C64D5A-BE22-400C-B8E3-22F53845CF76}"/>
+                <a16:creationId xmlns:a16="http://schemas.microsoft.com/office/drawing/2014/main" id="{297F4F15-6BAA-47A2-9C6D-B91E955B234E}"/>
               </a:ext>
             </a:extLst>
           </p:cNvPr>
@@ -39621,7 +39621,7 @@
           <p:cNvPr id="23" name="">
             <a:extLst xmlns:a="http://schemas.openxmlformats.org/drawingml/2006/main">
               <a:ext uri="{FF2B5EF4-FFF2-40B4-BE49-F238E27FC236}">
-                <a16:creationId xmlns:a16="http://schemas.microsoft.com/office/drawing/2014/main" id="{D17CD1CB-50B8-470B-A910-9E18B07638B3}"/>
+                <a16:creationId xmlns:a16="http://schemas.microsoft.com/office/drawing/2014/main" id="{C0200C58-0F9D-481D-9E08-3CBA1D69968D}"/>
               </a:ext>
             </a:extLst>
           </p:cNvPr>
@@ -39654,7 +39654,7 @@
           <p:cNvPr id="24" name="">
             <a:extLst xmlns:a="http://schemas.openxmlformats.org/drawingml/2006/main">
               <a:ext uri="{FF2B5EF4-FFF2-40B4-BE49-F238E27FC236}">
-                <a16:creationId xmlns:a16="http://schemas.microsoft.com/office/drawing/2014/main" id="{0044E740-147F-4E27-A4CB-C9954F31415C}"/>
+                <a16:creationId xmlns:a16="http://schemas.microsoft.com/office/drawing/2014/main" id="{5CBB34F7-53E5-45A8-BD5D-49F37E550D92}"/>
               </a:ext>
             </a:extLst>
           </p:cNvPr>
@@ -39706,7 +39706,7 @@
           <p:cNvPr id="25" name="">
             <a:extLst xmlns:a="http://schemas.openxmlformats.org/drawingml/2006/main">
               <a:ext uri="{FF2B5EF4-FFF2-40B4-BE49-F238E27FC236}">
-                <a16:creationId xmlns:a16="http://schemas.microsoft.com/office/drawing/2014/main" id="{94407D46-3C02-48AD-8217-C2FE8734CD42}"/>
+                <a16:creationId xmlns:a16="http://schemas.microsoft.com/office/drawing/2014/main" id="{69F48BD3-EB0E-4BE9-B855-765A133AB867}"/>
               </a:ext>
             </a:extLst>
           </p:cNvPr>
@@ -39739,7 +39739,7 @@
           <p:cNvPr id="26" name="">
             <a:extLst xmlns:a="http://schemas.openxmlformats.org/drawingml/2006/main">
               <a:ext uri="{FF2B5EF4-FFF2-40B4-BE49-F238E27FC236}">
-                <a16:creationId xmlns:a16="http://schemas.microsoft.com/office/drawing/2014/main" id="{B1168EBC-ED71-4CE4-B091-F15ABE893882}"/>
+                <a16:creationId xmlns:a16="http://schemas.microsoft.com/office/drawing/2014/main" id="{7F520492-9EF7-4540-9816-2AB03CA78AA1}"/>
               </a:ext>
             </a:extLst>
           </p:cNvPr>
@@ -39791,7 +39791,7 @@
           <p:cNvPr id="27" name="">
             <a:extLst xmlns:a="http://schemas.openxmlformats.org/drawingml/2006/main">
               <a:ext uri="{FF2B5EF4-FFF2-40B4-BE49-F238E27FC236}">
-                <a16:creationId xmlns:a16="http://schemas.microsoft.com/office/drawing/2014/main" id="{996C32F5-3C39-4D0B-B94A-35AB46BC451B}"/>
+                <a16:creationId xmlns:a16="http://schemas.microsoft.com/office/drawing/2014/main" id="{F07E5AEB-1366-4289-A0EB-3664A746733A}"/>
               </a:ext>
             </a:extLst>
           </p:cNvPr>
@@ -39824,7 +39824,7 @@
           <p:cNvPr id="28" name="">
             <a:extLst xmlns:a="http://schemas.openxmlformats.org/drawingml/2006/main">
               <a:ext uri="{FF2B5EF4-FFF2-40B4-BE49-F238E27FC236}">
-                <a16:creationId xmlns:a16="http://schemas.microsoft.com/office/drawing/2014/main" id="{D6EDAB7B-D010-4878-ADAE-5CE9ABD8C0A1}"/>
+                <a16:creationId xmlns:a16="http://schemas.microsoft.com/office/drawing/2014/main" id="{4AC8AC84-4E95-4992-8CFF-BE1910D970E7}"/>
               </a:ext>
             </a:extLst>
           </p:cNvPr>
@@ -39876,7 +39876,7 @@
           <p:cNvPr id="29" name="">
             <a:extLst xmlns:a="http://schemas.openxmlformats.org/drawingml/2006/main">
               <a:ext uri="{FF2B5EF4-FFF2-40B4-BE49-F238E27FC236}">
-                <a16:creationId xmlns:a16="http://schemas.microsoft.com/office/drawing/2014/main" id="{2D9D6606-14FF-48CE-9C65-FBE38811F9CB}"/>
+                <a16:creationId xmlns:a16="http://schemas.microsoft.com/office/drawing/2014/main" id="{8F037161-B9AA-4A44-87F5-7F4EB5E71CD2}"/>
               </a:ext>
             </a:extLst>
           </p:cNvPr>
@@ -39909,7 +39909,7 @@
           <p:cNvPr id="30" name="">
             <a:extLst xmlns:a="http://schemas.openxmlformats.org/drawingml/2006/main">
               <a:ext uri="{FF2B5EF4-FFF2-40B4-BE49-F238E27FC236}">
-                <a16:creationId xmlns:a16="http://schemas.microsoft.com/office/drawing/2014/main" id="{7521DFB7-31A5-4F55-AD2C-F2988790BF70}"/>
+                <a16:creationId xmlns:a16="http://schemas.microsoft.com/office/drawing/2014/main" id="{53DC8B52-2F38-4347-B9A4-0189E40D6A08}"/>
               </a:ext>
             </a:extLst>
           </p:cNvPr>
@@ -39961,7 +39961,7 @@
           <p:cNvPr id="31" name="">
             <a:extLst xmlns:a="http://schemas.openxmlformats.org/drawingml/2006/main">
               <a:ext uri="{FF2B5EF4-FFF2-40B4-BE49-F238E27FC236}">
-                <a16:creationId xmlns:a16="http://schemas.microsoft.com/office/drawing/2014/main" id="{B056E153-13B6-4D39-88FE-B093BFCA44D6}"/>
+                <a16:creationId xmlns:a16="http://schemas.microsoft.com/office/drawing/2014/main" id="{36AAEEE2-99C3-4A2D-A3D9-DE857874C268}"/>
               </a:ext>
             </a:extLst>
           </p:cNvPr>
@@ -39994,7 +39994,7 @@
           <p:cNvPr id="32" name="">
             <a:extLst xmlns:a="http://schemas.openxmlformats.org/drawingml/2006/main">
               <a:ext uri="{FF2B5EF4-FFF2-40B4-BE49-F238E27FC236}">
-                <a16:creationId xmlns:a16="http://schemas.microsoft.com/office/drawing/2014/main" id="{CC947A83-453A-4A90-BC48-CAA2B7BF9AE1}"/>
+                <a16:creationId xmlns:a16="http://schemas.microsoft.com/office/drawing/2014/main" id="{7867F4C1-9F68-479E-BD3C-30850C2623A0}"/>
               </a:ext>
             </a:extLst>
           </p:cNvPr>
@@ -40046,7 +40046,7 @@
           <p:cNvPr id="33" name="">
             <a:extLst xmlns:a="http://schemas.openxmlformats.org/drawingml/2006/main">
               <a:ext uri="{FF2B5EF4-FFF2-40B4-BE49-F238E27FC236}">
-                <a16:creationId xmlns:a16="http://schemas.microsoft.com/office/drawing/2014/main" id="{48CE1857-6D4E-4E9E-9409-F0C7B3B4FDA1}"/>
+                <a16:creationId xmlns:a16="http://schemas.microsoft.com/office/drawing/2014/main" id="{18173BC0-3FDA-4AF0-9D82-5FA1D27FF58B}"/>
               </a:ext>
             </a:extLst>
           </p:cNvPr>
@@ -40079,7 +40079,7 @@
           <p:cNvPr id="34" name="">
             <a:extLst xmlns:a="http://schemas.openxmlformats.org/drawingml/2006/main">
               <a:ext uri="{FF2B5EF4-FFF2-40B4-BE49-F238E27FC236}">
-                <a16:creationId xmlns:a16="http://schemas.microsoft.com/office/drawing/2014/main" id="{26436E1A-6012-4AC4-8BAA-BA1854FD9699}"/>
+                <a16:creationId xmlns:a16="http://schemas.microsoft.com/office/drawing/2014/main" id="{E8681CB5-BD82-461D-BC99-2DEEBEB5891C}"/>
               </a:ext>
             </a:extLst>
           </p:cNvPr>
@@ -40129,7 +40129,7 @@
     </p:spTree>
     <p:extLst>
       <p:ext uri="{BB962C8B-B14F-4D97-AF65-F5344CB8AC3E}">
-        <p14:creationId xmlns:p14="http://schemas.microsoft.com/office/powerpoint/2010/main" val="431962935"/>
+        <p14:creationId xmlns:p14="http://schemas.microsoft.com/office/powerpoint/2010/main" val="416184861"/>
       </p:ext>
     </p:extLst>
   </p:cSld>
@@ -40160,7 +40160,7 @@
           <p:cNvPr id="102" name="">
             <a:extLst xmlns:a="http://schemas.openxmlformats.org/drawingml/2006/main">
               <a:ext uri="{FF2B5EF4-FFF2-40B4-BE49-F238E27FC236}">
-                <a16:creationId xmlns:a16="http://schemas.microsoft.com/office/drawing/2014/main" id="{22495A7A-2F93-4D2A-B682-C04600491F8B}"/>
+                <a16:creationId xmlns:a16="http://schemas.microsoft.com/office/drawing/2014/main" id="{EB8C51FF-C635-4DC8-B3EF-90D03D5A47C1}"/>
               </a:ext>
             </a:extLst>
           </p:cNvPr>
@@ -40193,7 +40193,7 @@
           <p:cNvPr id="2" name="">
             <a:extLst xmlns:a="http://schemas.openxmlformats.org/drawingml/2006/main">
               <a:ext uri="{FF2B5EF4-FFF2-40B4-BE49-F238E27FC236}">
-                <a16:creationId xmlns:a16="http://schemas.microsoft.com/office/drawing/2014/main" id="{53055F06-82CB-49AC-8291-8937DD1DF78E}"/>
+                <a16:creationId xmlns:a16="http://schemas.microsoft.com/office/drawing/2014/main" id="{D9DB5504-E82D-48DE-B6C5-166535F38919}"/>
               </a:ext>
             </a:extLst>
           </p:cNvPr>
@@ -40224,7 +40224,7 @@
           <p:cNvPr id="3" name="">
             <a:extLst xmlns:a="http://schemas.openxmlformats.org/drawingml/2006/main">
               <a:ext uri="{FF2B5EF4-FFF2-40B4-BE49-F238E27FC236}">
-                <a16:creationId xmlns:a16="http://schemas.microsoft.com/office/drawing/2014/main" id="{A8AEBA19-9686-4358-9248-1D058815E586}"/>
+                <a16:creationId xmlns:a16="http://schemas.microsoft.com/office/drawing/2014/main" id="{D0B68E77-FD2C-4C4D-AF69-2F9DFC7A0A05}"/>
               </a:ext>
             </a:extLst>
           </p:cNvPr>
@@ -40276,7 +40276,7 @@
           <p:cNvPr id="4" name="">
             <a:extLst xmlns:a="http://schemas.openxmlformats.org/drawingml/2006/main">
               <a:ext uri="{FF2B5EF4-FFF2-40B4-BE49-F238E27FC236}">
-                <a16:creationId xmlns:a16="http://schemas.microsoft.com/office/drawing/2014/main" id="{7F63BCF6-F511-4900-8D5A-38168B1C827B}"/>
+                <a16:creationId xmlns:a16="http://schemas.microsoft.com/office/drawing/2014/main" id="{F521CC33-9CE8-4A88-B8F8-274EAC8D2ADC}"/>
               </a:ext>
             </a:extLst>
           </p:cNvPr>
@@ -40328,7 +40328,7 @@
           <p:cNvPr id="5" name="">
             <a:extLst xmlns:a="http://schemas.openxmlformats.org/drawingml/2006/main">
               <a:ext uri="{FF2B5EF4-FFF2-40B4-BE49-F238E27FC236}">
-                <a16:creationId xmlns:a16="http://schemas.microsoft.com/office/drawing/2014/main" id="{CE0F4FAB-AF03-4493-B018-603099389DDB}"/>
+                <a16:creationId xmlns:a16="http://schemas.microsoft.com/office/drawing/2014/main" id="{1867094A-0E76-44B4-83D8-54294E8F3AEC}"/>
               </a:ext>
             </a:extLst>
           </p:cNvPr>
@@ -40363,7 +40363,7 @@
           <p:nvPr/>
         </p:nvPicPr>
         <p:blipFill>
-          <a:blip xmlns:r="http://schemas.openxmlformats.org/officeDocument/2006/relationships" xmlns:a="http://schemas.openxmlformats.org/drawingml/2006/main" r:embed="R585a3f83822c4033"/>
+          <a:blip xmlns:r="http://schemas.openxmlformats.org/officeDocument/2006/relationships" xmlns:a="http://schemas.openxmlformats.org/drawingml/2006/main" r:embed="R6624beb353b8434a"/>
           <a:stretch xmlns:a="http://schemas.openxmlformats.org/drawingml/2006/main"/>
         </p:blipFill>
         <p:spPr>
@@ -40381,7 +40381,7 @@
           <p:cNvPr id="7" name="">
             <a:extLst xmlns:a="http://schemas.openxmlformats.org/drawingml/2006/main">
               <a:ext uri="{FF2B5EF4-FFF2-40B4-BE49-F238E27FC236}">
-                <a16:creationId xmlns:a16="http://schemas.microsoft.com/office/drawing/2014/main" id="{5031F249-E66C-46CC-8CB0-85809D3B3069}"/>
+                <a16:creationId xmlns:a16="http://schemas.microsoft.com/office/drawing/2014/main" id="{E83231AE-0B6D-4F85-BB39-60924553253E}"/>
               </a:ext>
             </a:extLst>
           </p:cNvPr>
@@ -40433,7 +40433,7 @@
           <p:cNvPr id="8" name="">
             <a:extLst xmlns:a="http://schemas.openxmlformats.org/drawingml/2006/main">
               <a:ext uri="{FF2B5EF4-FFF2-40B4-BE49-F238E27FC236}">
-                <a16:creationId xmlns:a16="http://schemas.microsoft.com/office/drawing/2014/main" id="{ECDA993A-0867-4E6A-B432-C2435AAEC037}"/>
+                <a16:creationId xmlns:a16="http://schemas.microsoft.com/office/drawing/2014/main" id="{B2EDC2AA-9B1C-47D2-9848-49D9F5F9B780}"/>
               </a:ext>
             </a:extLst>
           </p:cNvPr>
@@ -40485,7 +40485,7 @@
           <p:cNvPr id="9" name="">
             <a:extLst xmlns:a="http://schemas.openxmlformats.org/drawingml/2006/main">
               <a:ext uri="{FF2B5EF4-FFF2-40B4-BE49-F238E27FC236}">
-                <a16:creationId xmlns:a16="http://schemas.microsoft.com/office/drawing/2014/main" id="{F733A8CD-B3EE-4A92-8665-EB92DD0F7D18}"/>
+                <a16:creationId xmlns:a16="http://schemas.microsoft.com/office/drawing/2014/main" id="{F762454A-EA3A-47A7-AA26-713068F8894A}"/>
               </a:ext>
             </a:extLst>
           </p:cNvPr>
@@ -40537,7 +40537,7 @@
           <p:cNvPr id="10" name="">
             <a:extLst xmlns:a="http://schemas.openxmlformats.org/drawingml/2006/main">
               <a:ext uri="{FF2B5EF4-FFF2-40B4-BE49-F238E27FC236}">
-                <a16:creationId xmlns:a16="http://schemas.microsoft.com/office/drawing/2014/main" id="{19F79B16-E069-4604-A46D-6F20FEC860D2}"/>
+                <a16:creationId xmlns:a16="http://schemas.microsoft.com/office/drawing/2014/main" id="{DC37ABC6-5AB7-4F72-B62B-3ED792EF2A97}"/>
               </a:ext>
             </a:extLst>
           </p:cNvPr>
@@ -40589,7 +40589,7 @@
           <p:cNvPr id="11" name="">
             <a:extLst xmlns:a="http://schemas.openxmlformats.org/drawingml/2006/main">
               <a:ext uri="{FF2B5EF4-FFF2-40B4-BE49-F238E27FC236}">
-                <a16:creationId xmlns:a16="http://schemas.microsoft.com/office/drawing/2014/main" id="{ED57CC2E-4912-4D96-A449-E78FDF01F101}"/>
+                <a16:creationId xmlns:a16="http://schemas.microsoft.com/office/drawing/2014/main" id="{C46D0D34-8883-4EDC-9C5E-DAD8C576336F}"/>
               </a:ext>
             </a:extLst>
           </p:cNvPr>
@@ -40620,7 +40620,7 @@
           <p:cNvPr id="12" name="">
             <a:extLst xmlns:a="http://schemas.openxmlformats.org/drawingml/2006/main">
               <a:ext uri="{FF2B5EF4-FFF2-40B4-BE49-F238E27FC236}">
-                <a16:creationId xmlns:a16="http://schemas.microsoft.com/office/drawing/2014/main" id="{6E53F7B0-C485-4716-9818-DCCFC69398BD}"/>
+                <a16:creationId xmlns:a16="http://schemas.microsoft.com/office/drawing/2014/main" id="{DAD8DCB5-ACB7-48A2-BD4D-8E5BC96AA2A3}"/>
               </a:ext>
             </a:extLst>
           </p:cNvPr>
@@ -40651,7 +40651,7 @@
           <p:cNvPr id="13" name="">
             <a:extLst xmlns:a="http://schemas.openxmlformats.org/drawingml/2006/main">
               <a:ext uri="{FF2B5EF4-FFF2-40B4-BE49-F238E27FC236}">
-                <a16:creationId xmlns:a16="http://schemas.microsoft.com/office/drawing/2014/main" id="{31725A0A-8DA2-492E-9855-0A9D0567D829}"/>
+                <a16:creationId xmlns:a16="http://schemas.microsoft.com/office/drawing/2014/main" id="{4DCE1191-D4EE-4094-B42C-BF32991DA325}"/>
               </a:ext>
             </a:extLst>
           </p:cNvPr>
@@ -40703,7 +40703,7 @@
           <p:cNvPr id="14" name="">
             <a:extLst xmlns:a="http://schemas.openxmlformats.org/drawingml/2006/main">
               <a:ext uri="{FF2B5EF4-FFF2-40B4-BE49-F238E27FC236}">
-                <a16:creationId xmlns:a16="http://schemas.microsoft.com/office/drawing/2014/main" id="{C6663852-900D-4F34-81FC-6342D6186A9F}"/>
+                <a16:creationId xmlns:a16="http://schemas.microsoft.com/office/drawing/2014/main" id="{887823A4-7FFF-4FCF-AFD6-42C5E603E82B}"/>
               </a:ext>
             </a:extLst>
           </p:cNvPr>
@@ -40755,7 +40755,7 @@
           <p:cNvPr id="15" name="">
             <a:extLst xmlns:a="http://schemas.openxmlformats.org/drawingml/2006/main">
               <a:ext uri="{FF2B5EF4-FFF2-40B4-BE49-F238E27FC236}">
-                <a16:creationId xmlns:a16="http://schemas.microsoft.com/office/drawing/2014/main" id="{E3D3F2E6-68D4-4120-B766-5F68981A8E6D}"/>
+                <a16:creationId xmlns:a16="http://schemas.microsoft.com/office/drawing/2014/main" id="{B03D16D2-6364-492C-A323-B0360A93E324}"/>
               </a:ext>
             </a:extLst>
           </p:cNvPr>
@@ -40807,7 +40807,7 @@
           <p:cNvPr id="16" name="">
             <a:extLst xmlns:a="http://schemas.openxmlformats.org/drawingml/2006/main">
               <a:ext uri="{FF2B5EF4-FFF2-40B4-BE49-F238E27FC236}">
-                <a16:creationId xmlns:a16="http://schemas.microsoft.com/office/drawing/2014/main" id="{F7C208FF-B143-4686-8806-3AB828A4EAC7}"/>
+                <a16:creationId xmlns:a16="http://schemas.microsoft.com/office/drawing/2014/main" id="{E4DC9368-18EA-4CA3-A5AB-302A98018E1A}"/>
               </a:ext>
             </a:extLst>
           </p:cNvPr>
@@ -40859,7 +40859,7 @@
           <p:cNvPr id="17" name="">
             <a:extLst xmlns:a="http://schemas.openxmlformats.org/drawingml/2006/main">
               <a:ext uri="{FF2B5EF4-FFF2-40B4-BE49-F238E27FC236}">
-                <a16:creationId xmlns:a16="http://schemas.microsoft.com/office/drawing/2014/main" id="{4D1C094E-EB04-4B95-A595-D25C3775C7B7}"/>
+                <a16:creationId xmlns:a16="http://schemas.microsoft.com/office/drawing/2014/main" id="{8B54B813-0C87-4636-B5AB-D36D8FAE9AA5}"/>
               </a:ext>
             </a:extLst>
           </p:cNvPr>
@@ -40911,7 +40911,7 @@
           <p:cNvPr id="18" name="">
             <a:extLst xmlns:a="http://schemas.openxmlformats.org/drawingml/2006/main">
               <a:ext uri="{FF2B5EF4-FFF2-40B4-BE49-F238E27FC236}">
-                <a16:creationId xmlns:a16="http://schemas.microsoft.com/office/drawing/2014/main" id="{837E6989-BF1D-44D8-AC37-C07FB92B7FEC}"/>
+                <a16:creationId xmlns:a16="http://schemas.microsoft.com/office/drawing/2014/main" id="{0A995BA0-8CE8-4173-8648-EA7098BD651B}"/>
               </a:ext>
             </a:extLst>
           </p:cNvPr>
@@ -40942,7 +40942,7 @@
           <p:cNvPr id="19" name="">
             <a:extLst xmlns:a="http://schemas.openxmlformats.org/drawingml/2006/main">
               <a:ext uri="{FF2B5EF4-FFF2-40B4-BE49-F238E27FC236}">
-                <a16:creationId xmlns:a16="http://schemas.microsoft.com/office/drawing/2014/main" id="{8BF77703-124D-4C44-A28D-17892341B80A}"/>
+                <a16:creationId xmlns:a16="http://schemas.microsoft.com/office/drawing/2014/main" id="{630DD722-B97A-4B3F-9FD8-01C353705D9D}"/>
               </a:ext>
             </a:extLst>
           </p:cNvPr>
@@ -40994,7 +40994,7 @@
           <p:cNvPr id="20" name="">
             <a:extLst xmlns:a="http://schemas.openxmlformats.org/drawingml/2006/main">
               <a:ext uri="{FF2B5EF4-FFF2-40B4-BE49-F238E27FC236}">
-                <a16:creationId xmlns:a16="http://schemas.microsoft.com/office/drawing/2014/main" id="{C49F3910-9428-4A59-B252-7A7ADA1DA2FC}"/>
+                <a16:creationId xmlns:a16="http://schemas.microsoft.com/office/drawing/2014/main" id="{C93D82E7-49EC-4D37-AA98-30E01E59C447}"/>
               </a:ext>
             </a:extLst>
           </p:cNvPr>
@@ -41046,7 +41046,7 @@
           <p:cNvPr id="21" name="">
             <a:extLst xmlns:a="http://schemas.openxmlformats.org/drawingml/2006/main">
               <a:ext uri="{FF2B5EF4-FFF2-40B4-BE49-F238E27FC236}">
-                <a16:creationId xmlns:a16="http://schemas.microsoft.com/office/drawing/2014/main" id="{8FD42F16-EA31-4089-A403-DE4B6A2C242E}"/>
+                <a16:creationId xmlns:a16="http://schemas.microsoft.com/office/drawing/2014/main" id="{09ACBB76-1803-4907-A1D3-755D9CB75108}"/>
               </a:ext>
             </a:extLst>
           </p:cNvPr>
@@ -41098,7 +41098,7 @@
           <p:cNvPr id="22" name="">
             <a:extLst xmlns:a="http://schemas.openxmlformats.org/drawingml/2006/main">
               <a:ext uri="{FF2B5EF4-FFF2-40B4-BE49-F238E27FC236}">
-                <a16:creationId xmlns:a16="http://schemas.microsoft.com/office/drawing/2014/main" id="{CDF97E6B-37D8-43D5-B8D8-640BC51F34CA}"/>
+                <a16:creationId xmlns:a16="http://schemas.microsoft.com/office/drawing/2014/main" id="{A7C08FAA-786F-4F20-9BFA-07668D4B9C1F}"/>
               </a:ext>
             </a:extLst>
           </p:cNvPr>
@@ -41150,7 +41150,7 @@
           <p:cNvPr id="23" name="">
             <a:extLst xmlns:a="http://schemas.openxmlformats.org/drawingml/2006/main">
               <a:ext uri="{FF2B5EF4-FFF2-40B4-BE49-F238E27FC236}">
-                <a16:creationId xmlns:a16="http://schemas.microsoft.com/office/drawing/2014/main" id="{19176790-A46B-47B0-BAFE-AA7B1FB31666}"/>
+                <a16:creationId xmlns:a16="http://schemas.microsoft.com/office/drawing/2014/main" id="{7D09F574-79F2-4F90-9A34-E72D34F81E1D}"/>
               </a:ext>
             </a:extLst>
           </p:cNvPr>
@@ -41202,7 +41202,7 @@
           <p:cNvPr id="24" name="">
             <a:extLst xmlns:a="http://schemas.openxmlformats.org/drawingml/2006/main">
               <a:ext uri="{FF2B5EF4-FFF2-40B4-BE49-F238E27FC236}">
-                <a16:creationId xmlns:a16="http://schemas.microsoft.com/office/drawing/2014/main" id="{F52F37F9-B1FC-4331-BC23-2A5269811F3B}"/>
+                <a16:creationId xmlns:a16="http://schemas.microsoft.com/office/drawing/2014/main" id="{694403DE-9DA7-460F-B3D9-B42401277D9C}"/>
               </a:ext>
             </a:extLst>
           </p:cNvPr>
@@ -41233,7 +41233,7 @@
           <p:cNvPr id="25" name="">
             <a:extLst xmlns:a="http://schemas.openxmlformats.org/drawingml/2006/main">
               <a:ext uri="{FF2B5EF4-FFF2-40B4-BE49-F238E27FC236}">
-                <a16:creationId xmlns:a16="http://schemas.microsoft.com/office/drawing/2014/main" id="{E907437F-C85E-4DFA-AB4F-03C79CCD282D}"/>
+                <a16:creationId xmlns:a16="http://schemas.microsoft.com/office/drawing/2014/main" id="{AF908781-9EE9-4599-8878-460772B4769C}"/>
               </a:ext>
             </a:extLst>
           </p:cNvPr>
@@ -41264,7 +41264,7 @@
           <p:cNvPr id="26" name="">
             <a:extLst xmlns:a="http://schemas.openxmlformats.org/drawingml/2006/main">
               <a:ext uri="{FF2B5EF4-FFF2-40B4-BE49-F238E27FC236}">
-                <a16:creationId xmlns:a16="http://schemas.microsoft.com/office/drawing/2014/main" id="{B159B38E-3331-4B22-842D-AADAD0DE363A}"/>
+                <a16:creationId xmlns:a16="http://schemas.microsoft.com/office/drawing/2014/main" id="{D5A3C5EF-26C9-412C-8ECE-176BD2AC3840}"/>
               </a:ext>
             </a:extLst>
           </p:cNvPr>
@@ -41316,7 +41316,7 @@
           <p:cNvPr id="27" name="">
             <a:extLst xmlns:a="http://schemas.openxmlformats.org/drawingml/2006/main">
               <a:ext uri="{FF2B5EF4-FFF2-40B4-BE49-F238E27FC236}">
-                <a16:creationId xmlns:a16="http://schemas.microsoft.com/office/drawing/2014/main" id="{B9A84E5C-B045-435F-B44B-4DDC3FCDC501}"/>
+                <a16:creationId xmlns:a16="http://schemas.microsoft.com/office/drawing/2014/main" id="{106A3C5D-86CE-4495-BEEE-D1D2F57A16A1}"/>
               </a:ext>
             </a:extLst>
           </p:cNvPr>
@@ -41368,7 +41368,7 @@
           <p:cNvPr id="28" name="">
             <a:extLst xmlns:a="http://schemas.openxmlformats.org/drawingml/2006/main">
               <a:ext uri="{FF2B5EF4-FFF2-40B4-BE49-F238E27FC236}">
-                <a16:creationId xmlns:a16="http://schemas.microsoft.com/office/drawing/2014/main" id="{BE42B383-1895-4EF1-9300-514817D38F5F}"/>
+                <a16:creationId xmlns:a16="http://schemas.microsoft.com/office/drawing/2014/main" id="{C0556F3D-5223-44EC-91A6-353ACB216D72}"/>
               </a:ext>
             </a:extLst>
           </p:cNvPr>
@@ -41420,7 +41420,7 @@
           <p:cNvPr id="29" name="">
             <a:extLst xmlns:a="http://schemas.openxmlformats.org/drawingml/2006/main">
               <a:ext uri="{FF2B5EF4-FFF2-40B4-BE49-F238E27FC236}">
-                <a16:creationId xmlns:a16="http://schemas.microsoft.com/office/drawing/2014/main" id="{DD04E582-6D2A-4637-AAA1-45B34256B121}"/>
+                <a16:creationId xmlns:a16="http://schemas.microsoft.com/office/drawing/2014/main" id="{DCC799CB-1679-496B-A228-A20C3C6AFB72}"/>
               </a:ext>
             </a:extLst>
           </p:cNvPr>
@@ -41472,7 +41472,7 @@
           <p:cNvPr id="30" name="">
             <a:extLst xmlns:a="http://schemas.openxmlformats.org/drawingml/2006/main">
               <a:ext uri="{FF2B5EF4-FFF2-40B4-BE49-F238E27FC236}">
-                <a16:creationId xmlns:a16="http://schemas.microsoft.com/office/drawing/2014/main" id="{0A2CCD55-EFEE-4067-A913-2B5291B7F73A}"/>
+                <a16:creationId xmlns:a16="http://schemas.microsoft.com/office/drawing/2014/main" id="{0E9EF0FC-F376-48F8-A7FF-70D6D0EEE5F8}"/>
               </a:ext>
             </a:extLst>
           </p:cNvPr>
@@ -41524,7 +41524,7 @@
           <p:cNvPr id="31" name="">
             <a:extLst xmlns:a="http://schemas.openxmlformats.org/drawingml/2006/main">
               <a:ext uri="{FF2B5EF4-FFF2-40B4-BE49-F238E27FC236}">
-                <a16:creationId xmlns:a16="http://schemas.microsoft.com/office/drawing/2014/main" id="{03612484-41BF-4B39-8B4E-DCF4E065E5B6}"/>
+                <a16:creationId xmlns:a16="http://schemas.microsoft.com/office/drawing/2014/main" id="{35FCEDAC-5BF3-400A-8FD7-40E17F5660DC}"/>
               </a:ext>
             </a:extLst>
           </p:cNvPr>
@@ -41555,7 +41555,7 @@
           <p:cNvPr id="32" name="">
             <a:extLst xmlns:a="http://schemas.openxmlformats.org/drawingml/2006/main">
               <a:ext uri="{FF2B5EF4-FFF2-40B4-BE49-F238E27FC236}">
-                <a16:creationId xmlns:a16="http://schemas.microsoft.com/office/drawing/2014/main" id="{6B655A59-549F-41C4-8122-F84E42D0FD77}"/>
+                <a16:creationId xmlns:a16="http://schemas.microsoft.com/office/drawing/2014/main" id="{31B0C19E-087E-4F84-9212-3F88EC3A9DC4}"/>
               </a:ext>
             </a:extLst>
           </p:cNvPr>
@@ -41607,7 +41607,7 @@
           <p:cNvPr id="33" name="">
             <a:extLst xmlns:a="http://schemas.openxmlformats.org/drawingml/2006/main">
               <a:ext uri="{FF2B5EF4-FFF2-40B4-BE49-F238E27FC236}">
-                <a16:creationId xmlns:a16="http://schemas.microsoft.com/office/drawing/2014/main" id="{94731614-E5EF-4D49-8929-9F7E61B2247D}"/>
+                <a16:creationId xmlns:a16="http://schemas.microsoft.com/office/drawing/2014/main" id="{C214EE0A-83FA-412A-8C4D-6B7044B27BB4}"/>
               </a:ext>
             </a:extLst>
           </p:cNvPr>
@@ -41659,7 +41659,7 @@
           <p:cNvPr id="34" name="">
             <a:extLst xmlns:a="http://schemas.openxmlformats.org/drawingml/2006/main">
               <a:ext uri="{FF2B5EF4-FFF2-40B4-BE49-F238E27FC236}">
-                <a16:creationId xmlns:a16="http://schemas.microsoft.com/office/drawing/2014/main" id="{7726DE3B-B407-4022-881E-9CB91E3597F3}"/>
+                <a16:creationId xmlns:a16="http://schemas.microsoft.com/office/drawing/2014/main" id="{79C205DF-542C-4100-B10A-05F91C8FCB0E}"/>
               </a:ext>
             </a:extLst>
           </p:cNvPr>
@@ -41711,7 +41711,7 @@
           <p:cNvPr id="35" name="">
             <a:extLst xmlns:a="http://schemas.openxmlformats.org/drawingml/2006/main">
               <a:ext uri="{FF2B5EF4-FFF2-40B4-BE49-F238E27FC236}">
-                <a16:creationId xmlns:a16="http://schemas.microsoft.com/office/drawing/2014/main" id="{A6631EED-DA92-4D6F-A2F2-FFB337F2573E}"/>
+                <a16:creationId xmlns:a16="http://schemas.microsoft.com/office/drawing/2014/main" id="{B15ACDC5-D49B-4B04-9694-B5E47D7193C7}"/>
               </a:ext>
             </a:extLst>
           </p:cNvPr>
@@ -41763,7 +41763,7 @@
           <p:cNvPr id="36" name="">
             <a:extLst xmlns:a="http://schemas.openxmlformats.org/drawingml/2006/main">
               <a:ext uri="{FF2B5EF4-FFF2-40B4-BE49-F238E27FC236}">
-                <a16:creationId xmlns:a16="http://schemas.microsoft.com/office/drawing/2014/main" id="{740C05D0-4F58-4D4C-8B73-A44A6A0DB6EB}"/>
+                <a16:creationId xmlns:a16="http://schemas.microsoft.com/office/drawing/2014/main" id="{7DC064DE-3083-4A92-8606-997D0C2F18FF}"/>
               </a:ext>
             </a:extLst>
           </p:cNvPr>
@@ -41815,7 +41815,7 @@
           <p:cNvPr id="37" name="">
             <a:extLst xmlns:a="http://schemas.openxmlformats.org/drawingml/2006/main">
               <a:ext uri="{FF2B5EF4-FFF2-40B4-BE49-F238E27FC236}">
-                <a16:creationId xmlns:a16="http://schemas.microsoft.com/office/drawing/2014/main" id="{322D7D02-61D3-4049-8D94-1ED0C7BA1A8E}"/>
+                <a16:creationId xmlns:a16="http://schemas.microsoft.com/office/drawing/2014/main" id="{59FA97BC-FF67-4582-A18A-1C75580C443B}"/>
               </a:ext>
             </a:extLst>
           </p:cNvPr>
@@ -41846,7 +41846,7 @@
           <p:cNvPr id="38" name="">
             <a:extLst xmlns:a="http://schemas.openxmlformats.org/drawingml/2006/main">
               <a:ext uri="{FF2B5EF4-FFF2-40B4-BE49-F238E27FC236}">
-                <a16:creationId xmlns:a16="http://schemas.microsoft.com/office/drawing/2014/main" id="{9579FE0A-5636-474F-9F87-488267C217CF}"/>
+                <a16:creationId xmlns:a16="http://schemas.microsoft.com/office/drawing/2014/main" id="{1C051B6B-E0D8-4F58-B221-ACCEDBB412C8}"/>
               </a:ext>
             </a:extLst>
           </p:cNvPr>
@@ -41877,7 +41877,7 @@
           <p:cNvPr id="39" name="">
             <a:extLst xmlns:a="http://schemas.openxmlformats.org/drawingml/2006/main">
               <a:ext uri="{FF2B5EF4-FFF2-40B4-BE49-F238E27FC236}">
-                <a16:creationId xmlns:a16="http://schemas.microsoft.com/office/drawing/2014/main" id="{0E4F7632-BC84-4915-8A0E-7628E10DE980}"/>
+                <a16:creationId xmlns:a16="http://schemas.microsoft.com/office/drawing/2014/main" id="{39C4743C-0629-496E-8FE8-C38D16759CF2}"/>
               </a:ext>
             </a:extLst>
           </p:cNvPr>
@@ -41929,7 +41929,7 @@
           <p:cNvPr id="40" name="">
             <a:extLst xmlns:a="http://schemas.openxmlformats.org/drawingml/2006/main">
               <a:ext uri="{FF2B5EF4-FFF2-40B4-BE49-F238E27FC236}">
-                <a16:creationId xmlns:a16="http://schemas.microsoft.com/office/drawing/2014/main" id="{E7287D3F-677C-495E-9874-3E86AA7C1216}"/>
+                <a16:creationId xmlns:a16="http://schemas.microsoft.com/office/drawing/2014/main" id="{7846D8C0-F284-4111-A161-D510E9EE394F}"/>
               </a:ext>
             </a:extLst>
           </p:cNvPr>
@@ -41981,7 +41981,7 @@
           <p:cNvPr id="41" name="">
             <a:extLst xmlns:a="http://schemas.openxmlformats.org/drawingml/2006/main">
               <a:ext uri="{FF2B5EF4-FFF2-40B4-BE49-F238E27FC236}">
-                <a16:creationId xmlns:a16="http://schemas.microsoft.com/office/drawing/2014/main" id="{CA24C8F1-D268-465D-ADC3-329F022FA3AE}"/>
+                <a16:creationId xmlns:a16="http://schemas.microsoft.com/office/drawing/2014/main" id="{E3000067-D4DC-42D3-9544-F7CC80A8CC97}"/>
               </a:ext>
             </a:extLst>
           </p:cNvPr>
@@ -42033,7 +42033,7 @@
           <p:cNvPr id="42" name="">
             <a:extLst xmlns:a="http://schemas.openxmlformats.org/drawingml/2006/main">
               <a:ext uri="{FF2B5EF4-FFF2-40B4-BE49-F238E27FC236}">
-                <a16:creationId xmlns:a16="http://schemas.microsoft.com/office/drawing/2014/main" id="{528F0D6B-D3F1-4301-9F93-E89B2EEA868F}"/>
+                <a16:creationId xmlns:a16="http://schemas.microsoft.com/office/drawing/2014/main" id="{242A1190-0FF9-4096-A718-23BFA1FFC951}"/>
               </a:ext>
             </a:extLst>
           </p:cNvPr>
@@ -42085,7 +42085,7 @@
           <p:cNvPr id="43" name="">
             <a:extLst xmlns:a="http://schemas.openxmlformats.org/drawingml/2006/main">
               <a:ext uri="{FF2B5EF4-FFF2-40B4-BE49-F238E27FC236}">
-                <a16:creationId xmlns:a16="http://schemas.microsoft.com/office/drawing/2014/main" id="{958A8D7B-7F11-4351-AF3A-219D150F0B43}"/>
+                <a16:creationId xmlns:a16="http://schemas.microsoft.com/office/drawing/2014/main" id="{31E35E02-9DF7-4D60-893C-128EB847BBCF}"/>
               </a:ext>
             </a:extLst>
           </p:cNvPr>
@@ -42137,7 +42137,7 @@
           <p:cNvPr id="44" name="">
             <a:extLst xmlns:a="http://schemas.openxmlformats.org/drawingml/2006/main">
               <a:ext uri="{FF2B5EF4-FFF2-40B4-BE49-F238E27FC236}">
-                <a16:creationId xmlns:a16="http://schemas.microsoft.com/office/drawing/2014/main" id="{162731EA-72FF-4EDC-9438-D80854B2B798}"/>
+                <a16:creationId xmlns:a16="http://schemas.microsoft.com/office/drawing/2014/main" id="{3C378A94-1EE0-49B5-A889-0F72B4302A9B}"/>
               </a:ext>
             </a:extLst>
           </p:cNvPr>
@@ -42168,7 +42168,7 @@
           <p:cNvPr id="45" name="">
             <a:extLst xmlns:a="http://schemas.openxmlformats.org/drawingml/2006/main">
               <a:ext uri="{FF2B5EF4-FFF2-40B4-BE49-F238E27FC236}">
-                <a16:creationId xmlns:a16="http://schemas.microsoft.com/office/drawing/2014/main" id="{DFD8A990-0813-4A09-A61E-78A3DAD9F9EF}"/>
+                <a16:creationId xmlns:a16="http://schemas.microsoft.com/office/drawing/2014/main" id="{F83A56C8-0056-44B9-A9F8-52F9171BA729}"/>
               </a:ext>
             </a:extLst>
           </p:cNvPr>
@@ -42220,7 +42220,7 @@
           <p:cNvPr id="46" name="">
             <a:extLst xmlns:a="http://schemas.openxmlformats.org/drawingml/2006/main">
               <a:ext uri="{FF2B5EF4-FFF2-40B4-BE49-F238E27FC236}">
-                <a16:creationId xmlns:a16="http://schemas.microsoft.com/office/drawing/2014/main" id="{7454F986-6FFB-4866-AB86-808EFF88DCD3}"/>
+                <a16:creationId xmlns:a16="http://schemas.microsoft.com/office/drawing/2014/main" id="{F419543C-6752-4A9A-9460-EC7F519C427A}"/>
               </a:ext>
             </a:extLst>
           </p:cNvPr>
@@ -42272,7 +42272,7 @@
           <p:cNvPr id="47" name="">
             <a:extLst xmlns:a="http://schemas.openxmlformats.org/drawingml/2006/main">
               <a:ext uri="{FF2B5EF4-FFF2-40B4-BE49-F238E27FC236}">
-                <a16:creationId xmlns:a16="http://schemas.microsoft.com/office/drawing/2014/main" id="{789B87B1-519B-4CE5-9B64-ED835C347CAD}"/>
+                <a16:creationId xmlns:a16="http://schemas.microsoft.com/office/drawing/2014/main" id="{70F0A731-03F6-4597-9975-68FD52754189}"/>
               </a:ext>
             </a:extLst>
           </p:cNvPr>
@@ -42324,7 +42324,7 @@
           <p:cNvPr id="48" name="">
             <a:extLst xmlns:a="http://schemas.openxmlformats.org/drawingml/2006/main">
               <a:ext uri="{FF2B5EF4-FFF2-40B4-BE49-F238E27FC236}">
-                <a16:creationId xmlns:a16="http://schemas.microsoft.com/office/drawing/2014/main" id="{F905444F-0669-434C-AD14-473EC4A8CC51}"/>
+                <a16:creationId xmlns:a16="http://schemas.microsoft.com/office/drawing/2014/main" id="{29E40FCC-7134-4324-89BA-35148B84CF26}"/>
               </a:ext>
             </a:extLst>
           </p:cNvPr>
@@ -42376,7 +42376,7 @@
           <p:cNvPr id="49" name="">
             <a:extLst xmlns:a="http://schemas.openxmlformats.org/drawingml/2006/main">
               <a:ext uri="{FF2B5EF4-FFF2-40B4-BE49-F238E27FC236}">
-                <a16:creationId xmlns:a16="http://schemas.microsoft.com/office/drawing/2014/main" id="{0AF53560-2028-45FF-B483-889557534191}"/>
+                <a16:creationId xmlns:a16="http://schemas.microsoft.com/office/drawing/2014/main" id="{B6D35D31-C5F3-40F6-9DF7-BE0EE80CA1D5}"/>
               </a:ext>
             </a:extLst>
           </p:cNvPr>
@@ -42428,7 +42428,7 @@
           <p:cNvPr id="50" name="">
             <a:extLst xmlns:a="http://schemas.openxmlformats.org/drawingml/2006/main">
               <a:ext uri="{FF2B5EF4-FFF2-40B4-BE49-F238E27FC236}">
-                <a16:creationId xmlns:a16="http://schemas.microsoft.com/office/drawing/2014/main" id="{C9AF7E33-B987-48F0-83A6-268EE2E42B65}"/>
+                <a16:creationId xmlns:a16="http://schemas.microsoft.com/office/drawing/2014/main" id="{59C0AFDB-DD58-4128-9A48-D7B61219F70D}"/>
               </a:ext>
             </a:extLst>
           </p:cNvPr>
@@ -42459,7 +42459,7 @@
           <p:cNvPr id="51" name="">
             <a:extLst xmlns:a="http://schemas.openxmlformats.org/drawingml/2006/main">
               <a:ext uri="{FF2B5EF4-FFF2-40B4-BE49-F238E27FC236}">
-                <a16:creationId xmlns:a16="http://schemas.microsoft.com/office/drawing/2014/main" id="{FCBAF4CF-54C9-4A23-9E9D-26C6EC7163B0}"/>
+                <a16:creationId xmlns:a16="http://schemas.microsoft.com/office/drawing/2014/main" id="{5837FC30-61FA-45C9-A72A-E128CDA4425F}"/>
               </a:ext>
             </a:extLst>
           </p:cNvPr>
@@ -42490,7 +42490,7 @@
           <p:cNvPr id="52" name="">
             <a:extLst xmlns:a="http://schemas.openxmlformats.org/drawingml/2006/main">
               <a:ext uri="{FF2B5EF4-FFF2-40B4-BE49-F238E27FC236}">
-                <a16:creationId xmlns:a16="http://schemas.microsoft.com/office/drawing/2014/main" id="{597D468E-A033-4C47-A13B-3AFAFEC51211}"/>
+                <a16:creationId xmlns:a16="http://schemas.microsoft.com/office/drawing/2014/main" id="{285FF607-71BE-4B3E-A51B-508FD5F3E720}"/>
               </a:ext>
             </a:extLst>
           </p:cNvPr>
@@ -42542,7 +42542,7 @@
           <p:cNvPr id="53" name="">
             <a:extLst xmlns:a="http://schemas.openxmlformats.org/drawingml/2006/main">
               <a:ext uri="{FF2B5EF4-FFF2-40B4-BE49-F238E27FC236}">
-                <a16:creationId xmlns:a16="http://schemas.microsoft.com/office/drawing/2014/main" id="{F79FE3A7-3270-4DB7-971B-5F242DD9D79B}"/>
+                <a16:creationId xmlns:a16="http://schemas.microsoft.com/office/drawing/2014/main" id="{DB9BC569-9547-4C15-B3A0-425F9073FD1B}"/>
               </a:ext>
             </a:extLst>
           </p:cNvPr>
@@ -42594,7 +42594,7 @@
           <p:cNvPr id="54" name="">
             <a:extLst xmlns:a="http://schemas.openxmlformats.org/drawingml/2006/main">
               <a:ext uri="{FF2B5EF4-FFF2-40B4-BE49-F238E27FC236}">
-                <a16:creationId xmlns:a16="http://schemas.microsoft.com/office/drawing/2014/main" id="{2D3C8135-F556-444F-9336-3AE3E98F1C32}"/>
+                <a16:creationId xmlns:a16="http://schemas.microsoft.com/office/drawing/2014/main" id="{7EC3F32C-CDEF-4334-8533-55A1A2B25AAF}"/>
               </a:ext>
             </a:extLst>
           </p:cNvPr>
@@ -42646,7 +42646,7 @@
           <p:cNvPr id="55" name="">
             <a:extLst xmlns:a="http://schemas.openxmlformats.org/drawingml/2006/main">
               <a:ext uri="{FF2B5EF4-FFF2-40B4-BE49-F238E27FC236}">
-                <a16:creationId xmlns:a16="http://schemas.microsoft.com/office/drawing/2014/main" id="{95434351-8BF9-4DC7-ACC2-BE211BE7679A}"/>
+                <a16:creationId xmlns:a16="http://schemas.microsoft.com/office/drawing/2014/main" id="{5BC51168-A2A5-4227-A013-A9DF7D5223C7}"/>
               </a:ext>
             </a:extLst>
           </p:cNvPr>
@@ -42698,7 +42698,7 @@
           <p:cNvPr id="56" name="">
             <a:extLst xmlns:a="http://schemas.openxmlformats.org/drawingml/2006/main">
               <a:ext uri="{FF2B5EF4-FFF2-40B4-BE49-F238E27FC236}">
-                <a16:creationId xmlns:a16="http://schemas.microsoft.com/office/drawing/2014/main" id="{6171D664-D788-4772-920E-0B8F01B54AEB}"/>
+                <a16:creationId xmlns:a16="http://schemas.microsoft.com/office/drawing/2014/main" id="{0F87023F-3FC9-4C67-9490-77FC2F6AFFE1}"/>
               </a:ext>
             </a:extLst>
           </p:cNvPr>
@@ -42750,7 +42750,7 @@
           <p:cNvPr id="57" name="">
             <a:extLst xmlns:a="http://schemas.openxmlformats.org/drawingml/2006/main">
               <a:ext uri="{FF2B5EF4-FFF2-40B4-BE49-F238E27FC236}">
-                <a16:creationId xmlns:a16="http://schemas.microsoft.com/office/drawing/2014/main" id="{1A9FBB20-5496-4522-B694-1775E4BC8B7B}"/>
+                <a16:creationId xmlns:a16="http://schemas.microsoft.com/office/drawing/2014/main" id="{A13A3361-BD8D-48E6-81F4-09EB25856DF4}"/>
               </a:ext>
             </a:extLst>
           </p:cNvPr>
@@ -42781,7 +42781,7 @@
           <p:cNvPr id="58" name="">
             <a:extLst xmlns:a="http://schemas.openxmlformats.org/drawingml/2006/main">
               <a:ext uri="{FF2B5EF4-FFF2-40B4-BE49-F238E27FC236}">
-                <a16:creationId xmlns:a16="http://schemas.microsoft.com/office/drawing/2014/main" id="{8448B2BD-EAD3-4804-A9CD-4B7A5B324D50}"/>
+                <a16:creationId xmlns:a16="http://schemas.microsoft.com/office/drawing/2014/main" id="{2B88B2CD-91A2-4AF6-8791-7B3EDA85EA3F}"/>
               </a:ext>
             </a:extLst>
           </p:cNvPr>
@@ -42833,7 +42833,7 @@
           <p:cNvPr id="59" name="">
             <a:extLst xmlns:a="http://schemas.openxmlformats.org/drawingml/2006/main">
               <a:ext uri="{FF2B5EF4-FFF2-40B4-BE49-F238E27FC236}">
-                <a16:creationId xmlns:a16="http://schemas.microsoft.com/office/drawing/2014/main" id="{C72A3E41-7B43-45A0-887C-6236D3335A54}"/>
+                <a16:creationId xmlns:a16="http://schemas.microsoft.com/office/drawing/2014/main" id="{2EAD2A02-B1F4-4836-8F30-B81DFF8425DB}"/>
               </a:ext>
             </a:extLst>
           </p:cNvPr>
@@ -42885,7 +42885,7 @@
           <p:cNvPr id="60" name="">
             <a:extLst xmlns:a="http://schemas.openxmlformats.org/drawingml/2006/main">
               <a:ext uri="{FF2B5EF4-FFF2-40B4-BE49-F238E27FC236}">
-                <a16:creationId xmlns:a16="http://schemas.microsoft.com/office/drawing/2014/main" id="{7BEDE41A-54EB-498C-9671-1563BD7DFD3E}"/>
+                <a16:creationId xmlns:a16="http://schemas.microsoft.com/office/drawing/2014/main" id="{79135E59-96AB-4F6F-8688-E242225F4AAA}"/>
               </a:ext>
             </a:extLst>
           </p:cNvPr>
@@ -42937,7 +42937,7 @@
           <p:cNvPr id="61" name="">
             <a:extLst xmlns:a="http://schemas.openxmlformats.org/drawingml/2006/main">
               <a:ext uri="{FF2B5EF4-FFF2-40B4-BE49-F238E27FC236}">
-                <a16:creationId xmlns:a16="http://schemas.microsoft.com/office/drawing/2014/main" id="{1DFFD357-5956-4E36-BFD1-3F2B5BCF4835}"/>
+                <a16:creationId xmlns:a16="http://schemas.microsoft.com/office/drawing/2014/main" id="{EE2896D9-C928-4E8D-9AB4-785780CED774}"/>
               </a:ext>
             </a:extLst>
           </p:cNvPr>
@@ -42989,7 +42989,7 @@
           <p:cNvPr id="62" name="">
             <a:extLst xmlns:a="http://schemas.openxmlformats.org/drawingml/2006/main">
               <a:ext uri="{FF2B5EF4-FFF2-40B4-BE49-F238E27FC236}">
-                <a16:creationId xmlns:a16="http://schemas.microsoft.com/office/drawing/2014/main" id="{3F0B4344-491C-4600-92EE-9AD0B3F0BC51}"/>
+                <a16:creationId xmlns:a16="http://schemas.microsoft.com/office/drawing/2014/main" id="{E849140F-5967-4D6F-8EDA-B5119C66C42E}"/>
               </a:ext>
             </a:extLst>
           </p:cNvPr>
@@ -43041,7 +43041,7 @@
           <p:cNvPr id="63" name="">
             <a:extLst xmlns:a="http://schemas.openxmlformats.org/drawingml/2006/main">
               <a:ext uri="{FF2B5EF4-FFF2-40B4-BE49-F238E27FC236}">
-                <a16:creationId xmlns:a16="http://schemas.microsoft.com/office/drawing/2014/main" id="{104EE825-CDE8-4D26-94E9-07B0B0517332}"/>
+                <a16:creationId xmlns:a16="http://schemas.microsoft.com/office/drawing/2014/main" id="{480791E1-0C6D-459A-8CA0-3959C2431F68}"/>
               </a:ext>
             </a:extLst>
           </p:cNvPr>
@@ -43072,7 +43072,7 @@
           <p:cNvPr id="64" name="">
             <a:extLst xmlns:a="http://schemas.openxmlformats.org/drawingml/2006/main">
               <a:ext uri="{FF2B5EF4-FFF2-40B4-BE49-F238E27FC236}">
-                <a16:creationId xmlns:a16="http://schemas.microsoft.com/office/drawing/2014/main" id="{DA1E10DD-C3FB-440D-9542-076CCE52BB95}"/>
+                <a16:creationId xmlns:a16="http://schemas.microsoft.com/office/drawing/2014/main" id="{F13F31D4-05D2-4D26-9D03-2EAA2764B276}"/>
               </a:ext>
             </a:extLst>
           </p:cNvPr>
@@ -43103,7 +43103,7 @@
           <p:cNvPr id="65" name="">
             <a:extLst xmlns:a="http://schemas.openxmlformats.org/drawingml/2006/main">
               <a:ext uri="{FF2B5EF4-FFF2-40B4-BE49-F238E27FC236}">
-                <a16:creationId xmlns:a16="http://schemas.microsoft.com/office/drawing/2014/main" id="{CF28CDB4-96B3-4E74-AB7B-90D5D8224668}"/>
+                <a16:creationId xmlns:a16="http://schemas.microsoft.com/office/drawing/2014/main" id="{55BDB02A-F53A-4E8F-8752-46BFC8170379}"/>
               </a:ext>
             </a:extLst>
           </p:cNvPr>
@@ -43155,7 +43155,7 @@
           <p:cNvPr id="66" name="">
             <a:extLst xmlns:a="http://schemas.openxmlformats.org/drawingml/2006/main">
               <a:ext uri="{FF2B5EF4-FFF2-40B4-BE49-F238E27FC236}">
-                <a16:creationId xmlns:a16="http://schemas.microsoft.com/office/drawing/2014/main" id="{90205860-018E-4468-86E8-98E28755341A}"/>
+                <a16:creationId xmlns:a16="http://schemas.microsoft.com/office/drawing/2014/main" id="{005F57AB-6338-4CC8-9D63-D18946B4E4DE}"/>
               </a:ext>
             </a:extLst>
           </p:cNvPr>
@@ -43207,7 +43207,7 @@
           <p:cNvPr id="67" name="">
             <a:extLst xmlns:a="http://schemas.openxmlformats.org/drawingml/2006/main">
               <a:ext uri="{FF2B5EF4-FFF2-40B4-BE49-F238E27FC236}">
-                <a16:creationId xmlns:a16="http://schemas.microsoft.com/office/drawing/2014/main" id="{6294C650-9EEF-4CDB-A9C9-E1C317789EAB}"/>
+                <a16:creationId xmlns:a16="http://schemas.microsoft.com/office/drawing/2014/main" id="{7AD19719-C8B3-491F-A7F3-C10373F1BB81}"/>
               </a:ext>
             </a:extLst>
           </p:cNvPr>
@@ -43259,7 +43259,7 @@
           <p:cNvPr id="68" name="">
             <a:extLst xmlns:a="http://schemas.openxmlformats.org/drawingml/2006/main">
               <a:ext uri="{FF2B5EF4-FFF2-40B4-BE49-F238E27FC236}">
-                <a16:creationId xmlns:a16="http://schemas.microsoft.com/office/drawing/2014/main" id="{F626DC2E-C93A-44E1-8CF0-65F46FB906D1}"/>
+                <a16:creationId xmlns:a16="http://schemas.microsoft.com/office/drawing/2014/main" id="{45C68382-5525-430F-8454-E17537A8E9E8}"/>
               </a:ext>
             </a:extLst>
           </p:cNvPr>
@@ -43311,7 +43311,7 @@
           <p:cNvPr id="69" name="">
             <a:extLst xmlns:a="http://schemas.openxmlformats.org/drawingml/2006/main">
               <a:ext uri="{FF2B5EF4-FFF2-40B4-BE49-F238E27FC236}">
-                <a16:creationId xmlns:a16="http://schemas.microsoft.com/office/drawing/2014/main" id="{9AFB5EBC-689F-449F-8D70-E8F9C4B7A641}"/>
+                <a16:creationId xmlns:a16="http://schemas.microsoft.com/office/drawing/2014/main" id="{4B2D4952-13D6-4D0F-B170-D272BEE7CD3D}"/>
               </a:ext>
             </a:extLst>
           </p:cNvPr>
@@ -43363,7 +43363,7 @@
           <p:cNvPr id="70" name="">
             <a:extLst xmlns:a="http://schemas.openxmlformats.org/drawingml/2006/main">
               <a:ext uri="{FF2B5EF4-FFF2-40B4-BE49-F238E27FC236}">
-                <a16:creationId xmlns:a16="http://schemas.microsoft.com/office/drawing/2014/main" id="{C6AFAA53-AE07-4835-A295-E8ACF0A96B16}"/>
+                <a16:creationId xmlns:a16="http://schemas.microsoft.com/office/drawing/2014/main" id="{7BE9BB5C-F009-4D95-9C87-731104B5D57A}"/>
               </a:ext>
             </a:extLst>
           </p:cNvPr>
@@ -43394,7 +43394,7 @@
           <p:cNvPr id="71" name="">
             <a:extLst xmlns:a="http://schemas.openxmlformats.org/drawingml/2006/main">
               <a:ext uri="{FF2B5EF4-FFF2-40B4-BE49-F238E27FC236}">
-                <a16:creationId xmlns:a16="http://schemas.microsoft.com/office/drawing/2014/main" id="{F91C2C74-8BD7-4407-985C-36FFFC764FB3}"/>
+                <a16:creationId xmlns:a16="http://schemas.microsoft.com/office/drawing/2014/main" id="{7A2DED34-DFAB-4D3C-A935-355057AB8EAE}"/>
               </a:ext>
             </a:extLst>
           </p:cNvPr>
@@ -43446,7 +43446,7 @@
           <p:cNvPr id="72" name="">
             <a:extLst xmlns:a="http://schemas.openxmlformats.org/drawingml/2006/main">
               <a:ext uri="{FF2B5EF4-FFF2-40B4-BE49-F238E27FC236}">
-                <a16:creationId xmlns:a16="http://schemas.microsoft.com/office/drawing/2014/main" id="{AE9331B6-402E-46B9-AB6D-A51E3AC89501}"/>
+                <a16:creationId xmlns:a16="http://schemas.microsoft.com/office/drawing/2014/main" id="{4AE8DD5A-D86A-480F-A8DD-8D32CAC6F29D}"/>
               </a:ext>
             </a:extLst>
           </p:cNvPr>
@@ -43498,7 +43498,7 @@
           <p:cNvPr id="73" name="">
             <a:extLst xmlns:a="http://schemas.openxmlformats.org/drawingml/2006/main">
               <a:ext uri="{FF2B5EF4-FFF2-40B4-BE49-F238E27FC236}">
-                <a16:creationId xmlns:a16="http://schemas.microsoft.com/office/drawing/2014/main" id="{241C96C8-9AEF-4037-8213-F49F91FF3A76}"/>
+                <a16:creationId xmlns:a16="http://schemas.microsoft.com/office/drawing/2014/main" id="{930A36FE-708D-46A2-A717-CF6C670010B1}"/>
               </a:ext>
             </a:extLst>
           </p:cNvPr>
@@ -43550,7 +43550,7 @@
           <p:cNvPr id="74" name="">
             <a:extLst xmlns:a="http://schemas.openxmlformats.org/drawingml/2006/main">
               <a:ext uri="{FF2B5EF4-FFF2-40B4-BE49-F238E27FC236}">
-                <a16:creationId xmlns:a16="http://schemas.microsoft.com/office/drawing/2014/main" id="{9801339D-323D-4831-8F18-8629EBA92AE8}"/>
+                <a16:creationId xmlns:a16="http://schemas.microsoft.com/office/drawing/2014/main" id="{AD777702-1065-423F-A612-BCF3F8C26EDD}"/>
               </a:ext>
             </a:extLst>
           </p:cNvPr>
@@ -43602,7 +43602,7 @@
           <p:cNvPr id="75" name="">
             <a:extLst xmlns:a="http://schemas.openxmlformats.org/drawingml/2006/main">
               <a:ext uri="{FF2B5EF4-FFF2-40B4-BE49-F238E27FC236}">
-                <a16:creationId xmlns:a16="http://schemas.microsoft.com/office/drawing/2014/main" id="{E42DACC7-0A81-48D3-9E83-EC3BF3967B17}"/>
+                <a16:creationId xmlns:a16="http://schemas.microsoft.com/office/drawing/2014/main" id="{4D81AEAD-CD2A-4698-97FF-90F3EA2248D3}"/>
               </a:ext>
             </a:extLst>
           </p:cNvPr>
@@ -43654,7 +43654,7 @@
           <p:cNvPr id="76" name="">
             <a:extLst xmlns:a="http://schemas.openxmlformats.org/drawingml/2006/main">
               <a:ext uri="{FF2B5EF4-FFF2-40B4-BE49-F238E27FC236}">
-                <a16:creationId xmlns:a16="http://schemas.microsoft.com/office/drawing/2014/main" id="{6BD8C21B-F0CC-4596-8C96-2F4A5ED43F87}"/>
+                <a16:creationId xmlns:a16="http://schemas.microsoft.com/office/drawing/2014/main" id="{BCD432E3-7A84-40D1-B255-C26E8D2A524A}"/>
               </a:ext>
             </a:extLst>
           </p:cNvPr>
@@ -43685,7 +43685,7 @@
           <p:cNvPr id="77" name="">
             <a:extLst xmlns:a="http://schemas.openxmlformats.org/drawingml/2006/main">
               <a:ext uri="{FF2B5EF4-FFF2-40B4-BE49-F238E27FC236}">
-                <a16:creationId xmlns:a16="http://schemas.microsoft.com/office/drawing/2014/main" id="{BC93C816-C72E-4303-97D7-8C8BA14AC288}"/>
+                <a16:creationId xmlns:a16="http://schemas.microsoft.com/office/drawing/2014/main" id="{33001062-FDCE-4B17-9DC8-C66EEA6DF860}"/>
               </a:ext>
             </a:extLst>
           </p:cNvPr>
@@ -43716,7 +43716,7 @@
           <p:cNvPr id="78" name="">
             <a:extLst xmlns:a="http://schemas.openxmlformats.org/drawingml/2006/main">
               <a:ext uri="{FF2B5EF4-FFF2-40B4-BE49-F238E27FC236}">
-                <a16:creationId xmlns:a16="http://schemas.microsoft.com/office/drawing/2014/main" id="{FCF25224-849F-41D1-A280-8C05014167F4}"/>
+                <a16:creationId xmlns:a16="http://schemas.microsoft.com/office/drawing/2014/main" id="{122728DE-AAA2-4DE1-B131-4BBA66B005D0}"/>
               </a:ext>
             </a:extLst>
           </p:cNvPr>
@@ -43768,7 +43768,7 @@
           <p:cNvPr id="79" name="">
             <a:extLst xmlns:a="http://schemas.openxmlformats.org/drawingml/2006/main">
               <a:ext uri="{FF2B5EF4-FFF2-40B4-BE49-F238E27FC236}">
-                <a16:creationId xmlns:a16="http://schemas.microsoft.com/office/drawing/2014/main" id="{54A4F995-59DD-457C-A3B0-0AEEFB256B4A}"/>
+                <a16:creationId xmlns:a16="http://schemas.microsoft.com/office/drawing/2014/main" id="{2A10EBCF-0792-4492-8766-5FC825C920F1}"/>
               </a:ext>
             </a:extLst>
           </p:cNvPr>
@@ -43820,7 +43820,7 @@
           <p:cNvPr id="80" name="">
             <a:extLst xmlns:a="http://schemas.openxmlformats.org/drawingml/2006/main">
               <a:ext uri="{FF2B5EF4-FFF2-40B4-BE49-F238E27FC236}">
-                <a16:creationId xmlns:a16="http://schemas.microsoft.com/office/drawing/2014/main" id="{14655F80-FA17-4DB4-A2DA-E6549AB08ECD}"/>
+                <a16:creationId xmlns:a16="http://schemas.microsoft.com/office/drawing/2014/main" id="{C473AB31-5F63-4532-A70D-831F5A1CA59C}"/>
               </a:ext>
             </a:extLst>
           </p:cNvPr>
@@ -43872,7 +43872,7 @@
           <p:cNvPr id="81" name="">
             <a:extLst xmlns:a="http://schemas.openxmlformats.org/drawingml/2006/main">
               <a:ext uri="{FF2B5EF4-FFF2-40B4-BE49-F238E27FC236}">
-                <a16:creationId xmlns:a16="http://schemas.microsoft.com/office/drawing/2014/main" id="{EECA625E-F862-4E27-83DD-91A108A1F970}"/>
+                <a16:creationId xmlns:a16="http://schemas.microsoft.com/office/drawing/2014/main" id="{9CC1928B-04BB-4E9F-B0C2-21D0CF6F001A}"/>
               </a:ext>
             </a:extLst>
           </p:cNvPr>
@@ -43924,7 +43924,7 @@
           <p:cNvPr id="82" name="">
             <a:extLst xmlns:a="http://schemas.openxmlformats.org/drawingml/2006/main">
               <a:ext uri="{FF2B5EF4-FFF2-40B4-BE49-F238E27FC236}">
-                <a16:creationId xmlns:a16="http://schemas.microsoft.com/office/drawing/2014/main" id="{FD4CD822-B297-4E5D-99AE-E496314A29D8}"/>
+                <a16:creationId xmlns:a16="http://schemas.microsoft.com/office/drawing/2014/main" id="{BA17DC58-D742-4B05-9ED4-DAB761545E9E}"/>
               </a:ext>
             </a:extLst>
           </p:cNvPr>
@@ -43976,7 +43976,7 @@
           <p:cNvPr id="83" name="">
             <a:extLst xmlns:a="http://schemas.openxmlformats.org/drawingml/2006/main">
               <a:ext uri="{FF2B5EF4-FFF2-40B4-BE49-F238E27FC236}">
-                <a16:creationId xmlns:a16="http://schemas.microsoft.com/office/drawing/2014/main" id="{BC3A0C83-16AF-4976-BD09-6EAF09E54F28}"/>
+                <a16:creationId xmlns:a16="http://schemas.microsoft.com/office/drawing/2014/main" id="{BBD875D9-EF3D-4AE0-92E9-C9DDECB4962A}"/>
               </a:ext>
             </a:extLst>
           </p:cNvPr>
@@ -44007,7 +44007,7 @@
           <p:cNvPr id="84" name="">
             <a:extLst xmlns:a="http://schemas.openxmlformats.org/drawingml/2006/main">
               <a:ext uri="{FF2B5EF4-FFF2-40B4-BE49-F238E27FC236}">
-                <a16:creationId xmlns:a16="http://schemas.microsoft.com/office/drawing/2014/main" id="{8EE4E43A-84AF-4C5A-B437-719CB5869F9B}"/>
+                <a16:creationId xmlns:a16="http://schemas.microsoft.com/office/drawing/2014/main" id="{1E0A2518-9898-48E4-97EA-5E6A151CD36A}"/>
               </a:ext>
             </a:extLst>
           </p:cNvPr>
@@ -44059,7 +44059,7 @@
           <p:cNvPr id="85" name="">
             <a:extLst xmlns:a="http://schemas.openxmlformats.org/drawingml/2006/main">
               <a:ext uri="{FF2B5EF4-FFF2-40B4-BE49-F238E27FC236}">
-                <a16:creationId xmlns:a16="http://schemas.microsoft.com/office/drawing/2014/main" id="{28BA85F5-F67F-413B-A149-8F93FB57C789}"/>
+                <a16:creationId xmlns:a16="http://schemas.microsoft.com/office/drawing/2014/main" id="{1AB91DE6-E7B8-4401-BFB3-5F66475EF7DA}"/>
               </a:ext>
             </a:extLst>
           </p:cNvPr>
@@ -44111,7 +44111,7 @@
           <p:cNvPr id="86" name="">
             <a:extLst xmlns:a="http://schemas.openxmlformats.org/drawingml/2006/main">
               <a:ext uri="{FF2B5EF4-FFF2-40B4-BE49-F238E27FC236}">
-                <a16:creationId xmlns:a16="http://schemas.microsoft.com/office/drawing/2014/main" id="{1F0212E2-53E8-4EF1-AE09-419D65C512D1}"/>
+                <a16:creationId xmlns:a16="http://schemas.microsoft.com/office/drawing/2014/main" id="{9B95CCAB-C8FE-4493-BA98-977BC9C48D83}"/>
               </a:ext>
             </a:extLst>
           </p:cNvPr>
@@ -44163,7 +44163,7 @@
           <p:cNvPr id="87" name="">
             <a:extLst xmlns:a="http://schemas.openxmlformats.org/drawingml/2006/main">
               <a:ext uri="{FF2B5EF4-FFF2-40B4-BE49-F238E27FC236}">
-                <a16:creationId xmlns:a16="http://schemas.microsoft.com/office/drawing/2014/main" id="{01816850-89D0-4DDE-AAD2-A9EB75154195}"/>
+                <a16:creationId xmlns:a16="http://schemas.microsoft.com/office/drawing/2014/main" id="{0B85B27D-D2CD-4EAA-AD22-C87663536A5D}"/>
               </a:ext>
             </a:extLst>
           </p:cNvPr>
@@ -44215,7 +44215,7 @@
           <p:cNvPr id="88" name="">
             <a:extLst xmlns:a="http://schemas.openxmlformats.org/drawingml/2006/main">
               <a:ext uri="{FF2B5EF4-FFF2-40B4-BE49-F238E27FC236}">
-                <a16:creationId xmlns:a16="http://schemas.microsoft.com/office/drawing/2014/main" id="{3D3AC99A-593C-471A-AB0E-4A1AE16A0703}"/>
+                <a16:creationId xmlns:a16="http://schemas.microsoft.com/office/drawing/2014/main" id="{6B372CA9-2350-4C25-938C-765A6301F832}"/>
               </a:ext>
             </a:extLst>
           </p:cNvPr>
@@ -44267,7 +44267,7 @@
           <p:cNvPr id="89" name="">
             <a:extLst xmlns:a="http://schemas.openxmlformats.org/drawingml/2006/main">
               <a:ext uri="{FF2B5EF4-FFF2-40B4-BE49-F238E27FC236}">
-                <a16:creationId xmlns:a16="http://schemas.microsoft.com/office/drawing/2014/main" id="{3296C872-B7B8-4964-8649-924022CCCB40}"/>
+                <a16:creationId xmlns:a16="http://schemas.microsoft.com/office/drawing/2014/main" id="{6C60DE6F-DED4-4213-B3CD-7748DBCEF6BC}"/>
               </a:ext>
             </a:extLst>
           </p:cNvPr>
@@ -44298,7 +44298,7 @@
           <p:cNvPr id="90" name="">
             <a:extLst xmlns:a="http://schemas.openxmlformats.org/drawingml/2006/main">
               <a:ext uri="{FF2B5EF4-FFF2-40B4-BE49-F238E27FC236}">
-                <a16:creationId xmlns:a16="http://schemas.microsoft.com/office/drawing/2014/main" id="{3ADDE125-70A8-43DE-B602-5150FE9CFAAD}"/>
+                <a16:creationId xmlns:a16="http://schemas.microsoft.com/office/drawing/2014/main" id="{09763C30-40B6-47E4-8DEB-C66197829033}"/>
               </a:ext>
             </a:extLst>
           </p:cNvPr>
@@ -44329,7 +44329,7 @@
           <p:cNvPr id="91" name="">
             <a:extLst xmlns:a="http://schemas.openxmlformats.org/drawingml/2006/main">
               <a:ext uri="{FF2B5EF4-FFF2-40B4-BE49-F238E27FC236}">
-                <a16:creationId xmlns:a16="http://schemas.microsoft.com/office/drawing/2014/main" id="{5C95DBAB-5004-4B06-A985-6105A4C25172}"/>
+                <a16:creationId xmlns:a16="http://schemas.microsoft.com/office/drawing/2014/main" id="{8350FB3D-3D7E-496C-B359-A3F31CD1878F}"/>
               </a:ext>
             </a:extLst>
           </p:cNvPr>
@@ -44381,7 +44381,7 @@
           <p:cNvPr id="92" name="">
             <a:extLst xmlns:a="http://schemas.openxmlformats.org/drawingml/2006/main">
               <a:ext uri="{FF2B5EF4-FFF2-40B4-BE49-F238E27FC236}">
-                <a16:creationId xmlns:a16="http://schemas.microsoft.com/office/drawing/2014/main" id="{804DC7A0-D8A7-4578-A1A2-3617E2C6A5F4}"/>
+                <a16:creationId xmlns:a16="http://schemas.microsoft.com/office/drawing/2014/main" id="{4AE49077-DE7F-45A5-A748-8806268207AD}"/>
               </a:ext>
             </a:extLst>
           </p:cNvPr>
@@ -44433,7 +44433,7 @@
           <p:cNvPr id="93" name="">
             <a:extLst xmlns:a="http://schemas.openxmlformats.org/drawingml/2006/main">
               <a:ext uri="{FF2B5EF4-FFF2-40B4-BE49-F238E27FC236}">
-                <a16:creationId xmlns:a16="http://schemas.microsoft.com/office/drawing/2014/main" id="{ED3C5851-EFC7-4979-8CD2-6BAD04CE83DB}"/>
+                <a16:creationId xmlns:a16="http://schemas.microsoft.com/office/drawing/2014/main" id="{F552189C-3793-4B93-876D-DF7A86D68F17}"/>
               </a:ext>
             </a:extLst>
           </p:cNvPr>
@@ -44485,7 +44485,7 @@
           <p:cNvPr id="94" name="">
             <a:extLst xmlns:a="http://schemas.openxmlformats.org/drawingml/2006/main">
               <a:ext uri="{FF2B5EF4-FFF2-40B4-BE49-F238E27FC236}">
-                <a16:creationId xmlns:a16="http://schemas.microsoft.com/office/drawing/2014/main" id="{7A2070DF-E492-4C8B-BEBD-3FF7BDE34E24}"/>
+                <a16:creationId xmlns:a16="http://schemas.microsoft.com/office/drawing/2014/main" id="{707E33A3-5A04-4DBD-9BB8-A1A9527F2A6D}"/>
               </a:ext>
             </a:extLst>
           </p:cNvPr>
@@ -44537,7 +44537,7 @@
           <p:cNvPr id="95" name="">
             <a:extLst xmlns:a="http://schemas.openxmlformats.org/drawingml/2006/main">
               <a:ext uri="{FF2B5EF4-FFF2-40B4-BE49-F238E27FC236}">
-                <a16:creationId xmlns:a16="http://schemas.microsoft.com/office/drawing/2014/main" id="{77C0E2F5-29E1-4C57-B975-36CA10026D2E}"/>
+                <a16:creationId xmlns:a16="http://schemas.microsoft.com/office/drawing/2014/main" id="{268463B8-AAE3-4A83-8E24-373698400814}"/>
               </a:ext>
             </a:extLst>
           </p:cNvPr>
@@ -44589,7 +44589,7 @@
           <p:cNvPr id="96" name="">
             <a:extLst xmlns:a="http://schemas.openxmlformats.org/drawingml/2006/main">
               <a:ext uri="{FF2B5EF4-FFF2-40B4-BE49-F238E27FC236}">
-                <a16:creationId xmlns:a16="http://schemas.microsoft.com/office/drawing/2014/main" id="{DA4044A7-7812-4199-AB75-4D0A490C608E}"/>
+                <a16:creationId xmlns:a16="http://schemas.microsoft.com/office/drawing/2014/main" id="{1839BE41-DB30-4911-BC9D-FCF9F73B42AB}"/>
               </a:ext>
             </a:extLst>
           </p:cNvPr>
@@ -44620,7 +44620,7 @@
           <p:cNvPr id="97" name="">
             <a:extLst xmlns:a="http://schemas.openxmlformats.org/drawingml/2006/main">
               <a:ext uri="{FF2B5EF4-FFF2-40B4-BE49-F238E27FC236}">
-                <a16:creationId xmlns:a16="http://schemas.microsoft.com/office/drawing/2014/main" id="{B4C23092-924A-4DC9-94B8-D500383F4565}"/>
+                <a16:creationId xmlns:a16="http://schemas.microsoft.com/office/drawing/2014/main" id="{F177507F-944D-4A2F-812B-758AEEDA51D2}"/>
               </a:ext>
             </a:extLst>
           </p:cNvPr>
@@ -44672,7 +44672,7 @@
           <p:cNvPr id="98" name="">
             <a:extLst xmlns:a="http://schemas.openxmlformats.org/drawingml/2006/main">
               <a:ext uri="{FF2B5EF4-FFF2-40B4-BE49-F238E27FC236}">
-                <a16:creationId xmlns:a16="http://schemas.microsoft.com/office/drawing/2014/main" id="{BD6C5EFD-D6F8-4F50-B7CA-DE1908B8713F}"/>
+                <a16:creationId xmlns:a16="http://schemas.microsoft.com/office/drawing/2014/main" id="{CF6818DE-44B2-46FE-B54D-F9ADA21D41AA}"/>
               </a:ext>
             </a:extLst>
           </p:cNvPr>
@@ -44724,7 +44724,7 @@
           <p:cNvPr id="99" name="">
             <a:extLst xmlns:a="http://schemas.openxmlformats.org/drawingml/2006/main">
               <a:ext uri="{FF2B5EF4-FFF2-40B4-BE49-F238E27FC236}">
-                <a16:creationId xmlns:a16="http://schemas.microsoft.com/office/drawing/2014/main" id="{1C2F7513-D670-4AAD-8B7B-45F48806AF32}"/>
+                <a16:creationId xmlns:a16="http://schemas.microsoft.com/office/drawing/2014/main" id="{34E357AD-04FC-401A-947E-F8B5618AF085}"/>
               </a:ext>
             </a:extLst>
           </p:cNvPr>
@@ -44776,7 +44776,7 @@
           <p:cNvPr id="100" name="">
             <a:extLst xmlns:a="http://schemas.openxmlformats.org/drawingml/2006/main">
               <a:ext uri="{FF2B5EF4-FFF2-40B4-BE49-F238E27FC236}">
-                <a16:creationId xmlns:a16="http://schemas.microsoft.com/office/drawing/2014/main" id="{DB15039A-8B27-4436-95F1-0AEFC37A318F}"/>
+                <a16:creationId xmlns:a16="http://schemas.microsoft.com/office/drawing/2014/main" id="{01A56418-7230-418E-B47B-E5E57E0AF368}"/>
               </a:ext>
             </a:extLst>
           </p:cNvPr>
@@ -44828,7 +44828,7 @@
           <p:cNvPr id="101" name="">
             <a:extLst xmlns:a="http://schemas.openxmlformats.org/drawingml/2006/main">
               <a:ext uri="{FF2B5EF4-FFF2-40B4-BE49-F238E27FC236}">
-                <a16:creationId xmlns:a16="http://schemas.microsoft.com/office/drawing/2014/main" id="{D9C28D43-674C-48A1-A6E8-E096F222FD6F}"/>
+                <a16:creationId xmlns:a16="http://schemas.microsoft.com/office/drawing/2014/main" id="{63486D51-3414-42C2-A074-9707D0D79EAC}"/>
               </a:ext>
             </a:extLst>
           </p:cNvPr>
@@ -44878,7 +44878,7 @@
     </p:spTree>
     <p:extLst>
       <p:ext uri="{BB962C8B-B14F-4D97-AF65-F5344CB8AC3E}">
-        <p14:creationId xmlns:p14="http://schemas.microsoft.com/office/powerpoint/2010/main" val="2072004671"/>
+        <p14:creationId xmlns:p14="http://schemas.microsoft.com/office/powerpoint/2010/main" val="2062644726"/>
       </p:ext>
     </p:extLst>
   </p:cSld>

--- a/.preview/pptx/deck.pptx
+++ b/.preview/pptx/deck.pptx
@@ -2,27 +2,27 @@
 <file path=ppt/presentation.xml><?xml version="1.0" encoding="utf-8"?>
 <p:presentation xmlns:p="http://schemas.openxmlformats.org/presentationml/2006/main">
   <p:sldMasterIdLst>
-    <p:sldMasterId xmlns:r="http://schemas.openxmlformats.org/officeDocument/2006/relationships" id="2147483648" r:id="R305cd68df293421d"/>
+    <p:sldMasterId xmlns:r="http://schemas.openxmlformats.org/officeDocument/2006/relationships" id="2147483648" r:id="R219eab9ace60405b"/>
   </p:sldMasterIdLst>
   <p:notesMasterIdLst>
-    <p:notesMasterId xmlns:r="http://schemas.openxmlformats.org/officeDocument/2006/relationships" r:id="Rfe5760f56d7a495c"/>
+    <p:notesMasterId xmlns:r="http://schemas.openxmlformats.org/officeDocument/2006/relationships" r:id="R7fc6dd838efe46b9"/>
   </p:notesMasterIdLst>
   <p:sldIdLst>
-    <p:sldId xmlns:r="http://schemas.openxmlformats.org/officeDocument/2006/relationships" id="256" r:id="R46738a3764c64efd"/>
-    <p:sldId xmlns:r="http://schemas.openxmlformats.org/officeDocument/2006/relationships" id="257" r:id="R41654e1e104f4c94"/>
-    <p:sldId xmlns:r="http://schemas.openxmlformats.org/officeDocument/2006/relationships" id="258" r:id="R4b21d9d7c3174ea0"/>
-    <p:sldId xmlns:r="http://schemas.openxmlformats.org/officeDocument/2006/relationships" id="259" r:id="R7c12fb4d669346c2"/>
-    <p:sldId xmlns:r="http://schemas.openxmlformats.org/officeDocument/2006/relationships" id="260" r:id="Raa8f793c71474911"/>
-    <p:sldId xmlns:r="http://schemas.openxmlformats.org/officeDocument/2006/relationships" id="261" r:id="R8a2f6db40f24494e"/>
-    <p:sldId xmlns:r="http://schemas.openxmlformats.org/officeDocument/2006/relationships" id="262" r:id="R6830815a456d4dda"/>
-    <p:sldId xmlns:r="http://schemas.openxmlformats.org/officeDocument/2006/relationships" id="263" r:id="Ra61aa8c813d241b6"/>
-    <p:sldId xmlns:r="http://schemas.openxmlformats.org/officeDocument/2006/relationships" id="264" r:id="R42960316e6a14569"/>
-    <p:sldId xmlns:r="http://schemas.openxmlformats.org/officeDocument/2006/relationships" id="265" r:id="R4149b415ec524922"/>
-    <p:sldId xmlns:r="http://schemas.openxmlformats.org/officeDocument/2006/relationships" id="266" r:id="R22e38db36d094bd8"/>
-    <p:sldId xmlns:r="http://schemas.openxmlformats.org/officeDocument/2006/relationships" id="267" r:id="Rd424e9156b584a43"/>
-    <p:sldId xmlns:r="http://schemas.openxmlformats.org/officeDocument/2006/relationships" id="268" r:id="R52764634065846ed"/>
-    <p:sldId xmlns:r="http://schemas.openxmlformats.org/officeDocument/2006/relationships" id="269" r:id="Race3dd0844ea4fa3"/>
-    <p:sldId xmlns:r="http://schemas.openxmlformats.org/officeDocument/2006/relationships" id="270" r:id="R2748034507fc4c97"/>
+    <p:sldId xmlns:r="http://schemas.openxmlformats.org/officeDocument/2006/relationships" id="256" r:id="Ref0b069ab93c4aaa"/>
+    <p:sldId xmlns:r="http://schemas.openxmlformats.org/officeDocument/2006/relationships" id="257" r:id="R27bd233398df4433"/>
+    <p:sldId xmlns:r="http://schemas.openxmlformats.org/officeDocument/2006/relationships" id="258" r:id="Rb280458754d84f00"/>
+    <p:sldId xmlns:r="http://schemas.openxmlformats.org/officeDocument/2006/relationships" id="259" r:id="R9e4ee9174b4946ed"/>
+    <p:sldId xmlns:r="http://schemas.openxmlformats.org/officeDocument/2006/relationships" id="260" r:id="R8eb1a8a392044db0"/>
+    <p:sldId xmlns:r="http://schemas.openxmlformats.org/officeDocument/2006/relationships" id="261" r:id="R347a9f44ec6d475e"/>
+    <p:sldId xmlns:r="http://schemas.openxmlformats.org/officeDocument/2006/relationships" id="262" r:id="R9c1b7bcaebb340cf"/>
+    <p:sldId xmlns:r="http://schemas.openxmlformats.org/officeDocument/2006/relationships" id="263" r:id="R66b221a87daa4ba2"/>
+    <p:sldId xmlns:r="http://schemas.openxmlformats.org/officeDocument/2006/relationships" id="264" r:id="R3a417572686a4b34"/>
+    <p:sldId xmlns:r="http://schemas.openxmlformats.org/officeDocument/2006/relationships" id="265" r:id="R21bf7dd6395e4ca0"/>
+    <p:sldId xmlns:r="http://schemas.openxmlformats.org/officeDocument/2006/relationships" id="266" r:id="Rdf8bccdd91604ba4"/>
+    <p:sldId xmlns:r="http://schemas.openxmlformats.org/officeDocument/2006/relationships" id="267" r:id="Rba4dae5c65c64c31"/>
+    <p:sldId xmlns:r="http://schemas.openxmlformats.org/officeDocument/2006/relationships" id="268" r:id="R4f825fb6f27c41d0"/>
+    <p:sldId xmlns:r="http://schemas.openxmlformats.org/officeDocument/2006/relationships" id="269" r:id="R80a7ec1e4b8240f6"/>
+    <p:sldId xmlns:r="http://schemas.openxmlformats.org/officeDocument/2006/relationships" id="270" r:id="R819498bac1624166"/>
   </p:sldIdLst>
   <p:sldSz cx="12192000" cy="6858000"/>
   <p:notesSz cx="6858000" cy="9144000"/>
@@ -1879,7 +1879,7 @@
   </p:cSld>
   <p:clrMap bg1="lt1" tx1="dk1" bg2="lt2" tx2="dk2" accent1="accent1" accent2="accent2" accent3="accent3" accent4="accent4" accent5="accent5" accent6="accent6" hlink="hlink" folHlink="folHlink"/>
   <p:sldLayoutIdLst>
-    <p:sldLayoutId xmlns:r="http://schemas.openxmlformats.org/officeDocument/2006/relationships" id="2147483649" r:id="R12b2a7900d2d4460"/>
+    <p:sldLayoutId xmlns:r="http://schemas.openxmlformats.org/officeDocument/2006/relationships" id="2147483649" r:id="Rd545e07768704ce4"/>
   </p:sldLayoutIdLst>
   <p:txStyles>
     <p:titleStyle>
@@ -2430,7 +2430,7 @@
           <p:cNvPr id="17" name="">
             <a:extLst xmlns:a="http://schemas.openxmlformats.org/drawingml/2006/main">
               <a:ext uri="{FF2B5EF4-FFF2-40B4-BE49-F238E27FC236}">
-                <a16:creationId xmlns:a16="http://schemas.microsoft.com/office/drawing/2014/main" id="{4E8D7064-0028-4A68-8151-D9024548B8C7}"/>
+                <a16:creationId xmlns:a16="http://schemas.microsoft.com/office/drawing/2014/main" id="{6ABA6E0C-BAAF-4EFA-9335-45E8F5CCCA5B}"/>
               </a:ext>
             </a:extLst>
           </p:cNvPr>
@@ -2463,7 +2463,7 @@
           <p:cNvPr id="2" name="">
             <a:extLst xmlns:a="http://schemas.openxmlformats.org/drawingml/2006/main">
               <a:ext uri="{FF2B5EF4-FFF2-40B4-BE49-F238E27FC236}">
-                <a16:creationId xmlns:a16="http://schemas.microsoft.com/office/drawing/2014/main" id="{2B6EA26B-A982-4C79-A078-B3CE2A54818E}"/>
+                <a16:creationId xmlns:a16="http://schemas.microsoft.com/office/drawing/2014/main" id="{3FBB1189-EB48-4A95-8A02-2192BFA81E66}"/>
               </a:ext>
             </a:extLst>
           </p:cNvPr>
@@ -2494,7 +2494,7 @@
           <p:cNvPr id="3" name="">
             <a:extLst xmlns:a="http://schemas.openxmlformats.org/drawingml/2006/main">
               <a:ext uri="{FF2B5EF4-FFF2-40B4-BE49-F238E27FC236}">
-                <a16:creationId xmlns:a16="http://schemas.microsoft.com/office/drawing/2014/main" id="{3D346D1B-DF64-44DD-A4A8-49CBC4013A0B}"/>
+                <a16:creationId xmlns:a16="http://schemas.microsoft.com/office/drawing/2014/main" id="{6ABBCD70-7244-4F80-8D01-2F02CEEEDCB0}"/>
               </a:ext>
             </a:extLst>
           </p:cNvPr>
@@ -2529,7 +2529,7 @@
           <p:nvPr/>
         </p:nvPicPr>
         <p:blipFill>
-          <a:blip xmlns:r="http://schemas.openxmlformats.org/officeDocument/2006/relationships" xmlns:a="http://schemas.openxmlformats.org/drawingml/2006/main" r:embed="R33b8aa2e330e4c91"/>
+          <a:blip xmlns:r="http://schemas.openxmlformats.org/officeDocument/2006/relationships" xmlns:a="http://schemas.openxmlformats.org/drawingml/2006/main" r:embed="R0af38819fc3c4fa6"/>
           <a:stretch xmlns:a="http://schemas.openxmlformats.org/drawingml/2006/main"/>
         </p:blipFill>
         <p:spPr>
@@ -2547,7 +2547,7 @@
           <p:cNvPr id="5" name="">
             <a:extLst xmlns:a="http://schemas.openxmlformats.org/drawingml/2006/main">
               <a:ext uri="{FF2B5EF4-FFF2-40B4-BE49-F238E27FC236}">
-                <a16:creationId xmlns:a16="http://schemas.microsoft.com/office/drawing/2014/main" id="{6929E6C1-A779-4641-98C2-1597B3857F79}"/>
+                <a16:creationId xmlns:a16="http://schemas.microsoft.com/office/drawing/2014/main" id="{43EC56DC-73FB-4AAA-ABF6-5712CC347988}"/>
               </a:ext>
             </a:extLst>
           </p:cNvPr>
@@ -2599,7 +2599,7 @@
           <p:cNvPr id="6" name="">
             <a:extLst xmlns:a="http://schemas.openxmlformats.org/drawingml/2006/main">
               <a:ext uri="{FF2B5EF4-FFF2-40B4-BE49-F238E27FC236}">
-                <a16:creationId xmlns:a16="http://schemas.microsoft.com/office/drawing/2014/main" id="{2601CC57-2676-4F6F-BACF-CAC60A9D2B13}"/>
+                <a16:creationId xmlns:a16="http://schemas.microsoft.com/office/drawing/2014/main" id="{1C465EDB-B82D-4FFF-A2FD-8EFD30188141}"/>
               </a:ext>
             </a:extLst>
           </p:cNvPr>
@@ -2655,7 +2655,7 @@
           <p:nvPr/>
         </p:nvPicPr>
         <p:blipFill>
-          <a:blip xmlns:r="http://schemas.openxmlformats.org/officeDocument/2006/relationships" xmlns:a="http://schemas.openxmlformats.org/drawingml/2006/main" r:embed="Rca062b482a3f4ab0"/>
+          <a:blip xmlns:r="http://schemas.openxmlformats.org/officeDocument/2006/relationships" xmlns:a="http://schemas.openxmlformats.org/drawingml/2006/main" r:embed="R6c1c65a69ae4470a"/>
           <a:stretch xmlns:a="http://schemas.openxmlformats.org/drawingml/2006/main"/>
         </p:blipFill>
         <p:spPr>
@@ -2673,7 +2673,7 @@
           <p:cNvPr id="8" name="">
             <a:extLst xmlns:a="http://schemas.openxmlformats.org/drawingml/2006/main">
               <a:ext uri="{FF2B5EF4-FFF2-40B4-BE49-F238E27FC236}">
-                <a16:creationId xmlns:a16="http://schemas.microsoft.com/office/drawing/2014/main" id="{064D1C7C-F5A4-4B97-9FA1-FD983985BAC8}"/>
+                <a16:creationId xmlns:a16="http://schemas.microsoft.com/office/drawing/2014/main" id="{ED7A3A53-3C7F-453E-8D0B-7EE891F3AD51}"/>
               </a:ext>
             </a:extLst>
           </p:cNvPr>
@@ -2706,7 +2706,7 @@
           <p:cNvPr id="9" name="">
             <a:extLst xmlns:a="http://schemas.openxmlformats.org/drawingml/2006/main">
               <a:ext uri="{FF2B5EF4-FFF2-40B4-BE49-F238E27FC236}">
-                <a16:creationId xmlns:a16="http://schemas.microsoft.com/office/drawing/2014/main" id="{029CABE0-151F-4591-911B-FD237E8C7F48}"/>
+                <a16:creationId xmlns:a16="http://schemas.microsoft.com/office/drawing/2014/main" id="{1C5FBC99-E01E-48C0-808F-E28656220D68}"/>
               </a:ext>
             </a:extLst>
           </p:cNvPr>
@@ -2758,7 +2758,7 @@
           <p:cNvPr id="10" name="">
             <a:extLst xmlns:a="http://schemas.openxmlformats.org/drawingml/2006/main">
               <a:ext uri="{FF2B5EF4-FFF2-40B4-BE49-F238E27FC236}">
-                <a16:creationId xmlns:a16="http://schemas.microsoft.com/office/drawing/2014/main" id="{D8150463-409E-4EB5-84B6-BF38C21780AE}"/>
+                <a16:creationId xmlns:a16="http://schemas.microsoft.com/office/drawing/2014/main" id="{7BB91B22-5E1F-417B-987C-DB8A983A7870}"/>
               </a:ext>
             </a:extLst>
           </p:cNvPr>
@@ -2810,7 +2810,7 @@
           <p:cNvPr id="11" name="">
             <a:extLst xmlns:a="http://schemas.openxmlformats.org/drawingml/2006/main">
               <a:ext uri="{FF2B5EF4-FFF2-40B4-BE49-F238E27FC236}">
-                <a16:creationId xmlns:a16="http://schemas.microsoft.com/office/drawing/2014/main" id="{C5A70FDC-1324-445D-A634-E09DE4557D69}"/>
+                <a16:creationId xmlns:a16="http://schemas.microsoft.com/office/drawing/2014/main" id="{04A10609-BA38-499B-A9ED-3E35D9DC14AA}"/>
               </a:ext>
             </a:extLst>
           </p:cNvPr>
@@ -2862,7 +2862,7 @@
           <p:cNvPr id="12" name="">
             <a:extLst xmlns:a="http://schemas.openxmlformats.org/drawingml/2006/main">
               <a:ext uri="{FF2B5EF4-FFF2-40B4-BE49-F238E27FC236}">
-                <a16:creationId xmlns:a16="http://schemas.microsoft.com/office/drawing/2014/main" id="{BD0946DD-F7B9-4B68-B3BC-39B679AD131C}"/>
+                <a16:creationId xmlns:a16="http://schemas.microsoft.com/office/drawing/2014/main" id="{2993EC0E-6ED6-44D7-86CA-E12C5162FF01}"/>
               </a:ext>
             </a:extLst>
           </p:cNvPr>
@@ -2914,7 +2914,7 @@
           <p:cNvPr id="13" name="">
             <a:extLst xmlns:a="http://schemas.openxmlformats.org/drawingml/2006/main">
               <a:ext uri="{FF2B5EF4-FFF2-40B4-BE49-F238E27FC236}">
-                <a16:creationId xmlns:a16="http://schemas.microsoft.com/office/drawing/2014/main" id="{8418F73C-DB45-4252-9640-2719116EDA60}"/>
+                <a16:creationId xmlns:a16="http://schemas.microsoft.com/office/drawing/2014/main" id="{FC4A1559-4267-4061-BC81-6010C0156590}"/>
               </a:ext>
             </a:extLst>
           </p:cNvPr>
@@ -2966,7 +2966,7 @@
           <p:cNvPr id="14" name="">
             <a:extLst xmlns:a="http://schemas.openxmlformats.org/drawingml/2006/main">
               <a:ext uri="{FF2B5EF4-FFF2-40B4-BE49-F238E27FC236}">
-                <a16:creationId xmlns:a16="http://schemas.microsoft.com/office/drawing/2014/main" id="{E9F95A73-6279-4488-8F4A-687B1AE247F9}"/>
+                <a16:creationId xmlns:a16="http://schemas.microsoft.com/office/drawing/2014/main" id="{A82233C6-3278-40AB-A2A4-BFC65828635E}"/>
               </a:ext>
             </a:extLst>
           </p:cNvPr>
@@ -3018,7 +3018,7 @@
           <p:cNvPr id="15" name="">
             <a:extLst xmlns:a="http://schemas.openxmlformats.org/drawingml/2006/main">
               <a:ext uri="{FF2B5EF4-FFF2-40B4-BE49-F238E27FC236}">
-                <a16:creationId xmlns:a16="http://schemas.microsoft.com/office/drawing/2014/main" id="{70211395-81EF-49A0-AA0C-89F4E2F15025}"/>
+                <a16:creationId xmlns:a16="http://schemas.microsoft.com/office/drawing/2014/main" id="{42B5A7A5-DA3B-4A2B-B1CE-79B6DD95C133}"/>
               </a:ext>
             </a:extLst>
           </p:cNvPr>
@@ -3070,7 +3070,7 @@
           <p:cNvPr id="16" name="">
             <a:extLst xmlns:a="http://schemas.openxmlformats.org/drawingml/2006/main">
               <a:ext uri="{FF2B5EF4-FFF2-40B4-BE49-F238E27FC236}">
-                <a16:creationId xmlns:a16="http://schemas.microsoft.com/office/drawing/2014/main" id="{AD7B9B32-8811-4DD3-97E0-4A27169A453D}"/>
+                <a16:creationId xmlns:a16="http://schemas.microsoft.com/office/drawing/2014/main" id="{BFBB76EA-657B-4C0D-A6FA-576C818EB405}"/>
               </a:ext>
             </a:extLst>
           </p:cNvPr>
@@ -3120,7 +3120,7 @@
     </p:spTree>
     <p:extLst>
       <p:ext uri="{BB962C8B-B14F-4D97-AF65-F5344CB8AC3E}">
-        <p14:creationId xmlns:p14="http://schemas.microsoft.com/office/powerpoint/2010/main" val="259442689"/>
+        <p14:creationId xmlns:p14="http://schemas.microsoft.com/office/powerpoint/2010/main" val="628056934"/>
       </p:ext>
     </p:extLst>
   </p:cSld>
@@ -3151,7 +3151,7 @@
           <p:cNvPr id="103" name="">
             <a:extLst xmlns:a="http://schemas.openxmlformats.org/drawingml/2006/main">
               <a:ext uri="{FF2B5EF4-FFF2-40B4-BE49-F238E27FC236}">
-                <a16:creationId xmlns:a16="http://schemas.microsoft.com/office/drawing/2014/main" id="{EFF449DC-756E-4768-815A-4FD5DC8EB8ED}"/>
+                <a16:creationId xmlns:a16="http://schemas.microsoft.com/office/drawing/2014/main" id="{B7C16D8B-A652-4208-9DFD-26898D5E0551}"/>
               </a:ext>
             </a:extLst>
           </p:cNvPr>
@@ -3184,7 +3184,7 @@
           <p:cNvPr id="2" name="">
             <a:extLst xmlns:a="http://schemas.openxmlformats.org/drawingml/2006/main">
               <a:ext uri="{FF2B5EF4-FFF2-40B4-BE49-F238E27FC236}">
-                <a16:creationId xmlns:a16="http://schemas.microsoft.com/office/drawing/2014/main" id="{3E94C137-E9DA-43EE-837C-21CD99E87926}"/>
+                <a16:creationId xmlns:a16="http://schemas.microsoft.com/office/drawing/2014/main" id="{684152F4-29EF-4E75-9C60-B890CC4C9A54}"/>
               </a:ext>
             </a:extLst>
           </p:cNvPr>
@@ -3215,7 +3215,7 @@
           <p:cNvPr id="3" name="">
             <a:extLst xmlns:a="http://schemas.openxmlformats.org/drawingml/2006/main">
               <a:ext uri="{FF2B5EF4-FFF2-40B4-BE49-F238E27FC236}">
-                <a16:creationId xmlns:a16="http://schemas.microsoft.com/office/drawing/2014/main" id="{1A4FD2EF-D60C-4B30-B030-E87D7936057B}"/>
+                <a16:creationId xmlns:a16="http://schemas.microsoft.com/office/drawing/2014/main" id="{B22F32D6-EB0F-4DDB-A9A2-36947431B223}"/>
               </a:ext>
             </a:extLst>
           </p:cNvPr>
@@ -3267,7 +3267,7 @@
           <p:cNvPr id="4" name="">
             <a:extLst xmlns:a="http://schemas.openxmlformats.org/drawingml/2006/main">
               <a:ext uri="{FF2B5EF4-FFF2-40B4-BE49-F238E27FC236}">
-                <a16:creationId xmlns:a16="http://schemas.microsoft.com/office/drawing/2014/main" id="{6633C198-48D5-44DD-8D8F-9C40B4D9372B}"/>
+                <a16:creationId xmlns:a16="http://schemas.microsoft.com/office/drawing/2014/main" id="{83EECCE5-5C16-4F2E-B1BC-917128A192EF}"/>
               </a:ext>
             </a:extLst>
           </p:cNvPr>
@@ -3319,7 +3319,7 @@
           <p:cNvPr id="5" name="">
             <a:extLst xmlns:a="http://schemas.openxmlformats.org/drawingml/2006/main">
               <a:ext uri="{FF2B5EF4-FFF2-40B4-BE49-F238E27FC236}">
-                <a16:creationId xmlns:a16="http://schemas.microsoft.com/office/drawing/2014/main" id="{21CDBC32-6F1B-404C-A815-8A65229B49AB}"/>
+                <a16:creationId xmlns:a16="http://schemas.microsoft.com/office/drawing/2014/main" id="{B58B5E94-6179-4916-88C5-68196AB40F09}"/>
               </a:ext>
             </a:extLst>
           </p:cNvPr>
@@ -3354,7 +3354,7 @@
           <p:nvPr/>
         </p:nvPicPr>
         <p:blipFill>
-          <a:blip xmlns:r="http://schemas.openxmlformats.org/officeDocument/2006/relationships" xmlns:a="http://schemas.openxmlformats.org/drawingml/2006/main" r:embed="Raf8797790efd4740"/>
+          <a:blip xmlns:r="http://schemas.openxmlformats.org/officeDocument/2006/relationships" xmlns:a="http://schemas.openxmlformats.org/drawingml/2006/main" r:embed="R6bd5be8c5c474f35"/>
           <a:stretch xmlns:a="http://schemas.openxmlformats.org/drawingml/2006/main"/>
         </p:blipFill>
         <p:spPr>
@@ -3372,7 +3372,7 @@
           <p:cNvPr id="7" name="">
             <a:extLst xmlns:a="http://schemas.openxmlformats.org/drawingml/2006/main">
               <a:ext uri="{FF2B5EF4-FFF2-40B4-BE49-F238E27FC236}">
-                <a16:creationId xmlns:a16="http://schemas.microsoft.com/office/drawing/2014/main" id="{AA0DE496-98EC-439E-963D-48033DDACFDD}"/>
+                <a16:creationId xmlns:a16="http://schemas.microsoft.com/office/drawing/2014/main" id="{2B68F3F1-0775-482E-B49C-600CDC11FFBE}"/>
               </a:ext>
             </a:extLst>
           </p:cNvPr>
@@ -3424,7 +3424,7 @@
           <p:cNvPr id="8" name="">
             <a:extLst xmlns:a="http://schemas.openxmlformats.org/drawingml/2006/main">
               <a:ext uri="{FF2B5EF4-FFF2-40B4-BE49-F238E27FC236}">
-                <a16:creationId xmlns:a16="http://schemas.microsoft.com/office/drawing/2014/main" id="{E0327C9E-52AF-4EF5-9BA1-1715F2D0BC40}"/>
+                <a16:creationId xmlns:a16="http://schemas.microsoft.com/office/drawing/2014/main" id="{1118D936-64C0-4F60-884F-BF1B9F1E53F0}"/>
               </a:ext>
             </a:extLst>
           </p:cNvPr>
@@ -3476,7 +3476,7 @@
           <p:cNvPr id="9" name="">
             <a:extLst xmlns:a="http://schemas.openxmlformats.org/drawingml/2006/main">
               <a:ext uri="{FF2B5EF4-FFF2-40B4-BE49-F238E27FC236}">
-                <a16:creationId xmlns:a16="http://schemas.microsoft.com/office/drawing/2014/main" id="{2465FD4D-0244-45B2-BE16-49E2AC29BAC9}"/>
+                <a16:creationId xmlns:a16="http://schemas.microsoft.com/office/drawing/2014/main" id="{850AD741-5A96-4F15-8F6E-8E7ECFA4966B}"/>
               </a:ext>
             </a:extLst>
           </p:cNvPr>
@@ -3528,7 +3528,7 @@
           <p:cNvPr id="10" name="">
             <a:extLst xmlns:a="http://schemas.openxmlformats.org/drawingml/2006/main">
               <a:ext uri="{FF2B5EF4-FFF2-40B4-BE49-F238E27FC236}">
-                <a16:creationId xmlns:a16="http://schemas.microsoft.com/office/drawing/2014/main" id="{B9354DAB-F41D-4D7A-85A4-303A8AA32FF2}"/>
+                <a16:creationId xmlns:a16="http://schemas.microsoft.com/office/drawing/2014/main" id="{35C3AA88-EE0A-4E70-83DB-0F7F682514F0}"/>
               </a:ext>
             </a:extLst>
           </p:cNvPr>
@@ -3580,7 +3580,7 @@
           <p:cNvPr id="11" name="">
             <a:extLst xmlns:a="http://schemas.openxmlformats.org/drawingml/2006/main">
               <a:ext uri="{FF2B5EF4-FFF2-40B4-BE49-F238E27FC236}">
-                <a16:creationId xmlns:a16="http://schemas.microsoft.com/office/drawing/2014/main" id="{B57B9610-2809-4A58-BA9D-0C0455D34E3D}"/>
+                <a16:creationId xmlns:a16="http://schemas.microsoft.com/office/drawing/2014/main" id="{62461817-C982-4AA7-8442-9DA6192A9F0B}"/>
               </a:ext>
             </a:extLst>
           </p:cNvPr>
@@ -3611,7 +3611,7 @@
           <p:cNvPr id="12" name="">
             <a:extLst xmlns:a="http://schemas.openxmlformats.org/drawingml/2006/main">
               <a:ext uri="{FF2B5EF4-FFF2-40B4-BE49-F238E27FC236}">
-                <a16:creationId xmlns:a16="http://schemas.microsoft.com/office/drawing/2014/main" id="{6B0F775D-0569-4518-B56B-0F7B4358FB06}"/>
+                <a16:creationId xmlns:a16="http://schemas.microsoft.com/office/drawing/2014/main" id="{F79DD6EB-9D4C-44D1-BAED-50D304B5C1AB}"/>
               </a:ext>
             </a:extLst>
           </p:cNvPr>
@@ -3642,7 +3642,7 @@
           <p:cNvPr id="13" name="">
             <a:extLst xmlns:a="http://schemas.openxmlformats.org/drawingml/2006/main">
               <a:ext uri="{FF2B5EF4-FFF2-40B4-BE49-F238E27FC236}">
-                <a16:creationId xmlns:a16="http://schemas.microsoft.com/office/drawing/2014/main" id="{0E86FE6D-6393-4D0E-9074-8A4A202193B6}"/>
+                <a16:creationId xmlns:a16="http://schemas.microsoft.com/office/drawing/2014/main" id="{7C7800AA-B480-49D9-BCD2-3492A4ABE7D2}"/>
               </a:ext>
             </a:extLst>
           </p:cNvPr>
@@ -3694,7 +3694,7 @@
           <p:cNvPr id="14" name="">
             <a:extLst xmlns:a="http://schemas.openxmlformats.org/drawingml/2006/main">
               <a:ext uri="{FF2B5EF4-FFF2-40B4-BE49-F238E27FC236}">
-                <a16:creationId xmlns:a16="http://schemas.microsoft.com/office/drawing/2014/main" id="{DF3C006B-BDE4-4FA9-B55D-90AD5A8EC875}"/>
+                <a16:creationId xmlns:a16="http://schemas.microsoft.com/office/drawing/2014/main" id="{4FCF5408-1AC9-437D-A52A-BEFD1EA18C65}"/>
               </a:ext>
             </a:extLst>
           </p:cNvPr>
@@ -3746,7 +3746,7 @@
           <p:cNvPr id="15" name="">
             <a:extLst xmlns:a="http://schemas.openxmlformats.org/drawingml/2006/main">
               <a:ext uri="{FF2B5EF4-FFF2-40B4-BE49-F238E27FC236}">
-                <a16:creationId xmlns:a16="http://schemas.microsoft.com/office/drawing/2014/main" id="{5499FD43-0F69-4632-859E-EAEA4D0401FF}"/>
+                <a16:creationId xmlns:a16="http://schemas.microsoft.com/office/drawing/2014/main" id="{8B31E0DD-9F32-482D-AE5D-3343FEFE8255}"/>
               </a:ext>
             </a:extLst>
           </p:cNvPr>
@@ -3798,7 +3798,7 @@
           <p:cNvPr id="16" name="">
             <a:extLst xmlns:a="http://schemas.openxmlformats.org/drawingml/2006/main">
               <a:ext uri="{FF2B5EF4-FFF2-40B4-BE49-F238E27FC236}">
-                <a16:creationId xmlns:a16="http://schemas.microsoft.com/office/drawing/2014/main" id="{967AAE74-A056-4152-828C-3C5468821E4A}"/>
+                <a16:creationId xmlns:a16="http://schemas.microsoft.com/office/drawing/2014/main" id="{E1CB1FAB-851C-4A7E-AC04-3E8737259641}"/>
               </a:ext>
             </a:extLst>
           </p:cNvPr>
@@ -3850,7 +3850,7 @@
           <p:cNvPr id="17" name="">
             <a:extLst xmlns:a="http://schemas.openxmlformats.org/drawingml/2006/main">
               <a:ext uri="{FF2B5EF4-FFF2-40B4-BE49-F238E27FC236}">
-                <a16:creationId xmlns:a16="http://schemas.microsoft.com/office/drawing/2014/main" id="{8B6AC199-7494-4A4B-963E-81C95BF5F652}"/>
+                <a16:creationId xmlns:a16="http://schemas.microsoft.com/office/drawing/2014/main" id="{376F6936-558E-4B69-85B8-995B6E078160}"/>
               </a:ext>
             </a:extLst>
           </p:cNvPr>
@@ -3902,7 +3902,7 @@
           <p:cNvPr id="18" name="">
             <a:extLst xmlns:a="http://schemas.openxmlformats.org/drawingml/2006/main">
               <a:ext uri="{FF2B5EF4-FFF2-40B4-BE49-F238E27FC236}">
-                <a16:creationId xmlns:a16="http://schemas.microsoft.com/office/drawing/2014/main" id="{7C97368E-3611-4CFB-A747-2F8443BEDF8A}"/>
+                <a16:creationId xmlns:a16="http://schemas.microsoft.com/office/drawing/2014/main" id="{60C30AE1-B6CC-4E03-AA99-0BA8C164305D}"/>
               </a:ext>
             </a:extLst>
           </p:cNvPr>
@@ -3933,7 +3933,7 @@
           <p:cNvPr id="19" name="">
             <a:extLst xmlns:a="http://schemas.openxmlformats.org/drawingml/2006/main">
               <a:ext uri="{FF2B5EF4-FFF2-40B4-BE49-F238E27FC236}">
-                <a16:creationId xmlns:a16="http://schemas.microsoft.com/office/drawing/2014/main" id="{2F6AFB9A-4FB1-4722-B08D-8BEBABC4FB16}"/>
+                <a16:creationId xmlns:a16="http://schemas.microsoft.com/office/drawing/2014/main" id="{184AA4F7-6876-4F9C-9584-4626E226B2B2}"/>
               </a:ext>
             </a:extLst>
           </p:cNvPr>
@@ -3964,7 +3964,7 @@
           <p:cNvPr id="20" name="">
             <a:extLst xmlns:a="http://schemas.openxmlformats.org/drawingml/2006/main">
               <a:ext uri="{FF2B5EF4-FFF2-40B4-BE49-F238E27FC236}">
-                <a16:creationId xmlns:a16="http://schemas.microsoft.com/office/drawing/2014/main" id="{A6E6B39C-7C32-444D-AEBC-3AC68FEE7845}"/>
+                <a16:creationId xmlns:a16="http://schemas.microsoft.com/office/drawing/2014/main" id="{D44FA3F6-E874-4DE4-98BA-5C5191B50453}"/>
               </a:ext>
             </a:extLst>
           </p:cNvPr>
@@ -4016,7 +4016,7 @@
           <p:cNvPr id="21" name="">
             <a:extLst xmlns:a="http://schemas.openxmlformats.org/drawingml/2006/main">
               <a:ext uri="{FF2B5EF4-FFF2-40B4-BE49-F238E27FC236}">
-                <a16:creationId xmlns:a16="http://schemas.microsoft.com/office/drawing/2014/main" id="{F0924D5B-BEA4-4AA6-834F-4199F1E367FA}"/>
+                <a16:creationId xmlns:a16="http://schemas.microsoft.com/office/drawing/2014/main" id="{32D16ADB-406F-4105-9BCA-49D6582281E2}"/>
               </a:ext>
             </a:extLst>
           </p:cNvPr>
@@ -4068,7 +4068,7 @@
           <p:cNvPr id="22" name="">
             <a:extLst xmlns:a="http://schemas.openxmlformats.org/drawingml/2006/main">
               <a:ext uri="{FF2B5EF4-FFF2-40B4-BE49-F238E27FC236}">
-                <a16:creationId xmlns:a16="http://schemas.microsoft.com/office/drawing/2014/main" id="{4D999FAB-458E-4B4A-BADF-1811187E3E7E}"/>
+                <a16:creationId xmlns:a16="http://schemas.microsoft.com/office/drawing/2014/main" id="{68EEA0F8-98B9-48DF-965D-87F1729AC9E8}"/>
               </a:ext>
             </a:extLst>
           </p:cNvPr>
@@ -4120,7 +4120,7 @@
           <p:cNvPr id="23" name="">
             <a:extLst xmlns:a="http://schemas.openxmlformats.org/drawingml/2006/main">
               <a:ext uri="{FF2B5EF4-FFF2-40B4-BE49-F238E27FC236}">
-                <a16:creationId xmlns:a16="http://schemas.microsoft.com/office/drawing/2014/main" id="{DC0E230A-1E9C-412A-9ED6-57F6AC073DA9}"/>
+                <a16:creationId xmlns:a16="http://schemas.microsoft.com/office/drawing/2014/main" id="{72A2B7D6-9DB7-4B64-A6FC-BD9B2258855A}"/>
               </a:ext>
             </a:extLst>
           </p:cNvPr>
@@ -4172,7 +4172,7 @@
           <p:cNvPr id="24" name="">
             <a:extLst xmlns:a="http://schemas.openxmlformats.org/drawingml/2006/main">
               <a:ext uri="{FF2B5EF4-FFF2-40B4-BE49-F238E27FC236}">
-                <a16:creationId xmlns:a16="http://schemas.microsoft.com/office/drawing/2014/main" id="{3E8A50B7-57CC-4C6D-982B-85AE60B89815}"/>
+                <a16:creationId xmlns:a16="http://schemas.microsoft.com/office/drawing/2014/main" id="{C8D97C1B-1272-42E5-9DAD-CE97E6DB1C23}"/>
               </a:ext>
             </a:extLst>
           </p:cNvPr>
@@ -4224,7 +4224,7 @@
           <p:cNvPr id="25" name="">
             <a:extLst xmlns:a="http://schemas.openxmlformats.org/drawingml/2006/main">
               <a:ext uri="{FF2B5EF4-FFF2-40B4-BE49-F238E27FC236}">
-                <a16:creationId xmlns:a16="http://schemas.microsoft.com/office/drawing/2014/main" id="{6AFD7254-8FB8-412B-96B6-EF2563843E37}"/>
+                <a16:creationId xmlns:a16="http://schemas.microsoft.com/office/drawing/2014/main" id="{41C2A758-8103-4D5E-9521-F9C6C7D12FFE}"/>
               </a:ext>
             </a:extLst>
           </p:cNvPr>
@@ -4255,7 +4255,7 @@
           <p:cNvPr id="26" name="">
             <a:extLst xmlns:a="http://schemas.openxmlformats.org/drawingml/2006/main">
               <a:ext uri="{FF2B5EF4-FFF2-40B4-BE49-F238E27FC236}">
-                <a16:creationId xmlns:a16="http://schemas.microsoft.com/office/drawing/2014/main" id="{BCAC73A0-8CC2-4849-9486-1B8DB270DFBC}"/>
+                <a16:creationId xmlns:a16="http://schemas.microsoft.com/office/drawing/2014/main" id="{0A41DE14-777A-449A-B6BE-D00F44D1FA96}"/>
               </a:ext>
             </a:extLst>
           </p:cNvPr>
@@ -4307,7 +4307,7 @@
           <p:cNvPr id="27" name="">
             <a:extLst xmlns:a="http://schemas.openxmlformats.org/drawingml/2006/main">
               <a:ext uri="{FF2B5EF4-FFF2-40B4-BE49-F238E27FC236}">
-                <a16:creationId xmlns:a16="http://schemas.microsoft.com/office/drawing/2014/main" id="{EA3D6C2F-3976-44BB-98CD-5D7AC983CF7C}"/>
+                <a16:creationId xmlns:a16="http://schemas.microsoft.com/office/drawing/2014/main" id="{2C9270D5-595F-4344-B494-584B5A91B9AF}"/>
               </a:ext>
             </a:extLst>
           </p:cNvPr>
@@ -4359,7 +4359,7 @@
           <p:cNvPr id="28" name="">
             <a:extLst xmlns:a="http://schemas.openxmlformats.org/drawingml/2006/main">
               <a:ext uri="{FF2B5EF4-FFF2-40B4-BE49-F238E27FC236}">
-                <a16:creationId xmlns:a16="http://schemas.microsoft.com/office/drawing/2014/main" id="{09489E91-7814-4B31-8B4D-EEB2497CE6CA}"/>
+                <a16:creationId xmlns:a16="http://schemas.microsoft.com/office/drawing/2014/main" id="{05E4E44C-E1AD-4296-845B-3D3E646592C9}"/>
               </a:ext>
             </a:extLst>
           </p:cNvPr>
@@ -4411,7 +4411,7 @@
           <p:cNvPr id="29" name="">
             <a:extLst xmlns:a="http://schemas.openxmlformats.org/drawingml/2006/main">
               <a:ext uri="{FF2B5EF4-FFF2-40B4-BE49-F238E27FC236}">
-                <a16:creationId xmlns:a16="http://schemas.microsoft.com/office/drawing/2014/main" id="{64C89C2C-BC37-40B1-87B7-64FB9A82434F}"/>
+                <a16:creationId xmlns:a16="http://schemas.microsoft.com/office/drawing/2014/main" id="{15A305BF-1C29-43E7-9A54-D0800B18F3DD}"/>
               </a:ext>
             </a:extLst>
           </p:cNvPr>
@@ -4463,7 +4463,7 @@
           <p:cNvPr id="30" name="">
             <a:extLst xmlns:a="http://schemas.openxmlformats.org/drawingml/2006/main">
               <a:ext uri="{FF2B5EF4-FFF2-40B4-BE49-F238E27FC236}">
-                <a16:creationId xmlns:a16="http://schemas.microsoft.com/office/drawing/2014/main" id="{D1084F65-17DE-4DA3-9A12-D754EE41E90F}"/>
+                <a16:creationId xmlns:a16="http://schemas.microsoft.com/office/drawing/2014/main" id="{2B7136CD-EAF7-47CA-A23A-6BF9A75B782A}"/>
               </a:ext>
             </a:extLst>
           </p:cNvPr>
@@ -4515,7 +4515,7 @@
           <p:cNvPr id="31" name="">
             <a:extLst xmlns:a="http://schemas.openxmlformats.org/drawingml/2006/main">
               <a:ext uri="{FF2B5EF4-FFF2-40B4-BE49-F238E27FC236}">
-                <a16:creationId xmlns:a16="http://schemas.microsoft.com/office/drawing/2014/main" id="{A8548D17-30AF-440B-AF61-6FC91469BF2A}"/>
+                <a16:creationId xmlns:a16="http://schemas.microsoft.com/office/drawing/2014/main" id="{1A88CC31-FFA6-42B9-8EE3-247314D0BF9B}"/>
               </a:ext>
             </a:extLst>
           </p:cNvPr>
@@ -4546,7 +4546,7 @@
           <p:cNvPr id="32" name="">
             <a:extLst xmlns:a="http://schemas.openxmlformats.org/drawingml/2006/main">
               <a:ext uri="{FF2B5EF4-FFF2-40B4-BE49-F238E27FC236}">
-                <a16:creationId xmlns:a16="http://schemas.microsoft.com/office/drawing/2014/main" id="{E00B6359-4761-4EA9-B23A-98098BFCC07A}"/>
+                <a16:creationId xmlns:a16="http://schemas.microsoft.com/office/drawing/2014/main" id="{87FC774D-18E4-4C26-BA59-7F1E70DC403F}"/>
               </a:ext>
             </a:extLst>
           </p:cNvPr>
@@ -4577,7 +4577,7 @@
           <p:cNvPr id="33" name="">
             <a:extLst xmlns:a="http://schemas.openxmlformats.org/drawingml/2006/main">
               <a:ext uri="{FF2B5EF4-FFF2-40B4-BE49-F238E27FC236}">
-                <a16:creationId xmlns:a16="http://schemas.microsoft.com/office/drawing/2014/main" id="{5B939AAD-F3F7-4404-80C8-4C047C6EE5C4}"/>
+                <a16:creationId xmlns:a16="http://schemas.microsoft.com/office/drawing/2014/main" id="{F2D5124D-B31C-49E3-AD56-2144BCF090C4}"/>
               </a:ext>
             </a:extLst>
           </p:cNvPr>
@@ -4629,7 +4629,7 @@
           <p:cNvPr id="34" name="">
             <a:extLst xmlns:a="http://schemas.openxmlformats.org/drawingml/2006/main">
               <a:ext uri="{FF2B5EF4-FFF2-40B4-BE49-F238E27FC236}">
-                <a16:creationId xmlns:a16="http://schemas.microsoft.com/office/drawing/2014/main" id="{1E817C21-6CB5-4DC3-93C2-ED6C050F9532}"/>
+                <a16:creationId xmlns:a16="http://schemas.microsoft.com/office/drawing/2014/main" id="{05008E67-0FC0-43CB-BAD2-F71CF04038F4}"/>
               </a:ext>
             </a:extLst>
           </p:cNvPr>
@@ -4681,7 +4681,7 @@
           <p:cNvPr id="35" name="">
             <a:extLst xmlns:a="http://schemas.openxmlformats.org/drawingml/2006/main">
               <a:ext uri="{FF2B5EF4-FFF2-40B4-BE49-F238E27FC236}">
-                <a16:creationId xmlns:a16="http://schemas.microsoft.com/office/drawing/2014/main" id="{20F5D6B1-1AE5-4D89-9D23-4945A9286B28}"/>
+                <a16:creationId xmlns:a16="http://schemas.microsoft.com/office/drawing/2014/main" id="{4B4E8C3D-62D5-47A1-9478-C465F3EEC017}"/>
               </a:ext>
             </a:extLst>
           </p:cNvPr>
@@ -4733,7 +4733,7 @@
           <p:cNvPr id="36" name="">
             <a:extLst xmlns:a="http://schemas.openxmlformats.org/drawingml/2006/main">
               <a:ext uri="{FF2B5EF4-FFF2-40B4-BE49-F238E27FC236}">
-                <a16:creationId xmlns:a16="http://schemas.microsoft.com/office/drawing/2014/main" id="{4B25FF7E-3DA6-4C70-9D72-6EA3847BFA3C}"/>
+                <a16:creationId xmlns:a16="http://schemas.microsoft.com/office/drawing/2014/main" id="{655043E5-560D-4DCD-B6C8-53979444AB78}"/>
               </a:ext>
             </a:extLst>
           </p:cNvPr>
@@ -4785,7 +4785,7 @@
           <p:cNvPr id="37" name="">
             <a:extLst xmlns:a="http://schemas.openxmlformats.org/drawingml/2006/main">
               <a:ext uri="{FF2B5EF4-FFF2-40B4-BE49-F238E27FC236}">
-                <a16:creationId xmlns:a16="http://schemas.microsoft.com/office/drawing/2014/main" id="{7834B92B-D902-40F7-8744-FA3ABD22099A}"/>
+                <a16:creationId xmlns:a16="http://schemas.microsoft.com/office/drawing/2014/main" id="{191C43D0-6007-4E5C-B981-1E52A3368E46}"/>
               </a:ext>
             </a:extLst>
           </p:cNvPr>
@@ -4837,7 +4837,7 @@
           <p:cNvPr id="38" name="">
             <a:extLst xmlns:a="http://schemas.openxmlformats.org/drawingml/2006/main">
               <a:ext uri="{FF2B5EF4-FFF2-40B4-BE49-F238E27FC236}">
-                <a16:creationId xmlns:a16="http://schemas.microsoft.com/office/drawing/2014/main" id="{CFE92FF5-932D-47A1-93FA-2ADC17757E86}"/>
+                <a16:creationId xmlns:a16="http://schemas.microsoft.com/office/drawing/2014/main" id="{3E3A2C2D-BF24-47D1-9538-7C4F01CF8C7B}"/>
               </a:ext>
             </a:extLst>
           </p:cNvPr>
@@ -4868,7 +4868,7 @@
           <p:cNvPr id="39" name="">
             <a:extLst xmlns:a="http://schemas.openxmlformats.org/drawingml/2006/main">
               <a:ext uri="{FF2B5EF4-FFF2-40B4-BE49-F238E27FC236}">
-                <a16:creationId xmlns:a16="http://schemas.microsoft.com/office/drawing/2014/main" id="{F5D86390-5BC0-4610-8A25-498F8F502CC2}"/>
+                <a16:creationId xmlns:a16="http://schemas.microsoft.com/office/drawing/2014/main" id="{3A71A8B3-A66A-4EC3-BAF7-7DF426FF9D2B}"/>
               </a:ext>
             </a:extLst>
           </p:cNvPr>
@@ -4920,7 +4920,7 @@
           <p:cNvPr id="40" name="">
             <a:extLst xmlns:a="http://schemas.openxmlformats.org/drawingml/2006/main">
               <a:ext uri="{FF2B5EF4-FFF2-40B4-BE49-F238E27FC236}">
-                <a16:creationId xmlns:a16="http://schemas.microsoft.com/office/drawing/2014/main" id="{5F0E4ACD-63FC-4EAA-B271-E5E8D0DFA346}"/>
+                <a16:creationId xmlns:a16="http://schemas.microsoft.com/office/drawing/2014/main" id="{8C02CC5D-58C8-421A-9CDA-C7F462DC782C}"/>
               </a:ext>
             </a:extLst>
           </p:cNvPr>
@@ -4972,7 +4972,7 @@
           <p:cNvPr id="41" name="">
             <a:extLst xmlns:a="http://schemas.openxmlformats.org/drawingml/2006/main">
               <a:ext uri="{FF2B5EF4-FFF2-40B4-BE49-F238E27FC236}">
-                <a16:creationId xmlns:a16="http://schemas.microsoft.com/office/drawing/2014/main" id="{7EE71C74-8D3C-4A74-A2F4-1461A0135AFF}"/>
+                <a16:creationId xmlns:a16="http://schemas.microsoft.com/office/drawing/2014/main" id="{8F97450D-16CA-4407-932D-FFC0A6E12620}"/>
               </a:ext>
             </a:extLst>
           </p:cNvPr>
@@ -5024,7 +5024,7 @@
           <p:cNvPr id="42" name="">
             <a:extLst xmlns:a="http://schemas.openxmlformats.org/drawingml/2006/main">
               <a:ext uri="{FF2B5EF4-FFF2-40B4-BE49-F238E27FC236}">
-                <a16:creationId xmlns:a16="http://schemas.microsoft.com/office/drawing/2014/main" id="{EDC91A45-ACED-4946-824C-53F9036398E0}"/>
+                <a16:creationId xmlns:a16="http://schemas.microsoft.com/office/drawing/2014/main" id="{7D467C71-F698-45DC-BF73-E735B52BF9DF}"/>
               </a:ext>
             </a:extLst>
           </p:cNvPr>
@@ -5076,7 +5076,7 @@
           <p:cNvPr id="43" name="">
             <a:extLst xmlns:a="http://schemas.openxmlformats.org/drawingml/2006/main">
               <a:ext uri="{FF2B5EF4-FFF2-40B4-BE49-F238E27FC236}">
-                <a16:creationId xmlns:a16="http://schemas.microsoft.com/office/drawing/2014/main" id="{0E901DCE-E945-4CB1-BED9-276D059F0EA8}"/>
+                <a16:creationId xmlns:a16="http://schemas.microsoft.com/office/drawing/2014/main" id="{B51ED5AA-F2A5-42ED-AE42-ED88D08E3F5F}"/>
               </a:ext>
             </a:extLst>
           </p:cNvPr>
@@ -5128,7 +5128,7 @@
           <p:cNvPr id="44" name="">
             <a:extLst xmlns:a="http://schemas.openxmlformats.org/drawingml/2006/main">
               <a:ext uri="{FF2B5EF4-FFF2-40B4-BE49-F238E27FC236}">
-                <a16:creationId xmlns:a16="http://schemas.microsoft.com/office/drawing/2014/main" id="{68A9CE8D-8B60-4D96-812B-FB5ED78F586A}"/>
+                <a16:creationId xmlns:a16="http://schemas.microsoft.com/office/drawing/2014/main" id="{D8C9FCCA-82D7-420C-BE14-9FFC8E4110C4}"/>
               </a:ext>
             </a:extLst>
           </p:cNvPr>
@@ -5159,7 +5159,7 @@
           <p:cNvPr id="45" name="">
             <a:extLst xmlns:a="http://schemas.openxmlformats.org/drawingml/2006/main">
               <a:ext uri="{FF2B5EF4-FFF2-40B4-BE49-F238E27FC236}">
-                <a16:creationId xmlns:a16="http://schemas.microsoft.com/office/drawing/2014/main" id="{3E68CFE7-4D7D-4773-A273-7A5D2C8C73D0}"/>
+                <a16:creationId xmlns:a16="http://schemas.microsoft.com/office/drawing/2014/main" id="{D89BE253-6897-42F1-A3CF-FD315CC09493}"/>
               </a:ext>
             </a:extLst>
           </p:cNvPr>
@@ -5190,7 +5190,7 @@
           <p:cNvPr id="46" name="">
             <a:extLst xmlns:a="http://schemas.openxmlformats.org/drawingml/2006/main">
               <a:ext uri="{FF2B5EF4-FFF2-40B4-BE49-F238E27FC236}">
-                <a16:creationId xmlns:a16="http://schemas.microsoft.com/office/drawing/2014/main" id="{9FF6A8D7-2DBE-4FB3-BF9A-9F339CE43020}"/>
+                <a16:creationId xmlns:a16="http://schemas.microsoft.com/office/drawing/2014/main" id="{1A717A60-FAB9-42B1-B8AC-F30D5D9EF950}"/>
               </a:ext>
             </a:extLst>
           </p:cNvPr>
@@ -5242,7 +5242,7 @@
           <p:cNvPr id="47" name="">
             <a:extLst xmlns:a="http://schemas.openxmlformats.org/drawingml/2006/main">
               <a:ext uri="{FF2B5EF4-FFF2-40B4-BE49-F238E27FC236}">
-                <a16:creationId xmlns:a16="http://schemas.microsoft.com/office/drawing/2014/main" id="{9A094EE5-3489-40CC-ADED-8CA65882881A}"/>
+                <a16:creationId xmlns:a16="http://schemas.microsoft.com/office/drawing/2014/main" id="{1D2C9DA9-765E-4DFB-A148-962E12D23CA4}"/>
               </a:ext>
             </a:extLst>
           </p:cNvPr>
@@ -5294,7 +5294,7 @@
           <p:cNvPr id="48" name="">
             <a:extLst xmlns:a="http://schemas.openxmlformats.org/drawingml/2006/main">
               <a:ext uri="{FF2B5EF4-FFF2-40B4-BE49-F238E27FC236}">
-                <a16:creationId xmlns:a16="http://schemas.microsoft.com/office/drawing/2014/main" id="{F56F23D3-B525-4AEB-AB04-3A9B613417D0}"/>
+                <a16:creationId xmlns:a16="http://schemas.microsoft.com/office/drawing/2014/main" id="{A3E5F1FC-37D5-4A70-B3A3-46687DDCB0C5}"/>
               </a:ext>
             </a:extLst>
           </p:cNvPr>
@@ -5346,7 +5346,7 @@
           <p:cNvPr id="49" name="">
             <a:extLst xmlns:a="http://schemas.openxmlformats.org/drawingml/2006/main">
               <a:ext uri="{FF2B5EF4-FFF2-40B4-BE49-F238E27FC236}">
-                <a16:creationId xmlns:a16="http://schemas.microsoft.com/office/drawing/2014/main" id="{8F732B48-2020-4E22-968C-28D3D5DFAD3F}"/>
+                <a16:creationId xmlns:a16="http://schemas.microsoft.com/office/drawing/2014/main" id="{4E4D4E86-9C84-4013-8D90-3D925D9B54D8}"/>
               </a:ext>
             </a:extLst>
           </p:cNvPr>
@@ -5398,7 +5398,7 @@
           <p:cNvPr id="50" name="">
             <a:extLst xmlns:a="http://schemas.openxmlformats.org/drawingml/2006/main">
               <a:ext uri="{FF2B5EF4-FFF2-40B4-BE49-F238E27FC236}">
-                <a16:creationId xmlns:a16="http://schemas.microsoft.com/office/drawing/2014/main" id="{2C9CCB6A-BCA3-4C9B-BDF8-5CCE7B23176F}"/>
+                <a16:creationId xmlns:a16="http://schemas.microsoft.com/office/drawing/2014/main" id="{574963B8-3C74-445B-AB4E-E840EE722850}"/>
               </a:ext>
             </a:extLst>
           </p:cNvPr>
@@ -5450,7 +5450,7 @@
           <p:cNvPr id="51" name="">
             <a:extLst xmlns:a="http://schemas.openxmlformats.org/drawingml/2006/main">
               <a:ext uri="{FF2B5EF4-FFF2-40B4-BE49-F238E27FC236}">
-                <a16:creationId xmlns:a16="http://schemas.microsoft.com/office/drawing/2014/main" id="{F40C6EAB-D853-4900-86D9-3224674C3857}"/>
+                <a16:creationId xmlns:a16="http://schemas.microsoft.com/office/drawing/2014/main" id="{D213D179-9453-4F4D-A4A0-396D4CD80C7A}"/>
               </a:ext>
             </a:extLst>
           </p:cNvPr>
@@ -5481,7 +5481,7 @@
           <p:cNvPr id="52" name="">
             <a:extLst xmlns:a="http://schemas.openxmlformats.org/drawingml/2006/main">
               <a:ext uri="{FF2B5EF4-FFF2-40B4-BE49-F238E27FC236}">
-                <a16:creationId xmlns:a16="http://schemas.microsoft.com/office/drawing/2014/main" id="{BA9500B3-2173-4F38-A6F2-7BADE2FD06E1}"/>
+                <a16:creationId xmlns:a16="http://schemas.microsoft.com/office/drawing/2014/main" id="{41233113-7EEB-44F6-8234-54A508876153}"/>
               </a:ext>
             </a:extLst>
           </p:cNvPr>
@@ -5533,7 +5533,7 @@
           <p:cNvPr id="53" name="">
             <a:extLst xmlns:a="http://schemas.openxmlformats.org/drawingml/2006/main">
               <a:ext uri="{FF2B5EF4-FFF2-40B4-BE49-F238E27FC236}">
-                <a16:creationId xmlns:a16="http://schemas.microsoft.com/office/drawing/2014/main" id="{F777FA4B-AC19-4831-9B81-5AC535472138}"/>
+                <a16:creationId xmlns:a16="http://schemas.microsoft.com/office/drawing/2014/main" id="{52B2B491-1864-4A77-BFD8-8F45EBFD683D}"/>
               </a:ext>
             </a:extLst>
           </p:cNvPr>
@@ -5585,7 +5585,7 @@
           <p:cNvPr id="54" name="">
             <a:extLst xmlns:a="http://schemas.openxmlformats.org/drawingml/2006/main">
               <a:ext uri="{FF2B5EF4-FFF2-40B4-BE49-F238E27FC236}">
-                <a16:creationId xmlns:a16="http://schemas.microsoft.com/office/drawing/2014/main" id="{2BD4C7F6-EFB8-44E3-ADAC-869272A8F114}"/>
+                <a16:creationId xmlns:a16="http://schemas.microsoft.com/office/drawing/2014/main" id="{42864152-F6FD-441C-9A1B-706A79670E1E}"/>
               </a:ext>
             </a:extLst>
           </p:cNvPr>
@@ -5637,7 +5637,7 @@
           <p:cNvPr id="55" name="">
             <a:extLst xmlns:a="http://schemas.openxmlformats.org/drawingml/2006/main">
               <a:ext uri="{FF2B5EF4-FFF2-40B4-BE49-F238E27FC236}">
-                <a16:creationId xmlns:a16="http://schemas.microsoft.com/office/drawing/2014/main" id="{F4473F33-9E5B-4288-9E24-B7570B2EFA3F}"/>
+                <a16:creationId xmlns:a16="http://schemas.microsoft.com/office/drawing/2014/main" id="{35A3127F-F77D-40C3-BA22-E105DC22E2C4}"/>
               </a:ext>
             </a:extLst>
           </p:cNvPr>
@@ -5689,7 +5689,7 @@
           <p:cNvPr id="56" name="">
             <a:extLst xmlns:a="http://schemas.openxmlformats.org/drawingml/2006/main">
               <a:ext uri="{FF2B5EF4-FFF2-40B4-BE49-F238E27FC236}">
-                <a16:creationId xmlns:a16="http://schemas.microsoft.com/office/drawing/2014/main" id="{DFA54B7D-A5A3-4788-B31C-BE87B94CA5A5}"/>
+                <a16:creationId xmlns:a16="http://schemas.microsoft.com/office/drawing/2014/main" id="{94100FEE-F7A2-40A0-9957-2462253046C1}"/>
               </a:ext>
             </a:extLst>
           </p:cNvPr>
@@ -5741,7 +5741,7 @@
           <p:cNvPr id="57" name="">
             <a:extLst xmlns:a="http://schemas.openxmlformats.org/drawingml/2006/main">
               <a:ext uri="{FF2B5EF4-FFF2-40B4-BE49-F238E27FC236}">
-                <a16:creationId xmlns:a16="http://schemas.microsoft.com/office/drawing/2014/main" id="{770F8A76-5A86-4930-836C-89C222855AF1}"/>
+                <a16:creationId xmlns:a16="http://schemas.microsoft.com/office/drawing/2014/main" id="{982AEF6D-6E49-4D72-B0CF-77A4E57DE510}"/>
               </a:ext>
             </a:extLst>
           </p:cNvPr>
@@ -5772,7 +5772,7 @@
           <p:cNvPr id="58" name="">
             <a:extLst xmlns:a="http://schemas.openxmlformats.org/drawingml/2006/main">
               <a:ext uri="{FF2B5EF4-FFF2-40B4-BE49-F238E27FC236}">
-                <a16:creationId xmlns:a16="http://schemas.microsoft.com/office/drawing/2014/main" id="{C98CB1FE-519A-4FB4-BE2F-CFF3E724D69A}"/>
+                <a16:creationId xmlns:a16="http://schemas.microsoft.com/office/drawing/2014/main" id="{234C0059-A2F0-4557-A8E3-20DBF3F4816B}"/>
               </a:ext>
             </a:extLst>
           </p:cNvPr>
@@ -5803,7 +5803,7 @@
           <p:cNvPr id="59" name="">
             <a:extLst xmlns:a="http://schemas.openxmlformats.org/drawingml/2006/main">
               <a:ext uri="{FF2B5EF4-FFF2-40B4-BE49-F238E27FC236}">
-                <a16:creationId xmlns:a16="http://schemas.microsoft.com/office/drawing/2014/main" id="{650B1D04-676B-4CA1-84E7-65143495D968}"/>
+                <a16:creationId xmlns:a16="http://schemas.microsoft.com/office/drawing/2014/main" id="{BC0A3657-14D5-48CD-85A3-80F7FFAD0F26}"/>
               </a:ext>
             </a:extLst>
           </p:cNvPr>
@@ -5855,7 +5855,7 @@
           <p:cNvPr id="60" name="">
             <a:extLst xmlns:a="http://schemas.openxmlformats.org/drawingml/2006/main">
               <a:ext uri="{FF2B5EF4-FFF2-40B4-BE49-F238E27FC236}">
-                <a16:creationId xmlns:a16="http://schemas.microsoft.com/office/drawing/2014/main" id="{2CC0FAD9-0572-4566-ABF9-33B784E2B370}"/>
+                <a16:creationId xmlns:a16="http://schemas.microsoft.com/office/drawing/2014/main" id="{42F58F8F-8BBF-473F-84E8-104F3B497243}"/>
               </a:ext>
             </a:extLst>
           </p:cNvPr>
@@ -5907,7 +5907,7 @@
           <p:cNvPr id="61" name="">
             <a:extLst xmlns:a="http://schemas.openxmlformats.org/drawingml/2006/main">
               <a:ext uri="{FF2B5EF4-FFF2-40B4-BE49-F238E27FC236}">
-                <a16:creationId xmlns:a16="http://schemas.microsoft.com/office/drawing/2014/main" id="{1DF5F2D0-A6F2-497C-9F50-40DD3DC56532}"/>
+                <a16:creationId xmlns:a16="http://schemas.microsoft.com/office/drawing/2014/main" id="{26CEDE65-CB49-4007-9155-300981D7B407}"/>
               </a:ext>
             </a:extLst>
           </p:cNvPr>
@@ -5959,7 +5959,7 @@
           <p:cNvPr id="62" name="">
             <a:extLst xmlns:a="http://schemas.openxmlformats.org/drawingml/2006/main">
               <a:ext uri="{FF2B5EF4-FFF2-40B4-BE49-F238E27FC236}">
-                <a16:creationId xmlns:a16="http://schemas.microsoft.com/office/drawing/2014/main" id="{B2314A72-5629-4261-9ADF-52ED6FD7C7A5}"/>
+                <a16:creationId xmlns:a16="http://schemas.microsoft.com/office/drawing/2014/main" id="{66D5B4C2-B5E4-47A3-A4FD-CEF299F4B9A0}"/>
               </a:ext>
             </a:extLst>
           </p:cNvPr>
@@ -6011,7 +6011,7 @@
           <p:cNvPr id="63" name="">
             <a:extLst xmlns:a="http://schemas.openxmlformats.org/drawingml/2006/main">
               <a:ext uri="{FF2B5EF4-FFF2-40B4-BE49-F238E27FC236}">
-                <a16:creationId xmlns:a16="http://schemas.microsoft.com/office/drawing/2014/main" id="{D9391519-430A-4C65-B895-4D4953882CB6}"/>
+                <a16:creationId xmlns:a16="http://schemas.microsoft.com/office/drawing/2014/main" id="{763E9C47-0D96-491F-BA81-67095683997C}"/>
               </a:ext>
             </a:extLst>
           </p:cNvPr>
@@ -6063,7 +6063,7 @@
           <p:cNvPr id="64" name="">
             <a:extLst xmlns:a="http://schemas.openxmlformats.org/drawingml/2006/main">
               <a:ext uri="{FF2B5EF4-FFF2-40B4-BE49-F238E27FC236}">
-                <a16:creationId xmlns:a16="http://schemas.microsoft.com/office/drawing/2014/main" id="{31C88EF5-3D3A-4247-8414-733DC256C0AC}"/>
+                <a16:creationId xmlns:a16="http://schemas.microsoft.com/office/drawing/2014/main" id="{22B88B68-DCF6-4CC0-88D2-A5B570E30267}"/>
               </a:ext>
             </a:extLst>
           </p:cNvPr>
@@ -6094,7 +6094,7 @@
           <p:cNvPr id="65" name="">
             <a:extLst xmlns:a="http://schemas.openxmlformats.org/drawingml/2006/main">
               <a:ext uri="{FF2B5EF4-FFF2-40B4-BE49-F238E27FC236}">
-                <a16:creationId xmlns:a16="http://schemas.microsoft.com/office/drawing/2014/main" id="{072442C2-89C3-4578-8F44-C11B9D6DF9E8}"/>
+                <a16:creationId xmlns:a16="http://schemas.microsoft.com/office/drawing/2014/main" id="{2B141EA5-051F-46C2-BE3A-CFDAD666E3A7}"/>
               </a:ext>
             </a:extLst>
           </p:cNvPr>
@@ -6146,7 +6146,7 @@
           <p:cNvPr id="66" name="">
             <a:extLst xmlns:a="http://schemas.openxmlformats.org/drawingml/2006/main">
               <a:ext uri="{FF2B5EF4-FFF2-40B4-BE49-F238E27FC236}">
-                <a16:creationId xmlns:a16="http://schemas.microsoft.com/office/drawing/2014/main" id="{535D78BE-2464-43C7-B127-D184CB7A0ADA}"/>
+                <a16:creationId xmlns:a16="http://schemas.microsoft.com/office/drawing/2014/main" id="{5E074318-DD41-4059-A2AE-0459751EB4E2}"/>
               </a:ext>
             </a:extLst>
           </p:cNvPr>
@@ -6198,7 +6198,7 @@
           <p:cNvPr id="67" name="">
             <a:extLst xmlns:a="http://schemas.openxmlformats.org/drawingml/2006/main">
               <a:ext uri="{FF2B5EF4-FFF2-40B4-BE49-F238E27FC236}">
-                <a16:creationId xmlns:a16="http://schemas.microsoft.com/office/drawing/2014/main" id="{00912FFD-0C2A-4A7F-9BBF-091D3FFF6798}"/>
+                <a16:creationId xmlns:a16="http://schemas.microsoft.com/office/drawing/2014/main" id="{E1DDFF28-CE47-4A4A-B20A-A78B4E077124}"/>
               </a:ext>
             </a:extLst>
           </p:cNvPr>
@@ -6250,7 +6250,7 @@
           <p:cNvPr id="68" name="">
             <a:extLst xmlns:a="http://schemas.openxmlformats.org/drawingml/2006/main">
               <a:ext uri="{FF2B5EF4-FFF2-40B4-BE49-F238E27FC236}">
-                <a16:creationId xmlns:a16="http://schemas.microsoft.com/office/drawing/2014/main" id="{C0439B3A-B3CC-44A3-8A70-D77C0D1EC005}"/>
+                <a16:creationId xmlns:a16="http://schemas.microsoft.com/office/drawing/2014/main" id="{2B04FC09-8B37-4027-B071-66360F867CA1}"/>
               </a:ext>
             </a:extLst>
           </p:cNvPr>
@@ -6302,7 +6302,7 @@
           <p:cNvPr id="69" name="">
             <a:extLst xmlns:a="http://schemas.openxmlformats.org/drawingml/2006/main">
               <a:ext uri="{FF2B5EF4-FFF2-40B4-BE49-F238E27FC236}">
-                <a16:creationId xmlns:a16="http://schemas.microsoft.com/office/drawing/2014/main" id="{FDC805E3-50F6-43D5-BDA0-DE2115FE5068}"/>
+                <a16:creationId xmlns:a16="http://schemas.microsoft.com/office/drawing/2014/main" id="{5D127B5A-83CD-45C0-8B94-9165027AB5D3}"/>
               </a:ext>
             </a:extLst>
           </p:cNvPr>
@@ -6354,7 +6354,7 @@
           <p:cNvPr id="70" name="">
             <a:extLst xmlns:a="http://schemas.openxmlformats.org/drawingml/2006/main">
               <a:ext uri="{FF2B5EF4-FFF2-40B4-BE49-F238E27FC236}">
-                <a16:creationId xmlns:a16="http://schemas.microsoft.com/office/drawing/2014/main" id="{179D313C-9A93-4017-8A90-C794B95DCE62}"/>
+                <a16:creationId xmlns:a16="http://schemas.microsoft.com/office/drawing/2014/main" id="{969B1CD9-79A9-48CD-8547-2B41D5E25FA9}"/>
               </a:ext>
             </a:extLst>
           </p:cNvPr>
@@ -6385,7 +6385,7 @@
           <p:cNvPr id="71" name="">
             <a:extLst xmlns:a="http://schemas.openxmlformats.org/drawingml/2006/main">
               <a:ext uri="{FF2B5EF4-FFF2-40B4-BE49-F238E27FC236}">
-                <a16:creationId xmlns:a16="http://schemas.microsoft.com/office/drawing/2014/main" id="{EA3CB1A5-13A5-445A-B89B-2F772B616E56}"/>
+                <a16:creationId xmlns:a16="http://schemas.microsoft.com/office/drawing/2014/main" id="{97A51C88-00E6-4F19-BB8A-858434A65529}"/>
               </a:ext>
             </a:extLst>
           </p:cNvPr>
@@ -6416,7 +6416,7 @@
           <p:cNvPr id="72" name="">
             <a:extLst xmlns:a="http://schemas.openxmlformats.org/drawingml/2006/main">
               <a:ext uri="{FF2B5EF4-FFF2-40B4-BE49-F238E27FC236}">
-                <a16:creationId xmlns:a16="http://schemas.microsoft.com/office/drawing/2014/main" id="{77858D6E-BF88-492B-AEC0-37F47FEA41E1}"/>
+                <a16:creationId xmlns:a16="http://schemas.microsoft.com/office/drawing/2014/main" id="{2A1F5D21-2A6E-4A5D-8FBD-B94B06859108}"/>
               </a:ext>
             </a:extLst>
           </p:cNvPr>
@@ -6468,7 +6468,7 @@
           <p:cNvPr id="73" name="">
             <a:extLst xmlns:a="http://schemas.openxmlformats.org/drawingml/2006/main">
               <a:ext uri="{FF2B5EF4-FFF2-40B4-BE49-F238E27FC236}">
-                <a16:creationId xmlns:a16="http://schemas.microsoft.com/office/drawing/2014/main" id="{6133F8B9-1C07-44C9-8A4C-5A8C41D824F9}"/>
+                <a16:creationId xmlns:a16="http://schemas.microsoft.com/office/drawing/2014/main" id="{A599EBC0-FA95-4DAE-9F7D-83D0685B4EE3}"/>
               </a:ext>
             </a:extLst>
           </p:cNvPr>
@@ -6520,7 +6520,7 @@
           <p:cNvPr id="74" name="">
             <a:extLst xmlns:a="http://schemas.openxmlformats.org/drawingml/2006/main">
               <a:ext uri="{FF2B5EF4-FFF2-40B4-BE49-F238E27FC236}">
-                <a16:creationId xmlns:a16="http://schemas.microsoft.com/office/drawing/2014/main" id="{EBA8BA80-9696-48A5-A89E-A2290D32153D}"/>
+                <a16:creationId xmlns:a16="http://schemas.microsoft.com/office/drawing/2014/main" id="{40168B07-7C33-40C6-8865-BF7FEA0C9FCB}"/>
               </a:ext>
             </a:extLst>
           </p:cNvPr>
@@ -6572,7 +6572,7 @@
           <p:cNvPr id="75" name="">
             <a:extLst xmlns:a="http://schemas.openxmlformats.org/drawingml/2006/main">
               <a:ext uri="{FF2B5EF4-FFF2-40B4-BE49-F238E27FC236}">
-                <a16:creationId xmlns:a16="http://schemas.microsoft.com/office/drawing/2014/main" id="{CAB7FACB-1647-4790-B869-AA229C196741}"/>
+                <a16:creationId xmlns:a16="http://schemas.microsoft.com/office/drawing/2014/main" id="{CD179FE1-6CE6-499B-A081-44E7D187D12F}"/>
               </a:ext>
             </a:extLst>
           </p:cNvPr>
@@ -6624,7 +6624,7 @@
           <p:cNvPr id="76" name="">
             <a:extLst xmlns:a="http://schemas.openxmlformats.org/drawingml/2006/main">
               <a:ext uri="{FF2B5EF4-FFF2-40B4-BE49-F238E27FC236}">
-                <a16:creationId xmlns:a16="http://schemas.microsoft.com/office/drawing/2014/main" id="{AD69BA0D-1F14-4496-9A1E-0768F258625E}"/>
+                <a16:creationId xmlns:a16="http://schemas.microsoft.com/office/drawing/2014/main" id="{743C7654-5CC3-4B8E-8594-008E694B978F}"/>
               </a:ext>
             </a:extLst>
           </p:cNvPr>
@@ -6676,7 +6676,7 @@
           <p:cNvPr id="77" name="">
             <a:extLst xmlns:a="http://schemas.openxmlformats.org/drawingml/2006/main">
               <a:ext uri="{FF2B5EF4-FFF2-40B4-BE49-F238E27FC236}">
-                <a16:creationId xmlns:a16="http://schemas.microsoft.com/office/drawing/2014/main" id="{2951251C-5AAB-4E9B-9B2A-51EDA862BFC8}"/>
+                <a16:creationId xmlns:a16="http://schemas.microsoft.com/office/drawing/2014/main" id="{FDAA60BC-D79B-4768-88C0-47565FCEA4F3}"/>
               </a:ext>
             </a:extLst>
           </p:cNvPr>
@@ -6707,7 +6707,7 @@
           <p:cNvPr id="78" name="">
             <a:extLst xmlns:a="http://schemas.openxmlformats.org/drawingml/2006/main">
               <a:ext uri="{FF2B5EF4-FFF2-40B4-BE49-F238E27FC236}">
-                <a16:creationId xmlns:a16="http://schemas.microsoft.com/office/drawing/2014/main" id="{A45C1659-887D-42B0-BABD-F93486CDAFA4}"/>
+                <a16:creationId xmlns:a16="http://schemas.microsoft.com/office/drawing/2014/main" id="{E4F18F68-1441-408A-9C7A-CF5CF9724DAF}"/>
               </a:ext>
             </a:extLst>
           </p:cNvPr>
@@ -6759,7 +6759,7 @@
           <p:cNvPr id="79" name="">
             <a:extLst xmlns:a="http://schemas.openxmlformats.org/drawingml/2006/main">
               <a:ext uri="{FF2B5EF4-FFF2-40B4-BE49-F238E27FC236}">
-                <a16:creationId xmlns:a16="http://schemas.microsoft.com/office/drawing/2014/main" id="{00FBB2ED-AD0C-4048-B824-00EB59709670}"/>
+                <a16:creationId xmlns:a16="http://schemas.microsoft.com/office/drawing/2014/main" id="{286F846B-1F0D-4646-9B99-73EF11083486}"/>
               </a:ext>
             </a:extLst>
           </p:cNvPr>
@@ -6811,7 +6811,7 @@
           <p:cNvPr id="80" name="">
             <a:extLst xmlns:a="http://schemas.openxmlformats.org/drawingml/2006/main">
               <a:ext uri="{FF2B5EF4-FFF2-40B4-BE49-F238E27FC236}">
-                <a16:creationId xmlns:a16="http://schemas.microsoft.com/office/drawing/2014/main" id="{61E87FB1-5FE8-493E-966E-6F26895E5F57}"/>
+                <a16:creationId xmlns:a16="http://schemas.microsoft.com/office/drawing/2014/main" id="{CC6C383A-021C-4074-8E69-2CDAAC7CB688}"/>
               </a:ext>
             </a:extLst>
           </p:cNvPr>
@@ -6863,7 +6863,7 @@
           <p:cNvPr id="81" name="">
             <a:extLst xmlns:a="http://schemas.openxmlformats.org/drawingml/2006/main">
               <a:ext uri="{FF2B5EF4-FFF2-40B4-BE49-F238E27FC236}">
-                <a16:creationId xmlns:a16="http://schemas.microsoft.com/office/drawing/2014/main" id="{AA26565A-B830-4D25-9FDA-641484B28D87}"/>
+                <a16:creationId xmlns:a16="http://schemas.microsoft.com/office/drawing/2014/main" id="{20DB018C-572C-48AF-8701-9229051F5A77}"/>
               </a:ext>
             </a:extLst>
           </p:cNvPr>
@@ -6915,7 +6915,7 @@
           <p:cNvPr id="82" name="">
             <a:extLst xmlns:a="http://schemas.openxmlformats.org/drawingml/2006/main">
               <a:ext uri="{FF2B5EF4-FFF2-40B4-BE49-F238E27FC236}">
-                <a16:creationId xmlns:a16="http://schemas.microsoft.com/office/drawing/2014/main" id="{2C016493-6B09-48E1-B52C-7FA4C39A9298}"/>
+                <a16:creationId xmlns:a16="http://schemas.microsoft.com/office/drawing/2014/main" id="{A70B1D6F-50F1-4914-A0D9-094A230D4DF9}"/>
               </a:ext>
             </a:extLst>
           </p:cNvPr>
@@ -6967,7 +6967,7 @@
           <p:cNvPr id="83" name="">
             <a:extLst xmlns:a="http://schemas.openxmlformats.org/drawingml/2006/main">
               <a:ext uri="{FF2B5EF4-FFF2-40B4-BE49-F238E27FC236}">
-                <a16:creationId xmlns:a16="http://schemas.microsoft.com/office/drawing/2014/main" id="{A23B9180-A45E-4AC9-B533-2B592DEED6BB}"/>
+                <a16:creationId xmlns:a16="http://schemas.microsoft.com/office/drawing/2014/main" id="{DD8663F4-46BB-4A2E-8974-B01309346CFB}"/>
               </a:ext>
             </a:extLst>
           </p:cNvPr>
@@ -6998,7 +6998,7 @@
           <p:cNvPr id="84" name="">
             <a:extLst xmlns:a="http://schemas.openxmlformats.org/drawingml/2006/main">
               <a:ext uri="{FF2B5EF4-FFF2-40B4-BE49-F238E27FC236}">
-                <a16:creationId xmlns:a16="http://schemas.microsoft.com/office/drawing/2014/main" id="{30B93E89-6EB2-4F28-845C-374140B4F56A}"/>
+                <a16:creationId xmlns:a16="http://schemas.microsoft.com/office/drawing/2014/main" id="{6E3F120B-A3EC-466D-A0E4-5B9B1512DA94}"/>
               </a:ext>
             </a:extLst>
           </p:cNvPr>
@@ -7029,7 +7029,7 @@
           <p:cNvPr id="85" name="">
             <a:extLst xmlns:a="http://schemas.openxmlformats.org/drawingml/2006/main">
               <a:ext uri="{FF2B5EF4-FFF2-40B4-BE49-F238E27FC236}">
-                <a16:creationId xmlns:a16="http://schemas.microsoft.com/office/drawing/2014/main" id="{9553BA6B-1726-4E15-9C7E-310950F0FFCC}"/>
+                <a16:creationId xmlns:a16="http://schemas.microsoft.com/office/drawing/2014/main" id="{1EA033C6-291E-4AF2-8321-9CBD24F1C168}"/>
               </a:ext>
             </a:extLst>
           </p:cNvPr>
@@ -7081,7 +7081,7 @@
           <p:cNvPr id="86" name="">
             <a:extLst xmlns:a="http://schemas.openxmlformats.org/drawingml/2006/main">
               <a:ext uri="{FF2B5EF4-FFF2-40B4-BE49-F238E27FC236}">
-                <a16:creationId xmlns:a16="http://schemas.microsoft.com/office/drawing/2014/main" id="{1642D433-8B30-401D-93D2-940EAB380742}"/>
+                <a16:creationId xmlns:a16="http://schemas.microsoft.com/office/drawing/2014/main" id="{DDDD6C09-E74E-4B86-B44F-8F496D7821FB}"/>
               </a:ext>
             </a:extLst>
           </p:cNvPr>
@@ -7133,7 +7133,7 @@
           <p:cNvPr id="87" name="">
             <a:extLst xmlns:a="http://schemas.openxmlformats.org/drawingml/2006/main">
               <a:ext uri="{FF2B5EF4-FFF2-40B4-BE49-F238E27FC236}">
-                <a16:creationId xmlns:a16="http://schemas.microsoft.com/office/drawing/2014/main" id="{EC0001FC-4A55-41DA-B1A4-7F7B03B0D2B1}"/>
+                <a16:creationId xmlns:a16="http://schemas.microsoft.com/office/drawing/2014/main" id="{0750FD40-542A-45D2-8CDB-8E9C1FD68A24}"/>
               </a:ext>
             </a:extLst>
           </p:cNvPr>
@@ -7185,7 +7185,7 @@
           <p:cNvPr id="88" name="">
             <a:extLst xmlns:a="http://schemas.openxmlformats.org/drawingml/2006/main">
               <a:ext uri="{FF2B5EF4-FFF2-40B4-BE49-F238E27FC236}">
-                <a16:creationId xmlns:a16="http://schemas.microsoft.com/office/drawing/2014/main" id="{B11D05DE-C54A-4CDF-B04A-F8394E00F0AB}"/>
+                <a16:creationId xmlns:a16="http://schemas.microsoft.com/office/drawing/2014/main" id="{28AEF847-C393-4325-AE7C-57089D63750D}"/>
               </a:ext>
             </a:extLst>
           </p:cNvPr>
@@ -7237,7 +7237,7 @@
           <p:cNvPr id="89" name="">
             <a:extLst xmlns:a="http://schemas.openxmlformats.org/drawingml/2006/main">
               <a:ext uri="{FF2B5EF4-FFF2-40B4-BE49-F238E27FC236}">
-                <a16:creationId xmlns:a16="http://schemas.microsoft.com/office/drawing/2014/main" id="{09C9B022-51A7-4A2B-AC33-EB22C25CA692}"/>
+                <a16:creationId xmlns:a16="http://schemas.microsoft.com/office/drawing/2014/main" id="{D4E1B8BF-6014-41C8-B1A3-9657BB325745}"/>
               </a:ext>
             </a:extLst>
           </p:cNvPr>
@@ -7289,7 +7289,7 @@
           <p:cNvPr id="90" name="">
             <a:extLst xmlns:a="http://schemas.openxmlformats.org/drawingml/2006/main">
               <a:ext uri="{FF2B5EF4-FFF2-40B4-BE49-F238E27FC236}">
-                <a16:creationId xmlns:a16="http://schemas.microsoft.com/office/drawing/2014/main" id="{90AB4F5D-89DB-439E-AC7A-9ACE00EBF039}"/>
+                <a16:creationId xmlns:a16="http://schemas.microsoft.com/office/drawing/2014/main" id="{E92FD977-5550-4868-BB5E-3723A33A1EEE}"/>
               </a:ext>
             </a:extLst>
           </p:cNvPr>
@@ -7320,7 +7320,7 @@
           <p:cNvPr id="91" name="">
             <a:extLst xmlns:a="http://schemas.openxmlformats.org/drawingml/2006/main">
               <a:ext uri="{FF2B5EF4-FFF2-40B4-BE49-F238E27FC236}">
-                <a16:creationId xmlns:a16="http://schemas.microsoft.com/office/drawing/2014/main" id="{C91C343D-7BAD-490D-AC7D-1F94992F1346}"/>
+                <a16:creationId xmlns:a16="http://schemas.microsoft.com/office/drawing/2014/main" id="{DCD412AE-A802-4425-99BF-630A24C94D27}"/>
               </a:ext>
             </a:extLst>
           </p:cNvPr>
@@ -7372,7 +7372,7 @@
           <p:cNvPr id="92" name="">
             <a:extLst xmlns:a="http://schemas.openxmlformats.org/drawingml/2006/main">
               <a:ext uri="{FF2B5EF4-FFF2-40B4-BE49-F238E27FC236}">
-                <a16:creationId xmlns:a16="http://schemas.microsoft.com/office/drawing/2014/main" id="{862FAB0A-0A01-4866-9FE1-D7E2A997FBF7}"/>
+                <a16:creationId xmlns:a16="http://schemas.microsoft.com/office/drawing/2014/main" id="{368DEA30-603E-4D1E-8BD0-ABBBFB3C8710}"/>
               </a:ext>
             </a:extLst>
           </p:cNvPr>
@@ -7424,7 +7424,7 @@
           <p:cNvPr id="93" name="">
             <a:extLst xmlns:a="http://schemas.openxmlformats.org/drawingml/2006/main">
               <a:ext uri="{FF2B5EF4-FFF2-40B4-BE49-F238E27FC236}">
-                <a16:creationId xmlns:a16="http://schemas.microsoft.com/office/drawing/2014/main" id="{4BA4E3A9-B778-4D8E-8A77-4F0B9B70B36F}"/>
+                <a16:creationId xmlns:a16="http://schemas.microsoft.com/office/drawing/2014/main" id="{6D9BEC03-6215-472F-B9FF-A88E29072F49}"/>
               </a:ext>
             </a:extLst>
           </p:cNvPr>
@@ -7476,7 +7476,7 @@
           <p:cNvPr id="94" name="">
             <a:extLst xmlns:a="http://schemas.openxmlformats.org/drawingml/2006/main">
               <a:ext uri="{FF2B5EF4-FFF2-40B4-BE49-F238E27FC236}">
-                <a16:creationId xmlns:a16="http://schemas.microsoft.com/office/drawing/2014/main" id="{88C30DAE-8F8B-41EF-997A-D5DD56E9C2EC}"/>
+                <a16:creationId xmlns:a16="http://schemas.microsoft.com/office/drawing/2014/main" id="{F93AF1BD-0A50-4B97-B547-90D98FCCF798}"/>
               </a:ext>
             </a:extLst>
           </p:cNvPr>
@@ -7528,7 +7528,7 @@
           <p:cNvPr id="95" name="">
             <a:extLst xmlns:a="http://schemas.openxmlformats.org/drawingml/2006/main">
               <a:ext uri="{FF2B5EF4-FFF2-40B4-BE49-F238E27FC236}">
-                <a16:creationId xmlns:a16="http://schemas.microsoft.com/office/drawing/2014/main" id="{4A5E9603-95C9-4D2C-91B9-0E2F79D1A878}"/>
+                <a16:creationId xmlns:a16="http://schemas.microsoft.com/office/drawing/2014/main" id="{4BC46AED-CA43-468A-85EB-2B3661A742DA}"/>
               </a:ext>
             </a:extLst>
           </p:cNvPr>
@@ -7580,7 +7580,7 @@
           <p:cNvPr id="96" name="">
             <a:extLst xmlns:a="http://schemas.openxmlformats.org/drawingml/2006/main">
               <a:ext uri="{FF2B5EF4-FFF2-40B4-BE49-F238E27FC236}">
-                <a16:creationId xmlns:a16="http://schemas.microsoft.com/office/drawing/2014/main" id="{D88DE414-CD95-49C7-9CBF-0CE43685F705}"/>
+                <a16:creationId xmlns:a16="http://schemas.microsoft.com/office/drawing/2014/main" id="{627C1A29-8741-4BF5-B8BF-5F30871FBD72}"/>
               </a:ext>
             </a:extLst>
           </p:cNvPr>
@@ -7611,7 +7611,7 @@
           <p:cNvPr id="97" name="">
             <a:extLst xmlns:a="http://schemas.openxmlformats.org/drawingml/2006/main">
               <a:ext uri="{FF2B5EF4-FFF2-40B4-BE49-F238E27FC236}">
-                <a16:creationId xmlns:a16="http://schemas.microsoft.com/office/drawing/2014/main" id="{25ED4DF8-4E2F-4034-9623-7D2B57AA58CF}"/>
+                <a16:creationId xmlns:a16="http://schemas.microsoft.com/office/drawing/2014/main" id="{6E775A3A-6F14-4D2D-B1F2-35425919C9B7}"/>
               </a:ext>
             </a:extLst>
           </p:cNvPr>
@@ -7642,7 +7642,7 @@
           <p:cNvPr id="98" name="">
             <a:extLst xmlns:a="http://schemas.openxmlformats.org/drawingml/2006/main">
               <a:ext uri="{FF2B5EF4-FFF2-40B4-BE49-F238E27FC236}">
-                <a16:creationId xmlns:a16="http://schemas.microsoft.com/office/drawing/2014/main" id="{D39EE24D-10EC-4217-8719-59356BE47D7E}"/>
+                <a16:creationId xmlns:a16="http://schemas.microsoft.com/office/drawing/2014/main" id="{3121F67F-B1EC-41B4-A2B5-5D431523BA33}"/>
               </a:ext>
             </a:extLst>
           </p:cNvPr>
@@ -7694,7 +7694,7 @@
           <p:cNvPr id="99" name="">
             <a:extLst xmlns:a="http://schemas.openxmlformats.org/drawingml/2006/main">
               <a:ext uri="{FF2B5EF4-FFF2-40B4-BE49-F238E27FC236}">
-                <a16:creationId xmlns:a16="http://schemas.microsoft.com/office/drawing/2014/main" id="{6B947CF4-4617-45D5-9862-013CB7CA7C42}"/>
+                <a16:creationId xmlns:a16="http://schemas.microsoft.com/office/drawing/2014/main" id="{79382D70-4C1B-4237-8BD4-A079E4EE8121}"/>
               </a:ext>
             </a:extLst>
           </p:cNvPr>
@@ -7746,7 +7746,7 @@
           <p:cNvPr id="100" name="">
             <a:extLst xmlns:a="http://schemas.openxmlformats.org/drawingml/2006/main">
               <a:ext uri="{FF2B5EF4-FFF2-40B4-BE49-F238E27FC236}">
-                <a16:creationId xmlns:a16="http://schemas.microsoft.com/office/drawing/2014/main" id="{FD1D6403-8B64-48DE-870A-BA4A9F07C66E}"/>
+                <a16:creationId xmlns:a16="http://schemas.microsoft.com/office/drawing/2014/main" id="{3ADE5962-77A4-43C5-AD06-CFF70A65E278}"/>
               </a:ext>
             </a:extLst>
           </p:cNvPr>
@@ -7798,7 +7798,7 @@
           <p:cNvPr id="101" name="">
             <a:extLst xmlns:a="http://schemas.openxmlformats.org/drawingml/2006/main">
               <a:ext uri="{FF2B5EF4-FFF2-40B4-BE49-F238E27FC236}">
-                <a16:creationId xmlns:a16="http://schemas.microsoft.com/office/drawing/2014/main" id="{E938D5E5-5925-4A1A-A5BF-5DFD35EECB99}"/>
+                <a16:creationId xmlns:a16="http://schemas.microsoft.com/office/drawing/2014/main" id="{09EC8078-5C7F-48CD-B3C0-CC6CC46DBDC3}"/>
               </a:ext>
             </a:extLst>
           </p:cNvPr>
@@ -7850,7 +7850,7 @@
           <p:cNvPr id="102" name="">
             <a:extLst xmlns:a="http://schemas.openxmlformats.org/drawingml/2006/main">
               <a:ext uri="{FF2B5EF4-FFF2-40B4-BE49-F238E27FC236}">
-                <a16:creationId xmlns:a16="http://schemas.microsoft.com/office/drawing/2014/main" id="{E0CE05CC-3DA9-46B4-ABF2-3732750EF315}"/>
+                <a16:creationId xmlns:a16="http://schemas.microsoft.com/office/drawing/2014/main" id="{C6D3EB53-6E22-4BAA-8BB4-F59AF158DE91}"/>
               </a:ext>
             </a:extLst>
           </p:cNvPr>
@@ -7900,7 +7900,7 @@
     </p:spTree>
     <p:extLst>
       <p:ext uri="{BB962C8B-B14F-4D97-AF65-F5344CB8AC3E}">
-        <p14:creationId xmlns:p14="http://schemas.microsoft.com/office/powerpoint/2010/main" val="451899121"/>
+        <p14:creationId xmlns:p14="http://schemas.microsoft.com/office/powerpoint/2010/main" val="925141761"/>
       </p:ext>
     </p:extLst>
   </p:cSld>
@@ -7931,7 +7931,7 @@
           <p:cNvPr id="98" name="">
             <a:extLst xmlns:a="http://schemas.openxmlformats.org/drawingml/2006/main">
               <a:ext uri="{FF2B5EF4-FFF2-40B4-BE49-F238E27FC236}">
-                <a16:creationId xmlns:a16="http://schemas.microsoft.com/office/drawing/2014/main" id="{0A47D754-68FE-423A-B759-371F42EA14AF}"/>
+                <a16:creationId xmlns:a16="http://schemas.microsoft.com/office/drawing/2014/main" id="{2E516150-6B0E-4206-9626-AC2E6C6259BA}"/>
               </a:ext>
             </a:extLst>
           </p:cNvPr>
@@ -7964,7 +7964,7 @@
           <p:cNvPr id="2" name="">
             <a:extLst xmlns:a="http://schemas.openxmlformats.org/drawingml/2006/main">
               <a:ext uri="{FF2B5EF4-FFF2-40B4-BE49-F238E27FC236}">
-                <a16:creationId xmlns:a16="http://schemas.microsoft.com/office/drawing/2014/main" id="{714429BC-1D35-46B5-9EDA-61EBB411915C}"/>
+                <a16:creationId xmlns:a16="http://schemas.microsoft.com/office/drawing/2014/main" id="{A10DCAAF-3B25-41BD-9690-AB6E7AD3C3D2}"/>
               </a:ext>
             </a:extLst>
           </p:cNvPr>
@@ -7995,7 +7995,7 @@
           <p:cNvPr id="3" name="">
             <a:extLst xmlns:a="http://schemas.openxmlformats.org/drawingml/2006/main">
               <a:ext uri="{FF2B5EF4-FFF2-40B4-BE49-F238E27FC236}">
-                <a16:creationId xmlns:a16="http://schemas.microsoft.com/office/drawing/2014/main" id="{84FCE1E4-F135-43C7-92EF-83A0E023697D}"/>
+                <a16:creationId xmlns:a16="http://schemas.microsoft.com/office/drawing/2014/main" id="{B4C6FE15-5DA2-479B-8EB1-8A3A0C4D609B}"/>
               </a:ext>
             </a:extLst>
           </p:cNvPr>
@@ -8047,7 +8047,7 @@
           <p:cNvPr id="4" name="">
             <a:extLst xmlns:a="http://schemas.openxmlformats.org/drawingml/2006/main">
               <a:ext uri="{FF2B5EF4-FFF2-40B4-BE49-F238E27FC236}">
-                <a16:creationId xmlns:a16="http://schemas.microsoft.com/office/drawing/2014/main" id="{3BADA557-D3F6-4459-BBEC-41C4AE2AB132}"/>
+                <a16:creationId xmlns:a16="http://schemas.microsoft.com/office/drawing/2014/main" id="{4D4604E1-5F35-4EAF-B1C0-DA437745BF0B}"/>
               </a:ext>
             </a:extLst>
           </p:cNvPr>
@@ -8099,7 +8099,7 @@
           <p:cNvPr id="5" name="">
             <a:extLst xmlns:a="http://schemas.openxmlformats.org/drawingml/2006/main">
               <a:ext uri="{FF2B5EF4-FFF2-40B4-BE49-F238E27FC236}">
-                <a16:creationId xmlns:a16="http://schemas.microsoft.com/office/drawing/2014/main" id="{5B9BF90C-1011-4DEE-A769-7FC87E353030}"/>
+                <a16:creationId xmlns:a16="http://schemas.microsoft.com/office/drawing/2014/main" id="{CD6EBFD0-A3E1-4A69-A287-230CB55A4D01}"/>
               </a:ext>
             </a:extLst>
           </p:cNvPr>
@@ -8134,7 +8134,7 @@
           <p:nvPr/>
         </p:nvPicPr>
         <p:blipFill>
-          <a:blip xmlns:r="http://schemas.openxmlformats.org/officeDocument/2006/relationships" xmlns:a="http://schemas.openxmlformats.org/drawingml/2006/main" r:embed="R13e5dc162ed84a2f"/>
+          <a:blip xmlns:r="http://schemas.openxmlformats.org/officeDocument/2006/relationships" xmlns:a="http://schemas.openxmlformats.org/drawingml/2006/main" r:embed="Re7d54d15a7d34bba"/>
           <a:stretch xmlns:a="http://schemas.openxmlformats.org/drawingml/2006/main"/>
         </p:blipFill>
         <p:spPr>
@@ -8152,7 +8152,7 @@
           <p:cNvPr id="7" name="">
             <a:extLst xmlns:a="http://schemas.openxmlformats.org/drawingml/2006/main">
               <a:ext uri="{FF2B5EF4-FFF2-40B4-BE49-F238E27FC236}">
-                <a16:creationId xmlns:a16="http://schemas.microsoft.com/office/drawing/2014/main" id="{9ECD3BB5-43DB-40F2-854B-2EEA6BF35844}"/>
+                <a16:creationId xmlns:a16="http://schemas.microsoft.com/office/drawing/2014/main" id="{4985ECF1-DABE-4228-B02C-12EA98D2EE78}"/>
               </a:ext>
             </a:extLst>
           </p:cNvPr>
@@ -8204,7 +8204,7 @@
           <p:cNvPr id="8" name="">
             <a:extLst xmlns:a="http://schemas.openxmlformats.org/drawingml/2006/main">
               <a:ext uri="{FF2B5EF4-FFF2-40B4-BE49-F238E27FC236}">
-                <a16:creationId xmlns:a16="http://schemas.microsoft.com/office/drawing/2014/main" id="{2BE38594-1C5F-4BE2-BC1A-2A055DE259D5}"/>
+                <a16:creationId xmlns:a16="http://schemas.microsoft.com/office/drawing/2014/main" id="{A18A55AB-61F4-4FD4-ACF6-87AF051A56C8}"/>
               </a:ext>
             </a:extLst>
           </p:cNvPr>
@@ -8256,7 +8256,7 @@
           <p:cNvPr id="9" name="">
             <a:extLst xmlns:a="http://schemas.openxmlformats.org/drawingml/2006/main">
               <a:ext uri="{FF2B5EF4-FFF2-40B4-BE49-F238E27FC236}">
-                <a16:creationId xmlns:a16="http://schemas.microsoft.com/office/drawing/2014/main" id="{53EAAB96-327B-4FBA-AAB7-42FC79952E9C}"/>
+                <a16:creationId xmlns:a16="http://schemas.microsoft.com/office/drawing/2014/main" id="{BB9D6F51-B359-486C-8211-0C01333B0BDE}"/>
               </a:ext>
             </a:extLst>
           </p:cNvPr>
@@ -8308,7 +8308,7 @@
           <p:cNvPr id="10" name="">
             <a:extLst xmlns:a="http://schemas.openxmlformats.org/drawingml/2006/main">
               <a:ext uri="{FF2B5EF4-FFF2-40B4-BE49-F238E27FC236}">
-                <a16:creationId xmlns:a16="http://schemas.microsoft.com/office/drawing/2014/main" id="{3D7B595B-8E3E-4934-B788-24F69E7378DA}"/>
+                <a16:creationId xmlns:a16="http://schemas.microsoft.com/office/drawing/2014/main" id="{B2B86C24-E2A1-4882-BFB2-1162D63DCE0A}"/>
               </a:ext>
             </a:extLst>
           </p:cNvPr>
@@ -8360,7 +8360,7 @@
           <p:cNvPr id="11" name="">
             <a:extLst xmlns:a="http://schemas.openxmlformats.org/drawingml/2006/main">
               <a:ext uri="{FF2B5EF4-FFF2-40B4-BE49-F238E27FC236}">
-                <a16:creationId xmlns:a16="http://schemas.microsoft.com/office/drawing/2014/main" id="{7211924D-5184-43B0-9899-6C64FE3B151E}"/>
+                <a16:creationId xmlns:a16="http://schemas.microsoft.com/office/drawing/2014/main" id="{23F709B8-96CF-40F2-95E8-3BD23C2A9CF0}"/>
               </a:ext>
             </a:extLst>
           </p:cNvPr>
@@ -8391,7 +8391,7 @@
           <p:cNvPr id="12" name="">
             <a:extLst xmlns:a="http://schemas.openxmlformats.org/drawingml/2006/main">
               <a:ext uri="{FF2B5EF4-FFF2-40B4-BE49-F238E27FC236}">
-                <a16:creationId xmlns:a16="http://schemas.microsoft.com/office/drawing/2014/main" id="{C546BA93-23AC-4395-8CE0-89E18F6262BE}"/>
+                <a16:creationId xmlns:a16="http://schemas.microsoft.com/office/drawing/2014/main" id="{B8D6EC7D-43E7-4314-9B17-5C57AD62DB78}"/>
               </a:ext>
             </a:extLst>
           </p:cNvPr>
@@ -8422,7 +8422,7 @@
           <p:cNvPr id="13" name="">
             <a:extLst xmlns:a="http://schemas.openxmlformats.org/drawingml/2006/main">
               <a:ext uri="{FF2B5EF4-FFF2-40B4-BE49-F238E27FC236}">
-                <a16:creationId xmlns:a16="http://schemas.microsoft.com/office/drawing/2014/main" id="{59121D3E-6166-4D98-93BE-F8F78ACE232F}"/>
+                <a16:creationId xmlns:a16="http://schemas.microsoft.com/office/drawing/2014/main" id="{78017ED9-EE05-4FF9-BEE3-C9B4DE61C05F}"/>
               </a:ext>
             </a:extLst>
           </p:cNvPr>
@@ -8474,7 +8474,7 @@
           <p:cNvPr id="14" name="">
             <a:extLst xmlns:a="http://schemas.openxmlformats.org/drawingml/2006/main">
               <a:ext uri="{FF2B5EF4-FFF2-40B4-BE49-F238E27FC236}">
-                <a16:creationId xmlns:a16="http://schemas.microsoft.com/office/drawing/2014/main" id="{78E9DC3D-000A-416A-B897-30A2EEA6E289}"/>
+                <a16:creationId xmlns:a16="http://schemas.microsoft.com/office/drawing/2014/main" id="{25B9524B-B3DB-4F14-95BA-B37909C2906A}"/>
               </a:ext>
             </a:extLst>
           </p:cNvPr>
@@ -8526,7 +8526,7 @@
           <p:cNvPr id="15" name="">
             <a:extLst xmlns:a="http://schemas.openxmlformats.org/drawingml/2006/main">
               <a:ext uri="{FF2B5EF4-FFF2-40B4-BE49-F238E27FC236}">
-                <a16:creationId xmlns:a16="http://schemas.microsoft.com/office/drawing/2014/main" id="{65826B1F-3E9F-4F6B-8C97-B18BAABEAC87}"/>
+                <a16:creationId xmlns:a16="http://schemas.microsoft.com/office/drawing/2014/main" id="{5A1B1592-B3A7-4177-A789-B59A4F73FCE5}"/>
               </a:ext>
             </a:extLst>
           </p:cNvPr>
@@ -8578,7 +8578,7 @@
           <p:cNvPr id="16" name="">
             <a:extLst xmlns:a="http://schemas.openxmlformats.org/drawingml/2006/main">
               <a:ext uri="{FF2B5EF4-FFF2-40B4-BE49-F238E27FC236}">
-                <a16:creationId xmlns:a16="http://schemas.microsoft.com/office/drawing/2014/main" id="{FE36DE34-32AE-49ED-AD62-4EBDD4A5D2E8}"/>
+                <a16:creationId xmlns:a16="http://schemas.microsoft.com/office/drawing/2014/main" id="{605F2C6C-5043-4456-9155-B636B6868F94}"/>
               </a:ext>
             </a:extLst>
           </p:cNvPr>
@@ -8630,7 +8630,7 @@
           <p:cNvPr id="17" name="">
             <a:extLst xmlns:a="http://schemas.openxmlformats.org/drawingml/2006/main">
               <a:ext uri="{FF2B5EF4-FFF2-40B4-BE49-F238E27FC236}">
-                <a16:creationId xmlns:a16="http://schemas.microsoft.com/office/drawing/2014/main" id="{A93DC616-8EBC-4C73-9665-81EAD108E955}"/>
+                <a16:creationId xmlns:a16="http://schemas.microsoft.com/office/drawing/2014/main" id="{0D189D5E-0F92-4BED-BF24-E0D1E6BF4C43}"/>
               </a:ext>
             </a:extLst>
           </p:cNvPr>
@@ -8682,7 +8682,7 @@
           <p:cNvPr id="18" name="">
             <a:extLst xmlns:a="http://schemas.openxmlformats.org/drawingml/2006/main">
               <a:ext uri="{FF2B5EF4-FFF2-40B4-BE49-F238E27FC236}">
-                <a16:creationId xmlns:a16="http://schemas.microsoft.com/office/drawing/2014/main" id="{9C8807BF-89B2-4C32-951C-52FA5FB30AC2}"/>
+                <a16:creationId xmlns:a16="http://schemas.microsoft.com/office/drawing/2014/main" id="{C44E5433-6A72-4967-8009-D5FFF57E03CE}"/>
               </a:ext>
             </a:extLst>
           </p:cNvPr>
@@ -8713,7 +8713,7 @@
           <p:cNvPr id="19" name="">
             <a:extLst xmlns:a="http://schemas.openxmlformats.org/drawingml/2006/main">
               <a:ext uri="{FF2B5EF4-FFF2-40B4-BE49-F238E27FC236}">
-                <a16:creationId xmlns:a16="http://schemas.microsoft.com/office/drawing/2014/main" id="{1A21BE1F-A04F-42A7-85F3-3C5E3DAAE630}"/>
+                <a16:creationId xmlns:a16="http://schemas.microsoft.com/office/drawing/2014/main" id="{226D5980-55F5-473D-ABD4-D470098641A7}"/>
               </a:ext>
             </a:extLst>
           </p:cNvPr>
@@ -8765,7 +8765,7 @@
           <p:cNvPr id="20" name="">
             <a:extLst xmlns:a="http://schemas.openxmlformats.org/drawingml/2006/main">
               <a:ext uri="{FF2B5EF4-FFF2-40B4-BE49-F238E27FC236}">
-                <a16:creationId xmlns:a16="http://schemas.microsoft.com/office/drawing/2014/main" id="{45C9583A-6F21-48B9-9A3E-A405F43F2EF9}"/>
+                <a16:creationId xmlns:a16="http://schemas.microsoft.com/office/drawing/2014/main" id="{DC143886-9190-41B7-8AE3-B26AF52C8DCD}"/>
               </a:ext>
             </a:extLst>
           </p:cNvPr>
@@ -8817,7 +8817,7 @@
           <p:cNvPr id="21" name="">
             <a:extLst xmlns:a="http://schemas.openxmlformats.org/drawingml/2006/main">
               <a:ext uri="{FF2B5EF4-FFF2-40B4-BE49-F238E27FC236}">
-                <a16:creationId xmlns:a16="http://schemas.microsoft.com/office/drawing/2014/main" id="{2C27A294-7E07-4A96-80F3-54B7E1CA0B00}"/>
+                <a16:creationId xmlns:a16="http://schemas.microsoft.com/office/drawing/2014/main" id="{6D7EC182-8C78-482C-84E2-578F738ED217}"/>
               </a:ext>
             </a:extLst>
           </p:cNvPr>
@@ -8869,7 +8869,7 @@
           <p:cNvPr id="22" name="">
             <a:extLst xmlns:a="http://schemas.openxmlformats.org/drawingml/2006/main">
               <a:ext uri="{FF2B5EF4-FFF2-40B4-BE49-F238E27FC236}">
-                <a16:creationId xmlns:a16="http://schemas.microsoft.com/office/drawing/2014/main" id="{9E58AEE0-E69D-4BEB-A3C3-32BE1B98FC39}"/>
+                <a16:creationId xmlns:a16="http://schemas.microsoft.com/office/drawing/2014/main" id="{4F556EB9-E48E-4AFA-BEF4-2345904FA052}"/>
               </a:ext>
             </a:extLst>
           </p:cNvPr>
@@ -8921,7 +8921,7 @@
           <p:cNvPr id="23" name="">
             <a:extLst xmlns:a="http://schemas.openxmlformats.org/drawingml/2006/main">
               <a:ext uri="{FF2B5EF4-FFF2-40B4-BE49-F238E27FC236}">
-                <a16:creationId xmlns:a16="http://schemas.microsoft.com/office/drawing/2014/main" id="{E62BBD21-9CA4-4F57-B9DA-B2F3FA592727}"/>
+                <a16:creationId xmlns:a16="http://schemas.microsoft.com/office/drawing/2014/main" id="{8314A9C7-0649-41CB-B0CE-0A529F19358D}"/>
               </a:ext>
             </a:extLst>
           </p:cNvPr>
@@ -8973,7 +8973,7 @@
           <p:cNvPr id="24" name="">
             <a:extLst xmlns:a="http://schemas.openxmlformats.org/drawingml/2006/main">
               <a:ext uri="{FF2B5EF4-FFF2-40B4-BE49-F238E27FC236}">
-                <a16:creationId xmlns:a16="http://schemas.microsoft.com/office/drawing/2014/main" id="{A3A0285D-2023-4492-A77D-8070CC6A68FC}"/>
+                <a16:creationId xmlns:a16="http://schemas.microsoft.com/office/drawing/2014/main" id="{E6021989-E319-4215-9571-1A7B174378A4}"/>
               </a:ext>
             </a:extLst>
           </p:cNvPr>
@@ -9004,7 +9004,7 @@
           <p:cNvPr id="25" name="">
             <a:extLst xmlns:a="http://schemas.openxmlformats.org/drawingml/2006/main">
               <a:ext uri="{FF2B5EF4-FFF2-40B4-BE49-F238E27FC236}">
-                <a16:creationId xmlns:a16="http://schemas.microsoft.com/office/drawing/2014/main" id="{B5CEE5FE-B137-4C7F-8E5C-C88913A3A178}"/>
+                <a16:creationId xmlns:a16="http://schemas.microsoft.com/office/drawing/2014/main" id="{CCAD155C-9E7E-4750-A161-96699E9308BA}"/>
               </a:ext>
             </a:extLst>
           </p:cNvPr>
@@ -9035,7 +9035,7 @@
           <p:cNvPr id="26" name="">
             <a:extLst xmlns:a="http://schemas.openxmlformats.org/drawingml/2006/main">
               <a:ext uri="{FF2B5EF4-FFF2-40B4-BE49-F238E27FC236}">
-                <a16:creationId xmlns:a16="http://schemas.microsoft.com/office/drawing/2014/main" id="{4185860B-74A7-43B4-9408-BECA2C5CD4AD}"/>
+                <a16:creationId xmlns:a16="http://schemas.microsoft.com/office/drawing/2014/main" id="{D604AFAE-1723-48B7-9899-7AE032DFECD8}"/>
               </a:ext>
             </a:extLst>
           </p:cNvPr>
@@ -9087,7 +9087,7 @@
           <p:cNvPr id="27" name="">
             <a:extLst xmlns:a="http://schemas.openxmlformats.org/drawingml/2006/main">
               <a:ext uri="{FF2B5EF4-FFF2-40B4-BE49-F238E27FC236}">
-                <a16:creationId xmlns:a16="http://schemas.microsoft.com/office/drawing/2014/main" id="{1F0FC1C4-F2DA-487F-85ED-416DB88F9204}"/>
+                <a16:creationId xmlns:a16="http://schemas.microsoft.com/office/drawing/2014/main" id="{8B2BC66E-CAA3-4D9D-845C-0CE2DF215F82}"/>
               </a:ext>
             </a:extLst>
           </p:cNvPr>
@@ -9139,7 +9139,7 @@
           <p:cNvPr id="28" name="">
             <a:extLst xmlns:a="http://schemas.openxmlformats.org/drawingml/2006/main">
               <a:ext uri="{FF2B5EF4-FFF2-40B4-BE49-F238E27FC236}">
-                <a16:creationId xmlns:a16="http://schemas.microsoft.com/office/drawing/2014/main" id="{AB92B200-07A4-40FD-82AD-BF718C4B8AA7}"/>
+                <a16:creationId xmlns:a16="http://schemas.microsoft.com/office/drawing/2014/main" id="{888DD065-C9F2-401E-A33F-6526995A80D5}"/>
               </a:ext>
             </a:extLst>
           </p:cNvPr>
@@ -9191,7 +9191,7 @@
           <p:cNvPr id="29" name="">
             <a:extLst xmlns:a="http://schemas.openxmlformats.org/drawingml/2006/main">
               <a:ext uri="{FF2B5EF4-FFF2-40B4-BE49-F238E27FC236}">
-                <a16:creationId xmlns:a16="http://schemas.microsoft.com/office/drawing/2014/main" id="{4AAFE964-715D-40AC-A7DB-48A3314411B8}"/>
+                <a16:creationId xmlns:a16="http://schemas.microsoft.com/office/drawing/2014/main" id="{47C7FC04-719A-4472-96A5-D9D87F5BEB7E}"/>
               </a:ext>
             </a:extLst>
           </p:cNvPr>
@@ -9243,7 +9243,7 @@
           <p:cNvPr id="30" name="">
             <a:extLst xmlns:a="http://schemas.openxmlformats.org/drawingml/2006/main">
               <a:ext uri="{FF2B5EF4-FFF2-40B4-BE49-F238E27FC236}">
-                <a16:creationId xmlns:a16="http://schemas.microsoft.com/office/drawing/2014/main" id="{5C922C64-966E-444D-8104-6A8006595F8F}"/>
+                <a16:creationId xmlns:a16="http://schemas.microsoft.com/office/drawing/2014/main" id="{901F2AC0-A877-476B-B671-ECA8DE7DA55E}"/>
               </a:ext>
             </a:extLst>
           </p:cNvPr>
@@ -9295,7 +9295,7 @@
           <p:cNvPr id="31" name="">
             <a:extLst xmlns:a="http://schemas.openxmlformats.org/drawingml/2006/main">
               <a:ext uri="{FF2B5EF4-FFF2-40B4-BE49-F238E27FC236}">
-                <a16:creationId xmlns:a16="http://schemas.microsoft.com/office/drawing/2014/main" id="{0F9CE410-F0C1-4797-9930-D7D5FBAECE57}"/>
+                <a16:creationId xmlns:a16="http://schemas.microsoft.com/office/drawing/2014/main" id="{1B1999BA-C2AC-4C04-8F01-69948FA430BD}"/>
               </a:ext>
             </a:extLst>
           </p:cNvPr>
@@ -9326,7 +9326,7 @@
           <p:cNvPr id="32" name="">
             <a:extLst xmlns:a="http://schemas.openxmlformats.org/drawingml/2006/main">
               <a:ext uri="{FF2B5EF4-FFF2-40B4-BE49-F238E27FC236}">
-                <a16:creationId xmlns:a16="http://schemas.microsoft.com/office/drawing/2014/main" id="{7E8FA411-0FD5-48E2-9C16-2C041E1A7B98}"/>
+                <a16:creationId xmlns:a16="http://schemas.microsoft.com/office/drawing/2014/main" id="{CE70D656-8352-454E-9126-C8124577589E}"/>
               </a:ext>
             </a:extLst>
           </p:cNvPr>
@@ -9378,7 +9378,7 @@
           <p:cNvPr id="33" name="">
             <a:extLst xmlns:a="http://schemas.openxmlformats.org/drawingml/2006/main">
               <a:ext uri="{FF2B5EF4-FFF2-40B4-BE49-F238E27FC236}">
-                <a16:creationId xmlns:a16="http://schemas.microsoft.com/office/drawing/2014/main" id="{69232CB2-EDF7-4AB5-8954-9E5015EB7C2A}"/>
+                <a16:creationId xmlns:a16="http://schemas.microsoft.com/office/drawing/2014/main" id="{105D01DF-8365-4510-B755-32CD57B13B7A}"/>
               </a:ext>
             </a:extLst>
           </p:cNvPr>
@@ -9430,7 +9430,7 @@
           <p:cNvPr id="34" name="">
             <a:extLst xmlns:a="http://schemas.openxmlformats.org/drawingml/2006/main">
               <a:ext uri="{FF2B5EF4-FFF2-40B4-BE49-F238E27FC236}">
-                <a16:creationId xmlns:a16="http://schemas.microsoft.com/office/drawing/2014/main" id="{49050C7D-D20E-4813-96D2-504F5032A616}"/>
+                <a16:creationId xmlns:a16="http://schemas.microsoft.com/office/drawing/2014/main" id="{75390A3B-1F95-472D-A32E-3C87DA14197C}"/>
               </a:ext>
             </a:extLst>
           </p:cNvPr>
@@ -9482,7 +9482,7 @@
           <p:cNvPr id="35" name="">
             <a:extLst xmlns:a="http://schemas.openxmlformats.org/drawingml/2006/main">
               <a:ext uri="{FF2B5EF4-FFF2-40B4-BE49-F238E27FC236}">
-                <a16:creationId xmlns:a16="http://schemas.microsoft.com/office/drawing/2014/main" id="{812EEEC1-7335-480C-8024-81A8E7E04307}"/>
+                <a16:creationId xmlns:a16="http://schemas.microsoft.com/office/drawing/2014/main" id="{2F8405C9-2375-4892-90AF-37F138B37D16}"/>
               </a:ext>
             </a:extLst>
           </p:cNvPr>
@@ -9534,7 +9534,7 @@
           <p:cNvPr id="36" name="">
             <a:extLst xmlns:a="http://schemas.openxmlformats.org/drawingml/2006/main">
               <a:ext uri="{FF2B5EF4-FFF2-40B4-BE49-F238E27FC236}">
-                <a16:creationId xmlns:a16="http://schemas.microsoft.com/office/drawing/2014/main" id="{798556AB-7402-4D70-BD88-361139A1922E}"/>
+                <a16:creationId xmlns:a16="http://schemas.microsoft.com/office/drawing/2014/main" id="{7035E059-9DDE-40B7-B40D-EDBD0B9EA478}"/>
               </a:ext>
             </a:extLst>
           </p:cNvPr>
@@ -9586,7 +9586,7 @@
           <p:cNvPr id="37" name="">
             <a:extLst xmlns:a="http://schemas.openxmlformats.org/drawingml/2006/main">
               <a:ext uri="{FF2B5EF4-FFF2-40B4-BE49-F238E27FC236}">
-                <a16:creationId xmlns:a16="http://schemas.microsoft.com/office/drawing/2014/main" id="{E61A238A-2DE6-4221-8A93-96588D41B01E}"/>
+                <a16:creationId xmlns:a16="http://schemas.microsoft.com/office/drawing/2014/main" id="{9BB6BD05-1245-4BD5-AD92-65FB2C792FD7}"/>
               </a:ext>
             </a:extLst>
           </p:cNvPr>
@@ -9617,7 +9617,7 @@
           <p:cNvPr id="38" name="">
             <a:extLst xmlns:a="http://schemas.openxmlformats.org/drawingml/2006/main">
               <a:ext uri="{FF2B5EF4-FFF2-40B4-BE49-F238E27FC236}">
-                <a16:creationId xmlns:a16="http://schemas.microsoft.com/office/drawing/2014/main" id="{52D476F0-E89C-4550-9BFE-D3373A2E5E25}"/>
+                <a16:creationId xmlns:a16="http://schemas.microsoft.com/office/drawing/2014/main" id="{19DF5670-EADC-4047-A6F0-6AF400BCCA15}"/>
               </a:ext>
             </a:extLst>
           </p:cNvPr>
@@ -9648,7 +9648,7 @@
           <p:cNvPr id="39" name="">
             <a:extLst xmlns:a="http://schemas.openxmlformats.org/drawingml/2006/main">
               <a:ext uri="{FF2B5EF4-FFF2-40B4-BE49-F238E27FC236}">
-                <a16:creationId xmlns:a16="http://schemas.microsoft.com/office/drawing/2014/main" id="{CC557D6A-C2D3-4A64-87E5-1B31DA5225C2}"/>
+                <a16:creationId xmlns:a16="http://schemas.microsoft.com/office/drawing/2014/main" id="{9B16C477-30E0-43AD-BC87-0131BADAE02F}"/>
               </a:ext>
             </a:extLst>
           </p:cNvPr>
@@ -9700,7 +9700,7 @@
           <p:cNvPr id="40" name="">
             <a:extLst xmlns:a="http://schemas.openxmlformats.org/drawingml/2006/main">
               <a:ext uri="{FF2B5EF4-FFF2-40B4-BE49-F238E27FC236}">
-                <a16:creationId xmlns:a16="http://schemas.microsoft.com/office/drawing/2014/main" id="{C160F056-BBE5-4448-B7B8-428BA770F2AA}"/>
+                <a16:creationId xmlns:a16="http://schemas.microsoft.com/office/drawing/2014/main" id="{536B8CCF-3943-4EEB-9191-6D178DC2654B}"/>
               </a:ext>
             </a:extLst>
           </p:cNvPr>
@@ -9752,7 +9752,7 @@
           <p:cNvPr id="41" name="">
             <a:extLst xmlns:a="http://schemas.openxmlformats.org/drawingml/2006/main">
               <a:ext uri="{FF2B5EF4-FFF2-40B4-BE49-F238E27FC236}">
-                <a16:creationId xmlns:a16="http://schemas.microsoft.com/office/drawing/2014/main" id="{E612C816-2952-418C-84E9-DC1013FF9E83}"/>
+                <a16:creationId xmlns:a16="http://schemas.microsoft.com/office/drawing/2014/main" id="{760CA23C-FF3D-420A-A33F-E7DF1D57A584}"/>
               </a:ext>
             </a:extLst>
           </p:cNvPr>
@@ -9804,7 +9804,7 @@
           <p:cNvPr id="42" name="">
             <a:extLst xmlns:a="http://schemas.openxmlformats.org/drawingml/2006/main">
               <a:ext uri="{FF2B5EF4-FFF2-40B4-BE49-F238E27FC236}">
-                <a16:creationId xmlns:a16="http://schemas.microsoft.com/office/drawing/2014/main" id="{21D306A6-C694-4AE3-9B9A-74881D01D6D0}"/>
+                <a16:creationId xmlns:a16="http://schemas.microsoft.com/office/drawing/2014/main" id="{EAFF019E-52CC-49AD-ADBD-44976BDA5B4C}"/>
               </a:ext>
             </a:extLst>
           </p:cNvPr>
@@ -9856,7 +9856,7 @@
           <p:cNvPr id="43" name="">
             <a:extLst xmlns:a="http://schemas.openxmlformats.org/drawingml/2006/main">
               <a:ext uri="{FF2B5EF4-FFF2-40B4-BE49-F238E27FC236}">
-                <a16:creationId xmlns:a16="http://schemas.microsoft.com/office/drawing/2014/main" id="{E66FB5BA-8DEF-4871-9B9D-96DC785B3CC8}"/>
+                <a16:creationId xmlns:a16="http://schemas.microsoft.com/office/drawing/2014/main" id="{C91E24B8-0661-49DC-AEB0-134CC46A3322}"/>
               </a:ext>
             </a:extLst>
           </p:cNvPr>
@@ -9908,7 +9908,7 @@
           <p:cNvPr id="44" name="">
             <a:extLst xmlns:a="http://schemas.openxmlformats.org/drawingml/2006/main">
               <a:ext uri="{FF2B5EF4-FFF2-40B4-BE49-F238E27FC236}">
-                <a16:creationId xmlns:a16="http://schemas.microsoft.com/office/drawing/2014/main" id="{EE241214-4656-4603-BE39-2024866D8728}"/>
+                <a16:creationId xmlns:a16="http://schemas.microsoft.com/office/drawing/2014/main" id="{30B2B209-4464-4F02-9A31-CC666BC22214}"/>
               </a:ext>
             </a:extLst>
           </p:cNvPr>
@@ -9939,7 +9939,7 @@
           <p:cNvPr id="45" name="">
             <a:extLst xmlns:a="http://schemas.openxmlformats.org/drawingml/2006/main">
               <a:ext uri="{FF2B5EF4-FFF2-40B4-BE49-F238E27FC236}">
-                <a16:creationId xmlns:a16="http://schemas.microsoft.com/office/drawing/2014/main" id="{C46B9AA1-33DA-412C-BD20-466CBD48FBD6}"/>
+                <a16:creationId xmlns:a16="http://schemas.microsoft.com/office/drawing/2014/main" id="{6242520C-DBEB-4B66-AC7C-498994F1FEE9}"/>
               </a:ext>
             </a:extLst>
           </p:cNvPr>
@@ -9991,7 +9991,7 @@
           <p:cNvPr id="46" name="">
             <a:extLst xmlns:a="http://schemas.openxmlformats.org/drawingml/2006/main">
               <a:ext uri="{FF2B5EF4-FFF2-40B4-BE49-F238E27FC236}">
-                <a16:creationId xmlns:a16="http://schemas.microsoft.com/office/drawing/2014/main" id="{DA115A32-8D80-413E-85D6-E4C6473CF789}"/>
+                <a16:creationId xmlns:a16="http://schemas.microsoft.com/office/drawing/2014/main" id="{D57AF27F-1DA2-4EE9-ABCC-5B49A5F638DD}"/>
               </a:ext>
             </a:extLst>
           </p:cNvPr>
@@ -10043,7 +10043,7 @@
           <p:cNvPr id="47" name="">
             <a:extLst xmlns:a="http://schemas.openxmlformats.org/drawingml/2006/main">
               <a:ext uri="{FF2B5EF4-FFF2-40B4-BE49-F238E27FC236}">
-                <a16:creationId xmlns:a16="http://schemas.microsoft.com/office/drawing/2014/main" id="{CB718FD5-BFF5-49BD-8CF1-F27D6AEEB633}"/>
+                <a16:creationId xmlns:a16="http://schemas.microsoft.com/office/drawing/2014/main" id="{EE9874B7-8144-4ADA-ACE0-A6599D689FBA}"/>
               </a:ext>
             </a:extLst>
           </p:cNvPr>
@@ -10095,7 +10095,7 @@
           <p:cNvPr id="48" name="">
             <a:extLst xmlns:a="http://schemas.openxmlformats.org/drawingml/2006/main">
               <a:ext uri="{FF2B5EF4-FFF2-40B4-BE49-F238E27FC236}">
-                <a16:creationId xmlns:a16="http://schemas.microsoft.com/office/drawing/2014/main" id="{6BBDDE06-C380-47E0-9756-8D58CA790417}"/>
+                <a16:creationId xmlns:a16="http://schemas.microsoft.com/office/drawing/2014/main" id="{79119405-C4FF-4B36-AF3C-9BD99DEC64D9}"/>
               </a:ext>
             </a:extLst>
           </p:cNvPr>
@@ -10147,7 +10147,7 @@
           <p:cNvPr id="49" name="">
             <a:extLst xmlns:a="http://schemas.openxmlformats.org/drawingml/2006/main">
               <a:ext uri="{FF2B5EF4-FFF2-40B4-BE49-F238E27FC236}">
-                <a16:creationId xmlns:a16="http://schemas.microsoft.com/office/drawing/2014/main" id="{D263E30F-E1D6-4F42-AF05-F09847A13D44}"/>
+                <a16:creationId xmlns:a16="http://schemas.microsoft.com/office/drawing/2014/main" id="{DF3F517E-E839-4AD8-A348-B33A1521399A}"/>
               </a:ext>
             </a:extLst>
           </p:cNvPr>
@@ -10199,7 +10199,7 @@
           <p:cNvPr id="50" name="">
             <a:extLst xmlns:a="http://schemas.openxmlformats.org/drawingml/2006/main">
               <a:ext uri="{FF2B5EF4-FFF2-40B4-BE49-F238E27FC236}">
-                <a16:creationId xmlns:a16="http://schemas.microsoft.com/office/drawing/2014/main" id="{C23EEBB0-829E-4AD7-B4D5-09BCECEFF311}"/>
+                <a16:creationId xmlns:a16="http://schemas.microsoft.com/office/drawing/2014/main" id="{7D14BE9F-B706-4849-972F-31DE8F42549A}"/>
               </a:ext>
             </a:extLst>
           </p:cNvPr>
@@ -10251,7 +10251,7 @@
           <p:cNvPr id="51" name="">
             <a:extLst xmlns:a="http://schemas.openxmlformats.org/drawingml/2006/main">
               <a:ext uri="{FF2B5EF4-FFF2-40B4-BE49-F238E27FC236}">
-                <a16:creationId xmlns:a16="http://schemas.microsoft.com/office/drawing/2014/main" id="{A5660EFE-B307-43FB-B910-5DADC08677B5}"/>
+                <a16:creationId xmlns:a16="http://schemas.microsoft.com/office/drawing/2014/main" id="{3925F8A9-E3D7-4431-B829-14B79FA9B52C}"/>
               </a:ext>
             </a:extLst>
           </p:cNvPr>
@@ -10282,7 +10282,7 @@
           <p:cNvPr id="52" name="">
             <a:extLst xmlns:a="http://schemas.openxmlformats.org/drawingml/2006/main">
               <a:ext uri="{FF2B5EF4-FFF2-40B4-BE49-F238E27FC236}">
-                <a16:creationId xmlns:a16="http://schemas.microsoft.com/office/drawing/2014/main" id="{BB35A487-F686-4229-8394-A406EE817E96}"/>
+                <a16:creationId xmlns:a16="http://schemas.microsoft.com/office/drawing/2014/main" id="{8242D2D6-2BBB-49C1-BEF2-F01589C02594}"/>
               </a:ext>
             </a:extLst>
           </p:cNvPr>
@@ -10313,7 +10313,7 @@
           <p:cNvPr id="53" name="">
             <a:extLst xmlns:a="http://schemas.openxmlformats.org/drawingml/2006/main">
               <a:ext uri="{FF2B5EF4-FFF2-40B4-BE49-F238E27FC236}">
-                <a16:creationId xmlns:a16="http://schemas.microsoft.com/office/drawing/2014/main" id="{CAE6ACFA-5C23-4F85-9BA7-77F1895C5662}"/>
+                <a16:creationId xmlns:a16="http://schemas.microsoft.com/office/drawing/2014/main" id="{A974240A-847C-451D-B2ED-7732C4FF8091}"/>
               </a:ext>
             </a:extLst>
           </p:cNvPr>
@@ -10344,7 +10344,7 @@
           <p:cNvPr id="54" name="">
             <a:extLst xmlns:a="http://schemas.openxmlformats.org/drawingml/2006/main">
               <a:ext uri="{FF2B5EF4-FFF2-40B4-BE49-F238E27FC236}">
-                <a16:creationId xmlns:a16="http://schemas.microsoft.com/office/drawing/2014/main" id="{59C94CD7-36DC-41ED-BFD7-350762D6151B}"/>
+                <a16:creationId xmlns:a16="http://schemas.microsoft.com/office/drawing/2014/main" id="{C2C495B0-2F01-48BB-988E-40E56A95D662}"/>
               </a:ext>
             </a:extLst>
           </p:cNvPr>
@@ -10396,7 +10396,7 @@
           <p:cNvPr id="55" name="">
             <a:extLst xmlns:a="http://schemas.openxmlformats.org/drawingml/2006/main">
               <a:ext uri="{FF2B5EF4-FFF2-40B4-BE49-F238E27FC236}">
-                <a16:creationId xmlns:a16="http://schemas.microsoft.com/office/drawing/2014/main" id="{4F792A38-1CFC-4FE9-AE7E-1C2233DF9805}"/>
+                <a16:creationId xmlns:a16="http://schemas.microsoft.com/office/drawing/2014/main" id="{8126397F-4B8A-4A51-8AD7-5253C26FAFBB}"/>
               </a:ext>
             </a:extLst>
           </p:cNvPr>
@@ -10448,7 +10448,7 @@
           <p:cNvPr id="56" name="">
             <a:extLst xmlns:a="http://schemas.openxmlformats.org/drawingml/2006/main">
               <a:ext uri="{FF2B5EF4-FFF2-40B4-BE49-F238E27FC236}">
-                <a16:creationId xmlns:a16="http://schemas.microsoft.com/office/drawing/2014/main" id="{771366CA-3D00-4CBA-8DFD-ED0E88967571}"/>
+                <a16:creationId xmlns:a16="http://schemas.microsoft.com/office/drawing/2014/main" id="{1D5D65D5-EC67-4342-94FB-3681F64FAEC9}"/>
               </a:ext>
             </a:extLst>
           </p:cNvPr>
@@ -10500,7 +10500,7 @@
           <p:cNvPr id="57" name="">
             <a:extLst xmlns:a="http://schemas.openxmlformats.org/drawingml/2006/main">
               <a:ext uri="{FF2B5EF4-FFF2-40B4-BE49-F238E27FC236}">
-                <a16:creationId xmlns:a16="http://schemas.microsoft.com/office/drawing/2014/main" id="{FA7B4873-5934-46A2-A26B-70B918C6FCC8}"/>
+                <a16:creationId xmlns:a16="http://schemas.microsoft.com/office/drawing/2014/main" id="{A0A2B54D-D3E4-4C72-8853-CC72D152CF67}"/>
               </a:ext>
             </a:extLst>
           </p:cNvPr>
@@ -10552,7 +10552,7 @@
           <p:cNvPr id="58" name="">
             <a:extLst xmlns:a="http://schemas.openxmlformats.org/drawingml/2006/main">
               <a:ext uri="{FF2B5EF4-FFF2-40B4-BE49-F238E27FC236}">
-                <a16:creationId xmlns:a16="http://schemas.microsoft.com/office/drawing/2014/main" id="{70807CE1-5E97-4868-A635-483171695407}"/>
+                <a16:creationId xmlns:a16="http://schemas.microsoft.com/office/drawing/2014/main" id="{9D8386C8-0FF1-4957-8A67-4AC4ABD31A00}"/>
               </a:ext>
             </a:extLst>
           </p:cNvPr>
@@ -10604,7 +10604,7 @@
           <p:cNvPr id="59" name="">
             <a:extLst xmlns:a="http://schemas.openxmlformats.org/drawingml/2006/main">
               <a:ext uri="{FF2B5EF4-FFF2-40B4-BE49-F238E27FC236}">
-                <a16:creationId xmlns:a16="http://schemas.microsoft.com/office/drawing/2014/main" id="{65E24EB8-F476-4DCE-8CE6-9642E8925993}"/>
+                <a16:creationId xmlns:a16="http://schemas.microsoft.com/office/drawing/2014/main" id="{485FBC0D-6E60-4A94-8BF4-22364B9196B6}"/>
               </a:ext>
             </a:extLst>
           </p:cNvPr>
@@ -10635,7 +10635,7 @@
           <p:cNvPr id="60" name="">
             <a:extLst xmlns:a="http://schemas.openxmlformats.org/drawingml/2006/main">
               <a:ext uri="{FF2B5EF4-FFF2-40B4-BE49-F238E27FC236}">
-                <a16:creationId xmlns:a16="http://schemas.microsoft.com/office/drawing/2014/main" id="{FD9CA457-C6E6-45D0-A705-4ABDB9193CD3}"/>
+                <a16:creationId xmlns:a16="http://schemas.microsoft.com/office/drawing/2014/main" id="{5D25E99D-BD49-4B31-98C1-DB80B7F68E2F}"/>
               </a:ext>
             </a:extLst>
           </p:cNvPr>
@@ -10687,7 +10687,7 @@
           <p:cNvPr id="61" name="">
             <a:extLst xmlns:a="http://schemas.openxmlformats.org/drawingml/2006/main">
               <a:ext uri="{FF2B5EF4-FFF2-40B4-BE49-F238E27FC236}">
-                <a16:creationId xmlns:a16="http://schemas.microsoft.com/office/drawing/2014/main" id="{A9C15471-78F4-4F84-8336-940F068C4CAB}"/>
+                <a16:creationId xmlns:a16="http://schemas.microsoft.com/office/drawing/2014/main" id="{D49B1A72-9C4A-46EB-95C4-D88B52825C87}"/>
               </a:ext>
             </a:extLst>
           </p:cNvPr>
@@ -10739,7 +10739,7 @@
           <p:cNvPr id="62" name="">
             <a:extLst xmlns:a="http://schemas.openxmlformats.org/drawingml/2006/main">
               <a:ext uri="{FF2B5EF4-FFF2-40B4-BE49-F238E27FC236}">
-                <a16:creationId xmlns:a16="http://schemas.microsoft.com/office/drawing/2014/main" id="{D5C166ED-05A9-42A5-B3FB-B8EE29D87C32}"/>
+                <a16:creationId xmlns:a16="http://schemas.microsoft.com/office/drawing/2014/main" id="{9FCDE705-E39C-4624-958E-3ECFB4BC2773}"/>
               </a:ext>
             </a:extLst>
           </p:cNvPr>
@@ -10791,7 +10791,7 @@
           <p:cNvPr id="63" name="">
             <a:extLst xmlns:a="http://schemas.openxmlformats.org/drawingml/2006/main">
               <a:ext uri="{FF2B5EF4-FFF2-40B4-BE49-F238E27FC236}">
-                <a16:creationId xmlns:a16="http://schemas.microsoft.com/office/drawing/2014/main" id="{8F3CC5C0-B6BD-4274-99A7-0F0B68952B63}"/>
+                <a16:creationId xmlns:a16="http://schemas.microsoft.com/office/drawing/2014/main" id="{6D1B5EE1-3706-48AF-9F70-8E51C6488A9C}"/>
               </a:ext>
             </a:extLst>
           </p:cNvPr>
@@ -10843,7 +10843,7 @@
           <p:cNvPr id="64" name="">
             <a:extLst xmlns:a="http://schemas.openxmlformats.org/drawingml/2006/main">
               <a:ext uri="{FF2B5EF4-FFF2-40B4-BE49-F238E27FC236}">
-                <a16:creationId xmlns:a16="http://schemas.microsoft.com/office/drawing/2014/main" id="{215828D3-2F0A-40A6-92E9-F079029D78FD}"/>
+                <a16:creationId xmlns:a16="http://schemas.microsoft.com/office/drawing/2014/main" id="{A2B783A6-0FA8-44F7-A8FC-C7B5141A5E0D}"/>
               </a:ext>
             </a:extLst>
           </p:cNvPr>
@@ -10895,7 +10895,7 @@
           <p:cNvPr id="65" name="">
             <a:extLst xmlns:a="http://schemas.openxmlformats.org/drawingml/2006/main">
               <a:ext uri="{FF2B5EF4-FFF2-40B4-BE49-F238E27FC236}">
-                <a16:creationId xmlns:a16="http://schemas.microsoft.com/office/drawing/2014/main" id="{54807E2F-9468-42D6-ADC0-BAC30433731B}"/>
+                <a16:creationId xmlns:a16="http://schemas.microsoft.com/office/drawing/2014/main" id="{250F5CE9-F3C6-441D-9E36-E34DF3F26B0A}"/>
               </a:ext>
             </a:extLst>
           </p:cNvPr>
@@ -10926,7 +10926,7 @@
           <p:cNvPr id="66" name="">
             <a:extLst xmlns:a="http://schemas.openxmlformats.org/drawingml/2006/main">
               <a:ext uri="{FF2B5EF4-FFF2-40B4-BE49-F238E27FC236}">
-                <a16:creationId xmlns:a16="http://schemas.microsoft.com/office/drawing/2014/main" id="{FF314139-8B04-420B-8C14-8248A7EDF60C}"/>
+                <a16:creationId xmlns:a16="http://schemas.microsoft.com/office/drawing/2014/main" id="{E8E28AD2-3D2E-408F-9A02-C14791F41C03}"/>
               </a:ext>
             </a:extLst>
           </p:cNvPr>
@@ -10957,7 +10957,7 @@
           <p:cNvPr id="67" name="">
             <a:extLst xmlns:a="http://schemas.openxmlformats.org/drawingml/2006/main">
               <a:ext uri="{FF2B5EF4-FFF2-40B4-BE49-F238E27FC236}">
-                <a16:creationId xmlns:a16="http://schemas.microsoft.com/office/drawing/2014/main" id="{0F2317F3-6085-45EE-8285-A77C48690A0C}"/>
+                <a16:creationId xmlns:a16="http://schemas.microsoft.com/office/drawing/2014/main" id="{3EB3E042-C7AF-43E4-B362-7D9872CEFAB5}"/>
               </a:ext>
             </a:extLst>
           </p:cNvPr>
@@ -11009,7 +11009,7 @@
           <p:cNvPr id="68" name="">
             <a:extLst xmlns:a="http://schemas.openxmlformats.org/drawingml/2006/main">
               <a:ext uri="{FF2B5EF4-FFF2-40B4-BE49-F238E27FC236}">
-                <a16:creationId xmlns:a16="http://schemas.microsoft.com/office/drawing/2014/main" id="{9C7B4DAF-21B9-4666-A381-AD104547A855}"/>
+                <a16:creationId xmlns:a16="http://schemas.microsoft.com/office/drawing/2014/main" id="{9B988E54-6B8A-44C7-A475-E133B1203D22}"/>
               </a:ext>
             </a:extLst>
           </p:cNvPr>
@@ -11061,7 +11061,7 @@
           <p:cNvPr id="69" name="">
             <a:extLst xmlns:a="http://schemas.openxmlformats.org/drawingml/2006/main">
               <a:ext uri="{FF2B5EF4-FFF2-40B4-BE49-F238E27FC236}">
-                <a16:creationId xmlns:a16="http://schemas.microsoft.com/office/drawing/2014/main" id="{3D0D40CC-AD1A-4F72-83A8-06D8046CE6A8}"/>
+                <a16:creationId xmlns:a16="http://schemas.microsoft.com/office/drawing/2014/main" id="{A8EE6368-4C0C-4E48-9D7C-ADDA868444DB}"/>
               </a:ext>
             </a:extLst>
           </p:cNvPr>
@@ -11113,7 +11113,7 @@
           <p:cNvPr id="70" name="">
             <a:extLst xmlns:a="http://schemas.openxmlformats.org/drawingml/2006/main">
               <a:ext uri="{FF2B5EF4-FFF2-40B4-BE49-F238E27FC236}">
-                <a16:creationId xmlns:a16="http://schemas.microsoft.com/office/drawing/2014/main" id="{E7DBEBB7-B7EA-44ED-B0A8-EA027FBA5D2C}"/>
+                <a16:creationId xmlns:a16="http://schemas.microsoft.com/office/drawing/2014/main" id="{DB3C00CB-35D7-46F5-B516-145788EF16FA}"/>
               </a:ext>
             </a:extLst>
           </p:cNvPr>
@@ -11165,7 +11165,7 @@
           <p:cNvPr id="71" name="">
             <a:extLst xmlns:a="http://schemas.openxmlformats.org/drawingml/2006/main">
               <a:ext uri="{FF2B5EF4-FFF2-40B4-BE49-F238E27FC236}">
-                <a16:creationId xmlns:a16="http://schemas.microsoft.com/office/drawing/2014/main" id="{4B4927E3-C721-4251-94F2-074208941E69}"/>
+                <a16:creationId xmlns:a16="http://schemas.microsoft.com/office/drawing/2014/main" id="{24390CA9-4490-4700-8685-A2A2A4BA71F7}"/>
               </a:ext>
             </a:extLst>
           </p:cNvPr>
@@ -11217,7 +11217,7 @@
           <p:cNvPr id="72" name="">
             <a:extLst xmlns:a="http://schemas.openxmlformats.org/drawingml/2006/main">
               <a:ext uri="{FF2B5EF4-FFF2-40B4-BE49-F238E27FC236}">
-                <a16:creationId xmlns:a16="http://schemas.microsoft.com/office/drawing/2014/main" id="{76C30341-5AD7-4AE0-8681-F1C91A917798}"/>
+                <a16:creationId xmlns:a16="http://schemas.microsoft.com/office/drawing/2014/main" id="{CDE4BE6A-6101-4C8A-80D3-B7EC7B57DAE0}"/>
               </a:ext>
             </a:extLst>
           </p:cNvPr>
@@ -11248,7 +11248,7 @@
           <p:cNvPr id="73" name="">
             <a:extLst xmlns:a="http://schemas.openxmlformats.org/drawingml/2006/main">
               <a:ext uri="{FF2B5EF4-FFF2-40B4-BE49-F238E27FC236}">
-                <a16:creationId xmlns:a16="http://schemas.microsoft.com/office/drawing/2014/main" id="{C446593F-1065-4076-BAA9-E45ED3FBFDA0}"/>
+                <a16:creationId xmlns:a16="http://schemas.microsoft.com/office/drawing/2014/main" id="{765D09ED-624A-46EF-9193-272793680268}"/>
               </a:ext>
             </a:extLst>
           </p:cNvPr>
@@ -11300,7 +11300,7 @@
           <p:cNvPr id="74" name="">
             <a:extLst xmlns:a="http://schemas.openxmlformats.org/drawingml/2006/main">
               <a:ext uri="{FF2B5EF4-FFF2-40B4-BE49-F238E27FC236}">
-                <a16:creationId xmlns:a16="http://schemas.microsoft.com/office/drawing/2014/main" id="{97F76455-5697-4715-BBE8-7C383B7B07DF}"/>
+                <a16:creationId xmlns:a16="http://schemas.microsoft.com/office/drawing/2014/main" id="{B1D2DF6E-A1C1-41C3-958B-3D927A8CC59B}"/>
               </a:ext>
             </a:extLst>
           </p:cNvPr>
@@ -11352,7 +11352,7 @@
           <p:cNvPr id="75" name="">
             <a:extLst xmlns:a="http://schemas.openxmlformats.org/drawingml/2006/main">
               <a:ext uri="{FF2B5EF4-FFF2-40B4-BE49-F238E27FC236}">
-                <a16:creationId xmlns:a16="http://schemas.microsoft.com/office/drawing/2014/main" id="{CADB5E02-E239-4058-AC67-EC36E933F234}"/>
+                <a16:creationId xmlns:a16="http://schemas.microsoft.com/office/drawing/2014/main" id="{C601D8B6-65B3-426C-9BBB-DA375C14FD6A}"/>
               </a:ext>
             </a:extLst>
           </p:cNvPr>
@@ -11404,7 +11404,7 @@
           <p:cNvPr id="76" name="">
             <a:extLst xmlns:a="http://schemas.openxmlformats.org/drawingml/2006/main">
               <a:ext uri="{FF2B5EF4-FFF2-40B4-BE49-F238E27FC236}">
-                <a16:creationId xmlns:a16="http://schemas.microsoft.com/office/drawing/2014/main" id="{E9B93596-3DDD-41DD-90D6-3FA658133F5D}"/>
+                <a16:creationId xmlns:a16="http://schemas.microsoft.com/office/drawing/2014/main" id="{0062C940-5C81-4C9A-BC31-3A23E4A9494B}"/>
               </a:ext>
             </a:extLst>
           </p:cNvPr>
@@ -11456,7 +11456,7 @@
           <p:cNvPr id="77" name="">
             <a:extLst xmlns:a="http://schemas.openxmlformats.org/drawingml/2006/main">
               <a:ext uri="{FF2B5EF4-FFF2-40B4-BE49-F238E27FC236}">
-                <a16:creationId xmlns:a16="http://schemas.microsoft.com/office/drawing/2014/main" id="{B9195356-9CF4-4A97-B0D8-A77630A56BD1}"/>
+                <a16:creationId xmlns:a16="http://schemas.microsoft.com/office/drawing/2014/main" id="{D7066538-7808-4C84-9B98-1306E3ABE78C}"/>
               </a:ext>
             </a:extLst>
           </p:cNvPr>
@@ -11508,7 +11508,7 @@
           <p:cNvPr id="78" name="">
             <a:extLst xmlns:a="http://schemas.openxmlformats.org/drawingml/2006/main">
               <a:ext uri="{FF2B5EF4-FFF2-40B4-BE49-F238E27FC236}">
-                <a16:creationId xmlns:a16="http://schemas.microsoft.com/office/drawing/2014/main" id="{569DA28E-A88D-4294-8FD5-7A6386F40C80}"/>
+                <a16:creationId xmlns:a16="http://schemas.microsoft.com/office/drawing/2014/main" id="{2505B5D6-B419-4FAE-B916-2CB93E271B9B}"/>
               </a:ext>
             </a:extLst>
           </p:cNvPr>
@@ -11539,7 +11539,7 @@
           <p:cNvPr id="79" name="">
             <a:extLst xmlns:a="http://schemas.openxmlformats.org/drawingml/2006/main">
               <a:ext uri="{FF2B5EF4-FFF2-40B4-BE49-F238E27FC236}">
-                <a16:creationId xmlns:a16="http://schemas.microsoft.com/office/drawing/2014/main" id="{FA857DE1-524C-4199-9CEB-F0830680AE75}"/>
+                <a16:creationId xmlns:a16="http://schemas.microsoft.com/office/drawing/2014/main" id="{FE83157A-E237-4F96-80F2-E2DE63A1E237}"/>
               </a:ext>
             </a:extLst>
           </p:cNvPr>
@@ -11570,7 +11570,7 @@
           <p:cNvPr id="80" name="">
             <a:extLst xmlns:a="http://schemas.openxmlformats.org/drawingml/2006/main">
               <a:ext uri="{FF2B5EF4-FFF2-40B4-BE49-F238E27FC236}">
-                <a16:creationId xmlns:a16="http://schemas.microsoft.com/office/drawing/2014/main" id="{4664C248-40F7-48AC-AB84-D5F91DE7D6F3}"/>
+                <a16:creationId xmlns:a16="http://schemas.microsoft.com/office/drawing/2014/main" id="{447BCAED-8F7F-49D5-80BC-E7F0D0CAB369}"/>
               </a:ext>
             </a:extLst>
           </p:cNvPr>
@@ -11622,7 +11622,7 @@
           <p:cNvPr id="81" name="">
             <a:extLst xmlns:a="http://schemas.openxmlformats.org/drawingml/2006/main">
               <a:ext uri="{FF2B5EF4-FFF2-40B4-BE49-F238E27FC236}">
-                <a16:creationId xmlns:a16="http://schemas.microsoft.com/office/drawing/2014/main" id="{31897030-F71F-472B-84C7-9C70BE7C1CE5}"/>
+                <a16:creationId xmlns:a16="http://schemas.microsoft.com/office/drawing/2014/main" id="{45814410-374B-44EC-B130-103DD7323247}"/>
               </a:ext>
             </a:extLst>
           </p:cNvPr>
@@ -11674,7 +11674,7 @@
           <p:cNvPr id="82" name="">
             <a:extLst xmlns:a="http://schemas.openxmlformats.org/drawingml/2006/main">
               <a:ext uri="{FF2B5EF4-FFF2-40B4-BE49-F238E27FC236}">
-                <a16:creationId xmlns:a16="http://schemas.microsoft.com/office/drawing/2014/main" id="{05EACF8B-3576-4E28-8D96-CA1337C5627A}"/>
+                <a16:creationId xmlns:a16="http://schemas.microsoft.com/office/drawing/2014/main" id="{F0AB6C7F-93F6-4C2F-BE53-9572364E0304}"/>
               </a:ext>
             </a:extLst>
           </p:cNvPr>
@@ -11726,7 +11726,7 @@
           <p:cNvPr id="83" name="">
             <a:extLst xmlns:a="http://schemas.openxmlformats.org/drawingml/2006/main">
               <a:ext uri="{FF2B5EF4-FFF2-40B4-BE49-F238E27FC236}">
-                <a16:creationId xmlns:a16="http://schemas.microsoft.com/office/drawing/2014/main" id="{93270198-924E-4C68-B401-1410063DF18A}"/>
+                <a16:creationId xmlns:a16="http://schemas.microsoft.com/office/drawing/2014/main" id="{7EB85BE6-D867-4050-92CA-BF8BEF78C6CD}"/>
               </a:ext>
             </a:extLst>
           </p:cNvPr>
@@ -11778,7 +11778,7 @@
           <p:cNvPr id="84" name="">
             <a:extLst xmlns:a="http://schemas.openxmlformats.org/drawingml/2006/main">
               <a:ext uri="{FF2B5EF4-FFF2-40B4-BE49-F238E27FC236}">
-                <a16:creationId xmlns:a16="http://schemas.microsoft.com/office/drawing/2014/main" id="{57000E87-AC41-4DBD-807E-9884C74BE3BE}"/>
+                <a16:creationId xmlns:a16="http://schemas.microsoft.com/office/drawing/2014/main" id="{753A5F81-94D1-4900-BEB9-E26D58258357}"/>
               </a:ext>
             </a:extLst>
           </p:cNvPr>
@@ -11830,7 +11830,7 @@
           <p:cNvPr id="85" name="">
             <a:extLst xmlns:a="http://schemas.openxmlformats.org/drawingml/2006/main">
               <a:ext uri="{FF2B5EF4-FFF2-40B4-BE49-F238E27FC236}">
-                <a16:creationId xmlns:a16="http://schemas.microsoft.com/office/drawing/2014/main" id="{17F8965F-FF2A-47E8-8013-86DC1132E7B2}"/>
+                <a16:creationId xmlns:a16="http://schemas.microsoft.com/office/drawing/2014/main" id="{80C30149-871F-467F-9754-6A50C8C95A76}"/>
               </a:ext>
             </a:extLst>
           </p:cNvPr>
@@ -11861,7 +11861,7 @@
           <p:cNvPr id="86" name="">
             <a:extLst xmlns:a="http://schemas.openxmlformats.org/drawingml/2006/main">
               <a:ext uri="{FF2B5EF4-FFF2-40B4-BE49-F238E27FC236}">
-                <a16:creationId xmlns:a16="http://schemas.microsoft.com/office/drawing/2014/main" id="{DCE13CBD-6F86-47A7-8B99-2A9818E0F3A0}"/>
+                <a16:creationId xmlns:a16="http://schemas.microsoft.com/office/drawing/2014/main" id="{48898CE1-0816-4338-BAD0-A9477CF5C046}"/>
               </a:ext>
             </a:extLst>
           </p:cNvPr>
@@ -11913,7 +11913,7 @@
           <p:cNvPr id="87" name="">
             <a:extLst xmlns:a="http://schemas.openxmlformats.org/drawingml/2006/main">
               <a:ext uri="{FF2B5EF4-FFF2-40B4-BE49-F238E27FC236}">
-                <a16:creationId xmlns:a16="http://schemas.microsoft.com/office/drawing/2014/main" id="{9F5FF613-A3C1-4BF6-926D-969DBB39E228}"/>
+                <a16:creationId xmlns:a16="http://schemas.microsoft.com/office/drawing/2014/main" id="{9C2404C0-135C-400B-8260-0C87365B6C26}"/>
               </a:ext>
             </a:extLst>
           </p:cNvPr>
@@ -11965,7 +11965,7 @@
           <p:cNvPr id="88" name="">
             <a:extLst xmlns:a="http://schemas.openxmlformats.org/drawingml/2006/main">
               <a:ext uri="{FF2B5EF4-FFF2-40B4-BE49-F238E27FC236}">
-                <a16:creationId xmlns:a16="http://schemas.microsoft.com/office/drawing/2014/main" id="{89DC70B0-1881-4CE2-8960-5267A0471C8E}"/>
+                <a16:creationId xmlns:a16="http://schemas.microsoft.com/office/drawing/2014/main" id="{4D3C2AC3-2700-4D1B-98E5-159325696AC9}"/>
               </a:ext>
             </a:extLst>
           </p:cNvPr>
@@ -12017,7 +12017,7 @@
           <p:cNvPr id="89" name="">
             <a:extLst xmlns:a="http://schemas.openxmlformats.org/drawingml/2006/main">
               <a:ext uri="{FF2B5EF4-FFF2-40B4-BE49-F238E27FC236}">
-                <a16:creationId xmlns:a16="http://schemas.microsoft.com/office/drawing/2014/main" id="{E9FE8499-8361-4DCF-A310-CD1FC1C37C90}"/>
+                <a16:creationId xmlns:a16="http://schemas.microsoft.com/office/drawing/2014/main" id="{F2757DEB-F361-42A3-A0D4-84ABC846AA66}"/>
               </a:ext>
             </a:extLst>
           </p:cNvPr>
@@ -12069,7 +12069,7 @@
           <p:cNvPr id="90" name="">
             <a:extLst xmlns:a="http://schemas.openxmlformats.org/drawingml/2006/main">
               <a:ext uri="{FF2B5EF4-FFF2-40B4-BE49-F238E27FC236}">
-                <a16:creationId xmlns:a16="http://schemas.microsoft.com/office/drawing/2014/main" id="{70628EA1-E38D-4E05-9AA2-009FA09E80EE}"/>
+                <a16:creationId xmlns:a16="http://schemas.microsoft.com/office/drawing/2014/main" id="{8F29FDB4-EFD7-4823-AFEE-0D2F173236B0}"/>
               </a:ext>
             </a:extLst>
           </p:cNvPr>
@@ -12121,7 +12121,7 @@
           <p:cNvPr id="91" name="">
             <a:extLst xmlns:a="http://schemas.openxmlformats.org/drawingml/2006/main">
               <a:ext uri="{FF2B5EF4-FFF2-40B4-BE49-F238E27FC236}">
-                <a16:creationId xmlns:a16="http://schemas.microsoft.com/office/drawing/2014/main" id="{4ACA8176-69E0-415B-83F2-83DA41F57EE2}"/>
+                <a16:creationId xmlns:a16="http://schemas.microsoft.com/office/drawing/2014/main" id="{A1B353F3-8371-46C6-8149-DC9D86DE4752}"/>
               </a:ext>
             </a:extLst>
           </p:cNvPr>
@@ -12152,7 +12152,7 @@
           <p:cNvPr id="92" name="">
             <a:extLst xmlns:a="http://schemas.openxmlformats.org/drawingml/2006/main">
               <a:ext uri="{FF2B5EF4-FFF2-40B4-BE49-F238E27FC236}">
-                <a16:creationId xmlns:a16="http://schemas.microsoft.com/office/drawing/2014/main" id="{B3D84D84-E922-45AF-8E95-EB8BBA3223F1}"/>
+                <a16:creationId xmlns:a16="http://schemas.microsoft.com/office/drawing/2014/main" id="{8D1EBC12-DD9D-4488-9FB3-1018F9A954E7}"/>
               </a:ext>
             </a:extLst>
           </p:cNvPr>
@@ -12183,7 +12183,7 @@
           <p:cNvPr id="93" name="">
             <a:extLst xmlns:a="http://schemas.openxmlformats.org/drawingml/2006/main">
               <a:ext uri="{FF2B5EF4-FFF2-40B4-BE49-F238E27FC236}">
-                <a16:creationId xmlns:a16="http://schemas.microsoft.com/office/drawing/2014/main" id="{BF4F2C7C-2CB6-41A5-9AE5-CFBE4A1B87CF}"/>
+                <a16:creationId xmlns:a16="http://schemas.microsoft.com/office/drawing/2014/main" id="{4B6E20E5-CE3B-494F-9328-EE6F3DF5CC51}"/>
               </a:ext>
             </a:extLst>
           </p:cNvPr>
@@ -12235,7 +12235,7 @@
           <p:cNvPr id="94" name="">
             <a:extLst xmlns:a="http://schemas.openxmlformats.org/drawingml/2006/main">
               <a:ext uri="{FF2B5EF4-FFF2-40B4-BE49-F238E27FC236}">
-                <a16:creationId xmlns:a16="http://schemas.microsoft.com/office/drawing/2014/main" id="{172CB840-9FB5-4544-B3D9-EB69BF4A1731}"/>
+                <a16:creationId xmlns:a16="http://schemas.microsoft.com/office/drawing/2014/main" id="{FDEFACAB-165F-4E12-BE1B-E16F2C49E166}"/>
               </a:ext>
             </a:extLst>
           </p:cNvPr>
@@ -12287,7 +12287,7 @@
           <p:cNvPr id="95" name="">
             <a:extLst xmlns:a="http://schemas.openxmlformats.org/drawingml/2006/main">
               <a:ext uri="{FF2B5EF4-FFF2-40B4-BE49-F238E27FC236}">
-                <a16:creationId xmlns:a16="http://schemas.microsoft.com/office/drawing/2014/main" id="{B4CFA770-4157-49DF-B103-AF132BC43BF5}"/>
+                <a16:creationId xmlns:a16="http://schemas.microsoft.com/office/drawing/2014/main" id="{9379D1E2-4D9B-46CF-BDD9-F6B414547F93}"/>
               </a:ext>
             </a:extLst>
           </p:cNvPr>
@@ -12339,7 +12339,7 @@
           <p:cNvPr id="96" name="">
             <a:extLst xmlns:a="http://schemas.openxmlformats.org/drawingml/2006/main">
               <a:ext uri="{FF2B5EF4-FFF2-40B4-BE49-F238E27FC236}">
-                <a16:creationId xmlns:a16="http://schemas.microsoft.com/office/drawing/2014/main" id="{2FB8FB54-6C35-49F6-8862-572C52B9000A}"/>
+                <a16:creationId xmlns:a16="http://schemas.microsoft.com/office/drawing/2014/main" id="{422F7422-B911-4353-9A9C-594D465724BC}"/>
               </a:ext>
             </a:extLst>
           </p:cNvPr>
@@ -12391,7 +12391,7 @@
           <p:cNvPr id="97" name="">
             <a:extLst xmlns:a="http://schemas.openxmlformats.org/drawingml/2006/main">
               <a:ext uri="{FF2B5EF4-FFF2-40B4-BE49-F238E27FC236}">
-                <a16:creationId xmlns:a16="http://schemas.microsoft.com/office/drawing/2014/main" id="{4BA16585-D823-44A6-B994-0FDC1B44BB50}"/>
+                <a16:creationId xmlns:a16="http://schemas.microsoft.com/office/drawing/2014/main" id="{B3C1DF55-7849-41C4-B5BA-41DA6FCE113B}"/>
               </a:ext>
             </a:extLst>
           </p:cNvPr>
@@ -12441,7 +12441,7 @@
     </p:spTree>
     <p:extLst>
       <p:ext uri="{BB962C8B-B14F-4D97-AF65-F5344CB8AC3E}">
-        <p14:creationId xmlns:p14="http://schemas.microsoft.com/office/powerpoint/2010/main" val="1619645952"/>
+        <p14:creationId xmlns:p14="http://schemas.microsoft.com/office/powerpoint/2010/main" val="995743155"/>
       </p:ext>
     </p:extLst>
   </p:cSld>
@@ -12472,7 +12472,7 @@
           <p:cNvPr id="102" name="">
             <a:extLst xmlns:a="http://schemas.openxmlformats.org/drawingml/2006/main">
               <a:ext uri="{FF2B5EF4-FFF2-40B4-BE49-F238E27FC236}">
-                <a16:creationId xmlns:a16="http://schemas.microsoft.com/office/drawing/2014/main" id="{7CAEC936-16B1-4B5F-8041-BC472D4978B3}"/>
+                <a16:creationId xmlns:a16="http://schemas.microsoft.com/office/drawing/2014/main" id="{734A4D2C-593D-4CDF-BD8B-907FE6CDDA6B}"/>
               </a:ext>
             </a:extLst>
           </p:cNvPr>
@@ -12505,7 +12505,7 @@
           <p:cNvPr id="2" name="">
             <a:extLst xmlns:a="http://schemas.openxmlformats.org/drawingml/2006/main">
               <a:ext uri="{FF2B5EF4-FFF2-40B4-BE49-F238E27FC236}">
-                <a16:creationId xmlns:a16="http://schemas.microsoft.com/office/drawing/2014/main" id="{2D9675B3-363C-4EFE-8E81-8FD40ABCD4FC}"/>
+                <a16:creationId xmlns:a16="http://schemas.microsoft.com/office/drawing/2014/main" id="{59CBF3E9-39B2-4141-8514-5887D2303E14}"/>
               </a:ext>
             </a:extLst>
           </p:cNvPr>
@@ -12536,7 +12536,7 @@
           <p:cNvPr id="3" name="">
             <a:extLst xmlns:a="http://schemas.openxmlformats.org/drawingml/2006/main">
               <a:ext uri="{FF2B5EF4-FFF2-40B4-BE49-F238E27FC236}">
-                <a16:creationId xmlns:a16="http://schemas.microsoft.com/office/drawing/2014/main" id="{E093C6EE-2031-4590-BD7D-49EC1B0299A2}"/>
+                <a16:creationId xmlns:a16="http://schemas.microsoft.com/office/drawing/2014/main" id="{B592BDC2-D213-4600-AF9A-6BD41A54D9BD}"/>
               </a:ext>
             </a:extLst>
           </p:cNvPr>
@@ -12588,7 +12588,7 @@
           <p:cNvPr id="4" name="">
             <a:extLst xmlns:a="http://schemas.openxmlformats.org/drawingml/2006/main">
               <a:ext uri="{FF2B5EF4-FFF2-40B4-BE49-F238E27FC236}">
-                <a16:creationId xmlns:a16="http://schemas.microsoft.com/office/drawing/2014/main" id="{ECE66BC0-37F3-4CE7-BA78-5EEE16385D2F}"/>
+                <a16:creationId xmlns:a16="http://schemas.microsoft.com/office/drawing/2014/main" id="{FB8A4FAC-521C-4ED8-9199-2145D8EAD66B}"/>
               </a:ext>
             </a:extLst>
           </p:cNvPr>
@@ -12640,7 +12640,7 @@
           <p:cNvPr id="5" name="">
             <a:extLst xmlns:a="http://schemas.openxmlformats.org/drawingml/2006/main">
               <a:ext uri="{FF2B5EF4-FFF2-40B4-BE49-F238E27FC236}">
-                <a16:creationId xmlns:a16="http://schemas.microsoft.com/office/drawing/2014/main" id="{005EFC51-F325-4CFB-B494-44B92462AFCB}"/>
+                <a16:creationId xmlns:a16="http://schemas.microsoft.com/office/drawing/2014/main" id="{D98BC1EC-5A4A-4128-8AFE-FBEB21BF9484}"/>
               </a:ext>
             </a:extLst>
           </p:cNvPr>
@@ -12675,7 +12675,7 @@
           <p:nvPr/>
         </p:nvPicPr>
         <p:blipFill>
-          <a:blip xmlns:r="http://schemas.openxmlformats.org/officeDocument/2006/relationships" xmlns:a="http://schemas.openxmlformats.org/drawingml/2006/main" r:embed="R3f455ff606ef4858"/>
+          <a:blip xmlns:r="http://schemas.openxmlformats.org/officeDocument/2006/relationships" xmlns:a="http://schemas.openxmlformats.org/drawingml/2006/main" r:embed="R170fe9b80d3f4839"/>
           <a:stretch xmlns:a="http://schemas.openxmlformats.org/drawingml/2006/main"/>
         </p:blipFill>
         <p:spPr>
@@ -12693,7 +12693,7 @@
           <p:cNvPr id="7" name="">
             <a:extLst xmlns:a="http://schemas.openxmlformats.org/drawingml/2006/main">
               <a:ext uri="{FF2B5EF4-FFF2-40B4-BE49-F238E27FC236}">
-                <a16:creationId xmlns:a16="http://schemas.microsoft.com/office/drawing/2014/main" id="{4F26A154-BDD6-4326-B543-42C67E0CE9BA}"/>
+                <a16:creationId xmlns:a16="http://schemas.microsoft.com/office/drawing/2014/main" id="{A2596C15-C7AB-456C-9D88-58CA0071C5C9}"/>
               </a:ext>
             </a:extLst>
           </p:cNvPr>
@@ -12745,7 +12745,7 @@
           <p:cNvPr id="8" name="">
             <a:extLst xmlns:a="http://schemas.openxmlformats.org/drawingml/2006/main">
               <a:ext uri="{FF2B5EF4-FFF2-40B4-BE49-F238E27FC236}">
-                <a16:creationId xmlns:a16="http://schemas.microsoft.com/office/drawing/2014/main" id="{28834290-FFB8-4969-BBA4-D816C77BFF29}"/>
+                <a16:creationId xmlns:a16="http://schemas.microsoft.com/office/drawing/2014/main" id="{4E256D68-31B1-4E0E-8D74-75403171CD9B}"/>
               </a:ext>
             </a:extLst>
           </p:cNvPr>
@@ -12797,7 +12797,7 @@
           <p:cNvPr id="9" name="">
             <a:extLst xmlns:a="http://schemas.openxmlformats.org/drawingml/2006/main">
               <a:ext uri="{FF2B5EF4-FFF2-40B4-BE49-F238E27FC236}">
-                <a16:creationId xmlns:a16="http://schemas.microsoft.com/office/drawing/2014/main" id="{17B16654-AB49-4F97-B03D-BFECC1A3DE52}"/>
+                <a16:creationId xmlns:a16="http://schemas.microsoft.com/office/drawing/2014/main" id="{5AD9618A-91D4-4F2B-8932-EE50FEA6453F}"/>
               </a:ext>
             </a:extLst>
           </p:cNvPr>
@@ -12849,7 +12849,7 @@
           <p:cNvPr id="10" name="">
             <a:extLst xmlns:a="http://schemas.openxmlformats.org/drawingml/2006/main">
               <a:ext uri="{FF2B5EF4-FFF2-40B4-BE49-F238E27FC236}">
-                <a16:creationId xmlns:a16="http://schemas.microsoft.com/office/drawing/2014/main" id="{8763E6EE-6C8F-4F4E-AFA2-177487DC8B06}"/>
+                <a16:creationId xmlns:a16="http://schemas.microsoft.com/office/drawing/2014/main" id="{CD890E09-F6F7-400D-82D2-988A585E2E75}"/>
               </a:ext>
             </a:extLst>
           </p:cNvPr>
@@ -12901,7 +12901,7 @@
           <p:cNvPr id="11" name="">
             <a:extLst xmlns:a="http://schemas.openxmlformats.org/drawingml/2006/main">
               <a:ext uri="{FF2B5EF4-FFF2-40B4-BE49-F238E27FC236}">
-                <a16:creationId xmlns:a16="http://schemas.microsoft.com/office/drawing/2014/main" id="{40D135C9-0AAA-448D-B5EB-521704A0DA70}"/>
+                <a16:creationId xmlns:a16="http://schemas.microsoft.com/office/drawing/2014/main" id="{DBD89C97-8BB8-492F-808A-DB1C1D22BF95}"/>
               </a:ext>
             </a:extLst>
           </p:cNvPr>
@@ -12932,7 +12932,7 @@
           <p:cNvPr id="12" name="">
             <a:extLst xmlns:a="http://schemas.openxmlformats.org/drawingml/2006/main">
               <a:ext uri="{FF2B5EF4-FFF2-40B4-BE49-F238E27FC236}">
-                <a16:creationId xmlns:a16="http://schemas.microsoft.com/office/drawing/2014/main" id="{A26CFD7D-FC2B-4235-A866-98C680F84374}"/>
+                <a16:creationId xmlns:a16="http://schemas.microsoft.com/office/drawing/2014/main" id="{EBB6E9A8-85B3-4B68-B87F-167C7CD0EAE0}"/>
               </a:ext>
             </a:extLst>
           </p:cNvPr>
@@ -12963,7 +12963,7 @@
           <p:cNvPr id="13" name="">
             <a:extLst xmlns:a="http://schemas.openxmlformats.org/drawingml/2006/main">
               <a:ext uri="{FF2B5EF4-FFF2-40B4-BE49-F238E27FC236}">
-                <a16:creationId xmlns:a16="http://schemas.microsoft.com/office/drawing/2014/main" id="{DAE65C03-B49A-4542-B743-8CA24664F8CA}"/>
+                <a16:creationId xmlns:a16="http://schemas.microsoft.com/office/drawing/2014/main" id="{17F9A3E3-C52A-490F-BFE2-BC94D5A63EDA}"/>
               </a:ext>
             </a:extLst>
           </p:cNvPr>
@@ -13015,7 +13015,7 @@
           <p:cNvPr id="14" name="">
             <a:extLst xmlns:a="http://schemas.openxmlformats.org/drawingml/2006/main">
               <a:ext uri="{FF2B5EF4-FFF2-40B4-BE49-F238E27FC236}">
-                <a16:creationId xmlns:a16="http://schemas.microsoft.com/office/drawing/2014/main" id="{EDF488D8-EEE0-48F3-B1E2-C01E76ED8CE0}"/>
+                <a16:creationId xmlns:a16="http://schemas.microsoft.com/office/drawing/2014/main" id="{58CB4A06-67D6-48C7-B86B-8AC5B95FC0E9}"/>
               </a:ext>
             </a:extLst>
           </p:cNvPr>
@@ -13067,7 +13067,7 @@
           <p:cNvPr id="15" name="">
             <a:extLst xmlns:a="http://schemas.openxmlformats.org/drawingml/2006/main">
               <a:ext uri="{FF2B5EF4-FFF2-40B4-BE49-F238E27FC236}">
-                <a16:creationId xmlns:a16="http://schemas.microsoft.com/office/drawing/2014/main" id="{B2A2DF02-265E-4F34-98C5-65E447E00D51}"/>
+                <a16:creationId xmlns:a16="http://schemas.microsoft.com/office/drawing/2014/main" id="{53632B18-A015-4F7D-AAC0-30E0B3327E7E}"/>
               </a:ext>
             </a:extLst>
           </p:cNvPr>
@@ -13119,7 +13119,7 @@
           <p:cNvPr id="16" name="">
             <a:extLst xmlns:a="http://schemas.openxmlformats.org/drawingml/2006/main">
               <a:ext uri="{FF2B5EF4-FFF2-40B4-BE49-F238E27FC236}">
-                <a16:creationId xmlns:a16="http://schemas.microsoft.com/office/drawing/2014/main" id="{75C40846-B9D1-45A6-BC35-E15CFA203EB9}"/>
+                <a16:creationId xmlns:a16="http://schemas.microsoft.com/office/drawing/2014/main" id="{CF6690A0-BBC4-4310-B017-30673BA6A5A5}"/>
               </a:ext>
             </a:extLst>
           </p:cNvPr>
@@ -13171,7 +13171,7 @@
           <p:cNvPr id="17" name="">
             <a:extLst xmlns:a="http://schemas.openxmlformats.org/drawingml/2006/main">
               <a:ext uri="{FF2B5EF4-FFF2-40B4-BE49-F238E27FC236}">
-                <a16:creationId xmlns:a16="http://schemas.microsoft.com/office/drawing/2014/main" id="{A0240D93-F07B-40CE-9574-02DEDB0B2353}"/>
+                <a16:creationId xmlns:a16="http://schemas.microsoft.com/office/drawing/2014/main" id="{422E1047-DCD9-48FA-BC47-1F7E66C52B4A}"/>
               </a:ext>
             </a:extLst>
           </p:cNvPr>
@@ -13223,7 +13223,7 @@
           <p:cNvPr id="18" name="">
             <a:extLst xmlns:a="http://schemas.openxmlformats.org/drawingml/2006/main">
               <a:ext uri="{FF2B5EF4-FFF2-40B4-BE49-F238E27FC236}">
-                <a16:creationId xmlns:a16="http://schemas.microsoft.com/office/drawing/2014/main" id="{B3A4E2BA-6072-497C-886E-9C5CABB4C5EB}"/>
+                <a16:creationId xmlns:a16="http://schemas.microsoft.com/office/drawing/2014/main" id="{B11FA82F-1CF6-4544-B6C3-A5C3EA2B391F}"/>
               </a:ext>
             </a:extLst>
           </p:cNvPr>
@@ -13254,7 +13254,7 @@
           <p:cNvPr id="19" name="">
             <a:extLst xmlns:a="http://schemas.openxmlformats.org/drawingml/2006/main">
               <a:ext uri="{FF2B5EF4-FFF2-40B4-BE49-F238E27FC236}">
-                <a16:creationId xmlns:a16="http://schemas.microsoft.com/office/drawing/2014/main" id="{88E6C074-EA98-4092-96E6-4C0896E56A16}"/>
+                <a16:creationId xmlns:a16="http://schemas.microsoft.com/office/drawing/2014/main" id="{822B4BB3-8761-439A-97AC-885222240E8D}"/>
               </a:ext>
             </a:extLst>
           </p:cNvPr>
@@ -13306,7 +13306,7 @@
           <p:cNvPr id="20" name="">
             <a:extLst xmlns:a="http://schemas.openxmlformats.org/drawingml/2006/main">
               <a:ext uri="{FF2B5EF4-FFF2-40B4-BE49-F238E27FC236}">
-                <a16:creationId xmlns:a16="http://schemas.microsoft.com/office/drawing/2014/main" id="{82A46475-76F3-4046-BB08-55B4BE90B6DA}"/>
+                <a16:creationId xmlns:a16="http://schemas.microsoft.com/office/drawing/2014/main" id="{B5C247E5-4BA2-4C85-861A-692A32679F5D}"/>
               </a:ext>
             </a:extLst>
           </p:cNvPr>
@@ -13358,7 +13358,7 @@
           <p:cNvPr id="21" name="">
             <a:extLst xmlns:a="http://schemas.openxmlformats.org/drawingml/2006/main">
               <a:ext uri="{FF2B5EF4-FFF2-40B4-BE49-F238E27FC236}">
-                <a16:creationId xmlns:a16="http://schemas.microsoft.com/office/drawing/2014/main" id="{97547AAE-3055-4D19-89ED-02CD5235E831}"/>
+                <a16:creationId xmlns:a16="http://schemas.microsoft.com/office/drawing/2014/main" id="{035DA495-B5FA-4A35-A724-696DFC766951}"/>
               </a:ext>
             </a:extLst>
           </p:cNvPr>
@@ -13410,7 +13410,7 @@
           <p:cNvPr id="22" name="">
             <a:extLst xmlns:a="http://schemas.openxmlformats.org/drawingml/2006/main">
               <a:ext uri="{FF2B5EF4-FFF2-40B4-BE49-F238E27FC236}">
-                <a16:creationId xmlns:a16="http://schemas.microsoft.com/office/drawing/2014/main" id="{A3A63BC8-F1C7-4783-A623-494726AB6392}"/>
+                <a16:creationId xmlns:a16="http://schemas.microsoft.com/office/drawing/2014/main" id="{2434AA28-515C-4AFD-8DDF-280190082442}"/>
               </a:ext>
             </a:extLst>
           </p:cNvPr>
@@ -13462,7 +13462,7 @@
           <p:cNvPr id="23" name="">
             <a:extLst xmlns:a="http://schemas.openxmlformats.org/drawingml/2006/main">
               <a:ext uri="{FF2B5EF4-FFF2-40B4-BE49-F238E27FC236}">
-                <a16:creationId xmlns:a16="http://schemas.microsoft.com/office/drawing/2014/main" id="{F6E9F9D0-DE29-4AC8-8992-0ECF49C6ED08}"/>
+                <a16:creationId xmlns:a16="http://schemas.microsoft.com/office/drawing/2014/main" id="{E723A7A2-549B-45FD-8B72-CA52C7A036EE}"/>
               </a:ext>
             </a:extLst>
           </p:cNvPr>
@@ -13514,7 +13514,7 @@
           <p:cNvPr id="24" name="">
             <a:extLst xmlns:a="http://schemas.openxmlformats.org/drawingml/2006/main">
               <a:ext uri="{FF2B5EF4-FFF2-40B4-BE49-F238E27FC236}">
-                <a16:creationId xmlns:a16="http://schemas.microsoft.com/office/drawing/2014/main" id="{88FCFE9C-9FCC-4F07-B29B-B9E197EBF4A6}"/>
+                <a16:creationId xmlns:a16="http://schemas.microsoft.com/office/drawing/2014/main" id="{A001888A-6384-45AD-ABFC-7E2D42FD601B}"/>
               </a:ext>
             </a:extLst>
           </p:cNvPr>
@@ -13545,7 +13545,7 @@
           <p:cNvPr id="25" name="">
             <a:extLst xmlns:a="http://schemas.openxmlformats.org/drawingml/2006/main">
               <a:ext uri="{FF2B5EF4-FFF2-40B4-BE49-F238E27FC236}">
-                <a16:creationId xmlns:a16="http://schemas.microsoft.com/office/drawing/2014/main" id="{DFDBF037-558A-4242-803D-2380EBCE0CAD}"/>
+                <a16:creationId xmlns:a16="http://schemas.microsoft.com/office/drawing/2014/main" id="{F6255D6E-A177-474A-B0F1-3B4AFA95C5A4}"/>
               </a:ext>
             </a:extLst>
           </p:cNvPr>
@@ -13576,7 +13576,7 @@
           <p:cNvPr id="26" name="">
             <a:extLst xmlns:a="http://schemas.openxmlformats.org/drawingml/2006/main">
               <a:ext uri="{FF2B5EF4-FFF2-40B4-BE49-F238E27FC236}">
-                <a16:creationId xmlns:a16="http://schemas.microsoft.com/office/drawing/2014/main" id="{29CC7132-AC42-41D1-A3A9-1437C361464F}"/>
+                <a16:creationId xmlns:a16="http://schemas.microsoft.com/office/drawing/2014/main" id="{42626EB4-B6D2-46CD-A223-4FE521C967E5}"/>
               </a:ext>
             </a:extLst>
           </p:cNvPr>
@@ -13628,7 +13628,7 @@
           <p:cNvPr id="27" name="">
             <a:extLst xmlns:a="http://schemas.openxmlformats.org/drawingml/2006/main">
               <a:ext uri="{FF2B5EF4-FFF2-40B4-BE49-F238E27FC236}">
-                <a16:creationId xmlns:a16="http://schemas.microsoft.com/office/drawing/2014/main" id="{8B6FB749-15B5-4EE7-B1AD-05BB8716BD00}"/>
+                <a16:creationId xmlns:a16="http://schemas.microsoft.com/office/drawing/2014/main" id="{047B4466-9EE2-41DD-88ED-5014A585FC4D}"/>
               </a:ext>
             </a:extLst>
           </p:cNvPr>
@@ -13680,7 +13680,7 @@
           <p:cNvPr id="28" name="">
             <a:extLst xmlns:a="http://schemas.openxmlformats.org/drawingml/2006/main">
               <a:ext uri="{FF2B5EF4-FFF2-40B4-BE49-F238E27FC236}">
-                <a16:creationId xmlns:a16="http://schemas.microsoft.com/office/drawing/2014/main" id="{49BCFC4F-F0EB-4C89-9952-C77088D02048}"/>
+                <a16:creationId xmlns:a16="http://schemas.microsoft.com/office/drawing/2014/main" id="{B73ABAD1-FC74-4406-A0D4-26E3911B1118}"/>
               </a:ext>
             </a:extLst>
           </p:cNvPr>
@@ -13732,7 +13732,7 @@
           <p:cNvPr id="29" name="">
             <a:extLst xmlns:a="http://schemas.openxmlformats.org/drawingml/2006/main">
               <a:ext uri="{FF2B5EF4-FFF2-40B4-BE49-F238E27FC236}">
-                <a16:creationId xmlns:a16="http://schemas.microsoft.com/office/drawing/2014/main" id="{6901B685-9991-4124-8CAE-C1D46A5CB7CB}"/>
+                <a16:creationId xmlns:a16="http://schemas.microsoft.com/office/drawing/2014/main" id="{1B002573-B452-4989-B600-8597F9A40750}"/>
               </a:ext>
             </a:extLst>
           </p:cNvPr>
@@ -13784,7 +13784,7 @@
           <p:cNvPr id="30" name="">
             <a:extLst xmlns:a="http://schemas.openxmlformats.org/drawingml/2006/main">
               <a:ext uri="{FF2B5EF4-FFF2-40B4-BE49-F238E27FC236}">
-                <a16:creationId xmlns:a16="http://schemas.microsoft.com/office/drawing/2014/main" id="{7ACA233D-1CE0-4CE5-B95C-FEE8E3402A61}"/>
+                <a16:creationId xmlns:a16="http://schemas.microsoft.com/office/drawing/2014/main" id="{F2F03900-9520-44A9-B52D-E39C306F6CCD}"/>
               </a:ext>
             </a:extLst>
           </p:cNvPr>
@@ -13836,7 +13836,7 @@
           <p:cNvPr id="31" name="">
             <a:extLst xmlns:a="http://schemas.openxmlformats.org/drawingml/2006/main">
               <a:ext uri="{FF2B5EF4-FFF2-40B4-BE49-F238E27FC236}">
-                <a16:creationId xmlns:a16="http://schemas.microsoft.com/office/drawing/2014/main" id="{C638B430-D5CA-48A7-82AC-D27623269223}"/>
+                <a16:creationId xmlns:a16="http://schemas.microsoft.com/office/drawing/2014/main" id="{1392536F-52AC-4C8F-8E4E-D16B698B896C}"/>
               </a:ext>
             </a:extLst>
           </p:cNvPr>
@@ -13867,7 +13867,7 @@
           <p:cNvPr id="32" name="">
             <a:extLst xmlns:a="http://schemas.openxmlformats.org/drawingml/2006/main">
               <a:ext uri="{FF2B5EF4-FFF2-40B4-BE49-F238E27FC236}">
-                <a16:creationId xmlns:a16="http://schemas.microsoft.com/office/drawing/2014/main" id="{6B827928-CA9B-4A4F-AC65-E2808C80B30E}"/>
+                <a16:creationId xmlns:a16="http://schemas.microsoft.com/office/drawing/2014/main" id="{F8E0242F-E460-4651-8B4D-B811EFE01402}"/>
               </a:ext>
             </a:extLst>
           </p:cNvPr>
@@ -13919,7 +13919,7 @@
           <p:cNvPr id="33" name="">
             <a:extLst xmlns:a="http://schemas.openxmlformats.org/drawingml/2006/main">
               <a:ext uri="{FF2B5EF4-FFF2-40B4-BE49-F238E27FC236}">
-                <a16:creationId xmlns:a16="http://schemas.microsoft.com/office/drawing/2014/main" id="{48CB39E3-744E-49AE-9159-9568E699AC74}"/>
+                <a16:creationId xmlns:a16="http://schemas.microsoft.com/office/drawing/2014/main" id="{84E1AE61-D147-4F25-8997-A04016F41326}"/>
               </a:ext>
             </a:extLst>
           </p:cNvPr>
@@ -13971,7 +13971,7 @@
           <p:cNvPr id="34" name="">
             <a:extLst xmlns:a="http://schemas.openxmlformats.org/drawingml/2006/main">
               <a:ext uri="{FF2B5EF4-FFF2-40B4-BE49-F238E27FC236}">
-                <a16:creationId xmlns:a16="http://schemas.microsoft.com/office/drawing/2014/main" id="{68D44C82-6C39-4F5C-A57E-F2D6C0387314}"/>
+                <a16:creationId xmlns:a16="http://schemas.microsoft.com/office/drawing/2014/main" id="{113F7730-7EC9-40FC-8960-352D67D3DDA5}"/>
               </a:ext>
             </a:extLst>
           </p:cNvPr>
@@ -14023,7 +14023,7 @@
           <p:cNvPr id="35" name="">
             <a:extLst xmlns:a="http://schemas.openxmlformats.org/drawingml/2006/main">
               <a:ext uri="{FF2B5EF4-FFF2-40B4-BE49-F238E27FC236}">
-                <a16:creationId xmlns:a16="http://schemas.microsoft.com/office/drawing/2014/main" id="{D371486C-12CC-4948-8435-298BDF5835F1}"/>
+                <a16:creationId xmlns:a16="http://schemas.microsoft.com/office/drawing/2014/main" id="{8104A9E5-E211-42D6-B0F5-B628FFF5A5E5}"/>
               </a:ext>
             </a:extLst>
           </p:cNvPr>
@@ -14075,7 +14075,7 @@
           <p:cNvPr id="36" name="">
             <a:extLst xmlns:a="http://schemas.openxmlformats.org/drawingml/2006/main">
               <a:ext uri="{FF2B5EF4-FFF2-40B4-BE49-F238E27FC236}">
-                <a16:creationId xmlns:a16="http://schemas.microsoft.com/office/drawing/2014/main" id="{E6B4B561-7D93-44DF-8344-83E6EE710134}"/>
+                <a16:creationId xmlns:a16="http://schemas.microsoft.com/office/drawing/2014/main" id="{68665BAA-548F-4D65-B71C-599106E36594}"/>
               </a:ext>
             </a:extLst>
           </p:cNvPr>
@@ -14127,7 +14127,7 @@
           <p:cNvPr id="37" name="">
             <a:extLst xmlns:a="http://schemas.openxmlformats.org/drawingml/2006/main">
               <a:ext uri="{FF2B5EF4-FFF2-40B4-BE49-F238E27FC236}">
-                <a16:creationId xmlns:a16="http://schemas.microsoft.com/office/drawing/2014/main" id="{512F6E78-70C6-4C97-94EB-DC1F4268763E}"/>
+                <a16:creationId xmlns:a16="http://schemas.microsoft.com/office/drawing/2014/main" id="{4890E293-163B-418F-80ED-C0A15BD2DCC0}"/>
               </a:ext>
             </a:extLst>
           </p:cNvPr>
@@ -14158,7 +14158,7 @@
           <p:cNvPr id="38" name="">
             <a:extLst xmlns:a="http://schemas.openxmlformats.org/drawingml/2006/main">
               <a:ext uri="{FF2B5EF4-FFF2-40B4-BE49-F238E27FC236}">
-                <a16:creationId xmlns:a16="http://schemas.microsoft.com/office/drawing/2014/main" id="{2A2CDA20-50C3-41EE-A89F-FA9EA4E3ACE1}"/>
+                <a16:creationId xmlns:a16="http://schemas.microsoft.com/office/drawing/2014/main" id="{00BB3466-DA80-4DEA-A340-7C74DF205468}"/>
               </a:ext>
             </a:extLst>
           </p:cNvPr>
@@ -14189,7 +14189,7 @@
           <p:cNvPr id="39" name="">
             <a:extLst xmlns:a="http://schemas.openxmlformats.org/drawingml/2006/main">
               <a:ext uri="{FF2B5EF4-FFF2-40B4-BE49-F238E27FC236}">
-                <a16:creationId xmlns:a16="http://schemas.microsoft.com/office/drawing/2014/main" id="{BD1B2528-68F9-4111-B59E-0DA94031B016}"/>
+                <a16:creationId xmlns:a16="http://schemas.microsoft.com/office/drawing/2014/main" id="{6D4BA022-27B4-44EA-ADD9-D369CE9747F8}"/>
               </a:ext>
             </a:extLst>
           </p:cNvPr>
@@ -14241,7 +14241,7 @@
           <p:cNvPr id="40" name="">
             <a:extLst xmlns:a="http://schemas.openxmlformats.org/drawingml/2006/main">
               <a:ext uri="{FF2B5EF4-FFF2-40B4-BE49-F238E27FC236}">
-                <a16:creationId xmlns:a16="http://schemas.microsoft.com/office/drawing/2014/main" id="{4AFAB5BC-C204-4DD9-B4B0-BAB17633E538}"/>
+                <a16:creationId xmlns:a16="http://schemas.microsoft.com/office/drawing/2014/main" id="{685E55D4-499C-4A78-B172-A5E3C7868D12}"/>
               </a:ext>
             </a:extLst>
           </p:cNvPr>
@@ -14293,7 +14293,7 @@
           <p:cNvPr id="41" name="">
             <a:extLst xmlns:a="http://schemas.openxmlformats.org/drawingml/2006/main">
               <a:ext uri="{FF2B5EF4-FFF2-40B4-BE49-F238E27FC236}">
-                <a16:creationId xmlns:a16="http://schemas.microsoft.com/office/drawing/2014/main" id="{E48CB23A-B5E8-495E-B0B1-BFB50ACB3744}"/>
+                <a16:creationId xmlns:a16="http://schemas.microsoft.com/office/drawing/2014/main" id="{223CD56E-E59D-434E-8292-4C980C9BACD6}"/>
               </a:ext>
             </a:extLst>
           </p:cNvPr>
@@ -14345,7 +14345,7 @@
           <p:cNvPr id="42" name="">
             <a:extLst xmlns:a="http://schemas.openxmlformats.org/drawingml/2006/main">
               <a:ext uri="{FF2B5EF4-FFF2-40B4-BE49-F238E27FC236}">
-                <a16:creationId xmlns:a16="http://schemas.microsoft.com/office/drawing/2014/main" id="{5360679F-8185-4E7D-A015-4FBB1BD4AB81}"/>
+                <a16:creationId xmlns:a16="http://schemas.microsoft.com/office/drawing/2014/main" id="{4EE76372-474A-4FEF-AD8C-0FE68C4D94B9}"/>
               </a:ext>
             </a:extLst>
           </p:cNvPr>
@@ -14397,7 +14397,7 @@
           <p:cNvPr id="43" name="">
             <a:extLst xmlns:a="http://schemas.openxmlformats.org/drawingml/2006/main">
               <a:ext uri="{FF2B5EF4-FFF2-40B4-BE49-F238E27FC236}">
-                <a16:creationId xmlns:a16="http://schemas.microsoft.com/office/drawing/2014/main" id="{E6CCC424-DE88-4A78-BE39-8B34711B4E93}"/>
+                <a16:creationId xmlns:a16="http://schemas.microsoft.com/office/drawing/2014/main" id="{E874D885-E25A-475E-B201-70FED7814547}"/>
               </a:ext>
             </a:extLst>
           </p:cNvPr>
@@ -14449,7 +14449,7 @@
           <p:cNvPr id="44" name="">
             <a:extLst xmlns:a="http://schemas.openxmlformats.org/drawingml/2006/main">
               <a:ext uri="{FF2B5EF4-FFF2-40B4-BE49-F238E27FC236}">
-                <a16:creationId xmlns:a16="http://schemas.microsoft.com/office/drawing/2014/main" id="{5710A2F3-31DD-4838-A695-B7BF70529BFA}"/>
+                <a16:creationId xmlns:a16="http://schemas.microsoft.com/office/drawing/2014/main" id="{51B1720D-C674-4C6A-AA67-8C046F413083}"/>
               </a:ext>
             </a:extLst>
           </p:cNvPr>
@@ -14480,7 +14480,7 @@
           <p:cNvPr id="45" name="">
             <a:extLst xmlns:a="http://schemas.openxmlformats.org/drawingml/2006/main">
               <a:ext uri="{FF2B5EF4-FFF2-40B4-BE49-F238E27FC236}">
-                <a16:creationId xmlns:a16="http://schemas.microsoft.com/office/drawing/2014/main" id="{46D3813F-FA94-42C7-943A-466154236A98}"/>
+                <a16:creationId xmlns:a16="http://schemas.microsoft.com/office/drawing/2014/main" id="{00DB945B-B311-4CAC-B6B1-C87842260D66}"/>
               </a:ext>
             </a:extLst>
           </p:cNvPr>
@@ -14532,7 +14532,7 @@
           <p:cNvPr id="46" name="">
             <a:extLst xmlns:a="http://schemas.openxmlformats.org/drawingml/2006/main">
               <a:ext uri="{FF2B5EF4-FFF2-40B4-BE49-F238E27FC236}">
-                <a16:creationId xmlns:a16="http://schemas.microsoft.com/office/drawing/2014/main" id="{AFF3CBE8-EB23-49E2-A50E-B35137094866}"/>
+                <a16:creationId xmlns:a16="http://schemas.microsoft.com/office/drawing/2014/main" id="{183D4C89-5CDE-46CA-9B58-72B7414E9C65}"/>
               </a:ext>
             </a:extLst>
           </p:cNvPr>
@@ -14584,7 +14584,7 @@
           <p:cNvPr id="47" name="">
             <a:extLst xmlns:a="http://schemas.openxmlformats.org/drawingml/2006/main">
               <a:ext uri="{FF2B5EF4-FFF2-40B4-BE49-F238E27FC236}">
-                <a16:creationId xmlns:a16="http://schemas.microsoft.com/office/drawing/2014/main" id="{D85161FF-B75E-4AC4-91FC-E5ACE0F57C74}"/>
+                <a16:creationId xmlns:a16="http://schemas.microsoft.com/office/drawing/2014/main" id="{1FF6943C-97CC-42E8-8443-637EAE971933}"/>
               </a:ext>
             </a:extLst>
           </p:cNvPr>
@@ -14636,7 +14636,7 @@
           <p:cNvPr id="48" name="">
             <a:extLst xmlns:a="http://schemas.openxmlformats.org/drawingml/2006/main">
               <a:ext uri="{FF2B5EF4-FFF2-40B4-BE49-F238E27FC236}">
-                <a16:creationId xmlns:a16="http://schemas.microsoft.com/office/drawing/2014/main" id="{9CE7C184-2D5C-444F-8FFE-41FD8C57A0AA}"/>
+                <a16:creationId xmlns:a16="http://schemas.microsoft.com/office/drawing/2014/main" id="{0AB99B45-FDEB-40CA-B2EF-9E4D951B324A}"/>
               </a:ext>
             </a:extLst>
           </p:cNvPr>
@@ -14688,7 +14688,7 @@
           <p:cNvPr id="49" name="">
             <a:extLst xmlns:a="http://schemas.openxmlformats.org/drawingml/2006/main">
               <a:ext uri="{FF2B5EF4-FFF2-40B4-BE49-F238E27FC236}">
-                <a16:creationId xmlns:a16="http://schemas.microsoft.com/office/drawing/2014/main" id="{38528D75-A7C6-4DBD-BCD7-E65A6F0B8494}"/>
+                <a16:creationId xmlns:a16="http://schemas.microsoft.com/office/drawing/2014/main" id="{05700A82-8B9A-443B-823D-6C65BD376843}"/>
               </a:ext>
             </a:extLst>
           </p:cNvPr>
@@ -14740,7 +14740,7 @@
           <p:cNvPr id="50" name="">
             <a:extLst xmlns:a="http://schemas.openxmlformats.org/drawingml/2006/main">
               <a:ext uri="{FF2B5EF4-FFF2-40B4-BE49-F238E27FC236}">
-                <a16:creationId xmlns:a16="http://schemas.microsoft.com/office/drawing/2014/main" id="{8E55579B-C484-4767-9BFE-0C51E824EC4C}"/>
+                <a16:creationId xmlns:a16="http://schemas.microsoft.com/office/drawing/2014/main" id="{26FDC256-F98F-443C-99D2-4F579A28F91B}"/>
               </a:ext>
             </a:extLst>
           </p:cNvPr>
@@ -14771,7 +14771,7 @@
           <p:cNvPr id="51" name="">
             <a:extLst xmlns:a="http://schemas.openxmlformats.org/drawingml/2006/main">
               <a:ext uri="{FF2B5EF4-FFF2-40B4-BE49-F238E27FC236}">
-                <a16:creationId xmlns:a16="http://schemas.microsoft.com/office/drawing/2014/main" id="{32EBF3EE-4963-41F0-9D44-47BF078F3E2F}"/>
+                <a16:creationId xmlns:a16="http://schemas.microsoft.com/office/drawing/2014/main" id="{16B0F9DC-B9A0-4B8A-9606-8C6B8958F85A}"/>
               </a:ext>
             </a:extLst>
           </p:cNvPr>
@@ -14802,7 +14802,7 @@
           <p:cNvPr id="52" name="">
             <a:extLst xmlns:a="http://schemas.openxmlformats.org/drawingml/2006/main">
               <a:ext uri="{FF2B5EF4-FFF2-40B4-BE49-F238E27FC236}">
-                <a16:creationId xmlns:a16="http://schemas.microsoft.com/office/drawing/2014/main" id="{61205AEA-31C7-4385-9F3D-FCD1C880E552}"/>
+                <a16:creationId xmlns:a16="http://schemas.microsoft.com/office/drawing/2014/main" id="{7985CAE4-EA17-469D-9A87-E9BEBFD77053}"/>
               </a:ext>
             </a:extLst>
           </p:cNvPr>
@@ -14854,7 +14854,7 @@
           <p:cNvPr id="53" name="">
             <a:extLst xmlns:a="http://schemas.openxmlformats.org/drawingml/2006/main">
               <a:ext uri="{FF2B5EF4-FFF2-40B4-BE49-F238E27FC236}">
-                <a16:creationId xmlns:a16="http://schemas.microsoft.com/office/drawing/2014/main" id="{D8613431-C897-4781-AEBC-28EF38912677}"/>
+                <a16:creationId xmlns:a16="http://schemas.microsoft.com/office/drawing/2014/main" id="{AE13894E-897E-4723-BD56-6B27CD63DFC1}"/>
               </a:ext>
             </a:extLst>
           </p:cNvPr>
@@ -14906,7 +14906,7 @@
           <p:cNvPr id="54" name="">
             <a:extLst xmlns:a="http://schemas.openxmlformats.org/drawingml/2006/main">
               <a:ext uri="{FF2B5EF4-FFF2-40B4-BE49-F238E27FC236}">
-                <a16:creationId xmlns:a16="http://schemas.microsoft.com/office/drawing/2014/main" id="{D25AF7D8-8881-4DFF-A284-DBE21C931658}"/>
+                <a16:creationId xmlns:a16="http://schemas.microsoft.com/office/drawing/2014/main" id="{60EA92A9-8A27-455E-9DC0-184F985097AA}"/>
               </a:ext>
             </a:extLst>
           </p:cNvPr>
@@ -14958,7 +14958,7 @@
           <p:cNvPr id="55" name="">
             <a:extLst xmlns:a="http://schemas.openxmlformats.org/drawingml/2006/main">
               <a:ext uri="{FF2B5EF4-FFF2-40B4-BE49-F238E27FC236}">
-                <a16:creationId xmlns:a16="http://schemas.microsoft.com/office/drawing/2014/main" id="{3C85F885-B807-471C-A808-8E9D08911248}"/>
+                <a16:creationId xmlns:a16="http://schemas.microsoft.com/office/drawing/2014/main" id="{8D02B7F9-29D3-464B-BB7A-FB2344628488}"/>
               </a:ext>
             </a:extLst>
           </p:cNvPr>
@@ -15010,7 +15010,7 @@
           <p:cNvPr id="56" name="">
             <a:extLst xmlns:a="http://schemas.openxmlformats.org/drawingml/2006/main">
               <a:ext uri="{FF2B5EF4-FFF2-40B4-BE49-F238E27FC236}">
-                <a16:creationId xmlns:a16="http://schemas.microsoft.com/office/drawing/2014/main" id="{CA74FAB1-0E26-42DD-8ADA-B39A419E14A0}"/>
+                <a16:creationId xmlns:a16="http://schemas.microsoft.com/office/drawing/2014/main" id="{22D7D308-9472-4E34-9028-F622166BC9B6}"/>
               </a:ext>
             </a:extLst>
           </p:cNvPr>
@@ -15062,7 +15062,7 @@
           <p:cNvPr id="57" name="">
             <a:extLst xmlns:a="http://schemas.openxmlformats.org/drawingml/2006/main">
               <a:ext uri="{FF2B5EF4-FFF2-40B4-BE49-F238E27FC236}">
-                <a16:creationId xmlns:a16="http://schemas.microsoft.com/office/drawing/2014/main" id="{47E3C5EE-092E-4F9F-BD12-AE51126B1DA2}"/>
+                <a16:creationId xmlns:a16="http://schemas.microsoft.com/office/drawing/2014/main" id="{671E76ED-4881-4641-BB4A-89C33AD11DA7}"/>
               </a:ext>
             </a:extLst>
           </p:cNvPr>
@@ -15093,7 +15093,7 @@
           <p:cNvPr id="58" name="">
             <a:extLst xmlns:a="http://schemas.openxmlformats.org/drawingml/2006/main">
               <a:ext uri="{FF2B5EF4-FFF2-40B4-BE49-F238E27FC236}">
-                <a16:creationId xmlns:a16="http://schemas.microsoft.com/office/drawing/2014/main" id="{0B63CEE1-CBF4-4262-B578-245480309A39}"/>
+                <a16:creationId xmlns:a16="http://schemas.microsoft.com/office/drawing/2014/main" id="{3AE65A8F-CB74-4067-937A-FC3189D325E1}"/>
               </a:ext>
             </a:extLst>
           </p:cNvPr>
@@ -15145,7 +15145,7 @@
           <p:cNvPr id="59" name="">
             <a:extLst xmlns:a="http://schemas.openxmlformats.org/drawingml/2006/main">
               <a:ext uri="{FF2B5EF4-FFF2-40B4-BE49-F238E27FC236}">
-                <a16:creationId xmlns:a16="http://schemas.microsoft.com/office/drawing/2014/main" id="{5320CE40-317E-4E01-9657-21D100D4E3BD}"/>
+                <a16:creationId xmlns:a16="http://schemas.microsoft.com/office/drawing/2014/main" id="{3986975C-9621-408D-96CD-754A2AA5ABD0}"/>
               </a:ext>
             </a:extLst>
           </p:cNvPr>
@@ -15197,7 +15197,7 @@
           <p:cNvPr id="60" name="">
             <a:extLst xmlns:a="http://schemas.openxmlformats.org/drawingml/2006/main">
               <a:ext uri="{FF2B5EF4-FFF2-40B4-BE49-F238E27FC236}">
-                <a16:creationId xmlns:a16="http://schemas.microsoft.com/office/drawing/2014/main" id="{0F0ADDAC-1569-460F-AF89-A1B6BD01281A}"/>
+                <a16:creationId xmlns:a16="http://schemas.microsoft.com/office/drawing/2014/main" id="{BDC11B55-6B45-46C6-9F02-B98A970C895A}"/>
               </a:ext>
             </a:extLst>
           </p:cNvPr>
@@ -15249,7 +15249,7 @@
           <p:cNvPr id="61" name="">
             <a:extLst xmlns:a="http://schemas.openxmlformats.org/drawingml/2006/main">
               <a:ext uri="{FF2B5EF4-FFF2-40B4-BE49-F238E27FC236}">
-                <a16:creationId xmlns:a16="http://schemas.microsoft.com/office/drawing/2014/main" id="{64EF1ABA-344D-438E-9A73-0487445A13F0}"/>
+                <a16:creationId xmlns:a16="http://schemas.microsoft.com/office/drawing/2014/main" id="{EB3CB58D-0876-45FC-B46B-4C7610F6FEA4}"/>
               </a:ext>
             </a:extLst>
           </p:cNvPr>
@@ -15301,7 +15301,7 @@
           <p:cNvPr id="62" name="">
             <a:extLst xmlns:a="http://schemas.openxmlformats.org/drawingml/2006/main">
               <a:ext uri="{FF2B5EF4-FFF2-40B4-BE49-F238E27FC236}">
-                <a16:creationId xmlns:a16="http://schemas.microsoft.com/office/drawing/2014/main" id="{8310720A-4C44-4471-AF40-6A6ACBFD7F15}"/>
+                <a16:creationId xmlns:a16="http://schemas.microsoft.com/office/drawing/2014/main" id="{CB419EB0-9439-4ACD-9A6D-20A5FF761C00}"/>
               </a:ext>
             </a:extLst>
           </p:cNvPr>
@@ -15353,7 +15353,7 @@
           <p:cNvPr id="63" name="">
             <a:extLst xmlns:a="http://schemas.openxmlformats.org/drawingml/2006/main">
               <a:ext uri="{FF2B5EF4-FFF2-40B4-BE49-F238E27FC236}">
-                <a16:creationId xmlns:a16="http://schemas.microsoft.com/office/drawing/2014/main" id="{5960E507-A889-416B-9C36-D521902AC53D}"/>
+                <a16:creationId xmlns:a16="http://schemas.microsoft.com/office/drawing/2014/main" id="{7BD0ABB0-15D6-4E14-8175-1AC4BA037E0C}"/>
               </a:ext>
             </a:extLst>
           </p:cNvPr>
@@ -15384,7 +15384,7 @@
           <p:cNvPr id="64" name="">
             <a:extLst xmlns:a="http://schemas.openxmlformats.org/drawingml/2006/main">
               <a:ext uri="{FF2B5EF4-FFF2-40B4-BE49-F238E27FC236}">
-                <a16:creationId xmlns:a16="http://schemas.microsoft.com/office/drawing/2014/main" id="{FE65B58A-77D9-4A8D-844D-4114A1393288}"/>
+                <a16:creationId xmlns:a16="http://schemas.microsoft.com/office/drawing/2014/main" id="{C6963FC4-DD83-429D-A01F-31A5E48E965A}"/>
               </a:ext>
             </a:extLst>
           </p:cNvPr>
@@ -15415,7 +15415,7 @@
           <p:cNvPr id="65" name="">
             <a:extLst xmlns:a="http://schemas.openxmlformats.org/drawingml/2006/main">
               <a:ext uri="{FF2B5EF4-FFF2-40B4-BE49-F238E27FC236}">
-                <a16:creationId xmlns:a16="http://schemas.microsoft.com/office/drawing/2014/main" id="{9142DEB8-3020-4103-BAB8-1A0F8EC6178E}"/>
+                <a16:creationId xmlns:a16="http://schemas.microsoft.com/office/drawing/2014/main" id="{5E4BE725-58F7-47C2-98E7-511A4AC56A49}"/>
               </a:ext>
             </a:extLst>
           </p:cNvPr>
@@ -15467,7 +15467,7 @@
           <p:cNvPr id="66" name="">
             <a:extLst xmlns:a="http://schemas.openxmlformats.org/drawingml/2006/main">
               <a:ext uri="{FF2B5EF4-FFF2-40B4-BE49-F238E27FC236}">
-                <a16:creationId xmlns:a16="http://schemas.microsoft.com/office/drawing/2014/main" id="{B5BEC48C-1EDB-48A2-929A-FFE54A57829B}"/>
+                <a16:creationId xmlns:a16="http://schemas.microsoft.com/office/drawing/2014/main" id="{FE12B4B2-29E2-42A7-A5A1-11207EB7872A}"/>
               </a:ext>
             </a:extLst>
           </p:cNvPr>
@@ -15519,7 +15519,7 @@
           <p:cNvPr id="67" name="">
             <a:extLst xmlns:a="http://schemas.openxmlformats.org/drawingml/2006/main">
               <a:ext uri="{FF2B5EF4-FFF2-40B4-BE49-F238E27FC236}">
-                <a16:creationId xmlns:a16="http://schemas.microsoft.com/office/drawing/2014/main" id="{C3D398B6-A4E5-4BF5-ACE5-71F4E8185055}"/>
+                <a16:creationId xmlns:a16="http://schemas.microsoft.com/office/drawing/2014/main" id="{53652C99-A3FC-403E-81BD-95C9A9062A29}"/>
               </a:ext>
             </a:extLst>
           </p:cNvPr>
@@ -15571,7 +15571,7 @@
           <p:cNvPr id="68" name="">
             <a:extLst xmlns:a="http://schemas.openxmlformats.org/drawingml/2006/main">
               <a:ext uri="{FF2B5EF4-FFF2-40B4-BE49-F238E27FC236}">
-                <a16:creationId xmlns:a16="http://schemas.microsoft.com/office/drawing/2014/main" id="{8CD86D6F-DCE7-4623-951C-B445D1C1AFB5}"/>
+                <a16:creationId xmlns:a16="http://schemas.microsoft.com/office/drawing/2014/main" id="{0F827752-BC91-424A-845E-D4CE267CBB85}"/>
               </a:ext>
             </a:extLst>
           </p:cNvPr>
@@ -15623,7 +15623,7 @@
           <p:cNvPr id="69" name="">
             <a:extLst xmlns:a="http://schemas.openxmlformats.org/drawingml/2006/main">
               <a:ext uri="{FF2B5EF4-FFF2-40B4-BE49-F238E27FC236}">
-                <a16:creationId xmlns:a16="http://schemas.microsoft.com/office/drawing/2014/main" id="{62164D5F-933A-416D-846E-7BB9B78F4892}"/>
+                <a16:creationId xmlns:a16="http://schemas.microsoft.com/office/drawing/2014/main" id="{EA943845-13A4-48F6-9412-CB3B4685A0C0}"/>
               </a:ext>
             </a:extLst>
           </p:cNvPr>
@@ -15675,7 +15675,7 @@
           <p:cNvPr id="70" name="">
             <a:extLst xmlns:a="http://schemas.openxmlformats.org/drawingml/2006/main">
               <a:ext uri="{FF2B5EF4-FFF2-40B4-BE49-F238E27FC236}">
-                <a16:creationId xmlns:a16="http://schemas.microsoft.com/office/drawing/2014/main" id="{17D7E437-FA06-46E7-B692-4BA1A8D69E46}"/>
+                <a16:creationId xmlns:a16="http://schemas.microsoft.com/office/drawing/2014/main" id="{BB1476D2-C535-412C-BD9B-800F88B17C51}"/>
               </a:ext>
             </a:extLst>
           </p:cNvPr>
@@ -15706,7 +15706,7 @@
           <p:cNvPr id="71" name="">
             <a:extLst xmlns:a="http://schemas.openxmlformats.org/drawingml/2006/main">
               <a:ext uri="{FF2B5EF4-FFF2-40B4-BE49-F238E27FC236}">
-                <a16:creationId xmlns:a16="http://schemas.microsoft.com/office/drawing/2014/main" id="{43A97190-FB65-4233-9238-A0722A02676A}"/>
+                <a16:creationId xmlns:a16="http://schemas.microsoft.com/office/drawing/2014/main" id="{DB3EA9EF-AF10-44CE-BC51-FA9557A20DA9}"/>
               </a:ext>
             </a:extLst>
           </p:cNvPr>
@@ -15758,7 +15758,7 @@
           <p:cNvPr id="72" name="">
             <a:extLst xmlns:a="http://schemas.openxmlformats.org/drawingml/2006/main">
               <a:ext uri="{FF2B5EF4-FFF2-40B4-BE49-F238E27FC236}">
-                <a16:creationId xmlns:a16="http://schemas.microsoft.com/office/drawing/2014/main" id="{DD59590C-6BB5-4CBB-B057-BE30C6FE1F9D}"/>
+                <a16:creationId xmlns:a16="http://schemas.microsoft.com/office/drawing/2014/main" id="{D2A8F67F-6310-411A-ABC6-C1591240636C}"/>
               </a:ext>
             </a:extLst>
           </p:cNvPr>
@@ -15810,7 +15810,7 @@
           <p:cNvPr id="73" name="">
             <a:extLst xmlns:a="http://schemas.openxmlformats.org/drawingml/2006/main">
               <a:ext uri="{FF2B5EF4-FFF2-40B4-BE49-F238E27FC236}">
-                <a16:creationId xmlns:a16="http://schemas.microsoft.com/office/drawing/2014/main" id="{1281264F-1986-4349-8392-AC41131A71B7}"/>
+                <a16:creationId xmlns:a16="http://schemas.microsoft.com/office/drawing/2014/main" id="{A8A61FA1-40D6-4D78-8590-48F73D78F5D7}"/>
               </a:ext>
             </a:extLst>
           </p:cNvPr>
@@ -15862,7 +15862,7 @@
           <p:cNvPr id="74" name="">
             <a:extLst xmlns:a="http://schemas.openxmlformats.org/drawingml/2006/main">
               <a:ext uri="{FF2B5EF4-FFF2-40B4-BE49-F238E27FC236}">
-                <a16:creationId xmlns:a16="http://schemas.microsoft.com/office/drawing/2014/main" id="{71AF88F0-82A0-4D93-BE1E-ABE64CE0173B}"/>
+                <a16:creationId xmlns:a16="http://schemas.microsoft.com/office/drawing/2014/main" id="{FF5E39A3-403F-4EA1-B2C8-3E2A40CC4B48}"/>
               </a:ext>
             </a:extLst>
           </p:cNvPr>
@@ -15914,7 +15914,7 @@
           <p:cNvPr id="75" name="">
             <a:extLst xmlns:a="http://schemas.openxmlformats.org/drawingml/2006/main">
               <a:ext uri="{FF2B5EF4-FFF2-40B4-BE49-F238E27FC236}">
-                <a16:creationId xmlns:a16="http://schemas.microsoft.com/office/drawing/2014/main" id="{5B463C72-15AC-4EDA-BD63-7A07B921C13B}"/>
+                <a16:creationId xmlns:a16="http://schemas.microsoft.com/office/drawing/2014/main" id="{03424A42-DEBA-4490-9391-B39D99FEF337}"/>
               </a:ext>
             </a:extLst>
           </p:cNvPr>
@@ -15966,7 +15966,7 @@
           <p:cNvPr id="76" name="">
             <a:extLst xmlns:a="http://schemas.openxmlformats.org/drawingml/2006/main">
               <a:ext uri="{FF2B5EF4-FFF2-40B4-BE49-F238E27FC236}">
-                <a16:creationId xmlns:a16="http://schemas.microsoft.com/office/drawing/2014/main" id="{4FF8BBA7-6418-4418-A494-D9E2F91DF58F}"/>
+                <a16:creationId xmlns:a16="http://schemas.microsoft.com/office/drawing/2014/main" id="{A644C8DD-583D-47A4-8209-0D78BB060A30}"/>
               </a:ext>
             </a:extLst>
           </p:cNvPr>
@@ -15997,7 +15997,7 @@
           <p:cNvPr id="77" name="">
             <a:extLst xmlns:a="http://schemas.openxmlformats.org/drawingml/2006/main">
               <a:ext uri="{FF2B5EF4-FFF2-40B4-BE49-F238E27FC236}">
-                <a16:creationId xmlns:a16="http://schemas.microsoft.com/office/drawing/2014/main" id="{093421A2-9A4D-43FA-ACF4-3F4FC868B6B2}"/>
+                <a16:creationId xmlns:a16="http://schemas.microsoft.com/office/drawing/2014/main" id="{820C7B8B-22B3-4238-80CC-C93E8CB3EE02}"/>
               </a:ext>
             </a:extLst>
           </p:cNvPr>
@@ -16028,7 +16028,7 @@
           <p:cNvPr id="78" name="">
             <a:extLst xmlns:a="http://schemas.openxmlformats.org/drawingml/2006/main">
               <a:ext uri="{FF2B5EF4-FFF2-40B4-BE49-F238E27FC236}">
-                <a16:creationId xmlns:a16="http://schemas.microsoft.com/office/drawing/2014/main" id="{3829F841-31E2-4C43-B628-F52C125FE89E}"/>
+                <a16:creationId xmlns:a16="http://schemas.microsoft.com/office/drawing/2014/main" id="{5DC9FABE-BBC9-4D99-8446-DE6AA55DED36}"/>
               </a:ext>
             </a:extLst>
           </p:cNvPr>
@@ -16080,7 +16080,7 @@
           <p:cNvPr id="79" name="">
             <a:extLst xmlns:a="http://schemas.openxmlformats.org/drawingml/2006/main">
               <a:ext uri="{FF2B5EF4-FFF2-40B4-BE49-F238E27FC236}">
-                <a16:creationId xmlns:a16="http://schemas.microsoft.com/office/drawing/2014/main" id="{DD56A507-4A08-4212-85DD-91458829B294}"/>
+                <a16:creationId xmlns:a16="http://schemas.microsoft.com/office/drawing/2014/main" id="{D2A396FA-D275-4FB9-A02F-8CCC6B617147}"/>
               </a:ext>
             </a:extLst>
           </p:cNvPr>
@@ -16132,7 +16132,7 @@
           <p:cNvPr id="80" name="">
             <a:extLst xmlns:a="http://schemas.openxmlformats.org/drawingml/2006/main">
               <a:ext uri="{FF2B5EF4-FFF2-40B4-BE49-F238E27FC236}">
-                <a16:creationId xmlns:a16="http://schemas.microsoft.com/office/drawing/2014/main" id="{927C1107-792E-49C6-9F95-C8D8B4331103}"/>
+                <a16:creationId xmlns:a16="http://schemas.microsoft.com/office/drawing/2014/main" id="{44712E3A-1665-4D81-B8F9-0F1BF65BC256}"/>
               </a:ext>
             </a:extLst>
           </p:cNvPr>
@@ -16184,7 +16184,7 @@
           <p:cNvPr id="81" name="">
             <a:extLst xmlns:a="http://schemas.openxmlformats.org/drawingml/2006/main">
               <a:ext uri="{FF2B5EF4-FFF2-40B4-BE49-F238E27FC236}">
-                <a16:creationId xmlns:a16="http://schemas.microsoft.com/office/drawing/2014/main" id="{F31EC324-FC7D-4838-A166-03EDA9F0F98B}"/>
+                <a16:creationId xmlns:a16="http://schemas.microsoft.com/office/drawing/2014/main" id="{223906B8-7DC5-470A-B853-D607AA20B501}"/>
               </a:ext>
             </a:extLst>
           </p:cNvPr>
@@ -16236,7 +16236,7 @@
           <p:cNvPr id="82" name="">
             <a:extLst xmlns:a="http://schemas.openxmlformats.org/drawingml/2006/main">
               <a:ext uri="{FF2B5EF4-FFF2-40B4-BE49-F238E27FC236}">
-                <a16:creationId xmlns:a16="http://schemas.microsoft.com/office/drawing/2014/main" id="{4D818FC1-5838-47FF-9F44-692D1B8CE3DD}"/>
+                <a16:creationId xmlns:a16="http://schemas.microsoft.com/office/drawing/2014/main" id="{1DE31CED-1106-4668-BFB8-72B5DF8C6221}"/>
               </a:ext>
             </a:extLst>
           </p:cNvPr>
@@ -16288,7 +16288,7 @@
           <p:cNvPr id="83" name="">
             <a:extLst xmlns:a="http://schemas.openxmlformats.org/drawingml/2006/main">
               <a:ext uri="{FF2B5EF4-FFF2-40B4-BE49-F238E27FC236}">
-                <a16:creationId xmlns:a16="http://schemas.microsoft.com/office/drawing/2014/main" id="{269E2F31-C155-4475-967E-38C44C0AC63B}"/>
+                <a16:creationId xmlns:a16="http://schemas.microsoft.com/office/drawing/2014/main" id="{5FD691AD-211F-4772-A788-C281B8CB4394}"/>
               </a:ext>
             </a:extLst>
           </p:cNvPr>
@@ -16319,7 +16319,7 @@
           <p:cNvPr id="84" name="">
             <a:extLst xmlns:a="http://schemas.openxmlformats.org/drawingml/2006/main">
               <a:ext uri="{FF2B5EF4-FFF2-40B4-BE49-F238E27FC236}">
-                <a16:creationId xmlns:a16="http://schemas.microsoft.com/office/drawing/2014/main" id="{8A7696F6-B3B0-4679-B4DC-82C459817238}"/>
+                <a16:creationId xmlns:a16="http://schemas.microsoft.com/office/drawing/2014/main" id="{38A90CAB-EE99-4A94-8AB0-1EF7D6BDC89F}"/>
               </a:ext>
             </a:extLst>
           </p:cNvPr>
@@ -16371,7 +16371,7 @@
           <p:cNvPr id="85" name="">
             <a:extLst xmlns:a="http://schemas.openxmlformats.org/drawingml/2006/main">
               <a:ext uri="{FF2B5EF4-FFF2-40B4-BE49-F238E27FC236}">
-                <a16:creationId xmlns:a16="http://schemas.microsoft.com/office/drawing/2014/main" id="{7FA4B3CC-4CF3-4EC3-89B8-FABF93AC92FF}"/>
+                <a16:creationId xmlns:a16="http://schemas.microsoft.com/office/drawing/2014/main" id="{2333352B-A43A-467C-B625-3484AD399EE2}"/>
               </a:ext>
             </a:extLst>
           </p:cNvPr>
@@ -16423,7 +16423,7 @@
           <p:cNvPr id="86" name="">
             <a:extLst xmlns:a="http://schemas.openxmlformats.org/drawingml/2006/main">
               <a:ext uri="{FF2B5EF4-FFF2-40B4-BE49-F238E27FC236}">
-                <a16:creationId xmlns:a16="http://schemas.microsoft.com/office/drawing/2014/main" id="{8D00FDE2-C72D-4783-AD79-AFE624B61159}"/>
+                <a16:creationId xmlns:a16="http://schemas.microsoft.com/office/drawing/2014/main" id="{D46D5E78-AE85-409A-B5F8-69C1863ED8CA}"/>
               </a:ext>
             </a:extLst>
           </p:cNvPr>
@@ -16475,7 +16475,7 @@
           <p:cNvPr id="87" name="">
             <a:extLst xmlns:a="http://schemas.openxmlformats.org/drawingml/2006/main">
               <a:ext uri="{FF2B5EF4-FFF2-40B4-BE49-F238E27FC236}">
-                <a16:creationId xmlns:a16="http://schemas.microsoft.com/office/drawing/2014/main" id="{5C81ED2B-97B8-499F-B4A5-0176CA01CE57}"/>
+                <a16:creationId xmlns:a16="http://schemas.microsoft.com/office/drawing/2014/main" id="{BE78765F-7597-4B9C-9A06-D7238D67946E}"/>
               </a:ext>
             </a:extLst>
           </p:cNvPr>
@@ -16527,7 +16527,7 @@
           <p:cNvPr id="88" name="">
             <a:extLst xmlns:a="http://schemas.openxmlformats.org/drawingml/2006/main">
               <a:ext uri="{FF2B5EF4-FFF2-40B4-BE49-F238E27FC236}">
-                <a16:creationId xmlns:a16="http://schemas.microsoft.com/office/drawing/2014/main" id="{42CF996B-3054-4F5A-B6C9-A2CF8A920B04}"/>
+                <a16:creationId xmlns:a16="http://schemas.microsoft.com/office/drawing/2014/main" id="{489E650A-9698-4432-A140-B6ADB9E43B7B}"/>
               </a:ext>
             </a:extLst>
           </p:cNvPr>
@@ -16579,7 +16579,7 @@
           <p:cNvPr id="89" name="">
             <a:extLst xmlns:a="http://schemas.openxmlformats.org/drawingml/2006/main">
               <a:ext uri="{FF2B5EF4-FFF2-40B4-BE49-F238E27FC236}">
-                <a16:creationId xmlns:a16="http://schemas.microsoft.com/office/drawing/2014/main" id="{45DBC011-A639-4F05-BEA7-0D9ECFECDEB8}"/>
+                <a16:creationId xmlns:a16="http://schemas.microsoft.com/office/drawing/2014/main" id="{1825F23D-4218-4633-8A7D-55BD4B038173}"/>
               </a:ext>
             </a:extLst>
           </p:cNvPr>
@@ -16610,7 +16610,7 @@
           <p:cNvPr id="90" name="">
             <a:extLst xmlns:a="http://schemas.openxmlformats.org/drawingml/2006/main">
               <a:ext uri="{FF2B5EF4-FFF2-40B4-BE49-F238E27FC236}">
-                <a16:creationId xmlns:a16="http://schemas.microsoft.com/office/drawing/2014/main" id="{C9C66E7D-644D-4DF6-844A-4F8F4AE3D398}"/>
+                <a16:creationId xmlns:a16="http://schemas.microsoft.com/office/drawing/2014/main" id="{DEA6C268-5CEE-456E-B872-60A5AC275F6F}"/>
               </a:ext>
             </a:extLst>
           </p:cNvPr>
@@ -16641,7 +16641,7 @@
           <p:cNvPr id="91" name="">
             <a:extLst xmlns:a="http://schemas.openxmlformats.org/drawingml/2006/main">
               <a:ext uri="{FF2B5EF4-FFF2-40B4-BE49-F238E27FC236}">
-                <a16:creationId xmlns:a16="http://schemas.microsoft.com/office/drawing/2014/main" id="{3C6DB7C0-5DF8-480B-8255-19D5A2264B7C}"/>
+                <a16:creationId xmlns:a16="http://schemas.microsoft.com/office/drawing/2014/main" id="{F82DC3FA-A2BA-4BF8-9BC9-F4CC275F4117}"/>
               </a:ext>
             </a:extLst>
           </p:cNvPr>
@@ -16693,7 +16693,7 @@
           <p:cNvPr id="92" name="">
             <a:extLst xmlns:a="http://schemas.openxmlformats.org/drawingml/2006/main">
               <a:ext uri="{FF2B5EF4-FFF2-40B4-BE49-F238E27FC236}">
-                <a16:creationId xmlns:a16="http://schemas.microsoft.com/office/drawing/2014/main" id="{EE52EEB1-BDB6-47F1-B6E4-70E7E8F3892B}"/>
+                <a16:creationId xmlns:a16="http://schemas.microsoft.com/office/drawing/2014/main" id="{E36B42D8-071C-4166-BC31-024F6EBF1BFE}"/>
               </a:ext>
             </a:extLst>
           </p:cNvPr>
@@ -16745,7 +16745,7 @@
           <p:cNvPr id="93" name="">
             <a:extLst xmlns:a="http://schemas.openxmlformats.org/drawingml/2006/main">
               <a:ext uri="{FF2B5EF4-FFF2-40B4-BE49-F238E27FC236}">
-                <a16:creationId xmlns:a16="http://schemas.microsoft.com/office/drawing/2014/main" id="{C9A303CB-6164-4D4C-9B8A-F0051E3FD98C}"/>
+                <a16:creationId xmlns:a16="http://schemas.microsoft.com/office/drawing/2014/main" id="{A6F11538-5539-4926-98CC-7DFCACEDBA02}"/>
               </a:ext>
             </a:extLst>
           </p:cNvPr>
@@ -16797,7 +16797,7 @@
           <p:cNvPr id="94" name="">
             <a:extLst xmlns:a="http://schemas.openxmlformats.org/drawingml/2006/main">
               <a:ext uri="{FF2B5EF4-FFF2-40B4-BE49-F238E27FC236}">
-                <a16:creationId xmlns:a16="http://schemas.microsoft.com/office/drawing/2014/main" id="{1786A17E-51A6-4E74-8488-45521DFE85B0}"/>
+                <a16:creationId xmlns:a16="http://schemas.microsoft.com/office/drawing/2014/main" id="{E08575A3-ED41-43E1-A4B9-AC4556FED3CF}"/>
               </a:ext>
             </a:extLst>
           </p:cNvPr>
@@ -16849,7 +16849,7 @@
           <p:cNvPr id="95" name="">
             <a:extLst xmlns:a="http://schemas.openxmlformats.org/drawingml/2006/main">
               <a:ext uri="{FF2B5EF4-FFF2-40B4-BE49-F238E27FC236}">
-                <a16:creationId xmlns:a16="http://schemas.microsoft.com/office/drawing/2014/main" id="{E0A28C3F-C11D-456B-A598-CD947EEF2A60}"/>
+                <a16:creationId xmlns:a16="http://schemas.microsoft.com/office/drawing/2014/main" id="{82E886CB-BA00-4946-B04C-6168F5ED45E6}"/>
               </a:ext>
             </a:extLst>
           </p:cNvPr>
@@ -16901,7 +16901,7 @@
           <p:cNvPr id="96" name="">
             <a:extLst xmlns:a="http://schemas.openxmlformats.org/drawingml/2006/main">
               <a:ext uri="{FF2B5EF4-FFF2-40B4-BE49-F238E27FC236}">
-                <a16:creationId xmlns:a16="http://schemas.microsoft.com/office/drawing/2014/main" id="{216659C6-3178-40D4-94B7-61287A0BA86E}"/>
+                <a16:creationId xmlns:a16="http://schemas.microsoft.com/office/drawing/2014/main" id="{9134CF5C-1E9C-430C-89AD-EB8FA9943BF0}"/>
               </a:ext>
             </a:extLst>
           </p:cNvPr>
@@ -16932,7 +16932,7 @@
           <p:cNvPr id="97" name="">
             <a:extLst xmlns:a="http://schemas.openxmlformats.org/drawingml/2006/main">
               <a:ext uri="{FF2B5EF4-FFF2-40B4-BE49-F238E27FC236}">
-                <a16:creationId xmlns:a16="http://schemas.microsoft.com/office/drawing/2014/main" id="{6B256B65-08E9-4F0D-ADE3-ECE91254C1F8}"/>
+                <a16:creationId xmlns:a16="http://schemas.microsoft.com/office/drawing/2014/main" id="{1B14C190-C4F0-4C2B-AC98-44F669288543}"/>
               </a:ext>
             </a:extLst>
           </p:cNvPr>
@@ -16984,7 +16984,7 @@
           <p:cNvPr id="98" name="">
             <a:extLst xmlns:a="http://schemas.openxmlformats.org/drawingml/2006/main">
               <a:ext uri="{FF2B5EF4-FFF2-40B4-BE49-F238E27FC236}">
-                <a16:creationId xmlns:a16="http://schemas.microsoft.com/office/drawing/2014/main" id="{3A44AB93-B4F3-49E0-ACD7-E12276CDAF75}"/>
+                <a16:creationId xmlns:a16="http://schemas.microsoft.com/office/drawing/2014/main" id="{FE33225C-C305-423F-A065-2C4CDA83BA15}"/>
               </a:ext>
             </a:extLst>
           </p:cNvPr>
@@ -17036,7 +17036,7 @@
           <p:cNvPr id="99" name="">
             <a:extLst xmlns:a="http://schemas.openxmlformats.org/drawingml/2006/main">
               <a:ext uri="{FF2B5EF4-FFF2-40B4-BE49-F238E27FC236}">
-                <a16:creationId xmlns:a16="http://schemas.microsoft.com/office/drawing/2014/main" id="{5CA153D6-2A50-48CC-AD70-FC6BAB4C3BDE}"/>
+                <a16:creationId xmlns:a16="http://schemas.microsoft.com/office/drawing/2014/main" id="{BBF7641F-69F4-4BC0-9CAB-FE437AE81E97}"/>
               </a:ext>
             </a:extLst>
           </p:cNvPr>
@@ -17088,7 +17088,7 @@
           <p:cNvPr id="100" name="">
             <a:extLst xmlns:a="http://schemas.openxmlformats.org/drawingml/2006/main">
               <a:ext uri="{FF2B5EF4-FFF2-40B4-BE49-F238E27FC236}">
-                <a16:creationId xmlns:a16="http://schemas.microsoft.com/office/drawing/2014/main" id="{25065297-6659-4D95-A0A4-48394FAB767D}"/>
+                <a16:creationId xmlns:a16="http://schemas.microsoft.com/office/drawing/2014/main" id="{083541A4-4C04-4033-A606-4F1392E006DC}"/>
               </a:ext>
             </a:extLst>
           </p:cNvPr>
@@ -17140,7 +17140,7 @@
           <p:cNvPr id="101" name="">
             <a:extLst xmlns:a="http://schemas.openxmlformats.org/drawingml/2006/main">
               <a:ext uri="{FF2B5EF4-FFF2-40B4-BE49-F238E27FC236}">
-                <a16:creationId xmlns:a16="http://schemas.microsoft.com/office/drawing/2014/main" id="{264F9B06-7AC1-43BD-8B05-86461D9DC146}"/>
+                <a16:creationId xmlns:a16="http://schemas.microsoft.com/office/drawing/2014/main" id="{0076719A-ADB8-4A71-A666-53EF197574C3}"/>
               </a:ext>
             </a:extLst>
           </p:cNvPr>
@@ -17190,7 +17190,7 @@
     </p:spTree>
     <p:extLst>
       <p:ext uri="{BB962C8B-B14F-4D97-AF65-F5344CB8AC3E}">
-        <p14:creationId xmlns:p14="http://schemas.microsoft.com/office/powerpoint/2010/main" val="640244"/>
+        <p14:creationId xmlns:p14="http://schemas.microsoft.com/office/powerpoint/2010/main" val="1011021664"/>
       </p:ext>
     </p:extLst>
   </p:cSld>
@@ -17221,7 +17221,7 @@
           <p:cNvPr id="96" name="">
             <a:extLst xmlns:a="http://schemas.openxmlformats.org/drawingml/2006/main">
               <a:ext uri="{FF2B5EF4-FFF2-40B4-BE49-F238E27FC236}">
-                <a16:creationId xmlns:a16="http://schemas.microsoft.com/office/drawing/2014/main" id="{E2A83703-3B1B-418D-B02D-09EA4FBF588C}"/>
+                <a16:creationId xmlns:a16="http://schemas.microsoft.com/office/drawing/2014/main" id="{4A48BB72-E8BE-48C4-A263-77CA70806E30}"/>
               </a:ext>
             </a:extLst>
           </p:cNvPr>
@@ -17254,7 +17254,7 @@
           <p:cNvPr id="2" name="">
             <a:extLst xmlns:a="http://schemas.openxmlformats.org/drawingml/2006/main">
               <a:ext uri="{FF2B5EF4-FFF2-40B4-BE49-F238E27FC236}">
-                <a16:creationId xmlns:a16="http://schemas.microsoft.com/office/drawing/2014/main" id="{F7892ECD-2C8E-4FB8-A2F1-2CCACB3F2F59}"/>
+                <a16:creationId xmlns:a16="http://schemas.microsoft.com/office/drawing/2014/main" id="{FBDB42F4-9843-4842-81D0-733DBC7E7E94}"/>
               </a:ext>
             </a:extLst>
           </p:cNvPr>
@@ -17285,7 +17285,7 @@
           <p:cNvPr id="3" name="">
             <a:extLst xmlns:a="http://schemas.openxmlformats.org/drawingml/2006/main">
               <a:ext uri="{FF2B5EF4-FFF2-40B4-BE49-F238E27FC236}">
-                <a16:creationId xmlns:a16="http://schemas.microsoft.com/office/drawing/2014/main" id="{2F80B3EC-D930-4F4E-80CE-AD9F6659EAA1}"/>
+                <a16:creationId xmlns:a16="http://schemas.microsoft.com/office/drawing/2014/main" id="{E76ABF45-1CAE-4009-894B-2EA3E9A0FC8F}"/>
               </a:ext>
             </a:extLst>
           </p:cNvPr>
@@ -17337,7 +17337,7 @@
           <p:cNvPr id="4" name="">
             <a:extLst xmlns:a="http://schemas.openxmlformats.org/drawingml/2006/main">
               <a:ext uri="{FF2B5EF4-FFF2-40B4-BE49-F238E27FC236}">
-                <a16:creationId xmlns:a16="http://schemas.microsoft.com/office/drawing/2014/main" id="{82E80A62-2854-4252-BFE0-5657C9A8D93B}"/>
+                <a16:creationId xmlns:a16="http://schemas.microsoft.com/office/drawing/2014/main" id="{A9F442C5-693C-43A9-9BCB-0CC4B5292DC7}"/>
               </a:ext>
             </a:extLst>
           </p:cNvPr>
@@ -17389,7 +17389,7 @@
           <p:cNvPr id="5" name="">
             <a:extLst xmlns:a="http://schemas.openxmlformats.org/drawingml/2006/main">
               <a:ext uri="{FF2B5EF4-FFF2-40B4-BE49-F238E27FC236}">
-                <a16:creationId xmlns:a16="http://schemas.microsoft.com/office/drawing/2014/main" id="{881D8361-7B21-4714-94AD-BDDB6EB347EE}"/>
+                <a16:creationId xmlns:a16="http://schemas.microsoft.com/office/drawing/2014/main" id="{9839198B-6338-4555-A273-CA07D5586773}"/>
               </a:ext>
             </a:extLst>
           </p:cNvPr>
@@ -17424,7 +17424,7 @@
           <p:nvPr/>
         </p:nvPicPr>
         <p:blipFill>
-          <a:blip xmlns:r="http://schemas.openxmlformats.org/officeDocument/2006/relationships" xmlns:a="http://schemas.openxmlformats.org/drawingml/2006/main" r:embed="R81179e45ca494e3c"/>
+          <a:blip xmlns:r="http://schemas.openxmlformats.org/officeDocument/2006/relationships" xmlns:a="http://schemas.openxmlformats.org/drawingml/2006/main" r:embed="Rdb9197b9cbd941e5"/>
           <a:stretch xmlns:a="http://schemas.openxmlformats.org/drawingml/2006/main"/>
         </p:blipFill>
         <p:spPr>
@@ -17442,7 +17442,7 @@
           <p:cNvPr id="7" name="">
             <a:extLst xmlns:a="http://schemas.openxmlformats.org/drawingml/2006/main">
               <a:ext uri="{FF2B5EF4-FFF2-40B4-BE49-F238E27FC236}">
-                <a16:creationId xmlns:a16="http://schemas.microsoft.com/office/drawing/2014/main" id="{CA2EA32E-ACC1-40C7-B63B-2104D8C6170A}"/>
+                <a16:creationId xmlns:a16="http://schemas.microsoft.com/office/drawing/2014/main" id="{A0AF77B8-2DEB-47E3-9FA3-70BEDDB20635}"/>
               </a:ext>
             </a:extLst>
           </p:cNvPr>
@@ -17494,7 +17494,7 @@
           <p:cNvPr id="8" name="">
             <a:extLst xmlns:a="http://schemas.openxmlformats.org/drawingml/2006/main">
               <a:ext uri="{FF2B5EF4-FFF2-40B4-BE49-F238E27FC236}">
-                <a16:creationId xmlns:a16="http://schemas.microsoft.com/office/drawing/2014/main" id="{0E7B76F7-C749-4B52-92EB-E7EF44363E76}"/>
+                <a16:creationId xmlns:a16="http://schemas.microsoft.com/office/drawing/2014/main" id="{6CBE86DD-508B-45E5-A3F2-93B71E0A97AA}"/>
               </a:ext>
             </a:extLst>
           </p:cNvPr>
@@ -17546,7 +17546,7 @@
           <p:cNvPr id="9" name="">
             <a:extLst xmlns:a="http://schemas.openxmlformats.org/drawingml/2006/main">
               <a:ext uri="{FF2B5EF4-FFF2-40B4-BE49-F238E27FC236}">
-                <a16:creationId xmlns:a16="http://schemas.microsoft.com/office/drawing/2014/main" id="{AF46B9EC-4957-44FB-A805-F70512C7AE85}"/>
+                <a16:creationId xmlns:a16="http://schemas.microsoft.com/office/drawing/2014/main" id="{C8BA0A59-AF6B-4162-B062-AF21CC9194FF}"/>
               </a:ext>
             </a:extLst>
           </p:cNvPr>
@@ -17598,7 +17598,7 @@
           <p:cNvPr id="10" name="">
             <a:extLst xmlns:a="http://schemas.openxmlformats.org/drawingml/2006/main">
               <a:ext uri="{FF2B5EF4-FFF2-40B4-BE49-F238E27FC236}">
-                <a16:creationId xmlns:a16="http://schemas.microsoft.com/office/drawing/2014/main" id="{35EA1792-ACD4-4914-B5F9-0A99AAE7F65B}"/>
+                <a16:creationId xmlns:a16="http://schemas.microsoft.com/office/drawing/2014/main" id="{DBE7CCAB-1D82-4A41-97E0-C97C89A0D635}"/>
               </a:ext>
             </a:extLst>
           </p:cNvPr>
@@ -17650,7 +17650,7 @@
           <p:cNvPr id="11" name="">
             <a:extLst xmlns:a="http://schemas.openxmlformats.org/drawingml/2006/main">
               <a:ext uri="{FF2B5EF4-FFF2-40B4-BE49-F238E27FC236}">
-                <a16:creationId xmlns:a16="http://schemas.microsoft.com/office/drawing/2014/main" id="{1E592C1C-EC2B-43CA-8E12-0300431F2474}"/>
+                <a16:creationId xmlns:a16="http://schemas.microsoft.com/office/drawing/2014/main" id="{F57B56B3-F752-443F-943E-A839B3697A24}"/>
               </a:ext>
             </a:extLst>
           </p:cNvPr>
@@ -17681,7 +17681,7 @@
           <p:cNvPr id="12" name="">
             <a:extLst xmlns:a="http://schemas.openxmlformats.org/drawingml/2006/main">
               <a:ext uri="{FF2B5EF4-FFF2-40B4-BE49-F238E27FC236}">
-                <a16:creationId xmlns:a16="http://schemas.microsoft.com/office/drawing/2014/main" id="{B7A880EB-8EDB-4131-8671-63B54BF17C20}"/>
+                <a16:creationId xmlns:a16="http://schemas.microsoft.com/office/drawing/2014/main" id="{08DA84FD-C2B1-40D3-B592-30308AAFCC82}"/>
               </a:ext>
             </a:extLst>
           </p:cNvPr>
@@ -17712,7 +17712,7 @@
           <p:cNvPr id="13" name="">
             <a:extLst xmlns:a="http://schemas.openxmlformats.org/drawingml/2006/main">
               <a:ext uri="{FF2B5EF4-FFF2-40B4-BE49-F238E27FC236}">
-                <a16:creationId xmlns:a16="http://schemas.microsoft.com/office/drawing/2014/main" id="{C42D8FEE-9E93-4E62-8B31-BD310F873F13}"/>
+                <a16:creationId xmlns:a16="http://schemas.microsoft.com/office/drawing/2014/main" id="{A024F59A-FBBE-484E-AF86-86F47EC53B7B}"/>
               </a:ext>
             </a:extLst>
           </p:cNvPr>
@@ -17764,7 +17764,7 @@
           <p:cNvPr id="14" name="">
             <a:extLst xmlns:a="http://schemas.openxmlformats.org/drawingml/2006/main">
               <a:ext uri="{FF2B5EF4-FFF2-40B4-BE49-F238E27FC236}">
-                <a16:creationId xmlns:a16="http://schemas.microsoft.com/office/drawing/2014/main" id="{B8D7E869-1EFD-4311-867E-37D90C875FE0}"/>
+                <a16:creationId xmlns:a16="http://schemas.microsoft.com/office/drawing/2014/main" id="{3756E83F-D7B0-4103-9A31-AAB1BAB603DD}"/>
               </a:ext>
             </a:extLst>
           </p:cNvPr>
@@ -17816,7 +17816,7 @@
           <p:cNvPr id="15" name="">
             <a:extLst xmlns:a="http://schemas.openxmlformats.org/drawingml/2006/main">
               <a:ext uri="{FF2B5EF4-FFF2-40B4-BE49-F238E27FC236}">
-                <a16:creationId xmlns:a16="http://schemas.microsoft.com/office/drawing/2014/main" id="{0D13B41F-F9C8-4165-A400-8BD9CAE30F8D}"/>
+                <a16:creationId xmlns:a16="http://schemas.microsoft.com/office/drawing/2014/main" id="{79F65331-8F4F-49C7-8059-FBF71D6B4F7A}"/>
               </a:ext>
             </a:extLst>
           </p:cNvPr>
@@ -17868,7 +17868,7 @@
           <p:cNvPr id="16" name="">
             <a:extLst xmlns:a="http://schemas.openxmlformats.org/drawingml/2006/main">
               <a:ext uri="{FF2B5EF4-FFF2-40B4-BE49-F238E27FC236}">
-                <a16:creationId xmlns:a16="http://schemas.microsoft.com/office/drawing/2014/main" id="{53DCC370-2F95-4486-87BD-9288DAB53E4A}"/>
+                <a16:creationId xmlns:a16="http://schemas.microsoft.com/office/drawing/2014/main" id="{C4C4F077-F191-4BFD-A0A7-CD02F7097F96}"/>
               </a:ext>
             </a:extLst>
           </p:cNvPr>
@@ -17920,7 +17920,7 @@
           <p:cNvPr id="17" name="">
             <a:extLst xmlns:a="http://schemas.openxmlformats.org/drawingml/2006/main">
               <a:ext uri="{FF2B5EF4-FFF2-40B4-BE49-F238E27FC236}">
-                <a16:creationId xmlns:a16="http://schemas.microsoft.com/office/drawing/2014/main" id="{EB416BCC-8134-4C1B-BEE0-730739023151}"/>
+                <a16:creationId xmlns:a16="http://schemas.microsoft.com/office/drawing/2014/main" id="{9BB6C9C8-394A-45B4-948E-D78B8D26A6EA}"/>
               </a:ext>
             </a:extLst>
           </p:cNvPr>
@@ -17972,7 +17972,7 @@
           <p:cNvPr id="18" name="">
             <a:extLst xmlns:a="http://schemas.openxmlformats.org/drawingml/2006/main">
               <a:ext uri="{FF2B5EF4-FFF2-40B4-BE49-F238E27FC236}">
-                <a16:creationId xmlns:a16="http://schemas.microsoft.com/office/drawing/2014/main" id="{EA43762E-09DF-474B-9E17-BDAC800F5FC0}"/>
+                <a16:creationId xmlns:a16="http://schemas.microsoft.com/office/drawing/2014/main" id="{E92911C5-ACE8-41C7-895D-CCFF85F9BFAE}"/>
               </a:ext>
             </a:extLst>
           </p:cNvPr>
@@ -18003,7 +18003,7 @@
           <p:cNvPr id="19" name="">
             <a:extLst xmlns:a="http://schemas.openxmlformats.org/drawingml/2006/main">
               <a:ext uri="{FF2B5EF4-FFF2-40B4-BE49-F238E27FC236}">
-                <a16:creationId xmlns:a16="http://schemas.microsoft.com/office/drawing/2014/main" id="{040DDDF5-0B8A-457F-BB23-9D6334250804}"/>
+                <a16:creationId xmlns:a16="http://schemas.microsoft.com/office/drawing/2014/main" id="{43E996F8-6D22-417E-9F9D-238D1DC63DD1}"/>
               </a:ext>
             </a:extLst>
           </p:cNvPr>
@@ -18034,7 +18034,7 @@
           <p:cNvPr id="20" name="">
             <a:extLst xmlns:a="http://schemas.openxmlformats.org/drawingml/2006/main">
               <a:ext uri="{FF2B5EF4-FFF2-40B4-BE49-F238E27FC236}">
-                <a16:creationId xmlns:a16="http://schemas.microsoft.com/office/drawing/2014/main" id="{796281BF-D3A0-45F3-9641-A2EBFF7FEDC8}"/>
+                <a16:creationId xmlns:a16="http://schemas.microsoft.com/office/drawing/2014/main" id="{0352B98D-462D-4FC1-8E20-70BD27B1464B}"/>
               </a:ext>
             </a:extLst>
           </p:cNvPr>
@@ -18086,7 +18086,7 @@
           <p:cNvPr id="21" name="">
             <a:extLst xmlns:a="http://schemas.openxmlformats.org/drawingml/2006/main">
               <a:ext uri="{FF2B5EF4-FFF2-40B4-BE49-F238E27FC236}">
-                <a16:creationId xmlns:a16="http://schemas.microsoft.com/office/drawing/2014/main" id="{49090360-B06B-4F75-9F50-B5512097061B}"/>
+                <a16:creationId xmlns:a16="http://schemas.microsoft.com/office/drawing/2014/main" id="{B525AAA7-D467-430B-A6F0-032501210014}"/>
               </a:ext>
             </a:extLst>
           </p:cNvPr>
@@ -18138,7 +18138,7 @@
           <p:cNvPr id="22" name="">
             <a:extLst xmlns:a="http://schemas.openxmlformats.org/drawingml/2006/main">
               <a:ext uri="{FF2B5EF4-FFF2-40B4-BE49-F238E27FC236}">
-                <a16:creationId xmlns:a16="http://schemas.microsoft.com/office/drawing/2014/main" id="{21FA21D3-142D-447D-95FC-BB5586A610F9}"/>
+                <a16:creationId xmlns:a16="http://schemas.microsoft.com/office/drawing/2014/main" id="{0953600F-FE9D-420E-B1B7-4EE26F7B89A3}"/>
               </a:ext>
             </a:extLst>
           </p:cNvPr>
@@ -18190,7 +18190,7 @@
           <p:cNvPr id="23" name="">
             <a:extLst xmlns:a="http://schemas.openxmlformats.org/drawingml/2006/main">
               <a:ext uri="{FF2B5EF4-FFF2-40B4-BE49-F238E27FC236}">
-                <a16:creationId xmlns:a16="http://schemas.microsoft.com/office/drawing/2014/main" id="{C64731EF-EEE7-4896-A9D6-0DEA79AB4B53}"/>
+                <a16:creationId xmlns:a16="http://schemas.microsoft.com/office/drawing/2014/main" id="{995D6444-EDCB-49FF-8A03-A4CB4731AE12}"/>
               </a:ext>
             </a:extLst>
           </p:cNvPr>
@@ -18242,7 +18242,7 @@
           <p:cNvPr id="24" name="">
             <a:extLst xmlns:a="http://schemas.openxmlformats.org/drawingml/2006/main">
               <a:ext uri="{FF2B5EF4-FFF2-40B4-BE49-F238E27FC236}">
-                <a16:creationId xmlns:a16="http://schemas.microsoft.com/office/drawing/2014/main" id="{8228C641-823D-42FF-A0E4-5ADA53A69898}"/>
+                <a16:creationId xmlns:a16="http://schemas.microsoft.com/office/drawing/2014/main" id="{685CC043-23B4-406A-ACC4-44ADBED6FAAD}"/>
               </a:ext>
             </a:extLst>
           </p:cNvPr>
@@ -18294,7 +18294,7 @@
           <p:cNvPr id="25" name="">
             <a:extLst xmlns:a="http://schemas.openxmlformats.org/drawingml/2006/main">
               <a:ext uri="{FF2B5EF4-FFF2-40B4-BE49-F238E27FC236}">
-                <a16:creationId xmlns:a16="http://schemas.microsoft.com/office/drawing/2014/main" id="{13BC1ADB-2CCC-4D66-928A-EAE05973EC2C}"/>
+                <a16:creationId xmlns:a16="http://schemas.microsoft.com/office/drawing/2014/main" id="{9E6EBC15-BEA3-4874-A5CD-8F85D288D08E}"/>
               </a:ext>
             </a:extLst>
           </p:cNvPr>
@@ -18325,7 +18325,7 @@
           <p:cNvPr id="26" name="">
             <a:extLst xmlns:a="http://schemas.openxmlformats.org/drawingml/2006/main">
               <a:ext uri="{FF2B5EF4-FFF2-40B4-BE49-F238E27FC236}">
-                <a16:creationId xmlns:a16="http://schemas.microsoft.com/office/drawing/2014/main" id="{8879244F-5DDA-494C-9777-EDD44B9B4CDD}"/>
+                <a16:creationId xmlns:a16="http://schemas.microsoft.com/office/drawing/2014/main" id="{BE2A730A-296E-4EA9-8631-ACEEEB5C51BC}"/>
               </a:ext>
             </a:extLst>
           </p:cNvPr>
@@ -18377,7 +18377,7 @@
           <p:cNvPr id="27" name="">
             <a:extLst xmlns:a="http://schemas.openxmlformats.org/drawingml/2006/main">
               <a:ext uri="{FF2B5EF4-FFF2-40B4-BE49-F238E27FC236}">
-                <a16:creationId xmlns:a16="http://schemas.microsoft.com/office/drawing/2014/main" id="{867E00F8-EE1D-48BF-A690-C4951578229E}"/>
+                <a16:creationId xmlns:a16="http://schemas.microsoft.com/office/drawing/2014/main" id="{54F5D93B-8871-44B8-BBE7-60B492E36DBB}"/>
               </a:ext>
             </a:extLst>
           </p:cNvPr>
@@ -18429,7 +18429,7 @@
           <p:cNvPr id="28" name="">
             <a:extLst xmlns:a="http://schemas.openxmlformats.org/drawingml/2006/main">
               <a:ext uri="{FF2B5EF4-FFF2-40B4-BE49-F238E27FC236}">
-                <a16:creationId xmlns:a16="http://schemas.microsoft.com/office/drawing/2014/main" id="{F71A9F2A-13B7-4C4B-8088-7930063633EE}"/>
+                <a16:creationId xmlns:a16="http://schemas.microsoft.com/office/drawing/2014/main" id="{1A0A81E3-5A19-4FBF-BC0F-E8ACCE162D58}"/>
               </a:ext>
             </a:extLst>
           </p:cNvPr>
@@ -18481,7 +18481,7 @@
           <p:cNvPr id="29" name="">
             <a:extLst xmlns:a="http://schemas.openxmlformats.org/drawingml/2006/main">
               <a:ext uri="{FF2B5EF4-FFF2-40B4-BE49-F238E27FC236}">
-                <a16:creationId xmlns:a16="http://schemas.microsoft.com/office/drawing/2014/main" id="{A43BD46C-7381-4545-942F-E830013BAA8C}"/>
+                <a16:creationId xmlns:a16="http://schemas.microsoft.com/office/drawing/2014/main" id="{9C6B6CAF-2CDA-4D8E-AEC3-65FA6B63BCC1}"/>
               </a:ext>
             </a:extLst>
           </p:cNvPr>
@@ -18533,7 +18533,7 @@
           <p:cNvPr id="30" name="">
             <a:extLst xmlns:a="http://schemas.openxmlformats.org/drawingml/2006/main">
               <a:ext uri="{FF2B5EF4-FFF2-40B4-BE49-F238E27FC236}">
-                <a16:creationId xmlns:a16="http://schemas.microsoft.com/office/drawing/2014/main" id="{9198E069-06BD-4A5B-BCC3-6E11EA1D5704}"/>
+                <a16:creationId xmlns:a16="http://schemas.microsoft.com/office/drawing/2014/main" id="{CD25E4B3-AB06-4CE1-84B9-C3ABB34C3ECB}"/>
               </a:ext>
             </a:extLst>
           </p:cNvPr>
@@ -18585,7 +18585,7 @@
           <p:cNvPr id="31" name="">
             <a:extLst xmlns:a="http://schemas.openxmlformats.org/drawingml/2006/main">
               <a:ext uri="{FF2B5EF4-FFF2-40B4-BE49-F238E27FC236}">
-                <a16:creationId xmlns:a16="http://schemas.microsoft.com/office/drawing/2014/main" id="{683DC817-51C2-40B1-BC09-B2455638A1AE}"/>
+                <a16:creationId xmlns:a16="http://schemas.microsoft.com/office/drawing/2014/main" id="{0AA64DEE-5148-468A-9087-1B5EC1DACEBC}"/>
               </a:ext>
             </a:extLst>
           </p:cNvPr>
@@ -18616,7 +18616,7 @@
           <p:cNvPr id="32" name="">
             <a:extLst xmlns:a="http://schemas.openxmlformats.org/drawingml/2006/main">
               <a:ext uri="{FF2B5EF4-FFF2-40B4-BE49-F238E27FC236}">
-                <a16:creationId xmlns:a16="http://schemas.microsoft.com/office/drawing/2014/main" id="{5B5CBCA3-54DF-4763-A2BB-84240205936A}"/>
+                <a16:creationId xmlns:a16="http://schemas.microsoft.com/office/drawing/2014/main" id="{802C2BD5-BC0D-470B-BCEB-3B0E5B9EE3D8}"/>
               </a:ext>
             </a:extLst>
           </p:cNvPr>
@@ -18647,7 +18647,7 @@
           <p:cNvPr id="33" name="">
             <a:extLst xmlns:a="http://schemas.openxmlformats.org/drawingml/2006/main">
               <a:ext uri="{FF2B5EF4-FFF2-40B4-BE49-F238E27FC236}">
-                <a16:creationId xmlns:a16="http://schemas.microsoft.com/office/drawing/2014/main" id="{A18056BD-9DF8-42E0-B3A3-D169DA7B553B}"/>
+                <a16:creationId xmlns:a16="http://schemas.microsoft.com/office/drawing/2014/main" id="{C12D20E4-D52D-4E08-98BE-4EFF24DAECAD}"/>
               </a:ext>
             </a:extLst>
           </p:cNvPr>
@@ -18699,7 +18699,7 @@
           <p:cNvPr id="34" name="">
             <a:extLst xmlns:a="http://schemas.openxmlformats.org/drawingml/2006/main">
               <a:ext uri="{FF2B5EF4-FFF2-40B4-BE49-F238E27FC236}">
-                <a16:creationId xmlns:a16="http://schemas.microsoft.com/office/drawing/2014/main" id="{030F95D4-6932-48E6-A105-4916A5988AD4}"/>
+                <a16:creationId xmlns:a16="http://schemas.microsoft.com/office/drawing/2014/main" id="{BBD86DEB-C994-481F-8138-C8DE8A734E23}"/>
               </a:ext>
             </a:extLst>
           </p:cNvPr>
@@ -18751,7 +18751,7 @@
           <p:cNvPr id="35" name="">
             <a:extLst xmlns:a="http://schemas.openxmlformats.org/drawingml/2006/main">
               <a:ext uri="{FF2B5EF4-FFF2-40B4-BE49-F238E27FC236}">
-                <a16:creationId xmlns:a16="http://schemas.microsoft.com/office/drawing/2014/main" id="{312A1BBC-3D74-41D8-B241-33EBEB5A8CBB}"/>
+                <a16:creationId xmlns:a16="http://schemas.microsoft.com/office/drawing/2014/main" id="{E31C4195-F396-4047-B58E-F22C990D453E}"/>
               </a:ext>
             </a:extLst>
           </p:cNvPr>
@@ -18803,7 +18803,7 @@
           <p:cNvPr id="36" name="">
             <a:extLst xmlns:a="http://schemas.openxmlformats.org/drawingml/2006/main">
               <a:ext uri="{FF2B5EF4-FFF2-40B4-BE49-F238E27FC236}">
-                <a16:creationId xmlns:a16="http://schemas.microsoft.com/office/drawing/2014/main" id="{7E81271D-ED52-43FF-A5EC-94A248D22D34}"/>
+                <a16:creationId xmlns:a16="http://schemas.microsoft.com/office/drawing/2014/main" id="{5A822D01-03CF-4D7C-8F36-7AA5EA3D502B}"/>
               </a:ext>
             </a:extLst>
           </p:cNvPr>
@@ -18855,7 +18855,7 @@
           <p:cNvPr id="37" name="">
             <a:extLst xmlns:a="http://schemas.openxmlformats.org/drawingml/2006/main">
               <a:ext uri="{FF2B5EF4-FFF2-40B4-BE49-F238E27FC236}">
-                <a16:creationId xmlns:a16="http://schemas.microsoft.com/office/drawing/2014/main" id="{A7FB04C7-C4FC-46E3-B1FA-3EDA664A45E2}"/>
+                <a16:creationId xmlns:a16="http://schemas.microsoft.com/office/drawing/2014/main" id="{740A9434-1AA2-45EF-9327-36EE0F7A2738}"/>
               </a:ext>
             </a:extLst>
           </p:cNvPr>
@@ -18907,7 +18907,7 @@
           <p:cNvPr id="38" name="">
             <a:extLst xmlns:a="http://schemas.openxmlformats.org/drawingml/2006/main">
               <a:ext uri="{FF2B5EF4-FFF2-40B4-BE49-F238E27FC236}">
-                <a16:creationId xmlns:a16="http://schemas.microsoft.com/office/drawing/2014/main" id="{A70CC856-23D7-449A-856A-500B762CC596}"/>
+                <a16:creationId xmlns:a16="http://schemas.microsoft.com/office/drawing/2014/main" id="{2DAD1F8E-F380-41E9-82C9-94E12DA179D1}"/>
               </a:ext>
             </a:extLst>
           </p:cNvPr>
@@ -18938,7 +18938,7 @@
           <p:cNvPr id="39" name="">
             <a:extLst xmlns:a="http://schemas.openxmlformats.org/drawingml/2006/main">
               <a:ext uri="{FF2B5EF4-FFF2-40B4-BE49-F238E27FC236}">
-                <a16:creationId xmlns:a16="http://schemas.microsoft.com/office/drawing/2014/main" id="{DA164AAB-E4F6-4939-885E-9EA2301AC3D0}"/>
+                <a16:creationId xmlns:a16="http://schemas.microsoft.com/office/drawing/2014/main" id="{635450B3-289E-4AB2-9E6C-42E13D446E69}"/>
               </a:ext>
             </a:extLst>
           </p:cNvPr>
@@ -18990,7 +18990,7 @@
           <p:cNvPr id="40" name="">
             <a:extLst xmlns:a="http://schemas.openxmlformats.org/drawingml/2006/main">
               <a:ext uri="{FF2B5EF4-FFF2-40B4-BE49-F238E27FC236}">
-                <a16:creationId xmlns:a16="http://schemas.microsoft.com/office/drawing/2014/main" id="{C7E70715-8B8D-4253-AF33-0DA3EFFA77B7}"/>
+                <a16:creationId xmlns:a16="http://schemas.microsoft.com/office/drawing/2014/main" id="{CC55B52F-A419-4296-9B15-9B45092F336A}"/>
               </a:ext>
             </a:extLst>
           </p:cNvPr>
@@ -19042,7 +19042,7 @@
           <p:cNvPr id="41" name="">
             <a:extLst xmlns:a="http://schemas.openxmlformats.org/drawingml/2006/main">
               <a:ext uri="{FF2B5EF4-FFF2-40B4-BE49-F238E27FC236}">
-                <a16:creationId xmlns:a16="http://schemas.microsoft.com/office/drawing/2014/main" id="{66E33D55-5DEB-4BDD-8B53-27E79322B25B}"/>
+                <a16:creationId xmlns:a16="http://schemas.microsoft.com/office/drawing/2014/main" id="{30C4A30B-D971-452E-9E59-7C0111D4159A}"/>
               </a:ext>
             </a:extLst>
           </p:cNvPr>
@@ -19094,7 +19094,7 @@
           <p:cNvPr id="42" name="">
             <a:extLst xmlns:a="http://schemas.openxmlformats.org/drawingml/2006/main">
               <a:ext uri="{FF2B5EF4-FFF2-40B4-BE49-F238E27FC236}">
-                <a16:creationId xmlns:a16="http://schemas.microsoft.com/office/drawing/2014/main" id="{575A6227-ECA0-4E9E-8D1A-9BF856DA1D55}"/>
+                <a16:creationId xmlns:a16="http://schemas.microsoft.com/office/drawing/2014/main" id="{CF4CA5BD-F9FF-46E6-95F3-D164C523A028}"/>
               </a:ext>
             </a:extLst>
           </p:cNvPr>
@@ -19146,7 +19146,7 @@
           <p:cNvPr id="43" name="">
             <a:extLst xmlns:a="http://schemas.openxmlformats.org/drawingml/2006/main">
               <a:ext uri="{FF2B5EF4-FFF2-40B4-BE49-F238E27FC236}">
-                <a16:creationId xmlns:a16="http://schemas.microsoft.com/office/drawing/2014/main" id="{ABA64C2B-2EB1-47DE-AD3F-03AA305B8550}"/>
+                <a16:creationId xmlns:a16="http://schemas.microsoft.com/office/drawing/2014/main" id="{D82448DC-06D1-440B-B171-B6BAB2CC13BF}"/>
               </a:ext>
             </a:extLst>
           </p:cNvPr>
@@ -19198,7 +19198,7 @@
           <p:cNvPr id="44" name="">
             <a:extLst xmlns:a="http://schemas.openxmlformats.org/drawingml/2006/main">
               <a:ext uri="{FF2B5EF4-FFF2-40B4-BE49-F238E27FC236}">
-                <a16:creationId xmlns:a16="http://schemas.microsoft.com/office/drawing/2014/main" id="{2C5C5DBE-E83A-4C51-8E33-30A3515D4FB8}"/>
+                <a16:creationId xmlns:a16="http://schemas.microsoft.com/office/drawing/2014/main" id="{E432F87A-082C-47A3-84CE-9293DD62BB51}"/>
               </a:ext>
             </a:extLst>
           </p:cNvPr>
@@ -19229,7 +19229,7 @@
           <p:cNvPr id="45" name="">
             <a:extLst xmlns:a="http://schemas.openxmlformats.org/drawingml/2006/main">
               <a:ext uri="{FF2B5EF4-FFF2-40B4-BE49-F238E27FC236}">
-                <a16:creationId xmlns:a16="http://schemas.microsoft.com/office/drawing/2014/main" id="{0C64096D-AEB4-4B4A-999D-02BB6270CFD9}"/>
+                <a16:creationId xmlns:a16="http://schemas.microsoft.com/office/drawing/2014/main" id="{EF770040-7C25-40BA-AD21-DE3B8155370E}"/>
               </a:ext>
             </a:extLst>
           </p:cNvPr>
@@ -19260,7 +19260,7 @@
           <p:cNvPr id="46" name="">
             <a:extLst xmlns:a="http://schemas.openxmlformats.org/drawingml/2006/main">
               <a:ext uri="{FF2B5EF4-FFF2-40B4-BE49-F238E27FC236}">
-                <a16:creationId xmlns:a16="http://schemas.microsoft.com/office/drawing/2014/main" id="{C777A8DD-03F9-4520-8A51-EFFB5D04A0F9}"/>
+                <a16:creationId xmlns:a16="http://schemas.microsoft.com/office/drawing/2014/main" id="{729FFF96-32EA-4F83-9209-821B3E0AA0CE}"/>
               </a:ext>
             </a:extLst>
           </p:cNvPr>
@@ -19312,7 +19312,7 @@
           <p:cNvPr id="47" name="">
             <a:extLst xmlns:a="http://schemas.openxmlformats.org/drawingml/2006/main">
               <a:ext uri="{FF2B5EF4-FFF2-40B4-BE49-F238E27FC236}">
-                <a16:creationId xmlns:a16="http://schemas.microsoft.com/office/drawing/2014/main" id="{43477DDA-F28E-49DF-BCA1-39F538388B6A}"/>
+                <a16:creationId xmlns:a16="http://schemas.microsoft.com/office/drawing/2014/main" id="{9B5B5394-F93B-45BF-8D42-65978D62BA51}"/>
               </a:ext>
             </a:extLst>
           </p:cNvPr>
@@ -19364,7 +19364,7 @@
           <p:cNvPr id="48" name="">
             <a:extLst xmlns:a="http://schemas.openxmlformats.org/drawingml/2006/main">
               <a:ext uri="{FF2B5EF4-FFF2-40B4-BE49-F238E27FC236}">
-                <a16:creationId xmlns:a16="http://schemas.microsoft.com/office/drawing/2014/main" id="{E1E81DF5-BE20-4D61-9134-7A8FA236B1BA}"/>
+                <a16:creationId xmlns:a16="http://schemas.microsoft.com/office/drawing/2014/main" id="{1AAB2EB4-120E-425C-800F-CC9666363DE3}"/>
               </a:ext>
             </a:extLst>
           </p:cNvPr>
@@ -19416,7 +19416,7 @@
           <p:cNvPr id="49" name="">
             <a:extLst xmlns:a="http://schemas.openxmlformats.org/drawingml/2006/main">
               <a:ext uri="{FF2B5EF4-FFF2-40B4-BE49-F238E27FC236}">
-                <a16:creationId xmlns:a16="http://schemas.microsoft.com/office/drawing/2014/main" id="{0AB06CF1-4304-43EF-83BD-85EF055B55D8}"/>
+                <a16:creationId xmlns:a16="http://schemas.microsoft.com/office/drawing/2014/main" id="{E6911108-69F2-4E57-B80A-C0AFB68C98DD}"/>
               </a:ext>
             </a:extLst>
           </p:cNvPr>
@@ -19468,7 +19468,7 @@
           <p:cNvPr id="50" name="">
             <a:extLst xmlns:a="http://schemas.openxmlformats.org/drawingml/2006/main">
               <a:ext uri="{FF2B5EF4-FFF2-40B4-BE49-F238E27FC236}">
-                <a16:creationId xmlns:a16="http://schemas.microsoft.com/office/drawing/2014/main" id="{F7FC1B82-B0B5-4A27-BE9B-56095CA908C3}"/>
+                <a16:creationId xmlns:a16="http://schemas.microsoft.com/office/drawing/2014/main" id="{2B7544B3-1BFD-4189-AB78-FA706206935F}"/>
               </a:ext>
             </a:extLst>
           </p:cNvPr>
@@ -19520,7 +19520,7 @@
           <p:cNvPr id="51" name="">
             <a:extLst xmlns:a="http://schemas.openxmlformats.org/drawingml/2006/main">
               <a:ext uri="{FF2B5EF4-FFF2-40B4-BE49-F238E27FC236}">
-                <a16:creationId xmlns:a16="http://schemas.microsoft.com/office/drawing/2014/main" id="{1E17A6BF-8A44-4F0E-8296-24BD19E2B591}"/>
+                <a16:creationId xmlns:a16="http://schemas.microsoft.com/office/drawing/2014/main" id="{8F974416-8F63-497E-A66D-7FC2E1A90CCA}"/>
               </a:ext>
             </a:extLst>
           </p:cNvPr>
@@ -19551,7 +19551,7 @@
           <p:cNvPr id="52" name="">
             <a:extLst xmlns:a="http://schemas.openxmlformats.org/drawingml/2006/main">
               <a:ext uri="{FF2B5EF4-FFF2-40B4-BE49-F238E27FC236}">
-                <a16:creationId xmlns:a16="http://schemas.microsoft.com/office/drawing/2014/main" id="{5ED424D4-5552-4C9D-9F6D-A66EB29127E4}"/>
+                <a16:creationId xmlns:a16="http://schemas.microsoft.com/office/drawing/2014/main" id="{5EA046E3-D704-4393-9076-88C5884F4891}"/>
               </a:ext>
             </a:extLst>
           </p:cNvPr>
@@ -19603,7 +19603,7 @@
           <p:cNvPr id="53" name="">
             <a:extLst xmlns:a="http://schemas.openxmlformats.org/drawingml/2006/main">
               <a:ext uri="{FF2B5EF4-FFF2-40B4-BE49-F238E27FC236}">
-                <a16:creationId xmlns:a16="http://schemas.microsoft.com/office/drawing/2014/main" id="{AB8B2D58-4550-4999-BC37-111021EF2E88}"/>
+                <a16:creationId xmlns:a16="http://schemas.microsoft.com/office/drawing/2014/main" id="{8F52A885-0C49-433E-8231-4CE1BB420199}"/>
               </a:ext>
             </a:extLst>
           </p:cNvPr>
@@ -19655,7 +19655,7 @@
           <p:cNvPr id="54" name="">
             <a:extLst xmlns:a="http://schemas.openxmlformats.org/drawingml/2006/main">
               <a:ext uri="{FF2B5EF4-FFF2-40B4-BE49-F238E27FC236}">
-                <a16:creationId xmlns:a16="http://schemas.microsoft.com/office/drawing/2014/main" id="{934F4654-A179-4719-AC3B-6BD50E636DAB}"/>
+                <a16:creationId xmlns:a16="http://schemas.microsoft.com/office/drawing/2014/main" id="{4296C077-AA73-4077-AB52-4BA7EC66AA0A}"/>
               </a:ext>
             </a:extLst>
           </p:cNvPr>
@@ -19707,7 +19707,7 @@
           <p:cNvPr id="55" name="">
             <a:extLst xmlns:a="http://schemas.openxmlformats.org/drawingml/2006/main">
               <a:ext uri="{FF2B5EF4-FFF2-40B4-BE49-F238E27FC236}">
-                <a16:creationId xmlns:a16="http://schemas.microsoft.com/office/drawing/2014/main" id="{1CF575A0-EC47-46C7-BE31-0CC6619C279D}"/>
+                <a16:creationId xmlns:a16="http://schemas.microsoft.com/office/drawing/2014/main" id="{E08E505D-C295-4FE1-A0D9-6C59D65D66D8}"/>
               </a:ext>
             </a:extLst>
           </p:cNvPr>
@@ -19759,7 +19759,7 @@
           <p:cNvPr id="56" name="">
             <a:extLst xmlns:a="http://schemas.openxmlformats.org/drawingml/2006/main">
               <a:ext uri="{FF2B5EF4-FFF2-40B4-BE49-F238E27FC236}">
-                <a16:creationId xmlns:a16="http://schemas.microsoft.com/office/drawing/2014/main" id="{03428819-6628-4D63-ACEF-04A2AD220B53}"/>
+                <a16:creationId xmlns:a16="http://schemas.microsoft.com/office/drawing/2014/main" id="{11ACDA19-9565-4248-8EE6-BD5548D8C0BC}"/>
               </a:ext>
             </a:extLst>
           </p:cNvPr>
@@ -19811,7 +19811,7 @@
           <p:cNvPr id="57" name="">
             <a:extLst xmlns:a="http://schemas.openxmlformats.org/drawingml/2006/main">
               <a:ext uri="{FF2B5EF4-FFF2-40B4-BE49-F238E27FC236}">
-                <a16:creationId xmlns:a16="http://schemas.microsoft.com/office/drawing/2014/main" id="{F78EE39E-168C-4095-BA8F-E931788A07C2}"/>
+                <a16:creationId xmlns:a16="http://schemas.microsoft.com/office/drawing/2014/main" id="{5399384D-069D-4642-A9EF-8897211360F0}"/>
               </a:ext>
             </a:extLst>
           </p:cNvPr>
@@ -19842,7 +19842,7 @@
           <p:cNvPr id="58" name="">
             <a:extLst xmlns:a="http://schemas.openxmlformats.org/drawingml/2006/main">
               <a:ext uri="{FF2B5EF4-FFF2-40B4-BE49-F238E27FC236}">
-                <a16:creationId xmlns:a16="http://schemas.microsoft.com/office/drawing/2014/main" id="{5503D014-A4BB-4FE7-828D-B03DE3ACA0D8}"/>
+                <a16:creationId xmlns:a16="http://schemas.microsoft.com/office/drawing/2014/main" id="{AA9D66F3-CC2D-4C42-9E53-2E90C10E397A}"/>
               </a:ext>
             </a:extLst>
           </p:cNvPr>
@@ -19873,7 +19873,7 @@
           <p:cNvPr id="59" name="">
             <a:extLst xmlns:a="http://schemas.openxmlformats.org/drawingml/2006/main">
               <a:ext uri="{FF2B5EF4-FFF2-40B4-BE49-F238E27FC236}">
-                <a16:creationId xmlns:a16="http://schemas.microsoft.com/office/drawing/2014/main" id="{0A8839FF-CEFF-4F23-9359-56F5286627F6}"/>
+                <a16:creationId xmlns:a16="http://schemas.microsoft.com/office/drawing/2014/main" id="{29CB61E5-495B-4FB7-9717-8116B1542A78}"/>
               </a:ext>
             </a:extLst>
           </p:cNvPr>
@@ -19925,7 +19925,7 @@
           <p:cNvPr id="60" name="">
             <a:extLst xmlns:a="http://schemas.openxmlformats.org/drawingml/2006/main">
               <a:ext uri="{FF2B5EF4-FFF2-40B4-BE49-F238E27FC236}">
-                <a16:creationId xmlns:a16="http://schemas.microsoft.com/office/drawing/2014/main" id="{BF3DF167-C4BD-4A11-82D3-3C423753B0A6}"/>
+                <a16:creationId xmlns:a16="http://schemas.microsoft.com/office/drawing/2014/main" id="{B1801123-5AD9-4042-8C4A-24D4DEABAD83}"/>
               </a:ext>
             </a:extLst>
           </p:cNvPr>
@@ -19977,7 +19977,7 @@
           <p:cNvPr id="61" name="">
             <a:extLst xmlns:a="http://schemas.openxmlformats.org/drawingml/2006/main">
               <a:ext uri="{FF2B5EF4-FFF2-40B4-BE49-F238E27FC236}">
-                <a16:creationId xmlns:a16="http://schemas.microsoft.com/office/drawing/2014/main" id="{18940DBA-34E3-4C1E-A43B-A702092740BB}"/>
+                <a16:creationId xmlns:a16="http://schemas.microsoft.com/office/drawing/2014/main" id="{D08D430C-DD79-4836-8517-0EBECB43EB38}"/>
               </a:ext>
             </a:extLst>
           </p:cNvPr>
@@ -20029,7 +20029,7 @@
           <p:cNvPr id="62" name="">
             <a:extLst xmlns:a="http://schemas.openxmlformats.org/drawingml/2006/main">
               <a:ext uri="{FF2B5EF4-FFF2-40B4-BE49-F238E27FC236}">
-                <a16:creationId xmlns:a16="http://schemas.microsoft.com/office/drawing/2014/main" id="{01EA9303-94AC-4B7E-B98A-F9ED447BC97F}"/>
+                <a16:creationId xmlns:a16="http://schemas.microsoft.com/office/drawing/2014/main" id="{4D7A4E3D-851B-4536-85CB-34B455F8EECF}"/>
               </a:ext>
             </a:extLst>
           </p:cNvPr>
@@ -20081,7 +20081,7 @@
           <p:cNvPr id="63" name="">
             <a:extLst xmlns:a="http://schemas.openxmlformats.org/drawingml/2006/main">
               <a:ext uri="{FF2B5EF4-FFF2-40B4-BE49-F238E27FC236}">
-                <a16:creationId xmlns:a16="http://schemas.microsoft.com/office/drawing/2014/main" id="{62D7EE37-8107-4E4D-BAE1-69A5188E182A}"/>
+                <a16:creationId xmlns:a16="http://schemas.microsoft.com/office/drawing/2014/main" id="{28C6B2F7-282D-4C6E-88A5-FE6463F9624D}"/>
               </a:ext>
             </a:extLst>
           </p:cNvPr>
@@ -20133,7 +20133,7 @@
           <p:cNvPr id="64" name="">
             <a:extLst xmlns:a="http://schemas.openxmlformats.org/drawingml/2006/main">
               <a:ext uri="{FF2B5EF4-FFF2-40B4-BE49-F238E27FC236}">
-                <a16:creationId xmlns:a16="http://schemas.microsoft.com/office/drawing/2014/main" id="{DB3BB90E-DC52-4AD4-9A08-609B51E5E7BB}"/>
+                <a16:creationId xmlns:a16="http://schemas.microsoft.com/office/drawing/2014/main" id="{59E79BC2-94FF-4DEB-B86E-F719196E4FA5}"/>
               </a:ext>
             </a:extLst>
           </p:cNvPr>
@@ -20164,7 +20164,7 @@
           <p:cNvPr id="65" name="">
             <a:extLst xmlns:a="http://schemas.openxmlformats.org/drawingml/2006/main">
               <a:ext uri="{FF2B5EF4-FFF2-40B4-BE49-F238E27FC236}">
-                <a16:creationId xmlns:a16="http://schemas.microsoft.com/office/drawing/2014/main" id="{F5EC9FAC-43D6-4DB3-ABC4-72E5F85544B9}"/>
+                <a16:creationId xmlns:a16="http://schemas.microsoft.com/office/drawing/2014/main" id="{C4613954-C8A7-4DAF-B0B1-606CC2AC20F7}"/>
               </a:ext>
             </a:extLst>
           </p:cNvPr>
@@ -20216,7 +20216,7 @@
           <p:cNvPr id="66" name="">
             <a:extLst xmlns:a="http://schemas.openxmlformats.org/drawingml/2006/main">
               <a:ext uri="{FF2B5EF4-FFF2-40B4-BE49-F238E27FC236}">
-                <a16:creationId xmlns:a16="http://schemas.microsoft.com/office/drawing/2014/main" id="{F0EDFF0D-6E6B-4B7D-B90D-4980DA0371FF}"/>
+                <a16:creationId xmlns:a16="http://schemas.microsoft.com/office/drawing/2014/main" id="{2D7A5BF6-DC17-4782-90AC-03F12B31BCF6}"/>
               </a:ext>
             </a:extLst>
           </p:cNvPr>
@@ -20268,7 +20268,7 @@
           <p:cNvPr id="67" name="">
             <a:extLst xmlns:a="http://schemas.openxmlformats.org/drawingml/2006/main">
               <a:ext uri="{FF2B5EF4-FFF2-40B4-BE49-F238E27FC236}">
-                <a16:creationId xmlns:a16="http://schemas.microsoft.com/office/drawing/2014/main" id="{DA8C54E2-1223-4E32-BC37-6621402C87FA}"/>
+                <a16:creationId xmlns:a16="http://schemas.microsoft.com/office/drawing/2014/main" id="{0A722440-B680-4435-8A9D-3B71A83FCB62}"/>
               </a:ext>
             </a:extLst>
           </p:cNvPr>
@@ -20320,7 +20320,7 @@
           <p:cNvPr id="68" name="">
             <a:extLst xmlns:a="http://schemas.openxmlformats.org/drawingml/2006/main">
               <a:ext uri="{FF2B5EF4-FFF2-40B4-BE49-F238E27FC236}">
-                <a16:creationId xmlns:a16="http://schemas.microsoft.com/office/drawing/2014/main" id="{37031495-FF1E-438F-B84C-09ECE83F2FE3}"/>
+                <a16:creationId xmlns:a16="http://schemas.microsoft.com/office/drawing/2014/main" id="{40650424-EBB4-4B52-AE34-53928D1E89F6}"/>
               </a:ext>
             </a:extLst>
           </p:cNvPr>
@@ -20372,7 +20372,7 @@
           <p:cNvPr id="69" name="">
             <a:extLst xmlns:a="http://schemas.openxmlformats.org/drawingml/2006/main">
               <a:ext uri="{FF2B5EF4-FFF2-40B4-BE49-F238E27FC236}">
-                <a16:creationId xmlns:a16="http://schemas.microsoft.com/office/drawing/2014/main" id="{170FC777-89CC-4D10-AC64-3B47801AC1D5}"/>
+                <a16:creationId xmlns:a16="http://schemas.microsoft.com/office/drawing/2014/main" id="{B9E08EC9-BE23-40EB-AD64-51B13C553F4B}"/>
               </a:ext>
             </a:extLst>
           </p:cNvPr>
@@ -20424,7 +20424,7 @@
           <p:cNvPr id="70" name="">
             <a:extLst xmlns:a="http://schemas.openxmlformats.org/drawingml/2006/main">
               <a:ext uri="{FF2B5EF4-FFF2-40B4-BE49-F238E27FC236}">
-                <a16:creationId xmlns:a16="http://schemas.microsoft.com/office/drawing/2014/main" id="{39F08BB4-DAF2-4098-8354-0BCD27FD3307}"/>
+                <a16:creationId xmlns:a16="http://schemas.microsoft.com/office/drawing/2014/main" id="{393C8CA5-2006-49CB-8EEB-5E0C207BB8E1}"/>
               </a:ext>
             </a:extLst>
           </p:cNvPr>
@@ -20455,7 +20455,7 @@
           <p:cNvPr id="71" name="">
             <a:extLst xmlns:a="http://schemas.openxmlformats.org/drawingml/2006/main">
               <a:ext uri="{FF2B5EF4-FFF2-40B4-BE49-F238E27FC236}">
-                <a16:creationId xmlns:a16="http://schemas.microsoft.com/office/drawing/2014/main" id="{1A1A4A20-097E-417A-AED8-C2C299B00759}"/>
+                <a16:creationId xmlns:a16="http://schemas.microsoft.com/office/drawing/2014/main" id="{158E43CA-1D94-4A4F-A766-21C054DFCD36}"/>
               </a:ext>
             </a:extLst>
           </p:cNvPr>
@@ -20486,7 +20486,7 @@
           <p:cNvPr id="72" name="">
             <a:extLst xmlns:a="http://schemas.openxmlformats.org/drawingml/2006/main">
               <a:ext uri="{FF2B5EF4-FFF2-40B4-BE49-F238E27FC236}">
-                <a16:creationId xmlns:a16="http://schemas.microsoft.com/office/drawing/2014/main" id="{7B0BAA6E-016D-4D41-8002-7ED961FAAEAA}"/>
+                <a16:creationId xmlns:a16="http://schemas.microsoft.com/office/drawing/2014/main" id="{ACF25CF2-502D-4290-8B0F-1B588194D295}"/>
               </a:ext>
             </a:extLst>
           </p:cNvPr>
@@ -20538,7 +20538,7 @@
           <p:cNvPr id="73" name="">
             <a:extLst xmlns:a="http://schemas.openxmlformats.org/drawingml/2006/main">
               <a:ext uri="{FF2B5EF4-FFF2-40B4-BE49-F238E27FC236}">
-                <a16:creationId xmlns:a16="http://schemas.microsoft.com/office/drawing/2014/main" id="{772C3215-17D2-49F4-A386-08AE753D0515}"/>
+                <a16:creationId xmlns:a16="http://schemas.microsoft.com/office/drawing/2014/main" id="{06F91634-95D0-46E0-AD65-9E631063683A}"/>
               </a:ext>
             </a:extLst>
           </p:cNvPr>
@@ -20590,7 +20590,7 @@
           <p:cNvPr id="74" name="">
             <a:extLst xmlns:a="http://schemas.openxmlformats.org/drawingml/2006/main">
               <a:ext uri="{FF2B5EF4-FFF2-40B4-BE49-F238E27FC236}">
-                <a16:creationId xmlns:a16="http://schemas.microsoft.com/office/drawing/2014/main" id="{50D459B8-E0DA-4C10-9B67-FB5487582D83}"/>
+                <a16:creationId xmlns:a16="http://schemas.microsoft.com/office/drawing/2014/main" id="{9D8A13E4-FB4C-4FA1-A470-27DA5271A318}"/>
               </a:ext>
             </a:extLst>
           </p:cNvPr>
@@ -20642,7 +20642,7 @@
           <p:cNvPr id="75" name="">
             <a:extLst xmlns:a="http://schemas.openxmlformats.org/drawingml/2006/main">
               <a:ext uri="{FF2B5EF4-FFF2-40B4-BE49-F238E27FC236}">
-                <a16:creationId xmlns:a16="http://schemas.microsoft.com/office/drawing/2014/main" id="{417A3DED-0D8E-41EA-9E3D-406ACAF67B7B}"/>
+                <a16:creationId xmlns:a16="http://schemas.microsoft.com/office/drawing/2014/main" id="{20026B66-636B-47D3-AE13-E6BDF5706D5B}"/>
               </a:ext>
             </a:extLst>
           </p:cNvPr>
@@ -20694,7 +20694,7 @@
           <p:cNvPr id="76" name="">
             <a:extLst xmlns:a="http://schemas.openxmlformats.org/drawingml/2006/main">
               <a:ext uri="{FF2B5EF4-FFF2-40B4-BE49-F238E27FC236}">
-                <a16:creationId xmlns:a16="http://schemas.microsoft.com/office/drawing/2014/main" id="{0C836AF4-E47E-4ECA-8D7E-89D4BDB3B5BB}"/>
+                <a16:creationId xmlns:a16="http://schemas.microsoft.com/office/drawing/2014/main" id="{E8EE9509-7DF7-4E07-9BE0-BE2FE8F03DE3}"/>
               </a:ext>
             </a:extLst>
           </p:cNvPr>
@@ -20746,7 +20746,7 @@
           <p:cNvPr id="77" name="">
             <a:extLst xmlns:a="http://schemas.openxmlformats.org/drawingml/2006/main">
               <a:ext uri="{FF2B5EF4-FFF2-40B4-BE49-F238E27FC236}">
-                <a16:creationId xmlns:a16="http://schemas.microsoft.com/office/drawing/2014/main" id="{A29FD246-34DB-4B50-9BE0-1B85B335F15A}"/>
+                <a16:creationId xmlns:a16="http://schemas.microsoft.com/office/drawing/2014/main" id="{DE72ED33-7CC8-48A8-A2EA-74EE9D2AB5DC}"/>
               </a:ext>
             </a:extLst>
           </p:cNvPr>
@@ -20777,7 +20777,7 @@
           <p:cNvPr id="78" name="">
             <a:extLst xmlns:a="http://schemas.openxmlformats.org/drawingml/2006/main">
               <a:ext uri="{FF2B5EF4-FFF2-40B4-BE49-F238E27FC236}">
-                <a16:creationId xmlns:a16="http://schemas.microsoft.com/office/drawing/2014/main" id="{0806C3AE-EA43-4E69-BAAD-7ED01754AEB9}"/>
+                <a16:creationId xmlns:a16="http://schemas.microsoft.com/office/drawing/2014/main" id="{9B9C8B66-7D4D-4C44-9732-C7931A03CCD8}"/>
               </a:ext>
             </a:extLst>
           </p:cNvPr>
@@ -20829,7 +20829,7 @@
           <p:cNvPr id="79" name="">
             <a:extLst xmlns:a="http://schemas.openxmlformats.org/drawingml/2006/main">
               <a:ext uri="{FF2B5EF4-FFF2-40B4-BE49-F238E27FC236}">
-                <a16:creationId xmlns:a16="http://schemas.microsoft.com/office/drawing/2014/main" id="{C259232C-B4F1-4616-87EB-5AA0AEB1E205}"/>
+                <a16:creationId xmlns:a16="http://schemas.microsoft.com/office/drawing/2014/main" id="{E3340B01-D213-4EA2-BAE9-22B7DB748401}"/>
               </a:ext>
             </a:extLst>
           </p:cNvPr>
@@ -20881,7 +20881,7 @@
           <p:cNvPr id="80" name="">
             <a:extLst xmlns:a="http://schemas.openxmlformats.org/drawingml/2006/main">
               <a:ext uri="{FF2B5EF4-FFF2-40B4-BE49-F238E27FC236}">
-                <a16:creationId xmlns:a16="http://schemas.microsoft.com/office/drawing/2014/main" id="{CED02605-2746-4A45-8C2C-A4306E81CF89}"/>
+                <a16:creationId xmlns:a16="http://schemas.microsoft.com/office/drawing/2014/main" id="{9892F509-AAC4-43BF-9F33-59BF9DC69A8F}"/>
               </a:ext>
             </a:extLst>
           </p:cNvPr>
@@ -20933,7 +20933,7 @@
           <p:cNvPr id="81" name="">
             <a:extLst xmlns:a="http://schemas.openxmlformats.org/drawingml/2006/main">
               <a:ext uri="{FF2B5EF4-FFF2-40B4-BE49-F238E27FC236}">
-                <a16:creationId xmlns:a16="http://schemas.microsoft.com/office/drawing/2014/main" id="{56541A12-B4D0-4F4B-8494-3604BE738C80}"/>
+                <a16:creationId xmlns:a16="http://schemas.microsoft.com/office/drawing/2014/main" id="{45020E5D-D19B-4709-98C2-2CFA689DD3BD}"/>
               </a:ext>
             </a:extLst>
           </p:cNvPr>
@@ -20985,7 +20985,7 @@
           <p:cNvPr id="82" name="">
             <a:extLst xmlns:a="http://schemas.openxmlformats.org/drawingml/2006/main">
               <a:ext uri="{FF2B5EF4-FFF2-40B4-BE49-F238E27FC236}">
-                <a16:creationId xmlns:a16="http://schemas.microsoft.com/office/drawing/2014/main" id="{6ECF01D6-729E-4CDF-AF39-971B64BCF183}"/>
+                <a16:creationId xmlns:a16="http://schemas.microsoft.com/office/drawing/2014/main" id="{6FB974CE-5E26-4D0C-81DD-BA43E39E0731}"/>
               </a:ext>
             </a:extLst>
           </p:cNvPr>
@@ -21037,7 +21037,7 @@
           <p:cNvPr id="83" name="">
             <a:extLst xmlns:a="http://schemas.openxmlformats.org/drawingml/2006/main">
               <a:ext uri="{FF2B5EF4-FFF2-40B4-BE49-F238E27FC236}">
-                <a16:creationId xmlns:a16="http://schemas.microsoft.com/office/drawing/2014/main" id="{4C8795AB-065A-402C-B49B-C704A6BB5738}"/>
+                <a16:creationId xmlns:a16="http://schemas.microsoft.com/office/drawing/2014/main" id="{00A82DFF-1619-4E3A-9687-D74243BDA3C7}"/>
               </a:ext>
             </a:extLst>
           </p:cNvPr>
@@ -21068,7 +21068,7 @@
           <p:cNvPr id="84" name="">
             <a:extLst xmlns:a="http://schemas.openxmlformats.org/drawingml/2006/main">
               <a:ext uri="{FF2B5EF4-FFF2-40B4-BE49-F238E27FC236}">
-                <a16:creationId xmlns:a16="http://schemas.microsoft.com/office/drawing/2014/main" id="{52295957-6B1F-411E-B3F6-A949028C7701}"/>
+                <a16:creationId xmlns:a16="http://schemas.microsoft.com/office/drawing/2014/main" id="{DB465974-34DA-4B42-B0D0-5C9D77A353CC}"/>
               </a:ext>
             </a:extLst>
           </p:cNvPr>
@@ -21120,7 +21120,7 @@
           <p:cNvPr id="85" name="">
             <a:extLst xmlns:a="http://schemas.openxmlformats.org/drawingml/2006/main">
               <a:ext uri="{FF2B5EF4-FFF2-40B4-BE49-F238E27FC236}">
-                <a16:creationId xmlns:a16="http://schemas.microsoft.com/office/drawing/2014/main" id="{68769113-A2B9-4FA4-8095-3AC4630CCE19}"/>
+                <a16:creationId xmlns:a16="http://schemas.microsoft.com/office/drawing/2014/main" id="{BAE84ADA-8A1E-4D71-8C85-5684D8A6926A}"/>
               </a:ext>
             </a:extLst>
           </p:cNvPr>
@@ -21172,7 +21172,7 @@
           <p:cNvPr id="86" name="">
             <a:extLst xmlns:a="http://schemas.openxmlformats.org/drawingml/2006/main">
               <a:ext uri="{FF2B5EF4-FFF2-40B4-BE49-F238E27FC236}">
-                <a16:creationId xmlns:a16="http://schemas.microsoft.com/office/drawing/2014/main" id="{8670D416-4402-4EF9-809A-83016DBF9833}"/>
+                <a16:creationId xmlns:a16="http://schemas.microsoft.com/office/drawing/2014/main" id="{AAC9D10F-8D77-4E94-8A40-E96EC225EF46}"/>
               </a:ext>
             </a:extLst>
           </p:cNvPr>
@@ -21224,7 +21224,7 @@
           <p:cNvPr id="87" name="">
             <a:extLst xmlns:a="http://schemas.openxmlformats.org/drawingml/2006/main">
               <a:ext uri="{FF2B5EF4-FFF2-40B4-BE49-F238E27FC236}">
-                <a16:creationId xmlns:a16="http://schemas.microsoft.com/office/drawing/2014/main" id="{FD852258-68DF-4DDC-9808-09A32770EC3F}"/>
+                <a16:creationId xmlns:a16="http://schemas.microsoft.com/office/drawing/2014/main" id="{616A8521-B0B6-42CF-BF41-3BD21CAD0D7E}"/>
               </a:ext>
             </a:extLst>
           </p:cNvPr>
@@ -21276,7 +21276,7 @@
           <p:cNvPr id="88" name="">
             <a:extLst xmlns:a="http://schemas.openxmlformats.org/drawingml/2006/main">
               <a:ext uri="{FF2B5EF4-FFF2-40B4-BE49-F238E27FC236}">
-                <a16:creationId xmlns:a16="http://schemas.microsoft.com/office/drawing/2014/main" id="{F5FA8FBC-C12B-43BA-B5F7-C512934DC0A9}"/>
+                <a16:creationId xmlns:a16="http://schemas.microsoft.com/office/drawing/2014/main" id="{7CEBD01A-8B69-4C65-8F74-F0D6DA669256}"/>
               </a:ext>
             </a:extLst>
           </p:cNvPr>
@@ -21328,7 +21328,7 @@
           <p:cNvPr id="89" name="">
             <a:extLst xmlns:a="http://schemas.openxmlformats.org/drawingml/2006/main">
               <a:ext uri="{FF2B5EF4-FFF2-40B4-BE49-F238E27FC236}">
-                <a16:creationId xmlns:a16="http://schemas.microsoft.com/office/drawing/2014/main" id="{66D0D9EA-A0EE-4B93-B3B7-F0DF43014857}"/>
+                <a16:creationId xmlns:a16="http://schemas.microsoft.com/office/drawing/2014/main" id="{99466CD6-4126-4488-BB6D-4266A2C2A83E}"/>
               </a:ext>
             </a:extLst>
           </p:cNvPr>
@@ -21359,7 +21359,7 @@
           <p:cNvPr id="90" name="">
             <a:extLst xmlns:a="http://schemas.openxmlformats.org/drawingml/2006/main">
               <a:ext uri="{FF2B5EF4-FFF2-40B4-BE49-F238E27FC236}">
-                <a16:creationId xmlns:a16="http://schemas.microsoft.com/office/drawing/2014/main" id="{81433C10-D61D-4067-A0AF-5C35B96E9B17}"/>
+                <a16:creationId xmlns:a16="http://schemas.microsoft.com/office/drawing/2014/main" id="{9B6FF16F-354A-46E0-AA09-AE5F798CF35B}"/>
               </a:ext>
             </a:extLst>
           </p:cNvPr>
@@ -21390,7 +21390,7 @@
           <p:cNvPr id="91" name="">
             <a:extLst xmlns:a="http://schemas.openxmlformats.org/drawingml/2006/main">
               <a:ext uri="{FF2B5EF4-FFF2-40B4-BE49-F238E27FC236}">
-                <a16:creationId xmlns:a16="http://schemas.microsoft.com/office/drawing/2014/main" id="{F4F480E8-DEF1-4444-8070-32AC709A212E}"/>
+                <a16:creationId xmlns:a16="http://schemas.microsoft.com/office/drawing/2014/main" id="{99398226-F176-4BD6-B07A-4EDB84883200}"/>
               </a:ext>
             </a:extLst>
           </p:cNvPr>
@@ -21442,7 +21442,7 @@
           <p:cNvPr id="92" name="">
             <a:extLst xmlns:a="http://schemas.openxmlformats.org/drawingml/2006/main">
               <a:ext uri="{FF2B5EF4-FFF2-40B4-BE49-F238E27FC236}">
-                <a16:creationId xmlns:a16="http://schemas.microsoft.com/office/drawing/2014/main" id="{64A4F708-4E7B-4709-9E74-64A1A8FB915F}"/>
+                <a16:creationId xmlns:a16="http://schemas.microsoft.com/office/drawing/2014/main" id="{214A9717-D28C-4CB8-B516-F235615CF0EE}"/>
               </a:ext>
             </a:extLst>
           </p:cNvPr>
@@ -21494,7 +21494,7 @@
           <p:cNvPr id="93" name="">
             <a:extLst xmlns:a="http://schemas.openxmlformats.org/drawingml/2006/main">
               <a:ext uri="{FF2B5EF4-FFF2-40B4-BE49-F238E27FC236}">
-                <a16:creationId xmlns:a16="http://schemas.microsoft.com/office/drawing/2014/main" id="{7855D32D-9F6A-4413-9C10-9236AB8A82EB}"/>
+                <a16:creationId xmlns:a16="http://schemas.microsoft.com/office/drawing/2014/main" id="{270D9F6B-8305-49A5-916B-2DCA218A3E4E}"/>
               </a:ext>
             </a:extLst>
           </p:cNvPr>
@@ -21546,7 +21546,7 @@
           <p:cNvPr id="94" name="">
             <a:extLst xmlns:a="http://schemas.openxmlformats.org/drawingml/2006/main">
               <a:ext uri="{FF2B5EF4-FFF2-40B4-BE49-F238E27FC236}">
-                <a16:creationId xmlns:a16="http://schemas.microsoft.com/office/drawing/2014/main" id="{52C21E24-590F-43FF-B3F7-2849892D292D}"/>
+                <a16:creationId xmlns:a16="http://schemas.microsoft.com/office/drawing/2014/main" id="{9A643F87-7800-468A-8F53-576AE1F4ED87}"/>
               </a:ext>
             </a:extLst>
           </p:cNvPr>
@@ -21598,7 +21598,7 @@
           <p:cNvPr id="95" name="">
             <a:extLst xmlns:a="http://schemas.openxmlformats.org/drawingml/2006/main">
               <a:ext uri="{FF2B5EF4-FFF2-40B4-BE49-F238E27FC236}">
-                <a16:creationId xmlns:a16="http://schemas.microsoft.com/office/drawing/2014/main" id="{85FAE0A3-071D-4B89-A7AE-8C65542C0446}"/>
+                <a16:creationId xmlns:a16="http://schemas.microsoft.com/office/drawing/2014/main" id="{E811C6BD-20E9-4E99-A0EF-B7D7ABFEA6C7}"/>
               </a:ext>
             </a:extLst>
           </p:cNvPr>
@@ -21648,7 +21648,7 @@
     </p:spTree>
     <p:extLst>
       <p:ext uri="{BB962C8B-B14F-4D97-AF65-F5344CB8AC3E}">
-        <p14:creationId xmlns:p14="http://schemas.microsoft.com/office/powerpoint/2010/main" val="1502661489"/>
+        <p14:creationId xmlns:p14="http://schemas.microsoft.com/office/powerpoint/2010/main" val="761580628"/>
       </p:ext>
     </p:extLst>
   </p:cSld>
@@ -21679,7 +21679,7 @@
           <p:cNvPr id="135" name="">
             <a:extLst xmlns:a="http://schemas.openxmlformats.org/drawingml/2006/main">
               <a:ext uri="{FF2B5EF4-FFF2-40B4-BE49-F238E27FC236}">
-                <a16:creationId xmlns:a16="http://schemas.microsoft.com/office/drawing/2014/main" id="{BD087A8E-2249-49C0-B8E6-AB7BEE832008}"/>
+                <a16:creationId xmlns:a16="http://schemas.microsoft.com/office/drawing/2014/main" id="{F0792D8F-0918-46EF-923D-CE7173A38DCA}"/>
               </a:ext>
             </a:extLst>
           </p:cNvPr>
@@ -21712,7 +21712,7 @@
           <p:cNvPr id="2" name="">
             <a:extLst xmlns:a="http://schemas.openxmlformats.org/drawingml/2006/main">
               <a:ext uri="{FF2B5EF4-FFF2-40B4-BE49-F238E27FC236}">
-                <a16:creationId xmlns:a16="http://schemas.microsoft.com/office/drawing/2014/main" id="{96E1C10C-4802-448F-9CFB-D02ED06D207C}"/>
+                <a16:creationId xmlns:a16="http://schemas.microsoft.com/office/drawing/2014/main" id="{C1B399E7-7755-4ADA-A2E9-EC27EEC153B0}"/>
               </a:ext>
             </a:extLst>
           </p:cNvPr>
@@ -21743,7 +21743,7 @@
           <p:cNvPr id="3" name="">
             <a:extLst xmlns:a="http://schemas.openxmlformats.org/drawingml/2006/main">
               <a:ext uri="{FF2B5EF4-FFF2-40B4-BE49-F238E27FC236}">
-                <a16:creationId xmlns:a16="http://schemas.microsoft.com/office/drawing/2014/main" id="{1CF710A6-9F51-4E29-A933-64E1DE4FA31E}"/>
+                <a16:creationId xmlns:a16="http://schemas.microsoft.com/office/drawing/2014/main" id="{E72AB49E-FF37-4772-908B-D60C7F372A61}"/>
               </a:ext>
             </a:extLst>
           </p:cNvPr>
@@ -21795,7 +21795,7 @@
           <p:cNvPr id="4" name="">
             <a:extLst xmlns:a="http://schemas.openxmlformats.org/drawingml/2006/main">
               <a:ext uri="{FF2B5EF4-FFF2-40B4-BE49-F238E27FC236}">
-                <a16:creationId xmlns:a16="http://schemas.microsoft.com/office/drawing/2014/main" id="{38FBB9CE-79B2-4E56-8F39-6D672B0A519D}"/>
+                <a16:creationId xmlns:a16="http://schemas.microsoft.com/office/drawing/2014/main" id="{6536DFC2-0BBB-4FFA-B2A6-56CD3A40FC20}"/>
               </a:ext>
             </a:extLst>
           </p:cNvPr>
@@ -21847,7 +21847,7 @@
           <p:cNvPr id="5" name="">
             <a:extLst xmlns:a="http://schemas.openxmlformats.org/drawingml/2006/main">
               <a:ext uri="{FF2B5EF4-FFF2-40B4-BE49-F238E27FC236}">
-                <a16:creationId xmlns:a16="http://schemas.microsoft.com/office/drawing/2014/main" id="{41433295-175C-4D95-8D25-601D7A9A92A0}"/>
+                <a16:creationId xmlns:a16="http://schemas.microsoft.com/office/drawing/2014/main" id="{1D0C27FC-BCB4-4252-9E38-E309BDB9FF09}"/>
               </a:ext>
             </a:extLst>
           </p:cNvPr>
@@ -21882,7 +21882,7 @@
           <p:nvPr/>
         </p:nvPicPr>
         <p:blipFill>
-          <a:blip xmlns:r="http://schemas.openxmlformats.org/officeDocument/2006/relationships" xmlns:a="http://schemas.openxmlformats.org/drawingml/2006/main" r:embed="R332e8afc8da24aed"/>
+          <a:blip xmlns:r="http://schemas.openxmlformats.org/officeDocument/2006/relationships" xmlns:a="http://schemas.openxmlformats.org/drawingml/2006/main" r:embed="R528b6e70419143f3"/>
           <a:stretch xmlns:a="http://schemas.openxmlformats.org/drawingml/2006/main"/>
         </p:blipFill>
         <p:spPr>
@@ -21900,7 +21900,7 @@
           <p:cNvPr id="7" name="">
             <a:extLst xmlns:a="http://schemas.openxmlformats.org/drawingml/2006/main">
               <a:ext uri="{FF2B5EF4-FFF2-40B4-BE49-F238E27FC236}">
-                <a16:creationId xmlns:a16="http://schemas.microsoft.com/office/drawing/2014/main" id="{AE7530F7-BB90-4E89-A235-77DBEFAAE0BD}"/>
+                <a16:creationId xmlns:a16="http://schemas.microsoft.com/office/drawing/2014/main" id="{8B7777D7-5787-4F75-B5AA-82B22BC171C4}"/>
               </a:ext>
             </a:extLst>
           </p:cNvPr>
@@ -21952,7 +21952,7 @@
           <p:cNvPr id="8" name="">
             <a:extLst xmlns:a="http://schemas.openxmlformats.org/drawingml/2006/main">
               <a:ext uri="{FF2B5EF4-FFF2-40B4-BE49-F238E27FC236}">
-                <a16:creationId xmlns:a16="http://schemas.microsoft.com/office/drawing/2014/main" id="{C97A2D77-017F-4244-8AF5-F10CA09C9473}"/>
+                <a16:creationId xmlns:a16="http://schemas.microsoft.com/office/drawing/2014/main" id="{F10631AB-36B4-4FD0-AF41-55C18B6E90B8}"/>
               </a:ext>
             </a:extLst>
           </p:cNvPr>
@@ -22004,7 +22004,7 @@
           <p:cNvPr id="9" name="">
             <a:extLst xmlns:a="http://schemas.openxmlformats.org/drawingml/2006/main">
               <a:ext uri="{FF2B5EF4-FFF2-40B4-BE49-F238E27FC236}">
-                <a16:creationId xmlns:a16="http://schemas.microsoft.com/office/drawing/2014/main" id="{A10E52C1-368F-4BBA-AF21-9F1E50C3DC18}"/>
+                <a16:creationId xmlns:a16="http://schemas.microsoft.com/office/drawing/2014/main" id="{65727D74-B85A-45F3-BF8C-974A3F834502}"/>
               </a:ext>
             </a:extLst>
           </p:cNvPr>
@@ -22056,7 +22056,7 @@
           <p:cNvPr id="10" name="">
             <a:extLst xmlns:a="http://schemas.openxmlformats.org/drawingml/2006/main">
               <a:ext uri="{FF2B5EF4-FFF2-40B4-BE49-F238E27FC236}">
-                <a16:creationId xmlns:a16="http://schemas.microsoft.com/office/drawing/2014/main" id="{BAD71C68-D081-4448-8485-8B03E3DA1E1B}"/>
+                <a16:creationId xmlns:a16="http://schemas.microsoft.com/office/drawing/2014/main" id="{103C2F5A-38F7-4408-9E78-7C581D59E347}"/>
               </a:ext>
             </a:extLst>
           </p:cNvPr>
@@ -22108,7 +22108,7 @@
           <p:cNvPr id="11" name="">
             <a:extLst xmlns:a="http://schemas.openxmlformats.org/drawingml/2006/main">
               <a:ext uri="{FF2B5EF4-FFF2-40B4-BE49-F238E27FC236}">
-                <a16:creationId xmlns:a16="http://schemas.microsoft.com/office/drawing/2014/main" id="{F9BCDBB0-2BB6-45E7-928C-B85D969203B1}"/>
+                <a16:creationId xmlns:a16="http://schemas.microsoft.com/office/drawing/2014/main" id="{EAAFE9F8-9C29-4522-8867-131D3ED6771D}"/>
               </a:ext>
             </a:extLst>
           </p:cNvPr>
@@ -22139,7 +22139,7 @@
           <p:cNvPr id="12" name="">
             <a:extLst xmlns:a="http://schemas.openxmlformats.org/drawingml/2006/main">
               <a:ext uri="{FF2B5EF4-FFF2-40B4-BE49-F238E27FC236}">
-                <a16:creationId xmlns:a16="http://schemas.microsoft.com/office/drawing/2014/main" id="{607439D1-7276-4BEA-941D-6FA2A96785C3}"/>
+                <a16:creationId xmlns:a16="http://schemas.microsoft.com/office/drawing/2014/main" id="{FD69E3D1-5006-4B90-9636-0E42B33C6670}"/>
               </a:ext>
             </a:extLst>
           </p:cNvPr>
@@ -22170,7 +22170,7 @@
           <p:cNvPr id="13" name="">
             <a:extLst xmlns:a="http://schemas.openxmlformats.org/drawingml/2006/main">
               <a:ext uri="{FF2B5EF4-FFF2-40B4-BE49-F238E27FC236}">
-                <a16:creationId xmlns:a16="http://schemas.microsoft.com/office/drawing/2014/main" id="{B9725582-5687-49D2-BF3A-D09C1E1AA820}"/>
+                <a16:creationId xmlns:a16="http://schemas.microsoft.com/office/drawing/2014/main" id="{CDDEBD32-3CB4-4059-B5A8-5E818976F988}"/>
               </a:ext>
             </a:extLst>
           </p:cNvPr>
@@ -22222,7 +22222,7 @@
           <p:cNvPr id="14" name="">
             <a:extLst xmlns:a="http://schemas.openxmlformats.org/drawingml/2006/main">
               <a:ext uri="{FF2B5EF4-FFF2-40B4-BE49-F238E27FC236}">
-                <a16:creationId xmlns:a16="http://schemas.microsoft.com/office/drawing/2014/main" id="{4775FF64-A797-4B2E-93B1-28C5175FC9AC}"/>
+                <a16:creationId xmlns:a16="http://schemas.microsoft.com/office/drawing/2014/main" id="{18F6E268-F72E-4DA6-A4A1-52432218A4FB}"/>
               </a:ext>
             </a:extLst>
           </p:cNvPr>
@@ -22274,7 +22274,7 @@
           <p:cNvPr id="15" name="">
             <a:extLst xmlns:a="http://schemas.openxmlformats.org/drawingml/2006/main">
               <a:ext uri="{FF2B5EF4-FFF2-40B4-BE49-F238E27FC236}">
-                <a16:creationId xmlns:a16="http://schemas.microsoft.com/office/drawing/2014/main" id="{B2131833-63A8-436A-80A2-5CDEC26FB61A}"/>
+                <a16:creationId xmlns:a16="http://schemas.microsoft.com/office/drawing/2014/main" id="{53A5BB68-CBBD-460F-BBC6-1A0401C7FA2D}"/>
               </a:ext>
             </a:extLst>
           </p:cNvPr>
@@ -22326,7 +22326,7 @@
           <p:cNvPr id="16" name="">
             <a:extLst xmlns:a="http://schemas.openxmlformats.org/drawingml/2006/main">
               <a:ext uri="{FF2B5EF4-FFF2-40B4-BE49-F238E27FC236}">
-                <a16:creationId xmlns:a16="http://schemas.microsoft.com/office/drawing/2014/main" id="{80631591-484A-4BBD-B030-1C5B899F952C}"/>
+                <a16:creationId xmlns:a16="http://schemas.microsoft.com/office/drawing/2014/main" id="{DA671D92-D572-42C2-9AE5-91EE7ADF8A3E}"/>
               </a:ext>
             </a:extLst>
           </p:cNvPr>
@@ -22378,7 +22378,7 @@
           <p:cNvPr id="17" name="">
             <a:extLst xmlns:a="http://schemas.openxmlformats.org/drawingml/2006/main">
               <a:ext uri="{FF2B5EF4-FFF2-40B4-BE49-F238E27FC236}">
-                <a16:creationId xmlns:a16="http://schemas.microsoft.com/office/drawing/2014/main" id="{789DF6AA-21E4-4C31-9F2D-EA1B674A7066}"/>
+                <a16:creationId xmlns:a16="http://schemas.microsoft.com/office/drawing/2014/main" id="{3ABCDF49-1743-415B-A394-9655FA4CB3D3}"/>
               </a:ext>
             </a:extLst>
           </p:cNvPr>
@@ -22430,7 +22430,7 @@
           <p:cNvPr id="18" name="">
             <a:extLst xmlns:a="http://schemas.openxmlformats.org/drawingml/2006/main">
               <a:ext uri="{FF2B5EF4-FFF2-40B4-BE49-F238E27FC236}">
-                <a16:creationId xmlns:a16="http://schemas.microsoft.com/office/drawing/2014/main" id="{19292E1B-77C5-4BBA-84F3-C398C1B240A9}"/>
+                <a16:creationId xmlns:a16="http://schemas.microsoft.com/office/drawing/2014/main" id="{5AABFB0F-6DB8-42CB-84BD-C523BA13F28C}"/>
               </a:ext>
             </a:extLst>
           </p:cNvPr>
@@ -22482,7 +22482,7 @@
           <p:cNvPr id="19" name="">
             <a:extLst xmlns:a="http://schemas.openxmlformats.org/drawingml/2006/main">
               <a:ext uri="{FF2B5EF4-FFF2-40B4-BE49-F238E27FC236}">
-                <a16:creationId xmlns:a16="http://schemas.microsoft.com/office/drawing/2014/main" id="{D9A69DED-ABEE-40F5-954C-85DA82438B07}"/>
+                <a16:creationId xmlns:a16="http://schemas.microsoft.com/office/drawing/2014/main" id="{050B2C99-74DA-48F0-9CEF-CAA0EE2D6A16}"/>
               </a:ext>
             </a:extLst>
           </p:cNvPr>
@@ -22534,7 +22534,7 @@
           <p:cNvPr id="20" name="">
             <a:extLst xmlns:a="http://schemas.openxmlformats.org/drawingml/2006/main">
               <a:ext uri="{FF2B5EF4-FFF2-40B4-BE49-F238E27FC236}">
-                <a16:creationId xmlns:a16="http://schemas.microsoft.com/office/drawing/2014/main" id="{507994CF-3F8D-47AD-AE33-DAF559FDAEB8}"/>
+                <a16:creationId xmlns:a16="http://schemas.microsoft.com/office/drawing/2014/main" id="{8E183462-56BE-4AB0-8059-1D10B6220242}"/>
               </a:ext>
             </a:extLst>
           </p:cNvPr>
@@ -22586,7 +22586,7 @@
           <p:cNvPr id="21" name="">
             <a:extLst xmlns:a="http://schemas.openxmlformats.org/drawingml/2006/main">
               <a:ext uri="{FF2B5EF4-FFF2-40B4-BE49-F238E27FC236}">
-                <a16:creationId xmlns:a16="http://schemas.microsoft.com/office/drawing/2014/main" id="{D4B66490-C7A9-48A4-A8DC-990DAEB08051}"/>
+                <a16:creationId xmlns:a16="http://schemas.microsoft.com/office/drawing/2014/main" id="{5BF210AA-CB93-4A78-9008-1D89EF25B6E8}"/>
               </a:ext>
             </a:extLst>
           </p:cNvPr>
@@ -22617,7 +22617,7 @@
           <p:cNvPr id="22" name="">
             <a:extLst xmlns:a="http://schemas.openxmlformats.org/drawingml/2006/main">
               <a:ext uri="{FF2B5EF4-FFF2-40B4-BE49-F238E27FC236}">
-                <a16:creationId xmlns:a16="http://schemas.microsoft.com/office/drawing/2014/main" id="{7E390A7F-69BA-401E-9F54-656AD1BCF01D}"/>
+                <a16:creationId xmlns:a16="http://schemas.microsoft.com/office/drawing/2014/main" id="{2B7DE1DA-24B9-4FF3-BDE8-D0EC9E79B85F}"/>
               </a:ext>
             </a:extLst>
           </p:cNvPr>
@@ -22669,7 +22669,7 @@
           <p:cNvPr id="23" name="">
             <a:extLst xmlns:a="http://schemas.openxmlformats.org/drawingml/2006/main">
               <a:ext uri="{FF2B5EF4-FFF2-40B4-BE49-F238E27FC236}">
-                <a16:creationId xmlns:a16="http://schemas.microsoft.com/office/drawing/2014/main" id="{1364C1B0-5134-4B36-A223-48CCF0788517}"/>
+                <a16:creationId xmlns:a16="http://schemas.microsoft.com/office/drawing/2014/main" id="{2B089193-C020-4FE6-BE9E-3C585A2435F6}"/>
               </a:ext>
             </a:extLst>
           </p:cNvPr>
@@ -22721,7 +22721,7 @@
           <p:cNvPr id="24" name="">
             <a:extLst xmlns:a="http://schemas.openxmlformats.org/drawingml/2006/main">
               <a:ext uri="{FF2B5EF4-FFF2-40B4-BE49-F238E27FC236}">
-                <a16:creationId xmlns:a16="http://schemas.microsoft.com/office/drawing/2014/main" id="{18156189-4FB3-4479-8B9A-9C287AE3A4EE}"/>
+                <a16:creationId xmlns:a16="http://schemas.microsoft.com/office/drawing/2014/main" id="{C407CCF6-46FE-47D1-AC87-B3784D23BDD1}"/>
               </a:ext>
             </a:extLst>
           </p:cNvPr>
@@ -22773,7 +22773,7 @@
           <p:cNvPr id="25" name="">
             <a:extLst xmlns:a="http://schemas.openxmlformats.org/drawingml/2006/main">
               <a:ext uri="{FF2B5EF4-FFF2-40B4-BE49-F238E27FC236}">
-                <a16:creationId xmlns:a16="http://schemas.microsoft.com/office/drawing/2014/main" id="{52D38380-38C0-4513-AB4E-64318A1BA740}"/>
+                <a16:creationId xmlns:a16="http://schemas.microsoft.com/office/drawing/2014/main" id="{F585F7AA-1F9E-4505-A1C9-A59314EC6AB1}"/>
               </a:ext>
             </a:extLst>
           </p:cNvPr>
@@ -22825,7 +22825,7 @@
           <p:cNvPr id="26" name="">
             <a:extLst xmlns:a="http://schemas.openxmlformats.org/drawingml/2006/main">
               <a:ext uri="{FF2B5EF4-FFF2-40B4-BE49-F238E27FC236}">
-                <a16:creationId xmlns:a16="http://schemas.microsoft.com/office/drawing/2014/main" id="{A23CC324-6BC1-47CD-B743-7676B0563CDA}"/>
+                <a16:creationId xmlns:a16="http://schemas.microsoft.com/office/drawing/2014/main" id="{E855C86F-199A-4D45-9C0B-73874211E23E}"/>
               </a:ext>
             </a:extLst>
           </p:cNvPr>
@@ -22877,7 +22877,7 @@
           <p:cNvPr id="27" name="">
             <a:extLst xmlns:a="http://schemas.openxmlformats.org/drawingml/2006/main">
               <a:ext uri="{FF2B5EF4-FFF2-40B4-BE49-F238E27FC236}">
-                <a16:creationId xmlns:a16="http://schemas.microsoft.com/office/drawing/2014/main" id="{FF02CE54-61FC-4C1B-AE2C-48B063BA868F}"/>
+                <a16:creationId xmlns:a16="http://schemas.microsoft.com/office/drawing/2014/main" id="{F16177B5-79A0-40E7-A9E0-D28F6EA9DCD8}"/>
               </a:ext>
             </a:extLst>
           </p:cNvPr>
@@ -22929,7 +22929,7 @@
           <p:cNvPr id="28" name="">
             <a:extLst xmlns:a="http://schemas.openxmlformats.org/drawingml/2006/main">
               <a:ext uri="{FF2B5EF4-FFF2-40B4-BE49-F238E27FC236}">
-                <a16:creationId xmlns:a16="http://schemas.microsoft.com/office/drawing/2014/main" id="{8A8DD44E-2861-4D17-B310-22C7E44855B8}"/>
+                <a16:creationId xmlns:a16="http://schemas.microsoft.com/office/drawing/2014/main" id="{A1EFF063-6362-47D9-A8F6-F9DB51A7276F}"/>
               </a:ext>
             </a:extLst>
           </p:cNvPr>
@@ -22981,7 +22981,7 @@
           <p:cNvPr id="29" name="">
             <a:extLst xmlns:a="http://schemas.openxmlformats.org/drawingml/2006/main">
               <a:ext uri="{FF2B5EF4-FFF2-40B4-BE49-F238E27FC236}">
-                <a16:creationId xmlns:a16="http://schemas.microsoft.com/office/drawing/2014/main" id="{3E7DC2BC-00EE-4737-803E-BE329B93D9EF}"/>
+                <a16:creationId xmlns:a16="http://schemas.microsoft.com/office/drawing/2014/main" id="{FB9DDE9D-1C85-473B-B9A9-A6C0A54A259F}"/>
               </a:ext>
             </a:extLst>
           </p:cNvPr>
@@ -23033,7 +23033,7 @@
           <p:cNvPr id="30" name="">
             <a:extLst xmlns:a="http://schemas.openxmlformats.org/drawingml/2006/main">
               <a:ext uri="{FF2B5EF4-FFF2-40B4-BE49-F238E27FC236}">
-                <a16:creationId xmlns:a16="http://schemas.microsoft.com/office/drawing/2014/main" id="{E4DA380F-1888-4D1B-A696-D9D9E11B99E8}"/>
+                <a16:creationId xmlns:a16="http://schemas.microsoft.com/office/drawing/2014/main" id="{18F25E4D-C4F8-410C-9B30-E0FCFB66E197}"/>
               </a:ext>
             </a:extLst>
           </p:cNvPr>
@@ -23064,7 +23064,7 @@
           <p:cNvPr id="31" name="">
             <a:extLst xmlns:a="http://schemas.openxmlformats.org/drawingml/2006/main">
               <a:ext uri="{FF2B5EF4-FFF2-40B4-BE49-F238E27FC236}">
-                <a16:creationId xmlns:a16="http://schemas.microsoft.com/office/drawing/2014/main" id="{E932A119-D770-4C93-A679-61105E713902}"/>
+                <a16:creationId xmlns:a16="http://schemas.microsoft.com/office/drawing/2014/main" id="{A8E2CFD1-3EFC-44E6-8B79-3E3DA95AA6B9}"/>
               </a:ext>
             </a:extLst>
           </p:cNvPr>
@@ -23095,7 +23095,7 @@
           <p:cNvPr id="32" name="">
             <a:extLst xmlns:a="http://schemas.openxmlformats.org/drawingml/2006/main">
               <a:ext uri="{FF2B5EF4-FFF2-40B4-BE49-F238E27FC236}">
-                <a16:creationId xmlns:a16="http://schemas.microsoft.com/office/drawing/2014/main" id="{38439E23-3F74-4684-9D4B-99F15862BE96}"/>
+                <a16:creationId xmlns:a16="http://schemas.microsoft.com/office/drawing/2014/main" id="{72322C9E-F43B-4AD9-984A-EBB17258A4E8}"/>
               </a:ext>
             </a:extLst>
           </p:cNvPr>
@@ -23147,7 +23147,7 @@
           <p:cNvPr id="33" name="">
             <a:extLst xmlns:a="http://schemas.openxmlformats.org/drawingml/2006/main">
               <a:ext uri="{FF2B5EF4-FFF2-40B4-BE49-F238E27FC236}">
-                <a16:creationId xmlns:a16="http://schemas.microsoft.com/office/drawing/2014/main" id="{28912748-28EF-4E10-853B-15B7E4E125D5}"/>
+                <a16:creationId xmlns:a16="http://schemas.microsoft.com/office/drawing/2014/main" id="{42702800-8894-4CAC-93BB-AD034BE31FE2}"/>
               </a:ext>
             </a:extLst>
           </p:cNvPr>
@@ -23199,7 +23199,7 @@
           <p:cNvPr id="34" name="">
             <a:extLst xmlns:a="http://schemas.openxmlformats.org/drawingml/2006/main">
               <a:ext uri="{FF2B5EF4-FFF2-40B4-BE49-F238E27FC236}">
-                <a16:creationId xmlns:a16="http://schemas.microsoft.com/office/drawing/2014/main" id="{37FF4975-ADFF-4F26-BC75-1CF3614C5338}"/>
+                <a16:creationId xmlns:a16="http://schemas.microsoft.com/office/drawing/2014/main" id="{629FE88B-748C-4143-85D2-0326DF0ED996}"/>
               </a:ext>
             </a:extLst>
           </p:cNvPr>
@@ -23251,7 +23251,7 @@
           <p:cNvPr id="35" name="">
             <a:extLst xmlns:a="http://schemas.openxmlformats.org/drawingml/2006/main">
               <a:ext uri="{FF2B5EF4-FFF2-40B4-BE49-F238E27FC236}">
-                <a16:creationId xmlns:a16="http://schemas.microsoft.com/office/drawing/2014/main" id="{813A8217-68DE-466B-AD7F-2F8FD46D6A45}"/>
+                <a16:creationId xmlns:a16="http://schemas.microsoft.com/office/drawing/2014/main" id="{34A67F9E-8BF2-42D5-8339-E21521EBF8EF}"/>
               </a:ext>
             </a:extLst>
           </p:cNvPr>
@@ -23303,7 +23303,7 @@
           <p:cNvPr id="36" name="">
             <a:extLst xmlns:a="http://schemas.openxmlformats.org/drawingml/2006/main">
               <a:ext uri="{FF2B5EF4-FFF2-40B4-BE49-F238E27FC236}">
-                <a16:creationId xmlns:a16="http://schemas.microsoft.com/office/drawing/2014/main" id="{A6AB1012-9F65-41E3-868A-EA9D4D32C84C}"/>
+                <a16:creationId xmlns:a16="http://schemas.microsoft.com/office/drawing/2014/main" id="{74E468DA-3991-4A21-AC9D-6CCFDF1CDEFF}"/>
               </a:ext>
             </a:extLst>
           </p:cNvPr>
@@ -23355,7 +23355,7 @@
           <p:cNvPr id="37" name="">
             <a:extLst xmlns:a="http://schemas.openxmlformats.org/drawingml/2006/main">
               <a:ext uri="{FF2B5EF4-FFF2-40B4-BE49-F238E27FC236}">
-                <a16:creationId xmlns:a16="http://schemas.microsoft.com/office/drawing/2014/main" id="{F9E7A117-B7A6-4293-B700-4249637D3A8A}"/>
+                <a16:creationId xmlns:a16="http://schemas.microsoft.com/office/drawing/2014/main" id="{921416ED-F7C4-4732-B9C5-1EFCF22FD869}"/>
               </a:ext>
             </a:extLst>
           </p:cNvPr>
@@ -23407,7 +23407,7 @@
           <p:cNvPr id="38" name="">
             <a:extLst xmlns:a="http://schemas.openxmlformats.org/drawingml/2006/main">
               <a:ext uri="{FF2B5EF4-FFF2-40B4-BE49-F238E27FC236}">
-                <a16:creationId xmlns:a16="http://schemas.microsoft.com/office/drawing/2014/main" id="{DF7CAC6C-15A9-4509-BEEE-27C68F6B841A}"/>
+                <a16:creationId xmlns:a16="http://schemas.microsoft.com/office/drawing/2014/main" id="{83C8D01B-65E9-40F7-B1F5-AD8A31E1494F}"/>
               </a:ext>
             </a:extLst>
           </p:cNvPr>
@@ -23459,7 +23459,7 @@
           <p:cNvPr id="39" name="">
             <a:extLst xmlns:a="http://schemas.openxmlformats.org/drawingml/2006/main">
               <a:ext uri="{FF2B5EF4-FFF2-40B4-BE49-F238E27FC236}">
-                <a16:creationId xmlns:a16="http://schemas.microsoft.com/office/drawing/2014/main" id="{75C22F07-9E14-43F2-ADF0-43500FE31512}"/>
+                <a16:creationId xmlns:a16="http://schemas.microsoft.com/office/drawing/2014/main" id="{4121C0BC-2707-4CC2-8779-1504A6EED181}"/>
               </a:ext>
             </a:extLst>
           </p:cNvPr>
@@ -23511,7 +23511,7 @@
           <p:cNvPr id="40" name="">
             <a:extLst xmlns:a="http://schemas.openxmlformats.org/drawingml/2006/main">
               <a:ext uri="{FF2B5EF4-FFF2-40B4-BE49-F238E27FC236}">
-                <a16:creationId xmlns:a16="http://schemas.microsoft.com/office/drawing/2014/main" id="{90010B00-2490-4630-9A05-5DE77915EB71}"/>
+                <a16:creationId xmlns:a16="http://schemas.microsoft.com/office/drawing/2014/main" id="{7526B3CC-EDA3-40C2-8617-E9E94E2744AE}"/>
               </a:ext>
             </a:extLst>
           </p:cNvPr>
@@ -23542,7 +23542,7 @@
           <p:cNvPr id="41" name="">
             <a:extLst xmlns:a="http://schemas.openxmlformats.org/drawingml/2006/main">
               <a:ext uri="{FF2B5EF4-FFF2-40B4-BE49-F238E27FC236}">
-                <a16:creationId xmlns:a16="http://schemas.microsoft.com/office/drawing/2014/main" id="{0468DFFB-B79B-4594-9B15-CAC6CF9F0C33}"/>
+                <a16:creationId xmlns:a16="http://schemas.microsoft.com/office/drawing/2014/main" id="{5104623C-E4D2-4082-A09B-6509A3D143C0}"/>
               </a:ext>
             </a:extLst>
           </p:cNvPr>
@@ -23594,7 +23594,7 @@
           <p:cNvPr id="42" name="">
             <a:extLst xmlns:a="http://schemas.openxmlformats.org/drawingml/2006/main">
               <a:ext uri="{FF2B5EF4-FFF2-40B4-BE49-F238E27FC236}">
-                <a16:creationId xmlns:a16="http://schemas.microsoft.com/office/drawing/2014/main" id="{563E72B5-023B-44BE-8A9B-F21596B7E8E0}"/>
+                <a16:creationId xmlns:a16="http://schemas.microsoft.com/office/drawing/2014/main" id="{3BBDA8DB-5689-4F86-BF7C-B48C2031BB50}"/>
               </a:ext>
             </a:extLst>
           </p:cNvPr>
@@ -23646,7 +23646,7 @@
           <p:cNvPr id="43" name="">
             <a:extLst xmlns:a="http://schemas.openxmlformats.org/drawingml/2006/main">
               <a:ext uri="{FF2B5EF4-FFF2-40B4-BE49-F238E27FC236}">
-                <a16:creationId xmlns:a16="http://schemas.microsoft.com/office/drawing/2014/main" id="{8682DC9A-7306-4C87-AAB7-243FCD79A11A}"/>
+                <a16:creationId xmlns:a16="http://schemas.microsoft.com/office/drawing/2014/main" id="{613C5D25-0B97-45E4-94B6-F76959496FA2}"/>
               </a:ext>
             </a:extLst>
           </p:cNvPr>
@@ -23698,7 +23698,7 @@
           <p:cNvPr id="44" name="">
             <a:extLst xmlns:a="http://schemas.openxmlformats.org/drawingml/2006/main">
               <a:ext uri="{FF2B5EF4-FFF2-40B4-BE49-F238E27FC236}">
-                <a16:creationId xmlns:a16="http://schemas.microsoft.com/office/drawing/2014/main" id="{AEB978D8-F215-4070-BC8E-769B726A089A}"/>
+                <a16:creationId xmlns:a16="http://schemas.microsoft.com/office/drawing/2014/main" id="{EBDA7710-A51D-4E33-92EB-FA19C59D35A7}"/>
               </a:ext>
             </a:extLst>
           </p:cNvPr>
@@ -23750,7 +23750,7 @@
           <p:cNvPr id="45" name="">
             <a:extLst xmlns:a="http://schemas.openxmlformats.org/drawingml/2006/main">
               <a:ext uri="{FF2B5EF4-FFF2-40B4-BE49-F238E27FC236}">
-                <a16:creationId xmlns:a16="http://schemas.microsoft.com/office/drawing/2014/main" id="{814D80B4-3A6C-4A10-A7B8-D086D9E9ACAA}"/>
+                <a16:creationId xmlns:a16="http://schemas.microsoft.com/office/drawing/2014/main" id="{99E5B3EF-2C7F-49FF-A2AC-3A2A6685A400}"/>
               </a:ext>
             </a:extLst>
           </p:cNvPr>
@@ -23802,7 +23802,7 @@
           <p:cNvPr id="46" name="">
             <a:extLst xmlns:a="http://schemas.openxmlformats.org/drawingml/2006/main">
               <a:ext uri="{FF2B5EF4-FFF2-40B4-BE49-F238E27FC236}">
-                <a16:creationId xmlns:a16="http://schemas.microsoft.com/office/drawing/2014/main" id="{0EA3EBCF-5618-4604-BB92-8ECFF6677FA6}"/>
+                <a16:creationId xmlns:a16="http://schemas.microsoft.com/office/drawing/2014/main" id="{3D3D667E-59B7-4B95-B462-DDAF830D55F4}"/>
               </a:ext>
             </a:extLst>
           </p:cNvPr>
@@ -23854,7 +23854,7 @@
           <p:cNvPr id="47" name="">
             <a:extLst xmlns:a="http://schemas.openxmlformats.org/drawingml/2006/main">
               <a:ext uri="{FF2B5EF4-FFF2-40B4-BE49-F238E27FC236}">
-                <a16:creationId xmlns:a16="http://schemas.microsoft.com/office/drawing/2014/main" id="{E97EBBAA-001C-4399-A0B3-2FD27804D95B}"/>
+                <a16:creationId xmlns:a16="http://schemas.microsoft.com/office/drawing/2014/main" id="{BAC9B3AA-784F-44C1-84B5-A5204FFB9EA3}"/>
               </a:ext>
             </a:extLst>
           </p:cNvPr>
@@ -23906,7 +23906,7 @@
           <p:cNvPr id="48" name="">
             <a:extLst xmlns:a="http://schemas.openxmlformats.org/drawingml/2006/main">
               <a:ext uri="{FF2B5EF4-FFF2-40B4-BE49-F238E27FC236}">
-                <a16:creationId xmlns:a16="http://schemas.microsoft.com/office/drawing/2014/main" id="{AA70CC36-649B-47E1-860A-594EAE0A70F0}"/>
+                <a16:creationId xmlns:a16="http://schemas.microsoft.com/office/drawing/2014/main" id="{00EAC254-73B6-4DAC-9940-10A6D451AFF2}"/>
               </a:ext>
             </a:extLst>
           </p:cNvPr>
@@ -23958,7 +23958,7 @@
           <p:cNvPr id="49" name="">
             <a:extLst xmlns:a="http://schemas.openxmlformats.org/drawingml/2006/main">
               <a:ext uri="{FF2B5EF4-FFF2-40B4-BE49-F238E27FC236}">
-                <a16:creationId xmlns:a16="http://schemas.microsoft.com/office/drawing/2014/main" id="{AA1640DF-6CA9-4407-8FB1-5B7C6B686FD2}"/>
+                <a16:creationId xmlns:a16="http://schemas.microsoft.com/office/drawing/2014/main" id="{B795982B-AEE4-4F42-B41A-92FAE4CE07C8}"/>
               </a:ext>
             </a:extLst>
           </p:cNvPr>
@@ -23989,7 +23989,7 @@
           <p:cNvPr id="50" name="">
             <a:extLst xmlns:a="http://schemas.openxmlformats.org/drawingml/2006/main">
               <a:ext uri="{FF2B5EF4-FFF2-40B4-BE49-F238E27FC236}">
-                <a16:creationId xmlns:a16="http://schemas.microsoft.com/office/drawing/2014/main" id="{914F3BDD-F8BC-4707-B40E-FCAAEF6FC4DE}"/>
+                <a16:creationId xmlns:a16="http://schemas.microsoft.com/office/drawing/2014/main" id="{FCCC6A9C-B1D4-4BA9-928C-6BBA9898E020}"/>
               </a:ext>
             </a:extLst>
           </p:cNvPr>
@@ -24020,7 +24020,7 @@
           <p:cNvPr id="51" name="">
             <a:extLst xmlns:a="http://schemas.openxmlformats.org/drawingml/2006/main">
               <a:ext uri="{FF2B5EF4-FFF2-40B4-BE49-F238E27FC236}">
-                <a16:creationId xmlns:a16="http://schemas.microsoft.com/office/drawing/2014/main" id="{31193A8E-F8CB-44C9-8EB8-0B1C01B1BFAD}"/>
+                <a16:creationId xmlns:a16="http://schemas.microsoft.com/office/drawing/2014/main" id="{B99C5499-7728-4239-9D40-D330A6C6B7D4}"/>
               </a:ext>
             </a:extLst>
           </p:cNvPr>
@@ -24072,7 +24072,7 @@
           <p:cNvPr id="52" name="">
             <a:extLst xmlns:a="http://schemas.openxmlformats.org/drawingml/2006/main">
               <a:ext uri="{FF2B5EF4-FFF2-40B4-BE49-F238E27FC236}">
-                <a16:creationId xmlns:a16="http://schemas.microsoft.com/office/drawing/2014/main" id="{5E5F7535-167C-44DF-8A0B-442F38D2790B}"/>
+                <a16:creationId xmlns:a16="http://schemas.microsoft.com/office/drawing/2014/main" id="{C767FB7A-4992-4558-9947-120439A107BF}"/>
               </a:ext>
             </a:extLst>
           </p:cNvPr>
@@ -24124,7 +24124,7 @@
           <p:cNvPr id="53" name="">
             <a:extLst xmlns:a="http://schemas.openxmlformats.org/drawingml/2006/main">
               <a:ext uri="{FF2B5EF4-FFF2-40B4-BE49-F238E27FC236}">
-                <a16:creationId xmlns:a16="http://schemas.microsoft.com/office/drawing/2014/main" id="{EC6073F3-33D4-4571-8531-1E3144A75A11}"/>
+                <a16:creationId xmlns:a16="http://schemas.microsoft.com/office/drawing/2014/main" id="{7F95B53C-D5DA-433F-A9E6-D366B843A0D8}"/>
               </a:ext>
             </a:extLst>
           </p:cNvPr>
@@ -24176,7 +24176,7 @@
           <p:cNvPr id="54" name="">
             <a:extLst xmlns:a="http://schemas.openxmlformats.org/drawingml/2006/main">
               <a:ext uri="{FF2B5EF4-FFF2-40B4-BE49-F238E27FC236}">
-                <a16:creationId xmlns:a16="http://schemas.microsoft.com/office/drawing/2014/main" id="{FC2B7C7C-3570-4169-8748-2B05665CA4F1}"/>
+                <a16:creationId xmlns:a16="http://schemas.microsoft.com/office/drawing/2014/main" id="{3651D38F-5C4B-4BE3-8011-2FD8ADB34BC1}"/>
               </a:ext>
             </a:extLst>
           </p:cNvPr>
@@ -24228,7 +24228,7 @@
           <p:cNvPr id="55" name="">
             <a:extLst xmlns:a="http://schemas.openxmlformats.org/drawingml/2006/main">
               <a:ext uri="{FF2B5EF4-FFF2-40B4-BE49-F238E27FC236}">
-                <a16:creationId xmlns:a16="http://schemas.microsoft.com/office/drawing/2014/main" id="{2A4AC1F6-566C-436A-8716-618D2BAE6E4B}"/>
+                <a16:creationId xmlns:a16="http://schemas.microsoft.com/office/drawing/2014/main" id="{EC93E0BF-21DC-4152-9F63-3F098CE3E153}"/>
               </a:ext>
             </a:extLst>
           </p:cNvPr>
@@ -24280,7 +24280,7 @@
           <p:cNvPr id="56" name="">
             <a:extLst xmlns:a="http://schemas.openxmlformats.org/drawingml/2006/main">
               <a:ext uri="{FF2B5EF4-FFF2-40B4-BE49-F238E27FC236}">
-                <a16:creationId xmlns:a16="http://schemas.microsoft.com/office/drawing/2014/main" id="{450A8F62-8385-4EC2-85FF-B131B97095D6}"/>
+                <a16:creationId xmlns:a16="http://schemas.microsoft.com/office/drawing/2014/main" id="{01909BCD-BC2C-4389-A5B7-C86118C9A42E}"/>
               </a:ext>
             </a:extLst>
           </p:cNvPr>
@@ -24332,7 +24332,7 @@
           <p:cNvPr id="57" name="">
             <a:extLst xmlns:a="http://schemas.openxmlformats.org/drawingml/2006/main">
               <a:ext uri="{FF2B5EF4-FFF2-40B4-BE49-F238E27FC236}">
-                <a16:creationId xmlns:a16="http://schemas.microsoft.com/office/drawing/2014/main" id="{4162BA22-FE13-463D-AA18-659352A2C5B9}"/>
+                <a16:creationId xmlns:a16="http://schemas.microsoft.com/office/drawing/2014/main" id="{94B60A68-BE0A-4380-8EBB-C561DB70CB33}"/>
               </a:ext>
             </a:extLst>
           </p:cNvPr>
@@ -24384,7 +24384,7 @@
           <p:cNvPr id="58" name="">
             <a:extLst xmlns:a="http://schemas.openxmlformats.org/drawingml/2006/main">
               <a:ext uri="{FF2B5EF4-FFF2-40B4-BE49-F238E27FC236}">
-                <a16:creationId xmlns:a16="http://schemas.microsoft.com/office/drawing/2014/main" id="{9A83AC89-500B-4970-98C1-24787D2EFD97}"/>
+                <a16:creationId xmlns:a16="http://schemas.microsoft.com/office/drawing/2014/main" id="{62C6E398-2BF7-4CA7-B482-5B73ADC22D56}"/>
               </a:ext>
             </a:extLst>
           </p:cNvPr>
@@ -24436,7 +24436,7 @@
           <p:cNvPr id="59" name="">
             <a:extLst xmlns:a="http://schemas.openxmlformats.org/drawingml/2006/main">
               <a:ext uri="{FF2B5EF4-FFF2-40B4-BE49-F238E27FC236}">
-                <a16:creationId xmlns:a16="http://schemas.microsoft.com/office/drawing/2014/main" id="{8EF03DA0-C7F1-45B9-979E-D46C3A9A5E6F}"/>
+                <a16:creationId xmlns:a16="http://schemas.microsoft.com/office/drawing/2014/main" id="{B39C68A7-E2BA-4B54-B720-2CAE527FBA5D}"/>
               </a:ext>
             </a:extLst>
           </p:cNvPr>
@@ -24467,7 +24467,7 @@
           <p:cNvPr id="60" name="">
             <a:extLst xmlns:a="http://schemas.openxmlformats.org/drawingml/2006/main">
               <a:ext uri="{FF2B5EF4-FFF2-40B4-BE49-F238E27FC236}">
-                <a16:creationId xmlns:a16="http://schemas.microsoft.com/office/drawing/2014/main" id="{5F5FEA5C-D3A7-4C67-B60F-8F46CE9DC91A}"/>
+                <a16:creationId xmlns:a16="http://schemas.microsoft.com/office/drawing/2014/main" id="{58A515E8-F308-4F36-9747-639BEBEF3398}"/>
               </a:ext>
             </a:extLst>
           </p:cNvPr>
@@ -24519,7 +24519,7 @@
           <p:cNvPr id="61" name="">
             <a:extLst xmlns:a="http://schemas.openxmlformats.org/drawingml/2006/main">
               <a:ext uri="{FF2B5EF4-FFF2-40B4-BE49-F238E27FC236}">
-                <a16:creationId xmlns:a16="http://schemas.microsoft.com/office/drawing/2014/main" id="{765C0AA8-E34B-401D-9F29-D04089A01B62}"/>
+                <a16:creationId xmlns:a16="http://schemas.microsoft.com/office/drawing/2014/main" id="{84C2E4C6-6CE8-47A4-B6C3-CA2121EFC8A9}"/>
               </a:ext>
             </a:extLst>
           </p:cNvPr>
@@ -24571,7 +24571,7 @@
           <p:cNvPr id="62" name="">
             <a:extLst xmlns:a="http://schemas.openxmlformats.org/drawingml/2006/main">
               <a:ext uri="{FF2B5EF4-FFF2-40B4-BE49-F238E27FC236}">
-                <a16:creationId xmlns:a16="http://schemas.microsoft.com/office/drawing/2014/main" id="{DDB4E0F8-65D9-4D69-932D-2CF83AFED934}"/>
+                <a16:creationId xmlns:a16="http://schemas.microsoft.com/office/drawing/2014/main" id="{91F90FB9-F11D-495C-896F-9BB68B375477}"/>
               </a:ext>
             </a:extLst>
           </p:cNvPr>
@@ -24623,7 +24623,7 @@
           <p:cNvPr id="63" name="">
             <a:extLst xmlns:a="http://schemas.openxmlformats.org/drawingml/2006/main">
               <a:ext uri="{FF2B5EF4-FFF2-40B4-BE49-F238E27FC236}">
-                <a16:creationId xmlns:a16="http://schemas.microsoft.com/office/drawing/2014/main" id="{144C4344-A778-48EA-A358-7BB00CC1428A}"/>
+                <a16:creationId xmlns:a16="http://schemas.microsoft.com/office/drawing/2014/main" id="{03E72304-DF64-415B-A6A3-1DF28F7ABA4E}"/>
               </a:ext>
             </a:extLst>
           </p:cNvPr>
@@ -24675,7 +24675,7 @@
           <p:cNvPr id="64" name="">
             <a:extLst xmlns:a="http://schemas.openxmlformats.org/drawingml/2006/main">
               <a:ext uri="{FF2B5EF4-FFF2-40B4-BE49-F238E27FC236}">
-                <a16:creationId xmlns:a16="http://schemas.microsoft.com/office/drawing/2014/main" id="{BDED01E4-DFE3-490A-9518-8B094DF1995A}"/>
+                <a16:creationId xmlns:a16="http://schemas.microsoft.com/office/drawing/2014/main" id="{A5B5C9E6-0E4E-4055-8822-2B8BA1EEE37E}"/>
               </a:ext>
             </a:extLst>
           </p:cNvPr>
@@ -24727,7 +24727,7 @@
           <p:cNvPr id="65" name="">
             <a:extLst xmlns:a="http://schemas.openxmlformats.org/drawingml/2006/main">
               <a:ext uri="{FF2B5EF4-FFF2-40B4-BE49-F238E27FC236}">
-                <a16:creationId xmlns:a16="http://schemas.microsoft.com/office/drawing/2014/main" id="{6165792B-F9D2-48FA-8F85-5FB5A34DAC83}"/>
+                <a16:creationId xmlns:a16="http://schemas.microsoft.com/office/drawing/2014/main" id="{16947A8F-6134-435C-8CCC-34FF2AD47D69}"/>
               </a:ext>
             </a:extLst>
           </p:cNvPr>
@@ -24779,7 +24779,7 @@
           <p:cNvPr id="66" name="">
             <a:extLst xmlns:a="http://schemas.openxmlformats.org/drawingml/2006/main">
               <a:ext uri="{FF2B5EF4-FFF2-40B4-BE49-F238E27FC236}">
-                <a16:creationId xmlns:a16="http://schemas.microsoft.com/office/drawing/2014/main" id="{6FBDFC57-6309-4F75-8596-F09574626C95}"/>
+                <a16:creationId xmlns:a16="http://schemas.microsoft.com/office/drawing/2014/main" id="{52FFDBAB-410A-422A-8EA0-B0C90B370B07}"/>
               </a:ext>
             </a:extLst>
           </p:cNvPr>
@@ -24831,7 +24831,7 @@
           <p:cNvPr id="67" name="">
             <a:extLst xmlns:a="http://schemas.openxmlformats.org/drawingml/2006/main">
               <a:ext uri="{FF2B5EF4-FFF2-40B4-BE49-F238E27FC236}">
-                <a16:creationId xmlns:a16="http://schemas.microsoft.com/office/drawing/2014/main" id="{5D406A17-C4D8-44CE-A3DE-CE0011CD1C7E}"/>
+                <a16:creationId xmlns:a16="http://schemas.microsoft.com/office/drawing/2014/main" id="{D4C94B9A-48A2-4476-B794-0F92F3A0AF77}"/>
               </a:ext>
             </a:extLst>
           </p:cNvPr>
@@ -24883,7 +24883,7 @@
           <p:cNvPr id="68" name="">
             <a:extLst xmlns:a="http://schemas.openxmlformats.org/drawingml/2006/main">
               <a:ext uri="{FF2B5EF4-FFF2-40B4-BE49-F238E27FC236}">
-                <a16:creationId xmlns:a16="http://schemas.microsoft.com/office/drawing/2014/main" id="{CCB02A14-E315-4A85-AC16-7C69EF95CB0D}"/>
+                <a16:creationId xmlns:a16="http://schemas.microsoft.com/office/drawing/2014/main" id="{6921E6FE-58A6-4B99-8398-546BD22A1F17}"/>
               </a:ext>
             </a:extLst>
           </p:cNvPr>
@@ -24914,7 +24914,7 @@
           <p:cNvPr id="69" name="">
             <a:extLst xmlns:a="http://schemas.openxmlformats.org/drawingml/2006/main">
               <a:ext uri="{FF2B5EF4-FFF2-40B4-BE49-F238E27FC236}">
-                <a16:creationId xmlns:a16="http://schemas.microsoft.com/office/drawing/2014/main" id="{25C83194-7182-490E-9149-53AF81E36496}"/>
+                <a16:creationId xmlns:a16="http://schemas.microsoft.com/office/drawing/2014/main" id="{AB18085C-7157-472D-8E1F-7F01FA7A9A46}"/>
               </a:ext>
             </a:extLst>
           </p:cNvPr>
@@ -24945,7 +24945,7 @@
           <p:cNvPr id="70" name="">
             <a:extLst xmlns:a="http://schemas.openxmlformats.org/drawingml/2006/main">
               <a:ext uri="{FF2B5EF4-FFF2-40B4-BE49-F238E27FC236}">
-                <a16:creationId xmlns:a16="http://schemas.microsoft.com/office/drawing/2014/main" id="{19E7E245-5BEB-431B-BD1A-DE2A486FA98B}"/>
+                <a16:creationId xmlns:a16="http://schemas.microsoft.com/office/drawing/2014/main" id="{9A2D0B98-5C0A-408E-95BD-2DB28B6A194C}"/>
               </a:ext>
             </a:extLst>
           </p:cNvPr>
@@ -24997,7 +24997,7 @@
           <p:cNvPr id="71" name="">
             <a:extLst xmlns:a="http://schemas.openxmlformats.org/drawingml/2006/main">
               <a:ext uri="{FF2B5EF4-FFF2-40B4-BE49-F238E27FC236}">
-                <a16:creationId xmlns:a16="http://schemas.microsoft.com/office/drawing/2014/main" id="{06671B7C-CE08-42FE-8E9D-B0A80C0699C5}"/>
+                <a16:creationId xmlns:a16="http://schemas.microsoft.com/office/drawing/2014/main" id="{1769424D-7FB5-4684-A95F-DDECC78645A1}"/>
               </a:ext>
             </a:extLst>
           </p:cNvPr>
@@ -25049,7 +25049,7 @@
           <p:cNvPr id="72" name="">
             <a:extLst xmlns:a="http://schemas.openxmlformats.org/drawingml/2006/main">
               <a:ext uri="{FF2B5EF4-FFF2-40B4-BE49-F238E27FC236}">
-                <a16:creationId xmlns:a16="http://schemas.microsoft.com/office/drawing/2014/main" id="{9515D370-EEE1-4FE0-B544-E33568CBBD17}"/>
+                <a16:creationId xmlns:a16="http://schemas.microsoft.com/office/drawing/2014/main" id="{01C274C3-2B43-41F7-8EB4-C07E2E336343}"/>
               </a:ext>
             </a:extLst>
           </p:cNvPr>
@@ -25101,7 +25101,7 @@
           <p:cNvPr id="73" name="">
             <a:extLst xmlns:a="http://schemas.openxmlformats.org/drawingml/2006/main">
               <a:ext uri="{FF2B5EF4-FFF2-40B4-BE49-F238E27FC236}">
-                <a16:creationId xmlns:a16="http://schemas.microsoft.com/office/drawing/2014/main" id="{ECFB2C8D-49DF-42D7-A56B-9D800B51D267}"/>
+                <a16:creationId xmlns:a16="http://schemas.microsoft.com/office/drawing/2014/main" id="{DF528CC8-D30A-403A-AA49-093F133E7313}"/>
               </a:ext>
             </a:extLst>
           </p:cNvPr>
@@ -25153,7 +25153,7 @@
           <p:cNvPr id="74" name="">
             <a:extLst xmlns:a="http://schemas.openxmlformats.org/drawingml/2006/main">
               <a:ext uri="{FF2B5EF4-FFF2-40B4-BE49-F238E27FC236}">
-                <a16:creationId xmlns:a16="http://schemas.microsoft.com/office/drawing/2014/main" id="{833905D3-E15F-4F66-9B70-D2C533F6CC1A}"/>
+                <a16:creationId xmlns:a16="http://schemas.microsoft.com/office/drawing/2014/main" id="{730D284E-C9EA-4158-919F-F70954EC85D0}"/>
               </a:ext>
             </a:extLst>
           </p:cNvPr>
@@ -25205,7 +25205,7 @@
           <p:cNvPr id="75" name="">
             <a:extLst xmlns:a="http://schemas.openxmlformats.org/drawingml/2006/main">
               <a:ext uri="{FF2B5EF4-FFF2-40B4-BE49-F238E27FC236}">
-                <a16:creationId xmlns:a16="http://schemas.microsoft.com/office/drawing/2014/main" id="{862C3B6B-3F8C-45B1-9703-367A44DF4135}"/>
+                <a16:creationId xmlns:a16="http://schemas.microsoft.com/office/drawing/2014/main" id="{4AEEF4CC-2486-42A9-8F30-22CE9154B4CD}"/>
               </a:ext>
             </a:extLst>
           </p:cNvPr>
@@ -25257,7 +25257,7 @@
           <p:cNvPr id="76" name="">
             <a:extLst xmlns:a="http://schemas.openxmlformats.org/drawingml/2006/main">
               <a:ext uri="{FF2B5EF4-FFF2-40B4-BE49-F238E27FC236}">
-                <a16:creationId xmlns:a16="http://schemas.microsoft.com/office/drawing/2014/main" id="{12E4D259-1D48-453A-B144-50468F3DD493}"/>
+                <a16:creationId xmlns:a16="http://schemas.microsoft.com/office/drawing/2014/main" id="{E83CEFDC-71C5-4E7F-A31D-4B1227067965}"/>
               </a:ext>
             </a:extLst>
           </p:cNvPr>
@@ -25309,7 +25309,7 @@
           <p:cNvPr id="77" name="">
             <a:extLst xmlns:a="http://schemas.openxmlformats.org/drawingml/2006/main">
               <a:ext uri="{FF2B5EF4-FFF2-40B4-BE49-F238E27FC236}">
-                <a16:creationId xmlns:a16="http://schemas.microsoft.com/office/drawing/2014/main" id="{FF462EF9-10EB-438D-A947-F834A19D5FDB}"/>
+                <a16:creationId xmlns:a16="http://schemas.microsoft.com/office/drawing/2014/main" id="{569379DB-4316-4778-8483-6DCAA7101AB5}"/>
               </a:ext>
             </a:extLst>
           </p:cNvPr>
@@ -25361,7 +25361,7 @@
           <p:cNvPr id="78" name="">
             <a:extLst xmlns:a="http://schemas.openxmlformats.org/drawingml/2006/main">
               <a:ext uri="{FF2B5EF4-FFF2-40B4-BE49-F238E27FC236}">
-                <a16:creationId xmlns:a16="http://schemas.microsoft.com/office/drawing/2014/main" id="{CC39EB61-47E6-43B8-AB63-83379AC26DAA}"/>
+                <a16:creationId xmlns:a16="http://schemas.microsoft.com/office/drawing/2014/main" id="{EB2DDADE-8733-4BB3-9106-CE8D4B2824A7}"/>
               </a:ext>
             </a:extLst>
           </p:cNvPr>
@@ -25392,7 +25392,7 @@
           <p:cNvPr id="79" name="">
             <a:extLst xmlns:a="http://schemas.openxmlformats.org/drawingml/2006/main">
               <a:ext uri="{FF2B5EF4-FFF2-40B4-BE49-F238E27FC236}">
-                <a16:creationId xmlns:a16="http://schemas.microsoft.com/office/drawing/2014/main" id="{9A8F5BCB-6920-434B-A21A-90E251A50645}"/>
+                <a16:creationId xmlns:a16="http://schemas.microsoft.com/office/drawing/2014/main" id="{41E635FF-1F98-43FA-B966-D4773087BD87}"/>
               </a:ext>
             </a:extLst>
           </p:cNvPr>
@@ -25444,7 +25444,7 @@
           <p:cNvPr id="80" name="">
             <a:extLst xmlns:a="http://schemas.openxmlformats.org/drawingml/2006/main">
               <a:ext uri="{FF2B5EF4-FFF2-40B4-BE49-F238E27FC236}">
-                <a16:creationId xmlns:a16="http://schemas.microsoft.com/office/drawing/2014/main" id="{ACE402BD-FA5A-4885-963A-D3AEB8881B5A}"/>
+                <a16:creationId xmlns:a16="http://schemas.microsoft.com/office/drawing/2014/main" id="{E8177091-4E93-4FC4-B7B8-8250032481F1}"/>
               </a:ext>
             </a:extLst>
           </p:cNvPr>
@@ -25496,7 +25496,7 @@
           <p:cNvPr id="81" name="">
             <a:extLst xmlns:a="http://schemas.openxmlformats.org/drawingml/2006/main">
               <a:ext uri="{FF2B5EF4-FFF2-40B4-BE49-F238E27FC236}">
-                <a16:creationId xmlns:a16="http://schemas.microsoft.com/office/drawing/2014/main" id="{A5FB6250-882C-41FD-8F20-D83CCFF33FAA}"/>
+                <a16:creationId xmlns:a16="http://schemas.microsoft.com/office/drawing/2014/main" id="{B8EA01A2-80DC-4653-8382-798492532B19}"/>
               </a:ext>
             </a:extLst>
           </p:cNvPr>
@@ -25548,7 +25548,7 @@
           <p:cNvPr id="82" name="">
             <a:extLst xmlns:a="http://schemas.openxmlformats.org/drawingml/2006/main">
               <a:ext uri="{FF2B5EF4-FFF2-40B4-BE49-F238E27FC236}">
-                <a16:creationId xmlns:a16="http://schemas.microsoft.com/office/drawing/2014/main" id="{4095D18B-1E9D-4653-8A95-9B6364919411}"/>
+                <a16:creationId xmlns:a16="http://schemas.microsoft.com/office/drawing/2014/main" id="{DF8CC549-5E38-4DEE-98CE-EE9B33173AFF}"/>
               </a:ext>
             </a:extLst>
           </p:cNvPr>
@@ -25600,7 +25600,7 @@
           <p:cNvPr id="83" name="">
             <a:extLst xmlns:a="http://schemas.openxmlformats.org/drawingml/2006/main">
               <a:ext uri="{FF2B5EF4-FFF2-40B4-BE49-F238E27FC236}">
-                <a16:creationId xmlns:a16="http://schemas.microsoft.com/office/drawing/2014/main" id="{E7F5EFA5-3F8A-4762-AF14-0444287D77FD}"/>
+                <a16:creationId xmlns:a16="http://schemas.microsoft.com/office/drawing/2014/main" id="{1B1FAED3-A71B-49FA-9AC5-AAA954C70D8A}"/>
               </a:ext>
             </a:extLst>
           </p:cNvPr>
@@ -25652,7 +25652,7 @@
           <p:cNvPr id="84" name="">
             <a:extLst xmlns:a="http://schemas.openxmlformats.org/drawingml/2006/main">
               <a:ext uri="{FF2B5EF4-FFF2-40B4-BE49-F238E27FC236}">
-                <a16:creationId xmlns:a16="http://schemas.microsoft.com/office/drawing/2014/main" id="{314B4D81-DD18-4B34-BDDC-1D19A8CAB4DC}"/>
+                <a16:creationId xmlns:a16="http://schemas.microsoft.com/office/drawing/2014/main" id="{327ADAA9-47A4-4B9C-BA97-2A9BAF8D6F10}"/>
               </a:ext>
             </a:extLst>
           </p:cNvPr>
@@ -25704,7 +25704,7 @@
           <p:cNvPr id="85" name="">
             <a:extLst xmlns:a="http://schemas.openxmlformats.org/drawingml/2006/main">
               <a:ext uri="{FF2B5EF4-FFF2-40B4-BE49-F238E27FC236}">
-                <a16:creationId xmlns:a16="http://schemas.microsoft.com/office/drawing/2014/main" id="{30C0183C-0E44-4CA1-9EAA-12DB65CA9718}"/>
+                <a16:creationId xmlns:a16="http://schemas.microsoft.com/office/drawing/2014/main" id="{8C801F75-2E20-47CC-BB5B-93E5C2DC6592}"/>
               </a:ext>
             </a:extLst>
           </p:cNvPr>
@@ -25756,7 +25756,7 @@
           <p:cNvPr id="86" name="">
             <a:extLst xmlns:a="http://schemas.openxmlformats.org/drawingml/2006/main">
               <a:ext uri="{FF2B5EF4-FFF2-40B4-BE49-F238E27FC236}">
-                <a16:creationId xmlns:a16="http://schemas.microsoft.com/office/drawing/2014/main" id="{D91A69CD-DD98-4036-849B-89EBAB20649C}"/>
+                <a16:creationId xmlns:a16="http://schemas.microsoft.com/office/drawing/2014/main" id="{C9370F76-7F88-473F-804D-3E269B30BAD8}"/>
               </a:ext>
             </a:extLst>
           </p:cNvPr>
@@ -25808,7 +25808,7 @@
           <p:cNvPr id="87" name="">
             <a:extLst xmlns:a="http://schemas.openxmlformats.org/drawingml/2006/main">
               <a:ext uri="{FF2B5EF4-FFF2-40B4-BE49-F238E27FC236}">
-                <a16:creationId xmlns:a16="http://schemas.microsoft.com/office/drawing/2014/main" id="{91881CBE-1E19-4104-B90D-D7C745DCB389}"/>
+                <a16:creationId xmlns:a16="http://schemas.microsoft.com/office/drawing/2014/main" id="{FE5D04FB-6681-486A-AD66-F5F73D4D4DB3}"/>
               </a:ext>
             </a:extLst>
           </p:cNvPr>
@@ -25839,7 +25839,7 @@
           <p:cNvPr id="88" name="">
             <a:extLst xmlns:a="http://schemas.openxmlformats.org/drawingml/2006/main">
               <a:ext uri="{FF2B5EF4-FFF2-40B4-BE49-F238E27FC236}">
-                <a16:creationId xmlns:a16="http://schemas.microsoft.com/office/drawing/2014/main" id="{3467298D-FF89-4713-BD41-0302ACAEB4E8}"/>
+                <a16:creationId xmlns:a16="http://schemas.microsoft.com/office/drawing/2014/main" id="{2C912394-AB66-43D6-B9F4-DF14D0AB5D14}"/>
               </a:ext>
             </a:extLst>
           </p:cNvPr>
@@ -25870,7 +25870,7 @@
           <p:cNvPr id="89" name="">
             <a:extLst xmlns:a="http://schemas.openxmlformats.org/drawingml/2006/main">
               <a:ext uri="{FF2B5EF4-FFF2-40B4-BE49-F238E27FC236}">
-                <a16:creationId xmlns:a16="http://schemas.microsoft.com/office/drawing/2014/main" id="{69DA0A41-A7A3-4D55-B7CF-AF28D6EE3E5B}"/>
+                <a16:creationId xmlns:a16="http://schemas.microsoft.com/office/drawing/2014/main" id="{B917E780-4E2C-443A-B399-215ADDD6E6AA}"/>
               </a:ext>
             </a:extLst>
           </p:cNvPr>
@@ -25922,7 +25922,7 @@
           <p:cNvPr id="90" name="">
             <a:extLst xmlns:a="http://schemas.openxmlformats.org/drawingml/2006/main">
               <a:ext uri="{FF2B5EF4-FFF2-40B4-BE49-F238E27FC236}">
-                <a16:creationId xmlns:a16="http://schemas.microsoft.com/office/drawing/2014/main" id="{B5EDABE4-1BF1-4AE3-9990-036793D96627}"/>
+                <a16:creationId xmlns:a16="http://schemas.microsoft.com/office/drawing/2014/main" id="{D0441211-F5DC-48BF-8D6D-AE64EBAD22CD}"/>
               </a:ext>
             </a:extLst>
           </p:cNvPr>
@@ -25974,7 +25974,7 @@
           <p:cNvPr id="91" name="">
             <a:extLst xmlns:a="http://schemas.openxmlformats.org/drawingml/2006/main">
               <a:ext uri="{FF2B5EF4-FFF2-40B4-BE49-F238E27FC236}">
-                <a16:creationId xmlns:a16="http://schemas.microsoft.com/office/drawing/2014/main" id="{4C044254-A0EB-43D5-8784-49902D586DDE}"/>
+                <a16:creationId xmlns:a16="http://schemas.microsoft.com/office/drawing/2014/main" id="{D001CF38-A9BD-4B7B-BBA8-178EBA072DD4}"/>
               </a:ext>
             </a:extLst>
           </p:cNvPr>
@@ -26026,7 +26026,7 @@
           <p:cNvPr id="92" name="">
             <a:extLst xmlns:a="http://schemas.openxmlformats.org/drawingml/2006/main">
               <a:ext uri="{FF2B5EF4-FFF2-40B4-BE49-F238E27FC236}">
-                <a16:creationId xmlns:a16="http://schemas.microsoft.com/office/drawing/2014/main" id="{17D93CA1-ED13-430F-9BB7-4C2DAA835EF5}"/>
+                <a16:creationId xmlns:a16="http://schemas.microsoft.com/office/drawing/2014/main" id="{5AD60B43-F08E-4DA5-8343-781785318106}"/>
               </a:ext>
             </a:extLst>
           </p:cNvPr>
@@ -26078,7 +26078,7 @@
           <p:cNvPr id="93" name="">
             <a:extLst xmlns:a="http://schemas.openxmlformats.org/drawingml/2006/main">
               <a:ext uri="{FF2B5EF4-FFF2-40B4-BE49-F238E27FC236}">
-                <a16:creationId xmlns:a16="http://schemas.microsoft.com/office/drawing/2014/main" id="{B40BAD0C-B41D-44EF-8EBF-067E222AEBEB}"/>
+                <a16:creationId xmlns:a16="http://schemas.microsoft.com/office/drawing/2014/main" id="{81F41176-6E63-4A2E-8847-0AE6F3C0DF9F}"/>
               </a:ext>
             </a:extLst>
           </p:cNvPr>
@@ -26130,7 +26130,7 @@
           <p:cNvPr id="94" name="">
             <a:extLst xmlns:a="http://schemas.openxmlformats.org/drawingml/2006/main">
               <a:ext uri="{FF2B5EF4-FFF2-40B4-BE49-F238E27FC236}">
-                <a16:creationId xmlns:a16="http://schemas.microsoft.com/office/drawing/2014/main" id="{CB25E3A8-C792-4F2E-821A-3C8B2B839866}"/>
+                <a16:creationId xmlns:a16="http://schemas.microsoft.com/office/drawing/2014/main" id="{78B0E34A-6F42-437D-8674-D41CFF05266B}"/>
               </a:ext>
             </a:extLst>
           </p:cNvPr>
@@ -26182,7 +26182,7 @@
           <p:cNvPr id="95" name="">
             <a:extLst xmlns:a="http://schemas.openxmlformats.org/drawingml/2006/main">
               <a:ext uri="{FF2B5EF4-FFF2-40B4-BE49-F238E27FC236}">
-                <a16:creationId xmlns:a16="http://schemas.microsoft.com/office/drawing/2014/main" id="{BEA5E651-CF8A-4BDF-9EEB-1B82652B0288}"/>
+                <a16:creationId xmlns:a16="http://schemas.microsoft.com/office/drawing/2014/main" id="{2A4108D5-B2C9-42BB-8159-A0F59A740E91}"/>
               </a:ext>
             </a:extLst>
           </p:cNvPr>
@@ -26234,7 +26234,7 @@
           <p:cNvPr id="96" name="">
             <a:extLst xmlns:a="http://schemas.openxmlformats.org/drawingml/2006/main">
               <a:ext uri="{FF2B5EF4-FFF2-40B4-BE49-F238E27FC236}">
-                <a16:creationId xmlns:a16="http://schemas.microsoft.com/office/drawing/2014/main" id="{C1DD51A2-C476-4A3B-8568-D3FD582592C2}"/>
+                <a16:creationId xmlns:a16="http://schemas.microsoft.com/office/drawing/2014/main" id="{8EECCD11-0B73-4E2E-A689-94C74455411F}"/>
               </a:ext>
             </a:extLst>
           </p:cNvPr>
@@ -26286,7 +26286,7 @@
           <p:cNvPr id="97" name="">
             <a:extLst xmlns:a="http://schemas.openxmlformats.org/drawingml/2006/main">
               <a:ext uri="{FF2B5EF4-FFF2-40B4-BE49-F238E27FC236}">
-                <a16:creationId xmlns:a16="http://schemas.microsoft.com/office/drawing/2014/main" id="{890D1D8C-9BCB-4816-8360-144300EC2D40}"/>
+                <a16:creationId xmlns:a16="http://schemas.microsoft.com/office/drawing/2014/main" id="{61E47816-3412-4FC1-9E80-5B1F045AC2AB}"/>
               </a:ext>
             </a:extLst>
           </p:cNvPr>
@@ -26317,7 +26317,7 @@
           <p:cNvPr id="98" name="">
             <a:extLst xmlns:a="http://schemas.openxmlformats.org/drawingml/2006/main">
               <a:ext uri="{FF2B5EF4-FFF2-40B4-BE49-F238E27FC236}">
-                <a16:creationId xmlns:a16="http://schemas.microsoft.com/office/drawing/2014/main" id="{5A0FBAC6-A69F-441D-B579-D0DE8E59EA01}"/>
+                <a16:creationId xmlns:a16="http://schemas.microsoft.com/office/drawing/2014/main" id="{52B12AFE-F967-4CFB-A70C-94A5E013BD0D}"/>
               </a:ext>
             </a:extLst>
           </p:cNvPr>
@@ -26369,7 +26369,7 @@
           <p:cNvPr id="99" name="">
             <a:extLst xmlns:a="http://schemas.openxmlformats.org/drawingml/2006/main">
               <a:ext uri="{FF2B5EF4-FFF2-40B4-BE49-F238E27FC236}">
-                <a16:creationId xmlns:a16="http://schemas.microsoft.com/office/drawing/2014/main" id="{2AA14B90-89A8-4702-BE40-4F660B554159}"/>
+                <a16:creationId xmlns:a16="http://schemas.microsoft.com/office/drawing/2014/main" id="{F7F4AA60-E760-4CA4-8D91-F32F285C49D2}"/>
               </a:ext>
             </a:extLst>
           </p:cNvPr>
@@ -26421,7 +26421,7 @@
           <p:cNvPr id="100" name="">
             <a:extLst xmlns:a="http://schemas.openxmlformats.org/drawingml/2006/main">
               <a:ext uri="{FF2B5EF4-FFF2-40B4-BE49-F238E27FC236}">
-                <a16:creationId xmlns:a16="http://schemas.microsoft.com/office/drawing/2014/main" id="{D843FC70-7F6B-4814-9A35-A99B8EF268DC}"/>
+                <a16:creationId xmlns:a16="http://schemas.microsoft.com/office/drawing/2014/main" id="{C111D31E-9769-48CB-8F99-991BE13D250C}"/>
               </a:ext>
             </a:extLst>
           </p:cNvPr>
@@ -26473,7 +26473,7 @@
           <p:cNvPr id="101" name="">
             <a:extLst xmlns:a="http://schemas.openxmlformats.org/drawingml/2006/main">
               <a:ext uri="{FF2B5EF4-FFF2-40B4-BE49-F238E27FC236}">
-                <a16:creationId xmlns:a16="http://schemas.microsoft.com/office/drawing/2014/main" id="{ECEECD6C-1011-43D2-BD45-A97E6A6BDE2E}"/>
+                <a16:creationId xmlns:a16="http://schemas.microsoft.com/office/drawing/2014/main" id="{47CD1D6A-A6EF-42CE-904A-E1DEB97EED75}"/>
               </a:ext>
             </a:extLst>
           </p:cNvPr>
@@ -26525,7 +26525,7 @@
           <p:cNvPr id="102" name="">
             <a:extLst xmlns:a="http://schemas.openxmlformats.org/drawingml/2006/main">
               <a:ext uri="{FF2B5EF4-FFF2-40B4-BE49-F238E27FC236}">
-                <a16:creationId xmlns:a16="http://schemas.microsoft.com/office/drawing/2014/main" id="{DCDF48A4-E54F-4B21-A413-BC8764CC1175}"/>
+                <a16:creationId xmlns:a16="http://schemas.microsoft.com/office/drawing/2014/main" id="{50FD10A9-9F67-4293-ADF7-74C2D49E5867}"/>
               </a:ext>
             </a:extLst>
           </p:cNvPr>
@@ -26577,7 +26577,7 @@
           <p:cNvPr id="103" name="">
             <a:extLst xmlns:a="http://schemas.openxmlformats.org/drawingml/2006/main">
               <a:ext uri="{FF2B5EF4-FFF2-40B4-BE49-F238E27FC236}">
-                <a16:creationId xmlns:a16="http://schemas.microsoft.com/office/drawing/2014/main" id="{D9F5209A-9156-4265-B346-6FAF5E79A38C}"/>
+                <a16:creationId xmlns:a16="http://schemas.microsoft.com/office/drawing/2014/main" id="{76B57D34-07F0-4465-A120-8DF7125648E0}"/>
               </a:ext>
             </a:extLst>
           </p:cNvPr>
@@ -26629,7 +26629,7 @@
           <p:cNvPr id="104" name="">
             <a:extLst xmlns:a="http://schemas.openxmlformats.org/drawingml/2006/main">
               <a:ext uri="{FF2B5EF4-FFF2-40B4-BE49-F238E27FC236}">
-                <a16:creationId xmlns:a16="http://schemas.microsoft.com/office/drawing/2014/main" id="{C30255CD-6DDD-47B6-B44A-2809C76B994A}"/>
+                <a16:creationId xmlns:a16="http://schemas.microsoft.com/office/drawing/2014/main" id="{AB2E23DB-080B-4071-84A7-E6E54964298F}"/>
               </a:ext>
             </a:extLst>
           </p:cNvPr>
@@ -26681,7 +26681,7 @@
           <p:cNvPr id="105" name="">
             <a:extLst xmlns:a="http://schemas.openxmlformats.org/drawingml/2006/main">
               <a:ext uri="{FF2B5EF4-FFF2-40B4-BE49-F238E27FC236}">
-                <a16:creationId xmlns:a16="http://schemas.microsoft.com/office/drawing/2014/main" id="{0BCBD552-EF3B-4838-83E5-6EA344751E14}"/>
+                <a16:creationId xmlns:a16="http://schemas.microsoft.com/office/drawing/2014/main" id="{3F8844EF-BC18-4FB5-9B81-D55ACC284448}"/>
               </a:ext>
             </a:extLst>
           </p:cNvPr>
@@ -26733,7 +26733,7 @@
           <p:cNvPr id="106" name="">
             <a:extLst xmlns:a="http://schemas.openxmlformats.org/drawingml/2006/main">
               <a:ext uri="{FF2B5EF4-FFF2-40B4-BE49-F238E27FC236}">
-                <a16:creationId xmlns:a16="http://schemas.microsoft.com/office/drawing/2014/main" id="{3A903107-526A-4A04-A37E-0ED1A0CE058D}"/>
+                <a16:creationId xmlns:a16="http://schemas.microsoft.com/office/drawing/2014/main" id="{121EBBFF-6358-4AA0-A34F-24E645857E1E}"/>
               </a:ext>
             </a:extLst>
           </p:cNvPr>
@@ -26764,7 +26764,7 @@
           <p:cNvPr id="107" name="">
             <a:extLst xmlns:a="http://schemas.openxmlformats.org/drawingml/2006/main">
               <a:ext uri="{FF2B5EF4-FFF2-40B4-BE49-F238E27FC236}">
-                <a16:creationId xmlns:a16="http://schemas.microsoft.com/office/drawing/2014/main" id="{DDE924BF-3873-4E6E-B116-17207C298B8A}"/>
+                <a16:creationId xmlns:a16="http://schemas.microsoft.com/office/drawing/2014/main" id="{51D8DCFC-1F6D-419D-8774-420CCC9904D9}"/>
               </a:ext>
             </a:extLst>
           </p:cNvPr>
@@ -26795,7 +26795,7 @@
           <p:cNvPr id="108" name="">
             <a:extLst xmlns:a="http://schemas.openxmlformats.org/drawingml/2006/main">
               <a:ext uri="{FF2B5EF4-FFF2-40B4-BE49-F238E27FC236}">
-                <a16:creationId xmlns:a16="http://schemas.microsoft.com/office/drawing/2014/main" id="{0A09B60F-AA08-4680-BD4C-B0F2BE051F48}"/>
+                <a16:creationId xmlns:a16="http://schemas.microsoft.com/office/drawing/2014/main" id="{A70FD200-8C18-42BE-A1FA-202C00CBFABC}"/>
               </a:ext>
             </a:extLst>
           </p:cNvPr>
@@ -26847,7 +26847,7 @@
           <p:cNvPr id="109" name="">
             <a:extLst xmlns:a="http://schemas.openxmlformats.org/drawingml/2006/main">
               <a:ext uri="{FF2B5EF4-FFF2-40B4-BE49-F238E27FC236}">
-                <a16:creationId xmlns:a16="http://schemas.microsoft.com/office/drawing/2014/main" id="{A7EB6DC9-F475-49CF-894B-8C8276B26398}"/>
+                <a16:creationId xmlns:a16="http://schemas.microsoft.com/office/drawing/2014/main" id="{18AE6FF9-F2C3-470F-A389-7A0E49D31628}"/>
               </a:ext>
             </a:extLst>
           </p:cNvPr>
@@ -26899,7 +26899,7 @@
           <p:cNvPr id="110" name="">
             <a:extLst xmlns:a="http://schemas.openxmlformats.org/drawingml/2006/main">
               <a:ext uri="{FF2B5EF4-FFF2-40B4-BE49-F238E27FC236}">
-                <a16:creationId xmlns:a16="http://schemas.microsoft.com/office/drawing/2014/main" id="{42D025FE-3E42-406E-AF99-A5935E973271}"/>
+                <a16:creationId xmlns:a16="http://schemas.microsoft.com/office/drawing/2014/main" id="{6C0164EC-7EF2-4A5E-8031-E5666F2D26BC}"/>
               </a:ext>
             </a:extLst>
           </p:cNvPr>
@@ -26951,7 +26951,7 @@
           <p:cNvPr id="111" name="">
             <a:extLst xmlns:a="http://schemas.openxmlformats.org/drawingml/2006/main">
               <a:ext uri="{FF2B5EF4-FFF2-40B4-BE49-F238E27FC236}">
-                <a16:creationId xmlns:a16="http://schemas.microsoft.com/office/drawing/2014/main" id="{69CA23DD-21CA-4561-B3F1-960ABC200536}"/>
+                <a16:creationId xmlns:a16="http://schemas.microsoft.com/office/drawing/2014/main" id="{2D4F0D3F-6ECC-429F-8430-CEF6F4822433}"/>
               </a:ext>
             </a:extLst>
           </p:cNvPr>
@@ -27003,7 +27003,7 @@
           <p:cNvPr id="112" name="">
             <a:extLst xmlns:a="http://schemas.openxmlformats.org/drawingml/2006/main">
               <a:ext uri="{FF2B5EF4-FFF2-40B4-BE49-F238E27FC236}">
-                <a16:creationId xmlns:a16="http://schemas.microsoft.com/office/drawing/2014/main" id="{3B59E392-121F-45EB-96AF-9FE351DC4629}"/>
+                <a16:creationId xmlns:a16="http://schemas.microsoft.com/office/drawing/2014/main" id="{00F7A6E8-D374-4C50-8920-72F8FCD23C88}"/>
               </a:ext>
             </a:extLst>
           </p:cNvPr>
@@ -27055,7 +27055,7 @@
           <p:cNvPr id="113" name="">
             <a:extLst xmlns:a="http://schemas.openxmlformats.org/drawingml/2006/main">
               <a:ext uri="{FF2B5EF4-FFF2-40B4-BE49-F238E27FC236}">
-                <a16:creationId xmlns:a16="http://schemas.microsoft.com/office/drawing/2014/main" id="{8170B106-D3E2-49ED-8119-0B99AFEE55DA}"/>
+                <a16:creationId xmlns:a16="http://schemas.microsoft.com/office/drawing/2014/main" id="{1A136B4C-ED3D-4808-A6BF-104FD1FB9118}"/>
               </a:ext>
             </a:extLst>
           </p:cNvPr>
@@ -27107,7 +27107,7 @@
           <p:cNvPr id="114" name="">
             <a:extLst xmlns:a="http://schemas.openxmlformats.org/drawingml/2006/main">
               <a:ext uri="{FF2B5EF4-FFF2-40B4-BE49-F238E27FC236}">
-                <a16:creationId xmlns:a16="http://schemas.microsoft.com/office/drawing/2014/main" id="{E7E5C264-F272-415B-8615-258387C4D2C6}"/>
+                <a16:creationId xmlns:a16="http://schemas.microsoft.com/office/drawing/2014/main" id="{DD285374-F0F0-496B-AF56-BAA5F1C97F78}"/>
               </a:ext>
             </a:extLst>
           </p:cNvPr>
@@ -27159,7 +27159,7 @@
           <p:cNvPr id="115" name="">
             <a:extLst xmlns:a="http://schemas.openxmlformats.org/drawingml/2006/main">
               <a:ext uri="{FF2B5EF4-FFF2-40B4-BE49-F238E27FC236}">
-                <a16:creationId xmlns:a16="http://schemas.microsoft.com/office/drawing/2014/main" id="{094C2578-7597-49DB-931F-8C3F48F351D9}"/>
+                <a16:creationId xmlns:a16="http://schemas.microsoft.com/office/drawing/2014/main" id="{35176D06-61F5-442B-BCBA-5792DDCF4951}"/>
               </a:ext>
             </a:extLst>
           </p:cNvPr>
@@ -27211,7 +27211,7 @@
           <p:cNvPr id="116" name="">
             <a:extLst xmlns:a="http://schemas.openxmlformats.org/drawingml/2006/main">
               <a:ext uri="{FF2B5EF4-FFF2-40B4-BE49-F238E27FC236}">
-                <a16:creationId xmlns:a16="http://schemas.microsoft.com/office/drawing/2014/main" id="{B19EFBE7-C14E-4D48-A421-581BA0D07CE9}"/>
+                <a16:creationId xmlns:a16="http://schemas.microsoft.com/office/drawing/2014/main" id="{057ACDB1-2C3F-4E21-B88F-8B7F1DAC529F}"/>
               </a:ext>
             </a:extLst>
           </p:cNvPr>
@@ -27242,7 +27242,7 @@
           <p:cNvPr id="117" name="">
             <a:extLst xmlns:a="http://schemas.openxmlformats.org/drawingml/2006/main">
               <a:ext uri="{FF2B5EF4-FFF2-40B4-BE49-F238E27FC236}">
-                <a16:creationId xmlns:a16="http://schemas.microsoft.com/office/drawing/2014/main" id="{E96A913B-4FC1-4961-87A2-F504D3837F7A}"/>
+                <a16:creationId xmlns:a16="http://schemas.microsoft.com/office/drawing/2014/main" id="{FFF32800-409B-493E-A057-8586860C0442}"/>
               </a:ext>
             </a:extLst>
           </p:cNvPr>
@@ -27294,7 +27294,7 @@
           <p:cNvPr id="118" name="">
             <a:extLst xmlns:a="http://schemas.openxmlformats.org/drawingml/2006/main">
               <a:ext uri="{FF2B5EF4-FFF2-40B4-BE49-F238E27FC236}">
-                <a16:creationId xmlns:a16="http://schemas.microsoft.com/office/drawing/2014/main" id="{BFCAB485-4310-4116-9BB0-79C207552D41}"/>
+                <a16:creationId xmlns:a16="http://schemas.microsoft.com/office/drawing/2014/main" id="{719ED263-7C46-45E6-913C-C533773487CE}"/>
               </a:ext>
             </a:extLst>
           </p:cNvPr>
@@ -27346,7 +27346,7 @@
           <p:cNvPr id="119" name="">
             <a:extLst xmlns:a="http://schemas.openxmlformats.org/drawingml/2006/main">
               <a:ext uri="{FF2B5EF4-FFF2-40B4-BE49-F238E27FC236}">
-                <a16:creationId xmlns:a16="http://schemas.microsoft.com/office/drawing/2014/main" id="{EE99CF53-CF24-4EA4-B346-6EA787E3AA45}"/>
+                <a16:creationId xmlns:a16="http://schemas.microsoft.com/office/drawing/2014/main" id="{177B6A3C-E0E8-4CB8-8640-1FE7694444F8}"/>
               </a:ext>
             </a:extLst>
           </p:cNvPr>
@@ -27398,7 +27398,7 @@
           <p:cNvPr id="120" name="">
             <a:extLst xmlns:a="http://schemas.openxmlformats.org/drawingml/2006/main">
               <a:ext uri="{FF2B5EF4-FFF2-40B4-BE49-F238E27FC236}">
-                <a16:creationId xmlns:a16="http://schemas.microsoft.com/office/drawing/2014/main" id="{10EBEAAB-664E-4C89-B4A4-28B5E5C66EBF}"/>
+                <a16:creationId xmlns:a16="http://schemas.microsoft.com/office/drawing/2014/main" id="{B00607F4-82A9-4CC9-95B5-E43F187FBFF8}"/>
               </a:ext>
             </a:extLst>
           </p:cNvPr>
@@ -27450,7 +27450,7 @@
           <p:cNvPr id="121" name="">
             <a:extLst xmlns:a="http://schemas.openxmlformats.org/drawingml/2006/main">
               <a:ext uri="{FF2B5EF4-FFF2-40B4-BE49-F238E27FC236}">
-                <a16:creationId xmlns:a16="http://schemas.microsoft.com/office/drawing/2014/main" id="{EAAF814B-D1C0-413D-AC2F-1D74EB14D46C}"/>
+                <a16:creationId xmlns:a16="http://schemas.microsoft.com/office/drawing/2014/main" id="{9258CBA8-1B66-4585-BB43-E8C659286CA3}"/>
               </a:ext>
             </a:extLst>
           </p:cNvPr>
@@ -27502,7 +27502,7 @@
           <p:cNvPr id="122" name="">
             <a:extLst xmlns:a="http://schemas.openxmlformats.org/drawingml/2006/main">
               <a:ext uri="{FF2B5EF4-FFF2-40B4-BE49-F238E27FC236}">
-                <a16:creationId xmlns:a16="http://schemas.microsoft.com/office/drawing/2014/main" id="{9E366FCB-37C6-45FA-AFEA-95C42D0B8D37}"/>
+                <a16:creationId xmlns:a16="http://schemas.microsoft.com/office/drawing/2014/main" id="{681779C5-7407-4100-ABF4-E8317CDDB0E0}"/>
               </a:ext>
             </a:extLst>
           </p:cNvPr>
@@ -27554,7 +27554,7 @@
           <p:cNvPr id="123" name="">
             <a:extLst xmlns:a="http://schemas.openxmlformats.org/drawingml/2006/main">
               <a:ext uri="{FF2B5EF4-FFF2-40B4-BE49-F238E27FC236}">
-                <a16:creationId xmlns:a16="http://schemas.microsoft.com/office/drawing/2014/main" id="{0D91ADF3-DDD2-4AC1-B863-3B9401CA016A}"/>
+                <a16:creationId xmlns:a16="http://schemas.microsoft.com/office/drawing/2014/main" id="{9E9698A6-0C23-42EF-ACC2-3589B2E7BA04}"/>
               </a:ext>
             </a:extLst>
           </p:cNvPr>
@@ -27606,7 +27606,7 @@
           <p:cNvPr id="124" name="">
             <a:extLst xmlns:a="http://schemas.openxmlformats.org/drawingml/2006/main">
               <a:ext uri="{FF2B5EF4-FFF2-40B4-BE49-F238E27FC236}">
-                <a16:creationId xmlns:a16="http://schemas.microsoft.com/office/drawing/2014/main" id="{8790E9F3-F443-4885-8CA6-71045887D052}"/>
+                <a16:creationId xmlns:a16="http://schemas.microsoft.com/office/drawing/2014/main" id="{6903FE67-DB30-413F-B54D-06F9E1C1CAE6}"/>
               </a:ext>
             </a:extLst>
           </p:cNvPr>
@@ -27658,7 +27658,7 @@
           <p:cNvPr id="125" name="">
             <a:extLst xmlns:a="http://schemas.openxmlformats.org/drawingml/2006/main">
               <a:ext uri="{FF2B5EF4-FFF2-40B4-BE49-F238E27FC236}">
-                <a16:creationId xmlns:a16="http://schemas.microsoft.com/office/drawing/2014/main" id="{6CD979FA-C21A-400F-B885-4B99DCDE75A0}"/>
+                <a16:creationId xmlns:a16="http://schemas.microsoft.com/office/drawing/2014/main" id="{52E73329-AC03-462F-B73D-E3A194300527}"/>
               </a:ext>
             </a:extLst>
           </p:cNvPr>
@@ -27689,7 +27689,7 @@
           <p:cNvPr id="126" name="">
             <a:extLst xmlns:a="http://schemas.openxmlformats.org/drawingml/2006/main">
               <a:ext uri="{FF2B5EF4-FFF2-40B4-BE49-F238E27FC236}">
-                <a16:creationId xmlns:a16="http://schemas.microsoft.com/office/drawing/2014/main" id="{59FD1F66-623E-42A1-A616-20D1AB31C052}"/>
+                <a16:creationId xmlns:a16="http://schemas.microsoft.com/office/drawing/2014/main" id="{1944826D-CEBF-471F-A65B-04C7DB392727}"/>
               </a:ext>
             </a:extLst>
           </p:cNvPr>
@@ -27720,7 +27720,7 @@
           <p:cNvPr id="127" name="">
             <a:extLst xmlns:a="http://schemas.openxmlformats.org/drawingml/2006/main">
               <a:ext uri="{FF2B5EF4-FFF2-40B4-BE49-F238E27FC236}">
-                <a16:creationId xmlns:a16="http://schemas.microsoft.com/office/drawing/2014/main" id="{5291CF33-D29E-49D6-B296-95FB92227BB4}"/>
+                <a16:creationId xmlns:a16="http://schemas.microsoft.com/office/drawing/2014/main" id="{C03E8508-E67C-4A07-913D-A2D73EE65871}"/>
               </a:ext>
             </a:extLst>
           </p:cNvPr>
@@ -27772,7 +27772,7 @@
           <p:cNvPr id="128" name="">
             <a:extLst xmlns:a="http://schemas.openxmlformats.org/drawingml/2006/main">
               <a:ext uri="{FF2B5EF4-FFF2-40B4-BE49-F238E27FC236}">
-                <a16:creationId xmlns:a16="http://schemas.microsoft.com/office/drawing/2014/main" id="{311E4D00-52F9-4566-BB6E-3B4B5BF586D7}"/>
+                <a16:creationId xmlns:a16="http://schemas.microsoft.com/office/drawing/2014/main" id="{07CACEED-5522-45DD-8712-2E49F1F2B7A1}"/>
               </a:ext>
             </a:extLst>
           </p:cNvPr>
@@ -27824,7 +27824,7 @@
           <p:cNvPr id="129" name="">
             <a:extLst xmlns:a="http://schemas.openxmlformats.org/drawingml/2006/main">
               <a:ext uri="{FF2B5EF4-FFF2-40B4-BE49-F238E27FC236}">
-                <a16:creationId xmlns:a16="http://schemas.microsoft.com/office/drawing/2014/main" id="{0ABCEFB9-E923-4CFD-BA2F-61A11AD722AB}"/>
+                <a16:creationId xmlns:a16="http://schemas.microsoft.com/office/drawing/2014/main" id="{A20FF69D-B203-4F5D-B666-7B4B8B6DBDCD}"/>
               </a:ext>
             </a:extLst>
           </p:cNvPr>
@@ -27876,7 +27876,7 @@
           <p:cNvPr id="130" name="">
             <a:extLst xmlns:a="http://schemas.openxmlformats.org/drawingml/2006/main">
               <a:ext uri="{FF2B5EF4-FFF2-40B4-BE49-F238E27FC236}">
-                <a16:creationId xmlns:a16="http://schemas.microsoft.com/office/drawing/2014/main" id="{75F66FCA-C753-410C-B7B3-C43C95DBAEC5}"/>
+                <a16:creationId xmlns:a16="http://schemas.microsoft.com/office/drawing/2014/main" id="{BB88D190-AD4A-4EA1-8638-DD2A165919D6}"/>
               </a:ext>
             </a:extLst>
           </p:cNvPr>
@@ -27928,7 +27928,7 @@
           <p:cNvPr id="131" name="">
             <a:extLst xmlns:a="http://schemas.openxmlformats.org/drawingml/2006/main">
               <a:ext uri="{FF2B5EF4-FFF2-40B4-BE49-F238E27FC236}">
-                <a16:creationId xmlns:a16="http://schemas.microsoft.com/office/drawing/2014/main" id="{8B1B476B-CB17-4797-BD15-32A55BCC8B1D}"/>
+                <a16:creationId xmlns:a16="http://schemas.microsoft.com/office/drawing/2014/main" id="{7C05A693-DC79-4164-A5A4-AAC023D0EC37}"/>
               </a:ext>
             </a:extLst>
           </p:cNvPr>
@@ -27980,7 +27980,7 @@
           <p:cNvPr id="132" name="">
             <a:extLst xmlns:a="http://schemas.openxmlformats.org/drawingml/2006/main">
               <a:ext uri="{FF2B5EF4-FFF2-40B4-BE49-F238E27FC236}">
-                <a16:creationId xmlns:a16="http://schemas.microsoft.com/office/drawing/2014/main" id="{39BA1ADF-89CC-404A-8F0A-C97F7C1A19F6}"/>
+                <a16:creationId xmlns:a16="http://schemas.microsoft.com/office/drawing/2014/main" id="{337FB223-8543-47B6-B259-C9DA981595FD}"/>
               </a:ext>
             </a:extLst>
           </p:cNvPr>
@@ -28032,7 +28032,7 @@
           <p:cNvPr id="133" name="">
             <a:extLst xmlns:a="http://schemas.openxmlformats.org/drawingml/2006/main">
               <a:ext uri="{FF2B5EF4-FFF2-40B4-BE49-F238E27FC236}">
-                <a16:creationId xmlns:a16="http://schemas.microsoft.com/office/drawing/2014/main" id="{4B7D3906-8C27-4484-B3D8-C07EEC4E872C}"/>
+                <a16:creationId xmlns:a16="http://schemas.microsoft.com/office/drawing/2014/main" id="{2CAFB5B8-2DDD-4733-9945-AF588143A618}"/>
               </a:ext>
             </a:extLst>
           </p:cNvPr>
@@ -28084,7 +28084,7 @@
           <p:cNvPr id="134" name="">
             <a:extLst xmlns:a="http://schemas.openxmlformats.org/drawingml/2006/main">
               <a:ext uri="{FF2B5EF4-FFF2-40B4-BE49-F238E27FC236}">
-                <a16:creationId xmlns:a16="http://schemas.microsoft.com/office/drawing/2014/main" id="{DC368CA7-2B05-4CA7-BDDA-65A0614529DD}"/>
+                <a16:creationId xmlns:a16="http://schemas.microsoft.com/office/drawing/2014/main" id="{FE3DF8F1-9E37-4F36-BCAE-F3E997E5A466}"/>
               </a:ext>
             </a:extLst>
           </p:cNvPr>
@@ -28134,7 +28134,7 @@
     </p:spTree>
     <p:extLst>
       <p:ext uri="{BB962C8B-B14F-4D97-AF65-F5344CB8AC3E}">
-        <p14:creationId xmlns:p14="http://schemas.microsoft.com/office/powerpoint/2010/main" val="899581399"/>
+        <p14:creationId xmlns:p14="http://schemas.microsoft.com/office/powerpoint/2010/main" val="1745282033"/>
       </p:ext>
     </p:extLst>
   </p:cSld>
@@ -28165,7 +28165,7 @@
           <p:cNvPr id="9" name="">
             <a:extLst xmlns:a="http://schemas.openxmlformats.org/drawingml/2006/main">
               <a:ext uri="{FF2B5EF4-FFF2-40B4-BE49-F238E27FC236}">
-                <a16:creationId xmlns:a16="http://schemas.microsoft.com/office/drawing/2014/main" id="{70804BBA-1D1B-4BA5-954E-46D49081B36E}"/>
+                <a16:creationId xmlns:a16="http://schemas.microsoft.com/office/drawing/2014/main" id="{2F0A18A3-D06B-46C9-9C84-EAF61D919B29}"/>
               </a:ext>
             </a:extLst>
           </p:cNvPr>
@@ -28198,7 +28198,7 @@
           <p:cNvPr id="2" name="">
             <a:extLst xmlns:a="http://schemas.openxmlformats.org/drawingml/2006/main">
               <a:ext uri="{FF2B5EF4-FFF2-40B4-BE49-F238E27FC236}">
-                <a16:creationId xmlns:a16="http://schemas.microsoft.com/office/drawing/2014/main" id="{CB95CB5A-0830-472E-8DA1-D1E3136AA351}"/>
+                <a16:creationId xmlns:a16="http://schemas.microsoft.com/office/drawing/2014/main" id="{56717353-B60D-4C56-B856-F218396E50CF}"/>
               </a:ext>
             </a:extLst>
           </p:cNvPr>
@@ -28229,7 +28229,7 @@
           <p:cNvPr id="3" name="">
             <a:extLst xmlns:a="http://schemas.openxmlformats.org/drawingml/2006/main">
               <a:ext uri="{FF2B5EF4-FFF2-40B4-BE49-F238E27FC236}">
-                <a16:creationId xmlns:a16="http://schemas.microsoft.com/office/drawing/2014/main" id="{86330211-FEEA-4F80-AE6A-2D62CF453D1A}"/>
+                <a16:creationId xmlns:a16="http://schemas.microsoft.com/office/drawing/2014/main" id="{5C6DE2D8-BDDB-43DE-8380-3F3D7DBC8136}"/>
               </a:ext>
             </a:extLst>
           </p:cNvPr>
@@ -28281,7 +28281,7 @@
           <p:cNvPr id="4" name="">
             <a:extLst xmlns:a="http://schemas.openxmlformats.org/drawingml/2006/main">
               <a:ext uri="{FF2B5EF4-FFF2-40B4-BE49-F238E27FC236}">
-                <a16:creationId xmlns:a16="http://schemas.microsoft.com/office/drawing/2014/main" id="{512172EB-D6FC-4999-8460-E8FB026D9E2B}"/>
+                <a16:creationId xmlns:a16="http://schemas.microsoft.com/office/drawing/2014/main" id="{0CFE61F6-3ED8-4881-A90E-3969202FF9FC}"/>
               </a:ext>
             </a:extLst>
           </p:cNvPr>
@@ -28316,7 +28316,7 @@
           <p:nvPr/>
         </p:nvPicPr>
         <p:blipFill>
-          <a:blip xmlns:r="http://schemas.openxmlformats.org/officeDocument/2006/relationships" xmlns:a="http://schemas.openxmlformats.org/drawingml/2006/main" r:embed="R269b321973ce451a"/>
+          <a:blip xmlns:r="http://schemas.openxmlformats.org/officeDocument/2006/relationships" xmlns:a="http://schemas.openxmlformats.org/drawingml/2006/main" r:embed="Rbad32dd8db034777"/>
           <a:stretch xmlns:a="http://schemas.openxmlformats.org/drawingml/2006/main"/>
         </p:blipFill>
         <p:spPr>
@@ -28334,7 +28334,7 @@
           <p:cNvPr id="6" name="">
             <a:extLst xmlns:a="http://schemas.openxmlformats.org/drawingml/2006/main">
               <a:ext uri="{FF2B5EF4-FFF2-40B4-BE49-F238E27FC236}">
-                <a16:creationId xmlns:a16="http://schemas.microsoft.com/office/drawing/2014/main" id="{27BD1251-EF5E-4E84-915B-345676C6495C}"/>
+                <a16:creationId xmlns:a16="http://schemas.microsoft.com/office/drawing/2014/main" id="{C30E4CD1-1E65-4B71-9D23-F1A9AD9AC689}"/>
               </a:ext>
             </a:extLst>
           </p:cNvPr>
@@ -28386,7 +28386,7 @@
           <p:cNvPr id="7" name="">
             <a:extLst xmlns:a="http://schemas.openxmlformats.org/drawingml/2006/main">
               <a:ext uri="{FF2B5EF4-FFF2-40B4-BE49-F238E27FC236}">
-                <a16:creationId xmlns:a16="http://schemas.microsoft.com/office/drawing/2014/main" id="{9FD3EDA2-AFF6-4BA6-8E25-EFD2C1D04D6B}"/>
+                <a16:creationId xmlns:a16="http://schemas.microsoft.com/office/drawing/2014/main" id="{BD8EFEEA-CED3-4E3F-87AC-64AE9AF1843D}"/>
               </a:ext>
             </a:extLst>
           </p:cNvPr>
@@ -28442,7 +28442,7 @@
           <p:nvPr/>
         </p:nvPicPr>
         <p:blipFill>
-          <a:blip xmlns:r="http://schemas.openxmlformats.org/officeDocument/2006/relationships" xmlns:a="http://schemas.openxmlformats.org/drawingml/2006/main" r:embed="Rbf8f6eb0c4f24979"/>
+          <a:blip xmlns:r="http://schemas.openxmlformats.org/officeDocument/2006/relationships" xmlns:a="http://schemas.openxmlformats.org/drawingml/2006/main" r:embed="R39e34bba96894922"/>
           <a:stretch xmlns:a="http://schemas.openxmlformats.org/drawingml/2006/main"/>
         </p:blipFill>
         <p:spPr>
@@ -28458,7 +28458,7 @@
     </p:spTree>
     <p:extLst>
       <p:ext uri="{BB962C8B-B14F-4D97-AF65-F5344CB8AC3E}">
-        <p14:creationId xmlns:p14="http://schemas.microsoft.com/office/powerpoint/2010/main" val="1325059909"/>
+        <p14:creationId xmlns:p14="http://schemas.microsoft.com/office/powerpoint/2010/main" val="1709829952"/>
       </p:ext>
     </p:extLst>
   </p:cSld>
@@ -28489,7 +28489,7 @@
           <p:cNvPr id="42" name="">
             <a:extLst xmlns:a="http://schemas.openxmlformats.org/drawingml/2006/main">
               <a:ext uri="{FF2B5EF4-FFF2-40B4-BE49-F238E27FC236}">
-                <a16:creationId xmlns:a16="http://schemas.microsoft.com/office/drawing/2014/main" id="{876EFFD4-D2ED-41F2-8ADF-BA51F6661B90}"/>
+                <a16:creationId xmlns:a16="http://schemas.microsoft.com/office/drawing/2014/main" id="{30586D2C-7B2B-4973-AAC1-A113B1499A8E}"/>
               </a:ext>
             </a:extLst>
           </p:cNvPr>
@@ -28522,7 +28522,7 @@
           <p:cNvPr id="2" name="">
             <a:extLst xmlns:a="http://schemas.openxmlformats.org/drawingml/2006/main">
               <a:ext uri="{FF2B5EF4-FFF2-40B4-BE49-F238E27FC236}">
-                <a16:creationId xmlns:a16="http://schemas.microsoft.com/office/drawing/2014/main" id="{313B3C7F-CBDF-4909-99E9-9FF876F4E15D}"/>
+                <a16:creationId xmlns:a16="http://schemas.microsoft.com/office/drawing/2014/main" id="{B361C8B1-5127-4D6D-B290-47E56085B968}"/>
               </a:ext>
             </a:extLst>
           </p:cNvPr>
@@ -28553,7 +28553,7 @@
           <p:cNvPr id="3" name="">
             <a:extLst xmlns:a="http://schemas.openxmlformats.org/drawingml/2006/main">
               <a:ext uri="{FF2B5EF4-FFF2-40B4-BE49-F238E27FC236}">
-                <a16:creationId xmlns:a16="http://schemas.microsoft.com/office/drawing/2014/main" id="{BCB7D2D0-74B8-48C5-9926-B8B5DCE6AAE0}"/>
+                <a16:creationId xmlns:a16="http://schemas.microsoft.com/office/drawing/2014/main" id="{29B82953-F228-4CBD-B4A3-18E35453F22E}"/>
               </a:ext>
             </a:extLst>
           </p:cNvPr>
@@ -28605,7 +28605,7 @@
           <p:cNvPr id="4" name="">
             <a:extLst xmlns:a="http://schemas.openxmlformats.org/drawingml/2006/main">
               <a:ext uri="{FF2B5EF4-FFF2-40B4-BE49-F238E27FC236}">
-                <a16:creationId xmlns:a16="http://schemas.microsoft.com/office/drawing/2014/main" id="{B7BEFB50-F31F-4349-89F7-FE2B691CBA2D}"/>
+                <a16:creationId xmlns:a16="http://schemas.microsoft.com/office/drawing/2014/main" id="{82968248-47E7-42A1-8F40-5FC5C7CD2CC4}"/>
               </a:ext>
             </a:extLst>
           </p:cNvPr>
@@ -28657,7 +28657,7 @@
           <p:cNvPr id="5" name="">
             <a:extLst xmlns:a="http://schemas.openxmlformats.org/drawingml/2006/main">
               <a:ext uri="{FF2B5EF4-FFF2-40B4-BE49-F238E27FC236}">
-                <a16:creationId xmlns:a16="http://schemas.microsoft.com/office/drawing/2014/main" id="{96CE563F-77B2-43E3-B7B4-42DDB0C96DBA}"/>
+                <a16:creationId xmlns:a16="http://schemas.microsoft.com/office/drawing/2014/main" id="{6868099B-DE2F-4206-9995-0773441602E7}"/>
               </a:ext>
             </a:extLst>
           </p:cNvPr>
@@ -28692,7 +28692,7 @@
           <p:nvPr/>
         </p:nvPicPr>
         <p:blipFill>
-          <a:blip xmlns:r="http://schemas.openxmlformats.org/officeDocument/2006/relationships" xmlns:a="http://schemas.openxmlformats.org/drawingml/2006/main" r:embed="Rf1f6d0407afe48e1"/>
+          <a:blip xmlns:r="http://schemas.openxmlformats.org/officeDocument/2006/relationships" xmlns:a="http://schemas.openxmlformats.org/drawingml/2006/main" r:embed="R371f791e51f84d12"/>
           <a:stretch xmlns:a="http://schemas.openxmlformats.org/drawingml/2006/main"/>
         </p:blipFill>
         <p:spPr>
@@ -28710,7 +28710,7 @@
           <p:cNvPr id="7" name="">
             <a:extLst xmlns:a="http://schemas.openxmlformats.org/drawingml/2006/main">
               <a:ext uri="{FF2B5EF4-FFF2-40B4-BE49-F238E27FC236}">
-                <a16:creationId xmlns:a16="http://schemas.microsoft.com/office/drawing/2014/main" id="{19F98917-7A71-4F2F-87DE-D3EFB7CA2A0B}"/>
+                <a16:creationId xmlns:a16="http://schemas.microsoft.com/office/drawing/2014/main" id="{6D84679A-D69E-4303-A356-CE0A963397D3}"/>
               </a:ext>
             </a:extLst>
           </p:cNvPr>
@@ -28762,7 +28762,7 @@
           <p:cNvPr id="8" name="">
             <a:extLst xmlns:a="http://schemas.openxmlformats.org/drawingml/2006/main">
               <a:ext uri="{FF2B5EF4-FFF2-40B4-BE49-F238E27FC236}">
-                <a16:creationId xmlns:a16="http://schemas.microsoft.com/office/drawing/2014/main" id="{83C42599-4324-4588-8D79-B0457E1CE576}"/>
+                <a16:creationId xmlns:a16="http://schemas.microsoft.com/office/drawing/2014/main" id="{B66E5152-667A-4D85-9A4F-5FE64FA6B200}"/>
               </a:ext>
             </a:extLst>
           </p:cNvPr>
@@ -28814,7 +28814,7 @@
           <p:cNvPr id="9" name="">
             <a:extLst xmlns:a="http://schemas.openxmlformats.org/drawingml/2006/main">
               <a:ext uri="{FF2B5EF4-FFF2-40B4-BE49-F238E27FC236}">
-                <a16:creationId xmlns:a16="http://schemas.microsoft.com/office/drawing/2014/main" id="{07865743-279C-403F-93D7-5A81FCF33451}"/>
+                <a16:creationId xmlns:a16="http://schemas.microsoft.com/office/drawing/2014/main" id="{311AEB7A-A48F-4BF9-A59E-E6E72068E4AF}"/>
               </a:ext>
             </a:extLst>
           </p:cNvPr>
@@ -28866,7 +28866,7 @@
           <p:cNvPr id="10" name="">
             <a:extLst xmlns:a="http://schemas.openxmlformats.org/drawingml/2006/main">
               <a:ext uri="{FF2B5EF4-FFF2-40B4-BE49-F238E27FC236}">
-                <a16:creationId xmlns:a16="http://schemas.microsoft.com/office/drawing/2014/main" id="{2824063B-B0B2-42E9-8162-29516C2892BE}"/>
+                <a16:creationId xmlns:a16="http://schemas.microsoft.com/office/drawing/2014/main" id="{5D31ECCC-BFEF-4585-8EE5-B660C35AA92C}"/>
               </a:ext>
             </a:extLst>
           </p:cNvPr>
@@ -28897,7 +28897,7 @@
           <p:cNvPr id="11" name="">
             <a:extLst xmlns:a="http://schemas.openxmlformats.org/drawingml/2006/main">
               <a:ext uri="{FF2B5EF4-FFF2-40B4-BE49-F238E27FC236}">
-                <a16:creationId xmlns:a16="http://schemas.microsoft.com/office/drawing/2014/main" id="{E0BDA629-1FC7-475A-B802-94531E204D0A}"/>
+                <a16:creationId xmlns:a16="http://schemas.microsoft.com/office/drawing/2014/main" id="{68264411-3676-4E01-A229-9520FC5B82FC}"/>
               </a:ext>
             </a:extLst>
           </p:cNvPr>
@@ -28949,7 +28949,7 @@
           <p:cNvPr id="12" name="">
             <a:extLst xmlns:a="http://schemas.openxmlformats.org/drawingml/2006/main">
               <a:ext uri="{FF2B5EF4-FFF2-40B4-BE49-F238E27FC236}">
-                <a16:creationId xmlns:a16="http://schemas.microsoft.com/office/drawing/2014/main" id="{EFAD2D69-5B28-4B92-ACE6-5C789C984BF0}"/>
+                <a16:creationId xmlns:a16="http://schemas.microsoft.com/office/drawing/2014/main" id="{7E816795-FC0A-49CA-8A18-D15DEB99504D}"/>
               </a:ext>
             </a:extLst>
           </p:cNvPr>
@@ -29001,7 +29001,7 @@
           <p:cNvPr id="13" name="">
             <a:extLst xmlns:a="http://schemas.openxmlformats.org/drawingml/2006/main">
               <a:ext uri="{FF2B5EF4-FFF2-40B4-BE49-F238E27FC236}">
-                <a16:creationId xmlns:a16="http://schemas.microsoft.com/office/drawing/2014/main" id="{69320434-7A43-4748-BEA4-D44A8E314926}"/>
+                <a16:creationId xmlns:a16="http://schemas.microsoft.com/office/drawing/2014/main" id="{14F25165-7009-48E0-82D1-5F03D99B0CBE}"/>
               </a:ext>
             </a:extLst>
           </p:cNvPr>
@@ -29053,7 +29053,7 @@
           <p:cNvPr id="14" name="">
             <a:extLst xmlns:a="http://schemas.openxmlformats.org/drawingml/2006/main">
               <a:ext uri="{FF2B5EF4-FFF2-40B4-BE49-F238E27FC236}">
-                <a16:creationId xmlns:a16="http://schemas.microsoft.com/office/drawing/2014/main" id="{19C0F0A6-E4EB-4CB7-8970-3EEE01268AEF}"/>
+                <a16:creationId xmlns:a16="http://schemas.microsoft.com/office/drawing/2014/main" id="{45F4814D-8243-4CD7-AAE7-42C9327ED5C0}"/>
               </a:ext>
             </a:extLst>
           </p:cNvPr>
@@ -29084,7 +29084,7 @@
           <p:cNvPr id="15" name="">
             <a:extLst xmlns:a="http://schemas.openxmlformats.org/drawingml/2006/main">
               <a:ext uri="{FF2B5EF4-FFF2-40B4-BE49-F238E27FC236}">
-                <a16:creationId xmlns:a16="http://schemas.microsoft.com/office/drawing/2014/main" id="{B49ABEB2-20CC-49EA-B0CE-5BCBBD0F08FD}"/>
+                <a16:creationId xmlns:a16="http://schemas.microsoft.com/office/drawing/2014/main" id="{FD104E63-10C2-4467-996E-3D6F184B28A7}"/>
               </a:ext>
             </a:extLst>
           </p:cNvPr>
@@ -29136,7 +29136,7 @@
           <p:cNvPr id="16" name="">
             <a:extLst xmlns:a="http://schemas.openxmlformats.org/drawingml/2006/main">
               <a:ext uri="{FF2B5EF4-FFF2-40B4-BE49-F238E27FC236}">
-                <a16:creationId xmlns:a16="http://schemas.microsoft.com/office/drawing/2014/main" id="{D7CC7566-7B05-4EA5-A9F7-D0DCED5CFD67}"/>
+                <a16:creationId xmlns:a16="http://schemas.microsoft.com/office/drawing/2014/main" id="{70B21D4D-7CD3-44BF-93CC-B5F859A06BB2}"/>
               </a:ext>
             </a:extLst>
           </p:cNvPr>
@@ -29188,7 +29188,7 @@
           <p:cNvPr id="17" name="">
             <a:extLst xmlns:a="http://schemas.openxmlformats.org/drawingml/2006/main">
               <a:ext uri="{FF2B5EF4-FFF2-40B4-BE49-F238E27FC236}">
-                <a16:creationId xmlns:a16="http://schemas.microsoft.com/office/drawing/2014/main" id="{0BBEBB0A-03EB-436E-8C89-305ABFCDFEBA}"/>
+                <a16:creationId xmlns:a16="http://schemas.microsoft.com/office/drawing/2014/main" id="{A7CC8F7B-C0A1-4C83-9E2D-08519C1A61F0}"/>
               </a:ext>
             </a:extLst>
           </p:cNvPr>
@@ -29240,7 +29240,7 @@
           <p:cNvPr id="18" name="">
             <a:extLst xmlns:a="http://schemas.openxmlformats.org/drawingml/2006/main">
               <a:ext uri="{FF2B5EF4-FFF2-40B4-BE49-F238E27FC236}">
-                <a16:creationId xmlns:a16="http://schemas.microsoft.com/office/drawing/2014/main" id="{57E50376-5E13-440C-B092-8A32DBEEAB48}"/>
+                <a16:creationId xmlns:a16="http://schemas.microsoft.com/office/drawing/2014/main" id="{9BFC1A52-0DA1-4059-A4AC-0D8BCDC62F49}"/>
               </a:ext>
             </a:extLst>
           </p:cNvPr>
@@ -29271,7 +29271,7 @@
           <p:cNvPr id="19" name="">
             <a:extLst xmlns:a="http://schemas.openxmlformats.org/drawingml/2006/main">
               <a:ext uri="{FF2B5EF4-FFF2-40B4-BE49-F238E27FC236}">
-                <a16:creationId xmlns:a16="http://schemas.microsoft.com/office/drawing/2014/main" id="{0E268302-A8A2-42AF-8233-B0016C332491}"/>
+                <a16:creationId xmlns:a16="http://schemas.microsoft.com/office/drawing/2014/main" id="{55E01692-6F10-4FEA-8D68-739BF96FB545}"/>
               </a:ext>
             </a:extLst>
           </p:cNvPr>
@@ -29323,7 +29323,7 @@
           <p:cNvPr id="20" name="">
             <a:extLst xmlns:a="http://schemas.openxmlformats.org/drawingml/2006/main">
               <a:ext uri="{FF2B5EF4-FFF2-40B4-BE49-F238E27FC236}">
-                <a16:creationId xmlns:a16="http://schemas.microsoft.com/office/drawing/2014/main" id="{8661EC53-8D43-42A5-9A22-9BEAB5FA82EB}"/>
+                <a16:creationId xmlns:a16="http://schemas.microsoft.com/office/drawing/2014/main" id="{F9D7CCFA-094C-42C8-81A5-14DE1B9EDE5D}"/>
               </a:ext>
             </a:extLst>
           </p:cNvPr>
@@ -29375,7 +29375,7 @@
           <p:cNvPr id="21" name="">
             <a:extLst xmlns:a="http://schemas.openxmlformats.org/drawingml/2006/main">
               <a:ext uri="{FF2B5EF4-FFF2-40B4-BE49-F238E27FC236}">
-                <a16:creationId xmlns:a16="http://schemas.microsoft.com/office/drawing/2014/main" id="{6B3CF21E-4111-484D-8FAD-4989130EEC2E}"/>
+                <a16:creationId xmlns:a16="http://schemas.microsoft.com/office/drawing/2014/main" id="{9259878C-1FB7-4168-9B02-628CC8BA6599}"/>
               </a:ext>
             </a:extLst>
           </p:cNvPr>
@@ -29427,7 +29427,7 @@
           <p:cNvPr id="22" name="">
             <a:extLst xmlns:a="http://schemas.openxmlformats.org/drawingml/2006/main">
               <a:ext uri="{FF2B5EF4-FFF2-40B4-BE49-F238E27FC236}">
-                <a16:creationId xmlns:a16="http://schemas.microsoft.com/office/drawing/2014/main" id="{884F6FBE-6AC9-4839-9F99-AD9C4481C61A}"/>
+                <a16:creationId xmlns:a16="http://schemas.microsoft.com/office/drawing/2014/main" id="{59EE92FE-7CC9-47B8-AC99-A83C95EEDFEE}"/>
               </a:ext>
             </a:extLst>
           </p:cNvPr>
@@ -29458,7 +29458,7 @@
           <p:cNvPr id="23" name="">
             <a:extLst xmlns:a="http://schemas.openxmlformats.org/drawingml/2006/main">
               <a:ext uri="{FF2B5EF4-FFF2-40B4-BE49-F238E27FC236}">
-                <a16:creationId xmlns:a16="http://schemas.microsoft.com/office/drawing/2014/main" id="{D60C6C0B-6485-4AFE-9898-DD025B1B1409}"/>
+                <a16:creationId xmlns:a16="http://schemas.microsoft.com/office/drawing/2014/main" id="{87C56AA5-8D51-4385-A6E9-97A5934E1486}"/>
               </a:ext>
             </a:extLst>
           </p:cNvPr>
@@ -29510,7 +29510,7 @@
           <p:cNvPr id="24" name="">
             <a:extLst xmlns:a="http://schemas.openxmlformats.org/drawingml/2006/main">
               <a:ext uri="{FF2B5EF4-FFF2-40B4-BE49-F238E27FC236}">
-                <a16:creationId xmlns:a16="http://schemas.microsoft.com/office/drawing/2014/main" id="{E8B0B0FF-6237-4B00-8988-4CCDE1C2F3EF}"/>
+                <a16:creationId xmlns:a16="http://schemas.microsoft.com/office/drawing/2014/main" id="{BF59AF06-A216-4663-A67A-F6B598D219C3}"/>
               </a:ext>
             </a:extLst>
           </p:cNvPr>
@@ -29562,7 +29562,7 @@
           <p:cNvPr id="25" name="">
             <a:extLst xmlns:a="http://schemas.openxmlformats.org/drawingml/2006/main">
               <a:ext uri="{FF2B5EF4-FFF2-40B4-BE49-F238E27FC236}">
-                <a16:creationId xmlns:a16="http://schemas.microsoft.com/office/drawing/2014/main" id="{821F75D7-FCBF-4075-A0DC-119E8621515B}"/>
+                <a16:creationId xmlns:a16="http://schemas.microsoft.com/office/drawing/2014/main" id="{075C9292-E840-4D69-8AF3-F807E1DA9738}"/>
               </a:ext>
             </a:extLst>
           </p:cNvPr>
@@ -29614,7 +29614,7 @@
           <p:cNvPr id="26" name="">
             <a:extLst xmlns:a="http://schemas.openxmlformats.org/drawingml/2006/main">
               <a:ext uri="{FF2B5EF4-FFF2-40B4-BE49-F238E27FC236}">
-                <a16:creationId xmlns:a16="http://schemas.microsoft.com/office/drawing/2014/main" id="{46F850AC-026A-4E4E-B31E-08AEEC131397}"/>
+                <a16:creationId xmlns:a16="http://schemas.microsoft.com/office/drawing/2014/main" id="{2257D0E0-82F2-4CEB-AD56-B5B97F479DCD}"/>
               </a:ext>
             </a:extLst>
           </p:cNvPr>
@@ -29645,7 +29645,7 @@
           <p:cNvPr id="27" name="">
             <a:extLst xmlns:a="http://schemas.openxmlformats.org/drawingml/2006/main">
               <a:ext uri="{FF2B5EF4-FFF2-40B4-BE49-F238E27FC236}">
-                <a16:creationId xmlns:a16="http://schemas.microsoft.com/office/drawing/2014/main" id="{6F06E12F-1E71-4FF6-8638-A3E190841311}"/>
+                <a16:creationId xmlns:a16="http://schemas.microsoft.com/office/drawing/2014/main" id="{6C68F02B-15E6-48FE-9059-CDB1DDF69D6E}"/>
               </a:ext>
             </a:extLst>
           </p:cNvPr>
@@ -29697,7 +29697,7 @@
           <p:cNvPr id="28" name="">
             <a:extLst xmlns:a="http://schemas.openxmlformats.org/drawingml/2006/main">
               <a:ext uri="{FF2B5EF4-FFF2-40B4-BE49-F238E27FC236}">
-                <a16:creationId xmlns:a16="http://schemas.microsoft.com/office/drawing/2014/main" id="{0A6A6B55-04DA-4FE0-95B4-8E93A61793DF}"/>
+                <a16:creationId xmlns:a16="http://schemas.microsoft.com/office/drawing/2014/main" id="{0FAF0AB7-3B9B-4937-AE79-651165B884B5}"/>
               </a:ext>
             </a:extLst>
           </p:cNvPr>
@@ -29749,7 +29749,7 @@
           <p:cNvPr id="29" name="">
             <a:extLst xmlns:a="http://schemas.openxmlformats.org/drawingml/2006/main">
               <a:ext uri="{FF2B5EF4-FFF2-40B4-BE49-F238E27FC236}">
-                <a16:creationId xmlns:a16="http://schemas.microsoft.com/office/drawing/2014/main" id="{1ED750FA-733D-47B7-A46C-6EFD28F47C00}"/>
+                <a16:creationId xmlns:a16="http://schemas.microsoft.com/office/drawing/2014/main" id="{43B125E0-5478-4AA6-A036-E294E54C11D7}"/>
               </a:ext>
             </a:extLst>
           </p:cNvPr>
@@ -29801,7 +29801,7 @@
           <p:cNvPr id="30" name="">
             <a:extLst xmlns:a="http://schemas.openxmlformats.org/drawingml/2006/main">
               <a:ext uri="{FF2B5EF4-FFF2-40B4-BE49-F238E27FC236}">
-                <a16:creationId xmlns:a16="http://schemas.microsoft.com/office/drawing/2014/main" id="{B5D4D861-4B59-467F-8DD6-214A3346731C}"/>
+                <a16:creationId xmlns:a16="http://schemas.microsoft.com/office/drawing/2014/main" id="{DB35CD74-0F00-423D-B5B3-12E5C4E578A3}"/>
               </a:ext>
             </a:extLst>
           </p:cNvPr>
@@ -29832,7 +29832,7 @@
           <p:cNvPr id="31" name="">
             <a:extLst xmlns:a="http://schemas.openxmlformats.org/drawingml/2006/main">
               <a:ext uri="{FF2B5EF4-FFF2-40B4-BE49-F238E27FC236}">
-                <a16:creationId xmlns:a16="http://schemas.microsoft.com/office/drawing/2014/main" id="{03D5869F-664C-44E1-9803-E2D485EDB69B}"/>
+                <a16:creationId xmlns:a16="http://schemas.microsoft.com/office/drawing/2014/main" id="{D7683692-8141-43FA-B43A-2BEE8B558F27}"/>
               </a:ext>
             </a:extLst>
           </p:cNvPr>
@@ -29884,7 +29884,7 @@
           <p:cNvPr id="32" name="">
             <a:extLst xmlns:a="http://schemas.openxmlformats.org/drawingml/2006/main">
               <a:ext uri="{FF2B5EF4-FFF2-40B4-BE49-F238E27FC236}">
-                <a16:creationId xmlns:a16="http://schemas.microsoft.com/office/drawing/2014/main" id="{78F60133-6551-42BF-823D-D8C68AF1766F}"/>
+                <a16:creationId xmlns:a16="http://schemas.microsoft.com/office/drawing/2014/main" id="{6C202D56-5E76-4DC3-9B1A-2D6F52B8D1DD}"/>
               </a:ext>
             </a:extLst>
           </p:cNvPr>
@@ -29936,7 +29936,7 @@
           <p:cNvPr id="33" name="">
             <a:extLst xmlns:a="http://schemas.openxmlformats.org/drawingml/2006/main">
               <a:ext uri="{FF2B5EF4-FFF2-40B4-BE49-F238E27FC236}">
-                <a16:creationId xmlns:a16="http://schemas.microsoft.com/office/drawing/2014/main" id="{01BF0E2B-B332-45A0-B2AA-87EADCCE8CD1}"/>
+                <a16:creationId xmlns:a16="http://schemas.microsoft.com/office/drawing/2014/main" id="{7DAA93CC-437C-4A8D-9A7E-F5CB6FFFB798}"/>
               </a:ext>
             </a:extLst>
           </p:cNvPr>
@@ -29988,7 +29988,7 @@
           <p:cNvPr id="34" name="">
             <a:extLst xmlns:a="http://schemas.openxmlformats.org/drawingml/2006/main">
               <a:ext uri="{FF2B5EF4-FFF2-40B4-BE49-F238E27FC236}">
-                <a16:creationId xmlns:a16="http://schemas.microsoft.com/office/drawing/2014/main" id="{54456250-17D2-40D1-9583-E52E64B1D44D}"/>
+                <a16:creationId xmlns:a16="http://schemas.microsoft.com/office/drawing/2014/main" id="{0B6116A7-6870-4E9A-B677-DA956034192B}"/>
               </a:ext>
             </a:extLst>
           </p:cNvPr>
@@ -30019,7 +30019,7 @@
           <p:cNvPr id="35" name="">
             <a:extLst xmlns:a="http://schemas.openxmlformats.org/drawingml/2006/main">
               <a:ext uri="{FF2B5EF4-FFF2-40B4-BE49-F238E27FC236}">
-                <a16:creationId xmlns:a16="http://schemas.microsoft.com/office/drawing/2014/main" id="{52300D71-F818-4B63-9354-7DB205337500}"/>
+                <a16:creationId xmlns:a16="http://schemas.microsoft.com/office/drawing/2014/main" id="{4F104E1B-D4D8-47AE-8DDA-47EB9980555C}"/>
               </a:ext>
             </a:extLst>
           </p:cNvPr>
@@ -30071,7 +30071,7 @@
           <p:cNvPr id="36" name="">
             <a:extLst xmlns:a="http://schemas.openxmlformats.org/drawingml/2006/main">
               <a:ext uri="{FF2B5EF4-FFF2-40B4-BE49-F238E27FC236}">
-                <a16:creationId xmlns:a16="http://schemas.microsoft.com/office/drawing/2014/main" id="{6A9AF89C-8019-47C5-BFBC-C56A46541A8E}"/>
+                <a16:creationId xmlns:a16="http://schemas.microsoft.com/office/drawing/2014/main" id="{3DFE967A-F89E-4D7C-A03B-94EDF8F64568}"/>
               </a:ext>
             </a:extLst>
           </p:cNvPr>
@@ -30123,7 +30123,7 @@
           <p:cNvPr id="37" name="">
             <a:extLst xmlns:a="http://schemas.openxmlformats.org/drawingml/2006/main">
               <a:ext uri="{FF2B5EF4-FFF2-40B4-BE49-F238E27FC236}">
-                <a16:creationId xmlns:a16="http://schemas.microsoft.com/office/drawing/2014/main" id="{0AEDF886-578A-4B35-BD54-8F03111452D2}"/>
+                <a16:creationId xmlns:a16="http://schemas.microsoft.com/office/drawing/2014/main" id="{96FC93A8-3DFE-46D9-A3CE-9B7AD191F87C}"/>
               </a:ext>
             </a:extLst>
           </p:cNvPr>
@@ -30175,7 +30175,7 @@
           <p:cNvPr id="38" name="">
             <a:extLst xmlns:a="http://schemas.openxmlformats.org/drawingml/2006/main">
               <a:ext uri="{FF2B5EF4-FFF2-40B4-BE49-F238E27FC236}">
-                <a16:creationId xmlns:a16="http://schemas.microsoft.com/office/drawing/2014/main" id="{9F9EEA52-287A-4CF9-8347-DCF8C7090481}"/>
+                <a16:creationId xmlns:a16="http://schemas.microsoft.com/office/drawing/2014/main" id="{8A6E2820-4B84-4273-A858-6294548A7F2F}"/>
               </a:ext>
             </a:extLst>
           </p:cNvPr>
@@ -30206,7 +30206,7 @@
           <p:cNvPr id="39" name="">
             <a:extLst xmlns:a="http://schemas.openxmlformats.org/drawingml/2006/main">
               <a:ext uri="{FF2B5EF4-FFF2-40B4-BE49-F238E27FC236}">
-                <a16:creationId xmlns:a16="http://schemas.microsoft.com/office/drawing/2014/main" id="{2318B12D-08BB-4272-9B6C-6593024C85FE}"/>
+                <a16:creationId xmlns:a16="http://schemas.microsoft.com/office/drawing/2014/main" id="{27C299AA-AE9D-4DFB-8258-C1D6202BDE5D}"/>
               </a:ext>
             </a:extLst>
           </p:cNvPr>
@@ -30258,7 +30258,7 @@
           <p:cNvPr id="40" name="">
             <a:extLst xmlns:a="http://schemas.openxmlformats.org/drawingml/2006/main">
               <a:ext uri="{FF2B5EF4-FFF2-40B4-BE49-F238E27FC236}">
-                <a16:creationId xmlns:a16="http://schemas.microsoft.com/office/drawing/2014/main" id="{56CCEDC9-1F9C-4BFE-A057-4F9174D57317}"/>
+                <a16:creationId xmlns:a16="http://schemas.microsoft.com/office/drawing/2014/main" id="{4BF7A2DB-7675-49F5-A5AA-80BBB133196F}"/>
               </a:ext>
             </a:extLst>
           </p:cNvPr>
@@ -30310,7 +30310,7 @@
           <p:cNvPr id="41" name="">
             <a:extLst xmlns:a="http://schemas.openxmlformats.org/drawingml/2006/main">
               <a:ext uri="{FF2B5EF4-FFF2-40B4-BE49-F238E27FC236}">
-                <a16:creationId xmlns:a16="http://schemas.microsoft.com/office/drawing/2014/main" id="{D76276A3-A539-4F99-BB30-59E3412605D1}"/>
+                <a16:creationId xmlns:a16="http://schemas.microsoft.com/office/drawing/2014/main" id="{330F45BD-2B96-4703-883B-9B612D02F395}"/>
               </a:ext>
             </a:extLst>
           </p:cNvPr>
@@ -30360,7 +30360,7 @@
     </p:spTree>
     <p:extLst>
       <p:ext uri="{BB962C8B-B14F-4D97-AF65-F5344CB8AC3E}">
-        <p14:creationId xmlns:p14="http://schemas.microsoft.com/office/powerpoint/2010/main" val="1936451599"/>
+        <p14:creationId xmlns:p14="http://schemas.microsoft.com/office/powerpoint/2010/main" val="1731874871"/>
       </p:ext>
     </p:extLst>
   </p:cSld>
@@ -30391,7 +30391,7 @@
           <p:cNvPr id="76" name="">
             <a:extLst xmlns:a="http://schemas.openxmlformats.org/drawingml/2006/main">
               <a:ext uri="{FF2B5EF4-FFF2-40B4-BE49-F238E27FC236}">
-                <a16:creationId xmlns:a16="http://schemas.microsoft.com/office/drawing/2014/main" id="{5D3FB01C-E566-410E-A180-39A091F8AFF7}"/>
+                <a16:creationId xmlns:a16="http://schemas.microsoft.com/office/drawing/2014/main" id="{3B1D5256-FACE-4F0F-B874-B24B7C742390}"/>
               </a:ext>
             </a:extLst>
           </p:cNvPr>
@@ -30424,7 +30424,7 @@
           <p:cNvPr id="2" name="">
             <a:extLst xmlns:a="http://schemas.openxmlformats.org/drawingml/2006/main">
               <a:ext uri="{FF2B5EF4-FFF2-40B4-BE49-F238E27FC236}">
-                <a16:creationId xmlns:a16="http://schemas.microsoft.com/office/drawing/2014/main" id="{0EE3D7EA-0C37-4F5C-B80E-97E4D350A9E1}"/>
+                <a16:creationId xmlns:a16="http://schemas.microsoft.com/office/drawing/2014/main" id="{9E149DB8-499D-4B17-9599-40E52305083A}"/>
               </a:ext>
             </a:extLst>
           </p:cNvPr>
@@ -30455,7 +30455,7 @@
           <p:cNvPr id="3" name="">
             <a:extLst xmlns:a="http://schemas.openxmlformats.org/drawingml/2006/main">
               <a:ext uri="{FF2B5EF4-FFF2-40B4-BE49-F238E27FC236}">
-                <a16:creationId xmlns:a16="http://schemas.microsoft.com/office/drawing/2014/main" id="{4362EEA5-2A07-4EA4-B7F6-4DD61BAF4E08}"/>
+                <a16:creationId xmlns:a16="http://schemas.microsoft.com/office/drawing/2014/main" id="{706EB06C-2957-402C-9395-C62E1DD1BE9C}"/>
               </a:ext>
             </a:extLst>
           </p:cNvPr>
@@ -30507,7 +30507,7 @@
           <p:cNvPr id="4" name="">
             <a:extLst xmlns:a="http://schemas.openxmlformats.org/drawingml/2006/main">
               <a:ext uri="{FF2B5EF4-FFF2-40B4-BE49-F238E27FC236}">
-                <a16:creationId xmlns:a16="http://schemas.microsoft.com/office/drawing/2014/main" id="{57F0259E-A6BD-4C95-B498-CC25CBBF620F}"/>
+                <a16:creationId xmlns:a16="http://schemas.microsoft.com/office/drawing/2014/main" id="{66909DBA-FDB1-4E07-84EB-6CBF918CE7C8}"/>
               </a:ext>
             </a:extLst>
           </p:cNvPr>
@@ -30559,7 +30559,7 @@
           <p:cNvPr id="5" name="">
             <a:extLst xmlns:a="http://schemas.openxmlformats.org/drawingml/2006/main">
               <a:ext uri="{FF2B5EF4-FFF2-40B4-BE49-F238E27FC236}">
-                <a16:creationId xmlns:a16="http://schemas.microsoft.com/office/drawing/2014/main" id="{417E8817-03AF-4374-98C2-2BFEBDADF212}"/>
+                <a16:creationId xmlns:a16="http://schemas.microsoft.com/office/drawing/2014/main" id="{52515BB4-7377-4F06-9300-C62DA90C5D34}"/>
               </a:ext>
             </a:extLst>
           </p:cNvPr>
@@ -30594,7 +30594,7 @@
           <p:nvPr/>
         </p:nvPicPr>
         <p:blipFill>
-          <a:blip xmlns:r="http://schemas.openxmlformats.org/officeDocument/2006/relationships" xmlns:a="http://schemas.openxmlformats.org/drawingml/2006/main" r:embed="Rdaa022ba40ce4846"/>
+          <a:blip xmlns:r="http://schemas.openxmlformats.org/officeDocument/2006/relationships" xmlns:a="http://schemas.openxmlformats.org/drawingml/2006/main" r:embed="Ra72819ae28204a3f"/>
           <a:stretch xmlns:a="http://schemas.openxmlformats.org/drawingml/2006/main"/>
         </p:blipFill>
         <p:spPr>
@@ -30612,7 +30612,7 @@
           <p:cNvPr id="7" name="">
             <a:extLst xmlns:a="http://schemas.openxmlformats.org/drawingml/2006/main">
               <a:ext uri="{FF2B5EF4-FFF2-40B4-BE49-F238E27FC236}">
-                <a16:creationId xmlns:a16="http://schemas.microsoft.com/office/drawing/2014/main" id="{0864F2E2-35D6-4D75-9408-8B4ABC4B5E3A}"/>
+                <a16:creationId xmlns:a16="http://schemas.microsoft.com/office/drawing/2014/main" id="{839E7BDF-A9A9-4B1B-BEB3-164D041D4ACB}"/>
               </a:ext>
             </a:extLst>
           </p:cNvPr>
@@ -30664,7 +30664,7 @@
           <p:cNvPr id="8" name="">
             <a:extLst xmlns:a="http://schemas.openxmlformats.org/drawingml/2006/main">
               <a:ext uri="{FF2B5EF4-FFF2-40B4-BE49-F238E27FC236}">
-                <a16:creationId xmlns:a16="http://schemas.microsoft.com/office/drawing/2014/main" id="{065D4FA9-A644-4C07-9262-53549F062977}"/>
+                <a16:creationId xmlns:a16="http://schemas.microsoft.com/office/drawing/2014/main" id="{5E3F50CD-6C48-4B17-8C66-B85AF534D480}"/>
               </a:ext>
             </a:extLst>
           </p:cNvPr>
@@ -30716,7 +30716,7 @@
           <p:cNvPr id="9" name="">
             <a:extLst xmlns:a="http://schemas.openxmlformats.org/drawingml/2006/main">
               <a:ext uri="{FF2B5EF4-FFF2-40B4-BE49-F238E27FC236}">
-                <a16:creationId xmlns:a16="http://schemas.microsoft.com/office/drawing/2014/main" id="{4AF06B84-1032-4459-A324-551A98684070}"/>
+                <a16:creationId xmlns:a16="http://schemas.microsoft.com/office/drawing/2014/main" id="{1567379C-11D2-4CB4-91FE-6077FAA7792B}"/>
               </a:ext>
             </a:extLst>
           </p:cNvPr>
@@ -30768,7 +30768,7 @@
           <p:cNvPr id="10" name="">
             <a:extLst xmlns:a="http://schemas.openxmlformats.org/drawingml/2006/main">
               <a:ext uri="{FF2B5EF4-FFF2-40B4-BE49-F238E27FC236}">
-                <a16:creationId xmlns:a16="http://schemas.microsoft.com/office/drawing/2014/main" id="{8B9E94DF-C8A3-4F01-8517-F8C9CEE50ABA}"/>
+                <a16:creationId xmlns:a16="http://schemas.microsoft.com/office/drawing/2014/main" id="{67BBA1F9-95B7-45CC-95D4-2D32A7C2D021}"/>
               </a:ext>
             </a:extLst>
           </p:cNvPr>
@@ -30820,7 +30820,7 @@
           <p:cNvPr id="11" name="">
             <a:extLst xmlns:a="http://schemas.openxmlformats.org/drawingml/2006/main">
               <a:ext uri="{FF2B5EF4-FFF2-40B4-BE49-F238E27FC236}">
-                <a16:creationId xmlns:a16="http://schemas.microsoft.com/office/drawing/2014/main" id="{BE3FED6B-9583-474D-839D-D5DB8F48CA90}"/>
+                <a16:creationId xmlns:a16="http://schemas.microsoft.com/office/drawing/2014/main" id="{DD5FE99B-7FEB-474D-8713-837514BA45F8}"/>
               </a:ext>
             </a:extLst>
           </p:cNvPr>
@@ -30863,7 +30863,7 @@
           <p:cNvPr id="12" name="">
             <a:extLst xmlns:a="http://schemas.openxmlformats.org/drawingml/2006/main">
               <a:ext uri="{FF2B5EF4-FFF2-40B4-BE49-F238E27FC236}">
-                <a16:creationId xmlns:a16="http://schemas.microsoft.com/office/drawing/2014/main" id="{F8B12B4E-987C-43AA-A054-A0BD1894C24C}"/>
+                <a16:creationId xmlns:a16="http://schemas.microsoft.com/office/drawing/2014/main" id="{396BD228-BF26-4093-8490-8481DADA7247}"/>
               </a:ext>
             </a:extLst>
           </p:cNvPr>
@@ -30894,7 +30894,7 @@
           <p:cNvPr id="13" name="">
             <a:extLst xmlns:a="http://schemas.openxmlformats.org/drawingml/2006/main">
               <a:ext uri="{FF2B5EF4-FFF2-40B4-BE49-F238E27FC236}">
-                <a16:creationId xmlns:a16="http://schemas.microsoft.com/office/drawing/2014/main" id="{35A21295-82DB-4CB8-AF55-929611CC9517}"/>
+                <a16:creationId xmlns:a16="http://schemas.microsoft.com/office/drawing/2014/main" id="{9DD54629-CB17-41D1-9F72-D03D800217C4}"/>
               </a:ext>
             </a:extLst>
           </p:cNvPr>
@@ -30925,7 +30925,7 @@
           <p:cNvPr id="14" name="">
             <a:extLst xmlns:a="http://schemas.openxmlformats.org/drawingml/2006/main">
               <a:ext uri="{FF2B5EF4-FFF2-40B4-BE49-F238E27FC236}">
-                <a16:creationId xmlns:a16="http://schemas.microsoft.com/office/drawing/2014/main" id="{46CDEFF2-CACD-4703-B521-8346DCCC12F2}"/>
+                <a16:creationId xmlns:a16="http://schemas.microsoft.com/office/drawing/2014/main" id="{D6E712F8-C073-44E3-A596-F817190D77B2}"/>
               </a:ext>
             </a:extLst>
           </p:cNvPr>
@@ -30968,7 +30968,7 @@
           <p:cNvPr id="15" name="">
             <a:extLst xmlns:a="http://schemas.openxmlformats.org/drawingml/2006/main">
               <a:ext uri="{FF2B5EF4-FFF2-40B4-BE49-F238E27FC236}">
-                <a16:creationId xmlns:a16="http://schemas.microsoft.com/office/drawing/2014/main" id="{A903A40D-5BA2-412C-BF61-74C1214190F7}"/>
+                <a16:creationId xmlns:a16="http://schemas.microsoft.com/office/drawing/2014/main" id="{5A4CCEE9-0D93-4983-92FF-A47455B34E5B}"/>
               </a:ext>
             </a:extLst>
           </p:cNvPr>
@@ -30999,7 +30999,7 @@
           <p:cNvPr id="16" name="">
             <a:extLst xmlns:a="http://schemas.openxmlformats.org/drawingml/2006/main">
               <a:ext uri="{FF2B5EF4-FFF2-40B4-BE49-F238E27FC236}">
-                <a16:creationId xmlns:a16="http://schemas.microsoft.com/office/drawing/2014/main" id="{6A561C27-DE42-44BD-8336-68FB4D159FB0}"/>
+                <a16:creationId xmlns:a16="http://schemas.microsoft.com/office/drawing/2014/main" id="{00FC96F0-9F0F-42CA-9AF4-DA97D0D520B1}"/>
               </a:ext>
             </a:extLst>
           </p:cNvPr>
@@ -31030,7 +31030,7 @@
           <p:cNvPr id="17" name="">
             <a:extLst xmlns:a="http://schemas.openxmlformats.org/drawingml/2006/main">
               <a:ext uri="{FF2B5EF4-FFF2-40B4-BE49-F238E27FC236}">
-                <a16:creationId xmlns:a16="http://schemas.microsoft.com/office/drawing/2014/main" id="{8979D26D-EAF6-4B45-8BE6-D082A8B97D71}"/>
+                <a16:creationId xmlns:a16="http://schemas.microsoft.com/office/drawing/2014/main" id="{3725ED96-8A62-4917-9375-4401A3866437}"/>
               </a:ext>
             </a:extLst>
           </p:cNvPr>
@@ -31082,7 +31082,7 @@
           <p:cNvPr id="18" name="">
             <a:extLst xmlns:a="http://schemas.openxmlformats.org/drawingml/2006/main">
               <a:ext uri="{FF2B5EF4-FFF2-40B4-BE49-F238E27FC236}">
-                <a16:creationId xmlns:a16="http://schemas.microsoft.com/office/drawing/2014/main" id="{BF98231F-ACC2-4850-8C3F-EE24A3E90608}"/>
+                <a16:creationId xmlns:a16="http://schemas.microsoft.com/office/drawing/2014/main" id="{7E6844EF-1ECF-4461-88AC-418DBEF131CC}"/>
               </a:ext>
             </a:extLst>
           </p:cNvPr>
@@ -31134,7 +31134,7 @@
           <p:cNvPr id="19" name="">
             <a:extLst xmlns:a="http://schemas.openxmlformats.org/drawingml/2006/main">
               <a:ext uri="{FF2B5EF4-FFF2-40B4-BE49-F238E27FC236}">
-                <a16:creationId xmlns:a16="http://schemas.microsoft.com/office/drawing/2014/main" id="{867D2123-E8EF-44D8-98B5-B2010CB63246}"/>
+                <a16:creationId xmlns:a16="http://schemas.microsoft.com/office/drawing/2014/main" id="{DD6BF9E1-883F-4E3E-8A35-2DA4258E25A5}"/>
               </a:ext>
             </a:extLst>
           </p:cNvPr>
@@ -31186,7 +31186,7 @@
           <p:cNvPr id="20" name="">
             <a:extLst xmlns:a="http://schemas.openxmlformats.org/drawingml/2006/main">
               <a:ext uri="{FF2B5EF4-FFF2-40B4-BE49-F238E27FC236}">
-                <a16:creationId xmlns:a16="http://schemas.microsoft.com/office/drawing/2014/main" id="{06547984-7C0B-4482-A73D-73BB113773D3}"/>
+                <a16:creationId xmlns:a16="http://schemas.microsoft.com/office/drawing/2014/main" id="{AA931DF2-A511-4713-860D-E725B9683EEE}"/>
               </a:ext>
             </a:extLst>
           </p:cNvPr>
@@ -31229,7 +31229,7 @@
           <p:cNvPr id="21" name="">
             <a:extLst xmlns:a="http://schemas.openxmlformats.org/drawingml/2006/main">
               <a:ext uri="{FF2B5EF4-FFF2-40B4-BE49-F238E27FC236}">
-                <a16:creationId xmlns:a16="http://schemas.microsoft.com/office/drawing/2014/main" id="{D986BD80-0B8B-4E62-9342-A03528379FEE}"/>
+                <a16:creationId xmlns:a16="http://schemas.microsoft.com/office/drawing/2014/main" id="{301F2694-5E31-4CC6-985C-438306DA060E}"/>
               </a:ext>
             </a:extLst>
           </p:cNvPr>
@@ -31260,7 +31260,7 @@
           <p:cNvPr id="22" name="">
             <a:extLst xmlns:a="http://schemas.openxmlformats.org/drawingml/2006/main">
               <a:ext uri="{FF2B5EF4-FFF2-40B4-BE49-F238E27FC236}">
-                <a16:creationId xmlns:a16="http://schemas.microsoft.com/office/drawing/2014/main" id="{EC8956BD-FF0E-4A08-8E00-F6FB3C26D5B2}"/>
+                <a16:creationId xmlns:a16="http://schemas.microsoft.com/office/drawing/2014/main" id="{53EFF582-79D2-411B-92AE-1C1E3F2059C7}"/>
               </a:ext>
             </a:extLst>
           </p:cNvPr>
@@ -31291,7 +31291,7 @@
           <p:cNvPr id="23" name="">
             <a:extLst xmlns:a="http://schemas.openxmlformats.org/drawingml/2006/main">
               <a:ext uri="{FF2B5EF4-FFF2-40B4-BE49-F238E27FC236}">
-                <a16:creationId xmlns:a16="http://schemas.microsoft.com/office/drawing/2014/main" id="{57777F9B-379E-45CF-AF7E-FCEEB3759846}"/>
+                <a16:creationId xmlns:a16="http://schemas.microsoft.com/office/drawing/2014/main" id="{017B41B4-22D3-4DD6-BFA0-AD67E39D0292}"/>
               </a:ext>
             </a:extLst>
           </p:cNvPr>
@@ -31343,7 +31343,7 @@
           <p:cNvPr id="24" name="">
             <a:extLst xmlns:a="http://schemas.openxmlformats.org/drawingml/2006/main">
               <a:ext uri="{FF2B5EF4-FFF2-40B4-BE49-F238E27FC236}">
-                <a16:creationId xmlns:a16="http://schemas.microsoft.com/office/drawing/2014/main" id="{F23B50F4-993B-48C9-9C0D-172841E003AF}"/>
+                <a16:creationId xmlns:a16="http://schemas.microsoft.com/office/drawing/2014/main" id="{4B39C38E-9793-410F-858F-040978D8DF82}"/>
               </a:ext>
             </a:extLst>
           </p:cNvPr>
@@ -31395,7 +31395,7 @@
           <p:cNvPr id="25" name="">
             <a:extLst xmlns:a="http://schemas.openxmlformats.org/drawingml/2006/main">
               <a:ext uri="{FF2B5EF4-FFF2-40B4-BE49-F238E27FC236}">
-                <a16:creationId xmlns:a16="http://schemas.microsoft.com/office/drawing/2014/main" id="{85E64DB7-CCE2-4CB4-B0D7-0433FAA9BE32}"/>
+                <a16:creationId xmlns:a16="http://schemas.microsoft.com/office/drawing/2014/main" id="{1AC1B13B-C9F6-4A72-BDA1-6A78462FF9EA}"/>
               </a:ext>
             </a:extLst>
           </p:cNvPr>
@@ -31447,7 +31447,7 @@
           <p:cNvPr id="26" name="">
             <a:extLst xmlns:a="http://schemas.openxmlformats.org/drawingml/2006/main">
               <a:ext uri="{FF2B5EF4-FFF2-40B4-BE49-F238E27FC236}">
-                <a16:creationId xmlns:a16="http://schemas.microsoft.com/office/drawing/2014/main" id="{6BF3E947-847B-4A7D-AE58-218583F789E6}"/>
+                <a16:creationId xmlns:a16="http://schemas.microsoft.com/office/drawing/2014/main" id="{057C5EBB-08DF-4642-8810-E95BA09A87BC}"/>
               </a:ext>
             </a:extLst>
           </p:cNvPr>
@@ -31490,7 +31490,7 @@
           <p:cNvPr id="27" name="">
             <a:extLst xmlns:a="http://schemas.openxmlformats.org/drawingml/2006/main">
               <a:ext uri="{FF2B5EF4-FFF2-40B4-BE49-F238E27FC236}">
-                <a16:creationId xmlns:a16="http://schemas.microsoft.com/office/drawing/2014/main" id="{9A24BAF2-EB2F-406A-82E1-B32C5BC933EE}"/>
+                <a16:creationId xmlns:a16="http://schemas.microsoft.com/office/drawing/2014/main" id="{FEA5B4B1-0F8D-41D2-A286-D76713A4C951}"/>
               </a:ext>
             </a:extLst>
           </p:cNvPr>
@@ -31521,7 +31521,7 @@
           <p:cNvPr id="28" name="">
             <a:extLst xmlns:a="http://schemas.openxmlformats.org/drawingml/2006/main">
               <a:ext uri="{FF2B5EF4-FFF2-40B4-BE49-F238E27FC236}">
-                <a16:creationId xmlns:a16="http://schemas.microsoft.com/office/drawing/2014/main" id="{5C4D7C2E-DBAB-4514-9893-4CDF177C52F3}"/>
+                <a16:creationId xmlns:a16="http://schemas.microsoft.com/office/drawing/2014/main" id="{D5995CC0-5877-49AE-BF08-A47FC919635D}"/>
               </a:ext>
             </a:extLst>
           </p:cNvPr>
@@ -31552,7 +31552,7 @@
           <p:cNvPr id="29" name="">
             <a:extLst xmlns:a="http://schemas.openxmlformats.org/drawingml/2006/main">
               <a:ext uri="{FF2B5EF4-FFF2-40B4-BE49-F238E27FC236}">
-                <a16:creationId xmlns:a16="http://schemas.microsoft.com/office/drawing/2014/main" id="{90522B79-FCEC-4CEB-A098-F99CAAE62646}"/>
+                <a16:creationId xmlns:a16="http://schemas.microsoft.com/office/drawing/2014/main" id="{D51DDC5A-95E6-46E4-8688-3356890E5327}"/>
               </a:ext>
             </a:extLst>
           </p:cNvPr>
@@ -31604,7 +31604,7 @@
           <p:cNvPr id="30" name="">
             <a:extLst xmlns:a="http://schemas.openxmlformats.org/drawingml/2006/main">
               <a:ext uri="{FF2B5EF4-FFF2-40B4-BE49-F238E27FC236}">
-                <a16:creationId xmlns:a16="http://schemas.microsoft.com/office/drawing/2014/main" id="{3564B2D9-6B88-4C11-B3A3-FB2B0C4685F5}"/>
+                <a16:creationId xmlns:a16="http://schemas.microsoft.com/office/drawing/2014/main" id="{1B2CE442-B0C7-481C-BAAB-620EFCFFCBC7}"/>
               </a:ext>
             </a:extLst>
           </p:cNvPr>
@@ -31656,7 +31656,7 @@
           <p:cNvPr id="31" name="">
             <a:extLst xmlns:a="http://schemas.openxmlformats.org/drawingml/2006/main">
               <a:ext uri="{FF2B5EF4-FFF2-40B4-BE49-F238E27FC236}">
-                <a16:creationId xmlns:a16="http://schemas.microsoft.com/office/drawing/2014/main" id="{8558D821-E179-4DB1-9D3C-53EA085BCA96}"/>
+                <a16:creationId xmlns:a16="http://schemas.microsoft.com/office/drawing/2014/main" id="{72C0C5CF-F7DE-4491-94C7-4722960C6667}"/>
               </a:ext>
             </a:extLst>
           </p:cNvPr>
@@ -31708,7 +31708,7 @@
           <p:cNvPr id="32" name="">
             <a:extLst xmlns:a="http://schemas.openxmlformats.org/drawingml/2006/main">
               <a:ext uri="{FF2B5EF4-FFF2-40B4-BE49-F238E27FC236}">
-                <a16:creationId xmlns:a16="http://schemas.microsoft.com/office/drawing/2014/main" id="{72D9BE06-B842-47FD-A6F5-39F46CC46CB3}"/>
+                <a16:creationId xmlns:a16="http://schemas.microsoft.com/office/drawing/2014/main" id="{47A3F882-63CC-40FF-B240-D61D0A34FA48}"/>
               </a:ext>
             </a:extLst>
           </p:cNvPr>
@@ -31751,7 +31751,7 @@
           <p:cNvPr id="33" name="">
             <a:extLst xmlns:a="http://schemas.openxmlformats.org/drawingml/2006/main">
               <a:ext uri="{FF2B5EF4-FFF2-40B4-BE49-F238E27FC236}">
-                <a16:creationId xmlns:a16="http://schemas.microsoft.com/office/drawing/2014/main" id="{4DC91777-9F8D-4E78-BC1F-D1E6E6D530C5}"/>
+                <a16:creationId xmlns:a16="http://schemas.microsoft.com/office/drawing/2014/main" id="{E27F5B37-758C-4F45-9E2E-20540DBC05BA}"/>
               </a:ext>
             </a:extLst>
           </p:cNvPr>
@@ -31782,7 +31782,7 @@
           <p:cNvPr id="34" name="">
             <a:extLst xmlns:a="http://schemas.openxmlformats.org/drawingml/2006/main">
               <a:ext uri="{FF2B5EF4-FFF2-40B4-BE49-F238E27FC236}">
-                <a16:creationId xmlns:a16="http://schemas.microsoft.com/office/drawing/2014/main" id="{C247AA01-3559-49A9-8490-A5E8972CE51F}"/>
+                <a16:creationId xmlns:a16="http://schemas.microsoft.com/office/drawing/2014/main" id="{792730D0-E057-4EFE-A36B-BB04A5EA8753}"/>
               </a:ext>
             </a:extLst>
           </p:cNvPr>
@@ -31813,7 +31813,7 @@
           <p:cNvPr id="35" name="">
             <a:extLst xmlns:a="http://schemas.openxmlformats.org/drawingml/2006/main">
               <a:ext uri="{FF2B5EF4-FFF2-40B4-BE49-F238E27FC236}">
-                <a16:creationId xmlns:a16="http://schemas.microsoft.com/office/drawing/2014/main" id="{BD0402F6-373E-40A4-84EA-046D37658799}"/>
+                <a16:creationId xmlns:a16="http://schemas.microsoft.com/office/drawing/2014/main" id="{972916E9-0AEB-463C-9DB9-9EFAA62FE597}"/>
               </a:ext>
             </a:extLst>
           </p:cNvPr>
@@ -31865,7 +31865,7 @@
           <p:cNvPr id="36" name="">
             <a:extLst xmlns:a="http://schemas.openxmlformats.org/drawingml/2006/main">
               <a:ext uri="{FF2B5EF4-FFF2-40B4-BE49-F238E27FC236}">
-                <a16:creationId xmlns:a16="http://schemas.microsoft.com/office/drawing/2014/main" id="{F8A643C7-E665-40D5-8FF9-C80C346E4BD6}"/>
+                <a16:creationId xmlns:a16="http://schemas.microsoft.com/office/drawing/2014/main" id="{9F613984-1417-40E6-9CE8-2400173FAC0D}"/>
               </a:ext>
             </a:extLst>
           </p:cNvPr>
@@ -31917,7 +31917,7 @@
           <p:cNvPr id="37" name="">
             <a:extLst xmlns:a="http://schemas.openxmlformats.org/drawingml/2006/main">
               <a:ext uri="{FF2B5EF4-FFF2-40B4-BE49-F238E27FC236}">
-                <a16:creationId xmlns:a16="http://schemas.microsoft.com/office/drawing/2014/main" id="{00A6B85C-04D8-430F-8DA4-32476319036E}"/>
+                <a16:creationId xmlns:a16="http://schemas.microsoft.com/office/drawing/2014/main" id="{99E58B89-3C5D-4843-A4C8-B73B130A10AD}"/>
               </a:ext>
             </a:extLst>
           </p:cNvPr>
@@ -31973,10 +31973,10 @@
           <p:nvPr/>
         </p:nvPicPr>
         <p:blipFill>
-          <a:blip xmlns:r="http://schemas.openxmlformats.org/officeDocument/2006/relationships" xmlns:a="http://schemas.openxmlformats.org/drawingml/2006/main" r:embed="R7d11996f51424bcf">
+          <a:blip xmlns:r="http://schemas.openxmlformats.org/officeDocument/2006/relationships" xmlns:a="http://schemas.openxmlformats.org/drawingml/2006/main" r:embed="R442394b8816244f8">
             <a:extLst>
               <a:ext uri="{96DAC541-7B7A-43D3-8B79-37D633B846F1}">
-                <asvg:svgBlip xmlns:asvg="http://schemas.microsoft.com/office/drawing/2016/SVG/main" r:embed="R5e42d0b021c34cf0"/>
+                <asvg:svgBlip xmlns:asvg="http://schemas.microsoft.com/office/drawing/2016/SVG/main" r:embed="R1d1081224dc9407a"/>
               </a:ext>
             </a:extLst>
           </a:blip>
@@ -31997,7 +31997,7 @@
           <p:cNvPr id="39" name="">
             <a:extLst xmlns:a="http://schemas.openxmlformats.org/drawingml/2006/main">
               <a:ext uri="{FF2B5EF4-FFF2-40B4-BE49-F238E27FC236}">
-                <a16:creationId xmlns:a16="http://schemas.microsoft.com/office/drawing/2014/main" id="{F74BFA7B-ED55-42E8-90BE-97C1D16E333F}"/>
+                <a16:creationId xmlns:a16="http://schemas.microsoft.com/office/drawing/2014/main" id="{1D38E224-2098-466F-B955-90BD27606B47}"/>
               </a:ext>
             </a:extLst>
           </p:cNvPr>
@@ -32049,7 +32049,7 @@
           <p:cNvPr id="40" name="">
             <a:extLst xmlns:a="http://schemas.openxmlformats.org/drawingml/2006/main">
               <a:ext uri="{FF2B5EF4-FFF2-40B4-BE49-F238E27FC236}">
-                <a16:creationId xmlns:a16="http://schemas.microsoft.com/office/drawing/2014/main" id="{E2A66699-3EC3-46E5-99FE-7197FAECF2DA}"/>
+                <a16:creationId xmlns:a16="http://schemas.microsoft.com/office/drawing/2014/main" id="{17EEEBFF-4561-4D60-81AC-08ADA092EFA5}"/>
               </a:ext>
             </a:extLst>
           </p:cNvPr>
@@ -32101,7 +32101,7 @@
           <p:cNvPr id="41" name="">
             <a:extLst xmlns:a="http://schemas.openxmlformats.org/drawingml/2006/main">
               <a:ext uri="{FF2B5EF4-FFF2-40B4-BE49-F238E27FC236}">
-                <a16:creationId xmlns:a16="http://schemas.microsoft.com/office/drawing/2014/main" id="{FDA6F383-9122-481F-906F-CA2DB0309FAB}"/>
+                <a16:creationId xmlns:a16="http://schemas.microsoft.com/office/drawing/2014/main" id="{B94AAF79-2DBF-4C52-AC4B-98FF8A2A2616}"/>
               </a:ext>
             </a:extLst>
           </p:cNvPr>
@@ -32144,7 +32144,7 @@
           <p:cNvPr id="42" name="">
             <a:extLst xmlns:a="http://schemas.openxmlformats.org/drawingml/2006/main">
               <a:ext uri="{FF2B5EF4-FFF2-40B4-BE49-F238E27FC236}">
-                <a16:creationId xmlns:a16="http://schemas.microsoft.com/office/drawing/2014/main" id="{D01D223A-CE8A-4B84-A947-F1ECF2B43EAB}"/>
+                <a16:creationId xmlns:a16="http://schemas.microsoft.com/office/drawing/2014/main" id="{21D86121-4486-4F25-B538-77FA8B3ED364}"/>
               </a:ext>
             </a:extLst>
           </p:cNvPr>
@@ -32175,7 +32175,7 @@
           <p:cNvPr id="43" name="">
             <a:extLst xmlns:a="http://schemas.openxmlformats.org/drawingml/2006/main">
               <a:ext uri="{FF2B5EF4-FFF2-40B4-BE49-F238E27FC236}">
-                <a16:creationId xmlns:a16="http://schemas.microsoft.com/office/drawing/2014/main" id="{6F55DC53-B4C1-4C63-A617-74E00F8F54DB}"/>
+                <a16:creationId xmlns:a16="http://schemas.microsoft.com/office/drawing/2014/main" id="{B4F3CCF4-A4A0-4049-8C93-5292031B1596}"/>
               </a:ext>
             </a:extLst>
           </p:cNvPr>
@@ -32206,7 +32206,7 @@
           <p:cNvPr id="44" name="">
             <a:extLst xmlns:a="http://schemas.openxmlformats.org/drawingml/2006/main">
               <a:ext uri="{FF2B5EF4-FFF2-40B4-BE49-F238E27FC236}">
-                <a16:creationId xmlns:a16="http://schemas.microsoft.com/office/drawing/2014/main" id="{ED782DD9-C35D-4FC0-839A-EB5B768E9810}"/>
+                <a16:creationId xmlns:a16="http://schemas.microsoft.com/office/drawing/2014/main" id="{C2110941-86EB-4BE8-9392-EA7EC64CCBF8}"/>
               </a:ext>
             </a:extLst>
           </p:cNvPr>
@@ -32249,7 +32249,7 @@
           <p:cNvPr id="45" name="">
             <a:extLst xmlns:a="http://schemas.openxmlformats.org/drawingml/2006/main">
               <a:ext uri="{FF2B5EF4-FFF2-40B4-BE49-F238E27FC236}">
-                <a16:creationId xmlns:a16="http://schemas.microsoft.com/office/drawing/2014/main" id="{B1769BCE-63ED-415D-95C0-6C5336EBCFEB}"/>
+                <a16:creationId xmlns:a16="http://schemas.microsoft.com/office/drawing/2014/main" id="{64610AB7-144A-41E2-AB78-C0B709CC1478}"/>
               </a:ext>
             </a:extLst>
           </p:cNvPr>
@@ -32280,7 +32280,7 @@
           <p:cNvPr id="46" name="">
             <a:extLst xmlns:a="http://schemas.openxmlformats.org/drawingml/2006/main">
               <a:ext uri="{FF2B5EF4-FFF2-40B4-BE49-F238E27FC236}">
-                <a16:creationId xmlns:a16="http://schemas.microsoft.com/office/drawing/2014/main" id="{32ABB086-929D-4947-BA31-1328C1238AB9}"/>
+                <a16:creationId xmlns:a16="http://schemas.microsoft.com/office/drawing/2014/main" id="{9674FCCA-08A7-4B88-B0E9-67E7423F9A03}"/>
               </a:ext>
             </a:extLst>
           </p:cNvPr>
@@ -32311,7 +32311,7 @@
           <p:cNvPr id="47" name="">
             <a:extLst xmlns:a="http://schemas.openxmlformats.org/drawingml/2006/main">
               <a:ext uri="{FF2B5EF4-FFF2-40B4-BE49-F238E27FC236}">
-                <a16:creationId xmlns:a16="http://schemas.microsoft.com/office/drawing/2014/main" id="{F33335DF-ADE1-4F05-A61B-BE7374595539}"/>
+                <a16:creationId xmlns:a16="http://schemas.microsoft.com/office/drawing/2014/main" id="{974FB75A-EB89-49D2-9060-D1498D182324}"/>
               </a:ext>
             </a:extLst>
           </p:cNvPr>
@@ -32363,7 +32363,7 @@
           <p:cNvPr id="48" name="">
             <a:extLst xmlns:a="http://schemas.openxmlformats.org/drawingml/2006/main">
               <a:ext uri="{FF2B5EF4-FFF2-40B4-BE49-F238E27FC236}">
-                <a16:creationId xmlns:a16="http://schemas.microsoft.com/office/drawing/2014/main" id="{AE44D6C3-4FAE-46E1-8944-EDF304DACF65}"/>
+                <a16:creationId xmlns:a16="http://schemas.microsoft.com/office/drawing/2014/main" id="{8B4D06BB-B71A-4325-9A05-9545EAA6D373}"/>
               </a:ext>
             </a:extLst>
           </p:cNvPr>
@@ -32396,7 +32396,7 @@
           <p:cNvPr id="49" name="">
             <a:extLst xmlns:a="http://schemas.openxmlformats.org/drawingml/2006/main">
               <a:ext uri="{FF2B5EF4-FFF2-40B4-BE49-F238E27FC236}">
-                <a16:creationId xmlns:a16="http://schemas.microsoft.com/office/drawing/2014/main" id="{E102941D-4065-4C3A-99B3-6081B740608C}"/>
+                <a16:creationId xmlns:a16="http://schemas.microsoft.com/office/drawing/2014/main" id="{CFCE250C-3862-4226-AAA9-6CDDC1BF77E4}"/>
               </a:ext>
             </a:extLst>
           </p:cNvPr>
@@ -32448,7 +32448,7 @@
           <p:cNvPr id="50" name="">
             <a:extLst xmlns:a="http://schemas.openxmlformats.org/drawingml/2006/main">
               <a:ext uri="{FF2B5EF4-FFF2-40B4-BE49-F238E27FC236}">
-                <a16:creationId xmlns:a16="http://schemas.microsoft.com/office/drawing/2014/main" id="{EAB2D6C4-2F27-47B0-AEFE-155A558F3CD7}"/>
+                <a16:creationId xmlns:a16="http://schemas.microsoft.com/office/drawing/2014/main" id="{F22B5A2F-BBD1-4FEE-870C-7C67599C9933}"/>
               </a:ext>
             </a:extLst>
           </p:cNvPr>
@@ -32500,7 +32500,7 @@
           <p:cNvPr id="51" name="">
             <a:extLst xmlns:a="http://schemas.openxmlformats.org/drawingml/2006/main">
               <a:ext uri="{FF2B5EF4-FFF2-40B4-BE49-F238E27FC236}">
-                <a16:creationId xmlns:a16="http://schemas.microsoft.com/office/drawing/2014/main" id="{00CF1762-597F-412E-9F1C-ECF930CA2412}"/>
+                <a16:creationId xmlns:a16="http://schemas.microsoft.com/office/drawing/2014/main" id="{57149591-B13E-41E5-A9A6-0BA58123E13A}"/>
               </a:ext>
             </a:extLst>
           </p:cNvPr>
@@ -32552,7 +32552,7 @@
           <p:cNvPr id="52" name="">
             <a:extLst xmlns:a="http://schemas.openxmlformats.org/drawingml/2006/main">
               <a:ext uri="{FF2B5EF4-FFF2-40B4-BE49-F238E27FC236}">
-                <a16:creationId xmlns:a16="http://schemas.microsoft.com/office/drawing/2014/main" id="{9487D256-505A-4841-8BDF-9FD90F8ECCEE}"/>
+                <a16:creationId xmlns:a16="http://schemas.microsoft.com/office/drawing/2014/main" id="{B3383F72-844E-410D-9D08-31B2B2B9A052}"/>
               </a:ext>
             </a:extLst>
           </p:cNvPr>
@@ -32595,7 +32595,7 @@
           <p:cNvPr id="53" name="">
             <a:extLst xmlns:a="http://schemas.openxmlformats.org/drawingml/2006/main">
               <a:ext uri="{FF2B5EF4-FFF2-40B4-BE49-F238E27FC236}">
-                <a16:creationId xmlns:a16="http://schemas.microsoft.com/office/drawing/2014/main" id="{518FAF62-4199-4EFA-B6CB-0A0A7B63E0A5}"/>
+                <a16:creationId xmlns:a16="http://schemas.microsoft.com/office/drawing/2014/main" id="{0DD36DF4-B92D-4DF7-BF1A-BC4010884A1F}"/>
               </a:ext>
             </a:extLst>
           </p:cNvPr>
@@ -32626,7 +32626,7 @@
           <p:cNvPr id="54" name="">
             <a:extLst xmlns:a="http://schemas.openxmlformats.org/drawingml/2006/main">
               <a:ext uri="{FF2B5EF4-FFF2-40B4-BE49-F238E27FC236}">
-                <a16:creationId xmlns:a16="http://schemas.microsoft.com/office/drawing/2014/main" id="{AE9C2629-80D9-4B78-A1A0-CBF14F0B4BB1}"/>
+                <a16:creationId xmlns:a16="http://schemas.microsoft.com/office/drawing/2014/main" id="{10BA16F3-251C-4AFF-9EFE-0AAAFA10401A}"/>
               </a:ext>
             </a:extLst>
           </p:cNvPr>
@@ -32657,7 +32657,7 @@
           <p:cNvPr id="55" name="">
             <a:extLst xmlns:a="http://schemas.openxmlformats.org/drawingml/2006/main">
               <a:ext uri="{FF2B5EF4-FFF2-40B4-BE49-F238E27FC236}">
-                <a16:creationId xmlns:a16="http://schemas.microsoft.com/office/drawing/2014/main" id="{49F8457C-F88C-4A73-B88D-F39057D88DFF}"/>
+                <a16:creationId xmlns:a16="http://schemas.microsoft.com/office/drawing/2014/main" id="{E9B53690-387D-4558-A117-98F45B09C4CF}"/>
               </a:ext>
             </a:extLst>
           </p:cNvPr>
@@ -32709,7 +32709,7 @@
           <p:cNvPr id="56" name="">
             <a:extLst xmlns:a="http://schemas.openxmlformats.org/drawingml/2006/main">
               <a:ext uri="{FF2B5EF4-FFF2-40B4-BE49-F238E27FC236}">
-                <a16:creationId xmlns:a16="http://schemas.microsoft.com/office/drawing/2014/main" id="{85222D57-A52C-48ED-986C-1DCA2FE5A9B1}"/>
+                <a16:creationId xmlns:a16="http://schemas.microsoft.com/office/drawing/2014/main" id="{6AEA05B3-4659-4305-9A16-58C6F8EC0981}"/>
               </a:ext>
             </a:extLst>
           </p:cNvPr>
@@ -32742,7 +32742,7 @@
           <p:cNvPr id="57" name="">
             <a:extLst xmlns:a="http://schemas.openxmlformats.org/drawingml/2006/main">
               <a:ext uri="{FF2B5EF4-FFF2-40B4-BE49-F238E27FC236}">
-                <a16:creationId xmlns:a16="http://schemas.microsoft.com/office/drawing/2014/main" id="{0BE40574-2888-48FC-8688-A19D387DD380}"/>
+                <a16:creationId xmlns:a16="http://schemas.microsoft.com/office/drawing/2014/main" id="{A3C00222-818B-43CD-AC02-7496298E633E}"/>
               </a:ext>
             </a:extLst>
           </p:cNvPr>
@@ -32794,7 +32794,7 @@
           <p:cNvPr id="58" name="">
             <a:extLst xmlns:a="http://schemas.openxmlformats.org/drawingml/2006/main">
               <a:ext uri="{FF2B5EF4-FFF2-40B4-BE49-F238E27FC236}">
-                <a16:creationId xmlns:a16="http://schemas.microsoft.com/office/drawing/2014/main" id="{822B1E78-664E-4596-A56A-7DD93E9D6336}"/>
+                <a16:creationId xmlns:a16="http://schemas.microsoft.com/office/drawing/2014/main" id="{31EA9D5F-043F-47A3-A7CF-927CB46D8F9B}"/>
               </a:ext>
             </a:extLst>
           </p:cNvPr>
@@ -32846,7 +32846,7 @@
           <p:cNvPr id="59" name="">
             <a:extLst xmlns:a="http://schemas.openxmlformats.org/drawingml/2006/main">
               <a:ext uri="{FF2B5EF4-FFF2-40B4-BE49-F238E27FC236}">
-                <a16:creationId xmlns:a16="http://schemas.microsoft.com/office/drawing/2014/main" id="{5A55ED34-FC55-4FB6-A7A4-66B894DAA110}"/>
+                <a16:creationId xmlns:a16="http://schemas.microsoft.com/office/drawing/2014/main" id="{0862233E-3F76-4A9A-90F4-A2C000D68C90}"/>
               </a:ext>
             </a:extLst>
           </p:cNvPr>
@@ -32898,7 +32898,7 @@
           <p:cNvPr id="60" name="">
             <a:extLst xmlns:a="http://schemas.openxmlformats.org/drawingml/2006/main">
               <a:ext uri="{FF2B5EF4-FFF2-40B4-BE49-F238E27FC236}">
-                <a16:creationId xmlns:a16="http://schemas.microsoft.com/office/drawing/2014/main" id="{76B7CDBA-C7A3-4506-82DD-1D06332C39E7}"/>
+                <a16:creationId xmlns:a16="http://schemas.microsoft.com/office/drawing/2014/main" id="{1D47DD3A-5843-4A6D-91F0-3F86B98BF7B9}"/>
               </a:ext>
             </a:extLst>
           </p:cNvPr>
@@ -32941,7 +32941,7 @@
           <p:cNvPr id="61" name="">
             <a:extLst xmlns:a="http://schemas.openxmlformats.org/drawingml/2006/main">
               <a:ext uri="{FF2B5EF4-FFF2-40B4-BE49-F238E27FC236}">
-                <a16:creationId xmlns:a16="http://schemas.microsoft.com/office/drawing/2014/main" id="{5F44A71D-DCC2-4F4A-B5C3-030A016DF425}"/>
+                <a16:creationId xmlns:a16="http://schemas.microsoft.com/office/drawing/2014/main" id="{B4B941FD-F104-4DB6-B663-424758706848}"/>
               </a:ext>
             </a:extLst>
           </p:cNvPr>
@@ -32972,7 +32972,7 @@
           <p:cNvPr id="62" name="">
             <a:extLst xmlns:a="http://schemas.openxmlformats.org/drawingml/2006/main">
               <a:ext uri="{FF2B5EF4-FFF2-40B4-BE49-F238E27FC236}">
-                <a16:creationId xmlns:a16="http://schemas.microsoft.com/office/drawing/2014/main" id="{9CC288EB-37CC-4711-8A5D-24AF271A8196}"/>
+                <a16:creationId xmlns:a16="http://schemas.microsoft.com/office/drawing/2014/main" id="{B66803BD-E9E3-4335-AC53-DC81FA106A94}"/>
               </a:ext>
             </a:extLst>
           </p:cNvPr>
@@ -33003,7 +33003,7 @@
           <p:cNvPr id="63" name="">
             <a:extLst xmlns:a="http://schemas.openxmlformats.org/drawingml/2006/main">
               <a:ext uri="{FF2B5EF4-FFF2-40B4-BE49-F238E27FC236}">
-                <a16:creationId xmlns:a16="http://schemas.microsoft.com/office/drawing/2014/main" id="{CB79FCA5-4787-4D3D-B227-25BDF7599B27}"/>
+                <a16:creationId xmlns:a16="http://schemas.microsoft.com/office/drawing/2014/main" id="{AA7BE2A3-CD91-46CE-A3DC-5A578C8C3C6D}"/>
               </a:ext>
             </a:extLst>
           </p:cNvPr>
@@ -33055,7 +33055,7 @@
           <p:cNvPr id="64" name="">
             <a:extLst xmlns:a="http://schemas.openxmlformats.org/drawingml/2006/main">
               <a:ext uri="{FF2B5EF4-FFF2-40B4-BE49-F238E27FC236}">
-                <a16:creationId xmlns:a16="http://schemas.microsoft.com/office/drawing/2014/main" id="{447CEA02-F5A5-4483-B0D1-3228EBCC7C99}"/>
+                <a16:creationId xmlns:a16="http://schemas.microsoft.com/office/drawing/2014/main" id="{AFD42AA6-9E9F-438F-8A47-3A32BC586EF7}"/>
               </a:ext>
             </a:extLst>
           </p:cNvPr>
@@ -33088,7 +33088,7 @@
           <p:cNvPr id="65" name="">
             <a:extLst xmlns:a="http://schemas.openxmlformats.org/drawingml/2006/main">
               <a:ext uri="{FF2B5EF4-FFF2-40B4-BE49-F238E27FC236}">
-                <a16:creationId xmlns:a16="http://schemas.microsoft.com/office/drawing/2014/main" id="{FA6E2D21-AA63-4A48-A730-B8DF54574CDB}"/>
+                <a16:creationId xmlns:a16="http://schemas.microsoft.com/office/drawing/2014/main" id="{75D45C10-DDC1-4705-BC6E-18BD68BE2700}"/>
               </a:ext>
             </a:extLst>
           </p:cNvPr>
@@ -33140,7 +33140,7 @@
           <p:cNvPr id="66" name="">
             <a:extLst xmlns:a="http://schemas.openxmlformats.org/drawingml/2006/main">
               <a:ext uri="{FF2B5EF4-FFF2-40B4-BE49-F238E27FC236}">
-                <a16:creationId xmlns:a16="http://schemas.microsoft.com/office/drawing/2014/main" id="{39FBD382-A90F-4311-B003-F0F632D45726}"/>
+                <a16:creationId xmlns:a16="http://schemas.microsoft.com/office/drawing/2014/main" id="{8C2666AE-04C1-4DCF-8EF8-ED979ABC661D}"/>
               </a:ext>
             </a:extLst>
           </p:cNvPr>
@@ -33192,7 +33192,7 @@
           <p:cNvPr id="67" name="">
             <a:extLst xmlns:a="http://schemas.openxmlformats.org/drawingml/2006/main">
               <a:ext uri="{FF2B5EF4-FFF2-40B4-BE49-F238E27FC236}">
-                <a16:creationId xmlns:a16="http://schemas.microsoft.com/office/drawing/2014/main" id="{FFC5B656-EACC-4E9B-BB56-EC76CEB4709A}"/>
+                <a16:creationId xmlns:a16="http://schemas.microsoft.com/office/drawing/2014/main" id="{A1804996-C119-4D9C-93B6-DEA59DFBBFB3}"/>
               </a:ext>
             </a:extLst>
           </p:cNvPr>
@@ -33244,7 +33244,7 @@
           <p:cNvPr id="68" name="">
             <a:extLst xmlns:a="http://schemas.openxmlformats.org/drawingml/2006/main">
               <a:ext uri="{FF2B5EF4-FFF2-40B4-BE49-F238E27FC236}">
-                <a16:creationId xmlns:a16="http://schemas.microsoft.com/office/drawing/2014/main" id="{E8FB9069-307B-4154-B35A-E2BBBC1298E3}"/>
+                <a16:creationId xmlns:a16="http://schemas.microsoft.com/office/drawing/2014/main" id="{84CF3604-630A-4CC2-B60D-EDFB0CA2A51A}"/>
               </a:ext>
             </a:extLst>
           </p:cNvPr>
@@ -33287,7 +33287,7 @@
           <p:cNvPr id="69" name="">
             <a:extLst xmlns:a="http://schemas.openxmlformats.org/drawingml/2006/main">
               <a:ext uri="{FF2B5EF4-FFF2-40B4-BE49-F238E27FC236}">
-                <a16:creationId xmlns:a16="http://schemas.microsoft.com/office/drawing/2014/main" id="{DB562296-79D3-4A95-9FAE-C8A6E2A4E82F}"/>
+                <a16:creationId xmlns:a16="http://schemas.microsoft.com/office/drawing/2014/main" id="{0E9E6D19-CCB3-46FF-9210-5304D71F55B5}"/>
               </a:ext>
             </a:extLst>
           </p:cNvPr>
@@ -33318,7 +33318,7 @@
           <p:cNvPr id="70" name="">
             <a:extLst xmlns:a="http://schemas.openxmlformats.org/drawingml/2006/main">
               <a:ext uri="{FF2B5EF4-FFF2-40B4-BE49-F238E27FC236}">
-                <a16:creationId xmlns:a16="http://schemas.microsoft.com/office/drawing/2014/main" id="{E0941EFD-E266-4731-A438-5C3DD43C54F6}"/>
+                <a16:creationId xmlns:a16="http://schemas.microsoft.com/office/drawing/2014/main" id="{8B056CE9-1D73-466B-8365-5D3074D44527}"/>
               </a:ext>
             </a:extLst>
           </p:cNvPr>
@@ -33349,7 +33349,7 @@
           <p:cNvPr id="71" name="">
             <a:extLst xmlns:a="http://schemas.openxmlformats.org/drawingml/2006/main">
               <a:ext uri="{FF2B5EF4-FFF2-40B4-BE49-F238E27FC236}">
-                <a16:creationId xmlns:a16="http://schemas.microsoft.com/office/drawing/2014/main" id="{2085C621-8CF0-499E-9622-FEEF6037B0F0}"/>
+                <a16:creationId xmlns:a16="http://schemas.microsoft.com/office/drawing/2014/main" id="{F4F41832-D6D3-4CF4-B620-9EAF1FB2449F}"/>
               </a:ext>
             </a:extLst>
           </p:cNvPr>
@@ -33401,7 +33401,7 @@
           <p:cNvPr id="72" name="">
             <a:extLst xmlns:a="http://schemas.openxmlformats.org/drawingml/2006/main">
               <a:ext uri="{FF2B5EF4-FFF2-40B4-BE49-F238E27FC236}">
-                <a16:creationId xmlns:a16="http://schemas.microsoft.com/office/drawing/2014/main" id="{EFFBC7F2-F573-4ED4-BAB4-954CD010B830}"/>
+                <a16:creationId xmlns:a16="http://schemas.microsoft.com/office/drawing/2014/main" id="{A2726874-6570-4F82-ACAB-E03165C8EFE4}"/>
               </a:ext>
             </a:extLst>
           </p:cNvPr>
@@ -33434,7 +33434,7 @@
           <p:cNvPr id="73" name="">
             <a:extLst xmlns:a="http://schemas.openxmlformats.org/drawingml/2006/main">
               <a:ext uri="{FF2B5EF4-FFF2-40B4-BE49-F238E27FC236}">
-                <a16:creationId xmlns:a16="http://schemas.microsoft.com/office/drawing/2014/main" id="{23CC0CA1-D137-40A5-8EA1-1E6DA52E37B7}"/>
+                <a16:creationId xmlns:a16="http://schemas.microsoft.com/office/drawing/2014/main" id="{8DB669A0-693F-4A89-B624-71A8919A63A1}"/>
               </a:ext>
             </a:extLst>
           </p:cNvPr>
@@ -33486,7 +33486,7 @@
           <p:cNvPr id="74" name="">
             <a:extLst xmlns:a="http://schemas.openxmlformats.org/drawingml/2006/main">
               <a:ext uri="{FF2B5EF4-FFF2-40B4-BE49-F238E27FC236}">
-                <a16:creationId xmlns:a16="http://schemas.microsoft.com/office/drawing/2014/main" id="{BDD6D785-FEB6-4706-B2F8-42A3946E8A6E}"/>
+                <a16:creationId xmlns:a16="http://schemas.microsoft.com/office/drawing/2014/main" id="{1D490DBF-2776-403E-A05A-670F380B9D93}"/>
               </a:ext>
             </a:extLst>
           </p:cNvPr>
@@ -33538,7 +33538,7 @@
           <p:cNvPr id="75" name="">
             <a:extLst xmlns:a="http://schemas.openxmlformats.org/drawingml/2006/main">
               <a:ext uri="{FF2B5EF4-FFF2-40B4-BE49-F238E27FC236}">
-                <a16:creationId xmlns:a16="http://schemas.microsoft.com/office/drawing/2014/main" id="{BC301BC0-C710-41A4-AC46-E3E7DBDA62DD}"/>
+                <a16:creationId xmlns:a16="http://schemas.microsoft.com/office/drawing/2014/main" id="{4407175A-EDFC-4A49-8E29-90ACAD2D4D6B}"/>
               </a:ext>
             </a:extLst>
           </p:cNvPr>
@@ -33588,7 +33588,7 @@
     </p:spTree>
     <p:extLst>
       <p:ext uri="{BB962C8B-B14F-4D97-AF65-F5344CB8AC3E}">
-        <p14:creationId xmlns:p14="http://schemas.microsoft.com/office/powerpoint/2010/main" val="1448144467"/>
+        <p14:creationId xmlns:p14="http://schemas.microsoft.com/office/powerpoint/2010/main" val="1493749046"/>
       </p:ext>
     </p:extLst>
   </p:cSld>
@@ -33619,7 +33619,7 @@
           <p:cNvPr id="30" name="">
             <a:extLst xmlns:a="http://schemas.openxmlformats.org/drawingml/2006/main">
               <a:ext uri="{FF2B5EF4-FFF2-40B4-BE49-F238E27FC236}">
-                <a16:creationId xmlns:a16="http://schemas.microsoft.com/office/drawing/2014/main" id="{4BA2EAA7-0173-4149-8F9D-A1903BB3532C}"/>
+                <a16:creationId xmlns:a16="http://schemas.microsoft.com/office/drawing/2014/main" id="{47B4041C-6F2F-4B13-956C-724836EA8033}"/>
               </a:ext>
             </a:extLst>
           </p:cNvPr>
@@ -33652,7 +33652,7 @@
           <p:cNvPr id="2" name="">
             <a:extLst xmlns:a="http://schemas.openxmlformats.org/drawingml/2006/main">
               <a:ext uri="{FF2B5EF4-FFF2-40B4-BE49-F238E27FC236}">
-                <a16:creationId xmlns:a16="http://schemas.microsoft.com/office/drawing/2014/main" id="{C30F392B-63A8-458A-AA25-C9021D36B842}"/>
+                <a16:creationId xmlns:a16="http://schemas.microsoft.com/office/drawing/2014/main" id="{DC8DDA38-3080-44AB-9159-608F28D1D61C}"/>
               </a:ext>
             </a:extLst>
           </p:cNvPr>
@@ -33683,7 +33683,7 @@
           <p:cNvPr id="3" name="">
             <a:extLst xmlns:a="http://schemas.openxmlformats.org/drawingml/2006/main">
               <a:ext uri="{FF2B5EF4-FFF2-40B4-BE49-F238E27FC236}">
-                <a16:creationId xmlns:a16="http://schemas.microsoft.com/office/drawing/2014/main" id="{117B4F2E-40C9-408A-BC6A-F054E68689D7}"/>
+                <a16:creationId xmlns:a16="http://schemas.microsoft.com/office/drawing/2014/main" id="{55DC307F-50BE-4E98-B0DE-FA8680155F9A}"/>
               </a:ext>
             </a:extLst>
           </p:cNvPr>
@@ -33735,7 +33735,7 @@
           <p:cNvPr id="4" name="">
             <a:extLst xmlns:a="http://schemas.openxmlformats.org/drawingml/2006/main">
               <a:ext uri="{FF2B5EF4-FFF2-40B4-BE49-F238E27FC236}">
-                <a16:creationId xmlns:a16="http://schemas.microsoft.com/office/drawing/2014/main" id="{F6D32E3A-827E-455B-AB6E-E4051696D8FC}"/>
+                <a16:creationId xmlns:a16="http://schemas.microsoft.com/office/drawing/2014/main" id="{CD97BF89-B6C0-4487-8DE2-B252DC6FA12E}"/>
               </a:ext>
             </a:extLst>
           </p:cNvPr>
@@ -33787,7 +33787,7 @@
           <p:cNvPr id="5" name="">
             <a:extLst xmlns:a="http://schemas.openxmlformats.org/drawingml/2006/main">
               <a:ext uri="{FF2B5EF4-FFF2-40B4-BE49-F238E27FC236}">
-                <a16:creationId xmlns:a16="http://schemas.microsoft.com/office/drawing/2014/main" id="{62CBE4DB-F9FE-4E4B-883D-8B4D9367344E}"/>
+                <a16:creationId xmlns:a16="http://schemas.microsoft.com/office/drawing/2014/main" id="{555ED00E-5437-408A-BB22-9C9A66F5A7B6}"/>
               </a:ext>
             </a:extLst>
           </p:cNvPr>
@@ -33822,7 +33822,7 @@
           <p:nvPr/>
         </p:nvPicPr>
         <p:blipFill>
-          <a:blip xmlns:r="http://schemas.openxmlformats.org/officeDocument/2006/relationships" xmlns:a="http://schemas.openxmlformats.org/drawingml/2006/main" r:embed="Rbdd2f2c9369c48c0"/>
+          <a:blip xmlns:r="http://schemas.openxmlformats.org/officeDocument/2006/relationships" xmlns:a="http://schemas.openxmlformats.org/drawingml/2006/main" r:embed="R7336a27ea9d1450c"/>
           <a:stretch xmlns:a="http://schemas.openxmlformats.org/drawingml/2006/main"/>
         </p:blipFill>
         <p:spPr>
@@ -33840,7 +33840,7 @@
           <p:cNvPr id="7" name="">
             <a:extLst xmlns:a="http://schemas.openxmlformats.org/drawingml/2006/main">
               <a:ext uri="{FF2B5EF4-FFF2-40B4-BE49-F238E27FC236}">
-                <a16:creationId xmlns:a16="http://schemas.microsoft.com/office/drawing/2014/main" id="{0E9715AB-2BF2-4BDD-AC8F-9B7BBAFCDB7C}"/>
+                <a16:creationId xmlns:a16="http://schemas.microsoft.com/office/drawing/2014/main" id="{A4B94101-463A-4D05-ABFE-833073313112}"/>
               </a:ext>
             </a:extLst>
           </p:cNvPr>
@@ -33892,7 +33892,7 @@
           <p:cNvPr id="8" name="">
             <a:extLst xmlns:a="http://schemas.openxmlformats.org/drawingml/2006/main">
               <a:ext uri="{FF2B5EF4-FFF2-40B4-BE49-F238E27FC236}">
-                <a16:creationId xmlns:a16="http://schemas.microsoft.com/office/drawing/2014/main" id="{9C5A6164-AD1E-4BD6-A6BE-0ABE1000F6C5}"/>
+                <a16:creationId xmlns:a16="http://schemas.microsoft.com/office/drawing/2014/main" id="{CEC1F2C5-B311-48A0-B7CE-D8D193C5F5E5}"/>
               </a:ext>
             </a:extLst>
           </p:cNvPr>
@@ -33944,7 +33944,7 @@
           <p:cNvPr id="9" name="">
             <a:extLst xmlns:a="http://schemas.openxmlformats.org/drawingml/2006/main">
               <a:ext uri="{FF2B5EF4-FFF2-40B4-BE49-F238E27FC236}">
-                <a16:creationId xmlns:a16="http://schemas.microsoft.com/office/drawing/2014/main" id="{16CD1C5D-685A-4B7E-A057-22AA0FC85F72}"/>
+                <a16:creationId xmlns:a16="http://schemas.microsoft.com/office/drawing/2014/main" id="{4195C978-C4E1-472F-9EA9-0E1589CF9F9E}"/>
               </a:ext>
             </a:extLst>
           </p:cNvPr>
@@ -33996,7 +33996,7 @@
           <p:cNvPr id="10" name="">
             <a:extLst xmlns:a="http://schemas.openxmlformats.org/drawingml/2006/main">
               <a:ext uri="{FF2B5EF4-FFF2-40B4-BE49-F238E27FC236}">
-                <a16:creationId xmlns:a16="http://schemas.microsoft.com/office/drawing/2014/main" id="{0C2922E2-E776-4E4B-85EC-ACEAEC5B60E1}"/>
+                <a16:creationId xmlns:a16="http://schemas.microsoft.com/office/drawing/2014/main" id="{262203C5-BB5F-45FA-927E-687454884F3F}"/>
               </a:ext>
             </a:extLst>
           </p:cNvPr>
@@ -34048,7 +34048,7 @@
           <p:cNvPr id="11" name="">
             <a:extLst xmlns:a="http://schemas.openxmlformats.org/drawingml/2006/main">
               <a:ext uri="{FF2B5EF4-FFF2-40B4-BE49-F238E27FC236}">
-                <a16:creationId xmlns:a16="http://schemas.microsoft.com/office/drawing/2014/main" id="{92A4597F-2834-4DA9-9906-8546F2F52837}"/>
+                <a16:creationId xmlns:a16="http://schemas.microsoft.com/office/drawing/2014/main" id="{D27358F6-7049-4B40-B00C-F23B2FCB0A6F}"/>
               </a:ext>
             </a:extLst>
           </p:cNvPr>
@@ -34095,10 +34095,10 @@
           <p:nvPr/>
         </p:nvPicPr>
         <p:blipFill>
-          <a:blip xmlns:r="http://schemas.openxmlformats.org/officeDocument/2006/relationships" xmlns:a="http://schemas.openxmlformats.org/drawingml/2006/main" r:embed="Rbf33b36913624d33">
+          <a:blip xmlns:r="http://schemas.openxmlformats.org/officeDocument/2006/relationships" xmlns:a="http://schemas.openxmlformats.org/drawingml/2006/main" r:embed="Rb995622debd14319">
             <a:extLst>
               <a:ext uri="{96DAC541-7B7A-43D3-8B79-37D633B846F1}">
-                <asvg:svgBlip xmlns:asvg="http://schemas.microsoft.com/office/drawing/2016/SVG/main" r:embed="R15cb818ef7764664"/>
+                <asvg:svgBlip xmlns:asvg="http://schemas.microsoft.com/office/drawing/2016/SVG/main" r:embed="Re862f47dde2d47ba"/>
               </a:ext>
             </a:extLst>
           </a:blip>
@@ -34119,7 +34119,7 @@
           <p:cNvPr id="13" name="">
             <a:extLst xmlns:a="http://schemas.openxmlformats.org/drawingml/2006/main">
               <a:ext uri="{FF2B5EF4-FFF2-40B4-BE49-F238E27FC236}">
-                <a16:creationId xmlns:a16="http://schemas.microsoft.com/office/drawing/2014/main" id="{96FDB22B-14EE-43C3-9A54-B74FFAFFB6FA}"/>
+                <a16:creationId xmlns:a16="http://schemas.microsoft.com/office/drawing/2014/main" id="{CB817E2D-1888-433B-A7E5-916F2C630886}"/>
               </a:ext>
             </a:extLst>
           </p:cNvPr>
@@ -34152,7 +34152,7 @@
           <p:cNvPr id="14" name="">
             <a:extLst xmlns:a="http://schemas.openxmlformats.org/drawingml/2006/main">
               <a:ext uri="{FF2B5EF4-FFF2-40B4-BE49-F238E27FC236}">
-                <a16:creationId xmlns:a16="http://schemas.microsoft.com/office/drawing/2014/main" id="{9623846B-210E-4AFF-A3B5-68987838ACDB}"/>
+                <a16:creationId xmlns:a16="http://schemas.microsoft.com/office/drawing/2014/main" id="{FE88F9FB-BCE5-4671-9C79-EA6400CA9A05}"/>
               </a:ext>
             </a:extLst>
           </p:cNvPr>
@@ -34204,7 +34204,7 @@
           <p:cNvPr id="15" name="">
             <a:extLst xmlns:a="http://schemas.openxmlformats.org/drawingml/2006/main">
               <a:ext uri="{FF2B5EF4-FFF2-40B4-BE49-F238E27FC236}">
-                <a16:creationId xmlns:a16="http://schemas.microsoft.com/office/drawing/2014/main" id="{96166846-0F4D-4BF0-B859-0994BF27F9D3}"/>
+                <a16:creationId xmlns:a16="http://schemas.microsoft.com/office/drawing/2014/main" id="{3A5BB857-018D-4093-A1D4-C40A819BF22B}"/>
               </a:ext>
             </a:extLst>
           </p:cNvPr>
@@ -34237,7 +34237,7 @@
           <p:cNvPr id="16" name="">
             <a:extLst xmlns:a="http://schemas.openxmlformats.org/drawingml/2006/main">
               <a:ext uri="{FF2B5EF4-FFF2-40B4-BE49-F238E27FC236}">
-                <a16:creationId xmlns:a16="http://schemas.microsoft.com/office/drawing/2014/main" id="{E1FA1CC9-7363-4747-B38E-EF46FABA352D}"/>
+                <a16:creationId xmlns:a16="http://schemas.microsoft.com/office/drawing/2014/main" id="{EF992982-A266-4405-8E1C-7A0285B1FB32}"/>
               </a:ext>
             </a:extLst>
           </p:cNvPr>
@@ -34289,7 +34289,7 @@
           <p:cNvPr id="17" name="">
             <a:extLst xmlns:a="http://schemas.openxmlformats.org/drawingml/2006/main">
               <a:ext uri="{FF2B5EF4-FFF2-40B4-BE49-F238E27FC236}">
-                <a16:creationId xmlns:a16="http://schemas.microsoft.com/office/drawing/2014/main" id="{EC88A484-70E1-423A-8CAE-D5A82B6CACA8}"/>
+                <a16:creationId xmlns:a16="http://schemas.microsoft.com/office/drawing/2014/main" id="{968EEA80-834B-4E64-9C97-1953527CFC6F}"/>
               </a:ext>
             </a:extLst>
           </p:cNvPr>
@@ -34322,7 +34322,7 @@
           <p:cNvPr id="18" name="">
             <a:extLst xmlns:a="http://schemas.openxmlformats.org/drawingml/2006/main">
               <a:ext uri="{FF2B5EF4-FFF2-40B4-BE49-F238E27FC236}">
-                <a16:creationId xmlns:a16="http://schemas.microsoft.com/office/drawing/2014/main" id="{9F8C81E0-612C-4533-93A5-AC2AEB3918AC}"/>
+                <a16:creationId xmlns:a16="http://schemas.microsoft.com/office/drawing/2014/main" id="{F92A4E58-57DB-4B77-A959-9A8A669F164D}"/>
               </a:ext>
             </a:extLst>
           </p:cNvPr>
@@ -34374,7 +34374,7 @@
           <p:cNvPr id="19" name="">
             <a:extLst xmlns:a="http://schemas.openxmlformats.org/drawingml/2006/main">
               <a:ext uri="{FF2B5EF4-FFF2-40B4-BE49-F238E27FC236}">
-                <a16:creationId xmlns:a16="http://schemas.microsoft.com/office/drawing/2014/main" id="{0F7B28DF-E765-4C5B-AB86-3F8FC21BD98E}"/>
+                <a16:creationId xmlns:a16="http://schemas.microsoft.com/office/drawing/2014/main" id="{18A6C391-6C66-407A-BA65-7BC62CD55ED2}"/>
               </a:ext>
             </a:extLst>
           </p:cNvPr>
@@ -34407,7 +34407,7 @@
           <p:cNvPr id="20" name="">
             <a:extLst xmlns:a="http://schemas.openxmlformats.org/drawingml/2006/main">
               <a:ext uri="{FF2B5EF4-FFF2-40B4-BE49-F238E27FC236}">
-                <a16:creationId xmlns:a16="http://schemas.microsoft.com/office/drawing/2014/main" id="{5E716D15-16F6-481C-B58E-8AA75941C98D}"/>
+                <a16:creationId xmlns:a16="http://schemas.microsoft.com/office/drawing/2014/main" id="{995A74F0-1301-46BF-8A8F-44FD1D612F45}"/>
               </a:ext>
             </a:extLst>
           </p:cNvPr>
@@ -34459,7 +34459,7 @@
           <p:cNvPr id="21" name="">
             <a:extLst xmlns:a="http://schemas.openxmlformats.org/drawingml/2006/main">
               <a:ext uri="{FF2B5EF4-FFF2-40B4-BE49-F238E27FC236}">
-                <a16:creationId xmlns:a16="http://schemas.microsoft.com/office/drawing/2014/main" id="{F116732E-B714-4F9B-9A9C-563E834C5861}"/>
+                <a16:creationId xmlns:a16="http://schemas.microsoft.com/office/drawing/2014/main" id="{9CCF02E7-74E5-4603-80ED-E2460FF5DC42}"/>
               </a:ext>
             </a:extLst>
           </p:cNvPr>
@@ -34490,7 +34490,7 @@
           <p:cNvPr id="22" name="">
             <a:extLst xmlns:a="http://schemas.openxmlformats.org/drawingml/2006/main">
               <a:ext uri="{FF2B5EF4-FFF2-40B4-BE49-F238E27FC236}">
-                <a16:creationId xmlns:a16="http://schemas.microsoft.com/office/drawing/2014/main" id="{0CFA5884-DB72-4983-BBC2-421CB6E2AF79}"/>
+                <a16:creationId xmlns:a16="http://schemas.microsoft.com/office/drawing/2014/main" id="{14E8E809-2F34-4D2C-8DDA-B3532BFF5649}"/>
               </a:ext>
             </a:extLst>
           </p:cNvPr>
@@ -34542,7 +34542,7 @@
           <p:cNvPr id="23" name="">
             <a:extLst xmlns:a="http://schemas.openxmlformats.org/drawingml/2006/main">
               <a:ext uri="{FF2B5EF4-FFF2-40B4-BE49-F238E27FC236}">
-                <a16:creationId xmlns:a16="http://schemas.microsoft.com/office/drawing/2014/main" id="{D1A2231E-8693-4C23-B395-D977C024DD59}"/>
+                <a16:creationId xmlns:a16="http://schemas.microsoft.com/office/drawing/2014/main" id="{769C42A4-9F4A-492B-AE1E-E94023712828}"/>
               </a:ext>
             </a:extLst>
           </p:cNvPr>
@@ -34594,7 +34594,7 @@
           <p:cNvPr id="24" name="">
             <a:extLst xmlns:a="http://schemas.openxmlformats.org/drawingml/2006/main">
               <a:ext uri="{FF2B5EF4-FFF2-40B4-BE49-F238E27FC236}">
-                <a16:creationId xmlns:a16="http://schemas.microsoft.com/office/drawing/2014/main" id="{F2BB082F-5697-4EFE-BE25-5F84CB7C16D5}"/>
+                <a16:creationId xmlns:a16="http://schemas.microsoft.com/office/drawing/2014/main" id="{96E9911E-77DF-4DD1-AB57-D4B110A6751C}"/>
               </a:ext>
             </a:extLst>
           </p:cNvPr>
@@ -34646,7 +34646,7 @@
           <p:cNvPr id="25" name="">
             <a:extLst xmlns:a="http://schemas.openxmlformats.org/drawingml/2006/main">
               <a:ext uri="{FF2B5EF4-FFF2-40B4-BE49-F238E27FC236}">
-                <a16:creationId xmlns:a16="http://schemas.microsoft.com/office/drawing/2014/main" id="{DF02784C-46EE-4192-B276-E01E876B9FA4}"/>
+                <a16:creationId xmlns:a16="http://schemas.microsoft.com/office/drawing/2014/main" id="{5E23E390-A39A-4D08-8E15-4305E2CAF5B6}"/>
               </a:ext>
             </a:extLst>
           </p:cNvPr>
@@ -34698,7 +34698,7 @@
           <p:cNvPr id="26" name="">
             <a:extLst xmlns:a="http://schemas.openxmlformats.org/drawingml/2006/main">
               <a:ext uri="{FF2B5EF4-FFF2-40B4-BE49-F238E27FC236}">
-                <a16:creationId xmlns:a16="http://schemas.microsoft.com/office/drawing/2014/main" id="{A420B309-67C4-4DC9-9C3A-AAEEE3E5B420}"/>
+                <a16:creationId xmlns:a16="http://schemas.microsoft.com/office/drawing/2014/main" id="{72E45C94-17A3-471B-BA49-E22596D856E7}"/>
               </a:ext>
             </a:extLst>
           </p:cNvPr>
@@ -34750,7 +34750,7 @@
           <p:cNvPr id="27" name="">
             <a:extLst xmlns:a="http://schemas.openxmlformats.org/drawingml/2006/main">
               <a:ext uri="{FF2B5EF4-FFF2-40B4-BE49-F238E27FC236}">
-                <a16:creationId xmlns:a16="http://schemas.microsoft.com/office/drawing/2014/main" id="{D0A9F7DA-FA0F-4FCA-B87E-1DB42EB9F987}"/>
+                <a16:creationId xmlns:a16="http://schemas.microsoft.com/office/drawing/2014/main" id="{F67E69AF-1F59-4740-AC72-FC10F47D4201}"/>
               </a:ext>
             </a:extLst>
           </p:cNvPr>
@@ -34802,7 +34802,7 @@
           <p:cNvPr id="28" name="">
             <a:extLst xmlns:a="http://schemas.openxmlformats.org/drawingml/2006/main">
               <a:ext uri="{FF2B5EF4-FFF2-40B4-BE49-F238E27FC236}">
-                <a16:creationId xmlns:a16="http://schemas.microsoft.com/office/drawing/2014/main" id="{32FB2C3A-1860-4DF5-9FE1-1FCFD5512BD3}"/>
+                <a16:creationId xmlns:a16="http://schemas.microsoft.com/office/drawing/2014/main" id="{FC370D12-6671-42D1-8E6F-C29B5D4C1D15}"/>
               </a:ext>
             </a:extLst>
           </p:cNvPr>
@@ -34854,7 +34854,7 @@
           <p:cNvPr id="29" name="">
             <a:extLst xmlns:a="http://schemas.openxmlformats.org/drawingml/2006/main">
               <a:ext uri="{FF2B5EF4-FFF2-40B4-BE49-F238E27FC236}">
-                <a16:creationId xmlns:a16="http://schemas.microsoft.com/office/drawing/2014/main" id="{B87EFC2F-53E6-40A1-AB9D-B0FD1E8B766F}"/>
+                <a16:creationId xmlns:a16="http://schemas.microsoft.com/office/drawing/2014/main" id="{AE476A76-7F74-4858-8256-75124F1B7FFB}"/>
               </a:ext>
             </a:extLst>
           </p:cNvPr>
@@ -34904,7 +34904,7 @@
     </p:spTree>
     <p:extLst>
       <p:ext uri="{BB962C8B-B14F-4D97-AF65-F5344CB8AC3E}">
-        <p14:creationId xmlns:p14="http://schemas.microsoft.com/office/powerpoint/2010/main" val="1310136277"/>
+        <p14:creationId xmlns:p14="http://schemas.microsoft.com/office/powerpoint/2010/main" val="2079931018"/>
       </p:ext>
     </p:extLst>
   </p:cSld>
@@ -34935,7 +34935,7 @@
           <p:cNvPr id="33" name="">
             <a:extLst xmlns:a="http://schemas.openxmlformats.org/drawingml/2006/main">
               <a:ext uri="{FF2B5EF4-FFF2-40B4-BE49-F238E27FC236}">
-                <a16:creationId xmlns:a16="http://schemas.microsoft.com/office/drawing/2014/main" id="{43E8B17D-4F1C-4BF5-8C47-A452642F09DF}"/>
+                <a16:creationId xmlns:a16="http://schemas.microsoft.com/office/drawing/2014/main" id="{65EDDC67-2B1A-4D46-A5E5-2E490AA0773C}"/>
               </a:ext>
             </a:extLst>
           </p:cNvPr>
@@ -34968,7 +34968,7 @@
           <p:cNvPr id="2" name="">
             <a:extLst xmlns:a="http://schemas.openxmlformats.org/drawingml/2006/main">
               <a:ext uri="{FF2B5EF4-FFF2-40B4-BE49-F238E27FC236}">
-                <a16:creationId xmlns:a16="http://schemas.microsoft.com/office/drawing/2014/main" id="{949BD4C0-4BE0-4A16-8570-F85E06284B95}"/>
+                <a16:creationId xmlns:a16="http://schemas.microsoft.com/office/drawing/2014/main" id="{33195E3B-5159-46A3-B031-D2B5E1D01A9E}"/>
               </a:ext>
             </a:extLst>
           </p:cNvPr>
@@ -34999,7 +34999,7 @@
           <p:cNvPr id="3" name="">
             <a:extLst xmlns:a="http://schemas.openxmlformats.org/drawingml/2006/main">
               <a:ext uri="{FF2B5EF4-FFF2-40B4-BE49-F238E27FC236}">
-                <a16:creationId xmlns:a16="http://schemas.microsoft.com/office/drawing/2014/main" id="{C681BFB2-F4E9-4B04-819B-935D2C4B2B6B}"/>
+                <a16:creationId xmlns:a16="http://schemas.microsoft.com/office/drawing/2014/main" id="{BD780A0C-A5C3-4BC2-938B-6BC36637E5AD}"/>
               </a:ext>
             </a:extLst>
           </p:cNvPr>
@@ -35051,7 +35051,7 @@
           <p:cNvPr id="4" name="">
             <a:extLst xmlns:a="http://schemas.openxmlformats.org/drawingml/2006/main">
               <a:ext uri="{FF2B5EF4-FFF2-40B4-BE49-F238E27FC236}">
-                <a16:creationId xmlns:a16="http://schemas.microsoft.com/office/drawing/2014/main" id="{6669D964-CEF1-47E7-8FFC-D50D83C1ACC3}"/>
+                <a16:creationId xmlns:a16="http://schemas.microsoft.com/office/drawing/2014/main" id="{F5F6FEF2-CDF1-4586-A47E-692211DDF980}"/>
               </a:ext>
             </a:extLst>
           </p:cNvPr>
@@ -35103,7 +35103,7 @@
           <p:cNvPr id="5" name="">
             <a:extLst xmlns:a="http://schemas.openxmlformats.org/drawingml/2006/main">
               <a:ext uri="{FF2B5EF4-FFF2-40B4-BE49-F238E27FC236}">
-                <a16:creationId xmlns:a16="http://schemas.microsoft.com/office/drawing/2014/main" id="{B37F1CE6-C005-4FCF-B1C2-D1DC9FB5E877}"/>
+                <a16:creationId xmlns:a16="http://schemas.microsoft.com/office/drawing/2014/main" id="{1C1FBB6C-A40F-47FD-A7CA-0408AE99BA0D}"/>
               </a:ext>
             </a:extLst>
           </p:cNvPr>
@@ -35138,7 +35138,7 @@
           <p:nvPr/>
         </p:nvPicPr>
         <p:blipFill>
-          <a:blip xmlns:r="http://schemas.openxmlformats.org/officeDocument/2006/relationships" xmlns:a="http://schemas.openxmlformats.org/drawingml/2006/main" r:embed="Rfb85fdcb73244ea5"/>
+          <a:blip xmlns:r="http://schemas.openxmlformats.org/officeDocument/2006/relationships" xmlns:a="http://schemas.openxmlformats.org/drawingml/2006/main" r:embed="R549ab8ade2c446ea"/>
           <a:stretch xmlns:a="http://schemas.openxmlformats.org/drawingml/2006/main"/>
         </p:blipFill>
         <p:spPr>
@@ -35156,7 +35156,7 @@
           <p:cNvPr id="7" name="">
             <a:extLst xmlns:a="http://schemas.openxmlformats.org/drawingml/2006/main">
               <a:ext uri="{FF2B5EF4-FFF2-40B4-BE49-F238E27FC236}">
-                <a16:creationId xmlns:a16="http://schemas.microsoft.com/office/drawing/2014/main" id="{426554ED-78D0-43FA-B762-C96D599DAB45}"/>
+                <a16:creationId xmlns:a16="http://schemas.microsoft.com/office/drawing/2014/main" id="{2AE2EDB8-C533-4C01-A1C2-60103B526234}"/>
               </a:ext>
             </a:extLst>
           </p:cNvPr>
@@ -35208,7 +35208,7 @@
           <p:cNvPr id="8" name="">
             <a:extLst xmlns:a="http://schemas.openxmlformats.org/drawingml/2006/main">
               <a:ext uri="{FF2B5EF4-FFF2-40B4-BE49-F238E27FC236}">
-                <a16:creationId xmlns:a16="http://schemas.microsoft.com/office/drawing/2014/main" id="{010C35E8-7C11-4AF7-A41D-9F04AD238CD4}"/>
+                <a16:creationId xmlns:a16="http://schemas.microsoft.com/office/drawing/2014/main" id="{D9B19AE3-4E1D-4FC9-88E0-0D92B8E06025}"/>
               </a:ext>
             </a:extLst>
           </p:cNvPr>
@@ -35260,7 +35260,7 @@
           <p:cNvPr id="9" name="">
             <a:extLst xmlns:a="http://schemas.openxmlformats.org/drawingml/2006/main">
               <a:ext uri="{FF2B5EF4-FFF2-40B4-BE49-F238E27FC236}">
-                <a16:creationId xmlns:a16="http://schemas.microsoft.com/office/drawing/2014/main" id="{992D5F26-40EF-4229-89F9-28B6C9C1273B}"/>
+                <a16:creationId xmlns:a16="http://schemas.microsoft.com/office/drawing/2014/main" id="{FC551EEF-C057-4F51-B5B7-53A3090D3869}"/>
               </a:ext>
             </a:extLst>
           </p:cNvPr>
@@ -35312,7 +35312,7 @@
           <p:cNvPr id="10" name="">
             <a:extLst xmlns:a="http://schemas.openxmlformats.org/drawingml/2006/main">
               <a:ext uri="{FF2B5EF4-FFF2-40B4-BE49-F238E27FC236}">
-                <a16:creationId xmlns:a16="http://schemas.microsoft.com/office/drawing/2014/main" id="{83F6BCFC-4470-4387-B91F-646B0441CBE2}"/>
+                <a16:creationId xmlns:a16="http://schemas.microsoft.com/office/drawing/2014/main" id="{75E6B2B8-19C0-493E-9FFA-B575AB3DCA98}"/>
               </a:ext>
             </a:extLst>
           </p:cNvPr>
@@ -35364,7 +35364,7 @@
           <p:cNvPr id="11" name="">
             <a:extLst xmlns:a="http://schemas.openxmlformats.org/drawingml/2006/main">
               <a:ext uri="{FF2B5EF4-FFF2-40B4-BE49-F238E27FC236}">
-                <a16:creationId xmlns:a16="http://schemas.microsoft.com/office/drawing/2014/main" id="{DB6ADC15-4AFC-4D5F-94C3-232F979A5443}"/>
+                <a16:creationId xmlns:a16="http://schemas.microsoft.com/office/drawing/2014/main" id="{999D9A00-DBA8-4A34-8756-F0CC861861A8}"/>
               </a:ext>
             </a:extLst>
           </p:cNvPr>
@@ -35411,10 +35411,10 @@
           <p:nvPr/>
         </p:nvPicPr>
         <p:blipFill>
-          <a:blip xmlns:r="http://schemas.openxmlformats.org/officeDocument/2006/relationships" xmlns:a="http://schemas.openxmlformats.org/drawingml/2006/main" r:embed="R9b5fc80d44214c5b">
+          <a:blip xmlns:r="http://schemas.openxmlformats.org/officeDocument/2006/relationships" xmlns:a="http://schemas.openxmlformats.org/drawingml/2006/main" r:embed="R3536eecebcb445f3">
             <a:extLst>
               <a:ext uri="{96DAC541-7B7A-43D3-8B79-37D633B846F1}">
-                <asvg:svgBlip xmlns:asvg="http://schemas.microsoft.com/office/drawing/2016/SVG/main" r:embed="R5183318d6993412c"/>
+                <asvg:svgBlip xmlns:asvg="http://schemas.microsoft.com/office/drawing/2016/SVG/main" r:embed="Rd030e23eb9ef4cdd"/>
               </a:ext>
             </a:extLst>
           </a:blip>
@@ -35435,7 +35435,7 @@
           <p:cNvPr id="13" name="">
             <a:extLst xmlns:a="http://schemas.openxmlformats.org/drawingml/2006/main">
               <a:ext uri="{FF2B5EF4-FFF2-40B4-BE49-F238E27FC236}">
-                <a16:creationId xmlns:a16="http://schemas.microsoft.com/office/drawing/2014/main" id="{A1330F94-3A63-442C-9EB1-F8366F63F2DE}"/>
+                <a16:creationId xmlns:a16="http://schemas.microsoft.com/office/drawing/2014/main" id="{42B0D733-6DE0-4C1E-A15E-BD877A7C5A32}"/>
               </a:ext>
             </a:extLst>
           </p:cNvPr>
@@ -35468,7 +35468,7 @@
           <p:cNvPr id="14" name="">
             <a:extLst xmlns:a="http://schemas.openxmlformats.org/drawingml/2006/main">
               <a:ext uri="{FF2B5EF4-FFF2-40B4-BE49-F238E27FC236}">
-                <a16:creationId xmlns:a16="http://schemas.microsoft.com/office/drawing/2014/main" id="{C903EBDF-29B7-43B4-81F2-8FFEE0A0A65F}"/>
+                <a16:creationId xmlns:a16="http://schemas.microsoft.com/office/drawing/2014/main" id="{ED8AFBF2-5A74-49BD-8504-B4BE6A085F10}"/>
               </a:ext>
             </a:extLst>
           </p:cNvPr>
@@ -35520,7 +35520,7 @@
           <p:cNvPr id="15" name="">
             <a:extLst xmlns:a="http://schemas.openxmlformats.org/drawingml/2006/main">
               <a:ext uri="{FF2B5EF4-FFF2-40B4-BE49-F238E27FC236}">
-                <a16:creationId xmlns:a16="http://schemas.microsoft.com/office/drawing/2014/main" id="{C1822731-F7D6-4D29-81D3-85C8287008AC}"/>
+                <a16:creationId xmlns:a16="http://schemas.microsoft.com/office/drawing/2014/main" id="{6065CE01-7440-4688-92DB-47EF90C9607C}"/>
               </a:ext>
             </a:extLst>
           </p:cNvPr>
@@ -35551,7 +35551,7 @@
           <p:cNvPr id="16" name="">
             <a:extLst xmlns:a="http://schemas.openxmlformats.org/drawingml/2006/main">
               <a:ext uri="{FF2B5EF4-FFF2-40B4-BE49-F238E27FC236}">
-                <a16:creationId xmlns:a16="http://schemas.microsoft.com/office/drawing/2014/main" id="{06EFA227-9237-4B43-BA42-3EE583A6381A}"/>
+                <a16:creationId xmlns:a16="http://schemas.microsoft.com/office/drawing/2014/main" id="{27C4857D-9EF5-44A2-A424-996BF8D3053D}"/>
               </a:ext>
             </a:extLst>
           </p:cNvPr>
@@ -35582,7 +35582,7 @@
           <p:cNvPr id="17" name="">
             <a:extLst xmlns:a="http://schemas.openxmlformats.org/drawingml/2006/main">
               <a:ext uri="{FF2B5EF4-FFF2-40B4-BE49-F238E27FC236}">
-                <a16:creationId xmlns:a16="http://schemas.microsoft.com/office/drawing/2014/main" id="{7F11EBFF-9A08-4D6A-BD28-FB79708F9B73}"/>
+                <a16:creationId xmlns:a16="http://schemas.microsoft.com/office/drawing/2014/main" id="{0DC95B38-CA18-4F75-AD54-005460B63732}"/>
               </a:ext>
             </a:extLst>
           </p:cNvPr>
@@ -35634,7 +35634,7 @@
           <p:cNvPr id="18" name="">
             <a:extLst xmlns:a="http://schemas.openxmlformats.org/drawingml/2006/main">
               <a:ext uri="{FF2B5EF4-FFF2-40B4-BE49-F238E27FC236}">
-                <a16:creationId xmlns:a16="http://schemas.microsoft.com/office/drawing/2014/main" id="{08BB288A-BF95-4BCC-862B-01365C83FE27}"/>
+                <a16:creationId xmlns:a16="http://schemas.microsoft.com/office/drawing/2014/main" id="{76EF5D2C-6D54-46EC-AA6C-EA937A40531B}"/>
               </a:ext>
             </a:extLst>
           </p:cNvPr>
@@ -35667,7 +35667,7 @@
           <p:cNvPr id="19" name="">
             <a:extLst xmlns:a="http://schemas.openxmlformats.org/drawingml/2006/main">
               <a:ext uri="{FF2B5EF4-FFF2-40B4-BE49-F238E27FC236}">
-                <a16:creationId xmlns:a16="http://schemas.microsoft.com/office/drawing/2014/main" id="{146E40FE-77B9-42C9-981F-DA0CA385739B}"/>
+                <a16:creationId xmlns:a16="http://schemas.microsoft.com/office/drawing/2014/main" id="{432CB22B-B24A-4DAD-AD73-15CAE82F15DE}"/>
               </a:ext>
             </a:extLst>
           </p:cNvPr>
@@ -35719,7 +35719,7 @@
           <p:cNvPr id="20" name="">
             <a:extLst xmlns:a="http://schemas.openxmlformats.org/drawingml/2006/main">
               <a:ext uri="{FF2B5EF4-FFF2-40B4-BE49-F238E27FC236}">
-                <a16:creationId xmlns:a16="http://schemas.microsoft.com/office/drawing/2014/main" id="{377FDB42-D5FE-4466-ABA6-0793CC8A3817}"/>
+                <a16:creationId xmlns:a16="http://schemas.microsoft.com/office/drawing/2014/main" id="{DD54931A-9037-47E7-A31D-A00074C4E447}"/>
               </a:ext>
             </a:extLst>
           </p:cNvPr>
@@ -35750,7 +35750,7 @@
           <p:cNvPr id="21" name="">
             <a:extLst xmlns:a="http://schemas.openxmlformats.org/drawingml/2006/main">
               <a:ext uri="{FF2B5EF4-FFF2-40B4-BE49-F238E27FC236}">
-                <a16:creationId xmlns:a16="http://schemas.microsoft.com/office/drawing/2014/main" id="{304551E9-AF74-42A0-A2FF-60BD5736034B}"/>
+                <a16:creationId xmlns:a16="http://schemas.microsoft.com/office/drawing/2014/main" id="{78BE32E9-A34C-4A41-B1B1-C7200244C018}"/>
               </a:ext>
             </a:extLst>
           </p:cNvPr>
@@ -35781,7 +35781,7 @@
           <p:cNvPr id="22" name="">
             <a:extLst xmlns:a="http://schemas.openxmlformats.org/drawingml/2006/main">
               <a:ext uri="{FF2B5EF4-FFF2-40B4-BE49-F238E27FC236}">
-                <a16:creationId xmlns:a16="http://schemas.microsoft.com/office/drawing/2014/main" id="{B0325834-E01A-4AA6-A7E9-5274CA7A85CA}"/>
+                <a16:creationId xmlns:a16="http://schemas.microsoft.com/office/drawing/2014/main" id="{C102633F-945B-43FB-A799-8C3DE8EF04B6}"/>
               </a:ext>
             </a:extLst>
           </p:cNvPr>
@@ -35833,7 +35833,7 @@
           <p:cNvPr id="23" name="">
             <a:extLst xmlns:a="http://schemas.openxmlformats.org/drawingml/2006/main">
               <a:ext uri="{FF2B5EF4-FFF2-40B4-BE49-F238E27FC236}">
-                <a16:creationId xmlns:a16="http://schemas.microsoft.com/office/drawing/2014/main" id="{97583D63-4DE6-47F4-A29D-0A5B224E7352}"/>
+                <a16:creationId xmlns:a16="http://schemas.microsoft.com/office/drawing/2014/main" id="{348D83E1-F765-4C87-810E-5A6AE6046854}"/>
               </a:ext>
             </a:extLst>
           </p:cNvPr>
@@ -35885,7 +35885,7 @@
           <p:cNvPr id="24" name="">
             <a:extLst xmlns:a="http://schemas.openxmlformats.org/drawingml/2006/main">
               <a:ext uri="{FF2B5EF4-FFF2-40B4-BE49-F238E27FC236}">
-                <a16:creationId xmlns:a16="http://schemas.microsoft.com/office/drawing/2014/main" id="{68C3AD7E-928A-43DE-83D4-9F24F00BCFAA}"/>
+                <a16:creationId xmlns:a16="http://schemas.microsoft.com/office/drawing/2014/main" id="{A4369AE7-CB57-4DE1-A8E8-7AE8321706D9}"/>
               </a:ext>
             </a:extLst>
           </p:cNvPr>
@@ -35916,7 +35916,7 @@
           <p:cNvPr id="25" name="">
             <a:extLst xmlns:a="http://schemas.openxmlformats.org/drawingml/2006/main">
               <a:ext uri="{FF2B5EF4-FFF2-40B4-BE49-F238E27FC236}">
-                <a16:creationId xmlns:a16="http://schemas.microsoft.com/office/drawing/2014/main" id="{39086254-C95F-4C20-95A1-51EC9D77A690}"/>
+                <a16:creationId xmlns:a16="http://schemas.microsoft.com/office/drawing/2014/main" id="{4D5D5134-18FC-412D-9C0C-0CA8F3B26EBA}"/>
               </a:ext>
             </a:extLst>
           </p:cNvPr>
@@ -35968,7 +35968,7 @@
           <p:cNvPr id="26" name="">
             <a:extLst xmlns:a="http://schemas.openxmlformats.org/drawingml/2006/main">
               <a:ext uri="{FF2B5EF4-FFF2-40B4-BE49-F238E27FC236}">
-                <a16:creationId xmlns:a16="http://schemas.microsoft.com/office/drawing/2014/main" id="{A13D4A12-B349-4FEF-82FD-C50B5ACFC318}"/>
+                <a16:creationId xmlns:a16="http://schemas.microsoft.com/office/drawing/2014/main" id="{DB468393-B2BB-4A34-96FE-E9A0EA1AF371}"/>
               </a:ext>
             </a:extLst>
           </p:cNvPr>
@@ -36020,7 +36020,7 @@
           <p:cNvPr id="27" name="">
             <a:extLst xmlns:a="http://schemas.openxmlformats.org/drawingml/2006/main">
               <a:ext uri="{FF2B5EF4-FFF2-40B4-BE49-F238E27FC236}">
-                <a16:creationId xmlns:a16="http://schemas.microsoft.com/office/drawing/2014/main" id="{4BCD4F5C-AEBB-421D-B1F9-06F409C7BDA7}"/>
+                <a16:creationId xmlns:a16="http://schemas.microsoft.com/office/drawing/2014/main" id="{E0D3AA65-531E-4283-A1F2-899DC4F941E2}"/>
               </a:ext>
             </a:extLst>
           </p:cNvPr>
@@ -36072,7 +36072,7 @@
           <p:cNvPr id="28" name="">
             <a:extLst xmlns:a="http://schemas.openxmlformats.org/drawingml/2006/main">
               <a:ext uri="{FF2B5EF4-FFF2-40B4-BE49-F238E27FC236}">
-                <a16:creationId xmlns:a16="http://schemas.microsoft.com/office/drawing/2014/main" id="{2739A45F-119A-4C09-BF2D-B54F3A85091C}"/>
+                <a16:creationId xmlns:a16="http://schemas.microsoft.com/office/drawing/2014/main" id="{4E9851F2-CD82-4BB5-8470-9BB2D0E1A2ED}"/>
               </a:ext>
             </a:extLst>
           </p:cNvPr>
@@ -36124,7 +36124,7 @@
           <p:cNvPr id="29" name="">
             <a:extLst xmlns:a="http://schemas.openxmlformats.org/drawingml/2006/main">
               <a:ext uri="{FF2B5EF4-FFF2-40B4-BE49-F238E27FC236}">
-                <a16:creationId xmlns:a16="http://schemas.microsoft.com/office/drawing/2014/main" id="{57949F6C-105D-49E6-BBB5-32904A22D2FE}"/>
+                <a16:creationId xmlns:a16="http://schemas.microsoft.com/office/drawing/2014/main" id="{3A0592CB-EAB4-4644-8EC9-15C49F8989D6}"/>
               </a:ext>
             </a:extLst>
           </p:cNvPr>
@@ -36176,7 +36176,7 @@
           <p:cNvPr id="30" name="">
             <a:extLst xmlns:a="http://schemas.openxmlformats.org/drawingml/2006/main">
               <a:ext uri="{FF2B5EF4-FFF2-40B4-BE49-F238E27FC236}">
-                <a16:creationId xmlns:a16="http://schemas.microsoft.com/office/drawing/2014/main" id="{42D07AB9-9EE5-4EDD-AF4D-BA74B21F1A25}"/>
+                <a16:creationId xmlns:a16="http://schemas.microsoft.com/office/drawing/2014/main" id="{B2C73CA5-BF4C-4118-897E-B145C97BB6C8}"/>
               </a:ext>
             </a:extLst>
           </p:cNvPr>
@@ -36228,7 +36228,7 @@
           <p:cNvPr id="31" name="">
             <a:extLst xmlns:a="http://schemas.openxmlformats.org/drawingml/2006/main">
               <a:ext uri="{FF2B5EF4-FFF2-40B4-BE49-F238E27FC236}">
-                <a16:creationId xmlns:a16="http://schemas.microsoft.com/office/drawing/2014/main" id="{C054E006-920F-41D3-AAB6-9AD0943373B7}"/>
+                <a16:creationId xmlns:a16="http://schemas.microsoft.com/office/drawing/2014/main" id="{529EA673-6269-4FB7-8B10-78B338A87CCC}"/>
               </a:ext>
             </a:extLst>
           </p:cNvPr>
@@ -36280,7 +36280,7 @@
           <p:cNvPr id="32" name="">
             <a:extLst xmlns:a="http://schemas.openxmlformats.org/drawingml/2006/main">
               <a:ext uri="{FF2B5EF4-FFF2-40B4-BE49-F238E27FC236}">
-                <a16:creationId xmlns:a16="http://schemas.microsoft.com/office/drawing/2014/main" id="{9194F28E-A269-40FC-A92F-089A01388CEE}"/>
+                <a16:creationId xmlns:a16="http://schemas.microsoft.com/office/drawing/2014/main" id="{D943DAF8-9496-483A-84A6-A7CF674F76DA}"/>
               </a:ext>
             </a:extLst>
           </p:cNvPr>
@@ -36330,7 +36330,7 @@
     </p:spTree>
     <p:extLst>
       <p:ext uri="{BB962C8B-B14F-4D97-AF65-F5344CB8AC3E}">
-        <p14:creationId xmlns:p14="http://schemas.microsoft.com/office/powerpoint/2010/main" val="1295026346"/>
+        <p14:creationId xmlns:p14="http://schemas.microsoft.com/office/powerpoint/2010/main" val="1799303314"/>
       </p:ext>
     </p:extLst>
   </p:cSld>
@@ -36361,7 +36361,7 @@
           <p:cNvPr id="27" name="">
             <a:extLst xmlns:a="http://schemas.openxmlformats.org/drawingml/2006/main">
               <a:ext uri="{FF2B5EF4-FFF2-40B4-BE49-F238E27FC236}">
-                <a16:creationId xmlns:a16="http://schemas.microsoft.com/office/drawing/2014/main" id="{FBB0B467-80BF-4A47-8037-856EB728622F}"/>
+                <a16:creationId xmlns:a16="http://schemas.microsoft.com/office/drawing/2014/main" id="{C162C0B5-BA20-4E76-9618-0D4C837D4F7C}"/>
               </a:ext>
             </a:extLst>
           </p:cNvPr>
@@ -36394,7 +36394,7 @@
           <p:cNvPr id="2" name="">
             <a:extLst xmlns:a="http://schemas.openxmlformats.org/drawingml/2006/main">
               <a:ext uri="{FF2B5EF4-FFF2-40B4-BE49-F238E27FC236}">
-                <a16:creationId xmlns:a16="http://schemas.microsoft.com/office/drawing/2014/main" id="{69DC412E-8279-4A94-892D-976C1522E39F}"/>
+                <a16:creationId xmlns:a16="http://schemas.microsoft.com/office/drawing/2014/main" id="{2B4DD9ED-2B57-4185-99BC-1C55A9BF1B0F}"/>
               </a:ext>
             </a:extLst>
           </p:cNvPr>
@@ -36425,7 +36425,7 @@
           <p:cNvPr id="3" name="">
             <a:extLst xmlns:a="http://schemas.openxmlformats.org/drawingml/2006/main">
               <a:ext uri="{FF2B5EF4-FFF2-40B4-BE49-F238E27FC236}">
-                <a16:creationId xmlns:a16="http://schemas.microsoft.com/office/drawing/2014/main" id="{BCEBE3AE-8C9A-4584-9863-645E8579B8E7}"/>
+                <a16:creationId xmlns:a16="http://schemas.microsoft.com/office/drawing/2014/main" id="{7A423ACF-22CA-4D12-88F8-595692C3B176}"/>
               </a:ext>
             </a:extLst>
           </p:cNvPr>
@@ -36477,7 +36477,7 @@
           <p:cNvPr id="4" name="">
             <a:extLst xmlns:a="http://schemas.openxmlformats.org/drawingml/2006/main">
               <a:ext uri="{FF2B5EF4-FFF2-40B4-BE49-F238E27FC236}">
-                <a16:creationId xmlns:a16="http://schemas.microsoft.com/office/drawing/2014/main" id="{E7AC19BD-683D-4566-BD27-C176E84F2C6D}"/>
+                <a16:creationId xmlns:a16="http://schemas.microsoft.com/office/drawing/2014/main" id="{64B4D2C1-4451-4065-901B-D513CED6498B}"/>
               </a:ext>
             </a:extLst>
           </p:cNvPr>
@@ -36529,7 +36529,7 @@
           <p:cNvPr id="5" name="">
             <a:extLst xmlns:a="http://schemas.openxmlformats.org/drawingml/2006/main">
               <a:ext uri="{FF2B5EF4-FFF2-40B4-BE49-F238E27FC236}">
-                <a16:creationId xmlns:a16="http://schemas.microsoft.com/office/drawing/2014/main" id="{D52A6D34-7EB9-4B9C-A830-078C72584C0F}"/>
+                <a16:creationId xmlns:a16="http://schemas.microsoft.com/office/drawing/2014/main" id="{7B2088FD-62A7-4998-A7C6-796C9BF1657D}"/>
               </a:ext>
             </a:extLst>
           </p:cNvPr>
@@ -36564,7 +36564,7 @@
           <p:nvPr/>
         </p:nvPicPr>
         <p:blipFill>
-          <a:blip xmlns:r="http://schemas.openxmlformats.org/officeDocument/2006/relationships" xmlns:a="http://schemas.openxmlformats.org/drawingml/2006/main" r:embed="R3be230e21cc74b92"/>
+          <a:blip xmlns:r="http://schemas.openxmlformats.org/officeDocument/2006/relationships" xmlns:a="http://schemas.openxmlformats.org/drawingml/2006/main" r:embed="Ra265002761374d6e"/>
           <a:stretch xmlns:a="http://schemas.openxmlformats.org/drawingml/2006/main"/>
         </p:blipFill>
         <p:spPr>
@@ -36582,7 +36582,7 @@
           <p:cNvPr id="7" name="">
             <a:extLst xmlns:a="http://schemas.openxmlformats.org/drawingml/2006/main">
               <a:ext uri="{FF2B5EF4-FFF2-40B4-BE49-F238E27FC236}">
-                <a16:creationId xmlns:a16="http://schemas.microsoft.com/office/drawing/2014/main" id="{D71013B1-AE6F-4612-9BC8-9B5669A4E56F}"/>
+                <a16:creationId xmlns:a16="http://schemas.microsoft.com/office/drawing/2014/main" id="{1C20D173-0BCD-47EA-9EE2-6D03FECB3C88}"/>
               </a:ext>
             </a:extLst>
           </p:cNvPr>
@@ -36634,7 +36634,7 @@
           <p:cNvPr id="8" name="">
             <a:extLst xmlns:a="http://schemas.openxmlformats.org/drawingml/2006/main">
               <a:ext uri="{FF2B5EF4-FFF2-40B4-BE49-F238E27FC236}">
-                <a16:creationId xmlns:a16="http://schemas.microsoft.com/office/drawing/2014/main" id="{35E34421-DFB5-4BF7-A2F1-4EF392D87679}"/>
+                <a16:creationId xmlns:a16="http://schemas.microsoft.com/office/drawing/2014/main" id="{21E1EE8B-F97F-4190-82D0-3CD680C6106A}"/>
               </a:ext>
             </a:extLst>
           </p:cNvPr>
@@ -36686,7 +36686,7 @@
           <p:cNvPr id="9" name="">
             <a:extLst xmlns:a="http://schemas.openxmlformats.org/drawingml/2006/main">
               <a:ext uri="{FF2B5EF4-FFF2-40B4-BE49-F238E27FC236}">
-                <a16:creationId xmlns:a16="http://schemas.microsoft.com/office/drawing/2014/main" id="{33B76A8E-6397-46AB-9011-D192E3BFF89A}"/>
+                <a16:creationId xmlns:a16="http://schemas.microsoft.com/office/drawing/2014/main" id="{8E9D044E-2B60-4D5E-8797-3852F391E0DC}"/>
               </a:ext>
             </a:extLst>
           </p:cNvPr>
@@ -36738,7 +36738,7 @@
           <p:cNvPr id="10" name="">
             <a:extLst xmlns:a="http://schemas.openxmlformats.org/drawingml/2006/main">
               <a:ext uri="{FF2B5EF4-FFF2-40B4-BE49-F238E27FC236}">
-                <a16:creationId xmlns:a16="http://schemas.microsoft.com/office/drawing/2014/main" id="{3A9ADCC3-1A9D-4652-B662-BF715A13EB89}"/>
+                <a16:creationId xmlns:a16="http://schemas.microsoft.com/office/drawing/2014/main" id="{D23D5E6C-2BD8-40A9-81AC-A7D009B40DE5}"/>
               </a:ext>
             </a:extLst>
           </p:cNvPr>
@@ -36790,7 +36790,7 @@
           <p:cNvPr id="11" name="">
             <a:extLst xmlns:a="http://schemas.openxmlformats.org/drawingml/2006/main">
               <a:ext uri="{FF2B5EF4-FFF2-40B4-BE49-F238E27FC236}">
-                <a16:creationId xmlns:a16="http://schemas.microsoft.com/office/drawing/2014/main" id="{9B0D4E51-5B6F-4F8E-9FE1-61495078EA31}"/>
+                <a16:creationId xmlns:a16="http://schemas.microsoft.com/office/drawing/2014/main" id="{DD8B2CBF-F962-406A-A2BE-B069341976E1}"/>
               </a:ext>
             </a:extLst>
           </p:cNvPr>
@@ -36837,10 +36837,10 @@
           <p:nvPr/>
         </p:nvPicPr>
         <p:blipFill>
-          <a:blip xmlns:r="http://schemas.openxmlformats.org/officeDocument/2006/relationships" xmlns:a="http://schemas.openxmlformats.org/drawingml/2006/main" r:embed="R9cfc65a2c5034b61">
+          <a:blip xmlns:r="http://schemas.openxmlformats.org/officeDocument/2006/relationships" xmlns:a="http://schemas.openxmlformats.org/drawingml/2006/main" r:embed="R2304b1dc30b04784">
             <a:extLst>
               <a:ext uri="{96DAC541-7B7A-43D3-8B79-37D633B846F1}">
-                <asvg:svgBlip xmlns:asvg="http://schemas.microsoft.com/office/drawing/2016/SVG/main" r:embed="Rfc1c4c8237474d36"/>
+                <asvg:svgBlip xmlns:asvg="http://schemas.microsoft.com/office/drawing/2016/SVG/main" r:embed="R0e17655483dc4a7c"/>
               </a:ext>
             </a:extLst>
           </a:blip>
@@ -36861,7 +36861,7 @@
           <p:cNvPr id="13" name="">
             <a:extLst xmlns:a="http://schemas.openxmlformats.org/drawingml/2006/main">
               <a:ext uri="{FF2B5EF4-FFF2-40B4-BE49-F238E27FC236}">
-                <a16:creationId xmlns:a16="http://schemas.microsoft.com/office/drawing/2014/main" id="{4C065434-879D-40F1-AA2C-E63B66B62AA8}"/>
+                <a16:creationId xmlns:a16="http://schemas.microsoft.com/office/drawing/2014/main" id="{4C341E06-AA52-4171-AF85-F80C638ED4BC}"/>
               </a:ext>
             </a:extLst>
           </p:cNvPr>
@@ -36894,7 +36894,7 @@
           <p:cNvPr id="14" name="">
             <a:extLst xmlns:a="http://schemas.openxmlformats.org/drawingml/2006/main">
               <a:ext uri="{FF2B5EF4-FFF2-40B4-BE49-F238E27FC236}">
-                <a16:creationId xmlns:a16="http://schemas.microsoft.com/office/drawing/2014/main" id="{53C7CE9F-E4F7-4D0C-A695-0A374331D91E}"/>
+                <a16:creationId xmlns:a16="http://schemas.microsoft.com/office/drawing/2014/main" id="{C3878134-D661-4BC3-88A1-B99B18346A00}"/>
               </a:ext>
             </a:extLst>
           </p:cNvPr>
@@ -36946,7 +36946,7 @@
           <p:cNvPr id="15" name="">
             <a:extLst xmlns:a="http://schemas.openxmlformats.org/drawingml/2006/main">
               <a:ext uri="{FF2B5EF4-FFF2-40B4-BE49-F238E27FC236}">
-                <a16:creationId xmlns:a16="http://schemas.microsoft.com/office/drawing/2014/main" id="{CC1A0082-1363-4D35-9ECD-19911B3E7913}"/>
+                <a16:creationId xmlns:a16="http://schemas.microsoft.com/office/drawing/2014/main" id="{7B1D949C-E77D-4785-8D3D-6956AC92233A}"/>
               </a:ext>
             </a:extLst>
           </p:cNvPr>
@@ -36979,7 +36979,7 @@
           <p:cNvPr id="16" name="">
             <a:extLst xmlns:a="http://schemas.openxmlformats.org/drawingml/2006/main">
               <a:ext uri="{FF2B5EF4-FFF2-40B4-BE49-F238E27FC236}">
-                <a16:creationId xmlns:a16="http://schemas.microsoft.com/office/drawing/2014/main" id="{9378757B-FBA2-411A-8E05-A23467B23E64}"/>
+                <a16:creationId xmlns:a16="http://schemas.microsoft.com/office/drawing/2014/main" id="{F8AA7F50-F647-41C5-81C3-3A577DFBCF4E}"/>
               </a:ext>
             </a:extLst>
           </p:cNvPr>
@@ -37031,7 +37031,7 @@
           <p:cNvPr id="17" name="">
             <a:extLst xmlns:a="http://schemas.openxmlformats.org/drawingml/2006/main">
               <a:ext uri="{FF2B5EF4-FFF2-40B4-BE49-F238E27FC236}">
-                <a16:creationId xmlns:a16="http://schemas.microsoft.com/office/drawing/2014/main" id="{697AA1F5-DA5E-45A3-A53D-486718D8ACDF}"/>
+                <a16:creationId xmlns:a16="http://schemas.microsoft.com/office/drawing/2014/main" id="{3C31BC65-0412-4015-B47C-ADF6E0019F51}"/>
               </a:ext>
             </a:extLst>
           </p:cNvPr>
@@ -37062,7 +37062,7 @@
           <p:cNvPr id="18" name="">
             <a:extLst xmlns:a="http://schemas.openxmlformats.org/drawingml/2006/main">
               <a:ext uri="{FF2B5EF4-FFF2-40B4-BE49-F238E27FC236}">
-                <a16:creationId xmlns:a16="http://schemas.microsoft.com/office/drawing/2014/main" id="{1A955616-48CD-48CC-9E01-871A7B0BF640}"/>
+                <a16:creationId xmlns:a16="http://schemas.microsoft.com/office/drawing/2014/main" id="{4FE484B8-C9EF-46F6-BADE-684994D9A2A2}"/>
               </a:ext>
             </a:extLst>
           </p:cNvPr>
@@ -37093,7 +37093,7 @@
           <p:cNvPr id="19" name="">
             <a:extLst xmlns:a="http://schemas.openxmlformats.org/drawingml/2006/main">
               <a:ext uri="{FF2B5EF4-FFF2-40B4-BE49-F238E27FC236}">
-                <a16:creationId xmlns:a16="http://schemas.microsoft.com/office/drawing/2014/main" id="{B652BFEE-DFB5-412C-90D9-A92CC5B63789}"/>
+                <a16:creationId xmlns:a16="http://schemas.microsoft.com/office/drawing/2014/main" id="{D130B259-80E4-456F-8A14-695DCD564E20}"/>
               </a:ext>
             </a:extLst>
           </p:cNvPr>
@@ -37145,7 +37145,7 @@
           <p:cNvPr id="20" name="">
             <a:extLst xmlns:a="http://schemas.openxmlformats.org/drawingml/2006/main">
               <a:ext uri="{FF2B5EF4-FFF2-40B4-BE49-F238E27FC236}">
-                <a16:creationId xmlns:a16="http://schemas.microsoft.com/office/drawing/2014/main" id="{B80F5030-4E6D-468F-AA4C-8C36B8D34AB4}"/>
+                <a16:creationId xmlns:a16="http://schemas.microsoft.com/office/drawing/2014/main" id="{87B93556-69DA-44CD-8B5C-B7888A36B28E}"/>
               </a:ext>
             </a:extLst>
           </p:cNvPr>
@@ -37176,7 +37176,7 @@
           <p:cNvPr id="21" name="">
             <a:extLst xmlns:a="http://schemas.openxmlformats.org/drawingml/2006/main">
               <a:ext uri="{FF2B5EF4-FFF2-40B4-BE49-F238E27FC236}">
-                <a16:creationId xmlns:a16="http://schemas.microsoft.com/office/drawing/2014/main" id="{83BE47D3-D652-4824-B2C6-653BBC766992}"/>
+                <a16:creationId xmlns:a16="http://schemas.microsoft.com/office/drawing/2014/main" id="{053EAFDD-557E-4F7F-8201-965BAAB8293E}"/>
               </a:ext>
             </a:extLst>
           </p:cNvPr>
@@ -37228,7 +37228,7 @@
           <p:cNvPr id="22" name="">
             <a:extLst xmlns:a="http://schemas.openxmlformats.org/drawingml/2006/main">
               <a:ext uri="{FF2B5EF4-FFF2-40B4-BE49-F238E27FC236}">
-                <a16:creationId xmlns:a16="http://schemas.microsoft.com/office/drawing/2014/main" id="{2A148689-F1FD-4869-87A1-23DC0740086D}"/>
+                <a16:creationId xmlns:a16="http://schemas.microsoft.com/office/drawing/2014/main" id="{70BDA565-017C-4319-9A2C-91C84A8402EC}"/>
               </a:ext>
             </a:extLst>
           </p:cNvPr>
@@ -37280,7 +37280,7 @@
           <p:cNvPr id="23" name="">
             <a:extLst xmlns:a="http://schemas.openxmlformats.org/drawingml/2006/main">
               <a:ext uri="{FF2B5EF4-FFF2-40B4-BE49-F238E27FC236}">
-                <a16:creationId xmlns:a16="http://schemas.microsoft.com/office/drawing/2014/main" id="{71167A30-BD1F-42F3-B247-315D9FD48250}"/>
+                <a16:creationId xmlns:a16="http://schemas.microsoft.com/office/drawing/2014/main" id="{C576B31E-FC0A-4B1D-A914-79C0CAFB949F}"/>
               </a:ext>
             </a:extLst>
           </p:cNvPr>
@@ -37332,7 +37332,7 @@
           <p:cNvPr id="24" name="">
             <a:extLst xmlns:a="http://schemas.openxmlformats.org/drawingml/2006/main">
               <a:ext uri="{FF2B5EF4-FFF2-40B4-BE49-F238E27FC236}">
-                <a16:creationId xmlns:a16="http://schemas.microsoft.com/office/drawing/2014/main" id="{5235B3A4-8CC8-424D-B5FD-44FF64A09B7A}"/>
+                <a16:creationId xmlns:a16="http://schemas.microsoft.com/office/drawing/2014/main" id="{D771BB90-8A01-400F-BEE8-853ECF28111A}"/>
               </a:ext>
             </a:extLst>
           </p:cNvPr>
@@ -37384,7 +37384,7 @@
           <p:cNvPr id="25" name="">
             <a:extLst xmlns:a="http://schemas.openxmlformats.org/drawingml/2006/main">
               <a:ext uri="{FF2B5EF4-FFF2-40B4-BE49-F238E27FC236}">
-                <a16:creationId xmlns:a16="http://schemas.microsoft.com/office/drawing/2014/main" id="{92D3648C-B228-4E29-A627-00C19165E12F}"/>
+                <a16:creationId xmlns:a16="http://schemas.microsoft.com/office/drawing/2014/main" id="{85D44567-7653-42F4-B7D8-7FE744AD8CCD}"/>
               </a:ext>
             </a:extLst>
           </p:cNvPr>
@@ -37436,7 +37436,7 @@
           <p:cNvPr id="26" name="">
             <a:extLst xmlns:a="http://schemas.openxmlformats.org/drawingml/2006/main">
               <a:ext uri="{FF2B5EF4-FFF2-40B4-BE49-F238E27FC236}">
-                <a16:creationId xmlns:a16="http://schemas.microsoft.com/office/drawing/2014/main" id="{F5E82F20-C8C2-4FF0-ACA7-5A05D7F9472F}"/>
+                <a16:creationId xmlns:a16="http://schemas.microsoft.com/office/drawing/2014/main" id="{DCCF6F9F-62F4-4B07-BED4-BCCE0C6550DF}"/>
               </a:ext>
             </a:extLst>
           </p:cNvPr>
@@ -37486,7 +37486,7 @@
     </p:spTree>
     <p:extLst>
       <p:ext uri="{BB962C8B-B14F-4D97-AF65-F5344CB8AC3E}">
-        <p14:creationId xmlns:p14="http://schemas.microsoft.com/office/powerpoint/2010/main" val="1883090661"/>
+        <p14:creationId xmlns:p14="http://schemas.microsoft.com/office/powerpoint/2010/main" val="1889342143"/>
       </p:ext>
     </p:extLst>
   </p:cSld>
@@ -37517,7 +37517,7 @@
           <p:cNvPr id="27" name="">
             <a:extLst xmlns:a="http://schemas.openxmlformats.org/drawingml/2006/main">
               <a:ext uri="{FF2B5EF4-FFF2-40B4-BE49-F238E27FC236}">
-                <a16:creationId xmlns:a16="http://schemas.microsoft.com/office/drawing/2014/main" id="{CFDC4A36-7A4D-4F85-BEC0-73A613DB77A9}"/>
+                <a16:creationId xmlns:a16="http://schemas.microsoft.com/office/drawing/2014/main" id="{1881FC05-F74A-4F5E-8DFA-83707CAC1363}"/>
               </a:ext>
             </a:extLst>
           </p:cNvPr>
@@ -37550,7 +37550,7 @@
           <p:cNvPr id="2" name="">
             <a:extLst xmlns:a="http://schemas.openxmlformats.org/drawingml/2006/main">
               <a:ext uri="{FF2B5EF4-FFF2-40B4-BE49-F238E27FC236}">
-                <a16:creationId xmlns:a16="http://schemas.microsoft.com/office/drawing/2014/main" id="{1B161570-0398-4765-AE4D-CE109A0CE57C}"/>
+                <a16:creationId xmlns:a16="http://schemas.microsoft.com/office/drawing/2014/main" id="{AA523BDD-AA75-48FB-9AD0-4324EB17388D}"/>
               </a:ext>
             </a:extLst>
           </p:cNvPr>
@@ -37581,7 +37581,7 @@
           <p:cNvPr id="3" name="">
             <a:extLst xmlns:a="http://schemas.openxmlformats.org/drawingml/2006/main">
               <a:ext uri="{FF2B5EF4-FFF2-40B4-BE49-F238E27FC236}">
-                <a16:creationId xmlns:a16="http://schemas.microsoft.com/office/drawing/2014/main" id="{82E8F8D3-37C7-4D98-B827-8B7A7FEFC74A}"/>
+                <a16:creationId xmlns:a16="http://schemas.microsoft.com/office/drawing/2014/main" id="{4AE1495B-71F7-4B0E-82B3-C9071E8D5C4C}"/>
               </a:ext>
             </a:extLst>
           </p:cNvPr>
@@ -37633,7 +37633,7 @@
           <p:cNvPr id="4" name="">
             <a:extLst xmlns:a="http://schemas.openxmlformats.org/drawingml/2006/main">
               <a:ext uri="{FF2B5EF4-FFF2-40B4-BE49-F238E27FC236}">
-                <a16:creationId xmlns:a16="http://schemas.microsoft.com/office/drawing/2014/main" id="{F2374953-E305-467C-B579-3BE80B998A18}"/>
+                <a16:creationId xmlns:a16="http://schemas.microsoft.com/office/drawing/2014/main" id="{38BD7708-E2C7-47CE-981A-9D202DAE7BA0}"/>
               </a:ext>
             </a:extLst>
           </p:cNvPr>
@@ -37685,7 +37685,7 @@
           <p:cNvPr id="5" name="">
             <a:extLst xmlns:a="http://schemas.openxmlformats.org/drawingml/2006/main">
               <a:ext uri="{FF2B5EF4-FFF2-40B4-BE49-F238E27FC236}">
-                <a16:creationId xmlns:a16="http://schemas.microsoft.com/office/drawing/2014/main" id="{25D7619C-11EC-479D-AE6F-A8C83E9D013A}"/>
+                <a16:creationId xmlns:a16="http://schemas.microsoft.com/office/drawing/2014/main" id="{0431F90E-0AFA-4B71-97F2-F750A0E59910}"/>
               </a:ext>
             </a:extLst>
           </p:cNvPr>
@@ -37720,7 +37720,7 @@
           <p:nvPr/>
         </p:nvPicPr>
         <p:blipFill>
-          <a:blip xmlns:r="http://schemas.openxmlformats.org/officeDocument/2006/relationships" xmlns:a="http://schemas.openxmlformats.org/drawingml/2006/main" r:embed="Rae8972c0430149a7"/>
+          <a:blip xmlns:r="http://schemas.openxmlformats.org/officeDocument/2006/relationships" xmlns:a="http://schemas.openxmlformats.org/drawingml/2006/main" r:embed="R9875ad651c13470c"/>
           <a:stretch xmlns:a="http://schemas.openxmlformats.org/drawingml/2006/main"/>
         </p:blipFill>
         <p:spPr>
@@ -37738,7 +37738,7 @@
           <p:cNvPr id="7" name="">
             <a:extLst xmlns:a="http://schemas.openxmlformats.org/drawingml/2006/main">
               <a:ext uri="{FF2B5EF4-FFF2-40B4-BE49-F238E27FC236}">
-                <a16:creationId xmlns:a16="http://schemas.microsoft.com/office/drawing/2014/main" id="{B43CADAF-5C18-4BC7-B16B-C9C6C965E80C}"/>
+                <a16:creationId xmlns:a16="http://schemas.microsoft.com/office/drawing/2014/main" id="{660309C9-3DAC-44F8-8D28-18CF40AF3C6B}"/>
               </a:ext>
             </a:extLst>
           </p:cNvPr>
@@ -37790,7 +37790,7 @@
           <p:cNvPr id="8" name="">
             <a:extLst xmlns:a="http://schemas.openxmlformats.org/drawingml/2006/main">
               <a:ext uri="{FF2B5EF4-FFF2-40B4-BE49-F238E27FC236}">
-                <a16:creationId xmlns:a16="http://schemas.microsoft.com/office/drawing/2014/main" id="{F0C13EE7-0D68-4A65-9015-68D66CC8A390}"/>
+                <a16:creationId xmlns:a16="http://schemas.microsoft.com/office/drawing/2014/main" id="{94AFFFE5-7F9F-4B0A-99B1-C9DE9C67386D}"/>
               </a:ext>
             </a:extLst>
           </p:cNvPr>
@@ -37842,7 +37842,7 @@
           <p:cNvPr id="9" name="">
             <a:extLst xmlns:a="http://schemas.openxmlformats.org/drawingml/2006/main">
               <a:ext uri="{FF2B5EF4-FFF2-40B4-BE49-F238E27FC236}">
-                <a16:creationId xmlns:a16="http://schemas.microsoft.com/office/drawing/2014/main" id="{EC6E1BE1-7EB3-4847-B160-6B4E8D7CAF24}"/>
+                <a16:creationId xmlns:a16="http://schemas.microsoft.com/office/drawing/2014/main" id="{C159D0C5-CAC9-4271-A454-33F3CFF254BE}"/>
               </a:ext>
             </a:extLst>
           </p:cNvPr>
@@ -37894,7 +37894,7 @@
           <p:cNvPr id="10" name="">
             <a:extLst xmlns:a="http://schemas.openxmlformats.org/drawingml/2006/main">
               <a:ext uri="{FF2B5EF4-FFF2-40B4-BE49-F238E27FC236}">
-                <a16:creationId xmlns:a16="http://schemas.microsoft.com/office/drawing/2014/main" id="{C0D5CFF5-910A-43BF-BB57-CC6821EE65AD}"/>
+                <a16:creationId xmlns:a16="http://schemas.microsoft.com/office/drawing/2014/main" id="{5E49F336-1790-42FC-A44B-B6D7A56DE472}"/>
               </a:ext>
             </a:extLst>
           </p:cNvPr>
@@ -37946,7 +37946,7 @@
           <p:cNvPr id="11" name="">
             <a:extLst xmlns:a="http://schemas.openxmlformats.org/drawingml/2006/main">
               <a:ext uri="{FF2B5EF4-FFF2-40B4-BE49-F238E27FC236}">
-                <a16:creationId xmlns:a16="http://schemas.microsoft.com/office/drawing/2014/main" id="{D24BBFF0-1A88-4572-86AE-71743868088B}"/>
+                <a16:creationId xmlns:a16="http://schemas.microsoft.com/office/drawing/2014/main" id="{7BC7D8D4-5F2E-4FEE-A26A-746906FD7DAC}"/>
               </a:ext>
             </a:extLst>
           </p:cNvPr>
@@ -37993,10 +37993,10 @@
           <p:nvPr/>
         </p:nvPicPr>
         <p:blipFill>
-          <a:blip xmlns:r="http://schemas.openxmlformats.org/officeDocument/2006/relationships" xmlns:a="http://schemas.openxmlformats.org/drawingml/2006/main" r:embed="Re66bab7b5ea04ede">
+          <a:blip xmlns:r="http://schemas.openxmlformats.org/officeDocument/2006/relationships" xmlns:a="http://schemas.openxmlformats.org/drawingml/2006/main" r:embed="R4f065071cb284bae">
             <a:extLst>
               <a:ext uri="{96DAC541-7B7A-43D3-8B79-37D633B846F1}">
-                <asvg:svgBlip xmlns:asvg="http://schemas.microsoft.com/office/drawing/2016/SVG/main" r:embed="Rb5bad8339a9d42a6"/>
+                <asvg:svgBlip xmlns:asvg="http://schemas.microsoft.com/office/drawing/2016/SVG/main" r:embed="R3ad78c8b48774189"/>
               </a:ext>
             </a:extLst>
           </a:blip>
@@ -38017,7 +38017,7 @@
           <p:cNvPr id="13" name="">
             <a:extLst xmlns:a="http://schemas.openxmlformats.org/drawingml/2006/main">
               <a:ext uri="{FF2B5EF4-FFF2-40B4-BE49-F238E27FC236}">
-                <a16:creationId xmlns:a16="http://schemas.microsoft.com/office/drawing/2014/main" id="{5FC9A715-41B0-4EF6-92CE-ED1AB238460B}"/>
+                <a16:creationId xmlns:a16="http://schemas.microsoft.com/office/drawing/2014/main" id="{A29591A1-F74B-42A0-B8F3-A7311E02C72A}"/>
               </a:ext>
             </a:extLst>
           </p:cNvPr>
@@ -38050,7 +38050,7 @@
           <p:cNvPr id="14" name="">
             <a:extLst xmlns:a="http://schemas.openxmlformats.org/drawingml/2006/main">
               <a:ext uri="{FF2B5EF4-FFF2-40B4-BE49-F238E27FC236}">
-                <a16:creationId xmlns:a16="http://schemas.microsoft.com/office/drawing/2014/main" id="{D786B5CB-B0C0-4BB6-A23B-DEF8D7A70180}"/>
+                <a16:creationId xmlns:a16="http://schemas.microsoft.com/office/drawing/2014/main" id="{A43CCEBA-2845-4A86-8DC9-6E1256B9FFEA}"/>
               </a:ext>
             </a:extLst>
           </p:cNvPr>
@@ -38102,7 +38102,7 @@
           <p:cNvPr id="15" name="">
             <a:extLst xmlns:a="http://schemas.openxmlformats.org/drawingml/2006/main">
               <a:ext uri="{FF2B5EF4-FFF2-40B4-BE49-F238E27FC236}">
-                <a16:creationId xmlns:a16="http://schemas.microsoft.com/office/drawing/2014/main" id="{AA180779-A65D-4ECE-9A2E-E816504B865B}"/>
+                <a16:creationId xmlns:a16="http://schemas.microsoft.com/office/drawing/2014/main" id="{643EE845-12E1-477A-A390-7042749AC44E}"/>
               </a:ext>
             </a:extLst>
           </p:cNvPr>
@@ -38135,7 +38135,7 @@
           <p:cNvPr id="16" name="">
             <a:extLst xmlns:a="http://schemas.openxmlformats.org/drawingml/2006/main">
               <a:ext uri="{FF2B5EF4-FFF2-40B4-BE49-F238E27FC236}">
-                <a16:creationId xmlns:a16="http://schemas.microsoft.com/office/drawing/2014/main" id="{A821F542-1A5F-4226-AA3D-A92B4EFD16CD}"/>
+                <a16:creationId xmlns:a16="http://schemas.microsoft.com/office/drawing/2014/main" id="{5521B18F-61A1-4D87-A9E2-580C6F889539}"/>
               </a:ext>
             </a:extLst>
           </p:cNvPr>
@@ -38187,7 +38187,7 @@
           <p:cNvPr id="17" name="">
             <a:extLst xmlns:a="http://schemas.openxmlformats.org/drawingml/2006/main">
               <a:ext uri="{FF2B5EF4-FFF2-40B4-BE49-F238E27FC236}">
-                <a16:creationId xmlns:a16="http://schemas.microsoft.com/office/drawing/2014/main" id="{F6E8935E-F132-4F36-A399-9298FFFDACE6}"/>
+                <a16:creationId xmlns:a16="http://schemas.microsoft.com/office/drawing/2014/main" id="{04784213-647A-4214-83FB-A4A285FF2073}"/>
               </a:ext>
             </a:extLst>
           </p:cNvPr>
@@ -38220,7 +38220,7 @@
           <p:cNvPr id="18" name="">
             <a:extLst xmlns:a="http://schemas.openxmlformats.org/drawingml/2006/main">
               <a:ext uri="{FF2B5EF4-FFF2-40B4-BE49-F238E27FC236}">
-                <a16:creationId xmlns:a16="http://schemas.microsoft.com/office/drawing/2014/main" id="{44E75633-AE75-41FA-9D53-D7FA8AB7D377}"/>
+                <a16:creationId xmlns:a16="http://schemas.microsoft.com/office/drawing/2014/main" id="{BE539E77-06BA-4923-94F9-6DCDF7716E45}"/>
               </a:ext>
             </a:extLst>
           </p:cNvPr>
@@ -38272,7 +38272,7 @@
           <p:cNvPr id="19" name="">
             <a:extLst xmlns:a="http://schemas.openxmlformats.org/drawingml/2006/main">
               <a:ext uri="{FF2B5EF4-FFF2-40B4-BE49-F238E27FC236}">
-                <a16:creationId xmlns:a16="http://schemas.microsoft.com/office/drawing/2014/main" id="{4AA813CF-66F3-44A4-80F9-A84E0824A4EF}"/>
+                <a16:creationId xmlns:a16="http://schemas.microsoft.com/office/drawing/2014/main" id="{B76B4082-6428-457D-8775-CA556EE03076}"/>
               </a:ext>
             </a:extLst>
           </p:cNvPr>
@@ -38324,7 +38324,7 @@
           <p:cNvPr id="20" name="">
             <a:extLst xmlns:a="http://schemas.openxmlformats.org/drawingml/2006/main">
               <a:ext uri="{FF2B5EF4-FFF2-40B4-BE49-F238E27FC236}">
-                <a16:creationId xmlns:a16="http://schemas.microsoft.com/office/drawing/2014/main" id="{978D7C22-7D70-4C30-8E48-21BACBA734A9}"/>
+                <a16:creationId xmlns:a16="http://schemas.microsoft.com/office/drawing/2014/main" id="{A0A19BCF-FE9A-43EF-8587-F45B820095B6}"/>
               </a:ext>
             </a:extLst>
           </p:cNvPr>
@@ -38355,7 +38355,7 @@
           <p:cNvPr id="21" name="">
             <a:extLst xmlns:a="http://schemas.openxmlformats.org/drawingml/2006/main">
               <a:ext uri="{FF2B5EF4-FFF2-40B4-BE49-F238E27FC236}">
-                <a16:creationId xmlns:a16="http://schemas.microsoft.com/office/drawing/2014/main" id="{AB50125C-876F-4D93-9E0D-32B0D058FFBC}"/>
+                <a16:creationId xmlns:a16="http://schemas.microsoft.com/office/drawing/2014/main" id="{0FBEC2DB-835F-4F84-AB03-368E4D02028C}"/>
               </a:ext>
             </a:extLst>
           </p:cNvPr>
@@ -38407,7 +38407,7 @@
           <p:cNvPr id="22" name="">
             <a:extLst xmlns:a="http://schemas.openxmlformats.org/drawingml/2006/main">
               <a:ext uri="{FF2B5EF4-FFF2-40B4-BE49-F238E27FC236}">
-                <a16:creationId xmlns:a16="http://schemas.microsoft.com/office/drawing/2014/main" id="{C38BA23F-0728-4917-B5EF-2E6719786930}"/>
+                <a16:creationId xmlns:a16="http://schemas.microsoft.com/office/drawing/2014/main" id="{B9EC2300-B872-479F-AD53-4D7403047EDB}"/>
               </a:ext>
             </a:extLst>
           </p:cNvPr>
@@ -38459,7 +38459,7 @@
           <p:cNvPr id="23" name="">
             <a:extLst xmlns:a="http://schemas.openxmlformats.org/drawingml/2006/main">
               <a:ext uri="{FF2B5EF4-FFF2-40B4-BE49-F238E27FC236}">
-                <a16:creationId xmlns:a16="http://schemas.microsoft.com/office/drawing/2014/main" id="{B3F60ACF-FA8C-4C1E-BFB3-F50BA1AF20A7}"/>
+                <a16:creationId xmlns:a16="http://schemas.microsoft.com/office/drawing/2014/main" id="{934723DE-C199-46C7-879F-8EF996EBE830}"/>
               </a:ext>
             </a:extLst>
           </p:cNvPr>
@@ -38511,7 +38511,7 @@
           <p:cNvPr id="24" name="">
             <a:extLst xmlns:a="http://schemas.openxmlformats.org/drawingml/2006/main">
               <a:ext uri="{FF2B5EF4-FFF2-40B4-BE49-F238E27FC236}">
-                <a16:creationId xmlns:a16="http://schemas.microsoft.com/office/drawing/2014/main" id="{8DDF3930-5116-4C67-AF1C-A73BF77F95AE}"/>
+                <a16:creationId xmlns:a16="http://schemas.microsoft.com/office/drawing/2014/main" id="{FDE6B7CD-C96F-48B3-958A-ACA7CF3759DD}"/>
               </a:ext>
             </a:extLst>
           </p:cNvPr>
@@ -38563,7 +38563,7 @@
           <p:cNvPr id="25" name="">
             <a:extLst xmlns:a="http://schemas.openxmlformats.org/drawingml/2006/main">
               <a:ext uri="{FF2B5EF4-FFF2-40B4-BE49-F238E27FC236}">
-                <a16:creationId xmlns:a16="http://schemas.microsoft.com/office/drawing/2014/main" id="{AF95B4F6-4E5C-4CA5-A05E-866084A84644}"/>
+                <a16:creationId xmlns:a16="http://schemas.microsoft.com/office/drawing/2014/main" id="{47BB20A8-6002-4F05-ACB4-0D15B2888A85}"/>
               </a:ext>
             </a:extLst>
           </p:cNvPr>
@@ -38615,7 +38615,7 @@
           <p:cNvPr id="26" name="">
             <a:extLst xmlns:a="http://schemas.openxmlformats.org/drawingml/2006/main">
               <a:ext uri="{FF2B5EF4-FFF2-40B4-BE49-F238E27FC236}">
-                <a16:creationId xmlns:a16="http://schemas.microsoft.com/office/drawing/2014/main" id="{43902683-F983-417D-B77B-AFED5B98839C}"/>
+                <a16:creationId xmlns:a16="http://schemas.microsoft.com/office/drawing/2014/main" id="{8C3DDCB6-1C10-4C0E-929A-ACC6A92E36FF}"/>
               </a:ext>
             </a:extLst>
           </p:cNvPr>
@@ -38665,7 +38665,7 @@
     </p:spTree>
     <p:extLst>
       <p:ext uri="{BB962C8B-B14F-4D97-AF65-F5344CB8AC3E}">
-        <p14:creationId xmlns:p14="http://schemas.microsoft.com/office/powerpoint/2010/main" val="433155165"/>
+        <p14:creationId xmlns:p14="http://schemas.microsoft.com/office/powerpoint/2010/main" val="1715718224"/>
       </p:ext>
     </p:extLst>
   </p:cSld>
@@ -38696,7 +38696,7 @@
           <p:cNvPr id="35" name="">
             <a:extLst xmlns:a="http://schemas.openxmlformats.org/drawingml/2006/main">
               <a:ext uri="{FF2B5EF4-FFF2-40B4-BE49-F238E27FC236}">
-                <a16:creationId xmlns:a16="http://schemas.microsoft.com/office/drawing/2014/main" id="{55F3CD5C-8965-44B6-8ACF-B04C80275AE7}"/>
+                <a16:creationId xmlns:a16="http://schemas.microsoft.com/office/drawing/2014/main" id="{9F11B1C0-EC98-4928-B326-E7D2A5D3374C}"/>
               </a:ext>
             </a:extLst>
           </p:cNvPr>
@@ -38729,7 +38729,7 @@
           <p:cNvPr id="2" name="">
             <a:extLst xmlns:a="http://schemas.openxmlformats.org/drawingml/2006/main">
               <a:ext uri="{FF2B5EF4-FFF2-40B4-BE49-F238E27FC236}">
-                <a16:creationId xmlns:a16="http://schemas.microsoft.com/office/drawing/2014/main" id="{B80A6BD1-A9D4-4584-884C-3AF769440413}"/>
+                <a16:creationId xmlns:a16="http://schemas.microsoft.com/office/drawing/2014/main" id="{7572A85E-DDD6-4D11-88EF-59D1863B6F37}"/>
               </a:ext>
             </a:extLst>
           </p:cNvPr>
@@ -38760,7 +38760,7 @@
           <p:cNvPr id="3" name="">
             <a:extLst xmlns:a="http://schemas.openxmlformats.org/drawingml/2006/main">
               <a:ext uri="{FF2B5EF4-FFF2-40B4-BE49-F238E27FC236}">
-                <a16:creationId xmlns:a16="http://schemas.microsoft.com/office/drawing/2014/main" id="{905CF034-0A0F-49DD-B1F5-05B84D364A4C}"/>
+                <a16:creationId xmlns:a16="http://schemas.microsoft.com/office/drawing/2014/main" id="{19825693-D23D-43E1-A393-EDA4BDED67B1}"/>
               </a:ext>
             </a:extLst>
           </p:cNvPr>
@@ -38812,7 +38812,7 @@
           <p:cNvPr id="4" name="">
             <a:extLst xmlns:a="http://schemas.openxmlformats.org/drawingml/2006/main">
               <a:ext uri="{FF2B5EF4-FFF2-40B4-BE49-F238E27FC236}">
-                <a16:creationId xmlns:a16="http://schemas.microsoft.com/office/drawing/2014/main" id="{7A2917DA-4B3C-4140-B7F9-83BAB56A61E2}"/>
+                <a16:creationId xmlns:a16="http://schemas.microsoft.com/office/drawing/2014/main" id="{ABD9B33E-7D05-4481-B425-C2A41AE8D52E}"/>
               </a:ext>
             </a:extLst>
           </p:cNvPr>
@@ -38864,7 +38864,7 @@
           <p:cNvPr id="5" name="">
             <a:extLst xmlns:a="http://schemas.openxmlformats.org/drawingml/2006/main">
               <a:ext uri="{FF2B5EF4-FFF2-40B4-BE49-F238E27FC236}">
-                <a16:creationId xmlns:a16="http://schemas.microsoft.com/office/drawing/2014/main" id="{9594D687-5251-4D61-B3BB-CAE84FA753D0}"/>
+                <a16:creationId xmlns:a16="http://schemas.microsoft.com/office/drawing/2014/main" id="{9B6A43D6-8891-4E8D-B381-71C96EA78DB0}"/>
               </a:ext>
             </a:extLst>
           </p:cNvPr>
@@ -38899,7 +38899,7 @@
           <p:nvPr/>
         </p:nvPicPr>
         <p:blipFill>
-          <a:blip xmlns:r="http://schemas.openxmlformats.org/officeDocument/2006/relationships" xmlns:a="http://schemas.openxmlformats.org/drawingml/2006/main" r:embed="Ra731ca5a4dcb4b3d"/>
+          <a:blip xmlns:r="http://schemas.openxmlformats.org/officeDocument/2006/relationships" xmlns:a="http://schemas.openxmlformats.org/drawingml/2006/main" r:embed="R4f3e7b2275db4d3d"/>
           <a:stretch xmlns:a="http://schemas.openxmlformats.org/drawingml/2006/main"/>
         </p:blipFill>
         <p:spPr>
@@ -38917,7 +38917,7 @@
           <p:cNvPr id="7" name="">
             <a:extLst xmlns:a="http://schemas.openxmlformats.org/drawingml/2006/main">
               <a:ext uri="{FF2B5EF4-FFF2-40B4-BE49-F238E27FC236}">
-                <a16:creationId xmlns:a16="http://schemas.microsoft.com/office/drawing/2014/main" id="{EA02F7E5-A142-4FEA-825F-11DC90A8B7F5}"/>
+                <a16:creationId xmlns:a16="http://schemas.microsoft.com/office/drawing/2014/main" id="{12EF8F63-1FFC-476F-87ED-24B01E19C558}"/>
               </a:ext>
             </a:extLst>
           </p:cNvPr>
@@ -38969,7 +38969,7 @@
           <p:cNvPr id="8" name="">
             <a:extLst xmlns:a="http://schemas.openxmlformats.org/drawingml/2006/main">
               <a:ext uri="{FF2B5EF4-FFF2-40B4-BE49-F238E27FC236}">
-                <a16:creationId xmlns:a16="http://schemas.microsoft.com/office/drawing/2014/main" id="{C43012AE-1A99-45B2-B74A-C7ECC553433C}"/>
+                <a16:creationId xmlns:a16="http://schemas.microsoft.com/office/drawing/2014/main" id="{3F83E50F-F227-4ABE-B80C-D75E361678F7}"/>
               </a:ext>
             </a:extLst>
           </p:cNvPr>
@@ -39021,7 +39021,7 @@
           <p:cNvPr id="9" name="">
             <a:extLst xmlns:a="http://schemas.openxmlformats.org/drawingml/2006/main">
               <a:ext uri="{FF2B5EF4-FFF2-40B4-BE49-F238E27FC236}">
-                <a16:creationId xmlns:a16="http://schemas.microsoft.com/office/drawing/2014/main" id="{15714052-0C1D-4F45-BCD0-E5735088138D}"/>
+                <a16:creationId xmlns:a16="http://schemas.microsoft.com/office/drawing/2014/main" id="{C1BAF180-1FE6-40D1-AE2C-DD35B195AE44}"/>
               </a:ext>
             </a:extLst>
           </p:cNvPr>
@@ -39073,7 +39073,7 @@
           <p:cNvPr id="10" name="">
             <a:extLst xmlns:a="http://schemas.openxmlformats.org/drawingml/2006/main">
               <a:ext uri="{FF2B5EF4-FFF2-40B4-BE49-F238E27FC236}">
-                <a16:creationId xmlns:a16="http://schemas.microsoft.com/office/drawing/2014/main" id="{7ACB3033-688C-4516-9C77-5FE07A6E1E8C}"/>
+                <a16:creationId xmlns:a16="http://schemas.microsoft.com/office/drawing/2014/main" id="{3DB27C50-5C36-4163-95F3-E2D608E10245}"/>
               </a:ext>
             </a:extLst>
           </p:cNvPr>
@@ -39125,7 +39125,7 @@
           <p:cNvPr id="11" name="">
             <a:extLst xmlns:a="http://schemas.openxmlformats.org/drawingml/2006/main">
               <a:ext uri="{FF2B5EF4-FFF2-40B4-BE49-F238E27FC236}">
-                <a16:creationId xmlns:a16="http://schemas.microsoft.com/office/drawing/2014/main" id="{38FA0B3C-22D4-498C-8EAA-C21A69005D8C}"/>
+                <a16:creationId xmlns:a16="http://schemas.microsoft.com/office/drawing/2014/main" id="{18FD18F0-0F61-4CCA-B169-EDE55A538C42}"/>
               </a:ext>
             </a:extLst>
           </p:cNvPr>
@@ -39172,10 +39172,10 @@
           <p:nvPr/>
         </p:nvPicPr>
         <p:blipFill>
-          <a:blip xmlns:r="http://schemas.openxmlformats.org/officeDocument/2006/relationships" xmlns:a="http://schemas.openxmlformats.org/drawingml/2006/main" r:embed="Rf26044a01a2d4d8a">
+          <a:blip xmlns:r="http://schemas.openxmlformats.org/officeDocument/2006/relationships" xmlns:a="http://schemas.openxmlformats.org/drawingml/2006/main" r:embed="Rbe0a2450848a410d">
             <a:extLst>
               <a:ext uri="{96DAC541-7B7A-43D3-8B79-37D633B846F1}">
-                <asvg:svgBlip xmlns:asvg="http://schemas.microsoft.com/office/drawing/2016/SVG/main" r:embed="Rbbb10179c8f349a4"/>
+                <asvg:svgBlip xmlns:asvg="http://schemas.microsoft.com/office/drawing/2016/SVG/main" r:embed="Rd0c22a5ceded4e67"/>
               </a:ext>
             </a:extLst>
           </a:blip>
@@ -39196,7 +39196,7 @@
           <p:cNvPr id="13" name="">
             <a:extLst xmlns:a="http://schemas.openxmlformats.org/drawingml/2006/main">
               <a:ext uri="{FF2B5EF4-FFF2-40B4-BE49-F238E27FC236}">
-                <a16:creationId xmlns:a16="http://schemas.microsoft.com/office/drawing/2014/main" id="{C635D50D-65F2-414B-8D57-6E6753BC0F46}"/>
+                <a16:creationId xmlns:a16="http://schemas.microsoft.com/office/drawing/2014/main" id="{1CFB16C7-FB32-47B6-83BC-8A38AFF464BC}"/>
               </a:ext>
             </a:extLst>
           </p:cNvPr>
@@ -39229,7 +39229,7 @@
           <p:cNvPr id="14" name="">
             <a:extLst xmlns:a="http://schemas.openxmlformats.org/drawingml/2006/main">
               <a:ext uri="{FF2B5EF4-FFF2-40B4-BE49-F238E27FC236}">
-                <a16:creationId xmlns:a16="http://schemas.microsoft.com/office/drawing/2014/main" id="{28556031-F5F3-40AA-8640-8A492D94B43D}"/>
+                <a16:creationId xmlns:a16="http://schemas.microsoft.com/office/drawing/2014/main" id="{3759E0EE-5995-43BE-B33F-1FBB406C2805}"/>
               </a:ext>
             </a:extLst>
           </p:cNvPr>
@@ -39281,7 +39281,7 @@
           <p:cNvPr id="15" name="">
             <a:extLst xmlns:a="http://schemas.openxmlformats.org/drawingml/2006/main">
               <a:ext uri="{FF2B5EF4-FFF2-40B4-BE49-F238E27FC236}">
-                <a16:creationId xmlns:a16="http://schemas.microsoft.com/office/drawing/2014/main" id="{6452BCA4-E384-4368-A6BE-8C6AE02235BD}"/>
+                <a16:creationId xmlns:a16="http://schemas.microsoft.com/office/drawing/2014/main" id="{E55942F6-8C35-4A4B-A72F-B8A6EFAAB324}"/>
               </a:ext>
             </a:extLst>
           </p:cNvPr>
@@ -39314,7 +39314,7 @@
           <p:cNvPr id="16" name="">
             <a:extLst xmlns:a="http://schemas.openxmlformats.org/drawingml/2006/main">
               <a:ext uri="{FF2B5EF4-FFF2-40B4-BE49-F238E27FC236}">
-                <a16:creationId xmlns:a16="http://schemas.microsoft.com/office/drawing/2014/main" id="{72F68A31-6B3F-472F-89F8-AB6F73F8FD73}"/>
+                <a16:creationId xmlns:a16="http://schemas.microsoft.com/office/drawing/2014/main" id="{3311C64E-C9D7-4251-BEC1-4DAD8CF2C78F}"/>
               </a:ext>
             </a:extLst>
           </p:cNvPr>
@@ -39366,7 +39366,7 @@
           <p:cNvPr id="17" name="">
             <a:extLst xmlns:a="http://schemas.openxmlformats.org/drawingml/2006/main">
               <a:ext uri="{FF2B5EF4-FFF2-40B4-BE49-F238E27FC236}">
-                <a16:creationId xmlns:a16="http://schemas.microsoft.com/office/drawing/2014/main" id="{FFAC71B8-4C93-4BF5-8937-0DCA588DA460}"/>
+                <a16:creationId xmlns:a16="http://schemas.microsoft.com/office/drawing/2014/main" id="{03AA72EA-1EB7-4940-967D-50EC91731DDF}"/>
               </a:ext>
             </a:extLst>
           </p:cNvPr>
@@ -39399,7 +39399,7 @@
           <p:cNvPr id="18" name="">
             <a:extLst xmlns:a="http://schemas.openxmlformats.org/drawingml/2006/main">
               <a:ext uri="{FF2B5EF4-FFF2-40B4-BE49-F238E27FC236}">
-                <a16:creationId xmlns:a16="http://schemas.microsoft.com/office/drawing/2014/main" id="{2FF44BB8-4B06-47D2-8CC3-355B9542EB5C}"/>
+                <a16:creationId xmlns:a16="http://schemas.microsoft.com/office/drawing/2014/main" id="{80A89136-8C1E-4CA0-9CDF-3D22B6A71F44}"/>
               </a:ext>
             </a:extLst>
           </p:cNvPr>
@@ -39451,7 +39451,7 @@
           <p:cNvPr id="19" name="">
             <a:extLst xmlns:a="http://schemas.openxmlformats.org/drawingml/2006/main">
               <a:ext uri="{FF2B5EF4-FFF2-40B4-BE49-F238E27FC236}">
-                <a16:creationId xmlns:a16="http://schemas.microsoft.com/office/drawing/2014/main" id="{5B81A6DA-70C6-4971-88DE-B3BC8074D7FC}"/>
+                <a16:creationId xmlns:a16="http://schemas.microsoft.com/office/drawing/2014/main" id="{8656AC10-0B59-4C2A-B883-AED765D491C9}"/>
               </a:ext>
             </a:extLst>
           </p:cNvPr>
@@ -39484,7 +39484,7 @@
           <p:cNvPr id="20" name="">
             <a:extLst xmlns:a="http://schemas.openxmlformats.org/drawingml/2006/main">
               <a:ext uri="{FF2B5EF4-FFF2-40B4-BE49-F238E27FC236}">
-                <a16:creationId xmlns:a16="http://schemas.microsoft.com/office/drawing/2014/main" id="{ECBB6AAB-4196-4C10-BD68-95E839266C3F}"/>
+                <a16:creationId xmlns:a16="http://schemas.microsoft.com/office/drawing/2014/main" id="{F4EC47F4-1179-4250-A763-03D7A64648B2}"/>
               </a:ext>
             </a:extLst>
           </p:cNvPr>
@@ -39536,7 +39536,7 @@
           <p:cNvPr id="21" name="">
             <a:extLst xmlns:a="http://schemas.openxmlformats.org/drawingml/2006/main">
               <a:ext uri="{FF2B5EF4-FFF2-40B4-BE49-F238E27FC236}">
-                <a16:creationId xmlns:a16="http://schemas.microsoft.com/office/drawing/2014/main" id="{4216B89E-AA76-42C1-BFB7-C4F8724EAE76}"/>
+                <a16:creationId xmlns:a16="http://schemas.microsoft.com/office/drawing/2014/main" id="{82BE6FFC-1F80-466F-8F42-5329D242B3FA}"/>
               </a:ext>
             </a:extLst>
           </p:cNvPr>
@@ -39569,7 +39569,7 @@
           <p:cNvPr id="22" name="">
             <a:extLst xmlns:a="http://schemas.openxmlformats.org/drawingml/2006/main">
               <a:ext uri="{FF2B5EF4-FFF2-40B4-BE49-F238E27FC236}">
-                <a16:creationId xmlns:a16="http://schemas.microsoft.com/office/drawing/2014/main" id="{297F4F15-6BAA-47A2-9C6D-B91E955B234E}"/>
+                <a16:creationId xmlns:a16="http://schemas.microsoft.com/office/drawing/2014/main" id="{759027CF-CE95-48A1-B918-FAA0E65EFC6C}"/>
               </a:ext>
             </a:extLst>
           </p:cNvPr>
@@ -39621,7 +39621,7 @@
           <p:cNvPr id="23" name="">
             <a:extLst xmlns:a="http://schemas.openxmlformats.org/drawingml/2006/main">
               <a:ext uri="{FF2B5EF4-FFF2-40B4-BE49-F238E27FC236}">
-                <a16:creationId xmlns:a16="http://schemas.microsoft.com/office/drawing/2014/main" id="{C0200C58-0F9D-481D-9E08-3CBA1D69968D}"/>
+                <a16:creationId xmlns:a16="http://schemas.microsoft.com/office/drawing/2014/main" id="{4E7ACCC0-E354-4D14-94F5-99B821A5695E}"/>
               </a:ext>
             </a:extLst>
           </p:cNvPr>
@@ -39654,7 +39654,7 @@
           <p:cNvPr id="24" name="">
             <a:extLst xmlns:a="http://schemas.openxmlformats.org/drawingml/2006/main">
               <a:ext uri="{FF2B5EF4-FFF2-40B4-BE49-F238E27FC236}">
-                <a16:creationId xmlns:a16="http://schemas.microsoft.com/office/drawing/2014/main" id="{5CBB34F7-53E5-45A8-BD5D-49F37E550D92}"/>
+                <a16:creationId xmlns:a16="http://schemas.microsoft.com/office/drawing/2014/main" id="{41299981-2CB9-4BE5-A235-FACBA750E3F5}"/>
               </a:ext>
             </a:extLst>
           </p:cNvPr>
@@ -39706,7 +39706,7 @@
           <p:cNvPr id="25" name="">
             <a:extLst xmlns:a="http://schemas.openxmlformats.org/drawingml/2006/main">
               <a:ext uri="{FF2B5EF4-FFF2-40B4-BE49-F238E27FC236}">
-                <a16:creationId xmlns:a16="http://schemas.microsoft.com/office/drawing/2014/main" id="{69F48BD3-EB0E-4BE9-B855-765A133AB867}"/>
+                <a16:creationId xmlns:a16="http://schemas.microsoft.com/office/drawing/2014/main" id="{0CB6B67B-C5FE-45F7-A54B-15C78624A703}"/>
               </a:ext>
             </a:extLst>
           </p:cNvPr>
@@ -39739,7 +39739,7 @@
           <p:cNvPr id="26" name="">
             <a:extLst xmlns:a="http://schemas.openxmlformats.org/drawingml/2006/main">
               <a:ext uri="{FF2B5EF4-FFF2-40B4-BE49-F238E27FC236}">
-                <a16:creationId xmlns:a16="http://schemas.microsoft.com/office/drawing/2014/main" id="{7F520492-9EF7-4540-9816-2AB03CA78AA1}"/>
+                <a16:creationId xmlns:a16="http://schemas.microsoft.com/office/drawing/2014/main" id="{FEC3A944-725B-4A0B-9EDA-7A4CDBF22831}"/>
               </a:ext>
             </a:extLst>
           </p:cNvPr>
@@ -39791,7 +39791,7 @@
           <p:cNvPr id="27" name="">
             <a:extLst xmlns:a="http://schemas.openxmlformats.org/drawingml/2006/main">
               <a:ext uri="{FF2B5EF4-FFF2-40B4-BE49-F238E27FC236}">
-                <a16:creationId xmlns:a16="http://schemas.microsoft.com/office/drawing/2014/main" id="{F07E5AEB-1366-4289-A0EB-3664A746733A}"/>
+                <a16:creationId xmlns:a16="http://schemas.microsoft.com/office/drawing/2014/main" id="{7B4D43BC-69EA-485A-A986-5B8776287EF6}"/>
               </a:ext>
             </a:extLst>
           </p:cNvPr>
@@ -39824,7 +39824,7 @@
           <p:cNvPr id="28" name="">
             <a:extLst xmlns:a="http://schemas.openxmlformats.org/drawingml/2006/main">
               <a:ext uri="{FF2B5EF4-FFF2-40B4-BE49-F238E27FC236}">
-                <a16:creationId xmlns:a16="http://schemas.microsoft.com/office/drawing/2014/main" id="{4AC8AC84-4E95-4992-8CFF-BE1910D970E7}"/>
+                <a16:creationId xmlns:a16="http://schemas.microsoft.com/office/drawing/2014/main" id="{E3D0E1E6-0212-4690-8716-800389E2DE7D}"/>
               </a:ext>
             </a:extLst>
           </p:cNvPr>
@@ -39876,7 +39876,7 @@
           <p:cNvPr id="29" name="">
             <a:extLst xmlns:a="http://schemas.openxmlformats.org/drawingml/2006/main">
               <a:ext uri="{FF2B5EF4-FFF2-40B4-BE49-F238E27FC236}">
-                <a16:creationId xmlns:a16="http://schemas.microsoft.com/office/drawing/2014/main" id="{8F037161-B9AA-4A44-87F5-7F4EB5E71CD2}"/>
+                <a16:creationId xmlns:a16="http://schemas.microsoft.com/office/drawing/2014/main" id="{CBDB7386-57C0-468B-92CC-417AD4DED319}"/>
               </a:ext>
             </a:extLst>
           </p:cNvPr>
@@ -39909,7 +39909,7 @@
           <p:cNvPr id="30" name="">
             <a:extLst xmlns:a="http://schemas.openxmlformats.org/drawingml/2006/main">
               <a:ext uri="{FF2B5EF4-FFF2-40B4-BE49-F238E27FC236}">
-                <a16:creationId xmlns:a16="http://schemas.microsoft.com/office/drawing/2014/main" id="{53DC8B52-2F38-4347-B9A4-0189E40D6A08}"/>
+                <a16:creationId xmlns:a16="http://schemas.microsoft.com/office/drawing/2014/main" id="{46DC8240-885D-4A32-A08F-BBBFDEA68DC4}"/>
               </a:ext>
             </a:extLst>
           </p:cNvPr>
@@ -39961,7 +39961,7 @@
           <p:cNvPr id="31" name="">
             <a:extLst xmlns:a="http://schemas.openxmlformats.org/drawingml/2006/main">
               <a:ext uri="{FF2B5EF4-FFF2-40B4-BE49-F238E27FC236}">
-                <a16:creationId xmlns:a16="http://schemas.microsoft.com/office/drawing/2014/main" id="{36AAEEE2-99C3-4A2D-A3D9-DE857874C268}"/>
+                <a16:creationId xmlns:a16="http://schemas.microsoft.com/office/drawing/2014/main" id="{9377DB10-A931-42AB-AD2F-1A9FD915C306}"/>
               </a:ext>
             </a:extLst>
           </p:cNvPr>
@@ -39994,7 +39994,7 @@
           <p:cNvPr id="32" name="">
             <a:extLst xmlns:a="http://schemas.openxmlformats.org/drawingml/2006/main">
               <a:ext uri="{FF2B5EF4-FFF2-40B4-BE49-F238E27FC236}">
-                <a16:creationId xmlns:a16="http://schemas.microsoft.com/office/drawing/2014/main" id="{7867F4C1-9F68-479E-BD3C-30850C2623A0}"/>
+                <a16:creationId xmlns:a16="http://schemas.microsoft.com/office/drawing/2014/main" id="{628026FC-9492-4746-851E-EB2D185E59BB}"/>
               </a:ext>
             </a:extLst>
           </p:cNvPr>
@@ -40046,7 +40046,7 @@
           <p:cNvPr id="33" name="">
             <a:extLst xmlns:a="http://schemas.openxmlformats.org/drawingml/2006/main">
               <a:ext uri="{FF2B5EF4-FFF2-40B4-BE49-F238E27FC236}">
-                <a16:creationId xmlns:a16="http://schemas.microsoft.com/office/drawing/2014/main" id="{18173BC0-3FDA-4AF0-9D82-5FA1D27FF58B}"/>
+                <a16:creationId xmlns:a16="http://schemas.microsoft.com/office/drawing/2014/main" id="{461FE210-F42C-41C8-992D-20025A926C3C}"/>
               </a:ext>
             </a:extLst>
           </p:cNvPr>
@@ -40079,7 +40079,7 @@
           <p:cNvPr id="34" name="">
             <a:extLst xmlns:a="http://schemas.openxmlformats.org/drawingml/2006/main">
               <a:ext uri="{FF2B5EF4-FFF2-40B4-BE49-F238E27FC236}">
-                <a16:creationId xmlns:a16="http://schemas.microsoft.com/office/drawing/2014/main" id="{E8681CB5-BD82-461D-BC99-2DEEBEB5891C}"/>
+                <a16:creationId xmlns:a16="http://schemas.microsoft.com/office/drawing/2014/main" id="{D3ED6B83-5F3A-4AD2-9DAB-9511A3F1CAE1}"/>
               </a:ext>
             </a:extLst>
           </p:cNvPr>
@@ -40129,7 +40129,7 @@
     </p:spTree>
     <p:extLst>
       <p:ext uri="{BB962C8B-B14F-4D97-AF65-F5344CB8AC3E}">
-        <p14:creationId xmlns:p14="http://schemas.microsoft.com/office/powerpoint/2010/main" val="416184861"/>
+        <p14:creationId xmlns:p14="http://schemas.microsoft.com/office/powerpoint/2010/main" val="1615031004"/>
       </p:ext>
     </p:extLst>
   </p:cSld>
@@ -40160,7 +40160,7 @@
           <p:cNvPr id="102" name="">
             <a:extLst xmlns:a="http://schemas.openxmlformats.org/drawingml/2006/main">
               <a:ext uri="{FF2B5EF4-FFF2-40B4-BE49-F238E27FC236}">
-                <a16:creationId xmlns:a16="http://schemas.microsoft.com/office/drawing/2014/main" id="{EB8C51FF-C635-4DC8-B3EF-90D03D5A47C1}"/>
+                <a16:creationId xmlns:a16="http://schemas.microsoft.com/office/drawing/2014/main" id="{A7418F4D-E5E4-4667-AAC6-5537454AEF82}"/>
               </a:ext>
             </a:extLst>
           </p:cNvPr>
@@ -40193,7 +40193,7 @@
           <p:cNvPr id="2" name="">
             <a:extLst xmlns:a="http://schemas.openxmlformats.org/drawingml/2006/main">
               <a:ext uri="{FF2B5EF4-FFF2-40B4-BE49-F238E27FC236}">
-                <a16:creationId xmlns:a16="http://schemas.microsoft.com/office/drawing/2014/main" id="{D9DB5504-E82D-48DE-B6C5-166535F38919}"/>
+                <a16:creationId xmlns:a16="http://schemas.microsoft.com/office/drawing/2014/main" id="{B75996BB-438A-42AD-8A43-0D630F515575}"/>
               </a:ext>
             </a:extLst>
           </p:cNvPr>
@@ -40224,7 +40224,7 @@
           <p:cNvPr id="3" name="">
             <a:extLst xmlns:a="http://schemas.openxmlformats.org/drawingml/2006/main">
               <a:ext uri="{FF2B5EF4-FFF2-40B4-BE49-F238E27FC236}">
-                <a16:creationId xmlns:a16="http://schemas.microsoft.com/office/drawing/2014/main" id="{D0B68E77-FD2C-4C4D-AF69-2F9DFC7A0A05}"/>
+                <a16:creationId xmlns:a16="http://schemas.microsoft.com/office/drawing/2014/main" id="{2F8F5FDF-3777-4C67-815F-BEED3EBF70B1}"/>
               </a:ext>
             </a:extLst>
           </p:cNvPr>
@@ -40276,7 +40276,7 @@
           <p:cNvPr id="4" name="">
             <a:extLst xmlns:a="http://schemas.openxmlformats.org/drawingml/2006/main">
               <a:ext uri="{FF2B5EF4-FFF2-40B4-BE49-F238E27FC236}">
-                <a16:creationId xmlns:a16="http://schemas.microsoft.com/office/drawing/2014/main" id="{F521CC33-9CE8-4A88-B8F8-274EAC8D2ADC}"/>
+                <a16:creationId xmlns:a16="http://schemas.microsoft.com/office/drawing/2014/main" id="{C9F85ADE-E6C1-4197-9DAC-FC115ABC2E7C}"/>
               </a:ext>
             </a:extLst>
           </p:cNvPr>
@@ -40328,7 +40328,7 @@
           <p:cNvPr id="5" name="">
             <a:extLst xmlns:a="http://schemas.openxmlformats.org/drawingml/2006/main">
               <a:ext uri="{FF2B5EF4-FFF2-40B4-BE49-F238E27FC236}">
-                <a16:creationId xmlns:a16="http://schemas.microsoft.com/office/drawing/2014/main" id="{1867094A-0E76-44B4-83D8-54294E8F3AEC}"/>
+                <a16:creationId xmlns:a16="http://schemas.microsoft.com/office/drawing/2014/main" id="{9C318349-3077-451B-AF8C-819D45DED3A2}"/>
               </a:ext>
             </a:extLst>
           </p:cNvPr>
@@ -40363,7 +40363,7 @@
           <p:nvPr/>
         </p:nvPicPr>
         <p:blipFill>
-          <a:blip xmlns:r="http://schemas.openxmlformats.org/officeDocument/2006/relationships" xmlns:a="http://schemas.openxmlformats.org/drawingml/2006/main" r:embed="R6624beb353b8434a"/>
+          <a:blip xmlns:r="http://schemas.openxmlformats.org/officeDocument/2006/relationships" xmlns:a="http://schemas.openxmlformats.org/drawingml/2006/main" r:embed="R44d5fda23b4b4a65"/>
           <a:stretch xmlns:a="http://schemas.openxmlformats.org/drawingml/2006/main"/>
         </p:blipFill>
         <p:spPr>
@@ -40381,7 +40381,7 @@
           <p:cNvPr id="7" name="">
             <a:extLst xmlns:a="http://schemas.openxmlformats.org/drawingml/2006/main">
               <a:ext uri="{FF2B5EF4-FFF2-40B4-BE49-F238E27FC236}">
-                <a16:creationId xmlns:a16="http://schemas.microsoft.com/office/drawing/2014/main" id="{E83231AE-0B6D-4F85-BB39-60924553253E}"/>
+                <a16:creationId xmlns:a16="http://schemas.microsoft.com/office/drawing/2014/main" id="{A631ECED-0322-41EE-8677-0F9C81D4FC18}"/>
               </a:ext>
             </a:extLst>
           </p:cNvPr>
@@ -40433,7 +40433,7 @@
           <p:cNvPr id="8" name="">
             <a:extLst xmlns:a="http://schemas.openxmlformats.org/drawingml/2006/main">
               <a:ext uri="{FF2B5EF4-FFF2-40B4-BE49-F238E27FC236}">
-                <a16:creationId xmlns:a16="http://schemas.microsoft.com/office/drawing/2014/main" id="{B2EDC2AA-9B1C-47D2-9848-49D9F5F9B780}"/>
+                <a16:creationId xmlns:a16="http://schemas.microsoft.com/office/drawing/2014/main" id="{DEA5AE05-9FD0-4C9D-B157-36A6F9556719}"/>
               </a:ext>
             </a:extLst>
           </p:cNvPr>
@@ -40485,7 +40485,7 @@
           <p:cNvPr id="9" name="">
             <a:extLst xmlns:a="http://schemas.openxmlformats.org/drawingml/2006/main">
               <a:ext uri="{FF2B5EF4-FFF2-40B4-BE49-F238E27FC236}">
-                <a16:creationId xmlns:a16="http://schemas.microsoft.com/office/drawing/2014/main" id="{F762454A-EA3A-47A7-AA26-713068F8894A}"/>
+                <a16:creationId xmlns:a16="http://schemas.microsoft.com/office/drawing/2014/main" id="{29D9000C-2380-445F-BFDD-95A198F7D0B0}"/>
               </a:ext>
             </a:extLst>
           </p:cNvPr>
@@ -40537,7 +40537,7 @@
           <p:cNvPr id="10" name="">
             <a:extLst xmlns:a="http://schemas.openxmlformats.org/drawingml/2006/main">
               <a:ext uri="{FF2B5EF4-FFF2-40B4-BE49-F238E27FC236}">
-                <a16:creationId xmlns:a16="http://schemas.microsoft.com/office/drawing/2014/main" id="{DC37ABC6-5AB7-4F72-B62B-3ED792EF2A97}"/>
+                <a16:creationId xmlns:a16="http://schemas.microsoft.com/office/drawing/2014/main" id="{54EB1F52-7A5E-45B7-91B3-37E0BEEAB272}"/>
               </a:ext>
             </a:extLst>
           </p:cNvPr>
@@ -40589,7 +40589,7 @@
           <p:cNvPr id="11" name="">
             <a:extLst xmlns:a="http://schemas.openxmlformats.org/drawingml/2006/main">
               <a:ext uri="{FF2B5EF4-FFF2-40B4-BE49-F238E27FC236}">
-                <a16:creationId xmlns:a16="http://schemas.microsoft.com/office/drawing/2014/main" id="{C46D0D34-8883-4EDC-9C5E-DAD8C576336F}"/>
+                <a16:creationId xmlns:a16="http://schemas.microsoft.com/office/drawing/2014/main" id="{6AAB84F7-2ADE-408F-9816-2FCDC6B1E056}"/>
               </a:ext>
             </a:extLst>
           </p:cNvPr>
@@ -40620,7 +40620,7 @@
           <p:cNvPr id="12" name="">
             <a:extLst xmlns:a="http://schemas.openxmlformats.org/drawingml/2006/main">
               <a:ext uri="{FF2B5EF4-FFF2-40B4-BE49-F238E27FC236}">
-                <a16:creationId xmlns:a16="http://schemas.microsoft.com/office/drawing/2014/main" id="{DAD8DCB5-ACB7-48A2-BD4D-8E5BC96AA2A3}"/>
+                <a16:creationId xmlns:a16="http://schemas.microsoft.com/office/drawing/2014/main" id="{B3B6CB74-6E17-4E2C-BF0F-5F1248F2C10D}"/>
               </a:ext>
             </a:extLst>
           </p:cNvPr>
@@ -40651,7 +40651,7 @@
           <p:cNvPr id="13" name="">
             <a:extLst xmlns:a="http://schemas.openxmlformats.org/drawingml/2006/main">
               <a:ext uri="{FF2B5EF4-FFF2-40B4-BE49-F238E27FC236}">
-                <a16:creationId xmlns:a16="http://schemas.microsoft.com/office/drawing/2014/main" id="{4DCE1191-D4EE-4094-B42C-BF32991DA325}"/>
+                <a16:creationId xmlns:a16="http://schemas.microsoft.com/office/drawing/2014/main" id="{68523348-8B52-4A3D-B39C-4DA7B35C87E3}"/>
               </a:ext>
             </a:extLst>
           </p:cNvPr>
@@ -40703,7 +40703,7 @@
           <p:cNvPr id="14" name="">
             <a:extLst xmlns:a="http://schemas.openxmlformats.org/drawingml/2006/main">
               <a:ext uri="{FF2B5EF4-FFF2-40B4-BE49-F238E27FC236}">
-                <a16:creationId xmlns:a16="http://schemas.microsoft.com/office/drawing/2014/main" id="{887823A4-7FFF-4FCF-AFD6-42C5E603E82B}"/>
+                <a16:creationId xmlns:a16="http://schemas.microsoft.com/office/drawing/2014/main" id="{19CA6FDF-BD70-454E-8B40-FD45B6E424C2}"/>
               </a:ext>
             </a:extLst>
           </p:cNvPr>
@@ -40755,7 +40755,7 @@
           <p:cNvPr id="15" name="">
             <a:extLst xmlns:a="http://schemas.openxmlformats.org/drawingml/2006/main">
               <a:ext uri="{FF2B5EF4-FFF2-40B4-BE49-F238E27FC236}">
-                <a16:creationId xmlns:a16="http://schemas.microsoft.com/office/drawing/2014/main" id="{B03D16D2-6364-492C-A323-B0360A93E324}"/>
+                <a16:creationId xmlns:a16="http://schemas.microsoft.com/office/drawing/2014/main" id="{00FE1473-ABA1-4023-852F-1F03B06A1552}"/>
               </a:ext>
             </a:extLst>
           </p:cNvPr>
@@ -40807,7 +40807,7 @@
           <p:cNvPr id="16" name="">
             <a:extLst xmlns:a="http://schemas.openxmlformats.org/drawingml/2006/main">
               <a:ext uri="{FF2B5EF4-FFF2-40B4-BE49-F238E27FC236}">
-                <a16:creationId xmlns:a16="http://schemas.microsoft.com/office/drawing/2014/main" id="{E4DC9368-18EA-4CA3-A5AB-302A98018E1A}"/>
+                <a16:creationId xmlns:a16="http://schemas.microsoft.com/office/drawing/2014/main" id="{D0095B60-760B-472E-863E-1A0A5630B235}"/>
               </a:ext>
             </a:extLst>
           </p:cNvPr>
@@ -40859,7 +40859,7 @@
           <p:cNvPr id="17" name="">
             <a:extLst xmlns:a="http://schemas.openxmlformats.org/drawingml/2006/main">
               <a:ext uri="{FF2B5EF4-FFF2-40B4-BE49-F238E27FC236}">
-                <a16:creationId xmlns:a16="http://schemas.microsoft.com/office/drawing/2014/main" id="{8B54B813-0C87-4636-B5AB-D36D8FAE9AA5}"/>
+                <a16:creationId xmlns:a16="http://schemas.microsoft.com/office/drawing/2014/main" id="{2CFD4F62-A366-49F0-882B-2D9F2D1714BD}"/>
               </a:ext>
             </a:extLst>
           </p:cNvPr>
@@ -40911,7 +40911,7 @@
           <p:cNvPr id="18" name="">
             <a:extLst xmlns:a="http://schemas.openxmlformats.org/drawingml/2006/main">
               <a:ext uri="{FF2B5EF4-FFF2-40B4-BE49-F238E27FC236}">
-                <a16:creationId xmlns:a16="http://schemas.microsoft.com/office/drawing/2014/main" id="{0A995BA0-8CE8-4173-8648-EA7098BD651B}"/>
+                <a16:creationId xmlns:a16="http://schemas.microsoft.com/office/drawing/2014/main" id="{72BF5275-1422-4954-9452-8C887FA77141}"/>
               </a:ext>
             </a:extLst>
           </p:cNvPr>
@@ -40942,7 +40942,7 @@
           <p:cNvPr id="19" name="">
             <a:extLst xmlns:a="http://schemas.openxmlformats.org/drawingml/2006/main">
               <a:ext uri="{FF2B5EF4-FFF2-40B4-BE49-F238E27FC236}">
-                <a16:creationId xmlns:a16="http://schemas.microsoft.com/office/drawing/2014/main" id="{630DD722-B97A-4B3F-9FD8-01C353705D9D}"/>
+                <a16:creationId xmlns:a16="http://schemas.microsoft.com/office/drawing/2014/main" id="{4497CBA7-A727-4C31-9243-E39A7C94522D}"/>
               </a:ext>
             </a:extLst>
           </p:cNvPr>
@@ -40994,7 +40994,7 @@
           <p:cNvPr id="20" name="">
             <a:extLst xmlns:a="http://schemas.openxmlformats.org/drawingml/2006/main">
               <a:ext uri="{FF2B5EF4-FFF2-40B4-BE49-F238E27FC236}">
-                <a16:creationId xmlns:a16="http://schemas.microsoft.com/office/drawing/2014/main" id="{C93D82E7-49EC-4D37-AA98-30E01E59C447}"/>
+                <a16:creationId xmlns:a16="http://schemas.microsoft.com/office/drawing/2014/main" id="{15068F82-CA17-4232-B729-5A58991FF798}"/>
               </a:ext>
             </a:extLst>
           </p:cNvPr>
@@ -41046,7 +41046,7 @@
           <p:cNvPr id="21" name="">
             <a:extLst xmlns:a="http://schemas.openxmlformats.org/drawingml/2006/main">
               <a:ext uri="{FF2B5EF4-FFF2-40B4-BE49-F238E27FC236}">
-                <a16:creationId xmlns:a16="http://schemas.microsoft.com/office/drawing/2014/main" id="{09ACBB76-1803-4907-A1D3-755D9CB75108}"/>
+                <a16:creationId xmlns:a16="http://schemas.microsoft.com/office/drawing/2014/main" id="{B65C5652-EF9B-4BD2-8B09-4AFC34D1561B}"/>
               </a:ext>
             </a:extLst>
           </p:cNvPr>
@@ -41098,7 +41098,7 @@
           <p:cNvPr id="22" name="">
             <a:extLst xmlns:a="http://schemas.openxmlformats.org/drawingml/2006/main">
               <a:ext uri="{FF2B5EF4-FFF2-40B4-BE49-F238E27FC236}">
-                <a16:creationId xmlns:a16="http://schemas.microsoft.com/office/drawing/2014/main" id="{A7C08FAA-786F-4F20-9BFA-07668D4B9C1F}"/>
+                <a16:creationId xmlns:a16="http://schemas.microsoft.com/office/drawing/2014/main" id="{71DF5389-A84D-4D38-81B5-69E9870A27A2}"/>
               </a:ext>
             </a:extLst>
           </p:cNvPr>
@@ -41150,7 +41150,7 @@
           <p:cNvPr id="23" name="">
             <a:extLst xmlns:a="http://schemas.openxmlformats.org/drawingml/2006/main">
               <a:ext uri="{FF2B5EF4-FFF2-40B4-BE49-F238E27FC236}">
-                <a16:creationId xmlns:a16="http://schemas.microsoft.com/office/drawing/2014/main" id="{7D09F574-79F2-4F90-9A34-E72D34F81E1D}"/>
+                <a16:creationId xmlns:a16="http://schemas.microsoft.com/office/drawing/2014/main" id="{9B0A1596-4CD7-40DF-B50E-FE8AED73B252}"/>
               </a:ext>
             </a:extLst>
           </p:cNvPr>
@@ -41202,7 +41202,7 @@
           <p:cNvPr id="24" name="">
             <a:extLst xmlns:a="http://schemas.openxmlformats.org/drawingml/2006/main">
               <a:ext uri="{FF2B5EF4-FFF2-40B4-BE49-F238E27FC236}">
-                <a16:creationId xmlns:a16="http://schemas.microsoft.com/office/drawing/2014/main" id="{694403DE-9DA7-460F-B3D9-B42401277D9C}"/>
+                <a16:creationId xmlns:a16="http://schemas.microsoft.com/office/drawing/2014/main" id="{55B44BCC-7E9E-4F4F-97B9-81CC2E2FDEC2}"/>
               </a:ext>
             </a:extLst>
           </p:cNvPr>
@@ -41233,7 +41233,7 @@
           <p:cNvPr id="25" name="">
             <a:extLst xmlns:a="http://schemas.openxmlformats.org/drawingml/2006/main">
               <a:ext uri="{FF2B5EF4-FFF2-40B4-BE49-F238E27FC236}">
-                <a16:creationId xmlns:a16="http://schemas.microsoft.com/office/drawing/2014/main" id="{AF908781-9EE9-4599-8878-460772B4769C}"/>
+                <a16:creationId xmlns:a16="http://schemas.microsoft.com/office/drawing/2014/main" id="{E02DB0D6-B95A-43E4-9A4D-A73A43E9EC4E}"/>
               </a:ext>
             </a:extLst>
           </p:cNvPr>
@@ -41264,7 +41264,7 @@
           <p:cNvPr id="26" name="">
             <a:extLst xmlns:a="http://schemas.openxmlformats.org/drawingml/2006/main">
               <a:ext uri="{FF2B5EF4-FFF2-40B4-BE49-F238E27FC236}">
-                <a16:creationId xmlns:a16="http://schemas.microsoft.com/office/drawing/2014/main" id="{D5A3C5EF-26C9-412C-8ECE-176BD2AC3840}"/>
+                <a16:creationId xmlns:a16="http://schemas.microsoft.com/office/drawing/2014/main" id="{540DD639-CCB6-408A-921F-4A517B0B0101}"/>
               </a:ext>
             </a:extLst>
           </p:cNvPr>
@@ -41316,7 +41316,7 @@
           <p:cNvPr id="27" name="">
             <a:extLst xmlns:a="http://schemas.openxmlformats.org/drawingml/2006/main">
               <a:ext uri="{FF2B5EF4-FFF2-40B4-BE49-F238E27FC236}">
-                <a16:creationId xmlns:a16="http://schemas.microsoft.com/office/drawing/2014/main" id="{106A3C5D-86CE-4495-BEEE-D1D2F57A16A1}"/>
+                <a16:creationId xmlns:a16="http://schemas.microsoft.com/office/drawing/2014/main" id="{B99DDE8B-3CF7-4EB8-B1CD-0AA2DCB5EE46}"/>
               </a:ext>
             </a:extLst>
           </p:cNvPr>
@@ -41368,7 +41368,7 @@
           <p:cNvPr id="28" name="">
             <a:extLst xmlns:a="http://schemas.openxmlformats.org/drawingml/2006/main">
               <a:ext uri="{FF2B5EF4-FFF2-40B4-BE49-F238E27FC236}">
-                <a16:creationId xmlns:a16="http://schemas.microsoft.com/office/drawing/2014/main" id="{C0556F3D-5223-44EC-91A6-353ACB216D72}"/>
+                <a16:creationId xmlns:a16="http://schemas.microsoft.com/office/drawing/2014/main" id="{296DA39F-3BE7-44D9-BAE3-4B340D00198F}"/>
               </a:ext>
             </a:extLst>
           </p:cNvPr>
@@ -41420,7 +41420,7 @@
           <p:cNvPr id="29" name="">
             <a:extLst xmlns:a="http://schemas.openxmlformats.org/drawingml/2006/main">
               <a:ext uri="{FF2B5EF4-FFF2-40B4-BE49-F238E27FC236}">
-                <a16:creationId xmlns:a16="http://schemas.microsoft.com/office/drawing/2014/main" id="{DCC799CB-1679-496B-A228-A20C3C6AFB72}"/>
+                <a16:creationId xmlns:a16="http://schemas.microsoft.com/office/drawing/2014/main" id="{17A5DCC8-3286-42B5-BB8F-BF84A9C0EED2}"/>
               </a:ext>
             </a:extLst>
           </p:cNvPr>
@@ -41472,7 +41472,7 @@
           <p:cNvPr id="30" name="">
             <a:extLst xmlns:a="http://schemas.openxmlformats.org/drawingml/2006/main">
               <a:ext uri="{FF2B5EF4-FFF2-40B4-BE49-F238E27FC236}">
-                <a16:creationId xmlns:a16="http://schemas.microsoft.com/office/drawing/2014/main" id="{0E9EF0FC-F376-48F8-A7FF-70D6D0EEE5F8}"/>
+                <a16:creationId xmlns:a16="http://schemas.microsoft.com/office/drawing/2014/main" id="{D256C27C-32C7-487A-9D08-4BDEB12D74C6}"/>
               </a:ext>
             </a:extLst>
           </p:cNvPr>
@@ -41524,7 +41524,7 @@
           <p:cNvPr id="31" name="">
             <a:extLst xmlns:a="http://schemas.openxmlformats.org/drawingml/2006/main">
               <a:ext uri="{FF2B5EF4-FFF2-40B4-BE49-F238E27FC236}">
-                <a16:creationId xmlns:a16="http://schemas.microsoft.com/office/drawing/2014/main" id="{35FCEDAC-5BF3-400A-8FD7-40E17F5660DC}"/>
+                <a16:creationId xmlns:a16="http://schemas.microsoft.com/office/drawing/2014/main" id="{88250912-B499-4272-8981-C17CBF45E4DA}"/>
               </a:ext>
             </a:extLst>
           </p:cNvPr>
@@ -41555,7 +41555,7 @@
           <p:cNvPr id="32" name="">
             <a:extLst xmlns:a="http://schemas.openxmlformats.org/drawingml/2006/main">
               <a:ext uri="{FF2B5EF4-FFF2-40B4-BE49-F238E27FC236}">
-                <a16:creationId xmlns:a16="http://schemas.microsoft.com/office/drawing/2014/main" id="{31B0C19E-087E-4F84-9212-3F88EC3A9DC4}"/>
+                <a16:creationId xmlns:a16="http://schemas.microsoft.com/office/drawing/2014/main" id="{D2F61C68-FAF5-47A8-AE1E-D586F6355CE9}"/>
               </a:ext>
             </a:extLst>
           </p:cNvPr>
@@ -41607,7 +41607,7 @@
           <p:cNvPr id="33" name="">
             <a:extLst xmlns:a="http://schemas.openxmlformats.org/drawingml/2006/main">
               <a:ext uri="{FF2B5EF4-FFF2-40B4-BE49-F238E27FC236}">
-                <a16:creationId xmlns:a16="http://schemas.microsoft.com/office/drawing/2014/main" id="{C214EE0A-83FA-412A-8C4D-6B7044B27BB4}"/>
+                <a16:creationId xmlns:a16="http://schemas.microsoft.com/office/drawing/2014/main" id="{7F9267D8-E913-4DEF-80B5-5827E4E8BBEC}"/>
               </a:ext>
             </a:extLst>
           </p:cNvPr>
@@ -41659,7 +41659,7 @@
           <p:cNvPr id="34" name="">
             <a:extLst xmlns:a="http://schemas.openxmlformats.org/drawingml/2006/main">
               <a:ext uri="{FF2B5EF4-FFF2-40B4-BE49-F238E27FC236}">
-                <a16:creationId xmlns:a16="http://schemas.microsoft.com/office/drawing/2014/main" id="{79C205DF-542C-4100-B10A-05F91C8FCB0E}"/>
+                <a16:creationId xmlns:a16="http://schemas.microsoft.com/office/drawing/2014/main" id="{4909B62A-3549-4224-BAA7-D91E5514CABB}"/>
               </a:ext>
             </a:extLst>
           </p:cNvPr>
@@ -41711,7 +41711,7 @@
           <p:cNvPr id="35" name="">
             <a:extLst xmlns:a="http://schemas.openxmlformats.org/drawingml/2006/main">
               <a:ext uri="{FF2B5EF4-FFF2-40B4-BE49-F238E27FC236}">
-                <a16:creationId xmlns:a16="http://schemas.microsoft.com/office/drawing/2014/main" id="{B15ACDC5-D49B-4B04-9694-B5E47D7193C7}"/>
+                <a16:creationId xmlns:a16="http://schemas.microsoft.com/office/drawing/2014/main" id="{F69C6B57-8AD3-4938-A12E-499F20F9018A}"/>
               </a:ext>
             </a:extLst>
           </p:cNvPr>
@@ -41763,7 +41763,7 @@
           <p:cNvPr id="36" name="">
             <a:extLst xmlns:a="http://schemas.openxmlformats.org/drawingml/2006/main">
               <a:ext uri="{FF2B5EF4-FFF2-40B4-BE49-F238E27FC236}">
-                <a16:creationId xmlns:a16="http://schemas.microsoft.com/office/drawing/2014/main" id="{7DC064DE-3083-4A92-8606-997D0C2F18FF}"/>
+                <a16:creationId xmlns:a16="http://schemas.microsoft.com/office/drawing/2014/main" id="{C0FEC887-E9C0-4EF2-9C81-96741D5DA974}"/>
               </a:ext>
             </a:extLst>
           </p:cNvPr>
@@ -41815,7 +41815,7 @@
           <p:cNvPr id="37" name="">
             <a:extLst xmlns:a="http://schemas.openxmlformats.org/drawingml/2006/main">
               <a:ext uri="{FF2B5EF4-FFF2-40B4-BE49-F238E27FC236}">
-                <a16:creationId xmlns:a16="http://schemas.microsoft.com/office/drawing/2014/main" id="{59FA97BC-FF67-4582-A18A-1C75580C443B}"/>
+                <a16:creationId xmlns:a16="http://schemas.microsoft.com/office/drawing/2014/main" id="{1168FC53-8EE2-420B-83C9-617792D290FF}"/>
               </a:ext>
             </a:extLst>
           </p:cNvPr>
@@ -41846,7 +41846,7 @@
           <p:cNvPr id="38" name="">
             <a:extLst xmlns:a="http://schemas.openxmlformats.org/drawingml/2006/main">
               <a:ext uri="{FF2B5EF4-FFF2-40B4-BE49-F238E27FC236}">
-                <a16:creationId xmlns:a16="http://schemas.microsoft.com/office/drawing/2014/main" id="{1C051B6B-E0D8-4F58-B221-ACCEDBB412C8}"/>
+                <a16:creationId xmlns:a16="http://schemas.microsoft.com/office/drawing/2014/main" id="{5557E1CA-0BC8-4C35-BB16-858605FE0CFE}"/>
               </a:ext>
             </a:extLst>
           </p:cNvPr>
@@ -41877,7 +41877,7 @@
           <p:cNvPr id="39" name="">
             <a:extLst xmlns:a="http://schemas.openxmlformats.org/drawingml/2006/main">
               <a:ext uri="{FF2B5EF4-FFF2-40B4-BE49-F238E27FC236}">
-                <a16:creationId xmlns:a16="http://schemas.microsoft.com/office/drawing/2014/main" id="{39C4743C-0629-496E-8FE8-C38D16759CF2}"/>
+                <a16:creationId xmlns:a16="http://schemas.microsoft.com/office/drawing/2014/main" id="{46C8326F-5833-4C7F-A73B-8EB85B491678}"/>
               </a:ext>
             </a:extLst>
           </p:cNvPr>
@@ -41929,7 +41929,7 @@
           <p:cNvPr id="40" name="">
             <a:extLst xmlns:a="http://schemas.openxmlformats.org/drawingml/2006/main">
               <a:ext uri="{FF2B5EF4-FFF2-40B4-BE49-F238E27FC236}">
-                <a16:creationId xmlns:a16="http://schemas.microsoft.com/office/drawing/2014/main" id="{7846D8C0-F284-4111-A161-D510E9EE394F}"/>
+                <a16:creationId xmlns:a16="http://schemas.microsoft.com/office/drawing/2014/main" id="{8ED29F6B-71C4-43F3-8B59-0A9E953FEB48}"/>
               </a:ext>
             </a:extLst>
           </p:cNvPr>
@@ -41981,7 +41981,7 @@
           <p:cNvPr id="41" name="">
             <a:extLst xmlns:a="http://schemas.openxmlformats.org/drawingml/2006/main">
               <a:ext uri="{FF2B5EF4-FFF2-40B4-BE49-F238E27FC236}">
-                <a16:creationId xmlns:a16="http://schemas.microsoft.com/office/drawing/2014/main" id="{E3000067-D4DC-42D3-9544-F7CC80A8CC97}"/>
+                <a16:creationId xmlns:a16="http://schemas.microsoft.com/office/drawing/2014/main" id="{52C9DAA7-16DE-46AF-B7D6-5CD94DEB41C2}"/>
               </a:ext>
             </a:extLst>
           </p:cNvPr>
@@ -42033,7 +42033,7 @@
           <p:cNvPr id="42" name="">
             <a:extLst xmlns:a="http://schemas.openxmlformats.org/drawingml/2006/main">
               <a:ext uri="{FF2B5EF4-FFF2-40B4-BE49-F238E27FC236}">
-                <a16:creationId xmlns:a16="http://schemas.microsoft.com/office/drawing/2014/main" id="{242A1190-0FF9-4096-A718-23BFA1FFC951}"/>
+                <a16:creationId xmlns:a16="http://schemas.microsoft.com/office/drawing/2014/main" id="{143BA0F9-84AE-491B-9E9A-2E6995221410}"/>
               </a:ext>
             </a:extLst>
           </p:cNvPr>
@@ -42085,7 +42085,7 @@
           <p:cNvPr id="43" name="">
             <a:extLst xmlns:a="http://schemas.openxmlformats.org/drawingml/2006/main">
               <a:ext uri="{FF2B5EF4-FFF2-40B4-BE49-F238E27FC236}">
-                <a16:creationId xmlns:a16="http://schemas.microsoft.com/office/drawing/2014/main" id="{31E35E02-9DF7-4D60-893C-128EB847BBCF}"/>
+                <a16:creationId xmlns:a16="http://schemas.microsoft.com/office/drawing/2014/main" id="{6311E22F-F546-402E-AB02-31FE5DE7BE1B}"/>
               </a:ext>
             </a:extLst>
           </p:cNvPr>
@@ -42137,7 +42137,7 @@
           <p:cNvPr id="44" name="">
             <a:extLst xmlns:a="http://schemas.openxmlformats.org/drawingml/2006/main">
               <a:ext uri="{FF2B5EF4-FFF2-40B4-BE49-F238E27FC236}">
-                <a16:creationId xmlns:a16="http://schemas.microsoft.com/office/drawing/2014/main" id="{3C378A94-1EE0-49B5-A889-0F72B4302A9B}"/>
+                <a16:creationId xmlns:a16="http://schemas.microsoft.com/office/drawing/2014/main" id="{94176BF3-5514-4A2D-A6C8-1950569414A1}"/>
               </a:ext>
             </a:extLst>
           </p:cNvPr>
@@ -42168,7 +42168,7 @@
           <p:cNvPr id="45" name="">
             <a:extLst xmlns:a="http://schemas.openxmlformats.org/drawingml/2006/main">
               <a:ext uri="{FF2B5EF4-FFF2-40B4-BE49-F238E27FC236}">
-                <a16:creationId xmlns:a16="http://schemas.microsoft.com/office/drawing/2014/main" id="{F83A56C8-0056-44B9-A9F8-52F9171BA729}"/>
+                <a16:creationId xmlns:a16="http://schemas.microsoft.com/office/drawing/2014/main" id="{387F22DF-50AF-4DE3-9FAB-35A2CFE9C809}"/>
               </a:ext>
             </a:extLst>
           </p:cNvPr>
@@ -42220,7 +42220,7 @@
           <p:cNvPr id="46" name="">
             <a:extLst xmlns:a="http://schemas.openxmlformats.org/drawingml/2006/main">
               <a:ext uri="{FF2B5EF4-FFF2-40B4-BE49-F238E27FC236}">
-                <a16:creationId xmlns:a16="http://schemas.microsoft.com/office/drawing/2014/main" id="{F419543C-6752-4A9A-9460-EC7F519C427A}"/>
+                <a16:creationId xmlns:a16="http://schemas.microsoft.com/office/drawing/2014/main" id="{785DB6D0-7B76-46D9-88DC-144C2EBB10F0}"/>
               </a:ext>
             </a:extLst>
           </p:cNvPr>
@@ -42272,7 +42272,7 @@
           <p:cNvPr id="47" name="">
             <a:extLst xmlns:a="http://schemas.openxmlformats.org/drawingml/2006/main">
               <a:ext uri="{FF2B5EF4-FFF2-40B4-BE49-F238E27FC236}">
-                <a16:creationId xmlns:a16="http://schemas.microsoft.com/office/drawing/2014/main" id="{70F0A731-03F6-4597-9975-68FD52754189}"/>
+                <a16:creationId xmlns:a16="http://schemas.microsoft.com/office/drawing/2014/main" id="{6BA4C18C-BA80-484E-9146-6F7620FADCD3}"/>
               </a:ext>
             </a:extLst>
           </p:cNvPr>
@@ -42324,7 +42324,7 @@
           <p:cNvPr id="48" name="">
             <a:extLst xmlns:a="http://schemas.openxmlformats.org/drawingml/2006/main">
               <a:ext uri="{FF2B5EF4-FFF2-40B4-BE49-F238E27FC236}">
-                <a16:creationId xmlns:a16="http://schemas.microsoft.com/office/drawing/2014/main" id="{29E40FCC-7134-4324-89BA-35148B84CF26}"/>
+                <a16:creationId xmlns:a16="http://schemas.microsoft.com/office/drawing/2014/main" id="{D81237AE-F0B2-4A87-BA66-41AE188B238C}"/>
               </a:ext>
             </a:extLst>
           </p:cNvPr>
@@ -42376,7 +42376,7 @@
           <p:cNvPr id="49" name="">
             <a:extLst xmlns:a="http://schemas.openxmlformats.org/drawingml/2006/main">
               <a:ext uri="{FF2B5EF4-FFF2-40B4-BE49-F238E27FC236}">
-                <a16:creationId xmlns:a16="http://schemas.microsoft.com/office/drawing/2014/main" id="{B6D35D31-C5F3-40F6-9DF7-BE0EE80CA1D5}"/>
+                <a16:creationId xmlns:a16="http://schemas.microsoft.com/office/drawing/2014/main" id="{F1071F1A-5D97-4DBB-8AE1-60E45AA76A5B}"/>
               </a:ext>
             </a:extLst>
           </p:cNvPr>
@@ -42428,7 +42428,7 @@
           <p:cNvPr id="50" name="">
             <a:extLst xmlns:a="http://schemas.openxmlformats.org/drawingml/2006/main">
               <a:ext uri="{FF2B5EF4-FFF2-40B4-BE49-F238E27FC236}">
-                <a16:creationId xmlns:a16="http://schemas.microsoft.com/office/drawing/2014/main" id="{59C0AFDB-DD58-4128-9A48-D7B61219F70D}"/>
+                <a16:creationId xmlns:a16="http://schemas.microsoft.com/office/drawing/2014/main" id="{EDB5B12F-E80A-4CCD-A45B-2D39C2C4D48D}"/>
               </a:ext>
             </a:extLst>
           </p:cNvPr>
@@ -42459,7 +42459,7 @@
           <p:cNvPr id="51" name="">
             <a:extLst xmlns:a="http://schemas.openxmlformats.org/drawingml/2006/main">
               <a:ext uri="{FF2B5EF4-FFF2-40B4-BE49-F238E27FC236}">
-                <a16:creationId xmlns:a16="http://schemas.microsoft.com/office/drawing/2014/main" id="{5837FC30-61FA-45C9-A72A-E128CDA4425F}"/>
+                <a16:creationId xmlns:a16="http://schemas.microsoft.com/office/drawing/2014/main" id="{38BAC201-F007-4674-8FFF-38C22C8300DC}"/>
               </a:ext>
             </a:extLst>
           </p:cNvPr>
@@ -42490,7 +42490,7 @@
           <p:cNvPr id="52" name="">
             <a:extLst xmlns:a="http://schemas.openxmlformats.org/drawingml/2006/main">
               <a:ext uri="{FF2B5EF4-FFF2-40B4-BE49-F238E27FC236}">
-                <a16:creationId xmlns:a16="http://schemas.microsoft.com/office/drawing/2014/main" id="{285FF607-71BE-4B3E-A51B-508FD5F3E720}"/>
+                <a16:creationId xmlns:a16="http://schemas.microsoft.com/office/drawing/2014/main" id="{74C77D38-9A58-409B-98CC-7019451A907D}"/>
               </a:ext>
             </a:extLst>
           </p:cNvPr>
@@ -42542,7 +42542,7 @@
           <p:cNvPr id="53" name="">
             <a:extLst xmlns:a="http://schemas.openxmlformats.org/drawingml/2006/main">
               <a:ext uri="{FF2B5EF4-FFF2-40B4-BE49-F238E27FC236}">
-                <a16:creationId xmlns:a16="http://schemas.microsoft.com/office/drawing/2014/main" id="{DB9BC569-9547-4C15-B3A0-425F9073FD1B}"/>
+                <a16:creationId xmlns:a16="http://schemas.microsoft.com/office/drawing/2014/main" id="{DB2F56EA-FC94-451B-8085-BBE8D8D35EB6}"/>
               </a:ext>
             </a:extLst>
           </p:cNvPr>
@@ -42594,7 +42594,7 @@
           <p:cNvPr id="54" name="">
             <a:extLst xmlns:a="http://schemas.openxmlformats.org/drawingml/2006/main">
               <a:ext uri="{FF2B5EF4-FFF2-40B4-BE49-F238E27FC236}">
-                <a16:creationId xmlns:a16="http://schemas.microsoft.com/office/drawing/2014/main" id="{7EC3F32C-CDEF-4334-8533-55A1A2B25AAF}"/>
+                <a16:creationId xmlns:a16="http://schemas.microsoft.com/office/drawing/2014/main" id="{6C38B27E-6FC7-4241-AF17-434C1A369B7E}"/>
               </a:ext>
             </a:extLst>
           </p:cNvPr>
@@ -42646,7 +42646,7 @@
           <p:cNvPr id="55" name="">
             <a:extLst xmlns:a="http://schemas.openxmlformats.org/drawingml/2006/main">
               <a:ext uri="{FF2B5EF4-FFF2-40B4-BE49-F238E27FC236}">
-                <a16:creationId xmlns:a16="http://schemas.microsoft.com/office/drawing/2014/main" id="{5BC51168-A2A5-4227-A013-A9DF7D5223C7}"/>
+                <a16:creationId xmlns:a16="http://schemas.microsoft.com/office/drawing/2014/main" id="{B0D2BED9-F2E9-4197-9E79-223374B84D56}"/>
               </a:ext>
             </a:extLst>
           </p:cNvPr>
@@ -42698,7 +42698,7 @@
           <p:cNvPr id="56" name="">
             <a:extLst xmlns:a="http://schemas.openxmlformats.org/drawingml/2006/main">
               <a:ext uri="{FF2B5EF4-FFF2-40B4-BE49-F238E27FC236}">
-                <a16:creationId xmlns:a16="http://schemas.microsoft.com/office/drawing/2014/main" id="{0F87023F-3FC9-4C67-9490-77FC2F6AFFE1}"/>
+                <a16:creationId xmlns:a16="http://schemas.microsoft.com/office/drawing/2014/main" id="{7B110754-687E-4A91-863C-94BBE03AFF75}"/>
               </a:ext>
             </a:extLst>
           </p:cNvPr>
@@ -42750,7 +42750,7 @@
           <p:cNvPr id="57" name="">
             <a:extLst xmlns:a="http://schemas.openxmlformats.org/drawingml/2006/main">
               <a:ext uri="{FF2B5EF4-FFF2-40B4-BE49-F238E27FC236}">
-                <a16:creationId xmlns:a16="http://schemas.microsoft.com/office/drawing/2014/main" id="{A13A3361-BD8D-48E6-81F4-09EB25856DF4}"/>
+                <a16:creationId xmlns:a16="http://schemas.microsoft.com/office/drawing/2014/main" id="{244A4E4E-5AD0-4742-BF25-D8F951C2A9ED}"/>
               </a:ext>
             </a:extLst>
           </p:cNvPr>
@@ -42781,7 +42781,7 @@
           <p:cNvPr id="58" name="">
             <a:extLst xmlns:a="http://schemas.openxmlformats.org/drawingml/2006/main">
               <a:ext uri="{FF2B5EF4-FFF2-40B4-BE49-F238E27FC236}">
-                <a16:creationId xmlns:a16="http://schemas.microsoft.com/office/drawing/2014/main" id="{2B88B2CD-91A2-4AF6-8791-7B3EDA85EA3F}"/>
+                <a16:creationId xmlns:a16="http://schemas.microsoft.com/office/drawing/2014/main" id="{CBCACA30-1A78-4058-999C-E83A25807C00}"/>
               </a:ext>
             </a:extLst>
           </p:cNvPr>
@@ -42833,7 +42833,7 @@
           <p:cNvPr id="59" name="">
             <a:extLst xmlns:a="http://schemas.openxmlformats.org/drawingml/2006/main">
               <a:ext uri="{FF2B5EF4-FFF2-40B4-BE49-F238E27FC236}">
-                <a16:creationId xmlns:a16="http://schemas.microsoft.com/office/drawing/2014/main" id="{2EAD2A02-B1F4-4836-8F30-B81DFF8425DB}"/>
+                <a16:creationId xmlns:a16="http://schemas.microsoft.com/office/drawing/2014/main" id="{007B721C-C65A-43CE-A1EB-D2F047DB525C}"/>
               </a:ext>
             </a:extLst>
           </p:cNvPr>
@@ -42885,7 +42885,7 @@
           <p:cNvPr id="60" name="">
             <a:extLst xmlns:a="http://schemas.openxmlformats.org/drawingml/2006/main">
               <a:ext uri="{FF2B5EF4-FFF2-40B4-BE49-F238E27FC236}">
-                <a16:creationId xmlns:a16="http://schemas.microsoft.com/office/drawing/2014/main" id="{79135E59-96AB-4F6F-8688-E242225F4AAA}"/>
+                <a16:creationId xmlns:a16="http://schemas.microsoft.com/office/drawing/2014/main" id="{B6FE0CF3-EAE9-4767-A84D-A397CAABF3C2}"/>
               </a:ext>
             </a:extLst>
           </p:cNvPr>
@@ -42937,7 +42937,7 @@
           <p:cNvPr id="61" name="">
             <a:extLst xmlns:a="http://schemas.openxmlformats.org/drawingml/2006/main">
               <a:ext uri="{FF2B5EF4-FFF2-40B4-BE49-F238E27FC236}">
-                <a16:creationId xmlns:a16="http://schemas.microsoft.com/office/drawing/2014/main" id="{EE2896D9-C928-4E8D-9AB4-785780CED774}"/>
+                <a16:creationId xmlns:a16="http://schemas.microsoft.com/office/drawing/2014/main" id="{0C30514B-06E3-4063-B1F2-0A6C823FF178}"/>
               </a:ext>
             </a:extLst>
           </p:cNvPr>
@@ -42989,7 +42989,7 @@
           <p:cNvPr id="62" name="">
             <a:extLst xmlns:a="http://schemas.openxmlformats.org/drawingml/2006/main">
               <a:ext uri="{FF2B5EF4-FFF2-40B4-BE49-F238E27FC236}">
-                <a16:creationId xmlns:a16="http://schemas.microsoft.com/office/drawing/2014/main" id="{E849140F-5967-4D6F-8EDA-B5119C66C42E}"/>
+                <a16:creationId xmlns:a16="http://schemas.microsoft.com/office/drawing/2014/main" id="{E7CF5214-3140-42B1-8179-D0F69320D708}"/>
               </a:ext>
             </a:extLst>
           </p:cNvPr>
@@ -43041,7 +43041,7 @@
           <p:cNvPr id="63" name="">
             <a:extLst xmlns:a="http://schemas.openxmlformats.org/drawingml/2006/main">
               <a:ext uri="{FF2B5EF4-FFF2-40B4-BE49-F238E27FC236}">
-                <a16:creationId xmlns:a16="http://schemas.microsoft.com/office/drawing/2014/main" id="{480791E1-0C6D-459A-8CA0-3959C2431F68}"/>
+                <a16:creationId xmlns:a16="http://schemas.microsoft.com/office/drawing/2014/main" id="{DE4BB9A5-7D44-407A-9AAE-A26422036E0F}"/>
               </a:ext>
             </a:extLst>
           </p:cNvPr>
@@ -43072,7 +43072,7 @@
           <p:cNvPr id="64" name="">
             <a:extLst xmlns:a="http://schemas.openxmlformats.org/drawingml/2006/main">
               <a:ext uri="{FF2B5EF4-FFF2-40B4-BE49-F238E27FC236}">
-                <a16:creationId xmlns:a16="http://schemas.microsoft.com/office/drawing/2014/main" id="{F13F31D4-05D2-4D26-9D03-2EAA2764B276}"/>
+                <a16:creationId xmlns:a16="http://schemas.microsoft.com/office/drawing/2014/main" id="{C2A79517-015E-4EDD-881D-651C8B8A5019}"/>
               </a:ext>
             </a:extLst>
           </p:cNvPr>
@@ -43103,7 +43103,7 @@
           <p:cNvPr id="65" name="">
             <a:extLst xmlns:a="http://schemas.openxmlformats.org/drawingml/2006/main">
               <a:ext uri="{FF2B5EF4-FFF2-40B4-BE49-F238E27FC236}">
-                <a16:creationId xmlns:a16="http://schemas.microsoft.com/office/drawing/2014/main" id="{55BDB02A-F53A-4E8F-8752-46BFC8170379}"/>
+                <a16:creationId xmlns:a16="http://schemas.microsoft.com/office/drawing/2014/main" id="{10482EAE-21CE-480A-90FC-9DA3FE5027A5}"/>
               </a:ext>
             </a:extLst>
           </p:cNvPr>
@@ -43155,7 +43155,7 @@
           <p:cNvPr id="66" name="">
             <a:extLst xmlns:a="http://schemas.openxmlformats.org/drawingml/2006/main">
               <a:ext uri="{FF2B5EF4-FFF2-40B4-BE49-F238E27FC236}">
-                <a16:creationId xmlns:a16="http://schemas.microsoft.com/office/drawing/2014/main" id="{005F57AB-6338-4CC8-9D63-D18946B4E4DE}"/>
+                <a16:creationId xmlns:a16="http://schemas.microsoft.com/office/drawing/2014/main" id="{2F59F2AF-E858-466A-ADE4-0B75E6E705FB}"/>
               </a:ext>
             </a:extLst>
           </p:cNvPr>
@@ -43207,7 +43207,7 @@
           <p:cNvPr id="67" name="">
             <a:extLst xmlns:a="http://schemas.openxmlformats.org/drawingml/2006/main">
               <a:ext uri="{FF2B5EF4-FFF2-40B4-BE49-F238E27FC236}">
-                <a16:creationId xmlns:a16="http://schemas.microsoft.com/office/drawing/2014/main" id="{7AD19719-C8B3-491F-A7F3-C10373F1BB81}"/>
+                <a16:creationId xmlns:a16="http://schemas.microsoft.com/office/drawing/2014/main" id="{1525FA0E-17E2-4649-9489-9612A71BE10B}"/>
               </a:ext>
             </a:extLst>
           </p:cNvPr>
@@ -43259,7 +43259,7 @@
           <p:cNvPr id="68" name="">
             <a:extLst xmlns:a="http://schemas.openxmlformats.org/drawingml/2006/main">
               <a:ext uri="{FF2B5EF4-FFF2-40B4-BE49-F238E27FC236}">
-                <a16:creationId xmlns:a16="http://schemas.microsoft.com/office/drawing/2014/main" id="{45C68382-5525-430F-8454-E17537A8E9E8}"/>
+                <a16:creationId xmlns:a16="http://schemas.microsoft.com/office/drawing/2014/main" id="{801CF4EC-B207-4A8E-B040-64B34171F8D8}"/>
               </a:ext>
             </a:extLst>
           </p:cNvPr>
@@ -43311,7 +43311,7 @@
           <p:cNvPr id="69" name="">
             <a:extLst xmlns:a="http://schemas.openxmlformats.org/drawingml/2006/main">
               <a:ext uri="{FF2B5EF4-FFF2-40B4-BE49-F238E27FC236}">
-                <a16:creationId xmlns:a16="http://schemas.microsoft.com/office/drawing/2014/main" id="{4B2D4952-13D6-4D0F-B170-D272BEE7CD3D}"/>
+                <a16:creationId xmlns:a16="http://schemas.microsoft.com/office/drawing/2014/main" id="{626B2DE8-898F-4D0B-AC55-6EAB31AFB069}"/>
               </a:ext>
             </a:extLst>
           </p:cNvPr>
@@ -43363,7 +43363,7 @@
           <p:cNvPr id="70" name="">
             <a:extLst xmlns:a="http://schemas.openxmlformats.org/drawingml/2006/main">
               <a:ext uri="{FF2B5EF4-FFF2-40B4-BE49-F238E27FC236}">
-                <a16:creationId xmlns:a16="http://schemas.microsoft.com/office/drawing/2014/main" id="{7BE9BB5C-F009-4D95-9C87-731104B5D57A}"/>
+                <a16:creationId xmlns:a16="http://schemas.microsoft.com/office/drawing/2014/main" id="{118CBDC8-F396-430D-A5FD-AA8E543C9524}"/>
               </a:ext>
             </a:extLst>
           </p:cNvPr>
@@ -43394,7 +43394,7 @@
           <p:cNvPr id="71" name="">
             <a:extLst xmlns:a="http://schemas.openxmlformats.org/drawingml/2006/main">
               <a:ext uri="{FF2B5EF4-FFF2-40B4-BE49-F238E27FC236}">
-                <a16:creationId xmlns:a16="http://schemas.microsoft.com/office/drawing/2014/main" id="{7A2DED34-DFAB-4D3C-A935-355057AB8EAE}"/>
+                <a16:creationId xmlns:a16="http://schemas.microsoft.com/office/drawing/2014/main" id="{0F34DCA7-3B42-4B6A-B38E-CAF9945A2364}"/>
               </a:ext>
             </a:extLst>
           </p:cNvPr>
@@ -43446,7 +43446,7 @@
           <p:cNvPr id="72" name="">
             <a:extLst xmlns:a="http://schemas.openxmlformats.org/drawingml/2006/main">
               <a:ext uri="{FF2B5EF4-FFF2-40B4-BE49-F238E27FC236}">
-                <a16:creationId xmlns:a16="http://schemas.microsoft.com/office/drawing/2014/main" id="{4AE8DD5A-D86A-480F-A8DD-8D32CAC6F29D}"/>
+                <a16:creationId xmlns:a16="http://schemas.microsoft.com/office/drawing/2014/main" id="{161F7B33-5A95-4596-B02D-C37F219A4791}"/>
               </a:ext>
             </a:extLst>
           </p:cNvPr>
@@ -43498,7 +43498,7 @@
           <p:cNvPr id="73" name="">
             <a:extLst xmlns:a="http://schemas.openxmlformats.org/drawingml/2006/main">
               <a:ext uri="{FF2B5EF4-FFF2-40B4-BE49-F238E27FC236}">
-                <a16:creationId xmlns:a16="http://schemas.microsoft.com/office/drawing/2014/main" id="{930A36FE-708D-46A2-A717-CF6C670010B1}"/>
+                <a16:creationId xmlns:a16="http://schemas.microsoft.com/office/drawing/2014/main" id="{A357E222-3F0B-431A-9E40-377D2D4E7A68}"/>
               </a:ext>
             </a:extLst>
           </p:cNvPr>
@@ -43550,7 +43550,7 @@
           <p:cNvPr id="74" name="">
             <a:extLst xmlns:a="http://schemas.openxmlformats.org/drawingml/2006/main">
               <a:ext uri="{FF2B5EF4-FFF2-40B4-BE49-F238E27FC236}">
-                <a16:creationId xmlns:a16="http://schemas.microsoft.com/office/drawing/2014/main" id="{AD777702-1065-423F-A612-BCF3F8C26EDD}"/>
+                <a16:creationId xmlns:a16="http://schemas.microsoft.com/office/drawing/2014/main" id="{79CB1C81-791D-4272-A2D1-5C6E505287E1}"/>
               </a:ext>
             </a:extLst>
           </p:cNvPr>
@@ -43602,7 +43602,7 @@
           <p:cNvPr id="75" name="">
             <a:extLst xmlns:a="http://schemas.openxmlformats.org/drawingml/2006/main">
               <a:ext uri="{FF2B5EF4-FFF2-40B4-BE49-F238E27FC236}">
-                <a16:creationId xmlns:a16="http://schemas.microsoft.com/office/drawing/2014/main" id="{4D81AEAD-CD2A-4698-97FF-90F3EA2248D3}"/>
+                <a16:creationId xmlns:a16="http://schemas.microsoft.com/office/drawing/2014/main" id="{FB8D507D-0EF5-4F47-8206-174EB78AB00E}"/>
               </a:ext>
             </a:extLst>
           </p:cNvPr>
@@ -43654,7 +43654,7 @@
           <p:cNvPr id="76" name="">
             <a:extLst xmlns:a="http://schemas.openxmlformats.org/drawingml/2006/main">
               <a:ext uri="{FF2B5EF4-FFF2-40B4-BE49-F238E27FC236}">
-                <a16:creationId xmlns:a16="http://schemas.microsoft.com/office/drawing/2014/main" id="{BCD432E3-7A84-40D1-B255-C26E8D2A524A}"/>
+                <a16:creationId xmlns:a16="http://schemas.microsoft.com/office/drawing/2014/main" id="{529B0815-E2AF-4B45-A6BD-E183B5443570}"/>
               </a:ext>
             </a:extLst>
           </p:cNvPr>
@@ -43685,7 +43685,7 @@
           <p:cNvPr id="77" name="">
             <a:extLst xmlns:a="http://schemas.openxmlformats.org/drawingml/2006/main">
               <a:ext uri="{FF2B5EF4-FFF2-40B4-BE49-F238E27FC236}">
-                <a16:creationId xmlns:a16="http://schemas.microsoft.com/office/drawing/2014/main" id="{33001062-FDCE-4B17-9DC8-C66EEA6DF860}"/>
+                <a16:creationId xmlns:a16="http://schemas.microsoft.com/office/drawing/2014/main" id="{4727D114-72E3-4F8D-93BA-5A96C9F5B7DC}"/>
               </a:ext>
             </a:extLst>
           </p:cNvPr>
@@ -43716,7 +43716,7 @@
           <p:cNvPr id="78" name="">
             <a:extLst xmlns:a="http://schemas.openxmlformats.org/drawingml/2006/main">
               <a:ext uri="{FF2B5EF4-FFF2-40B4-BE49-F238E27FC236}">
-                <a16:creationId xmlns:a16="http://schemas.microsoft.com/office/drawing/2014/main" id="{122728DE-AAA2-4DE1-B131-4BBA66B005D0}"/>
+                <a16:creationId xmlns:a16="http://schemas.microsoft.com/office/drawing/2014/main" id="{82CA25A9-D194-4A2A-BE4D-95BC13918137}"/>
               </a:ext>
             </a:extLst>
           </p:cNvPr>
@@ -43768,7 +43768,7 @@
           <p:cNvPr id="79" name="">
             <a:extLst xmlns:a="http://schemas.openxmlformats.org/drawingml/2006/main">
               <a:ext uri="{FF2B5EF4-FFF2-40B4-BE49-F238E27FC236}">
-                <a16:creationId xmlns:a16="http://schemas.microsoft.com/office/drawing/2014/main" id="{2A10EBCF-0792-4492-8766-5FC825C920F1}"/>
+                <a16:creationId xmlns:a16="http://schemas.microsoft.com/office/drawing/2014/main" id="{0158B882-78FC-4112-8F66-F3E237D755AE}"/>
               </a:ext>
             </a:extLst>
           </p:cNvPr>
@@ -43820,7 +43820,7 @@
           <p:cNvPr id="80" name="">
             <a:extLst xmlns:a="http://schemas.openxmlformats.org/drawingml/2006/main">
               <a:ext uri="{FF2B5EF4-FFF2-40B4-BE49-F238E27FC236}">
-                <a16:creationId xmlns:a16="http://schemas.microsoft.com/office/drawing/2014/main" id="{C473AB31-5F63-4532-A70D-831F5A1CA59C}"/>
+                <a16:creationId xmlns:a16="http://schemas.microsoft.com/office/drawing/2014/main" id="{449551CF-386A-4EEB-B2A4-B07DBE1159F8}"/>
               </a:ext>
             </a:extLst>
           </p:cNvPr>
@@ -43872,7 +43872,7 @@
           <p:cNvPr id="81" name="">
             <a:extLst xmlns:a="http://schemas.openxmlformats.org/drawingml/2006/main">
               <a:ext uri="{FF2B5EF4-FFF2-40B4-BE49-F238E27FC236}">
-                <a16:creationId xmlns:a16="http://schemas.microsoft.com/office/drawing/2014/main" id="{9CC1928B-04BB-4E9F-B0C2-21D0CF6F001A}"/>
+                <a16:creationId xmlns:a16="http://schemas.microsoft.com/office/drawing/2014/main" id="{C0C16A20-A576-4D37-87C7-8FE495152E05}"/>
               </a:ext>
             </a:extLst>
           </p:cNvPr>
@@ -43924,7 +43924,7 @@
           <p:cNvPr id="82" name="">
             <a:extLst xmlns:a="http://schemas.openxmlformats.org/drawingml/2006/main">
               <a:ext uri="{FF2B5EF4-FFF2-40B4-BE49-F238E27FC236}">
-                <a16:creationId xmlns:a16="http://schemas.microsoft.com/office/drawing/2014/main" id="{BA17DC58-D742-4B05-9ED4-DAB761545E9E}"/>
+                <a16:creationId xmlns:a16="http://schemas.microsoft.com/office/drawing/2014/main" id="{8EB60C6C-AD66-49AF-899C-7A274379EC2F}"/>
               </a:ext>
             </a:extLst>
           </p:cNvPr>
@@ -43976,7 +43976,7 @@
           <p:cNvPr id="83" name="">
             <a:extLst xmlns:a="http://schemas.openxmlformats.org/drawingml/2006/main">
               <a:ext uri="{FF2B5EF4-FFF2-40B4-BE49-F238E27FC236}">
-                <a16:creationId xmlns:a16="http://schemas.microsoft.com/office/drawing/2014/main" id="{BBD875D9-EF3D-4AE0-92E9-C9DDECB4962A}"/>
+                <a16:creationId xmlns:a16="http://schemas.microsoft.com/office/drawing/2014/main" id="{E4390433-07D8-42B0-A576-DE310F69067E}"/>
               </a:ext>
             </a:extLst>
           </p:cNvPr>
@@ -44007,7 +44007,7 @@
           <p:cNvPr id="84" name="">
             <a:extLst xmlns:a="http://schemas.openxmlformats.org/drawingml/2006/main">
               <a:ext uri="{FF2B5EF4-FFF2-40B4-BE49-F238E27FC236}">
-                <a16:creationId xmlns:a16="http://schemas.microsoft.com/office/drawing/2014/main" id="{1E0A2518-9898-48E4-97EA-5E6A151CD36A}"/>
+                <a16:creationId xmlns:a16="http://schemas.microsoft.com/office/drawing/2014/main" id="{D9CE87FD-695F-4EA3-8BD6-6C6D9EA60E15}"/>
               </a:ext>
             </a:extLst>
           </p:cNvPr>
@@ -44059,7 +44059,7 @@
           <p:cNvPr id="85" name="">
             <a:extLst xmlns:a="http://schemas.openxmlformats.org/drawingml/2006/main">
               <a:ext uri="{FF2B5EF4-FFF2-40B4-BE49-F238E27FC236}">
-                <a16:creationId xmlns:a16="http://schemas.microsoft.com/office/drawing/2014/main" id="{1AB91DE6-E7B8-4401-BFB3-5F66475EF7DA}"/>
+                <a16:creationId xmlns:a16="http://schemas.microsoft.com/office/drawing/2014/main" id="{850D1B1A-8F95-493E-B1C0-E14B354365F6}"/>
               </a:ext>
             </a:extLst>
           </p:cNvPr>
@@ -44111,7 +44111,7 @@
           <p:cNvPr id="86" name="">
             <a:extLst xmlns:a="http://schemas.openxmlformats.org/drawingml/2006/main">
               <a:ext uri="{FF2B5EF4-FFF2-40B4-BE49-F238E27FC236}">
-                <a16:creationId xmlns:a16="http://schemas.microsoft.com/office/drawing/2014/main" id="{9B95CCAB-C8FE-4493-BA98-977BC9C48D83}"/>
+                <a16:creationId xmlns:a16="http://schemas.microsoft.com/office/drawing/2014/main" id="{B1C670E0-016D-4D12-B7E3-A9CD3BA7D2FE}"/>
               </a:ext>
             </a:extLst>
           </p:cNvPr>
@@ -44163,7 +44163,7 @@
           <p:cNvPr id="87" name="">
             <a:extLst xmlns:a="http://schemas.openxmlformats.org/drawingml/2006/main">
               <a:ext uri="{FF2B5EF4-FFF2-40B4-BE49-F238E27FC236}">
-                <a16:creationId xmlns:a16="http://schemas.microsoft.com/office/drawing/2014/main" id="{0B85B27D-D2CD-4EAA-AD22-C87663536A5D}"/>
+                <a16:creationId xmlns:a16="http://schemas.microsoft.com/office/drawing/2014/main" id="{CFE238CE-CCE8-4A17-BBCD-35AEC34C3A74}"/>
               </a:ext>
             </a:extLst>
           </p:cNvPr>
@@ -44215,7 +44215,7 @@
           <p:cNvPr id="88" name="">
             <a:extLst xmlns:a="http://schemas.openxmlformats.org/drawingml/2006/main">
               <a:ext uri="{FF2B5EF4-FFF2-40B4-BE49-F238E27FC236}">
-                <a16:creationId xmlns:a16="http://schemas.microsoft.com/office/drawing/2014/main" id="{6B372CA9-2350-4C25-938C-765A6301F832}"/>
+                <a16:creationId xmlns:a16="http://schemas.microsoft.com/office/drawing/2014/main" id="{6708896F-B654-4E1E-85F4-88614E470D9F}"/>
               </a:ext>
             </a:extLst>
           </p:cNvPr>
@@ -44267,7 +44267,7 @@
           <p:cNvPr id="89" name="">
             <a:extLst xmlns:a="http://schemas.openxmlformats.org/drawingml/2006/main">
               <a:ext uri="{FF2B5EF4-FFF2-40B4-BE49-F238E27FC236}">
-                <a16:creationId xmlns:a16="http://schemas.microsoft.com/office/drawing/2014/main" id="{6C60DE6F-DED4-4213-B3CD-7748DBCEF6BC}"/>
+                <a16:creationId xmlns:a16="http://schemas.microsoft.com/office/drawing/2014/main" id="{586A3429-A403-437D-A4BC-8A7B331CD3F7}"/>
               </a:ext>
             </a:extLst>
           </p:cNvPr>
@@ -44298,7 +44298,7 @@
           <p:cNvPr id="90" name="">
             <a:extLst xmlns:a="http://schemas.openxmlformats.org/drawingml/2006/main">
               <a:ext uri="{FF2B5EF4-FFF2-40B4-BE49-F238E27FC236}">
-                <a16:creationId xmlns:a16="http://schemas.microsoft.com/office/drawing/2014/main" id="{09763C30-40B6-47E4-8DEB-C66197829033}"/>
+                <a16:creationId xmlns:a16="http://schemas.microsoft.com/office/drawing/2014/main" id="{48EE9997-BE50-4CDF-9502-61AFEA6010A9}"/>
               </a:ext>
             </a:extLst>
           </p:cNvPr>
@@ -44329,7 +44329,7 @@
           <p:cNvPr id="91" name="">
             <a:extLst xmlns:a="http://schemas.openxmlformats.org/drawingml/2006/main">
               <a:ext uri="{FF2B5EF4-FFF2-40B4-BE49-F238E27FC236}">
-                <a16:creationId xmlns:a16="http://schemas.microsoft.com/office/drawing/2014/main" id="{8350FB3D-3D7E-496C-B359-A3F31CD1878F}"/>
+                <a16:creationId xmlns:a16="http://schemas.microsoft.com/office/drawing/2014/main" id="{3FEE79FD-1AC2-4946-9034-B846235EC62E}"/>
               </a:ext>
             </a:extLst>
           </p:cNvPr>
@@ -44381,7 +44381,7 @@
           <p:cNvPr id="92" name="">
             <a:extLst xmlns:a="http://schemas.openxmlformats.org/drawingml/2006/main">
               <a:ext uri="{FF2B5EF4-FFF2-40B4-BE49-F238E27FC236}">
-                <a16:creationId xmlns:a16="http://schemas.microsoft.com/office/drawing/2014/main" id="{4AE49077-DE7F-45A5-A748-8806268207AD}"/>
+                <a16:creationId xmlns:a16="http://schemas.microsoft.com/office/drawing/2014/main" id="{F78E7082-5BDB-4499-930B-8D627482FB9F}"/>
               </a:ext>
             </a:extLst>
           </p:cNvPr>
@@ -44433,7 +44433,7 @@
           <p:cNvPr id="93" name="">
             <a:extLst xmlns:a="http://schemas.openxmlformats.org/drawingml/2006/main">
               <a:ext uri="{FF2B5EF4-FFF2-40B4-BE49-F238E27FC236}">
-                <a16:creationId xmlns:a16="http://schemas.microsoft.com/office/drawing/2014/main" id="{F552189C-3793-4B93-876D-DF7A86D68F17}"/>
+                <a16:creationId xmlns:a16="http://schemas.microsoft.com/office/drawing/2014/main" id="{9BD8E34B-BEEC-4CFE-9821-5E8F963A76B5}"/>
               </a:ext>
             </a:extLst>
           </p:cNvPr>
@@ -44485,7 +44485,7 @@
           <p:cNvPr id="94" name="">
             <a:extLst xmlns:a="http://schemas.openxmlformats.org/drawingml/2006/main">
               <a:ext uri="{FF2B5EF4-FFF2-40B4-BE49-F238E27FC236}">
-                <a16:creationId xmlns:a16="http://schemas.microsoft.com/office/drawing/2014/main" id="{707E33A3-5A04-4DBD-9BB8-A1A9527F2A6D}"/>
+                <a16:creationId xmlns:a16="http://schemas.microsoft.com/office/drawing/2014/main" id="{C756F594-08C5-4AE4-B6F3-49D91858E0F8}"/>
               </a:ext>
             </a:extLst>
           </p:cNvPr>
@@ -44537,7 +44537,7 @@
           <p:cNvPr id="95" name="">
             <a:extLst xmlns:a="http://schemas.openxmlformats.org/drawingml/2006/main">
               <a:ext uri="{FF2B5EF4-FFF2-40B4-BE49-F238E27FC236}">
-                <a16:creationId xmlns:a16="http://schemas.microsoft.com/office/drawing/2014/main" id="{268463B8-AAE3-4A83-8E24-373698400814}"/>
+                <a16:creationId xmlns:a16="http://schemas.microsoft.com/office/drawing/2014/main" id="{23685387-332C-4EE2-AE8D-C5921AF7A3EF}"/>
               </a:ext>
             </a:extLst>
           </p:cNvPr>
@@ -44589,7 +44589,7 @@
           <p:cNvPr id="96" name="">
             <a:extLst xmlns:a="http://schemas.openxmlformats.org/drawingml/2006/main">
               <a:ext uri="{FF2B5EF4-FFF2-40B4-BE49-F238E27FC236}">
-                <a16:creationId xmlns:a16="http://schemas.microsoft.com/office/drawing/2014/main" id="{1839BE41-DB30-4911-BC9D-FCF9F73B42AB}"/>
+                <a16:creationId xmlns:a16="http://schemas.microsoft.com/office/drawing/2014/main" id="{CC14C771-6BCD-47C3-B91D-953A603FF9F3}"/>
               </a:ext>
             </a:extLst>
           </p:cNvPr>
@@ -44620,7 +44620,7 @@
           <p:cNvPr id="97" name="">
             <a:extLst xmlns:a="http://schemas.openxmlformats.org/drawingml/2006/main">
               <a:ext uri="{FF2B5EF4-FFF2-40B4-BE49-F238E27FC236}">
-                <a16:creationId xmlns:a16="http://schemas.microsoft.com/office/drawing/2014/main" id="{F177507F-944D-4A2F-812B-758AEEDA51D2}"/>
+                <a16:creationId xmlns:a16="http://schemas.microsoft.com/office/drawing/2014/main" id="{B307FEE3-F22C-4614-A756-CE48961E0C0F}"/>
               </a:ext>
             </a:extLst>
           </p:cNvPr>
@@ -44672,7 +44672,7 @@
           <p:cNvPr id="98" name="">
             <a:extLst xmlns:a="http://schemas.openxmlformats.org/drawingml/2006/main">
               <a:ext uri="{FF2B5EF4-FFF2-40B4-BE49-F238E27FC236}">
-                <a16:creationId xmlns:a16="http://schemas.microsoft.com/office/drawing/2014/main" id="{CF6818DE-44B2-46FE-B54D-F9ADA21D41AA}"/>
+                <a16:creationId xmlns:a16="http://schemas.microsoft.com/office/drawing/2014/main" id="{270A5B05-6410-498E-A4B5-E95F6CAF630A}"/>
               </a:ext>
             </a:extLst>
           </p:cNvPr>
@@ -44724,7 +44724,7 @@
           <p:cNvPr id="99" name="">
             <a:extLst xmlns:a="http://schemas.openxmlformats.org/drawingml/2006/main">
               <a:ext uri="{FF2B5EF4-FFF2-40B4-BE49-F238E27FC236}">
-                <a16:creationId xmlns:a16="http://schemas.microsoft.com/office/drawing/2014/main" id="{34E357AD-04FC-401A-947E-F8B5618AF085}"/>
+                <a16:creationId xmlns:a16="http://schemas.microsoft.com/office/drawing/2014/main" id="{B5DC34C7-4D7E-44A8-A639-55C3B1CE304C}"/>
               </a:ext>
             </a:extLst>
           </p:cNvPr>
@@ -44776,7 +44776,7 @@
           <p:cNvPr id="100" name="">
             <a:extLst xmlns:a="http://schemas.openxmlformats.org/drawingml/2006/main">
               <a:ext uri="{FF2B5EF4-FFF2-40B4-BE49-F238E27FC236}">
-                <a16:creationId xmlns:a16="http://schemas.microsoft.com/office/drawing/2014/main" id="{01A56418-7230-418E-B47B-E5E57E0AF368}"/>
+                <a16:creationId xmlns:a16="http://schemas.microsoft.com/office/drawing/2014/main" id="{351C9C92-9874-42FB-B001-C790D3F31954}"/>
               </a:ext>
             </a:extLst>
           </p:cNvPr>
@@ -44828,7 +44828,7 @@
           <p:cNvPr id="101" name="">
             <a:extLst xmlns:a="http://schemas.openxmlformats.org/drawingml/2006/main">
               <a:ext uri="{FF2B5EF4-FFF2-40B4-BE49-F238E27FC236}">
-                <a16:creationId xmlns:a16="http://schemas.microsoft.com/office/drawing/2014/main" id="{63486D51-3414-42C2-A074-9707D0D79EAC}"/>
+                <a16:creationId xmlns:a16="http://schemas.microsoft.com/office/drawing/2014/main" id="{5D73AD76-39B7-42E5-8A86-50104996122C}"/>
               </a:ext>
             </a:extLst>
           </p:cNvPr>
@@ -44878,7 +44878,7 @@
     </p:spTree>
     <p:extLst>
       <p:ext uri="{BB962C8B-B14F-4D97-AF65-F5344CB8AC3E}">
-        <p14:creationId xmlns:p14="http://schemas.microsoft.com/office/powerpoint/2010/main" val="2062644726"/>
+        <p14:creationId xmlns:p14="http://schemas.microsoft.com/office/powerpoint/2010/main" val="1449527200"/>
       </p:ext>
     </p:extLst>
   </p:cSld>

--- a/.preview/pptx/deck.pptx
+++ b/.preview/pptx/deck.pptx
@@ -2,27 +2,27 @@
 <file path=ppt/presentation.xml><?xml version="1.0" encoding="utf-8"?>
 <p:presentation xmlns:p="http://schemas.openxmlformats.org/presentationml/2006/main">
   <p:sldMasterIdLst>
-    <p:sldMasterId xmlns:r="http://schemas.openxmlformats.org/officeDocument/2006/relationships" id="2147483648" r:id="R219eab9ace60405b"/>
+    <p:sldMasterId xmlns:r="http://schemas.openxmlformats.org/officeDocument/2006/relationships" id="2147483648" r:id="R31e1d2381cc74d61"/>
   </p:sldMasterIdLst>
   <p:notesMasterIdLst>
-    <p:notesMasterId xmlns:r="http://schemas.openxmlformats.org/officeDocument/2006/relationships" r:id="R7fc6dd838efe46b9"/>
+    <p:notesMasterId xmlns:r="http://schemas.openxmlformats.org/officeDocument/2006/relationships" r:id="R5baa5eec6da54490"/>
   </p:notesMasterIdLst>
   <p:sldIdLst>
-    <p:sldId xmlns:r="http://schemas.openxmlformats.org/officeDocument/2006/relationships" id="256" r:id="Ref0b069ab93c4aaa"/>
-    <p:sldId xmlns:r="http://schemas.openxmlformats.org/officeDocument/2006/relationships" id="257" r:id="R27bd233398df4433"/>
-    <p:sldId xmlns:r="http://schemas.openxmlformats.org/officeDocument/2006/relationships" id="258" r:id="Rb280458754d84f00"/>
-    <p:sldId xmlns:r="http://schemas.openxmlformats.org/officeDocument/2006/relationships" id="259" r:id="R9e4ee9174b4946ed"/>
-    <p:sldId xmlns:r="http://schemas.openxmlformats.org/officeDocument/2006/relationships" id="260" r:id="R8eb1a8a392044db0"/>
-    <p:sldId xmlns:r="http://schemas.openxmlformats.org/officeDocument/2006/relationships" id="261" r:id="R347a9f44ec6d475e"/>
-    <p:sldId xmlns:r="http://schemas.openxmlformats.org/officeDocument/2006/relationships" id="262" r:id="R9c1b7bcaebb340cf"/>
-    <p:sldId xmlns:r="http://schemas.openxmlformats.org/officeDocument/2006/relationships" id="263" r:id="R66b221a87daa4ba2"/>
-    <p:sldId xmlns:r="http://schemas.openxmlformats.org/officeDocument/2006/relationships" id="264" r:id="R3a417572686a4b34"/>
-    <p:sldId xmlns:r="http://schemas.openxmlformats.org/officeDocument/2006/relationships" id="265" r:id="R21bf7dd6395e4ca0"/>
-    <p:sldId xmlns:r="http://schemas.openxmlformats.org/officeDocument/2006/relationships" id="266" r:id="Rdf8bccdd91604ba4"/>
-    <p:sldId xmlns:r="http://schemas.openxmlformats.org/officeDocument/2006/relationships" id="267" r:id="Rba4dae5c65c64c31"/>
-    <p:sldId xmlns:r="http://schemas.openxmlformats.org/officeDocument/2006/relationships" id="268" r:id="R4f825fb6f27c41d0"/>
-    <p:sldId xmlns:r="http://schemas.openxmlformats.org/officeDocument/2006/relationships" id="269" r:id="R80a7ec1e4b8240f6"/>
-    <p:sldId xmlns:r="http://schemas.openxmlformats.org/officeDocument/2006/relationships" id="270" r:id="R819498bac1624166"/>
+    <p:sldId xmlns:r="http://schemas.openxmlformats.org/officeDocument/2006/relationships" id="256" r:id="R8a041fe0b69349fc"/>
+    <p:sldId xmlns:r="http://schemas.openxmlformats.org/officeDocument/2006/relationships" id="257" r:id="Ra132502647e44869"/>
+    <p:sldId xmlns:r="http://schemas.openxmlformats.org/officeDocument/2006/relationships" id="258" r:id="R4e29a19156624f3e"/>
+    <p:sldId xmlns:r="http://schemas.openxmlformats.org/officeDocument/2006/relationships" id="259" r:id="R741f5bc83f8f44a8"/>
+    <p:sldId xmlns:r="http://schemas.openxmlformats.org/officeDocument/2006/relationships" id="260" r:id="Rc1d02b82d7364c2a"/>
+    <p:sldId xmlns:r="http://schemas.openxmlformats.org/officeDocument/2006/relationships" id="261" r:id="Rf45c2bdf526e4349"/>
+    <p:sldId xmlns:r="http://schemas.openxmlformats.org/officeDocument/2006/relationships" id="262" r:id="Rb335ea82c7e14bfa"/>
+    <p:sldId xmlns:r="http://schemas.openxmlformats.org/officeDocument/2006/relationships" id="263" r:id="Rd0a373a5366444b9"/>
+    <p:sldId xmlns:r="http://schemas.openxmlformats.org/officeDocument/2006/relationships" id="264" r:id="R969abf5233534df4"/>
+    <p:sldId xmlns:r="http://schemas.openxmlformats.org/officeDocument/2006/relationships" id="265" r:id="Rcc1e1a16429c4b62"/>
+    <p:sldId xmlns:r="http://schemas.openxmlformats.org/officeDocument/2006/relationships" id="266" r:id="R4848625b89de438f"/>
+    <p:sldId xmlns:r="http://schemas.openxmlformats.org/officeDocument/2006/relationships" id="267" r:id="Rfa8d1956b89745a5"/>
+    <p:sldId xmlns:r="http://schemas.openxmlformats.org/officeDocument/2006/relationships" id="268" r:id="R28bc7549e3fb4184"/>
+    <p:sldId xmlns:r="http://schemas.openxmlformats.org/officeDocument/2006/relationships" id="269" r:id="Ra167c0e4e2a8467a"/>
+    <p:sldId xmlns:r="http://schemas.openxmlformats.org/officeDocument/2006/relationships" id="270" r:id="Ra2934bdf19f94850"/>
   </p:sldIdLst>
   <p:sldSz cx="12192000" cy="6858000"/>
   <p:notesSz cx="6858000" cy="9144000"/>
@@ -1879,7 +1879,7 @@
   </p:cSld>
   <p:clrMap bg1="lt1" tx1="dk1" bg2="lt2" tx2="dk2" accent1="accent1" accent2="accent2" accent3="accent3" accent4="accent4" accent5="accent5" accent6="accent6" hlink="hlink" folHlink="folHlink"/>
   <p:sldLayoutIdLst>
-    <p:sldLayoutId xmlns:r="http://schemas.openxmlformats.org/officeDocument/2006/relationships" id="2147483649" r:id="Rd545e07768704ce4"/>
+    <p:sldLayoutId xmlns:r="http://schemas.openxmlformats.org/officeDocument/2006/relationships" id="2147483649" r:id="R663cb807c07b4faf"/>
   </p:sldLayoutIdLst>
   <p:txStyles>
     <p:titleStyle>
@@ -2430,7 +2430,7 @@
           <p:cNvPr id="17" name="">
             <a:extLst xmlns:a="http://schemas.openxmlformats.org/drawingml/2006/main">
               <a:ext uri="{FF2B5EF4-FFF2-40B4-BE49-F238E27FC236}">
-                <a16:creationId xmlns:a16="http://schemas.microsoft.com/office/drawing/2014/main" id="{6ABA6E0C-BAAF-4EFA-9335-45E8F5CCCA5B}"/>
+                <a16:creationId xmlns:a16="http://schemas.microsoft.com/office/drawing/2014/main" id="{731EFFCA-7FAE-4BDE-A995-5531351B6611}"/>
               </a:ext>
             </a:extLst>
           </p:cNvPr>
@@ -2463,7 +2463,7 @@
           <p:cNvPr id="2" name="">
             <a:extLst xmlns:a="http://schemas.openxmlformats.org/drawingml/2006/main">
               <a:ext uri="{FF2B5EF4-FFF2-40B4-BE49-F238E27FC236}">
-                <a16:creationId xmlns:a16="http://schemas.microsoft.com/office/drawing/2014/main" id="{3FBB1189-EB48-4A95-8A02-2192BFA81E66}"/>
+                <a16:creationId xmlns:a16="http://schemas.microsoft.com/office/drawing/2014/main" id="{C7534A7A-D44F-43F0-8A0D-639A38A8935E}"/>
               </a:ext>
             </a:extLst>
           </p:cNvPr>
@@ -2494,7 +2494,7 @@
           <p:cNvPr id="3" name="">
             <a:extLst xmlns:a="http://schemas.openxmlformats.org/drawingml/2006/main">
               <a:ext uri="{FF2B5EF4-FFF2-40B4-BE49-F238E27FC236}">
-                <a16:creationId xmlns:a16="http://schemas.microsoft.com/office/drawing/2014/main" id="{6ABBCD70-7244-4F80-8D01-2F02CEEEDCB0}"/>
+                <a16:creationId xmlns:a16="http://schemas.microsoft.com/office/drawing/2014/main" id="{16E1D36D-A36C-48C1-8720-22F221BC5C2F}"/>
               </a:ext>
             </a:extLst>
           </p:cNvPr>
@@ -2529,7 +2529,7 @@
           <p:nvPr/>
         </p:nvPicPr>
         <p:blipFill>
-          <a:blip xmlns:r="http://schemas.openxmlformats.org/officeDocument/2006/relationships" xmlns:a="http://schemas.openxmlformats.org/drawingml/2006/main" r:embed="R0af38819fc3c4fa6"/>
+          <a:blip xmlns:r="http://schemas.openxmlformats.org/officeDocument/2006/relationships" xmlns:a="http://schemas.openxmlformats.org/drawingml/2006/main" r:embed="R6275204a5737479b"/>
           <a:stretch xmlns:a="http://schemas.openxmlformats.org/drawingml/2006/main"/>
         </p:blipFill>
         <p:spPr>
@@ -2547,7 +2547,7 @@
           <p:cNvPr id="5" name="">
             <a:extLst xmlns:a="http://schemas.openxmlformats.org/drawingml/2006/main">
               <a:ext uri="{FF2B5EF4-FFF2-40B4-BE49-F238E27FC236}">
-                <a16:creationId xmlns:a16="http://schemas.microsoft.com/office/drawing/2014/main" id="{43EC56DC-73FB-4AAA-ABF6-5712CC347988}"/>
+                <a16:creationId xmlns:a16="http://schemas.microsoft.com/office/drawing/2014/main" id="{B2486C55-8783-4352-9FD6-C23C7476A65E}"/>
               </a:ext>
             </a:extLst>
           </p:cNvPr>
@@ -2599,7 +2599,7 @@
           <p:cNvPr id="6" name="">
             <a:extLst xmlns:a="http://schemas.openxmlformats.org/drawingml/2006/main">
               <a:ext uri="{FF2B5EF4-FFF2-40B4-BE49-F238E27FC236}">
-                <a16:creationId xmlns:a16="http://schemas.microsoft.com/office/drawing/2014/main" id="{1C465EDB-B82D-4FFF-A2FD-8EFD30188141}"/>
+                <a16:creationId xmlns:a16="http://schemas.microsoft.com/office/drawing/2014/main" id="{E28E5EF5-A562-400B-89AF-0B6B150C0E3B}"/>
               </a:ext>
             </a:extLst>
           </p:cNvPr>
@@ -2655,7 +2655,7 @@
           <p:nvPr/>
         </p:nvPicPr>
         <p:blipFill>
-          <a:blip xmlns:r="http://schemas.openxmlformats.org/officeDocument/2006/relationships" xmlns:a="http://schemas.openxmlformats.org/drawingml/2006/main" r:embed="R6c1c65a69ae4470a"/>
+          <a:blip xmlns:r="http://schemas.openxmlformats.org/officeDocument/2006/relationships" xmlns:a="http://schemas.openxmlformats.org/drawingml/2006/main" r:embed="R786ca6bae6ea4123"/>
           <a:stretch xmlns:a="http://schemas.openxmlformats.org/drawingml/2006/main"/>
         </p:blipFill>
         <p:spPr>
@@ -2673,7 +2673,7 @@
           <p:cNvPr id="8" name="">
             <a:extLst xmlns:a="http://schemas.openxmlformats.org/drawingml/2006/main">
               <a:ext uri="{FF2B5EF4-FFF2-40B4-BE49-F238E27FC236}">
-                <a16:creationId xmlns:a16="http://schemas.microsoft.com/office/drawing/2014/main" id="{ED7A3A53-3C7F-453E-8D0B-7EE891F3AD51}"/>
+                <a16:creationId xmlns:a16="http://schemas.microsoft.com/office/drawing/2014/main" id="{F98C8567-FDA1-4516-9878-9D6A318C499C}"/>
               </a:ext>
             </a:extLst>
           </p:cNvPr>
@@ -2706,7 +2706,7 @@
           <p:cNvPr id="9" name="">
             <a:extLst xmlns:a="http://schemas.openxmlformats.org/drawingml/2006/main">
               <a:ext uri="{FF2B5EF4-FFF2-40B4-BE49-F238E27FC236}">
-                <a16:creationId xmlns:a16="http://schemas.microsoft.com/office/drawing/2014/main" id="{1C5FBC99-E01E-48C0-808F-E28656220D68}"/>
+                <a16:creationId xmlns:a16="http://schemas.microsoft.com/office/drawing/2014/main" id="{0A539A30-B848-4FD1-9EBC-6C9406AF9892}"/>
               </a:ext>
             </a:extLst>
           </p:cNvPr>
@@ -2758,7 +2758,7 @@
           <p:cNvPr id="10" name="">
             <a:extLst xmlns:a="http://schemas.openxmlformats.org/drawingml/2006/main">
               <a:ext uri="{FF2B5EF4-FFF2-40B4-BE49-F238E27FC236}">
-                <a16:creationId xmlns:a16="http://schemas.microsoft.com/office/drawing/2014/main" id="{7BB91B22-5E1F-417B-987C-DB8A983A7870}"/>
+                <a16:creationId xmlns:a16="http://schemas.microsoft.com/office/drawing/2014/main" id="{F8F0E12E-8C0A-418C-A9B6-D51DF2987467}"/>
               </a:ext>
             </a:extLst>
           </p:cNvPr>
@@ -2810,7 +2810,7 @@
           <p:cNvPr id="11" name="">
             <a:extLst xmlns:a="http://schemas.openxmlformats.org/drawingml/2006/main">
               <a:ext uri="{FF2B5EF4-FFF2-40B4-BE49-F238E27FC236}">
-                <a16:creationId xmlns:a16="http://schemas.microsoft.com/office/drawing/2014/main" id="{04A10609-BA38-499B-A9ED-3E35D9DC14AA}"/>
+                <a16:creationId xmlns:a16="http://schemas.microsoft.com/office/drawing/2014/main" id="{67149B26-486A-4006-AAC3-7100E3638F96}"/>
               </a:ext>
             </a:extLst>
           </p:cNvPr>
@@ -2862,7 +2862,7 @@
           <p:cNvPr id="12" name="">
             <a:extLst xmlns:a="http://schemas.openxmlformats.org/drawingml/2006/main">
               <a:ext uri="{FF2B5EF4-FFF2-40B4-BE49-F238E27FC236}">
-                <a16:creationId xmlns:a16="http://schemas.microsoft.com/office/drawing/2014/main" id="{2993EC0E-6ED6-44D7-86CA-E12C5162FF01}"/>
+                <a16:creationId xmlns:a16="http://schemas.microsoft.com/office/drawing/2014/main" id="{C333DEC6-E432-4896-9565-3E7229A7B6C5}"/>
               </a:ext>
             </a:extLst>
           </p:cNvPr>
@@ -2914,7 +2914,7 @@
           <p:cNvPr id="13" name="">
             <a:extLst xmlns:a="http://schemas.openxmlformats.org/drawingml/2006/main">
               <a:ext uri="{FF2B5EF4-FFF2-40B4-BE49-F238E27FC236}">
-                <a16:creationId xmlns:a16="http://schemas.microsoft.com/office/drawing/2014/main" id="{FC4A1559-4267-4061-BC81-6010C0156590}"/>
+                <a16:creationId xmlns:a16="http://schemas.microsoft.com/office/drawing/2014/main" id="{46C30753-E827-461D-8E07-30FFC4763A91}"/>
               </a:ext>
             </a:extLst>
           </p:cNvPr>
@@ -2966,7 +2966,7 @@
           <p:cNvPr id="14" name="">
             <a:extLst xmlns:a="http://schemas.openxmlformats.org/drawingml/2006/main">
               <a:ext uri="{FF2B5EF4-FFF2-40B4-BE49-F238E27FC236}">
-                <a16:creationId xmlns:a16="http://schemas.microsoft.com/office/drawing/2014/main" id="{A82233C6-3278-40AB-A2A4-BFC65828635E}"/>
+                <a16:creationId xmlns:a16="http://schemas.microsoft.com/office/drawing/2014/main" id="{5198E1F5-E45C-4B3E-8D36-B4D6491D3D17}"/>
               </a:ext>
             </a:extLst>
           </p:cNvPr>
@@ -3018,7 +3018,7 @@
           <p:cNvPr id="15" name="">
             <a:extLst xmlns:a="http://schemas.openxmlformats.org/drawingml/2006/main">
               <a:ext uri="{FF2B5EF4-FFF2-40B4-BE49-F238E27FC236}">
-                <a16:creationId xmlns:a16="http://schemas.microsoft.com/office/drawing/2014/main" id="{42B5A7A5-DA3B-4A2B-B1CE-79B6DD95C133}"/>
+                <a16:creationId xmlns:a16="http://schemas.microsoft.com/office/drawing/2014/main" id="{C755E80F-4F43-4EC3-9771-2F4FC9D02CD6}"/>
               </a:ext>
             </a:extLst>
           </p:cNvPr>
@@ -3070,7 +3070,7 @@
           <p:cNvPr id="16" name="">
             <a:extLst xmlns:a="http://schemas.openxmlformats.org/drawingml/2006/main">
               <a:ext uri="{FF2B5EF4-FFF2-40B4-BE49-F238E27FC236}">
-                <a16:creationId xmlns:a16="http://schemas.microsoft.com/office/drawing/2014/main" id="{BFBB76EA-657B-4C0D-A6FA-576C818EB405}"/>
+                <a16:creationId xmlns:a16="http://schemas.microsoft.com/office/drawing/2014/main" id="{EEE6AE69-80A2-4A7A-872D-ED5EAEB89938}"/>
               </a:ext>
             </a:extLst>
           </p:cNvPr>
@@ -3120,7 +3120,7 @@
     </p:spTree>
     <p:extLst>
       <p:ext uri="{BB962C8B-B14F-4D97-AF65-F5344CB8AC3E}">
-        <p14:creationId xmlns:p14="http://schemas.microsoft.com/office/powerpoint/2010/main" val="628056934"/>
+        <p14:creationId xmlns:p14="http://schemas.microsoft.com/office/powerpoint/2010/main" val="1278921548"/>
       </p:ext>
     </p:extLst>
   </p:cSld>
@@ -3151,7 +3151,7 @@
           <p:cNvPr id="103" name="">
             <a:extLst xmlns:a="http://schemas.openxmlformats.org/drawingml/2006/main">
               <a:ext uri="{FF2B5EF4-FFF2-40B4-BE49-F238E27FC236}">
-                <a16:creationId xmlns:a16="http://schemas.microsoft.com/office/drawing/2014/main" id="{B7C16D8B-A652-4208-9DFD-26898D5E0551}"/>
+                <a16:creationId xmlns:a16="http://schemas.microsoft.com/office/drawing/2014/main" id="{35097115-986F-402E-8EE6-501D46ACDB8C}"/>
               </a:ext>
             </a:extLst>
           </p:cNvPr>
@@ -3184,7 +3184,7 @@
           <p:cNvPr id="2" name="">
             <a:extLst xmlns:a="http://schemas.openxmlformats.org/drawingml/2006/main">
               <a:ext uri="{FF2B5EF4-FFF2-40B4-BE49-F238E27FC236}">
-                <a16:creationId xmlns:a16="http://schemas.microsoft.com/office/drawing/2014/main" id="{684152F4-29EF-4E75-9C60-B890CC4C9A54}"/>
+                <a16:creationId xmlns:a16="http://schemas.microsoft.com/office/drawing/2014/main" id="{C48FC1CB-F8F8-4C39-B380-E8E4F07F51F7}"/>
               </a:ext>
             </a:extLst>
           </p:cNvPr>
@@ -3215,7 +3215,7 @@
           <p:cNvPr id="3" name="">
             <a:extLst xmlns:a="http://schemas.openxmlformats.org/drawingml/2006/main">
               <a:ext uri="{FF2B5EF4-FFF2-40B4-BE49-F238E27FC236}">
-                <a16:creationId xmlns:a16="http://schemas.microsoft.com/office/drawing/2014/main" id="{B22F32D6-EB0F-4DDB-A9A2-36947431B223}"/>
+                <a16:creationId xmlns:a16="http://schemas.microsoft.com/office/drawing/2014/main" id="{384EE696-1D9E-4012-B39C-D7FD4D981B7A}"/>
               </a:ext>
             </a:extLst>
           </p:cNvPr>
@@ -3267,7 +3267,7 @@
           <p:cNvPr id="4" name="">
             <a:extLst xmlns:a="http://schemas.openxmlformats.org/drawingml/2006/main">
               <a:ext uri="{FF2B5EF4-FFF2-40B4-BE49-F238E27FC236}">
-                <a16:creationId xmlns:a16="http://schemas.microsoft.com/office/drawing/2014/main" id="{83EECCE5-5C16-4F2E-B1BC-917128A192EF}"/>
+                <a16:creationId xmlns:a16="http://schemas.microsoft.com/office/drawing/2014/main" id="{2D1D8CB2-CA7B-42E9-9A2E-7E646DEDCC6B}"/>
               </a:ext>
             </a:extLst>
           </p:cNvPr>
@@ -3319,7 +3319,7 @@
           <p:cNvPr id="5" name="">
             <a:extLst xmlns:a="http://schemas.openxmlformats.org/drawingml/2006/main">
               <a:ext uri="{FF2B5EF4-FFF2-40B4-BE49-F238E27FC236}">
-                <a16:creationId xmlns:a16="http://schemas.microsoft.com/office/drawing/2014/main" id="{B58B5E94-6179-4916-88C5-68196AB40F09}"/>
+                <a16:creationId xmlns:a16="http://schemas.microsoft.com/office/drawing/2014/main" id="{E8760062-6E1C-41D4-B7AF-F132F2D62365}"/>
               </a:ext>
             </a:extLst>
           </p:cNvPr>
@@ -3354,7 +3354,7 @@
           <p:nvPr/>
         </p:nvPicPr>
         <p:blipFill>
-          <a:blip xmlns:r="http://schemas.openxmlformats.org/officeDocument/2006/relationships" xmlns:a="http://schemas.openxmlformats.org/drawingml/2006/main" r:embed="R6bd5be8c5c474f35"/>
+          <a:blip xmlns:r="http://schemas.openxmlformats.org/officeDocument/2006/relationships" xmlns:a="http://schemas.openxmlformats.org/drawingml/2006/main" r:embed="R9cbbccc3784a44ba"/>
           <a:stretch xmlns:a="http://schemas.openxmlformats.org/drawingml/2006/main"/>
         </p:blipFill>
         <p:spPr>
@@ -3372,7 +3372,7 @@
           <p:cNvPr id="7" name="">
             <a:extLst xmlns:a="http://schemas.openxmlformats.org/drawingml/2006/main">
               <a:ext uri="{FF2B5EF4-FFF2-40B4-BE49-F238E27FC236}">
-                <a16:creationId xmlns:a16="http://schemas.microsoft.com/office/drawing/2014/main" id="{2B68F3F1-0775-482E-B49C-600CDC11FFBE}"/>
+                <a16:creationId xmlns:a16="http://schemas.microsoft.com/office/drawing/2014/main" id="{3A12C44D-AD0E-43D4-BDB1-AE0E8C975012}"/>
               </a:ext>
             </a:extLst>
           </p:cNvPr>
@@ -3424,7 +3424,7 @@
           <p:cNvPr id="8" name="">
             <a:extLst xmlns:a="http://schemas.openxmlformats.org/drawingml/2006/main">
               <a:ext uri="{FF2B5EF4-FFF2-40B4-BE49-F238E27FC236}">
-                <a16:creationId xmlns:a16="http://schemas.microsoft.com/office/drawing/2014/main" id="{1118D936-64C0-4F60-884F-BF1B9F1E53F0}"/>
+                <a16:creationId xmlns:a16="http://schemas.microsoft.com/office/drawing/2014/main" id="{AA1036BA-6584-45EA-B1D7-67CDA08EB83E}"/>
               </a:ext>
             </a:extLst>
           </p:cNvPr>
@@ -3476,7 +3476,7 @@
           <p:cNvPr id="9" name="">
             <a:extLst xmlns:a="http://schemas.openxmlformats.org/drawingml/2006/main">
               <a:ext uri="{FF2B5EF4-FFF2-40B4-BE49-F238E27FC236}">
-                <a16:creationId xmlns:a16="http://schemas.microsoft.com/office/drawing/2014/main" id="{850AD741-5A96-4F15-8F6E-8E7ECFA4966B}"/>
+                <a16:creationId xmlns:a16="http://schemas.microsoft.com/office/drawing/2014/main" id="{664ABD30-B412-49BA-8CC7-051516A5502B}"/>
               </a:ext>
             </a:extLst>
           </p:cNvPr>
@@ -3528,7 +3528,7 @@
           <p:cNvPr id="10" name="">
             <a:extLst xmlns:a="http://schemas.openxmlformats.org/drawingml/2006/main">
               <a:ext uri="{FF2B5EF4-FFF2-40B4-BE49-F238E27FC236}">
-                <a16:creationId xmlns:a16="http://schemas.microsoft.com/office/drawing/2014/main" id="{35C3AA88-EE0A-4E70-83DB-0F7F682514F0}"/>
+                <a16:creationId xmlns:a16="http://schemas.microsoft.com/office/drawing/2014/main" id="{68C63E20-A1DA-47DF-8012-4F547FA3B928}"/>
               </a:ext>
             </a:extLst>
           </p:cNvPr>
@@ -3580,7 +3580,7 @@
           <p:cNvPr id="11" name="">
             <a:extLst xmlns:a="http://schemas.openxmlformats.org/drawingml/2006/main">
               <a:ext uri="{FF2B5EF4-FFF2-40B4-BE49-F238E27FC236}">
-                <a16:creationId xmlns:a16="http://schemas.microsoft.com/office/drawing/2014/main" id="{62461817-C982-4AA7-8442-9DA6192A9F0B}"/>
+                <a16:creationId xmlns:a16="http://schemas.microsoft.com/office/drawing/2014/main" id="{9FE97F18-94F0-48FE-B69C-7FCE240290AF}"/>
               </a:ext>
             </a:extLst>
           </p:cNvPr>
@@ -3611,7 +3611,7 @@
           <p:cNvPr id="12" name="">
             <a:extLst xmlns:a="http://schemas.openxmlformats.org/drawingml/2006/main">
               <a:ext uri="{FF2B5EF4-FFF2-40B4-BE49-F238E27FC236}">
-                <a16:creationId xmlns:a16="http://schemas.microsoft.com/office/drawing/2014/main" id="{F79DD6EB-9D4C-44D1-BAED-50D304B5C1AB}"/>
+                <a16:creationId xmlns:a16="http://schemas.microsoft.com/office/drawing/2014/main" id="{7133A47F-1EAA-42C8-8D88-8D39D92F3887}"/>
               </a:ext>
             </a:extLst>
           </p:cNvPr>
@@ -3642,7 +3642,7 @@
           <p:cNvPr id="13" name="">
             <a:extLst xmlns:a="http://schemas.openxmlformats.org/drawingml/2006/main">
               <a:ext uri="{FF2B5EF4-FFF2-40B4-BE49-F238E27FC236}">
-                <a16:creationId xmlns:a16="http://schemas.microsoft.com/office/drawing/2014/main" id="{7C7800AA-B480-49D9-BCD2-3492A4ABE7D2}"/>
+                <a16:creationId xmlns:a16="http://schemas.microsoft.com/office/drawing/2014/main" id="{0E286564-B796-4279-A7BD-A4FD655708C6}"/>
               </a:ext>
             </a:extLst>
           </p:cNvPr>
@@ -3694,7 +3694,7 @@
           <p:cNvPr id="14" name="">
             <a:extLst xmlns:a="http://schemas.openxmlformats.org/drawingml/2006/main">
               <a:ext uri="{FF2B5EF4-FFF2-40B4-BE49-F238E27FC236}">
-                <a16:creationId xmlns:a16="http://schemas.microsoft.com/office/drawing/2014/main" id="{4FCF5408-1AC9-437D-A52A-BEFD1EA18C65}"/>
+                <a16:creationId xmlns:a16="http://schemas.microsoft.com/office/drawing/2014/main" id="{CCBF9858-D5A1-498E-B250-09E2395EF17B}"/>
               </a:ext>
             </a:extLst>
           </p:cNvPr>
@@ -3746,7 +3746,7 @@
           <p:cNvPr id="15" name="">
             <a:extLst xmlns:a="http://schemas.openxmlformats.org/drawingml/2006/main">
               <a:ext uri="{FF2B5EF4-FFF2-40B4-BE49-F238E27FC236}">
-                <a16:creationId xmlns:a16="http://schemas.microsoft.com/office/drawing/2014/main" id="{8B31E0DD-9F32-482D-AE5D-3343FEFE8255}"/>
+                <a16:creationId xmlns:a16="http://schemas.microsoft.com/office/drawing/2014/main" id="{DCE47FF5-B06E-44DB-B100-6A95B6FF6CCB}"/>
               </a:ext>
             </a:extLst>
           </p:cNvPr>
@@ -3798,7 +3798,7 @@
           <p:cNvPr id="16" name="">
             <a:extLst xmlns:a="http://schemas.openxmlformats.org/drawingml/2006/main">
               <a:ext uri="{FF2B5EF4-FFF2-40B4-BE49-F238E27FC236}">
-                <a16:creationId xmlns:a16="http://schemas.microsoft.com/office/drawing/2014/main" id="{E1CB1FAB-851C-4A7E-AC04-3E8737259641}"/>
+                <a16:creationId xmlns:a16="http://schemas.microsoft.com/office/drawing/2014/main" id="{8CA2156B-C2A5-4E30-8521-7127D5B37C21}"/>
               </a:ext>
             </a:extLst>
           </p:cNvPr>
@@ -3850,7 +3850,7 @@
           <p:cNvPr id="17" name="">
             <a:extLst xmlns:a="http://schemas.openxmlformats.org/drawingml/2006/main">
               <a:ext uri="{FF2B5EF4-FFF2-40B4-BE49-F238E27FC236}">
-                <a16:creationId xmlns:a16="http://schemas.microsoft.com/office/drawing/2014/main" id="{376F6936-558E-4B69-85B8-995B6E078160}"/>
+                <a16:creationId xmlns:a16="http://schemas.microsoft.com/office/drawing/2014/main" id="{2ACB25AB-3550-4B00-BFDA-18A379F4EC01}"/>
               </a:ext>
             </a:extLst>
           </p:cNvPr>
@@ -3902,7 +3902,7 @@
           <p:cNvPr id="18" name="">
             <a:extLst xmlns:a="http://schemas.openxmlformats.org/drawingml/2006/main">
               <a:ext uri="{FF2B5EF4-FFF2-40B4-BE49-F238E27FC236}">
-                <a16:creationId xmlns:a16="http://schemas.microsoft.com/office/drawing/2014/main" id="{60C30AE1-B6CC-4E03-AA99-0BA8C164305D}"/>
+                <a16:creationId xmlns:a16="http://schemas.microsoft.com/office/drawing/2014/main" id="{C617C79A-308C-4AA5-994C-236D4FF6A12E}"/>
               </a:ext>
             </a:extLst>
           </p:cNvPr>
@@ -3933,7 +3933,7 @@
           <p:cNvPr id="19" name="">
             <a:extLst xmlns:a="http://schemas.openxmlformats.org/drawingml/2006/main">
               <a:ext uri="{FF2B5EF4-FFF2-40B4-BE49-F238E27FC236}">
-                <a16:creationId xmlns:a16="http://schemas.microsoft.com/office/drawing/2014/main" id="{184AA4F7-6876-4F9C-9584-4626E226B2B2}"/>
+                <a16:creationId xmlns:a16="http://schemas.microsoft.com/office/drawing/2014/main" id="{78ADB1C8-62F2-4268-B8D3-1F0DF4414CD8}"/>
               </a:ext>
             </a:extLst>
           </p:cNvPr>
@@ -3964,7 +3964,7 @@
           <p:cNvPr id="20" name="">
             <a:extLst xmlns:a="http://schemas.openxmlformats.org/drawingml/2006/main">
               <a:ext uri="{FF2B5EF4-FFF2-40B4-BE49-F238E27FC236}">
-                <a16:creationId xmlns:a16="http://schemas.microsoft.com/office/drawing/2014/main" id="{D44FA3F6-E874-4DE4-98BA-5C5191B50453}"/>
+                <a16:creationId xmlns:a16="http://schemas.microsoft.com/office/drawing/2014/main" id="{5A121735-720F-4353-8F75-EBBC1F7C6183}"/>
               </a:ext>
             </a:extLst>
           </p:cNvPr>
@@ -4016,7 +4016,7 @@
           <p:cNvPr id="21" name="">
             <a:extLst xmlns:a="http://schemas.openxmlformats.org/drawingml/2006/main">
               <a:ext uri="{FF2B5EF4-FFF2-40B4-BE49-F238E27FC236}">
-                <a16:creationId xmlns:a16="http://schemas.microsoft.com/office/drawing/2014/main" id="{32D16ADB-406F-4105-9BCA-49D6582281E2}"/>
+                <a16:creationId xmlns:a16="http://schemas.microsoft.com/office/drawing/2014/main" id="{7B028DCB-E65C-40E5-A715-6C2575878970}"/>
               </a:ext>
             </a:extLst>
           </p:cNvPr>
@@ -4068,7 +4068,7 @@
           <p:cNvPr id="22" name="">
             <a:extLst xmlns:a="http://schemas.openxmlformats.org/drawingml/2006/main">
               <a:ext uri="{FF2B5EF4-FFF2-40B4-BE49-F238E27FC236}">
-                <a16:creationId xmlns:a16="http://schemas.microsoft.com/office/drawing/2014/main" id="{68EEA0F8-98B9-48DF-965D-87F1729AC9E8}"/>
+                <a16:creationId xmlns:a16="http://schemas.microsoft.com/office/drawing/2014/main" id="{4097B4D9-3E53-405F-BF42-40D1E3F87165}"/>
               </a:ext>
             </a:extLst>
           </p:cNvPr>
@@ -4120,7 +4120,7 @@
           <p:cNvPr id="23" name="">
             <a:extLst xmlns:a="http://schemas.openxmlformats.org/drawingml/2006/main">
               <a:ext uri="{FF2B5EF4-FFF2-40B4-BE49-F238E27FC236}">
-                <a16:creationId xmlns:a16="http://schemas.microsoft.com/office/drawing/2014/main" id="{72A2B7D6-9DB7-4B64-A6FC-BD9B2258855A}"/>
+                <a16:creationId xmlns:a16="http://schemas.microsoft.com/office/drawing/2014/main" id="{AD7937B3-CFED-40B3-B66F-B91FD033D0D6}"/>
               </a:ext>
             </a:extLst>
           </p:cNvPr>
@@ -4172,7 +4172,7 @@
           <p:cNvPr id="24" name="">
             <a:extLst xmlns:a="http://schemas.openxmlformats.org/drawingml/2006/main">
               <a:ext uri="{FF2B5EF4-FFF2-40B4-BE49-F238E27FC236}">
-                <a16:creationId xmlns:a16="http://schemas.microsoft.com/office/drawing/2014/main" id="{C8D97C1B-1272-42E5-9DAD-CE97E6DB1C23}"/>
+                <a16:creationId xmlns:a16="http://schemas.microsoft.com/office/drawing/2014/main" id="{9B841619-A3DA-4E81-9D08-7B238074503F}"/>
               </a:ext>
             </a:extLst>
           </p:cNvPr>
@@ -4224,7 +4224,7 @@
           <p:cNvPr id="25" name="">
             <a:extLst xmlns:a="http://schemas.openxmlformats.org/drawingml/2006/main">
               <a:ext uri="{FF2B5EF4-FFF2-40B4-BE49-F238E27FC236}">
-                <a16:creationId xmlns:a16="http://schemas.microsoft.com/office/drawing/2014/main" id="{41C2A758-8103-4D5E-9521-F9C6C7D12FFE}"/>
+                <a16:creationId xmlns:a16="http://schemas.microsoft.com/office/drawing/2014/main" id="{1073EF16-99A4-46CB-95C6-43AB50DF158F}"/>
               </a:ext>
             </a:extLst>
           </p:cNvPr>
@@ -4255,7 +4255,7 @@
           <p:cNvPr id="26" name="">
             <a:extLst xmlns:a="http://schemas.openxmlformats.org/drawingml/2006/main">
               <a:ext uri="{FF2B5EF4-FFF2-40B4-BE49-F238E27FC236}">
-                <a16:creationId xmlns:a16="http://schemas.microsoft.com/office/drawing/2014/main" id="{0A41DE14-777A-449A-B6BE-D00F44D1FA96}"/>
+                <a16:creationId xmlns:a16="http://schemas.microsoft.com/office/drawing/2014/main" id="{1B5DB996-6AC6-4F50-960D-B10329DFBC54}"/>
               </a:ext>
             </a:extLst>
           </p:cNvPr>
@@ -4307,7 +4307,7 @@
           <p:cNvPr id="27" name="">
             <a:extLst xmlns:a="http://schemas.openxmlformats.org/drawingml/2006/main">
               <a:ext uri="{FF2B5EF4-FFF2-40B4-BE49-F238E27FC236}">
-                <a16:creationId xmlns:a16="http://schemas.microsoft.com/office/drawing/2014/main" id="{2C9270D5-595F-4344-B494-584B5A91B9AF}"/>
+                <a16:creationId xmlns:a16="http://schemas.microsoft.com/office/drawing/2014/main" id="{E5533421-C330-4927-B4E2-BE2E8EE1D382}"/>
               </a:ext>
             </a:extLst>
           </p:cNvPr>
@@ -4359,7 +4359,7 @@
           <p:cNvPr id="28" name="">
             <a:extLst xmlns:a="http://schemas.openxmlformats.org/drawingml/2006/main">
               <a:ext uri="{FF2B5EF4-FFF2-40B4-BE49-F238E27FC236}">
-                <a16:creationId xmlns:a16="http://schemas.microsoft.com/office/drawing/2014/main" id="{05E4E44C-E1AD-4296-845B-3D3E646592C9}"/>
+                <a16:creationId xmlns:a16="http://schemas.microsoft.com/office/drawing/2014/main" id="{11006FB4-6935-4985-96D9-D9BE23690E81}"/>
               </a:ext>
             </a:extLst>
           </p:cNvPr>
@@ -4411,7 +4411,7 @@
           <p:cNvPr id="29" name="">
             <a:extLst xmlns:a="http://schemas.openxmlformats.org/drawingml/2006/main">
               <a:ext uri="{FF2B5EF4-FFF2-40B4-BE49-F238E27FC236}">
-                <a16:creationId xmlns:a16="http://schemas.microsoft.com/office/drawing/2014/main" id="{15A305BF-1C29-43E7-9A54-D0800B18F3DD}"/>
+                <a16:creationId xmlns:a16="http://schemas.microsoft.com/office/drawing/2014/main" id="{1FF81282-4427-4A03-9490-442A5D3CC390}"/>
               </a:ext>
             </a:extLst>
           </p:cNvPr>
@@ -4463,7 +4463,7 @@
           <p:cNvPr id="30" name="">
             <a:extLst xmlns:a="http://schemas.openxmlformats.org/drawingml/2006/main">
               <a:ext uri="{FF2B5EF4-FFF2-40B4-BE49-F238E27FC236}">
-                <a16:creationId xmlns:a16="http://schemas.microsoft.com/office/drawing/2014/main" id="{2B7136CD-EAF7-47CA-A23A-6BF9A75B782A}"/>
+                <a16:creationId xmlns:a16="http://schemas.microsoft.com/office/drawing/2014/main" id="{D17A332A-66B0-4E56-9815-49EC66D1D209}"/>
               </a:ext>
             </a:extLst>
           </p:cNvPr>
@@ -4515,7 +4515,7 @@
           <p:cNvPr id="31" name="">
             <a:extLst xmlns:a="http://schemas.openxmlformats.org/drawingml/2006/main">
               <a:ext uri="{FF2B5EF4-FFF2-40B4-BE49-F238E27FC236}">
-                <a16:creationId xmlns:a16="http://schemas.microsoft.com/office/drawing/2014/main" id="{1A88CC31-FFA6-42B9-8EE3-247314D0BF9B}"/>
+                <a16:creationId xmlns:a16="http://schemas.microsoft.com/office/drawing/2014/main" id="{EA0965EB-6C67-4376-A67E-D3353A0C77FD}"/>
               </a:ext>
             </a:extLst>
           </p:cNvPr>
@@ -4546,7 +4546,7 @@
           <p:cNvPr id="32" name="">
             <a:extLst xmlns:a="http://schemas.openxmlformats.org/drawingml/2006/main">
               <a:ext uri="{FF2B5EF4-FFF2-40B4-BE49-F238E27FC236}">
-                <a16:creationId xmlns:a16="http://schemas.microsoft.com/office/drawing/2014/main" id="{87FC774D-18E4-4C26-BA59-7F1E70DC403F}"/>
+                <a16:creationId xmlns:a16="http://schemas.microsoft.com/office/drawing/2014/main" id="{D665256E-C225-4800-866B-78A632DA830C}"/>
               </a:ext>
             </a:extLst>
           </p:cNvPr>
@@ -4577,7 +4577,7 @@
           <p:cNvPr id="33" name="">
             <a:extLst xmlns:a="http://schemas.openxmlformats.org/drawingml/2006/main">
               <a:ext uri="{FF2B5EF4-FFF2-40B4-BE49-F238E27FC236}">
-                <a16:creationId xmlns:a16="http://schemas.microsoft.com/office/drawing/2014/main" id="{F2D5124D-B31C-49E3-AD56-2144BCF090C4}"/>
+                <a16:creationId xmlns:a16="http://schemas.microsoft.com/office/drawing/2014/main" id="{8F62D25D-BF01-413D-8F56-063C55C35643}"/>
               </a:ext>
             </a:extLst>
           </p:cNvPr>
@@ -4629,7 +4629,7 @@
           <p:cNvPr id="34" name="">
             <a:extLst xmlns:a="http://schemas.openxmlformats.org/drawingml/2006/main">
               <a:ext uri="{FF2B5EF4-FFF2-40B4-BE49-F238E27FC236}">
-                <a16:creationId xmlns:a16="http://schemas.microsoft.com/office/drawing/2014/main" id="{05008E67-0FC0-43CB-BAD2-F71CF04038F4}"/>
+                <a16:creationId xmlns:a16="http://schemas.microsoft.com/office/drawing/2014/main" id="{DD68EC7A-AF8F-47A1-BA7E-AF1CBE3EBA19}"/>
               </a:ext>
             </a:extLst>
           </p:cNvPr>
@@ -4681,7 +4681,7 @@
           <p:cNvPr id="35" name="">
             <a:extLst xmlns:a="http://schemas.openxmlformats.org/drawingml/2006/main">
               <a:ext uri="{FF2B5EF4-FFF2-40B4-BE49-F238E27FC236}">
-                <a16:creationId xmlns:a16="http://schemas.microsoft.com/office/drawing/2014/main" id="{4B4E8C3D-62D5-47A1-9478-C465F3EEC017}"/>
+                <a16:creationId xmlns:a16="http://schemas.microsoft.com/office/drawing/2014/main" id="{EBD122F9-DE1B-4637-97A2-118FCBDB329E}"/>
               </a:ext>
             </a:extLst>
           </p:cNvPr>
@@ -4733,7 +4733,7 @@
           <p:cNvPr id="36" name="">
             <a:extLst xmlns:a="http://schemas.openxmlformats.org/drawingml/2006/main">
               <a:ext uri="{FF2B5EF4-FFF2-40B4-BE49-F238E27FC236}">
-                <a16:creationId xmlns:a16="http://schemas.microsoft.com/office/drawing/2014/main" id="{655043E5-560D-4DCD-B6C8-53979444AB78}"/>
+                <a16:creationId xmlns:a16="http://schemas.microsoft.com/office/drawing/2014/main" id="{C25C01AA-EF9C-4100-9C6C-4496E33BB409}"/>
               </a:ext>
             </a:extLst>
           </p:cNvPr>
@@ -4785,7 +4785,7 @@
           <p:cNvPr id="37" name="">
             <a:extLst xmlns:a="http://schemas.openxmlformats.org/drawingml/2006/main">
               <a:ext uri="{FF2B5EF4-FFF2-40B4-BE49-F238E27FC236}">
-                <a16:creationId xmlns:a16="http://schemas.microsoft.com/office/drawing/2014/main" id="{191C43D0-6007-4E5C-B981-1E52A3368E46}"/>
+                <a16:creationId xmlns:a16="http://schemas.microsoft.com/office/drawing/2014/main" id="{FAAB62C2-5630-4DAB-9CFA-49F1857D91D8}"/>
               </a:ext>
             </a:extLst>
           </p:cNvPr>
@@ -4837,7 +4837,7 @@
           <p:cNvPr id="38" name="">
             <a:extLst xmlns:a="http://schemas.openxmlformats.org/drawingml/2006/main">
               <a:ext uri="{FF2B5EF4-FFF2-40B4-BE49-F238E27FC236}">
-                <a16:creationId xmlns:a16="http://schemas.microsoft.com/office/drawing/2014/main" id="{3E3A2C2D-BF24-47D1-9538-7C4F01CF8C7B}"/>
+                <a16:creationId xmlns:a16="http://schemas.microsoft.com/office/drawing/2014/main" id="{2C4B6A9F-465E-46E8-B844-8CF61F0554D6}"/>
               </a:ext>
             </a:extLst>
           </p:cNvPr>
@@ -4868,7 +4868,7 @@
           <p:cNvPr id="39" name="">
             <a:extLst xmlns:a="http://schemas.openxmlformats.org/drawingml/2006/main">
               <a:ext uri="{FF2B5EF4-FFF2-40B4-BE49-F238E27FC236}">
-                <a16:creationId xmlns:a16="http://schemas.microsoft.com/office/drawing/2014/main" id="{3A71A8B3-A66A-4EC3-BAF7-7DF426FF9D2B}"/>
+                <a16:creationId xmlns:a16="http://schemas.microsoft.com/office/drawing/2014/main" id="{8AF7D9D8-CCB7-4963-BF3A-4AEECC136548}"/>
               </a:ext>
             </a:extLst>
           </p:cNvPr>
@@ -4920,7 +4920,7 @@
           <p:cNvPr id="40" name="">
             <a:extLst xmlns:a="http://schemas.openxmlformats.org/drawingml/2006/main">
               <a:ext uri="{FF2B5EF4-FFF2-40B4-BE49-F238E27FC236}">
-                <a16:creationId xmlns:a16="http://schemas.microsoft.com/office/drawing/2014/main" id="{8C02CC5D-58C8-421A-9CDA-C7F462DC782C}"/>
+                <a16:creationId xmlns:a16="http://schemas.microsoft.com/office/drawing/2014/main" id="{E388B9F4-22FD-43A8-BE29-C81C24A2B047}"/>
               </a:ext>
             </a:extLst>
           </p:cNvPr>
@@ -4972,7 +4972,7 @@
           <p:cNvPr id="41" name="">
             <a:extLst xmlns:a="http://schemas.openxmlformats.org/drawingml/2006/main">
               <a:ext uri="{FF2B5EF4-FFF2-40B4-BE49-F238E27FC236}">
-                <a16:creationId xmlns:a16="http://schemas.microsoft.com/office/drawing/2014/main" id="{8F97450D-16CA-4407-932D-FFC0A6E12620}"/>
+                <a16:creationId xmlns:a16="http://schemas.microsoft.com/office/drawing/2014/main" id="{A46E139C-94CD-4864-8D24-7AF989C6A363}"/>
               </a:ext>
             </a:extLst>
           </p:cNvPr>
@@ -5024,7 +5024,7 @@
           <p:cNvPr id="42" name="">
             <a:extLst xmlns:a="http://schemas.openxmlformats.org/drawingml/2006/main">
               <a:ext uri="{FF2B5EF4-FFF2-40B4-BE49-F238E27FC236}">
-                <a16:creationId xmlns:a16="http://schemas.microsoft.com/office/drawing/2014/main" id="{7D467C71-F698-45DC-BF73-E735B52BF9DF}"/>
+                <a16:creationId xmlns:a16="http://schemas.microsoft.com/office/drawing/2014/main" id="{19620E16-6BD7-4B65-AB90-08B3D4E35D85}"/>
               </a:ext>
             </a:extLst>
           </p:cNvPr>
@@ -5076,7 +5076,7 @@
           <p:cNvPr id="43" name="">
             <a:extLst xmlns:a="http://schemas.openxmlformats.org/drawingml/2006/main">
               <a:ext uri="{FF2B5EF4-FFF2-40B4-BE49-F238E27FC236}">
-                <a16:creationId xmlns:a16="http://schemas.microsoft.com/office/drawing/2014/main" id="{B51ED5AA-F2A5-42ED-AE42-ED88D08E3F5F}"/>
+                <a16:creationId xmlns:a16="http://schemas.microsoft.com/office/drawing/2014/main" id="{2C77E823-3AFC-412E-894C-8E0FB51C62A8}"/>
               </a:ext>
             </a:extLst>
           </p:cNvPr>
@@ -5128,7 +5128,7 @@
           <p:cNvPr id="44" name="">
             <a:extLst xmlns:a="http://schemas.openxmlformats.org/drawingml/2006/main">
               <a:ext uri="{FF2B5EF4-FFF2-40B4-BE49-F238E27FC236}">
-                <a16:creationId xmlns:a16="http://schemas.microsoft.com/office/drawing/2014/main" id="{D8C9FCCA-82D7-420C-BE14-9FFC8E4110C4}"/>
+                <a16:creationId xmlns:a16="http://schemas.microsoft.com/office/drawing/2014/main" id="{790860D2-DE56-4CEF-98CE-7D75D3D9090D}"/>
               </a:ext>
             </a:extLst>
           </p:cNvPr>
@@ -5159,7 +5159,7 @@
           <p:cNvPr id="45" name="">
             <a:extLst xmlns:a="http://schemas.openxmlformats.org/drawingml/2006/main">
               <a:ext uri="{FF2B5EF4-FFF2-40B4-BE49-F238E27FC236}">
-                <a16:creationId xmlns:a16="http://schemas.microsoft.com/office/drawing/2014/main" id="{D89BE253-6897-42F1-A3CF-FD315CC09493}"/>
+                <a16:creationId xmlns:a16="http://schemas.microsoft.com/office/drawing/2014/main" id="{2D2D8DE9-1502-4FAE-8E5D-B40BA0107812}"/>
               </a:ext>
             </a:extLst>
           </p:cNvPr>
@@ -5190,7 +5190,7 @@
           <p:cNvPr id="46" name="">
             <a:extLst xmlns:a="http://schemas.openxmlformats.org/drawingml/2006/main">
               <a:ext uri="{FF2B5EF4-FFF2-40B4-BE49-F238E27FC236}">
-                <a16:creationId xmlns:a16="http://schemas.microsoft.com/office/drawing/2014/main" id="{1A717A60-FAB9-42B1-B8AC-F30D5D9EF950}"/>
+                <a16:creationId xmlns:a16="http://schemas.microsoft.com/office/drawing/2014/main" id="{109FED18-2F8A-41D6-8BA1-B1AE48DF7AB1}"/>
               </a:ext>
             </a:extLst>
           </p:cNvPr>
@@ -5242,7 +5242,7 @@
           <p:cNvPr id="47" name="">
             <a:extLst xmlns:a="http://schemas.openxmlformats.org/drawingml/2006/main">
               <a:ext uri="{FF2B5EF4-FFF2-40B4-BE49-F238E27FC236}">
-                <a16:creationId xmlns:a16="http://schemas.microsoft.com/office/drawing/2014/main" id="{1D2C9DA9-765E-4DFB-A148-962E12D23CA4}"/>
+                <a16:creationId xmlns:a16="http://schemas.microsoft.com/office/drawing/2014/main" id="{B7CAFE23-EDB6-4043-A38F-0E3BAF258AFA}"/>
               </a:ext>
             </a:extLst>
           </p:cNvPr>
@@ -5294,7 +5294,7 @@
           <p:cNvPr id="48" name="">
             <a:extLst xmlns:a="http://schemas.openxmlformats.org/drawingml/2006/main">
               <a:ext uri="{FF2B5EF4-FFF2-40B4-BE49-F238E27FC236}">
-                <a16:creationId xmlns:a16="http://schemas.microsoft.com/office/drawing/2014/main" id="{A3E5F1FC-37D5-4A70-B3A3-46687DDCB0C5}"/>
+                <a16:creationId xmlns:a16="http://schemas.microsoft.com/office/drawing/2014/main" id="{ADE9A64F-5986-4E27-949A-2E71E6095472}"/>
               </a:ext>
             </a:extLst>
           </p:cNvPr>
@@ -5346,7 +5346,7 @@
           <p:cNvPr id="49" name="">
             <a:extLst xmlns:a="http://schemas.openxmlformats.org/drawingml/2006/main">
               <a:ext uri="{FF2B5EF4-FFF2-40B4-BE49-F238E27FC236}">
-                <a16:creationId xmlns:a16="http://schemas.microsoft.com/office/drawing/2014/main" id="{4E4D4E86-9C84-4013-8D90-3D925D9B54D8}"/>
+                <a16:creationId xmlns:a16="http://schemas.microsoft.com/office/drawing/2014/main" id="{D3975CC0-12BF-4E17-8D33-2F95517BC6A1}"/>
               </a:ext>
             </a:extLst>
           </p:cNvPr>
@@ -5398,7 +5398,7 @@
           <p:cNvPr id="50" name="">
             <a:extLst xmlns:a="http://schemas.openxmlformats.org/drawingml/2006/main">
               <a:ext uri="{FF2B5EF4-FFF2-40B4-BE49-F238E27FC236}">
-                <a16:creationId xmlns:a16="http://schemas.microsoft.com/office/drawing/2014/main" id="{574963B8-3C74-445B-AB4E-E840EE722850}"/>
+                <a16:creationId xmlns:a16="http://schemas.microsoft.com/office/drawing/2014/main" id="{49E9C1AE-6ACA-4A45-B8BF-C590CEF1A7A6}"/>
               </a:ext>
             </a:extLst>
           </p:cNvPr>
@@ -5450,7 +5450,7 @@
           <p:cNvPr id="51" name="">
             <a:extLst xmlns:a="http://schemas.openxmlformats.org/drawingml/2006/main">
               <a:ext uri="{FF2B5EF4-FFF2-40B4-BE49-F238E27FC236}">
-                <a16:creationId xmlns:a16="http://schemas.microsoft.com/office/drawing/2014/main" id="{D213D179-9453-4F4D-A4A0-396D4CD80C7A}"/>
+                <a16:creationId xmlns:a16="http://schemas.microsoft.com/office/drawing/2014/main" id="{9EC101AC-CE2C-4F0C-8069-EFC0B46E2A5A}"/>
               </a:ext>
             </a:extLst>
           </p:cNvPr>
@@ -5481,7 +5481,7 @@
           <p:cNvPr id="52" name="">
             <a:extLst xmlns:a="http://schemas.openxmlformats.org/drawingml/2006/main">
               <a:ext uri="{FF2B5EF4-FFF2-40B4-BE49-F238E27FC236}">
-                <a16:creationId xmlns:a16="http://schemas.microsoft.com/office/drawing/2014/main" id="{41233113-7EEB-44F6-8234-54A508876153}"/>
+                <a16:creationId xmlns:a16="http://schemas.microsoft.com/office/drawing/2014/main" id="{D484CC89-B341-4DAD-A001-D00FABEB51D2}"/>
               </a:ext>
             </a:extLst>
           </p:cNvPr>
@@ -5533,7 +5533,7 @@
           <p:cNvPr id="53" name="">
             <a:extLst xmlns:a="http://schemas.openxmlformats.org/drawingml/2006/main">
               <a:ext uri="{FF2B5EF4-FFF2-40B4-BE49-F238E27FC236}">
-                <a16:creationId xmlns:a16="http://schemas.microsoft.com/office/drawing/2014/main" id="{52B2B491-1864-4A77-BFD8-8F45EBFD683D}"/>
+                <a16:creationId xmlns:a16="http://schemas.microsoft.com/office/drawing/2014/main" id="{75C7DA6D-42F8-4C40-BDD8-68AAEFB17426}"/>
               </a:ext>
             </a:extLst>
           </p:cNvPr>
@@ -5585,7 +5585,7 @@
           <p:cNvPr id="54" name="">
             <a:extLst xmlns:a="http://schemas.openxmlformats.org/drawingml/2006/main">
               <a:ext uri="{FF2B5EF4-FFF2-40B4-BE49-F238E27FC236}">
-                <a16:creationId xmlns:a16="http://schemas.microsoft.com/office/drawing/2014/main" id="{42864152-F6FD-441C-9A1B-706A79670E1E}"/>
+                <a16:creationId xmlns:a16="http://schemas.microsoft.com/office/drawing/2014/main" id="{C05784D3-FA0B-4EDD-9DC5-6BC95EC6511C}"/>
               </a:ext>
             </a:extLst>
           </p:cNvPr>
@@ -5637,7 +5637,7 @@
           <p:cNvPr id="55" name="">
             <a:extLst xmlns:a="http://schemas.openxmlformats.org/drawingml/2006/main">
               <a:ext uri="{FF2B5EF4-FFF2-40B4-BE49-F238E27FC236}">
-                <a16:creationId xmlns:a16="http://schemas.microsoft.com/office/drawing/2014/main" id="{35A3127F-F77D-40C3-BA22-E105DC22E2C4}"/>
+                <a16:creationId xmlns:a16="http://schemas.microsoft.com/office/drawing/2014/main" id="{5727E9D5-2819-4FBC-A2AE-B28CB4C66788}"/>
               </a:ext>
             </a:extLst>
           </p:cNvPr>
@@ -5689,7 +5689,7 @@
           <p:cNvPr id="56" name="">
             <a:extLst xmlns:a="http://schemas.openxmlformats.org/drawingml/2006/main">
               <a:ext uri="{FF2B5EF4-FFF2-40B4-BE49-F238E27FC236}">
-                <a16:creationId xmlns:a16="http://schemas.microsoft.com/office/drawing/2014/main" id="{94100FEE-F7A2-40A0-9957-2462253046C1}"/>
+                <a16:creationId xmlns:a16="http://schemas.microsoft.com/office/drawing/2014/main" id="{9B02C0BB-9C3A-4E16-B40C-56272493B617}"/>
               </a:ext>
             </a:extLst>
           </p:cNvPr>
@@ -5741,7 +5741,7 @@
           <p:cNvPr id="57" name="">
             <a:extLst xmlns:a="http://schemas.openxmlformats.org/drawingml/2006/main">
               <a:ext uri="{FF2B5EF4-FFF2-40B4-BE49-F238E27FC236}">
-                <a16:creationId xmlns:a16="http://schemas.microsoft.com/office/drawing/2014/main" id="{982AEF6D-6E49-4D72-B0CF-77A4E57DE510}"/>
+                <a16:creationId xmlns:a16="http://schemas.microsoft.com/office/drawing/2014/main" id="{AC28673E-55DB-4223-8E23-922B16F6DA82}"/>
               </a:ext>
             </a:extLst>
           </p:cNvPr>
@@ -5772,7 +5772,7 @@
           <p:cNvPr id="58" name="">
             <a:extLst xmlns:a="http://schemas.openxmlformats.org/drawingml/2006/main">
               <a:ext uri="{FF2B5EF4-FFF2-40B4-BE49-F238E27FC236}">
-                <a16:creationId xmlns:a16="http://schemas.microsoft.com/office/drawing/2014/main" id="{234C0059-A2F0-4557-A8E3-20DBF3F4816B}"/>
+                <a16:creationId xmlns:a16="http://schemas.microsoft.com/office/drawing/2014/main" id="{BB1C9871-B262-4DFE-902C-C6C547868CF0}"/>
               </a:ext>
             </a:extLst>
           </p:cNvPr>
@@ -5803,7 +5803,7 @@
           <p:cNvPr id="59" name="">
             <a:extLst xmlns:a="http://schemas.openxmlformats.org/drawingml/2006/main">
               <a:ext uri="{FF2B5EF4-FFF2-40B4-BE49-F238E27FC236}">
-                <a16:creationId xmlns:a16="http://schemas.microsoft.com/office/drawing/2014/main" id="{BC0A3657-14D5-48CD-85A3-80F7FFAD0F26}"/>
+                <a16:creationId xmlns:a16="http://schemas.microsoft.com/office/drawing/2014/main" id="{1E4F7B3E-91C5-40B4-8C73-EB693C86C088}"/>
               </a:ext>
             </a:extLst>
           </p:cNvPr>
@@ -5855,7 +5855,7 @@
           <p:cNvPr id="60" name="">
             <a:extLst xmlns:a="http://schemas.openxmlformats.org/drawingml/2006/main">
               <a:ext uri="{FF2B5EF4-FFF2-40B4-BE49-F238E27FC236}">
-                <a16:creationId xmlns:a16="http://schemas.microsoft.com/office/drawing/2014/main" id="{42F58F8F-8BBF-473F-84E8-104F3B497243}"/>
+                <a16:creationId xmlns:a16="http://schemas.microsoft.com/office/drawing/2014/main" id="{24D2544C-7BA6-4A54-BF08-72DAAA2E8363}"/>
               </a:ext>
             </a:extLst>
           </p:cNvPr>
@@ -5907,7 +5907,7 @@
           <p:cNvPr id="61" name="">
             <a:extLst xmlns:a="http://schemas.openxmlformats.org/drawingml/2006/main">
               <a:ext uri="{FF2B5EF4-FFF2-40B4-BE49-F238E27FC236}">
-                <a16:creationId xmlns:a16="http://schemas.microsoft.com/office/drawing/2014/main" id="{26CEDE65-CB49-4007-9155-300981D7B407}"/>
+                <a16:creationId xmlns:a16="http://schemas.microsoft.com/office/drawing/2014/main" id="{CA53E474-AD78-4837-8293-AE2CAF782661}"/>
               </a:ext>
             </a:extLst>
           </p:cNvPr>
@@ -5959,7 +5959,7 @@
           <p:cNvPr id="62" name="">
             <a:extLst xmlns:a="http://schemas.openxmlformats.org/drawingml/2006/main">
               <a:ext uri="{FF2B5EF4-FFF2-40B4-BE49-F238E27FC236}">
-                <a16:creationId xmlns:a16="http://schemas.microsoft.com/office/drawing/2014/main" id="{66D5B4C2-B5E4-47A3-A4FD-CEF299F4B9A0}"/>
+                <a16:creationId xmlns:a16="http://schemas.microsoft.com/office/drawing/2014/main" id="{9E8D691A-D095-4439-B120-99A5412F7DB9}"/>
               </a:ext>
             </a:extLst>
           </p:cNvPr>
@@ -6011,7 +6011,7 @@
           <p:cNvPr id="63" name="">
             <a:extLst xmlns:a="http://schemas.openxmlformats.org/drawingml/2006/main">
               <a:ext uri="{FF2B5EF4-FFF2-40B4-BE49-F238E27FC236}">
-                <a16:creationId xmlns:a16="http://schemas.microsoft.com/office/drawing/2014/main" id="{763E9C47-0D96-491F-BA81-67095683997C}"/>
+                <a16:creationId xmlns:a16="http://schemas.microsoft.com/office/drawing/2014/main" id="{B1645C68-D0D7-400B-9AFF-C6F913B51923}"/>
               </a:ext>
             </a:extLst>
           </p:cNvPr>
@@ -6063,7 +6063,7 @@
           <p:cNvPr id="64" name="">
             <a:extLst xmlns:a="http://schemas.openxmlformats.org/drawingml/2006/main">
               <a:ext uri="{FF2B5EF4-FFF2-40B4-BE49-F238E27FC236}">
-                <a16:creationId xmlns:a16="http://schemas.microsoft.com/office/drawing/2014/main" id="{22B88B68-DCF6-4CC0-88D2-A5B570E30267}"/>
+                <a16:creationId xmlns:a16="http://schemas.microsoft.com/office/drawing/2014/main" id="{3067A648-E76E-413F-BE08-E8C10E0DD592}"/>
               </a:ext>
             </a:extLst>
           </p:cNvPr>
@@ -6094,7 +6094,7 @@
           <p:cNvPr id="65" name="">
             <a:extLst xmlns:a="http://schemas.openxmlformats.org/drawingml/2006/main">
               <a:ext uri="{FF2B5EF4-FFF2-40B4-BE49-F238E27FC236}">
-                <a16:creationId xmlns:a16="http://schemas.microsoft.com/office/drawing/2014/main" id="{2B141EA5-051F-46C2-BE3A-CFDAD666E3A7}"/>
+                <a16:creationId xmlns:a16="http://schemas.microsoft.com/office/drawing/2014/main" id="{0A0873C7-6DBC-49BE-BD3D-3DE59071D442}"/>
               </a:ext>
             </a:extLst>
           </p:cNvPr>
@@ -6146,7 +6146,7 @@
           <p:cNvPr id="66" name="">
             <a:extLst xmlns:a="http://schemas.openxmlformats.org/drawingml/2006/main">
               <a:ext uri="{FF2B5EF4-FFF2-40B4-BE49-F238E27FC236}">
-                <a16:creationId xmlns:a16="http://schemas.microsoft.com/office/drawing/2014/main" id="{5E074318-DD41-4059-A2AE-0459751EB4E2}"/>
+                <a16:creationId xmlns:a16="http://schemas.microsoft.com/office/drawing/2014/main" id="{70E5D4D6-0995-4E27-AC0D-C73AB83FD964}"/>
               </a:ext>
             </a:extLst>
           </p:cNvPr>
@@ -6198,7 +6198,7 @@
           <p:cNvPr id="67" name="">
             <a:extLst xmlns:a="http://schemas.openxmlformats.org/drawingml/2006/main">
               <a:ext uri="{FF2B5EF4-FFF2-40B4-BE49-F238E27FC236}">
-                <a16:creationId xmlns:a16="http://schemas.microsoft.com/office/drawing/2014/main" id="{E1DDFF28-CE47-4A4A-B20A-A78B4E077124}"/>
+                <a16:creationId xmlns:a16="http://schemas.microsoft.com/office/drawing/2014/main" id="{EC20B7ED-93CE-46E8-9131-B58C8C9112E3}"/>
               </a:ext>
             </a:extLst>
           </p:cNvPr>
@@ -6250,7 +6250,7 @@
           <p:cNvPr id="68" name="">
             <a:extLst xmlns:a="http://schemas.openxmlformats.org/drawingml/2006/main">
               <a:ext uri="{FF2B5EF4-FFF2-40B4-BE49-F238E27FC236}">
-                <a16:creationId xmlns:a16="http://schemas.microsoft.com/office/drawing/2014/main" id="{2B04FC09-8B37-4027-B071-66360F867CA1}"/>
+                <a16:creationId xmlns:a16="http://schemas.microsoft.com/office/drawing/2014/main" id="{1331BD67-6D1F-4CA1-8BAC-6D876B991C31}"/>
               </a:ext>
             </a:extLst>
           </p:cNvPr>
@@ -6302,7 +6302,7 @@
           <p:cNvPr id="69" name="">
             <a:extLst xmlns:a="http://schemas.openxmlformats.org/drawingml/2006/main">
               <a:ext uri="{FF2B5EF4-FFF2-40B4-BE49-F238E27FC236}">
-                <a16:creationId xmlns:a16="http://schemas.microsoft.com/office/drawing/2014/main" id="{5D127B5A-83CD-45C0-8B94-9165027AB5D3}"/>
+                <a16:creationId xmlns:a16="http://schemas.microsoft.com/office/drawing/2014/main" id="{AF63E05A-5849-4090-96AD-FF31E946A8BD}"/>
               </a:ext>
             </a:extLst>
           </p:cNvPr>
@@ -6354,7 +6354,7 @@
           <p:cNvPr id="70" name="">
             <a:extLst xmlns:a="http://schemas.openxmlformats.org/drawingml/2006/main">
               <a:ext uri="{FF2B5EF4-FFF2-40B4-BE49-F238E27FC236}">
-                <a16:creationId xmlns:a16="http://schemas.microsoft.com/office/drawing/2014/main" id="{969B1CD9-79A9-48CD-8547-2B41D5E25FA9}"/>
+                <a16:creationId xmlns:a16="http://schemas.microsoft.com/office/drawing/2014/main" id="{508428F0-98D6-42A0-B857-468EF8188176}"/>
               </a:ext>
             </a:extLst>
           </p:cNvPr>
@@ -6385,7 +6385,7 @@
           <p:cNvPr id="71" name="">
             <a:extLst xmlns:a="http://schemas.openxmlformats.org/drawingml/2006/main">
               <a:ext uri="{FF2B5EF4-FFF2-40B4-BE49-F238E27FC236}">
-                <a16:creationId xmlns:a16="http://schemas.microsoft.com/office/drawing/2014/main" id="{97A51C88-00E6-4F19-BB8A-858434A65529}"/>
+                <a16:creationId xmlns:a16="http://schemas.microsoft.com/office/drawing/2014/main" id="{FF4C74E0-F8B7-4997-8B95-175249A39A5B}"/>
               </a:ext>
             </a:extLst>
           </p:cNvPr>
@@ -6416,7 +6416,7 @@
           <p:cNvPr id="72" name="">
             <a:extLst xmlns:a="http://schemas.openxmlformats.org/drawingml/2006/main">
               <a:ext uri="{FF2B5EF4-FFF2-40B4-BE49-F238E27FC236}">
-                <a16:creationId xmlns:a16="http://schemas.microsoft.com/office/drawing/2014/main" id="{2A1F5D21-2A6E-4A5D-8FBD-B94B06859108}"/>
+                <a16:creationId xmlns:a16="http://schemas.microsoft.com/office/drawing/2014/main" id="{696B4575-E474-4CD3-9287-0DB7EF5E3F56}"/>
               </a:ext>
             </a:extLst>
           </p:cNvPr>
@@ -6468,7 +6468,7 @@
           <p:cNvPr id="73" name="">
             <a:extLst xmlns:a="http://schemas.openxmlformats.org/drawingml/2006/main">
               <a:ext uri="{FF2B5EF4-FFF2-40B4-BE49-F238E27FC236}">
-                <a16:creationId xmlns:a16="http://schemas.microsoft.com/office/drawing/2014/main" id="{A599EBC0-FA95-4DAE-9F7D-83D0685B4EE3}"/>
+                <a16:creationId xmlns:a16="http://schemas.microsoft.com/office/drawing/2014/main" id="{B028BF6E-AEC4-46BE-80EF-22E30DFAA4CE}"/>
               </a:ext>
             </a:extLst>
           </p:cNvPr>
@@ -6520,7 +6520,7 @@
           <p:cNvPr id="74" name="">
             <a:extLst xmlns:a="http://schemas.openxmlformats.org/drawingml/2006/main">
               <a:ext uri="{FF2B5EF4-FFF2-40B4-BE49-F238E27FC236}">
-                <a16:creationId xmlns:a16="http://schemas.microsoft.com/office/drawing/2014/main" id="{40168B07-7C33-40C6-8865-BF7FEA0C9FCB}"/>
+                <a16:creationId xmlns:a16="http://schemas.microsoft.com/office/drawing/2014/main" id="{1DF353F4-C49C-48D0-986F-F5C948029569}"/>
               </a:ext>
             </a:extLst>
           </p:cNvPr>
@@ -6572,7 +6572,7 @@
           <p:cNvPr id="75" name="">
             <a:extLst xmlns:a="http://schemas.openxmlformats.org/drawingml/2006/main">
               <a:ext uri="{FF2B5EF4-FFF2-40B4-BE49-F238E27FC236}">
-                <a16:creationId xmlns:a16="http://schemas.microsoft.com/office/drawing/2014/main" id="{CD179FE1-6CE6-499B-A081-44E7D187D12F}"/>
+                <a16:creationId xmlns:a16="http://schemas.microsoft.com/office/drawing/2014/main" id="{5EF71CA5-0EAA-485E-8167-9B9D4BA08E0C}"/>
               </a:ext>
             </a:extLst>
           </p:cNvPr>
@@ -6624,7 +6624,7 @@
           <p:cNvPr id="76" name="">
             <a:extLst xmlns:a="http://schemas.openxmlformats.org/drawingml/2006/main">
               <a:ext uri="{FF2B5EF4-FFF2-40B4-BE49-F238E27FC236}">
-                <a16:creationId xmlns:a16="http://schemas.microsoft.com/office/drawing/2014/main" id="{743C7654-5CC3-4B8E-8594-008E694B978F}"/>
+                <a16:creationId xmlns:a16="http://schemas.microsoft.com/office/drawing/2014/main" id="{2D9EA1DB-A7CA-4E4C-9E29-0634BEA0BC18}"/>
               </a:ext>
             </a:extLst>
           </p:cNvPr>
@@ -6676,7 +6676,7 @@
           <p:cNvPr id="77" name="">
             <a:extLst xmlns:a="http://schemas.openxmlformats.org/drawingml/2006/main">
               <a:ext uri="{FF2B5EF4-FFF2-40B4-BE49-F238E27FC236}">
-                <a16:creationId xmlns:a16="http://schemas.microsoft.com/office/drawing/2014/main" id="{FDAA60BC-D79B-4768-88C0-47565FCEA4F3}"/>
+                <a16:creationId xmlns:a16="http://schemas.microsoft.com/office/drawing/2014/main" id="{F95909CE-272B-481E-9BBA-489590BA196F}"/>
               </a:ext>
             </a:extLst>
           </p:cNvPr>
@@ -6707,7 +6707,7 @@
           <p:cNvPr id="78" name="">
             <a:extLst xmlns:a="http://schemas.openxmlformats.org/drawingml/2006/main">
               <a:ext uri="{FF2B5EF4-FFF2-40B4-BE49-F238E27FC236}">
-                <a16:creationId xmlns:a16="http://schemas.microsoft.com/office/drawing/2014/main" id="{E4F18F68-1441-408A-9C7A-CF5CF9724DAF}"/>
+                <a16:creationId xmlns:a16="http://schemas.microsoft.com/office/drawing/2014/main" id="{AFC7397F-2FF4-40C3-92E7-EF90B38E366B}"/>
               </a:ext>
             </a:extLst>
           </p:cNvPr>
@@ -6759,7 +6759,7 @@
           <p:cNvPr id="79" name="">
             <a:extLst xmlns:a="http://schemas.openxmlformats.org/drawingml/2006/main">
               <a:ext uri="{FF2B5EF4-FFF2-40B4-BE49-F238E27FC236}">
-                <a16:creationId xmlns:a16="http://schemas.microsoft.com/office/drawing/2014/main" id="{286F846B-1F0D-4646-9B99-73EF11083486}"/>
+                <a16:creationId xmlns:a16="http://schemas.microsoft.com/office/drawing/2014/main" id="{D9E4D396-7148-4972-BBB0-4B54332E5B24}"/>
               </a:ext>
             </a:extLst>
           </p:cNvPr>
@@ -6811,7 +6811,7 @@
           <p:cNvPr id="80" name="">
             <a:extLst xmlns:a="http://schemas.openxmlformats.org/drawingml/2006/main">
               <a:ext uri="{FF2B5EF4-FFF2-40B4-BE49-F238E27FC236}">
-                <a16:creationId xmlns:a16="http://schemas.microsoft.com/office/drawing/2014/main" id="{CC6C383A-021C-4074-8E69-2CDAAC7CB688}"/>
+                <a16:creationId xmlns:a16="http://schemas.microsoft.com/office/drawing/2014/main" id="{3630E3B3-2B1F-4F9E-A5CD-3D147B93B2D1}"/>
               </a:ext>
             </a:extLst>
           </p:cNvPr>
@@ -6863,7 +6863,7 @@
           <p:cNvPr id="81" name="">
             <a:extLst xmlns:a="http://schemas.openxmlformats.org/drawingml/2006/main">
               <a:ext uri="{FF2B5EF4-FFF2-40B4-BE49-F238E27FC236}">
-                <a16:creationId xmlns:a16="http://schemas.microsoft.com/office/drawing/2014/main" id="{20DB018C-572C-48AF-8701-9229051F5A77}"/>
+                <a16:creationId xmlns:a16="http://schemas.microsoft.com/office/drawing/2014/main" id="{4CB10EFA-CBB4-41A1-B207-C2DDAE7145D6}"/>
               </a:ext>
             </a:extLst>
           </p:cNvPr>
@@ -6915,7 +6915,7 @@
           <p:cNvPr id="82" name="">
             <a:extLst xmlns:a="http://schemas.openxmlformats.org/drawingml/2006/main">
               <a:ext uri="{FF2B5EF4-FFF2-40B4-BE49-F238E27FC236}">
-                <a16:creationId xmlns:a16="http://schemas.microsoft.com/office/drawing/2014/main" id="{A70B1D6F-50F1-4914-A0D9-094A230D4DF9}"/>
+                <a16:creationId xmlns:a16="http://schemas.microsoft.com/office/drawing/2014/main" id="{8829B611-8919-4C44-A39A-A73A720B73DF}"/>
               </a:ext>
             </a:extLst>
           </p:cNvPr>
@@ -6967,7 +6967,7 @@
           <p:cNvPr id="83" name="">
             <a:extLst xmlns:a="http://schemas.openxmlformats.org/drawingml/2006/main">
               <a:ext uri="{FF2B5EF4-FFF2-40B4-BE49-F238E27FC236}">
-                <a16:creationId xmlns:a16="http://schemas.microsoft.com/office/drawing/2014/main" id="{DD8663F4-46BB-4A2E-8974-B01309346CFB}"/>
+                <a16:creationId xmlns:a16="http://schemas.microsoft.com/office/drawing/2014/main" id="{1FA1AFA3-5F3C-4595-8C74-27572D88F3C9}"/>
               </a:ext>
             </a:extLst>
           </p:cNvPr>
@@ -6998,7 +6998,7 @@
           <p:cNvPr id="84" name="">
             <a:extLst xmlns:a="http://schemas.openxmlformats.org/drawingml/2006/main">
               <a:ext uri="{FF2B5EF4-FFF2-40B4-BE49-F238E27FC236}">
-                <a16:creationId xmlns:a16="http://schemas.microsoft.com/office/drawing/2014/main" id="{6E3F120B-A3EC-466D-A0E4-5B9B1512DA94}"/>
+                <a16:creationId xmlns:a16="http://schemas.microsoft.com/office/drawing/2014/main" id="{6E43C791-CF8B-40FF-BB0B-B6894AED9EC9}"/>
               </a:ext>
             </a:extLst>
           </p:cNvPr>
@@ -7029,7 +7029,7 @@
           <p:cNvPr id="85" name="">
             <a:extLst xmlns:a="http://schemas.openxmlformats.org/drawingml/2006/main">
               <a:ext uri="{FF2B5EF4-FFF2-40B4-BE49-F238E27FC236}">
-                <a16:creationId xmlns:a16="http://schemas.microsoft.com/office/drawing/2014/main" id="{1EA033C6-291E-4AF2-8321-9CBD24F1C168}"/>
+                <a16:creationId xmlns:a16="http://schemas.microsoft.com/office/drawing/2014/main" id="{8D2B3A9C-1C84-4902-8FC0-83E53889F9E9}"/>
               </a:ext>
             </a:extLst>
           </p:cNvPr>
@@ -7081,7 +7081,7 @@
           <p:cNvPr id="86" name="">
             <a:extLst xmlns:a="http://schemas.openxmlformats.org/drawingml/2006/main">
               <a:ext uri="{FF2B5EF4-FFF2-40B4-BE49-F238E27FC236}">
-                <a16:creationId xmlns:a16="http://schemas.microsoft.com/office/drawing/2014/main" id="{DDDD6C09-E74E-4B86-B44F-8F496D7821FB}"/>
+                <a16:creationId xmlns:a16="http://schemas.microsoft.com/office/drawing/2014/main" id="{CA0F83FE-F718-4941-AA7D-A5CD9E28F1CD}"/>
               </a:ext>
             </a:extLst>
           </p:cNvPr>
@@ -7133,7 +7133,7 @@
           <p:cNvPr id="87" name="">
             <a:extLst xmlns:a="http://schemas.openxmlformats.org/drawingml/2006/main">
               <a:ext uri="{FF2B5EF4-FFF2-40B4-BE49-F238E27FC236}">
-                <a16:creationId xmlns:a16="http://schemas.microsoft.com/office/drawing/2014/main" id="{0750FD40-542A-45D2-8CDB-8E9C1FD68A24}"/>
+                <a16:creationId xmlns:a16="http://schemas.microsoft.com/office/drawing/2014/main" id="{7A60E1AC-6E84-4D27-9E47-458DD73FFAE9}"/>
               </a:ext>
             </a:extLst>
           </p:cNvPr>
@@ -7185,7 +7185,7 @@
           <p:cNvPr id="88" name="">
             <a:extLst xmlns:a="http://schemas.openxmlformats.org/drawingml/2006/main">
               <a:ext uri="{FF2B5EF4-FFF2-40B4-BE49-F238E27FC236}">
-                <a16:creationId xmlns:a16="http://schemas.microsoft.com/office/drawing/2014/main" id="{28AEF847-C393-4325-AE7C-57089D63750D}"/>
+                <a16:creationId xmlns:a16="http://schemas.microsoft.com/office/drawing/2014/main" id="{7A9FF7EA-7E83-498F-BD16-8FF5BB34DEC4}"/>
               </a:ext>
             </a:extLst>
           </p:cNvPr>
@@ -7237,7 +7237,7 @@
           <p:cNvPr id="89" name="">
             <a:extLst xmlns:a="http://schemas.openxmlformats.org/drawingml/2006/main">
               <a:ext uri="{FF2B5EF4-FFF2-40B4-BE49-F238E27FC236}">
-                <a16:creationId xmlns:a16="http://schemas.microsoft.com/office/drawing/2014/main" id="{D4E1B8BF-6014-41C8-B1A3-9657BB325745}"/>
+                <a16:creationId xmlns:a16="http://schemas.microsoft.com/office/drawing/2014/main" id="{F98E846E-72FD-49AA-9239-DF4B8211B32E}"/>
               </a:ext>
             </a:extLst>
           </p:cNvPr>
@@ -7289,7 +7289,7 @@
           <p:cNvPr id="90" name="">
             <a:extLst xmlns:a="http://schemas.openxmlformats.org/drawingml/2006/main">
               <a:ext uri="{FF2B5EF4-FFF2-40B4-BE49-F238E27FC236}">
-                <a16:creationId xmlns:a16="http://schemas.microsoft.com/office/drawing/2014/main" id="{E92FD977-5550-4868-BB5E-3723A33A1EEE}"/>
+                <a16:creationId xmlns:a16="http://schemas.microsoft.com/office/drawing/2014/main" id="{386BA219-E22B-420E-8D2E-B0305520EC63}"/>
               </a:ext>
             </a:extLst>
           </p:cNvPr>
@@ -7320,7 +7320,7 @@
           <p:cNvPr id="91" name="">
             <a:extLst xmlns:a="http://schemas.openxmlformats.org/drawingml/2006/main">
               <a:ext uri="{FF2B5EF4-FFF2-40B4-BE49-F238E27FC236}">
-                <a16:creationId xmlns:a16="http://schemas.microsoft.com/office/drawing/2014/main" id="{DCD412AE-A802-4425-99BF-630A24C94D27}"/>
+                <a16:creationId xmlns:a16="http://schemas.microsoft.com/office/drawing/2014/main" id="{0C0F27FC-E224-4587-B443-7AD08C2148CC}"/>
               </a:ext>
             </a:extLst>
           </p:cNvPr>
@@ -7372,7 +7372,7 @@
           <p:cNvPr id="92" name="">
             <a:extLst xmlns:a="http://schemas.openxmlformats.org/drawingml/2006/main">
               <a:ext uri="{FF2B5EF4-FFF2-40B4-BE49-F238E27FC236}">
-                <a16:creationId xmlns:a16="http://schemas.microsoft.com/office/drawing/2014/main" id="{368DEA30-603E-4D1E-8BD0-ABBBFB3C8710}"/>
+                <a16:creationId xmlns:a16="http://schemas.microsoft.com/office/drawing/2014/main" id="{8744C9F9-711D-44B2-8EF8-8CB6177F1CEB}"/>
               </a:ext>
             </a:extLst>
           </p:cNvPr>
@@ -7424,7 +7424,7 @@
           <p:cNvPr id="93" name="">
             <a:extLst xmlns:a="http://schemas.openxmlformats.org/drawingml/2006/main">
               <a:ext uri="{FF2B5EF4-FFF2-40B4-BE49-F238E27FC236}">
-                <a16:creationId xmlns:a16="http://schemas.microsoft.com/office/drawing/2014/main" id="{6D9BEC03-6215-472F-B9FF-A88E29072F49}"/>
+                <a16:creationId xmlns:a16="http://schemas.microsoft.com/office/drawing/2014/main" id="{5B03D346-1A5C-41C4-BCA8-6FD6C6E29A77}"/>
               </a:ext>
             </a:extLst>
           </p:cNvPr>
@@ -7476,7 +7476,7 @@
           <p:cNvPr id="94" name="">
             <a:extLst xmlns:a="http://schemas.openxmlformats.org/drawingml/2006/main">
               <a:ext uri="{FF2B5EF4-FFF2-40B4-BE49-F238E27FC236}">
-                <a16:creationId xmlns:a16="http://schemas.microsoft.com/office/drawing/2014/main" id="{F93AF1BD-0A50-4B97-B547-90D98FCCF798}"/>
+                <a16:creationId xmlns:a16="http://schemas.microsoft.com/office/drawing/2014/main" id="{43DAEB2D-4A1A-4426-A288-716AB3218E3F}"/>
               </a:ext>
             </a:extLst>
           </p:cNvPr>
@@ -7528,7 +7528,7 @@
           <p:cNvPr id="95" name="">
             <a:extLst xmlns:a="http://schemas.openxmlformats.org/drawingml/2006/main">
               <a:ext uri="{FF2B5EF4-FFF2-40B4-BE49-F238E27FC236}">
-                <a16:creationId xmlns:a16="http://schemas.microsoft.com/office/drawing/2014/main" id="{4BC46AED-CA43-468A-85EB-2B3661A742DA}"/>
+                <a16:creationId xmlns:a16="http://schemas.microsoft.com/office/drawing/2014/main" id="{6164B7D2-86F7-44A7-B31A-C607B79F6DA2}"/>
               </a:ext>
             </a:extLst>
           </p:cNvPr>
@@ -7580,7 +7580,7 @@
           <p:cNvPr id="96" name="">
             <a:extLst xmlns:a="http://schemas.openxmlformats.org/drawingml/2006/main">
               <a:ext uri="{FF2B5EF4-FFF2-40B4-BE49-F238E27FC236}">
-                <a16:creationId xmlns:a16="http://schemas.microsoft.com/office/drawing/2014/main" id="{627C1A29-8741-4BF5-B8BF-5F30871FBD72}"/>
+                <a16:creationId xmlns:a16="http://schemas.microsoft.com/office/drawing/2014/main" id="{5BE09432-C6E3-461B-B211-9992618BFE5F}"/>
               </a:ext>
             </a:extLst>
           </p:cNvPr>
@@ -7611,7 +7611,7 @@
           <p:cNvPr id="97" name="">
             <a:extLst xmlns:a="http://schemas.openxmlformats.org/drawingml/2006/main">
               <a:ext uri="{FF2B5EF4-FFF2-40B4-BE49-F238E27FC236}">
-                <a16:creationId xmlns:a16="http://schemas.microsoft.com/office/drawing/2014/main" id="{6E775A3A-6F14-4D2D-B1F2-35425919C9B7}"/>
+                <a16:creationId xmlns:a16="http://schemas.microsoft.com/office/drawing/2014/main" id="{4C376752-C4D3-4853-A5CB-615210B62F19}"/>
               </a:ext>
             </a:extLst>
           </p:cNvPr>
@@ -7642,7 +7642,7 @@
           <p:cNvPr id="98" name="">
             <a:extLst xmlns:a="http://schemas.openxmlformats.org/drawingml/2006/main">
               <a:ext uri="{FF2B5EF4-FFF2-40B4-BE49-F238E27FC236}">
-                <a16:creationId xmlns:a16="http://schemas.microsoft.com/office/drawing/2014/main" id="{3121F67F-B1EC-41B4-A2B5-5D431523BA33}"/>
+                <a16:creationId xmlns:a16="http://schemas.microsoft.com/office/drawing/2014/main" id="{6B9329E1-E8F2-4F4D-B189-C42D410E140B}"/>
               </a:ext>
             </a:extLst>
           </p:cNvPr>
@@ -7694,7 +7694,7 @@
           <p:cNvPr id="99" name="">
             <a:extLst xmlns:a="http://schemas.openxmlformats.org/drawingml/2006/main">
               <a:ext uri="{FF2B5EF4-FFF2-40B4-BE49-F238E27FC236}">
-                <a16:creationId xmlns:a16="http://schemas.microsoft.com/office/drawing/2014/main" id="{79382D70-4C1B-4237-8BD4-A079E4EE8121}"/>
+                <a16:creationId xmlns:a16="http://schemas.microsoft.com/office/drawing/2014/main" id="{7D465A6A-902F-47C5-B828-6B7FA93F5268}"/>
               </a:ext>
             </a:extLst>
           </p:cNvPr>
@@ -7746,7 +7746,7 @@
           <p:cNvPr id="100" name="">
             <a:extLst xmlns:a="http://schemas.openxmlformats.org/drawingml/2006/main">
               <a:ext uri="{FF2B5EF4-FFF2-40B4-BE49-F238E27FC236}">
-                <a16:creationId xmlns:a16="http://schemas.microsoft.com/office/drawing/2014/main" id="{3ADE5962-77A4-43C5-AD06-CFF70A65E278}"/>
+                <a16:creationId xmlns:a16="http://schemas.microsoft.com/office/drawing/2014/main" id="{172EDF39-1BB4-4B80-A39F-8DB5DC1B1CBE}"/>
               </a:ext>
             </a:extLst>
           </p:cNvPr>
@@ -7798,7 +7798,7 @@
           <p:cNvPr id="101" name="">
             <a:extLst xmlns:a="http://schemas.openxmlformats.org/drawingml/2006/main">
               <a:ext uri="{FF2B5EF4-FFF2-40B4-BE49-F238E27FC236}">
-                <a16:creationId xmlns:a16="http://schemas.microsoft.com/office/drawing/2014/main" id="{09EC8078-5C7F-48CD-B3C0-CC6CC46DBDC3}"/>
+                <a16:creationId xmlns:a16="http://schemas.microsoft.com/office/drawing/2014/main" id="{D9905C73-98DD-44BD-849F-BA1320DD79D0}"/>
               </a:ext>
             </a:extLst>
           </p:cNvPr>
@@ -7850,7 +7850,7 @@
           <p:cNvPr id="102" name="">
             <a:extLst xmlns:a="http://schemas.openxmlformats.org/drawingml/2006/main">
               <a:ext uri="{FF2B5EF4-FFF2-40B4-BE49-F238E27FC236}">
-                <a16:creationId xmlns:a16="http://schemas.microsoft.com/office/drawing/2014/main" id="{C6D3EB53-6E22-4BAA-8BB4-F59AF158DE91}"/>
+                <a16:creationId xmlns:a16="http://schemas.microsoft.com/office/drawing/2014/main" id="{BA0C9EFE-751B-4BBE-9461-B7FFAEC8A666}"/>
               </a:ext>
             </a:extLst>
           </p:cNvPr>
@@ -7900,7 +7900,7 @@
     </p:spTree>
     <p:extLst>
       <p:ext uri="{BB962C8B-B14F-4D97-AF65-F5344CB8AC3E}">
-        <p14:creationId xmlns:p14="http://schemas.microsoft.com/office/powerpoint/2010/main" val="925141761"/>
+        <p14:creationId xmlns:p14="http://schemas.microsoft.com/office/powerpoint/2010/main" val="1083264396"/>
       </p:ext>
     </p:extLst>
   </p:cSld>
@@ -7931,7 +7931,7 @@
           <p:cNvPr id="98" name="">
             <a:extLst xmlns:a="http://schemas.openxmlformats.org/drawingml/2006/main">
               <a:ext uri="{FF2B5EF4-FFF2-40B4-BE49-F238E27FC236}">
-                <a16:creationId xmlns:a16="http://schemas.microsoft.com/office/drawing/2014/main" id="{2E516150-6B0E-4206-9626-AC2E6C6259BA}"/>
+                <a16:creationId xmlns:a16="http://schemas.microsoft.com/office/drawing/2014/main" id="{CD9F9F61-1021-4E47-B0B6-CE31CE63CA0F}"/>
               </a:ext>
             </a:extLst>
           </p:cNvPr>
@@ -7964,7 +7964,7 @@
           <p:cNvPr id="2" name="">
             <a:extLst xmlns:a="http://schemas.openxmlformats.org/drawingml/2006/main">
               <a:ext uri="{FF2B5EF4-FFF2-40B4-BE49-F238E27FC236}">
-                <a16:creationId xmlns:a16="http://schemas.microsoft.com/office/drawing/2014/main" id="{A10DCAAF-3B25-41BD-9690-AB6E7AD3C3D2}"/>
+                <a16:creationId xmlns:a16="http://schemas.microsoft.com/office/drawing/2014/main" id="{AC12626B-EEA7-4815-9966-26CB2A80AF06}"/>
               </a:ext>
             </a:extLst>
           </p:cNvPr>
@@ -7995,7 +7995,7 @@
           <p:cNvPr id="3" name="">
             <a:extLst xmlns:a="http://schemas.openxmlformats.org/drawingml/2006/main">
               <a:ext uri="{FF2B5EF4-FFF2-40B4-BE49-F238E27FC236}">
-                <a16:creationId xmlns:a16="http://schemas.microsoft.com/office/drawing/2014/main" id="{B4C6FE15-5DA2-479B-8EB1-8A3A0C4D609B}"/>
+                <a16:creationId xmlns:a16="http://schemas.microsoft.com/office/drawing/2014/main" id="{2EC1805F-71D1-4CA3-BFAD-6E76C8A3B8E7}"/>
               </a:ext>
             </a:extLst>
           </p:cNvPr>
@@ -8047,7 +8047,7 @@
           <p:cNvPr id="4" name="">
             <a:extLst xmlns:a="http://schemas.openxmlformats.org/drawingml/2006/main">
               <a:ext uri="{FF2B5EF4-FFF2-40B4-BE49-F238E27FC236}">
-                <a16:creationId xmlns:a16="http://schemas.microsoft.com/office/drawing/2014/main" id="{4D4604E1-5F35-4EAF-B1C0-DA437745BF0B}"/>
+                <a16:creationId xmlns:a16="http://schemas.microsoft.com/office/drawing/2014/main" id="{DD602E84-EE55-4F6E-B270-614D924A6100}"/>
               </a:ext>
             </a:extLst>
           </p:cNvPr>
@@ -8099,7 +8099,7 @@
           <p:cNvPr id="5" name="">
             <a:extLst xmlns:a="http://schemas.openxmlformats.org/drawingml/2006/main">
               <a:ext uri="{FF2B5EF4-FFF2-40B4-BE49-F238E27FC236}">
-                <a16:creationId xmlns:a16="http://schemas.microsoft.com/office/drawing/2014/main" id="{CD6EBFD0-A3E1-4A69-A287-230CB55A4D01}"/>
+                <a16:creationId xmlns:a16="http://schemas.microsoft.com/office/drawing/2014/main" id="{D8D6A880-FA25-42C9-A6DE-764596F8342D}"/>
               </a:ext>
             </a:extLst>
           </p:cNvPr>
@@ -8134,7 +8134,7 @@
           <p:nvPr/>
         </p:nvPicPr>
         <p:blipFill>
-          <a:blip xmlns:r="http://schemas.openxmlformats.org/officeDocument/2006/relationships" xmlns:a="http://schemas.openxmlformats.org/drawingml/2006/main" r:embed="Re7d54d15a7d34bba"/>
+          <a:blip xmlns:r="http://schemas.openxmlformats.org/officeDocument/2006/relationships" xmlns:a="http://schemas.openxmlformats.org/drawingml/2006/main" r:embed="R84fd9668c44b4ba7"/>
           <a:stretch xmlns:a="http://schemas.openxmlformats.org/drawingml/2006/main"/>
         </p:blipFill>
         <p:spPr>
@@ -8152,7 +8152,7 @@
           <p:cNvPr id="7" name="">
             <a:extLst xmlns:a="http://schemas.openxmlformats.org/drawingml/2006/main">
               <a:ext uri="{FF2B5EF4-FFF2-40B4-BE49-F238E27FC236}">
-                <a16:creationId xmlns:a16="http://schemas.microsoft.com/office/drawing/2014/main" id="{4985ECF1-DABE-4228-B02C-12EA98D2EE78}"/>
+                <a16:creationId xmlns:a16="http://schemas.microsoft.com/office/drawing/2014/main" id="{0E046669-0200-455F-B2EA-748C7FB3103F}"/>
               </a:ext>
             </a:extLst>
           </p:cNvPr>
@@ -8204,7 +8204,7 @@
           <p:cNvPr id="8" name="">
             <a:extLst xmlns:a="http://schemas.openxmlformats.org/drawingml/2006/main">
               <a:ext uri="{FF2B5EF4-FFF2-40B4-BE49-F238E27FC236}">
-                <a16:creationId xmlns:a16="http://schemas.microsoft.com/office/drawing/2014/main" id="{A18A55AB-61F4-4FD4-ACF6-87AF051A56C8}"/>
+                <a16:creationId xmlns:a16="http://schemas.microsoft.com/office/drawing/2014/main" id="{96D3DF5F-D651-4A4E-9CC3-C1B478996A8C}"/>
               </a:ext>
             </a:extLst>
           </p:cNvPr>
@@ -8256,7 +8256,7 @@
           <p:cNvPr id="9" name="">
             <a:extLst xmlns:a="http://schemas.openxmlformats.org/drawingml/2006/main">
               <a:ext uri="{FF2B5EF4-FFF2-40B4-BE49-F238E27FC236}">
-                <a16:creationId xmlns:a16="http://schemas.microsoft.com/office/drawing/2014/main" id="{BB9D6F51-B359-486C-8211-0C01333B0BDE}"/>
+                <a16:creationId xmlns:a16="http://schemas.microsoft.com/office/drawing/2014/main" id="{896A592B-6F17-4DB1-BCBF-B89FDD3D5213}"/>
               </a:ext>
             </a:extLst>
           </p:cNvPr>
@@ -8308,7 +8308,7 @@
           <p:cNvPr id="10" name="">
             <a:extLst xmlns:a="http://schemas.openxmlformats.org/drawingml/2006/main">
               <a:ext uri="{FF2B5EF4-FFF2-40B4-BE49-F238E27FC236}">
-                <a16:creationId xmlns:a16="http://schemas.microsoft.com/office/drawing/2014/main" id="{B2B86C24-E2A1-4882-BFB2-1162D63DCE0A}"/>
+                <a16:creationId xmlns:a16="http://schemas.microsoft.com/office/drawing/2014/main" id="{8765B67A-79C5-4730-8B12-5D7151135F3F}"/>
               </a:ext>
             </a:extLst>
           </p:cNvPr>
@@ -8360,7 +8360,7 @@
           <p:cNvPr id="11" name="">
             <a:extLst xmlns:a="http://schemas.openxmlformats.org/drawingml/2006/main">
               <a:ext uri="{FF2B5EF4-FFF2-40B4-BE49-F238E27FC236}">
-                <a16:creationId xmlns:a16="http://schemas.microsoft.com/office/drawing/2014/main" id="{23F709B8-96CF-40F2-95E8-3BD23C2A9CF0}"/>
+                <a16:creationId xmlns:a16="http://schemas.microsoft.com/office/drawing/2014/main" id="{15C3712E-4728-4287-88F8-9B69A44820AA}"/>
               </a:ext>
             </a:extLst>
           </p:cNvPr>
@@ -8391,7 +8391,7 @@
           <p:cNvPr id="12" name="">
             <a:extLst xmlns:a="http://schemas.openxmlformats.org/drawingml/2006/main">
               <a:ext uri="{FF2B5EF4-FFF2-40B4-BE49-F238E27FC236}">
-                <a16:creationId xmlns:a16="http://schemas.microsoft.com/office/drawing/2014/main" id="{B8D6EC7D-43E7-4314-9B17-5C57AD62DB78}"/>
+                <a16:creationId xmlns:a16="http://schemas.microsoft.com/office/drawing/2014/main" id="{CECEDF59-FA82-4D16-973C-C682AC936335}"/>
               </a:ext>
             </a:extLst>
           </p:cNvPr>
@@ -8422,7 +8422,7 @@
           <p:cNvPr id="13" name="">
             <a:extLst xmlns:a="http://schemas.openxmlformats.org/drawingml/2006/main">
               <a:ext uri="{FF2B5EF4-FFF2-40B4-BE49-F238E27FC236}">
-                <a16:creationId xmlns:a16="http://schemas.microsoft.com/office/drawing/2014/main" id="{78017ED9-EE05-4FF9-BEE3-C9B4DE61C05F}"/>
+                <a16:creationId xmlns:a16="http://schemas.microsoft.com/office/drawing/2014/main" id="{22EA64BE-FAB1-414E-BBC3-169DDAB3C6AB}"/>
               </a:ext>
             </a:extLst>
           </p:cNvPr>
@@ -8474,7 +8474,7 @@
           <p:cNvPr id="14" name="">
             <a:extLst xmlns:a="http://schemas.openxmlformats.org/drawingml/2006/main">
               <a:ext uri="{FF2B5EF4-FFF2-40B4-BE49-F238E27FC236}">
-                <a16:creationId xmlns:a16="http://schemas.microsoft.com/office/drawing/2014/main" id="{25B9524B-B3DB-4F14-95BA-B37909C2906A}"/>
+                <a16:creationId xmlns:a16="http://schemas.microsoft.com/office/drawing/2014/main" id="{B5043A47-3401-4FE3-9A3B-E926F821BBD8}"/>
               </a:ext>
             </a:extLst>
           </p:cNvPr>
@@ -8526,7 +8526,7 @@
           <p:cNvPr id="15" name="">
             <a:extLst xmlns:a="http://schemas.openxmlformats.org/drawingml/2006/main">
               <a:ext uri="{FF2B5EF4-FFF2-40B4-BE49-F238E27FC236}">
-                <a16:creationId xmlns:a16="http://schemas.microsoft.com/office/drawing/2014/main" id="{5A1B1592-B3A7-4177-A789-B59A4F73FCE5}"/>
+                <a16:creationId xmlns:a16="http://schemas.microsoft.com/office/drawing/2014/main" id="{03E9AADA-F68C-4906-A69B-FAD68AA9BE70}"/>
               </a:ext>
             </a:extLst>
           </p:cNvPr>
@@ -8578,7 +8578,7 @@
           <p:cNvPr id="16" name="">
             <a:extLst xmlns:a="http://schemas.openxmlformats.org/drawingml/2006/main">
               <a:ext uri="{FF2B5EF4-FFF2-40B4-BE49-F238E27FC236}">
-                <a16:creationId xmlns:a16="http://schemas.microsoft.com/office/drawing/2014/main" id="{605F2C6C-5043-4456-9155-B636B6868F94}"/>
+                <a16:creationId xmlns:a16="http://schemas.microsoft.com/office/drawing/2014/main" id="{48044C37-5C89-43CA-81F0-BEFB94E1FBFB}"/>
               </a:ext>
             </a:extLst>
           </p:cNvPr>
@@ -8630,7 +8630,7 @@
           <p:cNvPr id="17" name="">
             <a:extLst xmlns:a="http://schemas.openxmlformats.org/drawingml/2006/main">
               <a:ext uri="{FF2B5EF4-FFF2-40B4-BE49-F238E27FC236}">
-                <a16:creationId xmlns:a16="http://schemas.microsoft.com/office/drawing/2014/main" id="{0D189D5E-0F92-4BED-BF24-E0D1E6BF4C43}"/>
+                <a16:creationId xmlns:a16="http://schemas.microsoft.com/office/drawing/2014/main" id="{5605E13B-F3AC-4DFA-8FBF-7E6B342E4D92}"/>
               </a:ext>
             </a:extLst>
           </p:cNvPr>
@@ -8682,7 +8682,7 @@
           <p:cNvPr id="18" name="">
             <a:extLst xmlns:a="http://schemas.openxmlformats.org/drawingml/2006/main">
               <a:ext uri="{FF2B5EF4-FFF2-40B4-BE49-F238E27FC236}">
-                <a16:creationId xmlns:a16="http://schemas.microsoft.com/office/drawing/2014/main" id="{C44E5433-6A72-4967-8009-D5FFF57E03CE}"/>
+                <a16:creationId xmlns:a16="http://schemas.microsoft.com/office/drawing/2014/main" id="{D437C7BE-8D83-4FF4-8EC6-CB590487BDCB}"/>
               </a:ext>
             </a:extLst>
           </p:cNvPr>
@@ -8713,7 +8713,7 @@
           <p:cNvPr id="19" name="">
             <a:extLst xmlns:a="http://schemas.openxmlformats.org/drawingml/2006/main">
               <a:ext uri="{FF2B5EF4-FFF2-40B4-BE49-F238E27FC236}">
-                <a16:creationId xmlns:a16="http://schemas.microsoft.com/office/drawing/2014/main" id="{226D5980-55F5-473D-ABD4-D470098641A7}"/>
+                <a16:creationId xmlns:a16="http://schemas.microsoft.com/office/drawing/2014/main" id="{CB84B363-33CD-4220-82EE-D9958EF17B69}"/>
               </a:ext>
             </a:extLst>
           </p:cNvPr>
@@ -8765,7 +8765,7 @@
           <p:cNvPr id="20" name="">
             <a:extLst xmlns:a="http://schemas.openxmlformats.org/drawingml/2006/main">
               <a:ext uri="{FF2B5EF4-FFF2-40B4-BE49-F238E27FC236}">
-                <a16:creationId xmlns:a16="http://schemas.microsoft.com/office/drawing/2014/main" id="{DC143886-9190-41B7-8AE3-B26AF52C8DCD}"/>
+                <a16:creationId xmlns:a16="http://schemas.microsoft.com/office/drawing/2014/main" id="{E5BA5DCB-410B-4D75-A5B8-253069DEFF52}"/>
               </a:ext>
             </a:extLst>
           </p:cNvPr>
@@ -8817,7 +8817,7 @@
           <p:cNvPr id="21" name="">
             <a:extLst xmlns:a="http://schemas.openxmlformats.org/drawingml/2006/main">
               <a:ext uri="{FF2B5EF4-FFF2-40B4-BE49-F238E27FC236}">
-                <a16:creationId xmlns:a16="http://schemas.microsoft.com/office/drawing/2014/main" id="{6D7EC182-8C78-482C-84E2-578F738ED217}"/>
+                <a16:creationId xmlns:a16="http://schemas.microsoft.com/office/drawing/2014/main" id="{67956D5E-1185-4553-9D5C-B088E7770DF7}"/>
               </a:ext>
             </a:extLst>
           </p:cNvPr>
@@ -8869,7 +8869,7 @@
           <p:cNvPr id="22" name="">
             <a:extLst xmlns:a="http://schemas.openxmlformats.org/drawingml/2006/main">
               <a:ext uri="{FF2B5EF4-FFF2-40B4-BE49-F238E27FC236}">
-                <a16:creationId xmlns:a16="http://schemas.microsoft.com/office/drawing/2014/main" id="{4F556EB9-E48E-4AFA-BEF4-2345904FA052}"/>
+                <a16:creationId xmlns:a16="http://schemas.microsoft.com/office/drawing/2014/main" id="{3761AB42-9528-424C-ADE9-A20FC7CC8B50}"/>
               </a:ext>
             </a:extLst>
           </p:cNvPr>
@@ -8921,7 +8921,7 @@
           <p:cNvPr id="23" name="">
             <a:extLst xmlns:a="http://schemas.openxmlformats.org/drawingml/2006/main">
               <a:ext uri="{FF2B5EF4-FFF2-40B4-BE49-F238E27FC236}">
-                <a16:creationId xmlns:a16="http://schemas.microsoft.com/office/drawing/2014/main" id="{8314A9C7-0649-41CB-B0CE-0A529F19358D}"/>
+                <a16:creationId xmlns:a16="http://schemas.microsoft.com/office/drawing/2014/main" id="{9D2F2B8F-7C29-437C-BF2F-E8FE778A1CBA}"/>
               </a:ext>
             </a:extLst>
           </p:cNvPr>
@@ -8973,7 +8973,7 @@
           <p:cNvPr id="24" name="">
             <a:extLst xmlns:a="http://schemas.openxmlformats.org/drawingml/2006/main">
               <a:ext uri="{FF2B5EF4-FFF2-40B4-BE49-F238E27FC236}">
-                <a16:creationId xmlns:a16="http://schemas.microsoft.com/office/drawing/2014/main" id="{E6021989-E319-4215-9571-1A7B174378A4}"/>
+                <a16:creationId xmlns:a16="http://schemas.microsoft.com/office/drawing/2014/main" id="{11D80ED6-8F93-4CCB-A9EA-DEBC1E3B71D2}"/>
               </a:ext>
             </a:extLst>
           </p:cNvPr>
@@ -9004,7 +9004,7 @@
           <p:cNvPr id="25" name="">
             <a:extLst xmlns:a="http://schemas.openxmlformats.org/drawingml/2006/main">
               <a:ext uri="{FF2B5EF4-FFF2-40B4-BE49-F238E27FC236}">
-                <a16:creationId xmlns:a16="http://schemas.microsoft.com/office/drawing/2014/main" id="{CCAD155C-9E7E-4750-A161-96699E9308BA}"/>
+                <a16:creationId xmlns:a16="http://schemas.microsoft.com/office/drawing/2014/main" id="{15BF5BFE-A70D-4FEF-91B8-3811C6778C72}"/>
               </a:ext>
             </a:extLst>
           </p:cNvPr>
@@ -9035,7 +9035,7 @@
           <p:cNvPr id="26" name="">
             <a:extLst xmlns:a="http://schemas.openxmlformats.org/drawingml/2006/main">
               <a:ext uri="{FF2B5EF4-FFF2-40B4-BE49-F238E27FC236}">
-                <a16:creationId xmlns:a16="http://schemas.microsoft.com/office/drawing/2014/main" id="{D604AFAE-1723-48B7-9899-7AE032DFECD8}"/>
+                <a16:creationId xmlns:a16="http://schemas.microsoft.com/office/drawing/2014/main" id="{7414238D-C131-4944-BFF6-23D4F2075378}"/>
               </a:ext>
             </a:extLst>
           </p:cNvPr>
@@ -9087,7 +9087,7 @@
           <p:cNvPr id="27" name="">
             <a:extLst xmlns:a="http://schemas.openxmlformats.org/drawingml/2006/main">
               <a:ext uri="{FF2B5EF4-FFF2-40B4-BE49-F238E27FC236}">
-                <a16:creationId xmlns:a16="http://schemas.microsoft.com/office/drawing/2014/main" id="{8B2BC66E-CAA3-4D9D-845C-0CE2DF215F82}"/>
+                <a16:creationId xmlns:a16="http://schemas.microsoft.com/office/drawing/2014/main" id="{4F1C8E17-B5A3-4789-8B48-854C2B453DBF}"/>
               </a:ext>
             </a:extLst>
           </p:cNvPr>
@@ -9139,7 +9139,7 @@
           <p:cNvPr id="28" name="">
             <a:extLst xmlns:a="http://schemas.openxmlformats.org/drawingml/2006/main">
               <a:ext uri="{FF2B5EF4-FFF2-40B4-BE49-F238E27FC236}">
-                <a16:creationId xmlns:a16="http://schemas.microsoft.com/office/drawing/2014/main" id="{888DD065-C9F2-401E-A33F-6526995A80D5}"/>
+                <a16:creationId xmlns:a16="http://schemas.microsoft.com/office/drawing/2014/main" id="{953A8D84-FBD2-4E83-AD38-4AB0DA60EAFE}"/>
               </a:ext>
             </a:extLst>
           </p:cNvPr>
@@ -9191,7 +9191,7 @@
           <p:cNvPr id="29" name="">
             <a:extLst xmlns:a="http://schemas.openxmlformats.org/drawingml/2006/main">
               <a:ext uri="{FF2B5EF4-FFF2-40B4-BE49-F238E27FC236}">
-                <a16:creationId xmlns:a16="http://schemas.microsoft.com/office/drawing/2014/main" id="{47C7FC04-719A-4472-96A5-D9D87F5BEB7E}"/>
+                <a16:creationId xmlns:a16="http://schemas.microsoft.com/office/drawing/2014/main" id="{1A96E7F8-8972-40AB-B6BB-42CC333D71DF}"/>
               </a:ext>
             </a:extLst>
           </p:cNvPr>
@@ -9243,7 +9243,7 @@
           <p:cNvPr id="30" name="">
             <a:extLst xmlns:a="http://schemas.openxmlformats.org/drawingml/2006/main">
               <a:ext uri="{FF2B5EF4-FFF2-40B4-BE49-F238E27FC236}">
-                <a16:creationId xmlns:a16="http://schemas.microsoft.com/office/drawing/2014/main" id="{901F2AC0-A877-476B-B671-ECA8DE7DA55E}"/>
+                <a16:creationId xmlns:a16="http://schemas.microsoft.com/office/drawing/2014/main" id="{EFF6A71B-428A-4BE1-A082-D5482A30D287}"/>
               </a:ext>
             </a:extLst>
           </p:cNvPr>
@@ -9295,7 +9295,7 @@
           <p:cNvPr id="31" name="">
             <a:extLst xmlns:a="http://schemas.openxmlformats.org/drawingml/2006/main">
               <a:ext uri="{FF2B5EF4-FFF2-40B4-BE49-F238E27FC236}">
-                <a16:creationId xmlns:a16="http://schemas.microsoft.com/office/drawing/2014/main" id="{1B1999BA-C2AC-4C04-8F01-69948FA430BD}"/>
+                <a16:creationId xmlns:a16="http://schemas.microsoft.com/office/drawing/2014/main" id="{715F675B-2973-4371-BFA8-A23395689115}"/>
               </a:ext>
             </a:extLst>
           </p:cNvPr>
@@ -9326,7 +9326,7 @@
           <p:cNvPr id="32" name="">
             <a:extLst xmlns:a="http://schemas.openxmlformats.org/drawingml/2006/main">
               <a:ext uri="{FF2B5EF4-FFF2-40B4-BE49-F238E27FC236}">
-                <a16:creationId xmlns:a16="http://schemas.microsoft.com/office/drawing/2014/main" id="{CE70D656-8352-454E-9126-C8124577589E}"/>
+                <a16:creationId xmlns:a16="http://schemas.microsoft.com/office/drawing/2014/main" id="{B85957FE-2E7D-4845-9DCA-6B3F93EA4A39}"/>
               </a:ext>
             </a:extLst>
           </p:cNvPr>
@@ -9378,7 +9378,7 @@
           <p:cNvPr id="33" name="">
             <a:extLst xmlns:a="http://schemas.openxmlformats.org/drawingml/2006/main">
               <a:ext uri="{FF2B5EF4-FFF2-40B4-BE49-F238E27FC236}">
-                <a16:creationId xmlns:a16="http://schemas.microsoft.com/office/drawing/2014/main" id="{105D01DF-8365-4510-B755-32CD57B13B7A}"/>
+                <a16:creationId xmlns:a16="http://schemas.microsoft.com/office/drawing/2014/main" id="{157E5B12-1E72-45B0-8DA3-028016D74E73}"/>
               </a:ext>
             </a:extLst>
           </p:cNvPr>
@@ -9430,7 +9430,7 @@
           <p:cNvPr id="34" name="">
             <a:extLst xmlns:a="http://schemas.openxmlformats.org/drawingml/2006/main">
               <a:ext uri="{FF2B5EF4-FFF2-40B4-BE49-F238E27FC236}">
-                <a16:creationId xmlns:a16="http://schemas.microsoft.com/office/drawing/2014/main" id="{75390A3B-1F95-472D-A32E-3C87DA14197C}"/>
+                <a16:creationId xmlns:a16="http://schemas.microsoft.com/office/drawing/2014/main" id="{5CAB2AC9-6DDC-4C17-A5F4-D3C8DBF6FDE0}"/>
               </a:ext>
             </a:extLst>
           </p:cNvPr>
@@ -9482,7 +9482,7 @@
           <p:cNvPr id="35" name="">
             <a:extLst xmlns:a="http://schemas.openxmlformats.org/drawingml/2006/main">
               <a:ext uri="{FF2B5EF4-FFF2-40B4-BE49-F238E27FC236}">
-                <a16:creationId xmlns:a16="http://schemas.microsoft.com/office/drawing/2014/main" id="{2F8405C9-2375-4892-90AF-37F138B37D16}"/>
+                <a16:creationId xmlns:a16="http://schemas.microsoft.com/office/drawing/2014/main" id="{06E0D783-7CC4-48E7-B8B5-A86449C30F26}"/>
               </a:ext>
             </a:extLst>
           </p:cNvPr>
@@ -9534,7 +9534,7 @@
           <p:cNvPr id="36" name="">
             <a:extLst xmlns:a="http://schemas.openxmlformats.org/drawingml/2006/main">
               <a:ext uri="{FF2B5EF4-FFF2-40B4-BE49-F238E27FC236}">
-                <a16:creationId xmlns:a16="http://schemas.microsoft.com/office/drawing/2014/main" id="{7035E059-9DDE-40B7-B40D-EDBD0B9EA478}"/>
+                <a16:creationId xmlns:a16="http://schemas.microsoft.com/office/drawing/2014/main" id="{49C6FFE9-3130-4CBC-823F-3B4362B7F8F4}"/>
               </a:ext>
             </a:extLst>
           </p:cNvPr>
@@ -9586,7 +9586,7 @@
           <p:cNvPr id="37" name="">
             <a:extLst xmlns:a="http://schemas.openxmlformats.org/drawingml/2006/main">
               <a:ext uri="{FF2B5EF4-FFF2-40B4-BE49-F238E27FC236}">
-                <a16:creationId xmlns:a16="http://schemas.microsoft.com/office/drawing/2014/main" id="{9BB6BD05-1245-4BD5-AD92-65FB2C792FD7}"/>
+                <a16:creationId xmlns:a16="http://schemas.microsoft.com/office/drawing/2014/main" id="{FAFC414C-367C-4DDE-B551-EE7B8B4CC5F1}"/>
               </a:ext>
             </a:extLst>
           </p:cNvPr>
@@ -9617,7 +9617,7 @@
           <p:cNvPr id="38" name="">
             <a:extLst xmlns:a="http://schemas.openxmlformats.org/drawingml/2006/main">
               <a:ext uri="{FF2B5EF4-FFF2-40B4-BE49-F238E27FC236}">
-                <a16:creationId xmlns:a16="http://schemas.microsoft.com/office/drawing/2014/main" id="{19DF5670-EADC-4047-A6F0-6AF400BCCA15}"/>
+                <a16:creationId xmlns:a16="http://schemas.microsoft.com/office/drawing/2014/main" id="{9C1D1B84-B28D-47AF-89B7-E44576C1E617}"/>
               </a:ext>
             </a:extLst>
           </p:cNvPr>
@@ -9648,7 +9648,7 @@
           <p:cNvPr id="39" name="">
             <a:extLst xmlns:a="http://schemas.openxmlformats.org/drawingml/2006/main">
               <a:ext uri="{FF2B5EF4-FFF2-40B4-BE49-F238E27FC236}">
-                <a16:creationId xmlns:a16="http://schemas.microsoft.com/office/drawing/2014/main" id="{9B16C477-30E0-43AD-BC87-0131BADAE02F}"/>
+                <a16:creationId xmlns:a16="http://schemas.microsoft.com/office/drawing/2014/main" id="{A03F0857-CFC8-4621-85FB-7DA0F0305E79}"/>
               </a:ext>
             </a:extLst>
           </p:cNvPr>
@@ -9700,7 +9700,7 @@
           <p:cNvPr id="40" name="">
             <a:extLst xmlns:a="http://schemas.openxmlformats.org/drawingml/2006/main">
               <a:ext uri="{FF2B5EF4-FFF2-40B4-BE49-F238E27FC236}">
-                <a16:creationId xmlns:a16="http://schemas.microsoft.com/office/drawing/2014/main" id="{536B8CCF-3943-4EEB-9191-6D178DC2654B}"/>
+                <a16:creationId xmlns:a16="http://schemas.microsoft.com/office/drawing/2014/main" id="{4A95264C-710F-40FA-9161-2AE5D8D1EE59}"/>
               </a:ext>
             </a:extLst>
           </p:cNvPr>
@@ -9752,7 +9752,7 @@
           <p:cNvPr id="41" name="">
             <a:extLst xmlns:a="http://schemas.openxmlformats.org/drawingml/2006/main">
               <a:ext uri="{FF2B5EF4-FFF2-40B4-BE49-F238E27FC236}">
-                <a16:creationId xmlns:a16="http://schemas.microsoft.com/office/drawing/2014/main" id="{760CA23C-FF3D-420A-A33F-E7DF1D57A584}"/>
+                <a16:creationId xmlns:a16="http://schemas.microsoft.com/office/drawing/2014/main" id="{0256D552-7E0F-4D17-BF6F-BC3C7D305C09}"/>
               </a:ext>
             </a:extLst>
           </p:cNvPr>
@@ -9804,7 +9804,7 @@
           <p:cNvPr id="42" name="">
             <a:extLst xmlns:a="http://schemas.openxmlformats.org/drawingml/2006/main">
               <a:ext uri="{FF2B5EF4-FFF2-40B4-BE49-F238E27FC236}">
-                <a16:creationId xmlns:a16="http://schemas.microsoft.com/office/drawing/2014/main" id="{EAFF019E-52CC-49AD-ADBD-44976BDA5B4C}"/>
+                <a16:creationId xmlns:a16="http://schemas.microsoft.com/office/drawing/2014/main" id="{910261E6-19C2-40E9-8952-92CDFBC06E51}"/>
               </a:ext>
             </a:extLst>
           </p:cNvPr>
@@ -9856,7 +9856,7 @@
           <p:cNvPr id="43" name="">
             <a:extLst xmlns:a="http://schemas.openxmlformats.org/drawingml/2006/main">
               <a:ext uri="{FF2B5EF4-FFF2-40B4-BE49-F238E27FC236}">
-                <a16:creationId xmlns:a16="http://schemas.microsoft.com/office/drawing/2014/main" id="{C91E24B8-0661-49DC-AEB0-134CC46A3322}"/>
+                <a16:creationId xmlns:a16="http://schemas.microsoft.com/office/drawing/2014/main" id="{BD77DC03-0115-488D-862E-FE0F0CB00708}"/>
               </a:ext>
             </a:extLst>
           </p:cNvPr>
@@ -9908,7 +9908,7 @@
           <p:cNvPr id="44" name="">
             <a:extLst xmlns:a="http://schemas.openxmlformats.org/drawingml/2006/main">
               <a:ext uri="{FF2B5EF4-FFF2-40B4-BE49-F238E27FC236}">
-                <a16:creationId xmlns:a16="http://schemas.microsoft.com/office/drawing/2014/main" id="{30B2B209-4464-4F02-9A31-CC666BC22214}"/>
+                <a16:creationId xmlns:a16="http://schemas.microsoft.com/office/drawing/2014/main" id="{0171AE53-A48A-41EF-94BE-D434BCA4CD9D}"/>
               </a:ext>
             </a:extLst>
           </p:cNvPr>
@@ -9939,7 +9939,7 @@
           <p:cNvPr id="45" name="">
             <a:extLst xmlns:a="http://schemas.openxmlformats.org/drawingml/2006/main">
               <a:ext uri="{FF2B5EF4-FFF2-40B4-BE49-F238E27FC236}">
-                <a16:creationId xmlns:a16="http://schemas.microsoft.com/office/drawing/2014/main" id="{6242520C-DBEB-4B66-AC7C-498994F1FEE9}"/>
+                <a16:creationId xmlns:a16="http://schemas.microsoft.com/office/drawing/2014/main" id="{28D39DC3-0BD8-4396-ACBC-47F7FFEB776B}"/>
               </a:ext>
             </a:extLst>
           </p:cNvPr>
@@ -9991,7 +9991,7 @@
           <p:cNvPr id="46" name="">
             <a:extLst xmlns:a="http://schemas.openxmlformats.org/drawingml/2006/main">
               <a:ext uri="{FF2B5EF4-FFF2-40B4-BE49-F238E27FC236}">
-                <a16:creationId xmlns:a16="http://schemas.microsoft.com/office/drawing/2014/main" id="{D57AF27F-1DA2-4EE9-ABCC-5B49A5F638DD}"/>
+                <a16:creationId xmlns:a16="http://schemas.microsoft.com/office/drawing/2014/main" id="{E4DE29E5-0B21-499E-8AED-EAA7396CEAAE}"/>
               </a:ext>
             </a:extLst>
           </p:cNvPr>
@@ -10043,7 +10043,7 @@
           <p:cNvPr id="47" name="">
             <a:extLst xmlns:a="http://schemas.openxmlformats.org/drawingml/2006/main">
               <a:ext uri="{FF2B5EF4-FFF2-40B4-BE49-F238E27FC236}">
-                <a16:creationId xmlns:a16="http://schemas.microsoft.com/office/drawing/2014/main" id="{EE9874B7-8144-4ADA-ACE0-A6599D689FBA}"/>
+                <a16:creationId xmlns:a16="http://schemas.microsoft.com/office/drawing/2014/main" id="{5C903269-E934-4442-822D-03F938604AC0}"/>
               </a:ext>
             </a:extLst>
           </p:cNvPr>
@@ -10095,7 +10095,7 @@
           <p:cNvPr id="48" name="">
             <a:extLst xmlns:a="http://schemas.openxmlformats.org/drawingml/2006/main">
               <a:ext uri="{FF2B5EF4-FFF2-40B4-BE49-F238E27FC236}">
-                <a16:creationId xmlns:a16="http://schemas.microsoft.com/office/drawing/2014/main" id="{79119405-C4FF-4B36-AF3C-9BD99DEC64D9}"/>
+                <a16:creationId xmlns:a16="http://schemas.microsoft.com/office/drawing/2014/main" id="{C50BD083-38CD-45AA-BA19-DBD362A65852}"/>
               </a:ext>
             </a:extLst>
           </p:cNvPr>
@@ -10147,7 +10147,7 @@
           <p:cNvPr id="49" name="">
             <a:extLst xmlns:a="http://schemas.openxmlformats.org/drawingml/2006/main">
               <a:ext uri="{FF2B5EF4-FFF2-40B4-BE49-F238E27FC236}">
-                <a16:creationId xmlns:a16="http://schemas.microsoft.com/office/drawing/2014/main" id="{DF3F517E-E839-4AD8-A348-B33A1521399A}"/>
+                <a16:creationId xmlns:a16="http://schemas.microsoft.com/office/drawing/2014/main" id="{6040E74F-573B-4D94-9781-E34229B90AD4}"/>
               </a:ext>
             </a:extLst>
           </p:cNvPr>
@@ -10199,7 +10199,7 @@
           <p:cNvPr id="50" name="">
             <a:extLst xmlns:a="http://schemas.openxmlformats.org/drawingml/2006/main">
               <a:ext uri="{FF2B5EF4-FFF2-40B4-BE49-F238E27FC236}">
-                <a16:creationId xmlns:a16="http://schemas.microsoft.com/office/drawing/2014/main" id="{7D14BE9F-B706-4849-972F-31DE8F42549A}"/>
+                <a16:creationId xmlns:a16="http://schemas.microsoft.com/office/drawing/2014/main" id="{C0334E75-2802-444B-B4E2-1092ACF129F8}"/>
               </a:ext>
             </a:extLst>
           </p:cNvPr>
@@ -10251,7 +10251,7 @@
           <p:cNvPr id="51" name="">
             <a:extLst xmlns:a="http://schemas.openxmlformats.org/drawingml/2006/main">
               <a:ext uri="{FF2B5EF4-FFF2-40B4-BE49-F238E27FC236}">
-                <a16:creationId xmlns:a16="http://schemas.microsoft.com/office/drawing/2014/main" id="{3925F8A9-E3D7-4431-B829-14B79FA9B52C}"/>
+                <a16:creationId xmlns:a16="http://schemas.microsoft.com/office/drawing/2014/main" id="{2AAA33D9-128F-4701-81DA-65B7F707A249}"/>
               </a:ext>
             </a:extLst>
           </p:cNvPr>
@@ -10282,7 +10282,7 @@
           <p:cNvPr id="52" name="">
             <a:extLst xmlns:a="http://schemas.openxmlformats.org/drawingml/2006/main">
               <a:ext uri="{FF2B5EF4-FFF2-40B4-BE49-F238E27FC236}">
-                <a16:creationId xmlns:a16="http://schemas.microsoft.com/office/drawing/2014/main" id="{8242D2D6-2BBB-49C1-BEF2-F01589C02594}"/>
+                <a16:creationId xmlns:a16="http://schemas.microsoft.com/office/drawing/2014/main" id="{FA82327D-428B-4CA6-AFCE-6727D92E983E}"/>
               </a:ext>
             </a:extLst>
           </p:cNvPr>
@@ -10313,7 +10313,7 @@
           <p:cNvPr id="53" name="">
             <a:extLst xmlns:a="http://schemas.openxmlformats.org/drawingml/2006/main">
               <a:ext uri="{FF2B5EF4-FFF2-40B4-BE49-F238E27FC236}">
-                <a16:creationId xmlns:a16="http://schemas.microsoft.com/office/drawing/2014/main" id="{A974240A-847C-451D-B2ED-7732C4FF8091}"/>
+                <a16:creationId xmlns:a16="http://schemas.microsoft.com/office/drawing/2014/main" id="{FCD9DD64-110A-47CA-882D-1BE91FB18E61}"/>
               </a:ext>
             </a:extLst>
           </p:cNvPr>
@@ -10344,7 +10344,7 @@
           <p:cNvPr id="54" name="">
             <a:extLst xmlns:a="http://schemas.openxmlformats.org/drawingml/2006/main">
               <a:ext uri="{FF2B5EF4-FFF2-40B4-BE49-F238E27FC236}">
-                <a16:creationId xmlns:a16="http://schemas.microsoft.com/office/drawing/2014/main" id="{C2C495B0-2F01-48BB-988E-40E56A95D662}"/>
+                <a16:creationId xmlns:a16="http://schemas.microsoft.com/office/drawing/2014/main" id="{8A14AC92-7DCF-48D5-8280-BBF461B3552C}"/>
               </a:ext>
             </a:extLst>
           </p:cNvPr>
@@ -10396,7 +10396,7 @@
           <p:cNvPr id="55" name="">
             <a:extLst xmlns:a="http://schemas.openxmlformats.org/drawingml/2006/main">
               <a:ext uri="{FF2B5EF4-FFF2-40B4-BE49-F238E27FC236}">
-                <a16:creationId xmlns:a16="http://schemas.microsoft.com/office/drawing/2014/main" id="{8126397F-4B8A-4A51-8AD7-5253C26FAFBB}"/>
+                <a16:creationId xmlns:a16="http://schemas.microsoft.com/office/drawing/2014/main" id="{CEFDC9F6-CA8C-441A-AE41-0CBD447E0BD6}"/>
               </a:ext>
             </a:extLst>
           </p:cNvPr>
@@ -10448,7 +10448,7 @@
           <p:cNvPr id="56" name="">
             <a:extLst xmlns:a="http://schemas.openxmlformats.org/drawingml/2006/main">
               <a:ext uri="{FF2B5EF4-FFF2-40B4-BE49-F238E27FC236}">
-                <a16:creationId xmlns:a16="http://schemas.microsoft.com/office/drawing/2014/main" id="{1D5D65D5-EC67-4342-94FB-3681F64FAEC9}"/>
+                <a16:creationId xmlns:a16="http://schemas.microsoft.com/office/drawing/2014/main" id="{EEDB0AB5-A59E-4042-BC1F-5FF6E97094E9}"/>
               </a:ext>
             </a:extLst>
           </p:cNvPr>
@@ -10500,7 +10500,7 @@
           <p:cNvPr id="57" name="">
             <a:extLst xmlns:a="http://schemas.openxmlformats.org/drawingml/2006/main">
               <a:ext uri="{FF2B5EF4-FFF2-40B4-BE49-F238E27FC236}">
-                <a16:creationId xmlns:a16="http://schemas.microsoft.com/office/drawing/2014/main" id="{A0A2B54D-D3E4-4C72-8853-CC72D152CF67}"/>
+                <a16:creationId xmlns:a16="http://schemas.microsoft.com/office/drawing/2014/main" id="{8131CFFD-5C11-402F-80C1-CCC12EEB1312}"/>
               </a:ext>
             </a:extLst>
           </p:cNvPr>
@@ -10552,7 +10552,7 @@
           <p:cNvPr id="58" name="">
             <a:extLst xmlns:a="http://schemas.openxmlformats.org/drawingml/2006/main">
               <a:ext uri="{FF2B5EF4-FFF2-40B4-BE49-F238E27FC236}">
-                <a16:creationId xmlns:a16="http://schemas.microsoft.com/office/drawing/2014/main" id="{9D8386C8-0FF1-4957-8A67-4AC4ABD31A00}"/>
+                <a16:creationId xmlns:a16="http://schemas.microsoft.com/office/drawing/2014/main" id="{0FBC7C4F-B988-49BD-8251-288A835CC3A5}"/>
               </a:ext>
             </a:extLst>
           </p:cNvPr>
@@ -10604,7 +10604,7 @@
           <p:cNvPr id="59" name="">
             <a:extLst xmlns:a="http://schemas.openxmlformats.org/drawingml/2006/main">
               <a:ext uri="{FF2B5EF4-FFF2-40B4-BE49-F238E27FC236}">
-                <a16:creationId xmlns:a16="http://schemas.microsoft.com/office/drawing/2014/main" id="{485FBC0D-6E60-4A94-8BF4-22364B9196B6}"/>
+                <a16:creationId xmlns:a16="http://schemas.microsoft.com/office/drawing/2014/main" id="{61D27B8D-050A-470D-971A-B28E8775100B}"/>
               </a:ext>
             </a:extLst>
           </p:cNvPr>
@@ -10635,7 +10635,7 @@
           <p:cNvPr id="60" name="">
             <a:extLst xmlns:a="http://schemas.openxmlformats.org/drawingml/2006/main">
               <a:ext uri="{FF2B5EF4-FFF2-40B4-BE49-F238E27FC236}">
-                <a16:creationId xmlns:a16="http://schemas.microsoft.com/office/drawing/2014/main" id="{5D25E99D-BD49-4B31-98C1-DB80B7F68E2F}"/>
+                <a16:creationId xmlns:a16="http://schemas.microsoft.com/office/drawing/2014/main" id="{81C0A3AB-6A4F-4F77-B2F9-92777D5E0EEA}"/>
               </a:ext>
             </a:extLst>
           </p:cNvPr>
@@ -10687,7 +10687,7 @@
           <p:cNvPr id="61" name="">
             <a:extLst xmlns:a="http://schemas.openxmlformats.org/drawingml/2006/main">
               <a:ext uri="{FF2B5EF4-FFF2-40B4-BE49-F238E27FC236}">
-                <a16:creationId xmlns:a16="http://schemas.microsoft.com/office/drawing/2014/main" id="{D49B1A72-9C4A-46EB-95C4-D88B52825C87}"/>
+                <a16:creationId xmlns:a16="http://schemas.microsoft.com/office/drawing/2014/main" id="{DEF5A031-81DC-4322-B4F8-4A98F4041102}"/>
               </a:ext>
             </a:extLst>
           </p:cNvPr>
@@ -10739,7 +10739,7 @@
           <p:cNvPr id="62" name="">
             <a:extLst xmlns:a="http://schemas.openxmlformats.org/drawingml/2006/main">
               <a:ext uri="{FF2B5EF4-FFF2-40B4-BE49-F238E27FC236}">
-                <a16:creationId xmlns:a16="http://schemas.microsoft.com/office/drawing/2014/main" id="{9FCDE705-E39C-4624-958E-3ECFB4BC2773}"/>
+                <a16:creationId xmlns:a16="http://schemas.microsoft.com/office/drawing/2014/main" id="{8FCE1259-2DC2-4353-85A3-D73252204B73}"/>
               </a:ext>
             </a:extLst>
           </p:cNvPr>
@@ -10791,7 +10791,7 @@
           <p:cNvPr id="63" name="">
             <a:extLst xmlns:a="http://schemas.openxmlformats.org/drawingml/2006/main">
               <a:ext uri="{FF2B5EF4-FFF2-40B4-BE49-F238E27FC236}">
-                <a16:creationId xmlns:a16="http://schemas.microsoft.com/office/drawing/2014/main" id="{6D1B5EE1-3706-48AF-9F70-8E51C6488A9C}"/>
+                <a16:creationId xmlns:a16="http://schemas.microsoft.com/office/drawing/2014/main" id="{E78C81B6-2862-4702-881F-5BB1E8D42E8F}"/>
               </a:ext>
             </a:extLst>
           </p:cNvPr>
@@ -10843,7 +10843,7 @@
           <p:cNvPr id="64" name="">
             <a:extLst xmlns:a="http://schemas.openxmlformats.org/drawingml/2006/main">
               <a:ext uri="{FF2B5EF4-FFF2-40B4-BE49-F238E27FC236}">
-                <a16:creationId xmlns:a16="http://schemas.microsoft.com/office/drawing/2014/main" id="{A2B783A6-0FA8-44F7-A8FC-C7B5141A5E0D}"/>
+                <a16:creationId xmlns:a16="http://schemas.microsoft.com/office/drawing/2014/main" id="{E5E8B6BC-516C-4E80-800F-548442CC8EDA}"/>
               </a:ext>
             </a:extLst>
           </p:cNvPr>
@@ -10895,7 +10895,7 @@
           <p:cNvPr id="65" name="">
             <a:extLst xmlns:a="http://schemas.openxmlformats.org/drawingml/2006/main">
               <a:ext uri="{FF2B5EF4-FFF2-40B4-BE49-F238E27FC236}">
-                <a16:creationId xmlns:a16="http://schemas.microsoft.com/office/drawing/2014/main" id="{250F5CE9-F3C6-441D-9E36-E34DF3F26B0A}"/>
+                <a16:creationId xmlns:a16="http://schemas.microsoft.com/office/drawing/2014/main" id="{1CC7803E-F1D1-45E1-9DB1-48F357D15F65}"/>
               </a:ext>
             </a:extLst>
           </p:cNvPr>
@@ -10926,7 +10926,7 @@
           <p:cNvPr id="66" name="">
             <a:extLst xmlns:a="http://schemas.openxmlformats.org/drawingml/2006/main">
               <a:ext uri="{FF2B5EF4-FFF2-40B4-BE49-F238E27FC236}">
-                <a16:creationId xmlns:a16="http://schemas.microsoft.com/office/drawing/2014/main" id="{E8E28AD2-3D2E-408F-9A02-C14791F41C03}"/>
+                <a16:creationId xmlns:a16="http://schemas.microsoft.com/office/drawing/2014/main" id="{7FE64C5F-3277-44E5-A7D2-FAD904AD4682}"/>
               </a:ext>
             </a:extLst>
           </p:cNvPr>
@@ -10957,7 +10957,7 @@
           <p:cNvPr id="67" name="">
             <a:extLst xmlns:a="http://schemas.openxmlformats.org/drawingml/2006/main">
               <a:ext uri="{FF2B5EF4-FFF2-40B4-BE49-F238E27FC236}">
-                <a16:creationId xmlns:a16="http://schemas.microsoft.com/office/drawing/2014/main" id="{3EB3E042-C7AF-43E4-B362-7D9872CEFAB5}"/>
+                <a16:creationId xmlns:a16="http://schemas.microsoft.com/office/drawing/2014/main" id="{935F327B-6C09-4B90-9AB9-1D3FDF1A1CE3}"/>
               </a:ext>
             </a:extLst>
           </p:cNvPr>
@@ -11009,7 +11009,7 @@
           <p:cNvPr id="68" name="">
             <a:extLst xmlns:a="http://schemas.openxmlformats.org/drawingml/2006/main">
               <a:ext uri="{FF2B5EF4-FFF2-40B4-BE49-F238E27FC236}">
-                <a16:creationId xmlns:a16="http://schemas.microsoft.com/office/drawing/2014/main" id="{9B988E54-6B8A-44C7-A475-E133B1203D22}"/>
+                <a16:creationId xmlns:a16="http://schemas.microsoft.com/office/drawing/2014/main" id="{989B5559-0D2E-4D5F-97A8-15B2E997FFCF}"/>
               </a:ext>
             </a:extLst>
           </p:cNvPr>
@@ -11061,7 +11061,7 @@
           <p:cNvPr id="69" name="">
             <a:extLst xmlns:a="http://schemas.openxmlformats.org/drawingml/2006/main">
               <a:ext uri="{FF2B5EF4-FFF2-40B4-BE49-F238E27FC236}">
-                <a16:creationId xmlns:a16="http://schemas.microsoft.com/office/drawing/2014/main" id="{A8EE6368-4C0C-4E48-9D7C-ADDA868444DB}"/>
+                <a16:creationId xmlns:a16="http://schemas.microsoft.com/office/drawing/2014/main" id="{94B2186F-39E0-4CE8-B046-C839EA67A834}"/>
               </a:ext>
             </a:extLst>
           </p:cNvPr>
@@ -11113,7 +11113,7 @@
           <p:cNvPr id="70" name="">
             <a:extLst xmlns:a="http://schemas.openxmlformats.org/drawingml/2006/main">
               <a:ext uri="{FF2B5EF4-FFF2-40B4-BE49-F238E27FC236}">
-                <a16:creationId xmlns:a16="http://schemas.microsoft.com/office/drawing/2014/main" id="{DB3C00CB-35D7-46F5-B516-145788EF16FA}"/>
+                <a16:creationId xmlns:a16="http://schemas.microsoft.com/office/drawing/2014/main" id="{21E55953-6454-44B1-ADBA-488110CE98C0}"/>
               </a:ext>
             </a:extLst>
           </p:cNvPr>
@@ -11165,7 +11165,7 @@
           <p:cNvPr id="71" name="">
             <a:extLst xmlns:a="http://schemas.openxmlformats.org/drawingml/2006/main">
               <a:ext uri="{FF2B5EF4-FFF2-40B4-BE49-F238E27FC236}">
-                <a16:creationId xmlns:a16="http://schemas.microsoft.com/office/drawing/2014/main" id="{24390CA9-4490-4700-8685-A2A2A4BA71F7}"/>
+                <a16:creationId xmlns:a16="http://schemas.microsoft.com/office/drawing/2014/main" id="{D74F5128-D23F-4D4C-B30D-44EA85E94D63}"/>
               </a:ext>
             </a:extLst>
           </p:cNvPr>
@@ -11217,7 +11217,7 @@
           <p:cNvPr id="72" name="">
             <a:extLst xmlns:a="http://schemas.openxmlformats.org/drawingml/2006/main">
               <a:ext uri="{FF2B5EF4-FFF2-40B4-BE49-F238E27FC236}">
-                <a16:creationId xmlns:a16="http://schemas.microsoft.com/office/drawing/2014/main" id="{CDE4BE6A-6101-4C8A-80D3-B7EC7B57DAE0}"/>
+                <a16:creationId xmlns:a16="http://schemas.microsoft.com/office/drawing/2014/main" id="{AA6E2166-7301-46B3-845C-48BDCD979A00}"/>
               </a:ext>
             </a:extLst>
           </p:cNvPr>
@@ -11248,7 +11248,7 @@
           <p:cNvPr id="73" name="">
             <a:extLst xmlns:a="http://schemas.openxmlformats.org/drawingml/2006/main">
               <a:ext uri="{FF2B5EF4-FFF2-40B4-BE49-F238E27FC236}">
-                <a16:creationId xmlns:a16="http://schemas.microsoft.com/office/drawing/2014/main" id="{765D09ED-624A-46EF-9193-272793680268}"/>
+                <a16:creationId xmlns:a16="http://schemas.microsoft.com/office/drawing/2014/main" id="{DB9178D8-09CF-4C60-8BD7-8112CEE10D97}"/>
               </a:ext>
             </a:extLst>
           </p:cNvPr>
@@ -11300,7 +11300,7 @@
           <p:cNvPr id="74" name="">
             <a:extLst xmlns:a="http://schemas.openxmlformats.org/drawingml/2006/main">
               <a:ext uri="{FF2B5EF4-FFF2-40B4-BE49-F238E27FC236}">
-                <a16:creationId xmlns:a16="http://schemas.microsoft.com/office/drawing/2014/main" id="{B1D2DF6E-A1C1-41C3-958B-3D927A8CC59B}"/>
+                <a16:creationId xmlns:a16="http://schemas.microsoft.com/office/drawing/2014/main" id="{D2B4CFA5-FACE-4836-B3E2-13CA04ADFA18}"/>
               </a:ext>
             </a:extLst>
           </p:cNvPr>
@@ -11352,7 +11352,7 @@
           <p:cNvPr id="75" name="">
             <a:extLst xmlns:a="http://schemas.openxmlformats.org/drawingml/2006/main">
               <a:ext uri="{FF2B5EF4-FFF2-40B4-BE49-F238E27FC236}">
-                <a16:creationId xmlns:a16="http://schemas.microsoft.com/office/drawing/2014/main" id="{C601D8B6-65B3-426C-9BBB-DA375C14FD6A}"/>
+                <a16:creationId xmlns:a16="http://schemas.microsoft.com/office/drawing/2014/main" id="{3AFB094C-BB32-43F5-8B89-46A576EFD133}"/>
               </a:ext>
             </a:extLst>
           </p:cNvPr>
@@ -11404,7 +11404,7 @@
           <p:cNvPr id="76" name="">
             <a:extLst xmlns:a="http://schemas.openxmlformats.org/drawingml/2006/main">
               <a:ext uri="{FF2B5EF4-FFF2-40B4-BE49-F238E27FC236}">
-                <a16:creationId xmlns:a16="http://schemas.microsoft.com/office/drawing/2014/main" id="{0062C940-5C81-4C9A-BC31-3A23E4A9494B}"/>
+                <a16:creationId xmlns:a16="http://schemas.microsoft.com/office/drawing/2014/main" id="{0CCA6789-EC68-441F-809F-016B3E783FF7}"/>
               </a:ext>
             </a:extLst>
           </p:cNvPr>
@@ -11456,7 +11456,7 @@
           <p:cNvPr id="77" name="">
             <a:extLst xmlns:a="http://schemas.openxmlformats.org/drawingml/2006/main">
               <a:ext uri="{FF2B5EF4-FFF2-40B4-BE49-F238E27FC236}">
-                <a16:creationId xmlns:a16="http://schemas.microsoft.com/office/drawing/2014/main" id="{D7066538-7808-4C84-9B98-1306E3ABE78C}"/>
+                <a16:creationId xmlns:a16="http://schemas.microsoft.com/office/drawing/2014/main" id="{F5FDEE0F-CD53-4382-90F3-816B18BF1BF6}"/>
               </a:ext>
             </a:extLst>
           </p:cNvPr>
@@ -11508,7 +11508,7 @@
           <p:cNvPr id="78" name="">
             <a:extLst xmlns:a="http://schemas.openxmlformats.org/drawingml/2006/main">
               <a:ext uri="{FF2B5EF4-FFF2-40B4-BE49-F238E27FC236}">
-                <a16:creationId xmlns:a16="http://schemas.microsoft.com/office/drawing/2014/main" id="{2505B5D6-B419-4FAE-B916-2CB93E271B9B}"/>
+                <a16:creationId xmlns:a16="http://schemas.microsoft.com/office/drawing/2014/main" id="{6DE5169B-DD2B-4031-836B-5646A7400731}"/>
               </a:ext>
             </a:extLst>
           </p:cNvPr>
@@ -11539,7 +11539,7 @@
           <p:cNvPr id="79" name="">
             <a:extLst xmlns:a="http://schemas.openxmlformats.org/drawingml/2006/main">
               <a:ext uri="{FF2B5EF4-FFF2-40B4-BE49-F238E27FC236}">
-                <a16:creationId xmlns:a16="http://schemas.microsoft.com/office/drawing/2014/main" id="{FE83157A-E237-4F96-80F2-E2DE63A1E237}"/>
+                <a16:creationId xmlns:a16="http://schemas.microsoft.com/office/drawing/2014/main" id="{0F3640DC-A7C0-4F7B-84C0-D6011A2DFA37}"/>
               </a:ext>
             </a:extLst>
           </p:cNvPr>
@@ -11570,7 +11570,7 @@
           <p:cNvPr id="80" name="">
             <a:extLst xmlns:a="http://schemas.openxmlformats.org/drawingml/2006/main">
               <a:ext uri="{FF2B5EF4-FFF2-40B4-BE49-F238E27FC236}">
-                <a16:creationId xmlns:a16="http://schemas.microsoft.com/office/drawing/2014/main" id="{447BCAED-8F7F-49D5-80BC-E7F0D0CAB369}"/>
+                <a16:creationId xmlns:a16="http://schemas.microsoft.com/office/drawing/2014/main" id="{0550FE62-F96E-4EF6-A4B5-0FFA1DB09E29}"/>
               </a:ext>
             </a:extLst>
           </p:cNvPr>
@@ -11622,7 +11622,7 @@
           <p:cNvPr id="81" name="">
             <a:extLst xmlns:a="http://schemas.openxmlformats.org/drawingml/2006/main">
               <a:ext uri="{FF2B5EF4-FFF2-40B4-BE49-F238E27FC236}">
-                <a16:creationId xmlns:a16="http://schemas.microsoft.com/office/drawing/2014/main" id="{45814410-374B-44EC-B130-103DD7323247}"/>
+                <a16:creationId xmlns:a16="http://schemas.microsoft.com/office/drawing/2014/main" id="{6D9B3AAF-B90C-4571-B54E-AAF8076C670D}"/>
               </a:ext>
             </a:extLst>
           </p:cNvPr>
@@ -11674,7 +11674,7 @@
           <p:cNvPr id="82" name="">
             <a:extLst xmlns:a="http://schemas.openxmlformats.org/drawingml/2006/main">
               <a:ext uri="{FF2B5EF4-FFF2-40B4-BE49-F238E27FC236}">
-                <a16:creationId xmlns:a16="http://schemas.microsoft.com/office/drawing/2014/main" id="{F0AB6C7F-93F6-4C2F-BE53-9572364E0304}"/>
+                <a16:creationId xmlns:a16="http://schemas.microsoft.com/office/drawing/2014/main" id="{1285D620-6FEB-4950-8E38-E91DDF034F49}"/>
               </a:ext>
             </a:extLst>
           </p:cNvPr>
@@ -11726,7 +11726,7 @@
           <p:cNvPr id="83" name="">
             <a:extLst xmlns:a="http://schemas.openxmlformats.org/drawingml/2006/main">
               <a:ext uri="{FF2B5EF4-FFF2-40B4-BE49-F238E27FC236}">
-                <a16:creationId xmlns:a16="http://schemas.microsoft.com/office/drawing/2014/main" id="{7EB85BE6-D867-4050-92CA-BF8BEF78C6CD}"/>
+                <a16:creationId xmlns:a16="http://schemas.microsoft.com/office/drawing/2014/main" id="{764EDAC8-D781-47A8-9FB8-590BEC581D11}"/>
               </a:ext>
             </a:extLst>
           </p:cNvPr>
@@ -11778,7 +11778,7 @@
           <p:cNvPr id="84" name="">
             <a:extLst xmlns:a="http://schemas.openxmlformats.org/drawingml/2006/main">
               <a:ext uri="{FF2B5EF4-FFF2-40B4-BE49-F238E27FC236}">
-                <a16:creationId xmlns:a16="http://schemas.microsoft.com/office/drawing/2014/main" id="{753A5F81-94D1-4900-BEB9-E26D58258357}"/>
+                <a16:creationId xmlns:a16="http://schemas.microsoft.com/office/drawing/2014/main" id="{16518EB5-6898-4515-811E-1A47B0137ABE}"/>
               </a:ext>
             </a:extLst>
           </p:cNvPr>
@@ -11830,7 +11830,7 @@
           <p:cNvPr id="85" name="">
             <a:extLst xmlns:a="http://schemas.openxmlformats.org/drawingml/2006/main">
               <a:ext uri="{FF2B5EF4-FFF2-40B4-BE49-F238E27FC236}">
-                <a16:creationId xmlns:a16="http://schemas.microsoft.com/office/drawing/2014/main" id="{80C30149-871F-467F-9754-6A50C8C95A76}"/>
+                <a16:creationId xmlns:a16="http://schemas.microsoft.com/office/drawing/2014/main" id="{C0371DA6-B963-4DC2-A64A-555ECD8FF151}"/>
               </a:ext>
             </a:extLst>
           </p:cNvPr>
@@ -11861,7 +11861,7 @@
           <p:cNvPr id="86" name="">
             <a:extLst xmlns:a="http://schemas.openxmlformats.org/drawingml/2006/main">
               <a:ext uri="{FF2B5EF4-FFF2-40B4-BE49-F238E27FC236}">
-                <a16:creationId xmlns:a16="http://schemas.microsoft.com/office/drawing/2014/main" id="{48898CE1-0816-4338-BAD0-A9477CF5C046}"/>
+                <a16:creationId xmlns:a16="http://schemas.microsoft.com/office/drawing/2014/main" id="{D33889AE-765E-48CA-BEE2-B446DD522FA2}"/>
               </a:ext>
             </a:extLst>
           </p:cNvPr>
@@ -11913,7 +11913,7 @@
           <p:cNvPr id="87" name="">
             <a:extLst xmlns:a="http://schemas.openxmlformats.org/drawingml/2006/main">
               <a:ext uri="{FF2B5EF4-FFF2-40B4-BE49-F238E27FC236}">
-                <a16:creationId xmlns:a16="http://schemas.microsoft.com/office/drawing/2014/main" id="{9C2404C0-135C-400B-8260-0C87365B6C26}"/>
+                <a16:creationId xmlns:a16="http://schemas.microsoft.com/office/drawing/2014/main" id="{16E3275E-6946-406D-B05F-422845B22B6F}"/>
               </a:ext>
             </a:extLst>
           </p:cNvPr>
@@ -11965,7 +11965,7 @@
           <p:cNvPr id="88" name="">
             <a:extLst xmlns:a="http://schemas.openxmlformats.org/drawingml/2006/main">
               <a:ext uri="{FF2B5EF4-FFF2-40B4-BE49-F238E27FC236}">
-                <a16:creationId xmlns:a16="http://schemas.microsoft.com/office/drawing/2014/main" id="{4D3C2AC3-2700-4D1B-98E5-159325696AC9}"/>
+                <a16:creationId xmlns:a16="http://schemas.microsoft.com/office/drawing/2014/main" id="{BF0FC3E4-A8D8-4492-8073-C8848A3BF04A}"/>
               </a:ext>
             </a:extLst>
           </p:cNvPr>
@@ -12017,7 +12017,7 @@
           <p:cNvPr id="89" name="">
             <a:extLst xmlns:a="http://schemas.openxmlformats.org/drawingml/2006/main">
               <a:ext uri="{FF2B5EF4-FFF2-40B4-BE49-F238E27FC236}">
-                <a16:creationId xmlns:a16="http://schemas.microsoft.com/office/drawing/2014/main" id="{F2757DEB-F361-42A3-A0D4-84ABC846AA66}"/>
+                <a16:creationId xmlns:a16="http://schemas.microsoft.com/office/drawing/2014/main" id="{EFF59602-E5BE-4FD9-9AEF-AFCD897489E8}"/>
               </a:ext>
             </a:extLst>
           </p:cNvPr>
@@ -12069,7 +12069,7 @@
           <p:cNvPr id="90" name="">
             <a:extLst xmlns:a="http://schemas.openxmlformats.org/drawingml/2006/main">
               <a:ext uri="{FF2B5EF4-FFF2-40B4-BE49-F238E27FC236}">
-                <a16:creationId xmlns:a16="http://schemas.microsoft.com/office/drawing/2014/main" id="{8F29FDB4-EFD7-4823-AFEE-0D2F173236B0}"/>
+                <a16:creationId xmlns:a16="http://schemas.microsoft.com/office/drawing/2014/main" id="{789CAD0A-AF49-4245-B2B6-2DC5CA145566}"/>
               </a:ext>
             </a:extLst>
           </p:cNvPr>
@@ -12121,7 +12121,7 @@
           <p:cNvPr id="91" name="">
             <a:extLst xmlns:a="http://schemas.openxmlformats.org/drawingml/2006/main">
               <a:ext uri="{FF2B5EF4-FFF2-40B4-BE49-F238E27FC236}">
-                <a16:creationId xmlns:a16="http://schemas.microsoft.com/office/drawing/2014/main" id="{A1B353F3-8371-46C6-8149-DC9D86DE4752}"/>
+                <a16:creationId xmlns:a16="http://schemas.microsoft.com/office/drawing/2014/main" id="{EBCAA82D-6D03-4CC9-9445-620A21A2F8F7}"/>
               </a:ext>
             </a:extLst>
           </p:cNvPr>
@@ -12152,7 +12152,7 @@
           <p:cNvPr id="92" name="">
             <a:extLst xmlns:a="http://schemas.openxmlformats.org/drawingml/2006/main">
               <a:ext uri="{FF2B5EF4-FFF2-40B4-BE49-F238E27FC236}">
-                <a16:creationId xmlns:a16="http://schemas.microsoft.com/office/drawing/2014/main" id="{8D1EBC12-DD9D-4488-9FB3-1018F9A954E7}"/>
+                <a16:creationId xmlns:a16="http://schemas.microsoft.com/office/drawing/2014/main" id="{B681D7F2-43C3-40AC-B7D7-A51A458EDBF7}"/>
               </a:ext>
             </a:extLst>
           </p:cNvPr>
@@ -12183,7 +12183,7 @@
           <p:cNvPr id="93" name="">
             <a:extLst xmlns:a="http://schemas.openxmlformats.org/drawingml/2006/main">
               <a:ext uri="{FF2B5EF4-FFF2-40B4-BE49-F238E27FC236}">
-                <a16:creationId xmlns:a16="http://schemas.microsoft.com/office/drawing/2014/main" id="{4B6E20E5-CE3B-494F-9328-EE6F3DF5CC51}"/>
+                <a16:creationId xmlns:a16="http://schemas.microsoft.com/office/drawing/2014/main" id="{1FC835B2-996E-4C16-9822-19C8FF2DE31E}"/>
               </a:ext>
             </a:extLst>
           </p:cNvPr>
@@ -12235,7 +12235,7 @@
           <p:cNvPr id="94" name="">
             <a:extLst xmlns:a="http://schemas.openxmlformats.org/drawingml/2006/main">
               <a:ext uri="{FF2B5EF4-FFF2-40B4-BE49-F238E27FC236}">
-                <a16:creationId xmlns:a16="http://schemas.microsoft.com/office/drawing/2014/main" id="{FDEFACAB-165F-4E12-BE1B-E16F2C49E166}"/>
+                <a16:creationId xmlns:a16="http://schemas.microsoft.com/office/drawing/2014/main" id="{BE1573C9-5EBB-4B7C-B070-9A7C9833B995}"/>
               </a:ext>
             </a:extLst>
           </p:cNvPr>
@@ -12287,7 +12287,7 @@
           <p:cNvPr id="95" name="">
             <a:extLst xmlns:a="http://schemas.openxmlformats.org/drawingml/2006/main">
               <a:ext uri="{FF2B5EF4-FFF2-40B4-BE49-F238E27FC236}">
-                <a16:creationId xmlns:a16="http://schemas.microsoft.com/office/drawing/2014/main" id="{9379D1E2-4D9B-46CF-BDD9-F6B414547F93}"/>
+                <a16:creationId xmlns:a16="http://schemas.microsoft.com/office/drawing/2014/main" id="{148D53DF-35BC-4126-B682-201B3431DA63}"/>
               </a:ext>
             </a:extLst>
           </p:cNvPr>
@@ -12339,7 +12339,7 @@
           <p:cNvPr id="96" name="">
             <a:extLst xmlns:a="http://schemas.openxmlformats.org/drawingml/2006/main">
               <a:ext uri="{FF2B5EF4-FFF2-40B4-BE49-F238E27FC236}">
-                <a16:creationId xmlns:a16="http://schemas.microsoft.com/office/drawing/2014/main" id="{422F7422-B911-4353-9A9C-594D465724BC}"/>
+                <a16:creationId xmlns:a16="http://schemas.microsoft.com/office/drawing/2014/main" id="{560A955E-7717-4A96-AE2B-E03EC4DD37E6}"/>
               </a:ext>
             </a:extLst>
           </p:cNvPr>
@@ -12391,7 +12391,7 @@
           <p:cNvPr id="97" name="">
             <a:extLst xmlns:a="http://schemas.openxmlformats.org/drawingml/2006/main">
               <a:ext uri="{FF2B5EF4-FFF2-40B4-BE49-F238E27FC236}">
-                <a16:creationId xmlns:a16="http://schemas.microsoft.com/office/drawing/2014/main" id="{B3C1DF55-7849-41C4-B5BA-41DA6FCE113B}"/>
+                <a16:creationId xmlns:a16="http://schemas.microsoft.com/office/drawing/2014/main" id="{5A4A08EA-E1F2-4AD7-BD6D-A63DD55D2FCC}"/>
               </a:ext>
             </a:extLst>
           </p:cNvPr>
@@ -12441,7 +12441,7 @@
     </p:spTree>
     <p:extLst>
       <p:ext uri="{BB962C8B-B14F-4D97-AF65-F5344CB8AC3E}">
-        <p14:creationId xmlns:p14="http://schemas.microsoft.com/office/powerpoint/2010/main" val="995743155"/>
+        <p14:creationId xmlns:p14="http://schemas.microsoft.com/office/powerpoint/2010/main" val="161414113"/>
       </p:ext>
     </p:extLst>
   </p:cSld>
@@ -12472,7 +12472,7 @@
           <p:cNvPr id="102" name="">
             <a:extLst xmlns:a="http://schemas.openxmlformats.org/drawingml/2006/main">
               <a:ext uri="{FF2B5EF4-FFF2-40B4-BE49-F238E27FC236}">
-                <a16:creationId xmlns:a16="http://schemas.microsoft.com/office/drawing/2014/main" id="{734A4D2C-593D-4CDF-BD8B-907FE6CDDA6B}"/>
+                <a16:creationId xmlns:a16="http://schemas.microsoft.com/office/drawing/2014/main" id="{29DD2CB6-878A-4621-858E-C35C983F5938}"/>
               </a:ext>
             </a:extLst>
           </p:cNvPr>
@@ -12505,7 +12505,7 @@
           <p:cNvPr id="2" name="">
             <a:extLst xmlns:a="http://schemas.openxmlformats.org/drawingml/2006/main">
               <a:ext uri="{FF2B5EF4-FFF2-40B4-BE49-F238E27FC236}">
-                <a16:creationId xmlns:a16="http://schemas.microsoft.com/office/drawing/2014/main" id="{59CBF3E9-39B2-4141-8514-5887D2303E14}"/>
+                <a16:creationId xmlns:a16="http://schemas.microsoft.com/office/drawing/2014/main" id="{2D4AC1B2-4D42-4B95-B972-119D6E294ECB}"/>
               </a:ext>
             </a:extLst>
           </p:cNvPr>
@@ -12536,7 +12536,7 @@
           <p:cNvPr id="3" name="">
             <a:extLst xmlns:a="http://schemas.openxmlformats.org/drawingml/2006/main">
               <a:ext uri="{FF2B5EF4-FFF2-40B4-BE49-F238E27FC236}">
-                <a16:creationId xmlns:a16="http://schemas.microsoft.com/office/drawing/2014/main" id="{B592BDC2-D213-4600-AF9A-6BD41A54D9BD}"/>
+                <a16:creationId xmlns:a16="http://schemas.microsoft.com/office/drawing/2014/main" id="{F0FCF874-6CBF-4026-94EC-4A8DDD392B2D}"/>
               </a:ext>
             </a:extLst>
           </p:cNvPr>
@@ -12588,7 +12588,7 @@
           <p:cNvPr id="4" name="">
             <a:extLst xmlns:a="http://schemas.openxmlformats.org/drawingml/2006/main">
               <a:ext uri="{FF2B5EF4-FFF2-40B4-BE49-F238E27FC236}">
-                <a16:creationId xmlns:a16="http://schemas.microsoft.com/office/drawing/2014/main" id="{FB8A4FAC-521C-4ED8-9199-2145D8EAD66B}"/>
+                <a16:creationId xmlns:a16="http://schemas.microsoft.com/office/drawing/2014/main" id="{36364C00-6649-4AB9-BCA8-C0E38F56B77F}"/>
               </a:ext>
             </a:extLst>
           </p:cNvPr>
@@ -12640,7 +12640,7 @@
           <p:cNvPr id="5" name="">
             <a:extLst xmlns:a="http://schemas.openxmlformats.org/drawingml/2006/main">
               <a:ext uri="{FF2B5EF4-FFF2-40B4-BE49-F238E27FC236}">
-                <a16:creationId xmlns:a16="http://schemas.microsoft.com/office/drawing/2014/main" id="{D98BC1EC-5A4A-4128-8AFE-FBEB21BF9484}"/>
+                <a16:creationId xmlns:a16="http://schemas.microsoft.com/office/drawing/2014/main" id="{A1942ABE-37DA-4540-89DA-72D88E0ADD5F}"/>
               </a:ext>
             </a:extLst>
           </p:cNvPr>
@@ -12675,7 +12675,7 @@
           <p:nvPr/>
         </p:nvPicPr>
         <p:blipFill>
-          <a:blip xmlns:r="http://schemas.openxmlformats.org/officeDocument/2006/relationships" xmlns:a="http://schemas.openxmlformats.org/drawingml/2006/main" r:embed="R170fe9b80d3f4839"/>
+          <a:blip xmlns:r="http://schemas.openxmlformats.org/officeDocument/2006/relationships" xmlns:a="http://schemas.openxmlformats.org/drawingml/2006/main" r:embed="R4a9aaf09f27e4b69"/>
           <a:stretch xmlns:a="http://schemas.openxmlformats.org/drawingml/2006/main"/>
         </p:blipFill>
         <p:spPr>
@@ -12693,7 +12693,7 @@
           <p:cNvPr id="7" name="">
             <a:extLst xmlns:a="http://schemas.openxmlformats.org/drawingml/2006/main">
               <a:ext uri="{FF2B5EF4-FFF2-40B4-BE49-F238E27FC236}">
-                <a16:creationId xmlns:a16="http://schemas.microsoft.com/office/drawing/2014/main" id="{A2596C15-C7AB-456C-9D88-58CA0071C5C9}"/>
+                <a16:creationId xmlns:a16="http://schemas.microsoft.com/office/drawing/2014/main" id="{8F994455-0D02-4B21-A6DD-8DDEC13D65FD}"/>
               </a:ext>
             </a:extLst>
           </p:cNvPr>
@@ -12745,7 +12745,7 @@
           <p:cNvPr id="8" name="">
             <a:extLst xmlns:a="http://schemas.openxmlformats.org/drawingml/2006/main">
               <a:ext uri="{FF2B5EF4-FFF2-40B4-BE49-F238E27FC236}">
-                <a16:creationId xmlns:a16="http://schemas.microsoft.com/office/drawing/2014/main" id="{4E256D68-31B1-4E0E-8D74-75403171CD9B}"/>
+                <a16:creationId xmlns:a16="http://schemas.microsoft.com/office/drawing/2014/main" id="{C7340103-E29C-4244-934A-8FF1E5BC8A7D}"/>
               </a:ext>
             </a:extLst>
           </p:cNvPr>
@@ -12797,7 +12797,7 @@
           <p:cNvPr id="9" name="">
             <a:extLst xmlns:a="http://schemas.openxmlformats.org/drawingml/2006/main">
               <a:ext uri="{FF2B5EF4-FFF2-40B4-BE49-F238E27FC236}">
-                <a16:creationId xmlns:a16="http://schemas.microsoft.com/office/drawing/2014/main" id="{5AD9618A-91D4-4F2B-8932-EE50FEA6453F}"/>
+                <a16:creationId xmlns:a16="http://schemas.microsoft.com/office/drawing/2014/main" id="{FD31A584-A7E0-4D3F-86F7-512371685145}"/>
               </a:ext>
             </a:extLst>
           </p:cNvPr>
@@ -12849,7 +12849,7 @@
           <p:cNvPr id="10" name="">
             <a:extLst xmlns:a="http://schemas.openxmlformats.org/drawingml/2006/main">
               <a:ext uri="{FF2B5EF4-FFF2-40B4-BE49-F238E27FC236}">
-                <a16:creationId xmlns:a16="http://schemas.microsoft.com/office/drawing/2014/main" id="{CD890E09-F6F7-400D-82D2-988A585E2E75}"/>
+                <a16:creationId xmlns:a16="http://schemas.microsoft.com/office/drawing/2014/main" id="{84E736C9-6FDC-423B-B3D8-737FA485B169}"/>
               </a:ext>
             </a:extLst>
           </p:cNvPr>
@@ -12901,7 +12901,7 @@
           <p:cNvPr id="11" name="">
             <a:extLst xmlns:a="http://schemas.openxmlformats.org/drawingml/2006/main">
               <a:ext uri="{FF2B5EF4-FFF2-40B4-BE49-F238E27FC236}">
-                <a16:creationId xmlns:a16="http://schemas.microsoft.com/office/drawing/2014/main" id="{DBD89C97-8BB8-492F-808A-DB1C1D22BF95}"/>
+                <a16:creationId xmlns:a16="http://schemas.microsoft.com/office/drawing/2014/main" id="{C4CBA772-50F1-47D7-ADBD-F2F363C8B934}"/>
               </a:ext>
             </a:extLst>
           </p:cNvPr>
@@ -12932,7 +12932,7 @@
           <p:cNvPr id="12" name="">
             <a:extLst xmlns:a="http://schemas.openxmlformats.org/drawingml/2006/main">
               <a:ext uri="{FF2B5EF4-FFF2-40B4-BE49-F238E27FC236}">
-                <a16:creationId xmlns:a16="http://schemas.microsoft.com/office/drawing/2014/main" id="{EBB6E9A8-85B3-4B68-B87F-167C7CD0EAE0}"/>
+                <a16:creationId xmlns:a16="http://schemas.microsoft.com/office/drawing/2014/main" id="{BDEC78A9-C043-40A4-A3B9-9B25CDB0FEAD}"/>
               </a:ext>
             </a:extLst>
           </p:cNvPr>
@@ -12963,7 +12963,7 @@
           <p:cNvPr id="13" name="">
             <a:extLst xmlns:a="http://schemas.openxmlformats.org/drawingml/2006/main">
               <a:ext uri="{FF2B5EF4-FFF2-40B4-BE49-F238E27FC236}">
-                <a16:creationId xmlns:a16="http://schemas.microsoft.com/office/drawing/2014/main" id="{17F9A3E3-C52A-490F-BFE2-BC94D5A63EDA}"/>
+                <a16:creationId xmlns:a16="http://schemas.microsoft.com/office/drawing/2014/main" id="{4CA381BC-BE8E-4F66-B04B-F2E49879C94A}"/>
               </a:ext>
             </a:extLst>
           </p:cNvPr>
@@ -13015,7 +13015,7 @@
           <p:cNvPr id="14" name="">
             <a:extLst xmlns:a="http://schemas.openxmlformats.org/drawingml/2006/main">
               <a:ext uri="{FF2B5EF4-FFF2-40B4-BE49-F238E27FC236}">
-                <a16:creationId xmlns:a16="http://schemas.microsoft.com/office/drawing/2014/main" id="{58CB4A06-67D6-48C7-B86B-8AC5B95FC0E9}"/>
+                <a16:creationId xmlns:a16="http://schemas.microsoft.com/office/drawing/2014/main" id="{CC8F623C-7F23-4935-9499-D787E049590B}"/>
               </a:ext>
             </a:extLst>
           </p:cNvPr>
@@ -13067,7 +13067,7 @@
           <p:cNvPr id="15" name="">
             <a:extLst xmlns:a="http://schemas.openxmlformats.org/drawingml/2006/main">
               <a:ext uri="{FF2B5EF4-FFF2-40B4-BE49-F238E27FC236}">
-                <a16:creationId xmlns:a16="http://schemas.microsoft.com/office/drawing/2014/main" id="{53632B18-A015-4F7D-AAC0-30E0B3327E7E}"/>
+                <a16:creationId xmlns:a16="http://schemas.microsoft.com/office/drawing/2014/main" id="{912FAAE0-BFA7-40D0-93F9-3B13A9DF9585}"/>
               </a:ext>
             </a:extLst>
           </p:cNvPr>
@@ -13119,7 +13119,7 @@
           <p:cNvPr id="16" name="">
             <a:extLst xmlns:a="http://schemas.openxmlformats.org/drawingml/2006/main">
               <a:ext uri="{FF2B5EF4-FFF2-40B4-BE49-F238E27FC236}">
-                <a16:creationId xmlns:a16="http://schemas.microsoft.com/office/drawing/2014/main" id="{CF6690A0-BBC4-4310-B017-30673BA6A5A5}"/>
+                <a16:creationId xmlns:a16="http://schemas.microsoft.com/office/drawing/2014/main" id="{069346E1-1B0A-4A46-8743-6DB3968E6EF4}"/>
               </a:ext>
             </a:extLst>
           </p:cNvPr>
@@ -13171,7 +13171,7 @@
           <p:cNvPr id="17" name="">
             <a:extLst xmlns:a="http://schemas.openxmlformats.org/drawingml/2006/main">
               <a:ext uri="{FF2B5EF4-FFF2-40B4-BE49-F238E27FC236}">
-                <a16:creationId xmlns:a16="http://schemas.microsoft.com/office/drawing/2014/main" id="{422E1047-DCD9-48FA-BC47-1F7E66C52B4A}"/>
+                <a16:creationId xmlns:a16="http://schemas.microsoft.com/office/drawing/2014/main" id="{37391916-556B-4CDF-A93C-74FEA377FF8E}"/>
               </a:ext>
             </a:extLst>
           </p:cNvPr>
@@ -13223,7 +13223,7 @@
           <p:cNvPr id="18" name="">
             <a:extLst xmlns:a="http://schemas.openxmlformats.org/drawingml/2006/main">
               <a:ext uri="{FF2B5EF4-FFF2-40B4-BE49-F238E27FC236}">
-                <a16:creationId xmlns:a16="http://schemas.microsoft.com/office/drawing/2014/main" id="{B11FA82F-1CF6-4544-B6C3-A5C3EA2B391F}"/>
+                <a16:creationId xmlns:a16="http://schemas.microsoft.com/office/drawing/2014/main" id="{AB60D5FD-6B72-45CC-95B2-CA56FC70BD89}"/>
               </a:ext>
             </a:extLst>
           </p:cNvPr>
@@ -13254,7 +13254,7 @@
           <p:cNvPr id="19" name="">
             <a:extLst xmlns:a="http://schemas.openxmlformats.org/drawingml/2006/main">
               <a:ext uri="{FF2B5EF4-FFF2-40B4-BE49-F238E27FC236}">
-                <a16:creationId xmlns:a16="http://schemas.microsoft.com/office/drawing/2014/main" id="{822B4BB3-8761-439A-97AC-885222240E8D}"/>
+                <a16:creationId xmlns:a16="http://schemas.microsoft.com/office/drawing/2014/main" id="{78026E20-424F-4F98-988D-0B701E75BAC5}"/>
               </a:ext>
             </a:extLst>
           </p:cNvPr>
@@ -13306,7 +13306,7 @@
           <p:cNvPr id="20" name="">
             <a:extLst xmlns:a="http://schemas.openxmlformats.org/drawingml/2006/main">
               <a:ext uri="{FF2B5EF4-FFF2-40B4-BE49-F238E27FC236}">
-                <a16:creationId xmlns:a16="http://schemas.microsoft.com/office/drawing/2014/main" id="{B5C247E5-4BA2-4C85-861A-692A32679F5D}"/>
+                <a16:creationId xmlns:a16="http://schemas.microsoft.com/office/drawing/2014/main" id="{F9FF4F20-7864-4AAD-B24A-4B62F1FAEFF9}"/>
               </a:ext>
             </a:extLst>
           </p:cNvPr>
@@ -13358,7 +13358,7 @@
           <p:cNvPr id="21" name="">
             <a:extLst xmlns:a="http://schemas.openxmlformats.org/drawingml/2006/main">
               <a:ext uri="{FF2B5EF4-FFF2-40B4-BE49-F238E27FC236}">
-                <a16:creationId xmlns:a16="http://schemas.microsoft.com/office/drawing/2014/main" id="{035DA495-B5FA-4A35-A724-696DFC766951}"/>
+                <a16:creationId xmlns:a16="http://schemas.microsoft.com/office/drawing/2014/main" id="{010EEB3C-077C-4F38-A23C-179DAC8AB02E}"/>
               </a:ext>
             </a:extLst>
           </p:cNvPr>
@@ -13410,7 +13410,7 @@
           <p:cNvPr id="22" name="">
             <a:extLst xmlns:a="http://schemas.openxmlformats.org/drawingml/2006/main">
               <a:ext uri="{FF2B5EF4-FFF2-40B4-BE49-F238E27FC236}">
-                <a16:creationId xmlns:a16="http://schemas.microsoft.com/office/drawing/2014/main" id="{2434AA28-515C-4AFD-8DDF-280190082442}"/>
+                <a16:creationId xmlns:a16="http://schemas.microsoft.com/office/drawing/2014/main" id="{12958376-DD1E-421E-B4F1-D5F6C2D51A3E}"/>
               </a:ext>
             </a:extLst>
           </p:cNvPr>
@@ -13462,7 +13462,7 @@
           <p:cNvPr id="23" name="">
             <a:extLst xmlns:a="http://schemas.openxmlformats.org/drawingml/2006/main">
               <a:ext uri="{FF2B5EF4-FFF2-40B4-BE49-F238E27FC236}">
-                <a16:creationId xmlns:a16="http://schemas.microsoft.com/office/drawing/2014/main" id="{E723A7A2-549B-45FD-8B72-CA52C7A036EE}"/>
+                <a16:creationId xmlns:a16="http://schemas.microsoft.com/office/drawing/2014/main" id="{3C44FAE7-1A20-4CAE-9410-0B8350C1981C}"/>
               </a:ext>
             </a:extLst>
           </p:cNvPr>
@@ -13514,7 +13514,7 @@
           <p:cNvPr id="24" name="">
             <a:extLst xmlns:a="http://schemas.openxmlformats.org/drawingml/2006/main">
               <a:ext uri="{FF2B5EF4-FFF2-40B4-BE49-F238E27FC236}">
-                <a16:creationId xmlns:a16="http://schemas.microsoft.com/office/drawing/2014/main" id="{A001888A-6384-45AD-ABFC-7E2D42FD601B}"/>
+                <a16:creationId xmlns:a16="http://schemas.microsoft.com/office/drawing/2014/main" id="{3BFB12BD-F2BC-4F1D-8ED8-EC68A1A2189D}"/>
               </a:ext>
             </a:extLst>
           </p:cNvPr>
@@ -13545,7 +13545,7 @@
           <p:cNvPr id="25" name="">
             <a:extLst xmlns:a="http://schemas.openxmlformats.org/drawingml/2006/main">
               <a:ext uri="{FF2B5EF4-FFF2-40B4-BE49-F238E27FC236}">
-                <a16:creationId xmlns:a16="http://schemas.microsoft.com/office/drawing/2014/main" id="{F6255D6E-A177-474A-B0F1-3B4AFA95C5A4}"/>
+                <a16:creationId xmlns:a16="http://schemas.microsoft.com/office/drawing/2014/main" id="{4E6CDC2E-2128-45D9-A2F4-DA9FA91C0648}"/>
               </a:ext>
             </a:extLst>
           </p:cNvPr>
@@ -13576,7 +13576,7 @@
           <p:cNvPr id="26" name="">
             <a:extLst xmlns:a="http://schemas.openxmlformats.org/drawingml/2006/main">
               <a:ext uri="{FF2B5EF4-FFF2-40B4-BE49-F238E27FC236}">
-                <a16:creationId xmlns:a16="http://schemas.microsoft.com/office/drawing/2014/main" id="{42626EB4-B6D2-46CD-A223-4FE521C967E5}"/>
+                <a16:creationId xmlns:a16="http://schemas.microsoft.com/office/drawing/2014/main" id="{223878CF-6E52-480C-A942-AD967EA69FE6}"/>
               </a:ext>
             </a:extLst>
           </p:cNvPr>
@@ -13628,7 +13628,7 @@
           <p:cNvPr id="27" name="">
             <a:extLst xmlns:a="http://schemas.openxmlformats.org/drawingml/2006/main">
               <a:ext uri="{FF2B5EF4-FFF2-40B4-BE49-F238E27FC236}">
-                <a16:creationId xmlns:a16="http://schemas.microsoft.com/office/drawing/2014/main" id="{047B4466-9EE2-41DD-88ED-5014A585FC4D}"/>
+                <a16:creationId xmlns:a16="http://schemas.microsoft.com/office/drawing/2014/main" id="{3669741B-94DD-486B-9FC3-C84207F2D653}"/>
               </a:ext>
             </a:extLst>
           </p:cNvPr>
@@ -13680,7 +13680,7 @@
           <p:cNvPr id="28" name="">
             <a:extLst xmlns:a="http://schemas.openxmlformats.org/drawingml/2006/main">
               <a:ext uri="{FF2B5EF4-FFF2-40B4-BE49-F238E27FC236}">
-                <a16:creationId xmlns:a16="http://schemas.microsoft.com/office/drawing/2014/main" id="{B73ABAD1-FC74-4406-A0D4-26E3911B1118}"/>
+                <a16:creationId xmlns:a16="http://schemas.microsoft.com/office/drawing/2014/main" id="{C5219A42-8B15-4105-A65C-30D513088A25}"/>
               </a:ext>
             </a:extLst>
           </p:cNvPr>
@@ -13732,7 +13732,7 @@
           <p:cNvPr id="29" name="">
             <a:extLst xmlns:a="http://schemas.openxmlformats.org/drawingml/2006/main">
               <a:ext uri="{FF2B5EF4-FFF2-40B4-BE49-F238E27FC236}">
-                <a16:creationId xmlns:a16="http://schemas.microsoft.com/office/drawing/2014/main" id="{1B002573-B452-4989-B600-8597F9A40750}"/>
+                <a16:creationId xmlns:a16="http://schemas.microsoft.com/office/drawing/2014/main" id="{C7849F89-EE6E-4298-9A1D-95A5224B2593}"/>
               </a:ext>
             </a:extLst>
           </p:cNvPr>
@@ -13784,7 +13784,7 @@
           <p:cNvPr id="30" name="">
             <a:extLst xmlns:a="http://schemas.openxmlformats.org/drawingml/2006/main">
               <a:ext uri="{FF2B5EF4-FFF2-40B4-BE49-F238E27FC236}">
-                <a16:creationId xmlns:a16="http://schemas.microsoft.com/office/drawing/2014/main" id="{F2F03900-9520-44A9-B52D-E39C306F6CCD}"/>
+                <a16:creationId xmlns:a16="http://schemas.microsoft.com/office/drawing/2014/main" id="{6135087C-94DF-483B-842A-D990F635FAB2}"/>
               </a:ext>
             </a:extLst>
           </p:cNvPr>
@@ -13836,7 +13836,7 @@
           <p:cNvPr id="31" name="">
             <a:extLst xmlns:a="http://schemas.openxmlformats.org/drawingml/2006/main">
               <a:ext uri="{FF2B5EF4-FFF2-40B4-BE49-F238E27FC236}">
-                <a16:creationId xmlns:a16="http://schemas.microsoft.com/office/drawing/2014/main" id="{1392536F-52AC-4C8F-8E4E-D16B698B896C}"/>
+                <a16:creationId xmlns:a16="http://schemas.microsoft.com/office/drawing/2014/main" id="{C33DA355-0F6B-486E-9C5C-F2F8C35F0BD1}"/>
               </a:ext>
             </a:extLst>
           </p:cNvPr>
@@ -13867,7 +13867,7 @@
           <p:cNvPr id="32" name="">
             <a:extLst xmlns:a="http://schemas.openxmlformats.org/drawingml/2006/main">
               <a:ext uri="{FF2B5EF4-FFF2-40B4-BE49-F238E27FC236}">
-                <a16:creationId xmlns:a16="http://schemas.microsoft.com/office/drawing/2014/main" id="{F8E0242F-E460-4651-8B4D-B811EFE01402}"/>
+                <a16:creationId xmlns:a16="http://schemas.microsoft.com/office/drawing/2014/main" id="{F05C45DD-61B8-4481-BA8E-48461A25F82A}"/>
               </a:ext>
             </a:extLst>
           </p:cNvPr>
@@ -13919,7 +13919,7 @@
           <p:cNvPr id="33" name="">
             <a:extLst xmlns:a="http://schemas.openxmlformats.org/drawingml/2006/main">
               <a:ext uri="{FF2B5EF4-FFF2-40B4-BE49-F238E27FC236}">
-                <a16:creationId xmlns:a16="http://schemas.microsoft.com/office/drawing/2014/main" id="{84E1AE61-D147-4F25-8997-A04016F41326}"/>
+                <a16:creationId xmlns:a16="http://schemas.microsoft.com/office/drawing/2014/main" id="{6CD3B0F2-4F88-49C2-8A48-DB7DF9FFA580}"/>
               </a:ext>
             </a:extLst>
           </p:cNvPr>
@@ -13971,7 +13971,7 @@
           <p:cNvPr id="34" name="">
             <a:extLst xmlns:a="http://schemas.openxmlformats.org/drawingml/2006/main">
               <a:ext uri="{FF2B5EF4-FFF2-40B4-BE49-F238E27FC236}">
-                <a16:creationId xmlns:a16="http://schemas.microsoft.com/office/drawing/2014/main" id="{113F7730-7EC9-40FC-8960-352D67D3DDA5}"/>
+                <a16:creationId xmlns:a16="http://schemas.microsoft.com/office/drawing/2014/main" id="{BB6B918D-3E66-4C81-9142-3A4B40740157}"/>
               </a:ext>
             </a:extLst>
           </p:cNvPr>
@@ -14023,7 +14023,7 @@
           <p:cNvPr id="35" name="">
             <a:extLst xmlns:a="http://schemas.openxmlformats.org/drawingml/2006/main">
               <a:ext uri="{FF2B5EF4-FFF2-40B4-BE49-F238E27FC236}">
-                <a16:creationId xmlns:a16="http://schemas.microsoft.com/office/drawing/2014/main" id="{8104A9E5-E211-42D6-B0F5-B628FFF5A5E5}"/>
+                <a16:creationId xmlns:a16="http://schemas.microsoft.com/office/drawing/2014/main" id="{A927C82F-40FD-4D28-878F-BDEE371E23D1}"/>
               </a:ext>
             </a:extLst>
           </p:cNvPr>
@@ -14075,7 +14075,7 @@
           <p:cNvPr id="36" name="">
             <a:extLst xmlns:a="http://schemas.openxmlformats.org/drawingml/2006/main">
               <a:ext uri="{FF2B5EF4-FFF2-40B4-BE49-F238E27FC236}">
-                <a16:creationId xmlns:a16="http://schemas.microsoft.com/office/drawing/2014/main" id="{68665BAA-548F-4D65-B71C-599106E36594}"/>
+                <a16:creationId xmlns:a16="http://schemas.microsoft.com/office/drawing/2014/main" id="{C24E0120-8F72-4A01-8B2C-812AD75E6AC6}"/>
               </a:ext>
             </a:extLst>
           </p:cNvPr>
@@ -14127,7 +14127,7 @@
           <p:cNvPr id="37" name="">
             <a:extLst xmlns:a="http://schemas.openxmlformats.org/drawingml/2006/main">
               <a:ext uri="{FF2B5EF4-FFF2-40B4-BE49-F238E27FC236}">
-                <a16:creationId xmlns:a16="http://schemas.microsoft.com/office/drawing/2014/main" id="{4890E293-163B-418F-80ED-C0A15BD2DCC0}"/>
+                <a16:creationId xmlns:a16="http://schemas.microsoft.com/office/drawing/2014/main" id="{782A6E3B-3566-4BA1-8D9C-ED215D9DA987}"/>
               </a:ext>
             </a:extLst>
           </p:cNvPr>
@@ -14158,7 +14158,7 @@
           <p:cNvPr id="38" name="">
             <a:extLst xmlns:a="http://schemas.openxmlformats.org/drawingml/2006/main">
               <a:ext uri="{FF2B5EF4-FFF2-40B4-BE49-F238E27FC236}">
-                <a16:creationId xmlns:a16="http://schemas.microsoft.com/office/drawing/2014/main" id="{00BB3466-DA80-4DEA-A340-7C74DF205468}"/>
+                <a16:creationId xmlns:a16="http://schemas.microsoft.com/office/drawing/2014/main" id="{EEE7A8B4-3343-4B02-9109-735CD9437DC7}"/>
               </a:ext>
             </a:extLst>
           </p:cNvPr>
@@ -14189,7 +14189,7 @@
           <p:cNvPr id="39" name="">
             <a:extLst xmlns:a="http://schemas.openxmlformats.org/drawingml/2006/main">
               <a:ext uri="{FF2B5EF4-FFF2-40B4-BE49-F238E27FC236}">
-                <a16:creationId xmlns:a16="http://schemas.microsoft.com/office/drawing/2014/main" id="{6D4BA022-27B4-44EA-ADD9-D369CE9747F8}"/>
+                <a16:creationId xmlns:a16="http://schemas.microsoft.com/office/drawing/2014/main" id="{6C79774E-C6B1-4313-8D86-825A7450B01E}"/>
               </a:ext>
             </a:extLst>
           </p:cNvPr>
@@ -14241,7 +14241,7 @@
           <p:cNvPr id="40" name="">
             <a:extLst xmlns:a="http://schemas.openxmlformats.org/drawingml/2006/main">
               <a:ext uri="{FF2B5EF4-FFF2-40B4-BE49-F238E27FC236}">
-                <a16:creationId xmlns:a16="http://schemas.microsoft.com/office/drawing/2014/main" id="{685E55D4-499C-4A78-B172-A5E3C7868D12}"/>
+                <a16:creationId xmlns:a16="http://schemas.microsoft.com/office/drawing/2014/main" id="{B8E2B698-5A7E-412C-801C-B49F80159631}"/>
               </a:ext>
             </a:extLst>
           </p:cNvPr>
@@ -14293,7 +14293,7 @@
           <p:cNvPr id="41" name="">
             <a:extLst xmlns:a="http://schemas.openxmlformats.org/drawingml/2006/main">
               <a:ext uri="{FF2B5EF4-FFF2-40B4-BE49-F238E27FC236}">
-                <a16:creationId xmlns:a16="http://schemas.microsoft.com/office/drawing/2014/main" id="{223CD56E-E59D-434E-8292-4C980C9BACD6}"/>
+                <a16:creationId xmlns:a16="http://schemas.microsoft.com/office/drawing/2014/main" id="{14D4A538-BE71-4A39-B781-874F9493E89C}"/>
               </a:ext>
             </a:extLst>
           </p:cNvPr>
@@ -14345,7 +14345,7 @@
           <p:cNvPr id="42" name="">
             <a:extLst xmlns:a="http://schemas.openxmlformats.org/drawingml/2006/main">
               <a:ext uri="{FF2B5EF4-FFF2-40B4-BE49-F238E27FC236}">
-                <a16:creationId xmlns:a16="http://schemas.microsoft.com/office/drawing/2014/main" id="{4EE76372-474A-4FEF-AD8C-0FE68C4D94B9}"/>
+                <a16:creationId xmlns:a16="http://schemas.microsoft.com/office/drawing/2014/main" id="{EA2E32E2-EF81-4584-9EE3-388C5004632A}"/>
               </a:ext>
             </a:extLst>
           </p:cNvPr>
@@ -14397,7 +14397,7 @@
           <p:cNvPr id="43" name="">
             <a:extLst xmlns:a="http://schemas.openxmlformats.org/drawingml/2006/main">
               <a:ext uri="{FF2B5EF4-FFF2-40B4-BE49-F238E27FC236}">
-                <a16:creationId xmlns:a16="http://schemas.microsoft.com/office/drawing/2014/main" id="{E874D885-E25A-475E-B201-70FED7814547}"/>
+                <a16:creationId xmlns:a16="http://schemas.microsoft.com/office/drawing/2014/main" id="{59976F6E-7EAB-417C-B1A5-DFC8C17380B6}"/>
               </a:ext>
             </a:extLst>
           </p:cNvPr>
@@ -14449,7 +14449,7 @@
           <p:cNvPr id="44" name="">
             <a:extLst xmlns:a="http://schemas.openxmlformats.org/drawingml/2006/main">
               <a:ext uri="{FF2B5EF4-FFF2-40B4-BE49-F238E27FC236}">
-                <a16:creationId xmlns:a16="http://schemas.microsoft.com/office/drawing/2014/main" id="{51B1720D-C674-4C6A-AA67-8C046F413083}"/>
+                <a16:creationId xmlns:a16="http://schemas.microsoft.com/office/drawing/2014/main" id="{E564B8EE-0D3B-45AD-A382-B18500E7C7D6}"/>
               </a:ext>
             </a:extLst>
           </p:cNvPr>
@@ -14480,7 +14480,7 @@
           <p:cNvPr id="45" name="">
             <a:extLst xmlns:a="http://schemas.openxmlformats.org/drawingml/2006/main">
               <a:ext uri="{FF2B5EF4-FFF2-40B4-BE49-F238E27FC236}">
-                <a16:creationId xmlns:a16="http://schemas.microsoft.com/office/drawing/2014/main" id="{00DB945B-B311-4CAC-B6B1-C87842260D66}"/>
+                <a16:creationId xmlns:a16="http://schemas.microsoft.com/office/drawing/2014/main" id="{BEAC6175-7591-481C-AF6F-6158C87249F2}"/>
               </a:ext>
             </a:extLst>
           </p:cNvPr>
@@ -14532,7 +14532,7 @@
           <p:cNvPr id="46" name="">
             <a:extLst xmlns:a="http://schemas.openxmlformats.org/drawingml/2006/main">
               <a:ext uri="{FF2B5EF4-FFF2-40B4-BE49-F238E27FC236}">
-                <a16:creationId xmlns:a16="http://schemas.microsoft.com/office/drawing/2014/main" id="{183D4C89-5CDE-46CA-9B58-72B7414E9C65}"/>
+                <a16:creationId xmlns:a16="http://schemas.microsoft.com/office/drawing/2014/main" id="{C1A03EE5-8CBD-47C7-83CE-743CE40C9E81}"/>
               </a:ext>
             </a:extLst>
           </p:cNvPr>
@@ -14584,7 +14584,7 @@
           <p:cNvPr id="47" name="">
             <a:extLst xmlns:a="http://schemas.openxmlformats.org/drawingml/2006/main">
               <a:ext uri="{FF2B5EF4-FFF2-40B4-BE49-F238E27FC236}">
-                <a16:creationId xmlns:a16="http://schemas.microsoft.com/office/drawing/2014/main" id="{1FF6943C-97CC-42E8-8443-637EAE971933}"/>
+                <a16:creationId xmlns:a16="http://schemas.microsoft.com/office/drawing/2014/main" id="{15C1C734-FB76-4ABC-AC81-6E6991FEA811}"/>
               </a:ext>
             </a:extLst>
           </p:cNvPr>
@@ -14636,7 +14636,7 @@
           <p:cNvPr id="48" name="">
             <a:extLst xmlns:a="http://schemas.openxmlformats.org/drawingml/2006/main">
               <a:ext uri="{FF2B5EF4-FFF2-40B4-BE49-F238E27FC236}">
-                <a16:creationId xmlns:a16="http://schemas.microsoft.com/office/drawing/2014/main" id="{0AB99B45-FDEB-40CA-B2EF-9E4D951B324A}"/>
+                <a16:creationId xmlns:a16="http://schemas.microsoft.com/office/drawing/2014/main" id="{74D512B3-67F3-4460-8E3F-D4A1B7FAD32C}"/>
               </a:ext>
             </a:extLst>
           </p:cNvPr>
@@ -14688,7 +14688,7 @@
           <p:cNvPr id="49" name="">
             <a:extLst xmlns:a="http://schemas.openxmlformats.org/drawingml/2006/main">
               <a:ext uri="{FF2B5EF4-FFF2-40B4-BE49-F238E27FC236}">
-                <a16:creationId xmlns:a16="http://schemas.microsoft.com/office/drawing/2014/main" id="{05700A82-8B9A-443B-823D-6C65BD376843}"/>
+                <a16:creationId xmlns:a16="http://schemas.microsoft.com/office/drawing/2014/main" id="{85D6D8D1-84AD-4CE3-B5AB-8D2FF680AB53}"/>
               </a:ext>
             </a:extLst>
           </p:cNvPr>
@@ -14740,7 +14740,7 @@
           <p:cNvPr id="50" name="">
             <a:extLst xmlns:a="http://schemas.openxmlformats.org/drawingml/2006/main">
               <a:ext uri="{FF2B5EF4-FFF2-40B4-BE49-F238E27FC236}">
-                <a16:creationId xmlns:a16="http://schemas.microsoft.com/office/drawing/2014/main" id="{26FDC256-F98F-443C-99D2-4F579A28F91B}"/>
+                <a16:creationId xmlns:a16="http://schemas.microsoft.com/office/drawing/2014/main" id="{0761A7E8-5C5D-4AEF-910E-CA6E1247BC1F}"/>
               </a:ext>
             </a:extLst>
           </p:cNvPr>
@@ -14771,7 +14771,7 @@
           <p:cNvPr id="51" name="">
             <a:extLst xmlns:a="http://schemas.openxmlformats.org/drawingml/2006/main">
               <a:ext uri="{FF2B5EF4-FFF2-40B4-BE49-F238E27FC236}">
-                <a16:creationId xmlns:a16="http://schemas.microsoft.com/office/drawing/2014/main" id="{16B0F9DC-B9A0-4B8A-9606-8C6B8958F85A}"/>
+                <a16:creationId xmlns:a16="http://schemas.microsoft.com/office/drawing/2014/main" id="{B85F98FC-6803-4472-AC2B-B023CE2F278A}"/>
               </a:ext>
             </a:extLst>
           </p:cNvPr>
@@ -14802,7 +14802,7 @@
           <p:cNvPr id="52" name="">
             <a:extLst xmlns:a="http://schemas.openxmlformats.org/drawingml/2006/main">
               <a:ext uri="{FF2B5EF4-FFF2-40B4-BE49-F238E27FC236}">
-                <a16:creationId xmlns:a16="http://schemas.microsoft.com/office/drawing/2014/main" id="{7985CAE4-EA17-469D-9A87-E9BEBFD77053}"/>
+                <a16:creationId xmlns:a16="http://schemas.microsoft.com/office/drawing/2014/main" id="{C3715B3C-3BB6-4859-8EBE-90BAAF1173CD}"/>
               </a:ext>
             </a:extLst>
           </p:cNvPr>
@@ -14854,7 +14854,7 @@
           <p:cNvPr id="53" name="">
             <a:extLst xmlns:a="http://schemas.openxmlformats.org/drawingml/2006/main">
               <a:ext uri="{FF2B5EF4-FFF2-40B4-BE49-F238E27FC236}">
-                <a16:creationId xmlns:a16="http://schemas.microsoft.com/office/drawing/2014/main" id="{AE13894E-897E-4723-BD56-6B27CD63DFC1}"/>
+                <a16:creationId xmlns:a16="http://schemas.microsoft.com/office/drawing/2014/main" id="{9805DF10-0C3F-4FB1-8E62-92405571CAAA}"/>
               </a:ext>
             </a:extLst>
           </p:cNvPr>
@@ -14906,7 +14906,7 @@
           <p:cNvPr id="54" name="">
             <a:extLst xmlns:a="http://schemas.openxmlformats.org/drawingml/2006/main">
               <a:ext uri="{FF2B5EF4-FFF2-40B4-BE49-F238E27FC236}">
-                <a16:creationId xmlns:a16="http://schemas.microsoft.com/office/drawing/2014/main" id="{60EA92A9-8A27-455E-9DC0-184F985097AA}"/>
+                <a16:creationId xmlns:a16="http://schemas.microsoft.com/office/drawing/2014/main" id="{CCD03DD0-FD32-4432-9CBC-FDE91FD90063}"/>
               </a:ext>
             </a:extLst>
           </p:cNvPr>
@@ -14958,7 +14958,7 @@
           <p:cNvPr id="55" name="">
             <a:extLst xmlns:a="http://schemas.openxmlformats.org/drawingml/2006/main">
               <a:ext uri="{FF2B5EF4-FFF2-40B4-BE49-F238E27FC236}">
-                <a16:creationId xmlns:a16="http://schemas.microsoft.com/office/drawing/2014/main" id="{8D02B7F9-29D3-464B-BB7A-FB2344628488}"/>
+                <a16:creationId xmlns:a16="http://schemas.microsoft.com/office/drawing/2014/main" id="{F5F16BC5-5F7E-45CF-BB59-6F88BAED5ECC}"/>
               </a:ext>
             </a:extLst>
           </p:cNvPr>
@@ -15010,7 +15010,7 @@
           <p:cNvPr id="56" name="">
             <a:extLst xmlns:a="http://schemas.openxmlformats.org/drawingml/2006/main">
               <a:ext uri="{FF2B5EF4-FFF2-40B4-BE49-F238E27FC236}">
-                <a16:creationId xmlns:a16="http://schemas.microsoft.com/office/drawing/2014/main" id="{22D7D308-9472-4E34-9028-F622166BC9B6}"/>
+                <a16:creationId xmlns:a16="http://schemas.microsoft.com/office/drawing/2014/main" id="{A4D27F13-A247-4510-ACF8-E7150AA9CC02}"/>
               </a:ext>
             </a:extLst>
           </p:cNvPr>
@@ -15062,7 +15062,7 @@
           <p:cNvPr id="57" name="">
             <a:extLst xmlns:a="http://schemas.openxmlformats.org/drawingml/2006/main">
               <a:ext uri="{FF2B5EF4-FFF2-40B4-BE49-F238E27FC236}">
-                <a16:creationId xmlns:a16="http://schemas.microsoft.com/office/drawing/2014/main" id="{671E76ED-4881-4641-BB4A-89C33AD11DA7}"/>
+                <a16:creationId xmlns:a16="http://schemas.microsoft.com/office/drawing/2014/main" id="{51564A54-F5C8-416F-9210-6293BBD172B4}"/>
               </a:ext>
             </a:extLst>
           </p:cNvPr>
@@ -15093,7 +15093,7 @@
           <p:cNvPr id="58" name="">
             <a:extLst xmlns:a="http://schemas.openxmlformats.org/drawingml/2006/main">
               <a:ext uri="{FF2B5EF4-FFF2-40B4-BE49-F238E27FC236}">
-                <a16:creationId xmlns:a16="http://schemas.microsoft.com/office/drawing/2014/main" id="{3AE65A8F-CB74-4067-937A-FC3189D325E1}"/>
+                <a16:creationId xmlns:a16="http://schemas.microsoft.com/office/drawing/2014/main" id="{A3624D95-4B53-4600-B857-E90E9A4197D8}"/>
               </a:ext>
             </a:extLst>
           </p:cNvPr>
@@ -15145,7 +15145,7 @@
           <p:cNvPr id="59" name="">
             <a:extLst xmlns:a="http://schemas.openxmlformats.org/drawingml/2006/main">
               <a:ext uri="{FF2B5EF4-FFF2-40B4-BE49-F238E27FC236}">
-                <a16:creationId xmlns:a16="http://schemas.microsoft.com/office/drawing/2014/main" id="{3986975C-9621-408D-96CD-754A2AA5ABD0}"/>
+                <a16:creationId xmlns:a16="http://schemas.microsoft.com/office/drawing/2014/main" id="{33BB7128-9353-4C70-BB19-CAFBA085595A}"/>
               </a:ext>
             </a:extLst>
           </p:cNvPr>
@@ -15197,7 +15197,7 @@
           <p:cNvPr id="60" name="">
             <a:extLst xmlns:a="http://schemas.openxmlformats.org/drawingml/2006/main">
               <a:ext uri="{FF2B5EF4-FFF2-40B4-BE49-F238E27FC236}">
-                <a16:creationId xmlns:a16="http://schemas.microsoft.com/office/drawing/2014/main" id="{BDC11B55-6B45-46C6-9F02-B98A970C895A}"/>
+                <a16:creationId xmlns:a16="http://schemas.microsoft.com/office/drawing/2014/main" id="{323280C8-E84B-42BE-9E9E-8632B77FC88D}"/>
               </a:ext>
             </a:extLst>
           </p:cNvPr>
@@ -15249,7 +15249,7 @@
           <p:cNvPr id="61" name="">
             <a:extLst xmlns:a="http://schemas.openxmlformats.org/drawingml/2006/main">
               <a:ext uri="{FF2B5EF4-FFF2-40B4-BE49-F238E27FC236}">
-                <a16:creationId xmlns:a16="http://schemas.microsoft.com/office/drawing/2014/main" id="{EB3CB58D-0876-45FC-B46B-4C7610F6FEA4}"/>
+                <a16:creationId xmlns:a16="http://schemas.microsoft.com/office/drawing/2014/main" id="{05A2597F-7F9E-4948-B74A-ABB11CC59E99}"/>
               </a:ext>
             </a:extLst>
           </p:cNvPr>
@@ -15301,7 +15301,7 @@
           <p:cNvPr id="62" name="">
             <a:extLst xmlns:a="http://schemas.openxmlformats.org/drawingml/2006/main">
               <a:ext uri="{FF2B5EF4-FFF2-40B4-BE49-F238E27FC236}">
-                <a16:creationId xmlns:a16="http://schemas.microsoft.com/office/drawing/2014/main" id="{CB419EB0-9439-4ACD-9A6D-20A5FF761C00}"/>
+                <a16:creationId xmlns:a16="http://schemas.microsoft.com/office/drawing/2014/main" id="{E1A4D967-F1EA-4FE6-B736-AC4A57638EB6}"/>
               </a:ext>
             </a:extLst>
           </p:cNvPr>
@@ -15353,7 +15353,7 @@
           <p:cNvPr id="63" name="">
             <a:extLst xmlns:a="http://schemas.openxmlformats.org/drawingml/2006/main">
               <a:ext uri="{FF2B5EF4-FFF2-40B4-BE49-F238E27FC236}">
-                <a16:creationId xmlns:a16="http://schemas.microsoft.com/office/drawing/2014/main" id="{7BD0ABB0-15D6-4E14-8175-1AC4BA037E0C}"/>
+                <a16:creationId xmlns:a16="http://schemas.microsoft.com/office/drawing/2014/main" id="{F2D98442-0A3F-42EE-B267-EA55A981A9A2}"/>
               </a:ext>
             </a:extLst>
           </p:cNvPr>
@@ -15384,7 +15384,7 @@
           <p:cNvPr id="64" name="">
             <a:extLst xmlns:a="http://schemas.openxmlformats.org/drawingml/2006/main">
               <a:ext uri="{FF2B5EF4-FFF2-40B4-BE49-F238E27FC236}">
-                <a16:creationId xmlns:a16="http://schemas.microsoft.com/office/drawing/2014/main" id="{C6963FC4-DD83-429D-A01F-31A5E48E965A}"/>
+                <a16:creationId xmlns:a16="http://schemas.microsoft.com/office/drawing/2014/main" id="{2D94269E-D5BA-49A0-8B94-38AD352B4830}"/>
               </a:ext>
             </a:extLst>
           </p:cNvPr>
@@ -15415,7 +15415,7 @@
           <p:cNvPr id="65" name="">
             <a:extLst xmlns:a="http://schemas.openxmlformats.org/drawingml/2006/main">
               <a:ext uri="{FF2B5EF4-FFF2-40B4-BE49-F238E27FC236}">
-                <a16:creationId xmlns:a16="http://schemas.microsoft.com/office/drawing/2014/main" id="{5E4BE725-58F7-47C2-98E7-511A4AC56A49}"/>
+                <a16:creationId xmlns:a16="http://schemas.microsoft.com/office/drawing/2014/main" id="{50A600CF-B6E2-4E5C-AD70-1BD6BCEEA781}"/>
               </a:ext>
             </a:extLst>
           </p:cNvPr>
@@ -15467,7 +15467,7 @@
           <p:cNvPr id="66" name="">
             <a:extLst xmlns:a="http://schemas.openxmlformats.org/drawingml/2006/main">
               <a:ext uri="{FF2B5EF4-FFF2-40B4-BE49-F238E27FC236}">
-                <a16:creationId xmlns:a16="http://schemas.microsoft.com/office/drawing/2014/main" id="{FE12B4B2-29E2-42A7-A5A1-11207EB7872A}"/>
+                <a16:creationId xmlns:a16="http://schemas.microsoft.com/office/drawing/2014/main" id="{E98ED4CA-FF1F-4010-B3D0-63D65A642C55}"/>
               </a:ext>
             </a:extLst>
           </p:cNvPr>
@@ -15519,7 +15519,7 @@
           <p:cNvPr id="67" name="">
             <a:extLst xmlns:a="http://schemas.openxmlformats.org/drawingml/2006/main">
               <a:ext uri="{FF2B5EF4-FFF2-40B4-BE49-F238E27FC236}">
-                <a16:creationId xmlns:a16="http://schemas.microsoft.com/office/drawing/2014/main" id="{53652C99-A3FC-403E-81BD-95C9A9062A29}"/>
+                <a16:creationId xmlns:a16="http://schemas.microsoft.com/office/drawing/2014/main" id="{8364BC7A-8CA6-4749-9FE4-46A78A2981E5}"/>
               </a:ext>
             </a:extLst>
           </p:cNvPr>
@@ -15571,7 +15571,7 @@
           <p:cNvPr id="68" name="">
             <a:extLst xmlns:a="http://schemas.openxmlformats.org/drawingml/2006/main">
               <a:ext uri="{FF2B5EF4-FFF2-40B4-BE49-F238E27FC236}">
-                <a16:creationId xmlns:a16="http://schemas.microsoft.com/office/drawing/2014/main" id="{0F827752-BC91-424A-845E-D4CE267CBB85}"/>
+                <a16:creationId xmlns:a16="http://schemas.microsoft.com/office/drawing/2014/main" id="{65EEB722-8AE5-4DCC-B73D-89A31C39F54F}"/>
               </a:ext>
             </a:extLst>
           </p:cNvPr>
@@ -15623,7 +15623,7 @@
           <p:cNvPr id="69" name="">
             <a:extLst xmlns:a="http://schemas.openxmlformats.org/drawingml/2006/main">
               <a:ext uri="{FF2B5EF4-FFF2-40B4-BE49-F238E27FC236}">
-                <a16:creationId xmlns:a16="http://schemas.microsoft.com/office/drawing/2014/main" id="{EA943845-13A4-48F6-9412-CB3B4685A0C0}"/>
+                <a16:creationId xmlns:a16="http://schemas.microsoft.com/office/drawing/2014/main" id="{146894BD-E7FE-4C88-9528-A8C2DAD5B3BC}"/>
               </a:ext>
             </a:extLst>
           </p:cNvPr>
@@ -15675,7 +15675,7 @@
           <p:cNvPr id="70" name="">
             <a:extLst xmlns:a="http://schemas.openxmlformats.org/drawingml/2006/main">
               <a:ext uri="{FF2B5EF4-FFF2-40B4-BE49-F238E27FC236}">
-                <a16:creationId xmlns:a16="http://schemas.microsoft.com/office/drawing/2014/main" id="{BB1476D2-C535-412C-BD9B-800F88B17C51}"/>
+                <a16:creationId xmlns:a16="http://schemas.microsoft.com/office/drawing/2014/main" id="{B3B553B8-EB32-4A96-8A4B-50B551120F30}"/>
               </a:ext>
             </a:extLst>
           </p:cNvPr>
@@ -15706,7 +15706,7 @@
           <p:cNvPr id="71" name="">
             <a:extLst xmlns:a="http://schemas.openxmlformats.org/drawingml/2006/main">
               <a:ext uri="{FF2B5EF4-FFF2-40B4-BE49-F238E27FC236}">
-                <a16:creationId xmlns:a16="http://schemas.microsoft.com/office/drawing/2014/main" id="{DB3EA9EF-AF10-44CE-BC51-FA9557A20DA9}"/>
+                <a16:creationId xmlns:a16="http://schemas.microsoft.com/office/drawing/2014/main" id="{1F4E95ED-8D15-49D9-8944-3697D26DC0B9}"/>
               </a:ext>
             </a:extLst>
           </p:cNvPr>
@@ -15758,7 +15758,7 @@
           <p:cNvPr id="72" name="">
             <a:extLst xmlns:a="http://schemas.openxmlformats.org/drawingml/2006/main">
               <a:ext uri="{FF2B5EF4-FFF2-40B4-BE49-F238E27FC236}">
-                <a16:creationId xmlns:a16="http://schemas.microsoft.com/office/drawing/2014/main" id="{D2A8F67F-6310-411A-ABC6-C1591240636C}"/>
+                <a16:creationId xmlns:a16="http://schemas.microsoft.com/office/drawing/2014/main" id="{CCDD3894-205C-4822-91E4-8F038A63E0F6}"/>
               </a:ext>
             </a:extLst>
           </p:cNvPr>
@@ -15810,7 +15810,7 @@
           <p:cNvPr id="73" name="">
             <a:extLst xmlns:a="http://schemas.openxmlformats.org/drawingml/2006/main">
               <a:ext uri="{FF2B5EF4-FFF2-40B4-BE49-F238E27FC236}">
-                <a16:creationId xmlns:a16="http://schemas.microsoft.com/office/drawing/2014/main" id="{A8A61FA1-40D6-4D78-8590-48F73D78F5D7}"/>
+                <a16:creationId xmlns:a16="http://schemas.microsoft.com/office/drawing/2014/main" id="{C0911F34-6CBA-4B10-8ED4-C75D17598583}"/>
               </a:ext>
             </a:extLst>
           </p:cNvPr>
@@ -15862,7 +15862,7 @@
           <p:cNvPr id="74" name="">
             <a:extLst xmlns:a="http://schemas.openxmlformats.org/drawingml/2006/main">
               <a:ext uri="{FF2B5EF4-FFF2-40B4-BE49-F238E27FC236}">
-                <a16:creationId xmlns:a16="http://schemas.microsoft.com/office/drawing/2014/main" id="{FF5E39A3-403F-4EA1-B2C8-3E2A40CC4B48}"/>
+                <a16:creationId xmlns:a16="http://schemas.microsoft.com/office/drawing/2014/main" id="{0A78743A-86BF-4E6D-9CE8-C4E041B2CC6B}"/>
               </a:ext>
             </a:extLst>
           </p:cNvPr>
@@ -15914,7 +15914,7 @@
           <p:cNvPr id="75" name="">
             <a:extLst xmlns:a="http://schemas.openxmlformats.org/drawingml/2006/main">
               <a:ext uri="{FF2B5EF4-FFF2-40B4-BE49-F238E27FC236}">
-                <a16:creationId xmlns:a16="http://schemas.microsoft.com/office/drawing/2014/main" id="{03424A42-DEBA-4490-9391-B39D99FEF337}"/>
+                <a16:creationId xmlns:a16="http://schemas.microsoft.com/office/drawing/2014/main" id="{F7C92C78-6987-4F79-B01D-C111FBFD269F}"/>
               </a:ext>
             </a:extLst>
           </p:cNvPr>
@@ -15966,7 +15966,7 @@
           <p:cNvPr id="76" name="">
             <a:extLst xmlns:a="http://schemas.openxmlformats.org/drawingml/2006/main">
               <a:ext uri="{FF2B5EF4-FFF2-40B4-BE49-F238E27FC236}">
-                <a16:creationId xmlns:a16="http://schemas.microsoft.com/office/drawing/2014/main" id="{A644C8DD-583D-47A4-8209-0D78BB060A30}"/>
+                <a16:creationId xmlns:a16="http://schemas.microsoft.com/office/drawing/2014/main" id="{B63D66BF-7A85-40DB-941D-65DC8674A407}"/>
               </a:ext>
             </a:extLst>
           </p:cNvPr>
@@ -15997,7 +15997,7 @@
           <p:cNvPr id="77" name="">
             <a:extLst xmlns:a="http://schemas.openxmlformats.org/drawingml/2006/main">
               <a:ext uri="{FF2B5EF4-FFF2-40B4-BE49-F238E27FC236}">
-                <a16:creationId xmlns:a16="http://schemas.microsoft.com/office/drawing/2014/main" id="{820C7B8B-22B3-4238-80CC-C93E8CB3EE02}"/>
+                <a16:creationId xmlns:a16="http://schemas.microsoft.com/office/drawing/2014/main" id="{03C68413-8E80-458B-88B1-6EE62A30FF08}"/>
               </a:ext>
             </a:extLst>
           </p:cNvPr>
@@ -16028,7 +16028,7 @@
           <p:cNvPr id="78" name="">
             <a:extLst xmlns:a="http://schemas.openxmlformats.org/drawingml/2006/main">
               <a:ext uri="{FF2B5EF4-FFF2-40B4-BE49-F238E27FC236}">
-                <a16:creationId xmlns:a16="http://schemas.microsoft.com/office/drawing/2014/main" id="{5DC9FABE-BBC9-4D99-8446-DE6AA55DED36}"/>
+                <a16:creationId xmlns:a16="http://schemas.microsoft.com/office/drawing/2014/main" id="{50089866-52FD-4C3D-BD0C-51B255EF5777}"/>
               </a:ext>
             </a:extLst>
           </p:cNvPr>
@@ -16080,7 +16080,7 @@
           <p:cNvPr id="79" name="">
             <a:extLst xmlns:a="http://schemas.openxmlformats.org/drawingml/2006/main">
               <a:ext uri="{FF2B5EF4-FFF2-40B4-BE49-F238E27FC236}">
-                <a16:creationId xmlns:a16="http://schemas.microsoft.com/office/drawing/2014/main" id="{D2A396FA-D275-4FB9-A02F-8CCC6B617147}"/>
+                <a16:creationId xmlns:a16="http://schemas.microsoft.com/office/drawing/2014/main" id="{5D24B9C0-F1FE-4BE7-BEFF-C8FE044CCA77}"/>
               </a:ext>
             </a:extLst>
           </p:cNvPr>
@@ -16132,7 +16132,7 @@
           <p:cNvPr id="80" name="">
             <a:extLst xmlns:a="http://schemas.openxmlformats.org/drawingml/2006/main">
               <a:ext uri="{FF2B5EF4-FFF2-40B4-BE49-F238E27FC236}">
-                <a16:creationId xmlns:a16="http://schemas.microsoft.com/office/drawing/2014/main" id="{44712E3A-1665-4D81-B8F9-0F1BF65BC256}"/>
+                <a16:creationId xmlns:a16="http://schemas.microsoft.com/office/drawing/2014/main" id="{EE54A670-DAF8-4FA5-AF4B-EF5FE2A9036D}"/>
               </a:ext>
             </a:extLst>
           </p:cNvPr>
@@ -16184,7 +16184,7 @@
           <p:cNvPr id="81" name="">
             <a:extLst xmlns:a="http://schemas.openxmlformats.org/drawingml/2006/main">
               <a:ext uri="{FF2B5EF4-FFF2-40B4-BE49-F238E27FC236}">
-                <a16:creationId xmlns:a16="http://schemas.microsoft.com/office/drawing/2014/main" id="{223906B8-7DC5-470A-B853-D607AA20B501}"/>
+                <a16:creationId xmlns:a16="http://schemas.microsoft.com/office/drawing/2014/main" id="{0B6A38AC-5B6F-40C5-9996-09018ED5F32C}"/>
               </a:ext>
             </a:extLst>
           </p:cNvPr>
@@ -16236,7 +16236,7 @@
           <p:cNvPr id="82" name="">
             <a:extLst xmlns:a="http://schemas.openxmlformats.org/drawingml/2006/main">
               <a:ext uri="{FF2B5EF4-FFF2-40B4-BE49-F238E27FC236}">
-                <a16:creationId xmlns:a16="http://schemas.microsoft.com/office/drawing/2014/main" id="{1DE31CED-1106-4668-BFB8-72B5DF8C6221}"/>
+                <a16:creationId xmlns:a16="http://schemas.microsoft.com/office/drawing/2014/main" id="{FC8A07D9-1227-4B25-9050-26AD2725462F}"/>
               </a:ext>
             </a:extLst>
           </p:cNvPr>
@@ -16288,7 +16288,7 @@
           <p:cNvPr id="83" name="">
             <a:extLst xmlns:a="http://schemas.openxmlformats.org/drawingml/2006/main">
               <a:ext uri="{FF2B5EF4-FFF2-40B4-BE49-F238E27FC236}">
-                <a16:creationId xmlns:a16="http://schemas.microsoft.com/office/drawing/2014/main" id="{5FD691AD-211F-4772-A788-C281B8CB4394}"/>
+                <a16:creationId xmlns:a16="http://schemas.microsoft.com/office/drawing/2014/main" id="{047D89C6-4DEF-4B9A-990B-0596758D7DF4}"/>
               </a:ext>
             </a:extLst>
           </p:cNvPr>
@@ -16319,7 +16319,7 @@
           <p:cNvPr id="84" name="">
             <a:extLst xmlns:a="http://schemas.openxmlformats.org/drawingml/2006/main">
               <a:ext uri="{FF2B5EF4-FFF2-40B4-BE49-F238E27FC236}">
-                <a16:creationId xmlns:a16="http://schemas.microsoft.com/office/drawing/2014/main" id="{38A90CAB-EE99-4A94-8AB0-1EF7D6BDC89F}"/>
+                <a16:creationId xmlns:a16="http://schemas.microsoft.com/office/drawing/2014/main" id="{88458CAE-C584-4164-8BBA-C5F492934772}"/>
               </a:ext>
             </a:extLst>
           </p:cNvPr>
@@ -16371,7 +16371,7 @@
           <p:cNvPr id="85" name="">
             <a:extLst xmlns:a="http://schemas.openxmlformats.org/drawingml/2006/main">
               <a:ext uri="{FF2B5EF4-FFF2-40B4-BE49-F238E27FC236}">
-                <a16:creationId xmlns:a16="http://schemas.microsoft.com/office/drawing/2014/main" id="{2333352B-A43A-467C-B625-3484AD399EE2}"/>
+                <a16:creationId xmlns:a16="http://schemas.microsoft.com/office/drawing/2014/main" id="{4EC29650-8969-456F-9CEE-F5E2AD3EE816}"/>
               </a:ext>
             </a:extLst>
           </p:cNvPr>
@@ -16423,7 +16423,7 @@
           <p:cNvPr id="86" name="">
             <a:extLst xmlns:a="http://schemas.openxmlformats.org/drawingml/2006/main">
               <a:ext uri="{FF2B5EF4-FFF2-40B4-BE49-F238E27FC236}">
-                <a16:creationId xmlns:a16="http://schemas.microsoft.com/office/drawing/2014/main" id="{D46D5E78-AE85-409A-B5F8-69C1863ED8CA}"/>
+                <a16:creationId xmlns:a16="http://schemas.microsoft.com/office/drawing/2014/main" id="{8965F70C-84C5-465A-A17C-FFEF6FF5DF92}"/>
               </a:ext>
             </a:extLst>
           </p:cNvPr>
@@ -16475,7 +16475,7 @@
           <p:cNvPr id="87" name="">
             <a:extLst xmlns:a="http://schemas.openxmlformats.org/drawingml/2006/main">
               <a:ext uri="{FF2B5EF4-FFF2-40B4-BE49-F238E27FC236}">
-                <a16:creationId xmlns:a16="http://schemas.microsoft.com/office/drawing/2014/main" id="{BE78765F-7597-4B9C-9A06-D7238D67946E}"/>
+                <a16:creationId xmlns:a16="http://schemas.microsoft.com/office/drawing/2014/main" id="{9348D534-77A4-4A16-B497-64F458D7B281}"/>
               </a:ext>
             </a:extLst>
           </p:cNvPr>
@@ -16527,7 +16527,7 @@
           <p:cNvPr id="88" name="">
             <a:extLst xmlns:a="http://schemas.openxmlformats.org/drawingml/2006/main">
               <a:ext uri="{FF2B5EF4-FFF2-40B4-BE49-F238E27FC236}">
-                <a16:creationId xmlns:a16="http://schemas.microsoft.com/office/drawing/2014/main" id="{489E650A-9698-4432-A140-B6ADB9E43B7B}"/>
+                <a16:creationId xmlns:a16="http://schemas.microsoft.com/office/drawing/2014/main" id="{873B0156-AE53-4241-98E9-C6D0F35A4894}"/>
               </a:ext>
             </a:extLst>
           </p:cNvPr>
@@ -16579,7 +16579,7 @@
           <p:cNvPr id="89" name="">
             <a:extLst xmlns:a="http://schemas.openxmlformats.org/drawingml/2006/main">
               <a:ext uri="{FF2B5EF4-FFF2-40B4-BE49-F238E27FC236}">
-                <a16:creationId xmlns:a16="http://schemas.microsoft.com/office/drawing/2014/main" id="{1825F23D-4218-4633-8A7D-55BD4B038173}"/>
+                <a16:creationId xmlns:a16="http://schemas.microsoft.com/office/drawing/2014/main" id="{7A9638AE-AF39-4291-87E9-BE2849968F30}"/>
               </a:ext>
             </a:extLst>
           </p:cNvPr>
@@ -16610,7 +16610,7 @@
           <p:cNvPr id="90" name="">
             <a:extLst xmlns:a="http://schemas.openxmlformats.org/drawingml/2006/main">
               <a:ext uri="{FF2B5EF4-FFF2-40B4-BE49-F238E27FC236}">
-                <a16:creationId xmlns:a16="http://schemas.microsoft.com/office/drawing/2014/main" id="{DEA6C268-5CEE-456E-B872-60A5AC275F6F}"/>
+                <a16:creationId xmlns:a16="http://schemas.microsoft.com/office/drawing/2014/main" id="{B04B8478-9BCA-4F2B-A643-C16AC25320E1}"/>
               </a:ext>
             </a:extLst>
           </p:cNvPr>
@@ -16641,7 +16641,7 @@
           <p:cNvPr id="91" name="">
             <a:extLst xmlns:a="http://schemas.openxmlformats.org/drawingml/2006/main">
               <a:ext uri="{FF2B5EF4-FFF2-40B4-BE49-F238E27FC236}">
-                <a16:creationId xmlns:a16="http://schemas.microsoft.com/office/drawing/2014/main" id="{F82DC3FA-A2BA-4BF8-9BC9-F4CC275F4117}"/>
+                <a16:creationId xmlns:a16="http://schemas.microsoft.com/office/drawing/2014/main" id="{0CFC576C-2880-4EFE-BF85-6BD0E0096D39}"/>
               </a:ext>
             </a:extLst>
           </p:cNvPr>
@@ -16693,7 +16693,7 @@
           <p:cNvPr id="92" name="">
             <a:extLst xmlns:a="http://schemas.openxmlformats.org/drawingml/2006/main">
               <a:ext uri="{FF2B5EF4-FFF2-40B4-BE49-F238E27FC236}">
-                <a16:creationId xmlns:a16="http://schemas.microsoft.com/office/drawing/2014/main" id="{E36B42D8-071C-4166-BC31-024F6EBF1BFE}"/>
+                <a16:creationId xmlns:a16="http://schemas.microsoft.com/office/drawing/2014/main" id="{2F7B093E-8DE6-4824-953F-B108A72230D8}"/>
               </a:ext>
             </a:extLst>
           </p:cNvPr>
@@ -16745,7 +16745,7 @@
           <p:cNvPr id="93" name="">
             <a:extLst xmlns:a="http://schemas.openxmlformats.org/drawingml/2006/main">
               <a:ext uri="{FF2B5EF4-FFF2-40B4-BE49-F238E27FC236}">
-                <a16:creationId xmlns:a16="http://schemas.microsoft.com/office/drawing/2014/main" id="{A6F11538-5539-4926-98CC-7DFCACEDBA02}"/>
+                <a16:creationId xmlns:a16="http://schemas.microsoft.com/office/drawing/2014/main" id="{984900B3-E843-44CD-94C4-86A94BEF799C}"/>
               </a:ext>
             </a:extLst>
           </p:cNvPr>
@@ -16797,7 +16797,7 @@
           <p:cNvPr id="94" name="">
             <a:extLst xmlns:a="http://schemas.openxmlformats.org/drawingml/2006/main">
               <a:ext uri="{FF2B5EF4-FFF2-40B4-BE49-F238E27FC236}">
-                <a16:creationId xmlns:a16="http://schemas.microsoft.com/office/drawing/2014/main" id="{E08575A3-ED41-43E1-A4B9-AC4556FED3CF}"/>
+                <a16:creationId xmlns:a16="http://schemas.microsoft.com/office/drawing/2014/main" id="{F437359C-838A-40CC-AB2B-0814DAD1EADB}"/>
               </a:ext>
             </a:extLst>
           </p:cNvPr>
@@ -16849,7 +16849,7 @@
           <p:cNvPr id="95" name="">
             <a:extLst xmlns:a="http://schemas.openxmlformats.org/drawingml/2006/main">
               <a:ext uri="{FF2B5EF4-FFF2-40B4-BE49-F238E27FC236}">
-                <a16:creationId xmlns:a16="http://schemas.microsoft.com/office/drawing/2014/main" id="{82E886CB-BA00-4946-B04C-6168F5ED45E6}"/>
+                <a16:creationId xmlns:a16="http://schemas.microsoft.com/office/drawing/2014/main" id="{EC58972B-3179-44BB-B05E-E8590A86040C}"/>
               </a:ext>
             </a:extLst>
           </p:cNvPr>
@@ -16901,7 +16901,7 @@
           <p:cNvPr id="96" name="">
             <a:extLst xmlns:a="http://schemas.openxmlformats.org/drawingml/2006/main">
               <a:ext uri="{FF2B5EF4-FFF2-40B4-BE49-F238E27FC236}">
-                <a16:creationId xmlns:a16="http://schemas.microsoft.com/office/drawing/2014/main" id="{9134CF5C-1E9C-430C-89AD-EB8FA9943BF0}"/>
+                <a16:creationId xmlns:a16="http://schemas.microsoft.com/office/drawing/2014/main" id="{BBF21BB0-8B49-41A3-9938-93DF29976847}"/>
               </a:ext>
             </a:extLst>
           </p:cNvPr>
@@ -16932,7 +16932,7 @@
           <p:cNvPr id="97" name="">
             <a:extLst xmlns:a="http://schemas.openxmlformats.org/drawingml/2006/main">
               <a:ext uri="{FF2B5EF4-FFF2-40B4-BE49-F238E27FC236}">
-                <a16:creationId xmlns:a16="http://schemas.microsoft.com/office/drawing/2014/main" id="{1B14C190-C4F0-4C2B-AC98-44F669288543}"/>
+                <a16:creationId xmlns:a16="http://schemas.microsoft.com/office/drawing/2014/main" id="{88999780-A8EE-435F-84CD-2E0FD12F8980}"/>
               </a:ext>
             </a:extLst>
           </p:cNvPr>
@@ -16984,7 +16984,7 @@
           <p:cNvPr id="98" name="">
             <a:extLst xmlns:a="http://schemas.openxmlformats.org/drawingml/2006/main">
               <a:ext uri="{FF2B5EF4-FFF2-40B4-BE49-F238E27FC236}">
-                <a16:creationId xmlns:a16="http://schemas.microsoft.com/office/drawing/2014/main" id="{FE33225C-C305-423F-A065-2C4CDA83BA15}"/>
+                <a16:creationId xmlns:a16="http://schemas.microsoft.com/office/drawing/2014/main" id="{2994603D-03A6-478B-BE9B-C5992AB9922C}"/>
               </a:ext>
             </a:extLst>
           </p:cNvPr>
@@ -17036,7 +17036,7 @@
           <p:cNvPr id="99" name="">
             <a:extLst xmlns:a="http://schemas.openxmlformats.org/drawingml/2006/main">
               <a:ext uri="{FF2B5EF4-FFF2-40B4-BE49-F238E27FC236}">
-                <a16:creationId xmlns:a16="http://schemas.microsoft.com/office/drawing/2014/main" id="{BBF7641F-69F4-4BC0-9CAB-FE437AE81E97}"/>
+                <a16:creationId xmlns:a16="http://schemas.microsoft.com/office/drawing/2014/main" id="{3010284F-A1EB-481D-9ADE-BB8D36BA6985}"/>
               </a:ext>
             </a:extLst>
           </p:cNvPr>
@@ -17088,7 +17088,7 @@
           <p:cNvPr id="100" name="">
             <a:extLst xmlns:a="http://schemas.openxmlformats.org/drawingml/2006/main">
               <a:ext uri="{FF2B5EF4-FFF2-40B4-BE49-F238E27FC236}">
-                <a16:creationId xmlns:a16="http://schemas.microsoft.com/office/drawing/2014/main" id="{083541A4-4C04-4033-A606-4F1392E006DC}"/>
+                <a16:creationId xmlns:a16="http://schemas.microsoft.com/office/drawing/2014/main" id="{CF8BA40D-B4C8-4FA0-91A9-47E8F5D6D2C2}"/>
               </a:ext>
             </a:extLst>
           </p:cNvPr>
@@ -17140,7 +17140,7 @@
           <p:cNvPr id="101" name="">
             <a:extLst xmlns:a="http://schemas.openxmlformats.org/drawingml/2006/main">
               <a:ext uri="{FF2B5EF4-FFF2-40B4-BE49-F238E27FC236}">
-                <a16:creationId xmlns:a16="http://schemas.microsoft.com/office/drawing/2014/main" id="{0076719A-ADB8-4A71-A666-53EF197574C3}"/>
+                <a16:creationId xmlns:a16="http://schemas.microsoft.com/office/drawing/2014/main" id="{97600D9B-28D3-425B-AEFC-E0E193B863A7}"/>
               </a:ext>
             </a:extLst>
           </p:cNvPr>
@@ -17190,7 +17190,7 @@
     </p:spTree>
     <p:extLst>
       <p:ext uri="{BB962C8B-B14F-4D97-AF65-F5344CB8AC3E}">
-        <p14:creationId xmlns:p14="http://schemas.microsoft.com/office/powerpoint/2010/main" val="1011021664"/>
+        <p14:creationId xmlns:p14="http://schemas.microsoft.com/office/powerpoint/2010/main" val="1565934119"/>
       </p:ext>
     </p:extLst>
   </p:cSld>
@@ -17221,7 +17221,7 @@
           <p:cNvPr id="96" name="">
             <a:extLst xmlns:a="http://schemas.openxmlformats.org/drawingml/2006/main">
               <a:ext uri="{FF2B5EF4-FFF2-40B4-BE49-F238E27FC236}">
-                <a16:creationId xmlns:a16="http://schemas.microsoft.com/office/drawing/2014/main" id="{4A48BB72-E8BE-48C4-A263-77CA70806E30}"/>
+                <a16:creationId xmlns:a16="http://schemas.microsoft.com/office/drawing/2014/main" id="{02C6E787-604E-4B83-A5D5-4F95C66774CC}"/>
               </a:ext>
             </a:extLst>
           </p:cNvPr>
@@ -17254,7 +17254,7 @@
           <p:cNvPr id="2" name="">
             <a:extLst xmlns:a="http://schemas.openxmlformats.org/drawingml/2006/main">
               <a:ext uri="{FF2B5EF4-FFF2-40B4-BE49-F238E27FC236}">
-                <a16:creationId xmlns:a16="http://schemas.microsoft.com/office/drawing/2014/main" id="{FBDB42F4-9843-4842-81D0-733DBC7E7E94}"/>
+                <a16:creationId xmlns:a16="http://schemas.microsoft.com/office/drawing/2014/main" id="{74AC7F98-5AED-4F0D-9A20-41E3D3BD1AC6}"/>
               </a:ext>
             </a:extLst>
           </p:cNvPr>
@@ -17285,7 +17285,7 @@
           <p:cNvPr id="3" name="">
             <a:extLst xmlns:a="http://schemas.openxmlformats.org/drawingml/2006/main">
               <a:ext uri="{FF2B5EF4-FFF2-40B4-BE49-F238E27FC236}">
-                <a16:creationId xmlns:a16="http://schemas.microsoft.com/office/drawing/2014/main" id="{E76ABF45-1CAE-4009-894B-2EA3E9A0FC8F}"/>
+                <a16:creationId xmlns:a16="http://schemas.microsoft.com/office/drawing/2014/main" id="{0209879C-78BB-4671-8403-8C19170B3C3D}"/>
               </a:ext>
             </a:extLst>
           </p:cNvPr>
@@ -17337,7 +17337,7 @@
           <p:cNvPr id="4" name="">
             <a:extLst xmlns:a="http://schemas.openxmlformats.org/drawingml/2006/main">
               <a:ext uri="{FF2B5EF4-FFF2-40B4-BE49-F238E27FC236}">
-                <a16:creationId xmlns:a16="http://schemas.microsoft.com/office/drawing/2014/main" id="{A9F442C5-693C-43A9-9BCB-0CC4B5292DC7}"/>
+                <a16:creationId xmlns:a16="http://schemas.microsoft.com/office/drawing/2014/main" id="{4DD95D3F-304B-4041-8935-EC3AB52A4BA4}"/>
               </a:ext>
             </a:extLst>
           </p:cNvPr>
@@ -17389,7 +17389,7 @@
           <p:cNvPr id="5" name="">
             <a:extLst xmlns:a="http://schemas.openxmlformats.org/drawingml/2006/main">
               <a:ext uri="{FF2B5EF4-FFF2-40B4-BE49-F238E27FC236}">
-                <a16:creationId xmlns:a16="http://schemas.microsoft.com/office/drawing/2014/main" id="{9839198B-6338-4555-A273-CA07D5586773}"/>
+                <a16:creationId xmlns:a16="http://schemas.microsoft.com/office/drawing/2014/main" id="{68EB8794-5E8A-477F-8BC2-E29557B513A8}"/>
               </a:ext>
             </a:extLst>
           </p:cNvPr>
@@ -17424,7 +17424,7 @@
           <p:nvPr/>
         </p:nvPicPr>
         <p:blipFill>
-          <a:blip xmlns:r="http://schemas.openxmlformats.org/officeDocument/2006/relationships" xmlns:a="http://schemas.openxmlformats.org/drawingml/2006/main" r:embed="Rdb9197b9cbd941e5"/>
+          <a:blip xmlns:r="http://schemas.openxmlformats.org/officeDocument/2006/relationships" xmlns:a="http://schemas.openxmlformats.org/drawingml/2006/main" r:embed="Rcc9c38df0d8841c2"/>
           <a:stretch xmlns:a="http://schemas.openxmlformats.org/drawingml/2006/main"/>
         </p:blipFill>
         <p:spPr>
@@ -17442,7 +17442,7 @@
           <p:cNvPr id="7" name="">
             <a:extLst xmlns:a="http://schemas.openxmlformats.org/drawingml/2006/main">
               <a:ext uri="{FF2B5EF4-FFF2-40B4-BE49-F238E27FC236}">
-                <a16:creationId xmlns:a16="http://schemas.microsoft.com/office/drawing/2014/main" id="{A0AF77B8-2DEB-47E3-9FA3-70BEDDB20635}"/>
+                <a16:creationId xmlns:a16="http://schemas.microsoft.com/office/drawing/2014/main" id="{C23D6F26-76A5-42C7-AE02-43FD7E27895B}"/>
               </a:ext>
             </a:extLst>
           </p:cNvPr>
@@ -17494,7 +17494,7 @@
           <p:cNvPr id="8" name="">
             <a:extLst xmlns:a="http://schemas.openxmlformats.org/drawingml/2006/main">
               <a:ext uri="{FF2B5EF4-FFF2-40B4-BE49-F238E27FC236}">
-                <a16:creationId xmlns:a16="http://schemas.microsoft.com/office/drawing/2014/main" id="{6CBE86DD-508B-45E5-A3F2-93B71E0A97AA}"/>
+                <a16:creationId xmlns:a16="http://schemas.microsoft.com/office/drawing/2014/main" id="{40EC3619-C82A-4D61-B8B9-EA8641ED115E}"/>
               </a:ext>
             </a:extLst>
           </p:cNvPr>
@@ -17546,7 +17546,7 @@
           <p:cNvPr id="9" name="">
             <a:extLst xmlns:a="http://schemas.openxmlformats.org/drawingml/2006/main">
               <a:ext uri="{FF2B5EF4-FFF2-40B4-BE49-F238E27FC236}">
-                <a16:creationId xmlns:a16="http://schemas.microsoft.com/office/drawing/2014/main" id="{C8BA0A59-AF6B-4162-B062-AF21CC9194FF}"/>
+                <a16:creationId xmlns:a16="http://schemas.microsoft.com/office/drawing/2014/main" id="{6D3CB5AC-AE34-4A0D-BD70-2943EDD1691E}"/>
               </a:ext>
             </a:extLst>
           </p:cNvPr>
@@ -17598,7 +17598,7 @@
           <p:cNvPr id="10" name="">
             <a:extLst xmlns:a="http://schemas.openxmlformats.org/drawingml/2006/main">
               <a:ext uri="{FF2B5EF4-FFF2-40B4-BE49-F238E27FC236}">
-                <a16:creationId xmlns:a16="http://schemas.microsoft.com/office/drawing/2014/main" id="{DBE7CCAB-1D82-4A41-97E0-C97C89A0D635}"/>
+                <a16:creationId xmlns:a16="http://schemas.microsoft.com/office/drawing/2014/main" id="{185F1E4D-EE33-4E86-8DCB-8742DE4A8B7D}"/>
               </a:ext>
             </a:extLst>
           </p:cNvPr>
@@ -17650,7 +17650,7 @@
           <p:cNvPr id="11" name="">
             <a:extLst xmlns:a="http://schemas.openxmlformats.org/drawingml/2006/main">
               <a:ext uri="{FF2B5EF4-FFF2-40B4-BE49-F238E27FC236}">
-                <a16:creationId xmlns:a16="http://schemas.microsoft.com/office/drawing/2014/main" id="{F57B56B3-F752-443F-943E-A839B3697A24}"/>
+                <a16:creationId xmlns:a16="http://schemas.microsoft.com/office/drawing/2014/main" id="{22FEC359-182C-497F-A7F4-6A14219C62BB}"/>
               </a:ext>
             </a:extLst>
           </p:cNvPr>
@@ -17681,7 +17681,7 @@
           <p:cNvPr id="12" name="">
             <a:extLst xmlns:a="http://schemas.openxmlformats.org/drawingml/2006/main">
               <a:ext uri="{FF2B5EF4-FFF2-40B4-BE49-F238E27FC236}">
-                <a16:creationId xmlns:a16="http://schemas.microsoft.com/office/drawing/2014/main" id="{08DA84FD-C2B1-40D3-B592-30308AAFCC82}"/>
+                <a16:creationId xmlns:a16="http://schemas.microsoft.com/office/drawing/2014/main" id="{0F29D61A-009B-4681-9328-614647E6F27E}"/>
               </a:ext>
             </a:extLst>
           </p:cNvPr>
@@ -17712,7 +17712,7 @@
           <p:cNvPr id="13" name="">
             <a:extLst xmlns:a="http://schemas.openxmlformats.org/drawingml/2006/main">
               <a:ext uri="{FF2B5EF4-FFF2-40B4-BE49-F238E27FC236}">
-                <a16:creationId xmlns:a16="http://schemas.microsoft.com/office/drawing/2014/main" id="{A024F59A-FBBE-484E-AF86-86F47EC53B7B}"/>
+                <a16:creationId xmlns:a16="http://schemas.microsoft.com/office/drawing/2014/main" id="{D7C7F462-4540-4F9A-BDF6-1D59C6A4C006}"/>
               </a:ext>
             </a:extLst>
           </p:cNvPr>
@@ -17764,7 +17764,7 @@
           <p:cNvPr id="14" name="">
             <a:extLst xmlns:a="http://schemas.openxmlformats.org/drawingml/2006/main">
               <a:ext uri="{FF2B5EF4-FFF2-40B4-BE49-F238E27FC236}">
-                <a16:creationId xmlns:a16="http://schemas.microsoft.com/office/drawing/2014/main" id="{3756E83F-D7B0-4103-9A31-AAB1BAB603DD}"/>
+                <a16:creationId xmlns:a16="http://schemas.microsoft.com/office/drawing/2014/main" id="{46F6965D-2C16-4F50-B0BE-A91FDA172C47}"/>
               </a:ext>
             </a:extLst>
           </p:cNvPr>
@@ -17816,7 +17816,7 @@
           <p:cNvPr id="15" name="">
             <a:extLst xmlns:a="http://schemas.openxmlformats.org/drawingml/2006/main">
               <a:ext uri="{FF2B5EF4-FFF2-40B4-BE49-F238E27FC236}">
-                <a16:creationId xmlns:a16="http://schemas.microsoft.com/office/drawing/2014/main" id="{79F65331-8F4F-49C7-8059-FBF71D6B4F7A}"/>
+                <a16:creationId xmlns:a16="http://schemas.microsoft.com/office/drawing/2014/main" id="{01F3AAD0-7C61-4C93-8C6E-733560225729}"/>
               </a:ext>
             </a:extLst>
           </p:cNvPr>
@@ -17868,7 +17868,7 @@
           <p:cNvPr id="16" name="">
             <a:extLst xmlns:a="http://schemas.openxmlformats.org/drawingml/2006/main">
               <a:ext uri="{FF2B5EF4-FFF2-40B4-BE49-F238E27FC236}">
-                <a16:creationId xmlns:a16="http://schemas.microsoft.com/office/drawing/2014/main" id="{C4C4F077-F191-4BFD-A0A7-CD02F7097F96}"/>
+                <a16:creationId xmlns:a16="http://schemas.microsoft.com/office/drawing/2014/main" id="{73BB6B5D-846C-4AA4-A59C-4DCF11FBDB5E}"/>
               </a:ext>
             </a:extLst>
           </p:cNvPr>
@@ -17920,7 +17920,7 @@
           <p:cNvPr id="17" name="">
             <a:extLst xmlns:a="http://schemas.openxmlformats.org/drawingml/2006/main">
               <a:ext uri="{FF2B5EF4-FFF2-40B4-BE49-F238E27FC236}">
-                <a16:creationId xmlns:a16="http://schemas.microsoft.com/office/drawing/2014/main" id="{9BB6C9C8-394A-45B4-948E-D78B8D26A6EA}"/>
+                <a16:creationId xmlns:a16="http://schemas.microsoft.com/office/drawing/2014/main" id="{8CD6D8FB-68FF-46D7-A922-93ED4087B742}"/>
               </a:ext>
             </a:extLst>
           </p:cNvPr>
@@ -17972,7 +17972,7 @@
           <p:cNvPr id="18" name="">
             <a:extLst xmlns:a="http://schemas.openxmlformats.org/drawingml/2006/main">
               <a:ext uri="{FF2B5EF4-FFF2-40B4-BE49-F238E27FC236}">
-                <a16:creationId xmlns:a16="http://schemas.microsoft.com/office/drawing/2014/main" id="{E92911C5-ACE8-41C7-895D-CCFF85F9BFAE}"/>
+                <a16:creationId xmlns:a16="http://schemas.microsoft.com/office/drawing/2014/main" id="{35D069A5-DBBF-4DF6-90BF-BE14217E2AD4}"/>
               </a:ext>
             </a:extLst>
           </p:cNvPr>
@@ -18003,7 +18003,7 @@
           <p:cNvPr id="19" name="">
             <a:extLst xmlns:a="http://schemas.openxmlformats.org/drawingml/2006/main">
               <a:ext uri="{FF2B5EF4-FFF2-40B4-BE49-F238E27FC236}">
-                <a16:creationId xmlns:a16="http://schemas.microsoft.com/office/drawing/2014/main" id="{43E996F8-6D22-417E-9F9D-238D1DC63DD1}"/>
+                <a16:creationId xmlns:a16="http://schemas.microsoft.com/office/drawing/2014/main" id="{16D173D3-8A9F-4DCD-B77C-925CCF59C912}"/>
               </a:ext>
             </a:extLst>
           </p:cNvPr>
@@ -18034,7 +18034,7 @@
           <p:cNvPr id="20" name="">
             <a:extLst xmlns:a="http://schemas.openxmlformats.org/drawingml/2006/main">
               <a:ext uri="{FF2B5EF4-FFF2-40B4-BE49-F238E27FC236}">
-                <a16:creationId xmlns:a16="http://schemas.microsoft.com/office/drawing/2014/main" id="{0352B98D-462D-4FC1-8E20-70BD27B1464B}"/>
+                <a16:creationId xmlns:a16="http://schemas.microsoft.com/office/drawing/2014/main" id="{1BFD5252-776B-4B1C-B891-58A6B15DB317}"/>
               </a:ext>
             </a:extLst>
           </p:cNvPr>
@@ -18086,7 +18086,7 @@
           <p:cNvPr id="21" name="">
             <a:extLst xmlns:a="http://schemas.openxmlformats.org/drawingml/2006/main">
               <a:ext uri="{FF2B5EF4-FFF2-40B4-BE49-F238E27FC236}">
-                <a16:creationId xmlns:a16="http://schemas.microsoft.com/office/drawing/2014/main" id="{B525AAA7-D467-430B-A6F0-032501210014}"/>
+                <a16:creationId xmlns:a16="http://schemas.microsoft.com/office/drawing/2014/main" id="{DBC109F7-D1C6-408F-8AED-9911F8DA2480}"/>
               </a:ext>
             </a:extLst>
           </p:cNvPr>
@@ -18138,7 +18138,7 @@
           <p:cNvPr id="22" name="">
             <a:extLst xmlns:a="http://schemas.openxmlformats.org/drawingml/2006/main">
               <a:ext uri="{FF2B5EF4-FFF2-40B4-BE49-F238E27FC236}">
-                <a16:creationId xmlns:a16="http://schemas.microsoft.com/office/drawing/2014/main" id="{0953600F-FE9D-420E-B1B7-4EE26F7B89A3}"/>
+                <a16:creationId xmlns:a16="http://schemas.microsoft.com/office/drawing/2014/main" id="{E9591CC6-5999-466E-AA44-1466B3C308A6}"/>
               </a:ext>
             </a:extLst>
           </p:cNvPr>
@@ -18190,7 +18190,7 @@
           <p:cNvPr id="23" name="">
             <a:extLst xmlns:a="http://schemas.openxmlformats.org/drawingml/2006/main">
               <a:ext uri="{FF2B5EF4-FFF2-40B4-BE49-F238E27FC236}">
-                <a16:creationId xmlns:a16="http://schemas.microsoft.com/office/drawing/2014/main" id="{995D6444-EDCB-49FF-8A03-A4CB4731AE12}"/>
+                <a16:creationId xmlns:a16="http://schemas.microsoft.com/office/drawing/2014/main" id="{AFEC3F8F-605C-462E-BD27-811595D72914}"/>
               </a:ext>
             </a:extLst>
           </p:cNvPr>
@@ -18242,7 +18242,7 @@
           <p:cNvPr id="24" name="">
             <a:extLst xmlns:a="http://schemas.openxmlformats.org/drawingml/2006/main">
               <a:ext uri="{FF2B5EF4-FFF2-40B4-BE49-F238E27FC236}">
-                <a16:creationId xmlns:a16="http://schemas.microsoft.com/office/drawing/2014/main" id="{685CC043-23B4-406A-ACC4-44ADBED6FAAD}"/>
+                <a16:creationId xmlns:a16="http://schemas.microsoft.com/office/drawing/2014/main" id="{3881881C-E2BF-4FFB-A605-B6D6C3FE9B57}"/>
               </a:ext>
             </a:extLst>
           </p:cNvPr>
@@ -18294,7 +18294,7 @@
           <p:cNvPr id="25" name="">
             <a:extLst xmlns:a="http://schemas.openxmlformats.org/drawingml/2006/main">
               <a:ext uri="{FF2B5EF4-FFF2-40B4-BE49-F238E27FC236}">
-                <a16:creationId xmlns:a16="http://schemas.microsoft.com/office/drawing/2014/main" id="{9E6EBC15-BEA3-4874-A5CD-8F85D288D08E}"/>
+                <a16:creationId xmlns:a16="http://schemas.microsoft.com/office/drawing/2014/main" id="{708F5069-1737-4163-9DA4-58D57B851B0A}"/>
               </a:ext>
             </a:extLst>
           </p:cNvPr>
@@ -18325,7 +18325,7 @@
           <p:cNvPr id="26" name="">
             <a:extLst xmlns:a="http://schemas.openxmlformats.org/drawingml/2006/main">
               <a:ext uri="{FF2B5EF4-FFF2-40B4-BE49-F238E27FC236}">
-                <a16:creationId xmlns:a16="http://schemas.microsoft.com/office/drawing/2014/main" id="{BE2A730A-296E-4EA9-8631-ACEEEB5C51BC}"/>
+                <a16:creationId xmlns:a16="http://schemas.microsoft.com/office/drawing/2014/main" id="{C5C5EEDA-1748-4B9C-9F67-D2A9729B762C}"/>
               </a:ext>
             </a:extLst>
           </p:cNvPr>
@@ -18377,7 +18377,7 @@
           <p:cNvPr id="27" name="">
             <a:extLst xmlns:a="http://schemas.openxmlformats.org/drawingml/2006/main">
               <a:ext uri="{FF2B5EF4-FFF2-40B4-BE49-F238E27FC236}">
-                <a16:creationId xmlns:a16="http://schemas.microsoft.com/office/drawing/2014/main" id="{54F5D93B-8871-44B8-BBE7-60B492E36DBB}"/>
+                <a16:creationId xmlns:a16="http://schemas.microsoft.com/office/drawing/2014/main" id="{51F62E2E-2687-4B27-9C6D-ABDF71EDED69}"/>
               </a:ext>
             </a:extLst>
           </p:cNvPr>
@@ -18429,7 +18429,7 @@
           <p:cNvPr id="28" name="">
             <a:extLst xmlns:a="http://schemas.openxmlformats.org/drawingml/2006/main">
               <a:ext uri="{FF2B5EF4-FFF2-40B4-BE49-F238E27FC236}">
-                <a16:creationId xmlns:a16="http://schemas.microsoft.com/office/drawing/2014/main" id="{1A0A81E3-5A19-4FBF-BC0F-E8ACCE162D58}"/>
+                <a16:creationId xmlns:a16="http://schemas.microsoft.com/office/drawing/2014/main" id="{E467BED0-3E3E-43F3-B6E2-D761228D1AB6}"/>
               </a:ext>
             </a:extLst>
           </p:cNvPr>
@@ -18481,7 +18481,7 @@
           <p:cNvPr id="29" name="">
             <a:extLst xmlns:a="http://schemas.openxmlformats.org/drawingml/2006/main">
               <a:ext uri="{FF2B5EF4-FFF2-40B4-BE49-F238E27FC236}">
-                <a16:creationId xmlns:a16="http://schemas.microsoft.com/office/drawing/2014/main" id="{9C6B6CAF-2CDA-4D8E-AEC3-65FA6B63BCC1}"/>
+                <a16:creationId xmlns:a16="http://schemas.microsoft.com/office/drawing/2014/main" id="{55D28E32-310B-4E8D-B969-DA3267905262}"/>
               </a:ext>
             </a:extLst>
           </p:cNvPr>
@@ -18533,7 +18533,7 @@
           <p:cNvPr id="30" name="">
             <a:extLst xmlns:a="http://schemas.openxmlformats.org/drawingml/2006/main">
               <a:ext uri="{FF2B5EF4-FFF2-40B4-BE49-F238E27FC236}">
-                <a16:creationId xmlns:a16="http://schemas.microsoft.com/office/drawing/2014/main" id="{CD25E4B3-AB06-4CE1-84B9-C3ABB34C3ECB}"/>
+                <a16:creationId xmlns:a16="http://schemas.microsoft.com/office/drawing/2014/main" id="{EB29DFB3-40DA-4D54-B597-F08A479A187F}"/>
               </a:ext>
             </a:extLst>
           </p:cNvPr>
@@ -18585,7 +18585,7 @@
           <p:cNvPr id="31" name="">
             <a:extLst xmlns:a="http://schemas.openxmlformats.org/drawingml/2006/main">
               <a:ext uri="{FF2B5EF4-FFF2-40B4-BE49-F238E27FC236}">
-                <a16:creationId xmlns:a16="http://schemas.microsoft.com/office/drawing/2014/main" id="{0AA64DEE-5148-468A-9087-1B5EC1DACEBC}"/>
+                <a16:creationId xmlns:a16="http://schemas.microsoft.com/office/drawing/2014/main" id="{9195DE35-AD74-4254-AA22-5EAFB60B005D}"/>
               </a:ext>
             </a:extLst>
           </p:cNvPr>
@@ -18616,7 +18616,7 @@
           <p:cNvPr id="32" name="">
             <a:extLst xmlns:a="http://schemas.openxmlformats.org/drawingml/2006/main">
               <a:ext uri="{FF2B5EF4-FFF2-40B4-BE49-F238E27FC236}">
-                <a16:creationId xmlns:a16="http://schemas.microsoft.com/office/drawing/2014/main" id="{802C2BD5-BC0D-470B-BCEB-3B0E5B9EE3D8}"/>
+                <a16:creationId xmlns:a16="http://schemas.microsoft.com/office/drawing/2014/main" id="{95E86D16-F739-4C7E-96AF-9E64B1E9CBA3}"/>
               </a:ext>
             </a:extLst>
           </p:cNvPr>
@@ -18647,7 +18647,7 @@
           <p:cNvPr id="33" name="">
             <a:extLst xmlns:a="http://schemas.openxmlformats.org/drawingml/2006/main">
               <a:ext uri="{FF2B5EF4-FFF2-40B4-BE49-F238E27FC236}">
-                <a16:creationId xmlns:a16="http://schemas.microsoft.com/office/drawing/2014/main" id="{C12D20E4-D52D-4E08-98BE-4EFF24DAECAD}"/>
+                <a16:creationId xmlns:a16="http://schemas.microsoft.com/office/drawing/2014/main" id="{059BE8F8-C4B9-48CB-8A55-B634BCD9FB2B}"/>
               </a:ext>
             </a:extLst>
           </p:cNvPr>
@@ -18699,7 +18699,7 @@
           <p:cNvPr id="34" name="">
             <a:extLst xmlns:a="http://schemas.openxmlformats.org/drawingml/2006/main">
               <a:ext uri="{FF2B5EF4-FFF2-40B4-BE49-F238E27FC236}">
-                <a16:creationId xmlns:a16="http://schemas.microsoft.com/office/drawing/2014/main" id="{BBD86DEB-C994-481F-8138-C8DE8A734E23}"/>
+                <a16:creationId xmlns:a16="http://schemas.microsoft.com/office/drawing/2014/main" id="{5802040A-4255-4E29-A909-74F6FB8879EA}"/>
               </a:ext>
             </a:extLst>
           </p:cNvPr>
@@ -18751,7 +18751,7 @@
           <p:cNvPr id="35" name="">
             <a:extLst xmlns:a="http://schemas.openxmlformats.org/drawingml/2006/main">
               <a:ext uri="{FF2B5EF4-FFF2-40B4-BE49-F238E27FC236}">
-                <a16:creationId xmlns:a16="http://schemas.microsoft.com/office/drawing/2014/main" id="{E31C4195-F396-4047-B58E-F22C990D453E}"/>
+                <a16:creationId xmlns:a16="http://schemas.microsoft.com/office/drawing/2014/main" id="{C64116EF-77F4-4C6A-8E47-45FAF1677120}"/>
               </a:ext>
             </a:extLst>
           </p:cNvPr>
@@ -18803,7 +18803,7 @@
           <p:cNvPr id="36" name="">
             <a:extLst xmlns:a="http://schemas.openxmlformats.org/drawingml/2006/main">
               <a:ext uri="{FF2B5EF4-FFF2-40B4-BE49-F238E27FC236}">
-                <a16:creationId xmlns:a16="http://schemas.microsoft.com/office/drawing/2014/main" id="{5A822D01-03CF-4D7C-8F36-7AA5EA3D502B}"/>
+                <a16:creationId xmlns:a16="http://schemas.microsoft.com/office/drawing/2014/main" id="{2BB041D4-9063-42E5-A04A-49B4488523F7}"/>
               </a:ext>
             </a:extLst>
           </p:cNvPr>
@@ -18855,7 +18855,7 @@
           <p:cNvPr id="37" name="">
             <a:extLst xmlns:a="http://schemas.openxmlformats.org/drawingml/2006/main">
               <a:ext uri="{FF2B5EF4-FFF2-40B4-BE49-F238E27FC236}">
-                <a16:creationId xmlns:a16="http://schemas.microsoft.com/office/drawing/2014/main" id="{740A9434-1AA2-45EF-9327-36EE0F7A2738}"/>
+                <a16:creationId xmlns:a16="http://schemas.microsoft.com/office/drawing/2014/main" id="{D47004C3-8CCA-4145-B5A1-AE3EC57D42E5}"/>
               </a:ext>
             </a:extLst>
           </p:cNvPr>
@@ -18907,7 +18907,7 @@
           <p:cNvPr id="38" name="">
             <a:extLst xmlns:a="http://schemas.openxmlformats.org/drawingml/2006/main">
               <a:ext uri="{FF2B5EF4-FFF2-40B4-BE49-F238E27FC236}">
-                <a16:creationId xmlns:a16="http://schemas.microsoft.com/office/drawing/2014/main" id="{2DAD1F8E-F380-41E9-82C9-94E12DA179D1}"/>
+                <a16:creationId xmlns:a16="http://schemas.microsoft.com/office/drawing/2014/main" id="{52533B08-3CA8-447A-885A-F8DB0D3AFA23}"/>
               </a:ext>
             </a:extLst>
           </p:cNvPr>
@@ -18938,7 +18938,7 @@
           <p:cNvPr id="39" name="">
             <a:extLst xmlns:a="http://schemas.openxmlformats.org/drawingml/2006/main">
               <a:ext uri="{FF2B5EF4-FFF2-40B4-BE49-F238E27FC236}">
-                <a16:creationId xmlns:a16="http://schemas.microsoft.com/office/drawing/2014/main" id="{635450B3-289E-4AB2-9E6C-42E13D446E69}"/>
+                <a16:creationId xmlns:a16="http://schemas.microsoft.com/office/drawing/2014/main" id="{F6DEF3BC-6749-4A39-8A62-4157E7C28145}"/>
               </a:ext>
             </a:extLst>
           </p:cNvPr>
@@ -18990,7 +18990,7 @@
           <p:cNvPr id="40" name="">
             <a:extLst xmlns:a="http://schemas.openxmlformats.org/drawingml/2006/main">
               <a:ext uri="{FF2B5EF4-FFF2-40B4-BE49-F238E27FC236}">
-                <a16:creationId xmlns:a16="http://schemas.microsoft.com/office/drawing/2014/main" id="{CC55B52F-A419-4296-9B15-9B45092F336A}"/>
+                <a16:creationId xmlns:a16="http://schemas.microsoft.com/office/drawing/2014/main" id="{C7654DD8-4515-4276-B3C5-63578A6853C7}"/>
               </a:ext>
             </a:extLst>
           </p:cNvPr>
@@ -19042,7 +19042,7 @@
           <p:cNvPr id="41" name="">
             <a:extLst xmlns:a="http://schemas.openxmlformats.org/drawingml/2006/main">
               <a:ext uri="{FF2B5EF4-FFF2-40B4-BE49-F238E27FC236}">
-                <a16:creationId xmlns:a16="http://schemas.microsoft.com/office/drawing/2014/main" id="{30C4A30B-D971-452E-9E59-7C0111D4159A}"/>
+                <a16:creationId xmlns:a16="http://schemas.microsoft.com/office/drawing/2014/main" id="{194911B7-D807-46DE-8883-094871DF41AC}"/>
               </a:ext>
             </a:extLst>
           </p:cNvPr>
@@ -19094,7 +19094,7 @@
           <p:cNvPr id="42" name="">
             <a:extLst xmlns:a="http://schemas.openxmlformats.org/drawingml/2006/main">
               <a:ext uri="{FF2B5EF4-FFF2-40B4-BE49-F238E27FC236}">
-                <a16:creationId xmlns:a16="http://schemas.microsoft.com/office/drawing/2014/main" id="{CF4CA5BD-F9FF-46E6-95F3-D164C523A028}"/>
+                <a16:creationId xmlns:a16="http://schemas.microsoft.com/office/drawing/2014/main" id="{7108FC7F-FC00-4853-9ADE-012EE2CB66D3}"/>
               </a:ext>
             </a:extLst>
           </p:cNvPr>
@@ -19146,7 +19146,7 @@
           <p:cNvPr id="43" name="">
             <a:extLst xmlns:a="http://schemas.openxmlformats.org/drawingml/2006/main">
               <a:ext uri="{FF2B5EF4-FFF2-40B4-BE49-F238E27FC236}">
-                <a16:creationId xmlns:a16="http://schemas.microsoft.com/office/drawing/2014/main" id="{D82448DC-06D1-440B-B171-B6BAB2CC13BF}"/>
+                <a16:creationId xmlns:a16="http://schemas.microsoft.com/office/drawing/2014/main" id="{A7B29506-EC12-46C1-82F4-A3E4D5F4E68C}"/>
               </a:ext>
             </a:extLst>
           </p:cNvPr>
@@ -19198,7 +19198,7 @@
           <p:cNvPr id="44" name="">
             <a:extLst xmlns:a="http://schemas.openxmlformats.org/drawingml/2006/main">
               <a:ext uri="{FF2B5EF4-FFF2-40B4-BE49-F238E27FC236}">
-                <a16:creationId xmlns:a16="http://schemas.microsoft.com/office/drawing/2014/main" id="{E432F87A-082C-47A3-84CE-9293DD62BB51}"/>
+                <a16:creationId xmlns:a16="http://schemas.microsoft.com/office/drawing/2014/main" id="{72D12AEF-ABC2-4AB0-A77F-511197EC1202}"/>
               </a:ext>
             </a:extLst>
           </p:cNvPr>
@@ -19229,7 +19229,7 @@
           <p:cNvPr id="45" name="">
             <a:extLst xmlns:a="http://schemas.openxmlformats.org/drawingml/2006/main">
               <a:ext uri="{FF2B5EF4-FFF2-40B4-BE49-F238E27FC236}">
-                <a16:creationId xmlns:a16="http://schemas.microsoft.com/office/drawing/2014/main" id="{EF770040-7C25-40BA-AD21-DE3B8155370E}"/>
+                <a16:creationId xmlns:a16="http://schemas.microsoft.com/office/drawing/2014/main" id="{F2A0EB16-9FA3-400B-BF22-83D510122E7D}"/>
               </a:ext>
             </a:extLst>
           </p:cNvPr>
@@ -19260,7 +19260,7 @@
           <p:cNvPr id="46" name="">
             <a:extLst xmlns:a="http://schemas.openxmlformats.org/drawingml/2006/main">
               <a:ext uri="{FF2B5EF4-FFF2-40B4-BE49-F238E27FC236}">
-                <a16:creationId xmlns:a16="http://schemas.microsoft.com/office/drawing/2014/main" id="{729FFF96-32EA-4F83-9209-821B3E0AA0CE}"/>
+                <a16:creationId xmlns:a16="http://schemas.microsoft.com/office/drawing/2014/main" id="{D9B1D886-0DBC-4BE3-AAAA-20B115C377FB}"/>
               </a:ext>
             </a:extLst>
           </p:cNvPr>
@@ -19312,7 +19312,7 @@
           <p:cNvPr id="47" name="">
             <a:extLst xmlns:a="http://schemas.openxmlformats.org/drawingml/2006/main">
               <a:ext uri="{FF2B5EF4-FFF2-40B4-BE49-F238E27FC236}">
-                <a16:creationId xmlns:a16="http://schemas.microsoft.com/office/drawing/2014/main" id="{9B5B5394-F93B-45BF-8D42-65978D62BA51}"/>
+                <a16:creationId xmlns:a16="http://schemas.microsoft.com/office/drawing/2014/main" id="{A663856B-F382-4728-986E-3ACA6140D438}"/>
               </a:ext>
             </a:extLst>
           </p:cNvPr>
@@ -19364,7 +19364,7 @@
           <p:cNvPr id="48" name="">
             <a:extLst xmlns:a="http://schemas.openxmlformats.org/drawingml/2006/main">
               <a:ext uri="{FF2B5EF4-FFF2-40B4-BE49-F238E27FC236}">
-                <a16:creationId xmlns:a16="http://schemas.microsoft.com/office/drawing/2014/main" id="{1AAB2EB4-120E-425C-800F-CC9666363DE3}"/>
+                <a16:creationId xmlns:a16="http://schemas.microsoft.com/office/drawing/2014/main" id="{9EA4895E-1C44-4F9B-9EBC-24967DF99E07}"/>
               </a:ext>
             </a:extLst>
           </p:cNvPr>
@@ -19416,7 +19416,7 @@
           <p:cNvPr id="49" name="">
             <a:extLst xmlns:a="http://schemas.openxmlformats.org/drawingml/2006/main">
               <a:ext uri="{FF2B5EF4-FFF2-40B4-BE49-F238E27FC236}">
-                <a16:creationId xmlns:a16="http://schemas.microsoft.com/office/drawing/2014/main" id="{E6911108-69F2-4E57-B80A-C0AFB68C98DD}"/>
+                <a16:creationId xmlns:a16="http://schemas.microsoft.com/office/drawing/2014/main" id="{39BD18D0-37DE-4007-B808-2DB46CC3E870}"/>
               </a:ext>
             </a:extLst>
           </p:cNvPr>
@@ -19468,7 +19468,7 @@
           <p:cNvPr id="50" name="">
             <a:extLst xmlns:a="http://schemas.openxmlformats.org/drawingml/2006/main">
               <a:ext uri="{FF2B5EF4-FFF2-40B4-BE49-F238E27FC236}">
-                <a16:creationId xmlns:a16="http://schemas.microsoft.com/office/drawing/2014/main" id="{2B7544B3-1BFD-4189-AB78-FA706206935F}"/>
+                <a16:creationId xmlns:a16="http://schemas.microsoft.com/office/drawing/2014/main" id="{D1AAD910-7DF5-4B0C-BB68-C2F9C2AE1FDC}"/>
               </a:ext>
             </a:extLst>
           </p:cNvPr>
@@ -19520,7 +19520,7 @@
           <p:cNvPr id="51" name="">
             <a:extLst xmlns:a="http://schemas.openxmlformats.org/drawingml/2006/main">
               <a:ext uri="{FF2B5EF4-FFF2-40B4-BE49-F238E27FC236}">
-                <a16:creationId xmlns:a16="http://schemas.microsoft.com/office/drawing/2014/main" id="{8F974416-8F63-497E-A66D-7FC2E1A90CCA}"/>
+                <a16:creationId xmlns:a16="http://schemas.microsoft.com/office/drawing/2014/main" id="{7EDE37EA-D302-4F9F-B70F-0B0451A4D509}"/>
               </a:ext>
             </a:extLst>
           </p:cNvPr>
@@ -19551,7 +19551,7 @@
           <p:cNvPr id="52" name="">
             <a:extLst xmlns:a="http://schemas.openxmlformats.org/drawingml/2006/main">
               <a:ext uri="{FF2B5EF4-FFF2-40B4-BE49-F238E27FC236}">
-                <a16:creationId xmlns:a16="http://schemas.microsoft.com/office/drawing/2014/main" id="{5EA046E3-D704-4393-9076-88C5884F4891}"/>
+                <a16:creationId xmlns:a16="http://schemas.microsoft.com/office/drawing/2014/main" id="{26E82C4D-2B2D-42C7-930D-08CBA7EFC197}"/>
               </a:ext>
             </a:extLst>
           </p:cNvPr>
@@ -19603,7 +19603,7 @@
           <p:cNvPr id="53" name="">
             <a:extLst xmlns:a="http://schemas.openxmlformats.org/drawingml/2006/main">
               <a:ext uri="{FF2B5EF4-FFF2-40B4-BE49-F238E27FC236}">
-                <a16:creationId xmlns:a16="http://schemas.microsoft.com/office/drawing/2014/main" id="{8F52A885-0C49-433E-8231-4CE1BB420199}"/>
+                <a16:creationId xmlns:a16="http://schemas.microsoft.com/office/drawing/2014/main" id="{CFD1107F-A04A-4A7D-BDA9-F5808FBACB7B}"/>
               </a:ext>
             </a:extLst>
           </p:cNvPr>
@@ -19655,7 +19655,7 @@
           <p:cNvPr id="54" name="">
             <a:extLst xmlns:a="http://schemas.openxmlformats.org/drawingml/2006/main">
               <a:ext uri="{FF2B5EF4-FFF2-40B4-BE49-F238E27FC236}">
-                <a16:creationId xmlns:a16="http://schemas.microsoft.com/office/drawing/2014/main" id="{4296C077-AA73-4077-AB52-4BA7EC66AA0A}"/>
+                <a16:creationId xmlns:a16="http://schemas.microsoft.com/office/drawing/2014/main" id="{5F194696-5E62-4AE8-B9EF-BF3E1482698F}"/>
               </a:ext>
             </a:extLst>
           </p:cNvPr>
@@ -19707,7 +19707,7 @@
           <p:cNvPr id="55" name="">
             <a:extLst xmlns:a="http://schemas.openxmlformats.org/drawingml/2006/main">
               <a:ext uri="{FF2B5EF4-FFF2-40B4-BE49-F238E27FC236}">
-                <a16:creationId xmlns:a16="http://schemas.microsoft.com/office/drawing/2014/main" id="{E08E505D-C295-4FE1-A0D9-6C59D65D66D8}"/>
+                <a16:creationId xmlns:a16="http://schemas.microsoft.com/office/drawing/2014/main" id="{C212CDA3-5A60-456E-83DF-050C16AE852B}"/>
               </a:ext>
             </a:extLst>
           </p:cNvPr>
@@ -19759,7 +19759,7 @@
           <p:cNvPr id="56" name="">
             <a:extLst xmlns:a="http://schemas.openxmlformats.org/drawingml/2006/main">
               <a:ext uri="{FF2B5EF4-FFF2-40B4-BE49-F238E27FC236}">
-                <a16:creationId xmlns:a16="http://schemas.microsoft.com/office/drawing/2014/main" id="{11ACDA19-9565-4248-8EE6-BD5548D8C0BC}"/>
+                <a16:creationId xmlns:a16="http://schemas.microsoft.com/office/drawing/2014/main" id="{4C4B888C-B274-4373-A1CB-702EB135CA08}"/>
               </a:ext>
             </a:extLst>
           </p:cNvPr>
@@ -19811,7 +19811,7 @@
           <p:cNvPr id="57" name="">
             <a:extLst xmlns:a="http://schemas.openxmlformats.org/drawingml/2006/main">
               <a:ext uri="{FF2B5EF4-FFF2-40B4-BE49-F238E27FC236}">
-                <a16:creationId xmlns:a16="http://schemas.microsoft.com/office/drawing/2014/main" id="{5399384D-069D-4642-A9EF-8897211360F0}"/>
+                <a16:creationId xmlns:a16="http://schemas.microsoft.com/office/drawing/2014/main" id="{70A37D62-7EC9-42A0-AD21-E426EF2D3FA1}"/>
               </a:ext>
             </a:extLst>
           </p:cNvPr>
@@ -19842,7 +19842,7 @@
           <p:cNvPr id="58" name="">
             <a:extLst xmlns:a="http://schemas.openxmlformats.org/drawingml/2006/main">
               <a:ext uri="{FF2B5EF4-FFF2-40B4-BE49-F238E27FC236}">
-                <a16:creationId xmlns:a16="http://schemas.microsoft.com/office/drawing/2014/main" id="{AA9D66F3-CC2D-4C42-9E53-2E90C10E397A}"/>
+                <a16:creationId xmlns:a16="http://schemas.microsoft.com/office/drawing/2014/main" id="{663FD70C-BCEB-4D76-8E5E-C07FE2F5FDA8}"/>
               </a:ext>
             </a:extLst>
           </p:cNvPr>
@@ -19873,7 +19873,7 @@
           <p:cNvPr id="59" name="">
             <a:extLst xmlns:a="http://schemas.openxmlformats.org/drawingml/2006/main">
               <a:ext uri="{FF2B5EF4-FFF2-40B4-BE49-F238E27FC236}">
-                <a16:creationId xmlns:a16="http://schemas.microsoft.com/office/drawing/2014/main" id="{29CB61E5-495B-4FB7-9717-8116B1542A78}"/>
+                <a16:creationId xmlns:a16="http://schemas.microsoft.com/office/drawing/2014/main" id="{D47CC511-60B3-4577-B89F-EC5B9DDF9E72}"/>
               </a:ext>
             </a:extLst>
           </p:cNvPr>
@@ -19925,7 +19925,7 @@
           <p:cNvPr id="60" name="">
             <a:extLst xmlns:a="http://schemas.openxmlformats.org/drawingml/2006/main">
               <a:ext uri="{FF2B5EF4-FFF2-40B4-BE49-F238E27FC236}">
-                <a16:creationId xmlns:a16="http://schemas.microsoft.com/office/drawing/2014/main" id="{B1801123-5AD9-4042-8C4A-24D4DEABAD83}"/>
+                <a16:creationId xmlns:a16="http://schemas.microsoft.com/office/drawing/2014/main" id="{D9E95A8B-A345-4DE3-AE61-E8F48D76D0A9}"/>
               </a:ext>
             </a:extLst>
           </p:cNvPr>
@@ -19977,7 +19977,7 @@
           <p:cNvPr id="61" name="">
             <a:extLst xmlns:a="http://schemas.openxmlformats.org/drawingml/2006/main">
               <a:ext uri="{FF2B5EF4-FFF2-40B4-BE49-F238E27FC236}">
-                <a16:creationId xmlns:a16="http://schemas.microsoft.com/office/drawing/2014/main" id="{D08D430C-DD79-4836-8517-0EBECB43EB38}"/>
+                <a16:creationId xmlns:a16="http://schemas.microsoft.com/office/drawing/2014/main" id="{6181A4AB-DB3C-48CB-9459-CBFBADACB1CC}"/>
               </a:ext>
             </a:extLst>
           </p:cNvPr>
@@ -20029,7 +20029,7 @@
           <p:cNvPr id="62" name="">
             <a:extLst xmlns:a="http://schemas.openxmlformats.org/drawingml/2006/main">
               <a:ext uri="{FF2B5EF4-FFF2-40B4-BE49-F238E27FC236}">
-                <a16:creationId xmlns:a16="http://schemas.microsoft.com/office/drawing/2014/main" id="{4D7A4E3D-851B-4536-85CB-34B455F8EECF}"/>
+                <a16:creationId xmlns:a16="http://schemas.microsoft.com/office/drawing/2014/main" id="{FF6AED28-7180-4E77-B78C-44BD40E05A24}"/>
               </a:ext>
             </a:extLst>
           </p:cNvPr>
@@ -20081,7 +20081,7 @@
           <p:cNvPr id="63" name="">
             <a:extLst xmlns:a="http://schemas.openxmlformats.org/drawingml/2006/main">
               <a:ext uri="{FF2B5EF4-FFF2-40B4-BE49-F238E27FC236}">
-                <a16:creationId xmlns:a16="http://schemas.microsoft.com/office/drawing/2014/main" id="{28C6B2F7-282D-4C6E-88A5-FE6463F9624D}"/>
+                <a16:creationId xmlns:a16="http://schemas.microsoft.com/office/drawing/2014/main" id="{756F8035-8F0C-4345-A8A0-8C00710C384A}"/>
               </a:ext>
             </a:extLst>
           </p:cNvPr>
@@ -20133,7 +20133,7 @@
           <p:cNvPr id="64" name="">
             <a:extLst xmlns:a="http://schemas.openxmlformats.org/drawingml/2006/main">
               <a:ext uri="{FF2B5EF4-FFF2-40B4-BE49-F238E27FC236}">
-                <a16:creationId xmlns:a16="http://schemas.microsoft.com/office/drawing/2014/main" id="{59E79BC2-94FF-4DEB-B86E-F719196E4FA5}"/>
+                <a16:creationId xmlns:a16="http://schemas.microsoft.com/office/drawing/2014/main" id="{834A45D2-FEF0-407C-82E7-ADC93A5CDA2D}"/>
               </a:ext>
             </a:extLst>
           </p:cNvPr>
@@ -20164,7 +20164,7 @@
           <p:cNvPr id="65" name="">
             <a:extLst xmlns:a="http://schemas.openxmlformats.org/drawingml/2006/main">
               <a:ext uri="{FF2B5EF4-FFF2-40B4-BE49-F238E27FC236}">
-                <a16:creationId xmlns:a16="http://schemas.microsoft.com/office/drawing/2014/main" id="{C4613954-C8A7-4DAF-B0B1-606CC2AC20F7}"/>
+                <a16:creationId xmlns:a16="http://schemas.microsoft.com/office/drawing/2014/main" id="{C1223957-96ED-4DF4-8147-8DFD0489C634}"/>
               </a:ext>
             </a:extLst>
           </p:cNvPr>
@@ -20216,7 +20216,7 @@
           <p:cNvPr id="66" name="">
             <a:extLst xmlns:a="http://schemas.openxmlformats.org/drawingml/2006/main">
               <a:ext uri="{FF2B5EF4-FFF2-40B4-BE49-F238E27FC236}">
-                <a16:creationId xmlns:a16="http://schemas.microsoft.com/office/drawing/2014/main" id="{2D7A5BF6-DC17-4782-90AC-03F12B31BCF6}"/>
+                <a16:creationId xmlns:a16="http://schemas.microsoft.com/office/drawing/2014/main" id="{6F1994E3-A51E-4D64-A3BE-B5DDD7B8E337}"/>
               </a:ext>
             </a:extLst>
           </p:cNvPr>
@@ -20268,7 +20268,7 @@
           <p:cNvPr id="67" name="">
             <a:extLst xmlns:a="http://schemas.openxmlformats.org/drawingml/2006/main">
               <a:ext uri="{FF2B5EF4-FFF2-40B4-BE49-F238E27FC236}">
-                <a16:creationId xmlns:a16="http://schemas.microsoft.com/office/drawing/2014/main" id="{0A722440-B680-4435-8A9D-3B71A83FCB62}"/>
+                <a16:creationId xmlns:a16="http://schemas.microsoft.com/office/drawing/2014/main" id="{FFF93221-0E59-4EDD-9C99-767093078042}"/>
               </a:ext>
             </a:extLst>
           </p:cNvPr>
@@ -20320,7 +20320,7 @@
           <p:cNvPr id="68" name="">
             <a:extLst xmlns:a="http://schemas.openxmlformats.org/drawingml/2006/main">
               <a:ext uri="{FF2B5EF4-FFF2-40B4-BE49-F238E27FC236}">
-                <a16:creationId xmlns:a16="http://schemas.microsoft.com/office/drawing/2014/main" id="{40650424-EBB4-4B52-AE34-53928D1E89F6}"/>
+                <a16:creationId xmlns:a16="http://schemas.microsoft.com/office/drawing/2014/main" id="{EC76158E-5CA0-4D26-9BCB-9D308FCE4456}"/>
               </a:ext>
             </a:extLst>
           </p:cNvPr>
@@ -20372,7 +20372,7 @@
           <p:cNvPr id="69" name="">
             <a:extLst xmlns:a="http://schemas.openxmlformats.org/drawingml/2006/main">
               <a:ext uri="{FF2B5EF4-FFF2-40B4-BE49-F238E27FC236}">
-                <a16:creationId xmlns:a16="http://schemas.microsoft.com/office/drawing/2014/main" id="{B9E08EC9-BE23-40EB-AD64-51B13C553F4B}"/>
+                <a16:creationId xmlns:a16="http://schemas.microsoft.com/office/drawing/2014/main" id="{1570483D-7C2E-4451-9DA0-CBD6A0D225CA}"/>
               </a:ext>
             </a:extLst>
           </p:cNvPr>
@@ -20424,7 +20424,7 @@
           <p:cNvPr id="70" name="">
             <a:extLst xmlns:a="http://schemas.openxmlformats.org/drawingml/2006/main">
               <a:ext uri="{FF2B5EF4-FFF2-40B4-BE49-F238E27FC236}">
-                <a16:creationId xmlns:a16="http://schemas.microsoft.com/office/drawing/2014/main" id="{393C8CA5-2006-49CB-8EEB-5E0C207BB8E1}"/>
+                <a16:creationId xmlns:a16="http://schemas.microsoft.com/office/drawing/2014/main" id="{B176C73F-A7C7-41DB-B5E4-EA9A01452774}"/>
               </a:ext>
             </a:extLst>
           </p:cNvPr>
@@ -20455,7 +20455,7 @@
           <p:cNvPr id="71" name="">
             <a:extLst xmlns:a="http://schemas.openxmlformats.org/drawingml/2006/main">
               <a:ext uri="{FF2B5EF4-FFF2-40B4-BE49-F238E27FC236}">
-                <a16:creationId xmlns:a16="http://schemas.microsoft.com/office/drawing/2014/main" id="{158E43CA-1D94-4A4F-A766-21C054DFCD36}"/>
+                <a16:creationId xmlns:a16="http://schemas.microsoft.com/office/drawing/2014/main" id="{FCBDB76B-F15A-4739-B730-493C6CACDC1E}"/>
               </a:ext>
             </a:extLst>
           </p:cNvPr>
@@ -20486,7 +20486,7 @@
           <p:cNvPr id="72" name="">
             <a:extLst xmlns:a="http://schemas.openxmlformats.org/drawingml/2006/main">
               <a:ext uri="{FF2B5EF4-FFF2-40B4-BE49-F238E27FC236}">
-                <a16:creationId xmlns:a16="http://schemas.microsoft.com/office/drawing/2014/main" id="{ACF25CF2-502D-4290-8B0F-1B588194D295}"/>
+                <a16:creationId xmlns:a16="http://schemas.microsoft.com/office/drawing/2014/main" id="{54CC7A89-84DF-40FF-9FCE-D43351981434}"/>
               </a:ext>
             </a:extLst>
           </p:cNvPr>
@@ -20538,7 +20538,7 @@
           <p:cNvPr id="73" name="">
             <a:extLst xmlns:a="http://schemas.openxmlformats.org/drawingml/2006/main">
               <a:ext uri="{FF2B5EF4-FFF2-40B4-BE49-F238E27FC236}">
-                <a16:creationId xmlns:a16="http://schemas.microsoft.com/office/drawing/2014/main" id="{06F91634-95D0-46E0-AD65-9E631063683A}"/>
+                <a16:creationId xmlns:a16="http://schemas.microsoft.com/office/drawing/2014/main" id="{5C70CC0E-19DA-4668-AD26-999382C4FD66}"/>
               </a:ext>
             </a:extLst>
           </p:cNvPr>
@@ -20590,7 +20590,7 @@
           <p:cNvPr id="74" name="">
             <a:extLst xmlns:a="http://schemas.openxmlformats.org/drawingml/2006/main">
               <a:ext uri="{FF2B5EF4-FFF2-40B4-BE49-F238E27FC236}">
-                <a16:creationId xmlns:a16="http://schemas.microsoft.com/office/drawing/2014/main" id="{9D8A13E4-FB4C-4FA1-A470-27DA5271A318}"/>
+                <a16:creationId xmlns:a16="http://schemas.microsoft.com/office/drawing/2014/main" id="{39A46060-FE4D-4FBE-80E0-11E595BF4EB7}"/>
               </a:ext>
             </a:extLst>
           </p:cNvPr>
@@ -20642,7 +20642,7 @@
           <p:cNvPr id="75" name="">
             <a:extLst xmlns:a="http://schemas.openxmlformats.org/drawingml/2006/main">
               <a:ext uri="{FF2B5EF4-FFF2-40B4-BE49-F238E27FC236}">
-                <a16:creationId xmlns:a16="http://schemas.microsoft.com/office/drawing/2014/main" id="{20026B66-636B-47D3-AE13-E6BDF5706D5B}"/>
+                <a16:creationId xmlns:a16="http://schemas.microsoft.com/office/drawing/2014/main" id="{28394EB5-3952-4D33-855E-B03E595942D0}"/>
               </a:ext>
             </a:extLst>
           </p:cNvPr>
@@ -20694,7 +20694,7 @@
           <p:cNvPr id="76" name="">
             <a:extLst xmlns:a="http://schemas.openxmlformats.org/drawingml/2006/main">
               <a:ext uri="{FF2B5EF4-FFF2-40B4-BE49-F238E27FC236}">
-                <a16:creationId xmlns:a16="http://schemas.microsoft.com/office/drawing/2014/main" id="{E8EE9509-7DF7-4E07-9BE0-BE2FE8F03DE3}"/>
+                <a16:creationId xmlns:a16="http://schemas.microsoft.com/office/drawing/2014/main" id="{BAB75671-2183-4846-B91B-8B53A3C77F63}"/>
               </a:ext>
             </a:extLst>
           </p:cNvPr>
@@ -20746,7 +20746,7 @@
           <p:cNvPr id="77" name="">
             <a:extLst xmlns:a="http://schemas.openxmlformats.org/drawingml/2006/main">
               <a:ext uri="{FF2B5EF4-FFF2-40B4-BE49-F238E27FC236}">
-                <a16:creationId xmlns:a16="http://schemas.microsoft.com/office/drawing/2014/main" id="{DE72ED33-7CC8-48A8-A2EA-74EE9D2AB5DC}"/>
+                <a16:creationId xmlns:a16="http://schemas.microsoft.com/office/drawing/2014/main" id="{5B9AABFC-86DF-4912-8A66-97F05FB6D203}"/>
               </a:ext>
             </a:extLst>
           </p:cNvPr>
@@ -20777,7 +20777,7 @@
           <p:cNvPr id="78" name="">
             <a:extLst xmlns:a="http://schemas.openxmlformats.org/drawingml/2006/main">
               <a:ext uri="{FF2B5EF4-FFF2-40B4-BE49-F238E27FC236}">
-                <a16:creationId xmlns:a16="http://schemas.microsoft.com/office/drawing/2014/main" id="{9B9C8B66-7D4D-4C44-9732-C7931A03CCD8}"/>
+                <a16:creationId xmlns:a16="http://schemas.microsoft.com/office/drawing/2014/main" id="{449C0C29-972F-4667-9E14-9A2A91113B42}"/>
               </a:ext>
             </a:extLst>
           </p:cNvPr>
@@ -20829,7 +20829,7 @@
           <p:cNvPr id="79" name="">
             <a:extLst xmlns:a="http://schemas.openxmlformats.org/drawingml/2006/main">
               <a:ext uri="{FF2B5EF4-FFF2-40B4-BE49-F238E27FC236}">
-                <a16:creationId xmlns:a16="http://schemas.microsoft.com/office/drawing/2014/main" id="{E3340B01-D213-4EA2-BAE9-22B7DB748401}"/>
+                <a16:creationId xmlns:a16="http://schemas.microsoft.com/office/drawing/2014/main" id="{9677D366-27F3-4C84-8AC0-94F3D5E11178}"/>
               </a:ext>
             </a:extLst>
           </p:cNvPr>
@@ -20881,7 +20881,7 @@
           <p:cNvPr id="80" name="">
             <a:extLst xmlns:a="http://schemas.openxmlformats.org/drawingml/2006/main">
               <a:ext uri="{FF2B5EF4-FFF2-40B4-BE49-F238E27FC236}">
-                <a16:creationId xmlns:a16="http://schemas.microsoft.com/office/drawing/2014/main" id="{9892F509-AAC4-43BF-9F33-59BF9DC69A8F}"/>
+                <a16:creationId xmlns:a16="http://schemas.microsoft.com/office/drawing/2014/main" id="{7EF14CF6-67C2-4DFE-A8A4-C934C79BFC6D}"/>
               </a:ext>
             </a:extLst>
           </p:cNvPr>
@@ -20933,7 +20933,7 @@
           <p:cNvPr id="81" name="">
             <a:extLst xmlns:a="http://schemas.openxmlformats.org/drawingml/2006/main">
               <a:ext uri="{FF2B5EF4-FFF2-40B4-BE49-F238E27FC236}">
-                <a16:creationId xmlns:a16="http://schemas.microsoft.com/office/drawing/2014/main" id="{45020E5D-D19B-4709-98C2-2CFA689DD3BD}"/>
+                <a16:creationId xmlns:a16="http://schemas.microsoft.com/office/drawing/2014/main" id="{03F9CAD2-EC53-400F-A21F-CABB5F7C7F5E}"/>
               </a:ext>
             </a:extLst>
           </p:cNvPr>
@@ -20985,7 +20985,7 @@
           <p:cNvPr id="82" name="">
             <a:extLst xmlns:a="http://schemas.openxmlformats.org/drawingml/2006/main">
               <a:ext uri="{FF2B5EF4-FFF2-40B4-BE49-F238E27FC236}">
-                <a16:creationId xmlns:a16="http://schemas.microsoft.com/office/drawing/2014/main" id="{6FB974CE-5E26-4D0C-81DD-BA43E39E0731}"/>
+                <a16:creationId xmlns:a16="http://schemas.microsoft.com/office/drawing/2014/main" id="{977C4856-D6C2-4358-954A-9998DB7F7398}"/>
               </a:ext>
             </a:extLst>
           </p:cNvPr>
@@ -21037,7 +21037,7 @@
           <p:cNvPr id="83" name="">
             <a:extLst xmlns:a="http://schemas.openxmlformats.org/drawingml/2006/main">
               <a:ext uri="{FF2B5EF4-FFF2-40B4-BE49-F238E27FC236}">
-                <a16:creationId xmlns:a16="http://schemas.microsoft.com/office/drawing/2014/main" id="{00A82DFF-1619-4E3A-9687-D74243BDA3C7}"/>
+                <a16:creationId xmlns:a16="http://schemas.microsoft.com/office/drawing/2014/main" id="{CE0309A9-FB8B-4B13-B89B-8A4223AF62B3}"/>
               </a:ext>
             </a:extLst>
           </p:cNvPr>
@@ -21068,7 +21068,7 @@
           <p:cNvPr id="84" name="">
             <a:extLst xmlns:a="http://schemas.openxmlformats.org/drawingml/2006/main">
               <a:ext uri="{FF2B5EF4-FFF2-40B4-BE49-F238E27FC236}">
-                <a16:creationId xmlns:a16="http://schemas.microsoft.com/office/drawing/2014/main" id="{DB465974-34DA-4B42-B0D0-5C9D77A353CC}"/>
+                <a16:creationId xmlns:a16="http://schemas.microsoft.com/office/drawing/2014/main" id="{97262090-E2D8-4AB8-BBE6-128B6F72A0A1}"/>
               </a:ext>
             </a:extLst>
           </p:cNvPr>
@@ -21120,7 +21120,7 @@
           <p:cNvPr id="85" name="">
             <a:extLst xmlns:a="http://schemas.openxmlformats.org/drawingml/2006/main">
               <a:ext uri="{FF2B5EF4-FFF2-40B4-BE49-F238E27FC236}">
-                <a16:creationId xmlns:a16="http://schemas.microsoft.com/office/drawing/2014/main" id="{BAE84ADA-8A1E-4D71-8C85-5684D8A6926A}"/>
+                <a16:creationId xmlns:a16="http://schemas.microsoft.com/office/drawing/2014/main" id="{B414511E-616F-413A-9378-4D4C281B6FAA}"/>
               </a:ext>
             </a:extLst>
           </p:cNvPr>
@@ -21172,7 +21172,7 @@
           <p:cNvPr id="86" name="">
             <a:extLst xmlns:a="http://schemas.openxmlformats.org/drawingml/2006/main">
               <a:ext uri="{FF2B5EF4-FFF2-40B4-BE49-F238E27FC236}">
-                <a16:creationId xmlns:a16="http://schemas.microsoft.com/office/drawing/2014/main" id="{AAC9D10F-8D77-4E94-8A40-E96EC225EF46}"/>
+                <a16:creationId xmlns:a16="http://schemas.microsoft.com/office/drawing/2014/main" id="{9307A4B5-8F72-44BB-A5B2-B4A0D9D97271}"/>
               </a:ext>
             </a:extLst>
           </p:cNvPr>
@@ -21224,7 +21224,7 @@
           <p:cNvPr id="87" name="">
             <a:extLst xmlns:a="http://schemas.openxmlformats.org/drawingml/2006/main">
               <a:ext uri="{FF2B5EF4-FFF2-40B4-BE49-F238E27FC236}">
-                <a16:creationId xmlns:a16="http://schemas.microsoft.com/office/drawing/2014/main" id="{616A8521-B0B6-42CF-BF41-3BD21CAD0D7E}"/>
+                <a16:creationId xmlns:a16="http://schemas.microsoft.com/office/drawing/2014/main" id="{C41D8C23-6369-4C05-A759-D77FABD121A2}"/>
               </a:ext>
             </a:extLst>
           </p:cNvPr>
@@ -21276,7 +21276,7 @@
           <p:cNvPr id="88" name="">
             <a:extLst xmlns:a="http://schemas.openxmlformats.org/drawingml/2006/main">
               <a:ext uri="{FF2B5EF4-FFF2-40B4-BE49-F238E27FC236}">
-                <a16:creationId xmlns:a16="http://schemas.microsoft.com/office/drawing/2014/main" id="{7CEBD01A-8B69-4C65-8F74-F0D6DA669256}"/>
+                <a16:creationId xmlns:a16="http://schemas.microsoft.com/office/drawing/2014/main" id="{E4D6CD5F-0BB1-4538-9550-10FB714401E6}"/>
               </a:ext>
             </a:extLst>
           </p:cNvPr>
@@ -21328,7 +21328,7 @@
           <p:cNvPr id="89" name="">
             <a:extLst xmlns:a="http://schemas.openxmlformats.org/drawingml/2006/main">
               <a:ext uri="{FF2B5EF4-FFF2-40B4-BE49-F238E27FC236}">
-                <a16:creationId xmlns:a16="http://schemas.microsoft.com/office/drawing/2014/main" id="{99466CD6-4126-4488-BB6D-4266A2C2A83E}"/>
+                <a16:creationId xmlns:a16="http://schemas.microsoft.com/office/drawing/2014/main" id="{3E196F3B-1E5A-46AC-9713-E60200E61DD5}"/>
               </a:ext>
             </a:extLst>
           </p:cNvPr>
@@ -21359,7 +21359,7 @@
           <p:cNvPr id="90" name="">
             <a:extLst xmlns:a="http://schemas.openxmlformats.org/drawingml/2006/main">
               <a:ext uri="{FF2B5EF4-FFF2-40B4-BE49-F238E27FC236}">
-                <a16:creationId xmlns:a16="http://schemas.microsoft.com/office/drawing/2014/main" id="{9B6FF16F-354A-46E0-AA09-AE5F798CF35B}"/>
+                <a16:creationId xmlns:a16="http://schemas.microsoft.com/office/drawing/2014/main" id="{BA9BB066-ADAD-4497-9D35-FABA3449F3DB}"/>
               </a:ext>
             </a:extLst>
           </p:cNvPr>
@@ -21390,7 +21390,7 @@
           <p:cNvPr id="91" name="">
             <a:extLst xmlns:a="http://schemas.openxmlformats.org/drawingml/2006/main">
               <a:ext uri="{FF2B5EF4-FFF2-40B4-BE49-F238E27FC236}">
-                <a16:creationId xmlns:a16="http://schemas.microsoft.com/office/drawing/2014/main" id="{99398226-F176-4BD6-B07A-4EDB84883200}"/>
+                <a16:creationId xmlns:a16="http://schemas.microsoft.com/office/drawing/2014/main" id="{5F5669D0-29CF-401D-B845-2883F8828534}"/>
               </a:ext>
             </a:extLst>
           </p:cNvPr>
@@ -21442,7 +21442,7 @@
           <p:cNvPr id="92" name="">
             <a:extLst xmlns:a="http://schemas.openxmlformats.org/drawingml/2006/main">
               <a:ext uri="{FF2B5EF4-FFF2-40B4-BE49-F238E27FC236}">
-                <a16:creationId xmlns:a16="http://schemas.microsoft.com/office/drawing/2014/main" id="{214A9717-D28C-4CB8-B516-F235615CF0EE}"/>
+                <a16:creationId xmlns:a16="http://schemas.microsoft.com/office/drawing/2014/main" id="{44F65348-2F55-4858-961E-6AC0D5585D61}"/>
               </a:ext>
             </a:extLst>
           </p:cNvPr>
@@ -21494,7 +21494,7 @@
           <p:cNvPr id="93" name="">
             <a:extLst xmlns:a="http://schemas.openxmlformats.org/drawingml/2006/main">
               <a:ext uri="{FF2B5EF4-FFF2-40B4-BE49-F238E27FC236}">
-                <a16:creationId xmlns:a16="http://schemas.microsoft.com/office/drawing/2014/main" id="{270D9F6B-8305-49A5-916B-2DCA218A3E4E}"/>
+                <a16:creationId xmlns:a16="http://schemas.microsoft.com/office/drawing/2014/main" id="{230A5CEC-86BE-44C5-B5CF-8D27E4B59310}"/>
               </a:ext>
             </a:extLst>
           </p:cNvPr>
@@ -21546,7 +21546,7 @@
           <p:cNvPr id="94" name="">
             <a:extLst xmlns:a="http://schemas.openxmlformats.org/drawingml/2006/main">
               <a:ext uri="{FF2B5EF4-FFF2-40B4-BE49-F238E27FC236}">
-                <a16:creationId xmlns:a16="http://schemas.microsoft.com/office/drawing/2014/main" id="{9A643F87-7800-468A-8F53-576AE1F4ED87}"/>
+                <a16:creationId xmlns:a16="http://schemas.microsoft.com/office/drawing/2014/main" id="{3AB39914-7E00-4CA4-B58F-72D57F41EF2A}"/>
               </a:ext>
             </a:extLst>
           </p:cNvPr>
@@ -21598,7 +21598,7 @@
           <p:cNvPr id="95" name="">
             <a:extLst xmlns:a="http://schemas.openxmlformats.org/drawingml/2006/main">
               <a:ext uri="{FF2B5EF4-FFF2-40B4-BE49-F238E27FC236}">
-                <a16:creationId xmlns:a16="http://schemas.microsoft.com/office/drawing/2014/main" id="{E811C6BD-20E9-4E99-A0EF-B7D7ABFEA6C7}"/>
+                <a16:creationId xmlns:a16="http://schemas.microsoft.com/office/drawing/2014/main" id="{DA6F452E-70A1-49C7-9E6A-5374AB7E8CC3}"/>
               </a:ext>
             </a:extLst>
           </p:cNvPr>
@@ -21648,7 +21648,7 @@
     </p:spTree>
     <p:extLst>
       <p:ext uri="{BB962C8B-B14F-4D97-AF65-F5344CB8AC3E}">
-        <p14:creationId xmlns:p14="http://schemas.microsoft.com/office/powerpoint/2010/main" val="761580628"/>
+        <p14:creationId xmlns:p14="http://schemas.microsoft.com/office/powerpoint/2010/main" val="804489718"/>
       </p:ext>
     </p:extLst>
   </p:cSld>
@@ -21679,7 +21679,7 @@
           <p:cNvPr id="135" name="">
             <a:extLst xmlns:a="http://schemas.openxmlformats.org/drawingml/2006/main">
               <a:ext uri="{FF2B5EF4-FFF2-40B4-BE49-F238E27FC236}">
-                <a16:creationId xmlns:a16="http://schemas.microsoft.com/office/drawing/2014/main" id="{F0792D8F-0918-46EF-923D-CE7173A38DCA}"/>
+                <a16:creationId xmlns:a16="http://schemas.microsoft.com/office/drawing/2014/main" id="{8DF1F5E6-70C2-4565-A3D1-8256A39731C7}"/>
               </a:ext>
             </a:extLst>
           </p:cNvPr>
@@ -21712,7 +21712,7 @@
           <p:cNvPr id="2" name="">
             <a:extLst xmlns:a="http://schemas.openxmlformats.org/drawingml/2006/main">
               <a:ext uri="{FF2B5EF4-FFF2-40B4-BE49-F238E27FC236}">
-                <a16:creationId xmlns:a16="http://schemas.microsoft.com/office/drawing/2014/main" id="{C1B399E7-7755-4ADA-A2E9-EC27EEC153B0}"/>
+                <a16:creationId xmlns:a16="http://schemas.microsoft.com/office/drawing/2014/main" id="{7EDC73BB-8790-4447-81D6-ECE35F990B16}"/>
               </a:ext>
             </a:extLst>
           </p:cNvPr>
@@ -21743,7 +21743,7 @@
           <p:cNvPr id="3" name="">
             <a:extLst xmlns:a="http://schemas.openxmlformats.org/drawingml/2006/main">
               <a:ext uri="{FF2B5EF4-FFF2-40B4-BE49-F238E27FC236}">
-                <a16:creationId xmlns:a16="http://schemas.microsoft.com/office/drawing/2014/main" id="{E72AB49E-FF37-4772-908B-D60C7F372A61}"/>
+                <a16:creationId xmlns:a16="http://schemas.microsoft.com/office/drawing/2014/main" id="{8A9E41B4-0477-4B9B-8772-F97EAAE0E7D7}"/>
               </a:ext>
             </a:extLst>
           </p:cNvPr>
@@ -21795,7 +21795,7 @@
           <p:cNvPr id="4" name="">
             <a:extLst xmlns:a="http://schemas.openxmlformats.org/drawingml/2006/main">
               <a:ext uri="{FF2B5EF4-FFF2-40B4-BE49-F238E27FC236}">
-                <a16:creationId xmlns:a16="http://schemas.microsoft.com/office/drawing/2014/main" id="{6536DFC2-0BBB-4FFA-B2A6-56CD3A40FC20}"/>
+                <a16:creationId xmlns:a16="http://schemas.microsoft.com/office/drawing/2014/main" id="{F09376B2-2F2D-43EA-B664-8E8086E84929}"/>
               </a:ext>
             </a:extLst>
           </p:cNvPr>
@@ -21847,7 +21847,7 @@
           <p:cNvPr id="5" name="">
             <a:extLst xmlns:a="http://schemas.openxmlformats.org/drawingml/2006/main">
               <a:ext uri="{FF2B5EF4-FFF2-40B4-BE49-F238E27FC236}">
-                <a16:creationId xmlns:a16="http://schemas.microsoft.com/office/drawing/2014/main" id="{1D0C27FC-BCB4-4252-9E38-E309BDB9FF09}"/>
+                <a16:creationId xmlns:a16="http://schemas.microsoft.com/office/drawing/2014/main" id="{41D4D13E-0C6B-4711-B838-DF2D69409AA3}"/>
               </a:ext>
             </a:extLst>
           </p:cNvPr>
@@ -21882,7 +21882,7 @@
           <p:nvPr/>
         </p:nvPicPr>
         <p:blipFill>
-          <a:blip xmlns:r="http://schemas.openxmlformats.org/officeDocument/2006/relationships" xmlns:a="http://schemas.openxmlformats.org/drawingml/2006/main" r:embed="R528b6e70419143f3"/>
+          <a:blip xmlns:r="http://schemas.openxmlformats.org/officeDocument/2006/relationships" xmlns:a="http://schemas.openxmlformats.org/drawingml/2006/main" r:embed="R8fd066c2e72546e7"/>
           <a:stretch xmlns:a="http://schemas.openxmlformats.org/drawingml/2006/main"/>
         </p:blipFill>
         <p:spPr>
@@ -21900,7 +21900,7 @@
           <p:cNvPr id="7" name="">
             <a:extLst xmlns:a="http://schemas.openxmlformats.org/drawingml/2006/main">
               <a:ext uri="{FF2B5EF4-FFF2-40B4-BE49-F238E27FC236}">
-                <a16:creationId xmlns:a16="http://schemas.microsoft.com/office/drawing/2014/main" id="{8B7777D7-5787-4F75-B5AA-82B22BC171C4}"/>
+                <a16:creationId xmlns:a16="http://schemas.microsoft.com/office/drawing/2014/main" id="{97487767-01D7-4810-82B3-7FC93638CC1F}"/>
               </a:ext>
             </a:extLst>
           </p:cNvPr>
@@ -21952,7 +21952,7 @@
           <p:cNvPr id="8" name="">
             <a:extLst xmlns:a="http://schemas.openxmlformats.org/drawingml/2006/main">
               <a:ext uri="{FF2B5EF4-FFF2-40B4-BE49-F238E27FC236}">
-                <a16:creationId xmlns:a16="http://schemas.microsoft.com/office/drawing/2014/main" id="{F10631AB-36B4-4FD0-AF41-55C18B6E90B8}"/>
+                <a16:creationId xmlns:a16="http://schemas.microsoft.com/office/drawing/2014/main" id="{EF268CB5-D33C-4516-A5E3-ECB12D79080C}"/>
               </a:ext>
             </a:extLst>
           </p:cNvPr>
@@ -22004,7 +22004,7 @@
           <p:cNvPr id="9" name="">
             <a:extLst xmlns:a="http://schemas.openxmlformats.org/drawingml/2006/main">
               <a:ext uri="{FF2B5EF4-FFF2-40B4-BE49-F238E27FC236}">
-                <a16:creationId xmlns:a16="http://schemas.microsoft.com/office/drawing/2014/main" id="{65727D74-B85A-45F3-BF8C-974A3F834502}"/>
+                <a16:creationId xmlns:a16="http://schemas.microsoft.com/office/drawing/2014/main" id="{A9FE8FB3-CB6A-47BA-8C8C-1F6E98CCBF34}"/>
               </a:ext>
             </a:extLst>
           </p:cNvPr>
@@ -22056,7 +22056,7 @@
           <p:cNvPr id="10" name="">
             <a:extLst xmlns:a="http://schemas.openxmlformats.org/drawingml/2006/main">
               <a:ext uri="{FF2B5EF4-FFF2-40B4-BE49-F238E27FC236}">
-                <a16:creationId xmlns:a16="http://schemas.microsoft.com/office/drawing/2014/main" id="{103C2F5A-38F7-4408-9E78-7C581D59E347}"/>
+                <a16:creationId xmlns:a16="http://schemas.microsoft.com/office/drawing/2014/main" id="{BE646EC5-DDD4-4007-9EA9-5A5B5117390C}"/>
               </a:ext>
             </a:extLst>
           </p:cNvPr>
@@ -22108,7 +22108,7 @@
           <p:cNvPr id="11" name="">
             <a:extLst xmlns:a="http://schemas.openxmlformats.org/drawingml/2006/main">
               <a:ext uri="{FF2B5EF4-FFF2-40B4-BE49-F238E27FC236}">
-                <a16:creationId xmlns:a16="http://schemas.microsoft.com/office/drawing/2014/main" id="{EAAFE9F8-9C29-4522-8867-131D3ED6771D}"/>
+                <a16:creationId xmlns:a16="http://schemas.microsoft.com/office/drawing/2014/main" id="{5A92A522-E352-4A82-8D6D-36D79349EAE3}"/>
               </a:ext>
             </a:extLst>
           </p:cNvPr>
@@ -22139,7 +22139,7 @@
           <p:cNvPr id="12" name="">
             <a:extLst xmlns:a="http://schemas.openxmlformats.org/drawingml/2006/main">
               <a:ext uri="{FF2B5EF4-FFF2-40B4-BE49-F238E27FC236}">
-                <a16:creationId xmlns:a16="http://schemas.microsoft.com/office/drawing/2014/main" id="{FD69E3D1-5006-4B90-9636-0E42B33C6670}"/>
+                <a16:creationId xmlns:a16="http://schemas.microsoft.com/office/drawing/2014/main" id="{138ABBB4-D1B9-493A-98A0-6EFE3F60E4EB}"/>
               </a:ext>
             </a:extLst>
           </p:cNvPr>
@@ -22170,7 +22170,7 @@
           <p:cNvPr id="13" name="">
             <a:extLst xmlns:a="http://schemas.openxmlformats.org/drawingml/2006/main">
               <a:ext uri="{FF2B5EF4-FFF2-40B4-BE49-F238E27FC236}">
-                <a16:creationId xmlns:a16="http://schemas.microsoft.com/office/drawing/2014/main" id="{CDDEBD32-3CB4-4059-B5A8-5E818976F988}"/>
+                <a16:creationId xmlns:a16="http://schemas.microsoft.com/office/drawing/2014/main" id="{8F5B89A7-9C7C-48DB-A2B5-5956AEEF7315}"/>
               </a:ext>
             </a:extLst>
           </p:cNvPr>
@@ -22222,7 +22222,7 @@
           <p:cNvPr id="14" name="">
             <a:extLst xmlns:a="http://schemas.openxmlformats.org/drawingml/2006/main">
               <a:ext uri="{FF2B5EF4-FFF2-40B4-BE49-F238E27FC236}">
-                <a16:creationId xmlns:a16="http://schemas.microsoft.com/office/drawing/2014/main" id="{18F6E268-F72E-4DA6-A4A1-52432218A4FB}"/>
+                <a16:creationId xmlns:a16="http://schemas.microsoft.com/office/drawing/2014/main" id="{23745144-E1B5-47A4-9A80-42B05421D300}"/>
               </a:ext>
             </a:extLst>
           </p:cNvPr>
@@ -22274,7 +22274,7 @@
           <p:cNvPr id="15" name="">
             <a:extLst xmlns:a="http://schemas.openxmlformats.org/drawingml/2006/main">
               <a:ext uri="{FF2B5EF4-FFF2-40B4-BE49-F238E27FC236}">
-                <a16:creationId xmlns:a16="http://schemas.microsoft.com/office/drawing/2014/main" id="{53A5BB68-CBBD-460F-BBC6-1A0401C7FA2D}"/>
+                <a16:creationId xmlns:a16="http://schemas.microsoft.com/office/drawing/2014/main" id="{92D5F356-2EF9-4266-9091-61CFCBF4A988}"/>
               </a:ext>
             </a:extLst>
           </p:cNvPr>
@@ -22326,7 +22326,7 @@
           <p:cNvPr id="16" name="">
             <a:extLst xmlns:a="http://schemas.openxmlformats.org/drawingml/2006/main">
               <a:ext uri="{FF2B5EF4-FFF2-40B4-BE49-F238E27FC236}">
-                <a16:creationId xmlns:a16="http://schemas.microsoft.com/office/drawing/2014/main" id="{DA671D92-D572-42C2-9AE5-91EE7ADF8A3E}"/>
+                <a16:creationId xmlns:a16="http://schemas.microsoft.com/office/drawing/2014/main" id="{47DC63D6-12A8-4C10-9C31-128722B7A6C0}"/>
               </a:ext>
             </a:extLst>
           </p:cNvPr>
@@ -22378,7 +22378,7 @@
           <p:cNvPr id="17" name="">
             <a:extLst xmlns:a="http://schemas.openxmlformats.org/drawingml/2006/main">
               <a:ext uri="{FF2B5EF4-FFF2-40B4-BE49-F238E27FC236}">
-                <a16:creationId xmlns:a16="http://schemas.microsoft.com/office/drawing/2014/main" id="{3ABCDF49-1743-415B-A394-9655FA4CB3D3}"/>
+                <a16:creationId xmlns:a16="http://schemas.microsoft.com/office/drawing/2014/main" id="{C3A06875-17B0-41E1-AA61-7402F7EDFA29}"/>
               </a:ext>
             </a:extLst>
           </p:cNvPr>
@@ -22430,7 +22430,7 @@
           <p:cNvPr id="18" name="">
             <a:extLst xmlns:a="http://schemas.openxmlformats.org/drawingml/2006/main">
               <a:ext uri="{FF2B5EF4-FFF2-40B4-BE49-F238E27FC236}">
-                <a16:creationId xmlns:a16="http://schemas.microsoft.com/office/drawing/2014/main" id="{5AABFB0F-6DB8-42CB-84BD-C523BA13F28C}"/>
+                <a16:creationId xmlns:a16="http://schemas.microsoft.com/office/drawing/2014/main" id="{5F29EF95-4A6B-4562-AB42-BF543B19D285}"/>
               </a:ext>
             </a:extLst>
           </p:cNvPr>
@@ -22482,7 +22482,7 @@
           <p:cNvPr id="19" name="">
             <a:extLst xmlns:a="http://schemas.openxmlformats.org/drawingml/2006/main">
               <a:ext uri="{FF2B5EF4-FFF2-40B4-BE49-F238E27FC236}">
-                <a16:creationId xmlns:a16="http://schemas.microsoft.com/office/drawing/2014/main" id="{050B2C99-74DA-48F0-9CEF-CAA0EE2D6A16}"/>
+                <a16:creationId xmlns:a16="http://schemas.microsoft.com/office/drawing/2014/main" id="{EFD8771A-C284-4101-9256-272A36FA02E4}"/>
               </a:ext>
             </a:extLst>
           </p:cNvPr>
@@ -22534,7 +22534,7 @@
           <p:cNvPr id="20" name="">
             <a:extLst xmlns:a="http://schemas.openxmlformats.org/drawingml/2006/main">
               <a:ext uri="{FF2B5EF4-FFF2-40B4-BE49-F238E27FC236}">
-                <a16:creationId xmlns:a16="http://schemas.microsoft.com/office/drawing/2014/main" id="{8E183462-56BE-4AB0-8059-1D10B6220242}"/>
+                <a16:creationId xmlns:a16="http://schemas.microsoft.com/office/drawing/2014/main" id="{29B35D10-7245-4AE2-BB2B-A0860789F8B4}"/>
               </a:ext>
             </a:extLst>
           </p:cNvPr>
@@ -22586,7 +22586,7 @@
           <p:cNvPr id="21" name="">
             <a:extLst xmlns:a="http://schemas.openxmlformats.org/drawingml/2006/main">
               <a:ext uri="{FF2B5EF4-FFF2-40B4-BE49-F238E27FC236}">
-                <a16:creationId xmlns:a16="http://schemas.microsoft.com/office/drawing/2014/main" id="{5BF210AA-CB93-4A78-9008-1D89EF25B6E8}"/>
+                <a16:creationId xmlns:a16="http://schemas.microsoft.com/office/drawing/2014/main" id="{B8BB1852-8503-494D-882E-939E470DFC9D}"/>
               </a:ext>
             </a:extLst>
           </p:cNvPr>
@@ -22617,7 +22617,7 @@
           <p:cNvPr id="22" name="">
             <a:extLst xmlns:a="http://schemas.openxmlformats.org/drawingml/2006/main">
               <a:ext uri="{FF2B5EF4-FFF2-40B4-BE49-F238E27FC236}">
-                <a16:creationId xmlns:a16="http://schemas.microsoft.com/office/drawing/2014/main" id="{2B7DE1DA-24B9-4FF3-BDE8-D0EC9E79B85F}"/>
+                <a16:creationId xmlns:a16="http://schemas.microsoft.com/office/drawing/2014/main" id="{6A43012B-A4BD-4AFB-8C26-5AEB0A9FA413}"/>
               </a:ext>
             </a:extLst>
           </p:cNvPr>
@@ -22669,7 +22669,7 @@
           <p:cNvPr id="23" name="">
             <a:extLst xmlns:a="http://schemas.openxmlformats.org/drawingml/2006/main">
               <a:ext uri="{FF2B5EF4-FFF2-40B4-BE49-F238E27FC236}">
-                <a16:creationId xmlns:a16="http://schemas.microsoft.com/office/drawing/2014/main" id="{2B089193-C020-4FE6-BE9E-3C585A2435F6}"/>
+                <a16:creationId xmlns:a16="http://schemas.microsoft.com/office/drawing/2014/main" id="{742E1038-441A-4C4B-AF37-A11ABD177815}"/>
               </a:ext>
             </a:extLst>
           </p:cNvPr>
@@ -22721,7 +22721,7 @@
           <p:cNvPr id="24" name="">
             <a:extLst xmlns:a="http://schemas.openxmlformats.org/drawingml/2006/main">
               <a:ext uri="{FF2B5EF4-FFF2-40B4-BE49-F238E27FC236}">
-                <a16:creationId xmlns:a16="http://schemas.microsoft.com/office/drawing/2014/main" id="{C407CCF6-46FE-47D1-AC87-B3784D23BDD1}"/>
+                <a16:creationId xmlns:a16="http://schemas.microsoft.com/office/drawing/2014/main" id="{09FFBB53-2DEA-42C8-BC78-266B61F69312}"/>
               </a:ext>
             </a:extLst>
           </p:cNvPr>
@@ -22773,7 +22773,7 @@
           <p:cNvPr id="25" name="">
             <a:extLst xmlns:a="http://schemas.openxmlformats.org/drawingml/2006/main">
               <a:ext uri="{FF2B5EF4-FFF2-40B4-BE49-F238E27FC236}">
-                <a16:creationId xmlns:a16="http://schemas.microsoft.com/office/drawing/2014/main" id="{F585F7AA-1F9E-4505-A1C9-A59314EC6AB1}"/>
+                <a16:creationId xmlns:a16="http://schemas.microsoft.com/office/drawing/2014/main" id="{EC51CB41-F78A-4E77-A698-D36F38C594B8}"/>
               </a:ext>
             </a:extLst>
           </p:cNvPr>
@@ -22825,7 +22825,7 @@
           <p:cNvPr id="26" name="">
             <a:extLst xmlns:a="http://schemas.openxmlformats.org/drawingml/2006/main">
               <a:ext uri="{FF2B5EF4-FFF2-40B4-BE49-F238E27FC236}">
-                <a16:creationId xmlns:a16="http://schemas.microsoft.com/office/drawing/2014/main" id="{E855C86F-199A-4D45-9C0B-73874211E23E}"/>
+                <a16:creationId xmlns:a16="http://schemas.microsoft.com/office/drawing/2014/main" id="{BBD4AAC6-0913-4FD4-BB4B-8E0D7ECEFF4F}"/>
               </a:ext>
             </a:extLst>
           </p:cNvPr>
@@ -22877,7 +22877,7 @@
           <p:cNvPr id="27" name="">
             <a:extLst xmlns:a="http://schemas.openxmlformats.org/drawingml/2006/main">
               <a:ext uri="{FF2B5EF4-FFF2-40B4-BE49-F238E27FC236}">
-                <a16:creationId xmlns:a16="http://schemas.microsoft.com/office/drawing/2014/main" id="{F16177B5-79A0-40E7-A9E0-D28F6EA9DCD8}"/>
+                <a16:creationId xmlns:a16="http://schemas.microsoft.com/office/drawing/2014/main" id="{53DAA220-43F6-4F70-B45C-D84D5DCD5E1A}"/>
               </a:ext>
             </a:extLst>
           </p:cNvPr>
@@ -22929,7 +22929,7 @@
           <p:cNvPr id="28" name="">
             <a:extLst xmlns:a="http://schemas.openxmlformats.org/drawingml/2006/main">
               <a:ext uri="{FF2B5EF4-FFF2-40B4-BE49-F238E27FC236}">
-                <a16:creationId xmlns:a16="http://schemas.microsoft.com/office/drawing/2014/main" id="{A1EFF063-6362-47D9-A8F6-F9DB51A7276F}"/>
+                <a16:creationId xmlns:a16="http://schemas.microsoft.com/office/drawing/2014/main" id="{60EA622F-C05D-41FE-A93B-C20482CA3F15}"/>
               </a:ext>
             </a:extLst>
           </p:cNvPr>
@@ -22981,7 +22981,7 @@
           <p:cNvPr id="29" name="">
             <a:extLst xmlns:a="http://schemas.openxmlformats.org/drawingml/2006/main">
               <a:ext uri="{FF2B5EF4-FFF2-40B4-BE49-F238E27FC236}">
-                <a16:creationId xmlns:a16="http://schemas.microsoft.com/office/drawing/2014/main" id="{FB9DDE9D-1C85-473B-B9A9-A6C0A54A259F}"/>
+                <a16:creationId xmlns:a16="http://schemas.microsoft.com/office/drawing/2014/main" id="{2CEFC8F4-0C7B-4E72-87C8-B0CEAE025695}"/>
               </a:ext>
             </a:extLst>
           </p:cNvPr>
@@ -23033,7 +23033,7 @@
           <p:cNvPr id="30" name="">
             <a:extLst xmlns:a="http://schemas.openxmlformats.org/drawingml/2006/main">
               <a:ext uri="{FF2B5EF4-FFF2-40B4-BE49-F238E27FC236}">
-                <a16:creationId xmlns:a16="http://schemas.microsoft.com/office/drawing/2014/main" id="{18F25E4D-C4F8-410C-9B30-E0FCFB66E197}"/>
+                <a16:creationId xmlns:a16="http://schemas.microsoft.com/office/drawing/2014/main" id="{3157EE3F-D71C-4061-BB94-7843003F9080}"/>
               </a:ext>
             </a:extLst>
           </p:cNvPr>
@@ -23064,7 +23064,7 @@
           <p:cNvPr id="31" name="">
             <a:extLst xmlns:a="http://schemas.openxmlformats.org/drawingml/2006/main">
               <a:ext uri="{FF2B5EF4-FFF2-40B4-BE49-F238E27FC236}">
-                <a16:creationId xmlns:a16="http://schemas.microsoft.com/office/drawing/2014/main" id="{A8E2CFD1-3EFC-44E6-8B79-3E3DA95AA6B9}"/>
+                <a16:creationId xmlns:a16="http://schemas.microsoft.com/office/drawing/2014/main" id="{E720FFDA-D446-43A4-9644-9E63623848AC}"/>
               </a:ext>
             </a:extLst>
           </p:cNvPr>
@@ -23095,7 +23095,7 @@
           <p:cNvPr id="32" name="">
             <a:extLst xmlns:a="http://schemas.openxmlformats.org/drawingml/2006/main">
               <a:ext uri="{FF2B5EF4-FFF2-40B4-BE49-F238E27FC236}">
-                <a16:creationId xmlns:a16="http://schemas.microsoft.com/office/drawing/2014/main" id="{72322C9E-F43B-4AD9-984A-EBB17258A4E8}"/>
+                <a16:creationId xmlns:a16="http://schemas.microsoft.com/office/drawing/2014/main" id="{2F6CB43C-DE15-427C-B80F-C6BCF95BDAE3}"/>
               </a:ext>
             </a:extLst>
           </p:cNvPr>
@@ -23147,7 +23147,7 @@
           <p:cNvPr id="33" name="">
             <a:extLst xmlns:a="http://schemas.openxmlformats.org/drawingml/2006/main">
               <a:ext uri="{FF2B5EF4-FFF2-40B4-BE49-F238E27FC236}">
-                <a16:creationId xmlns:a16="http://schemas.microsoft.com/office/drawing/2014/main" id="{42702800-8894-4CAC-93BB-AD034BE31FE2}"/>
+                <a16:creationId xmlns:a16="http://schemas.microsoft.com/office/drawing/2014/main" id="{9DECAB44-FEBA-499A-AF1B-A8260A1A9A2F}"/>
               </a:ext>
             </a:extLst>
           </p:cNvPr>
@@ -23199,7 +23199,7 @@
           <p:cNvPr id="34" name="">
             <a:extLst xmlns:a="http://schemas.openxmlformats.org/drawingml/2006/main">
               <a:ext uri="{FF2B5EF4-FFF2-40B4-BE49-F238E27FC236}">
-                <a16:creationId xmlns:a16="http://schemas.microsoft.com/office/drawing/2014/main" id="{629FE88B-748C-4143-85D2-0326DF0ED996}"/>
+                <a16:creationId xmlns:a16="http://schemas.microsoft.com/office/drawing/2014/main" id="{F9D0D3F3-14F5-402D-96DA-5D444A869CDA}"/>
               </a:ext>
             </a:extLst>
           </p:cNvPr>
@@ -23251,7 +23251,7 @@
           <p:cNvPr id="35" name="">
             <a:extLst xmlns:a="http://schemas.openxmlformats.org/drawingml/2006/main">
               <a:ext uri="{FF2B5EF4-FFF2-40B4-BE49-F238E27FC236}">
-                <a16:creationId xmlns:a16="http://schemas.microsoft.com/office/drawing/2014/main" id="{34A67F9E-8BF2-42D5-8339-E21521EBF8EF}"/>
+                <a16:creationId xmlns:a16="http://schemas.microsoft.com/office/drawing/2014/main" id="{99AD1669-6A0A-4DCF-BBB2-892DE68CFE15}"/>
               </a:ext>
             </a:extLst>
           </p:cNvPr>
@@ -23303,7 +23303,7 @@
           <p:cNvPr id="36" name="">
             <a:extLst xmlns:a="http://schemas.openxmlformats.org/drawingml/2006/main">
               <a:ext uri="{FF2B5EF4-FFF2-40B4-BE49-F238E27FC236}">
-                <a16:creationId xmlns:a16="http://schemas.microsoft.com/office/drawing/2014/main" id="{74E468DA-3991-4A21-AC9D-6CCFDF1CDEFF}"/>
+                <a16:creationId xmlns:a16="http://schemas.microsoft.com/office/drawing/2014/main" id="{1393B407-8FFA-4F5A-9742-479070748D02}"/>
               </a:ext>
             </a:extLst>
           </p:cNvPr>
@@ -23355,7 +23355,7 @@
           <p:cNvPr id="37" name="">
             <a:extLst xmlns:a="http://schemas.openxmlformats.org/drawingml/2006/main">
               <a:ext uri="{FF2B5EF4-FFF2-40B4-BE49-F238E27FC236}">
-                <a16:creationId xmlns:a16="http://schemas.microsoft.com/office/drawing/2014/main" id="{921416ED-F7C4-4732-B9C5-1EFCF22FD869}"/>
+                <a16:creationId xmlns:a16="http://schemas.microsoft.com/office/drawing/2014/main" id="{14B0F87C-8729-49DD-87D3-C1ED3D59A92A}"/>
               </a:ext>
             </a:extLst>
           </p:cNvPr>
@@ -23407,7 +23407,7 @@
           <p:cNvPr id="38" name="">
             <a:extLst xmlns:a="http://schemas.openxmlformats.org/drawingml/2006/main">
               <a:ext uri="{FF2B5EF4-FFF2-40B4-BE49-F238E27FC236}">
-                <a16:creationId xmlns:a16="http://schemas.microsoft.com/office/drawing/2014/main" id="{83C8D01B-65E9-40F7-B1F5-AD8A31E1494F}"/>
+                <a16:creationId xmlns:a16="http://schemas.microsoft.com/office/drawing/2014/main" id="{C5C29C6F-E3F7-49EC-A22A-B2404DC3A8FC}"/>
               </a:ext>
             </a:extLst>
           </p:cNvPr>
@@ -23459,7 +23459,7 @@
           <p:cNvPr id="39" name="">
             <a:extLst xmlns:a="http://schemas.openxmlformats.org/drawingml/2006/main">
               <a:ext uri="{FF2B5EF4-FFF2-40B4-BE49-F238E27FC236}">
-                <a16:creationId xmlns:a16="http://schemas.microsoft.com/office/drawing/2014/main" id="{4121C0BC-2707-4CC2-8779-1504A6EED181}"/>
+                <a16:creationId xmlns:a16="http://schemas.microsoft.com/office/drawing/2014/main" id="{C8EA01E4-7BDF-4A5B-A24F-EE06DF131D0B}"/>
               </a:ext>
             </a:extLst>
           </p:cNvPr>
@@ -23511,7 +23511,7 @@
           <p:cNvPr id="40" name="">
             <a:extLst xmlns:a="http://schemas.openxmlformats.org/drawingml/2006/main">
               <a:ext uri="{FF2B5EF4-FFF2-40B4-BE49-F238E27FC236}">
-                <a16:creationId xmlns:a16="http://schemas.microsoft.com/office/drawing/2014/main" id="{7526B3CC-EDA3-40C2-8617-E9E94E2744AE}"/>
+                <a16:creationId xmlns:a16="http://schemas.microsoft.com/office/drawing/2014/main" id="{E78635B4-5245-43E4-9D03-C78C45698222}"/>
               </a:ext>
             </a:extLst>
           </p:cNvPr>
@@ -23542,7 +23542,7 @@
           <p:cNvPr id="41" name="">
             <a:extLst xmlns:a="http://schemas.openxmlformats.org/drawingml/2006/main">
               <a:ext uri="{FF2B5EF4-FFF2-40B4-BE49-F238E27FC236}">
-                <a16:creationId xmlns:a16="http://schemas.microsoft.com/office/drawing/2014/main" id="{5104623C-E4D2-4082-A09B-6509A3D143C0}"/>
+                <a16:creationId xmlns:a16="http://schemas.microsoft.com/office/drawing/2014/main" id="{55D5BB28-DEEE-448E-8CA9-AC47F9348BA9}"/>
               </a:ext>
             </a:extLst>
           </p:cNvPr>
@@ -23594,7 +23594,7 @@
           <p:cNvPr id="42" name="">
             <a:extLst xmlns:a="http://schemas.openxmlformats.org/drawingml/2006/main">
               <a:ext uri="{FF2B5EF4-FFF2-40B4-BE49-F238E27FC236}">
-                <a16:creationId xmlns:a16="http://schemas.microsoft.com/office/drawing/2014/main" id="{3BBDA8DB-5689-4F86-BF7C-B48C2031BB50}"/>
+                <a16:creationId xmlns:a16="http://schemas.microsoft.com/office/drawing/2014/main" id="{9D6830E6-1AAD-4DAF-9765-D9E3E32E1F3F}"/>
               </a:ext>
             </a:extLst>
           </p:cNvPr>
@@ -23646,7 +23646,7 @@
           <p:cNvPr id="43" name="">
             <a:extLst xmlns:a="http://schemas.openxmlformats.org/drawingml/2006/main">
               <a:ext uri="{FF2B5EF4-FFF2-40B4-BE49-F238E27FC236}">
-                <a16:creationId xmlns:a16="http://schemas.microsoft.com/office/drawing/2014/main" id="{613C5D25-0B97-45E4-94B6-F76959496FA2}"/>
+                <a16:creationId xmlns:a16="http://schemas.microsoft.com/office/drawing/2014/main" id="{6C5B8C11-82BF-4B6B-B4D0-B9AF8350AF55}"/>
               </a:ext>
             </a:extLst>
           </p:cNvPr>
@@ -23698,7 +23698,7 @@
           <p:cNvPr id="44" name="">
             <a:extLst xmlns:a="http://schemas.openxmlformats.org/drawingml/2006/main">
               <a:ext uri="{FF2B5EF4-FFF2-40B4-BE49-F238E27FC236}">
-                <a16:creationId xmlns:a16="http://schemas.microsoft.com/office/drawing/2014/main" id="{EBDA7710-A51D-4E33-92EB-FA19C59D35A7}"/>
+                <a16:creationId xmlns:a16="http://schemas.microsoft.com/office/drawing/2014/main" id="{57987366-EFFD-4C90-826B-C5D29F522107}"/>
               </a:ext>
             </a:extLst>
           </p:cNvPr>
@@ -23750,7 +23750,7 @@
           <p:cNvPr id="45" name="">
             <a:extLst xmlns:a="http://schemas.openxmlformats.org/drawingml/2006/main">
               <a:ext uri="{FF2B5EF4-FFF2-40B4-BE49-F238E27FC236}">
-                <a16:creationId xmlns:a16="http://schemas.microsoft.com/office/drawing/2014/main" id="{99E5B3EF-2C7F-49FF-A2AC-3A2A6685A400}"/>
+                <a16:creationId xmlns:a16="http://schemas.microsoft.com/office/drawing/2014/main" id="{177803BA-5C74-42B7-80DC-D5DC1CFF4F0C}"/>
               </a:ext>
             </a:extLst>
           </p:cNvPr>
@@ -23802,7 +23802,7 @@
           <p:cNvPr id="46" name="">
             <a:extLst xmlns:a="http://schemas.openxmlformats.org/drawingml/2006/main">
               <a:ext uri="{FF2B5EF4-FFF2-40B4-BE49-F238E27FC236}">
-                <a16:creationId xmlns:a16="http://schemas.microsoft.com/office/drawing/2014/main" id="{3D3D667E-59B7-4B95-B462-DDAF830D55F4}"/>
+                <a16:creationId xmlns:a16="http://schemas.microsoft.com/office/drawing/2014/main" id="{7E188A81-35E4-41A0-9ADA-A9AD6E8DDEA3}"/>
               </a:ext>
             </a:extLst>
           </p:cNvPr>
@@ -23854,7 +23854,7 @@
           <p:cNvPr id="47" name="">
             <a:extLst xmlns:a="http://schemas.openxmlformats.org/drawingml/2006/main">
               <a:ext uri="{FF2B5EF4-FFF2-40B4-BE49-F238E27FC236}">
-                <a16:creationId xmlns:a16="http://schemas.microsoft.com/office/drawing/2014/main" id="{BAC9B3AA-784F-44C1-84B5-A5204FFB9EA3}"/>
+                <a16:creationId xmlns:a16="http://schemas.microsoft.com/office/drawing/2014/main" id="{B77C1749-6146-4333-946C-7893BBB8D29B}"/>
               </a:ext>
             </a:extLst>
           </p:cNvPr>
@@ -23906,7 +23906,7 @@
           <p:cNvPr id="48" name="">
             <a:extLst xmlns:a="http://schemas.openxmlformats.org/drawingml/2006/main">
               <a:ext uri="{FF2B5EF4-FFF2-40B4-BE49-F238E27FC236}">
-                <a16:creationId xmlns:a16="http://schemas.microsoft.com/office/drawing/2014/main" id="{00EAC254-73B6-4DAC-9940-10A6D451AFF2}"/>
+                <a16:creationId xmlns:a16="http://schemas.microsoft.com/office/drawing/2014/main" id="{63796B5F-DD92-4784-A666-226E6400169A}"/>
               </a:ext>
             </a:extLst>
           </p:cNvPr>
@@ -23958,7 +23958,7 @@
           <p:cNvPr id="49" name="">
             <a:extLst xmlns:a="http://schemas.openxmlformats.org/drawingml/2006/main">
               <a:ext uri="{FF2B5EF4-FFF2-40B4-BE49-F238E27FC236}">
-                <a16:creationId xmlns:a16="http://schemas.microsoft.com/office/drawing/2014/main" id="{B795982B-AEE4-4F42-B41A-92FAE4CE07C8}"/>
+                <a16:creationId xmlns:a16="http://schemas.microsoft.com/office/drawing/2014/main" id="{4B6DBAB9-CDB5-4D24-A8C5-C016B6414434}"/>
               </a:ext>
             </a:extLst>
           </p:cNvPr>
@@ -23989,7 +23989,7 @@
           <p:cNvPr id="50" name="">
             <a:extLst xmlns:a="http://schemas.openxmlformats.org/drawingml/2006/main">
               <a:ext uri="{FF2B5EF4-FFF2-40B4-BE49-F238E27FC236}">
-                <a16:creationId xmlns:a16="http://schemas.microsoft.com/office/drawing/2014/main" id="{FCCC6A9C-B1D4-4BA9-928C-6BBA9898E020}"/>
+                <a16:creationId xmlns:a16="http://schemas.microsoft.com/office/drawing/2014/main" id="{6D4C0EF7-C97B-4223-A8C4-3500D429D732}"/>
               </a:ext>
             </a:extLst>
           </p:cNvPr>
@@ -24020,7 +24020,7 @@
           <p:cNvPr id="51" name="">
             <a:extLst xmlns:a="http://schemas.openxmlformats.org/drawingml/2006/main">
               <a:ext uri="{FF2B5EF4-FFF2-40B4-BE49-F238E27FC236}">
-                <a16:creationId xmlns:a16="http://schemas.microsoft.com/office/drawing/2014/main" id="{B99C5499-7728-4239-9D40-D330A6C6B7D4}"/>
+                <a16:creationId xmlns:a16="http://schemas.microsoft.com/office/drawing/2014/main" id="{C7B31D1B-095B-4E4A-BA05-9FE5AD51C565}"/>
               </a:ext>
             </a:extLst>
           </p:cNvPr>
@@ -24072,7 +24072,7 @@
           <p:cNvPr id="52" name="">
             <a:extLst xmlns:a="http://schemas.openxmlformats.org/drawingml/2006/main">
               <a:ext uri="{FF2B5EF4-FFF2-40B4-BE49-F238E27FC236}">
-                <a16:creationId xmlns:a16="http://schemas.microsoft.com/office/drawing/2014/main" id="{C767FB7A-4992-4558-9947-120439A107BF}"/>
+                <a16:creationId xmlns:a16="http://schemas.microsoft.com/office/drawing/2014/main" id="{AF7DEE50-BB4B-4041-B382-434FDF41BBFD}"/>
               </a:ext>
             </a:extLst>
           </p:cNvPr>
@@ -24124,7 +24124,7 @@
           <p:cNvPr id="53" name="">
             <a:extLst xmlns:a="http://schemas.openxmlformats.org/drawingml/2006/main">
               <a:ext uri="{FF2B5EF4-FFF2-40B4-BE49-F238E27FC236}">
-                <a16:creationId xmlns:a16="http://schemas.microsoft.com/office/drawing/2014/main" id="{7F95B53C-D5DA-433F-A9E6-D366B843A0D8}"/>
+                <a16:creationId xmlns:a16="http://schemas.microsoft.com/office/drawing/2014/main" id="{1A44632C-94C9-46F9-8099-B423E92DEB07}"/>
               </a:ext>
             </a:extLst>
           </p:cNvPr>
@@ -24176,7 +24176,7 @@
           <p:cNvPr id="54" name="">
             <a:extLst xmlns:a="http://schemas.openxmlformats.org/drawingml/2006/main">
               <a:ext uri="{FF2B5EF4-FFF2-40B4-BE49-F238E27FC236}">
-                <a16:creationId xmlns:a16="http://schemas.microsoft.com/office/drawing/2014/main" id="{3651D38F-5C4B-4BE3-8011-2FD8ADB34BC1}"/>
+                <a16:creationId xmlns:a16="http://schemas.microsoft.com/office/drawing/2014/main" id="{18421870-F901-4D99-A73A-4D6008961A11}"/>
               </a:ext>
             </a:extLst>
           </p:cNvPr>
@@ -24228,7 +24228,7 @@
           <p:cNvPr id="55" name="">
             <a:extLst xmlns:a="http://schemas.openxmlformats.org/drawingml/2006/main">
               <a:ext uri="{FF2B5EF4-FFF2-40B4-BE49-F238E27FC236}">
-                <a16:creationId xmlns:a16="http://schemas.microsoft.com/office/drawing/2014/main" id="{EC93E0BF-21DC-4152-9F63-3F098CE3E153}"/>
+                <a16:creationId xmlns:a16="http://schemas.microsoft.com/office/drawing/2014/main" id="{639759F5-3527-49E5-B456-ECB52BE1AB33}"/>
               </a:ext>
             </a:extLst>
           </p:cNvPr>
@@ -24280,7 +24280,7 @@
           <p:cNvPr id="56" name="">
             <a:extLst xmlns:a="http://schemas.openxmlformats.org/drawingml/2006/main">
               <a:ext uri="{FF2B5EF4-FFF2-40B4-BE49-F238E27FC236}">
-                <a16:creationId xmlns:a16="http://schemas.microsoft.com/office/drawing/2014/main" id="{01909BCD-BC2C-4389-A5B7-C86118C9A42E}"/>
+                <a16:creationId xmlns:a16="http://schemas.microsoft.com/office/drawing/2014/main" id="{1369DDD7-79DC-4EA3-9DBA-5470DAB9B279}"/>
               </a:ext>
             </a:extLst>
           </p:cNvPr>
@@ -24332,7 +24332,7 @@
           <p:cNvPr id="57" name="">
             <a:extLst xmlns:a="http://schemas.openxmlformats.org/drawingml/2006/main">
               <a:ext uri="{FF2B5EF4-FFF2-40B4-BE49-F238E27FC236}">
-                <a16:creationId xmlns:a16="http://schemas.microsoft.com/office/drawing/2014/main" id="{94B60A68-BE0A-4380-8EBB-C561DB70CB33}"/>
+                <a16:creationId xmlns:a16="http://schemas.microsoft.com/office/drawing/2014/main" id="{045CD849-D59B-4132-8C94-4CD057D295AD}"/>
               </a:ext>
             </a:extLst>
           </p:cNvPr>
@@ -24384,7 +24384,7 @@
           <p:cNvPr id="58" name="">
             <a:extLst xmlns:a="http://schemas.openxmlformats.org/drawingml/2006/main">
               <a:ext uri="{FF2B5EF4-FFF2-40B4-BE49-F238E27FC236}">
-                <a16:creationId xmlns:a16="http://schemas.microsoft.com/office/drawing/2014/main" id="{62C6E398-2BF7-4CA7-B482-5B73ADC22D56}"/>
+                <a16:creationId xmlns:a16="http://schemas.microsoft.com/office/drawing/2014/main" id="{8FB3B44F-384B-4979-A0C3-48E1CB49AB5C}"/>
               </a:ext>
             </a:extLst>
           </p:cNvPr>
@@ -24436,7 +24436,7 @@
           <p:cNvPr id="59" name="">
             <a:extLst xmlns:a="http://schemas.openxmlformats.org/drawingml/2006/main">
               <a:ext uri="{FF2B5EF4-FFF2-40B4-BE49-F238E27FC236}">
-                <a16:creationId xmlns:a16="http://schemas.microsoft.com/office/drawing/2014/main" id="{B39C68A7-E2BA-4B54-B720-2CAE527FBA5D}"/>
+                <a16:creationId xmlns:a16="http://schemas.microsoft.com/office/drawing/2014/main" id="{44228004-EC81-4349-8C48-46032B6E91F6}"/>
               </a:ext>
             </a:extLst>
           </p:cNvPr>
@@ -24467,7 +24467,7 @@
           <p:cNvPr id="60" name="">
             <a:extLst xmlns:a="http://schemas.openxmlformats.org/drawingml/2006/main">
               <a:ext uri="{FF2B5EF4-FFF2-40B4-BE49-F238E27FC236}">
-                <a16:creationId xmlns:a16="http://schemas.microsoft.com/office/drawing/2014/main" id="{58A515E8-F308-4F36-9747-639BEBEF3398}"/>
+                <a16:creationId xmlns:a16="http://schemas.microsoft.com/office/drawing/2014/main" id="{477C4947-EF43-4327-9585-D71F5F9AFE22}"/>
               </a:ext>
             </a:extLst>
           </p:cNvPr>
@@ -24519,7 +24519,7 @@
           <p:cNvPr id="61" name="">
             <a:extLst xmlns:a="http://schemas.openxmlformats.org/drawingml/2006/main">
               <a:ext uri="{FF2B5EF4-FFF2-40B4-BE49-F238E27FC236}">
-                <a16:creationId xmlns:a16="http://schemas.microsoft.com/office/drawing/2014/main" id="{84C2E4C6-6CE8-47A4-B6C3-CA2121EFC8A9}"/>
+                <a16:creationId xmlns:a16="http://schemas.microsoft.com/office/drawing/2014/main" id="{D539F27E-088E-4D29-B17A-DA9641521486}"/>
               </a:ext>
             </a:extLst>
           </p:cNvPr>
@@ -24571,7 +24571,7 @@
           <p:cNvPr id="62" name="">
             <a:extLst xmlns:a="http://schemas.openxmlformats.org/drawingml/2006/main">
               <a:ext uri="{FF2B5EF4-FFF2-40B4-BE49-F238E27FC236}">
-                <a16:creationId xmlns:a16="http://schemas.microsoft.com/office/drawing/2014/main" id="{91F90FB9-F11D-495C-896F-9BB68B375477}"/>
+                <a16:creationId xmlns:a16="http://schemas.microsoft.com/office/drawing/2014/main" id="{9CA66C1E-1FA5-4BBA-874C-5C386B01C915}"/>
               </a:ext>
             </a:extLst>
           </p:cNvPr>
@@ -24623,7 +24623,7 @@
           <p:cNvPr id="63" name="">
             <a:extLst xmlns:a="http://schemas.openxmlformats.org/drawingml/2006/main">
               <a:ext uri="{FF2B5EF4-FFF2-40B4-BE49-F238E27FC236}">
-                <a16:creationId xmlns:a16="http://schemas.microsoft.com/office/drawing/2014/main" id="{03E72304-DF64-415B-A6A3-1DF28F7ABA4E}"/>
+                <a16:creationId xmlns:a16="http://schemas.microsoft.com/office/drawing/2014/main" id="{BD1014F1-662F-4BBF-9857-CA9071C45C7D}"/>
               </a:ext>
             </a:extLst>
           </p:cNvPr>
@@ -24675,7 +24675,7 @@
           <p:cNvPr id="64" name="">
             <a:extLst xmlns:a="http://schemas.openxmlformats.org/drawingml/2006/main">
               <a:ext uri="{FF2B5EF4-FFF2-40B4-BE49-F238E27FC236}">
-                <a16:creationId xmlns:a16="http://schemas.microsoft.com/office/drawing/2014/main" id="{A5B5C9E6-0E4E-4055-8822-2B8BA1EEE37E}"/>
+                <a16:creationId xmlns:a16="http://schemas.microsoft.com/office/drawing/2014/main" id="{C239ABCD-2A67-4AF7-931A-607E6D6438BC}"/>
               </a:ext>
             </a:extLst>
           </p:cNvPr>
@@ -24727,7 +24727,7 @@
           <p:cNvPr id="65" name="">
             <a:extLst xmlns:a="http://schemas.openxmlformats.org/drawingml/2006/main">
               <a:ext uri="{FF2B5EF4-FFF2-40B4-BE49-F238E27FC236}">
-                <a16:creationId xmlns:a16="http://schemas.microsoft.com/office/drawing/2014/main" id="{16947A8F-6134-435C-8CCC-34FF2AD47D69}"/>
+                <a16:creationId xmlns:a16="http://schemas.microsoft.com/office/drawing/2014/main" id="{86421B3B-08C0-42A0-811C-DE5FEC6BE28D}"/>
               </a:ext>
             </a:extLst>
           </p:cNvPr>
@@ -24779,7 +24779,7 @@
           <p:cNvPr id="66" name="">
             <a:extLst xmlns:a="http://schemas.openxmlformats.org/drawingml/2006/main">
               <a:ext uri="{FF2B5EF4-FFF2-40B4-BE49-F238E27FC236}">
-                <a16:creationId xmlns:a16="http://schemas.microsoft.com/office/drawing/2014/main" id="{52FFDBAB-410A-422A-8EA0-B0C90B370B07}"/>
+                <a16:creationId xmlns:a16="http://schemas.microsoft.com/office/drawing/2014/main" id="{083D8211-C54C-4252-89EB-F8765BB96BFC}"/>
               </a:ext>
             </a:extLst>
           </p:cNvPr>
@@ -24831,7 +24831,7 @@
           <p:cNvPr id="67" name="">
             <a:extLst xmlns:a="http://schemas.openxmlformats.org/drawingml/2006/main">
               <a:ext uri="{FF2B5EF4-FFF2-40B4-BE49-F238E27FC236}">
-                <a16:creationId xmlns:a16="http://schemas.microsoft.com/office/drawing/2014/main" id="{D4C94B9A-48A2-4476-B794-0F92F3A0AF77}"/>
+                <a16:creationId xmlns:a16="http://schemas.microsoft.com/office/drawing/2014/main" id="{60C73185-1CAB-4F47-8002-E3B3DCCB90E7}"/>
               </a:ext>
             </a:extLst>
           </p:cNvPr>
@@ -24883,7 +24883,7 @@
           <p:cNvPr id="68" name="">
             <a:extLst xmlns:a="http://schemas.openxmlformats.org/drawingml/2006/main">
               <a:ext uri="{FF2B5EF4-FFF2-40B4-BE49-F238E27FC236}">
-                <a16:creationId xmlns:a16="http://schemas.microsoft.com/office/drawing/2014/main" id="{6921E6FE-58A6-4B99-8398-546BD22A1F17}"/>
+                <a16:creationId xmlns:a16="http://schemas.microsoft.com/office/drawing/2014/main" id="{5FCEC4B9-31ED-44EC-B45D-F65FD5449E23}"/>
               </a:ext>
             </a:extLst>
           </p:cNvPr>
@@ -24914,7 +24914,7 @@
           <p:cNvPr id="69" name="">
             <a:extLst xmlns:a="http://schemas.openxmlformats.org/drawingml/2006/main">
               <a:ext uri="{FF2B5EF4-FFF2-40B4-BE49-F238E27FC236}">
-                <a16:creationId xmlns:a16="http://schemas.microsoft.com/office/drawing/2014/main" id="{AB18085C-7157-472D-8E1F-7F01FA7A9A46}"/>
+                <a16:creationId xmlns:a16="http://schemas.microsoft.com/office/drawing/2014/main" id="{721BF06B-508D-40DE-9C00-02DA63BFD331}"/>
               </a:ext>
             </a:extLst>
           </p:cNvPr>
@@ -24945,7 +24945,7 @@
           <p:cNvPr id="70" name="">
             <a:extLst xmlns:a="http://schemas.openxmlformats.org/drawingml/2006/main">
               <a:ext uri="{FF2B5EF4-FFF2-40B4-BE49-F238E27FC236}">
-                <a16:creationId xmlns:a16="http://schemas.microsoft.com/office/drawing/2014/main" id="{9A2D0B98-5C0A-408E-95BD-2DB28B6A194C}"/>
+                <a16:creationId xmlns:a16="http://schemas.microsoft.com/office/drawing/2014/main" id="{A927B2E3-6DEE-4271-B76E-F925A74ADF61}"/>
               </a:ext>
             </a:extLst>
           </p:cNvPr>
@@ -24997,7 +24997,7 @@
           <p:cNvPr id="71" name="">
             <a:extLst xmlns:a="http://schemas.openxmlformats.org/drawingml/2006/main">
               <a:ext uri="{FF2B5EF4-FFF2-40B4-BE49-F238E27FC236}">
-                <a16:creationId xmlns:a16="http://schemas.microsoft.com/office/drawing/2014/main" id="{1769424D-7FB5-4684-A95F-DDECC78645A1}"/>
+                <a16:creationId xmlns:a16="http://schemas.microsoft.com/office/drawing/2014/main" id="{C1A3A0EC-F8D5-426D-B8A3-25EF85A8D7D1}"/>
               </a:ext>
             </a:extLst>
           </p:cNvPr>
@@ -25049,7 +25049,7 @@
           <p:cNvPr id="72" name="">
             <a:extLst xmlns:a="http://schemas.openxmlformats.org/drawingml/2006/main">
               <a:ext uri="{FF2B5EF4-FFF2-40B4-BE49-F238E27FC236}">
-                <a16:creationId xmlns:a16="http://schemas.microsoft.com/office/drawing/2014/main" id="{01C274C3-2B43-41F7-8EB4-C07E2E336343}"/>
+                <a16:creationId xmlns:a16="http://schemas.microsoft.com/office/drawing/2014/main" id="{A15B9F35-D264-4217-9CAE-787E10D83BF7}"/>
               </a:ext>
             </a:extLst>
           </p:cNvPr>
@@ -25101,7 +25101,7 @@
           <p:cNvPr id="73" name="">
             <a:extLst xmlns:a="http://schemas.openxmlformats.org/drawingml/2006/main">
               <a:ext uri="{FF2B5EF4-FFF2-40B4-BE49-F238E27FC236}">
-                <a16:creationId xmlns:a16="http://schemas.microsoft.com/office/drawing/2014/main" id="{DF528CC8-D30A-403A-AA49-093F133E7313}"/>
+                <a16:creationId xmlns:a16="http://schemas.microsoft.com/office/drawing/2014/main" id="{F3906383-5CFE-4F33-9B4C-92917C05A499}"/>
               </a:ext>
             </a:extLst>
           </p:cNvPr>
@@ -25153,7 +25153,7 @@
           <p:cNvPr id="74" name="">
             <a:extLst xmlns:a="http://schemas.openxmlformats.org/drawingml/2006/main">
               <a:ext uri="{FF2B5EF4-FFF2-40B4-BE49-F238E27FC236}">
-                <a16:creationId xmlns:a16="http://schemas.microsoft.com/office/drawing/2014/main" id="{730D284E-C9EA-4158-919F-F70954EC85D0}"/>
+                <a16:creationId xmlns:a16="http://schemas.microsoft.com/office/drawing/2014/main" id="{82B0ACA6-85DF-4255-816F-782C5657FBB6}"/>
               </a:ext>
             </a:extLst>
           </p:cNvPr>
@@ -25205,7 +25205,7 @@
           <p:cNvPr id="75" name="">
             <a:extLst xmlns:a="http://schemas.openxmlformats.org/drawingml/2006/main">
               <a:ext uri="{FF2B5EF4-FFF2-40B4-BE49-F238E27FC236}">
-                <a16:creationId xmlns:a16="http://schemas.microsoft.com/office/drawing/2014/main" id="{4AEEF4CC-2486-42A9-8F30-22CE9154B4CD}"/>
+                <a16:creationId xmlns:a16="http://schemas.microsoft.com/office/drawing/2014/main" id="{6B241F9A-01BC-466D-BED3-D3FA3FBCDA80}"/>
               </a:ext>
             </a:extLst>
           </p:cNvPr>
@@ -25257,7 +25257,7 @@
           <p:cNvPr id="76" name="">
             <a:extLst xmlns:a="http://schemas.openxmlformats.org/drawingml/2006/main">
               <a:ext uri="{FF2B5EF4-FFF2-40B4-BE49-F238E27FC236}">
-                <a16:creationId xmlns:a16="http://schemas.microsoft.com/office/drawing/2014/main" id="{E83CEFDC-71C5-4E7F-A31D-4B1227067965}"/>
+                <a16:creationId xmlns:a16="http://schemas.microsoft.com/office/drawing/2014/main" id="{472FC6A5-6873-45E9-953A-5F131E6FED55}"/>
               </a:ext>
             </a:extLst>
           </p:cNvPr>
@@ -25309,7 +25309,7 @@
           <p:cNvPr id="77" name="">
             <a:extLst xmlns:a="http://schemas.openxmlformats.org/drawingml/2006/main">
               <a:ext uri="{FF2B5EF4-FFF2-40B4-BE49-F238E27FC236}">
-                <a16:creationId xmlns:a16="http://schemas.microsoft.com/office/drawing/2014/main" id="{569379DB-4316-4778-8483-6DCAA7101AB5}"/>
+                <a16:creationId xmlns:a16="http://schemas.microsoft.com/office/drawing/2014/main" id="{873C49D1-B17E-422E-9FD5-5E033F63AAF1}"/>
               </a:ext>
             </a:extLst>
           </p:cNvPr>
@@ -25361,7 +25361,7 @@
           <p:cNvPr id="78" name="">
             <a:extLst xmlns:a="http://schemas.openxmlformats.org/drawingml/2006/main">
               <a:ext uri="{FF2B5EF4-FFF2-40B4-BE49-F238E27FC236}">
-                <a16:creationId xmlns:a16="http://schemas.microsoft.com/office/drawing/2014/main" id="{EB2DDADE-8733-4BB3-9106-CE8D4B2824A7}"/>
+                <a16:creationId xmlns:a16="http://schemas.microsoft.com/office/drawing/2014/main" id="{5EB3F729-B03F-4F01-B47F-E684F92BD694}"/>
               </a:ext>
             </a:extLst>
           </p:cNvPr>
@@ -25392,7 +25392,7 @@
           <p:cNvPr id="79" name="">
             <a:extLst xmlns:a="http://schemas.openxmlformats.org/drawingml/2006/main">
               <a:ext uri="{FF2B5EF4-FFF2-40B4-BE49-F238E27FC236}">
-                <a16:creationId xmlns:a16="http://schemas.microsoft.com/office/drawing/2014/main" id="{41E635FF-1F98-43FA-B966-D4773087BD87}"/>
+                <a16:creationId xmlns:a16="http://schemas.microsoft.com/office/drawing/2014/main" id="{1FBEE012-729D-4674-9599-A07EB84B59C0}"/>
               </a:ext>
             </a:extLst>
           </p:cNvPr>
@@ -25444,7 +25444,7 @@
           <p:cNvPr id="80" name="">
             <a:extLst xmlns:a="http://schemas.openxmlformats.org/drawingml/2006/main">
               <a:ext uri="{FF2B5EF4-FFF2-40B4-BE49-F238E27FC236}">
-                <a16:creationId xmlns:a16="http://schemas.microsoft.com/office/drawing/2014/main" id="{E8177091-4E93-4FC4-B7B8-8250032481F1}"/>
+                <a16:creationId xmlns:a16="http://schemas.microsoft.com/office/drawing/2014/main" id="{03F09D0F-4F2B-46C5-8EDC-1E5B6BA3FA2F}"/>
               </a:ext>
             </a:extLst>
           </p:cNvPr>
@@ -25496,7 +25496,7 @@
           <p:cNvPr id="81" name="">
             <a:extLst xmlns:a="http://schemas.openxmlformats.org/drawingml/2006/main">
               <a:ext uri="{FF2B5EF4-FFF2-40B4-BE49-F238E27FC236}">
-                <a16:creationId xmlns:a16="http://schemas.microsoft.com/office/drawing/2014/main" id="{B8EA01A2-80DC-4653-8382-798492532B19}"/>
+                <a16:creationId xmlns:a16="http://schemas.microsoft.com/office/drawing/2014/main" id="{E855506B-9D6D-45F5-9FBA-62C879650EC3}"/>
               </a:ext>
             </a:extLst>
           </p:cNvPr>
@@ -25548,7 +25548,7 @@
           <p:cNvPr id="82" name="">
             <a:extLst xmlns:a="http://schemas.openxmlformats.org/drawingml/2006/main">
               <a:ext uri="{FF2B5EF4-FFF2-40B4-BE49-F238E27FC236}">
-                <a16:creationId xmlns:a16="http://schemas.microsoft.com/office/drawing/2014/main" id="{DF8CC549-5E38-4DEE-98CE-EE9B33173AFF}"/>
+                <a16:creationId xmlns:a16="http://schemas.microsoft.com/office/drawing/2014/main" id="{A04EF9D6-7E50-4566-B592-93AD7097E6DB}"/>
               </a:ext>
             </a:extLst>
           </p:cNvPr>
@@ -25600,7 +25600,7 @@
           <p:cNvPr id="83" name="">
             <a:extLst xmlns:a="http://schemas.openxmlformats.org/drawingml/2006/main">
               <a:ext uri="{FF2B5EF4-FFF2-40B4-BE49-F238E27FC236}">
-                <a16:creationId xmlns:a16="http://schemas.microsoft.com/office/drawing/2014/main" id="{1B1FAED3-A71B-49FA-9AC5-AAA954C70D8A}"/>
+                <a16:creationId xmlns:a16="http://schemas.microsoft.com/office/drawing/2014/main" id="{BED15C2E-227B-4FF0-ACCD-7F889A5EC13B}"/>
               </a:ext>
             </a:extLst>
           </p:cNvPr>
@@ -25652,7 +25652,7 @@
           <p:cNvPr id="84" name="">
             <a:extLst xmlns:a="http://schemas.openxmlformats.org/drawingml/2006/main">
               <a:ext uri="{FF2B5EF4-FFF2-40B4-BE49-F238E27FC236}">
-                <a16:creationId xmlns:a16="http://schemas.microsoft.com/office/drawing/2014/main" id="{327ADAA9-47A4-4B9C-BA97-2A9BAF8D6F10}"/>
+                <a16:creationId xmlns:a16="http://schemas.microsoft.com/office/drawing/2014/main" id="{73281B9E-E9D7-4C82-B2A8-E9AA131ACB85}"/>
               </a:ext>
             </a:extLst>
           </p:cNvPr>
@@ -25704,7 +25704,7 @@
           <p:cNvPr id="85" name="">
             <a:extLst xmlns:a="http://schemas.openxmlformats.org/drawingml/2006/main">
               <a:ext uri="{FF2B5EF4-FFF2-40B4-BE49-F238E27FC236}">
-                <a16:creationId xmlns:a16="http://schemas.microsoft.com/office/drawing/2014/main" id="{8C801F75-2E20-47CC-BB5B-93E5C2DC6592}"/>
+                <a16:creationId xmlns:a16="http://schemas.microsoft.com/office/drawing/2014/main" id="{8449196E-5A53-42C6-AD4B-3BD354C22773}"/>
               </a:ext>
             </a:extLst>
           </p:cNvPr>
@@ -25756,7 +25756,7 @@
           <p:cNvPr id="86" name="">
             <a:extLst xmlns:a="http://schemas.openxmlformats.org/drawingml/2006/main">
               <a:ext uri="{FF2B5EF4-FFF2-40B4-BE49-F238E27FC236}">
-                <a16:creationId xmlns:a16="http://schemas.microsoft.com/office/drawing/2014/main" id="{C9370F76-7F88-473F-804D-3E269B30BAD8}"/>
+                <a16:creationId xmlns:a16="http://schemas.microsoft.com/office/drawing/2014/main" id="{7EBCCD11-7747-45C5-BFEE-02B22AF43BEE}"/>
               </a:ext>
             </a:extLst>
           </p:cNvPr>
@@ -25808,7 +25808,7 @@
           <p:cNvPr id="87" name="">
             <a:extLst xmlns:a="http://schemas.openxmlformats.org/drawingml/2006/main">
               <a:ext uri="{FF2B5EF4-FFF2-40B4-BE49-F238E27FC236}">
-                <a16:creationId xmlns:a16="http://schemas.microsoft.com/office/drawing/2014/main" id="{FE5D04FB-6681-486A-AD66-F5F73D4D4DB3}"/>
+                <a16:creationId xmlns:a16="http://schemas.microsoft.com/office/drawing/2014/main" id="{522B283C-514C-452E-96FA-0BA30F836F0B}"/>
               </a:ext>
             </a:extLst>
           </p:cNvPr>
@@ -25839,7 +25839,7 @@
           <p:cNvPr id="88" name="">
             <a:extLst xmlns:a="http://schemas.openxmlformats.org/drawingml/2006/main">
               <a:ext uri="{FF2B5EF4-FFF2-40B4-BE49-F238E27FC236}">
-                <a16:creationId xmlns:a16="http://schemas.microsoft.com/office/drawing/2014/main" id="{2C912394-AB66-43D6-B9F4-DF14D0AB5D14}"/>
+                <a16:creationId xmlns:a16="http://schemas.microsoft.com/office/drawing/2014/main" id="{9397AB90-08A2-4442-A6A2-30DB4CFBDD9B}"/>
               </a:ext>
             </a:extLst>
           </p:cNvPr>
@@ -25870,7 +25870,7 @@
           <p:cNvPr id="89" name="">
             <a:extLst xmlns:a="http://schemas.openxmlformats.org/drawingml/2006/main">
               <a:ext uri="{FF2B5EF4-FFF2-40B4-BE49-F238E27FC236}">
-                <a16:creationId xmlns:a16="http://schemas.microsoft.com/office/drawing/2014/main" id="{B917E780-4E2C-443A-B399-215ADDD6E6AA}"/>
+                <a16:creationId xmlns:a16="http://schemas.microsoft.com/office/drawing/2014/main" id="{0DCD2DF3-E1FF-4D28-90AA-D156EC236899}"/>
               </a:ext>
             </a:extLst>
           </p:cNvPr>
@@ -25922,7 +25922,7 @@
           <p:cNvPr id="90" name="">
             <a:extLst xmlns:a="http://schemas.openxmlformats.org/drawingml/2006/main">
               <a:ext uri="{FF2B5EF4-FFF2-40B4-BE49-F238E27FC236}">
-                <a16:creationId xmlns:a16="http://schemas.microsoft.com/office/drawing/2014/main" id="{D0441211-F5DC-48BF-8D6D-AE64EBAD22CD}"/>
+                <a16:creationId xmlns:a16="http://schemas.microsoft.com/office/drawing/2014/main" id="{4ADA5E23-86FE-409F-A53A-69EF7CB209F3}"/>
               </a:ext>
             </a:extLst>
           </p:cNvPr>
@@ -25974,7 +25974,7 @@
           <p:cNvPr id="91" name="">
             <a:extLst xmlns:a="http://schemas.openxmlformats.org/drawingml/2006/main">
               <a:ext uri="{FF2B5EF4-FFF2-40B4-BE49-F238E27FC236}">
-                <a16:creationId xmlns:a16="http://schemas.microsoft.com/office/drawing/2014/main" id="{D001CF38-A9BD-4B7B-BBA8-178EBA072DD4}"/>
+                <a16:creationId xmlns:a16="http://schemas.microsoft.com/office/drawing/2014/main" id="{D589E66E-B2E1-4E6C-A096-C6D80A9C37EB}"/>
               </a:ext>
             </a:extLst>
           </p:cNvPr>
@@ -26026,7 +26026,7 @@
           <p:cNvPr id="92" name="">
             <a:extLst xmlns:a="http://schemas.openxmlformats.org/drawingml/2006/main">
               <a:ext uri="{FF2B5EF4-FFF2-40B4-BE49-F238E27FC236}">
-                <a16:creationId xmlns:a16="http://schemas.microsoft.com/office/drawing/2014/main" id="{5AD60B43-F08E-4DA5-8343-781785318106}"/>
+                <a16:creationId xmlns:a16="http://schemas.microsoft.com/office/drawing/2014/main" id="{6B62E320-F71D-4DD1-839B-57AC6E7ECF98}"/>
               </a:ext>
             </a:extLst>
           </p:cNvPr>
@@ -26078,7 +26078,7 @@
           <p:cNvPr id="93" name="">
             <a:extLst xmlns:a="http://schemas.openxmlformats.org/drawingml/2006/main">
               <a:ext uri="{FF2B5EF4-FFF2-40B4-BE49-F238E27FC236}">
-                <a16:creationId xmlns:a16="http://schemas.microsoft.com/office/drawing/2014/main" id="{81F41176-6E63-4A2E-8847-0AE6F3C0DF9F}"/>
+                <a16:creationId xmlns:a16="http://schemas.microsoft.com/office/drawing/2014/main" id="{598E5383-7D3B-4153-893B-8051C2580941}"/>
               </a:ext>
             </a:extLst>
           </p:cNvPr>
@@ -26130,7 +26130,7 @@
           <p:cNvPr id="94" name="">
             <a:extLst xmlns:a="http://schemas.openxmlformats.org/drawingml/2006/main">
               <a:ext uri="{FF2B5EF4-FFF2-40B4-BE49-F238E27FC236}">
-                <a16:creationId xmlns:a16="http://schemas.microsoft.com/office/drawing/2014/main" id="{78B0E34A-6F42-437D-8674-D41CFF05266B}"/>
+                <a16:creationId xmlns:a16="http://schemas.microsoft.com/office/drawing/2014/main" id="{5128DAAA-3EDE-474A-81CB-6E9173C2DB1B}"/>
               </a:ext>
             </a:extLst>
           </p:cNvPr>
@@ -26182,7 +26182,7 @@
           <p:cNvPr id="95" name="">
             <a:extLst xmlns:a="http://schemas.openxmlformats.org/drawingml/2006/main">
               <a:ext uri="{FF2B5EF4-FFF2-40B4-BE49-F238E27FC236}">
-                <a16:creationId xmlns:a16="http://schemas.microsoft.com/office/drawing/2014/main" id="{2A4108D5-B2C9-42BB-8159-A0F59A740E91}"/>
+                <a16:creationId xmlns:a16="http://schemas.microsoft.com/office/drawing/2014/main" id="{7B25B3F1-EC7F-4629-A7D1-F03A5A9FCABA}"/>
               </a:ext>
             </a:extLst>
           </p:cNvPr>
@@ -26234,7 +26234,7 @@
           <p:cNvPr id="96" name="">
             <a:extLst xmlns:a="http://schemas.openxmlformats.org/drawingml/2006/main">
               <a:ext uri="{FF2B5EF4-FFF2-40B4-BE49-F238E27FC236}">
-                <a16:creationId xmlns:a16="http://schemas.microsoft.com/office/drawing/2014/main" id="{8EECCD11-0B73-4E2E-A689-94C74455411F}"/>
+                <a16:creationId xmlns:a16="http://schemas.microsoft.com/office/drawing/2014/main" id="{F1832FDB-3FD6-439B-A974-22DA883A11CB}"/>
               </a:ext>
             </a:extLst>
           </p:cNvPr>
@@ -26286,7 +26286,7 @@
           <p:cNvPr id="97" name="">
             <a:extLst xmlns:a="http://schemas.openxmlformats.org/drawingml/2006/main">
               <a:ext uri="{FF2B5EF4-FFF2-40B4-BE49-F238E27FC236}">
-                <a16:creationId xmlns:a16="http://schemas.microsoft.com/office/drawing/2014/main" id="{61E47816-3412-4FC1-9E80-5B1F045AC2AB}"/>
+                <a16:creationId xmlns:a16="http://schemas.microsoft.com/office/drawing/2014/main" id="{508F6B7C-57D1-435D-B8D5-A32F58D46CE6}"/>
               </a:ext>
             </a:extLst>
           </p:cNvPr>
@@ -26317,7 +26317,7 @@
           <p:cNvPr id="98" name="">
             <a:extLst xmlns:a="http://schemas.openxmlformats.org/drawingml/2006/main">
               <a:ext uri="{FF2B5EF4-FFF2-40B4-BE49-F238E27FC236}">
-                <a16:creationId xmlns:a16="http://schemas.microsoft.com/office/drawing/2014/main" id="{52B12AFE-F967-4CFB-A70C-94A5E013BD0D}"/>
+                <a16:creationId xmlns:a16="http://schemas.microsoft.com/office/drawing/2014/main" id="{EC10B2D4-E515-4F21-A8B3-8DC81CB9607A}"/>
               </a:ext>
             </a:extLst>
           </p:cNvPr>
@@ -26369,7 +26369,7 @@
           <p:cNvPr id="99" name="">
             <a:extLst xmlns:a="http://schemas.openxmlformats.org/drawingml/2006/main">
               <a:ext uri="{FF2B5EF4-FFF2-40B4-BE49-F238E27FC236}">
-                <a16:creationId xmlns:a16="http://schemas.microsoft.com/office/drawing/2014/main" id="{F7F4AA60-E760-4CA4-8D91-F32F285C49D2}"/>
+                <a16:creationId xmlns:a16="http://schemas.microsoft.com/office/drawing/2014/main" id="{481757CD-0234-4BBE-906C-138D9862040E}"/>
               </a:ext>
             </a:extLst>
           </p:cNvPr>
@@ -26421,7 +26421,7 @@
           <p:cNvPr id="100" name="">
             <a:extLst xmlns:a="http://schemas.openxmlformats.org/drawingml/2006/main">
               <a:ext uri="{FF2B5EF4-FFF2-40B4-BE49-F238E27FC236}">
-                <a16:creationId xmlns:a16="http://schemas.microsoft.com/office/drawing/2014/main" id="{C111D31E-9769-48CB-8F99-991BE13D250C}"/>
+                <a16:creationId xmlns:a16="http://schemas.microsoft.com/office/drawing/2014/main" id="{F794176A-BFFD-4713-A583-7393EC2ABA07}"/>
               </a:ext>
             </a:extLst>
           </p:cNvPr>
@@ -26473,7 +26473,7 @@
           <p:cNvPr id="101" name="">
             <a:extLst xmlns:a="http://schemas.openxmlformats.org/drawingml/2006/main">
               <a:ext uri="{FF2B5EF4-FFF2-40B4-BE49-F238E27FC236}">
-                <a16:creationId xmlns:a16="http://schemas.microsoft.com/office/drawing/2014/main" id="{47CD1D6A-A6EF-42CE-904A-E1DEB97EED75}"/>
+                <a16:creationId xmlns:a16="http://schemas.microsoft.com/office/drawing/2014/main" id="{01294110-AB0D-4BB4-B677-12D60ED8B903}"/>
               </a:ext>
             </a:extLst>
           </p:cNvPr>
@@ -26525,7 +26525,7 @@
           <p:cNvPr id="102" name="">
             <a:extLst xmlns:a="http://schemas.openxmlformats.org/drawingml/2006/main">
               <a:ext uri="{FF2B5EF4-FFF2-40B4-BE49-F238E27FC236}">
-                <a16:creationId xmlns:a16="http://schemas.microsoft.com/office/drawing/2014/main" id="{50FD10A9-9F67-4293-ADF7-74C2D49E5867}"/>
+                <a16:creationId xmlns:a16="http://schemas.microsoft.com/office/drawing/2014/main" id="{BECA398D-4A6A-4E87-995F-58635BF855B7}"/>
               </a:ext>
             </a:extLst>
           </p:cNvPr>
@@ -26577,7 +26577,7 @@
           <p:cNvPr id="103" name="">
             <a:extLst xmlns:a="http://schemas.openxmlformats.org/drawingml/2006/main">
               <a:ext uri="{FF2B5EF4-FFF2-40B4-BE49-F238E27FC236}">
-                <a16:creationId xmlns:a16="http://schemas.microsoft.com/office/drawing/2014/main" id="{76B57D34-07F0-4465-A120-8DF7125648E0}"/>
+                <a16:creationId xmlns:a16="http://schemas.microsoft.com/office/drawing/2014/main" id="{17F78EB6-5CDE-46CC-A002-8EFF27DF764F}"/>
               </a:ext>
             </a:extLst>
           </p:cNvPr>
@@ -26629,7 +26629,7 @@
           <p:cNvPr id="104" name="">
             <a:extLst xmlns:a="http://schemas.openxmlformats.org/drawingml/2006/main">
               <a:ext uri="{FF2B5EF4-FFF2-40B4-BE49-F238E27FC236}">
-                <a16:creationId xmlns:a16="http://schemas.microsoft.com/office/drawing/2014/main" id="{AB2E23DB-080B-4071-84A7-E6E54964298F}"/>
+                <a16:creationId xmlns:a16="http://schemas.microsoft.com/office/drawing/2014/main" id="{4464169E-997E-40BC-95E0-81CA5B9750DA}"/>
               </a:ext>
             </a:extLst>
           </p:cNvPr>
@@ -26681,7 +26681,7 @@
           <p:cNvPr id="105" name="">
             <a:extLst xmlns:a="http://schemas.openxmlformats.org/drawingml/2006/main">
               <a:ext uri="{FF2B5EF4-FFF2-40B4-BE49-F238E27FC236}">
-                <a16:creationId xmlns:a16="http://schemas.microsoft.com/office/drawing/2014/main" id="{3F8844EF-BC18-4FB5-9B81-D55ACC284448}"/>
+                <a16:creationId xmlns:a16="http://schemas.microsoft.com/office/drawing/2014/main" id="{AC5A4959-70E7-4199-A6AA-16070331A7B1}"/>
               </a:ext>
             </a:extLst>
           </p:cNvPr>
@@ -26733,7 +26733,7 @@
           <p:cNvPr id="106" name="">
             <a:extLst xmlns:a="http://schemas.openxmlformats.org/drawingml/2006/main">
               <a:ext uri="{FF2B5EF4-FFF2-40B4-BE49-F238E27FC236}">
-                <a16:creationId xmlns:a16="http://schemas.microsoft.com/office/drawing/2014/main" id="{121EBBFF-6358-4AA0-A34F-24E645857E1E}"/>
+                <a16:creationId xmlns:a16="http://schemas.microsoft.com/office/drawing/2014/main" id="{1BA2D2C5-3366-41FD-A2B9-D2E09C98D116}"/>
               </a:ext>
             </a:extLst>
           </p:cNvPr>
@@ -26764,7 +26764,7 @@
           <p:cNvPr id="107" name="">
             <a:extLst xmlns:a="http://schemas.openxmlformats.org/drawingml/2006/main">
               <a:ext uri="{FF2B5EF4-FFF2-40B4-BE49-F238E27FC236}">
-                <a16:creationId xmlns:a16="http://schemas.microsoft.com/office/drawing/2014/main" id="{51D8DCFC-1F6D-419D-8774-420CCC9904D9}"/>
+                <a16:creationId xmlns:a16="http://schemas.microsoft.com/office/drawing/2014/main" id="{C030A36E-0B2D-43F3-BB33-4A8CCD048F13}"/>
               </a:ext>
             </a:extLst>
           </p:cNvPr>
@@ -26795,7 +26795,7 @@
           <p:cNvPr id="108" name="">
             <a:extLst xmlns:a="http://schemas.openxmlformats.org/drawingml/2006/main">
               <a:ext uri="{FF2B5EF4-FFF2-40B4-BE49-F238E27FC236}">
-                <a16:creationId xmlns:a16="http://schemas.microsoft.com/office/drawing/2014/main" id="{A70FD200-8C18-42BE-A1FA-202C00CBFABC}"/>
+                <a16:creationId xmlns:a16="http://schemas.microsoft.com/office/drawing/2014/main" id="{66052CA9-78E2-4D08-AEA1-6527CBE1E627}"/>
               </a:ext>
             </a:extLst>
           </p:cNvPr>
@@ -26847,7 +26847,7 @@
           <p:cNvPr id="109" name="">
             <a:extLst xmlns:a="http://schemas.openxmlformats.org/drawingml/2006/main">
               <a:ext uri="{FF2B5EF4-FFF2-40B4-BE49-F238E27FC236}">
-                <a16:creationId xmlns:a16="http://schemas.microsoft.com/office/drawing/2014/main" id="{18AE6FF9-F2C3-470F-A389-7A0E49D31628}"/>
+                <a16:creationId xmlns:a16="http://schemas.microsoft.com/office/drawing/2014/main" id="{8858197E-7524-415F-9950-160A3B9EBE8F}"/>
               </a:ext>
             </a:extLst>
           </p:cNvPr>
@@ -26899,7 +26899,7 @@
           <p:cNvPr id="110" name="">
             <a:extLst xmlns:a="http://schemas.openxmlformats.org/drawingml/2006/main">
               <a:ext uri="{FF2B5EF4-FFF2-40B4-BE49-F238E27FC236}">
-                <a16:creationId xmlns:a16="http://schemas.microsoft.com/office/drawing/2014/main" id="{6C0164EC-7EF2-4A5E-8031-E5666F2D26BC}"/>
+                <a16:creationId xmlns:a16="http://schemas.microsoft.com/office/drawing/2014/main" id="{9F9CF1BC-E05B-4E7F-BC4B-17E5460EE49E}"/>
               </a:ext>
             </a:extLst>
           </p:cNvPr>
@@ -26951,7 +26951,7 @@
           <p:cNvPr id="111" name="">
             <a:extLst xmlns:a="http://schemas.openxmlformats.org/drawingml/2006/main">
               <a:ext uri="{FF2B5EF4-FFF2-40B4-BE49-F238E27FC236}">
-                <a16:creationId xmlns:a16="http://schemas.microsoft.com/office/drawing/2014/main" id="{2D4F0D3F-6ECC-429F-8430-CEF6F4822433}"/>
+                <a16:creationId xmlns:a16="http://schemas.microsoft.com/office/drawing/2014/main" id="{65CD4DF1-A633-4F13-843A-5C73D4DF232D}"/>
               </a:ext>
             </a:extLst>
           </p:cNvPr>
@@ -27003,7 +27003,7 @@
           <p:cNvPr id="112" name="">
             <a:extLst xmlns:a="http://schemas.openxmlformats.org/drawingml/2006/main">
               <a:ext uri="{FF2B5EF4-FFF2-40B4-BE49-F238E27FC236}">
-                <a16:creationId xmlns:a16="http://schemas.microsoft.com/office/drawing/2014/main" id="{00F7A6E8-D374-4C50-8920-72F8FCD23C88}"/>
+                <a16:creationId xmlns:a16="http://schemas.microsoft.com/office/drawing/2014/main" id="{48493472-35C3-42E3-AEC4-025BDFC22399}"/>
               </a:ext>
             </a:extLst>
           </p:cNvPr>
@@ -27055,7 +27055,7 @@
           <p:cNvPr id="113" name="">
             <a:extLst xmlns:a="http://schemas.openxmlformats.org/drawingml/2006/main">
               <a:ext uri="{FF2B5EF4-FFF2-40B4-BE49-F238E27FC236}">
-                <a16:creationId xmlns:a16="http://schemas.microsoft.com/office/drawing/2014/main" id="{1A136B4C-ED3D-4808-A6BF-104FD1FB9118}"/>
+                <a16:creationId xmlns:a16="http://schemas.microsoft.com/office/drawing/2014/main" id="{92019BA5-27DF-4624-B7C2-D66C126EBD10}"/>
               </a:ext>
             </a:extLst>
           </p:cNvPr>
@@ -27107,7 +27107,7 @@
           <p:cNvPr id="114" name="">
             <a:extLst xmlns:a="http://schemas.openxmlformats.org/drawingml/2006/main">
               <a:ext uri="{FF2B5EF4-FFF2-40B4-BE49-F238E27FC236}">
-                <a16:creationId xmlns:a16="http://schemas.microsoft.com/office/drawing/2014/main" id="{DD285374-F0F0-496B-AF56-BAA5F1C97F78}"/>
+                <a16:creationId xmlns:a16="http://schemas.microsoft.com/office/drawing/2014/main" id="{80D28EA7-B3A7-452C-B94C-0B757A622B0E}"/>
               </a:ext>
             </a:extLst>
           </p:cNvPr>
@@ -27159,7 +27159,7 @@
           <p:cNvPr id="115" name="">
             <a:extLst xmlns:a="http://schemas.openxmlformats.org/drawingml/2006/main">
               <a:ext uri="{FF2B5EF4-FFF2-40B4-BE49-F238E27FC236}">
-                <a16:creationId xmlns:a16="http://schemas.microsoft.com/office/drawing/2014/main" id="{35176D06-61F5-442B-BCBA-5792DDCF4951}"/>
+                <a16:creationId xmlns:a16="http://schemas.microsoft.com/office/drawing/2014/main" id="{C206FC45-EACE-4E0C-80F5-89EF0C3724EC}"/>
               </a:ext>
             </a:extLst>
           </p:cNvPr>
@@ -27211,7 +27211,7 @@
           <p:cNvPr id="116" name="">
             <a:extLst xmlns:a="http://schemas.openxmlformats.org/drawingml/2006/main">
               <a:ext uri="{FF2B5EF4-FFF2-40B4-BE49-F238E27FC236}">
-                <a16:creationId xmlns:a16="http://schemas.microsoft.com/office/drawing/2014/main" id="{057ACDB1-2C3F-4E21-B88F-8B7F1DAC529F}"/>
+                <a16:creationId xmlns:a16="http://schemas.microsoft.com/office/drawing/2014/main" id="{91A9382A-FBBF-4314-A750-3AD2B39310C2}"/>
               </a:ext>
             </a:extLst>
           </p:cNvPr>
@@ -27242,7 +27242,7 @@
           <p:cNvPr id="117" name="">
             <a:extLst xmlns:a="http://schemas.openxmlformats.org/drawingml/2006/main">
               <a:ext uri="{FF2B5EF4-FFF2-40B4-BE49-F238E27FC236}">
-                <a16:creationId xmlns:a16="http://schemas.microsoft.com/office/drawing/2014/main" id="{FFF32800-409B-493E-A057-8586860C0442}"/>
+                <a16:creationId xmlns:a16="http://schemas.microsoft.com/office/drawing/2014/main" id="{87FDE43E-AD3F-4C2F-8351-30427277B6B6}"/>
               </a:ext>
             </a:extLst>
           </p:cNvPr>
@@ -27294,7 +27294,7 @@
           <p:cNvPr id="118" name="">
             <a:extLst xmlns:a="http://schemas.openxmlformats.org/drawingml/2006/main">
               <a:ext uri="{FF2B5EF4-FFF2-40B4-BE49-F238E27FC236}">
-                <a16:creationId xmlns:a16="http://schemas.microsoft.com/office/drawing/2014/main" id="{719ED263-7C46-45E6-913C-C533773487CE}"/>
+                <a16:creationId xmlns:a16="http://schemas.microsoft.com/office/drawing/2014/main" id="{80173F20-62E3-4446-91C2-7A1759862761}"/>
               </a:ext>
             </a:extLst>
           </p:cNvPr>
@@ -27346,7 +27346,7 @@
           <p:cNvPr id="119" name="">
             <a:extLst xmlns:a="http://schemas.openxmlformats.org/drawingml/2006/main">
               <a:ext uri="{FF2B5EF4-FFF2-40B4-BE49-F238E27FC236}">
-                <a16:creationId xmlns:a16="http://schemas.microsoft.com/office/drawing/2014/main" id="{177B6A3C-E0E8-4CB8-8640-1FE7694444F8}"/>
+                <a16:creationId xmlns:a16="http://schemas.microsoft.com/office/drawing/2014/main" id="{676629C6-409E-4847-B57F-936241D830E7}"/>
               </a:ext>
             </a:extLst>
           </p:cNvPr>
@@ -27398,7 +27398,7 @@
           <p:cNvPr id="120" name="">
             <a:extLst xmlns:a="http://schemas.openxmlformats.org/drawingml/2006/main">
               <a:ext uri="{FF2B5EF4-FFF2-40B4-BE49-F238E27FC236}">
-                <a16:creationId xmlns:a16="http://schemas.microsoft.com/office/drawing/2014/main" id="{B00607F4-82A9-4CC9-95B5-E43F187FBFF8}"/>
+                <a16:creationId xmlns:a16="http://schemas.microsoft.com/office/drawing/2014/main" id="{2F6C0CB7-8430-43C1-BA29-7622BC672CBD}"/>
               </a:ext>
             </a:extLst>
           </p:cNvPr>
@@ -27450,7 +27450,7 @@
           <p:cNvPr id="121" name="">
             <a:extLst xmlns:a="http://schemas.openxmlformats.org/drawingml/2006/main">
               <a:ext uri="{FF2B5EF4-FFF2-40B4-BE49-F238E27FC236}">
-                <a16:creationId xmlns:a16="http://schemas.microsoft.com/office/drawing/2014/main" id="{9258CBA8-1B66-4585-BB43-E8C659286CA3}"/>
+                <a16:creationId xmlns:a16="http://schemas.microsoft.com/office/drawing/2014/main" id="{735CB5E0-F272-4996-A9FD-7DFC78852BFB}"/>
               </a:ext>
             </a:extLst>
           </p:cNvPr>
@@ -27502,7 +27502,7 @@
           <p:cNvPr id="122" name="">
             <a:extLst xmlns:a="http://schemas.openxmlformats.org/drawingml/2006/main">
               <a:ext uri="{FF2B5EF4-FFF2-40B4-BE49-F238E27FC236}">
-                <a16:creationId xmlns:a16="http://schemas.microsoft.com/office/drawing/2014/main" id="{681779C5-7407-4100-ABF4-E8317CDDB0E0}"/>
+                <a16:creationId xmlns:a16="http://schemas.microsoft.com/office/drawing/2014/main" id="{DB95E4E9-DC4F-4D7E-945A-7EABBDB3D545}"/>
               </a:ext>
             </a:extLst>
           </p:cNvPr>
@@ -27554,7 +27554,7 @@
           <p:cNvPr id="123" name="">
             <a:extLst xmlns:a="http://schemas.openxmlformats.org/drawingml/2006/main">
               <a:ext uri="{FF2B5EF4-FFF2-40B4-BE49-F238E27FC236}">
-                <a16:creationId xmlns:a16="http://schemas.microsoft.com/office/drawing/2014/main" id="{9E9698A6-0C23-42EF-ACC2-3589B2E7BA04}"/>
+                <a16:creationId xmlns:a16="http://schemas.microsoft.com/office/drawing/2014/main" id="{F1690822-820B-404B-87C5-EE39A474284D}"/>
               </a:ext>
             </a:extLst>
           </p:cNvPr>
@@ -27606,7 +27606,7 @@
           <p:cNvPr id="124" name="">
             <a:extLst xmlns:a="http://schemas.openxmlformats.org/drawingml/2006/main">
               <a:ext uri="{FF2B5EF4-FFF2-40B4-BE49-F238E27FC236}">
-                <a16:creationId xmlns:a16="http://schemas.microsoft.com/office/drawing/2014/main" id="{6903FE67-DB30-413F-B54D-06F9E1C1CAE6}"/>
+                <a16:creationId xmlns:a16="http://schemas.microsoft.com/office/drawing/2014/main" id="{EB44E4B2-0755-4868-A1A4-4FA369114EE7}"/>
               </a:ext>
             </a:extLst>
           </p:cNvPr>
@@ -27658,7 +27658,7 @@
           <p:cNvPr id="125" name="">
             <a:extLst xmlns:a="http://schemas.openxmlformats.org/drawingml/2006/main">
               <a:ext uri="{FF2B5EF4-FFF2-40B4-BE49-F238E27FC236}">
-                <a16:creationId xmlns:a16="http://schemas.microsoft.com/office/drawing/2014/main" id="{52E73329-AC03-462F-B73D-E3A194300527}"/>
+                <a16:creationId xmlns:a16="http://schemas.microsoft.com/office/drawing/2014/main" id="{B43DF202-9211-4663-9DC9-55F7CA8EB0EB}"/>
               </a:ext>
             </a:extLst>
           </p:cNvPr>
@@ -27689,7 +27689,7 @@
           <p:cNvPr id="126" name="">
             <a:extLst xmlns:a="http://schemas.openxmlformats.org/drawingml/2006/main">
               <a:ext uri="{FF2B5EF4-FFF2-40B4-BE49-F238E27FC236}">
-                <a16:creationId xmlns:a16="http://schemas.microsoft.com/office/drawing/2014/main" id="{1944826D-CEBF-471F-A65B-04C7DB392727}"/>
+                <a16:creationId xmlns:a16="http://schemas.microsoft.com/office/drawing/2014/main" id="{7F0E682F-8B19-4485-B873-9C50F1793BA7}"/>
               </a:ext>
             </a:extLst>
           </p:cNvPr>
@@ -27720,7 +27720,7 @@
           <p:cNvPr id="127" name="">
             <a:extLst xmlns:a="http://schemas.openxmlformats.org/drawingml/2006/main">
               <a:ext uri="{FF2B5EF4-FFF2-40B4-BE49-F238E27FC236}">
-                <a16:creationId xmlns:a16="http://schemas.microsoft.com/office/drawing/2014/main" id="{C03E8508-E67C-4A07-913D-A2D73EE65871}"/>
+                <a16:creationId xmlns:a16="http://schemas.microsoft.com/office/drawing/2014/main" id="{76E5136E-DE34-46A4-A5D2-CB53D6E45ECB}"/>
               </a:ext>
             </a:extLst>
           </p:cNvPr>
@@ -27772,7 +27772,7 @@
           <p:cNvPr id="128" name="">
             <a:extLst xmlns:a="http://schemas.openxmlformats.org/drawingml/2006/main">
               <a:ext uri="{FF2B5EF4-FFF2-40B4-BE49-F238E27FC236}">
-                <a16:creationId xmlns:a16="http://schemas.microsoft.com/office/drawing/2014/main" id="{07CACEED-5522-45DD-8712-2E49F1F2B7A1}"/>
+                <a16:creationId xmlns:a16="http://schemas.microsoft.com/office/drawing/2014/main" id="{AA59B62F-D8D3-40B4-8780-D7F8D119ACB8}"/>
               </a:ext>
             </a:extLst>
           </p:cNvPr>
@@ -27824,7 +27824,7 @@
           <p:cNvPr id="129" name="">
             <a:extLst xmlns:a="http://schemas.openxmlformats.org/drawingml/2006/main">
               <a:ext uri="{FF2B5EF4-FFF2-40B4-BE49-F238E27FC236}">
-                <a16:creationId xmlns:a16="http://schemas.microsoft.com/office/drawing/2014/main" id="{A20FF69D-B203-4F5D-B666-7B4B8B6DBDCD}"/>
+                <a16:creationId xmlns:a16="http://schemas.microsoft.com/office/drawing/2014/main" id="{DA539884-8FA4-4E15-84EB-B76341E92290}"/>
               </a:ext>
             </a:extLst>
           </p:cNvPr>
@@ -27876,7 +27876,7 @@
           <p:cNvPr id="130" name="">
             <a:extLst xmlns:a="http://schemas.openxmlformats.org/drawingml/2006/main">
               <a:ext uri="{FF2B5EF4-FFF2-40B4-BE49-F238E27FC236}">
-                <a16:creationId xmlns:a16="http://schemas.microsoft.com/office/drawing/2014/main" id="{BB88D190-AD4A-4EA1-8638-DD2A165919D6}"/>
+                <a16:creationId xmlns:a16="http://schemas.microsoft.com/office/drawing/2014/main" id="{C88EF8FE-5232-4A83-86CE-245B180C5010}"/>
               </a:ext>
             </a:extLst>
           </p:cNvPr>
@@ -27928,7 +27928,7 @@
           <p:cNvPr id="131" name="">
             <a:extLst xmlns:a="http://schemas.openxmlformats.org/drawingml/2006/main">
               <a:ext uri="{FF2B5EF4-FFF2-40B4-BE49-F238E27FC236}">
-                <a16:creationId xmlns:a16="http://schemas.microsoft.com/office/drawing/2014/main" id="{7C05A693-DC79-4164-A5A4-AAC023D0EC37}"/>
+                <a16:creationId xmlns:a16="http://schemas.microsoft.com/office/drawing/2014/main" id="{5276F635-20F9-419F-8EEF-6BFA9D49F426}"/>
               </a:ext>
             </a:extLst>
           </p:cNvPr>
@@ -27980,7 +27980,7 @@
           <p:cNvPr id="132" name="">
             <a:extLst xmlns:a="http://schemas.openxmlformats.org/drawingml/2006/main">
               <a:ext uri="{FF2B5EF4-FFF2-40B4-BE49-F238E27FC236}">
-                <a16:creationId xmlns:a16="http://schemas.microsoft.com/office/drawing/2014/main" id="{337FB223-8543-47B6-B259-C9DA981595FD}"/>
+                <a16:creationId xmlns:a16="http://schemas.microsoft.com/office/drawing/2014/main" id="{937AC8AA-AA50-446F-8423-763877A73773}"/>
               </a:ext>
             </a:extLst>
           </p:cNvPr>
@@ -28032,7 +28032,7 @@
           <p:cNvPr id="133" name="">
             <a:extLst xmlns:a="http://schemas.openxmlformats.org/drawingml/2006/main">
               <a:ext uri="{FF2B5EF4-FFF2-40B4-BE49-F238E27FC236}">
-                <a16:creationId xmlns:a16="http://schemas.microsoft.com/office/drawing/2014/main" id="{2CAFB5B8-2DDD-4733-9945-AF588143A618}"/>
+                <a16:creationId xmlns:a16="http://schemas.microsoft.com/office/drawing/2014/main" id="{9F6B8BD6-2B49-4F57-9020-8BA7559416A1}"/>
               </a:ext>
             </a:extLst>
           </p:cNvPr>
@@ -28084,7 +28084,7 @@
           <p:cNvPr id="134" name="">
             <a:extLst xmlns:a="http://schemas.openxmlformats.org/drawingml/2006/main">
               <a:ext uri="{FF2B5EF4-FFF2-40B4-BE49-F238E27FC236}">
-                <a16:creationId xmlns:a16="http://schemas.microsoft.com/office/drawing/2014/main" id="{FE3DF8F1-9E37-4F36-BCAE-F3E997E5A466}"/>
+                <a16:creationId xmlns:a16="http://schemas.microsoft.com/office/drawing/2014/main" id="{5E026A38-37D6-4528-AA65-1B7B36507A4B}"/>
               </a:ext>
             </a:extLst>
           </p:cNvPr>
@@ -28134,7 +28134,7 @@
     </p:spTree>
     <p:extLst>
       <p:ext uri="{BB962C8B-B14F-4D97-AF65-F5344CB8AC3E}">
-        <p14:creationId xmlns:p14="http://schemas.microsoft.com/office/powerpoint/2010/main" val="1745282033"/>
+        <p14:creationId xmlns:p14="http://schemas.microsoft.com/office/powerpoint/2010/main" val="281176260"/>
       </p:ext>
     </p:extLst>
   </p:cSld>
@@ -28165,7 +28165,7 @@
           <p:cNvPr id="9" name="">
             <a:extLst xmlns:a="http://schemas.openxmlformats.org/drawingml/2006/main">
               <a:ext uri="{FF2B5EF4-FFF2-40B4-BE49-F238E27FC236}">
-                <a16:creationId xmlns:a16="http://schemas.microsoft.com/office/drawing/2014/main" id="{2F0A18A3-D06B-46C9-9C84-EAF61D919B29}"/>
+                <a16:creationId xmlns:a16="http://schemas.microsoft.com/office/drawing/2014/main" id="{177E46E8-28FC-49F5-BF4E-4560B16C5BF0}"/>
               </a:ext>
             </a:extLst>
           </p:cNvPr>
@@ -28198,7 +28198,7 @@
           <p:cNvPr id="2" name="">
             <a:extLst xmlns:a="http://schemas.openxmlformats.org/drawingml/2006/main">
               <a:ext uri="{FF2B5EF4-FFF2-40B4-BE49-F238E27FC236}">
-                <a16:creationId xmlns:a16="http://schemas.microsoft.com/office/drawing/2014/main" id="{56717353-B60D-4C56-B856-F218396E50CF}"/>
+                <a16:creationId xmlns:a16="http://schemas.microsoft.com/office/drawing/2014/main" id="{E9498F95-0DB4-47A2-8D77-C93E4A6BBB4C}"/>
               </a:ext>
             </a:extLst>
           </p:cNvPr>
@@ -28229,7 +28229,7 @@
           <p:cNvPr id="3" name="">
             <a:extLst xmlns:a="http://schemas.openxmlformats.org/drawingml/2006/main">
               <a:ext uri="{FF2B5EF4-FFF2-40B4-BE49-F238E27FC236}">
-                <a16:creationId xmlns:a16="http://schemas.microsoft.com/office/drawing/2014/main" id="{5C6DE2D8-BDDB-43DE-8380-3F3D7DBC8136}"/>
+                <a16:creationId xmlns:a16="http://schemas.microsoft.com/office/drawing/2014/main" id="{24AFEE7A-1560-4DD1-A955-F49886EC37C1}"/>
               </a:ext>
             </a:extLst>
           </p:cNvPr>
@@ -28281,7 +28281,7 @@
           <p:cNvPr id="4" name="">
             <a:extLst xmlns:a="http://schemas.openxmlformats.org/drawingml/2006/main">
               <a:ext uri="{FF2B5EF4-FFF2-40B4-BE49-F238E27FC236}">
-                <a16:creationId xmlns:a16="http://schemas.microsoft.com/office/drawing/2014/main" id="{0CFE61F6-3ED8-4881-A90E-3969202FF9FC}"/>
+                <a16:creationId xmlns:a16="http://schemas.microsoft.com/office/drawing/2014/main" id="{9454737A-C75A-4628-8AF7-53EB2F61F5BD}"/>
               </a:ext>
             </a:extLst>
           </p:cNvPr>
@@ -28316,7 +28316,7 @@
           <p:nvPr/>
         </p:nvPicPr>
         <p:blipFill>
-          <a:blip xmlns:r="http://schemas.openxmlformats.org/officeDocument/2006/relationships" xmlns:a="http://schemas.openxmlformats.org/drawingml/2006/main" r:embed="Rbad32dd8db034777"/>
+          <a:blip xmlns:r="http://schemas.openxmlformats.org/officeDocument/2006/relationships" xmlns:a="http://schemas.openxmlformats.org/drawingml/2006/main" r:embed="Rd7775420efc54a32"/>
           <a:stretch xmlns:a="http://schemas.openxmlformats.org/drawingml/2006/main"/>
         </p:blipFill>
         <p:spPr>
@@ -28334,7 +28334,7 @@
           <p:cNvPr id="6" name="">
             <a:extLst xmlns:a="http://schemas.openxmlformats.org/drawingml/2006/main">
               <a:ext uri="{FF2B5EF4-FFF2-40B4-BE49-F238E27FC236}">
-                <a16:creationId xmlns:a16="http://schemas.microsoft.com/office/drawing/2014/main" id="{C30E4CD1-1E65-4B71-9D23-F1A9AD9AC689}"/>
+                <a16:creationId xmlns:a16="http://schemas.microsoft.com/office/drawing/2014/main" id="{0A459496-A54C-43DF-B99D-097E66CB265F}"/>
               </a:ext>
             </a:extLst>
           </p:cNvPr>
@@ -28386,7 +28386,7 @@
           <p:cNvPr id="7" name="">
             <a:extLst xmlns:a="http://schemas.openxmlformats.org/drawingml/2006/main">
               <a:ext uri="{FF2B5EF4-FFF2-40B4-BE49-F238E27FC236}">
-                <a16:creationId xmlns:a16="http://schemas.microsoft.com/office/drawing/2014/main" id="{BD8EFEEA-CED3-4E3F-87AC-64AE9AF1843D}"/>
+                <a16:creationId xmlns:a16="http://schemas.microsoft.com/office/drawing/2014/main" id="{725FCECC-9BB2-4558-BFD0-CFD71FB5E233}"/>
               </a:ext>
             </a:extLst>
           </p:cNvPr>
@@ -28442,7 +28442,7 @@
           <p:nvPr/>
         </p:nvPicPr>
         <p:blipFill>
-          <a:blip xmlns:r="http://schemas.openxmlformats.org/officeDocument/2006/relationships" xmlns:a="http://schemas.openxmlformats.org/drawingml/2006/main" r:embed="R39e34bba96894922"/>
+          <a:blip xmlns:r="http://schemas.openxmlformats.org/officeDocument/2006/relationships" xmlns:a="http://schemas.openxmlformats.org/drawingml/2006/main" r:embed="R8de1fb26dd0e42f6"/>
           <a:stretch xmlns:a="http://schemas.openxmlformats.org/drawingml/2006/main"/>
         </p:blipFill>
         <p:spPr>
@@ -28458,7 +28458,7 @@
     </p:spTree>
     <p:extLst>
       <p:ext uri="{BB962C8B-B14F-4D97-AF65-F5344CB8AC3E}">
-        <p14:creationId xmlns:p14="http://schemas.microsoft.com/office/powerpoint/2010/main" val="1709829952"/>
+        <p14:creationId xmlns:p14="http://schemas.microsoft.com/office/powerpoint/2010/main" val="759109667"/>
       </p:ext>
     </p:extLst>
   </p:cSld>
@@ -28489,7 +28489,7 @@
           <p:cNvPr id="42" name="">
             <a:extLst xmlns:a="http://schemas.openxmlformats.org/drawingml/2006/main">
               <a:ext uri="{FF2B5EF4-FFF2-40B4-BE49-F238E27FC236}">
-                <a16:creationId xmlns:a16="http://schemas.microsoft.com/office/drawing/2014/main" id="{30586D2C-7B2B-4973-AAC1-A113B1499A8E}"/>
+                <a16:creationId xmlns:a16="http://schemas.microsoft.com/office/drawing/2014/main" id="{6A10D7EE-59FF-4F7C-BB77-522268BC15CC}"/>
               </a:ext>
             </a:extLst>
           </p:cNvPr>
@@ -28522,7 +28522,7 @@
           <p:cNvPr id="2" name="">
             <a:extLst xmlns:a="http://schemas.openxmlformats.org/drawingml/2006/main">
               <a:ext uri="{FF2B5EF4-FFF2-40B4-BE49-F238E27FC236}">
-                <a16:creationId xmlns:a16="http://schemas.microsoft.com/office/drawing/2014/main" id="{B361C8B1-5127-4D6D-B290-47E56085B968}"/>
+                <a16:creationId xmlns:a16="http://schemas.microsoft.com/office/drawing/2014/main" id="{5F7BA6F5-2FDE-47F6-B1BA-DD08FF90F940}"/>
               </a:ext>
             </a:extLst>
           </p:cNvPr>
@@ -28553,7 +28553,7 @@
           <p:cNvPr id="3" name="">
             <a:extLst xmlns:a="http://schemas.openxmlformats.org/drawingml/2006/main">
               <a:ext uri="{FF2B5EF4-FFF2-40B4-BE49-F238E27FC236}">
-                <a16:creationId xmlns:a16="http://schemas.microsoft.com/office/drawing/2014/main" id="{29B82953-F228-4CBD-B4A3-18E35453F22E}"/>
+                <a16:creationId xmlns:a16="http://schemas.microsoft.com/office/drawing/2014/main" id="{85B7731B-0ABC-40D7-B46B-82CF682E7569}"/>
               </a:ext>
             </a:extLst>
           </p:cNvPr>
@@ -28605,7 +28605,7 @@
           <p:cNvPr id="4" name="">
             <a:extLst xmlns:a="http://schemas.openxmlformats.org/drawingml/2006/main">
               <a:ext uri="{FF2B5EF4-FFF2-40B4-BE49-F238E27FC236}">
-                <a16:creationId xmlns:a16="http://schemas.microsoft.com/office/drawing/2014/main" id="{82968248-47E7-42A1-8F40-5FC5C7CD2CC4}"/>
+                <a16:creationId xmlns:a16="http://schemas.microsoft.com/office/drawing/2014/main" id="{791AC89D-5FC4-40E4-A7C3-3354DEDE2E52}"/>
               </a:ext>
             </a:extLst>
           </p:cNvPr>
@@ -28657,7 +28657,7 @@
           <p:cNvPr id="5" name="">
             <a:extLst xmlns:a="http://schemas.openxmlformats.org/drawingml/2006/main">
               <a:ext uri="{FF2B5EF4-FFF2-40B4-BE49-F238E27FC236}">
-                <a16:creationId xmlns:a16="http://schemas.microsoft.com/office/drawing/2014/main" id="{6868099B-DE2F-4206-9995-0773441602E7}"/>
+                <a16:creationId xmlns:a16="http://schemas.microsoft.com/office/drawing/2014/main" id="{78B5D3E4-84EB-42C9-82FA-8A90331D5703}"/>
               </a:ext>
             </a:extLst>
           </p:cNvPr>
@@ -28692,7 +28692,7 @@
           <p:nvPr/>
         </p:nvPicPr>
         <p:blipFill>
-          <a:blip xmlns:r="http://schemas.openxmlformats.org/officeDocument/2006/relationships" xmlns:a="http://schemas.openxmlformats.org/drawingml/2006/main" r:embed="R371f791e51f84d12"/>
+          <a:blip xmlns:r="http://schemas.openxmlformats.org/officeDocument/2006/relationships" xmlns:a="http://schemas.openxmlformats.org/drawingml/2006/main" r:embed="R86c042a72a7a4ffd"/>
           <a:stretch xmlns:a="http://schemas.openxmlformats.org/drawingml/2006/main"/>
         </p:blipFill>
         <p:spPr>
@@ -28710,7 +28710,7 @@
           <p:cNvPr id="7" name="">
             <a:extLst xmlns:a="http://schemas.openxmlformats.org/drawingml/2006/main">
               <a:ext uri="{FF2B5EF4-FFF2-40B4-BE49-F238E27FC236}">
-                <a16:creationId xmlns:a16="http://schemas.microsoft.com/office/drawing/2014/main" id="{6D84679A-D69E-4303-A356-CE0A963397D3}"/>
+                <a16:creationId xmlns:a16="http://schemas.microsoft.com/office/drawing/2014/main" id="{9D07C182-E288-48D9-865D-84CDFE43EB81}"/>
               </a:ext>
             </a:extLst>
           </p:cNvPr>
@@ -28762,7 +28762,7 @@
           <p:cNvPr id="8" name="">
             <a:extLst xmlns:a="http://schemas.openxmlformats.org/drawingml/2006/main">
               <a:ext uri="{FF2B5EF4-FFF2-40B4-BE49-F238E27FC236}">
-                <a16:creationId xmlns:a16="http://schemas.microsoft.com/office/drawing/2014/main" id="{B66E5152-667A-4D85-9A4F-5FE64FA6B200}"/>
+                <a16:creationId xmlns:a16="http://schemas.microsoft.com/office/drawing/2014/main" id="{8C886F6E-5454-415E-87AB-ED745C9433F8}"/>
               </a:ext>
             </a:extLst>
           </p:cNvPr>
@@ -28814,7 +28814,7 @@
           <p:cNvPr id="9" name="">
             <a:extLst xmlns:a="http://schemas.openxmlformats.org/drawingml/2006/main">
               <a:ext uri="{FF2B5EF4-FFF2-40B4-BE49-F238E27FC236}">
-                <a16:creationId xmlns:a16="http://schemas.microsoft.com/office/drawing/2014/main" id="{311AEB7A-A48F-4BF9-A59E-E6E72068E4AF}"/>
+                <a16:creationId xmlns:a16="http://schemas.microsoft.com/office/drawing/2014/main" id="{DE6C6EC7-1F7A-458E-89F6-145ABA3A8CFC}"/>
               </a:ext>
             </a:extLst>
           </p:cNvPr>
@@ -28866,7 +28866,7 @@
           <p:cNvPr id="10" name="">
             <a:extLst xmlns:a="http://schemas.openxmlformats.org/drawingml/2006/main">
               <a:ext uri="{FF2B5EF4-FFF2-40B4-BE49-F238E27FC236}">
-                <a16:creationId xmlns:a16="http://schemas.microsoft.com/office/drawing/2014/main" id="{5D31ECCC-BFEF-4585-8EE5-B660C35AA92C}"/>
+                <a16:creationId xmlns:a16="http://schemas.microsoft.com/office/drawing/2014/main" id="{90F5EFCD-9C90-4B56-9FCA-5D6F3BB88109}"/>
               </a:ext>
             </a:extLst>
           </p:cNvPr>
@@ -28897,7 +28897,7 @@
           <p:cNvPr id="11" name="">
             <a:extLst xmlns:a="http://schemas.openxmlformats.org/drawingml/2006/main">
               <a:ext uri="{FF2B5EF4-FFF2-40B4-BE49-F238E27FC236}">
-                <a16:creationId xmlns:a16="http://schemas.microsoft.com/office/drawing/2014/main" id="{68264411-3676-4E01-A229-9520FC5B82FC}"/>
+                <a16:creationId xmlns:a16="http://schemas.microsoft.com/office/drawing/2014/main" id="{FBD3FB09-8E16-40B7-B402-C173B556A7D8}"/>
               </a:ext>
             </a:extLst>
           </p:cNvPr>
@@ -28949,7 +28949,7 @@
           <p:cNvPr id="12" name="">
             <a:extLst xmlns:a="http://schemas.openxmlformats.org/drawingml/2006/main">
               <a:ext uri="{FF2B5EF4-FFF2-40B4-BE49-F238E27FC236}">
-                <a16:creationId xmlns:a16="http://schemas.microsoft.com/office/drawing/2014/main" id="{7E816795-FC0A-49CA-8A18-D15DEB99504D}"/>
+                <a16:creationId xmlns:a16="http://schemas.microsoft.com/office/drawing/2014/main" id="{03CCE5D3-DDDB-403C-9FF7-5B6D9B2FE718}"/>
               </a:ext>
             </a:extLst>
           </p:cNvPr>
@@ -29001,7 +29001,7 @@
           <p:cNvPr id="13" name="">
             <a:extLst xmlns:a="http://schemas.openxmlformats.org/drawingml/2006/main">
               <a:ext uri="{FF2B5EF4-FFF2-40B4-BE49-F238E27FC236}">
-                <a16:creationId xmlns:a16="http://schemas.microsoft.com/office/drawing/2014/main" id="{14F25165-7009-48E0-82D1-5F03D99B0CBE}"/>
+                <a16:creationId xmlns:a16="http://schemas.microsoft.com/office/drawing/2014/main" id="{7E01A026-F155-413A-B540-6A97A21EFC9C}"/>
               </a:ext>
             </a:extLst>
           </p:cNvPr>
@@ -29053,7 +29053,7 @@
           <p:cNvPr id="14" name="">
             <a:extLst xmlns:a="http://schemas.openxmlformats.org/drawingml/2006/main">
               <a:ext uri="{FF2B5EF4-FFF2-40B4-BE49-F238E27FC236}">
-                <a16:creationId xmlns:a16="http://schemas.microsoft.com/office/drawing/2014/main" id="{45F4814D-8243-4CD7-AAE7-42C9327ED5C0}"/>
+                <a16:creationId xmlns:a16="http://schemas.microsoft.com/office/drawing/2014/main" id="{4DB27790-37D6-4B4D-90AA-0F6EB3E4F82E}"/>
               </a:ext>
             </a:extLst>
           </p:cNvPr>
@@ -29084,7 +29084,7 @@
           <p:cNvPr id="15" name="">
             <a:extLst xmlns:a="http://schemas.openxmlformats.org/drawingml/2006/main">
               <a:ext uri="{FF2B5EF4-FFF2-40B4-BE49-F238E27FC236}">
-                <a16:creationId xmlns:a16="http://schemas.microsoft.com/office/drawing/2014/main" id="{FD104E63-10C2-4467-996E-3D6F184B28A7}"/>
+                <a16:creationId xmlns:a16="http://schemas.microsoft.com/office/drawing/2014/main" id="{2BF3541D-04EB-4A6E-9420-8CE70A4C68B1}"/>
               </a:ext>
             </a:extLst>
           </p:cNvPr>
@@ -29136,7 +29136,7 @@
           <p:cNvPr id="16" name="">
             <a:extLst xmlns:a="http://schemas.openxmlformats.org/drawingml/2006/main">
               <a:ext uri="{FF2B5EF4-FFF2-40B4-BE49-F238E27FC236}">
-                <a16:creationId xmlns:a16="http://schemas.microsoft.com/office/drawing/2014/main" id="{70B21D4D-7CD3-44BF-93CC-B5F859A06BB2}"/>
+                <a16:creationId xmlns:a16="http://schemas.microsoft.com/office/drawing/2014/main" id="{26321D55-6819-4AED-BFE6-2B5CA9D444EA}"/>
               </a:ext>
             </a:extLst>
           </p:cNvPr>
@@ -29188,7 +29188,7 @@
           <p:cNvPr id="17" name="">
             <a:extLst xmlns:a="http://schemas.openxmlformats.org/drawingml/2006/main">
               <a:ext uri="{FF2B5EF4-FFF2-40B4-BE49-F238E27FC236}">
-                <a16:creationId xmlns:a16="http://schemas.microsoft.com/office/drawing/2014/main" id="{A7CC8F7B-C0A1-4C83-9E2D-08519C1A61F0}"/>
+                <a16:creationId xmlns:a16="http://schemas.microsoft.com/office/drawing/2014/main" id="{2F6D21EE-6DA3-4152-8A38-9E448D1B71E6}"/>
               </a:ext>
             </a:extLst>
           </p:cNvPr>
@@ -29240,7 +29240,7 @@
           <p:cNvPr id="18" name="">
             <a:extLst xmlns:a="http://schemas.openxmlformats.org/drawingml/2006/main">
               <a:ext uri="{FF2B5EF4-FFF2-40B4-BE49-F238E27FC236}">
-                <a16:creationId xmlns:a16="http://schemas.microsoft.com/office/drawing/2014/main" id="{9BFC1A52-0DA1-4059-A4AC-0D8BCDC62F49}"/>
+                <a16:creationId xmlns:a16="http://schemas.microsoft.com/office/drawing/2014/main" id="{82CF5185-24D4-4965-BB9E-5DF205C94DC6}"/>
               </a:ext>
             </a:extLst>
           </p:cNvPr>
@@ -29271,7 +29271,7 @@
           <p:cNvPr id="19" name="">
             <a:extLst xmlns:a="http://schemas.openxmlformats.org/drawingml/2006/main">
               <a:ext uri="{FF2B5EF4-FFF2-40B4-BE49-F238E27FC236}">
-                <a16:creationId xmlns:a16="http://schemas.microsoft.com/office/drawing/2014/main" id="{55E01692-6F10-4FEA-8D68-739BF96FB545}"/>
+                <a16:creationId xmlns:a16="http://schemas.microsoft.com/office/drawing/2014/main" id="{6449192D-BA2C-4F30-B668-BBC75B9D713D}"/>
               </a:ext>
             </a:extLst>
           </p:cNvPr>
@@ -29323,7 +29323,7 @@
           <p:cNvPr id="20" name="">
             <a:extLst xmlns:a="http://schemas.openxmlformats.org/drawingml/2006/main">
               <a:ext uri="{FF2B5EF4-FFF2-40B4-BE49-F238E27FC236}">
-                <a16:creationId xmlns:a16="http://schemas.microsoft.com/office/drawing/2014/main" id="{F9D7CCFA-094C-42C8-81A5-14DE1B9EDE5D}"/>
+                <a16:creationId xmlns:a16="http://schemas.microsoft.com/office/drawing/2014/main" id="{AC8E9D25-7D14-4DDE-B2BB-924A03960FAD}"/>
               </a:ext>
             </a:extLst>
           </p:cNvPr>
@@ -29375,7 +29375,7 @@
           <p:cNvPr id="21" name="">
             <a:extLst xmlns:a="http://schemas.openxmlformats.org/drawingml/2006/main">
               <a:ext uri="{FF2B5EF4-FFF2-40B4-BE49-F238E27FC236}">
-                <a16:creationId xmlns:a16="http://schemas.microsoft.com/office/drawing/2014/main" id="{9259878C-1FB7-4168-9B02-628CC8BA6599}"/>
+                <a16:creationId xmlns:a16="http://schemas.microsoft.com/office/drawing/2014/main" id="{031574D1-7A90-4F73-9AB6-8030836FBDDB}"/>
               </a:ext>
             </a:extLst>
           </p:cNvPr>
@@ -29427,7 +29427,7 @@
           <p:cNvPr id="22" name="">
             <a:extLst xmlns:a="http://schemas.openxmlformats.org/drawingml/2006/main">
               <a:ext uri="{FF2B5EF4-FFF2-40B4-BE49-F238E27FC236}">
-                <a16:creationId xmlns:a16="http://schemas.microsoft.com/office/drawing/2014/main" id="{59EE92FE-7CC9-47B8-AC99-A83C95EEDFEE}"/>
+                <a16:creationId xmlns:a16="http://schemas.microsoft.com/office/drawing/2014/main" id="{3C6D78B5-9195-47E2-8B39-C9D466954626}"/>
               </a:ext>
             </a:extLst>
           </p:cNvPr>
@@ -29458,7 +29458,7 @@
           <p:cNvPr id="23" name="">
             <a:extLst xmlns:a="http://schemas.openxmlformats.org/drawingml/2006/main">
               <a:ext uri="{FF2B5EF4-FFF2-40B4-BE49-F238E27FC236}">
-                <a16:creationId xmlns:a16="http://schemas.microsoft.com/office/drawing/2014/main" id="{87C56AA5-8D51-4385-A6E9-97A5934E1486}"/>
+                <a16:creationId xmlns:a16="http://schemas.microsoft.com/office/drawing/2014/main" id="{AF5EBADF-CDC8-41C3-A77C-F3B4A5E87ED7}"/>
               </a:ext>
             </a:extLst>
           </p:cNvPr>
@@ -29510,7 +29510,7 @@
           <p:cNvPr id="24" name="">
             <a:extLst xmlns:a="http://schemas.openxmlformats.org/drawingml/2006/main">
               <a:ext uri="{FF2B5EF4-FFF2-40B4-BE49-F238E27FC236}">
-                <a16:creationId xmlns:a16="http://schemas.microsoft.com/office/drawing/2014/main" id="{BF59AF06-A216-4663-A67A-F6B598D219C3}"/>
+                <a16:creationId xmlns:a16="http://schemas.microsoft.com/office/drawing/2014/main" id="{599D5305-E083-4475-BA51-D53093ACF104}"/>
               </a:ext>
             </a:extLst>
           </p:cNvPr>
@@ -29562,7 +29562,7 @@
           <p:cNvPr id="25" name="">
             <a:extLst xmlns:a="http://schemas.openxmlformats.org/drawingml/2006/main">
               <a:ext uri="{FF2B5EF4-FFF2-40B4-BE49-F238E27FC236}">
-                <a16:creationId xmlns:a16="http://schemas.microsoft.com/office/drawing/2014/main" id="{075C9292-E840-4D69-8AF3-F807E1DA9738}"/>
+                <a16:creationId xmlns:a16="http://schemas.microsoft.com/office/drawing/2014/main" id="{B4783099-851B-4C1A-B879-CB7E0DBD0898}"/>
               </a:ext>
             </a:extLst>
           </p:cNvPr>
@@ -29614,7 +29614,7 @@
           <p:cNvPr id="26" name="">
             <a:extLst xmlns:a="http://schemas.openxmlformats.org/drawingml/2006/main">
               <a:ext uri="{FF2B5EF4-FFF2-40B4-BE49-F238E27FC236}">
-                <a16:creationId xmlns:a16="http://schemas.microsoft.com/office/drawing/2014/main" id="{2257D0E0-82F2-4CEB-AD56-B5B97F479DCD}"/>
+                <a16:creationId xmlns:a16="http://schemas.microsoft.com/office/drawing/2014/main" id="{D6B6AFBF-6F9D-411C-841F-39F5C315AD63}"/>
               </a:ext>
             </a:extLst>
           </p:cNvPr>
@@ -29645,7 +29645,7 @@
           <p:cNvPr id="27" name="">
             <a:extLst xmlns:a="http://schemas.openxmlformats.org/drawingml/2006/main">
               <a:ext uri="{FF2B5EF4-FFF2-40B4-BE49-F238E27FC236}">
-                <a16:creationId xmlns:a16="http://schemas.microsoft.com/office/drawing/2014/main" id="{6C68F02B-15E6-48FE-9059-CDB1DDF69D6E}"/>
+                <a16:creationId xmlns:a16="http://schemas.microsoft.com/office/drawing/2014/main" id="{1D3FCD82-AAF0-43EA-AB76-0819215CE7A5}"/>
               </a:ext>
             </a:extLst>
           </p:cNvPr>
@@ -29697,7 +29697,7 @@
           <p:cNvPr id="28" name="">
             <a:extLst xmlns:a="http://schemas.openxmlformats.org/drawingml/2006/main">
               <a:ext uri="{FF2B5EF4-FFF2-40B4-BE49-F238E27FC236}">
-                <a16:creationId xmlns:a16="http://schemas.microsoft.com/office/drawing/2014/main" id="{0FAF0AB7-3B9B-4937-AE79-651165B884B5}"/>
+                <a16:creationId xmlns:a16="http://schemas.microsoft.com/office/drawing/2014/main" id="{C990A2ED-480F-4B3F-BA67-1880868DD6D8}"/>
               </a:ext>
             </a:extLst>
           </p:cNvPr>
@@ -29749,7 +29749,7 @@
           <p:cNvPr id="29" name="">
             <a:extLst xmlns:a="http://schemas.openxmlformats.org/drawingml/2006/main">
               <a:ext uri="{FF2B5EF4-FFF2-40B4-BE49-F238E27FC236}">
-                <a16:creationId xmlns:a16="http://schemas.microsoft.com/office/drawing/2014/main" id="{43B125E0-5478-4AA6-A036-E294E54C11D7}"/>
+                <a16:creationId xmlns:a16="http://schemas.microsoft.com/office/drawing/2014/main" id="{126ACCC9-4A68-4AEF-95CE-96FFB40EE3BE}"/>
               </a:ext>
             </a:extLst>
           </p:cNvPr>
@@ -29801,7 +29801,7 @@
           <p:cNvPr id="30" name="">
             <a:extLst xmlns:a="http://schemas.openxmlformats.org/drawingml/2006/main">
               <a:ext uri="{FF2B5EF4-FFF2-40B4-BE49-F238E27FC236}">
-                <a16:creationId xmlns:a16="http://schemas.microsoft.com/office/drawing/2014/main" id="{DB35CD74-0F00-423D-B5B3-12E5C4E578A3}"/>
+                <a16:creationId xmlns:a16="http://schemas.microsoft.com/office/drawing/2014/main" id="{2EACC4C0-B6AF-4AB3-A2A2-0304865763B7}"/>
               </a:ext>
             </a:extLst>
           </p:cNvPr>
@@ -29832,7 +29832,7 @@
           <p:cNvPr id="31" name="">
             <a:extLst xmlns:a="http://schemas.openxmlformats.org/drawingml/2006/main">
               <a:ext uri="{FF2B5EF4-FFF2-40B4-BE49-F238E27FC236}">
-                <a16:creationId xmlns:a16="http://schemas.microsoft.com/office/drawing/2014/main" id="{D7683692-8141-43FA-B43A-2BEE8B558F27}"/>
+                <a16:creationId xmlns:a16="http://schemas.microsoft.com/office/drawing/2014/main" id="{5768BAE9-8F18-4144-8629-73BCC0580CC0}"/>
               </a:ext>
             </a:extLst>
           </p:cNvPr>
@@ -29884,7 +29884,7 @@
           <p:cNvPr id="32" name="">
             <a:extLst xmlns:a="http://schemas.openxmlformats.org/drawingml/2006/main">
               <a:ext uri="{FF2B5EF4-FFF2-40B4-BE49-F238E27FC236}">
-                <a16:creationId xmlns:a16="http://schemas.microsoft.com/office/drawing/2014/main" id="{6C202D56-5E76-4DC3-9B1A-2D6F52B8D1DD}"/>
+                <a16:creationId xmlns:a16="http://schemas.microsoft.com/office/drawing/2014/main" id="{370AAB2B-B0F2-49F5-9F17-844D2AD7B4D4}"/>
               </a:ext>
             </a:extLst>
           </p:cNvPr>
@@ -29936,7 +29936,7 @@
           <p:cNvPr id="33" name="">
             <a:extLst xmlns:a="http://schemas.openxmlformats.org/drawingml/2006/main">
               <a:ext uri="{FF2B5EF4-FFF2-40B4-BE49-F238E27FC236}">
-                <a16:creationId xmlns:a16="http://schemas.microsoft.com/office/drawing/2014/main" id="{7DAA93CC-437C-4A8D-9A7E-F5CB6FFFB798}"/>
+                <a16:creationId xmlns:a16="http://schemas.microsoft.com/office/drawing/2014/main" id="{DBF2FF87-192F-47BF-A4D3-09C52C654107}"/>
               </a:ext>
             </a:extLst>
           </p:cNvPr>
@@ -29988,7 +29988,7 @@
           <p:cNvPr id="34" name="">
             <a:extLst xmlns:a="http://schemas.openxmlformats.org/drawingml/2006/main">
               <a:ext uri="{FF2B5EF4-FFF2-40B4-BE49-F238E27FC236}">
-                <a16:creationId xmlns:a16="http://schemas.microsoft.com/office/drawing/2014/main" id="{0B6116A7-6870-4E9A-B677-DA956034192B}"/>
+                <a16:creationId xmlns:a16="http://schemas.microsoft.com/office/drawing/2014/main" id="{FA34C9C5-A9AA-4A6B-9394-CC7A178B9828}"/>
               </a:ext>
             </a:extLst>
           </p:cNvPr>
@@ -30019,7 +30019,7 @@
           <p:cNvPr id="35" name="">
             <a:extLst xmlns:a="http://schemas.openxmlformats.org/drawingml/2006/main">
               <a:ext uri="{FF2B5EF4-FFF2-40B4-BE49-F238E27FC236}">
-                <a16:creationId xmlns:a16="http://schemas.microsoft.com/office/drawing/2014/main" id="{4F104E1B-D4D8-47AE-8DDA-47EB9980555C}"/>
+                <a16:creationId xmlns:a16="http://schemas.microsoft.com/office/drawing/2014/main" id="{35B7AC06-EC42-42B9-AFEF-CEBEC89FD1D2}"/>
               </a:ext>
             </a:extLst>
           </p:cNvPr>
@@ -30071,7 +30071,7 @@
           <p:cNvPr id="36" name="">
             <a:extLst xmlns:a="http://schemas.openxmlformats.org/drawingml/2006/main">
               <a:ext uri="{FF2B5EF4-FFF2-40B4-BE49-F238E27FC236}">
-                <a16:creationId xmlns:a16="http://schemas.microsoft.com/office/drawing/2014/main" id="{3DFE967A-F89E-4D7C-A03B-94EDF8F64568}"/>
+                <a16:creationId xmlns:a16="http://schemas.microsoft.com/office/drawing/2014/main" id="{7D74126B-D12B-4A21-B4F4-6501D3A8690A}"/>
               </a:ext>
             </a:extLst>
           </p:cNvPr>
@@ -30123,7 +30123,7 @@
           <p:cNvPr id="37" name="">
             <a:extLst xmlns:a="http://schemas.openxmlformats.org/drawingml/2006/main">
               <a:ext uri="{FF2B5EF4-FFF2-40B4-BE49-F238E27FC236}">
-                <a16:creationId xmlns:a16="http://schemas.microsoft.com/office/drawing/2014/main" id="{96FC93A8-3DFE-46D9-A3CE-9B7AD191F87C}"/>
+                <a16:creationId xmlns:a16="http://schemas.microsoft.com/office/drawing/2014/main" id="{36BC19BE-1412-41BF-A713-C79F15609F53}"/>
               </a:ext>
             </a:extLst>
           </p:cNvPr>
@@ -30175,7 +30175,7 @@
           <p:cNvPr id="38" name="">
             <a:extLst xmlns:a="http://schemas.openxmlformats.org/drawingml/2006/main">
               <a:ext uri="{FF2B5EF4-FFF2-40B4-BE49-F238E27FC236}">
-                <a16:creationId xmlns:a16="http://schemas.microsoft.com/office/drawing/2014/main" id="{8A6E2820-4B84-4273-A858-6294548A7F2F}"/>
+                <a16:creationId xmlns:a16="http://schemas.microsoft.com/office/drawing/2014/main" id="{18F52760-2A7C-4A09-B340-3860D3FF7211}"/>
               </a:ext>
             </a:extLst>
           </p:cNvPr>
@@ -30206,7 +30206,7 @@
           <p:cNvPr id="39" name="">
             <a:extLst xmlns:a="http://schemas.openxmlformats.org/drawingml/2006/main">
               <a:ext uri="{FF2B5EF4-FFF2-40B4-BE49-F238E27FC236}">
-                <a16:creationId xmlns:a16="http://schemas.microsoft.com/office/drawing/2014/main" id="{27C299AA-AE9D-4DFB-8258-C1D6202BDE5D}"/>
+                <a16:creationId xmlns:a16="http://schemas.microsoft.com/office/drawing/2014/main" id="{BE560043-16DB-427C-AEEA-BC0879C03C2A}"/>
               </a:ext>
             </a:extLst>
           </p:cNvPr>
@@ -30258,7 +30258,7 @@
           <p:cNvPr id="40" name="">
             <a:extLst xmlns:a="http://schemas.openxmlformats.org/drawingml/2006/main">
               <a:ext uri="{FF2B5EF4-FFF2-40B4-BE49-F238E27FC236}">
-                <a16:creationId xmlns:a16="http://schemas.microsoft.com/office/drawing/2014/main" id="{4BF7A2DB-7675-49F5-A5AA-80BBB133196F}"/>
+                <a16:creationId xmlns:a16="http://schemas.microsoft.com/office/drawing/2014/main" id="{F9F2411B-317A-4989-B378-82256E77D231}"/>
               </a:ext>
             </a:extLst>
           </p:cNvPr>
@@ -30310,7 +30310,7 @@
           <p:cNvPr id="41" name="">
             <a:extLst xmlns:a="http://schemas.openxmlformats.org/drawingml/2006/main">
               <a:ext uri="{FF2B5EF4-FFF2-40B4-BE49-F238E27FC236}">
-                <a16:creationId xmlns:a16="http://schemas.microsoft.com/office/drawing/2014/main" id="{330F45BD-2B96-4703-883B-9B612D02F395}"/>
+                <a16:creationId xmlns:a16="http://schemas.microsoft.com/office/drawing/2014/main" id="{E2742D20-F599-4A1F-96E4-775E9271EC1C}"/>
               </a:ext>
             </a:extLst>
           </p:cNvPr>
@@ -30360,7 +30360,7 @@
     </p:spTree>
     <p:extLst>
       <p:ext uri="{BB962C8B-B14F-4D97-AF65-F5344CB8AC3E}">
-        <p14:creationId xmlns:p14="http://schemas.microsoft.com/office/powerpoint/2010/main" val="1731874871"/>
+        <p14:creationId xmlns:p14="http://schemas.microsoft.com/office/powerpoint/2010/main" val="236187495"/>
       </p:ext>
     </p:extLst>
   </p:cSld>
@@ -30391,7 +30391,7 @@
           <p:cNvPr id="76" name="">
             <a:extLst xmlns:a="http://schemas.openxmlformats.org/drawingml/2006/main">
               <a:ext uri="{FF2B5EF4-FFF2-40B4-BE49-F238E27FC236}">
-                <a16:creationId xmlns:a16="http://schemas.microsoft.com/office/drawing/2014/main" id="{3B1D5256-FACE-4F0F-B874-B24B7C742390}"/>
+                <a16:creationId xmlns:a16="http://schemas.microsoft.com/office/drawing/2014/main" id="{74A61089-7EE4-4DC5-A6A5-A9045B290D90}"/>
               </a:ext>
             </a:extLst>
           </p:cNvPr>
@@ -30424,7 +30424,7 @@
           <p:cNvPr id="2" name="">
             <a:extLst xmlns:a="http://schemas.openxmlformats.org/drawingml/2006/main">
               <a:ext uri="{FF2B5EF4-FFF2-40B4-BE49-F238E27FC236}">
-                <a16:creationId xmlns:a16="http://schemas.microsoft.com/office/drawing/2014/main" id="{9E149DB8-499D-4B17-9599-40E52305083A}"/>
+                <a16:creationId xmlns:a16="http://schemas.microsoft.com/office/drawing/2014/main" id="{BDC3689C-287B-4956-AB88-8243FFB69F4F}"/>
               </a:ext>
             </a:extLst>
           </p:cNvPr>
@@ -30455,7 +30455,7 @@
           <p:cNvPr id="3" name="">
             <a:extLst xmlns:a="http://schemas.openxmlformats.org/drawingml/2006/main">
               <a:ext uri="{FF2B5EF4-FFF2-40B4-BE49-F238E27FC236}">
-                <a16:creationId xmlns:a16="http://schemas.microsoft.com/office/drawing/2014/main" id="{706EB06C-2957-402C-9395-C62E1DD1BE9C}"/>
+                <a16:creationId xmlns:a16="http://schemas.microsoft.com/office/drawing/2014/main" id="{8C36C379-8E78-4BCB-B5AC-BE986F98B7E6}"/>
               </a:ext>
             </a:extLst>
           </p:cNvPr>
@@ -30507,7 +30507,7 @@
           <p:cNvPr id="4" name="">
             <a:extLst xmlns:a="http://schemas.openxmlformats.org/drawingml/2006/main">
               <a:ext uri="{FF2B5EF4-FFF2-40B4-BE49-F238E27FC236}">
-                <a16:creationId xmlns:a16="http://schemas.microsoft.com/office/drawing/2014/main" id="{66909DBA-FDB1-4E07-84EB-6CBF918CE7C8}"/>
+                <a16:creationId xmlns:a16="http://schemas.microsoft.com/office/drawing/2014/main" id="{E6F41571-D4F1-46D6-A1B8-55B8DC883A01}"/>
               </a:ext>
             </a:extLst>
           </p:cNvPr>
@@ -30559,7 +30559,7 @@
           <p:cNvPr id="5" name="">
             <a:extLst xmlns:a="http://schemas.openxmlformats.org/drawingml/2006/main">
               <a:ext uri="{FF2B5EF4-FFF2-40B4-BE49-F238E27FC236}">
-                <a16:creationId xmlns:a16="http://schemas.microsoft.com/office/drawing/2014/main" id="{52515BB4-7377-4F06-9300-C62DA90C5D34}"/>
+                <a16:creationId xmlns:a16="http://schemas.microsoft.com/office/drawing/2014/main" id="{E2DD5690-35E8-4835-96BA-D076383B2152}"/>
               </a:ext>
             </a:extLst>
           </p:cNvPr>
@@ -30594,7 +30594,7 @@
           <p:nvPr/>
         </p:nvPicPr>
         <p:blipFill>
-          <a:blip xmlns:r="http://schemas.openxmlformats.org/officeDocument/2006/relationships" xmlns:a="http://schemas.openxmlformats.org/drawingml/2006/main" r:embed="Ra72819ae28204a3f"/>
+          <a:blip xmlns:r="http://schemas.openxmlformats.org/officeDocument/2006/relationships" xmlns:a="http://schemas.openxmlformats.org/drawingml/2006/main" r:embed="R98a050d123e54945"/>
           <a:stretch xmlns:a="http://schemas.openxmlformats.org/drawingml/2006/main"/>
         </p:blipFill>
         <p:spPr>
@@ -30612,7 +30612,7 @@
           <p:cNvPr id="7" name="">
             <a:extLst xmlns:a="http://schemas.openxmlformats.org/drawingml/2006/main">
               <a:ext uri="{FF2B5EF4-FFF2-40B4-BE49-F238E27FC236}">
-                <a16:creationId xmlns:a16="http://schemas.microsoft.com/office/drawing/2014/main" id="{839E7BDF-A9A9-4B1B-BEB3-164D041D4ACB}"/>
+                <a16:creationId xmlns:a16="http://schemas.microsoft.com/office/drawing/2014/main" id="{82DD9B76-617B-4719-9746-FEFFF7F1D436}"/>
               </a:ext>
             </a:extLst>
           </p:cNvPr>
@@ -30664,7 +30664,7 @@
           <p:cNvPr id="8" name="">
             <a:extLst xmlns:a="http://schemas.openxmlformats.org/drawingml/2006/main">
               <a:ext uri="{FF2B5EF4-FFF2-40B4-BE49-F238E27FC236}">
-                <a16:creationId xmlns:a16="http://schemas.microsoft.com/office/drawing/2014/main" id="{5E3F50CD-6C48-4B17-8C66-B85AF534D480}"/>
+                <a16:creationId xmlns:a16="http://schemas.microsoft.com/office/drawing/2014/main" id="{290B291F-7A7E-4A86-BFBE-1183FDB5D645}"/>
               </a:ext>
             </a:extLst>
           </p:cNvPr>
@@ -30716,7 +30716,7 @@
           <p:cNvPr id="9" name="">
             <a:extLst xmlns:a="http://schemas.openxmlformats.org/drawingml/2006/main">
               <a:ext uri="{FF2B5EF4-FFF2-40B4-BE49-F238E27FC236}">
-                <a16:creationId xmlns:a16="http://schemas.microsoft.com/office/drawing/2014/main" id="{1567379C-11D2-4CB4-91FE-6077FAA7792B}"/>
+                <a16:creationId xmlns:a16="http://schemas.microsoft.com/office/drawing/2014/main" id="{4958737D-6D36-49FA-96A4-2A7F1A08AC5B}"/>
               </a:ext>
             </a:extLst>
           </p:cNvPr>
@@ -30768,7 +30768,7 @@
           <p:cNvPr id="10" name="">
             <a:extLst xmlns:a="http://schemas.openxmlformats.org/drawingml/2006/main">
               <a:ext uri="{FF2B5EF4-FFF2-40B4-BE49-F238E27FC236}">
-                <a16:creationId xmlns:a16="http://schemas.microsoft.com/office/drawing/2014/main" id="{67BBA1F9-95B7-45CC-95D4-2D32A7C2D021}"/>
+                <a16:creationId xmlns:a16="http://schemas.microsoft.com/office/drawing/2014/main" id="{8086001C-868B-4E66-B747-864B500C9465}"/>
               </a:ext>
             </a:extLst>
           </p:cNvPr>
@@ -30820,7 +30820,7 @@
           <p:cNvPr id="11" name="">
             <a:extLst xmlns:a="http://schemas.openxmlformats.org/drawingml/2006/main">
               <a:ext uri="{FF2B5EF4-FFF2-40B4-BE49-F238E27FC236}">
-                <a16:creationId xmlns:a16="http://schemas.microsoft.com/office/drawing/2014/main" id="{DD5FE99B-7FEB-474D-8713-837514BA45F8}"/>
+                <a16:creationId xmlns:a16="http://schemas.microsoft.com/office/drawing/2014/main" id="{CCCA3E03-A2E3-4046-A3B6-D667334617D3}"/>
               </a:ext>
             </a:extLst>
           </p:cNvPr>
@@ -30863,7 +30863,7 @@
           <p:cNvPr id="12" name="">
             <a:extLst xmlns:a="http://schemas.openxmlformats.org/drawingml/2006/main">
               <a:ext uri="{FF2B5EF4-FFF2-40B4-BE49-F238E27FC236}">
-                <a16:creationId xmlns:a16="http://schemas.microsoft.com/office/drawing/2014/main" id="{396BD228-BF26-4093-8490-8481DADA7247}"/>
+                <a16:creationId xmlns:a16="http://schemas.microsoft.com/office/drawing/2014/main" id="{762CC873-5DE4-42F9-86E0-0CC0D63027C9}"/>
               </a:ext>
             </a:extLst>
           </p:cNvPr>
@@ -30894,7 +30894,7 @@
           <p:cNvPr id="13" name="">
             <a:extLst xmlns:a="http://schemas.openxmlformats.org/drawingml/2006/main">
               <a:ext uri="{FF2B5EF4-FFF2-40B4-BE49-F238E27FC236}">
-                <a16:creationId xmlns:a16="http://schemas.microsoft.com/office/drawing/2014/main" id="{9DD54629-CB17-41D1-9F72-D03D800217C4}"/>
+                <a16:creationId xmlns:a16="http://schemas.microsoft.com/office/drawing/2014/main" id="{6705AC03-6D77-42D0-9557-CA0136264DCF}"/>
               </a:ext>
             </a:extLst>
           </p:cNvPr>
@@ -30925,7 +30925,7 @@
           <p:cNvPr id="14" name="">
             <a:extLst xmlns:a="http://schemas.openxmlformats.org/drawingml/2006/main">
               <a:ext uri="{FF2B5EF4-FFF2-40B4-BE49-F238E27FC236}">
-                <a16:creationId xmlns:a16="http://schemas.microsoft.com/office/drawing/2014/main" id="{D6E712F8-C073-44E3-A596-F817190D77B2}"/>
+                <a16:creationId xmlns:a16="http://schemas.microsoft.com/office/drawing/2014/main" id="{6DEB6DD5-8205-477E-BC24-13774127406D}"/>
               </a:ext>
             </a:extLst>
           </p:cNvPr>
@@ -30968,7 +30968,7 @@
           <p:cNvPr id="15" name="">
             <a:extLst xmlns:a="http://schemas.openxmlformats.org/drawingml/2006/main">
               <a:ext uri="{FF2B5EF4-FFF2-40B4-BE49-F238E27FC236}">
-                <a16:creationId xmlns:a16="http://schemas.microsoft.com/office/drawing/2014/main" id="{5A4CCEE9-0D93-4983-92FF-A47455B34E5B}"/>
+                <a16:creationId xmlns:a16="http://schemas.microsoft.com/office/drawing/2014/main" id="{6A7954A7-4F2A-4722-B729-1E5E2B73EE05}"/>
               </a:ext>
             </a:extLst>
           </p:cNvPr>
@@ -30999,7 +30999,7 @@
           <p:cNvPr id="16" name="">
             <a:extLst xmlns:a="http://schemas.openxmlformats.org/drawingml/2006/main">
               <a:ext uri="{FF2B5EF4-FFF2-40B4-BE49-F238E27FC236}">
-                <a16:creationId xmlns:a16="http://schemas.microsoft.com/office/drawing/2014/main" id="{00FC96F0-9F0F-42CA-9AF4-DA97D0D520B1}"/>
+                <a16:creationId xmlns:a16="http://schemas.microsoft.com/office/drawing/2014/main" id="{1BFB7412-E1E8-4CDF-8B62-017B75DFFAD2}"/>
               </a:ext>
             </a:extLst>
           </p:cNvPr>
@@ -31030,7 +31030,7 @@
           <p:cNvPr id="17" name="">
             <a:extLst xmlns:a="http://schemas.openxmlformats.org/drawingml/2006/main">
               <a:ext uri="{FF2B5EF4-FFF2-40B4-BE49-F238E27FC236}">
-                <a16:creationId xmlns:a16="http://schemas.microsoft.com/office/drawing/2014/main" id="{3725ED96-8A62-4917-9375-4401A3866437}"/>
+                <a16:creationId xmlns:a16="http://schemas.microsoft.com/office/drawing/2014/main" id="{38CFC904-3B01-4930-B0E2-28F39C25414F}"/>
               </a:ext>
             </a:extLst>
           </p:cNvPr>
@@ -31082,7 +31082,7 @@
           <p:cNvPr id="18" name="">
             <a:extLst xmlns:a="http://schemas.openxmlformats.org/drawingml/2006/main">
               <a:ext uri="{FF2B5EF4-FFF2-40B4-BE49-F238E27FC236}">
-                <a16:creationId xmlns:a16="http://schemas.microsoft.com/office/drawing/2014/main" id="{7E6844EF-1ECF-4461-88AC-418DBEF131CC}"/>
+                <a16:creationId xmlns:a16="http://schemas.microsoft.com/office/drawing/2014/main" id="{21FDDE11-4519-4B9B-A37B-6D7C18180A3C}"/>
               </a:ext>
             </a:extLst>
           </p:cNvPr>
@@ -31134,7 +31134,7 @@
           <p:cNvPr id="19" name="">
             <a:extLst xmlns:a="http://schemas.openxmlformats.org/drawingml/2006/main">
               <a:ext uri="{FF2B5EF4-FFF2-40B4-BE49-F238E27FC236}">
-                <a16:creationId xmlns:a16="http://schemas.microsoft.com/office/drawing/2014/main" id="{DD6BF9E1-883F-4E3E-8A35-2DA4258E25A5}"/>
+                <a16:creationId xmlns:a16="http://schemas.microsoft.com/office/drawing/2014/main" id="{3CAC9B4F-97A5-4952-A1E9-F73DDCAE611E}"/>
               </a:ext>
             </a:extLst>
           </p:cNvPr>
@@ -31186,7 +31186,7 @@
           <p:cNvPr id="20" name="">
             <a:extLst xmlns:a="http://schemas.openxmlformats.org/drawingml/2006/main">
               <a:ext uri="{FF2B5EF4-FFF2-40B4-BE49-F238E27FC236}">
-                <a16:creationId xmlns:a16="http://schemas.microsoft.com/office/drawing/2014/main" id="{AA931DF2-A511-4713-860D-E725B9683EEE}"/>
+                <a16:creationId xmlns:a16="http://schemas.microsoft.com/office/drawing/2014/main" id="{569B3D28-08C6-4450-8B81-BE51F35CFC9E}"/>
               </a:ext>
             </a:extLst>
           </p:cNvPr>
@@ -31229,7 +31229,7 @@
           <p:cNvPr id="21" name="">
             <a:extLst xmlns:a="http://schemas.openxmlformats.org/drawingml/2006/main">
               <a:ext uri="{FF2B5EF4-FFF2-40B4-BE49-F238E27FC236}">
-                <a16:creationId xmlns:a16="http://schemas.microsoft.com/office/drawing/2014/main" id="{301F2694-5E31-4CC6-985C-438306DA060E}"/>
+                <a16:creationId xmlns:a16="http://schemas.microsoft.com/office/drawing/2014/main" id="{6271A5C1-4EED-44BD-9D8D-A9B3906F23F6}"/>
               </a:ext>
             </a:extLst>
           </p:cNvPr>
@@ -31260,7 +31260,7 @@
           <p:cNvPr id="22" name="">
             <a:extLst xmlns:a="http://schemas.openxmlformats.org/drawingml/2006/main">
               <a:ext uri="{FF2B5EF4-FFF2-40B4-BE49-F238E27FC236}">
-                <a16:creationId xmlns:a16="http://schemas.microsoft.com/office/drawing/2014/main" id="{53EFF582-79D2-411B-92AE-1C1E3F2059C7}"/>
+                <a16:creationId xmlns:a16="http://schemas.microsoft.com/office/drawing/2014/main" id="{782BB338-8048-4DC7-A798-30EB7FB5635B}"/>
               </a:ext>
             </a:extLst>
           </p:cNvPr>
@@ -31291,7 +31291,7 @@
           <p:cNvPr id="23" name="">
             <a:extLst xmlns:a="http://schemas.openxmlformats.org/drawingml/2006/main">
               <a:ext uri="{FF2B5EF4-FFF2-40B4-BE49-F238E27FC236}">
-                <a16:creationId xmlns:a16="http://schemas.microsoft.com/office/drawing/2014/main" id="{017B41B4-22D3-4DD6-BFA0-AD67E39D0292}"/>
+                <a16:creationId xmlns:a16="http://schemas.microsoft.com/office/drawing/2014/main" id="{A32744CC-F979-4B95-803B-5AA2DAE34079}"/>
               </a:ext>
             </a:extLst>
           </p:cNvPr>
@@ -31343,7 +31343,7 @@
           <p:cNvPr id="24" name="">
             <a:extLst xmlns:a="http://schemas.openxmlformats.org/drawingml/2006/main">
               <a:ext uri="{FF2B5EF4-FFF2-40B4-BE49-F238E27FC236}">
-                <a16:creationId xmlns:a16="http://schemas.microsoft.com/office/drawing/2014/main" id="{4B39C38E-9793-410F-858F-040978D8DF82}"/>
+                <a16:creationId xmlns:a16="http://schemas.microsoft.com/office/drawing/2014/main" id="{D96B61D4-6371-4BA6-BC67-C9590C47187A}"/>
               </a:ext>
             </a:extLst>
           </p:cNvPr>
@@ -31395,7 +31395,7 @@
           <p:cNvPr id="25" name="">
             <a:extLst xmlns:a="http://schemas.openxmlformats.org/drawingml/2006/main">
               <a:ext uri="{FF2B5EF4-FFF2-40B4-BE49-F238E27FC236}">
-                <a16:creationId xmlns:a16="http://schemas.microsoft.com/office/drawing/2014/main" id="{1AC1B13B-C9F6-4A72-BDA1-6A78462FF9EA}"/>
+                <a16:creationId xmlns:a16="http://schemas.microsoft.com/office/drawing/2014/main" id="{9AE7493C-5FFC-4348-820C-80A549C0605F}"/>
               </a:ext>
             </a:extLst>
           </p:cNvPr>
@@ -31447,7 +31447,7 @@
           <p:cNvPr id="26" name="">
             <a:extLst xmlns:a="http://schemas.openxmlformats.org/drawingml/2006/main">
               <a:ext uri="{FF2B5EF4-FFF2-40B4-BE49-F238E27FC236}">
-                <a16:creationId xmlns:a16="http://schemas.microsoft.com/office/drawing/2014/main" id="{057C5EBB-08DF-4642-8810-E95BA09A87BC}"/>
+                <a16:creationId xmlns:a16="http://schemas.microsoft.com/office/drawing/2014/main" id="{6B984F41-D9B3-47BB-B30D-60E9D458CA4F}"/>
               </a:ext>
             </a:extLst>
           </p:cNvPr>
@@ -31490,7 +31490,7 @@
           <p:cNvPr id="27" name="">
             <a:extLst xmlns:a="http://schemas.openxmlformats.org/drawingml/2006/main">
               <a:ext uri="{FF2B5EF4-FFF2-40B4-BE49-F238E27FC236}">
-                <a16:creationId xmlns:a16="http://schemas.microsoft.com/office/drawing/2014/main" id="{FEA5B4B1-0F8D-41D2-A286-D76713A4C951}"/>
+                <a16:creationId xmlns:a16="http://schemas.microsoft.com/office/drawing/2014/main" id="{60500105-D9E6-453D-86BD-07DCB8802C0E}"/>
               </a:ext>
             </a:extLst>
           </p:cNvPr>
@@ -31521,7 +31521,7 @@
           <p:cNvPr id="28" name="">
             <a:extLst xmlns:a="http://schemas.openxmlformats.org/drawingml/2006/main">
               <a:ext uri="{FF2B5EF4-FFF2-40B4-BE49-F238E27FC236}">
-                <a16:creationId xmlns:a16="http://schemas.microsoft.com/office/drawing/2014/main" id="{D5995CC0-5877-49AE-BF08-A47FC919635D}"/>
+                <a16:creationId xmlns:a16="http://schemas.microsoft.com/office/drawing/2014/main" id="{D2022AA3-15EF-477A-ABCE-5DA9E8569802}"/>
               </a:ext>
             </a:extLst>
           </p:cNvPr>
@@ -31552,7 +31552,7 @@
           <p:cNvPr id="29" name="">
             <a:extLst xmlns:a="http://schemas.openxmlformats.org/drawingml/2006/main">
               <a:ext uri="{FF2B5EF4-FFF2-40B4-BE49-F238E27FC236}">
-                <a16:creationId xmlns:a16="http://schemas.microsoft.com/office/drawing/2014/main" id="{D51DDC5A-95E6-46E4-8688-3356890E5327}"/>
+                <a16:creationId xmlns:a16="http://schemas.microsoft.com/office/drawing/2014/main" id="{DEF283EE-3C3E-456B-A909-C5F8C724F451}"/>
               </a:ext>
             </a:extLst>
           </p:cNvPr>
@@ -31604,7 +31604,7 @@
           <p:cNvPr id="30" name="">
             <a:extLst xmlns:a="http://schemas.openxmlformats.org/drawingml/2006/main">
               <a:ext uri="{FF2B5EF4-FFF2-40B4-BE49-F238E27FC236}">
-                <a16:creationId xmlns:a16="http://schemas.microsoft.com/office/drawing/2014/main" id="{1B2CE442-B0C7-481C-BAAB-620EFCFFCBC7}"/>
+                <a16:creationId xmlns:a16="http://schemas.microsoft.com/office/drawing/2014/main" id="{F540F0A6-AC1E-4972-9219-ED4AB7979844}"/>
               </a:ext>
             </a:extLst>
           </p:cNvPr>
@@ -31656,7 +31656,7 @@
           <p:cNvPr id="31" name="">
             <a:extLst xmlns:a="http://schemas.openxmlformats.org/drawingml/2006/main">
               <a:ext uri="{FF2B5EF4-FFF2-40B4-BE49-F238E27FC236}">
-                <a16:creationId xmlns:a16="http://schemas.microsoft.com/office/drawing/2014/main" id="{72C0C5CF-F7DE-4491-94C7-4722960C6667}"/>
+                <a16:creationId xmlns:a16="http://schemas.microsoft.com/office/drawing/2014/main" id="{A08A2D73-DC3F-4CD6-8520-461DB0DA4A14}"/>
               </a:ext>
             </a:extLst>
           </p:cNvPr>
@@ -31708,7 +31708,7 @@
           <p:cNvPr id="32" name="">
             <a:extLst xmlns:a="http://schemas.openxmlformats.org/drawingml/2006/main">
               <a:ext uri="{FF2B5EF4-FFF2-40B4-BE49-F238E27FC236}">
-                <a16:creationId xmlns:a16="http://schemas.microsoft.com/office/drawing/2014/main" id="{47A3F882-63CC-40FF-B240-D61D0A34FA48}"/>
+                <a16:creationId xmlns:a16="http://schemas.microsoft.com/office/drawing/2014/main" id="{49ACA5AE-C7B7-4540-94EF-781651F2B9D1}"/>
               </a:ext>
             </a:extLst>
           </p:cNvPr>
@@ -31751,7 +31751,7 @@
           <p:cNvPr id="33" name="">
             <a:extLst xmlns:a="http://schemas.openxmlformats.org/drawingml/2006/main">
               <a:ext uri="{FF2B5EF4-FFF2-40B4-BE49-F238E27FC236}">
-                <a16:creationId xmlns:a16="